--- a/outputs/presentation/qlc-ssd-strategy.pptx
+++ b/outputs/presentation/qlc-ssd-strategy.pptx
@@ -574,7 +574,7 @@
           <a:lstStyle/>
           <a:p>
             <a:r>
-              <a:t>요구사항과 역량 한 장입니다. 갭 세 가지: 내구성(QLC 정격 0.075~0.6 vs TLC 1~3 DWPD, 10~40배), 스트림(RUH 2~8 vs 200+), 접점(KV 캐시 관리자 4종 코드에 배치·내구성 언급 0). 수단은 있습니다(CacheLib 실측 WAF 3.22→1.03, XFS write streams RocksDB -35%, ScaleFlux 유효 7~10 DWPD). 그림은 고객 시스템 5계층(응용·추론 엔진 / KV 캐시 관리자 / I/O 라이브러리 / 커널·플랫폼 / SSD)에서 우리가 닿는 층을 색으로 표시합니다. Phase 1은 SSD 층만 우리 것입니다(KV-ready QLC: RUH 200+, 수명 보증 조건표). Phase 2는 고객 워크로드 트레이스가 내려오고 최적화 정책이 올라갑니다. I/O·커널 층을 관측·부착합니다(업계 최초 KV cache WAF 실측 공개가 목표). Phase 3는 캐시 관리자·I/O·커널에 우리 코드가 메인라인으로 들어가고, 우리 엔지니어가 고객 옆에 상주하며, 공용 TCO 모델로 응용 층까지 이해합니다(FlexKV의 vLLM·SGLang·Dynamo 메인라인 머지가 co-design의 증거). 삼성 현 위치는 Phase 1 확보, Phase 2 진입: KV cache 백서 2종으로 측정 역량은 있으나 트레이스 기반 RUH 정책·WAF 실측이 미공개이고, 캐시 관리자 4종에 기여가 없습니다. 협업은 층별로 목적이 다릅니다: NVIDIA(CMX 플랫폼 게이트), Anthropic·OpenAI(스펙 상류), 하이퍼스케일러(물량·활성화), VAST·DDN·WEKA(실증 채널), 오픈소스 커뮤니티(업스트림). 오케스트레이션 자체는 만들지 않습니다.</a:t>
+              <a:t>요구사항과 역량 한 장입니다. 갭 세 가지: 내구성(QLC 정격 0.075~0.6 vs TLC 1~3 DWPD, 10~40배), 스트림(RUH 2~8 vs 200+), 접점(KV 캐시 관리자 4종 코드에 배치·내구성 언급 0). 수단은 있습니다(CacheLib 실측 WAF 3.22→1.03, XFS write streams RocksDB -35%, ScaleFlux 유효 7~10 DWPD). 그림은 고객 시스템 5계층을 세 번 그리고 우리가 닿는 층을 색으로 표시하며, 각 층에 그 층을 구성하는 기술을 적었습니다. 응용·추론 엔진(vLLM·SGLang·TensorRT-LLM), KV 캐시 관리자(NVIDIA Dynamo KVBM·LMCache·Mooncake·Tencent FlexKV), I/O 라이브러리(NIXL·GPUDirect Storage·io_uring·SPDK/xNVMe), 커널·플랫폼(Linux 6.16 write streams·XFS/f2fs 스트림·NVIDIA CMX와 DOCA Memos), SSD 디바이스(컨트롤러·펌웨어 RUH·2Tb QLC·NVMe KV 확장·텔레메트리). Phase 1은 SSD 층만 우리 것입니다(KV-ready QLC). Phase 2는 캐시 관리자의 빈도 필터·퇴거 정책이 트레이스의 원천이고, I/O 라이브러리의 io_uring·GDS 백엔드에 write stream을 부착하며 커널 스트림과 CMX 힌트 매핑을 검증해 RUH 정책·WAF·유효 DWPD 실측을 공개합니다. Phase 3는 캐시 관리자 4종에 플러그인을 메인라인으로 머지하고, NIXL·xNVMe가 기본 백엔드가 되며, DOCA Memos와 배치 표준의 매핑을 NVIDIA와 공동 정의하고, 응용 층은 커넥터·스케줄러를 이해해 공용 TCO 모델(GPU당 동시 사용자·TTFT·전력)로 대화합니다. FDE(Forward Deployed Engineer)가 고객 옆에 상주합니다. 삼성 현 위치는 Phase 1 확보, Phase 2 진입: KV cache 백서 2종으로 측정 역량은 있으나 트레이스 기반 실측이 미공개이고 캐시 관리자 4종에 기여가 없습니다. 오케스트레이션 자체는 만들지 않습니다.</a:t>
             </a:r>
           </a:p>
         </p:txBody>
@@ -644,7 +644,7 @@
           <a:lstStyle/>
           <a:p>
             <a:r>
-              <a:t>실행 전략 한 장입니다. 목표는 두 가지입니다. ① 고객 시스템 안으로 들어간다: 상주 엔지니어(Co-Design Pod, Palantir FDE·NVIDIA DevTech 모델), 캐시 관리자·I/O·커널에 메인라인으로 머지되는 업스트림 코드, 수명 보증(DWPD·WAF·W/TB SLA), 다년 공급·선급·자본. ② 워크로드가 온다: KV 블록 트레이스, 캐시 관리자의 수명 정책, 레퍼런스 스펙에 삼성 구현이 기본값으로 앉는 자리, 활성화 약정. 둘은 서로를 강화하므로 첫 계약에 들어갈 권리와 받을 권리를 함께 담고, 공급자 우위가 남은 2027년 상반기까지 계약으로 고정합니다. 다섯 축은 이 두 목표를 여는 수단입니다: 전략(하나의 베팅, HDD 대체 제외, 오케스트레이션은 만들지 않음), 조직(실리콘밸리 소프트웨어 자회사 + Co-Design Pod + 시스템 TCO 모델 조직, 본사 SSD와 동일 P&amp;L 지표), 인사(자회사 지분·RSU형 별도 보상으로 시장가 채용, 고객·생태계 출신 앵커 5명, 본사 펌웨어 엔지니어 6~12개월 상주 로테이션. 스타트업 팀 인수는 제외), 문화(업스트림 우선, 결과 평가, KV cache 배치 표준 WAF 실측 업계 최초 공개), 재무(공동 플랫폼 계약, 수명 보증 상품, TCO 연동 가격, DDN·Tensormesh 지분). 90일: KV-ready QLC 정의, LMCache·FlexKV 업스트림 PR, Anthropic 공급계약 공동 최적화 조항 제안, NVIDIA DOCA Memos 힌트 매핑 협의, Pod 1호 발족, 자회사 설계안. 1년: 자회사 출범·앵커 영입, Pod 2사 상주, CMX/STX 인증, 공동 플랫폼 계약 1건, 수명 보증 상품. 3년: 캐시 티어 QLC 침투 25%+ 중 삼성 40%, 계약 3건, 캐시 관리자 4종 기본 백엔드. 선례와 수치는 보고서 6장·위키 qlc-execution-strategy.md.</a:t>
+              <a:t>실행 전략 한 장입니다. 목표는 두 가지이고 각각 선례가 있습니다. ① FDE(Forward Deployed Engineer)가 고객 시스템 안으로 들어갑니다. Palantir가 창안한 역할로 내부 코드명 Delta, 고객 환경 내부에 상주하며 실제 운영 제약 아래서 프로덕션 시스템을 직접 구축하고 청구 시간이 아니라 성과로 평가받습니다. 명시적 요구와 실제 요구의 간극을 현장에서 코드로 메우고, 특정 고객용 거친 해법(gravel road)이 제품 표준 기능(paved highway)으로 포장되는 피드백 루프를 만듭니다. 파급: 고객 락인의 동력이자 640% 주가 수익률의 원천으로 회자되고, Anthropic·OpenAI가 엔터프라이즈 GTM 전략으로 채택했습니다(OpenAI는 2025년 초 FDE 팀 2명→10명+). 우리는 Co-Design Pod를 FDE 모델로 운영하되, 메모리는 제조 리드타임이 길므로 시스템 아키텍트·TCO 모델링 역량을 결합합니다. ② 전략적 협약(SCA)으로 워크로드가 옵니다. 선례는 Micron↔Anthropic(2026-06-22): 공동 설계(HBM·DRAM·SSD를 Claude 학습·추론 워크로드에 맞춰 공동 최적화) + 다년 공급 + 운영 통합(Claude 사내 배치) + 자본(Series H)을 한 계약에 묶었습니다. Micron은 SCA 16건, 최소 계약매출 약 $100B, 예치금 $22B를 공시했습니다. 삼성·SK의 Anthropic 공급계약에는 공동 설계 조항이 없으므로 우리가 먼저 제안합니다. 창은 공급 완화 전인 2027년 상반기까지입니다. 다섯 축은 두 목표를 여는 수단이고(전략·조직·인사·문화·재무), 90일에 제품 정의·업스트림 PR·SCA 조항 제안·FDE Pod 1호, 1년에 자회사·FDE 2사 상주·CMX 인증·SCA 1건, 3년에 캐시 티어 QLC 25%+·SCA 3건입니다. 결정 요청 세 가지입니다.</a:t>
             </a:r>
           </a:p>
         </p:txBody>
@@ -6337,7 +6337,7 @@
                 <a:latin typeface="Arial"/>
                 <a:ea typeface="Arial"/>
               </a:rPr>
-              <a:t>갭은 내구성·스트림·접점 세 가지이고 수단은 이미 있습니다. 세 단계의 그림과 삼성의 현 위치, 협업할 기업입니다.</a:t>
+              <a:t>갭은 내구성·스트림·접점 세 가지이고 수단은 이미 있습니다. 고객 시스템 다섯 계층의 기술과 우리가 닿는 층, 삼성의 현 위치입니다.</a:t>
             </a:r>
           </a:p>
         </p:txBody>
@@ -6965,7 +6965,7 @@
         <p:spPr>
           <a:xfrm>
             <a:off x="722376" y="3730752"/>
-            <a:ext cx="5413248" cy="3474720"/>
+            <a:ext cx="5413248" cy="4626864"/>
           </a:xfrm>
           <a:prstGeom prst="rect">
             <a:avLst/>
@@ -7060,8 +7060,8 @@
         </p:nvSpPr>
         <p:spPr>
           <a:xfrm>
-            <a:off x="1106424" y="4297680"/>
-            <a:ext cx="3017520" cy="365760"/>
+            <a:off x="1069848" y="4297680"/>
+            <a:ext cx="3547872" cy="676656"/>
           </a:xfrm>
           <a:prstGeom prst="rect">
             <a:avLst/>
@@ -7106,8 +7106,8 @@
         </p:nvSpPr>
         <p:spPr>
           <a:xfrm>
-            <a:off x="1243584" y="4297680"/>
-            <a:ext cx="2743200" cy="365760"/>
+            <a:off x="1216151" y="4352544"/>
+            <a:ext cx="3255264" cy="585216"/>
           </a:xfrm>
           <a:prstGeom prst="rect">
             <a:avLst/>
@@ -7115,18 +7115,18 @@
           <a:noFill/>
         </p:spPr>
         <p:txBody>
-          <a:bodyPr wrap="square" anchor="ctr" lIns="0" rIns="0" tIns="0" bIns="0">
+          <a:bodyPr wrap="square" anchor="t" lIns="0" rIns="0" tIns="0" bIns="0">
             <a:spAutoFit/>
           </a:bodyPr>
           <a:lstStyle/>
           <a:p>
             <a:pPr algn="l">
               <a:lnSpc>
-                <a:spcPct val="112000"/>
-              </a:lnSpc>
-            </a:pPr>
-            <a:r>
-              <a:rPr sz="1350" b="0">
+                <a:spcPct val="104000"/>
+              </a:lnSpc>
+            </a:pPr>
+            <a:r>
+              <a:rPr sz="1350" b="1">
                 <a:solidFill>
                   <a:srgbClr val="555555"/>
                 </a:solidFill>
@@ -7134,6 +7134,23 @@
                 <a:ea typeface="Arial"/>
               </a:rPr>
               <a:t>응용 · 추론 엔진</a:t>
+            </a:r>
+          </a:p>
+          <a:p>
+            <a:pPr algn="l">
+              <a:lnSpc>
+                <a:spcPct val="104000"/>
+              </a:lnSpc>
+            </a:pPr>
+            <a:r>
+              <a:rPr sz="1125" b="0">
+                <a:solidFill>
+                  <a:srgbClr val="8A8A8A"/>
+                </a:solidFill>
+                <a:latin typeface="Arial"/>
+                <a:ea typeface="Arial"/>
+              </a:rPr>
+              <a:t>vLLM · SGLang · TensorRT-LLM</a:t>
             </a:r>
           </a:p>
         </p:txBody>
@@ -7146,8 +7163,8 @@
         </p:nvSpPr>
         <p:spPr>
           <a:xfrm>
-            <a:off x="1106424" y="4718304"/>
-            <a:ext cx="3017520" cy="365760"/>
+            <a:off x="1069848" y="5029200"/>
+            <a:ext cx="3547872" cy="676656"/>
           </a:xfrm>
           <a:prstGeom prst="rect">
             <a:avLst/>
@@ -7192,8 +7209,8 @@
         </p:nvSpPr>
         <p:spPr>
           <a:xfrm>
-            <a:off x="1243584" y="4718304"/>
-            <a:ext cx="2743200" cy="365760"/>
+            <a:off x="1216151" y="5084064"/>
+            <a:ext cx="3255264" cy="585216"/>
           </a:xfrm>
           <a:prstGeom prst="rect">
             <a:avLst/>
@@ -7201,18 +7218,18 @@
           <a:noFill/>
         </p:spPr>
         <p:txBody>
-          <a:bodyPr wrap="square" anchor="ctr" lIns="0" rIns="0" tIns="0" bIns="0">
+          <a:bodyPr wrap="square" anchor="t" lIns="0" rIns="0" tIns="0" bIns="0">
             <a:spAutoFit/>
           </a:bodyPr>
           <a:lstStyle/>
           <a:p>
             <a:pPr algn="l">
               <a:lnSpc>
-                <a:spcPct val="112000"/>
-              </a:lnSpc>
-            </a:pPr>
-            <a:r>
-              <a:rPr sz="1350" b="0">
+                <a:spcPct val="104000"/>
+              </a:lnSpc>
+            </a:pPr>
+            <a:r>
+              <a:rPr sz="1350" b="1">
                 <a:solidFill>
                   <a:srgbClr val="555555"/>
                 </a:solidFill>
@@ -7220,6 +7237,23 @@
                 <a:ea typeface="Arial"/>
               </a:rPr>
               <a:t>KV 캐시 관리자</a:t>
+            </a:r>
+          </a:p>
+          <a:p>
+            <a:pPr algn="l">
+              <a:lnSpc>
+                <a:spcPct val="104000"/>
+              </a:lnSpc>
+            </a:pPr>
+            <a:r>
+              <a:rPr sz="1125" b="0">
+                <a:solidFill>
+                  <a:srgbClr val="8A8A8A"/>
+                </a:solidFill>
+                <a:latin typeface="Arial"/>
+                <a:ea typeface="Arial"/>
+              </a:rPr>
+              <a:t>Dynamo KVBM · LMCache · Mooncake · FlexKV</a:t>
             </a:r>
           </a:p>
         </p:txBody>
@@ -7232,8 +7266,8 @@
         </p:nvSpPr>
         <p:spPr>
           <a:xfrm>
-            <a:off x="1106424" y="5138928"/>
-            <a:ext cx="3017520" cy="365760"/>
+            <a:off x="1069848" y="5760720"/>
+            <a:ext cx="3547872" cy="676656"/>
           </a:xfrm>
           <a:prstGeom prst="rect">
             <a:avLst/>
@@ -7278,8 +7312,8 @@
         </p:nvSpPr>
         <p:spPr>
           <a:xfrm>
-            <a:off x="1243584" y="5138928"/>
-            <a:ext cx="2743200" cy="365760"/>
+            <a:off x="1216151" y="5815584"/>
+            <a:ext cx="3255264" cy="585216"/>
           </a:xfrm>
           <a:prstGeom prst="rect">
             <a:avLst/>
@@ -7287,18 +7321,18 @@
           <a:noFill/>
         </p:spPr>
         <p:txBody>
-          <a:bodyPr wrap="square" anchor="ctr" lIns="0" rIns="0" tIns="0" bIns="0">
+          <a:bodyPr wrap="square" anchor="t" lIns="0" rIns="0" tIns="0" bIns="0">
             <a:spAutoFit/>
           </a:bodyPr>
           <a:lstStyle/>
           <a:p>
             <a:pPr algn="l">
               <a:lnSpc>
-                <a:spcPct val="112000"/>
-              </a:lnSpc>
-            </a:pPr>
-            <a:r>
-              <a:rPr sz="1350" b="0">
+                <a:spcPct val="104000"/>
+              </a:lnSpc>
+            </a:pPr>
+            <a:r>
+              <a:rPr sz="1350" b="1">
                 <a:solidFill>
                   <a:srgbClr val="555555"/>
                 </a:solidFill>
@@ -7306,6 +7340,23 @@
                 <a:ea typeface="Arial"/>
               </a:rPr>
               <a:t>I/O 라이브러리</a:t>
+            </a:r>
+          </a:p>
+          <a:p>
+            <a:pPr algn="l">
+              <a:lnSpc>
+                <a:spcPct val="104000"/>
+              </a:lnSpc>
+            </a:pPr>
+            <a:r>
+              <a:rPr sz="1125" b="0">
+                <a:solidFill>
+                  <a:srgbClr val="8A8A8A"/>
+                </a:solidFill>
+                <a:latin typeface="Arial"/>
+                <a:ea typeface="Arial"/>
+              </a:rPr>
+              <a:t>NIXL · GPUDirect Storage · io_uring · SPDK</a:t>
             </a:r>
           </a:p>
         </p:txBody>
@@ -7318,8 +7369,8 @@
         </p:nvSpPr>
         <p:spPr>
           <a:xfrm>
-            <a:off x="1106424" y="5559552"/>
-            <a:ext cx="3017520" cy="365760"/>
+            <a:off x="1069848" y="6492240"/>
+            <a:ext cx="3547872" cy="676656"/>
           </a:xfrm>
           <a:prstGeom prst="rect">
             <a:avLst/>
@@ -7364,8 +7415,8 @@
         </p:nvSpPr>
         <p:spPr>
           <a:xfrm>
-            <a:off x="1243584" y="5559552"/>
-            <a:ext cx="2743200" cy="365760"/>
+            <a:off x="1216151" y="6547104"/>
+            <a:ext cx="3255264" cy="585216"/>
           </a:xfrm>
           <a:prstGeom prst="rect">
             <a:avLst/>
@@ -7373,18 +7424,18 @@
           <a:noFill/>
         </p:spPr>
         <p:txBody>
-          <a:bodyPr wrap="square" anchor="ctr" lIns="0" rIns="0" tIns="0" bIns="0">
+          <a:bodyPr wrap="square" anchor="t" lIns="0" rIns="0" tIns="0" bIns="0">
             <a:spAutoFit/>
           </a:bodyPr>
           <a:lstStyle/>
           <a:p>
             <a:pPr algn="l">
               <a:lnSpc>
-                <a:spcPct val="112000"/>
-              </a:lnSpc>
-            </a:pPr>
-            <a:r>
-              <a:rPr sz="1350" b="0">
+                <a:spcPct val="104000"/>
+              </a:lnSpc>
+            </a:pPr>
+            <a:r>
+              <a:rPr sz="1350" b="1">
                 <a:solidFill>
                   <a:srgbClr val="555555"/>
                 </a:solidFill>
@@ -7392,6 +7443,23 @@
                 <a:ea typeface="Arial"/>
               </a:rPr>
               <a:t>커널 · 플랫폼</a:t>
+            </a:r>
+          </a:p>
+          <a:p>
+            <a:pPr algn="l">
+              <a:lnSpc>
+                <a:spcPct val="104000"/>
+              </a:lnSpc>
+            </a:pPr>
+            <a:r>
+              <a:rPr sz="1125" b="0">
+                <a:solidFill>
+                  <a:srgbClr val="8A8A8A"/>
+                </a:solidFill>
+                <a:latin typeface="Arial"/>
+                <a:ea typeface="Arial"/>
+              </a:rPr>
+              <a:t>Linux write streams · XFS · CMX(DOCA Memos)</a:t>
             </a:r>
           </a:p>
         </p:txBody>
@@ -7404,8 +7472,8 @@
         </p:nvSpPr>
         <p:spPr>
           <a:xfrm>
-            <a:off x="1106424" y="5980176"/>
-            <a:ext cx="3017520" cy="365760"/>
+            <a:off x="1069848" y="7223760"/>
+            <a:ext cx="3547872" cy="676656"/>
           </a:xfrm>
           <a:prstGeom prst="rect">
             <a:avLst/>
@@ -7448,8 +7516,65 @@
         </p:nvSpPr>
         <p:spPr>
           <a:xfrm>
-            <a:off x="1243584" y="5980176"/>
-            <a:ext cx="2743200" cy="365760"/>
+            <a:off x="1216151" y="7278624"/>
+            <a:ext cx="3255264" cy="585216"/>
+          </a:xfrm>
+          <a:prstGeom prst="rect">
+            <a:avLst/>
+          </a:prstGeom>
+          <a:noFill/>
+        </p:spPr>
+        <p:txBody>
+          <a:bodyPr wrap="square" anchor="t" lIns="0" rIns="0" tIns="0" bIns="0">
+            <a:spAutoFit/>
+          </a:bodyPr>
+          <a:lstStyle/>
+          <a:p>
+            <a:pPr algn="l">
+              <a:lnSpc>
+                <a:spcPct val="104000"/>
+              </a:lnSpc>
+            </a:pPr>
+            <a:r>
+              <a:rPr sz="1350" b="1">
+                <a:solidFill>
+                  <a:srgbClr val="FFFFFF"/>
+                </a:solidFill>
+                <a:latin typeface="Arial"/>
+                <a:ea typeface="Arial"/>
+              </a:rPr>
+              <a:t>SSD 디바이스</a:t>
+            </a:r>
+          </a:p>
+          <a:p>
+            <a:pPr algn="l">
+              <a:lnSpc>
+                <a:spcPct val="104000"/>
+              </a:lnSpc>
+            </a:pPr>
+            <a:r>
+              <a:rPr sz="1125" b="0">
+                <a:solidFill>
+                  <a:srgbClr val="FFFFFF"/>
+                </a:solidFill>
+                <a:latin typeface="Arial"/>
+                <a:ea typeface="Arial"/>
+              </a:rPr>
+              <a:t>RUH 200+ 펌웨어 · 2Tb QLC(WAF≈1) · NVMe KV 확장 · 텔레메트리 · 액체냉각</a:t>
+            </a:r>
+          </a:p>
+        </p:txBody>
+      </p:sp>
+      <p:sp>
+        <p:nvSpPr>
+          <p:cNvPr id="32" name="TextBox 31"/>
+          <p:cNvSpPr txBox="1"/>
+          <p:nvPr/>
+        </p:nvSpPr>
+        <p:spPr>
+          <a:xfrm>
+            <a:off x="4782312" y="7223760"/>
+            <a:ext cx="1207008" cy="676656"/>
           </a:xfrm>
           <a:prstGeom prst="rect">
             <a:avLst/>
@@ -7464,32 +7589,72 @@
           <a:p>
             <a:pPr algn="l">
               <a:lnSpc>
-                <a:spcPct val="112000"/>
-              </a:lnSpc>
-            </a:pPr>
-            <a:r>
-              <a:rPr sz="1350" b="1">
-                <a:solidFill>
-                  <a:srgbClr val="FFFFFF"/>
-                </a:solidFill>
-                <a:latin typeface="Arial"/>
-                <a:ea typeface="Arial"/>
-              </a:rPr>
-              <a:t>SSD 디바이스</a:t>
-            </a:r>
-          </a:p>
-        </p:txBody>
-      </p:sp>
-      <p:sp>
-        <p:nvSpPr>
-          <p:cNvPr id="32" name="TextBox 31"/>
+                <a:spcPct val="102000"/>
+              </a:lnSpc>
+            </a:pPr>
+            <a:r>
+              <a:rPr sz="1275" b="1">
+                <a:solidFill>
+                  <a:srgbClr val="1428A0"/>
+                </a:solidFill>
+                <a:latin typeface="Arial"/>
+                <a:ea typeface="Arial"/>
+              </a:rPr>
+              <a:t>우리가 만드는 것</a:t>
+            </a:r>
+          </a:p>
+        </p:txBody>
+      </p:sp>
+      <p:sp>
+        <p:nvSpPr>
+          <p:cNvPr id="33" name="TextBox 32"/>
           <p:cNvSpPr txBox="1"/>
           <p:nvPr/>
         </p:nvSpPr>
         <p:spPr>
           <a:xfrm>
-            <a:off x="4325112" y="5961888"/>
-            <a:ext cx="1627632" cy="420624"/>
+            <a:off x="4782312" y="4297680"/>
+            <a:ext cx="1207008" cy="1353312"/>
+          </a:xfrm>
+          <a:prstGeom prst="rect">
+            <a:avLst/>
+          </a:prstGeom>
+          <a:noFill/>
+        </p:spPr>
+        <p:txBody>
+          <a:bodyPr wrap="square" anchor="t" lIns="0" rIns="0" tIns="0" bIns="0">
+            <a:spAutoFit/>
+          </a:bodyPr>
+          <a:lstStyle/>
+          <a:p>
+            <a:pPr algn="l">
+              <a:lnSpc>
+                <a:spcPct val="102000"/>
+              </a:lnSpc>
+            </a:pPr>
+            <a:r>
+              <a:rPr sz="1200" b="0">
+                <a:solidFill>
+                  <a:srgbClr val="8A8A8A"/>
+                </a:solidFill>
+                <a:latin typeface="Arial"/>
+                <a:ea typeface="Arial"/>
+              </a:rPr>
+              <a:t>고객 시스템은 밖에 있습니다</a:t>
+            </a:r>
+          </a:p>
+        </p:txBody>
+      </p:sp>
+      <p:sp>
+        <p:nvSpPr>
+          <p:cNvPr id="34" name="TextBox 33"/>
+          <p:cNvSpPr txBox="1"/>
+          <p:nvPr/>
+        </p:nvSpPr>
+        <p:spPr>
+          <a:xfrm>
+            <a:off x="1069848" y="7955280"/>
+            <a:ext cx="4718304" cy="310896"/>
           </a:xfrm>
           <a:prstGeom prst="rect">
             <a:avLst/>
@@ -7504,86 +7669,6 @@
           <a:p>
             <a:pPr algn="l">
               <a:lnSpc>
-                <a:spcPct val="112000"/>
-              </a:lnSpc>
-            </a:pPr>
-            <a:r>
-              <a:rPr sz="1350" b="1">
-                <a:solidFill>
-                  <a:srgbClr val="1428A0"/>
-                </a:solidFill>
-                <a:latin typeface="Arial"/>
-                <a:ea typeface="Arial"/>
-              </a:rPr>
-              <a:t>우리가 만드는 것</a:t>
-            </a:r>
-          </a:p>
-        </p:txBody>
-      </p:sp>
-      <p:sp>
-        <p:nvSpPr>
-          <p:cNvPr id="33" name="TextBox 32"/>
-          <p:cNvSpPr txBox="1"/>
-          <p:nvPr/>
-        </p:nvSpPr>
-        <p:spPr>
-          <a:xfrm>
-            <a:off x="4325112" y="4297680"/>
-            <a:ext cx="1627632" cy="1463040"/>
-          </a:xfrm>
-          <a:prstGeom prst="rect">
-            <a:avLst/>
-          </a:prstGeom>
-          <a:noFill/>
-        </p:spPr>
-        <p:txBody>
-          <a:bodyPr wrap="square" anchor="t" lIns="0" rIns="0" tIns="0" bIns="0">
-            <a:spAutoFit/>
-          </a:bodyPr>
-          <a:lstStyle/>
-          <a:p>
-            <a:pPr algn="l">
-              <a:lnSpc>
-                <a:spcPct val="105000"/>
-              </a:lnSpc>
-            </a:pPr>
-            <a:r>
-              <a:rPr sz="1350" b="0">
-                <a:solidFill>
-                  <a:srgbClr val="8A8A8A"/>
-                </a:solidFill>
-                <a:latin typeface="Arial"/>
-                <a:ea typeface="Arial"/>
-              </a:rPr>
-              <a:t>고객 시스템은 밖에 있습니다</a:t>
-            </a:r>
-          </a:p>
-        </p:txBody>
-      </p:sp>
-      <p:sp>
-        <p:nvSpPr>
-          <p:cNvPr id="34" name="TextBox 33"/>
-          <p:cNvSpPr txBox="1"/>
-          <p:nvPr/>
-        </p:nvSpPr>
-        <p:spPr>
-          <a:xfrm>
-            <a:off x="1069848" y="6492240"/>
-            <a:ext cx="4718304" cy="566928"/>
-          </a:xfrm>
-          <a:prstGeom prst="rect">
-            <a:avLst/>
-          </a:prstGeom>
-          <a:noFill/>
-        </p:spPr>
-        <p:txBody>
-          <a:bodyPr wrap="square" anchor="ctr" lIns="0" rIns="0" tIns="0" bIns="0">
-            <a:spAutoFit/>
-          </a:bodyPr>
-          <a:lstStyle/>
-          <a:p>
-            <a:pPr algn="l">
-              <a:lnSpc>
                 <a:spcPct val="105000"/>
               </a:lnSpc>
             </a:pPr>
@@ -7609,7 +7694,7 @@
         <p:spPr>
           <a:xfrm>
             <a:off x="6437376" y="3730752"/>
-            <a:ext cx="5413248" cy="3474720"/>
+            <a:ext cx="5413248" cy="4626864"/>
           </a:xfrm>
           <a:prstGeom prst="rect">
             <a:avLst/>
@@ -7704,8 +7789,8 @@
         </p:nvSpPr>
         <p:spPr>
           <a:xfrm>
-            <a:off x="6821424" y="4297680"/>
-            <a:ext cx="3017520" cy="365760"/>
+            <a:off x="6784848" y="4297680"/>
+            <a:ext cx="3547872" cy="676656"/>
           </a:xfrm>
           <a:prstGeom prst="rect">
             <a:avLst/>
@@ -7750,8 +7835,8 @@
         </p:nvSpPr>
         <p:spPr>
           <a:xfrm>
-            <a:off x="6958584" y="4297680"/>
-            <a:ext cx="2743200" cy="365760"/>
+            <a:off x="6931152" y="4352544"/>
+            <a:ext cx="3255264" cy="585216"/>
           </a:xfrm>
           <a:prstGeom prst="rect">
             <a:avLst/>
@@ -7759,18 +7844,18 @@
           <a:noFill/>
         </p:spPr>
         <p:txBody>
-          <a:bodyPr wrap="square" anchor="ctr" lIns="0" rIns="0" tIns="0" bIns="0">
+          <a:bodyPr wrap="square" anchor="t" lIns="0" rIns="0" tIns="0" bIns="0">
             <a:spAutoFit/>
           </a:bodyPr>
           <a:lstStyle/>
           <a:p>
             <a:pPr algn="l">
               <a:lnSpc>
-                <a:spcPct val="112000"/>
-              </a:lnSpc>
-            </a:pPr>
-            <a:r>
-              <a:rPr sz="1350" b="0">
+                <a:spcPct val="104000"/>
+              </a:lnSpc>
+            </a:pPr>
+            <a:r>
+              <a:rPr sz="1350" b="1">
                 <a:solidFill>
                   <a:srgbClr val="555555"/>
                 </a:solidFill>
@@ -7778,6 +7863,23 @@
                 <a:ea typeface="Arial"/>
               </a:rPr>
               <a:t>응용 · 추론 엔진</a:t>
+            </a:r>
+          </a:p>
+          <a:p>
+            <a:pPr algn="l">
+              <a:lnSpc>
+                <a:spcPct val="104000"/>
+              </a:lnSpc>
+            </a:pPr>
+            <a:r>
+              <a:rPr sz="1125" b="0">
+                <a:solidFill>
+                  <a:srgbClr val="8A8A8A"/>
+                </a:solidFill>
+                <a:latin typeface="Arial"/>
+                <a:ea typeface="Arial"/>
+              </a:rPr>
+              <a:t>vLLM · SGLang · TensorRT-LLM</a:t>
             </a:r>
           </a:p>
         </p:txBody>
@@ -7790,8 +7892,8 @@
         </p:nvSpPr>
         <p:spPr>
           <a:xfrm>
-            <a:off x="6821424" y="4718304"/>
-            <a:ext cx="3017520" cy="365760"/>
+            <a:off x="6784848" y="5029200"/>
+            <a:ext cx="3547872" cy="676656"/>
           </a:xfrm>
           <a:prstGeom prst="rect">
             <a:avLst/>
@@ -7836,8 +7938,8 @@
         </p:nvSpPr>
         <p:spPr>
           <a:xfrm>
-            <a:off x="6958584" y="4718304"/>
-            <a:ext cx="2743200" cy="365760"/>
+            <a:off x="6931152" y="5084064"/>
+            <a:ext cx="3255264" cy="585216"/>
           </a:xfrm>
           <a:prstGeom prst="rect">
             <a:avLst/>
@@ -7845,18 +7947,18 @@
           <a:noFill/>
         </p:spPr>
         <p:txBody>
-          <a:bodyPr wrap="square" anchor="ctr" lIns="0" rIns="0" tIns="0" bIns="0">
+          <a:bodyPr wrap="square" anchor="t" lIns="0" rIns="0" tIns="0" bIns="0">
             <a:spAutoFit/>
           </a:bodyPr>
           <a:lstStyle/>
           <a:p>
             <a:pPr algn="l">
               <a:lnSpc>
-                <a:spcPct val="112000"/>
-              </a:lnSpc>
-            </a:pPr>
-            <a:r>
-              <a:rPr sz="1350" b="0">
+                <a:spcPct val="104000"/>
+              </a:lnSpc>
+            </a:pPr>
+            <a:r>
+              <a:rPr sz="1350" b="1">
                 <a:solidFill>
                   <a:srgbClr val="555555"/>
                 </a:solidFill>
@@ -7864,6 +7966,23 @@
                 <a:ea typeface="Arial"/>
               </a:rPr>
               <a:t>KV 캐시 관리자</a:t>
+            </a:r>
+          </a:p>
+          <a:p>
+            <a:pPr algn="l">
+              <a:lnSpc>
+                <a:spcPct val="104000"/>
+              </a:lnSpc>
+            </a:pPr>
+            <a:r>
+              <a:rPr sz="1125" b="0">
+                <a:solidFill>
+                  <a:srgbClr val="8A8A8A"/>
+                </a:solidFill>
+                <a:latin typeface="Arial"/>
+                <a:ea typeface="Arial"/>
+              </a:rPr>
+              <a:t>KVBM 빈도 필터 · LMCache 퇴거 정책 = 트레이스의 원천</a:t>
             </a:r>
           </a:p>
         </p:txBody>
@@ -7876,8 +7995,8 @@
         </p:nvSpPr>
         <p:spPr>
           <a:xfrm>
-            <a:off x="6821424" y="5138928"/>
-            <a:ext cx="3017520" cy="365760"/>
+            <a:off x="6784848" y="5760720"/>
+            <a:ext cx="3547872" cy="676656"/>
           </a:xfrm>
           <a:prstGeom prst="rect">
             <a:avLst/>
@@ -7920,8 +8039,8 @@
         </p:nvSpPr>
         <p:spPr>
           <a:xfrm>
-            <a:off x="6958584" y="5138928"/>
-            <a:ext cx="2743200" cy="365760"/>
+            <a:off x="6931152" y="5815584"/>
+            <a:ext cx="3255264" cy="585216"/>
           </a:xfrm>
           <a:prstGeom prst="rect">
             <a:avLst/>
@@ -7929,14 +8048,14 @@
           <a:noFill/>
         </p:spPr>
         <p:txBody>
-          <a:bodyPr wrap="square" anchor="ctr" lIns="0" rIns="0" tIns="0" bIns="0">
+          <a:bodyPr wrap="square" anchor="t" lIns="0" rIns="0" tIns="0" bIns="0">
             <a:spAutoFit/>
           </a:bodyPr>
           <a:lstStyle/>
           <a:p>
             <a:pPr algn="l">
               <a:lnSpc>
-                <a:spcPct val="112000"/>
+                <a:spcPct val="104000"/>
               </a:lnSpc>
             </a:pPr>
             <a:r>
@@ -7948,6 +8067,23 @@
                 <a:ea typeface="Arial"/>
               </a:rPr>
               <a:t>I/O 라이브러리</a:t>
+            </a:r>
+          </a:p>
+          <a:p>
+            <a:pPr algn="l">
+              <a:lnSpc>
+                <a:spcPct val="104000"/>
+              </a:lnSpc>
+            </a:pPr>
+            <a:r>
+              <a:rPr sz="1125" b="0">
+                <a:solidFill>
+                  <a:srgbClr val="1A1A1A"/>
+                </a:solidFill>
+                <a:latin typeface="Arial"/>
+                <a:ea typeface="Arial"/>
+              </a:rPr>
+              <a:t>io_uring·GDS 백엔드에 write stream 부착 · xNVMe · fio·blktrace·eBPF</a:t>
             </a:r>
           </a:p>
         </p:txBody>
@@ -7960,8 +8096,8 @@
         </p:nvSpPr>
         <p:spPr>
           <a:xfrm>
-            <a:off x="6821424" y="5559552"/>
-            <a:ext cx="3017520" cy="365760"/>
+            <a:off x="6784848" y="6492240"/>
+            <a:ext cx="3547872" cy="676656"/>
           </a:xfrm>
           <a:prstGeom prst="rect">
             <a:avLst/>
@@ -8004,8 +8140,8 @@
         </p:nvSpPr>
         <p:spPr>
           <a:xfrm>
-            <a:off x="6958584" y="5559552"/>
-            <a:ext cx="2743200" cy="365760"/>
+            <a:off x="6931152" y="6547104"/>
+            <a:ext cx="3255264" cy="585216"/>
           </a:xfrm>
           <a:prstGeom prst="rect">
             <a:avLst/>
@@ -8013,14 +8149,14 @@
           <a:noFill/>
         </p:spPr>
         <p:txBody>
-          <a:bodyPr wrap="square" anchor="ctr" lIns="0" rIns="0" tIns="0" bIns="0">
+          <a:bodyPr wrap="square" anchor="t" lIns="0" rIns="0" tIns="0" bIns="0">
             <a:spAutoFit/>
           </a:bodyPr>
           <a:lstStyle/>
           <a:p>
             <a:pPr algn="l">
               <a:lnSpc>
-                <a:spcPct val="112000"/>
+                <a:spcPct val="104000"/>
               </a:lnSpc>
             </a:pPr>
             <a:r>
@@ -8032,6 +8168,23 @@
                 <a:ea typeface="Arial"/>
               </a:rPr>
               <a:t>커널 · 플랫폼</a:t>
+            </a:r>
+          </a:p>
+          <a:p>
+            <a:pPr algn="l">
+              <a:lnSpc>
+                <a:spcPct val="104000"/>
+              </a:lnSpc>
+            </a:pPr>
+            <a:r>
+              <a:rPr sz="1125" b="0">
+                <a:solidFill>
+                  <a:srgbClr val="1A1A1A"/>
+                </a:solidFill>
+                <a:latin typeface="Arial"/>
+                <a:ea typeface="Arial"/>
+              </a:rPr>
+              <a:t>Linux 6.16 write streams · XFS·f2fs 스트림 · CMX 힌트 매핑 검증</a:t>
             </a:r>
           </a:p>
         </p:txBody>
@@ -8044,8 +8197,8 @@
         </p:nvSpPr>
         <p:spPr>
           <a:xfrm>
-            <a:off x="6821424" y="5980176"/>
-            <a:ext cx="3017520" cy="365760"/>
+            <a:off x="6784848" y="7223760"/>
+            <a:ext cx="3547872" cy="676656"/>
           </a:xfrm>
           <a:prstGeom prst="rect">
             <a:avLst/>
@@ -8088,8 +8241,8 @@
         </p:nvSpPr>
         <p:spPr>
           <a:xfrm>
-            <a:off x="6958584" y="5980176"/>
-            <a:ext cx="2743200" cy="365760"/>
+            <a:off x="6931152" y="7278624"/>
+            <a:ext cx="3255264" cy="585216"/>
           </a:xfrm>
           <a:prstGeom prst="rect">
             <a:avLst/>
@@ -8097,14 +8250,14 @@
           <a:noFill/>
         </p:spPr>
         <p:txBody>
-          <a:bodyPr wrap="square" anchor="ctr" lIns="0" rIns="0" tIns="0" bIns="0">
+          <a:bodyPr wrap="square" anchor="t" lIns="0" rIns="0" tIns="0" bIns="0">
             <a:spAutoFit/>
           </a:bodyPr>
           <a:lstStyle/>
           <a:p>
             <a:pPr algn="l">
               <a:lnSpc>
-                <a:spcPct val="112000"/>
+                <a:spcPct val="104000"/>
               </a:lnSpc>
             </a:pPr>
             <a:r>
@@ -8116,6 +8269,23 @@
                 <a:ea typeface="Arial"/>
               </a:rPr>
               <a:t>SSD 디바이스</a:t>
+            </a:r>
+          </a:p>
+          <a:p>
+            <a:pPr algn="l">
+              <a:lnSpc>
+                <a:spcPct val="104000"/>
+              </a:lnSpc>
+            </a:pPr>
+            <a:r>
+              <a:rPr sz="1125" b="0">
+                <a:solidFill>
+                  <a:srgbClr val="FFFFFF"/>
+                </a:solidFill>
+                <a:latin typeface="Arial"/>
+                <a:ea typeface="Arial"/>
+              </a:rPr>
+              <a:t>RUH 정책(수명·테넌트·prefix) · WAF·유효 DWPD 실측 · 디지털 트윈</a:t>
             </a:r>
           </a:p>
         </p:txBody>
@@ -8128,8 +8298,8 @@
         </p:nvSpPr>
         <p:spPr>
           <a:xfrm>
-            <a:off x="10040112" y="4343400"/>
-            <a:ext cx="274320" cy="1956816"/>
+            <a:off x="10497312" y="4370832"/>
+            <a:ext cx="201168" cy="3456432"/>
           </a:xfrm>
           <a:prstGeom prst="downArrow">
             <a:avLst/>
@@ -8172,8 +8342,8 @@
         </p:nvSpPr>
         <p:spPr>
           <a:xfrm>
-            <a:off x="10424160" y="4343400"/>
-            <a:ext cx="274320" cy="1956816"/>
+            <a:off x="10753344" y="4370832"/>
+            <a:ext cx="201168" cy="3456432"/>
           </a:xfrm>
           <a:prstGeom prst="upArrow">
             <a:avLst/>
@@ -8216,8 +8386,8 @@
         </p:nvSpPr>
         <p:spPr>
           <a:xfrm>
-            <a:off x="10817352" y="4700016"/>
-            <a:ext cx="850392" cy="420624"/>
+            <a:off x="11027664" y="5029200"/>
+            <a:ext cx="676656" cy="676656"/>
           </a:xfrm>
           <a:prstGeom prst="rect">
             <a:avLst/>
@@ -8236,7 +8406,7 @@
               </a:lnSpc>
             </a:pPr>
             <a:r>
-              <a:rPr sz="1350" b="1">
+              <a:rPr sz="1200" b="1">
                 <a:solidFill>
                   <a:srgbClr val="1A1A1A"/>
                 </a:solidFill>
@@ -8253,14 +8423,14 @@
               </a:lnSpc>
             </a:pPr>
             <a:r>
-              <a:rPr sz="1275" b="0">
+              <a:rPr sz="1100" b="0">
                 <a:solidFill>
                   <a:srgbClr val="555555"/>
                 </a:solidFill>
                 <a:latin typeface="Arial"/>
                 <a:ea typeface="Arial"/>
               </a:rPr>
-              <a:t>워크로드가 내려옴</a:t>
+              <a:t>내려옴</a:t>
             </a:r>
           </a:p>
         </p:txBody>
@@ -8273,8 +8443,8 @@
         </p:nvSpPr>
         <p:spPr>
           <a:xfrm>
-            <a:off x="10817352" y="5541264"/>
-            <a:ext cx="850392" cy="420624"/>
+            <a:off x="11027664" y="6492240"/>
+            <a:ext cx="676656" cy="676656"/>
           </a:xfrm>
           <a:prstGeom prst="rect">
             <a:avLst/>
@@ -8293,7 +8463,7 @@
               </a:lnSpc>
             </a:pPr>
             <a:r>
-              <a:rPr sz="1350" b="1">
+              <a:rPr sz="1200" b="1">
                 <a:solidFill>
                   <a:srgbClr val="1428A0"/>
                 </a:solidFill>
@@ -8310,14 +8480,14 @@
               </a:lnSpc>
             </a:pPr>
             <a:r>
-              <a:rPr sz="1275" b="0">
+              <a:rPr sz="1100" b="0">
                 <a:solidFill>
                   <a:srgbClr val="555555"/>
                 </a:solidFill>
                 <a:latin typeface="Arial"/>
                 <a:ea typeface="Arial"/>
               </a:rPr>
-              <a:t>최적화가 올라감</a:t>
+              <a:t>올라감</a:t>
             </a:r>
           </a:p>
         </p:txBody>
@@ -8330,8 +8500,8 @@
         </p:nvSpPr>
         <p:spPr>
           <a:xfrm>
-            <a:off x="6784848" y="6492240"/>
-            <a:ext cx="4718304" cy="566928"/>
+            <a:off x="6784848" y="7955280"/>
+            <a:ext cx="4718304" cy="310896"/>
           </a:xfrm>
           <a:prstGeom prst="rect">
             <a:avLst/>
@@ -8371,7 +8541,7 @@
         <p:spPr>
           <a:xfrm>
             <a:off x="12152376" y="3730752"/>
-            <a:ext cx="5413248" cy="3474720"/>
+            <a:ext cx="5413248" cy="4626864"/>
           </a:xfrm>
           <a:prstGeom prst="rect">
             <a:avLst/>
@@ -8464,8 +8634,8 @@
         </p:nvSpPr>
         <p:spPr>
           <a:xfrm>
-            <a:off x="12536424" y="4297680"/>
-            <a:ext cx="3017520" cy="365760"/>
+            <a:off x="12499848" y="4297680"/>
+            <a:ext cx="3547872" cy="676656"/>
           </a:xfrm>
           <a:prstGeom prst="rect">
             <a:avLst/>
@@ -8508,8 +8678,8 @@
         </p:nvSpPr>
         <p:spPr>
           <a:xfrm>
-            <a:off x="12673584" y="4297680"/>
-            <a:ext cx="2743200" cy="365760"/>
+            <a:off x="12646152" y="4352544"/>
+            <a:ext cx="3255264" cy="585216"/>
           </a:xfrm>
           <a:prstGeom prst="rect">
             <a:avLst/>
@@ -8517,14 +8687,14 @@
           <a:noFill/>
         </p:spPr>
         <p:txBody>
-          <a:bodyPr wrap="square" anchor="ctr" lIns="0" rIns="0" tIns="0" bIns="0">
+          <a:bodyPr wrap="square" anchor="t" lIns="0" rIns="0" tIns="0" bIns="0">
             <a:spAutoFit/>
           </a:bodyPr>
           <a:lstStyle/>
           <a:p>
             <a:pPr algn="l">
               <a:lnSpc>
-                <a:spcPct val="112000"/>
+                <a:spcPct val="104000"/>
               </a:lnSpc>
             </a:pPr>
             <a:r>
@@ -8536,6 +8706,23 @@
                 <a:ea typeface="Arial"/>
               </a:rPr>
               <a:t>응용 · 추론 엔진</a:t>
+            </a:r>
+          </a:p>
+          <a:p>
+            <a:pPr algn="l">
+              <a:lnSpc>
+                <a:spcPct val="104000"/>
+              </a:lnSpc>
+            </a:pPr>
+            <a:r>
+              <a:rPr sz="1125" b="0">
+                <a:solidFill>
+                  <a:srgbClr val="1A1A1A"/>
+                </a:solidFill>
+                <a:latin typeface="Arial"/>
+                <a:ea typeface="Arial"/>
+              </a:rPr>
+              <a:t>커넥터·스케줄러 이해 · 공용 TCO 모델(GPU당 동시 사용자·TTFT·전력)</a:t>
             </a:r>
           </a:p>
         </p:txBody>
@@ -8548,8 +8735,8 @@
         </p:nvSpPr>
         <p:spPr>
           <a:xfrm>
-            <a:off x="12536424" y="4718304"/>
-            <a:ext cx="3017520" cy="365760"/>
+            <a:off x="12499848" y="5029200"/>
+            <a:ext cx="3547872" cy="676656"/>
           </a:xfrm>
           <a:prstGeom prst="rect">
             <a:avLst/>
@@ -8592,8 +8779,8 @@
         </p:nvSpPr>
         <p:spPr>
           <a:xfrm>
-            <a:off x="12673584" y="4718304"/>
-            <a:ext cx="2743200" cy="365760"/>
+            <a:off x="12646152" y="5084064"/>
+            <a:ext cx="3255264" cy="585216"/>
           </a:xfrm>
           <a:prstGeom prst="rect">
             <a:avLst/>
@@ -8601,14 +8788,14 @@
           <a:noFill/>
         </p:spPr>
         <p:txBody>
-          <a:bodyPr wrap="square" anchor="ctr" lIns="0" rIns="0" tIns="0" bIns="0">
+          <a:bodyPr wrap="square" anchor="t" lIns="0" rIns="0" tIns="0" bIns="0">
             <a:spAutoFit/>
           </a:bodyPr>
           <a:lstStyle/>
           <a:p>
             <a:pPr algn="l">
               <a:lnSpc>
-                <a:spcPct val="112000"/>
+                <a:spcPct val="104000"/>
               </a:lnSpc>
             </a:pPr>
             <a:r>
@@ -8620,6 +8807,23 @@
                 <a:ea typeface="Arial"/>
               </a:rPr>
               <a:t>KV 캐시 관리자</a:t>
+            </a:r>
+          </a:p>
+          <a:p>
+            <a:pPr algn="l">
+              <a:lnSpc>
+                <a:spcPct val="104000"/>
+              </a:lnSpc>
+            </a:pPr>
+            <a:r>
+              <a:rPr sz="1125" b="0">
+                <a:solidFill>
+                  <a:srgbClr val="FFFFFF"/>
+                </a:solidFill>
+                <a:latin typeface="Arial"/>
+                <a:ea typeface="Arial"/>
+              </a:rPr>
+              <a:t>KVBM·LMCache·Mooncake·FlexKV 플러그인 메인라인 머지</a:t>
             </a:r>
           </a:p>
         </p:txBody>
@@ -8632,8 +8836,8 @@
         </p:nvSpPr>
         <p:spPr>
           <a:xfrm>
-            <a:off x="12536424" y="5138928"/>
-            <a:ext cx="3017520" cy="365760"/>
+            <a:off x="12499848" y="5760720"/>
+            <a:ext cx="3547872" cy="676656"/>
           </a:xfrm>
           <a:prstGeom prst="rect">
             <a:avLst/>
@@ -8676,8 +8880,8 @@
         </p:nvSpPr>
         <p:spPr>
           <a:xfrm>
-            <a:off x="12673584" y="5138928"/>
-            <a:ext cx="2743200" cy="365760"/>
+            <a:off x="12646152" y="5815584"/>
+            <a:ext cx="3255264" cy="585216"/>
           </a:xfrm>
           <a:prstGeom prst="rect">
             <a:avLst/>
@@ -8685,14 +8889,14 @@
           <a:noFill/>
         </p:spPr>
         <p:txBody>
-          <a:bodyPr wrap="square" anchor="ctr" lIns="0" rIns="0" tIns="0" bIns="0">
+          <a:bodyPr wrap="square" anchor="t" lIns="0" rIns="0" tIns="0" bIns="0">
             <a:spAutoFit/>
           </a:bodyPr>
           <a:lstStyle/>
           <a:p>
             <a:pPr algn="l">
               <a:lnSpc>
-                <a:spcPct val="112000"/>
+                <a:spcPct val="104000"/>
               </a:lnSpc>
             </a:pPr>
             <a:r>
@@ -8704,6 +8908,23 @@
                 <a:ea typeface="Arial"/>
               </a:rPr>
               <a:t>I/O 라이브러리</a:t>
+            </a:r>
+          </a:p>
+          <a:p>
+            <a:pPr algn="l">
+              <a:lnSpc>
+                <a:spcPct val="104000"/>
+              </a:lnSpc>
+            </a:pPr>
+            <a:r>
+              <a:rPr sz="1125" b="0">
+                <a:solidFill>
+                  <a:srgbClr val="FFFFFF"/>
+                </a:solidFill>
+                <a:latin typeface="Arial"/>
+                <a:ea typeface="Arial"/>
+              </a:rPr>
+              <a:t>NIXL 스토리지 플러그인 · xNVMe 배치 API가 기본 백엔드</a:t>
             </a:r>
           </a:p>
         </p:txBody>
@@ -8716,8 +8937,8 @@
         </p:nvSpPr>
         <p:spPr>
           <a:xfrm>
-            <a:off x="12536424" y="5559552"/>
-            <a:ext cx="3017520" cy="365760"/>
+            <a:off x="12499848" y="6492240"/>
+            <a:ext cx="3547872" cy="676656"/>
           </a:xfrm>
           <a:prstGeom prst="rect">
             <a:avLst/>
@@ -8760,8 +8981,8 @@
         </p:nvSpPr>
         <p:spPr>
           <a:xfrm>
-            <a:off x="12673584" y="5559552"/>
-            <a:ext cx="2743200" cy="365760"/>
+            <a:off x="12646152" y="6547104"/>
+            <a:ext cx="3255264" cy="585216"/>
           </a:xfrm>
           <a:prstGeom prst="rect">
             <a:avLst/>
@@ -8769,14 +8990,14 @@
           <a:noFill/>
         </p:spPr>
         <p:txBody>
-          <a:bodyPr wrap="square" anchor="ctr" lIns="0" rIns="0" tIns="0" bIns="0">
+          <a:bodyPr wrap="square" anchor="t" lIns="0" rIns="0" tIns="0" bIns="0">
             <a:spAutoFit/>
           </a:bodyPr>
           <a:lstStyle/>
           <a:p>
             <a:pPr algn="l">
               <a:lnSpc>
-                <a:spcPct val="112000"/>
+                <a:spcPct val="104000"/>
               </a:lnSpc>
             </a:pPr>
             <a:r>
@@ -8788,6 +9009,23 @@
                 <a:ea typeface="Arial"/>
               </a:rPr>
               <a:t>커널 · 플랫폼</a:t>
+            </a:r>
+          </a:p>
+          <a:p>
+            <a:pPr algn="l">
+              <a:lnSpc>
+                <a:spcPct val="104000"/>
+              </a:lnSpc>
+            </a:pPr>
+            <a:r>
+              <a:rPr sz="1125" b="0">
+                <a:solidFill>
+                  <a:srgbClr val="FFFFFF"/>
+                </a:solidFill>
+                <a:latin typeface="Arial"/>
+                <a:ea typeface="Arial"/>
+              </a:rPr>
+              <a:t>XFS·f2fs 스트림 완주 · DOCA Memos↔배치 표준 공동 정의 · SNIA·OCP</a:t>
             </a:r>
           </a:p>
         </p:txBody>
@@ -8800,8 +9038,8 @@
         </p:nvSpPr>
         <p:spPr>
           <a:xfrm>
-            <a:off x="12536424" y="5980176"/>
-            <a:ext cx="3017520" cy="365760"/>
+            <a:off x="12499848" y="7223760"/>
+            <a:ext cx="3547872" cy="676656"/>
           </a:xfrm>
           <a:prstGeom prst="rect">
             <a:avLst/>
@@ -8844,8 +9082,8 @@
         </p:nvSpPr>
         <p:spPr>
           <a:xfrm>
-            <a:off x="12673584" y="5980176"/>
-            <a:ext cx="2743200" cy="365760"/>
+            <a:off x="12646152" y="7278624"/>
+            <a:ext cx="3255264" cy="585216"/>
           </a:xfrm>
           <a:prstGeom prst="rect">
             <a:avLst/>
@@ -8853,14 +9091,14 @@
           <a:noFill/>
         </p:spPr>
         <p:txBody>
-          <a:bodyPr wrap="square" anchor="ctr" lIns="0" rIns="0" tIns="0" bIns="0">
+          <a:bodyPr wrap="square" anchor="t" lIns="0" rIns="0" tIns="0" bIns="0">
             <a:spAutoFit/>
           </a:bodyPr>
           <a:lstStyle/>
           <a:p>
             <a:pPr algn="l">
               <a:lnSpc>
-                <a:spcPct val="112000"/>
+                <a:spcPct val="104000"/>
               </a:lnSpc>
             </a:pPr>
             <a:r>
@@ -8872,6 +9110,23 @@
                 <a:ea typeface="Arial"/>
               </a:rPr>
               <a:t>SSD 디바이스</a:t>
+            </a:r>
+          </a:p>
+          <a:p>
+            <a:pPr algn="l">
+              <a:lnSpc>
+                <a:spcPct val="104000"/>
+              </a:lnSpc>
+            </a:pPr>
+            <a:r>
+              <a:rPr sz="1125" b="0">
+                <a:solidFill>
+                  <a:srgbClr val="FFFFFF"/>
+                </a:solidFill>
+                <a:latin typeface="Arial"/>
+                <a:ea typeface="Arial"/>
+              </a:rPr>
+              <a:t>레퍼런스 스택의 기본 디바이스 · 수명 보증 SLA</a:t>
             </a:r>
           </a:p>
         </p:txBody>
@@ -8884,8 +9139,8 @@
         </p:nvSpPr>
         <p:spPr>
           <a:xfrm>
-            <a:off x="15834116" y="4663440"/>
-            <a:ext cx="187634" cy="187634"/>
+            <a:off x="16303751" y="5138928"/>
+            <a:ext cx="173736" cy="173736"/>
           </a:xfrm>
           <a:prstGeom prst="ellipse">
             <a:avLst/>
@@ -8928,8 +9183,8 @@
         </p:nvSpPr>
         <p:spPr>
           <a:xfrm>
-            <a:off x="15755111" y="4880701"/>
-            <a:ext cx="345643" cy="276514"/>
+            <a:off x="16230600" y="5340096"/>
+            <a:ext cx="320040" cy="256032"/>
           </a:xfrm>
           <a:prstGeom prst="round2SameRect">
             <a:avLst>
@@ -8975,8 +9230,8 @@
         </p:nvSpPr>
         <p:spPr>
           <a:xfrm>
-            <a:off x="16210483" y="4700016"/>
-            <a:ext cx="1172260" cy="420624"/>
+            <a:off x="16623792" y="5029200"/>
+            <a:ext cx="795528" cy="676656"/>
           </a:xfrm>
           <a:prstGeom prst="rect">
             <a:avLst/>
@@ -8991,18 +9246,35 @@
           <a:p>
             <a:pPr algn="l">
               <a:lnSpc>
-                <a:spcPct val="112000"/>
-              </a:lnSpc>
-            </a:pPr>
-            <a:r>
-              <a:rPr sz="1350" b="1">
+                <a:spcPct val="100000"/>
+              </a:lnSpc>
+            </a:pPr>
+            <a:r>
+              <a:rPr sz="1275" b="1">
                 <a:solidFill>
                   <a:srgbClr val="1428A0"/>
                 </a:solidFill>
                 <a:latin typeface="Arial"/>
                 <a:ea typeface="Arial"/>
               </a:rPr>
-              <a:t>상주 · 공동 설계</a:t>
+              <a:t>FDE 상주</a:t>
+            </a:r>
+          </a:p>
+          <a:p>
+            <a:pPr algn="l">
+              <a:lnSpc>
+                <a:spcPct val="100000"/>
+              </a:lnSpc>
+            </a:pPr>
+            <a:r>
+              <a:rPr sz="1125" b="0">
+                <a:solidFill>
+                  <a:srgbClr val="555555"/>
+                </a:solidFill>
+                <a:latin typeface="Arial"/>
+                <a:ea typeface="Arial"/>
+              </a:rPr>
+              <a:t>공동 설계</a:t>
             </a:r>
           </a:p>
         </p:txBody>
@@ -9015,8 +9287,8 @@
         </p:nvSpPr>
         <p:spPr>
           <a:xfrm>
-            <a:off x="15755111" y="5541264"/>
-            <a:ext cx="1627632" cy="420624"/>
+            <a:off x="16212312" y="5760720"/>
+            <a:ext cx="1207008" cy="676656"/>
           </a:xfrm>
           <a:prstGeom prst="rect">
             <a:avLst/>
@@ -9031,18 +9303,35 @@
           <a:p>
             <a:pPr algn="l">
               <a:lnSpc>
-                <a:spcPct val="112000"/>
-              </a:lnSpc>
-            </a:pPr>
-            <a:r>
-              <a:rPr sz="1350" b="1">
+                <a:spcPct val="100000"/>
+              </a:lnSpc>
+            </a:pPr>
+            <a:r>
+              <a:rPr sz="1275" b="1">
                 <a:solidFill>
                   <a:srgbClr val="1428A0"/>
                 </a:solidFill>
                 <a:latin typeface="Arial"/>
                 <a:ea typeface="Arial"/>
               </a:rPr>
-              <a:t>메인라인 머지</a:t>
+              <a:t>메인라인</a:t>
+            </a:r>
+          </a:p>
+          <a:p>
+            <a:pPr algn="l">
+              <a:lnSpc>
+                <a:spcPct val="100000"/>
+              </a:lnSpc>
+            </a:pPr>
+            <a:r>
+              <a:rPr sz="1125" b="0">
+                <a:solidFill>
+                  <a:srgbClr val="555555"/>
+                </a:solidFill>
+                <a:latin typeface="Arial"/>
+                <a:ea typeface="Arial"/>
+              </a:rPr>
+              <a:t>머지</a:t>
             </a:r>
           </a:p>
         </p:txBody>
@@ -9055,8 +9344,8 @@
         </p:nvSpPr>
         <p:spPr>
           <a:xfrm>
-            <a:off x="15755111" y="4279392"/>
-            <a:ext cx="1627632" cy="420624"/>
+            <a:off x="16212312" y="4297680"/>
+            <a:ext cx="1207008" cy="676656"/>
           </a:xfrm>
           <a:prstGeom prst="rect">
             <a:avLst/>
@@ -9071,18 +9360,35 @@
           <a:p>
             <a:pPr algn="l">
               <a:lnSpc>
-                <a:spcPct val="112000"/>
-              </a:lnSpc>
-            </a:pPr>
-            <a:r>
-              <a:rPr sz="1350" b="1">
+                <a:spcPct val="100000"/>
+              </a:lnSpc>
+            </a:pPr>
+            <a:r>
+              <a:rPr sz="1275" b="1">
                 <a:solidFill>
                   <a:srgbClr val="1A1A1A"/>
                 </a:solidFill>
                 <a:latin typeface="Arial"/>
                 <a:ea typeface="Arial"/>
               </a:rPr>
-              <a:t>공용 TCO 모델</a:t>
+              <a:t>공용 TCO</a:t>
+            </a:r>
+          </a:p>
+          <a:p>
+            <a:pPr algn="l">
+              <a:lnSpc>
+                <a:spcPct val="100000"/>
+              </a:lnSpc>
+            </a:pPr>
+            <a:r>
+              <a:rPr sz="1125" b="0">
+                <a:solidFill>
+                  <a:srgbClr val="555555"/>
+                </a:solidFill>
+                <a:latin typeface="Arial"/>
+                <a:ea typeface="Arial"/>
+              </a:rPr>
+              <a:t>모델</a:t>
             </a:r>
           </a:p>
         </p:txBody>
@@ -9095,8 +9401,8 @@
         </p:nvSpPr>
         <p:spPr>
           <a:xfrm>
-            <a:off x="12499848" y="6492240"/>
-            <a:ext cx="4718304" cy="566928"/>
+            <a:off x="12499848" y="7955280"/>
+            <a:ext cx="4718304" cy="310896"/>
           </a:xfrm>
           <a:prstGeom prst="rect">
             <a:avLst/>
@@ -9135,7 +9441,7 @@
         </p:nvSpPr>
         <p:spPr>
           <a:xfrm>
-            <a:off x="722376" y="7315200"/>
+            <a:off x="722376" y="8485632"/>
             <a:ext cx="237744" cy="164592"/>
           </a:xfrm>
           <a:prstGeom prst="rect">
@@ -9179,7 +9485,7 @@
         </p:nvSpPr>
         <p:spPr>
           <a:xfrm>
-            <a:off x="1033272" y="7278624"/>
+            <a:off x="1033272" y="8449056"/>
             <a:ext cx="1463040" cy="237744"/>
           </a:xfrm>
           <a:prstGeom prst="rect">
@@ -9219,7 +9525,7 @@
         </p:nvSpPr>
         <p:spPr>
           <a:xfrm>
-            <a:off x="2551176" y="7315200"/>
+            <a:off x="2551176" y="8485632"/>
             <a:ext cx="237744" cy="164592"/>
           </a:xfrm>
           <a:prstGeom prst="rect">
@@ -9263,7 +9569,7 @@
         </p:nvSpPr>
         <p:spPr>
           <a:xfrm>
-            <a:off x="2862072" y="7278624"/>
+            <a:off x="2862072" y="8449056"/>
             <a:ext cx="1463040" cy="237744"/>
           </a:xfrm>
           <a:prstGeom prst="rect">
@@ -9303,7 +9609,7 @@
         </p:nvSpPr>
         <p:spPr>
           <a:xfrm>
-            <a:off x="4379976" y="7315200"/>
+            <a:off x="4379976" y="8485632"/>
             <a:ext cx="237744" cy="164592"/>
           </a:xfrm>
           <a:prstGeom prst="rect">
@@ -9349,7 +9655,7 @@
         </p:nvSpPr>
         <p:spPr>
           <a:xfrm>
-            <a:off x="4690872" y="7278624"/>
+            <a:off x="4690872" y="8449056"/>
             <a:ext cx="1463040" cy="237744"/>
           </a:xfrm>
           <a:prstGeom prst="rect">
@@ -9389,7 +9695,7 @@
         </p:nvSpPr>
         <p:spPr>
           <a:xfrm>
-            <a:off x="722376" y="7589520"/>
+            <a:off x="722376" y="8778240"/>
             <a:ext cx="5413248" cy="164592"/>
           </a:xfrm>
           <a:prstGeom prst="rect">
@@ -9435,7 +9741,7 @@
         </p:nvSpPr>
         <p:spPr>
           <a:xfrm>
-            <a:off x="6437376" y="7589520"/>
+            <a:off x="6437376" y="8778240"/>
             <a:ext cx="5413248" cy="164592"/>
           </a:xfrm>
           <a:prstGeom prst="rect">
@@ -9481,7 +9787,7 @@
         </p:nvSpPr>
         <p:spPr>
           <a:xfrm>
-            <a:off x="12152376" y="7589520"/>
+            <a:off x="12152376" y="8778240"/>
             <a:ext cx="5413248" cy="164592"/>
           </a:xfrm>
           <a:prstGeom prst="rect">
@@ -9527,7 +9833,7 @@
         </p:nvSpPr>
         <p:spPr>
           <a:xfrm>
-            <a:off x="722376" y="7589520"/>
+            <a:off x="722376" y="8778240"/>
             <a:ext cx="5413248" cy="164592"/>
           </a:xfrm>
           <a:prstGeom prst="rect">
@@ -9571,7 +9877,7 @@
         </p:nvSpPr>
         <p:spPr>
           <a:xfrm>
-            <a:off x="6437376" y="7589520"/>
+            <a:off x="6437376" y="8778240"/>
             <a:ext cx="1515709" cy="164592"/>
           </a:xfrm>
           <a:prstGeom prst="rect">
@@ -9615,7 +9921,7 @@
         </p:nvSpPr>
         <p:spPr>
           <a:xfrm>
-            <a:off x="7834213" y="7790688"/>
+            <a:off x="7834213" y="8979407"/>
             <a:ext cx="237744" cy="182880"/>
           </a:xfrm>
           <a:prstGeom prst="triangle">
@@ -9659,8 +9965,8 @@
         </p:nvSpPr>
         <p:spPr>
           <a:xfrm>
-            <a:off x="8154253" y="7754112"/>
-            <a:ext cx="6400800" cy="274320"/>
+            <a:off x="8154253" y="8942832"/>
+            <a:ext cx="8229600" cy="274320"/>
           </a:xfrm>
           <a:prstGeom prst="rect">
             <a:avLst/>
@@ -9696,7 +10002,7 @@
                 <a:latin typeface="Arial"/>
                 <a:ea typeface="Arial"/>
               </a:rPr>
-              <a:t>디바이스는 확보, 워크로드 실측은 미공개, 캐시 관리자 기여 0</a:t>
+              <a:t>디바이스는 확보(CMX 첫 공급), 워크로드 실측은 미공개, 캐시 관리자 4종 기여 0</a:t>
             </a:r>
           </a:p>
         </p:txBody>
@@ -9709,8 +10015,8 @@
         </p:nvSpPr>
         <p:spPr>
           <a:xfrm>
-            <a:off x="722376" y="8101584"/>
-            <a:ext cx="16843248" cy="256032"/>
+            <a:off x="722376" y="9592056"/>
+            <a:ext cx="14264640" cy="310896"/>
           </a:xfrm>
           <a:prstGeom prst="rect">
             <a:avLst/>
@@ -9729,1184 +10035,6 @@
               </a:lnSpc>
             </a:pPr>
             <a:r>
-              <a:rPr sz="1650" b="1">
-                <a:solidFill>
-                  <a:srgbClr val="1428A0"/>
-                </a:solidFill>
-                <a:latin typeface="Arial"/>
-                <a:ea typeface="Arial"/>
-              </a:rPr>
-              <a:t>협업할 기업 · 목적을 달리해 다섯 층에 동시 진입</a:t>
-            </a:r>
-          </a:p>
-        </p:txBody>
-      </p:sp>
-      <p:sp>
-        <p:nvSpPr>
-          <p:cNvPr id="84" name="Rectangle 83"/>
-          <p:cNvSpPr/>
-          <p:nvPr/>
-        </p:nvSpPr>
-        <p:spPr>
-          <a:xfrm>
-            <a:off x="722376" y="8412480"/>
-            <a:ext cx="3185769" cy="987551"/>
-          </a:xfrm>
-          <a:prstGeom prst="rect">
-            <a:avLst/>
-          </a:prstGeom>
-          <a:solidFill>
-            <a:srgbClr val="FFFFFF"/>
-          </a:solidFill>
-          <a:ln w="9525">
-            <a:solidFill>
-              <a:srgbClr val="D9D9D9"/>
-            </a:solidFill>
-          </a:ln>
-          <a:effectLst/>
-        </p:spPr>
-        <p:style>
-          <a:lnRef idx="1">
-            <a:schemeClr val="accent1"/>
-          </a:lnRef>
-          <a:fillRef idx="3">
-            <a:schemeClr val="accent1"/>
-          </a:fillRef>
-          <a:effectRef idx="2">
-            <a:schemeClr val="accent1"/>
-          </a:effectRef>
-          <a:fontRef idx="minor">
-            <a:schemeClr val="lt1"/>
-          </a:fontRef>
-        </p:style>
-        <p:txBody>
-          <a:bodyPr rtlCol="0" anchor="ctr"/>
-          <a:lstStyle/>
-          <a:p>
-            <a:pPr algn="ctr"/>
-          </a:p>
-        </p:txBody>
-      </p:sp>
-      <p:sp>
-        <p:nvSpPr>
-          <p:cNvPr id="85" name="TextBox 84"/>
-          <p:cNvSpPr txBox="1"/>
-          <p:nvPr/>
-        </p:nvSpPr>
-        <p:spPr>
-          <a:xfrm>
-            <a:off x="923544" y="8503920"/>
-            <a:ext cx="2783433" cy="237744"/>
-          </a:xfrm>
-          <a:prstGeom prst="rect">
-            <a:avLst/>
-          </a:prstGeom>
-          <a:noFill/>
-        </p:spPr>
-        <p:txBody>
-          <a:bodyPr wrap="square" anchor="t" lIns="0" rIns="0" tIns="0" bIns="0">
-            <a:spAutoFit/>
-          </a:bodyPr>
-          <a:lstStyle/>
-          <a:p>
-            <a:pPr algn="l">
-              <a:lnSpc>
-                <a:spcPct val="112000"/>
-              </a:lnSpc>
-            </a:pPr>
-            <a:r>
-              <a:rPr sz="1425" b="1">
-                <a:solidFill>
-                  <a:srgbClr val="1A1A1A"/>
-                </a:solidFill>
-                <a:latin typeface="Arial"/>
-                <a:ea typeface="Arial"/>
-              </a:rPr>
-              <a:t>플랫폼 게이트</a:t>
-            </a:r>
-          </a:p>
-        </p:txBody>
-      </p:sp>
-      <p:pic>
-        <p:nvPicPr>
-          <p:cNvPr id="86" name="Picture 85" descr="nvidia.png"/>
-          <p:cNvPicPr>
-            <a:picLocks noChangeAspect="1"/>
-          </p:cNvPicPr>
-          <p:nvPr/>
-        </p:nvPicPr>
-        <p:blipFill>
-          <a:blip r:embed="rId2"/>
-          <a:stretch>
-            <a:fillRect/>
-          </a:stretch>
-        </p:blipFill>
-        <p:spPr>
-          <a:xfrm>
-            <a:off x="923544" y="8851392"/>
-            <a:ext cx="1435395" cy="274320"/>
-          </a:xfrm>
-          <a:prstGeom prst="rect">
-            <a:avLst/>
-          </a:prstGeom>
-        </p:spPr>
-      </p:pic>
-      <p:sp>
-        <p:nvSpPr>
-          <p:cNvPr id="87" name="Rectangle 86"/>
-          <p:cNvSpPr/>
-          <p:nvPr/>
-        </p:nvSpPr>
-        <p:spPr>
-          <a:xfrm>
-            <a:off x="4136745" y="8412480"/>
-            <a:ext cx="3185769" cy="987551"/>
-          </a:xfrm>
-          <a:prstGeom prst="rect">
-            <a:avLst/>
-          </a:prstGeom>
-          <a:solidFill>
-            <a:srgbClr val="FFFFFF"/>
-          </a:solidFill>
-          <a:ln w="9525">
-            <a:solidFill>
-              <a:srgbClr val="D9D9D9"/>
-            </a:solidFill>
-          </a:ln>
-          <a:effectLst/>
-        </p:spPr>
-        <p:style>
-          <a:lnRef idx="1">
-            <a:schemeClr val="accent1"/>
-          </a:lnRef>
-          <a:fillRef idx="3">
-            <a:schemeClr val="accent1"/>
-          </a:fillRef>
-          <a:effectRef idx="2">
-            <a:schemeClr val="accent1"/>
-          </a:effectRef>
-          <a:fontRef idx="minor">
-            <a:schemeClr val="lt1"/>
-          </a:fontRef>
-        </p:style>
-        <p:txBody>
-          <a:bodyPr rtlCol="0" anchor="ctr"/>
-          <a:lstStyle/>
-          <a:p>
-            <a:pPr algn="ctr"/>
-          </a:p>
-        </p:txBody>
-      </p:sp>
-      <p:sp>
-        <p:nvSpPr>
-          <p:cNvPr id="88" name="TextBox 87"/>
-          <p:cNvSpPr txBox="1"/>
-          <p:nvPr/>
-        </p:nvSpPr>
-        <p:spPr>
-          <a:xfrm>
-            <a:off x="4337913" y="8503920"/>
-            <a:ext cx="2783433" cy="237744"/>
-          </a:xfrm>
-          <a:prstGeom prst="rect">
-            <a:avLst/>
-          </a:prstGeom>
-          <a:noFill/>
-        </p:spPr>
-        <p:txBody>
-          <a:bodyPr wrap="square" anchor="t" lIns="0" rIns="0" tIns="0" bIns="0">
-            <a:spAutoFit/>
-          </a:bodyPr>
-          <a:lstStyle/>
-          <a:p>
-            <a:pPr algn="l">
-              <a:lnSpc>
-                <a:spcPct val="112000"/>
-              </a:lnSpc>
-            </a:pPr>
-            <a:r>
-              <a:rPr sz="1425" b="1">
-                <a:solidFill>
-                  <a:srgbClr val="1A1A1A"/>
-                </a:solidFill>
-                <a:latin typeface="Arial"/>
-                <a:ea typeface="Arial"/>
-              </a:rPr>
-              <a:t>스펙 상류</a:t>
-            </a:r>
-          </a:p>
-        </p:txBody>
-      </p:sp>
-      <p:pic>
-        <p:nvPicPr>
-          <p:cNvPr id="89" name="Picture 88" descr="anthropic.png"/>
-          <p:cNvPicPr>
-            <a:picLocks noChangeAspect="1"/>
-          </p:cNvPicPr>
-          <p:nvPr/>
-        </p:nvPicPr>
-        <p:blipFill>
-          <a:blip r:embed="rId3"/>
-          <a:stretch>
-            <a:fillRect/>
-          </a:stretch>
-        </p:blipFill>
-        <p:spPr>
-          <a:xfrm>
-            <a:off x="4337913" y="8887916"/>
-            <a:ext cx="1775921" cy="201271"/>
-          </a:xfrm>
-          <a:prstGeom prst="rect">
-            <a:avLst/>
-          </a:prstGeom>
-        </p:spPr>
-      </p:pic>
-      <p:pic>
-        <p:nvPicPr>
-          <p:cNvPr id="90" name="Picture 89" descr="openai.png"/>
-          <p:cNvPicPr>
-            <a:picLocks noChangeAspect="1"/>
-          </p:cNvPicPr>
-          <p:nvPr/>
-        </p:nvPicPr>
-        <p:blipFill>
-          <a:blip r:embed="rId4"/>
-          <a:stretch>
-            <a:fillRect/>
-          </a:stretch>
-        </p:blipFill>
-        <p:spPr>
-          <a:xfrm>
-            <a:off x="6301690" y="8887916"/>
-            <a:ext cx="819656" cy="201271"/>
-          </a:xfrm>
-          <a:prstGeom prst="rect">
-            <a:avLst/>
-          </a:prstGeom>
-        </p:spPr>
-      </p:pic>
-      <p:sp>
-        <p:nvSpPr>
-          <p:cNvPr id="91" name="Rectangle 90"/>
-          <p:cNvSpPr/>
-          <p:nvPr/>
-        </p:nvSpPr>
-        <p:spPr>
-          <a:xfrm>
-            <a:off x="7551115" y="8412480"/>
-            <a:ext cx="3185769" cy="987551"/>
-          </a:xfrm>
-          <a:prstGeom prst="rect">
-            <a:avLst/>
-          </a:prstGeom>
-          <a:solidFill>
-            <a:srgbClr val="FFFFFF"/>
-          </a:solidFill>
-          <a:ln w="9525">
-            <a:solidFill>
-              <a:srgbClr val="D9D9D9"/>
-            </a:solidFill>
-          </a:ln>
-          <a:effectLst/>
-        </p:spPr>
-        <p:style>
-          <a:lnRef idx="1">
-            <a:schemeClr val="accent1"/>
-          </a:lnRef>
-          <a:fillRef idx="3">
-            <a:schemeClr val="accent1"/>
-          </a:fillRef>
-          <a:effectRef idx="2">
-            <a:schemeClr val="accent1"/>
-          </a:effectRef>
-          <a:fontRef idx="minor">
-            <a:schemeClr val="lt1"/>
-          </a:fontRef>
-        </p:style>
-        <p:txBody>
-          <a:bodyPr rtlCol="0" anchor="ctr"/>
-          <a:lstStyle/>
-          <a:p>
-            <a:pPr algn="ctr"/>
-          </a:p>
-        </p:txBody>
-      </p:sp>
-      <p:sp>
-        <p:nvSpPr>
-          <p:cNvPr id="92" name="TextBox 91"/>
-          <p:cNvSpPr txBox="1"/>
-          <p:nvPr/>
-        </p:nvSpPr>
-        <p:spPr>
-          <a:xfrm>
-            <a:off x="7752283" y="8503920"/>
-            <a:ext cx="2783433" cy="237744"/>
-          </a:xfrm>
-          <a:prstGeom prst="rect">
-            <a:avLst/>
-          </a:prstGeom>
-          <a:noFill/>
-        </p:spPr>
-        <p:txBody>
-          <a:bodyPr wrap="square" anchor="t" lIns="0" rIns="0" tIns="0" bIns="0">
-            <a:spAutoFit/>
-          </a:bodyPr>
-          <a:lstStyle/>
-          <a:p>
-            <a:pPr algn="l">
-              <a:lnSpc>
-                <a:spcPct val="112000"/>
-              </a:lnSpc>
-            </a:pPr>
-            <a:r>
-              <a:rPr sz="1425" b="1">
-                <a:solidFill>
-                  <a:srgbClr val="1A1A1A"/>
-                </a:solidFill>
-                <a:latin typeface="Arial"/>
-                <a:ea typeface="Arial"/>
-              </a:rPr>
-              <a:t>물량 · 활성화</a:t>
-            </a:r>
-          </a:p>
-        </p:txBody>
-      </p:sp>
-      <p:pic>
-        <p:nvPicPr>
-          <p:cNvPr id="93" name="Picture 92" descr="meta.png"/>
-          <p:cNvPicPr>
-            <a:picLocks noChangeAspect="1"/>
-          </p:cNvPicPr>
-          <p:nvPr/>
-        </p:nvPicPr>
-        <p:blipFill>
-          <a:blip r:embed="rId5"/>
-          <a:stretch>
-            <a:fillRect/>
-          </a:stretch>
-        </p:blipFill>
-        <p:spPr>
-          <a:xfrm>
-            <a:off x="7752283" y="8875764"/>
-            <a:ext cx="839557" cy="170710"/>
-          </a:xfrm>
-          <a:prstGeom prst="rect">
-            <a:avLst/>
-          </a:prstGeom>
-        </p:spPr>
-      </p:pic>
-      <p:pic>
-        <p:nvPicPr>
-          <p:cNvPr id="94" name="Picture 93" descr="google.png"/>
-          <p:cNvPicPr>
-            <a:picLocks noChangeAspect="1"/>
-          </p:cNvPicPr>
-          <p:nvPr/>
-        </p:nvPicPr>
-        <p:blipFill>
-          <a:blip r:embed="rId6"/>
-          <a:stretch>
-            <a:fillRect/>
-          </a:stretch>
-        </p:blipFill>
-        <p:spPr>
-          <a:xfrm>
-            <a:off x="8705652" y="8875764"/>
-            <a:ext cx="520810" cy="170710"/>
-          </a:xfrm>
-          <a:prstGeom prst="rect">
-            <a:avLst/>
-          </a:prstGeom>
-        </p:spPr>
-      </p:pic>
-      <p:pic>
-        <p:nvPicPr>
-          <p:cNvPr id="95" name="Picture 94" descr="microsoft.png"/>
-          <p:cNvPicPr>
-            <a:picLocks noChangeAspect="1"/>
-          </p:cNvPicPr>
-          <p:nvPr/>
-        </p:nvPicPr>
-        <p:blipFill>
-          <a:blip r:embed="rId7"/>
-          <a:stretch>
-            <a:fillRect/>
-          </a:stretch>
-        </p:blipFill>
-        <p:spPr>
-          <a:xfrm>
-            <a:off x="9340272" y="8875764"/>
-            <a:ext cx="796057" cy="170710"/>
-          </a:xfrm>
-          <a:prstGeom prst="rect">
-            <a:avLst/>
-          </a:prstGeom>
-        </p:spPr>
-      </p:pic>
-      <p:pic>
-        <p:nvPicPr>
-          <p:cNvPr id="96" name="Picture 95" descr="aws.png"/>
-          <p:cNvPicPr>
-            <a:picLocks noChangeAspect="1"/>
-          </p:cNvPicPr>
-          <p:nvPr/>
-        </p:nvPicPr>
-        <p:blipFill>
-          <a:blip r:embed="rId8"/>
-          <a:stretch>
-            <a:fillRect/>
-          </a:stretch>
-        </p:blipFill>
-        <p:spPr>
-          <a:xfrm>
-            <a:off x="10250140" y="8875764"/>
-            <a:ext cx="285574" cy="170710"/>
-          </a:xfrm>
-          <a:prstGeom prst="rect">
-            <a:avLst/>
-          </a:prstGeom>
-        </p:spPr>
-      </p:pic>
-      <p:sp>
-        <p:nvSpPr>
-          <p:cNvPr id="97" name="Rectangle 96"/>
-          <p:cNvSpPr/>
-          <p:nvPr/>
-        </p:nvSpPr>
-        <p:spPr>
-          <a:xfrm>
-            <a:off x="10965484" y="8412480"/>
-            <a:ext cx="3185769" cy="987551"/>
-          </a:xfrm>
-          <a:prstGeom prst="rect">
-            <a:avLst/>
-          </a:prstGeom>
-          <a:solidFill>
-            <a:srgbClr val="FFFFFF"/>
-          </a:solidFill>
-          <a:ln w="9525">
-            <a:solidFill>
-              <a:srgbClr val="D9D9D9"/>
-            </a:solidFill>
-          </a:ln>
-          <a:effectLst/>
-        </p:spPr>
-        <p:style>
-          <a:lnRef idx="1">
-            <a:schemeClr val="accent1"/>
-          </a:lnRef>
-          <a:fillRef idx="3">
-            <a:schemeClr val="accent1"/>
-          </a:fillRef>
-          <a:effectRef idx="2">
-            <a:schemeClr val="accent1"/>
-          </a:effectRef>
-          <a:fontRef idx="minor">
-            <a:schemeClr val="lt1"/>
-          </a:fontRef>
-        </p:style>
-        <p:txBody>
-          <a:bodyPr rtlCol="0" anchor="ctr"/>
-          <a:lstStyle/>
-          <a:p>
-            <a:pPr algn="ctr"/>
-          </a:p>
-        </p:txBody>
-      </p:sp>
-      <p:sp>
-        <p:nvSpPr>
-          <p:cNvPr id="98" name="TextBox 97"/>
-          <p:cNvSpPr txBox="1"/>
-          <p:nvPr/>
-        </p:nvSpPr>
-        <p:spPr>
-          <a:xfrm>
-            <a:off x="11166652" y="8503920"/>
-            <a:ext cx="2783433" cy="237744"/>
-          </a:xfrm>
-          <a:prstGeom prst="rect">
-            <a:avLst/>
-          </a:prstGeom>
-          <a:noFill/>
-        </p:spPr>
-        <p:txBody>
-          <a:bodyPr wrap="square" anchor="t" lIns="0" rIns="0" tIns="0" bIns="0">
-            <a:spAutoFit/>
-          </a:bodyPr>
-          <a:lstStyle/>
-          <a:p>
-            <a:pPr algn="l">
-              <a:lnSpc>
-                <a:spcPct val="112000"/>
-              </a:lnSpc>
-            </a:pPr>
-            <a:r>
-              <a:rPr sz="1425" b="1">
-                <a:solidFill>
-                  <a:srgbClr val="1A1A1A"/>
-                </a:solidFill>
-                <a:latin typeface="Arial"/>
-                <a:ea typeface="Arial"/>
-              </a:rPr>
-              <a:t>실증 · 채널</a:t>
-            </a:r>
-          </a:p>
-        </p:txBody>
-      </p:sp>
-      <p:sp>
-        <p:nvSpPr>
-          <p:cNvPr id="99" name="Rectangle 98"/>
-          <p:cNvSpPr/>
-          <p:nvPr/>
-        </p:nvSpPr>
-        <p:spPr>
-          <a:xfrm>
-            <a:off x="11166652" y="8833104"/>
-            <a:ext cx="861821" cy="256031"/>
-          </a:xfrm>
-          <a:prstGeom prst="rect">
-            <a:avLst/>
-          </a:prstGeom>
-          <a:solidFill>
-            <a:srgbClr val="FFFFFF"/>
-          </a:solidFill>
-          <a:ln w="9525">
-            <a:solidFill>
-              <a:srgbClr val="8A8A8A"/>
-            </a:solidFill>
-          </a:ln>
-          <a:effectLst/>
-        </p:spPr>
-        <p:style>
-          <a:lnRef idx="1">
-            <a:schemeClr val="accent1"/>
-          </a:lnRef>
-          <a:fillRef idx="3">
-            <a:schemeClr val="accent1"/>
-          </a:fillRef>
-          <a:effectRef idx="2">
-            <a:schemeClr val="accent1"/>
-          </a:effectRef>
-          <a:fontRef idx="minor">
-            <a:schemeClr val="lt1"/>
-          </a:fontRef>
-        </p:style>
-        <p:txBody>
-          <a:bodyPr rtlCol="0" anchor="ctr"/>
-          <a:lstStyle/>
-          <a:p>
-            <a:pPr algn="ctr"/>
-          </a:p>
-        </p:txBody>
-      </p:sp>
-      <p:sp>
-        <p:nvSpPr>
-          <p:cNvPr id="100" name="TextBox 99"/>
-          <p:cNvSpPr txBox="1"/>
-          <p:nvPr/>
-        </p:nvSpPr>
-        <p:spPr>
-          <a:xfrm>
-            <a:off x="11166652" y="8833104"/>
-            <a:ext cx="861821" cy="256031"/>
-          </a:xfrm>
-          <a:prstGeom prst="rect">
-            <a:avLst/>
-          </a:prstGeom>
-          <a:noFill/>
-        </p:spPr>
-        <p:txBody>
-          <a:bodyPr wrap="square" anchor="ctr" lIns="0" rIns="0" tIns="0" bIns="0">
-            <a:spAutoFit/>
-          </a:bodyPr>
-          <a:lstStyle/>
-          <a:p>
-            <a:pPr algn="ctr">
-              <a:lnSpc>
-                <a:spcPct val="112000"/>
-              </a:lnSpc>
-            </a:pPr>
-            <a:r>
-              <a:rPr sz="1250" b="1">
-                <a:solidFill>
-                  <a:srgbClr val="1A1A1A"/>
-                </a:solidFill>
-                <a:latin typeface="Arial"/>
-                <a:ea typeface="Arial"/>
-              </a:rPr>
-              <a:t>VAST Data</a:t>
-            </a:r>
-          </a:p>
-        </p:txBody>
-      </p:sp>
-      <p:sp>
-        <p:nvSpPr>
-          <p:cNvPr id="101" name="Rectangle 100"/>
-          <p:cNvSpPr/>
-          <p:nvPr/>
-        </p:nvSpPr>
-        <p:spPr>
-          <a:xfrm>
-            <a:off x="12174778" y="8833104"/>
-            <a:ext cx="531114" cy="256031"/>
-          </a:xfrm>
-          <a:prstGeom prst="rect">
-            <a:avLst/>
-          </a:prstGeom>
-          <a:solidFill>
-            <a:srgbClr val="FFFFFF"/>
-          </a:solidFill>
-          <a:ln w="9525">
-            <a:solidFill>
-              <a:srgbClr val="8A8A8A"/>
-            </a:solidFill>
-          </a:ln>
-          <a:effectLst/>
-        </p:spPr>
-        <p:style>
-          <a:lnRef idx="1">
-            <a:schemeClr val="accent1"/>
-          </a:lnRef>
-          <a:fillRef idx="3">
-            <a:schemeClr val="accent1"/>
-          </a:fillRef>
-          <a:effectRef idx="2">
-            <a:schemeClr val="accent1"/>
-          </a:effectRef>
-          <a:fontRef idx="minor">
-            <a:schemeClr val="lt1"/>
-          </a:fontRef>
-        </p:style>
-        <p:txBody>
-          <a:bodyPr rtlCol="0" anchor="ctr"/>
-          <a:lstStyle/>
-          <a:p>
-            <a:pPr algn="ctr"/>
-          </a:p>
-        </p:txBody>
-      </p:sp>
-      <p:sp>
-        <p:nvSpPr>
-          <p:cNvPr id="102" name="TextBox 101"/>
-          <p:cNvSpPr txBox="1"/>
-          <p:nvPr/>
-        </p:nvSpPr>
-        <p:spPr>
-          <a:xfrm>
-            <a:off x="12174778" y="8833104"/>
-            <a:ext cx="531114" cy="256031"/>
-          </a:xfrm>
-          <a:prstGeom prst="rect">
-            <a:avLst/>
-          </a:prstGeom>
-          <a:noFill/>
-        </p:spPr>
-        <p:txBody>
-          <a:bodyPr wrap="square" anchor="ctr" lIns="0" rIns="0" tIns="0" bIns="0">
-            <a:spAutoFit/>
-          </a:bodyPr>
-          <a:lstStyle/>
-          <a:p>
-            <a:pPr algn="ctr">
-              <a:lnSpc>
-                <a:spcPct val="112000"/>
-              </a:lnSpc>
-            </a:pPr>
-            <a:r>
-              <a:rPr sz="1250" b="1">
-                <a:solidFill>
-                  <a:srgbClr val="1A1A1A"/>
-                </a:solidFill>
-                <a:latin typeface="Arial"/>
-                <a:ea typeface="Arial"/>
-              </a:rPr>
-              <a:t>DDN</a:t>
-            </a:r>
-          </a:p>
-        </p:txBody>
-      </p:sp>
-      <p:sp>
-        <p:nvSpPr>
-          <p:cNvPr id="103" name="Rectangle 102"/>
-          <p:cNvSpPr/>
-          <p:nvPr/>
-        </p:nvSpPr>
-        <p:spPr>
-          <a:xfrm>
-            <a:off x="12852196" y="8833104"/>
-            <a:ext cx="586232" cy="256031"/>
-          </a:xfrm>
-          <a:prstGeom prst="rect">
-            <a:avLst/>
-          </a:prstGeom>
-          <a:solidFill>
-            <a:srgbClr val="FFFFFF"/>
-          </a:solidFill>
-          <a:ln w="9525">
-            <a:solidFill>
-              <a:srgbClr val="8A8A8A"/>
-            </a:solidFill>
-          </a:ln>
-          <a:effectLst/>
-        </p:spPr>
-        <p:style>
-          <a:lnRef idx="1">
-            <a:schemeClr val="accent1"/>
-          </a:lnRef>
-          <a:fillRef idx="3">
-            <a:schemeClr val="accent1"/>
-          </a:fillRef>
-          <a:effectRef idx="2">
-            <a:schemeClr val="accent1"/>
-          </a:effectRef>
-          <a:fontRef idx="minor">
-            <a:schemeClr val="lt1"/>
-          </a:fontRef>
-        </p:style>
-        <p:txBody>
-          <a:bodyPr rtlCol="0" anchor="ctr"/>
-          <a:lstStyle/>
-          <a:p>
-            <a:pPr algn="ctr"/>
-          </a:p>
-        </p:txBody>
-      </p:sp>
-      <p:sp>
-        <p:nvSpPr>
-          <p:cNvPr id="104" name="TextBox 103"/>
-          <p:cNvSpPr txBox="1"/>
-          <p:nvPr/>
-        </p:nvSpPr>
-        <p:spPr>
-          <a:xfrm>
-            <a:off x="12852196" y="8833104"/>
-            <a:ext cx="586232" cy="256031"/>
-          </a:xfrm>
-          <a:prstGeom prst="rect">
-            <a:avLst/>
-          </a:prstGeom>
-          <a:noFill/>
-        </p:spPr>
-        <p:txBody>
-          <a:bodyPr wrap="square" anchor="ctr" lIns="0" rIns="0" tIns="0" bIns="0">
-            <a:spAutoFit/>
-          </a:bodyPr>
-          <a:lstStyle/>
-          <a:p>
-            <a:pPr algn="ctr">
-              <a:lnSpc>
-                <a:spcPct val="112000"/>
-              </a:lnSpc>
-            </a:pPr>
-            <a:r>
-              <a:rPr sz="1250" b="1">
-                <a:solidFill>
-                  <a:srgbClr val="1A1A1A"/>
-                </a:solidFill>
-                <a:latin typeface="Arial"/>
-                <a:ea typeface="Arial"/>
-              </a:rPr>
-              <a:t>WEKA</a:t>
-            </a:r>
-          </a:p>
-        </p:txBody>
-      </p:sp>
-      <p:sp>
-        <p:nvSpPr>
-          <p:cNvPr id="105" name="Rectangle 104"/>
-          <p:cNvSpPr/>
-          <p:nvPr/>
-        </p:nvSpPr>
-        <p:spPr>
-          <a:xfrm>
-            <a:off x="14379854" y="8412480"/>
-            <a:ext cx="3185769" cy="987551"/>
-          </a:xfrm>
-          <a:prstGeom prst="rect">
-            <a:avLst/>
-          </a:prstGeom>
-          <a:solidFill>
-            <a:srgbClr val="FFFFFF"/>
-          </a:solidFill>
-          <a:ln w="9525">
-            <a:solidFill>
-              <a:srgbClr val="D9D9D9"/>
-            </a:solidFill>
-          </a:ln>
-          <a:effectLst/>
-        </p:spPr>
-        <p:style>
-          <a:lnRef idx="1">
-            <a:schemeClr val="accent1"/>
-          </a:lnRef>
-          <a:fillRef idx="3">
-            <a:schemeClr val="accent1"/>
-          </a:fillRef>
-          <a:effectRef idx="2">
-            <a:schemeClr val="accent1"/>
-          </a:effectRef>
-          <a:fontRef idx="minor">
-            <a:schemeClr val="lt1"/>
-          </a:fontRef>
-        </p:style>
-        <p:txBody>
-          <a:bodyPr rtlCol="0" anchor="ctr"/>
-          <a:lstStyle/>
-          <a:p>
-            <a:pPr algn="ctr"/>
-          </a:p>
-        </p:txBody>
-      </p:sp>
-      <p:sp>
-        <p:nvSpPr>
-          <p:cNvPr id="106" name="TextBox 105"/>
-          <p:cNvSpPr txBox="1"/>
-          <p:nvPr/>
-        </p:nvSpPr>
-        <p:spPr>
-          <a:xfrm>
-            <a:off x="14581022" y="8503920"/>
-            <a:ext cx="2783433" cy="237744"/>
-          </a:xfrm>
-          <a:prstGeom prst="rect">
-            <a:avLst/>
-          </a:prstGeom>
-          <a:noFill/>
-        </p:spPr>
-        <p:txBody>
-          <a:bodyPr wrap="square" anchor="t" lIns="0" rIns="0" tIns="0" bIns="0">
-            <a:spAutoFit/>
-          </a:bodyPr>
-          <a:lstStyle/>
-          <a:p>
-            <a:pPr algn="l">
-              <a:lnSpc>
-                <a:spcPct val="112000"/>
-              </a:lnSpc>
-            </a:pPr>
-            <a:r>
-              <a:rPr sz="1425" b="1">
-                <a:solidFill>
-                  <a:srgbClr val="1A1A1A"/>
-                </a:solidFill>
-                <a:latin typeface="Arial"/>
-                <a:ea typeface="Arial"/>
-              </a:rPr>
-              <a:t>오픈소스</a:t>
-            </a:r>
-          </a:p>
-        </p:txBody>
-      </p:sp>
-      <p:sp>
-        <p:nvSpPr>
-          <p:cNvPr id="107" name="Rectangle 106"/>
-          <p:cNvSpPr/>
-          <p:nvPr/>
-        </p:nvSpPr>
-        <p:spPr>
-          <a:xfrm>
-            <a:off x="14581022" y="8833104"/>
-            <a:ext cx="734409" cy="256031"/>
-          </a:xfrm>
-          <a:prstGeom prst="rect">
-            <a:avLst/>
-          </a:prstGeom>
-          <a:solidFill>
-            <a:srgbClr val="FFFFFF"/>
-          </a:solidFill>
-          <a:ln w="9525">
-            <a:solidFill>
-              <a:srgbClr val="8A8A8A"/>
-            </a:solidFill>
-          </a:ln>
-          <a:effectLst/>
-        </p:spPr>
-        <p:style>
-          <a:lnRef idx="1">
-            <a:schemeClr val="accent1"/>
-          </a:lnRef>
-          <a:fillRef idx="3">
-            <a:schemeClr val="accent1"/>
-          </a:fillRef>
-          <a:effectRef idx="2">
-            <a:schemeClr val="accent1"/>
-          </a:effectRef>
-          <a:fontRef idx="minor">
-            <a:schemeClr val="lt1"/>
-          </a:fontRef>
-        </p:style>
-        <p:txBody>
-          <a:bodyPr rtlCol="0" anchor="ctr"/>
-          <a:lstStyle/>
-          <a:p>
-            <a:pPr algn="ctr"/>
-          </a:p>
-        </p:txBody>
-      </p:sp>
-      <p:sp>
-        <p:nvSpPr>
-          <p:cNvPr id="108" name="TextBox 107"/>
-          <p:cNvSpPr txBox="1"/>
-          <p:nvPr/>
-        </p:nvSpPr>
-        <p:spPr>
-          <a:xfrm>
-            <a:off x="14581022" y="8833104"/>
-            <a:ext cx="734409" cy="256031"/>
-          </a:xfrm>
-          <a:prstGeom prst="rect">
-            <a:avLst/>
-          </a:prstGeom>
-          <a:noFill/>
-        </p:spPr>
-        <p:txBody>
-          <a:bodyPr wrap="square" anchor="ctr" lIns="0" rIns="0" tIns="0" bIns="0">
-            <a:spAutoFit/>
-          </a:bodyPr>
-          <a:lstStyle/>
-          <a:p>
-            <a:pPr algn="ctr">
-              <a:lnSpc>
-                <a:spcPct val="112000"/>
-              </a:lnSpc>
-            </a:pPr>
-            <a:r>
-              <a:rPr sz="1194" b="1">
-                <a:solidFill>
-                  <a:srgbClr val="1A1A1A"/>
-                </a:solidFill>
-                <a:latin typeface="Arial"/>
-                <a:ea typeface="Arial"/>
-              </a:rPr>
-              <a:t>LMCache</a:t>
-            </a:r>
-          </a:p>
-        </p:txBody>
-      </p:sp>
-      <p:sp>
-        <p:nvSpPr>
-          <p:cNvPr id="109" name="Rectangle 108"/>
-          <p:cNvSpPr/>
-          <p:nvPr/>
-        </p:nvSpPr>
-        <p:spPr>
-          <a:xfrm>
-            <a:off x="15455221" y="8833104"/>
-            <a:ext cx="787073" cy="256031"/>
-          </a:xfrm>
-          <a:prstGeom prst="rect">
-            <a:avLst/>
-          </a:prstGeom>
-          <a:solidFill>
-            <a:srgbClr val="FFFFFF"/>
-          </a:solidFill>
-          <a:ln w="9525">
-            <a:solidFill>
-              <a:srgbClr val="8A8A8A"/>
-            </a:solidFill>
-          </a:ln>
-          <a:effectLst/>
-        </p:spPr>
-        <p:style>
-          <a:lnRef idx="1">
-            <a:schemeClr val="accent1"/>
-          </a:lnRef>
-          <a:fillRef idx="3">
-            <a:schemeClr val="accent1"/>
-          </a:fillRef>
-          <a:effectRef idx="2">
-            <a:schemeClr val="accent1"/>
-          </a:effectRef>
-          <a:fontRef idx="minor">
-            <a:schemeClr val="lt1"/>
-          </a:fontRef>
-        </p:style>
-        <p:txBody>
-          <a:bodyPr rtlCol="0" anchor="ctr"/>
-          <a:lstStyle/>
-          <a:p>
-            <a:pPr algn="ctr"/>
-          </a:p>
-        </p:txBody>
-      </p:sp>
-      <p:sp>
-        <p:nvSpPr>
-          <p:cNvPr id="110" name="TextBox 109"/>
-          <p:cNvSpPr txBox="1"/>
-          <p:nvPr/>
-        </p:nvSpPr>
-        <p:spPr>
-          <a:xfrm>
-            <a:off x="15455221" y="8833104"/>
-            <a:ext cx="787073" cy="256031"/>
-          </a:xfrm>
-          <a:prstGeom prst="rect">
-            <a:avLst/>
-          </a:prstGeom>
-          <a:noFill/>
-        </p:spPr>
-        <p:txBody>
-          <a:bodyPr wrap="square" anchor="ctr" lIns="0" rIns="0" tIns="0" bIns="0">
-            <a:spAutoFit/>
-          </a:bodyPr>
-          <a:lstStyle/>
-          <a:p>
-            <a:pPr algn="ctr">
-              <a:lnSpc>
-                <a:spcPct val="112000"/>
-              </a:lnSpc>
-            </a:pPr>
-            <a:r>
-              <a:rPr sz="1194" b="1">
-                <a:solidFill>
-                  <a:srgbClr val="1A1A1A"/>
-                </a:solidFill>
-                <a:latin typeface="Arial"/>
-                <a:ea typeface="Arial"/>
-              </a:rPr>
-              <a:t>Mooncake</a:t>
-            </a:r>
-          </a:p>
-        </p:txBody>
-      </p:sp>
-      <p:sp>
-        <p:nvSpPr>
-          <p:cNvPr id="111" name="Rectangle 110"/>
-          <p:cNvSpPr/>
-          <p:nvPr/>
-        </p:nvSpPr>
-        <p:spPr>
-          <a:xfrm>
-            <a:off x="16382085" y="8833104"/>
-            <a:ext cx="681744" cy="256031"/>
-          </a:xfrm>
-          <a:prstGeom prst="rect">
-            <a:avLst/>
-          </a:prstGeom>
-          <a:solidFill>
-            <a:srgbClr val="FFFFFF"/>
-          </a:solidFill>
-          <a:ln w="9525">
-            <a:solidFill>
-              <a:srgbClr val="8A8A8A"/>
-            </a:solidFill>
-          </a:ln>
-          <a:effectLst/>
-        </p:spPr>
-        <p:style>
-          <a:lnRef idx="1">
-            <a:schemeClr val="accent1"/>
-          </a:lnRef>
-          <a:fillRef idx="3">
-            <a:schemeClr val="accent1"/>
-          </a:fillRef>
-          <a:effectRef idx="2">
-            <a:schemeClr val="accent1"/>
-          </a:effectRef>
-          <a:fontRef idx="minor">
-            <a:schemeClr val="lt1"/>
-          </a:fontRef>
-        </p:style>
-        <p:txBody>
-          <a:bodyPr rtlCol="0" anchor="ctr"/>
-          <a:lstStyle/>
-          <a:p>
-            <a:pPr algn="ctr"/>
-          </a:p>
-        </p:txBody>
-      </p:sp>
-      <p:sp>
-        <p:nvSpPr>
-          <p:cNvPr id="112" name="TextBox 111"/>
-          <p:cNvSpPr txBox="1"/>
-          <p:nvPr/>
-        </p:nvSpPr>
-        <p:spPr>
-          <a:xfrm>
-            <a:off x="16382085" y="8833104"/>
-            <a:ext cx="681744" cy="256031"/>
-          </a:xfrm>
-          <a:prstGeom prst="rect">
-            <a:avLst/>
-          </a:prstGeom>
-          <a:noFill/>
-        </p:spPr>
-        <p:txBody>
-          <a:bodyPr wrap="square" anchor="ctr" lIns="0" rIns="0" tIns="0" bIns="0">
-            <a:spAutoFit/>
-          </a:bodyPr>
-          <a:lstStyle/>
-          <a:p>
-            <a:pPr algn="ctr">
-              <a:lnSpc>
-                <a:spcPct val="112000"/>
-              </a:lnSpc>
-            </a:pPr>
-            <a:r>
-              <a:rPr sz="1194" b="1">
-                <a:solidFill>
-                  <a:srgbClr val="1A1A1A"/>
-                </a:solidFill>
-                <a:latin typeface="Arial"/>
-                <a:ea typeface="Arial"/>
-              </a:rPr>
-              <a:t>FlexKV</a:t>
-            </a:r>
-          </a:p>
-        </p:txBody>
-      </p:sp>
-      <p:pic>
-        <p:nvPicPr>
-          <p:cNvPr id="113" name="Picture 112" descr="vllm.png"/>
-          <p:cNvPicPr>
-            <a:picLocks noChangeAspect="1"/>
-          </p:cNvPicPr>
-          <p:nvPr/>
-        </p:nvPicPr>
-        <p:blipFill>
-          <a:blip r:embed="rId9"/>
-          <a:stretch>
-            <a:fillRect/>
-          </a:stretch>
-        </p:blipFill>
-        <p:spPr>
-          <a:xfrm>
-            <a:off x="17203621" y="8856277"/>
-            <a:ext cx="209685" cy="209685"/>
-          </a:xfrm>
-          <a:prstGeom prst="rect">
-            <a:avLst/>
-          </a:prstGeom>
-        </p:spPr>
-      </p:pic>
-      <p:sp>
-        <p:nvSpPr>
-          <p:cNvPr id="114" name="TextBox 113"/>
-          <p:cNvSpPr txBox="1"/>
-          <p:nvPr/>
-        </p:nvSpPr>
-        <p:spPr>
-          <a:xfrm>
-            <a:off x="722376" y="9592056"/>
-            <a:ext cx="14264640" cy="310896"/>
-          </a:xfrm>
-          <a:prstGeom prst="rect">
-            <a:avLst/>
-          </a:prstGeom>
-          <a:noFill/>
-        </p:spPr>
-        <p:txBody>
-          <a:bodyPr wrap="square" anchor="t" lIns="0" rIns="0" tIns="0" bIns="0">
-            <a:spAutoFit/>
-          </a:bodyPr>
-          <a:lstStyle/>
-          <a:p>
-            <a:pPr algn="l">
-              <a:lnSpc>
-                <a:spcPct val="112000"/>
-              </a:lnSpc>
-            </a:pPr>
-            <a:r>
               <a:rPr sz="1600" b="0">
                 <a:solidFill>
                   <a:srgbClr val="555555"/>
@@ -10914,14 +10042,14 @@
                 <a:latin typeface="Arial"/>
                 <a:ea typeface="Arial"/>
               </a:rPr>
-              <a:t>출처: StorageReview·Solidigm·Kioxia 스펙(DWPD), ScaleFlux 2026-07(RUH 200+), GitHub README 확인(LMCache·Mooncake·FlexKV·3FS), CacheLib FDP 문서(WAF) · 로고는 식별 표시</a:t>
-            </a:r>
-          </a:p>
-        </p:txBody>
-      </p:sp>
-      <p:sp>
-        <p:nvSpPr>
-          <p:cNvPr id="115" name="TextBox 114"/>
+              <a:t>출처: StorageReview·Solidigm·Kioxia 스펙(DWPD), ScaleFlux 2026-07(RUH 200+), GitHub README 확인(LMCache·Mooncake·FlexKV·3FS·xNVMe), CacheLib FDP 문서(WAF), Linux 6.16·XFS 패치, NVIDIA CMX 문서</a:t>
+            </a:r>
+          </a:p>
+        </p:txBody>
+      </p:sp>
+      <p:sp>
+        <p:nvSpPr>
+          <p:cNvPr id="84" name="TextBox 83"/>
           <p:cNvSpPr txBox="1"/>
           <p:nvPr/>
         </p:nvSpPr>
@@ -11132,7 +10260,7 @@
                 <a:latin typeface="Arial"/>
                 <a:ea typeface="Arial"/>
               </a:rPr>
-              <a:t>고객의 워크로드를 받고 고객 시스템 안으로 들어갑니다. 조직·보상·계약이 그 길을 엽니다</a:t>
+              <a:t>FDE로 고객 시스템 안에 들어가고, 전략적 협약으로 워크로드를 받습니다. 선례는 이미 있습니다</a:t>
             </a:r>
           </a:p>
         </p:txBody>
@@ -11172,7 +10300,7 @@
                 <a:latin typeface="Arial"/>
                 <a:ea typeface="Arial"/>
               </a:rPr>
-              <a:t>실행의 목표는 두 가지입니다. 다섯 축이 그 길을 열고, 90일·1년·3년으로 갑니다.</a:t>
+              <a:t>Palantir가 만든 FDE와 Micron이 Anthropic과 맺은 SCA가 두 목표의 선례입니다. 다섯 축이 길을 열고 90일·1년·3년으로 갑니다.</a:t>
             </a:r>
           </a:p>
         </p:txBody>
@@ -11230,7 +10358,7 @@
         <p:spPr>
           <a:xfrm>
             <a:off x="722376" y="2560320"/>
-            <a:ext cx="3611880" cy="3749039"/>
+            <a:ext cx="3520440" cy="4133087"/>
           </a:xfrm>
           <a:prstGeom prst="rect">
             <a:avLst/>
@@ -11276,7 +10404,7 @@
         <p:spPr>
           <a:xfrm>
             <a:off x="1033272" y="2761488"/>
-            <a:ext cx="2990088" cy="292608"/>
+            <a:ext cx="2898648" cy="292608"/>
           </a:xfrm>
           <a:prstGeom prst="rect">
             <a:avLst/>
@@ -11316,7 +10444,7 @@
         <p:spPr>
           <a:xfrm>
             <a:off x="1033272" y="3072384"/>
-            <a:ext cx="2990088" cy="237744"/>
+            <a:ext cx="2898648" cy="237744"/>
           </a:xfrm>
           <a:prstGeom prst="rect">
             <a:avLst/>
@@ -11355,7 +10483,7 @@
         </p:nvSpPr>
         <p:spPr>
           <a:xfrm>
-            <a:off x="1033272" y="3557015"/>
+            <a:off x="1033272" y="3593591"/>
             <a:ext cx="146304" cy="146304"/>
           </a:xfrm>
           <a:prstGeom prst="rect">
@@ -11399,8 +10527,8 @@
         </p:nvSpPr>
         <p:spPr>
           <a:xfrm>
-            <a:off x="1289304" y="3456432"/>
-            <a:ext cx="2734056" cy="347472"/>
+            <a:off x="1289304" y="3493008"/>
+            <a:ext cx="2642616" cy="347472"/>
           </a:xfrm>
           <a:prstGeom prst="rect">
             <a:avLst/>
@@ -11439,7 +10567,7 @@
         </p:nvSpPr>
         <p:spPr>
           <a:xfrm>
-            <a:off x="1033272" y="4123944"/>
+            <a:off x="1033272" y="4178808"/>
             <a:ext cx="146304" cy="146304"/>
           </a:xfrm>
           <a:prstGeom prst="rect">
@@ -11483,8 +10611,8 @@
         </p:nvSpPr>
         <p:spPr>
           <a:xfrm>
-            <a:off x="1289304" y="4023359"/>
-            <a:ext cx="2734056" cy="347472"/>
+            <a:off x="1289304" y="4078224"/>
+            <a:ext cx="2642616" cy="347472"/>
           </a:xfrm>
           <a:prstGeom prst="rect">
             <a:avLst/>
@@ -11510,7 +10638,7 @@
                 <a:latin typeface="Arial"/>
                 <a:ea typeface="Arial"/>
               </a:rPr>
-              <a:t>상주 엔지니어(Co-Design Pod)</a:t>
+              <a:t>FDE(고객 상주 엔지니어)</a:t>
             </a:r>
           </a:p>
         </p:txBody>
@@ -11523,7 +10651,7 @@
         </p:nvSpPr>
         <p:spPr>
           <a:xfrm>
-            <a:off x="1033272" y="4690872"/>
+            <a:off x="1033272" y="4764024"/>
             <a:ext cx="146304" cy="146304"/>
           </a:xfrm>
           <a:prstGeom prst="rect">
@@ -11567,8 +10695,8 @@
         </p:nvSpPr>
         <p:spPr>
           <a:xfrm>
-            <a:off x="1289304" y="4590288"/>
-            <a:ext cx="2734056" cy="347472"/>
+            <a:off x="1289304" y="4663440"/>
+            <a:ext cx="2642616" cy="347472"/>
           </a:xfrm>
           <a:prstGeom prst="rect">
             <a:avLst/>
@@ -11607,7 +10735,7 @@
         </p:nvSpPr>
         <p:spPr>
           <a:xfrm>
-            <a:off x="1033272" y="5257800"/>
+            <a:off x="1033272" y="5349240"/>
             <a:ext cx="146304" cy="146304"/>
           </a:xfrm>
           <a:prstGeom prst="rect">
@@ -11651,8 +10779,8 @@
         </p:nvSpPr>
         <p:spPr>
           <a:xfrm>
-            <a:off x="1289304" y="5157216"/>
-            <a:ext cx="2734056" cy="347472"/>
+            <a:off x="1289304" y="5248655"/>
+            <a:ext cx="2642616" cy="347472"/>
           </a:xfrm>
           <a:prstGeom prst="rect">
             <a:avLst/>
@@ -11691,8 +10819,8 @@
         </p:nvSpPr>
         <p:spPr>
           <a:xfrm>
-            <a:off x="1033272" y="5596127"/>
-            <a:ext cx="2990088" cy="10972"/>
+            <a:off x="1033272" y="5961888"/>
+            <a:ext cx="2898648" cy="10972"/>
           </a:xfrm>
           <a:prstGeom prst="rect">
             <a:avLst/>
@@ -11735,8 +10863,8 @@
         </p:nvSpPr>
         <p:spPr>
           <a:xfrm>
-            <a:off x="1033272" y="5687568"/>
-            <a:ext cx="2990088" cy="457200"/>
+            <a:off x="1033272" y="6053327"/>
+            <a:ext cx="2898648" cy="457200"/>
           </a:xfrm>
           <a:prstGeom prst="rect">
             <a:avLst/>
@@ -11751,7 +10879,7 @@
           <a:p>
             <a:pPr algn="l">
               <a:lnSpc>
-                <a:spcPct val="112000"/>
+                <a:spcPct val="104000"/>
               </a:lnSpc>
             </a:pPr>
             <a:r>
@@ -11762,7 +10890,7 @@
                 <a:latin typeface="Arial"/>
                 <a:ea typeface="Arial"/>
               </a:rPr>
-              <a:t>자회사 · Pod · 별도 보상이 뒤를 받칩니다</a:t>
+              <a:t>자회사 · 별도 보상 · 업스트림 문화가 뒤를 받칩니다</a:t>
             </a:r>
           </a:p>
         </p:txBody>
@@ -11775,8 +10903,8 @@
         </p:nvSpPr>
         <p:spPr>
           <a:xfrm>
-            <a:off x="13578840" y="2560320"/>
-            <a:ext cx="3986784" cy="3749039"/>
+            <a:off x="13633704" y="2560320"/>
+            <a:ext cx="3931920" cy="4133087"/>
           </a:xfrm>
           <a:prstGeom prst="rect">
             <a:avLst/>
@@ -11821,8 +10949,8 @@
         </p:nvSpPr>
         <p:spPr>
           <a:xfrm>
-            <a:off x="13889736" y="2761488"/>
-            <a:ext cx="3364992" cy="292608"/>
+            <a:off x="13944600" y="2761488"/>
+            <a:ext cx="3310127" cy="292608"/>
           </a:xfrm>
           <a:prstGeom prst="rect">
             <a:avLst/>
@@ -11861,8 +10989,8 @@
         </p:nvSpPr>
         <p:spPr>
           <a:xfrm>
-            <a:off x="13889736" y="3072384"/>
-            <a:ext cx="3364992" cy="237744"/>
+            <a:off x="13944600" y="3072384"/>
+            <a:ext cx="3310127" cy="237744"/>
           </a:xfrm>
           <a:prstGeom prst="rect">
             <a:avLst/>
@@ -11901,8 +11029,8 @@
         </p:nvSpPr>
         <p:spPr>
           <a:xfrm>
-            <a:off x="13889736" y="3456432"/>
-            <a:ext cx="2395728" cy="457200"/>
+            <a:off x="13944600" y="3456432"/>
+            <a:ext cx="2340864" cy="457200"/>
           </a:xfrm>
           <a:prstGeom prst="rect">
             <a:avLst/>
@@ -11947,8 +11075,8 @@
         </p:nvSpPr>
         <p:spPr>
           <a:xfrm>
-            <a:off x="14026896" y="3456432"/>
-            <a:ext cx="2121408" cy="457200"/>
+            <a:off x="14081760" y="3456432"/>
+            <a:ext cx="2066544" cy="457200"/>
           </a:xfrm>
           <a:prstGeom prst="rect">
             <a:avLst/>
@@ -11987,8 +11115,8 @@
         </p:nvSpPr>
         <p:spPr>
           <a:xfrm>
-            <a:off x="13889736" y="3995928"/>
-            <a:ext cx="2395728" cy="457200"/>
+            <a:off x="13944600" y="3995928"/>
+            <a:ext cx="2340864" cy="457200"/>
           </a:xfrm>
           <a:prstGeom prst="rect">
             <a:avLst/>
@@ -12031,8 +11159,8 @@
         </p:nvSpPr>
         <p:spPr>
           <a:xfrm>
-            <a:off x="14026896" y="3995928"/>
-            <a:ext cx="2121408" cy="457200"/>
+            <a:off x="14081760" y="3995928"/>
+            <a:ext cx="2066544" cy="457200"/>
           </a:xfrm>
           <a:prstGeom prst="rect">
             <a:avLst/>
@@ -12071,8 +11199,8 @@
         </p:nvSpPr>
         <p:spPr>
           <a:xfrm>
-            <a:off x="13889736" y="4535424"/>
-            <a:ext cx="2395728" cy="457200"/>
+            <a:off x="13944600" y="4535424"/>
+            <a:ext cx="2340864" cy="457200"/>
           </a:xfrm>
           <a:prstGeom prst="rect">
             <a:avLst/>
@@ -12115,8 +11243,8 @@
         </p:nvSpPr>
         <p:spPr>
           <a:xfrm>
-            <a:off x="14026896" y="4535424"/>
-            <a:ext cx="2121408" cy="457200"/>
+            <a:off x="14081760" y="4535424"/>
+            <a:ext cx="2066544" cy="457200"/>
           </a:xfrm>
           <a:prstGeom prst="rect">
             <a:avLst/>
@@ -12155,8 +11283,8 @@
         </p:nvSpPr>
         <p:spPr>
           <a:xfrm>
-            <a:off x="13889736" y="5074920"/>
-            <a:ext cx="2395728" cy="457200"/>
+            <a:off x="13944600" y="5074920"/>
+            <a:ext cx="2340864" cy="457200"/>
           </a:xfrm>
           <a:prstGeom prst="rect">
             <a:avLst/>
@@ -12199,8 +11327,8 @@
         </p:nvSpPr>
         <p:spPr>
           <a:xfrm>
-            <a:off x="14026896" y="5074920"/>
-            <a:ext cx="2121408" cy="457200"/>
+            <a:off x="14081760" y="5074920"/>
+            <a:ext cx="2066544" cy="457200"/>
           </a:xfrm>
           <a:prstGeom prst="rect">
             <a:avLst/>
@@ -12283,7 +11411,7 @@
         </p:nvSpPr>
         <p:spPr>
           <a:xfrm>
-            <a:off x="16431768" y="4200387"/>
+            <a:off x="16431767" y="4200387"/>
             <a:ext cx="281635" cy="225308"/>
           </a:xfrm>
           <a:prstGeom prst="round2SameRect">
@@ -12330,8 +11458,8 @@
         </p:nvSpPr>
         <p:spPr>
           <a:xfrm>
-            <a:off x="16804843" y="3995928"/>
-            <a:ext cx="685800" cy="457200"/>
+            <a:off x="16786555" y="3995928"/>
+            <a:ext cx="731520" cy="457200"/>
           </a:xfrm>
           <a:prstGeom prst="rect">
             <a:avLst/>
@@ -12357,7 +11485,7 @@
                 <a:latin typeface="Arial"/>
                 <a:ea typeface="Arial"/>
               </a:rPr>
-              <a:t>상주</a:t>
+              <a:t>FDE</a:t>
             </a:r>
           </a:p>
         </p:txBody>
@@ -12370,7 +11498,7 @@
         </p:nvSpPr>
         <p:spPr>
           <a:xfrm>
-            <a:off x="16431768" y="4535424"/>
+            <a:off x="16431767" y="4535424"/>
             <a:ext cx="960120" cy="457200"/>
           </a:xfrm>
           <a:prstGeom prst="rect">
@@ -12402,21 +11530,117 @@
           </a:p>
         </p:txBody>
       </p:sp>
-      <p:sp>
-        <p:nvSpPr>
-          <p:cNvPr id="36" name="Right Arrow 35"/>
+      <p:pic>
+        <p:nvPicPr>
+          <p:cNvPr id="36" name="Picture 35" descr="anthropic.png"/>
+          <p:cNvPicPr>
+            <a:picLocks noChangeAspect="1"/>
+          </p:cNvPicPr>
+          <p:nvPr/>
+        </p:nvPicPr>
+        <p:blipFill>
+          <a:blip r:embed="rId2"/>
+          <a:stretch>
+            <a:fillRect/>
+          </a:stretch>
+        </p:blipFill>
+        <p:spPr>
+          <a:xfrm>
+            <a:off x="13944600" y="6170781"/>
+            <a:ext cx="1154585" cy="130853"/>
+          </a:xfrm>
+          <a:prstGeom prst="rect">
+            <a:avLst/>
+          </a:prstGeom>
+        </p:spPr>
+      </p:pic>
+      <p:pic>
+        <p:nvPicPr>
+          <p:cNvPr id="37" name="Picture 36" descr="openai.png"/>
+          <p:cNvPicPr>
+            <a:picLocks noChangeAspect="1"/>
+          </p:cNvPicPr>
+          <p:nvPr/>
+        </p:nvPicPr>
+        <p:blipFill>
+          <a:blip r:embed="rId3"/>
+          <a:stretch>
+            <a:fillRect/>
+          </a:stretch>
+        </p:blipFill>
+        <p:spPr>
+          <a:xfrm>
+            <a:off x="15197326" y="6170781"/>
+            <a:ext cx="532886" cy="130853"/>
+          </a:xfrm>
+          <a:prstGeom prst="rect">
+            <a:avLst/>
+          </a:prstGeom>
+        </p:spPr>
+      </p:pic>
+      <p:pic>
+        <p:nvPicPr>
+          <p:cNvPr id="38" name="Picture 37" descr="nvidia.png"/>
+          <p:cNvPicPr>
+            <a:picLocks noChangeAspect="1"/>
+          </p:cNvPicPr>
+          <p:nvPr/>
+        </p:nvPicPr>
+        <p:blipFill>
+          <a:blip r:embed="rId4"/>
+          <a:stretch>
+            <a:fillRect/>
+          </a:stretch>
+        </p:blipFill>
+        <p:spPr>
+          <a:xfrm>
+            <a:off x="15828351" y="6170781"/>
+            <a:ext cx="684696" cy="130853"/>
+          </a:xfrm>
+          <a:prstGeom prst="rect">
+            <a:avLst/>
+          </a:prstGeom>
+        </p:spPr>
+      </p:pic>
+      <p:pic>
+        <p:nvPicPr>
+          <p:cNvPr id="39" name="Picture 38" descr="meta.png"/>
+          <p:cNvPicPr>
+            <a:picLocks noChangeAspect="1"/>
+          </p:cNvPicPr>
+          <p:nvPr/>
+        </p:nvPicPr>
+        <p:blipFill>
+          <a:blip r:embed="rId5"/>
+          <a:stretch>
+            <a:fillRect/>
+          </a:stretch>
+        </p:blipFill>
+        <p:spPr>
+          <a:xfrm>
+            <a:off x="16611188" y="6170781"/>
+            <a:ext cx="643539" cy="130853"/>
+          </a:xfrm>
+          <a:prstGeom prst="rect">
+            <a:avLst/>
+          </a:prstGeom>
+        </p:spPr>
+      </p:pic>
+      <p:sp>
+        <p:nvSpPr>
+          <p:cNvPr id="40" name="Right Arrow 39"/>
           <p:cNvSpPr/>
           <p:nvPr/>
         </p:nvSpPr>
         <p:spPr>
           <a:xfrm>
-            <a:off x="4608576" y="2834639"/>
-            <a:ext cx="8695944" cy="932688"/>
+            <a:off x="4498848" y="2670048"/>
+            <a:ext cx="8878824" cy="841248"/>
           </a:xfrm>
           <a:prstGeom prst="rightArrow">
             <a:avLst>
-              <a:gd name="adj1" fmla="val 78000"/>
-              <a:gd name="adj2" fmla="val 30000"/>
+              <a:gd name="adj1" fmla="val 80000"/>
+              <a:gd name="adj2" fmla="val 26000"/>
             </a:avLst>
           </a:prstGeom>
           <a:solidFill>
@@ -12451,14 +11675,14 @@
       </p:sp>
       <p:sp>
         <p:nvSpPr>
-          <p:cNvPr id="37" name="TextBox 36"/>
+          <p:cNvPr id="41" name="TextBox 40"/>
           <p:cNvSpPr txBox="1"/>
           <p:nvPr/>
         </p:nvSpPr>
         <p:spPr>
           <a:xfrm>
-            <a:off x="5020056" y="2834639"/>
-            <a:ext cx="7232904" cy="932688"/>
+            <a:off x="4864608" y="2670048"/>
+            <a:ext cx="7598664" cy="841248"/>
           </a:xfrm>
           <a:prstGeom prst="rect">
             <a:avLst/>
@@ -12473,60 +11697,58 @@
           <a:p>
             <a:pPr algn="l">
               <a:lnSpc>
-                <a:spcPct val="108000"/>
-              </a:lnSpc>
-            </a:pPr>
-            <a:r>
-              <a:rPr sz="1800" b="1">
+                <a:spcPct val="106000"/>
+              </a:lnSpc>
+            </a:pPr>
+            <a:r>
+              <a:rPr sz="1725" b="1">
                 <a:solidFill>
                   <a:srgbClr val="FFFFFF"/>
                 </a:solidFill>
                 <a:latin typeface="Arial"/>
                 <a:ea typeface="Arial"/>
               </a:rPr>
-              <a:t>① 고객 시스템 안으로 들어간다</a:t>
+              <a:t>① FDE가 고객 시스템 안으로 들어간다</a:t>
             </a:r>
           </a:p>
           <a:p>
             <a:pPr algn="l">
               <a:lnSpc>
-                <a:spcPct val="108000"/>
-              </a:lnSpc>
-            </a:pPr>
-            <a:r>
-              <a:rPr sz="1425" b="0">
+                <a:spcPct val="106000"/>
+              </a:lnSpc>
+            </a:pPr>
+            <a:r>
+              <a:rPr sz="1350" b="0">
                 <a:solidFill>
                   <a:srgbClr val="FFFFFF"/>
                 </a:solidFill>
                 <a:latin typeface="Arial"/>
                 <a:ea typeface="Arial"/>
               </a:rPr>
-              <a:t>상주 엔지니어 · 업스트림 코드 · 수명 보증 · 자본</a:t>
-            </a:r>
-          </a:p>
-        </p:txBody>
-      </p:sp>
-      <p:sp>
-        <p:nvSpPr>
-          <p:cNvPr id="38" name="Rectangle 37"/>
+              <a:t>상주 엔지니어 · 업스트림 코드 · 수명 보증</a:t>
+            </a:r>
+          </a:p>
+        </p:txBody>
+      </p:sp>
+      <p:sp>
+        <p:nvSpPr>
+          <p:cNvPr id="42" name="Rectangle 41"/>
           <p:cNvSpPr/>
           <p:nvPr/>
         </p:nvSpPr>
         <p:spPr>
           <a:xfrm>
-            <a:off x="5157216" y="3950207"/>
-            <a:ext cx="7598664" cy="1243583"/>
+            <a:off x="4498848" y="3657600"/>
+            <a:ext cx="4338828" cy="1938527"/>
           </a:xfrm>
           <a:prstGeom prst="rect">
             <a:avLst/>
           </a:prstGeom>
           <a:solidFill>
-            <a:srgbClr val="FFFFFF"/>
+            <a:srgbClr val="F4F6FC"/>
           </a:solidFill>
-          <a:ln w="19050">
-            <a:solidFill>
-              <a:srgbClr val="1428A0"/>
-            </a:solidFill>
+          <a:ln>
+            <a:noFill/>
           </a:ln>
           <a:effectLst/>
         </p:spPr>
@@ -12554,14 +11776,14 @@
       </p:sp>
       <p:sp>
         <p:nvSpPr>
-          <p:cNvPr id="39" name="TextBox 38"/>
+          <p:cNvPr id="43" name="TextBox 42"/>
           <p:cNvSpPr txBox="1"/>
           <p:nvPr/>
         </p:nvSpPr>
         <p:spPr>
           <a:xfrm>
-            <a:off x="5431536" y="3950207"/>
-            <a:ext cx="7050024" cy="1243583"/>
+            <a:off x="4718304" y="3767328"/>
+            <a:ext cx="3899916" cy="256032"/>
           </a:xfrm>
           <a:prstGeom prst="rect">
             <a:avLst/>
@@ -12569,62 +11791,335 @@
           <a:noFill/>
         </p:spPr>
         <p:txBody>
-          <a:bodyPr wrap="square" anchor="ctr" lIns="0" rIns="0" tIns="0" bIns="0">
+          <a:bodyPr wrap="square" anchor="t" lIns="0" rIns="0" tIns="0" bIns="0">
             <a:spAutoFit/>
           </a:bodyPr>
           <a:lstStyle/>
           <a:p>
-            <a:pPr algn="ctr">
-              <a:lnSpc>
-                <a:spcPct val="108000"/>
-              </a:lnSpc>
-            </a:pPr>
-            <a:r>
-              <a:rPr sz="1575" b="1">
+            <a:pPr algn="l">
+              <a:lnSpc>
+                <a:spcPct val="112000"/>
+              </a:lnSpc>
+            </a:pPr>
+            <a:r>
+              <a:rPr sz="1350" b="0">
+                <a:solidFill>
+                  <a:srgbClr val="555555"/>
+                </a:solidFill>
+                <a:latin typeface="Arial"/>
+                <a:ea typeface="Arial"/>
+              </a:rPr>
+              <a:t>선례 · </a:t>
+            </a:r>
+            <a:r>
+              <a:rPr sz="1350" b="1">
                 <a:solidFill>
                   <a:srgbClr val="1428A0"/>
                 </a:solidFill>
                 <a:latin typeface="Arial"/>
                 <a:ea typeface="Arial"/>
               </a:rPr>
-              <a:t>계약으로 고정 · 창은 2027년 상반기까지</a:t>
-            </a:r>
-          </a:p>
-          <a:p>
-            <a:pPr algn="ctr">
-              <a:lnSpc>
-                <a:spcPct val="108000"/>
-              </a:lnSpc>
-            </a:pPr>
-            <a:r>
-              <a:rPr sz="1425" b="0">
-                <a:solidFill>
-                  <a:srgbClr val="1A1A1A"/>
-                </a:solidFill>
-                <a:latin typeface="Arial"/>
-                <a:ea typeface="Arial"/>
-              </a:rPr>
-              <a:t>공급 + 공동 최적화 + 워크로드 접근권 + 수명 보증</a:t>
-            </a:r>
-          </a:p>
-        </p:txBody>
-      </p:sp>
-      <p:sp>
-        <p:nvSpPr>
-          <p:cNvPr id="40" name="Left Arrow 39"/>
+              <a:t>Palantir FDE</a:t>
+            </a:r>
+            <a:r>
+              <a:rPr sz="1200" b="0">
+                <a:solidFill>
+                  <a:srgbClr val="555555"/>
+                </a:solidFill>
+                <a:latin typeface="Arial"/>
+                <a:ea typeface="Arial"/>
+              </a:rPr>
+              <a:t> (Forward Deployed Engineer)</a:t>
+            </a:r>
+          </a:p>
+        </p:txBody>
+      </p:sp>
+      <p:sp>
+        <p:nvSpPr>
+          <p:cNvPr id="44" name="Oval 43"/>
           <p:cNvSpPr/>
           <p:nvPr/>
         </p:nvSpPr>
         <p:spPr>
           <a:xfrm>
-            <a:off x="4608576" y="5376671"/>
-            <a:ext cx="8695944" cy="932688"/>
-          </a:xfrm>
-          <a:prstGeom prst="leftArrow">
+            <a:off x="4770973" y="4178807"/>
+            <a:ext cx="125089" cy="125089"/>
+          </a:xfrm>
+          <a:prstGeom prst="ellipse">
+            <a:avLst/>
+          </a:prstGeom>
+          <a:solidFill>
+            <a:srgbClr val="1428A0"/>
+          </a:solidFill>
+          <a:ln>
+            <a:noFill/>
+          </a:ln>
+          <a:effectLst/>
+        </p:spPr>
+        <p:style>
+          <a:lnRef idx="1">
+            <a:schemeClr val="accent1"/>
+          </a:lnRef>
+          <a:fillRef idx="3">
+            <a:schemeClr val="accent1"/>
+          </a:fillRef>
+          <a:effectRef idx="2">
+            <a:schemeClr val="accent1"/>
+          </a:effectRef>
+          <a:fontRef idx="minor">
+            <a:schemeClr val="lt1"/>
+          </a:fontRef>
+        </p:style>
+        <p:txBody>
+          <a:bodyPr rtlCol="0" anchor="ctr"/>
+          <a:lstStyle/>
+          <a:p>
+            <a:pPr algn="ctr"/>
+          </a:p>
+        </p:txBody>
+      </p:sp>
+      <p:sp>
+        <p:nvSpPr>
+          <p:cNvPr id="45" name="Round Same Side Corner Rectangle 44"/>
+          <p:cNvSpPr/>
+          <p:nvPr/>
+        </p:nvSpPr>
+        <p:spPr>
+          <a:xfrm>
+            <a:off x="4718304" y="4323648"/>
+            <a:ext cx="230428" cy="184343"/>
+          </a:xfrm>
+          <a:prstGeom prst="round2SameRect">
             <a:avLst>
-              <a:gd name="adj1" fmla="val 78000"/>
-              <a:gd name="adj2" fmla="val 30000"/>
+              <a:gd name="adj1" fmla="val 50000"/>
+              <a:gd name="adj2" fmla="val 0"/>
             </a:avLst>
+          </a:prstGeom>
+          <a:solidFill>
+            <a:srgbClr val="1428A0"/>
+          </a:solidFill>
+          <a:ln>
+            <a:noFill/>
+          </a:ln>
+          <a:effectLst/>
+        </p:spPr>
+        <p:style>
+          <a:lnRef idx="1">
+            <a:schemeClr val="accent1"/>
+          </a:lnRef>
+          <a:fillRef idx="3">
+            <a:schemeClr val="accent1"/>
+          </a:fillRef>
+          <a:effectRef idx="2">
+            <a:schemeClr val="accent1"/>
+          </a:effectRef>
+          <a:fontRef idx="minor">
+            <a:schemeClr val="lt1"/>
+          </a:fontRef>
+        </p:style>
+        <p:txBody>
+          <a:bodyPr rtlCol="0" anchor="ctr"/>
+          <a:lstStyle/>
+          <a:p>
+            <a:pPr algn="ctr"/>
+          </a:p>
+        </p:txBody>
+      </p:sp>
+      <p:sp>
+        <p:nvSpPr>
+          <p:cNvPr id="46" name="Oval 45"/>
+          <p:cNvSpPr/>
+          <p:nvPr/>
+        </p:nvSpPr>
+        <p:spPr>
+          <a:xfrm>
+            <a:off x="5045293" y="4178807"/>
+            <a:ext cx="125089" cy="125089"/>
+          </a:xfrm>
+          <a:prstGeom prst="ellipse">
+            <a:avLst/>
+          </a:prstGeom>
+          <a:solidFill>
+            <a:srgbClr val="1428A0"/>
+          </a:solidFill>
+          <a:ln>
+            <a:noFill/>
+          </a:ln>
+          <a:effectLst/>
+        </p:spPr>
+        <p:style>
+          <a:lnRef idx="1">
+            <a:schemeClr val="accent1"/>
+          </a:lnRef>
+          <a:fillRef idx="3">
+            <a:schemeClr val="accent1"/>
+          </a:fillRef>
+          <a:effectRef idx="2">
+            <a:schemeClr val="accent1"/>
+          </a:effectRef>
+          <a:fontRef idx="minor">
+            <a:schemeClr val="lt1"/>
+          </a:fontRef>
+        </p:style>
+        <p:txBody>
+          <a:bodyPr rtlCol="0" anchor="ctr"/>
+          <a:lstStyle/>
+          <a:p>
+            <a:pPr algn="ctr"/>
+          </a:p>
+        </p:txBody>
+      </p:sp>
+      <p:sp>
+        <p:nvSpPr>
+          <p:cNvPr id="47" name="Round Same Side Corner Rectangle 46"/>
+          <p:cNvSpPr/>
+          <p:nvPr/>
+        </p:nvSpPr>
+        <p:spPr>
+          <a:xfrm>
+            <a:off x="4992624" y="4323648"/>
+            <a:ext cx="230428" cy="184343"/>
+          </a:xfrm>
+          <a:prstGeom prst="round2SameRect">
+            <a:avLst>
+              <a:gd name="adj1" fmla="val 50000"/>
+              <a:gd name="adj2" fmla="val 0"/>
+            </a:avLst>
+          </a:prstGeom>
+          <a:solidFill>
+            <a:srgbClr val="1428A0"/>
+          </a:solidFill>
+          <a:ln>
+            <a:noFill/>
+          </a:ln>
+          <a:effectLst/>
+        </p:spPr>
+        <p:style>
+          <a:lnRef idx="1">
+            <a:schemeClr val="accent1"/>
+          </a:lnRef>
+          <a:fillRef idx="3">
+            <a:schemeClr val="accent1"/>
+          </a:fillRef>
+          <a:effectRef idx="2">
+            <a:schemeClr val="accent1"/>
+          </a:effectRef>
+          <a:fontRef idx="minor">
+            <a:schemeClr val="lt1"/>
+          </a:fontRef>
+        </p:style>
+        <p:txBody>
+          <a:bodyPr rtlCol="0" anchor="ctr"/>
+          <a:lstStyle/>
+          <a:p>
+            <a:pPr algn="ctr"/>
+          </a:p>
+        </p:txBody>
+      </p:sp>
+      <p:sp>
+        <p:nvSpPr>
+          <p:cNvPr id="48" name="Oval 47"/>
+          <p:cNvSpPr/>
+          <p:nvPr/>
+        </p:nvSpPr>
+        <p:spPr>
+          <a:xfrm>
+            <a:off x="5319613" y="4178807"/>
+            <a:ext cx="125089" cy="125089"/>
+          </a:xfrm>
+          <a:prstGeom prst="ellipse">
+            <a:avLst/>
+          </a:prstGeom>
+          <a:solidFill>
+            <a:srgbClr val="1428A0"/>
+          </a:solidFill>
+          <a:ln>
+            <a:noFill/>
+          </a:ln>
+          <a:effectLst/>
+        </p:spPr>
+        <p:style>
+          <a:lnRef idx="1">
+            <a:schemeClr val="accent1"/>
+          </a:lnRef>
+          <a:fillRef idx="3">
+            <a:schemeClr val="accent1"/>
+          </a:fillRef>
+          <a:effectRef idx="2">
+            <a:schemeClr val="accent1"/>
+          </a:effectRef>
+          <a:fontRef idx="minor">
+            <a:schemeClr val="lt1"/>
+          </a:fontRef>
+        </p:style>
+        <p:txBody>
+          <a:bodyPr rtlCol="0" anchor="ctr"/>
+          <a:lstStyle/>
+          <a:p>
+            <a:pPr algn="ctr"/>
+          </a:p>
+        </p:txBody>
+      </p:sp>
+      <p:sp>
+        <p:nvSpPr>
+          <p:cNvPr id="49" name="Round Same Side Corner Rectangle 48"/>
+          <p:cNvSpPr/>
+          <p:nvPr/>
+        </p:nvSpPr>
+        <p:spPr>
+          <a:xfrm>
+            <a:off x="5266944" y="4323648"/>
+            <a:ext cx="230428" cy="184343"/>
+          </a:xfrm>
+          <a:prstGeom prst="round2SameRect">
+            <a:avLst>
+              <a:gd name="adj1" fmla="val 50000"/>
+              <a:gd name="adj2" fmla="val 0"/>
+            </a:avLst>
+          </a:prstGeom>
+          <a:solidFill>
+            <a:srgbClr val="1428A0"/>
+          </a:solidFill>
+          <a:ln>
+            <a:noFill/>
+          </a:ln>
+          <a:effectLst/>
+        </p:spPr>
+        <p:style>
+          <a:lnRef idx="1">
+            <a:schemeClr val="accent1"/>
+          </a:lnRef>
+          <a:fillRef idx="3">
+            <a:schemeClr val="accent1"/>
+          </a:fillRef>
+          <a:effectRef idx="2">
+            <a:schemeClr val="accent1"/>
+          </a:effectRef>
+          <a:fontRef idx="minor">
+            <a:schemeClr val="lt1"/>
+          </a:fontRef>
+        </p:style>
+        <p:txBody>
+          <a:bodyPr rtlCol="0" anchor="ctr"/>
+          <a:lstStyle/>
+          <a:p>
+            <a:pPr algn="ctr"/>
+          </a:p>
+        </p:txBody>
+      </p:sp>
+      <p:sp>
+        <p:nvSpPr>
+          <p:cNvPr id="50" name="Right Arrow 49"/>
+          <p:cNvSpPr/>
+          <p:nvPr/>
+        </p:nvSpPr>
+        <p:spPr>
+          <a:xfrm>
+            <a:off x="5614416" y="4261103"/>
+            <a:ext cx="310896" cy="146304"/>
+          </a:xfrm>
+          <a:prstGeom prst="rightArrow">
+            <a:avLst/>
           </a:prstGeom>
           <a:solidFill>
             <a:srgbClr val="AAB8E8"/>
@@ -12658,279 +12153,14 @@
       </p:sp>
       <p:sp>
         <p:nvSpPr>
-          <p:cNvPr id="41" name="TextBox 40"/>
-          <p:cNvSpPr txBox="1"/>
-          <p:nvPr/>
-        </p:nvSpPr>
-        <p:spPr>
-          <a:xfrm>
-            <a:off x="5705856" y="5376671"/>
-            <a:ext cx="7232904" cy="932688"/>
-          </a:xfrm>
-          <a:prstGeom prst="rect">
-            <a:avLst/>
-          </a:prstGeom>
-          <a:noFill/>
-        </p:spPr>
-        <p:txBody>
-          <a:bodyPr wrap="square" anchor="ctr" lIns="0" rIns="0" tIns="0" bIns="0">
-            <a:spAutoFit/>
-          </a:bodyPr>
-          <a:lstStyle/>
-          <a:p>
-            <a:pPr algn="l">
-              <a:lnSpc>
-                <a:spcPct val="108000"/>
-              </a:lnSpc>
-            </a:pPr>
-            <a:r>
-              <a:rPr sz="1800" b="1">
-                <a:solidFill>
-                  <a:srgbClr val="1A1A1A"/>
-                </a:solidFill>
-                <a:latin typeface="Arial"/>
-                <a:ea typeface="Arial"/>
-              </a:rPr>
-              <a:t>② 워크로드가 온다</a:t>
-            </a:r>
-          </a:p>
-          <a:p>
-            <a:pPr algn="l">
-              <a:lnSpc>
-                <a:spcPct val="108000"/>
-              </a:lnSpc>
-            </a:pPr>
-            <a:r>
-              <a:rPr sz="1425" b="0">
-                <a:solidFill>
-                  <a:srgbClr val="1A1A1A"/>
-                </a:solidFill>
-                <a:latin typeface="Arial"/>
-                <a:ea typeface="Arial"/>
-              </a:rPr>
-              <a:t>트레이스 · KV 수명 정책 · 레퍼런스 스펙 자리 · 활성화 약정</a:t>
-            </a:r>
-          </a:p>
-        </p:txBody>
-      </p:sp>
-      <p:sp>
-        <p:nvSpPr>
-          <p:cNvPr id="42" name="TextBox 41"/>
-          <p:cNvSpPr txBox="1"/>
-          <p:nvPr/>
-        </p:nvSpPr>
-        <p:spPr>
-          <a:xfrm>
-            <a:off x="722376" y="6437375"/>
-            <a:ext cx="822960" cy="310896"/>
-          </a:xfrm>
-          <a:prstGeom prst="rect">
-            <a:avLst/>
-          </a:prstGeom>
-          <a:noFill/>
-        </p:spPr>
-        <p:txBody>
-          <a:bodyPr wrap="square" anchor="ctr" lIns="0" rIns="0" tIns="0" bIns="0">
-            <a:spAutoFit/>
-          </a:bodyPr>
-          <a:lstStyle/>
-          <a:p>
-            <a:pPr algn="l">
-              <a:lnSpc>
-                <a:spcPct val="112000"/>
-              </a:lnSpc>
-            </a:pPr>
-            <a:r>
-              <a:rPr sz="1425" b="1">
-                <a:solidFill>
-                  <a:srgbClr val="1428A0"/>
-                </a:solidFill>
-                <a:latin typeface="Arial"/>
-                <a:ea typeface="Arial"/>
-              </a:rPr>
-              <a:t>대상</a:t>
-            </a:r>
-          </a:p>
-        </p:txBody>
-      </p:sp>
-      <p:pic>
-        <p:nvPicPr>
-          <p:cNvPr id="43" name="Picture 42" descr="anthropic.png"/>
-          <p:cNvPicPr>
-            <a:picLocks noChangeAspect="1"/>
-          </p:cNvPicPr>
-          <p:nvPr/>
-        </p:nvPicPr>
-        <p:blipFill>
-          <a:blip r:embed="rId2"/>
-          <a:stretch>
-            <a:fillRect/>
-          </a:stretch>
-        </p:blipFill>
-        <p:spPr>
-          <a:xfrm>
-            <a:off x="1545336" y="6455663"/>
-            <a:ext cx="2420471" cy="274320"/>
-          </a:xfrm>
-          <a:prstGeom prst="rect">
-            <a:avLst/>
-          </a:prstGeom>
-        </p:spPr>
-      </p:pic>
-      <p:pic>
-        <p:nvPicPr>
-          <p:cNvPr id="44" name="Picture 43" descr="openai.png"/>
-          <p:cNvPicPr>
-            <a:picLocks noChangeAspect="1"/>
-          </p:cNvPicPr>
-          <p:nvPr/>
-        </p:nvPicPr>
-        <p:blipFill>
-          <a:blip r:embed="rId3"/>
-          <a:stretch>
-            <a:fillRect/>
-          </a:stretch>
-        </p:blipFill>
-        <p:spPr>
-          <a:xfrm>
-            <a:off x="4276702" y="6455663"/>
-            <a:ext cx="1117140" cy="274320"/>
-          </a:xfrm>
-          <a:prstGeom prst="rect">
-            <a:avLst/>
-          </a:prstGeom>
-        </p:spPr>
-      </p:pic>
-      <p:pic>
-        <p:nvPicPr>
-          <p:cNvPr id="45" name="Picture 44" descr="nvidia.png"/>
-          <p:cNvPicPr>
-            <a:picLocks noChangeAspect="1"/>
-          </p:cNvPicPr>
-          <p:nvPr/>
-        </p:nvPicPr>
-        <p:blipFill>
-          <a:blip r:embed="rId4"/>
-          <a:stretch>
-            <a:fillRect/>
-          </a:stretch>
-        </p:blipFill>
-        <p:spPr>
-          <a:xfrm>
-            <a:off x="5704738" y="6455663"/>
-            <a:ext cx="1435395" cy="274320"/>
-          </a:xfrm>
-          <a:prstGeom prst="rect">
-            <a:avLst/>
-          </a:prstGeom>
-        </p:spPr>
-      </p:pic>
-      <p:pic>
-        <p:nvPicPr>
-          <p:cNvPr id="46" name="Picture 45" descr="meta.png"/>
-          <p:cNvPicPr>
-            <a:picLocks noChangeAspect="1"/>
-          </p:cNvPicPr>
-          <p:nvPr/>
-        </p:nvPicPr>
-        <p:blipFill>
-          <a:blip r:embed="rId5"/>
-          <a:stretch>
-            <a:fillRect/>
-          </a:stretch>
-        </p:blipFill>
-        <p:spPr>
-          <a:xfrm>
-            <a:off x="7451030" y="6455663"/>
-            <a:ext cx="1349115" cy="274320"/>
-          </a:xfrm>
-          <a:prstGeom prst="rect">
-            <a:avLst/>
-          </a:prstGeom>
-        </p:spPr>
-      </p:pic>
-      <p:pic>
-        <p:nvPicPr>
-          <p:cNvPr id="47" name="Picture 46" descr="google.png"/>
-          <p:cNvPicPr>
-            <a:picLocks noChangeAspect="1"/>
-          </p:cNvPicPr>
-          <p:nvPr/>
-        </p:nvPicPr>
-        <p:blipFill>
-          <a:blip r:embed="rId6"/>
-          <a:stretch>
-            <a:fillRect/>
-          </a:stretch>
-        </p:blipFill>
-        <p:spPr>
-          <a:xfrm>
-            <a:off x="9111040" y="6455663"/>
-            <a:ext cx="836908" cy="274320"/>
-          </a:xfrm>
-          <a:prstGeom prst="rect">
-            <a:avLst/>
-          </a:prstGeom>
-        </p:spPr>
-      </p:pic>
-      <p:pic>
-        <p:nvPicPr>
-          <p:cNvPr id="48" name="Picture 47" descr="microsoft.png"/>
-          <p:cNvPicPr>
-            <a:picLocks noChangeAspect="1"/>
-          </p:cNvPicPr>
-          <p:nvPr/>
-        </p:nvPicPr>
-        <p:blipFill>
-          <a:blip r:embed="rId7"/>
-          <a:stretch>
-            <a:fillRect/>
-          </a:stretch>
-        </p:blipFill>
-        <p:spPr>
-          <a:xfrm>
-            <a:off x="10258845" y="6455663"/>
-            <a:ext cx="1279212" cy="274320"/>
-          </a:xfrm>
-          <a:prstGeom prst="rect">
-            <a:avLst/>
-          </a:prstGeom>
-        </p:spPr>
-      </p:pic>
-      <p:pic>
-        <p:nvPicPr>
-          <p:cNvPr id="49" name="Picture 48" descr="aws.png"/>
-          <p:cNvPicPr>
-            <a:picLocks noChangeAspect="1"/>
-          </p:cNvPicPr>
-          <p:nvPr/>
-        </p:nvPicPr>
-        <p:blipFill>
-          <a:blip r:embed="rId8"/>
-          <a:stretch>
-            <a:fillRect/>
-          </a:stretch>
-        </p:blipFill>
-        <p:spPr>
-          <a:xfrm>
-            <a:off x="11848953" y="6455663"/>
-            <a:ext cx="458900" cy="274320"/>
-          </a:xfrm>
-          <a:prstGeom prst="rect">
-            <a:avLst/>
-          </a:prstGeom>
-        </p:spPr>
-      </p:pic>
-      <p:sp>
-        <p:nvSpPr>
-          <p:cNvPr id="50" name="Rectangle 49"/>
+          <p:cNvPr id="51" name="Rectangle 50"/>
           <p:cNvSpPr/>
           <p:nvPr/>
         </p:nvSpPr>
         <p:spPr>
           <a:xfrm>
-            <a:off x="12618749" y="6437375"/>
-            <a:ext cx="861821" cy="310896"/>
+            <a:off x="5998464" y="4133087"/>
+            <a:ext cx="960120" cy="420624"/>
           </a:xfrm>
           <a:prstGeom prst="rect">
             <a:avLst/>
@@ -12938,9 +12168,9 @@
           <a:solidFill>
             <a:srgbClr val="FFFFFF"/>
           </a:solidFill>
-          <a:ln w="9525">
+          <a:ln w="12700">
             <a:solidFill>
-              <a:srgbClr val="8A8A8A"/>
+              <a:srgbClr val="1428A0"/>
             </a:solidFill>
           </a:ln>
           <a:effectLst/>
@@ -12969,14 +12199,14 @@
       </p:sp>
       <p:sp>
         <p:nvSpPr>
-          <p:cNvPr id="51" name="TextBox 50"/>
+          <p:cNvPr id="52" name="TextBox 51"/>
           <p:cNvSpPr txBox="1"/>
           <p:nvPr/>
         </p:nvSpPr>
         <p:spPr>
           <a:xfrm>
-            <a:off x="12618749" y="6437375"/>
-            <a:ext cx="861821" cy="310896"/>
+            <a:off x="5998464" y="4133087"/>
+            <a:ext cx="960120" cy="420624"/>
           </a:xfrm>
           <a:prstGeom prst="rect">
             <a:avLst/>
@@ -12995,39 +12225,94 @@
               </a:lnSpc>
             </a:pPr>
             <a:r>
-              <a:rPr sz="1250" b="1">
+              <a:rPr sz="1200" b="1">
                 <a:solidFill>
                   <a:srgbClr val="1A1A1A"/>
                 </a:solidFill>
                 <a:latin typeface="Arial"/>
                 <a:ea typeface="Arial"/>
               </a:rPr>
-              <a:t>VAST Data</a:t>
-            </a:r>
-          </a:p>
-        </p:txBody>
-      </p:sp>
-      <p:sp>
-        <p:nvSpPr>
-          <p:cNvPr id="52" name="Rectangle 51"/>
+              <a:t>고객 현장</a:t>
+            </a:r>
+          </a:p>
+        </p:txBody>
+      </p:sp>
+      <p:sp>
+        <p:nvSpPr>
+          <p:cNvPr id="53" name="TextBox 52"/>
+          <p:cNvSpPr txBox="1"/>
+          <p:nvPr/>
+        </p:nvSpPr>
+        <p:spPr>
+          <a:xfrm>
+            <a:off x="4718304" y="4681727"/>
+            <a:ext cx="3899916" cy="896111"/>
+          </a:xfrm>
+          <a:prstGeom prst="rect">
+            <a:avLst/>
+          </a:prstGeom>
+          <a:noFill/>
+        </p:spPr>
+        <p:txBody>
+          <a:bodyPr wrap="square" anchor="t" lIns="0" rIns="0" tIns="0" bIns="0">
+            <a:spAutoFit/>
+          </a:bodyPr>
+          <a:lstStyle/>
+          <a:p>
+            <a:pPr algn="l">
+              <a:lnSpc>
+                <a:spcPct val="104000"/>
+              </a:lnSpc>
+            </a:pPr>
+            <a:r>
+              <a:rPr sz="1200" b="0">
+                <a:solidFill>
+                  <a:srgbClr val="555555"/>
+                </a:solidFill>
+                <a:latin typeface="Arial"/>
+                <a:ea typeface="Arial"/>
+              </a:rPr>
+              <a:t>고객 시스템 안에 상주해 실제 요구를 코드로 풀고 성과로 평가받는 엔지니어(코드명 Delta)</a:t>
+            </a:r>
+          </a:p>
+          <a:p>
+            <a:pPr algn="l">
+              <a:lnSpc>
+                <a:spcPct val="104000"/>
+              </a:lnSpc>
+            </a:pPr>
+            <a:r>
+              <a:rPr sz="1200" b="1">
+                <a:solidFill>
+                  <a:srgbClr val="1A1A1A"/>
+                </a:solidFill>
+                <a:latin typeface="Arial"/>
+                <a:ea typeface="Arial"/>
+              </a:rPr>
+              <a:t>파급: 고객 락인의 동력, 640% 주가 수익률의 원천으로 회자. Anthropic·OpenAI가 GTM으로 채택</a:t>
+            </a:r>
+          </a:p>
+        </p:txBody>
+      </p:sp>
+      <p:sp>
+        <p:nvSpPr>
+          <p:cNvPr id="54" name="Rectangle 53"/>
           <p:cNvSpPr/>
           <p:nvPr/>
         </p:nvSpPr>
         <p:spPr>
           <a:xfrm>
-            <a:off x="13791467" y="6437375"/>
-            <a:ext cx="531114" cy="310896"/>
+            <a:off x="9038844" y="3657600"/>
+            <a:ext cx="4338828" cy="1938527"/>
           </a:xfrm>
           <a:prstGeom prst="rect">
             <a:avLst/>
           </a:prstGeom>
           <a:solidFill>
-            <a:srgbClr val="FFFFFF"/>
+            <a:srgbClr val="F4F6FC"/>
           </a:solidFill>
-          <a:ln w="9525">
-            <a:solidFill>
-              <a:srgbClr val="8A8A8A"/>
-            </a:solidFill>
+          <a:ln>
+            <a:noFill/>
           </a:ln>
           <a:effectLst/>
         </p:spPr>
@@ -13055,14 +12340,14 @@
       </p:sp>
       <p:sp>
         <p:nvSpPr>
-          <p:cNvPr id="53" name="TextBox 52"/>
+          <p:cNvPr id="55" name="TextBox 54"/>
           <p:cNvSpPr txBox="1"/>
           <p:nvPr/>
         </p:nvSpPr>
         <p:spPr>
           <a:xfrm>
-            <a:off x="13791467" y="6437375"/>
-            <a:ext cx="531114" cy="310896"/>
+            <a:off x="9258300" y="3767328"/>
+            <a:ext cx="3899916" cy="256032"/>
           </a:xfrm>
           <a:prstGeom prst="rect">
             <a:avLst/>
@@ -13070,50 +12355,68 @@
           <a:noFill/>
         </p:spPr>
         <p:txBody>
-          <a:bodyPr wrap="square" anchor="ctr" lIns="0" rIns="0" tIns="0" bIns="0">
+          <a:bodyPr wrap="square" anchor="t" lIns="0" rIns="0" tIns="0" bIns="0">
             <a:spAutoFit/>
           </a:bodyPr>
           <a:lstStyle/>
           <a:p>
-            <a:pPr algn="ctr">
+            <a:pPr algn="l">
               <a:lnSpc>
                 <a:spcPct val="112000"/>
               </a:lnSpc>
             </a:pPr>
             <a:r>
-              <a:rPr sz="1250" b="1">
-                <a:solidFill>
-                  <a:srgbClr val="1A1A1A"/>
-                </a:solidFill>
-                <a:latin typeface="Arial"/>
-                <a:ea typeface="Arial"/>
-              </a:rPr>
-              <a:t>DDN</a:t>
-            </a:r>
-          </a:p>
-        </p:txBody>
-      </p:sp>
-      <p:sp>
-        <p:nvSpPr>
-          <p:cNvPr id="54" name="Rectangle 53"/>
+              <a:rPr sz="1350" b="0">
+                <a:solidFill>
+                  <a:srgbClr val="555555"/>
+                </a:solidFill>
+                <a:latin typeface="Arial"/>
+                <a:ea typeface="Arial"/>
+              </a:rPr>
+              <a:t>선례 · </a:t>
+            </a:r>
+            <a:r>
+              <a:rPr sz="1350" b="1">
+                <a:solidFill>
+                  <a:srgbClr val="1428A0"/>
+                </a:solidFill>
+                <a:latin typeface="Arial"/>
+                <a:ea typeface="Arial"/>
+              </a:rPr>
+              <a:t>Micron ↔ Anthropic SCA</a:t>
+            </a:r>
+            <a:r>
+              <a:rPr sz="1200" b="0">
+                <a:solidFill>
+                  <a:srgbClr val="555555"/>
+                </a:solidFill>
+                <a:latin typeface="Arial"/>
+                <a:ea typeface="Arial"/>
+              </a:rPr>
+              <a:t> (2026-06)</a:t>
+            </a:r>
+          </a:p>
+        </p:txBody>
+      </p:sp>
+      <p:sp>
+        <p:nvSpPr>
+          <p:cNvPr id="56" name="Rectangle 55"/>
           <p:cNvSpPr/>
           <p:nvPr/>
         </p:nvSpPr>
         <p:spPr>
           <a:xfrm>
-            <a:off x="14633477" y="6437375"/>
-            <a:ext cx="586232" cy="310896"/>
+            <a:off x="9258300" y="4133087"/>
+            <a:ext cx="1417320" cy="237744"/>
           </a:xfrm>
           <a:prstGeom prst="rect">
             <a:avLst/>
           </a:prstGeom>
           <a:solidFill>
-            <a:srgbClr val="FFFFFF"/>
+            <a:srgbClr val="1428A0"/>
           </a:solidFill>
-          <a:ln w="9525">
-            <a:solidFill>
-              <a:srgbClr val="8A8A8A"/>
-            </a:solidFill>
+          <a:ln>
+            <a:noFill/>
           </a:ln>
           <a:effectLst/>
         </p:spPr>
@@ -13141,14 +12444,14 @@
       </p:sp>
       <p:sp>
         <p:nvSpPr>
-          <p:cNvPr id="55" name="TextBox 54"/>
+          <p:cNvPr id="57" name="TextBox 56"/>
           <p:cNvSpPr txBox="1"/>
           <p:nvPr/>
         </p:nvSpPr>
         <p:spPr>
           <a:xfrm>
-            <a:off x="14633477" y="6437375"/>
-            <a:ext cx="586232" cy="310896"/>
+            <a:off x="9258300" y="4133087"/>
+            <a:ext cx="1417320" cy="237744"/>
           </a:xfrm>
           <a:prstGeom prst="rect">
             <a:avLst/>
@@ -13167,28 +12470,458 @@
               </a:lnSpc>
             </a:pPr>
             <a:r>
-              <a:rPr sz="1250" b="1">
+              <a:rPr sz="1125" b="1">
+                <a:solidFill>
+                  <a:srgbClr val="FFFFFF"/>
+                </a:solidFill>
+                <a:latin typeface="Arial"/>
+                <a:ea typeface="Arial"/>
+              </a:rPr>
+              <a:t>공동 설계</a:t>
+            </a:r>
+          </a:p>
+        </p:txBody>
+      </p:sp>
+      <p:sp>
+        <p:nvSpPr>
+          <p:cNvPr id="58" name="Rectangle 57"/>
+          <p:cNvSpPr/>
+          <p:nvPr/>
+        </p:nvSpPr>
+        <p:spPr>
+          <a:xfrm>
+            <a:off x="9258300" y="4407407"/>
+            <a:ext cx="1417320" cy="237744"/>
+          </a:xfrm>
+          <a:prstGeom prst="rect">
+            <a:avLst/>
+          </a:prstGeom>
+          <a:solidFill>
+            <a:srgbClr val="AAB8E8"/>
+          </a:solidFill>
+          <a:ln>
+            <a:noFill/>
+          </a:ln>
+          <a:effectLst/>
+        </p:spPr>
+        <p:style>
+          <a:lnRef idx="1">
+            <a:schemeClr val="accent1"/>
+          </a:lnRef>
+          <a:fillRef idx="3">
+            <a:schemeClr val="accent1"/>
+          </a:fillRef>
+          <a:effectRef idx="2">
+            <a:schemeClr val="accent1"/>
+          </a:effectRef>
+          <a:fontRef idx="minor">
+            <a:schemeClr val="lt1"/>
+          </a:fontRef>
+        </p:style>
+        <p:txBody>
+          <a:bodyPr rtlCol="0" anchor="ctr"/>
+          <a:lstStyle/>
+          <a:p>
+            <a:pPr algn="ctr"/>
+          </a:p>
+        </p:txBody>
+      </p:sp>
+      <p:sp>
+        <p:nvSpPr>
+          <p:cNvPr id="59" name="TextBox 58"/>
+          <p:cNvSpPr txBox="1"/>
+          <p:nvPr/>
+        </p:nvSpPr>
+        <p:spPr>
+          <a:xfrm>
+            <a:off x="9258300" y="4407407"/>
+            <a:ext cx="1417320" cy="237744"/>
+          </a:xfrm>
+          <a:prstGeom prst="rect">
+            <a:avLst/>
+          </a:prstGeom>
+          <a:noFill/>
+        </p:spPr>
+        <p:txBody>
+          <a:bodyPr wrap="square" anchor="ctr" lIns="0" rIns="0" tIns="0" bIns="0">
+            <a:spAutoFit/>
+          </a:bodyPr>
+          <a:lstStyle/>
+          <a:p>
+            <a:pPr algn="ctr">
+              <a:lnSpc>
+                <a:spcPct val="112000"/>
+              </a:lnSpc>
+            </a:pPr>
+            <a:r>
+              <a:rPr sz="1125" b="1">
                 <a:solidFill>
                   <a:srgbClr val="1A1A1A"/>
                 </a:solidFill>
                 <a:latin typeface="Arial"/>
                 <a:ea typeface="Arial"/>
               </a:rPr>
-              <a:t>WEKA</a:t>
-            </a:r>
-          </a:p>
-        </p:txBody>
-      </p:sp>
-      <p:sp>
-        <p:nvSpPr>
-          <p:cNvPr id="56" name="Rectangle 55"/>
+              <a:t>다년 공급</a:t>
+            </a:r>
+          </a:p>
+        </p:txBody>
+      </p:sp>
+      <p:sp>
+        <p:nvSpPr>
+          <p:cNvPr id="60" name="Rectangle 59"/>
           <p:cNvSpPr/>
           <p:nvPr/>
         </p:nvSpPr>
         <p:spPr>
           <a:xfrm>
-            <a:off x="722376" y="6949440"/>
-            <a:ext cx="3200400" cy="914400"/>
+            <a:off x="9258300" y="4681727"/>
+            <a:ext cx="1417320" cy="237744"/>
+          </a:xfrm>
+          <a:prstGeom prst="rect">
+            <a:avLst/>
+          </a:prstGeom>
+          <a:solidFill>
+            <a:srgbClr val="AAB8E8"/>
+          </a:solidFill>
+          <a:ln>
+            <a:noFill/>
+          </a:ln>
+          <a:effectLst/>
+        </p:spPr>
+        <p:style>
+          <a:lnRef idx="1">
+            <a:schemeClr val="accent1"/>
+          </a:lnRef>
+          <a:fillRef idx="3">
+            <a:schemeClr val="accent1"/>
+          </a:fillRef>
+          <a:effectRef idx="2">
+            <a:schemeClr val="accent1"/>
+          </a:effectRef>
+          <a:fontRef idx="minor">
+            <a:schemeClr val="lt1"/>
+          </a:fontRef>
+        </p:style>
+        <p:txBody>
+          <a:bodyPr rtlCol="0" anchor="ctr"/>
+          <a:lstStyle/>
+          <a:p>
+            <a:pPr algn="ctr"/>
+          </a:p>
+        </p:txBody>
+      </p:sp>
+      <p:sp>
+        <p:nvSpPr>
+          <p:cNvPr id="61" name="TextBox 60"/>
+          <p:cNvSpPr txBox="1"/>
+          <p:nvPr/>
+        </p:nvSpPr>
+        <p:spPr>
+          <a:xfrm>
+            <a:off x="9258300" y="4681727"/>
+            <a:ext cx="1417320" cy="237744"/>
+          </a:xfrm>
+          <a:prstGeom prst="rect">
+            <a:avLst/>
+          </a:prstGeom>
+          <a:noFill/>
+        </p:spPr>
+        <p:txBody>
+          <a:bodyPr wrap="square" anchor="ctr" lIns="0" rIns="0" tIns="0" bIns="0">
+            <a:spAutoFit/>
+          </a:bodyPr>
+          <a:lstStyle/>
+          <a:p>
+            <a:pPr algn="ctr">
+              <a:lnSpc>
+                <a:spcPct val="112000"/>
+              </a:lnSpc>
+            </a:pPr>
+            <a:r>
+              <a:rPr sz="1125" b="1">
+                <a:solidFill>
+                  <a:srgbClr val="1A1A1A"/>
+                </a:solidFill>
+                <a:latin typeface="Arial"/>
+                <a:ea typeface="Arial"/>
+              </a:rPr>
+              <a:t>운영 통합</a:t>
+            </a:r>
+          </a:p>
+        </p:txBody>
+      </p:sp>
+      <p:sp>
+        <p:nvSpPr>
+          <p:cNvPr id="62" name="Rectangle 61"/>
+          <p:cNvSpPr/>
+          <p:nvPr/>
+        </p:nvSpPr>
+        <p:spPr>
+          <a:xfrm>
+            <a:off x="9258300" y="4956048"/>
+            <a:ext cx="1417320" cy="237744"/>
+          </a:xfrm>
+          <a:prstGeom prst="rect">
+            <a:avLst/>
+          </a:prstGeom>
+          <a:solidFill>
+            <a:srgbClr val="AAB8E8"/>
+          </a:solidFill>
+          <a:ln>
+            <a:noFill/>
+          </a:ln>
+          <a:effectLst/>
+        </p:spPr>
+        <p:style>
+          <a:lnRef idx="1">
+            <a:schemeClr val="accent1"/>
+          </a:lnRef>
+          <a:fillRef idx="3">
+            <a:schemeClr val="accent1"/>
+          </a:fillRef>
+          <a:effectRef idx="2">
+            <a:schemeClr val="accent1"/>
+          </a:effectRef>
+          <a:fontRef idx="minor">
+            <a:schemeClr val="lt1"/>
+          </a:fontRef>
+        </p:style>
+        <p:txBody>
+          <a:bodyPr rtlCol="0" anchor="ctr"/>
+          <a:lstStyle/>
+          <a:p>
+            <a:pPr algn="ctr"/>
+          </a:p>
+        </p:txBody>
+      </p:sp>
+      <p:sp>
+        <p:nvSpPr>
+          <p:cNvPr id="63" name="TextBox 62"/>
+          <p:cNvSpPr txBox="1"/>
+          <p:nvPr/>
+        </p:nvSpPr>
+        <p:spPr>
+          <a:xfrm>
+            <a:off x="9258300" y="4956048"/>
+            <a:ext cx="1417320" cy="237744"/>
+          </a:xfrm>
+          <a:prstGeom prst="rect">
+            <a:avLst/>
+          </a:prstGeom>
+          <a:noFill/>
+        </p:spPr>
+        <p:txBody>
+          <a:bodyPr wrap="square" anchor="ctr" lIns="0" rIns="0" tIns="0" bIns="0">
+            <a:spAutoFit/>
+          </a:bodyPr>
+          <a:lstStyle/>
+          <a:p>
+            <a:pPr algn="ctr">
+              <a:lnSpc>
+                <a:spcPct val="112000"/>
+              </a:lnSpc>
+            </a:pPr>
+            <a:r>
+              <a:rPr sz="1125" b="1">
+                <a:solidFill>
+                  <a:srgbClr val="1A1A1A"/>
+                </a:solidFill>
+                <a:latin typeface="Arial"/>
+                <a:ea typeface="Arial"/>
+              </a:rPr>
+              <a:t>자본(Series H)</a:t>
+            </a:r>
+          </a:p>
+        </p:txBody>
+      </p:sp>
+      <p:sp>
+        <p:nvSpPr>
+          <p:cNvPr id="64" name="TextBox 63"/>
+          <p:cNvSpPr txBox="1"/>
+          <p:nvPr/>
+        </p:nvSpPr>
+        <p:spPr>
+          <a:xfrm>
+            <a:off x="10876788" y="4114800"/>
+            <a:ext cx="2281428" cy="1353311"/>
+          </a:xfrm>
+          <a:prstGeom prst="rect">
+            <a:avLst/>
+          </a:prstGeom>
+          <a:noFill/>
+        </p:spPr>
+        <p:txBody>
+          <a:bodyPr wrap="square" anchor="t" lIns="0" rIns="0" tIns="0" bIns="0">
+            <a:spAutoFit/>
+          </a:bodyPr>
+          <a:lstStyle/>
+          <a:p>
+            <a:pPr algn="l">
+              <a:lnSpc>
+                <a:spcPct val="104000"/>
+              </a:lnSpc>
+            </a:pPr>
+            <a:r>
+              <a:rPr sz="1200" b="0">
+                <a:solidFill>
+                  <a:srgbClr val="555555"/>
+                </a:solidFill>
+                <a:latin typeface="Arial"/>
+                <a:ea typeface="Arial"/>
+              </a:rPr>
+              <a:t>네 요소를 한 계약에 묶어 워크로드·스펙 접근권을 확보</a:t>
+            </a:r>
+          </a:p>
+          <a:p>
+            <a:pPr algn="l">
+              <a:lnSpc>
+                <a:spcPct val="104000"/>
+              </a:lnSpc>
+            </a:pPr>
+            <a:r>
+              <a:rPr sz="1200" b="1">
+                <a:solidFill>
+                  <a:srgbClr val="1A1A1A"/>
+                </a:solidFill>
+                <a:latin typeface="Arial"/>
+                <a:ea typeface="Arial"/>
+              </a:rPr>
+              <a:t>Micron SCA 16건 · 최소 매출 약 $100B · 예치금 $22B</a:t>
+            </a:r>
+          </a:p>
+          <a:p>
+            <a:pPr algn="l">
+              <a:lnSpc>
+                <a:spcPct val="104000"/>
+              </a:lnSpc>
+            </a:pPr>
+            <a:r>
+              <a:rPr sz="1200" b="1">
+                <a:solidFill>
+                  <a:srgbClr val="1428A0"/>
+                </a:solidFill>
+                <a:latin typeface="Arial"/>
+                <a:ea typeface="Arial"/>
+              </a:rPr>
+              <a:t>삼성·SK의 Anthropic 계약에는 공동 설계 조항이 없습니다. 우리가 먼저 제안합니다</a:t>
+            </a:r>
+          </a:p>
+        </p:txBody>
+      </p:sp>
+      <p:sp>
+        <p:nvSpPr>
+          <p:cNvPr id="65" name="Left Arrow 64"/>
+          <p:cNvSpPr/>
+          <p:nvPr/>
+        </p:nvSpPr>
+        <p:spPr>
+          <a:xfrm>
+            <a:off x="4498848" y="5742431"/>
+            <a:ext cx="8878824" cy="841248"/>
+          </a:xfrm>
+          <a:prstGeom prst="leftArrow">
+            <a:avLst>
+              <a:gd name="adj1" fmla="val 80000"/>
+              <a:gd name="adj2" fmla="val 26000"/>
+            </a:avLst>
+          </a:prstGeom>
+          <a:solidFill>
+            <a:srgbClr val="AAB8E8"/>
+          </a:solidFill>
+          <a:ln>
+            <a:noFill/>
+          </a:ln>
+          <a:effectLst/>
+        </p:spPr>
+        <p:style>
+          <a:lnRef idx="1">
+            <a:schemeClr val="accent1"/>
+          </a:lnRef>
+          <a:fillRef idx="3">
+            <a:schemeClr val="accent1"/>
+          </a:fillRef>
+          <a:effectRef idx="2">
+            <a:schemeClr val="accent1"/>
+          </a:effectRef>
+          <a:fontRef idx="minor">
+            <a:schemeClr val="lt1"/>
+          </a:fontRef>
+        </p:style>
+        <p:txBody>
+          <a:bodyPr rtlCol="0" anchor="ctr"/>
+          <a:lstStyle/>
+          <a:p>
+            <a:pPr algn="ctr"/>
+          </a:p>
+        </p:txBody>
+      </p:sp>
+      <p:sp>
+        <p:nvSpPr>
+          <p:cNvPr id="66" name="TextBox 65"/>
+          <p:cNvSpPr txBox="1"/>
+          <p:nvPr/>
+        </p:nvSpPr>
+        <p:spPr>
+          <a:xfrm>
+            <a:off x="5458968" y="5742431"/>
+            <a:ext cx="7598664" cy="841248"/>
+          </a:xfrm>
+          <a:prstGeom prst="rect">
+            <a:avLst/>
+          </a:prstGeom>
+          <a:noFill/>
+        </p:spPr>
+        <p:txBody>
+          <a:bodyPr wrap="square" anchor="ctr" lIns="0" rIns="0" tIns="0" bIns="0">
+            <a:spAutoFit/>
+          </a:bodyPr>
+          <a:lstStyle/>
+          <a:p>
+            <a:pPr algn="l">
+              <a:lnSpc>
+                <a:spcPct val="106000"/>
+              </a:lnSpc>
+            </a:pPr>
+            <a:r>
+              <a:rPr sz="1725" b="1">
+                <a:solidFill>
+                  <a:srgbClr val="1A1A1A"/>
+                </a:solidFill>
+                <a:latin typeface="Arial"/>
+                <a:ea typeface="Arial"/>
+              </a:rPr>
+              <a:t>② 전략적 협약(SCA)으로 워크로드가 온다</a:t>
+            </a:r>
+          </a:p>
+          <a:p>
+            <a:pPr algn="l">
+              <a:lnSpc>
+                <a:spcPct val="106000"/>
+              </a:lnSpc>
+            </a:pPr>
+            <a:r>
+              <a:rPr sz="1350" b="0">
+                <a:solidFill>
+                  <a:srgbClr val="1A1A1A"/>
+                </a:solidFill>
+                <a:latin typeface="Arial"/>
+                <a:ea typeface="Arial"/>
+              </a:rPr>
+              <a:t>트레이스 · KV 수명 정책 · 레퍼런스 스펙 자리 · 창은 2027년 상반기까지</a:t>
+            </a:r>
+          </a:p>
+        </p:txBody>
+      </p:sp>
+      <p:sp>
+        <p:nvSpPr>
+          <p:cNvPr id="67" name="Rectangle 66"/>
+          <p:cNvSpPr/>
+          <p:nvPr/>
+        </p:nvSpPr>
+        <p:spPr>
+          <a:xfrm>
+            <a:off x="722376" y="6839712"/>
+            <a:ext cx="3200400" cy="877824"/>
           </a:xfrm>
           <a:prstGeom prst="rect">
             <a:avLst/>
@@ -13227,14 +12960,14 @@
       </p:sp>
       <p:sp>
         <p:nvSpPr>
-          <p:cNvPr id="57" name="Rectangle 56"/>
+          <p:cNvPr id="68" name="Rectangle 67"/>
           <p:cNvSpPr/>
           <p:nvPr/>
         </p:nvSpPr>
         <p:spPr>
           <a:xfrm>
-            <a:off x="722376" y="6949440"/>
-            <a:ext cx="777240" cy="914400"/>
+            <a:off x="722376" y="6839712"/>
+            <a:ext cx="777240" cy="877824"/>
           </a:xfrm>
           <a:prstGeom prst="rect">
             <a:avLst/>
@@ -13271,14 +13004,14 @@
       </p:sp>
       <p:sp>
         <p:nvSpPr>
-          <p:cNvPr id="58" name="TextBox 57"/>
+          <p:cNvPr id="69" name="TextBox 68"/>
           <p:cNvSpPr txBox="1"/>
           <p:nvPr/>
         </p:nvSpPr>
         <p:spPr>
           <a:xfrm>
-            <a:off x="722376" y="6949440"/>
-            <a:ext cx="777240" cy="914400"/>
+            <a:off x="722376" y="6839712"/>
+            <a:ext cx="777240" cy="877824"/>
           </a:xfrm>
           <a:prstGeom prst="rect">
             <a:avLst/>
@@ -13311,14 +13044,14 @@
       </p:sp>
       <p:sp>
         <p:nvSpPr>
-          <p:cNvPr id="59" name="TextBox 58"/>
+          <p:cNvPr id="70" name="TextBox 69"/>
           <p:cNvSpPr txBox="1"/>
           <p:nvPr/>
         </p:nvSpPr>
         <p:spPr>
           <a:xfrm>
-            <a:off x="1636776" y="6949440"/>
-            <a:ext cx="2176272" cy="914400"/>
+            <a:off x="1636776" y="6839712"/>
+            <a:ext cx="2176272" cy="877824"/>
           </a:xfrm>
           <a:prstGeom prst="rect">
             <a:avLst/>
@@ -13368,14 +13101,14 @@
       </p:sp>
       <p:sp>
         <p:nvSpPr>
-          <p:cNvPr id="60" name="Rectangle 59"/>
+          <p:cNvPr id="71" name="Rectangle 70"/>
           <p:cNvSpPr/>
           <p:nvPr/>
         </p:nvSpPr>
         <p:spPr>
           <a:xfrm>
-            <a:off x="4133087" y="6949440"/>
-            <a:ext cx="3200400" cy="914400"/>
+            <a:off x="4133087" y="6839712"/>
+            <a:ext cx="3200400" cy="877824"/>
           </a:xfrm>
           <a:prstGeom prst="rect">
             <a:avLst/>
@@ -13414,14 +13147,14 @@
       </p:sp>
       <p:sp>
         <p:nvSpPr>
-          <p:cNvPr id="61" name="Rectangle 60"/>
+          <p:cNvPr id="72" name="Rectangle 71"/>
           <p:cNvSpPr/>
           <p:nvPr/>
         </p:nvSpPr>
         <p:spPr>
           <a:xfrm>
-            <a:off x="4133087" y="6949440"/>
-            <a:ext cx="777240" cy="914400"/>
+            <a:off x="4133087" y="6839712"/>
+            <a:ext cx="777240" cy="877824"/>
           </a:xfrm>
           <a:prstGeom prst="rect">
             <a:avLst/>
@@ -13458,14 +13191,14 @@
       </p:sp>
       <p:sp>
         <p:nvSpPr>
-          <p:cNvPr id="62" name="TextBox 61"/>
+          <p:cNvPr id="73" name="TextBox 72"/>
           <p:cNvSpPr txBox="1"/>
           <p:nvPr/>
         </p:nvSpPr>
         <p:spPr>
           <a:xfrm>
-            <a:off x="4133087" y="6949440"/>
-            <a:ext cx="777240" cy="914400"/>
+            <a:off x="4133087" y="6839712"/>
+            <a:ext cx="777240" cy="877824"/>
           </a:xfrm>
           <a:prstGeom prst="rect">
             <a:avLst/>
@@ -13498,14 +13231,14 @@
       </p:sp>
       <p:sp>
         <p:nvSpPr>
-          <p:cNvPr id="63" name="TextBox 62"/>
+          <p:cNvPr id="74" name="TextBox 73"/>
           <p:cNvSpPr txBox="1"/>
           <p:nvPr/>
         </p:nvSpPr>
         <p:spPr>
           <a:xfrm>
-            <a:off x="5047488" y="6949440"/>
-            <a:ext cx="2176272" cy="914400"/>
+            <a:off x="5047488" y="6839712"/>
+            <a:ext cx="2176272" cy="877824"/>
           </a:xfrm>
           <a:prstGeom prst="rect">
             <a:avLst/>
@@ -13548,21 +13281,21 @@
                 <a:latin typeface="Arial"/>
                 <a:ea typeface="Arial"/>
               </a:rPr>
-              <a:t>+ 고객 상주 Pod</a:t>
-            </a:r>
-          </a:p>
-        </p:txBody>
-      </p:sp>
-      <p:sp>
-        <p:nvSpPr>
-          <p:cNvPr id="64" name="Rectangle 63"/>
+              <a:t>+ FDE Pod 상주</a:t>
+            </a:r>
+          </a:p>
+        </p:txBody>
+      </p:sp>
+      <p:sp>
+        <p:nvSpPr>
+          <p:cNvPr id="75" name="Rectangle 74"/>
           <p:cNvSpPr/>
           <p:nvPr/>
         </p:nvSpPr>
         <p:spPr>
           <a:xfrm>
-            <a:off x="7543800" y="6949440"/>
-            <a:ext cx="3200400" cy="914400"/>
+            <a:off x="7543800" y="6839712"/>
+            <a:ext cx="3200400" cy="877824"/>
           </a:xfrm>
           <a:prstGeom prst="rect">
             <a:avLst/>
@@ -13601,14 +13334,14 @@
       </p:sp>
       <p:sp>
         <p:nvSpPr>
-          <p:cNvPr id="65" name="Rectangle 64"/>
+          <p:cNvPr id="76" name="Rectangle 75"/>
           <p:cNvSpPr/>
           <p:nvPr/>
         </p:nvSpPr>
         <p:spPr>
           <a:xfrm>
-            <a:off x="7543800" y="6949440"/>
-            <a:ext cx="777240" cy="914400"/>
+            <a:off x="7543800" y="6839712"/>
+            <a:ext cx="777240" cy="877824"/>
           </a:xfrm>
           <a:prstGeom prst="rect">
             <a:avLst/>
@@ -13645,14 +13378,14 @@
       </p:sp>
       <p:sp>
         <p:nvSpPr>
-          <p:cNvPr id="66" name="TextBox 65"/>
+          <p:cNvPr id="77" name="TextBox 76"/>
           <p:cNvSpPr txBox="1"/>
           <p:nvPr/>
         </p:nvSpPr>
         <p:spPr>
           <a:xfrm>
-            <a:off x="7543800" y="6949440"/>
-            <a:ext cx="777240" cy="914400"/>
+            <a:off x="7543800" y="6839712"/>
+            <a:ext cx="777240" cy="877824"/>
           </a:xfrm>
           <a:prstGeom prst="rect">
             <a:avLst/>
@@ -13685,14 +13418,14 @@
       </p:sp>
       <p:sp>
         <p:nvSpPr>
-          <p:cNvPr id="67" name="TextBox 66"/>
+          <p:cNvPr id="78" name="TextBox 77"/>
           <p:cNvSpPr txBox="1"/>
           <p:nvPr/>
         </p:nvSpPr>
         <p:spPr>
           <a:xfrm>
-            <a:off x="8458200" y="6949440"/>
-            <a:ext cx="2176272" cy="914400"/>
+            <a:off x="8458200" y="6839712"/>
+            <a:ext cx="2176272" cy="877824"/>
           </a:xfrm>
           <a:prstGeom prst="rect">
             <a:avLst/>
@@ -13742,14 +13475,14 @@
       </p:sp>
       <p:sp>
         <p:nvSpPr>
-          <p:cNvPr id="68" name="Rectangle 67"/>
+          <p:cNvPr id="79" name="Rectangle 78"/>
           <p:cNvSpPr/>
           <p:nvPr/>
         </p:nvSpPr>
         <p:spPr>
           <a:xfrm>
-            <a:off x="10954512" y="6949440"/>
-            <a:ext cx="3200400" cy="914400"/>
+            <a:off x="10954512" y="6839712"/>
+            <a:ext cx="3200400" cy="877824"/>
           </a:xfrm>
           <a:prstGeom prst="rect">
             <a:avLst/>
@@ -13788,14 +13521,14 @@
       </p:sp>
       <p:sp>
         <p:nvSpPr>
-          <p:cNvPr id="69" name="Rectangle 68"/>
+          <p:cNvPr id="80" name="Rectangle 79"/>
           <p:cNvSpPr/>
           <p:nvPr/>
         </p:nvSpPr>
         <p:spPr>
           <a:xfrm>
-            <a:off x="10954512" y="6949440"/>
-            <a:ext cx="777240" cy="914400"/>
+            <a:off x="10954512" y="6839712"/>
+            <a:ext cx="777240" cy="877824"/>
           </a:xfrm>
           <a:prstGeom prst="rect">
             <a:avLst/>
@@ -13832,14 +13565,14 @@
       </p:sp>
       <p:sp>
         <p:nvSpPr>
-          <p:cNvPr id="70" name="TextBox 69"/>
+          <p:cNvPr id="81" name="TextBox 80"/>
           <p:cNvSpPr txBox="1"/>
           <p:nvPr/>
         </p:nvSpPr>
         <p:spPr>
           <a:xfrm>
-            <a:off x="10954512" y="6949440"/>
-            <a:ext cx="777240" cy="914400"/>
+            <a:off x="10954512" y="6839712"/>
+            <a:ext cx="777240" cy="877824"/>
           </a:xfrm>
           <a:prstGeom prst="rect">
             <a:avLst/>
@@ -13872,14 +13605,14 @@
       </p:sp>
       <p:sp>
         <p:nvSpPr>
-          <p:cNvPr id="71" name="TextBox 70"/>
+          <p:cNvPr id="82" name="TextBox 81"/>
           <p:cNvSpPr txBox="1"/>
           <p:nvPr/>
         </p:nvSpPr>
         <p:spPr>
           <a:xfrm>
-            <a:off x="11868912" y="6949440"/>
-            <a:ext cx="2176272" cy="914400"/>
+            <a:off x="11868912" y="6839712"/>
+            <a:ext cx="2176272" cy="877824"/>
           </a:xfrm>
           <a:prstGeom prst="rect">
             <a:avLst/>
@@ -13929,14 +13662,14 @@
       </p:sp>
       <p:sp>
         <p:nvSpPr>
-          <p:cNvPr id="72" name="Rectangle 71"/>
+          <p:cNvPr id="83" name="Rectangle 82"/>
           <p:cNvSpPr/>
           <p:nvPr/>
         </p:nvSpPr>
         <p:spPr>
           <a:xfrm>
-            <a:off x="14365224" y="6949440"/>
-            <a:ext cx="3200400" cy="914400"/>
+            <a:off x="14365224" y="6839712"/>
+            <a:ext cx="3200400" cy="877824"/>
           </a:xfrm>
           <a:prstGeom prst="rect">
             <a:avLst/>
@@ -13975,14 +13708,14 @@
       </p:sp>
       <p:sp>
         <p:nvSpPr>
-          <p:cNvPr id="73" name="Rectangle 72"/>
+          <p:cNvPr id="84" name="Rectangle 83"/>
           <p:cNvSpPr/>
           <p:nvPr/>
         </p:nvSpPr>
         <p:spPr>
           <a:xfrm>
-            <a:off x="14365224" y="6949440"/>
-            <a:ext cx="777240" cy="914400"/>
+            <a:off x="14365224" y="6839712"/>
+            <a:ext cx="777240" cy="877824"/>
           </a:xfrm>
           <a:prstGeom prst="rect">
             <a:avLst/>
@@ -14019,14 +13752,14 @@
       </p:sp>
       <p:sp>
         <p:nvSpPr>
-          <p:cNvPr id="74" name="TextBox 73"/>
+          <p:cNvPr id="85" name="TextBox 84"/>
           <p:cNvSpPr txBox="1"/>
           <p:nvPr/>
         </p:nvSpPr>
         <p:spPr>
           <a:xfrm>
-            <a:off x="14365224" y="6949440"/>
-            <a:ext cx="777240" cy="914400"/>
+            <a:off x="14365224" y="6839712"/>
+            <a:ext cx="777240" cy="877824"/>
           </a:xfrm>
           <a:prstGeom prst="rect">
             <a:avLst/>
@@ -14059,14 +13792,14 @@
       </p:sp>
       <p:sp>
         <p:nvSpPr>
-          <p:cNvPr id="75" name="TextBox 74"/>
+          <p:cNvPr id="86" name="TextBox 85"/>
           <p:cNvSpPr txBox="1"/>
           <p:nvPr/>
         </p:nvSpPr>
         <p:spPr>
           <a:xfrm>
-            <a:off x="15279624" y="6949440"/>
-            <a:ext cx="2176272" cy="914400"/>
+            <a:off x="15279624" y="6839712"/>
+            <a:ext cx="2176272" cy="877824"/>
           </a:xfrm>
           <a:prstGeom prst="rect">
             <a:avLst/>
@@ -14092,7 +13825,7 @@
                 <a:latin typeface="Arial"/>
                 <a:ea typeface="Arial"/>
               </a:rPr>
-              <a:t>공동 플랫폼 계약 · 보증</a:t>
+              <a:t>SCA · 수명 보증</a:t>
             </a:r>
           </a:p>
           <a:p>
@@ -14116,13 +13849,13 @@
       </p:sp>
       <p:sp>
         <p:nvSpPr>
-          <p:cNvPr id="76" name="Rectangle 75"/>
+          <p:cNvPr id="87" name="Rectangle 86"/>
           <p:cNvSpPr/>
           <p:nvPr/>
         </p:nvSpPr>
         <p:spPr>
           <a:xfrm>
-            <a:off x="905256" y="8430767"/>
+            <a:off x="905256" y="8247888"/>
             <a:ext cx="16477488" cy="18288"/>
           </a:xfrm>
           <a:prstGeom prst="rect">
@@ -14160,13 +13893,13 @@
       </p:sp>
       <p:sp>
         <p:nvSpPr>
-          <p:cNvPr id="77" name="Oval 76"/>
+          <p:cNvPr id="88" name="Oval 87"/>
           <p:cNvSpPr/>
           <p:nvPr/>
         </p:nvSpPr>
         <p:spPr>
           <a:xfrm>
-            <a:off x="832104" y="8366760"/>
+            <a:off x="832104" y="8183880"/>
             <a:ext cx="146304" cy="146304"/>
           </a:xfrm>
           <a:prstGeom prst="ellipse">
@@ -14204,13 +13937,13 @@
       </p:sp>
       <p:sp>
         <p:nvSpPr>
-          <p:cNvPr id="78" name="TextBox 77"/>
+          <p:cNvPr id="89" name="TextBox 88"/>
           <p:cNvSpPr txBox="1"/>
           <p:nvPr/>
         </p:nvSpPr>
         <p:spPr>
           <a:xfrm>
-            <a:off x="1088136" y="8119871"/>
+            <a:off x="1088136" y="7936992"/>
             <a:ext cx="5157216" cy="274320"/>
           </a:xfrm>
           <a:prstGeom prst="rect">
@@ -14247,20 +13980,20 @@
                 <a:latin typeface="Arial"/>
                 <a:ea typeface="Arial"/>
               </a:rPr>
-              <a:t>제품 정의 · 업스트림 PR · Anthropic 조항 · Pod 1호</a:t>
-            </a:r>
-          </a:p>
-        </p:txBody>
-      </p:sp>
-      <p:sp>
-        <p:nvSpPr>
-          <p:cNvPr id="79" name="Oval 78"/>
+              <a:t>제품 정의 · 업스트림 PR · SCA 조항 제안 · FDE Pod 1호</a:t>
+            </a:r>
+          </a:p>
+        </p:txBody>
+      </p:sp>
+      <p:sp>
+        <p:nvSpPr>
+          <p:cNvPr id="90" name="Oval 89"/>
           <p:cNvSpPr/>
           <p:nvPr/>
         </p:nvSpPr>
         <p:spPr>
           <a:xfrm>
-            <a:off x="6446520" y="8366760"/>
+            <a:off x="6446520" y="8183880"/>
             <a:ext cx="146304" cy="146304"/>
           </a:xfrm>
           <a:prstGeom prst="ellipse">
@@ -14298,13 +14031,13 @@
       </p:sp>
       <p:sp>
         <p:nvSpPr>
-          <p:cNvPr id="80" name="TextBox 79"/>
+          <p:cNvPr id="91" name="TextBox 90"/>
           <p:cNvSpPr txBox="1"/>
           <p:nvPr/>
         </p:nvSpPr>
         <p:spPr>
           <a:xfrm>
-            <a:off x="6702552" y="8119871"/>
+            <a:off x="6702552" y="7936992"/>
             <a:ext cx="5157216" cy="274320"/>
           </a:xfrm>
           <a:prstGeom prst="rect">
@@ -14341,20 +14074,20 @@
                 <a:latin typeface="Arial"/>
                 <a:ea typeface="Arial"/>
               </a:rPr>
-              <a:t>자회사 · Pod 2사 상주 · CMX 인증 · 계약 1건</a:t>
-            </a:r>
-          </a:p>
-        </p:txBody>
-      </p:sp>
-      <p:sp>
-        <p:nvSpPr>
-          <p:cNvPr id="81" name="Oval 80"/>
+              <a:t>자회사 · FDE 2사 상주 · CMX 인증 · SCA 1건</a:t>
+            </a:r>
+          </a:p>
+        </p:txBody>
+      </p:sp>
+      <p:sp>
+        <p:nvSpPr>
+          <p:cNvPr id="92" name="Oval 91"/>
           <p:cNvSpPr/>
           <p:nvPr/>
         </p:nvSpPr>
         <p:spPr>
           <a:xfrm>
-            <a:off x="12060936" y="8366760"/>
+            <a:off x="12060936" y="8183880"/>
             <a:ext cx="146304" cy="146304"/>
           </a:xfrm>
           <a:prstGeom prst="ellipse">
@@ -14392,13 +14125,13 @@
       </p:sp>
       <p:sp>
         <p:nvSpPr>
-          <p:cNvPr id="82" name="TextBox 81"/>
+          <p:cNvPr id="93" name="TextBox 92"/>
           <p:cNvSpPr txBox="1"/>
           <p:nvPr/>
         </p:nvSpPr>
         <p:spPr>
           <a:xfrm>
-            <a:off x="12316967" y="8119871"/>
+            <a:off x="12316967" y="7936992"/>
             <a:ext cx="5157216" cy="274320"/>
           </a:xfrm>
           <a:prstGeom prst="rect">
@@ -14435,14 +14168,14 @@
                 <a:latin typeface="Arial"/>
                 <a:ea typeface="Arial"/>
               </a:rPr>
-              <a:t>캐시 티어 QLC 25%+ · 계약 3건 · 기본 백엔드</a:t>
-            </a:r>
-          </a:p>
-        </p:txBody>
-      </p:sp>
-      <p:sp>
-        <p:nvSpPr>
-          <p:cNvPr id="83" name="Rectangle 82"/>
+              <a:t>캐시 티어 QLC 25%+ · SCA 3건 · 기본 백엔드</a:t>
+            </a:r>
+          </a:p>
+        </p:txBody>
+      </p:sp>
+      <p:sp>
+        <p:nvSpPr>
+          <p:cNvPr id="94" name="Rectangle 93"/>
           <p:cNvSpPr/>
           <p:nvPr/>
         </p:nvSpPr>
@@ -14486,7 +14219,7 @@
       </p:sp>
       <p:sp>
         <p:nvSpPr>
-          <p:cNvPr id="84" name="TextBox 83"/>
+          <p:cNvPr id="95" name="TextBox 94"/>
           <p:cNvSpPr txBox="1"/>
           <p:nvPr/>
         </p:nvSpPr>
@@ -14526,7 +14259,7 @@
       </p:sp>
       <p:sp>
         <p:nvSpPr>
-          <p:cNvPr id="85" name="TextBox 84"/>
+          <p:cNvPr id="96" name="TextBox 95"/>
           <p:cNvSpPr txBox="1"/>
           <p:nvPr/>
         </p:nvSpPr>
@@ -14559,14 +14292,14 @@
                 <a:latin typeface="Arial"/>
                 <a:ea typeface="Arial"/>
               </a:rPr>
-              <a:t>① 자회사 설립과 별도 보상 승인   ② Anthropic 공동 최적화 조항 · NVIDIA 기술 협의 착수   ③ Co-Design Pod 1호 발족</a:t>
-            </a:r>
-          </a:p>
-        </p:txBody>
-      </p:sp>
-      <p:sp>
-        <p:nvSpPr>
-          <p:cNvPr id="86" name="TextBox 85"/>
+              <a:t>① 자회사 설립과 별도 보상 승인   ② Anthropic SCA 공동 설계 조항 · NVIDIA 기술 협의 착수   ③ FDE Pod 1호 발족</a:t>
+            </a:r>
+          </a:p>
+        </p:txBody>
+      </p:sp>
+      <p:sp>
+        <p:nvSpPr>
+          <p:cNvPr id="97" name="TextBox 96"/>
           <p:cNvSpPr txBox="1"/>
           <p:nvPr/>
         </p:nvSpPr>
@@ -14599,14 +14332,14 @@
                 <a:latin typeface="Arial"/>
                 <a:ea typeface="Arial"/>
               </a:rPr>
-              <a:t>출처: SK hynix 뉴스룸·CNBC(2026-01), levels.fyi 2026, Micron IR·10-Q, Pure PR, Blackstone·Bloomberg(DDN) · 규모·시점은 추정, 사내 수치는 [사내 확인]</a:t>
-            </a:r>
-          </a:p>
-        </p:txBody>
-      </p:sp>
-      <p:sp>
-        <p:nvSpPr>
-          <p:cNvPr id="87" name="TextBox 86"/>
+              <a:t>출처: Pragmatic Engineer·FDE Academy·MindStudio(Palantir FDE), Micron IR 2026-06-22·10-Q(SCA 16건·$22B), SK hynix 뉴스룸(AI Company), levels.fyi 2026 · 규모·시점은 추정, 사내 수치는 [사내 확인]</a:t>
+            </a:r>
+          </a:p>
+        </p:txBody>
+      </p:sp>
+      <p:sp>
+        <p:nvSpPr>
+          <p:cNvPr id="98" name="TextBox 97"/>
           <p:cNvSpPr txBox="1"/>
           <p:nvPr/>
         </p:nvSpPr>

--- a/outputs/presentation/qlc-ssd-strategy.pptx
+++ b/outputs/presentation/qlc-ssd-strategy.pptx
@@ -644,7 +644,7 @@
           <a:lstStyle/>
           <a:p>
             <a:r>
-              <a:t>실행 전략 한 장입니다. 목표는 두 가지이고 각각 선례가 있습니다. ① FDE(Forward Deployed Engineer)가 고객 시스템 안으로 들어갑니다. Palantir가 창안한 역할로 내부 코드명 Delta, 고객 환경 내부에 상주하며 실제 운영 제약 아래서 프로덕션 시스템을 직접 구축하고 청구 시간이 아니라 성과로 평가받습니다. 명시적 요구와 실제 요구의 간극을 현장에서 코드로 메우고, 특정 고객용 거친 해법(gravel road)이 제품 표준 기능(paved highway)으로 포장되는 피드백 루프를 만듭니다. 파급: 고객 락인의 동력이자 640% 주가 수익률의 원천으로 회자되고, Anthropic·OpenAI가 엔터프라이즈 GTM 전략으로 채택했습니다(OpenAI는 2025년 초 FDE 팀 2명→10명+). 우리는 Co-Design Pod를 FDE 모델로 운영하되, 메모리는 제조 리드타임이 길므로 시스템 아키텍트·TCO 모델링 역량을 결합합니다. ② 전략적 협약(SCA)으로 워크로드가 옵니다. 선례는 Micron↔Anthropic(2026-06-22): 공동 설계(HBM·DRAM·SSD를 Claude 학습·추론 워크로드에 맞춰 공동 최적화) + 다년 공급 + 운영 통합(Claude 사내 배치) + 자본(Series H)을 한 계약에 묶었습니다. Micron은 SCA 16건, 최소 계약매출 약 $100B, 예치금 $22B를 공시했습니다. 삼성·SK의 Anthropic 공급계약에는 공동 설계 조항이 없으므로 우리가 먼저 제안합니다. 창은 공급 완화 전인 2027년 상반기까지입니다. 다섯 축은 두 목표를 여는 수단이고(전략·조직·인사·문화·재무), 90일에 제품 정의·업스트림 PR·SCA 조항 제안·FDE Pod 1호, 1년에 자회사·FDE 2사 상주·CMX 인증·SCA 1건, 3년에 캐시 티어 QLC 25%+·SCA 3건입니다. 결정 요청 세 가지입니다.</a:t>
+              <a:t>실행 전략 한 장입니다. 목표는 두 가지이고 각각 선례가 있습니다. ① FDE(Forward Deployed Engineer)가 고객 시스템 안으로 들어갑니다. Palantir가 창안한 역할로 내부 코드명 Delta, 고객 환경 내부에 상주하며 실제 운영 제약 아래서 프로덕션 시스템을 직접 구축하고 청구 시간이 아니라 성과로 평가받습니다. 명시적 요구와 실제 요구의 간극을 현장에서 코드로 메우고, 특정 고객용 거친 해법(gravel road)이 제품 표준 기능(paved highway)으로 포장되는 피드백 루프를 만듭니다. 파급: 고객 락인의 동력이자 640% 주가 수익률의 원천으로 회자되고, Anthropic·OpenAI가 엔터프라이즈 GTM 전략으로 채택했습니다(OpenAI는 2025년 초 FDE 팀 2명→10명+). 우리는 Co-Design Pod를 FDE 모델로 운영하되, 메모리는 제조 리드타임이 길므로 시스템 아키텍트·TCO 모델링 역량을 결합합니다. ② 전략적 협약(SCA)으로 워크로드가 옵니다. 선례는 Micron↔Anthropic(2026-06-22): 공동 설계(HBM·DRAM·SSD를 Claude 학습·추론 워크로드에 맞춰 공동 최적화) + 다년 공급 + 운영 통합(Claude 사내 배치) + 자본(Series H)을 한 계약에 묶었습니다. Micron은 SCA 16건, 최소 계약매출 약 $100B, 예치금 $22B를 공시했습니다. 삼성·SK의 Anthropic 공급계약에는 공동 설계 조항이 없으므로 우리가 먼저 제안합니다. 창은 공급 완화 전인 2027년 상반기까지입니다. 다섯 축은 두 목표를 여는 수단입니다. 전략은 추론 캐시 티어 한 곳에 베팅하고 HDD 대체는 하지 않으며 창은 2027년 상반기까지입니다. 조직은 실리콘밸리 소프트웨어 자회사와 FDE Pod에 더해 시스템 소프트웨어 조직을 강화합니다. 인사는 고객의 시스템을 잘 이해하는 시스템 소프트웨어 전문가를 채용하고 양성하는 것이 핵심이며, 채용 기준은 고객 시스템(추론 엔진·KV 캐시 관리자·I/O·커널 코드)을 읽고 고칠 수 있는가입니다. 미주 고객과의 협업을 위해 현지 채용을 늘리고, 그것이 가능하도록 별도 보상 체계를 둡니다. 문화는 업스트림 우선을 넘어 오픈소스 생태계를 주도하는 기업 문화로 갑니다. 기여자에서 메인테이너·커미터로 올라가고, 우리가 운영하는 레퍼런스 프로젝트에 외부 기여가 들어오게 하며, KV cache 실측을 업계 최초로 공개합니다. 재무는 SCA·수명 보증 상품·지분으로 접근권을 사고 선급을 R&amp;D 재원으로 씁니다. 90일에 제품 정의·업스트림 PR·SCA 조항 제안·FDE Pod 1호, 1년에 자회사·FDE 2사 상주·CMX 인증·SCA 1건, 3년에 캐시 티어 QLC 25%+·SCA 3건입니다. 결정 요청 세 가지입니다.</a:t>
             </a:r>
           </a:p>
         </p:txBody>
@@ -10890,7 +10890,7 @@
                 <a:latin typeface="Arial"/>
                 <a:ea typeface="Arial"/>
               </a:rPr>
-              <a:t>자회사 · 별도 보상 · 업스트림 문화가 뒤를 받칩니다</a:t>
+              <a:t>자회사 · 현지 채용 시스템 SW 전문가 · 오픈소스 주도 문화가 뒤를 받칩니다</a:t>
             </a:r>
           </a:p>
         </p:txBody>
@@ -12921,7 +12921,7 @@
         <p:spPr>
           <a:xfrm>
             <a:off x="722376" y="6839712"/>
-            <a:ext cx="3200400" cy="877824"/>
+            <a:ext cx="3200400" cy="1005840"/>
           </a:xfrm>
           <a:prstGeom prst="rect">
             <a:avLst/>
@@ -12967,7 +12967,7 @@
         <p:spPr>
           <a:xfrm>
             <a:off x="722376" y="6839712"/>
-            <a:ext cx="777240" cy="877824"/>
+            <a:ext cx="713232" cy="1005840"/>
           </a:xfrm>
           <a:prstGeom prst="rect">
             <a:avLst/>
@@ -13011,7 +13011,7 @@
         <p:spPr>
           <a:xfrm>
             <a:off x="722376" y="6839712"/>
-            <a:ext cx="777240" cy="877824"/>
+            <a:ext cx="713232" cy="1005840"/>
           </a:xfrm>
           <a:prstGeom prst="rect">
             <a:avLst/>
@@ -13050,8 +13050,8 @@
         </p:nvSpPr>
         <p:spPr>
           <a:xfrm>
-            <a:off x="1636776" y="6839712"/>
-            <a:ext cx="2176272" cy="877824"/>
+            <a:off x="1545336" y="6839712"/>
+            <a:ext cx="2286000" cy="1005840"/>
           </a:xfrm>
           <a:prstGeom prst="rect">
             <a:avLst/>
@@ -13070,7 +13070,7 @@
               </a:lnSpc>
             </a:pPr>
             <a:r>
-              <a:rPr sz="1350" b="1">
+              <a:rPr sz="1275" b="1">
                 <a:solidFill>
                   <a:srgbClr val="1A1A1A"/>
                 </a:solidFill>
@@ -13087,7 +13087,7 @@
               </a:lnSpc>
             </a:pPr>
             <a:r>
-              <a:rPr sz="1350" b="0">
+              <a:rPr sz="1200" b="0">
                 <a:solidFill>
                   <a:srgbClr val="555555"/>
                 </a:solidFill>
@@ -13095,6 +13095,23 @@
                 <a:ea typeface="Arial"/>
               </a:rPr>
               <a:t>HDD 대체는 안 함</a:t>
+            </a:r>
+          </a:p>
+          <a:p>
+            <a:pPr algn="l">
+              <a:lnSpc>
+                <a:spcPct val="106000"/>
+              </a:lnSpc>
+            </a:pPr>
+            <a:r>
+              <a:rPr sz="1200" b="0">
+                <a:solidFill>
+                  <a:srgbClr val="555555"/>
+                </a:solidFill>
+                <a:latin typeface="Arial"/>
+                <a:ea typeface="Arial"/>
+              </a:rPr>
+              <a:t>창은 2027년 상반기까지</a:t>
             </a:r>
           </a:p>
         </p:txBody>
@@ -13108,7 +13125,7 @@
         <p:spPr>
           <a:xfrm>
             <a:off x="4133087" y="6839712"/>
-            <a:ext cx="3200400" cy="877824"/>
+            <a:ext cx="3200400" cy="1005840"/>
           </a:xfrm>
           <a:prstGeom prst="rect">
             <a:avLst/>
@@ -13154,7 +13171,7 @@
         <p:spPr>
           <a:xfrm>
             <a:off x="4133087" y="6839712"/>
-            <a:ext cx="777240" cy="877824"/>
+            <a:ext cx="713232" cy="1005840"/>
           </a:xfrm>
           <a:prstGeom prst="rect">
             <a:avLst/>
@@ -13198,7 +13215,7 @@
         <p:spPr>
           <a:xfrm>
             <a:off x="4133087" y="6839712"/>
-            <a:ext cx="777240" cy="877824"/>
+            <a:ext cx="713232" cy="1005840"/>
           </a:xfrm>
           <a:prstGeom prst="rect">
             <a:avLst/>
@@ -13237,8 +13254,8 @@
         </p:nvSpPr>
         <p:spPr>
           <a:xfrm>
-            <a:off x="5047488" y="6839712"/>
-            <a:ext cx="2176272" cy="877824"/>
+            <a:off x="4956048" y="6839712"/>
+            <a:ext cx="2286000" cy="1005840"/>
           </a:xfrm>
           <a:prstGeom prst="rect">
             <a:avLst/>
@@ -13257,7 +13274,7 @@
               </a:lnSpc>
             </a:pPr>
             <a:r>
-              <a:rPr sz="1350" b="1">
+              <a:rPr sz="1275" b="1">
                 <a:solidFill>
                   <a:srgbClr val="1A1A1A"/>
                 </a:solidFill>
@@ -13274,14 +13291,31 @@
               </a:lnSpc>
             </a:pPr>
             <a:r>
-              <a:rPr sz="1350" b="0">
+              <a:rPr sz="1200" b="0">
                 <a:solidFill>
                   <a:srgbClr val="555555"/>
                 </a:solidFill>
                 <a:latin typeface="Arial"/>
                 <a:ea typeface="Arial"/>
               </a:rPr>
-              <a:t>+ FDE Pod 상주</a:t>
+              <a:t>FDE Pod 고객 상주</a:t>
+            </a:r>
+          </a:p>
+          <a:p>
+            <a:pPr algn="l">
+              <a:lnSpc>
+                <a:spcPct val="106000"/>
+              </a:lnSpc>
+            </a:pPr>
+            <a:r>
+              <a:rPr sz="1200" b="0">
+                <a:solidFill>
+                  <a:srgbClr val="555555"/>
+                </a:solidFill>
+                <a:latin typeface="Arial"/>
+                <a:ea typeface="Arial"/>
+              </a:rPr>
+              <a:t>시스템 SW 조직 강화</a:t>
             </a:r>
           </a:p>
         </p:txBody>
@@ -13295,7 +13329,7 @@
         <p:spPr>
           <a:xfrm>
             <a:off x="7543800" y="6839712"/>
-            <a:ext cx="3200400" cy="877824"/>
+            <a:ext cx="3200400" cy="1005840"/>
           </a:xfrm>
           <a:prstGeom prst="rect">
             <a:avLst/>
@@ -13341,7 +13375,7 @@
         <p:spPr>
           <a:xfrm>
             <a:off x="7543800" y="6839712"/>
-            <a:ext cx="777240" cy="877824"/>
+            <a:ext cx="713232" cy="1005840"/>
           </a:xfrm>
           <a:prstGeom prst="rect">
             <a:avLst/>
@@ -13385,7 +13419,7 @@
         <p:spPr>
           <a:xfrm>
             <a:off x="7543800" y="6839712"/>
-            <a:ext cx="777240" cy="877824"/>
+            <a:ext cx="713232" cy="1005840"/>
           </a:xfrm>
           <a:prstGeom prst="rect">
             <a:avLst/>
@@ -13424,8 +13458,8 @@
         </p:nvSpPr>
         <p:spPr>
           <a:xfrm>
-            <a:off x="8458200" y="6839712"/>
-            <a:ext cx="2176272" cy="877824"/>
+            <a:off x="8366760" y="6839712"/>
+            <a:ext cx="2286000" cy="1005840"/>
           </a:xfrm>
           <a:prstGeom prst="rect">
             <a:avLst/>
@@ -13444,14 +13478,14 @@
               </a:lnSpc>
             </a:pPr>
             <a:r>
-              <a:rPr sz="1350" b="1">
+              <a:rPr sz="1275" b="1">
                 <a:solidFill>
                   <a:srgbClr val="1A1A1A"/>
                 </a:solidFill>
                 <a:latin typeface="Arial"/>
                 <a:ea typeface="Arial"/>
               </a:rPr>
-              <a:t>별도 보상 · 앵커 5명</a:t>
+              <a:t>시스템 SW 전문가 채용·양성</a:t>
             </a:r>
           </a:p>
           <a:p>
@@ -13461,14 +13495,31 @@
               </a:lnSpc>
             </a:pPr>
             <a:r>
-              <a:rPr sz="1350" b="0">
+              <a:rPr sz="1200" b="0">
                 <a:solidFill>
                   <a:srgbClr val="555555"/>
                 </a:solidFill>
                 <a:latin typeface="Arial"/>
                 <a:ea typeface="Arial"/>
               </a:rPr>
-              <a:t>본사 엔지니어 상주</a:t>
+              <a:t>기준: 고객 시스템 이해</a:t>
+            </a:r>
+          </a:p>
+          <a:p>
+            <a:pPr algn="l">
+              <a:lnSpc>
+                <a:spcPct val="106000"/>
+              </a:lnSpc>
+            </a:pPr>
+            <a:r>
+              <a:rPr sz="1200" b="0">
+                <a:solidFill>
+                  <a:srgbClr val="555555"/>
+                </a:solidFill>
+                <a:latin typeface="Arial"/>
+                <a:ea typeface="Arial"/>
+              </a:rPr>
+              <a:t>미주 현지 채용 확대 · 별도 보상</a:t>
             </a:r>
           </a:p>
         </p:txBody>
@@ -13482,7 +13533,7 @@
         <p:spPr>
           <a:xfrm>
             <a:off x="10954512" y="6839712"/>
-            <a:ext cx="3200400" cy="877824"/>
+            <a:ext cx="3200400" cy="1005840"/>
           </a:xfrm>
           <a:prstGeom prst="rect">
             <a:avLst/>
@@ -13528,7 +13579,7 @@
         <p:spPr>
           <a:xfrm>
             <a:off x="10954512" y="6839712"/>
-            <a:ext cx="777240" cy="877824"/>
+            <a:ext cx="713232" cy="1005840"/>
           </a:xfrm>
           <a:prstGeom prst="rect">
             <a:avLst/>
@@ -13572,7 +13623,7 @@
         <p:spPr>
           <a:xfrm>
             <a:off x="10954512" y="6839712"/>
-            <a:ext cx="777240" cy="877824"/>
+            <a:ext cx="713232" cy="1005840"/>
           </a:xfrm>
           <a:prstGeom prst="rect">
             <a:avLst/>
@@ -13611,8 +13662,8 @@
         </p:nvSpPr>
         <p:spPr>
           <a:xfrm>
-            <a:off x="11868912" y="6839712"/>
-            <a:ext cx="2176272" cy="877824"/>
+            <a:off x="11777472" y="6839712"/>
+            <a:ext cx="2286000" cy="1005840"/>
           </a:xfrm>
           <a:prstGeom prst="rect">
             <a:avLst/>
@@ -13631,14 +13682,14 @@
               </a:lnSpc>
             </a:pPr>
             <a:r>
-              <a:rPr sz="1350" b="1">
+              <a:rPr sz="1275" b="1">
                 <a:solidFill>
                   <a:srgbClr val="1A1A1A"/>
                 </a:solidFill>
                 <a:latin typeface="Arial"/>
                 <a:ea typeface="Arial"/>
               </a:rPr>
-              <a:t>업스트림 우선</a:t>
+              <a:t>오픈소스 생태계를 주도</a:t>
             </a:r>
           </a:p>
           <a:p>
@@ -13648,14 +13699,31 @@
               </a:lnSpc>
             </a:pPr>
             <a:r>
-              <a:rPr sz="1350" b="0">
+              <a:rPr sz="1200" b="0">
                 <a:solidFill>
                   <a:srgbClr val="555555"/>
                 </a:solidFill>
                 <a:latin typeface="Arial"/>
                 <a:ea typeface="Arial"/>
               </a:rPr>
-              <a:t>KV 실측 최초 공개</a:t>
+              <a:t>메인테이너·커미터 배출</a:t>
+            </a:r>
+          </a:p>
+          <a:p>
+            <a:pPr algn="l">
+              <a:lnSpc>
+                <a:spcPct val="106000"/>
+              </a:lnSpc>
+            </a:pPr>
+            <a:r>
+              <a:rPr sz="1200" b="0">
+                <a:solidFill>
+                  <a:srgbClr val="555555"/>
+                </a:solidFill>
+                <a:latin typeface="Arial"/>
+                <a:ea typeface="Arial"/>
+              </a:rPr>
+              <a:t>업스트림 우선 · 실측 공개</a:t>
             </a:r>
           </a:p>
         </p:txBody>
@@ -13669,7 +13737,7 @@
         <p:spPr>
           <a:xfrm>
             <a:off x="14365224" y="6839712"/>
-            <a:ext cx="3200400" cy="877824"/>
+            <a:ext cx="3200400" cy="1005840"/>
           </a:xfrm>
           <a:prstGeom prst="rect">
             <a:avLst/>
@@ -13715,7 +13783,7 @@
         <p:spPr>
           <a:xfrm>
             <a:off x="14365224" y="6839712"/>
-            <a:ext cx="777240" cy="877824"/>
+            <a:ext cx="713232" cy="1005840"/>
           </a:xfrm>
           <a:prstGeom prst="rect">
             <a:avLst/>
@@ -13759,7 +13827,7 @@
         <p:spPr>
           <a:xfrm>
             <a:off x="14365224" y="6839712"/>
-            <a:ext cx="777240" cy="877824"/>
+            <a:ext cx="713232" cy="1005840"/>
           </a:xfrm>
           <a:prstGeom prst="rect">
             <a:avLst/>
@@ -13798,8 +13866,8 @@
         </p:nvSpPr>
         <p:spPr>
           <a:xfrm>
-            <a:off x="15279624" y="6839712"/>
-            <a:ext cx="2176272" cy="877824"/>
+            <a:off x="15188184" y="6839712"/>
+            <a:ext cx="2286000" cy="1005840"/>
           </a:xfrm>
           <a:prstGeom prst="rect">
             <a:avLst/>
@@ -13818,14 +13886,14 @@
               </a:lnSpc>
             </a:pPr>
             <a:r>
-              <a:rPr sz="1350" b="1">
+              <a:rPr sz="1275" b="1">
                 <a:solidFill>
                   <a:srgbClr val="1A1A1A"/>
                 </a:solidFill>
                 <a:latin typeface="Arial"/>
                 <a:ea typeface="Arial"/>
               </a:rPr>
-              <a:t>SCA · 수명 보증</a:t>
+              <a:t>SCA · 수명 보증 상품</a:t>
             </a:r>
           </a:p>
           <a:p>
@@ -13835,7 +13903,7 @@
               </a:lnSpc>
             </a:pPr>
             <a:r>
-              <a:rPr sz="1350" b="0">
+              <a:rPr sz="1200" b="0">
                 <a:solidFill>
                   <a:srgbClr val="555555"/>
                 </a:solidFill>
@@ -13843,6 +13911,23 @@
                 <a:ea typeface="Arial"/>
               </a:rPr>
               <a:t>지분으로 접근권</a:t>
+            </a:r>
+          </a:p>
+          <a:p>
+            <a:pPr algn="l">
+              <a:lnSpc>
+                <a:spcPct val="106000"/>
+              </a:lnSpc>
+            </a:pPr>
+            <a:r>
+              <a:rPr sz="1200" b="0">
+                <a:solidFill>
+                  <a:srgbClr val="555555"/>
+                </a:solidFill>
+                <a:latin typeface="Arial"/>
+                <a:ea typeface="Arial"/>
+              </a:rPr>
+              <a:t>선급이 R&amp;D 재원</a:t>
             </a:r>
           </a:p>
         </p:txBody>
@@ -13855,7 +13940,7 @@
         </p:nvSpPr>
         <p:spPr>
           <a:xfrm>
-            <a:off x="905256" y="8247888"/>
+            <a:off x="905256" y="8357615"/>
             <a:ext cx="16477488" cy="18288"/>
           </a:xfrm>
           <a:prstGeom prst="rect">
@@ -13899,7 +13984,7 @@
         </p:nvSpPr>
         <p:spPr>
           <a:xfrm>
-            <a:off x="832104" y="8183880"/>
+            <a:off x="832104" y="8293608"/>
             <a:ext cx="146304" cy="146304"/>
           </a:xfrm>
           <a:prstGeom prst="ellipse">
@@ -13943,7 +14028,7 @@
         </p:nvSpPr>
         <p:spPr>
           <a:xfrm>
-            <a:off x="1088136" y="7936992"/>
+            <a:off x="1088136" y="8046719"/>
             <a:ext cx="5157216" cy="274320"/>
           </a:xfrm>
           <a:prstGeom prst="rect">
@@ -13993,7 +14078,7 @@
         </p:nvSpPr>
         <p:spPr>
           <a:xfrm>
-            <a:off x="6446520" y="8183880"/>
+            <a:off x="6446520" y="8293608"/>
             <a:ext cx="146304" cy="146304"/>
           </a:xfrm>
           <a:prstGeom prst="ellipse">
@@ -14037,7 +14122,7 @@
         </p:nvSpPr>
         <p:spPr>
           <a:xfrm>
-            <a:off x="6702552" y="7936992"/>
+            <a:off x="6702552" y="8046719"/>
             <a:ext cx="5157216" cy="274320"/>
           </a:xfrm>
           <a:prstGeom prst="rect">
@@ -14087,7 +14172,7 @@
         </p:nvSpPr>
         <p:spPr>
           <a:xfrm>
-            <a:off x="12060936" y="8183880"/>
+            <a:off x="12060936" y="8293608"/>
             <a:ext cx="146304" cy="146304"/>
           </a:xfrm>
           <a:prstGeom prst="ellipse">
@@ -14131,7 +14216,7 @@
         </p:nvSpPr>
         <p:spPr>
           <a:xfrm>
-            <a:off x="12316967" y="7936992"/>
+            <a:off x="12316967" y="8046719"/>
             <a:ext cx="5157216" cy="274320"/>
           </a:xfrm>
           <a:prstGeom prst="rect">
@@ -14285,14 +14370,14 @@
               </a:lnSpc>
             </a:pPr>
             <a:r>
-              <a:rPr sz="2000" b="1">
+              <a:rPr sz="1900" b="1">
                 <a:solidFill>
                   <a:srgbClr val="FFFFFF"/>
                 </a:solidFill>
                 <a:latin typeface="Arial"/>
                 <a:ea typeface="Arial"/>
               </a:rPr>
-              <a:t>① 자회사 설립과 별도 보상 승인   ② Anthropic SCA 공동 설계 조항 · NVIDIA 기술 협의 착수   ③ FDE Pod 1호 발족</a:t>
+              <a:t>① 자회사 설립 · 별도 보상 · 미주 현지 채용 승인   ② Anthropic SCA 공동 설계 조항 · NVIDIA 기술 협의 착수   ③ FDE Pod 1호 발족</a:t>
             </a:r>
           </a:p>
         </p:txBody>

--- a/outputs/presentation/qlc-ssd-strategy.pptx
+++ b/outputs/presentation/qlc-ssd-strategy.pptx
@@ -644,7 +644,7 @@
           <a:lstStyle/>
           <a:p>
             <a:r>
-              <a:t>실행 전략 한 장입니다. 목표는 두 가지이고 각각 선례가 있습니다. ① FDE(Forward Deployed Engineer)가 고객 시스템 안으로 들어갑니다. Palantir가 창안한 역할로 내부 코드명 Delta, 고객 환경 내부에 상주하며 실제 운영 제약 아래서 프로덕션 시스템을 직접 구축하고 청구 시간이 아니라 성과로 평가받습니다. 명시적 요구와 실제 요구의 간극을 현장에서 코드로 메우고, 특정 고객용 거친 해법(gravel road)이 제품 표준 기능(paved highway)으로 포장되는 피드백 루프를 만듭니다. 파급: 고객 락인의 동력이자 640% 주가 수익률의 원천으로 회자되고, Anthropic·OpenAI가 엔터프라이즈 GTM 전략으로 채택했습니다(OpenAI는 2025년 초 FDE 팀 2명→10명+). 우리는 Co-Design Pod를 FDE 모델로 운영하되, 메모리는 제조 리드타임이 길므로 시스템 아키텍트·TCO 모델링 역량을 결합합니다. ② 전략적 협약(SCA)으로 워크로드가 옵니다. 선례는 Micron↔Anthropic(2026-06-22): 공동 설계(HBM·DRAM·SSD를 Claude 학습·추론 워크로드에 맞춰 공동 최적화) + 다년 공급 + 운영 통합(Claude 사내 배치) + 자본(Series H)을 한 계약에 묶었습니다. Micron은 SCA 16건, 최소 계약매출 약 $100B, 예치금 $22B를 공시했습니다. 삼성·SK의 Anthropic 공급계약에는 공동 설계 조항이 없으므로 우리가 먼저 제안합니다. 창은 공급 완화 전인 2027년 상반기까지입니다. 다섯 축은 두 목표를 여는 수단입니다. 전략은 추론 캐시 티어 한 곳에 베팅하고 HDD 대체는 하지 않으며 창은 2027년 상반기까지입니다. 조직은 실리콘밸리 소프트웨어 자회사와 FDE Pod에 더해 시스템 소프트웨어 조직을 강화합니다. 인사는 고객의 시스템을 잘 이해하는 시스템 소프트웨어 전문가를 채용하고 양성하는 것이 핵심이며, 채용 기준은 고객 시스템(추론 엔진·KV 캐시 관리자·I/O·커널 코드)을 읽고 고칠 수 있는가입니다. 미주 고객과의 협업을 위해 현지 채용을 늘리고, 그것이 가능하도록 별도 보상 체계를 둡니다. 문화는 업스트림 우선을 넘어 오픈소스 생태계를 주도하는 기업 문화로 갑니다. 기여자에서 메인테이너·커미터로 올라가고, 우리가 운영하는 레퍼런스 프로젝트에 외부 기여가 들어오게 하며, KV cache 실측을 업계 최초로 공개합니다. 재무는 SCA·수명 보증 상품·지분으로 접근권을 사고 선급을 R&amp;D 재원으로 씁니다. 90일에 제품 정의·업스트림 PR·SCA 조항 제안·FDE Pod 1호, 1년에 자회사·FDE 2사 상주·CMX 인증·SCA 1건, 3년에 캐시 티어 QLC 25%+·SCA 3건입니다. 결정 요청 세 가지입니다.</a:t>
+              <a:t>실행 전략 한 장입니다. 목표는 두 가지이고 각각 선례가 있습니다. ① FDE(Forward Deployed Engineer)가 고객 시스템 안으로 들어갑니다. Palantir가 창안한 역할로 내부 코드명 Delta, 고객 환경 내부에 상주하며 실제 운영 제약 아래서 프로덕션 시스템을 직접 구축하고 청구 시간이 아니라 성과로 평가받습니다. 명시적 요구와 실제 요구의 간극을 현장에서 코드로 메우고, 특정 고객용 거친 해법(gravel road)이 제품 표준 기능(paved highway)으로 포장되는 피드백 루프를 만듭니다. 파급: 고객 락인의 동력이자 640% 주가 수익률의 원천으로 회자되고, Anthropic·OpenAI가 엔터프라이즈 GTM 전략으로 채택했습니다(OpenAI는 2025년 초 FDE 팀 2명→10명+). 우리는 Co-Design Pod를 FDE 모델로 운영하되, 메모리는 제조 리드타임이 길므로 시스템 아키텍트·TCO 모델링 역량을 결합합니다. ② 전략적 협약(SCA)으로 워크로드가 옵니다. 선례는 Micron↔Anthropic(2026-06-22): 공동 설계(HBM·DRAM·SSD를 Claude 학습·추론 워크로드에 맞춰 공동 최적화) + 다년 공급 + 운영 통합(Claude 사내 배치) + 자본(Series H)을 한 계약에 묶었습니다. Micron은 SCA 16건, 최소 계약매출 약 $100B, 예치금 $22B를 공시했습니다. 삼성·SK의 Anthropic 공급계약에는 공동 설계 조항이 없으므로 우리가 먼저 제안합니다. 창은 공급 완화 전인 2027년 상반기까지입니다. 이 장에는 두 목표를 여는 수단 중 조직·인사·문화 세 축을 보였습니다(전략·재무 축과 90일·1년·3년 타임라인은 위키 실행 전략 페이지 §2.1·§2.5·§3에 있습니다). 조직은 실리콘밸리 소프트웨어 자회사와 FDE Pod에 더해 시스템 소프트웨어 조직을 강화합니다. 인사는 고객의 시스템을 잘 이해하는 시스템 소프트웨어 전문가를 채용하고 양성하는 것이 핵심이며, 채용 기준은 고객 시스템(추론 엔진·KV 캐시 관리자·I/O·커널 코드)을 읽고 고칠 수 있는가입니다. 미주 고객과의 협업을 위해 현지 채용을 늘리고, 그것이 가능하도록 별도 보상 체계를 두며, 본사 엔지니어는 상주 로테이션으로 양성합니다. 문화는 업스트림 우선을 넘어 오픈소스 생태계를 주도하는 기업 문화로 갑니다. 기여자에서 메인테이너·커미터로 올라가고, 우리가 운영하는 레퍼런스 프로젝트에 외부 기여가 들어오게 하며, KV cache 실측을 업계 최초로 공개합니다. 마지막 문장은 세 장의 요약입니다. 니어라인 HDD 대체가 아니라 추론 캐시 티어를 QLC로 가져가려면(1장) 디바이스에서 고객 시스템 안까지 세 단계를 올라가야 하며(2장), 그 길은 FDE와 전략적 협약, 그리고 이를 해낼 사람과 문화가 엽니다(3장).</a:t>
             </a:r>
           </a:p>
         </p:txBody>
@@ -6028,7 +6028,7 @@
           <a:p>
             <a:pPr algn="l">
               <a:lnSpc>
-                <a:spcPct val="112000"/>
+                <a:spcPct val="108000"/>
               </a:lnSpc>
             </a:pPr>
             <a:r>
@@ -10300,7 +10300,7 @@
                 <a:latin typeface="Arial"/>
                 <a:ea typeface="Arial"/>
               </a:rPr>
-              <a:t>Palantir가 만든 FDE와 Micron이 Anthropic과 맺은 SCA가 두 목표의 선례입니다. 다섯 축이 길을 열고 90일·1년·3년으로 갑니다.</a:t>
+              <a:t>Palantir가 만든 FDE와 Micron이 Anthropic과 맺은 SCA가 두 목표의 선례입니다. 조직·인사·문화가 그 길을 엽니다.</a:t>
             </a:r>
           </a:p>
         </p:txBody>
@@ -12920,8 +12920,8 @@
         </p:nvSpPr>
         <p:spPr>
           <a:xfrm>
-            <a:off x="722376" y="6839712"/>
-            <a:ext cx="3200400" cy="1005840"/>
+            <a:off x="722376" y="6876288"/>
+            <a:ext cx="5443728" cy="1225296"/>
           </a:xfrm>
           <a:prstGeom prst="rect">
             <a:avLst/>
@@ -12966,8 +12966,8 @@
         </p:nvSpPr>
         <p:spPr>
           <a:xfrm>
-            <a:off x="722376" y="6839712"/>
-            <a:ext cx="713232" cy="1005840"/>
+            <a:off x="722376" y="6876288"/>
+            <a:ext cx="868680" cy="1225296"/>
           </a:xfrm>
           <a:prstGeom prst="rect">
             <a:avLst/>
@@ -13010,8 +13010,8 @@
         </p:nvSpPr>
         <p:spPr>
           <a:xfrm>
-            <a:off x="722376" y="6839712"/>
-            <a:ext cx="713232" cy="1005840"/>
+            <a:off x="722376" y="6876288"/>
+            <a:ext cx="868680" cy="1225296"/>
           </a:xfrm>
           <a:prstGeom prst="rect">
             <a:avLst/>
@@ -13030,14 +13030,14 @@
               </a:lnSpc>
             </a:pPr>
             <a:r>
-              <a:rPr sz="1575" b="1">
+              <a:rPr sz="1725" b="1">
                 <a:solidFill>
                   <a:srgbClr val="FFFFFF"/>
                 </a:solidFill>
                 <a:latin typeface="Arial"/>
                 <a:ea typeface="Arial"/>
               </a:rPr>
-              <a:t>전략</a:t>
+              <a:t>조직</a:t>
             </a:r>
           </a:p>
         </p:txBody>
@@ -13050,8 +13050,8 @@
         </p:nvSpPr>
         <p:spPr>
           <a:xfrm>
-            <a:off x="1545336" y="6839712"/>
-            <a:ext cx="2286000" cy="1005840"/>
+            <a:off x="1746504" y="6876288"/>
+            <a:ext cx="4273296" cy="1225296"/>
           </a:xfrm>
           <a:prstGeom prst="rect">
             <a:avLst/>
@@ -13066,52 +13066,52 @@
           <a:p>
             <a:pPr algn="l">
               <a:lnSpc>
-                <a:spcPct val="106000"/>
-              </a:lnSpc>
-            </a:pPr>
-            <a:r>
-              <a:rPr sz="1275" b="1">
+                <a:spcPct val="108000"/>
+              </a:lnSpc>
+            </a:pPr>
+            <a:r>
+              <a:rPr sz="1425" b="1">
                 <a:solidFill>
                   <a:srgbClr val="1A1A1A"/>
                 </a:solidFill>
                 <a:latin typeface="Arial"/>
                 <a:ea typeface="Arial"/>
               </a:rPr>
-              <a:t>베팅: 추론 캐시 티어</a:t>
+              <a:t>실리콘밸리 소프트웨어 자회사</a:t>
             </a:r>
           </a:p>
           <a:p>
             <a:pPr algn="l">
               <a:lnSpc>
-                <a:spcPct val="106000"/>
-              </a:lnSpc>
-            </a:pPr>
-            <a:r>
-              <a:rPr sz="1200" b="0">
+                <a:spcPct val="108000"/>
+              </a:lnSpc>
+            </a:pPr>
+            <a:r>
+              <a:rPr sz="1350" b="0">
                 <a:solidFill>
                   <a:srgbClr val="555555"/>
                 </a:solidFill>
                 <a:latin typeface="Arial"/>
                 <a:ea typeface="Arial"/>
               </a:rPr>
-              <a:t>HDD 대체는 안 함</a:t>
+              <a:t>FDE Pod 고객 상주</a:t>
             </a:r>
           </a:p>
           <a:p>
             <a:pPr algn="l">
               <a:lnSpc>
-                <a:spcPct val="106000"/>
-              </a:lnSpc>
-            </a:pPr>
-            <a:r>
-              <a:rPr sz="1200" b="0">
+                <a:spcPct val="108000"/>
+              </a:lnSpc>
+            </a:pPr>
+            <a:r>
+              <a:rPr sz="1350" b="0">
                 <a:solidFill>
                   <a:srgbClr val="555555"/>
                 </a:solidFill>
                 <a:latin typeface="Arial"/>
                 <a:ea typeface="Arial"/>
               </a:rPr>
-              <a:t>창은 2027년 상반기까지</a:t>
+              <a:t>시스템 소프트웨어 조직 강화</a:t>
             </a:r>
           </a:p>
         </p:txBody>
@@ -13124,8 +13124,8 @@
         </p:nvSpPr>
         <p:spPr>
           <a:xfrm>
-            <a:off x="4133087" y="6839712"/>
-            <a:ext cx="3200400" cy="1005840"/>
+            <a:off x="6422136" y="6876288"/>
+            <a:ext cx="5443728" cy="1225296"/>
           </a:xfrm>
           <a:prstGeom prst="rect">
             <a:avLst/>
@@ -13170,8 +13170,8 @@
         </p:nvSpPr>
         <p:spPr>
           <a:xfrm>
-            <a:off x="4133087" y="6839712"/>
-            <a:ext cx="713232" cy="1005840"/>
+            <a:off x="6422136" y="6876288"/>
+            <a:ext cx="868680" cy="1225296"/>
           </a:xfrm>
           <a:prstGeom prst="rect">
             <a:avLst/>
@@ -13214,8 +13214,8 @@
         </p:nvSpPr>
         <p:spPr>
           <a:xfrm>
-            <a:off x="4133087" y="6839712"/>
-            <a:ext cx="713232" cy="1005840"/>
+            <a:off x="6422136" y="6876288"/>
+            <a:ext cx="868680" cy="1225296"/>
           </a:xfrm>
           <a:prstGeom prst="rect">
             <a:avLst/>
@@ -13234,14 +13234,14 @@
               </a:lnSpc>
             </a:pPr>
             <a:r>
-              <a:rPr sz="1575" b="1">
+              <a:rPr sz="1725" b="1">
                 <a:solidFill>
                   <a:srgbClr val="FFFFFF"/>
                 </a:solidFill>
                 <a:latin typeface="Arial"/>
                 <a:ea typeface="Arial"/>
               </a:rPr>
-              <a:t>조직</a:t>
+              <a:t>인사</a:t>
             </a:r>
           </a:p>
         </p:txBody>
@@ -13254,8 +13254,8 @@
         </p:nvSpPr>
         <p:spPr>
           <a:xfrm>
-            <a:off x="4956048" y="6839712"/>
-            <a:ext cx="2286000" cy="1005840"/>
+            <a:off x="7446264" y="6876288"/>
+            <a:ext cx="4273296" cy="1225296"/>
           </a:xfrm>
           <a:prstGeom prst="rect">
             <a:avLst/>
@@ -13270,52 +13270,52 @@
           <a:p>
             <a:pPr algn="l">
               <a:lnSpc>
-                <a:spcPct val="106000"/>
-              </a:lnSpc>
-            </a:pPr>
-            <a:r>
-              <a:rPr sz="1275" b="1">
+                <a:spcPct val="108000"/>
+              </a:lnSpc>
+            </a:pPr>
+            <a:r>
+              <a:rPr sz="1425" b="1">
                 <a:solidFill>
                   <a:srgbClr val="1A1A1A"/>
                 </a:solidFill>
                 <a:latin typeface="Arial"/>
                 <a:ea typeface="Arial"/>
               </a:rPr>
-              <a:t>SV 소프트웨어 자회사</a:t>
+              <a:t>고객 시스템을 아는 시스템 SW 전문가 채용·양성</a:t>
             </a:r>
           </a:p>
           <a:p>
             <a:pPr algn="l">
               <a:lnSpc>
-                <a:spcPct val="106000"/>
-              </a:lnSpc>
-            </a:pPr>
-            <a:r>
-              <a:rPr sz="1200" b="0">
+                <a:spcPct val="108000"/>
+              </a:lnSpc>
+            </a:pPr>
+            <a:r>
+              <a:rPr sz="1350" b="0">
                 <a:solidFill>
                   <a:srgbClr val="555555"/>
                 </a:solidFill>
                 <a:latin typeface="Arial"/>
                 <a:ea typeface="Arial"/>
               </a:rPr>
-              <a:t>FDE Pod 고객 상주</a:t>
+              <a:t>미주 현지 채용 확대 · 고객과 같은 시간대에서 협업</a:t>
             </a:r>
           </a:p>
           <a:p>
             <a:pPr algn="l">
               <a:lnSpc>
-                <a:spcPct val="106000"/>
-              </a:lnSpc>
-            </a:pPr>
-            <a:r>
-              <a:rPr sz="1200" b="0">
+                <a:spcPct val="108000"/>
+              </a:lnSpc>
+            </a:pPr>
+            <a:r>
+              <a:rPr sz="1350" b="0">
                 <a:solidFill>
                   <a:srgbClr val="555555"/>
                 </a:solidFill>
                 <a:latin typeface="Arial"/>
                 <a:ea typeface="Arial"/>
               </a:rPr>
-              <a:t>시스템 SW 조직 강화</a:t>
+              <a:t>별도 보상 · 본사 엔지니어 상주 로테이션</a:t>
             </a:r>
           </a:p>
         </p:txBody>
@@ -13328,8 +13328,8 @@
         </p:nvSpPr>
         <p:spPr>
           <a:xfrm>
-            <a:off x="7543800" y="6839712"/>
-            <a:ext cx="3200400" cy="1005840"/>
+            <a:off x="12121896" y="6876288"/>
+            <a:ext cx="5443728" cy="1225296"/>
           </a:xfrm>
           <a:prstGeom prst="rect">
             <a:avLst/>
@@ -13374,8 +13374,8 @@
         </p:nvSpPr>
         <p:spPr>
           <a:xfrm>
-            <a:off x="7543800" y="6839712"/>
-            <a:ext cx="713232" cy="1005840"/>
+            <a:off x="12121896" y="6876288"/>
+            <a:ext cx="868680" cy="1225296"/>
           </a:xfrm>
           <a:prstGeom prst="rect">
             <a:avLst/>
@@ -13418,8 +13418,8 @@
         </p:nvSpPr>
         <p:spPr>
           <a:xfrm>
-            <a:off x="7543800" y="6839712"/>
-            <a:ext cx="713232" cy="1005840"/>
+            <a:off x="12121896" y="6876288"/>
+            <a:ext cx="868680" cy="1225296"/>
           </a:xfrm>
           <a:prstGeom prst="rect">
             <a:avLst/>
@@ -13438,14 +13438,14 @@
               </a:lnSpc>
             </a:pPr>
             <a:r>
-              <a:rPr sz="1575" b="1">
+              <a:rPr sz="1725" b="1">
                 <a:solidFill>
                   <a:srgbClr val="FFFFFF"/>
                 </a:solidFill>
                 <a:latin typeface="Arial"/>
                 <a:ea typeface="Arial"/>
               </a:rPr>
-              <a:t>인사</a:t>
+              <a:t>문화</a:t>
             </a:r>
           </a:p>
         </p:txBody>
@@ -13458,8 +13458,8 @@
         </p:nvSpPr>
         <p:spPr>
           <a:xfrm>
-            <a:off x="8366760" y="6839712"/>
-            <a:ext cx="2286000" cy="1005840"/>
+            <a:off x="13146024" y="6876288"/>
+            <a:ext cx="4273296" cy="1225296"/>
           </a:xfrm>
           <a:prstGeom prst="rect">
             <a:avLst/>
@@ -13474,52 +13474,52 @@
           <a:p>
             <a:pPr algn="l">
               <a:lnSpc>
-                <a:spcPct val="106000"/>
-              </a:lnSpc>
-            </a:pPr>
-            <a:r>
-              <a:rPr sz="1275" b="1">
+                <a:spcPct val="108000"/>
+              </a:lnSpc>
+            </a:pPr>
+            <a:r>
+              <a:rPr sz="1425" b="1">
                 <a:solidFill>
                   <a:srgbClr val="1A1A1A"/>
                 </a:solidFill>
                 <a:latin typeface="Arial"/>
                 <a:ea typeface="Arial"/>
               </a:rPr>
-              <a:t>시스템 SW 전문가 채용·양성</a:t>
+              <a:t>오픈소스 생태계를 주도하는 문화</a:t>
             </a:r>
           </a:p>
           <a:p>
             <a:pPr algn="l">
               <a:lnSpc>
-                <a:spcPct val="106000"/>
-              </a:lnSpc>
-            </a:pPr>
-            <a:r>
-              <a:rPr sz="1200" b="0">
+                <a:spcPct val="108000"/>
+              </a:lnSpc>
+            </a:pPr>
+            <a:r>
+              <a:rPr sz="1350" b="0">
                 <a:solidFill>
                   <a:srgbClr val="555555"/>
                 </a:solidFill>
                 <a:latin typeface="Arial"/>
                 <a:ea typeface="Arial"/>
               </a:rPr>
-              <a:t>기준: 고객 시스템 이해</a:t>
+              <a:t>메인테이너·커미터 배출 · 레퍼런스 프로젝트 운영</a:t>
             </a:r>
           </a:p>
           <a:p>
             <a:pPr algn="l">
               <a:lnSpc>
-                <a:spcPct val="106000"/>
-              </a:lnSpc>
-            </a:pPr>
-            <a:r>
-              <a:rPr sz="1200" b="0">
+                <a:spcPct val="108000"/>
+              </a:lnSpc>
+            </a:pPr>
+            <a:r>
+              <a:rPr sz="1350" b="0">
                 <a:solidFill>
                   <a:srgbClr val="555555"/>
                 </a:solidFill>
                 <a:latin typeface="Arial"/>
                 <a:ea typeface="Arial"/>
               </a:rPr>
-              <a:t>미주 현지 채용 확대 · 별도 보상</a:t>
+              <a:t>업스트림 우선 · KV 실측 업계 최초 공개</a:t>
             </a:r>
           </a:p>
         </p:txBody>
@@ -13532,54 +13532,8 @@
         </p:nvSpPr>
         <p:spPr>
           <a:xfrm>
-            <a:off x="10954512" y="6839712"/>
-            <a:ext cx="3200400" cy="1005840"/>
-          </a:xfrm>
-          <a:prstGeom prst="rect">
-            <a:avLst/>
-          </a:prstGeom>
-          <a:solidFill>
-            <a:srgbClr val="FFFFFF"/>
-          </a:solidFill>
-          <a:ln w="9525">
-            <a:solidFill>
-              <a:srgbClr val="D9D9D9"/>
-            </a:solidFill>
-          </a:ln>
-          <a:effectLst/>
-        </p:spPr>
-        <p:style>
-          <a:lnRef idx="1">
-            <a:schemeClr val="accent1"/>
-          </a:lnRef>
-          <a:fillRef idx="3">
-            <a:schemeClr val="accent1"/>
-          </a:fillRef>
-          <a:effectRef idx="2">
-            <a:schemeClr val="accent1"/>
-          </a:effectRef>
-          <a:fontRef idx="minor">
-            <a:schemeClr val="lt1"/>
-          </a:fontRef>
-        </p:style>
-        <p:txBody>
-          <a:bodyPr rtlCol="0" anchor="ctr"/>
-          <a:lstStyle/>
-          <a:p>
-            <a:pPr algn="ctr"/>
-          </a:p>
-        </p:txBody>
-      </p:sp>
-      <p:sp>
-        <p:nvSpPr>
-          <p:cNvPr id="80" name="Rectangle 79"/>
-          <p:cNvSpPr/>
-          <p:nvPr/>
-        </p:nvSpPr>
-        <p:spPr>
-          <a:xfrm>
-            <a:off x="10954512" y="6839712"/>
-            <a:ext cx="713232" cy="1005840"/>
+            <a:off x="722376" y="8503920"/>
+            <a:ext cx="16843248" cy="822960"/>
           </a:xfrm>
           <a:prstGeom prst="rect">
             <a:avLst/>
@@ -13616,14 +13570,14 @@
       </p:sp>
       <p:sp>
         <p:nvSpPr>
-          <p:cNvPr id="81" name="TextBox 80"/>
+          <p:cNvPr id="80" name="TextBox 79"/>
           <p:cNvSpPr txBox="1"/>
           <p:nvPr/>
         </p:nvSpPr>
         <p:spPr>
           <a:xfrm>
-            <a:off x="10954512" y="6839712"/>
-            <a:ext cx="713232" cy="1005840"/>
+            <a:off x="1133856" y="8503920"/>
+            <a:ext cx="1463040" cy="822960"/>
           </a:xfrm>
           <a:prstGeom prst="rect">
             <a:avLst/>
@@ -13636,34 +13590,34 @@
           </a:bodyPr>
           <a:lstStyle/>
           <a:p>
-            <a:pPr algn="ctr">
+            <a:pPr algn="l">
               <a:lnSpc>
                 <a:spcPct val="112000"/>
               </a:lnSpc>
             </a:pPr>
             <a:r>
-              <a:rPr sz="1575" b="1">
+              <a:rPr sz="1800" b="0">
                 <a:solidFill>
                   <a:srgbClr val="FFFFFF"/>
                 </a:solidFill>
                 <a:latin typeface="Arial"/>
                 <a:ea typeface="Arial"/>
               </a:rPr>
-              <a:t>문화</a:t>
-            </a:r>
-          </a:p>
-        </p:txBody>
-      </p:sp>
-      <p:sp>
-        <p:nvSpPr>
-          <p:cNvPr id="82" name="TextBox 81"/>
+              <a:t>결론</a:t>
+            </a:r>
+          </a:p>
+        </p:txBody>
+      </p:sp>
+      <p:sp>
+        <p:nvSpPr>
+          <p:cNvPr id="81" name="TextBox 80"/>
           <p:cNvSpPr txBox="1"/>
           <p:nvPr/>
         </p:nvSpPr>
         <p:spPr>
           <a:xfrm>
-            <a:off x="11777472" y="6839712"/>
-            <a:ext cx="2286000" cy="1005840"/>
+            <a:off x="2551176" y="8503920"/>
+            <a:ext cx="14648688" cy="822960"/>
           </a:xfrm>
           <a:prstGeom prst="rect">
             <a:avLst/>
@@ -13678,713 +13632,42 @@
           <a:p>
             <a:pPr algn="l">
               <a:lnSpc>
-                <a:spcPct val="106000"/>
-              </a:lnSpc>
-            </a:pPr>
-            <a:r>
-              <a:rPr sz="1275" b="1">
-                <a:solidFill>
-                  <a:srgbClr val="1A1A1A"/>
-                </a:solidFill>
-                <a:latin typeface="Arial"/>
-                <a:ea typeface="Arial"/>
-              </a:rPr>
-              <a:t>오픈소스 생태계를 주도</a:t>
+                <a:spcPct val="108000"/>
+              </a:lnSpc>
+            </a:pPr>
+            <a:r>
+              <a:rPr sz="1900" b="1">
+                <a:solidFill>
+                  <a:srgbClr val="FFFFFF"/>
+                </a:solidFill>
+                <a:latin typeface="Arial"/>
+                <a:ea typeface="Arial"/>
+              </a:rPr>
+              <a:t>니어라인 HDD 대체가 아니라 추론 캐시 티어를 QLC로 가져가려면 디바이스에서 고객 시스템 안까지 세 단계를 올라가야 하며,</a:t>
             </a:r>
           </a:p>
           <a:p>
             <a:pPr algn="l">
               <a:lnSpc>
-                <a:spcPct val="106000"/>
-              </a:lnSpc>
-            </a:pPr>
-            <a:r>
-              <a:rPr sz="1200" b="0">
-                <a:solidFill>
-                  <a:srgbClr val="555555"/>
-                </a:solidFill>
-                <a:latin typeface="Arial"/>
-                <a:ea typeface="Arial"/>
-              </a:rPr>
-              <a:t>메인테이너·커미터 배출</a:t>
-            </a:r>
-          </a:p>
-          <a:p>
-            <a:pPr algn="l">
-              <a:lnSpc>
-                <a:spcPct val="106000"/>
-              </a:lnSpc>
-            </a:pPr>
-            <a:r>
-              <a:rPr sz="1200" b="0">
-                <a:solidFill>
-                  <a:srgbClr val="555555"/>
-                </a:solidFill>
-                <a:latin typeface="Arial"/>
-                <a:ea typeface="Arial"/>
-              </a:rPr>
-              <a:t>업스트림 우선 · 실측 공개</a:t>
-            </a:r>
-          </a:p>
-        </p:txBody>
-      </p:sp>
-      <p:sp>
-        <p:nvSpPr>
-          <p:cNvPr id="83" name="Rectangle 82"/>
-          <p:cNvSpPr/>
-          <p:nvPr/>
-        </p:nvSpPr>
-        <p:spPr>
-          <a:xfrm>
-            <a:off x="14365224" y="6839712"/>
-            <a:ext cx="3200400" cy="1005840"/>
-          </a:xfrm>
-          <a:prstGeom prst="rect">
-            <a:avLst/>
-          </a:prstGeom>
-          <a:solidFill>
-            <a:srgbClr val="FFFFFF"/>
-          </a:solidFill>
-          <a:ln w="9525">
-            <a:solidFill>
-              <a:srgbClr val="D9D9D9"/>
-            </a:solidFill>
-          </a:ln>
-          <a:effectLst/>
-        </p:spPr>
-        <p:style>
-          <a:lnRef idx="1">
-            <a:schemeClr val="accent1"/>
-          </a:lnRef>
-          <a:fillRef idx="3">
-            <a:schemeClr val="accent1"/>
-          </a:fillRef>
-          <a:effectRef idx="2">
-            <a:schemeClr val="accent1"/>
-          </a:effectRef>
-          <a:fontRef idx="minor">
-            <a:schemeClr val="lt1"/>
-          </a:fontRef>
-        </p:style>
-        <p:txBody>
-          <a:bodyPr rtlCol="0" anchor="ctr"/>
-          <a:lstStyle/>
-          <a:p>
-            <a:pPr algn="ctr"/>
-          </a:p>
-        </p:txBody>
-      </p:sp>
-      <p:sp>
-        <p:nvSpPr>
-          <p:cNvPr id="84" name="Rectangle 83"/>
-          <p:cNvSpPr/>
-          <p:nvPr/>
-        </p:nvSpPr>
-        <p:spPr>
-          <a:xfrm>
-            <a:off x="14365224" y="6839712"/>
-            <a:ext cx="713232" cy="1005840"/>
-          </a:xfrm>
-          <a:prstGeom prst="rect">
-            <a:avLst/>
-          </a:prstGeom>
-          <a:solidFill>
-            <a:srgbClr val="1428A0"/>
-          </a:solidFill>
-          <a:ln>
-            <a:noFill/>
-          </a:ln>
-          <a:effectLst/>
-        </p:spPr>
-        <p:style>
-          <a:lnRef idx="1">
-            <a:schemeClr val="accent1"/>
-          </a:lnRef>
-          <a:fillRef idx="3">
-            <a:schemeClr val="accent1"/>
-          </a:fillRef>
-          <a:effectRef idx="2">
-            <a:schemeClr val="accent1"/>
-          </a:effectRef>
-          <a:fontRef idx="minor">
-            <a:schemeClr val="lt1"/>
-          </a:fontRef>
-        </p:style>
-        <p:txBody>
-          <a:bodyPr rtlCol="0" anchor="ctr"/>
-          <a:lstStyle/>
-          <a:p>
-            <a:pPr algn="ctr"/>
-          </a:p>
-        </p:txBody>
-      </p:sp>
-      <p:sp>
-        <p:nvSpPr>
-          <p:cNvPr id="85" name="TextBox 84"/>
-          <p:cNvSpPr txBox="1"/>
-          <p:nvPr/>
-        </p:nvSpPr>
-        <p:spPr>
-          <a:xfrm>
-            <a:off x="14365224" y="6839712"/>
-            <a:ext cx="713232" cy="1005840"/>
-          </a:xfrm>
-          <a:prstGeom prst="rect">
-            <a:avLst/>
-          </a:prstGeom>
-          <a:noFill/>
-        </p:spPr>
-        <p:txBody>
-          <a:bodyPr wrap="square" anchor="ctr" lIns="0" rIns="0" tIns="0" bIns="0">
-            <a:spAutoFit/>
-          </a:bodyPr>
-          <a:lstStyle/>
-          <a:p>
-            <a:pPr algn="ctr">
-              <a:lnSpc>
-                <a:spcPct val="112000"/>
-              </a:lnSpc>
-            </a:pPr>
-            <a:r>
-              <a:rPr sz="1575" b="1">
+                <a:spcPct val="108000"/>
+              </a:lnSpc>
+            </a:pPr>
+            <a:r>
+              <a:rPr sz="1900" b="1">
                 <a:solidFill>
                   <a:srgbClr val="FFFFFF"/>
                 </a:solidFill>
                 <a:latin typeface="Arial"/>
                 <a:ea typeface="Arial"/>
               </a:rPr>
-              <a:t>재무</a:t>
-            </a:r>
-          </a:p>
-        </p:txBody>
-      </p:sp>
-      <p:sp>
-        <p:nvSpPr>
-          <p:cNvPr id="86" name="TextBox 85"/>
-          <p:cNvSpPr txBox="1"/>
-          <p:nvPr/>
-        </p:nvSpPr>
-        <p:spPr>
-          <a:xfrm>
-            <a:off x="15188184" y="6839712"/>
-            <a:ext cx="2286000" cy="1005840"/>
-          </a:xfrm>
-          <a:prstGeom prst="rect">
-            <a:avLst/>
-          </a:prstGeom>
-          <a:noFill/>
-        </p:spPr>
-        <p:txBody>
-          <a:bodyPr wrap="square" anchor="ctr" lIns="0" rIns="0" tIns="0" bIns="0">
-            <a:spAutoFit/>
-          </a:bodyPr>
-          <a:lstStyle/>
-          <a:p>
-            <a:pPr algn="l">
-              <a:lnSpc>
-                <a:spcPct val="106000"/>
-              </a:lnSpc>
-            </a:pPr>
-            <a:r>
-              <a:rPr sz="1275" b="1">
-                <a:solidFill>
-                  <a:srgbClr val="1A1A1A"/>
-                </a:solidFill>
-                <a:latin typeface="Arial"/>
-                <a:ea typeface="Arial"/>
-              </a:rPr>
-              <a:t>SCA · 수명 보증 상품</a:t>
-            </a:r>
-          </a:p>
-          <a:p>
-            <a:pPr algn="l">
-              <a:lnSpc>
-                <a:spcPct val="106000"/>
-              </a:lnSpc>
-            </a:pPr>
-            <a:r>
-              <a:rPr sz="1200" b="0">
-                <a:solidFill>
-                  <a:srgbClr val="555555"/>
-                </a:solidFill>
-                <a:latin typeface="Arial"/>
-                <a:ea typeface="Arial"/>
-              </a:rPr>
-              <a:t>지분으로 접근권</a:t>
-            </a:r>
-          </a:p>
-          <a:p>
-            <a:pPr algn="l">
-              <a:lnSpc>
-                <a:spcPct val="106000"/>
-              </a:lnSpc>
-            </a:pPr>
-            <a:r>
-              <a:rPr sz="1200" b="0">
-                <a:solidFill>
-                  <a:srgbClr val="555555"/>
-                </a:solidFill>
-                <a:latin typeface="Arial"/>
-                <a:ea typeface="Arial"/>
-              </a:rPr>
-              <a:t>선급이 R&amp;D 재원</a:t>
-            </a:r>
-          </a:p>
-        </p:txBody>
-      </p:sp>
-      <p:sp>
-        <p:nvSpPr>
-          <p:cNvPr id="87" name="Rectangle 86"/>
-          <p:cNvSpPr/>
-          <p:nvPr/>
-        </p:nvSpPr>
-        <p:spPr>
-          <a:xfrm>
-            <a:off x="905256" y="8357615"/>
-            <a:ext cx="16477488" cy="18288"/>
-          </a:xfrm>
-          <a:prstGeom prst="rect">
-            <a:avLst/>
-          </a:prstGeom>
-          <a:solidFill>
-            <a:srgbClr val="D9D9D9"/>
-          </a:solidFill>
-          <a:ln>
-            <a:noFill/>
-          </a:ln>
-          <a:effectLst/>
-        </p:spPr>
-        <p:style>
-          <a:lnRef idx="1">
-            <a:schemeClr val="accent1"/>
-          </a:lnRef>
-          <a:fillRef idx="3">
-            <a:schemeClr val="accent1"/>
-          </a:fillRef>
-          <a:effectRef idx="2">
-            <a:schemeClr val="accent1"/>
-          </a:effectRef>
-          <a:fontRef idx="minor">
-            <a:schemeClr val="lt1"/>
-          </a:fontRef>
-        </p:style>
-        <p:txBody>
-          <a:bodyPr rtlCol="0" anchor="ctr"/>
-          <a:lstStyle/>
-          <a:p>
-            <a:pPr algn="ctr"/>
-          </a:p>
-        </p:txBody>
-      </p:sp>
-      <p:sp>
-        <p:nvSpPr>
-          <p:cNvPr id="88" name="Oval 87"/>
-          <p:cNvSpPr/>
-          <p:nvPr/>
-        </p:nvSpPr>
-        <p:spPr>
-          <a:xfrm>
-            <a:off x="832104" y="8293608"/>
-            <a:ext cx="146304" cy="146304"/>
-          </a:xfrm>
-          <a:prstGeom prst="ellipse">
-            <a:avLst/>
-          </a:prstGeom>
-          <a:solidFill>
-            <a:srgbClr val="1428A0"/>
-          </a:solidFill>
-          <a:ln>
-            <a:noFill/>
-          </a:ln>
-          <a:effectLst/>
-        </p:spPr>
-        <p:style>
-          <a:lnRef idx="1">
-            <a:schemeClr val="accent1"/>
-          </a:lnRef>
-          <a:fillRef idx="3">
-            <a:schemeClr val="accent1"/>
-          </a:fillRef>
-          <a:effectRef idx="2">
-            <a:schemeClr val="accent1"/>
-          </a:effectRef>
-          <a:fontRef idx="minor">
-            <a:schemeClr val="lt1"/>
-          </a:fontRef>
-        </p:style>
-        <p:txBody>
-          <a:bodyPr rtlCol="0" anchor="ctr"/>
-          <a:lstStyle/>
-          <a:p>
-            <a:pPr algn="ctr"/>
-          </a:p>
-        </p:txBody>
-      </p:sp>
-      <p:sp>
-        <p:nvSpPr>
-          <p:cNvPr id="89" name="TextBox 88"/>
-          <p:cNvSpPr txBox="1"/>
-          <p:nvPr/>
-        </p:nvSpPr>
-        <p:spPr>
-          <a:xfrm>
-            <a:off x="1088136" y="8046719"/>
-            <a:ext cx="5157216" cy="274320"/>
-          </a:xfrm>
-          <a:prstGeom prst="rect">
-            <a:avLst/>
-          </a:prstGeom>
-          <a:noFill/>
-        </p:spPr>
-        <p:txBody>
-          <a:bodyPr wrap="square" anchor="ctr" lIns="0" rIns="0" tIns="0" bIns="0">
-            <a:spAutoFit/>
-          </a:bodyPr>
-          <a:lstStyle/>
-          <a:p>
-            <a:pPr algn="l">
-              <a:lnSpc>
-                <a:spcPct val="112000"/>
-              </a:lnSpc>
-            </a:pPr>
-            <a:r>
-              <a:rPr sz="1425" b="1">
-                <a:solidFill>
-                  <a:srgbClr val="1428A0"/>
-                </a:solidFill>
-                <a:latin typeface="Arial"/>
-                <a:ea typeface="Arial"/>
-              </a:rPr>
-              <a:t>90일  </a:t>
-            </a:r>
-            <a:r>
-              <a:rPr sz="1350" b="0">
-                <a:solidFill>
-                  <a:srgbClr val="555555"/>
-                </a:solidFill>
-                <a:latin typeface="Arial"/>
-                <a:ea typeface="Arial"/>
-              </a:rPr>
-              <a:t>제품 정의 · 업스트림 PR · SCA 조항 제안 · FDE Pod 1호</a:t>
-            </a:r>
-          </a:p>
-        </p:txBody>
-      </p:sp>
-      <p:sp>
-        <p:nvSpPr>
-          <p:cNvPr id="90" name="Oval 89"/>
-          <p:cNvSpPr/>
-          <p:nvPr/>
-        </p:nvSpPr>
-        <p:spPr>
-          <a:xfrm>
-            <a:off x="6446520" y="8293608"/>
-            <a:ext cx="146304" cy="146304"/>
-          </a:xfrm>
-          <a:prstGeom prst="ellipse">
-            <a:avLst/>
-          </a:prstGeom>
-          <a:solidFill>
-            <a:srgbClr val="1428A0"/>
-          </a:solidFill>
-          <a:ln>
-            <a:noFill/>
-          </a:ln>
-          <a:effectLst/>
-        </p:spPr>
-        <p:style>
-          <a:lnRef idx="1">
-            <a:schemeClr val="accent1"/>
-          </a:lnRef>
-          <a:fillRef idx="3">
-            <a:schemeClr val="accent1"/>
-          </a:fillRef>
-          <a:effectRef idx="2">
-            <a:schemeClr val="accent1"/>
-          </a:effectRef>
-          <a:fontRef idx="minor">
-            <a:schemeClr val="lt1"/>
-          </a:fontRef>
-        </p:style>
-        <p:txBody>
-          <a:bodyPr rtlCol="0" anchor="ctr"/>
-          <a:lstStyle/>
-          <a:p>
-            <a:pPr algn="ctr"/>
-          </a:p>
-        </p:txBody>
-      </p:sp>
-      <p:sp>
-        <p:nvSpPr>
-          <p:cNvPr id="91" name="TextBox 90"/>
-          <p:cNvSpPr txBox="1"/>
-          <p:nvPr/>
-        </p:nvSpPr>
-        <p:spPr>
-          <a:xfrm>
-            <a:off x="6702552" y="8046719"/>
-            <a:ext cx="5157216" cy="274320"/>
-          </a:xfrm>
-          <a:prstGeom prst="rect">
-            <a:avLst/>
-          </a:prstGeom>
-          <a:noFill/>
-        </p:spPr>
-        <p:txBody>
-          <a:bodyPr wrap="square" anchor="ctr" lIns="0" rIns="0" tIns="0" bIns="0">
-            <a:spAutoFit/>
-          </a:bodyPr>
-          <a:lstStyle/>
-          <a:p>
-            <a:pPr algn="l">
-              <a:lnSpc>
-                <a:spcPct val="112000"/>
-              </a:lnSpc>
-            </a:pPr>
-            <a:r>
-              <a:rPr sz="1425" b="1">
-                <a:solidFill>
-                  <a:srgbClr val="1428A0"/>
-                </a:solidFill>
-                <a:latin typeface="Arial"/>
-                <a:ea typeface="Arial"/>
-              </a:rPr>
-              <a:t>1년  </a:t>
-            </a:r>
-            <a:r>
-              <a:rPr sz="1350" b="0">
-                <a:solidFill>
-                  <a:srgbClr val="555555"/>
-                </a:solidFill>
-                <a:latin typeface="Arial"/>
-                <a:ea typeface="Arial"/>
-              </a:rPr>
-              <a:t>자회사 · FDE 2사 상주 · CMX 인증 · SCA 1건</a:t>
-            </a:r>
-          </a:p>
-        </p:txBody>
-      </p:sp>
-      <p:sp>
-        <p:nvSpPr>
-          <p:cNvPr id="92" name="Oval 91"/>
-          <p:cNvSpPr/>
-          <p:nvPr/>
-        </p:nvSpPr>
-        <p:spPr>
-          <a:xfrm>
-            <a:off x="12060936" y="8293608"/>
-            <a:ext cx="146304" cy="146304"/>
-          </a:xfrm>
-          <a:prstGeom prst="ellipse">
-            <a:avLst/>
-          </a:prstGeom>
-          <a:solidFill>
-            <a:srgbClr val="1428A0"/>
-          </a:solidFill>
-          <a:ln>
-            <a:noFill/>
-          </a:ln>
-          <a:effectLst/>
-        </p:spPr>
-        <p:style>
-          <a:lnRef idx="1">
-            <a:schemeClr val="accent1"/>
-          </a:lnRef>
-          <a:fillRef idx="3">
-            <a:schemeClr val="accent1"/>
-          </a:fillRef>
-          <a:effectRef idx="2">
-            <a:schemeClr val="accent1"/>
-          </a:effectRef>
-          <a:fontRef idx="minor">
-            <a:schemeClr val="lt1"/>
-          </a:fontRef>
-        </p:style>
-        <p:txBody>
-          <a:bodyPr rtlCol="0" anchor="ctr"/>
-          <a:lstStyle/>
-          <a:p>
-            <a:pPr algn="ctr"/>
-          </a:p>
-        </p:txBody>
-      </p:sp>
-      <p:sp>
-        <p:nvSpPr>
-          <p:cNvPr id="93" name="TextBox 92"/>
-          <p:cNvSpPr txBox="1"/>
-          <p:nvPr/>
-        </p:nvSpPr>
-        <p:spPr>
-          <a:xfrm>
-            <a:off x="12316967" y="8046719"/>
-            <a:ext cx="5157216" cy="274320"/>
-          </a:xfrm>
-          <a:prstGeom prst="rect">
-            <a:avLst/>
-          </a:prstGeom>
-          <a:noFill/>
-        </p:spPr>
-        <p:txBody>
-          <a:bodyPr wrap="square" anchor="ctr" lIns="0" rIns="0" tIns="0" bIns="0">
-            <a:spAutoFit/>
-          </a:bodyPr>
-          <a:lstStyle/>
-          <a:p>
-            <a:pPr algn="l">
-              <a:lnSpc>
-                <a:spcPct val="112000"/>
-              </a:lnSpc>
-            </a:pPr>
-            <a:r>
-              <a:rPr sz="1425" b="1">
-                <a:solidFill>
-                  <a:srgbClr val="1428A0"/>
-                </a:solidFill>
-                <a:latin typeface="Arial"/>
-                <a:ea typeface="Arial"/>
-              </a:rPr>
-              <a:t>3년  </a:t>
-            </a:r>
-            <a:r>
-              <a:rPr sz="1350" b="0">
-                <a:solidFill>
-                  <a:srgbClr val="555555"/>
-                </a:solidFill>
-                <a:latin typeface="Arial"/>
-                <a:ea typeface="Arial"/>
-              </a:rPr>
-              <a:t>캐시 티어 QLC 25%+ · SCA 3건 · 기본 백엔드</a:t>
-            </a:r>
-          </a:p>
-        </p:txBody>
-      </p:sp>
-      <p:sp>
-        <p:nvSpPr>
-          <p:cNvPr id="94" name="Rectangle 93"/>
-          <p:cNvSpPr/>
-          <p:nvPr/>
-        </p:nvSpPr>
-        <p:spPr>
-          <a:xfrm>
-            <a:off x="722376" y="8705088"/>
-            <a:ext cx="16843248" cy="694944"/>
-          </a:xfrm>
-          <a:prstGeom prst="rect">
-            <a:avLst/>
-          </a:prstGeom>
-          <a:solidFill>
-            <a:srgbClr val="1428A0"/>
-          </a:solidFill>
-          <a:ln>
-            <a:noFill/>
-          </a:ln>
-          <a:effectLst/>
-        </p:spPr>
-        <p:style>
-          <a:lnRef idx="1">
-            <a:schemeClr val="accent1"/>
-          </a:lnRef>
-          <a:fillRef idx="3">
-            <a:schemeClr val="accent1"/>
-          </a:fillRef>
-          <a:effectRef idx="2">
-            <a:schemeClr val="accent1"/>
-          </a:effectRef>
-          <a:fontRef idx="minor">
-            <a:schemeClr val="lt1"/>
-          </a:fontRef>
-        </p:style>
-        <p:txBody>
-          <a:bodyPr rtlCol="0" anchor="ctr"/>
-          <a:lstStyle/>
-          <a:p>
-            <a:pPr algn="ctr"/>
-          </a:p>
-        </p:txBody>
-      </p:sp>
-      <p:sp>
-        <p:nvSpPr>
-          <p:cNvPr id="95" name="TextBox 94"/>
-          <p:cNvSpPr txBox="1"/>
-          <p:nvPr/>
-        </p:nvSpPr>
-        <p:spPr>
-          <a:xfrm>
-            <a:off x="1133856" y="8705088"/>
-            <a:ext cx="1463040" cy="694944"/>
-          </a:xfrm>
-          <a:prstGeom prst="rect">
-            <a:avLst/>
-          </a:prstGeom>
-          <a:noFill/>
-        </p:spPr>
-        <p:txBody>
-          <a:bodyPr wrap="square" anchor="ctr" lIns="0" rIns="0" tIns="0" bIns="0">
-            <a:spAutoFit/>
-          </a:bodyPr>
-          <a:lstStyle/>
-          <a:p>
-            <a:pPr algn="l">
-              <a:lnSpc>
-                <a:spcPct val="112000"/>
-              </a:lnSpc>
-            </a:pPr>
-            <a:r>
-              <a:rPr sz="1800" b="0">
-                <a:solidFill>
-                  <a:srgbClr val="FFFFFF"/>
-                </a:solidFill>
-                <a:latin typeface="Arial"/>
-                <a:ea typeface="Arial"/>
-              </a:rPr>
-              <a:t>결정 요청</a:t>
-            </a:r>
-          </a:p>
-        </p:txBody>
-      </p:sp>
-      <p:sp>
-        <p:nvSpPr>
-          <p:cNvPr id="96" name="TextBox 95"/>
-          <p:cNvSpPr txBox="1"/>
-          <p:nvPr/>
-        </p:nvSpPr>
-        <p:spPr>
-          <a:xfrm>
-            <a:off x="2551176" y="8705088"/>
-            <a:ext cx="14648688" cy="694944"/>
-          </a:xfrm>
-          <a:prstGeom prst="rect">
-            <a:avLst/>
-          </a:prstGeom>
-          <a:noFill/>
-        </p:spPr>
-        <p:txBody>
-          <a:bodyPr wrap="square" anchor="ctr" lIns="0" rIns="0" tIns="0" bIns="0">
-            <a:spAutoFit/>
-          </a:bodyPr>
-          <a:lstStyle/>
-          <a:p>
-            <a:pPr algn="l">
-              <a:lnSpc>
-                <a:spcPct val="112000"/>
-              </a:lnSpc>
-            </a:pPr>
-            <a:r>
-              <a:rPr sz="1900" b="1">
-                <a:solidFill>
-                  <a:srgbClr val="FFFFFF"/>
-                </a:solidFill>
-                <a:latin typeface="Arial"/>
-                <a:ea typeface="Arial"/>
-              </a:rPr>
-              <a:t>① 자회사 설립 · 별도 보상 · 미주 현지 채용 승인   ② Anthropic SCA 공동 설계 조항 · NVIDIA 기술 협의 착수   ③ FDE Pod 1호 발족</a:t>
-            </a:r>
-          </a:p>
-        </p:txBody>
-      </p:sp>
-      <p:sp>
-        <p:nvSpPr>
-          <p:cNvPr id="97" name="TextBox 96"/>
+              <a:t>그 길은 FDE와 전략적 협약, 그리고 이를 해낼 사람과 문화가 엽니다</a:t>
+            </a:r>
+          </a:p>
+        </p:txBody>
+      </p:sp>
+      <p:sp>
+        <p:nvSpPr>
+          <p:cNvPr id="82" name="TextBox 81"/>
           <p:cNvSpPr txBox="1"/>
           <p:nvPr/>
         </p:nvSpPr>
@@ -14424,7 +13707,7 @@
       </p:sp>
       <p:sp>
         <p:nvSpPr>
-          <p:cNvPr id="98" name="TextBox 97"/>
+          <p:cNvPr id="83" name="TextBox 82"/>
           <p:cNvSpPr txBox="1"/>
           <p:nvPr/>
         </p:nvSpPr>

--- a/outputs/presentation/qlc-ssd-strategy.pptx
+++ b/outputs/presentation/qlc-ssd-strategy.pptx
@@ -504,7 +504,7 @@
           <a:lstStyle/>
           <a:p>
             <a:r>
-              <a:t>배경 한 장입니다. 2022년은 QLC 주문의 해가 아니라 조건이 갖춰진 해였습니다: 전문 벤더(Solidigm) 출범, 하이퍼스케일러 주도 폼팩터(E1.S/E1.L), Meta·Google의 배치 표준 비준(2022-12), NAND 가격 급락, 학습 데이터셋 6배. 하이퍼스케일러가 원한 것은 HDD 대역폭 붕괴를 메우는 용량 계층(Meta: 10 MB/s/TB), 공급자가 판 것은 1U에 1PB의 TCO였습니다. 물량은 AI 추론 서버의 전력 효율이 우선순위가 된 2024년에 터졌습니다(TrendForce 30EB, 4배). 구매 기준은 TB당 원가·랙 밀도 → TB당 와트·공급 확보 → 유효 DWPD·토큰 경제성으로 이동합니다. 향후 3~5년 공급 부족 국면에서 HDD 대체는 커머디티 경쟁이라 들어가지 않고, KV cache 오프로드가 만드는 추론 캐시 티어를 QLC로 가져갑니다. 이 티어는 오늘 TLC(1~3 DWPD)가 서비스합니다. 그래프: 비트는 10배, 가격 정상화 기준선에서 매출은 정체, 진한 파랑은 호스트 협력 배치가 성립할 때의 조건부 상방. 모델 가정은 위키 qlc-ssd-market.md §4.3.</a:t>
+              <a:t>배경 한 장입니다. 질문은 하나, 고객은 왜 QLC를 원하는가입니다. 세 국면을 관통하는 답은 계산 옆에 가장 싼 바이트를 두는 것입니다. 2022년 하이퍼스케일러는 데이터셋이 6배로 늘고 HDD가 TB당 대역폭을 잃자 플래시 용량 계층을 원했습니다(Meta: 10 MB/s/TB 대역, TLC 서버의 6배 바이트 밀도). 공급자가 판 것은 1U에 1PB, 5년 TCO -47%였습니다. 조건이 있었습니다. 읽기 중심 워크로드라서 0.3~0.6 DWPD로 충분했고, 쓰기가 NAND 전력의 대부분이라 읽기 중심 데이터를 QLC로 옮기면 전력도 줄었습니다. 그 해에 전문 벤더(Solidigm) 출범, E1.S/E1.L 폼팩터, Meta·Google의 배치 표준 비준(2022-12), 가격 급락이 갖춰졌고 물량은 AI 추론 서버의 전력 효율이 우선순위가 된 2024년에 터졌습니다(TrendForce 30EB, 4배). 현재 국면의 구매 기준은 TB당 와트와 공급 확보이고 245TB까지 용량 경쟁이 벌어졌지만, 여전히 읽기 중심 데이터가 QLC의 자리이고 쓰기 티어는 TLC입니다. 향후 국면에서 가장 빨리 크는 용량 수요는 KV cache입니다. 장문맥·에이전틱 추론의 KV 캐시가 HBM과 DRAM을 넘쳐 SSD로 내려오고, 프리필 재사용으로 GPU당 동시 사용자가 늘고 TTFT가 줄어듭니다(NVMe 오프로드로 H100 한 장이 동시 사용자 10배). 고객이 사는 것은 GPU당 캐시 용량과 토큰당 비용이며, 여기서도 가장 싼 바이트는 QLC입니다. 그러나 캐시는 쓰기가 많아 오늘 이 티어는 TLC 1~3 DWPD가 서비스하고(2027년 75~100EB), CMX 타깃 드라이브도 전부 TLC입니다. 그래프: 비트는 10배, 가격 정상화 기준선에서 매출은 정체, 진한 파랑은 호스트 협력 배치가 성립할 때의 조건부 상방. 결론: 고객은 추론 캐시 티어에서도 QLC의 경제성을 원하고, 문은 내구성이며, 그 문은 디바이스만으로는 열리지 않습니다. 다음 장이 그 이유입니다. 모델 가정은 위키 qlc-ssd-market.md §4.3.</a:t>
             </a:r>
           </a:p>
         </p:txBody>
@@ -574,7 +574,7 @@
           <a:lstStyle/>
           <a:p>
             <a:r>
-              <a:t>요구사항과 역량 한 장입니다. 갭 세 가지: 내구성(QLC 정격 0.075~0.6 vs TLC 1~3 DWPD, 10~40배), 스트림(RUH 2~8 vs 200+), 접점(KV 캐시 관리자 4종 코드에 배치·내구성 언급 0). 수단은 있습니다(CacheLib 실측 WAF 3.22→1.03, XFS write streams RocksDB -35%, ScaleFlux 유효 7~10 DWPD). 그림은 고객 시스템 5계층을 세 번 그리고 우리가 닿는 층을 색으로 표시하며, 각 층에 그 층을 구성하는 기술을 적었습니다. 응용·추론 엔진(vLLM·SGLang·TensorRT-LLM), KV 캐시 관리자(NVIDIA Dynamo KVBM·LMCache·Mooncake·Tencent FlexKV), I/O 라이브러리(NIXL·GPUDirect Storage·io_uring·SPDK/xNVMe), 커널·플랫폼(Linux 6.16 write streams·XFS/f2fs 스트림·NVIDIA CMX와 DOCA Memos), SSD 디바이스(컨트롤러·펌웨어 RUH·2Tb QLC·NVMe KV 확장·텔레메트리). Phase 1은 SSD 층만 우리 것입니다(KV-ready QLC). Phase 2는 캐시 관리자의 빈도 필터·퇴거 정책이 트레이스의 원천이고, I/O 라이브러리의 io_uring·GDS 백엔드에 write stream을 부착하며 커널 스트림과 CMX 힌트 매핑을 검증해 RUH 정책·WAF·유효 DWPD 실측을 공개합니다. Phase 3는 캐시 관리자 4종에 플러그인을 메인라인으로 머지하고, NIXL·xNVMe가 기본 백엔드가 되며, DOCA Memos와 배치 표준의 매핑을 NVIDIA와 공동 정의하고, 응용 층은 커넥터·스케줄러를 이해해 공용 TCO 모델(GPU당 동시 사용자·TTFT·전력)로 대화합니다. FDE(Forward Deployed Engineer)가 고객 옆에 상주합니다. 삼성 현 위치는 Phase 1 확보, Phase 2 진입: KV cache 백서 2종으로 측정 역량은 있으나 트레이스 기반 실측이 미공개이고 캐시 관리자 4종에 기여가 없습니다. 오케스트레이션 자체는 만들지 않습니다.</a:t>
+              <a:t>요구사항과 역량 한 장입니다. 앞 장의 결론을 잇습니다. 고객은 캐시 티어에서도 QLC의 경제성(TB당 원가·전력)을 원하지만 캐시는 쓰기가 많고, 내구성은 미디어를 바꿔서가 아니라 고객 시스템이 데이터를 어떻게 놓느냐(배치 표준·캐시 관리자 정책)로 풀립니다. 그래서 디바이스에서 고객 시스템 안까지 올라가야 합니다. 갭 세 가지: 내구성(QLC 정격 0.075~0.6 vs TLC 1~3 DWPD, 10~40배), 스트림(RUH 2~8 vs 200+), 접점(KV 캐시 관리자 4종 코드에 배치·내구성 언급 0). 수단은 있습니다(CacheLib 실측 WAF 3.22→1.03, XFS write streams RocksDB -35%, ScaleFlux 유효 7~10 DWPD). 그림은 고객 시스템 5계층을 세 번 그리고 우리가 닿는 층을 색으로 표시하며, 각 층에 그 층을 구성하는 기술을 적었습니다. 응용·추론 엔진(vLLM·SGLang·TensorRT-LLM), KV 캐시 관리자(NVIDIA Dynamo KVBM·LMCache·Mooncake·Tencent FlexKV), I/O 라이브러리(NIXL·GPUDirect Storage·io_uring·SPDK/xNVMe), 커널·플랫폼(Linux 6.16 write streams·XFS/f2fs 스트림·NVIDIA CMX와 DOCA Memos), SSD 디바이스(컨트롤러·펌웨어 RUH·2Tb QLC·NVMe KV 확장·텔레메트리). Phase 1은 SSD 층만 우리 것입니다(KV-ready QLC). Phase 2는 캐시 관리자의 빈도 필터·퇴거 정책이 트레이스의 원천이고, I/O 라이브러리의 io_uring·GDS 백엔드에 write stream을 부착하며 커널 스트림과 CMX 힌트 매핑을 검증해 RUH 정책·WAF·유효 DWPD 실측을 공개합니다. Phase 3는 캐시 관리자 4종에 플러그인을 메인라인으로 머지하고, NIXL·xNVMe가 기본 백엔드가 되며, DOCA Memos와 배치 표준의 매핑을 NVIDIA와 공동 정의하고, 응용 층은 커넥터·스케줄러를 이해해 공용 TCO 모델(GPU당 동시 사용자·TTFT·전력)로 대화합니다. FDE(Forward Deployed Engineer)가 고객 옆에 상주합니다. 삼성 현 위치는 Phase 1 확보, Phase 2 진입: KV cache 백서 2종으로 측정 역량은 있으나 트레이스 기반 실측이 미공개이고 캐시 관리자 4종에 기여가 없습니다. 오케스트레이션 자체는 만들지 않습니다.</a:t>
             </a:r>
           </a:p>
         </p:txBody>
@@ -644,7 +644,7 @@
           <a:lstStyle/>
           <a:p>
             <a:r>
-              <a:t>실행 전략 한 장입니다. 목표는 두 가지이고 각각 선례가 있습니다. ① FDE(Forward Deployed Engineer)가 고객 시스템 안으로 들어갑니다. Palantir가 창안한 역할로 내부 코드명 Delta, 고객 환경 내부에 상주하며 실제 운영 제약 아래서 프로덕션 시스템을 직접 구축하고 청구 시간이 아니라 성과로 평가받습니다. 명시적 요구와 실제 요구의 간극을 현장에서 코드로 메우고, 특정 고객용 거친 해법(gravel road)이 제품 표준 기능(paved highway)으로 포장되는 피드백 루프를 만듭니다. 파급: 고객 락인의 동력이자 640% 주가 수익률의 원천으로 회자되고, Anthropic·OpenAI가 엔터프라이즈 GTM 전략으로 채택했습니다(OpenAI는 2025년 초 FDE 팀 2명→10명+). 우리는 Co-Design Pod를 FDE 모델로 운영하되, 메모리는 제조 리드타임이 길므로 시스템 아키텍트·TCO 모델링 역량을 결합합니다. ② 전략적 협약(SCA)으로 워크로드가 옵니다. 선례는 Micron↔Anthropic(2026-06-22): 공동 설계(HBM·DRAM·SSD를 Claude 학습·추론 워크로드에 맞춰 공동 최적화) + 다년 공급 + 운영 통합(Claude 사내 배치) + 자본(Series H)을 한 계약에 묶었습니다. Micron은 SCA 16건, 최소 계약매출 약 $100B, 예치금 $22B를 공시했습니다. 삼성·SK의 Anthropic 공급계약에는 공동 설계 조항이 없으므로 우리가 먼저 제안합니다. 창은 공급 완화 전인 2027년 상반기까지입니다. 이 장에는 두 목표를 여는 수단 중 조직·인사·문화 세 축을 보였습니다(전략·재무 축과 90일·1년·3년 타임라인은 위키 실행 전략 페이지 §2.1·§2.5·§3에 있습니다). 조직은 실리콘밸리 소프트웨어 자회사와 FDE Pod에 더해 시스템 소프트웨어 조직을 강화합니다. 인사는 고객의 시스템을 잘 이해하는 시스템 소프트웨어 전문가를 채용하고 양성하는 것이 핵심이며, 채용 기준은 고객 시스템(추론 엔진·KV 캐시 관리자·I/O·커널 코드)을 읽고 고칠 수 있는가입니다. 미주 고객과의 협업을 위해 현지 채용을 늘리고, 그것이 가능하도록 별도 보상 체계를 두며, 본사 엔지니어는 상주 로테이션으로 양성합니다. 문화는 업스트림 우선을 넘어 오픈소스 생태계를 주도하는 기업 문화로 갑니다. 기여자에서 메인테이너·커미터로 올라가고, 우리가 운영하는 레퍼런스 프로젝트에 외부 기여가 들어오게 하며, KV cache 실측을 업계 최초로 공개합니다. 마지막 문장은 세 장의 요약입니다. 니어라인 HDD 대체가 아니라 추론 캐시 티어를 QLC로 가져가려면(1장) 디바이스에서 고객 시스템 안까지 세 단계를 올라가야 하며(2장), 그 길은 FDE와 전략적 협약, 그리고 이를 해낼 사람과 문화가 엽니다(3장).</a:t>
+              <a:t>실행 전략 한 장입니다. 목표는 두 가지이고 각각 선례가 있습니다. ① FDE(Forward Deployed Engineer)가 고객 시스템 안으로 들어갑니다. Palantir가 창안한 역할로 내부 코드명 Delta, 고객 환경 내부에 상주하며 실제 운영 제약 아래서 프로덕션 시스템을 직접 구축하고 청구 시간이 아니라 성과로 평가받습니다. 명시적 요구와 실제 요구의 간극을 현장에서 코드로 메우고, 특정 고객용 거친 해법(gravel road)이 제품 표준 기능(paved highway)으로 포장되는 피드백 루프를 만듭니다. 파급: 고객 락인의 동력이자 640% 주가 수익률의 원천으로 회자되고, Anthropic·OpenAI가 엔터프라이즈 GTM 전략으로 채택했습니다(OpenAI는 2025년 초 FDE 팀 2명→10명+). 우리는 Co-Design Pod를 FDE 모델로 운영하되, 메모리는 제조 리드타임이 길므로 시스템 아키텍트·TCO 모델링 역량을 결합합니다. ② 전략적 협약(SCA)으로 워크로드가 옵니다. 선례는 Micron↔Anthropic(2026-06-22): 공동 설계(HBM·DRAM·SSD를 Claude 학습·추론 워크로드에 맞춰 공동 최적화) + 다년 공급 + 운영 통합(Claude 사내 배치) + 자본(Series H)을 한 계약에 묶었습니다. Micron은 SCA 16건, 최소 계약매출 약 $100B, 예치금 $22B를 공시했습니다. 삼성·SK의 Anthropic 공급계약에는 공동 설계 조항이 없으므로 우리가 먼저 제안합니다. 창은 공급 완화 전인 2027년 상반기까지입니다. 이 장에는 두 목표를 여는 수단 중 조직·인사·문화 세 축을 보였습니다(전략·재무 축과 90일·1년·3년 타임라인은 위키 실행 전략 페이지 §2.1·§2.5·§3에 있습니다). 조직은 실리콘밸리 소프트웨어 자회사와 FDE Pod에 더해 시스템 소프트웨어 조직을 강화합니다. 인사는 고객의 시스템을 잘 이해하는 시스템 소프트웨어 전문가를 채용하고 양성하는 것이 핵심이며, 채용 기준은 고객 시스템(추론 엔진·KV 캐시 관리자·I/O·커널 코드)을 읽고 고칠 수 있는가입니다. 미주 고객과의 협업을 위해 현지 채용을 늘리고, 그것이 가능하도록 별도 보상 체계를 두며, 본사 엔지니어는 상주 로테이션으로 양성합니다. 문화는 업스트림 우선을 넘어 오픈소스 생태계를 주도하는 기업 문화로 갑니다. 기여자에서 메인테이너·커미터로 올라가고, 우리가 운영하는 레퍼런스 프로젝트에 외부 기여가 들어오게 하며, KV cache 실측을 업계 최초로 공개합니다. 마지막 문장은 세 장의 요약입니다. 고객은 계산 옆의 가장 싼 바이트를 사려고 QLC를 택했고 그 자리가 쓰기 많은 추론 캐시로 옮겨가므로(1장) 내구성을 고객 시스템 안에서 풀어야 하며(2장), 그 길은 FDE와 전략적 협약, 그리고 이를 해낼 사람과 문화가 엽니다(3장).</a:t>
             </a:r>
           </a:p>
         </p:txBody>
@@ -3765,7 +3765,7 @@
                 <a:latin typeface="Arial"/>
                 <a:ea typeface="Arial"/>
               </a:rPr>
-              <a:t>QLC eSSD 전략 · 배경: 트렌드 변화와 시장 흐름</a:t>
+              <a:t>QLC eSSD 전략 · 배경: 고객은 왜 QLC를 원하는가</a:t>
             </a:r>
           </a:p>
         </p:txBody>
@@ -3805,7 +3805,7 @@
                 <a:latin typeface="Arial"/>
                 <a:ea typeface="Arial"/>
               </a:rPr>
-              <a:t>요구는 2022년에 정의되고 물량은 2024년에 터졌으며, 다음 무대는 추론 캐시 티어입니다</a:t>
+              <a:t>고객이 사는 것은 계산 옆의 가장 싼 바이트이고, 그 자리가 추론 캐시 티어로 옮겨갑니다</a:t>
             </a:r>
           </a:p>
         </p:txBody>
@@ -3845,7 +3845,7 @@
                 <a:latin typeface="Arial"/>
                 <a:ea typeface="Arial"/>
               </a:rPr>
-              <a:t>세 국면의 구매 기준이 어떻게 바뀌는지, 그리고 2030년까지의 수요·비중·매출입니다.</a:t>
+              <a:t>세 국면 모두 고객은 TB당 원가·전력·공간을 샀습니다. 다음 자리는 쓰기가 많은 KV 캐시라 내구성이 문입니다.</a:t>
             </a:r>
           </a:p>
         </p:txBody>
@@ -3903,7 +3903,7 @@
         <p:spPr>
           <a:xfrm>
             <a:off x="722376" y="2560320"/>
-            <a:ext cx="5413248" cy="1847088"/>
+            <a:ext cx="5413248" cy="2139696"/>
           </a:xfrm>
           <a:prstGeom prst="rect">
             <a:avLst/>
@@ -4015,7 +4015,7 @@
                 <a:latin typeface="Arial"/>
                 <a:ea typeface="Arial"/>
               </a:rPr>
-              <a:t>구매 기준</a:t>
+              <a:t>고객이 산 것</a:t>
             </a:r>
           </a:p>
         </p:txBody>
@@ -4055,7 +4055,7 @@
                 <a:latin typeface="Arial"/>
                 <a:ea typeface="Arial"/>
               </a:rPr>
-              <a:t>TB당 원가 · 랙 밀도</a:t>
+              <a:t>TB당 원가 · 랙당 용량</a:t>
             </a:r>
           </a:p>
         </p:txBody>
@@ -4095,7 +4095,7 @@
                 <a:latin typeface="Arial"/>
                 <a:ea typeface="Arial"/>
               </a:rPr>
-              <a:t>배경  </a:t>
+              <a:t>왜  </a:t>
             </a:r>
             <a:r>
               <a:rPr sz="1425" b="0">
@@ -4105,7 +4105,7 @@
                 <a:latin typeface="Arial"/>
                 <a:ea typeface="Arial"/>
               </a:rPr>
-              <a:t>데이터 레이크 · HDD 대역폭 붕괴 · 배치 표준 비준</a:t>
+              <a:t>데이터 6배 · 1U에 1PB, TCO -47%</a:t>
             </a:r>
           </a:p>
         </p:txBody>
@@ -4145,6 +4145,56 @@
                 <a:latin typeface="Arial"/>
                 <a:ea typeface="Arial"/>
               </a:rPr>
+              <a:t>조건  </a:t>
+            </a:r>
+            <a:r>
+              <a:rPr sz="1425" b="0">
+                <a:solidFill>
+                  <a:srgbClr val="555555"/>
+                </a:solidFill>
+                <a:latin typeface="Arial"/>
+                <a:ea typeface="Arial"/>
+              </a:rPr>
+              <a:t>읽기 중심이라 0.3~0.6 DWPD로 충분</a:t>
+            </a:r>
+          </a:p>
+        </p:txBody>
+      </p:sp>
+      <p:sp>
+        <p:nvSpPr>
+          <p:cNvPr id="14" name="TextBox 13"/>
+          <p:cNvSpPr txBox="1"/>
+          <p:nvPr/>
+        </p:nvSpPr>
+        <p:spPr>
+          <a:xfrm>
+            <a:off x="1069848" y="4334255"/>
+            <a:ext cx="4718304" cy="274320"/>
+          </a:xfrm>
+          <a:prstGeom prst="rect">
+            <a:avLst/>
+          </a:prstGeom>
+          <a:noFill/>
+        </p:spPr>
+        <p:txBody>
+          <a:bodyPr wrap="square" anchor="t" lIns="0" rIns="0" tIns="0" bIns="0">
+            <a:spAutoFit/>
+          </a:bodyPr>
+          <a:lstStyle/>
+          <a:p>
+            <a:pPr algn="l">
+              <a:lnSpc>
+                <a:spcPct val="112000"/>
+              </a:lnSpc>
+            </a:pPr>
+            <a:r>
+              <a:rPr sz="1425" b="1">
+                <a:solidFill>
+                  <a:srgbClr val="1A1A1A"/>
+                </a:solidFill>
+                <a:latin typeface="Arial"/>
+                <a:ea typeface="Arial"/>
+              </a:rPr>
               <a:t>삼성  </a:t>
             </a:r>
             <a:r>
@@ -4162,13 +4212,13 @@
       </p:sp>
       <p:sp>
         <p:nvSpPr>
-          <p:cNvPr id="14" name="Right Arrow 13"/>
+          <p:cNvPr id="15" name="Right Arrow 14"/>
           <p:cNvSpPr/>
           <p:nvPr/>
         </p:nvSpPr>
         <p:spPr>
           <a:xfrm>
-            <a:off x="6217920" y="3401568"/>
+            <a:off x="6217920" y="3547872"/>
             <a:ext cx="146304" cy="164592"/>
           </a:xfrm>
           <a:prstGeom prst="rightArrow">
@@ -4206,14 +4256,14 @@
       </p:sp>
       <p:sp>
         <p:nvSpPr>
-          <p:cNvPr id="15" name="Rectangle 14"/>
+          <p:cNvPr id="16" name="Rectangle 15"/>
           <p:cNvSpPr/>
           <p:nvPr/>
         </p:nvSpPr>
         <p:spPr>
           <a:xfrm>
             <a:off x="6437376" y="2560320"/>
-            <a:ext cx="5413248" cy="1847088"/>
+            <a:ext cx="5413248" cy="2139696"/>
           </a:xfrm>
           <a:prstGeom prst="rect">
             <a:avLst/>
@@ -4252,7 +4302,7 @@
       </p:sp>
       <p:sp>
         <p:nvSpPr>
-          <p:cNvPr id="16" name="TextBox 15"/>
+          <p:cNvPr id="17" name="TextBox 16"/>
           <p:cNvSpPr txBox="1"/>
           <p:nvPr/>
         </p:nvSpPr>
@@ -4292,7 +4342,7 @@
       </p:sp>
       <p:sp>
         <p:nvSpPr>
-          <p:cNvPr id="17" name="TextBox 16"/>
+          <p:cNvPr id="18" name="TextBox 17"/>
           <p:cNvSpPr txBox="1"/>
           <p:nvPr/>
         </p:nvSpPr>
@@ -4325,14 +4375,14 @@
                 <a:latin typeface="Arial"/>
                 <a:ea typeface="Arial"/>
               </a:rPr>
-              <a:t>구매 기준</a:t>
-            </a:r>
-          </a:p>
-        </p:txBody>
-      </p:sp>
-      <p:sp>
-        <p:nvSpPr>
-          <p:cNvPr id="18" name="TextBox 17"/>
+              <a:t>고객이 산 것</a:t>
+            </a:r>
+          </a:p>
+        </p:txBody>
+      </p:sp>
+      <p:sp>
+        <p:nvSpPr>
+          <p:cNvPr id="19" name="TextBox 18"/>
           <p:cNvSpPr txBox="1"/>
           <p:nvPr/>
         </p:nvSpPr>
@@ -4372,7 +4422,7 @@
       </p:sp>
       <p:sp>
         <p:nvSpPr>
-          <p:cNvPr id="19" name="TextBox 18"/>
+          <p:cNvPr id="20" name="TextBox 19"/>
           <p:cNvSpPr txBox="1"/>
           <p:nvPr/>
         </p:nvSpPr>
@@ -4405,7 +4455,7 @@
                 <a:latin typeface="Arial"/>
                 <a:ea typeface="Arial"/>
               </a:rPr>
-              <a:t>배경  </a:t>
+              <a:t>왜  </a:t>
             </a:r>
             <a:r>
               <a:rPr sz="1425" b="0">
@@ -4415,14 +4465,14 @@
                 <a:latin typeface="Arial"/>
                 <a:ea typeface="Arial"/>
               </a:rPr>
-              <a:t>추론 서버 전력 효율 · 245TB 경쟁 · HDD 완판</a:t>
-            </a:r>
-          </a:p>
-        </p:txBody>
-      </p:sp>
-      <p:sp>
-        <p:nvSpPr>
-          <p:cNvPr id="20" name="TextBox 19"/>
+              <a:t>추론 서버의 전력·공간 병목 → 245TB</a:t>
+            </a:r>
+          </a:p>
+        </p:txBody>
+      </p:sp>
+      <p:sp>
+        <p:nvSpPr>
+          <p:cNvPr id="21" name="TextBox 20"/>
           <p:cNvSpPr txBox="1"/>
           <p:nvPr/>
         </p:nvSpPr>
@@ -4455,6 +4505,56 @@
                 <a:latin typeface="Arial"/>
                 <a:ea typeface="Arial"/>
               </a:rPr>
+              <a:t>조건  </a:t>
+            </a:r>
+            <a:r>
+              <a:rPr sz="1425" b="0">
+                <a:solidFill>
+                  <a:srgbClr val="555555"/>
+                </a:solidFill>
+                <a:latin typeface="Arial"/>
+                <a:ea typeface="Arial"/>
+              </a:rPr>
+              <a:t>여전히 읽기 중심, 쓰기 티어는 TLC</a:t>
+            </a:r>
+          </a:p>
+        </p:txBody>
+      </p:sp>
+      <p:sp>
+        <p:nvSpPr>
+          <p:cNvPr id="22" name="TextBox 21"/>
+          <p:cNvSpPr txBox="1"/>
+          <p:nvPr/>
+        </p:nvSpPr>
+        <p:spPr>
+          <a:xfrm>
+            <a:off x="6784848" y="4334255"/>
+            <a:ext cx="4718304" cy="274320"/>
+          </a:xfrm>
+          <a:prstGeom prst="rect">
+            <a:avLst/>
+          </a:prstGeom>
+          <a:noFill/>
+        </p:spPr>
+        <p:txBody>
+          <a:bodyPr wrap="square" anchor="t" lIns="0" rIns="0" tIns="0" bIns="0">
+            <a:spAutoFit/>
+          </a:bodyPr>
+          <a:lstStyle/>
+          <a:p>
+            <a:pPr algn="l">
+              <a:lnSpc>
+                <a:spcPct val="112000"/>
+              </a:lnSpc>
+            </a:pPr>
+            <a:r>
+              <a:rPr sz="1425" b="1">
+                <a:solidFill>
+                  <a:srgbClr val="1A1A1A"/>
+                </a:solidFill>
+                <a:latin typeface="Arial"/>
+                <a:ea typeface="Arial"/>
+              </a:rPr>
               <a:t>삼성  </a:t>
             </a:r>
             <a:r>
@@ -4472,13 +4572,13 @@
       </p:sp>
       <p:sp>
         <p:nvSpPr>
-          <p:cNvPr id="21" name="Right Arrow 20"/>
+          <p:cNvPr id="23" name="Right Arrow 22"/>
           <p:cNvSpPr/>
           <p:nvPr/>
         </p:nvSpPr>
         <p:spPr>
           <a:xfrm>
-            <a:off x="11932920" y="3401568"/>
+            <a:off x="11932920" y="3547872"/>
             <a:ext cx="146304" cy="164592"/>
           </a:xfrm>
           <a:prstGeom prst="rightArrow">
@@ -4516,14 +4616,14 @@
       </p:sp>
       <p:sp>
         <p:nvSpPr>
-          <p:cNvPr id="22" name="Rectangle 21"/>
+          <p:cNvPr id="24" name="Rectangle 23"/>
           <p:cNvSpPr/>
           <p:nvPr/>
         </p:nvSpPr>
         <p:spPr>
           <a:xfrm>
             <a:off x="12152376" y="2560320"/>
-            <a:ext cx="5413248" cy="1847088"/>
+            <a:ext cx="5413248" cy="2139696"/>
           </a:xfrm>
           <a:prstGeom prst="rect">
             <a:avLst/>
@@ -4560,14 +4660,14 @@
       </p:sp>
       <p:sp>
         <p:nvSpPr>
-          <p:cNvPr id="23" name="Rectangle 22"/>
+          <p:cNvPr id="25" name="Rectangle 24"/>
           <p:cNvSpPr/>
           <p:nvPr/>
         </p:nvSpPr>
         <p:spPr>
           <a:xfrm>
             <a:off x="12152376" y="2560320"/>
-            <a:ext cx="73152" cy="1847088"/>
+            <a:ext cx="73152" cy="2139696"/>
           </a:xfrm>
           <a:prstGeom prst="rect">
             <a:avLst/>
@@ -4604,7 +4704,7 @@
       </p:sp>
       <p:sp>
         <p:nvSpPr>
-          <p:cNvPr id="24" name="TextBox 23"/>
+          <p:cNvPr id="26" name="TextBox 25"/>
           <p:cNvSpPr txBox="1"/>
           <p:nvPr/>
         </p:nvSpPr>
@@ -4644,7 +4744,7 @@
       </p:sp>
       <p:sp>
         <p:nvSpPr>
-          <p:cNvPr id="25" name="TextBox 24"/>
+          <p:cNvPr id="27" name="TextBox 26"/>
           <p:cNvSpPr txBox="1"/>
           <p:nvPr/>
         </p:nvSpPr>
@@ -4677,14 +4777,14 @@
                 <a:latin typeface="Arial"/>
                 <a:ea typeface="Arial"/>
               </a:rPr>
-              <a:t>구매 기준</a:t>
-            </a:r>
-          </a:p>
-        </p:txBody>
-      </p:sp>
-      <p:sp>
-        <p:nvSpPr>
-          <p:cNvPr id="26" name="TextBox 25"/>
+              <a:t>고객이 산 것</a:t>
+            </a:r>
+          </a:p>
+        </p:txBody>
+      </p:sp>
+      <p:sp>
+        <p:nvSpPr>
+          <p:cNvPr id="28" name="TextBox 27"/>
           <p:cNvSpPr txBox="1"/>
           <p:nvPr/>
         </p:nvSpPr>
@@ -4717,14 +4817,14 @@
                 <a:latin typeface="Arial"/>
                 <a:ea typeface="Arial"/>
               </a:rPr>
-              <a:t>유효 DWPD · 토큰 경제성</a:t>
-            </a:r>
-          </a:p>
-        </p:txBody>
-      </p:sp>
-      <p:sp>
-        <p:nvSpPr>
-          <p:cNvPr id="27" name="TextBox 26"/>
+              <a:t>GPU당 캐시 용량 · 토큰당 비용</a:t>
+            </a:r>
+          </a:p>
+        </p:txBody>
+      </p:sp>
+      <p:sp>
+        <p:nvSpPr>
+          <p:cNvPr id="29" name="TextBox 28"/>
           <p:cNvSpPr txBox="1"/>
           <p:nvPr/>
         </p:nvSpPr>
@@ -4757,7 +4857,7 @@
                 <a:latin typeface="Arial"/>
                 <a:ea typeface="Arial"/>
               </a:rPr>
-              <a:t>배경  </a:t>
+              <a:t>왜  </a:t>
             </a:r>
             <a:r>
               <a:rPr sz="1425" b="0">
@@ -4767,14 +4867,14 @@
                 <a:latin typeface="Arial"/>
                 <a:ea typeface="Arial"/>
               </a:rPr>
-              <a:t>KV cache 오프로드 · 2027년 75~100EB</a:t>
-            </a:r>
-          </a:p>
-        </p:txBody>
-      </p:sp>
-      <p:sp>
-        <p:nvSpPr>
-          <p:cNvPr id="28" name="TextBox 27"/>
+              <a:t>KV 캐시가 HBM을 넘침 · GPU당 사용자 10배</a:t>
+            </a:r>
+          </a:p>
+        </p:txBody>
+      </p:sp>
+      <p:sp>
+        <p:nvSpPr>
+          <p:cNvPr id="30" name="TextBox 29"/>
           <p:cNvSpPr txBox="1"/>
           <p:nvPr/>
         </p:nvSpPr>
@@ -4807,6 +4907,56 @@
                 <a:latin typeface="Arial"/>
                 <a:ea typeface="Arial"/>
               </a:rPr>
+              <a:t>조건  </a:t>
+            </a:r>
+            <a:r>
+              <a:rPr sz="1425" b="0">
+                <a:solidFill>
+                  <a:srgbClr val="555555"/>
+                </a:solidFill>
+                <a:latin typeface="Arial"/>
+                <a:ea typeface="Arial"/>
+              </a:rPr>
+              <a:t>쓰기 많은 캐시 → 오늘은 TLC 1~3 DWPD</a:t>
+            </a:r>
+          </a:p>
+        </p:txBody>
+      </p:sp>
+      <p:sp>
+        <p:nvSpPr>
+          <p:cNvPr id="31" name="TextBox 30"/>
+          <p:cNvSpPr txBox="1"/>
+          <p:nvPr/>
+        </p:nvSpPr>
+        <p:spPr>
+          <a:xfrm>
+            <a:off x="12499848" y="4334255"/>
+            <a:ext cx="4718304" cy="274320"/>
+          </a:xfrm>
+          <a:prstGeom prst="rect">
+            <a:avLst/>
+          </a:prstGeom>
+          <a:noFill/>
+        </p:spPr>
+        <p:txBody>
+          <a:bodyPr wrap="square" anchor="t" lIns="0" rIns="0" tIns="0" bIns="0">
+            <a:spAutoFit/>
+          </a:bodyPr>
+          <a:lstStyle/>
+          <a:p>
+            <a:pPr algn="l">
+              <a:lnSpc>
+                <a:spcPct val="112000"/>
+              </a:lnSpc>
+            </a:pPr>
+            <a:r>
+              <a:rPr sz="1425" b="1">
+                <a:solidFill>
+                  <a:srgbClr val="1A1A1A"/>
+                </a:solidFill>
+                <a:latin typeface="Arial"/>
+                <a:ea typeface="Arial"/>
+              </a:rPr>
               <a:t>삼성  </a:t>
             </a:r>
             <a:r>
@@ -4824,13 +4974,13 @@
       </p:sp>
       <p:sp>
         <p:nvSpPr>
-          <p:cNvPr id="29" name="Rectangle 28"/>
+          <p:cNvPr id="32" name="Rectangle 31"/>
           <p:cNvSpPr/>
           <p:nvPr/>
         </p:nvSpPr>
         <p:spPr>
           <a:xfrm>
-            <a:off x="996696" y="4681728"/>
+            <a:off x="996696" y="4974336"/>
             <a:ext cx="16294608" cy="18288"/>
           </a:xfrm>
           <a:prstGeom prst="rect">
@@ -4868,13 +5018,13 @@
       </p:sp>
       <p:sp>
         <p:nvSpPr>
-          <p:cNvPr id="30" name="Oval 29"/>
+          <p:cNvPr id="33" name="Oval 32"/>
           <p:cNvSpPr/>
           <p:nvPr/>
         </p:nvSpPr>
         <p:spPr>
           <a:xfrm>
-            <a:off x="1738274" y="4617720"/>
+            <a:off x="1738274" y="4910328"/>
             <a:ext cx="146304" cy="146304"/>
           </a:xfrm>
           <a:prstGeom prst="ellipse">
@@ -4912,13 +5062,13 @@
       </p:sp>
       <p:sp>
         <p:nvSpPr>
-          <p:cNvPr id="31" name="TextBox 30"/>
+          <p:cNvPr id="34" name="TextBox 33"/>
           <p:cNvSpPr txBox="1"/>
           <p:nvPr/>
         </p:nvSpPr>
         <p:spPr>
           <a:xfrm>
-            <a:off x="256946" y="4828032"/>
+            <a:off x="256946" y="5120640"/>
             <a:ext cx="3108960" cy="219456"/>
           </a:xfrm>
           <a:prstGeom prst="rect">
@@ -4952,13 +5102,13 @@
       </p:sp>
       <p:sp>
         <p:nvSpPr>
-          <p:cNvPr id="32" name="TextBox 31"/>
+          <p:cNvPr id="35" name="TextBox 34"/>
           <p:cNvSpPr txBox="1"/>
           <p:nvPr/>
         </p:nvSpPr>
         <p:spPr>
           <a:xfrm>
-            <a:off x="256946" y="5029200"/>
+            <a:off x="256946" y="5321808"/>
             <a:ext cx="3108960" cy="219456"/>
           </a:xfrm>
           <a:prstGeom prst="rect">
@@ -4992,13 +5142,13 @@
       </p:sp>
       <p:sp>
         <p:nvSpPr>
-          <p:cNvPr id="33" name="Oval 32"/>
+          <p:cNvPr id="36" name="Oval 35"/>
           <p:cNvSpPr/>
           <p:nvPr/>
         </p:nvSpPr>
         <p:spPr>
           <a:xfrm>
-            <a:off x="4997196" y="4617720"/>
+            <a:off x="4997196" y="4910328"/>
             <a:ext cx="146304" cy="146304"/>
           </a:xfrm>
           <a:prstGeom prst="ellipse">
@@ -5036,13 +5186,13 @@
       </p:sp>
       <p:sp>
         <p:nvSpPr>
-          <p:cNvPr id="34" name="TextBox 33"/>
+          <p:cNvPr id="37" name="TextBox 36"/>
           <p:cNvSpPr txBox="1"/>
           <p:nvPr/>
         </p:nvSpPr>
         <p:spPr>
           <a:xfrm>
-            <a:off x="3515868" y="4828032"/>
+            <a:off x="3515868" y="5120640"/>
             <a:ext cx="3108960" cy="219456"/>
           </a:xfrm>
           <a:prstGeom prst="rect">
@@ -5076,13 +5226,13 @@
       </p:sp>
       <p:sp>
         <p:nvSpPr>
-          <p:cNvPr id="35" name="TextBox 34"/>
+          <p:cNvPr id="38" name="TextBox 37"/>
           <p:cNvSpPr txBox="1"/>
           <p:nvPr/>
         </p:nvSpPr>
         <p:spPr>
           <a:xfrm>
-            <a:off x="3515868" y="5029200"/>
+            <a:off x="3515868" y="5321808"/>
             <a:ext cx="3108960" cy="219456"/>
           </a:xfrm>
           <a:prstGeom prst="rect">
@@ -5116,13 +5266,13 @@
       </p:sp>
       <p:sp>
         <p:nvSpPr>
-          <p:cNvPr id="36" name="Oval 35"/>
+          <p:cNvPr id="39" name="Oval 38"/>
           <p:cNvSpPr/>
           <p:nvPr/>
         </p:nvSpPr>
         <p:spPr>
           <a:xfrm>
-            <a:off x="8582009" y="4617720"/>
+            <a:off x="8582009" y="4910328"/>
             <a:ext cx="146304" cy="146304"/>
           </a:xfrm>
           <a:prstGeom prst="ellipse">
@@ -5160,13 +5310,13 @@
       </p:sp>
       <p:sp>
         <p:nvSpPr>
-          <p:cNvPr id="37" name="TextBox 36"/>
+          <p:cNvPr id="40" name="TextBox 39"/>
           <p:cNvSpPr txBox="1"/>
           <p:nvPr/>
         </p:nvSpPr>
         <p:spPr>
           <a:xfrm>
-            <a:off x="7100681" y="4828032"/>
+            <a:off x="7100681" y="5120640"/>
             <a:ext cx="3108960" cy="219456"/>
           </a:xfrm>
           <a:prstGeom prst="rect">
@@ -5200,13 +5350,13 @@
       </p:sp>
       <p:sp>
         <p:nvSpPr>
-          <p:cNvPr id="38" name="TextBox 37"/>
+          <p:cNvPr id="41" name="TextBox 40"/>
           <p:cNvSpPr txBox="1"/>
           <p:nvPr/>
         </p:nvSpPr>
         <p:spPr>
           <a:xfrm>
-            <a:off x="7100681" y="5029200"/>
+            <a:off x="7100681" y="5321808"/>
             <a:ext cx="3108960" cy="219456"/>
           </a:xfrm>
           <a:prstGeom prst="rect">
@@ -5240,13 +5390,13 @@
       </p:sp>
       <p:sp>
         <p:nvSpPr>
-          <p:cNvPr id="39" name="Oval 38"/>
+          <p:cNvPr id="42" name="Oval 41"/>
           <p:cNvSpPr/>
           <p:nvPr/>
         </p:nvSpPr>
         <p:spPr>
           <a:xfrm>
-            <a:off x="12166823" y="4617720"/>
+            <a:off x="12166823" y="4910328"/>
             <a:ext cx="146304" cy="146304"/>
           </a:xfrm>
           <a:prstGeom prst="ellipse">
@@ -5284,13 +5434,13 @@
       </p:sp>
       <p:sp>
         <p:nvSpPr>
-          <p:cNvPr id="40" name="TextBox 39"/>
+          <p:cNvPr id="43" name="TextBox 42"/>
           <p:cNvSpPr txBox="1"/>
           <p:nvPr/>
         </p:nvSpPr>
         <p:spPr>
           <a:xfrm>
-            <a:off x="10685495" y="4828032"/>
+            <a:off x="10685495" y="5120640"/>
             <a:ext cx="3108960" cy="219456"/>
           </a:xfrm>
           <a:prstGeom prst="rect">
@@ -5324,13 +5474,13 @@
       </p:sp>
       <p:sp>
         <p:nvSpPr>
-          <p:cNvPr id="41" name="TextBox 40"/>
+          <p:cNvPr id="44" name="TextBox 43"/>
           <p:cNvSpPr txBox="1"/>
           <p:nvPr/>
         </p:nvSpPr>
         <p:spPr>
           <a:xfrm>
-            <a:off x="10685495" y="5029200"/>
+            <a:off x="10685495" y="5321808"/>
             <a:ext cx="3108960" cy="219456"/>
           </a:xfrm>
           <a:prstGeom prst="rect">
@@ -5364,13 +5514,13 @@
       </p:sp>
       <p:sp>
         <p:nvSpPr>
-          <p:cNvPr id="42" name="Oval 41"/>
+          <p:cNvPr id="45" name="Oval 44"/>
           <p:cNvSpPr/>
           <p:nvPr/>
         </p:nvSpPr>
         <p:spPr>
           <a:xfrm>
-            <a:off x="15751637" y="4617720"/>
+            <a:off x="15751637" y="4910328"/>
             <a:ext cx="146304" cy="146304"/>
           </a:xfrm>
           <a:prstGeom prst="ellipse">
@@ -5408,13 +5558,13 @@
       </p:sp>
       <p:sp>
         <p:nvSpPr>
-          <p:cNvPr id="43" name="TextBox 42"/>
+          <p:cNvPr id="46" name="TextBox 45"/>
           <p:cNvSpPr txBox="1"/>
           <p:nvPr/>
         </p:nvSpPr>
         <p:spPr>
           <a:xfrm>
-            <a:off x="14270309" y="4828032"/>
+            <a:off x="14270309" y="5120640"/>
             <a:ext cx="3108960" cy="219456"/>
           </a:xfrm>
           <a:prstGeom prst="rect">
@@ -5448,13 +5598,13 @@
       </p:sp>
       <p:sp>
         <p:nvSpPr>
-          <p:cNvPr id="44" name="TextBox 43"/>
+          <p:cNvPr id="47" name="TextBox 46"/>
           <p:cNvSpPr txBox="1"/>
           <p:nvPr/>
         </p:nvSpPr>
         <p:spPr>
           <a:xfrm>
-            <a:off x="14270309" y="5029200"/>
+            <a:off x="14270309" y="5321808"/>
             <a:ext cx="3108960" cy="219456"/>
           </a:xfrm>
           <a:prstGeom prst="rect">
@@ -5488,7 +5638,7 @@
       </p:sp>
       <p:pic>
         <p:nvPicPr>
-          <p:cNvPr id="45" name="Picture 44" descr="qlc_demand_share_revenue_slide.png"/>
+          <p:cNvPr id="48" name="Picture 47" descr="qlc_demand_share_revenue_slide.png"/>
           <p:cNvPicPr>
             <a:picLocks noChangeAspect="1"/>
           </p:cNvPicPr>
@@ -5502,8 +5652,8 @@
         </p:blipFill>
         <p:spPr>
           <a:xfrm>
-            <a:off x="722376" y="5303520"/>
-            <a:ext cx="10228217" cy="3182112"/>
+            <a:off x="722376" y="5632704"/>
+            <a:ext cx="9228909" cy="2871216"/>
           </a:xfrm>
           <a:prstGeom prst="rect">
             <a:avLst/>
@@ -5512,14 +5662,14 @@
       </p:pic>
       <p:sp>
         <p:nvSpPr>
-          <p:cNvPr id="46" name="Rectangle 45"/>
+          <p:cNvPr id="49" name="Rectangle 48"/>
           <p:cNvSpPr/>
           <p:nvPr/>
         </p:nvSpPr>
         <p:spPr>
           <a:xfrm>
-            <a:off x="11224913" y="5303520"/>
-            <a:ext cx="6340710" cy="3182112"/>
+            <a:off x="10225604" y="5632704"/>
+            <a:ext cx="7340019" cy="2871216"/>
           </a:xfrm>
           <a:prstGeom prst="rect">
             <a:avLst/>
@@ -5558,14 +5708,14 @@
       </p:sp>
       <p:sp>
         <p:nvSpPr>
-          <p:cNvPr id="47" name="TextBox 46"/>
+          <p:cNvPr id="50" name="TextBox 49"/>
           <p:cNvSpPr txBox="1"/>
           <p:nvPr/>
         </p:nvSpPr>
         <p:spPr>
           <a:xfrm>
-            <a:off x="11535809" y="5504688"/>
-            <a:ext cx="5718918" cy="274320"/>
+            <a:off x="10536500" y="5833872"/>
+            <a:ext cx="6718227" cy="274320"/>
           </a:xfrm>
           <a:prstGeom prst="rect">
             <a:avLst/>
@@ -5598,13 +5748,13 @@
       </p:sp>
       <p:sp>
         <p:nvSpPr>
-          <p:cNvPr id="48" name="TextBox 47"/>
+          <p:cNvPr id="51" name="TextBox 50"/>
           <p:cNvSpPr txBox="1"/>
           <p:nvPr/>
         </p:nvSpPr>
         <p:spPr>
           <a:xfrm>
-            <a:off x="11535809" y="5907024"/>
+            <a:off x="10536500" y="6236208"/>
             <a:ext cx="1600200" cy="566928"/>
           </a:xfrm>
           <a:prstGeom prst="rect">
@@ -5638,14 +5788,14 @@
       </p:sp>
       <p:sp>
         <p:nvSpPr>
-          <p:cNvPr id="49" name="TextBox 48"/>
+          <p:cNvPr id="52" name="TextBox 51"/>
           <p:cNvSpPr txBox="1"/>
           <p:nvPr/>
         </p:nvSpPr>
         <p:spPr>
           <a:xfrm>
-            <a:off x="13163441" y="5907024"/>
-            <a:ext cx="4091286" cy="566928"/>
+            <a:off x="12164132" y="6236208"/>
+            <a:ext cx="5090595" cy="566928"/>
           </a:xfrm>
           <a:prstGeom prst="rect">
             <a:avLst/>
@@ -5678,13 +5828,13 @@
       </p:sp>
       <p:sp>
         <p:nvSpPr>
-          <p:cNvPr id="50" name="TextBox 49"/>
+          <p:cNvPr id="53" name="TextBox 52"/>
           <p:cNvSpPr txBox="1"/>
           <p:nvPr/>
         </p:nvSpPr>
         <p:spPr>
           <a:xfrm>
-            <a:off x="11535809" y="6510528"/>
+            <a:off x="10536500" y="6839712"/>
             <a:ext cx="1600200" cy="566928"/>
           </a:xfrm>
           <a:prstGeom prst="rect">
@@ -5718,14 +5868,14 @@
       </p:sp>
       <p:sp>
         <p:nvSpPr>
-          <p:cNvPr id="51" name="TextBox 50"/>
+          <p:cNvPr id="54" name="TextBox 53"/>
           <p:cNvSpPr txBox="1"/>
           <p:nvPr/>
         </p:nvSpPr>
         <p:spPr>
           <a:xfrm>
-            <a:off x="13163441" y="6510528"/>
-            <a:ext cx="4091286" cy="566928"/>
+            <a:off x="12164132" y="6839712"/>
+            <a:ext cx="5090595" cy="566928"/>
           </a:xfrm>
           <a:prstGeom prst="rect">
             <a:avLst/>
@@ -5758,13 +5908,13 @@
       </p:sp>
       <p:sp>
         <p:nvSpPr>
-          <p:cNvPr id="52" name="TextBox 51"/>
+          <p:cNvPr id="55" name="TextBox 54"/>
           <p:cNvSpPr txBox="1"/>
           <p:nvPr/>
         </p:nvSpPr>
         <p:spPr>
           <a:xfrm>
-            <a:off x="11535809" y="7114032"/>
+            <a:off x="10536500" y="7443216"/>
             <a:ext cx="1600200" cy="566928"/>
           </a:xfrm>
           <a:prstGeom prst="rect">
@@ -5798,14 +5948,14 @@
       </p:sp>
       <p:sp>
         <p:nvSpPr>
-          <p:cNvPr id="53" name="TextBox 52"/>
+          <p:cNvPr id="56" name="TextBox 55"/>
           <p:cNvSpPr txBox="1"/>
           <p:nvPr/>
         </p:nvSpPr>
         <p:spPr>
           <a:xfrm>
-            <a:off x="13163441" y="7114032"/>
-            <a:ext cx="4091286" cy="566928"/>
+            <a:off x="12164132" y="7443216"/>
+            <a:ext cx="5090595" cy="566928"/>
           </a:xfrm>
           <a:prstGeom prst="rect">
             <a:avLst/>
@@ -5838,14 +5988,14 @@
       </p:sp>
       <p:sp>
         <p:nvSpPr>
-          <p:cNvPr id="54" name="Rectangle 53"/>
+          <p:cNvPr id="57" name="Rectangle 56"/>
           <p:cNvSpPr/>
           <p:nvPr/>
         </p:nvSpPr>
         <p:spPr>
           <a:xfrm>
-            <a:off x="11535809" y="7735823"/>
-            <a:ext cx="5718918" cy="10972"/>
+            <a:off x="10536500" y="8065008"/>
+            <a:ext cx="6718227" cy="10972"/>
           </a:xfrm>
           <a:prstGeom prst="rect">
             <a:avLst/>
@@ -5882,14 +6032,14 @@
       </p:sp>
       <p:sp>
         <p:nvSpPr>
-          <p:cNvPr id="55" name="TextBox 54"/>
+          <p:cNvPr id="58" name="TextBox 57"/>
           <p:cNvSpPr txBox="1"/>
           <p:nvPr/>
         </p:nvSpPr>
         <p:spPr>
           <a:xfrm>
-            <a:off x="11535809" y="7808975"/>
-            <a:ext cx="5718918" cy="621792"/>
+            <a:off x="10536500" y="8138160"/>
+            <a:ext cx="6718227" cy="310895"/>
           </a:xfrm>
           <a:prstGeom prst="rect">
             <a:avLst/>
@@ -5922,7 +6072,7 @@
       </p:sp>
       <p:sp>
         <p:nvSpPr>
-          <p:cNvPr id="56" name="Rectangle 55"/>
+          <p:cNvPr id="59" name="Rectangle 58"/>
           <p:cNvSpPr/>
           <p:nvPr/>
         </p:nvSpPr>
@@ -5966,7 +6116,7 @@
       </p:sp>
       <p:sp>
         <p:nvSpPr>
-          <p:cNvPr id="57" name="TextBox 56"/>
+          <p:cNvPr id="60" name="TextBox 59"/>
           <p:cNvSpPr txBox="1"/>
           <p:nvPr/>
         </p:nvSpPr>
@@ -6006,7 +6156,7 @@
       </p:sp>
       <p:sp>
         <p:nvSpPr>
-          <p:cNvPr id="58" name="TextBox 57"/>
+          <p:cNvPr id="61" name="TextBox 60"/>
           <p:cNvSpPr txBox="1"/>
           <p:nvPr/>
         </p:nvSpPr>
@@ -6032,21 +6182,21 @@
               </a:lnSpc>
             </a:pPr>
             <a:r>
-              <a:rPr sz="2200" b="1">
+              <a:rPr sz="2000" b="1">
                 <a:solidFill>
                   <a:srgbClr val="FFFFFF"/>
                 </a:solidFill>
                 <a:latin typeface="Arial"/>
                 <a:ea typeface="Arial"/>
               </a:rPr>
-              <a:t>니어라인 HDD 대체 대신, 오늘 TLC가 서비스하는 추론 캐시 티어를 QLC로 가져갑니다</a:t>
-            </a:r>
-          </a:p>
-        </p:txBody>
-      </p:sp>
-      <p:sp>
-        <p:nvSpPr>
-          <p:cNvPr id="59" name="TextBox 58"/>
+              <a:t>고객은 추론 캐시 티어에서도 QLC의 경제성을 원합니다. 문은 내구성이고, 디바이스만으로는 못 엽니다</a:t>
+            </a:r>
+          </a:p>
+        </p:txBody>
+      </p:sp>
+      <p:sp>
+        <p:nvSpPr>
+          <p:cNvPr id="62" name="TextBox 61"/>
           <p:cNvSpPr txBox="1"/>
           <p:nvPr/>
         </p:nvSpPr>
@@ -6086,7 +6236,7 @@
       </p:sp>
       <p:sp>
         <p:nvSpPr>
-          <p:cNvPr id="60" name="TextBox 59"/>
+          <p:cNvPr id="63" name="TextBox 62"/>
           <p:cNvSpPr txBox="1"/>
           <p:nvPr/>
         </p:nvSpPr>
@@ -6297,7 +6447,7 @@
                 <a:latin typeface="Arial"/>
                 <a:ea typeface="Arial"/>
               </a:rPr>
-              <a:t>QLC가 캐시 티어에 들어가려면 디바이스에서 고객 시스템 안까지 세 단계로 올라가야 합니다</a:t>
+              <a:t>내구성은 고객 시스템에서 풀리므로, 디바이스에서 고객 시스템 안까지 세 단계로 올라가야 합니다</a:t>
             </a:r>
           </a:p>
         </p:txBody>
@@ -6337,7 +6487,7 @@
                 <a:latin typeface="Arial"/>
                 <a:ea typeface="Arial"/>
               </a:rPr>
-              <a:t>갭은 내구성·스트림·접점 세 가지이고 수단은 이미 있습니다. 고객 시스템 다섯 계층의 기술과 우리가 닿는 층, 삼성의 현 위치입니다.</a:t>
+              <a:t>고객이 원하는 QLC 경제성과 캐시의 쓰기 사이 10~40배 갭은 배치 표준과 호스트 SW가 메웁니다. 층별 기술과 삼성의 현 위치입니다.</a:t>
             </a:r>
           </a:p>
         </p:txBody>
@@ -7680,7 +7830,7 @@
                 <a:latin typeface="Arial"/>
                 <a:ea typeface="Arial"/>
               </a:rPr>
-              <a:t>KV-ready QLC: RUH 200+, 수명 보증 조건표</a:t>
+              <a:t>고객이 얻는 것: 정격 내 QLC 원가·전력</a:t>
             </a:r>
           </a:p>
         </p:txBody>
@@ -8527,7 +8677,7 @@
                 <a:latin typeface="Arial"/>
                 <a:ea typeface="Arial"/>
               </a:rPr>
-              <a:t>트레이스 → RUH 정책 → WAF·DWPD 실측 공개</a:t>
+              <a:t>고객이 얻는 것: 자기 워크로드의 수명 보증</a:t>
             </a:r>
           </a:p>
         </p:txBody>
@@ -9428,7 +9578,7 @@
                 <a:latin typeface="Arial"/>
                 <a:ea typeface="Arial"/>
               </a:rPr>
-              <a:t>메인라인 머지 · 공용 TCO 모델 · 공동 계약</a:t>
+              <a:t>고객이 얻는 것: 시스템 위의 TCO 보증</a:t>
             </a:r>
           </a:p>
         </p:txBody>
@@ -13643,7 +13793,7 @@
                 <a:latin typeface="Arial"/>
                 <a:ea typeface="Arial"/>
               </a:rPr>
-              <a:t>니어라인 HDD 대체가 아니라 추론 캐시 티어를 QLC로 가져가려면 디바이스에서 고객 시스템 안까지 세 단계를 올라가야 하며,</a:t>
+              <a:t>고객은 계산 옆의 가장 싼 바이트를 사려고 QLC를 택했고, 그 자리가 쓰기 많은 추론 캐시로 옮겨가 내구성을 고객 시스템 안에서 풀어야 하며,</a:t>
             </a:r>
           </a:p>
           <a:p>

--- a/outputs/presentation/qlc-ssd-strategy.pptx
+++ b/outputs/presentation/qlc-ssd-strategy.pptx
@@ -504,7 +504,7 @@
           <a:lstStyle/>
           <a:p>
             <a:r>
-              <a:t>배경 한 장입니다. 질문은 하나, 고객은 왜 QLC를 원하는가입니다. 세 국면을 관통하는 답은 계산 옆에 가장 싼 바이트를 두는 것입니다. 2022년 하이퍼스케일러는 데이터셋이 6배로 늘고 HDD가 TB당 대역폭을 잃자 플래시 용량 계층을 원했습니다(Meta: 10 MB/s/TB 대역, TLC 서버의 6배 바이트 밀도). 공급자가 판 것은 1U에 1PB, 5년 TCO -47%였습니다. 조건이 있었습니다. 읽기 중심 워크로드라서 0.3~0.6 DWPD로 충분했고, 쓰기가 NAND 전력의 대부분이라 읽기 중심 데이터를 QLC로 옮기면 전력도 줄었습니다. 그 해에 전문 벤더(Solidigm) 출범, E1.S/E1.L 폼팩터, Meta·Google의 배치 표준 비준(2022-12), 가격 급락이 갖춰졌고 물량은 AI 추론 서버의 전력 효율이 우선순위가 된 2024년에 터졌습니다(TrendForce 30EB, 4배). 현재 국면의 구매 기준은 TB당 와트와 공급 확보이고 245TB까지 용량 경쟁이 벌어졌지만, 여전히 읽기 중심 데이터가 QLC의 자리이고 쓰기 티어는 TLC입니다. 향후 국면에서 가장 빨리 크는 용량 수요는 KV cache입니다. 장문맥·에이전틱 추론의 KV 캐시가 HBM과 DRAM을 넘쳐 SSD로 내려오고, 프리필 재사용으로 GPU당 동시 사용자가 늘고 TTFT가 줄어듭니다(NVMe 오프로드로 H100 한 장이 동시 사용자 10배). 고객이 사는 것은 GPU당 캐시 용량과 토큰당 비용이며, 여기서도 가장 싼 바이트는 QLC입니다. 그러나 캐시는 쓰기가 많아 오늘 이 티어는 TLC 1~3 DWPD가 서비스하고(2027년 75~100EB), CMX 타깃 드라이브도 전부 TLC입니다. 그래프: 비트는 10배, 가격 정상화 기준선에서 매출은 정체, 진한 파랑은 호스트 협력 배치가 성립할 때의 조건부 상방. 결론: 고객은 추론 캐시 티어에서도 QLC의 경제성을 원하고, 문은 내구성이며, 그 문은 디바이스만으로는 열리지 않습니다. 다음 장이 그 이유입니다. 모델 가정은 위키 qlc-ssd-market.md §4.3.</a:t>
+              <a:t>배경 한 장입니다. 질문은 하나, 고객은 왜 QLC를 원하는가입니다. 세 국면을 관통하는 답은 용량 계층의 TB당 TCO입니다. 원가($/TB)·전력(W/TB)·밀도(TB/U)를 한 지표로 묶은 것이고, 쉽게 말해 계산 옆에 둔 가장 싼 바이트입니다. 2022년 하이퍼스케일러는 데이터셋이 6배로 늘고 HDD가 TB당 대역폭을 잃자 플래시 용량 계층을 원했습니다(Meta: 10 MB/s/TB 대역, TLC 서버의 6배 바이트 밀도). 공급자가 판 것은 1U에 1PB, 5년 TCO -47%였습니다. 조건이 있었습니다. 읽기 중심 워크로드라서 0.3~0.6 DWPD로 충분했고, 쓰기가 NAND 전력의 대부분이라 읽기 중심 데이터를 QLC로 옮기면 전력도 줄었습니다. 그 해에 전문 벤더(Solidigm) 출범, E1.S/E1.L 폼팩터, Meta·Google의 배치 표준 비준(2022-12), 가격 급락이 갖춰졌고 물량은 AI 추론 서버의 전력 효율이 우선순위가 된 2024년에 터졌습니다(TrendForce 30EB, 4배). 현재 국면의 구매 기준은 TB당 와트와 공급 확보이고 245TB까지 용량 경쟁이 벌어졌지만, 여전히 읽기 중심 데이터가 QLC의 자리이고 쓰기 티어는 TLC입니다. 향후 국면에서 가장 빨리 크는 용량 수요는 KV cache입니다. 장문맥·에이전틱 추론의 KV 캐시가 HBM과 DRAM을 넘쳐 SSD로 내려오고, 프리필 재사용으로 GPU당 동시 사용자가 늘고 TTFT가 줄어듭니다(NVMe 오프로드로 H100 한 장이 동시 사용자 10배). 고객이 사는 것은 GPU당 컨텍스트 용량과 토큰당 비용이며, 여기서도 TB당 TCO가 가장 낮은 것은 QLC입니다. 그러나 캐시는 쓰기가 많아 오늘 이 티어는 TLC 1~3 DWPD가 서비스하고(2027년 75~100EB), CMX 타깃 드라이브도 전부 TLC입니다. 그래프: 비트는 10배, 가격 정상화 기준선에서 매출은 정체, 진한 파랑은 호스트 협력 배치가 성립할 때의 조건부 상방. 결론: 고객은 추론 캐시 티어에서도 QLC의 TB당 TCO를 원하고, 문은 내구성이며, 그 문은 디바이스만으로는 열리지 않습니다. 오른쪽 아래 인용은 송용호 AX/PI센터장의 말입니다. 부품이 어떻게 쓰일지는 시스템을 설계하는 사람 마음에 있다, 그걸 알았으면 HBM을 진작 준비했을 것이다. 고객이 왜 QLC를 원하는지 아는 것이 이 전략의 출발점인 이유입니다. 다음 장이 그 다음입니다. 모델 가정은 위키 qlc-ssd-market.md §4.3.</a:t>
             </a:r>
           </a:p>
         </p:txBody>
@@ -574,7 +574,7 @@
           <a:lstStyle/>
           <a:p>
             <a:r>
-              <a:t>요구사항과 역량 한 장입니다. 앞 장의 결론을 잇습니다. 고객은 캐시 티어에서도 QLC의 경제성(TB당 원가·전력)을 원하지만 캐시는 쓰기가 많고, 내구성은 미디어를 바꿔서가 아니라 고객 시스템이 데이터를 어떻게 놓느냐(배치 표준·캐시 관리자 정책)로 풀립니다. 그래서 디바이스에서 고객 시스템 안까지 올라가야 합니다. 갭 세 가지: 내구성(QLC 정격 0.075~0.6 vs TLC 1~3 DWPD, 10~40배), 스트림(RUH 2~8 vs 200+), 접점(KV 캐시 관리자 4종 코드에 배치·내구성 언급 0). 수단은 있습니다(CacheLib 실측 WAF 3.22→1.03, XFS write streams RocksDB -35%, ScaleFlux 유효 7~10 DWPD). 그림은 고객 시스템 5계층을 세 번 그리고 우리가 닿는 층을 색으로 표시하며, 각 층에 그 층을 구성하는 기술을 적었습니다. 응용·추론 엔진(vLLM·SGLang·TensorRT-LLM), KV 캐시 관리자(NVIDIA Dynamo KVBM·LMCache·Mooncake·Tencent FlexKV), I/O 라이브러리(NIXL·GPUDirect Storage·io_uring·SPDK/xNVMe), 커널·플랫폼(Linux 6.16 write streams·XFS/f2fs 스트림·NVIDIA CMX와 DOCA Memos), SSD 디바이스(컨트롤러·펌웨어 RUH·2Tb QLC·NVMe KV 확장·텔레메트리). Phase 1은 SSD 층만 우리 것입니다(KV-ready QLC). Phase 2는 캐시 관리자의 빈도 필터·퇴거 정책이 트레이스의 원천이고, I/O 라이브러리의 io_uring·GDS 백엔드에 write stream을 부착하며 커널 스트림과 CMX 힌트 매핑을 검증해 RUH 정책·WAF·유효 DWPD 실측을 공개합니다. Phase 3는 캐시 관리자 4종에 플러그인을 메인라인으로 머지하고, NIXL·xNVMe가 기본 백엔드가 되며, DOCA Memos와 배치 표준의 매핑을 NVIDIA와 공동 정의하고, 응용 층은 커넥터·스케줄러를 이해해 공용 TCO 모델(GPU당 동시 사용자·TTFT·전력)로 대화합니다. FDE(Forward Deployed Engineer)가 고객 옆에 상주합니다. 삼성 현 위치는 Phase 1 확보, Phase 2 진입: KV cache 백서 2종으로 측정 역량은 있으나 트레이스 기반 실측이 미공개이고 캐시 관리자 4종에 기여가 없습니다. 오케스트레이션 자체는 만들지 않습니다.</a:t>
+              <a:t>요구사항과 역량 한 장입니다. 리드의 인용은 베인 신문섭 파트너의 진단입니다. 승부는 칩을 많이 파는 기업이 아니라 고객의 아키텍처 안으로 들어가 수요를 함께 설계하는 기업이 가져간다. 이 장이 바로 그 안으로 들어가는 세 단계입니다. 앞 장의 결론을 잇습니다. 고객은 캐시 티어에서도 QLC의 TB당 TCO를 원하지만 캐시는 쓰기가 많고, 내구성은 미디어를 바꿔서가 아니라 고객 시스템이 데이터를 어떻게 놓느냐(배치 표준·캐시 관리자 정책)로 풀립니다. 그래서 디바이스에서 고객 시스템 안까지 올라가야 합니다. 갭 세 가지: 내구성(QLC 정격 0.075~0.6 vs TLC 1~3 DWPD, 10~40배), 스트림(RUH 2~8 vs 200+), 접점(KV 캐시 관리자 4종 코드에 배치·내구성 언급 0). 수단은 있습니다(CacheLib 실측 WAF 3.22→1.03, XFS write streams RocksDB -35%, ScaleFlux 유효 7~10 DWPD). 그림은 고객 시스템 5계층을 세 번 그리고 우리가 닿는 층을 색으로 표시하며, 각 층에 그 층을 구성하는 기술을 적었습니다. 응용·추론 엔진(vLLM·SGLang·TensorRT-LLM), KV 캐시 관리자(NVIDIA Dynamo KVBM·LMCache·Mooncake·Tencent FlexKV), I/O 라이브러리(NIXL·GPUDirect Storage·io_uring·SPDK/xNVMe), 커널·플랫폼(Linux 6.16 write streams·XFS/f2fs 스트림·NVIDIA CMX와 DOCA Memos), SSD 디바이스(컨트롤러·펌웨어 RUH·2Tb QLC·NVMe KV 확장·텔레메트리). Phase 1은 SSD 층만 우리 것입니다(KV-ready QLC). Phase 2는 캐시 관리자의 빈도 필터·퇴거 정책이 트레이스의 원천이고, I/O 라이브러리의 io_uring·GDS 백엔드에 write stream을 부착하며 커널 스트림과 CMX 힌트 매핑을 검증해 RUH 정책·WAF·유효 DWPD 실측을 공개합니다. Phase 3는 캐시 관리자 4종에 플러그인을 메인라인으로 머지하고, NIXL·xNVMe가 기본 백엔드가 되며, DOCA Memos와 배치 표준의 매핑을 NVIDIA와 공동 정의하고, 응용 층은 커넥터·스케줄러를 이해해 공용 TCO 모델(GPU당 동시 사용자·TTFT·전력)로 대화합니다. FDE(Forward Deployed Engineer)가 고객 옆에 상주합니다. 삼성 현 위치는 Phase 1 확보, Phase 2 진입: KV cache 백서 2종으로 측정 역량은 있으나 트레이스 기반 실측이 미공개이고 캐시 관리자 4종에 기여가 없습니다. 오케스트레이션 자체는 만들지 않습니다.</a:t>
             </a:r>
           </a:p>
         </p:txBody>
@@ -644,7 +644,7 @@
           <a:lstStyle/>
           <a:p>
             <a:r>
-              <a:t>실행 전략 한 장입니다. 목표는 두 가지이고 각각 선례가 있습니다. ① FDE(Forward Deployed Engineer)가 고객 시스템 안으로 들어갑니다. Palantir가 창안한 역할로 내부 코드명 Delta, 고객 환경 내부에 상주하며 실제 운영 제약 아래서 프로덕션 시스템을 직접 구축하고 청구 시간이 아니라 성과로 평가받습니다. 명시적 요구와 실제 요구의 간극을 현장에서 코드로 메우고, 특정 고객용 거친 해법(gravel road)이 제품 표준 기능(paved highway)으로 포장되는 피드백 루프를 만듭니다. 파급: 고객 락인의 동력이자 640% 주가 수익률의 원천으로 회자되고, Anthropic·OpenAI가 엔터프라이즈 GTM 전략으로 채택했습니다(OpenAI는 2025년 초 FDE 팀 2명→10명+). 우리는 Co-Design Pod를 FDE 모델로 운영하되, 메모리는 제조 리드타임이 길므로 시스템 아키텍트·TCO 모델링 역량을 결합합니다. ② 전략적 협약(SCA)으로 워크로드가 옵니다. 선례는 Micron↔Anthropic(2026-06-22): 공동 설계(HBM·DRAM·SSD를 Claude 학습·추론 워크로드에 맞춰 공동 최적화) + 다년 공급 + 운영 통합(Claude 사내 배치) + 자본(Series H)을 한 계약에 묶었습니다. Micron은 SCA 16건, 최소 계약매출 약 $100B, 예치금 $22B를 공시했습니다. 삼성·SK의 Anthropic 공급계약에는 공동 설계 조항이 없으므로 우리가 먼저 제안합니다. 창은 공급 완화 전인 2027년 상반기까지입니다. 이 장에는 두 목표를 여는 수단 중 조직·인사·문화 세 축을 보였습니다(전략·재무 축과 90일·1년·3년 타임라인은 위키 실행 전략 페이지 §2.1·§2.5·§3에 있습니다). 조직은 실리콘밸리 소프트웨어 자회사와 FDE Pod에 더해 시스템 소프트웨어 조직을 강화합니다. 인사는 고객의 시스템을 잘 이해하는 시스템 소프트웨어 전문가를 채용하고 양성하는 것이 핵심이며, 채용 기준은 고객 시스템(추론 엔진·KV 캐시 관리자·I/O·커널 코드)을 읽고 고칠 수 있는가입니다. 미주 고객과의 협업을 위해 현지 채용을 늘리고, 그것이 가능하도록 별도 보상 체계를 두며, 본사 엔지니어는 상주 로테이션으로 양성합니다. 문화는 업스트림 우선을 넘어 오픈소스 생태계를 주도하는 기업 문화로 갑니다. 기여자에서 메인테이너·커미터로 올라가고, 우리가 운영하는 레퍼런스 프로젝트에 외부 기여가 들어오게 하며, KV cache 실측을 업계 최초로 공개합니다. 마지막 문장은 세 장의 요약입니다. 고객은 계산 옆의 가장 싼 바이트를 사려고 QLC를 택했고 그 자리가 쓰기 많은 추론 캐시로 옮겨가므로(1장) 내구성을 고객 시스템 안에서 풀어야 하며(2장), 그 길은 FDE와 전략적 협약, 그리고 이를 해낼 사람과 문화가 엽니다(3장).</a:t>
+              <a:t>실행 전략 한 장입니다. 리드의 인용은 송용호 AX/PI센터장의 말입니다. 우리는 말로는 고객 지향을 하지만 단 한 번도 고객 지향적인 적이 없었고, 진짜 고객 지향이 뭔지 이해하고 그것을 위한 전략이 필요한 시점이 이미 됐다. 이 장이 그 전략입니다. 왼쪽 박스 아래 인용도 같은 인터뷰입니다. 고객의 집에 가서 저녁을 같이 먹는 것은 삼성에서는 상상할 수 없는 일이지만 SK하이닉스는 한다. 관계가 곧 워크로드 접근권이라는 뜻이고, 미주 현지 채용과 FDE 상주가 그 답입니다. 목표는 두 가지이고 각각 선례가 있습니다. ① FDE(Forward Deployed Engineer)가 고객 시스템 안으로 들어갑니다. Palantir가 창안한 역할로 내부 코드명 Delta, 고객 환경 내부에 상주하며 실제 운영 제약 아래서 프로덕션 시스템을 직접 구축하고 청구 시간이 아니라 성과로 평가받습니다. 명시적 요구와 실제 요구의 간극을 현장에서 코드로 메우고, 특정 고객용 거친 해법(gravel road)이 제품 표준 기능(paved highway)으로 포장되는 피드백 루프를 만듭니다. 파급: 고객 락인의 동력이자 640% 주가 수익률의 원천으로 회자되고, Anthropic·OpenAI가 엔터프라이즈 GTM 전략으로 채택했습니다(OpenAI는 2025년 초 FDE 팀 2명→10명+). 우리는 Co-Design Pod를 FDE 모델로 운영하되, 메모리는 제조 리드타임이 길므로 시스템 아키텍트·TCO 모델링 역량을 결합합니다. ② 전략적 협약(SCA)으로 워크로드가 옵니다. 선례는 Micron↔Anthropic(2026-06-22): 공동 설계(HBM·DRAM·SSD를 Claude 학습·추론 워크로드에 맞춰 공동 최적화) + 다년 공급 + 운영 통합(Claude 사내 배치) + 자본(Series H)을 한 계약에 묶었습니다. Micron은 SCA 16건, 최소 계약매출 약 $100B, 예치금 $22B를 공시했습니다. 삼성·SK의 Anthropic 공급계약에는 공동 설계 조항이 없으므로 우리가 먼저 제안합니다. 창은 공급 완화 전인 2027년 상반기까지입니다. 이 장에는 두 목표를 여는 수단 중 조직·인사·문화 세 축을 보였습니다(전략·재무 축과 90일·1년·3년 타임라인은 위키 실행 전략 페이지 §2.1·§2.5·§3에 있습니다). 조직은 실리콘밸리 소프트웨어 자회사와 FDE Pod에 더해 시스템 소프트웨어 조직을 강화합니다. 인사는 고객의 시스템을 잘 이해하는 시스템 소프트웨어 전문가를 채용하고 양성하는 것이 핵심이며, 채용 기준은 고객 시스템(추론 엔진·KV 캐시 관리자·I/O·커널 코드)을 읽고 고칠 수 있는가입니다. 미주 고객과의 협업을 위해 현지 채용을 늘리고, 그것이 가능하도록 별도 보상 체계를 두며, 본사 엔지니어는 상주 로테이션으로 양성합니다. 문화는 업스트림 우선을 넘어 오픈소스 생태계를 주도하는 기업 문화로 갑니다. 기여자에서 메인테이너·커미터로 올라가고, 우리가 운영하는 레퍼런스 프로젝트에 외부 기여가 들어오게 하며, KV cache 실측을 업계 최초로 공개합니다. 마지막 문장은 세 장의 요약입니다. 고객은 TB당 TCO가 가장 낮은 용량 계층을 QLC로 채웠고 그 계층이 쓰기 많은 추론 캐시로 옮겨가므로(1장) 내구성을 고객 시스템 안에서 풀어야 하며(2장), 그 길은 FDE와 전략적 협약, 그리고 이를 해낼 사람과 문화가 엽니다(3장).</a:t>
             </a:r>
           </a:p>
         </p:txBody>
@@ -3805,7 +3805,7 @@
                 <a:latin typeface="Arial"/>
                 <a:ea typeface="Arial"/>
               </a:rPr>
-              <a:t>고객이 사는 것은 계산 옆의 가장 싼 바이트이고, 그 자리가 추론 캐시 티어로 옮겨갑니다</a:t>
+              <a:t>고객이 사는 것은 용량 계층의 TB당 TCO이고, 그 계층이 추론 캐시 티어로 옮겨갑니다</a:t>
             </a:r>
           </a:p>
         </p:txBody>
@@ -3845,7 +3845,7 @@
                 <a:latin typeface="Arial"/>
                 <a:ea typeface="Arial"/>
               </a:rPr>
-              <a:t>세 국면 모두 고객은 TB당 원가·전력·공간을 샀습니다. 다음 자리는 쓰기가 많은 KV 캐시라 내구성이 문입니다.</a:t>
+              <a:t>세 국면 모두 기준은 TB당 TCO(원가·전력·밀도)였습니다. 다음 자리는 쓰기가 많은 KV 캐시라 내구성이 문입니다.</a:t>
             </a:r>
           </a:p>
         </p:txBody>
@@ -4055,7 +4055,7 @@
                 <a:latin typeface="Arial"/>
                 <a:ea typeface="Arial"/>
               </a:rPr>
-              <a:t>TB당 원가 · 랙당 용량</a:t>
+              <a:t>TB당 TCO: 원가 · 랙 밀도</a:t>
             </a:r>
           </a:p>
         </p:txBody>
@@ -4415,7 +4415,7 @@
                 <a:latin typeface="Arial"/>
                 <a:ea typeface="Arial"/>
               </a:rPr>
-              <a:t>TB당 와트 · 공급 확보</a:t>
+              <a:t>TB당 TCO: 전력 · 공급 확보</a:t>
             </a:r>
           </a:p>
         </p:txBody>
@@ -4817,7 +4817,7 @@
                 <a:latin typeface="Arial"/>
                 <a:ea typeface="Arial"/>
               </a:rPr>
-              <a:t>GPU당 캐시 용량 · 토큰당 비용</a:t>
+              <a:t>GPU당 컨텍스트 용량 · 토큰당 비용</a:t>
             </a:r>
           </a:p>
         </p:txBody>
@@ -5714,7 +5714,7 @@
         </p:nvSpPr>
         <p:spPr>
           <a:xfrm>
-            <a:off x="10536500" y="5833872"/>
+            <a:off x="10536500" y="5779008"/>
             <a:ext cx="6718227" cy="274320"/>
           </a:xfrm>
           <a:prstGeom prst="rect">
@@ -5754,8 +5754,8 @@
         </p:nvSpPr>
         <p:spPr>
           <a:xfrm>
-            <a:off x="10536500" y="6236208"/>
-            <a:ext cx="1600200" cy="566928"/>
+            <a:off x="10536500" y="6108192"/>
+            <a:ext cx="1600200" cy="457200"/>
           </a:xfrm>
           <a:prstGeom prst="rect">
             <a:avLst/>
@@ -5774,7 +5774,7 @@
               </a:lnSpc>
             </a:pPr>
             <a:r>
-              <a:rPr sz="2400" b="1">
+              <a:rPr sz="2200" b="1">
                 <a:solidFill>
                   <a:srgbClr val="1428A0"/>
                 </a:solidFill>
@@ -5794,8 +5794,8 @@
         </p:nvSpPr>
         <p:spPr>
           <a:xfrm>
-            <a:off x="12164132" y="6236208"/>
-            <a:ext cx="5090595" cy="566928"/>
+            <a:off x="12164132" y="6108192"/>
+            <a:ext cx="5090595" cy="457200"/>
           </a:xfrm>
           <a:prstGeom prst="rect">
             <a:avLst/>
@@ -5814,7 +5814,7 @@
               </a:lnSpc>
             </a:pPr>
             <a:r>
-              <a:rPr sz="1425" b="0">
+              <a:rPr sz="1350" b="0">
                 <a:solidFill>
                   <a:srgbClr val="555555"/>
                 </a:solidFill>
@@ -5834,8 +5834,8 @@
         </p:nvSpPr>
         <p:spPr>
           <a:xfrm>
-            <a:off x="10536500" y="6839712"/>
-            <a:ext cx="1600200" cy="566928"/>
+            <a:off x="10536500" y="6592824"/>
+            <a:ext cx="1600200" cy="457200"/>
           </a:xfrm>
           <a:prstGeom prst="rect">
             <a:avLst/>
@@ -5854,7 +5854,7 @@
               </a:lnSpc>
             </a:pPr>
             <a:r>
-              <a:rPr sz="2400" b="1">
+              <a:rPr sz="2200" b="1">
                 <a:solidFill>
                   <a:srgbClr val="1428A0"/>
                 </a:solidFill>
@@ -5874,8 +5874,8 @@
         </p:nvSpPr>
         <p:spPr>
           <a:xfrm>
-            <a:off x="12164132" y="6839712"/>
-            <a:ext cx="5090595" cy="566928"/>
+            <a:off x="12164132" y="6592824"/>
+            <a:ext cx="5090595" cy="457200"/>
           </a:xfrm>
           <a:prstGeom prst="rect">
             <a:avLst/>
@@ -5894,7 +5894,7 @@
               </a:lnSpc>
             </a:pPr>
             <a:r>
-              <a:rPr sz="1425" b="0">
+              <a:rPr sz="1350" b="0">
                 <a:solidFill>
                   <a:srgbClr val="555555"/>
                 </a:solidFill>
@@ -5914,8 +5914,8 @@
         </p:nvSpPr>
         <p:spPr>
           <a:xfrm>
-            <a:off x="10536500" y="7443216"/>
-            <a:ext cx="1600200" cy="566928"/>
+            <a:off x="10536500" y="7077456"/>
+            <a:ext cx="1600200" cy="457200"/>
           </a:xfrm>
           <a:prstGeom prst="rect">
             <a:avLst/>
@@ -5934,7 +5934,7 @@
               </a:lnSpc>
             </a:pPr>
             <a:r>
-              <a:rPr sz="2400" b="1">
+              <a:rPr sz="2200" b="1">
                 <a:solidFill>
                   <a:srgbClr val="1428A0"/>
                 </a:solidFill>
@@ -5954,8 +5954,8 @@
         </p:nvSpPr>
         <p:spPr>
           <a:xfrm>
-            <a:off x="12164132" y="7443216"/>
-            <a:ext cx="5090595" cy="566928"/>
+            <a:off x="12164132" y="7077456"/>
+            <a:ext cx="5090595" cy="457200"/>
           </a:xfrm>
           <a:prstGeom prst="rect">
             <a:avLst/>
@@ -5974,7 +5974,7 @@
               </a:lnSpc>
             </a:pPr>
             <a:r>
-              <a:rPr sz="1425" b="0">
+              <a:rPr sz="1350" b="0">
                 <a:solidFill>
                   <a:srgbClr val="555555"/>
                 </a:solidFill>
@@ -5994,7 +5994,7 @@
         </p:nvSpPr>
         <p:spPr>
           <a:xfrm>
-            <a:off x="10536500" y="8065008"/>
+            <a:off x="10536500" y="7598663"/>
             <a:ext cx="6718227" cy="10972"/>
           </a:xfrm>
           <a:prstGeom prst="rect">
@@ -6032,54 +6032,14 @@
       </p:sp>
       <p:sp>
         <p:nvSpPr>
-          <p:cNvPr id="58" name="TextBox 57"/>
-          <p:cNvSpPr txBox="1"/>
-          <p:nvPr/>
-        </p:nvSpPr>
-        <p:spPr>
-          <a:xfrm>
-            <a:off x="10536500" y="8138160"/>
-            <a:ext cx="6718227" cy="310895"/>
-          </a:xfrm>
-          <a:prstGeom prst="rect">
-            <a:avLst/>
-          </a:prstGeom>
-          <a:noFill/>
-        </p:spPr>
-        <p:txBody>
-          <a:bodyPr wrap="square" anchor="ctr" lIns="0" rIns="0" tIns="0" bIns="0">
-            <a:spAutoFit/>
-          </a:bodyPr>
-          <a:lstStyle/>
-          <a:p>
-            <a:pPr algn="l">
-              <a:lnSpc>
-                <a:spcPct val="105000"/>
-              </a:lnSpc>
-            </a:pPr>
-            <a:r>
-              <a:rPr sz="1575" b="1">
-                <a:solidFill>
-                  <a:srgbClr val="1A1A1A"/>
-                </a:solidFill>
-                <a:latin typeface="Arial"/>
-                <a:ea typeface="Arial"/>
-              </a:rPr>
-              <a:t>이익은 비트가 아니라 시스템 위의 TCO에서 나옵니다</a:t>
-            </a:r>
-          </a:p>
-        </p:txBody>
-      </p:sp>
-      <p:sp>
-        <p:nvSpPr>
-          <p:cNvPr id="59" name="Rectangle 58"/>
+          <p:cNvPr id="58" name="Rectangle 57"/>
           <p:cNvSpPr/>
           <p:nvPr/>
         </p:nvSpPr>
         <p:spPr>
           <a:xfrm>
-            <a:off x="722376" y="8613648"/>
-            <a:ext cx="16843248" cy="731520"/>
+            <a:off x="10536500" y="7690104"/>
+            <a:ext cx="54864" cy="722376"/>
           </a:xfrm>
           <a:prstGeom prst="rect">
             <a:avLst/>
@@ -6116,14 +6076,14 @@
       </p:sp>
       <p:sp>
         <p:nvSpPr>
-          <p:cNvPr id="60" name="TextBox 59"/>
+          <p:cNvPr id="59" name="TextBox 58"/>
           <p:cNvSpPr txBox="1"/>
           <p:nvPr/>
         </p:nvSpPr>
         <p:spPr>
           <a:xfrm>
-            <a:off x="1133856" y="8613648"/>
-            <a:ext cx="1463040" cy="731520"/>
+            <a:off x="10737668" y="7690104"/>
+            <a:ext cx="6517059" cy="722376"/>
           </a:xfrm>
           <a:prstGeom prst="rect">
             <a:avLst/>
@@ -6138,19 +6098,80 @@
           <a:p>
             <a:pPr algn="l">
               <a:lnSpc>
-                <a:spcPct val="112000"/>
-              </a:lnSpc>
-            </a:pPr>
-            <a:r>
-              <a:rPr sz="1800" b="0">
-                <a:solidFill>
-                  <a:srgbClr val="FFFFFF"/>
-                </a:solidFill>
-                <a:latin typeface="Arial"/>
-                <a:ea typeface="Arial"/>
-              </a:rPr>
-              <a:t>결론</a:t>
-            </a:r>
+                <a:spcPct val="106000"/>
+              </a:lnSpc>
+            </a:pPr>
+            <a:r>
+              <a:rPr sz="1275" b="1">
+                <a:solidFill>
+                  <a:srgbClr val="1A1A1A"/>
+                </a:solidFill>
+                <a:latin typeface="Arial"/>
+                <a:ea typeface="Arial"/>
+              </a:rPr>
+              <a:t>「부품이 어떻게 쓰일지는 시스템을 설계하는 사람 마음에 있다. 그걸 알았으면 HBM을 진작 준비했을 것이다」</a:t>
+            </a:r>
+          </a:p>
+          <a:p>
+            <a:pPr algn="l">
+              <a:lnSpc>
+                <a:spcPct val="106000"/>
+              </a:lnSpc>
+            </a:pPr>
+            <a:r>
+              <a:rPr sz="1125" b="0">
+                <a:solidFill>
+                  <a:srgbClr val="8A8A8A"/>
+                </a:solidFill>
+                <a:latin typeface="Arial"/>
+                <a:ea typeface="Arial"/>
+              </a:rPr>
+              <a:t>송용호 AX/PI센터장 · 사내 인터뷰 2026-09-03</a:t>
+            </a:r>
+          </a:p>
+        </p:txBody>
+      </p:sp>
+      <p:sp>
+        <p:nvSpPr>
+          <p:cNvPr id="60" name="Rectangle 59"/>
+          <p:cNvSpPr/>
+          <p:nvPr/>
+        </p:nvSpPr>
+        <p:spPr>
+          <a:xfrm>
+            <a:off x="722376" y="8613648"/>
+            <a:ext cx="16843248" cy="731520"/>
+          </a:xfrm>
+          <a:prstGeom prst="rect">
+            <a:avLst/>
+          </a:prstGeom>
+          <a:solidFill>
+            <a:srgbClr val="1428A0"/>
+          </a:solidFill>
+          <a:ln>
+            <a:noFill/>
+          </a:ln>
+          <a:effectLst/>
+        </p:spPr>
+        <p:style>
+          <a:lnRef idx="1">
+            <a:schemeClr val="accent1"/>
+          </a:lnRef>
+          <a:fillRef idx="3">
+            <a:schemeClr val="accent1"/>
+          </a:fillRef>
+          <a:effectRef idx="2">
+            <a:schemeClr val="accent1"/>
+          </a:effectRef>
+          <a:fontRef idx="minor">
+            <a:schemeClr val="lt1"/>
+          </a:fontRef>
+        </p:style>
+        <p:txBody>
+          <a:bodyPr rtlCol="0" anchor="ctr"/>
+          <a:lstStyle/>
+          <a:p>
+            <a:pPr algn="ctr"/>
           </a:p>
         </p:txBody>
       </p:sp>
@@ -6162,8 +6183,8 @@
         </p:nvSpPr>
         <p:spPr>
           <a:xfrm>
-            <a:off x="2551176" y="8613648"/>
-            <a:ext cx="14648688" cy="731520"/>
+            <a:off x="1133856" y="8613648"/>
+            <a:ext cx="1463040" cy="731520"/>
           </a:xfrm>
           <a:prstGeom prst="rect">
             <a:avLst/>
@@ -6178,6 +6199,46 @@
           <a:p>
             <a:pPr algn="l">
               <a:lnSpc>
+                <a:spcPct val="112000"/>
+              </a:lnSpc>
+            </a:pPr>
+            <a:r>
+              <a:rPr sz="1800" b="0">
+                <a:solidFill>
+                  <a:srgbClr val="FFFFFF"/>
+                </a:solidFill>
+                <a:latin typeface="Arial"/>
+                <a:ea typeface="Arial"/>
+              </a:rPr>
+              <a:t>결론</a:t>
+            </a:r>
+          </a:p>
+        </p:txBody>
+      </p:sp>
+      <p:sp>
+        <p:nvSpPr>
+          <p:cNvPr id="62" name="TextBox 61"/>
+          <p:cNvSpPr txBox="1"/>
+          <p:nvPr/>
+        </p:nvSpPr>
+        <p:spPr>
+          <a:xfrm>
+            <a:off x="2551176" y="8613648"/>
+            <a:ext cx="14648688" cy="731520"/>
+          </a:xfrm>
+          <a:prstGeom prst="rect">
+            <a:avLst/>
+          </a:prstGeom>
+          <a:noFill/>
+        </p:spPr>
+        <p:txBody>
+          <a:bodyPr wrap="square" anchor="ctr" lIns="0" rIns="0" tIns="0" bIns="0">
+            <a:spAutoFit/>
+          </a:bodyPr>
+          <a:lstStyle/>
+          <a:p>
+            <a:pPr algn="l">
+              <a:lnSpc>
                 <a:spcPct val="108000"/>
               </a:lnSpc>
             </a:pPr>
@@ -6189,14 +6250,14 @@
                 <a:latin typeface="Arial"/>
                 <a:ea typeface="Arial"/>
               </a:rPr>
-              <a:t>고객은 추론 캐시 티어에서도 QLC의 경제성을 원합니다. 문은 내구성이고, 디바이스만으로는 못 엽니다</a:t>
-            </a:r>
-          </a:p>
-        </p:txBody>
-      </p:sp>
-      <p:sp>
-        <p:nvSpPr>
-          <p:cNvPr id="62" name="TextBox 61"/>
+              <a:t>고객은 추론 캐시 티어에서도 QLC의 TB당 TCO를 원합니다. 문은 내구성이고, 디바이스만으로는 못 엽니다</a:t>
+            </a:r>
+          </a:p>
+        </p:txBody>
+      </p:sp>
+      <p:sp>
+        <p:nvSpPr>
+          <p:cNvPr id="63" name="TextBox 62"/>
           <p:cNvSpPr txBox="1"/>
           <p:nvPr/>
         </p:nvSpPr>
@@ -6236,7 +6297,7 @@
       </p:sp>
       <p:sp>
         <p:nvSpPr>
-          <p:cNvPr id="63" name="TextBox 62"/>
+          <p:cNvPr id="64" name="TextBox 63"/>
           <p:cNvSpPr txBox="1"/>
           <p:nvPr/>
         </p:nvSpPr>
@@ -6480,14 +6541,24 @@
               </a:lnSpc>
             </a:pPr>
             <a:r>
-              <a:rPr sz="2000" b="0">
-                <a:solidFill>
-                  <a:srgbClr val="555555"/>
-                </a:solidFill>
-                <a:latin typeface="Arial"/>
-                <a:ea typeface="Arial"/>
-              </a:rPr>
-              <a:t>고객이 원하는 QLC 경제성과 캐시의 쓰기 사이 10~40배 갭은 배치 표준과 호스트 SW가 메웁니다. 층별 기술과 삼성의 현 위치입니다.</a:t>
+              <a:rPr sz="1800" b="0">
+                <a:solidFill>
+                  <a:srgbClr val="1A1A1A"/>
+                </a:solidFill>
+                <a:latin typeface="Arial"/>
+                <a:ea typeface="Arial"/>
+              </a:rPr>
+              <a:t>「승부는 칩을 많이 파는 기업이 아니라, 고객의 아키텍처 안으로 들어가 수요를 함께 설계하는 기업이 가져간다」</a:t>
+            </a:r>
+            <a:r>
+              <a:rPr sz="1350" b="0">
+                <a:solidFill>
+                  <a:srgbClr val="8A8A8A"/>
+                </a:solidFill>
+                <a:latin typeface="Arial"/>
+                <a:ea typeface="Arial"/>
+              </a:rPr>
+              <a:t>   신문섭 · Bain 파트너, 2026-06</a:t>
             </a:r>
           </a:p>
         </p:txBody>
@@ -10443,14 +10514,24 @@
               </a:lnSpc>
             </a:pPr>
             <a:r>
-              <a:rPr sz="2000" b="0">
-                <a:solidFill>
-                  <a:srgbClr val="555555"/>
-                </a:solidFill>
-                <a:latin typeface="Arial"/>
-                <a:ea typeface="Arial"/>
-              </a:rPr>
-              <a:t>Palantir가 만든 FDE와 Micron이 Anthropic과 맺은 SCA가 두 목표의 선례입니다. 조직·인사·문화가 그 길을 엽니다.</a:t>
+              <a:rPr sz="1800" b="0">
+                <a:solidFill>
+                  <a:srgbClr val="1A1A1A"/>
+                </a:solidFill>
+                <a:latin typeface="Arial"/>
+                <a:ea typeface="Arial"/>
+              </a:rPr>
+              <a:t>「단 한 번도 고객 지향적인 적이 없었다. 진짜 고객 지향이 뭔지 이해하고, 그것을 위한 전략이 필요한 시점이 이미 됐다」</a:t>
+            </a:r>
+            <a:r>
+              <a:rPr sz="1350" b="0">
+                <a:solidFill>
+                  <a:srgbClr val="8A8A8A"/>
+                </a:solidFill>
+                <a:latin typeface="Arial"/>
+                <a:ea typeface="Arial"/>
+              </a:rPr>
+              <a:t>   송용호 · AX/PI센터장, 2026-09</a:t>
             </a:r>
           </a:p>
         </p:txBody>
@@ -10717,7 +10798,7 @@
         </p:nvSpPr>
         <p:spPr>
           <a:xfrm>
-            <a:off x="1033272" y="4178808"/>
+            <a:off x="1033272" y="4123944"/>
             <a:ext cx="146304" cy="146304"/>
           </a:xfrm>
           <a:prstGeom prst="rect">
@@ -10761,7 +10842,7 @@
         </p:nvSpPr>
         <p:spPr>
           <a:xfrm>
-            <a:off x="1289304" y="4078224"/>
+            <a:off x="1289304" y="4023359"/>
             <a:ext cx="2642616" cy="347472"/>
           </a:xfrm>
           <a:prstGeom prst="rect">
@@ -10801,7 +10882,7 @@
         </p:nvSpPr>
         <p:spPr>
           <a:xfrm>
-            <a:off x="1033272" y="4764024"/>
+            <a:off x="1033272" y="4654296"/>
             <a:ext cx="146304" cy="146304"/>
           </a:xfrm>
           <a:prstGeom prst="rect">
@@ -10845,7 +10926,7 @@
         </p:nvSpPr>
         <p:spPr>
           <a:xfrm>
-            <a:off x="1289304" y="4663440"/>
+            <a:off x="1289304" y="4553712"/>
             <a:ext cx="2642616" cy="347472"/>
           </a:xfrm>
           <a:prstGeom prst="rect">
@@ -10885,7 +10966,7 @@
         </p:nvSpPr>
         <p:spPr>
           <a:xfrm>
-            <a:off x="1033272" y="5349240"/>
+            <a:off x="1033272" y="5184648"/>
             <a:ext cx="146304" cy="146304"/>
           </a:xfrm>
           <a:prstGeom prst="rect">
@@ -10929,7 +11010,7 @@
         </p:nvSpPr>
         <p:spPr>
           <a:xfrm>
-            <a:off x="1289304" y="5248655"/>
+            <a:off x="1289304" y="5084064"/>
             <a:ext cx="2642616" cy="347472"/>
           </a:xfrm>
           <a:prstGeom prst="rect">
@@ -10969,7 +11050,7 @@
         </p:nvSpPr>
         <p:spPr>
           <a:xfrm>
-            <a:off x="1033272" y="5961888"/>
+            <a:off x="1033272" y="5632703"/>
             <a:ext cx="2898648" cy="10972"/>
           </a:xfrm>
           <a:prstGeom prst="rect">
@@ -11007,14 +11088,58 @@
       </p:sp>
       <p:sp>
         <p:nvSpPr>
-          <p:cNvPr id="20" name="TextBox 19"/>
+          <p:cNvPr id="20" name="Rectangle 19"/>
+          <p:cNvSpPr/>
+          <p:nvPr/>
+        </p:nvSpPr>
+        <p:spPr>
+          <a:xfrm>
+            <a:off x="1033272" y="5724144"/>
+            <a:ext cx="54864" cy="859536"/>
+          </a:xfrm>
+          <a:prstGeom prst="rect">
+            <a:avLst/>
+          </a:prstGeom>
+          <a:solidFill>
+            <a:srgbClr val="1428A0"/>
+          </a:solidFill>
+          <a:ln>
+            <a:noFill/>
+          </a:ln>
+          <a:effectLst/>
+        </p:spPr>
+        <p:style>
+          <a:lnRef idx="1">
+            <a:schemeClr val="accent1"/>
+          </a:lnRef>
+          <a:fillRef idx="3">
+            <a:schemeClr val="accent1"/>
+          </a:fillRef>
+          <a:effectRef idx="2">
+            <a:schemeClr val="accent1"/>
+          </a:effectRef>
+          <a:fontRef idx="minor">
+            <a:schemeClr val="lt1"/>
+          </a:fontRef>
+        </p:style>
+        <p:txBody>
+          <a:bodyPr rtlCol="0" anchor="ctr"/>
+          <a:lstStyle/>
+          <a:p>
+            <a:pPr algn="ctr"/>
+          </a:p>
+        </p:txBody>
+      </p:sp>
+      <p:sp>
+        <p:nvSpPr>
+          <p:cNvPr id="21" name="TextBox 20"/>
           <p:cNvSpPr txBox="1"/>
           <p:nvPr/>
         </p:nvSpPr>
         <p:spPr>
           <a:xfrm>
-            <a:off x="1033272" y="6053327"/>
-            <a:ext cx="2898648" cy="457200"/>
+            <a:off x="1234440" y="5724144"/>
+            <a:ext cx="2697479" cy="859536"/>
           </a:xfrm>
           <a:prstGeom prst="rect">
             <a:avLst/>
@@ -11029,25 +11154,42 @@
           <a:p>
             <a:pPr algn="l">
               <a:lnSpc>
-                <a:spcPct val="104000"/>
-              </a:lnSpc>
-            </a:pPr>
-            <a:r>
-              <a:rPr sz="1275" b="0">
-                <a:solidFill>
-                  <a:srgbClr val="555555"/>
-                </a:solidFill>
-                <a:latin typeface="Arial"/>
-                <a:ea typeface="Arial"/>
-              </a:rPr>
-              <a:t>자회사 · 현지 채용 시스템 SW 전문가 · 오픈소스 주도 문화가 뒤를 받칩니다</a:t>
-            </a:r>
-          </a:p>
-        </p:txBody>
-      </p:sp>
-      <p:sp>
-        <p:nvSpPr>
-          <p:cNvPr id="21" name="Rectangle 20"/>
+                <a:spcPct val="106000"/>
+              </a:lnSpc>
+            </a:pPr>
+            <a:r>
+              <a:rPr sz="1200" b="1">
+                <a:solidFill>
+                  <a:srgbClr val="1A1A1A"/>
+                </a:solidFill>
+                <a:latin typeface="Arial"/>
+                <a:ea typeface="Arial"/>
+              </a:rPr>
+              <a:t>「고객의 집에 가서 저녁을 같이 먹는 것, 삼성은 상상할 수 없는 일이지만 SK하이닉스는 한다」</a:t>
+            </a:r>
+          </a:p>
+          <a:p>
+            <a:pPr algn="l">
+              <a:lnSpc>
+                <a:spcPct val="106000"/>
+              </a:lnSpc>
+            </a:pPr>
+            <a:r>
+              <a:rPr sz="1050" b="0">
+                <a:solidFill>
+                  <a:srgbClr val="8A8A8A"/>
+                </a:solidFill>
+                <a:latin typeface="Arial"/>
+                <a:ea typeface="Arial"/>
+              </a:rPr>
+              <a:t>송용호 · 관계가 곧 워크로드 접근권</a:t>
+            </a:r>
+          </a:p>
+        </p:txBody>
+      </p:sp>
+      <p:sp>
+        <p:nvSpPr>
+          <p:cNvPr id="22" name="Rectangle 21"/>
           <p:cNvSpPr/>
           <p:nvPr/>
         </p:nvSpPr>
@@ -11093,7 +11235,7 @@
       </p:sp>
       <p:sp>
         <p:nvSpPr>
-          <p:cNvPr id="22" name="TextBox 21"/>
+          <p:cNvPr id="23" name="TextBox 22"/>
           <p:cNvSpPr txBox="1"/>
           <p:nvPr/>
         </p:nvSpPr>
@@ -11133,7 +11275,7 @@
       </p:sp>
       <p:sp>
         <p:nvSpPr>
-          <p:cNvPr id="23" name="TextBox 22"/>
+          <p:cNvPr id="24" name="TextBox 23"/>
           <p:cNvSpPr txBox="1"/>
           <p:nvPr/>
         </p:nvSpPr>
@@ -11173,7 +11315,7 @@
       </p:sp>
       <p:sp>
         <p:nvSpPr>
-          <p:cNvPr id="24" name="Rectangle 23"/>
+          <p:cNvPr id="25" name="Rectangle 24"/>
           <p:cNvSpPr/>
           <p:nvPr/>
         </p:nvSpPr>
@@ -11219,7 +11361,7 @@
       </p:sp>
       <p:sp>
         <p:nvSpPr>
-          <p:cNvPr id="25" name="TextBox 24"/>
+          <p:cNvPr id="26" name="TextBox 25"/>
           <p:cNvSpPr txBox="1"/>
           <p:nvPr/>
         </p:nvSpPr>
@@ -11259,7 +11401,7 @@
       </p:sp>
       <p:sp>
         <p:nvSpPr>
-          <p:cNvPr id="26" name="Rectangle 25"/>
+          <p:cNvPr id="27" name="Rectangle 26"/>
           <p:cNvSpPr/>
           <p:nvPr/>
         </p:nvSpPr>
@@ -11303,7 +11445,7 @@
       </p:sp>
       <p:sp>
         <p:nvSpPr>
-          <p:cNvPr id="27" name="TextBox 26"/>
+          <p:cNvPr id="28" name="TextBox 27"/>
           <p:cNvSpPr txBox="1"/>
           <p:nvPr/>
         </p:nvSpPr>
@@ -11343,7 +11485,7 @@
       </p:sp>
       <p:sp>
         <p:nvSpPr>
-          <p:cNvPr id="28" name="Rectangle 27"/>
+          <p:cNvPr id="29" name="Rectangle 28"/>
           <p:cNvSpPr/>
           <p:nvPr/>
         </p:nvSpPr>
@@ -11387,7 +11529,7 @@
       </p:sp>
       <p:sp>
         <p:nvSpPr>
-          <p:cNvPr id="29" name="TextBox 28"/>
+          <p:cNvPr id="30" name="TextBox 29"/>
           <p:cNvSpPr txBox="1"/>
           <p:nvPr/>
         </p:nvSpPr>
@@ -11427,7 +11569,7 @@
       </p:sp>
       <p:sp>
         <p:nvSpPr>
-          <p:cNvPr id="30" name="Rectangle 29"/>
+          <p:cNvPr id="31" name="Rectangle 30"/>
           <p:cNvSpPr/>
           <p:nvPr/>
         </p:nvSpPr>
@@ -11471,7 +11613,7 @@
       </p:sp>
       <p:sp>
         <p:nvSpPr>
-          <p:cNvPr id="31" name="TextBox 30"/>
+          <p:cNvPr id="32" name="TextBox 31"/>
           <p:cNvSpPr txBox="1"/>
           <p:nvPr/>
         </p:nvSpPr>
@@ -11511,7 +11653,7 @@
       </p:sp>
       <p:sp>
         <p:nvSpPr>
-          <p:cNvPr id="32" name="Oval 31"/>
+          <p:cNvPr id="33" name="Oval 32"/>
           <p:cNvSpPr/>
           <p:nvPr/>
         </p:nvSpPr>
@@ -11555,7 +11697,7 @@
       </p:sp>
       <p:sp>
         <p:nvSpPr>
-          <p:cNvPr id="33" name="Round Same Side Corner Rectangle 32"/>
+          <p:cNvPr id="34" name="Round Same Side Corner Rectangle 33"/>
           <p:cNvSpPr/>
           <p:nvPr/>
         </p:nvSpPr>
@@ -11602,7 +11744,7 @@
       </p:sp>
       <p:sp>
         <p:nvSpPr>
-          <p:cNvPr id="34" name="TextBox 33"/>
+          <p:cNvPr id="35" name="TextBox 34"/>
           <p:cNvSpPr txBox="1"/>
           <p:nvPr/>
         </p:nvSpPr>
@@ -11642,7 +11784,7 @@
       </p:sp>
       <p:sp>
         <p:nvSpPr>
-          <p:cNvPr id="35" name="TextBox 34"/>
+          <p:cNvPr id="36" name="TextBox 35"/>
           <p:cNvSpPr txBox="1"/>
           <p:nvPr/>
         </p:nvSpPr>
@@ -11682,7 +11824,7 @@
       </p:sp>
       <p:pic>
         <p:nvPicPr>
-          <p:cNvPr id="36" name="Picture 35" descr="anthropic.png"/>
+          <p:cNvPr id="37" name="Picture 36" descr="anthropic.png"/>
           <p:cNvPicPr>
             <a:picLocks noChangeAspect="1"/>
           </p:cNvPicPr>
@@ -11706,7 +11848,7 @@
       </p:pic>
       <p:pic>
         <p:nvPicPr>
-          <p:cNvPr id="37" name="Picture 36" descr="openai.png"/>
+          <p:cNvPr id="38" name="Picture 37" descr="openai.png"/>
           <p:cNvPicPr>
             <a:picLocks noChangeAspect="1"/>
           </p:cNvPicPr>
@@ -11730,7 +11872,7 @@
       </p:pic>
       <p:pic>
         <p:nvPicPr>
-          <p:cNvPr id="38" name="Picture 37" descr="nvidia.png"/>
+          <p:cNvPr id="39" name="Picture 38" descr="nvidia.png"/>
           <p:cNvPicPr>
             <a:picLocks noChangeAspect="1"/>
           </p:cNvPicPr>
@@ -11754,7 +11896,7 @@
       </p:pic>
       <p:pic>
         <p:nvPicPr>
-          <p:cNvPr id="39" name="Picture 38" descr="meta.png"/>
+          <p:cNvPr id="40" name="Picture 39" descr="meta.png"/>
           <p:cNvPicPr>
             <a:picLocks noChangeAspect="1"/>
           </p:cNvPicPr>
@@ -11778,7 +11920,7 @@
       </p:pic>
       <p:sp>
         <p:nvSpPr>
-          <p:cNvPr id="40" name="Right Arrow 39"/>
+          <p:cNvPr id="41" name="Right Arrow 40"/>
           <p:cNvSpPr/>
           <p:nvPr/>
         </p:nvSpPr>
@@ -11825,7 +11967,7 @@
       </p:sp>
       <p:sp>
         <p:nvSpPr>
-          <p:cNvPr id="41" name="TextBox 40"/>
+          <p:cNvPr id="42" name="TextBox 41"/>
           <p:cNvSpPr txBox="1"/>
           <p:nvPr/>
         </p:nvSpPr>
@@ -11882,7 +12024,7 @@
       </p:sp>
       <p:sp>
         <p:nvSpPr>
-          <p:cNvPr id="42" name="Rectangle 41"/>
+          <p:cNvPr id="43" name="Rectangle 42"/>
           <p:cNvSpPr/>
           <p:nvPr/>
         </p:nvSpPr>
@@ -11926,7 +12068,7 @@
       </p:sp>
       <p:sp>
         <p:nvSpPr>
-          <p:cNvPr id="43" name="TextBox 42"/>
+          <p:cNvPr id="44" name="TextBox 43"/>
           <p:cNvSpPr txBox="1"/>
           <p:nvPr/>
         </p:nvSpPr>
@@ -11986,7 +12128,7 @@
       </p:sp>
       <p:sp>
         <p:nvSpPr>
-          <p:cNvPr id="44" name="Oval 43"/>
+          <p:cNvPr id="45" name="Oval 44"/>
           <p:cNvSpPr/>
           <p:nvPr/>
         </p:nvSpPr>
@@ -12030,7 +12172,7 @@
       </p:sp>
       <p:sp>
         <p:nvSpPr>
-          <p:cNvPr id="45" name="Round Same Side Corner Rectangle 44"/>
+          <p:cNvPr id="46" name="Round Same Side Corner Rectangle 45"/>
           <p:cNvSpPr/>
           <p:nvPr/>
         </p:nvSpPr>
@@ -12077,7 +12219,7 @@
       </p:sp>
       <p:sp>
         <p:nvSpPr>
-          <p:cNvPr id="46" name="Oval 45"/>
+          <p:cNvPr id="47" name="Oval 46"/>
           <p:cNvSpPr/>
           <p:nvPr/>
         </p:nvSpPr>
@@ -12121,7 +12263,7 @@
       </p:sp>
       <p:sp>
         <p:nvSpPr>
-          <p:cNvPr id="47" name="Round Same Side Corner Rectangle 46"/>
+          <p:cNvPr id="48" name="Round Same Side Corner Rectangle 47"/>
           <p:cNvSpPr/>
           <p:nvPr/>
         </p:nvSpPr>
@@ -12168,7 +12310,7 @@
       </p:sp>
       <p:sp>
         <p:nvSpPr>
-          <p:cNvPr id="48" name="Oval 47"/>
+          <p:cNvPr id="49" name="Oval 48"/>
           <p:cNvSpPr/>
           <p:nvPr/>
         </p:nvSpPr>
@@ -12212,7 +12354,7 @@
       </p:sp>
       <p:sp>
         <p:nvSpPr>
-          <p:cNvPr id="49" name="Round Same Side Corner Rectangle 48"/>
+          <p:cNvPr id="50" name="Round Same Side Corner Rectangle 49"/>
           <p:cNvSpPr/>
           <p:nvPr/>
         </p:nvSpPr>
@@ -12259,7 +12401,7 @@
       </p:sp>
       <p:sp>
         <p:nvSpPr>
-          <p:cNvPr id="50" name="Right Arrow 49"/>
+          <p:cNvPr id="51" name="Right Arrow 50"/>
           <p:cNvSpPr/>
           <p:nvPr/>
         </p:nvSpPr>
@@ -12303,7 +12445,7 @@
       </p:sp>
       <p:sp>
         <p:nvSpPr>
-          <p:cNvPr id="51" name="Rectangle 50"/>
+          <p:cNvPr id="52" name="Rectangle 51"/>
           <p:cNvSpPr/>
           <p:nvPr/>
         </p:nvSpPr>
@@ -12349,7 +12491,7 @@
       </p:sp>
       <p:sp>
         <p:nvSpPr>
-          <p:cNvPr id="52" name="TextBox 51"/>
+          <p:cNvPr id="53" name="TextBox 52"/>
           <p:cNvSpPr txBox="1"/>
           <p:nvPr/>
         </p:nvSpPr>
@@ -12389,7 +12531,7 @@
       </p:sp>
       <p:sp>
         <p:nvSpPr>
-          <p:cNvPr id="53" name="TextBox 52"/>
+          <p:cNvPr id="54" name="TextBox 53"/>
           <p:cNvSpPr txBox="1"/>
           <p:nvPr/>
         </p:nvSpPr>
@@ -12446,7 +12588,7 @@
       </p:sp>
       <p:sp>
         <p:nvSpPr>
-          <p:cNvPr id="54" name="Rectangle 53"/>
+          <p:cNvPr id="55" name="Rectangle 54"/>
           <p:cNvSpPr/>
           <p:nvPr/>
         </p:nvSpPr>
@@ -12490,7 +12632,7 @@
       </p:sp>
       <p:sp>
         <p:nvSpPr>
-          <p:cNvPr id="55" name="TextBox 54"/>
+          <p:cNvPr id="56" name="TextBox 55"/>
           <p:cNvSpPr txBox="1"/>
           <p:nvPr/>
         </p:nvSpPr>
@@ -12550,7 +12692,7 @@
       </p:sp>
       <p:sp>
         <p:nvSpPr>
-          <p:cNvPr id="56" name="Rectangle 55"/>
+          <p:cNvPr id="57" name="Rectangle 56"/>
           <p:cNvSpPr/>
           <p:nvPr/>
         </p:nvSpPr>
@@ -12594,7 +12736,7 @@
       </p:sp>
       <p:sp>
         <p:nvSpPr>
-          <p:cNvPr id="57" name="TextBox 56"/>
+          <p:cNvPr id="58" name="TextBox 57"/>
           <p:cNvSpPr txBox="1"/>
           <p:nvPr/>
         </p:nvSpPr>
@@ -12634,7 +12776,7 @@
       </p:sp>
       <p:sp>
         <p:nvSpPr>
-          <p:cNvPr id="58" name="Rectangle 57"/>
+          <p:cNvPr id="59" name="Rectangle 58"/>
           <p:cNvSpPr/>
           <p:nvPr/>
         </p:nvSpPr>
@@ -12678,7 +12820,7 @@
       </p:sp>
       <p:sp>
         <p:nvSpPr>
-          <p:cNvPr id="59" name="TextBox 58"/>
+          <p:cNvPr id="60" name="TextBox 59"/>
           <p:cNvSpPr txBox="1"/>
           <p:nvPr/>
         </p:nvSpPr>
@@ -12718,7 +12860,7 @@
       </p:sp>
       <p:sp>
         <p:nvSpPr>
-          <p:cNvPr id="60" name="Rectangle 59"/>
+          <p:cNvPr id="61" name="Rectangle 60"/>
           <p:cNvSpPr/>
           <p:nvPr/>
         </p:nvSpPr>
@@ -12762,7 +12904,7 @@
       </p:sp>
       <p:sp>
         <p:nvSpPr>
-          <p:cNvPr id="61" name="TextBox 60"/>
+          <p:cNvPr id="62" name="TextBox 61"/>
           <p:cNvSpPr txBox="1"/>
           <p:nvPr/>
         </p:nvSpPr>
@@ -12802,7 +12944,7 @@
       </p:sp>
       <p:sp>
         <p:nvSpPr>
-          <p:cNvPr id="62" name="Rectangle 61"/>
+          <p:cNvPr id="63" name="Rectangle 62"/>
           <p:cNvSpPr/>
           <p:nvPr/>
         </p:nvSpPr>
@@ -12846,7 +12988,7 @@
       </p:sp>
       <p:sp>
         <p:nvSpPr>
-          <p:cNvPr id="63" name="TextBox 62"/>
+          <p:cNvPr id="64" name="TextBox 63"/>
           <p:cNvSpPr txBox="1"/>
           <p:nvPr/>
         </p:nvSpPr>
@@ -12886,7 +13028,7 @@
       </p:sp>
       <p:sp>
         <p:nvSpPr>
-          <p:cNvPr id="64" name="TextBox 63"/>
+          <p:cNvPr id="65" name="TextBox 64"/>
           <p:cNvSpPr txBox="1"/>
           <p:nvPr/>
         </p:nvSpPr>
@@ -12960,7 +13102,7 @@
       </p:sp>
       <p:sp>
         <p:nvSpPr>
-          <p:cNvPr id="65" name="Left Arrow 64"/>
+          <p:cNvPr id="66" name="Left Arrow 65"/>
           <p:cNvSpPr/>
           <p:nvPr/>
         </p:nvSpPr>
@@ -13007,7 +13149,7 @@
       </p:sp>
       <p:sp>
         <p:nvSpPr>
-          <p:cNvPr id="66" name="TextBox 65"/>
+          <p:cNvPr id="67" name="TextBox 66"/>
           <p:cNvSpPr txBox="1"/>
           <p:nvPr/>
         </p:nvSpPr>
@@ -13064,7 +13206,7 @@
       </p:sp>
       <p:sp>
         <p:nvSpPr>
-          <p:cNvPr id="67" name="Rectangle 66"/>
+          <p:cNvPr id="68" name="Rectangle 67"/>
           <p:cNvSpPr/>
           <p:nvPr/>
         </p:nvSpPr>
@@ -13110,7 +13252,7 @@
       </p:sp>
       <p:sp>
         <p:nvSpPr>
-          <p:cNvPr id="68" name="Rectangle 67"/>
+          <p:cNvPr id="69" name="Rectangle 68"/>
           <p:cNvSpPr/>
           <p:nvPr/>
         </p:nvSpPr>
@@ -13154,7 +13296,7 @@
       </p:sp>
       <p:sp>
         <p:nvSpPr>
-          <p:cNvPr id="69" name="TextBox 68"/>
+          <p:cNvPr id="70" name="TextBox 69"/>
           <p:cNvSpPr txBox="1"/>
           <p:nvPr/>
         </p:nvSpPr>
@@ -13194,7 +13336,7 @@
       </p:sp>
       <p:sp>
         <p:nvSpPr>
-          <p:cNvPr id="70" name="TextBox 69"/>
+          <p:cNvPr id="71" name="TextBox 70"/>
           <p:cNvSpPr txBox="1"/>
           <p:nvPr/>
         </p:nvSpPr>
@@ -13268,7 +13410,7 @@
       </p:sp>
       <p:sp>
         <p:nvSpPr>
-          <p:cNvPr id="71" name="Rectangle 70"/>
+          <p:cNvPr id="72" name="Rectangle 71"/>
           <p:cNvSpPr/>
           <p:nvPr/>
         </p:nvSpPr>
@@ -13314,7 +13456,7 @@
       </p:sp>
       <p:sp>
         <p:nvSpPr>
-          <p:cNvPr id="72" name="Rectangle 71"/>
+          <p:cNvPr id="73" name="Rectangle 72"/>
           <p:cNvSpPr/>
           <p:nvPr/>
         </p:nvSpPr>
@@ -13358,7 +13500,7 @@
       </p:sp>
       <p:sp>
         <p:nvSpPr>
-          <p:cNvPr id="73" name="TextBox 72"/>
+          <p:cNvPr id="74" name="TextBox 73"/>
           <p:cNvSpPr txBox="1"/>
           <p:nvPr/>
         </p:nvSpPr>
@@ -13398,7 +13540,7 @@
       </p:sp>
       <p:sp>
         <p:nvSpPr>
-          <p:cNvPr id="74" name="TextBox 73"/>
+          <p:cNvPr id="75" name="TextBox 74"/>
           <p:cNvSpPr txBox="1"/>
           <p:nvPr/>
         </p:nvSpPr>
@@ -13472,7 +13614,7 @@
       </p:sp>
       <p:sp>
         <p:nvSpPr>
-          <p:cNvPr id="75" name="Rectangle 74"/>
+          <p:cNvPr id="76" name="Rectangle 75"/>
           <p:cNvSpPr/>
           <p:nvPr/>
         </p:nvSpPr>
@@ -13518,7 +13660,7 @@
       </p:sp>
       <p:sp>
         <p:nvSpPr>
-          <p:cNvPr id="76" name="Rectangle 75"/>
+          <p:cNvPr id="77" name="Rectangle 76"/>
           <p:cNvSpPr/>
           <p:nvPr/>
         </p:nvSpPr>
@@ -13562,7 +13704,7 @@
       </p:sp>
       <p:sp>
         <p:nvSpPr>
-          <p:cNvPr id="77" name="TextBox 76"/>
+          <p:cNvPr id="78" name="TextBox 77"/>
           <p:cNvSpPr txBox="1"/>
           <p:nvPr/>
         </p:nvSpPr>
@@ -13602,7 +13744,7 @@
       </p:sp>
       <p:sp>
         <p:nvSpPr>
-          <p:cNvPr id="78" name="TextBox 77"/>
+          <p:cNvPr id="79" name="TextBox 78"/>
           <p:cNvSpPr txBox="1"/>
           <p:nvPr/>
         </p:nvSpPr>
@@ -13676,7 +13818,7 @@
       </p:sp>
       <p:sp>
         <p:nvSpPr>
-          <p:cNvPr id="79" name="Rectangle 78"/>
+          <p:cNvPr id="80" name="Rectangle 79"/>
           <p:cNvSpPr/>
           <p:nvPr/>
         </p:nvSpPr>
@@ -13720,7 +13862,7 @@
       </p:sp>
       <p:sp>
         <p:nvSpPr>
-          <p:cNvPr id="80" name="TextBox 79"/>
+          <p:cNvPr id="81" name="TextBox 80"/>
           <p:cNvSpPr txBox="1"/>
           <p:nvPr/>
         </p:nvSpPr>
@@ -13760,7 +13902,7 @@
       </p:sp>
       <p:sp>
         <p:nvSpPr>
-          <p:cNvPr id="81" name="TextBox 80"/>
+          <p:cNvPr id="82" name="TextBox 81"/>
           <p:cNvSpPr txBox="1"/>
           <p:nvPr/>
         </p:nvSpPr>
@@ -13793,7 +13935,7 @@
                 <a:latin typeface="Arial"/>
                 <a:ea typeface="Arial"/>
               </a:rPr>
-              <a:t>고객은 계산 옆의 가장 싼 바이트를 사려고 QLC를 택했고, 그 자리가 쓰기 많은 추론 캐시로 옮겨가 내구성을 고객 시스템 안에서 풀어야 하며,</a:t>
+              <a:t>고객은 TB당 TCO가 가장 낮은 용량 계층을 QLC로 채웠고, 그 계층이 쓰기 많은 추론 캐시로 옮겨가</a:t>
             </a:r>
           </a:p>
           <a:p>
@@ -13810,14 +13952,14 @@
                 <a:latin typeface="Arial"/>
                 <a:ea typeface="Arial"/>
               </a:rPr>
-              <a:t>그 길은 FDE와 전략적 협약, 그리고 이를 해낼 사람과 문화가 엽니다</a:t>
-            </a:r>
-          </a:p>
-        </p:txBody>
-      </p:sp>
-      <p:sp>
-        <p:nvSpPr>
-          <p:cNvPr id="82" name="TextBox 81"/>
+              <a:t>내구성을 고객 시스템 안에서 풀어야 하며, 그 길은 FDE와 전략적 협약, 그리고 이를 해낼 사람과 문화가 엽니다</a:t>
+            </a:r>
+          </a:p>
+        </p:txBody>
+      </p:sp>
+      <p:sp>
+        <p:nvSpPr>
+          <p:cNvPr id="83" name="TextBox 82"/>
           <p:cNvSpPr txBox="1"/>
           <p:nvPr/>
         </p:nvSpPr>
@@ -13857,7 +13999,7 @@
       </p:sp>
       <p:sp>
         <p:nvSpPr>
-          <p:cNvPr id="83" name="TextBox 82"/>
+          <p:cNvPr id="84" name="TextBox 83"/>
           <p:cNvSpPr txBox="1"/>
           <p:nvPr/>
         </p:nvSpPr>

--- a/outputs/presentation/qlc-ssd-strategy.pptx
+++ b/outputs/presentation/qlc-ssd-strategy.pptx
@@ -505,7 +505,7 @@
           <a:lstStyle/>
           <a:p>
             <a:r>
-              <a:t>첫 장은 다운턴이 가르친 것입니다. 위 타임라인에 두 다운턴(DT19 재고 조정, 낙폭 -37.6% / DT23 사상 최심 -45%, 진앙은 eSSD)과 QLC 연혁을 한 줄에 놓았습니다. 교훈 1, 센싱: 수요는 주문서보다 2년 먼저 고객의 스펙·표준·코드에 나타납니다. DT23 한복판인 4Q22에 eSSD 매출이 27% 급락하는 동안 Meta·Google은 배치 표준을 비준하고 OCP 폼팩터를 정했고 Solidigm은 61TB를 예고했습니다. 총량만 본 쪽은 다운턴을 봤고 고객 스펙을 본 쪽은 다음 요구를 봤습니다. 오늘의 등가 신호는 KV 캐시 관리자 4종 코드에 배치·내구성 언급이 0건이라는 사실입니다. 요구가 아직 안 쓰였고, 지금 들어가면 우리가 씁니다. 교훈 2, 고객 협업: 요구를 정의하는 자리에 있던 쪽이 적중했습니다. Solidigm은 SK그룹에서 낙폭이 가장 깊었지만 61TB QLC를 삼성보다 12개월 먼저 내 2024년 흑자 전환했고, HBM은 NVIDIA와 규격을 공동 정의한 SK hynix가 가져갔습니다. 위키의 2023 복기 결론이 바로 이것입니다. 다운턴 극복은 포트폴리오 다변화(방어)가 아니라 고객 니즈 적중(공격)이 결정했다. 교훈 3, 타이밍: 한 다운턴의 결정이 다음 다운턴의 출발 조건이 됩니다. DT19의 무감산 성공이 DT23의 오판이 됐고, DT19의 HBM 팀 축소가 DT23 회복기의 주도권 상실이 됐습니다. 다음 심판대는 2027년 하반기 가격 정상화 국면이고, 그때 비트는 10배인데 매출이 정체하면 남는 이익은 고객 시스템 안에서 보증한 TCO뿐입니다. 세 교훈이 이 덱의 나머지 세 장입니다. 2장은 고객이 왜 QLC를 원하는가, 3장은 디바이스에서 고객 시스템 안까지 세 단계, 4장은 FDE와 전략적 협약, 그리고 그것을 해낼 사람과 문화입니다.</a:t>
+              <a:t>1장은 다운턴 복기에서 도출한 교훈입니다. 상단 타임라인에 DT19(재고 조정 국면, 매출 낙폭 -37.6%)와 DT23(최대 낙폭 -45%, 진앙은 eSSD) 두 다운턴 구간과 QLC eSSD 연혁을 동일 시간축에 배치했습니다. 교훈 1, 수요 센싱: 수요 신호는 발주보다 약 2년 선행하여 고객의 규격·표준·소스 코드에 나타납니다. DT23 국면인 4Q22에 eSSD 매출이 27% 감소하는 동안 Meta·Google은 데이터 배치 표준을 비준하고 OCP 폼팩터를 표준화했으며 Solidigm은 61TB 제품을 예고했습니다. 총량 지표만 관측한 공급자는 다운턴을 보았고, 고객 규격을 관측한 공급자는 차기 요구사항을 보았습니다. 현재의 등가 신호는 KV 캐시 관리자 4종의 소스 코드에 데이터 배치·내구성 규격이 미정의 상태라는 사실이며, 규격 정의 주체가 선점 가능한 구간입니다. 교훈 2, 고객 협업: 요구사항 정의 과정에 참여한 공급자가 적중했습니다. Solidigm은 SK그룹 내 최대 낙폭 국면에서 61TB QLC를 삼성 대비 12개월 선행 출시해 2024년 흑자 전환했고, HBM은 NVIDIA와 규격을 공동 정의한 SK hynix가 주도권을 확보했습니다. 위키의 2023년 다운턴 복기 결론과 동일합니다. 다운턴 극복의 결정 변수는 포트폴리오 다변화(방어)가 아니라 고객 요구 적중(공격)이었습니다. 교훈 3, 의사결정 시점: 직전 다운턴의 의사결정이 다음 다운턴의 초기 조건을 결정합니다. DT19의 무감산 성공 경험이 DT23 국면 오판으로, DT19의 HBM 조직 축소가 DT23 회복기 주도권 상실로 이어졌습니다. 차기 전환점은 2027년 하반기 가격 정상화 국면이며, 비트 출하 10배 대비 매출이 정체할 경우 수익원은 고객 시스템 수준에서 보증한 TCO로 한정됩니다. 세 교훈이 이후 세 장의 전제입니다. 2장은 고객의 QLC 채택 동인, 3장은 디바이스에서 고객 시스템까지 3단계 역량, 4장은 FDE·전략적 협약과 이를 수행할 조직·인사·문화입니다.</a:t>
             </a:r>
           </a:p>
         </p:txBody>
@@ -575,7 +575,7 @@
           <a:lstStyle/>
           <a:p>
             <a:r>
-              <a:t>배경 한 장입니다. 질문은 하나, 고객은 왜 QLC를 원하는가입니다. 세 국면을 관통하는 답은 용량 계층의 TB당 TCO입니다. 원가($/TB)·전력(W/TB)·밀도(TB/U)를 한 지표로 묶은 것이고, 쉽게 말해 계산 옆에 둔 가장 싼 바이트입니다. 2022년 하이퍼스케일러는 데이터셋이 6배로 늘고 HDD가 TB당 대역폭을 잃자 플래시 용량 계층을 원했습니다(Meta: 10 MB/s/TB 대역, TLC 서버의 6배 바이트 밀도). 공급자가 판 것은 1U에 1PB, 5년 TCO -47%였습니다. 조건이 있었습니다. 읽기 중심 워크로드라서 0.3~0.6 DWPD로 충분했고, 쓰기가 NAND 전력의 대부분이라 읽기 중심 데이터를 QLC로 옮기면 전력도 줄었습니다. 그 해에 전문 벤더(Solidigm) 출범, E1.S/E1.L 폼팩터, Meta·Google의 배치 표준 비준(2022-12), 가격 급락이 갖춰졌고 물량은 AI 추론 서버의 전력 효율이 우선순위가 된 2024년에 터졌습니다(TrendForce 30EB, 4배). 현재 국면의 구매 기준은 TB당 와트와 공급 확보이고 245TB까지 용량 경쟁이 벌어졌지만, 여전히 읽기 중심 데이터가 QLC의 자리이고 쓰기 티어는 TLC입니다. 향후 국면에서 가장 빨리 크는 용량 수요는 KV cache입니다. 장문맥·에이전틱 추론의 KV 캐시가 HBM과 DRAM을 넘쳐 SSD로 내려오고, 프리필 재사용으로 GPU당 동시 사용자가 늘고 TTFT가 줄어듭니다(NVMe 오프로드로 H100 한 장이 동시 사용자 10배). 고객이 사는 것은 GPU당 컨텍스트 용량과 토큰당 비용이며, 여기서도 TB당 TCO가 가장 낮은 것은 QLC입니다. 그러나 캐시는 쓰기가 많아 오늘 이 티어는 TLC 1~3 DWPD가 서비스하고(2027년 75~100EB), CMX 타깃 드라이브도 전부 TLC입니다. 그래프: 비트는 10배, 가격 정상화 기준선에서 매출은 정체, 진한 파랑은 호스트 협력 배치가 성립할 때의 조건부 상방. 결론: 고객은 추론 캐시 티어에서도 QLC의 TB당 TCO를 원하고, 문은 내구성이며, 그 문은 디바이스만으로는 열리지 않습니다. 오른쪽 아래 인용은 송용호 AX/PI센터장의 말입니다. 부품이 어떻게 쓰일지는 시스템을 설계하는 사람 마음에 있다, 그걸 알았으면 HBM을 진작 준비했을 것이다. 고객이 왜 QLC를 원하는지 아는 것이 이 전략의 출발점인 이유입니다. 다음 장이 그 다음입니다. 모델 가정은 위키 qlc-ssd-market.md §4.3.</a:t>
+              <a:t>2장은 고객의 QLC 채택 동인입니다. 세 국면을 관통하는 구매 기준은 용량 계층의 TB당 TCO입니다. 원가($/TB)·전력(W/TB)·밀도(TB/U)를 통합한 지표이며, 계산 자원에 인접한 최저 비용 바이트로 요약할 수 있습니다. 초기 국면(2018~2023): 학습 데이터셋이 6배로 증가하고 HDD의 TB당 대역폭이 저하되자 하이퍼스케일러는 플래시 용량 계층을 요구했습니다(Meta: 10 MB/s/TB 대역, TLC 서버 대비 6배 바이트 밀도). 공급자의 제안 가치는 1U당 1PB, 5년 TCO -47%였습니다. 조건은 읽기 중심 워크로드로, 0.3~0.6 DWPD로 충족됐고 쓰기가 NAND 전력의 대부분을 차지하므로 읽기 데이터의 QLC 이전은 전력 효율도 개선했습니다. 같은 해 전문 벤더(Solidigm) 출범, E1.S/E1.L 폼팩터, Meta·Google의 데이터 배치 표준 비준(2022-12), 가격 하락이 동시에 성립했고, 비트 출하는 AI 추론 서버의 전력 효율이 우선순위가 된 2024년에 급증했습니다(TrendForce 30EB, 4배). 현재 국면(2024~2026): 구매 기준은 TB당 전력 효율과 공급 확보이며 245TB급까지 용량 경쟁이 진행됐으나, 읽기 중심 데이터가 QLC의 영역이고 쓰기 계층은 TLC가 담당합니다. 향후 국면(2027~2030): 최대 증가 수요는 KV 캐시입니다. 장문맥·에이전틱 추론의 KV 캐시가 HBM·DRAM 용량을 초과해 SSD로 오프로드되고, 프리필 재사용으로 GPU당 동시 사용자와 TTFT가 개선됩니다(NVMe 오프로드 시 H100 1기당 동시 사용자 10배 주장). 구매 기준은 GPU당 컨텍스트 용량과 토큰당 비용이며, 이 기준에서도 TB당 TCO가 최저인 미디어는 QLC입니다. 그러나 캐시는 쓰기 집약적이어서 현재 이 계층은 TLC 1~3 DWPD가 담당하고(2027년 75~100EB), CMX 대상 드라이브도 전량 TLC입니다. 그래프: 비트는 10배, 가격 정상화 기준선에서 매출은 정체, 진한 파랑은 호스트 협력 데이터 배치가 성립할 때의 조건부 상방입니다. 우측 하단 인용은 송용호 AX/PI센터장의 발언입니다. 부품이 어떻게 쓰일지는 시스템을 설계하는 사람 마음에 있다, 그걸 알았으면 HBM을 진작 준비했을 것이다. 고객의 채택 동인 파악이 본 전략의 출발점인 이유입니다. 결론: 고객은 추론 캐시 계층에서도 QLC의 TB당 TCO를 요구하며, 제약 조건은 내구성이고, 디바이스 단독으로는 해소되지 않습니다. 다음 장이 그 해소 경로입니다. 모델 가정은 위키 qlc-ssd-market.md §4.3.</a:t>
             </a:r>
           </a:p>
         </p:txBody>
@@ -3836,7 +3836,7 @@
                 <a:latin typeface="Arial"/>
                 <a:ea typeface="Arial"/>
               </a:rPr>
-              <a:t>QLC eSSD 전략 · 배경: 다운턴이 가르친 것</a:t>
+              <a:t>QLC eSSD 전략 · 배경: 다운턴 복기에서 도출한 교훈</a:t>
             </a:r>
           </a:p>
         </p:txBody>
@@ -3876,7 +3876,7 @@
                 <a:latin typeface="Arial"/>
                 <a:ea typeface="Arial"/>
               </a:rPr>
-              <a:t>다운턴 극복은 방어가 아니라 니즈 적중이었고, 적중은 고객 안에서 먼저 본 쪽이 했습니다</a:t>
+              <a:t>다운턴 극복의 결정 요인은 고객 요구 적중이었고, 요구는 고객 시스템 내부에서 먼저 관측됐습니다</a:t>
             </a:r>
           </a:p>
         </p:txBody>
@@ -3916,7 +3916,7 @@
                 <a:latin typeface="Arial"/>
                 <a:ea typeface="Arial"/>
               </a:rPr>
-              <a:t>두 다운턴과 QLC 연혁을 한 줄에 놓으면 세 교훈이 나오고, 그 교훈이 이 덱의 나머지 세 장입니다.</a:t>
+              <a:t>DT19·DT23 두 다운턴과 QLC eSSD 연혁을 동일 시간축에 배치해 도출한 세 교훈이 이후 세 장의 논리적 전제입니다.</a:t>
             </a:r>
           </a:p>
         </p:txBody>
@@ -4088,7 +4088,7 @@
                 <a:latin typeface="Arial"/>
                 <a:ea typeface="Arial"/>
               </a:rPr>
-              <a:t>DT19 재고 조정 · 낙폭 -37.6%</a:t>
+              <a:t>DT19 재고 조정 국면 · 매출 낙폭 -37.6%</a:t>
             </a:r>
           </a:p>
         </p:txBody>
@@ -4172,7 +4172,7 @@
                 <a:latin typeface="Arial"/>
                 <a:ea typeface="Arial"/>
               </a:rPr>
-              <a:t>DT23 사상 최심 · -45%, eSSD가 진앙</a:t>
+              <a:t>DT23 최대 낙폭 -45% · 진앙은 eSSD</a:t>
             </a:r>
           </a:p>
         </p:txBody>
@@ -4258,7 +4258,7 @@
                 <a:latin typeface="Arial"/>
                 <a:ea typeface="Arial"/>
               </a:rPr>
-              <a:t>다음 심판대(e) · 가격 정상화</a:t>
+              <a:t>차기 전환점(e) · 가격 정상화 국면</a:t>
             </a:r>
           </a:p>
         </p:txBody>
@@ -4706,7 +4706,7 @@
                 <a:latin typeface="Arial"/>
                 <a:ea typeface="Arial"/>
               </a:rPr>
-              <a:t>DT19 중 HBM 팀 축소</a:t>
+              <a:t>DT19 중 HBM 조직 축소</a:t>
             </a:r>
           </a:p>
         </p:txBody>
@@ -4874,7 +4874,7 @@
                 <a:latin typeface="Arial"/>
                 <a:ea typeface="Arial"/>
               </a:rPr>
-              <a:t>배치 표준 비준(Meta·Google)</a:t>
+              <a:t>데이터 배치 표준 비준</a:t>
             </a:r>
           </a:p>
           <a:p>
@@ -4891,7 +4891,7 @@
                 <a:latin typeface="Arial"/>
                 <a:ea typeface="Arial"/>
               </a:rPr>
-              <a:t>eSSD -27% 한복판</a:t>
+              <a:t>eSSD 매출 -27% 국면</a:t>
             </a:r>
           </a:p>
         </p:txBody>
@@ -5059,7 +5059,7 @@
                 <a:latin typeface="Arial"/>
                 <a:ea typeface="Arial"/>
               </a:rPr>
-              <a:t>Solidigm 61TB QLC</a:t>
+              <a:t>Solidigm 61.44TB QLC 출시</a:t>
             </a:r>
           </a:p>
           <a:p>
@@ -5076,7 +5076,7 @@
                 <a:latin typeface="Arial"/>
                 <a:ea typeface="Arial"/>
               </a:rPr>
-              <a:t>삼성보다 12개월 선행</a:t>
+              <a:t>삼성 대비 12개월 선행</a:t>
             </a:r>
           </a:p>
         </p:txBody>
@@ -5244,7 +5244,7 @@
                 <a:latin typeface="Arial"/>
                 <a:ea typeface="Arial"/>
               </a:rPr>
-              <a:t>QLC eSSD 30EB, 4배</a:t>
+              <a:t>QLC eSSD 비트 출하 30EB(4배)</a:t>
             </a:r>
           </a:p>
           <a:p>
@@ -5446,7 +5446,7 @@
                 <a:latin typeface="Arial"/>
                 <a:ea typeface="Arial"/>
               </a:rPr>
-              <a:t>배치 언급 0건</a:t>
+              <a:t>데이터 배치 규격 미정의</a:t>
             </a:r>
           </a:p>
         </p:txBody>
@@ -5614,7 +5614,7 @@
                 <a:latin typeface="Arial"/>
                 <a:ea typeface="Arial"/>
               </a:rPr>
-              <a:t>QLC 550EB, 비트 10배</a:t>
+              <a:t>QLC 비트 550EB(10배)</a:t>
             </a:r>
           </a:p>
           <a:p>
@@ -5631,7 +5631,7 @@
                 <a:latin typeface="Arial"/>
                 <a:ea typeface="Arial"/>
               </a:rPr>
-              <a:t>매출은 정체(e)</a:t>
+              <a:t>매출 정체(e)</a:t>
             </a:r>
           </a:p>
         </p:txBody>
@@ -5717,7 +5717,7 @@
                 <a:latin typeface="Arial"/>
                 <a:ea typeface="Arial"/>
               </a:rPr>
-              <a:t>초기 2018~2023 · 고객이 산 것 = TB당 TCO(원가·랙 밀도)</a:t>
+              <a:t>초기 2018~2023 · 구매 기준 = TB당 TCO(원가·랙 밀도)</a:t>
             </a:r>
           </a:p>
         </p:txBody>
@@ -5803,7 +5803,7 @@
                 <a:latin typeface="Arial"/>
                 <a:ea typeface="Arial"/>
               </a:rPr>
-              <a:t>현재 2024~2026 · TB당 TCO(전력·공급 확보)</a:t>
+              <a:t>현재 2024~2026 · TB당 TCO(전력 효율·공급 확보)</a:t>
             </a:r>
           </a:p>
         </p:txBody>
@@ -6017,7 +6017,7 @@
                 <a:latin typeface="Arial"/>
                 <a:ea typeface="Arial"/>
               </a:rPr>
-              <a:t>교훈 1 · 센싱</a:t>
+              <a:t>교훈 1 · 수요 센싱</a:t>
             </a:r>
           </a:p>
         </p:txBody>
@@ -6057,7 +6057,7 @@
                 <a:latin typeface="Arial"/>
                 <a:ea typeface="Arial"/>
               </a:rPr>
-              <a:t>수요는 주문서보다 2년 먼저 고객의 스펙·표준·코드에 나타난다</a:t>
+              <a:t>수요 신호는 발주보다 약 2년 선행하여 고객의 규격·표준·소스 코드에 나타난다</a:t>
             </a:r>
           </a:p>
         </p:txBody>
@@ -6107,7 +6107,7 @@
                 <a:latin typeface="Arial"/>
                 <a:ea typeface="Arial"/>
               </a:rPr>
-              <a:t>DT23 한복판, 4Q22 eSSD -27% 속에서 배치 표준 비준·OCP 폼팩터·61TB 예고. 물량은 2년 뒤 30EB</a:t>
+              <a:t>DT23 국면(4Q22 eSSD 매출 -27%)에서 데이터 배치 표준 비준·OCP 폼팩터 표준화·61TB 제품 예고가 선행. 비트 출하는 2년 후 30EB</a:t>
             </a:r>
           </a:p>
         </p:txBody>
@@ -6120,7 +6120,7 @@
         </p:nvSpPr>
         <p:spPr>
           <a:xfrm>
-            <a:off x="1069848" y="7040880"/>
+            <a:off x="1069848" y="7095744"/>
             <a:ext cx="4718304" cy="566928"/>
           </a:xfrm>
           <a:prstGeom prst="rect">
@@ -6147,7 +6147,7 @@
                 <a:latin typeface="Arial"/>
                 <a:ea typeface="Arial"/>
               </a:rPr>
-              <a:t>지금  </a:t>
+              <a:t>현재  </a:t>
             </a:r>
             <a:r>
               <a:rPr sz="1275" b="0">
@@ -6157,7 +6157,7 @@
                 <a:latin typeface="Arial"/>
                 <a:ea typeface="Arial"/>
               </a:rPr>
-              <a:t>KV 캐시 관리자 4종 코드에 배치·내구성 언급 0건. 요구가 아직 안 쓰였다 = 지금 들어가면 우리가 쓴다</a:t>
+              <a:t>KV 캐시 관리자 4종의 소스 코드에 데이터 배치·내구성 규격이 미정의. 규격 정의 주체가 선점 가능한 구간</a:t>
             </a:r>
           </a:p>
         </p:txBody>
@@ -6241,7 +6241,7 @@
                 <a:latin typeface="Arial"/>
                 <a:ea typeface="Arial"/>
               </a:rPr>
-              <a:t>→ 2장  고객은 왜 QLC를 원하는가</a:t>
+              <a:t>→ 2장  고객의 QLC 채택 동인</a:t>
             </a:r>
           </a:p>
         </p:txBody>
@@ -6409,7 +6409,7 @@
                 <a:latin typeface="Arial"/>
                 <a:ea typeface="Arial"/>
               </a:rPr>
-              <a:t>요구를 정의하는 자리에 있던 쪽이 적중했다</a:t>
+              <a:t>요구사항 정의 과정에 참여한 공급자가 적중했다</a:t>
             </a:r>
           </a:p>
         </p:txBody>
@@ -6459,7 +6459,7 @@
                 <a:latin typeface="Arial"/>
                 <a:ea typeface="Arial"/>
               </a:rPr>
-              <a:t>Solidigm은 최심 낙폭에서 61TB QLC를 12개월 먼저 내 흑자 전환. HBM은 NVIDIA와 공동 정의한 SK hynix가 가져갔다</a:t>
+              <a:t>Solidigm은 최대 낙폭 국면에서 61TB QLC를 12개월 선행 출시해 흑자 전환. HBM은 NVIDIA와 규격을 공동 정의한 SK hynix가 주도권 확보</a:t>
             </a:r>
           </a:p>
         </p:txBody>
@@ -6472,7 +6472,7 @@
         </p:nvSpPr>
         <p:spPr>
           <a:xfrm>
-            <a:off x="6784848" y="7040880"/>
+            <a:off x="6784848" y="7095744"/>
             <a:ext cx="4718304" cy="566928"/>
           </a:xfrm>
           <a:prstGeom prst="rect">
@@ -6499,7 +6499,7 @@
                 <a:latin typeface="Arial"/>
                 <a:ea typeface="Arial"/>
               </a:rPr>
-              <a:t>지금  </a:t>
+              <a:t>현재  </a:t>
             </a:r>
             <a:r>
               <a:rPr sz="1275" b="0">
@@ -6509,7 +6509,7 @@
                 <a:latin typeface="Arial"/>
                 <a:ea typeface="Arial"/>
               </a:rPr>
-              <a:t>캐시 티어의 내구성 요구는 고객 시스템(배치 표준·캐시 관리자 정책)에서 정의된다. 정의하는 자리에 들어가야 한다</a:t>
+              <a:t>추론 캐시 계층의 내구성 요구사항은 고객 시스템(데이터 배치 표준·캐시 관리자 정책)에서 정의된다. 정의 과정 참여가 전제 조건</a:t>
             </a:r>
           </a:p>
         </p:txBody>
@@ -6593,7 +6593,7 @@
                 <a:latin typeface="Arial"/>
                 <a:ea typeface="Arial"/>
               </a:rPr>
-              <a:t>→ 3장  디바이스에서 고객 시스템 안까지 세 단계</a:t>
+              <a:t>→ 3장  디바이스에서 고객 시스템까지 3단계 역량</a:t>
             </a:r>
           </a:p>
         </p:txBody>
@@ -6679,7 +6679,7 @@
                 <a:latin typeface="Arial"/>
                 <a:ea typeface="Arial"/>
               </a:rPr>
-              <a:t>교훈 3 · 타이밍</a:t>
+              <a:t>교훈 3 · 의사결정 시점</a:t>
             </a:r>
           </a:p>
         </p:txBody>
@@ -6719,7 +6719,7 @@
                 <a:latin typeface="Arial"/>
                 <a:ea typeface="Arial"/>
               </a:rPr>
-              <a:t>한 다운턴의 결정이 다음 다운턴의 출발 조건이 된다</a:t>
+              <a:t>직전 다운턴의 의사결정이 다음 다운턴의 초기 조건을 결정한다</a:t>
             </a:r>
           </a:p>
         </p:txBody>
@@ -6769,7 +6769,7 @@
                 <a:latin typeface="Arial"/>
                 <a:ea typeface="Arial"/>
               </a:rPr>
-              <a:t>DT19 무감산 성공 → DT23 오판. DT19 HBM 팀 축소 → DT23 회복기 주도권 상실</a:t>
+              <a:t>DT19 무감산 성공 경험 → DT23 국면 오판. DT19 HBM 조직 축소 → DT23 회복기 주도권 상실</a:t>
             </a:r>
           </a:p>
         </p:txBody>
@@ -6782,7 +6782,7 @@
         </p:nvSpPr>
         <p:spPr>
           <a:xfrm>
-            <a:off x="12499848" y="7040880"/>
+            <a:off x="12499848" y="7095744"/>
             <a:ext cx="4718304" cy="566928"/>
           </a:xfrm>
           <a:prstGeom prst="rect">
@@ -6809,7 +6809,7 @@
                 <a:latin typeface="Arial"/>
                 <a:ea typeface="Arial"/>
               </a:rPr>
-              <a:t>지금  </a:t>
+              <a:t>현재  </a:t>
             </a:r>
             <a:r>
               <a:rPr sz="1275" b="0">
@@ -6819,7 +6819,7 @@
                 <a:latin typeface="Arial"/>
                 <a:ea typeface="Arial"/>
               </a:rPr>
-              <a:t>다음 심판대는 2027년 하반기 가격 정상화. 비트 10배에 매출이 정체하면 남는 이익은 고객 시스템 안의 TCO 보증뿐</a:t>
+              <a:t>차기 전환점은 2027년 하반기 가격 정상화 국면. 비트 10배 대비 매출 정체 시 수익원은 고객 시스템 수준 TCO 보증으로 한정</a:t>
             </a:r>
           </a:p>
         </p:txBody>
@@ -6903,7 +6903,7 @@
                 <a:latin typeface="Arial"/>
                 <a:ea typeface="Arial"/>
               </a:rPr>
-              <a:t>→ 4장  FDE·전략적 협약, 그리고 사람과 문화</a:t>
+              <a:t>→ 4장  FDE·전략적 협약과 조직·인사·문화</a:t>
             </a:r>
           </a:p>
         </p:txBody>
@@ -7027,7 +7027,7 @@
                 <a:latin typeface="Arial"/>
                 <a:ea typeface="Arial"/>
               </a:rPr>
-              <a:t>요구는 다운턴 한복판에서 정의됐고, 정의하는 자리에 있던 쪽이 이겼습니다. 다음 요구는 지금 고객 코드에 쓰이고 있습니다</a:t>
+              <a:t>요구사항은 다운턴 국면에서 정의되었고, 정의에 참여한 공급자가 선점했습니다. 차기 요구사항은 지금 고객 코드에서 정의되고 있습니다</a:t>
             </a:r>
           </a:p>
         </p:txBody>
@@ -7245,7 +7245,7 @@
                 <a:latin typeface="Arial"/>
                 <a:ea typeface="Arial"/>
               </a:rPr>
-              <a:t>QLC eSSD 전략 · 배경: 고객은 왜 QLC를 원하는가</a:t>
+              <a:t>QLC eSSD 전략 · 배경: 고객의 QLC 채택 동인</a:t>
             </a:r>
           </a:p>
         </p:txBody>
@@ -7285,7 +7285,7 @@
                 <a:latin typeface="Arial"/>
                 <a:ea typeface="Arial"/>
               </a:rPr>
-              <a:t>고객이 사는 것은 용량 계층의 TB당 TCO이고, 그 계층이 추론 캐시 티어로 옮겨갑니다</a:t>
+              <a:t>고객의 구매 기준은 용량 계층의 TB당 TCO이며, 해당 계층은 추론 캐시 계층으로 이동합니다</a:t>
             </a:r>
           </a:p>
         </p:txBody>
@@ -7325,7 +7325,7 @@
                 <a:latin typeface="Arial"/>
                 <a:ea typeface="Arial"/>
               </a:rPr>
-              <a:t>세 국면 모두 기준은 TB당 TCO(원가·전력·밀도)였습니다. 다음 자리는 쓰기가 많은 KV 캐시라 내구성이 문입니다.</a:t>
+              <a:t>세 국면의 구매 기준은 일관되게 TB당 TCO(원가·전력·밀도)였고, 차기 KV 캐시 계층은 쓰기 집약적이라 내구성이 제약 조건입니다.</a:t>
             </a:r>
           </a:p>
         </p:txBody>
@@ -7495,7 +7495,7 @@
                 <a:latin typeface="Arial"/>
                 <a:ea typeface="Arial"/>
               </a:rPr>
-              <a:t>고객이 산 것</a:t>
+              <a:t>구매 기준</a:t>
             </a:r>
           </a:p>
         </p:txBody>
@@ -7575,7 +7575,7 @@
                 <a:latin typeface="Arial"/>
                 <a:ea typeface="Arial"/>
               </a:rPr>
-              <a:t>왜  </a:t>
+              <a:t>동인  </a:t>
             </a:r>
             <a:r>
               <a:rPr sz="1425" b="0">
@@ -7585,7 +7585,7 @@
                 <a:latin typeface="Arial"/>
                 <a:ea typeface="Arial"/>
               </a:rPr>
-              <a:t>데이터 6배 · 1U에 1PB, TCO -47%</a:t>
+              <a:t>학습 데이터셋 6배 · 1U당 1PB, 5년 TCO -47%</a:t>
             </a:r>
           </a:p>
         </p:txBody>
@@ -7635,7 +7635,7 @@
                 <a:latin typeface="Arial"/>
                 <a:ea typeface="Arial"/>
               </a:rPr>
-              <a:t>읽기 중심이라 0.3~0.6 DWPD로 충분</a:t>
+              <a:t>읽기 중심 워크로드, 0.3~0.6 DWPD로 충족</a:t>
             </a:r>
           </a:p>
         </p:txBody>
@@ -7685,7 +7685,7 @@
                 <a:latin typeface="Arial"/>
                 <a:ea typeface="Arial"/>
               </a:rPr>
-              <a:t>61TB 1년 후발</a:t>
+              <a:t>61TB 12개월 후발</a:t>
             </a:r>
           </a:p>
         </p:txBody>
@@ -7855,7 +7855,7 @@
                 <a:latin typeface="Arial"/>
                 <a:ea typeface="Arial"/>
               </a:rPr>
-              <a:t>고객이 산 것</a:t>
+              <a:t>구매 기준</a:t>
             </a:r>
           </a:p>
         </p:txBody>
@@ -7935,7 +7935,7 @@
                 <a:latin typeface="Arial"/>
                 <a:ea typeface="Arial"/>
               </a:rPr>
-              <a:t>왜  </a:t>
+              <a:t>동인  </a:t>
             </a:r>
             <a:r>
               <a:rPr sz="1425" b="0">
@@ -7945,7 +7945,7 @@
                 <a:latin typeface="Arial"/>
                 <a:ea typeface="Arial"/>
               </a:rPr>
-              <a:t>추론 서버의 전력·공간 병목 → 245TB</a:t>
+              <a:t>추론 서버의 전력·공간 제약 → 245TB급</a:t>
             </a:r>
           </a:p>
         </p:txBody>
@@ -7995,7 +7995,7 @@
                 <a:latin typeface="Arial"/>
                 <a:ea typeface="Arial"/>
               </a:rPr>
-              <a:t>여전히 읽기 중심, 쓰기 티어는 TLC</a:t>
+              <a:t>읽기 중심 유지, 쓰기 계층은 TLC</a:t>
             </a:r>
           </a:p>
         </p:txBody>
@@ -8045,7 +8045,7 @@
                 <a:latin typeface="Arial"/>
                 <a:ea typeface="Arial"/>
               </a:rPr>
-              <a:t>물량 1위(35.1%), 용량 후발</a:t>
+              <a:t>매출 1위(35.1%), 용량 후발</a:t>
             </a:r>
           </a:p>
         </p:txBody>
@@ -8257,7 +8257,7 @@
                 <a:latin typeface="Arial"/>
                 <a:ea typeface="Arial"/>
               </a:rPr>
-              <a:t>고객이 산 것</a:t>
+              <a:t>구매 기준</a:t>
             </a:r>
           </a:p>
         </p:txBody>
@@ -8337,7 +8337,7 @@
                 <a:latin typeface="Arial"/>
                 <a:ea typeface="Arial"/>
               </a:rPr>
-              <a:t>왜  </a:t>
+              <a:t>동인  </a:t>
             </a:r>
             <a:r>
               <a:rPr sz="1425" b="0">
@@ -8347,7 +8347,7 @@
                 <a:latin typeface="Arial"/>
                 <a:ea typeface="Arial"/>
               </a:rPr>
-              <a:t>KV 캐시가 HBM을 넘침 · GPU당 사용자 10배</a:t>
+              <a:t>KV 캐시 SSD 오프로드 · GPU당 동시 사용자 10배</a:t>
             </a:r>
           </a:p>
         </p:txBody>
@@ -8397,7 +8397,7 @@
                 <a:latin typeface="Arial"/>
                 <a:ea typeface="Arial"/>
               </a:rPr>
-              <a:t>쓰기 많은 캐시 → 오늘은 TLC 1~3 DWPD</a:t>
+              <a:t>쓰기 집약 캐시 → 현재 TLC 1~3 DWPD</a:t>
             </a:r>
           </a:p>
         </p:txBody>
@@ -8447,7 +8447,7 @@
                 <a:latin typeface="Arial"/>
                 <a:ea typeface="Arial"/>
               </a:rPr>
-              <a:t>디바이스 확보, 시스템 연결 공백</a:t>
+              <a:t>디바이스 확보, 시스템 SW 연계 공백</a:t>
             </a:r>
           </a:p>
         </p:txBody>
@@ -8557,7 +8557,7 @@
                 <a:latin typeface="Arial"/>
                 <a:ea typeface="Arial"/>
               </a:rPr>
-              <a:t>그래프가 말하는 것</a:t>
+              <a:t>모델의 핵심 수치</a:t>
             </a:r>
           </a:p>
         </p:txBody>
@@ -8637,7 +8637,7 @@
                 <a:latin typeface="Arial"/>
                 <a:ea typeface="Arial"/>
               </a:rPr>
-              <a:t>QLC 비트, 2025년 → 2030년</a:t>
+              <a:t>QLC 비트 출하, 2025년 → 2030년</a:t>
             </a:r>
           </a:p>
         </p:txBody>
@@ -8797,7 +8797,7 @@
                 <a:latin typeface="Arial"/>
                 <a:ea typeface="Arial"/>
               </a:rPr>
-              <a:t>2030년 추론 캐시 티어 수요(전 미디어)</a:t>
+              <a:t>2030년 추론 캐시 계층 수요(전 미디어)</a:t>
             </a:r>
           </a:p>
         </p:txBody>
@@ -9059,14 +9059,14 @@
               </a:lnSpc>
             </a:pPr>
             <a:r>
-              <a:rPr sz="2000" b="1">
+              <a:rPr sz="1900" b="1">
                 <a:solidFill>
                   <a:srgbClr val="FFFFFF"/>
                 </a:solidFill>
                 <a:latin typeface="Arial"/>
                 <a:ea typeface="Arial"/>
               </a:rPr>
-              <a:t>고객은 추론 캐시 티어에서도 QLC의 TB당 TCO를 원합니다. 문은 내구성이고, 디바이스만으로는 못 엽니다</a:t>
+              <a:t>고객은 추론 캐시 계층에서도 QLC의 TB당 TCO를 요구합니다. 제약 조건은 내구성이며, 디바이스 단독으로는 해소되지 않습니다</a:t>
             </a:r>
           </a:p>
         </p:txBody>

--- a/outputs/presentation/qlc-ssd-strategy.pptx
+++ b/outputs/presentation/qlc-ssd-strategy.pptx
@@ -6030,8 +6030,8 @@
         </p:nvSpPr>
         <p:spPr>
           <a:xfrm>
-            <a:off x="1069848" y="5614416"/>
-            <a:ext cx="4718304" cy="713232"/>
+            <a:off x="1069848" y="5596128"/>
+            <a:ext cx="4718304" cy="585216"/>
           </a:xfrm>
           <a:prstGeom prst="rect">
             <a:avLst/>
@@ -6057,7 +6057,7 @@
                 <a:latin typeface="Arial"/>
                 <a:ea typeface="Arial"/>
               </a:rPr>
-              <a:t>수요 신호는 발주보다 약 2년 선행하여 고객의 규격·표준·소스 코드에 나타난다</a:t>
+              <a:t>수요 신호는 발주보다 약 2년 선행해 고객 규격·코드에 나타난다</a:t>
             </a:r>
           </a:p>
         </p:txBody>
@@ -6070,8 +6070,8 @@
         </p:nvSpPr>
         <p:spPr>
           <a:xfrm>
-            <a:off x="1069848" y="6400800"/>
-            <a:ext cx="4718304" cy="566928"/>
+            <a:off x="1069848" y="6483096"/>
+            <a:ext cx="1143000" cy="237744"/>
           </a:xfrm>
           <a:prstGeom prst="rect">
             <a:avLst/>
@@ -6079,35 +6079,25 @@
           <a:noFill/>
         </p:spPr>
         <p:txBody>
-          <a:bodyPr wrap="square" anchor="t" lIns="0" rIns="0" tIns="0" bIns="0">
+          <a:bodyPr wrap="square" anchor="ctr" lIns="0" rIns="0" tIns="0" bIns="0">
             <a:spAutoFit/>
           </a:bodyPr>
           <a:lstStyle/>
           <a:p>
             <a:pPr algn="l">
               <a:lnSpc>
-                <a:spcPct val="106000"/>
-              </a:lnSpc>
-            </a:pPr>
-            <a:r>
-              <a:rPr sz="1275" b="1">
+                <a:spcPct val="112000"/>
+              </a:lnSpc>
+            </a:pPr>
+            <a:r>
+              <a:rPr sz="1125" b="1">
                 <a:solidFill>
                   <a:srgbClr val="1A1A1A"/>
                 </a:solidFill>
                 <a:latin typeface="Arial"/>
                 <a:ea typeface="Arial"/>
               </a:rPr>
-              <a:t>역사  </a:t>
-            </a:r>
-            <a:r>
-              <a:rPr sz="1275" b="0">
-                <a:solidFill>
-                  <a:srgbClr val="555555"/>
-                </a:solidFill>
-                <a:latin typeface="Arial"/>
-                <a:ea typeface="Arial"/>
-              </a:rPr>
-              <a:t>DT23 국면(4Q22 eSSD 매출 -27%)에서 데이터 배치 표준 비준·OCP 폼팩터 표준화·61TB 제품 예고가 선행. 비트 출하는 2년 후 30EB</a:t>
+              <a:t>고객 규격 · 코드</a:t>
             </a:r>
           </a:p>
         </p:txBody>
@@ -6120,8 +6110,8 @@
         </p:nvSpPr>
         <p:spPr>
           <a:xfrm>
-            <a:off x="1069848" y="7095744"/>
-            <a:ext cx="4718304" cy="566928"/>
+            <a:off x="1069848" y="7159752"/>
+            <a:ext cx="1143000" cy="237744"/>
           </a:xfrm>
           <a:prstGeom prst="rect">
             <a:avLst/>
@@ -6129,35 +6119,25 @@
           <a:noFill/>
         </p:spPr>
         <p:txBody>
-          <a:bodyPr wrap="square" anchor="t" lIns="0" rIns="0" tIns="0" bIns="0">
+          <a:bodyPr wrap="square" anchor="ctr" lIns="0" rIns="0" tIns="0" bIns="0">
             <a:spAutoFit/>
           </a:bodyPr>
           <a:lstStyle/>
           <a:p>
             <a:pPr algn="l">
               <a:lnSpc>
-                <a:spcPct val="106000"/>
-              </a:lnSpc>
-            </a:pPr>
-            <a:r>
-              <a:rPr sz="1275" b="1">
+                <a:spcPct val="112000"/>
+              </a:lnSpc>
+            </a:pPr>
+            <a:r>
+              <a:rPr sz="1125" b="1">
                 <a:solidFill>
                   <a:srgbClr val="1A1A1A"/>
                 </a:solidFill>
                 <a:latin typeface="Arial"/>
                 <a:ea typeface="Arial"/>
               </a:rPr>
-              <a:t>현재  </a:t>
-            </a:r>
-            <a:r>
-              <a:rPr sz="1275" b="0">
-                <a:solidFill>
-                  <a:srgbClr val="555555"/>
-                </a:solidFill>
-                <a:latin typeface="Arial"/>
-                <a:ea typeface="Arial"/>
-              </a:rPr>
-              <a:t>KV 캐시 관리자 4종의 소스 코드에 데이터 배치·내구성 규격이 미정의. 규격 정의 주체가 선점 가능한 구간</a:t>
+              <a:t>발주 · 비트 출하</a:t>
             </a:r>
           </a:p>
         </p:txBody>
@@ -6170,8 +6150,8 @@
         </p:nvSpPr>
         <p:spPr>
           <a:xfrm>
-            <a:off x="1069848" y="7717536"/>
-            <a:ext cx="4718304" cy="10972"/>
+            <a:off x="2258568" y="6601968"/>
+            <a:ext cx="3529584" cy="13716"/>
           </a:xfrm>
           <a:prstGeom prst="rect">
             <a:avLst/>
@@ -6208,14 +6188,190 @@
       </p:sp>
       <p:sp>
         <p:nvSpPr>
-          <p:cNvPr id="59" name="TextBox 58"/>
+          <p:cNvPr id="59" name="Rectangle 58"/>
+          <p:cNvSpPr/>
+          <p:nvPr/>
+        </p:nvSpPr>
+        <p:spPr>
+          <a:xfrm>
+            <a:off x="2258568" y="7278624"/>
+            <a:ext cx="3529584" cy="13716"/>
+          </a:xfrm>
+          <a:prstGeom prst="rect">
+            <a:avLst/>
+          </a:prstGeom>
+          <a:solidFill>
+            <a:srgbClr val="D9D9D9"/>
+          </a:solidFill>
+          <a:ln>
+            <a:noFill/>
+          </a:ln>
+          <a:effectLst/>
+        </p:spPr>
+        <p:style>
+          <a:lnRef idx="1">
+            <a:schemeClr val="accent1"/>
+          </a:lnRef>
+          <a:fillRef idx="3">
+            <a:schemeClr val="accent1"/>
+          </a:fillRef>
+          <a:effectRef idx="2">
+            <a:schemeClr val="accent1"/>
+          </a:effectRef>
+          <a:fontRef idx="minor">
+            <a:schemeClr val="lt1"/>
+          </a:fontRef>
+        </p:style>
+        <p:txBody>
+          <a:bodyPr rtlCol="0" anchor="ctr"/>
+          <a:lstStyle/>
+          <a:p>
+            <a:pPr algn="ctr"/>
+          </a:p>
+        </p:txBody>
+      </p:sp>
+      <p:sp>
+        <p:nvSpPr>
+          <p:cNvPr id="60" name="Rectangle 59"/>
+          <p:cNvSpPr/>
+          <p:nvPr/>
+        </p:nvSpPr>
+        <p:spPr>
+          <a:xfrm>
+            <a:off x="2923702" y="6601968"/>
+            <a:ext cx="10972" cy="237743"/>
+          </a:xfrm>
+          <a:prstGeom prst="rect">
+            <a:avLst/>
+          </a:prstGeom>
+          <a:solidFill>
+            <a:srgbClr val="AAB8E8"/>
+          </a:solidFill>
+          <a:ln>
+            <a:noFill/>
+          </a:ln>
+          <a:effectLst/>
+        </p:spPr>
+        <p:style>
+          <a:lnRef idx="1">
+            <a:schemeClr val="accent1"/>
+          </a:lnRef>
+          <a:fillRef idx="3">
+            <a:schemeClr val="accent1"/>
+          </a:fillRef>
+          <a:effectRef idx="2">
+            <a:schemeClr val="accent1"/>
+          </a:effectRef>
+          <a:fontRef idx="minor">
+            <a:schemeClr val="lt1"/>
+          </a:fontRef>
+        </p:style>
+        <p:txBody>
+          <a:bodyPr rtlCol="0" anchor="ctr"/>
+          <a:lstStyle/>
+          <a:p>
+            <a:pPr algn="ctr"/>
+          </a:p>
+        </p:txBody>
+      </p:sp>
+      <p:sp>
+        <p:nvSpPr>
+          <p:cNvPr id="61" name="Rectangle 60"/>
+          <p:cNvSpPr/>
+          <p:nvPr/>
+        </p:nvSpPr>
+        <p:spPr>
+          <a:xfrm>
+            <a:off x="4017873" y="7040880"/>
+            <a:ext cx="10972" cy="237743"/>
+          </a:xfrm>
+          <a:prstGeom prst="rect">
+            <a:avLst/>
+          </a:prstGeom>
+          <a:solidFill>
+            <a:srgbClr val="AAB8E8"/>
+          </a:solidFill>
+          <a:ln>
+            <a:noFill/>
+          </a:ln>
+          <a:effectLst/>
+        </p:spPr>
+        <p:style>
+          <a:lnRef idx="1">
+            <a:schemeClr val="accent1"/>
+          </a:lnRef>
+          <a:fillRef idx="3">
+            <a:schemeClr val="accent1"/>
+          </a:fillRef>
+          <a:effectRef idx="2">
+            <a:schemeClr val="accent1"/>
+          </a:effectRef>
+          <a:fontRef idx="minor">
+            <a:schemeClr val="lt1"/>
+          </a:fontRef>
+        </p:style>
+        <p:txBody>
+          <a:bodyPr rtlCol="0" anchor="ctr"/>
+          <a:lstStyle/>
+          <a:p>
+            <a:pPr algn="ctr"/>
+          </a:p>
+        </p:txBody>
+      </p:sp>
+      <p:sp>
+        <p:nvSpPr>
+          <p:cNvPr id="62" name="Right Arrow 61"/>
+          <p:cNvSpPr/>
+          <p:nvPr/>
+        </p:nvSpPr>
+        <p:spPr>
+          <a:xfrm>
+            <a:off x="2929188" y="6839712"/>
+            <a:ext cx="1094171" cy="201168"/>
+          </a:xfrm>
+          <a:prstGeom prst="rightArrow">
+            <a:avLst/>
+          </a:prstGeom>
+          <a:solidFill>
+            <a:srgbClr val="AAB8E8"/>
+          </a:solidFill>
+          <a:ln>
+            <a:noFill/>
+          </a:ln>
+          <a:effectLst/>
+        </p:spPr>
+        <p:style>
+          <a:lnRef idx="1">
+            <a:schemeClr val="accent1"/>
+          </a:lnRef>
+          <a:fillRef idx="3">
+            <a:schemeClr val="accent1"/>
+          </a:fillRef>
+          <a:effectRef idx="2">
+            <a:schemeClr val="accent1"/>
+          </a:effectRef>
+          <a:fontRef idx="minor">
+            <a:schemeClr val="lt1"/>
+          </a:fontRef>
+        </p:style>
+        <p:txBody>
+          <a:bodyPr rtlCol="0" anchor="ctr"/>
+          <a:lstStyle/>
+          <a:p>
+            <a:pPr algn="ctr"/>
+          </a:p>
+        </p:txBody>
+      </p:sp>
+      <p:sp>
+        <p:nvSpPr>
+          <p:cNvPr id="63" name="TextBox 62"/>
           <p:cNvSpPr txBox="1"/>
           <p:nvPr/>
         </p:nvSpPr>
         <p:spPr>
           <a:xfrm>
-            <a:off x="1069848" y="7790688"/>
-            <a:ext cx="4718304" cy="274320"/>
+            <a:off x="2929188" y="6839712"/>
+            <a:ext cx="1002731" cy="201168"/>
           </a:xfrm>
           <a:prstGeom prst="rect">
             <a:avLst/>
@@ -6228,12 +6384,367 @@
           </a:bodyPr>
           <a:lstStyle/>
           <a:p>
+            <a:pPr algn="ctr">
+              <a:lnSpc>
+                <a:spcPct val="112000"/>
+              </a:lnSpc>
+            </a:pPr>
+            <a:r>
+              <a:rPr sz="1050" b="1">
+                <a:solidFill>
+                  <a:srgbClr val="1A1A1A"/>
+                </a:solidFill>
+                <a:latin typeface="Arial"/>
+                <a:ea typeface="Arial"/>
+              </a:rPr>
+              <a:t>≈ 2년 선행</a:t>
+            </a:r>
+          </a:p>
+        </p:txBody>
+      </p:sp>
+      <p:sp>
+        <p:nvSpPr>
+          <p:cNvPr id="64" name="Oval 63"/>
+          <p:cNvSpPr/>
+          <p:nvPr/>
+        </p:nvSpPr>
+        <p:spPr>
+          <a:xfrm>
+            <a:off x="2846892" y="6519672"/>
+            <a:ext cx="164592" cy="164592"/>
+          </a:xfrm>
+          <a:prstGeom prst="ellipse">
+            <a:avLst/>
+          </a:prstGeom>
+          <a:solidFill>
+            <a:srgbClr val="1428A0"/>
+          </a:solidFill>
+          <a:ln>
+            <a:noFill/>
+          </a:ln>
+          <a:effectLst/>
+        </p:spPr>
+        <p:style>
+          <a:lnRef idx="1">
+            <a:schemeClr val="accent1"/>
+          </a:lnRef>
+          <a:fillRef idx="3">
+            <a:schemeClr val="accent1"/>
+          </a:fillRef>
+          <a:effectRef idx="2">
+            <a:schemeClr val="accent1"/>
+          </a:effectRef>
+          <a:fontRef idx="minor">
+            <a:schemeClr val="lt1"/>
+          </a:fontRef>
+        </p:style>
+        <p:txBody>
+          <a:bodyPr rtlCol="0" anchor="ctr"/>
+          <a:lstStyle/>
+          <a:p>
+            <a:pPr algn="ctr"/>
+          </a:p>
+        </p:txBody>
+      </p:sp>
+      <p:sp>
+        <p:nvSpPr>
+          <p:cNvPr id="65" name="TextBox 64"/>
+          <p:cNvSpPr txBox="1"/>
+          <p:nvPr/>
+        </p:nvSpPr>
+        <p:spPr>
+          <a:xfrm>
+            <a:off x="2654868" y="6236208"/>
+            <a:ext cx="2194560" cy="237744"/>
+          </a:xfrm>
+          <a:prstGeom prst="rect">
+            <a:avLst/>
+          </a:prstGeom>
+          <a:noFill/>
+        </p:spPr>
+        <p:txBody>
+          <a:bodyPr wrap="square" anchor="t" lIns="0" rIns="0" tIns="0" bIns="0">
+            <a:spAutoFit/>
+          </a:bodyPr>
+          <a:lstStyle/>
+          <a:p>
             <a:pPr algn="l">
               <a:lnSpc>
                 <a:spcPct val="112000"/>
               </a:lnSpc>
             </a:pPr>
             <a:r>
+              <a:rPr sz="1050" b="0">
+                <a:solidFill>
+                  <a:srgbClr val="555555"/>
+                </a:solidFill>
+                <a:latin typeface="Arial"/>
+                <a:ea typeface="Arial"/>
+              </a:rPr>
+              <a:t>2022-12 배치 표준 비준</a:t>
+            </a:r>
+          </a:p>
+        </p:txBody>
+      </p:sp>
+      <p:sp>
+        <p:nvSpPr>
+          <p:cNvPr id="66" name="Oval 65"/>
+          <p:cNvSpPr/>
+          <p:nvPr/>
+        </p:nvSpPr>
+        <p:spPr>
+          <a:xfrm>
+            <a:off x="3941064" y="7196328"/>
+            <a:ext cx="164592" cy="164592"/>
+          </a:xfrm>
+          <a:prstGeom prst="ellipse">
+            <a:avLst/>
+          </a:prstGeom>
+          <a:solidFill>
+            <a:srgbClr val="1428A0"/>
+          </a:solidFill>
+          <a:ln>
+            <a:noFill/>
+          </a:ln>
+          <a:effectLst/>
+        </p:spPr>
+        <p:style>
+          <a:lnRef idx="1">
+            <a:schemeClr val="accent1"/>
+          </a:lnRef>
+          <a:fillRef idx="3">
+            <a:schemeClr val="accent1"/>
+          </a:fillRef>
+          <a:effectRef idx="2">
+            <a:schemeClr val="accent1"/>
+          </a:effectRef>
+          <a:fontRef idx="minor">
+            <a:schemeClr val="lt1"/>
+          </a:fontRef>
+        </p:style>
+        <p:txBody>
+          <a:bodyPr rtlCol="0" anchor="ctr"/>
+          <a:lstStyle/>
+          <a:p>
+            <a:pPr algn="ctr"/>
+          </a:p>
+        </p:txBody>
+      </p:sp>
+      <p:sp>
+        <p:nvSpPr>
+          <p:cNvPr id="67" name="TextBox 66"/>
+          <p:cNvSpPr txBox="1"/>
+          <p:nvPr/>
+        </p:nvSpPr>
+        <p:spPr>
+          <a:xfrm>
+            <a:off x="3749040" y="7370064"/>
+            <a:ext cx="2011680" cy="237744"/>
+          </a:xfrm>
+          <a:prstGeom prst="rect">
+            <a:avLst/>
+          </a:prstGeom>
+          <a:noFill/>
+        </p:spPr>
+        <p:txBody>
+          <a:bodyPr wrap="square" anchor="t" lIns="0" rIns="0" tIns="0" bIns="0">
+            <a:spAutoFit/>
+          </a:bodyPr>
+          <a:lstStyle/>
+          <a:p>
+            <a:pPr algn="l">
+              <a:lnSpc>
+                <a:spcPct val="112000"/>
+              </a:lnSpc>
+            </a:pPr>
+            <a:r>
+              <a:rPr sz="1050" b="0">
+                <a:solidFill>
+                  <a:srgbClr val="555555"/>
+                </a:solidFill>
+                <a:latin typeface="Arial"/>
+                <a:ea typeface="Arial"/>
+              </a:rPr>
+              <a:t>2024 QLC eSSD 비트 출하 30EB</a:t>
+            </a:r>
+          </a:p>
+        </p:txBody>
+      </p:sp>
+      <p:sp>
+        <p:nvSpPr>
+          <p:cNvPr id="68" name="Oval 67"/>
+          <p:cNvSpPr/>
+          <p:nvPr/>
+        </p:nvSpPr>
+        <p:spPr>
+          <a:xfrm>
+            <a:off x="5423489" y="6519672"/>
+            <a:ext cx="164592" cy="164592"/>
+          </a:xfrm>
+          <a:prstGeom prst="ellipse">
+            <a:avLst/>
+          </a:prstGeom>
+          <a:solidFill>
+            <a:srgbClr val="FFFFFF"/>
+          </a:solidFill>
+          <a:ln w="19050">
+            <a:solidFill>
+              <a:srgbClr val="1428A0"/>
+            </a:solidFill>
+          </a:ln>
+          <a:effectLst/>
+        </p:spPr>
+        <p:style>
+          <a:lnRef idx="1">
+            <a:schemeClr val="accent1"/>
+          </a:lnRef>
+          <a:fillRef idx="3">
+            <a:schemeClr val="accent1"/>
+          </a:fillRef>
+          <a:effectRef idx="2">
+            <a:schemeClr val="accent1"/>
+          </a:effectRef>
+          <a:fontRef idx="minor">
+            <a:schemeClr val="lt1"/>
+          </a:fontRef>
+        </p:style>
+        <p:txBody>
+          <a:bodyPr rtlCol="0" anchor="ctr"/>
+          <a:lstStyle/>
+          <a:p>
+            <a:pPr algn="ctr"/>
+          </a:p>
+        </p:txBody>
+      </p:sp>
+      <p:sp>
+        <p:nvSpPr>
+          <p:cNvPr id="69" name="TextBox 68"/>
+          <p:cNvSpPr txBox="1"/>
+          <p:nvPr/>
+        </p:nvSpPr>
+        <p:spPr>
+          <a:xfrm>
+            <a:off x="3768425" y="6711696"/>
+            <a:ext cx="1965960" cy="365760"/>
+          </a:xfrm>
+          <a:prstGeom prst="rect">
+            <a:avLst/>
+          </a:prstGeom>
+          <a:noFill/>
+        </p:spPr>
+        <p:txBody>
+          <a:bodyPr wrap="square" anchor="t" lIns="0" rIns="0" tIns="0" bIns="0">
+            <a:spAutoFit/>
+          </a:bodyPr>
+          <a:lstStyle/>
+          <a:p>
+            <a:pPr algn="r">
+              <a:lnSpc>
+                <a:spcPct val="100000"/>
+              </a:lnSpc>
+            </a:pPr>
+            <a:r>
+              <a:rPr sz="1050" b="1">
+                <a:solidFill>
+                  <a:srgbClr val="1428A0"/>
+                </a:solidFill>
+                <a:latin typeface="Arial"/>
+                <a:ea typeface="Arial"/>
+              </a:rPr>
+              <a:t>2026 캐시 관리자 코드</a:t>
+            </a:r>
+          </a:p>
+          <a:p>
+            <a:pPr algn="r">
+              <a:lnSpc>
+                <a:spcPct val="100000"/>
+              </a:lnSpc>
+            </a:pPr>
+            <a:r>
+              <a:rPr sz="1050" b="1">
+                <a:solidFill>
+                  <a:srgbClr val="1428A0"/>
+                </a:solidFill>
+                <a:latin typeface="Arial"/>
+                <a:ea typeface="Arial"/>
+              </a:rPr>
+              <a:t>규격 미정의 = 선점 구간</a:t>
+            </a:r>
+          </a:p>
+        </p:txBody>
+      </p:sp>
+      <p:sp>
+        <p:nvSpPr>
+          <p:cNvPr id="70" name="Rectangle 69"/>
+          <p:cNvSpPr/>
+          <p:nvPr/>
+        </p:nvSpPr>
+        <p:spPr>
+          <a:xfrm>
+            <a:off x="1069848" y="7717536"/>
+            <a:ext cx="4718304" cy="10972"/>
+          </a:xfrm>
+          <a:prstGeom prst="rect">
+            <a:avLst/>
+          </a:prstGeom>
+          <a:solidFill>
+            <a:srgbClr val="D9D9D9"/>
+          </a:solidFill>
+          <a:ln>
+            <a:noFill/>
+          </a:ln>
+          <a:effectLst/>
+        </p:spPr>
+        <p:style>
+          <a:lnRef idx="1">
+            <a:schemeClr val="accent1"/>
+          </a:lnRef>
+          <a:fillRef idx="3">
+            <a:schemeClr val="accent1"/>
+          </a:fillRef>
+          <a:effectRef idx="2">
+            <a:schemeClr val="accent1"/>
+          </a:effectRef>
+          <a:fontRef idx="minor">
+            <a:schemeClr val="lt1"/>
+          </a:fontRef>
+        </p:style>
+        <p:txBody>
+          <a:bodyPr rtlCol="0" anchor="ctr"/>
+          <a:lstStyle/>
+          <a:p>
+            <a:pPr algn="ctr"/>
+          </a:p>
+        </p:txBody>
+      </p:sp>
+      <p:sp>
+        <p:nvSpPr>
+          <p:cNvPr id="71" name="TextBox 70"/>
+          <p:cNvSpPr txBox="1"/>
+          <p:nvPr/>
+        </p:nvSpPr>
+        <p:spPr>
+          <a:xfrm>
+            <a:off x="1069848" y="7790688"/>
+            <a:ext cx="4718304" cy="274320"/>
+          </a:xfrm>
+          <a:prstGeom prst="rect">
+            <a:avLst/>
+          </a:prstGeom>
+          <a:noFill/>
+        </p:spPr>
+        <p:txBody>
+          <a:bodyPr wrap="square" anchor="ctr" lIns="0" rIns="0" tIns="0" bIns="0">
+            <a:spAutoFit/>
+          </a:bodyPr>
+          <a:lstStyle/>
+          <a:p>
+            <a:pPr algn="l">
+              <a:lnSpc>
+                <a:spcPct val="112000"/>
+              </a:lnSpc>
+            </a:pPr>
+            <a:r>
               <a:rPr sz="1275" b="1">
                 <a:solidFill>
                   <a:srgbClr val="1428A0"/>
@@ -6248,7 +6759,7 @@
       </p:sp>
       <p:sp>
         <p:nvSpPr>
-          <p:cNvPr id="60" name="Rectangle 59"/>
+          <p:cNvPr id="72" name="Rectangle 71"/>
           <p:cNvSpPr/>
           <p:nvPr/>
         </p:nvSpPr>
@@ -6292,7 +6803,7 @@
       </p:sp>
       <p:sp>
         <p:nvSpPr>
-          <p:cNvPr id="61" name="Rectangle 60"/>
+          <p:cNvPr id="73" name="Rectangle 72"/>
           <p:cNvSpPr/>
           <p:nvPr/>
         </p:nvSpPr>
@@ -6336,7 +6847,7 @@
       </p:sp>
       <p:sp>
         <p:nvSpPr>
-          <p:cNvPr id="62" name="TextBox 61"/>
+          <p:cNvPr id="74" name="TextBox 73"/>
           <p:cNvSpPr txBox="1"/>
           <p:nvPr/>
         </p:nvSpPr>
@@ -6376,14 +6887,14 @@
       </p:sp>
       <p:sp>
         <p:nvSpPr>
-          <p:cNvPr id="63" name="TextBox 62"/>
+          <p:cNvPr id="75" name="TextBox 74"/>
           <p:cNvSpPr txBox="1"/>
           <p:nvPr/>
         </p:nvSpPr>
         <p:spPr>
           <a:xfrm>
-            <a:off x="6784848" y="5614416"/>
-            <a:ext cx="4718304" cy="713232"/>
+            <a:off x="6784848" y="5596128"/>
+            <a:ext cx="4718304" cy="585216"/>
           </a:xfrm>
           <a:prstGeom prst="rect">
             <a:avLst/>
@@ -6409,21 +6920,21 @@
                 <a:latin typeface="Arial"/>
                 <a:ea typeface="Arial"/>
               </a:rPr>
-              <a:t>요구사항 정의 과정에 참여한 공급자가 적중했다</a:t>
-            </a:r>
-          </a:p>
-        </p:txBody>
-      </p:sp>
-      <p:sp>
-        <p:nvSpPr>
-          <p:cNvPr id="64" name="TextBox 63"/>
+              <a:t>규격 정의에 참여한 공급자가 적중했다</a:t>
+            </a:r>
+          </a:p>
+        </p:txBody>
+      </p:sp>
+      <p:sp>
+        <p:nvSpPr>
+          <p:cNvPr id="76" name="TextBox 75"/>
           <p:cNvSpPr txBox="1"/>
           <p:nvPr/>
         </p:nvSpPr>
         <p:spPr>
           <a:xfrm>
-            <a:off x="6784848" y="6400800"/>
-            <a:ext cx="4718304" cy="566928"/>
+            <a:off x="6784848" y="6236208"/>
+            <a:ext cx="4718304" cy="201168"/>
           </a:xfrm>
           <a:prstGeom prst="rect">
             <a:avLst/>
@@ -6438,42 +6949,32 @@
           <a:p>
             <a:pPr algn="l">
               <a:lnSpc>
-                <a:spcPct val="106000"/>
-              </a:lnSpc>
-            </a:pPr>
-            <a:r>
-              <a:rPr sz="1275" b="1">
-                <a:solidFill>
-                  <a:srgbClr val="1A1A1A"/>
-                </a:solidFill>
-                <a:latin typeface="Arial"/>
-                <a:ea typeface="Arial"/>
-              </a:rPr>
-              <a:t>역사  </a:t>
-            </a:r>
-            <a:r>
-              <a:rPr sz="1275" b="0">
-                <a:solidFill>
-                  <a:srgbClr val="555555"/>
-                </a:solidFill>
-                <a:latin typeface="Arial"/>
-                <a:ea typeface="Arial"/>
-              </a:rPr>
-              <a:t>Solidigm은 최대 낙폭 국면에서 61TB QLC를 12개월 선행 출시해 흑자 전환. HBM은 NVIDIA와 규격을 공동 정의한 SK hynix가 주도권 확보</a:t>
-            </a:r>
-          </a:p>
-        </p:txBody>
-      </p:sp>
-      <p:sp>
-        <p:nvSpPr>
-          <p:cNvPr id="65" name="TextBox 64"/>
+                <a:spcPct val="112000"/>
+              </a:lnSpc>
+            </a:pPr>
+            <a:r>
+              <a:rPr sz="1050" b="0">
+                <a:solidFill>
+                  <a:srgbClr val="8A8A8A"/>
+                </a:solidFill>
+                <a:latin typeface="Arial"/>
+                <a:ea typeface="Arial"/>
+              </a:rPr>
+              <a:t>61TB QLC 출시 · OCP 2022-10 예고 기준</a:t>
+            </a:r>
+          </a:p>
+        </p:txBody>
+      </p:sp>
+      <p:sp>
+        <p:nvSpPr>
+          <p:cNvPr id="77" name="TextBox 76"/>
           <p:cNvSpPr txBox="1"/>
           <p:nvPr/>
         </p:nvSpPr>
         <p:spPr>
           <a:xfrm>
-            <a:off x="6784848" y="7095744"/>
-            <a:ext cx="4718304" cy="566928"/>
+            <a:off x="6784848" y="6455664"/>
+            <a:ext cx="822959" cy="219456"/>
           </a:xfrm>
           <a:prstGeom prst="rect">
             <a:avLst/>
@@ -6481,55 +6982,45 @@
           <a:noFill/>
         </p:spPr>
         <p:txBody>
-          <a:bodyPr wrap="square" anchor="t" lIns="0" rIns="0" tIns="0" bIns="0">
+          <a:bodyPr wrap="square" anchor="ctr" lIns="0" rIns="0" tIns="0" bIns="0">
             <a:spAutoFit/>
           </a:bodyPr>
           <a:lstStyle/>
           <a:p>
             <a:pPr algn="l">
               <a:lnSpc>
-                <a:spcPct val="106000"/>
-              </a:lnSpc>
-            </a:pPr>
-            <a:r>
-              <a:rPr sz="1275" b="1">
+                <a:spcPct val="112000"/>
+              </a:lnSpc>
+            </a:pPr>
+            <a:r>
+              <a:rPr sz="1125" b="1">
                 <a:solidFill>
                   <a:srgbClr val="1A1A1A"/>
                 </a:solidFill>
                 <a:latin typeface="Arial"/>
                 <a:ea typeface="Arial"/>
               </a:rPr>
-              <a:t>현재  </a:t>
-            </a:r>
-            <a:r>
-              <a:rPr sz="1275" b="0">
-                <a:solidFill>
-                  <a:srgbClr val="555555"/>
-                </a:solidFill>
-                <a:latin typeface="Arial"/>
-                <a:ea typeface="Arial"/>
-              </a:rPr>
-              <a:t>추론 캐시 계층의 내구성 요구사항은 고객 시스템(데이터 배치 표준·캐시 관리자 정책)에서 정의된다. 정의 과정 참여가 전제 조건</a:t>
-            </a:r>
-          </a:p>
-        </p:txBody>
-      </p:sp>
-      <p:sp>
-        <p:nvSpPr>
-          <p:cNvPr id="66" name="Rectangle 65"/>
+              <a:t>Solidigm</a:t>
+            </a:r>
+          </a:p>
+        </p:txBody>
+      </p:sp>
+      <p:sp>
+        <p:nvSpPr>
+          <p:cNvPr id="78" name="Rectangle 77"/>
           <p:cNvSpPr/>
           <p:nvPr/>
         </p:nvSpPr>
         <p:spPr>
           <a:xfrm>
-            <a:off x="6784848" y="7717536"/>
-            <a:ext cx="4718304" cy="10972"/>
+            <a:off x="7653528" y="6455664"/>
+            <a:ext cx="1649838" cy="219456"/>
           </a:xfrm>
           <a:prstGeom prst="rect">
             <a:avLst/>
           </a:prstGeom>
           <a:solidFill>
-            <a:srgbClr val="D9D9D9"/>
+            <a:srgbClr val="1428A0"/>
           </a:solidFill>
           <a:ln>
             <a:noFill/>
@@ -6560,14 +7051,14 @@
       </p:sp>
       <p:sp>
         <p:nvSpPr>
-          <p:cNvPr id="67" name="TextBox 66"/>
+          <p:cNvPr id="79" name="TextBox 78"/>
           <p:cNvSpPr txBox="1"/>
           <p:nvPr/>
         </p:nvSpPr>
         <p:spPr>
           <a:xfrm>
-            <a:off x="6784848" y="7790688"/>
-            <a:ext cx="4718304" cy="274320"/>
+            <a:off x="9376518" y="6455664"/>
+            <a:ext cx="2126633" cy="219456"/>
           </a:xfrm>
           <a:prstGeom prst="rect">
             <a:avLst/>
@@ -6586,28 +7077,68 @@
               </a:lnSpc>
             </a:pPr>
             <a:r>
-              <a:rPr sz="1275" b="1">
+              <a:rPr sz="1050" b="1">
                 <a:solidFill>
                   <a:srgbClr val="1428A0"/>
                 </a:solidFill>
                 <a:latin typeface="Arial"/>
                 <a:ea typeface="Arial"/>
               </a:rPr>
-              <a:t>→ 3장  디바이스에서 고객 시스템까지 3단계 역량</a:t>
-            </a:r>
-          </a:p>
-        </p:txBody>
-      </p:sp>
-      <p:sp>
-        <p:nvSpPr>
-          <p:cNvPr id="68" name="Rectangle 67"/>
+              <a:t>2023-07 · 규격 정의 참여</a:t>
+            </a:r>
+          </a:p>
+        </p:txBody>
+      </p:sp>
+      <p:sp>
+        <p:nvSpPr>
+          <p:cNvPr id="80" name="TextBox 79"/>
+          <p:cNvSpPr txBox="1"/>
+          <p:nvPr/>
+        </p:nvSpPr>
+        <p:spPr>
+          <a:xfrm>
+            <a:off x="6784848" y="6729984"/>
+            <a:ext cx="822959" cy="219456"/>
+          </a:xfrm>
+          <a:prstGeom prst="rect">
+            <a:avLst/>
+          </a:prstGeom>
+          <a:noFill/>
+        </p:spPr>
+        <p:txBody>
+          <a:bodyPr wrap="square" anchor="ctr" lIns="0" rIns="0" tIns="0" bIns="0">
+            <a:spAutoFit/>
+          </a:bodyPr>
+          <a:lstStyle/>
+          <a:p>
+            <a:pPr algn="l">
+              <a:lnSpc>
+                <a:spcPct val="112000"/>
+              </a:lnSpc>
+            </a:pPr>
+            <a:r>
+              <a:rPr sz="1125" b="1">
+                <a:solidFill>
+                  <a:srgbClr val="1A1A1A"/>
+                </a:solidFill>
+                <a:latin typeface="Arial"/>
+                <a:ea typeface="Arial"/>
+              </a:rPr>
+              <a:t>삼성</a:t>
+            </a:r>
+          </a:p>
+        </p:txBody>
+      </p:sp>
+      <p:sp>
+        <p:nvSpPr>
+          <p:cNvPr id="81" name="Rectangle 80"/>
           <p:cNvSpPr/>
           <p:nvPr/>
         </p:nvSpPr>
         <p:spPr>
           <a:xfrm>
-            <a:off x="12152376" y="5102352"/>
-            <a:ext cx="5413248" cy="3072384"/>
+            <a:off x="7653528" y="6729984"/>
+            <a:ext cx="3849624" cy="219456"/>
           </a:xfrm>
           <a:prstGeom prst="rect">
             <a:avLst/>
@@ -6646,14 +7177,14 @@
       </p:sp>
       <p:sp>
         <p:nvSpPr>
-          <p:cNvPr id="69" name="TextBox 68"/>
+          <p:cNvPr id="82" name="TextBox 81"/>
           <p:cNvSpPr txBox="1"/>
           <p:nvPr/>
         </p:nvSpPr>
         <p:spPr>
           <a:xfrm>
-            <a:off x="12499848" y="5285232"/>
-            <a:ext cx="4718304" cy="274320"/>
+            <a:off x="7726680" y="6729984"/>
+            <a:ext cx="3703320" cy="219456"/>
           </a:xfrm>
           <a:prstGeom prst="rect">
             <a:avLst/>
@@ -6661,178 +7192,38 @@
           <a:noFill/>
         </p:spPr>
         <p:txBody>
-          <a:bodyPr wrap="square" anchor="t" lIns="0" rIns="0" tIns="0" bIns="0">
+          <a:bodyPr wrap="square" anchor="ctr" lIns="0" rIns="0" tIns="0" bIns="0">
             <a:spAutoFit/>
           </a:bodyPr>
           <a:lstStyle/>
           <a:p>
-            <a:pPr algn="l">
+            <a:pPr algn="r">
               <a:lnSpc>
                 <a:spcPct val="112000"/>
               </a:lnSpc>
             </a:pPr>
             <a:r>
-              <a:rPr sz="1725" b="1">
-                <a:solidFill>
-                  <a:srgbClr val="1428A0"/>
-                </a:solidFill>
-                <a:latin typeface="Arial"/>
-                <a:ea typeface="Arial"/>
-              </a:rPr>
-              <a:t>교훈 3 · 의사결정 시점</a:t>
-            </a:r>
-          </a:p>
-        </p:txBody>
-      </p:sp>
-      <p:sp>
-        <p:nvSpPr>
-          <p:cNvPr id="70" name="TextBox 69"/>
-          <p:cNvSpPr txBox="1"/>
-          <p:nvPr/>
-        </p:nvSpPr>
-        <p:spPr>
-          <a:xfrm>
-            <a:off x="12499848" y="5614416"/>
-            <a:ext cx="4718304" cy="713232"/>
-          </a:xfrm>
-          <a:prstGeom prst="rect">
-            <a:avLst/>
-          </a:prstGeom>
-          <a:noFill/>
-        </p:spPr>
-        <p:txBody>
-          <a:bodyPr wrap="square" anchor="t" lIns="0" rIns="0" tIns="0" bIns="0">
-            <a:spAutoFit/>
-          </a:bodyPr>
-          <a:lstStyle/>
-          <a:p>
-            <a:pPr algn="l">
-              <a:lnSpc>
-                <a:spcPct val="106000"/>
-              </a:lnSpc>
-            </a:pPr>
-            <a:r>
-              <a:rPr sz="1575" b="1">
-                <a:solidFill>
-                  <a:srgbClr val="1A1A1A"/>
-                </a:solidFill>
-                <a:latin typeface="Arial"/>
-                <a:ea typeface="Arial"/>
-              </a:rPr>
-              <a:t>직전 다운턴의 의사결정이 다음 다운턴의 초기 조건을 결정한다</a:t>
-            </a:r>
-          </a:p>
-        </p:txBody>
-      </p:sp>
-      <p:sp>
-        <p:nvSpPr>
-          <p:cNvPr id="71" name="TextBox 70"/>
-          <p:cNvSpPr txBox="1"/>
-          <p:nvPr/>
-        </p:nvSpPr>
-        <p:spPr>
-          <a:xfrm>
-            <a:off x="12499848" y="6400800"/>
-            <a:ext cx="4718304" cy="566928"/>
-          </a:xfrm>
-          <a:prstGeom prst="rect">
-            <a:avLst/>
-          </a:prstGeom>
-          <a:noFill/>
-        </p:spPr>
-        <p:txBody>
-          <a:bodyPr wrap="square" anchor="t" lIns="0" rIns="0" tIns="0" bIns="0">
-            <a:spAutoFit/>
-          </a:bodyPr>
-          <a:lstStyle/>
-          <a:p>
-            <a:pPr algn="l">
-              <a:lnSpc>
-                <a:spcPct val="106000"/>
-              </a:lnSpc>
-            </a:pPr>
-            <a:r>
-              <a:rPr sz="1275" b="1">
-                <a:solidFill>
-                  <a:srgbClr val="1A1A1A"/>
-                </a:solidFill>
-                <a:latin typeface="Arial"/>
-                <a:ea typeface="Arial"/>
-              </a:rPr>
-              <a:t>역사  </a:t>
-            </a:r>
-            <a:r>
-              <a:rPr sz="1275" b="0">
+              <a:rPr sz="1050" b="1">
                 <a:solidFill>
                   <a:srgbClr val="555555"/>
                 </a:solidFill>
                 <a:latin typeface="Arial"/>
                 <a:ea typeface="Arial"/>
               </a:rPr>
-              <a:t>DT19 무감산 성공 경험 → DT23 국면 오판. DT19 HBM 조직 축소 → DT23 회복기 주도권 상실</a:t>
-            </a:r>
-          </a:p>
-        </p:txBody>
-      </p:sp>
-      <p:sp>
-        <p:nvSpPr>
-          <p:cNvPr id="72" name="TextBox 71"/>
-          <p:cNvSpPr txBox="1"/>
-          <p:nvPr/>
-        </p:nvSpPr>
-        <p:spPr>
-          <a:xfrm>
-            <a:off x="12499848" y="7095744"/>
-            <a:ext cx="4718304" cy="566928"/>
-          </a:xfrm>
-          <a:prstGeom prst="rect">
-            <a:avLst/>
-          </a:prstGeom>
-          <a:noFill/>
-        </p:spPr>
-        <p:txBody>
-          <a:bodyPr wrap="square" anchor="t" lIns="0" rIns="0" tIns="0" bIns="0">
-            <a:spAutoFit/>
-          </a:bodyPr>
-          <a:lstStyle/>
-          <a:p>
-            <a:pPr algn="l">
-              <a:lnSpc>
-                <a:spcPct val="106000"/>
-              </a:lnSpc>
-            </a:pPr>
-            <a:r>
-              <a:rPr sz="1275" b="1">
-                <a:solidFill>
-                  <a:srgbClr val="1A1A1A"/>
-                </a:solidFill>
-                <a:latin typeface="Arial"/>
-                <a:ea typeface="Arial"/>
-              </a:rPr>
-              <a:t>현재  </a:t>
-            </a:r>
-            <a:r>
-              <a:rPr sz="1275" b="0">
-                <a:solidFill>
-                  <a:srgbClr val="555555"/>
-                </a:solidFill>
-                <a:latin typeface="Arial"/>
-                <a:ea typeface="Arial"/>
-              </a:rPr>
-              <a:t>차기 전환점은 2027년 하반기 가격 정상화 국면. 비트 10배 대비 매출 정체 시 수익원은 고객 시스템 수준 TCO 보증으로 한정</a:t>
-            </a:r>
-          </a:p>
-        </p:txBody>
-      </p:sp>
-      <p:sp>
-        <p:nvSpPr>
-          <p:cNvPr id="73" name="Rectangle 72"/>
+              <a:t>2024-07 · 12개월 후발</a:t>
+            </a:r>
+          </a:p>
+        </p:txBody>
+      </p:sp>
+      <p:sp>
+        <p:nvSpPr>
+          <p:cNvPr id="83" name="Rectangle 82"/>
           <p:cNvSpPr/>
           <p:nvPr/>
         </p:nvSpPr>
         <p:spPr>
           <a:xfrm>
-            <a:off x="12499848" y="7717536"/>
+            <a:off x="6784848" y="7022592"/>
             <a:ext cx="4718304" cy="10972"/>
           </a:xfrm>
           <a:prstGeom prst="rect">
@@ -6870,14 +7261,14 @@
       </p:sp>
       <p:sp>
         <p:nvSpPr>
-          <p:cNvPr id="74" name="TextBox 73"/>
+          <p:cNvPr id="84" name="TextBox 83"/>
           <p:cNvSpPr txBox="1"/>
           <p:nvPr/>
         </p:nvSpPr>
         <p:spPr>
           <a:xfrm>
-            <a:off x="12499848" y="7790688"/>
-            <a:ext cx="4718304" cy="274320"/>
+            <a:off x="6784848" y="7077456"/>
+            <a:ext cx="4718304" cy="182880"/>
           </a:xfrm>
           <a:prstGeom prst="rect">
             <a:avLst/>
@@ -6885,7 +7276,7 @@
           <a:noFill/>
         </p:spPr>
         <p:txBody>
-          <a:bodyPr wrap="square" anchor="ctr" lIns="0" rIns="0" tIns="0" bIns="0">
+          <a:bodyPr wrap="square" anchor="t" lIns="0" rIns="0" tIns="0" bIns="0">
             <a:spAutoFit/>
           </a:bodyPr>
           <a:lstStyle/>
@@ -6896,30 +7287,30 @@
               </a:lnSpc>
             </a:pPr>
             <a:r>
-              <a:rPr sz="1275" b="1">
-                <a:solidFill>
-                  <a:srgbClr val="1428A0"/>
-                </a:solidFill>
-                <a:latin typeface="Arial"/>
-                <a:ea typeface="Arial"/>
-              </a:rPr>
-              <a:t>→ 4장  FDE·전략적 협약과 조직·인사·문화</a:t>
-            </a:r>
-          </a:p>
-        </p:txBody>
-      </p:sp>
-      <p:sp>
-        <p:nvSpPr>
-          <p:cNvPr id="75" name="Rectangle 74"/>
+              <a:rPr sz="1050" b="0">
+                <a:solidFill>
+                  <a:srgbClr val="8A8A8A"/>
+                </a:solidFill>
+                <a:latin typeface="Arial"/>
+                <a:ea typeface="Arial"/>
+              </a:rPr>
+              <a:t>HBM4 규격 정의</a:t>
+            </a:r>
+          </a:p>
+        </p:txBody>
+      </p:sp>
+      <p:sp>
+        <p:nvSpPr>
+          <p:cNvPr id="85" name="Oval 84"/>
           <p:cNvSpPr/>
           <p:nvPr/>
         </p:nvSpPr>
         <p:spPr>
           <a:xfrm>
-            <a:off x="722376" y="8613648"/>
-            <a:ext cx="16843248" cy="731520"/>
-          </a:xfrm>
-          <a:prstGeom prst="rect">
+            <a:off x="7706197" y="7296912"/>
+            <a:ext cx="125089" cy="125089"/>
+          </a:xfrm>
+          <a:prstGeom prst="ellipse">
             <a:avLst/>
           </a:prstGeom>
           <a:solidFill>
@@ -6954,14 +7345,196 @@
       </p:sp>
       <p:sp>
         <p:nvSpPr>
-          <p:cNvPr id="76" name="TextBox 75"/>
+          <p:cNvPr id="86" name="Round Same Side Corner Rectangle 85"/>
+          <p:cNvSpPr/>
+          <p:nvPr/>
+        </p:nvSpPr>
+        <p:spPr>
+          <a:xfrm>
+            <a:off x="7653528" y="7441752"/>
+            <a:ext cx="230428" cy="184343"/>
+          </a:xfrm>
+          <a:prstGeom prst="round2SameRect">
+            <a:avLst>
+              <a:gd name="adj1" fmla="val 50000"/>
+              <a:gd name="adj2" fmla="val 0"/>
+            </a:avLst>
+          </a:prstGeom>
+          <a:solidFill>
+            <a:srgbClr val="1428A0"/>
+          </a:solidFill>
+          <a:ln>
+            <a:noFill/>
+          </a:ln>
+          <a:effectLst/>
+        </p:spPr>
+        <p:style>
+          <a:lnRef idx="1">
+            <a:schemeClr val="accent1"/>
+          </a:lnRef>
+          <a:fillRef idx="3">
+            <a:schemeClr val="accent1"/>
+          </a:fillRef>
+          <a:effectRef idx="2">
+            <a:schemeClr val="accent1"/>
+          </a:effectRef>
+          <a:fontRef idx="minor">
+            <a:schemeClr val="lt1"/>
+          </a:fontRef>
+        </p:style>
+        <p:txBody>
+          <a:bodyPr rtlCol="0" anchor="ctr"/>
+          <a:lstStyle/>
+          <a:p>
+            <a:pPr algn="ctr"/>
+          </a:p>
+        </p:txBody>
+      </p:sp>
+      <p:sp>
+        <p:nvSpPr>
+          <p:cNvPr id="87" name="Rectangle 86"/>
+          <p:cNvSpPr/>
+          <p:nvPr/>
+        </p:nvSpPr>
+        <p:spPr>
+          <a:xfrm>
+            <a:off x="7920532" y="7443216"/>
+            <a:ext cx="237744" cy="45720"/>
+          </a:xfrm>
+          <a:prstGeom prst="rect">
+            <a:avLst/>
+          </a:prstGeom>
+          <a:solidFill>
+            <a:srgbClr val="1428A0"/>
+          </a:solidFill>
+          <a:ln>
+            <a:noFill/>
+          </a:ln>
+          <a:effectLst/>
+        </p:spPr>
+        <p:style>
+          <a:lnRef idx="1">
+            <a:schemeClr val="accent1"/>
+          </a:lnRef>
+          <a:fillRef idx="3">
+            <a:schemeClr val="accent1"/>
+          </a:fillRef>
+          <a:effectRef idx="2">
+            <a:schemeClr val="accent1"/>
+          </a:effectRef>
+          <a:fontRef idx="minor">
+            <a:schemeClr val="lt1"/>
+          </a:fontRef>
+        </p:style>
+        <p:txBody>
+          <a:bodyPr rtlCol="0" anchor="ctr"/>
+          <a:lstStyle/>
+          <a:p>
+            <a:pPr algn="ctr"/>
+          </a:p>
+        </p:txBody>
+      </p:sp>
+      <p:sp>
+        <p:nvSpPr>
+          <p:cNvPr id="88" name="Oval 87"/>
+          <p:cNvSpPr/>
+          <p:nvPr/>
+        </p:nvSpPr>
+        <p:spPr>
+          <a:xfrm>
+            <a:off x="8247522" y="7296912"/>
+            <a:ext cx="125089" cy="125089"/>
+          </a:xfrm>
+          <a:prstGeom prst="ellipse">
+            <a:avLst/>
+          </a:prstGeom>
+          <a:solidFill>
+            <a:srgbClr val="1428A0"/>
+          </a:solidFill>
+          <a:ln>
+            <a:noFill/>
+          </a:ln>
+          <a:effectLst/>
+        </p:spPr>
+        <p:style>
+          <a:lnRef idx="1">
+            <a:schemeClr val="accent1"/>
+          </a:lnRef>
+          <a:fillRef idx="3">
+            <a:schemeClr val="accent1"/>
+          </a:fillRef>
+          <a:effectRef idx="2">
+            <a:schemeClr val="accent1"/>
+          </a:effectRef>
+          <a:fontRef idx="minor">
+            <a:schemeClr val="lt1"/>
+          </a:fontRef>
+        </p:style>
+        <p:txBody>
+          <a:bodyPr rtlCol="0" anchor="ctr"/>
+          <a:lstStyle/>
+          <a:p>
+            <a:pPr algn="ctr"/>
+          </a:p>
+        </p:txBody>
+      </p:sp>
+      <p:sp>
+        <p:nvSpPr>
+          <p:cNvPr id="89" name="Round Same Side Corner Rectangle 88"/>
+          <p:cNvSpPr/>
+          <p:nvPr/>
+        </p:nvSpPr>
+        <p:spPr>
+          <a:xfrm>
+            <a:off x="8194852" y="7441752"/>
+            <a:ext cx="230428" cy="184343"/>
+          </a:xfrm>
+          <a:prstGeom prst="round2SameRect">
+            <a:avLst>
+              <a:gd name="adj1" fmla="val 50000"/>
+              <a:gd name="adj2" fmla="val 0"/>
+            </a:avLst>
+          </a:prstGeom>
+          <a:solidFill>
+            <a:srgbClr val="1428A0"/>
+          </a:solidFill>
+          <a:ln>
+            <a:noFill/>
+          </a:ln>
+          <a:effectLst/>
+        </p:spPr>
+        <p:style>
+          <a:lnRef idx="1">
+            <a:schemeClr val="accent1"/>
+          </a:lnRef>
+          <a:fillRef idx="3">
+            <a:schemeClr val="accent1"/>
+          </a:fillRef>
+          <a:effectRef idx="2">
+            <a:schemeClr val="accent1"/>
+          </a:effectRef>
+          <a:fontRef idx="minor">
+            <a:schemeClr val="lt1"/>
+          </a:fontRef>
+        </p:style>
+        <p:txBody>
+          <a:bodyPr rtlCol="0" anchor="ctr"/>
+          <a:lstStyle/>
+          <a:p>
+            <a:pPr algn="ctr"/>
+          </a:p>
+        </p:txBody>
+      </p:sp>
+      <p:sp>
+        <p:nvSpPr>
+          <p:cNvPr id="90" name="TextBox 89"/>
           <p:cNvSpPr txBox="1"/>
           <p:nvPr/>
         </p:nvSpPr>
         <p:spPr>
           <a:xfrm>
-            <a:off x="1133856" y="8613648"/>
-            <a:ext cx="1463040" cy="731520"/>
+            <a:off x="8516721" y="7278624"/>
+            <a:ext cx="1828800" cy="365760"/>
           </a:xfrm>
           <a:prstGeom prst="rect">
             <a:avLst/>
@@ -6976,32 +7549,140 @@
           <a:p>
             <a:pPr algn="l">
               <a:lnSpc>
-                <a:spcPct val="112000"/>
-              </a:lnSpc>
-            </a:pPr>
-            <a:r>
-              <a:rPr sz="1800" b="0">
-                <a:solidFill>
-                  <a:srgbClr val="FFFFFF"/>
-                </a:solidFill>
-                <a:latin typeface="Arial"/>
-                <a:ea typeface="Arial"/>
-              </a:rPr>
-              <a:t>결론</a:t>
-            </a:r>
-          </a:p>
-        </p:txBody>
-      </p:sp>
-      <p:sp>
-        <p:nvSpPr>
-          <p:cNvPr id="77" name="TextBox 76"/>
+                <a:spcPct val="100000"/>
+              </a:lnSpc>
+            </a:pPr>
+            <a:r>
+              <a:rPr sz="1050" b="1">
+                <a:solidFill>
+                  <a:srgbClr val="1428A0"/>
+                </a:solidFill>
+                <a:latin typeface="Arial"/>
+                <a:ea typeface="Arial"/>
+              </a:rPr>
+              <a:t>SK hynix ↔ NVIDIA</a:t>
+            </a:r>
+          </a:p>
+          <a:p>
+            <a:pPr algn="l">
+              <a:lnSpc>
+                <a:spcPct val="100000"/>
+              </a:lnSpc>
+            </a:pPr>
+            <a:r>
+              <a:rPr sz="1050" b="0">
+                <a:solidFill>
+                  <a:srgbClr val="555555"/>
+                </a:solidFill>
+                <a:latin typeface="Arial"/>
+                <a:ea typeface="Arial"/>
+              </a:rPr>
+              <a:t>공동 정의 → 주도권</a:t>
+            </a:r>
+          </a:p>
+        </p:txBody>
+      </p:sp>
+      <p:sp>
+        <p:nvSpPr>
+          <p:cNvPr id="91" name="Oval 90"/>
+          <p:cNvSpPr/>
+          <p:nvPr/>
+        </p:nvSpPr>
+        <p:spPr>
+          <a:xfrm>
+            <a:off x="10453055" y="7296912"/>
+            <a:ext cx="125089" cy="125089"/>
+          </a:xfrm>
+          <a:prstGeom prst="ellipse">
+            <a:avLst/>
+          </a:prstGeom>
+          <a:solidFill>
+            <a:srgbClr val="8A8A8A"/>
+          </a:solidFill>
+          <a:ln>
+            <a:noFill/>
+          </a:ln>
+          <a:effectLst/>
+        </p:spPr>
+        <p:style>
+          <a:lnRef idx="1">
+            <a:schemeClr val="accent1"/>
+          </a:lnRef>
+          <a:fillRef idx="3">
+            <a:schemeClr val="accent1"/>
+          </a:fillRef>
+          <a:effectRef idx="2">
+            <a:schemeClr val="accent1"/>
+          </a:effectRef>
+          <a:fontRef idx="minor">
+            <a:schemeClr val="lt1"/>
+          </a:fontRef>
+        </p:style>
+        <p:txBody>
+          <a:bodyPr rtlCol="0" anchor="ctr"/>
+          <a:lstStyle/>
+          <a:p>
+            <a:pPr algn="ctr"/>
+          </a:p>
+        </p:txBody>
+      </p:sp>
+      <p:sp>
+        <p:nvSpPr>
+          <p:cNvPr id="92" name="Round Same Side Corner Rectangle 91"/>
+          <p:cNvSpPr/>
+          <p:nvPr/>
+        </p:nvSpPr>
+        <p:spPr>
+          <a:xfrm>
+            <a:off x="10400385" y="7441752"/>
+            <a:ext cx="230428" cy="184343"/>
+          </a:xfrm>
+          <a:prstGeom prst="round2SameRect">
+            <a:avLst>
+              <a:gd name="adj1" fmla="val 50000"/>
+              <a:gd name="adj2" fmla="val 0"/>
+            </a:avLst>
+          </a:prstGeom>
+          <a:solidFill>
+            <a:srgbClr val="8A8A8A"/>
+          </a:solidFill>
+          <a:ln>
+            <a:noFill/>
+          </a:ln>
+          <a:effectLst/>
+        </p:spPr>
+        <p:style>
+          <a:lnRef idx="1">
+            <a:schemeClr val="accent1"/>
+          </a:lnRef>
+          <a:fillRef idx="3">
+            <a:schemeClr val="accent1"/>
+          </a:fillRef>
+          <a:effectRef idx="2">
+            <a:schemeClr val="accent1"/>
+          </a:effectRef>
+          <a:fontRef idx="minor">
+            <a:schemeClr val="lt1"/>
+          </a:fontRef>
+        </p:style>
+        <p:txBody>
+          <a:bodyPr rtlCol="0" anchor="ctr"/>
+          <a:lstStyle/>
+          <a:p>
+            <a:pPr algn="ctr"/>
+          </a:p>
+        </p:txBody>
+      </p:sp>
+      <p:sp>
+        <p:nvSpPr>
+          <p:cNvPr id="93" name="TextBox 92"/>
           <p:cNvSpPr txBox="1"/>
           <p:nvPr/>
         </p:nvSpPr>
         <p:spPr>
           <a:xfrm>
-            <a:off x="2551176" y="8613648"/>
-            <a:ext cx="14648688" cy="731520"/>
+            <a:off x="10703966" y="7278624"/>
+            <a:ext cx="780897" cy="365760"/>
           </a:xfrm>
           <a:prstGeom prst="rect">
             <a:avLst/>
@@ -7016,32 +7697,179 @@
           <a:p>
             <a:pPr algn="l">
               <a:lnSpc>
-                <a:spcPct val="108000"/>
-              </a:lnSpc>
-            </a:pPr>
-            <a:r>
-              <a:rPr sz="1900" b="1">
-                <a:solidFill>
-                  <a:srgbClr val="FFFFFF"/>
-                </a:solidFill>
-                <a:latin typeface="Arial"/>
-                <a:ea typeface="Arial"/>
-              </a:rPr>
-              <a:t>요구사항은 다운턴 국면에서 정의되었고, 정의에 참여한 공급자가 선점했습니다. 차기 요구사항은 지금 고객 코드에서 정의되고 있습니다</a:t>
-            </a:r>
-          </a:p>
-        </p:txBody>
-      </p:sp>
-      <p:sp>
-        <p:nvSpPr>
-          <p:cNvPr id="78" name="TextBox 77"/>
+                <a:spcPct val="100000"/>
+              </a:lnSpc>
+            </a:pPr>
+            <a:r>
+              <a:rPr sz="1050" b="1">
+                <a:solidFill>
+                  <a:srgbClr val="555555"/>
+                </a:solidFill>
+                <a:latin typeface="Arial"/>
+                <a:ea typeface="Arial"/>
+              </a:rPr>
+              <a:t>삼성</a:t>
+            </a:r>
+          </a:p>
+          <a:p>
+            <a:pPr algn="l">
+              <a:lnSpc>
+                <a:spcPct val="100000"/>
+              </a:lnSpc>
+            </a:pPr>
+            <a:r>
+              <a:rPr sz="1050" b="0">
+                <a:solidFill>
+                  <a:srgbClr val="555555"/>
+                </a:solidFill>
+                <a:latin typeface="Arial"/>
+                <a:ea typeface="Arial"/>
+              </a:rPr>
+              <a:t>후발</a:t>
+            </a:r>
+          </a:p>
+        </p:txBody>
+      </p:sp>
+      <p:sp>
+        <p:nvSpPr>
+          <p:cNvPr id="94" name="Rectangle 93"/>
+          <p:cNvSpPr/>
+          <p:nvPr/>
+        </p:nvSpPr>
+        <p:spPr>
+          <a:xfrm>
+            <a:off x="6784848" y="7717536"/>
+            <a:ext cx="4718304" cy="10972"/>
+          </a:xfrm>
+          <a:prstGeom prst="rect">
+            <a:avLst/>
+          </a:prstGeom>
+          <a:solidFill>
+            <a:srgbClr val="D9D9D9"/>
+          </a:solidFill>
+          <a:ln>
+            <a:noFill/>
+          </a:ln>
+          <a:effectLst/>
+        </p:spPr>
+        <p:style>
+          <a:lnRef idx="1">
+            <a:schemeClr val="accent1"/>
+          </a:lnRef>
+          <a:fillRef idx="3">
+            <a:schemeClr val="accent1"/>
+          </a:fillRef>
+          <a:effectRef idx="2">
+            <a:schemeClr val="accent1"/>
+          </a:effectRef>
+          <a:fontRef idx="minor">
+            <a:schemeClr val="lt1"/>
+          </a:fontRef>
+        </p:style>
+        <p:txBody>
+          <a:bodyPr rtlCol="0" anchor="ctr"/>
+          <a:lstStyle/>
+          <a:p>
+            <a:pPr algn="ctr"/>
+          </a:p>
+        </p:txBody>
+      </p:sp>
+      <p:sp>
+        <p:nvSpPr>
+          <p:cNvPr id="95" name="TextBox 94"/>
           <p:cNvSpPr txBox="1"/>
           <p:nvPr/>
         </p:nvSpPr>
         <p:spPr>
           <a:xfrm>
-            <a:off x="722376" y="9592056"/>
-            <a:ext cx="14264640" cy="310896"/>
+            <a:off x="6784848" y="7790688"/>
+            <a:ext cx="4718304" cy="274320"/>
+          </a:xfrm>
+          <a:prstGeom prst="rect">
+            <a:avLst/>
+          </a:prstGeom>
+          <a:noFill/>
+        </p:spPr>
+        <p:txBody>
+          <a:bodyPr wrap="square" anchor="ctr" lIns="0" rIns="0" tIns="0" bIns="0">
+            <a:spAutoFit/>
+          </a:bodyPr>
+          <a:lstStyle/>
+          <a:p>
+            <a:pPr algn="l">
+              <a:lnSpc>
+                <a:spcPct val="112000"/>
+              </a:lnSpc>
+            </a:pPr>
+            <a:r>
+              <a:rPr sz="1275" b="1">
+                <a:solidFill>
+                  <a:srgbClr val="1428A0"/>
+                </a:solidFill>
+                <a:latin typeface="Arial"/>
+                <a:ea typeface="Arial"/>
+              </a:rPr>
+              <a:t>→ 3장  디바이스에서 고객 시스템까지 3단계 역량</a:t>
+            </a:r>
+          </a:p>
+        </p:txBody>
+      </p:sp>
+      <p:sp>
+        <p:nvSpPr>
+          <p:cNvPr id="96" name="Rectangle 95"/>
+          <p:cNvSpPr/>
+          <p:nvPr/>
+        </p:nvSpPr>
+        <p:spPr>
+          <a:xfrm>
+            <a:off x="12152376" y="5102352"/>
+            <a:ext cx="5413248" cy="3072384"/>
+          </a:xfrm>
+          <a:prstGeom prst="rect">
+            <a:avLst/>
+          </a:prstGeom>
+          <a:solidFill>
+            <a:srgbClr val="FFFFFF"/>
+          </a:solidFill>
+          <a:ln w="9525">
+            <a:solidFill>
+              <a:srgbClr val="D9D9D9"/>
+            </a:solidFill>
+          </a:ln>
+          <a:effectLst/>
+        </p:spPr>
+        <p:style>
+          <a:lnRef idx="1">
+            <a:schemeClr val="accent1"/>
+          </a:lnRef>
+          <a:fillRef idx="3">
+            <a:schemeClr val="accent1"/>
+          </a:fillRef>
+          <a:effectRef idx="2">
+            <a:schemeClr val="accent1"/>
+          </a:effectRef>
+          <a:fontRef idx="minor">
+            <a:schemeClr val="lt1"/>
+          </a:fontRef>
+        </p:style>
+        <p:txBody>
+          <a:bodyPr rtlCol="0" anchor="ctr"/>
+          <a:lstStyle/>
+          <a:p>
+            <a:pPr algn="ctr"/>
+          </a:p>
+        </p:txBody>
+      </p:sp>
+      <p:sp>
+        <p:nvSpPr>
+          <p:cNvPr id="97" name="TextBox 96"/>
+          <p:cNvSpPr txBox="1"/>
+          <p:nvPr/>
+        </p:nvSpPr>
+        <p:spPr>
+          <a:xfrm>
+            <a:off x="12499848" y="5285232"/>
+            <a:ext cx="4718304" cy="274320"/>
           </a:xfrm>
           <a:prstGeom prst="rect">
             <a:avLst/>
@@ -7060,6 +7888,1014 @@
               </a:lnSpc>
             </a:pPr>
             <a:r>
+              <a:rPr sz="1725" b="1">
+                <a:solidFill>
+                  <a:srgbClr val="1428A0"/>
+                </a:solidFill>
+                <a:latin typeface="Arial"/>
+                <a:ea typeface="Arial"/>
+              </a:rPr>
+              <a:t>교훈 3 · 의사결정 시점</a:t>
+            </a:r>
+          </a:p>
+        </p:txBody>
+      </p:sp>
+      <p:sp>
+        <p:nvSpPr>
+          <p:cNvPr id="98" name="TextBox 97"/>
+          <p:cNvSpPr txBox="1"/>
+          <p:nvPr/>
+        </p:nvSpPr>
+        <p:spPr>
+          <a:xfrm>
+            <a:off x="12499848" y="5596128"/>
+            <a:ext cx="4718304" cy="585216"/>
+          </a:xfrm>
+          <a:prstGeom prst="rect">
+            <a:avLst/>
+          </a:prstGeom>
+          <a:noFill/>
+        </p:spPr>
+        <p:txBody>
+          <a:bodyPr wrap="square" anchor="t" lIns="0" rIns="0" tIns="0" bIns="0">
+            <a:spAutoFit/>
+          </a:bodyPr>
+          <a:lstStyle/>
+          <a:p>
+            <a:pPr algn="l">
+              <a:lnSpc>
+                <a:spcPct val="106000"/>
+              </a:lnSpc>
+            </a:pPr>
+            <a:r>
+              <a:rPr sz="1575" b="1">
+                <a:solidFill>
+                  <a:srgbClr val="1A1A1A"/>
+                </a:solidFill>
+                <a:latin typeface="Arial"/>
+                <a:ea typeface="Arial"/>
+              </a:rPr>
+              <a:t>직전 다운턴의 결정이 다음 다운턴의 초기 조건이다</a:t>
+            </a:r>
+          </a:p>
+        </p:txBody>
+      </p:sp>
+      <p:sp>
+        <p:nvSpPr>
+          <p:cNvPr id="99" name="TextBox 98"/>
+          <p:cNvSpPr txBox="1"/>
+          <p:nvPr/>
+        </p:nvSpPr>
+        <p:spPr>
+          <a:xfrm>
+            <a:off x="12499848" y="6236208"/>
+            <a:ext cx="2176272" cy="201168"/>
+          </a:xfrm>
+          <a:prstGeom prst="rect">
+            <a:avLst/>
+          </a:prstGeom>
+          <a:noFill/>
+        </p:spPr>
+        <p:txBody>
+          <a:bodyPr wrap="square" anchor="t" lIns="0" rIns="0" tIns="0" bIns="0">
+            <a:spAutoFit/>
+          </a:bodyPr>
+          <a:lstStyle/>
+          <a:p>
+            <a:pPr algn="ctr">
+              <a:lnSpc>
+                <a:spcPct val="112000"/>
+              </a:lnSpc>
+            </a:pPr>
+            <a:r>
+              <a:rPr sz="1050" b="0">
+                <a:solidFill>
+                  <a:srgbClr val="8A8A8A"/>
+                </a:solidFill>
+                <a:latin typeface="Arial"/>
+                <a:ea typeface="Arial"/>
+              </a:rPr>
+              <a:t>직전 다운턴의 결정</a:t>
+            </a:r>
+          </a:p>
+        </p:txBody>
+      </p:sp>
+      <p:sp>
+        <p:nvSpPr>
+          <p:cNvPr id="100" name="TextBox 99"/>
+          <p:cNvSpPr txBox="1"/>
+          <p:nvPr/>
+        </p:nvSpPr>
+        <p:spPr>
+          <a:xfrm>
+            <a:off x="15041880" y="6236208"/>
+            <a:ext cx="2176272" cy="201168"/>
+          </a:xfrm>
+          <a:prstGeom prst="rect">
+            <a:avLst/>
+          </a:prstGeom>
+          <a:noFill/>
+        </p:spPr>
+        <p:txBody>
+          <a:bodyPr wrap="square" anchor="t" lIns="0" rIns="0" tIns="0" bIns="0">
+            <a:spAutoFit/>
+          </a:bodyPr>
+          <a:lstStyle/>
+          <a:p>
+            <a:pPr algn="ctr">
+              <a:lnSpc>
+                <a:spcPct val="112000"/>
+              </a:lnSpc>
+            </a:pPr>
+            <a:r>
+              <a:rPr sz="1050" b="0">
+                <a:solidFill>
+                  <a:srgbClr val="8A8A8A"/>
+                </a:solidFill>
+                <a:latin typeface="Arial"/>
+                <a:ea typeface="Arial"/>
+              </a:rPr>
+              <a:t>다음 다운턴의 초기 조건</a:t>
+            </a:r>
+          </a:p>
+        </p:txBody>
+      </p:sp>
+      <p:sp>
+        <p:nvSpPr>
+          <p:cNvPr id="101" name="Rectangle 100"/>
+          <p:cNvSpPr/>
+          <p:nvPr/>
+        </p:nvSpPr>
+        <p:spPr>
+          <a:xfrm>
+            <a:off x="12499848" y="6510528"/>
+            <a:ext cx="2176272" cy="310896"/>
+          </a:xfrm>
+          <a:prstGeom prst="rect">
+            <a:avLst/>
+          </a:prstGeom>
+          <a:solidFill>
+            <a:srgbClr val="FFFFFF"/>
+          </a:solidFill>
+          <a:ln w="9525">
+            <a:solidFill>
+              <a:srgbClr val="D9D9D9"/>
+            </a:solidFill>
+          </a:ln>
+          <a:effectLst/>
+        </p:spPr>
+        <p:style>
+          <a:lnRef idx="1">
+            <a:schemeClr val="accent1"/>
+          </a:lnRef>
+          <a:fillRef idx="3">
+            <a:schemeClr val="accent1"/>
+          </a:fillRef>
+          <a:effectRef idx="2">
+            <a:schemeClr val="accent1"/>
+          </a:effectRef>
+          <a:fontRef idx="minor">
+            <a:schemeClr val="lt1"/>
+          </a:fontRef>
+        </p:style>
+        <p:txBody>
+          <a:bodyPr rtlCol="0" anchor="ctr"/>
+          <a:lstStyle/>
+          <a:p>
+            <a:pPr algn="ctr"/>
+          </a:p>
+        </p:txBody>
+      </p:sp>
+      <p:sp>
+        <p:nvSpPr>
+          <p:cNvPr id="102" name="TextBox 101"/>
+          <p:cNvSpPr txBox="1"/>
+          <p:nvPr/>
+        </p:nvSpPr>
+        <p:spPr>
+          <a:xfrm>
+            <a:off x="12554712" y="6510528"/>
+            <a:ext cx="2066544" cy="310896"/>
+          </a:xfrm>
+          <a:prstGeom prst="rect">
+            <a:avLst/>
+          </a:prstGeom>
+          <a:noFill/>
+        </p:spPr>
+        <p:txBody>
+          <a:bodyPr wrap="square" anchor="ctr" lIns="0" rIns="0" tIns="0" bIns="0">
+            <a:spAutoFit/>
+          </a:bodyPr>
+          <a:lstStyle/>
+          <a:p>
+            <a:pPr algn="ctr">
+              <a:lnSpc>
+                <a:spcPct val="112000"/>
+              </a:lnSpc>
+            </a:pPr>
+            <a:r>
+              <a:rPr sz="1125" b="0">
+                <a:solidFill>
+                  <a:srgbClr val="1A1A1A"/>
+                </a:solidFill>
+                <a:latin typeface="Arial"/>
+                <a:ea typeface="Arial"/>
+              </a:rPr>
+              <a:t>DT19 · 무감산 성공 경험</a:t>
+            </a:r>
+          </a:p>
+        </p:txBody>
+      </p:sp>
+      <p:sp>
+        <p:nvSpPr>
+          <p:cNvPr id="103" name="Right Arrow 102"/>
+          <p:cNvSpPr/>
+          <p:nvPr/>
+        </p:nvSpPr>
+        <p:spPr>
+          <a:xfrm>
+            <a:off x="14749272" y="6583680"/>
+            <a:ext cx="219456" cy="164592"/>
+          </a:xfrm>
+          <a:prstGeom prst="rightArrow">
+            <a:avLst/>
+          </a:prstGeom>
+          <a:solidFill>
+            <a:srgbClr val="AAB8E8"/>
+          </a:solidFill>
+          <a:ln>
+            <a:noFill/>
+          </a:ln>
+          <a:effectLst/>
+        </p:spPr>
+        <p:style>
+          <a:lnRef idx="1">
+            <a:schemeClr val="accent1"/>
+          </a:lnRef>
+          <a:fillRef idx="3">
+            <a:schemeClr val="accent1"/>
+          </a:fillRef>
+          <a:effectRef idx="2">
+            <a:schemeClr val="accent1"/>
+          </a:effectRef>
+          <a:fontRef idx="minor">
+            <a:schemeClr val="lt1"/>
+          </a:fontRef>
+        </p:style>
+        <p:txBody>
+          <a:bodyPr rtlCol="0" anchor="ctr"/>
+          <a:lstStyle/>
+          <a:p>
+            <a:pPr algn="ctr"/>
+          </a:p>
+        </p:txBody>
+      </p:sp>
+      <p:sp>
+        <p:nvSpPr>
+          <p:cNvPr id="104" name="Rectangle 103"/>
+          <p:cNvSpPr/>
+          <p:nvPr/>
+        </p:nvSpPr>
+        <p:spPr>
+          <a:xfrm>
+            <a:off x="15041880" y="6510528"/>
+            <a:ext cx="2176272" cy="310896"/>
+          </a:xfrm>
+          <a:prstGeom prst="rect">
+            <a:avLst/>
+          </a:prstGeom>
+          <a:solidFill>
+            <a:srgbClr val="F4F6FC"/>
+          </a:solidFill>
+          <a:ln>
+            <a:noFill/>
+          </a:ln>
+          <a:effectLst/>
+        </p:spPr>
+        <p:style>
+          <a:lnRef idx="1">
+            <a:schemeClr val="accent1"/>
+          </a:lnRef>
+          <a:fillRef idx="3">
+            <a:schemeClr val="accent1"/>
+          </a:fillRef>
+          <a:effectRef idx="2">
+            <a:schemeClr val="accent1"/>
+          </a:effectRef>
+          <a:fontRef idx="minor">
+            <a:schemeClr val="lt1"/>
+          </a:fontRef>
+        </p:style>
+        <p:txBody>
+          <a:bodyPr rtlCol="0" anchor="ctr"/>
+          <a:lstStyle/>
+          <a:p>
+            <a:pPr algn="ctr"/>
+          </a:p>
+        </p:txBody>
+      </p:sp>
+      <p:sp>
+        <p:nvSpPr>
+          <p:cNvPr id="105" name="TextBox 104"/>
+          <p:cNvSpPr txBox="1"/>
+          <p:nvPr/>
+        </p:nvSpPr>
+        <p:spPr>
+          <a:xfrm>
+            <a:off x="15096744" y="6510528"/>
+            <a:ext cx="2066544" cy="310896"/>
+          </a:xfrm>
+          <a:prstGeom prst="rect">
+            <a:avLst/>
+          </a:prstGeom>
+          <a:noFill/>
+        </p:spPr>
+        <p:txBody>
+          <a:bodyPr wrap="square" anchor="ctr" lIns="0" rIns="0" tIns="0" bIns="0">
+            <a:spAutoFit/>
+          </a:bodyPr>
+          <a:lstStyle/>
+          <a:p>
+            <a:pPr algn="ctr">
+              <a:lnSpc>
+                <a:spcPct val="112000"/>
+              </a:lnSpc>
+            </a:pPr>
+            <a:r>
+              <a:rPr sz="1125" b="1">
+                <a:solidFill>
+                  <a:srgbClr val="1A1A1A"/>
+                </a:solidFill>
+                <a:latin typeface="Arial"/>
+                <a:ea typeface="Arial"/>
+              </a:rPr>
+              <a:t>DT23 · 국면 오판</a:t>
+            </a:r>
+          </a:p>
+        </p:txBody>
+      </p:sp>
+      <p:sp>
+        <p:nvSpPr>
+          <p:cNvPr id="106" name="Rectangle 105"/>
+          <p:cNvSpPr/>
+          <p:nvPr/>
+        </p:nvSpPr>
+        <p:spPr>
+          <a:xfrm>
+            <a:off x="12499848" y="6894576"/>
+            <a:ext cx="2176272" cy="310896"/>
+          </a:xfrm>
+          <a:prstGeom prst="rect">
+            <a:avLst/>
+          </a:prstGeom>
+          <a:solidFill>
+            <a:srgbClr val="FFFFFF"/>
+          </a:solidFill>
+          <a:ln w="9525">
+            <a:solidFill>
+              <a:srgbClr val="D9D9D9"/>
+            </a:solidFill>
+          </a:ln>
+          <a:effectLst/>
+        </p:spPr>
+        <p:style>
+          <a:lnRef idx="1">
+            <a:schemeClr val="accent1"/>
+          </a:lnRef>
+          <a:fillRef idx="3">
+            <a:schemeClr val="accent1"/>
+          </a:fillRef>
+          <a:effectRef idx="2">
+            <a:schemeClr val="accent1"/>
+          </a:effectRef>
+          <a:fontRef idx="minor">
+            <a:schemeClr val="lt1"/>
+          </a:fontRef>
+        </p:style>
+        <p:txBody>
+          <a:bodyPr rtlCol="0" anchor="ctr"/>
+          <a:lstStyle/>
+          <a:p>
+            <a:pPr algn="ctr"/>
+          </a:p>
+        </p:txBody>
+      </p:sp>
+      <p:sp>
+        <p:nvSpPr>
+          <p:cNvPr id="107" name="TextBox 106"/>
+          <p:cNvSpPr txBox="1"/>
+          <p:nvPr/>
+        </p:nvSpPr>
+        <p:spPr>
+          <a:xfrm>
+            <a:off x="12554712" y="6894576"/>
+            <a:ext cx="2066544" cy="310896"/>
+          </a:xfrm>
+          <a:prstGeom prst="rect">
+            <a:avLst/>
+          </a:prstGeom>
+          <a:noFill/>
+        </p:spPr>
+        <p:txBody>
+          <a:bodyPr wrap="square" anchor="ctr" lIns="0" rIns="0" tIns="0" bIns="0">
+            <a:spAutoFit/>
+          </a:bodyPr>
+          <a:lstStyle/>
+          <a:p>
+            <a:pPr algn="ctr">
+              <a:lnSpc>
+                <a:spcPct val="112000"/>
+              </a:lnSpc>
+            </a:pPr>
+            <a:r>
+              <a:rPr sz="1125" b="0">
+                <a:solidFill>
+                  <a:srgbClr val="1A1A1A"/>
+                </a:solidFill>
+                <a:latin typeface="Arial"/>
+                <a:ea typeface="Arial"/>
+              </a:rPr>
+              <a:t>DT19 · HBM 조직 축소</a:t>
+            </a:r>
+          </a:p>
+        </p:txBody>
+      </p:sp>
+      <p:sp>
+        <p:nvSpPr>
+          <p:cNvPr id="108" name="Right Arrow 107"/>
+          <p:cNvSpPr/>
+          <p:nvPr/>
+        </p:nvSpPr>
+        <p:spPr>
+          <a:xfrm>
+            <a:off x="14749272" y="6967728"/>
+            <a:ext cx="219456" cy="164592"/>
+          </a:xfrm>
+          <a:prstGeom prst="rightArrow">
+            <a:avLst/>
+          </a:prstGeom>
+          <a:solidFill>
+            <a:srgbClr val="AAB8E8"/>
+          </a:solidFill>
+          <a:ln>
+            <a:noFill/>
+          </a:ln>
+          <a:effectLst/>
+        </p:spPr>
+        <p:style>
+          <a:lnRef idx="1">
+            <a:schemeClr val="accent1"/>
+          </a:lnRef>
+          <a:fillRef idx="3">
+            <a:schemeClr val="accent1"/>
+          </a:fillRef>
+          <a:effectRef idx="2">
+            <a:schemeClr val="accent1"/>
+          </a:effectRef>
+          <a:fontRef idx="minor">
+            <a:schemeClr val="lt1"/>
+          </a:fontRef>
+        </p:style>
+        <p:txBody>
+          <a:bodyPr rtlCol="0" anchor="ctr"/>
+          <a:lstStyle/>
+          <a:p>
+            <a:pPr algn="ctr"/>
+          </a:p>
+        </p:txBody>
+      </p:sp>
+      <p:sp>
+        <p:nvSpPr>
+          <p:cNvPr id="109" name="Rectangle 108"/>
+          <p:cNvSpPr/>
+          <p:nvPr/>
+        </p:nvSpPr>
+        <p:spPr>
+          <a:xfrm>
+            <a:off x="15041880" y="6894576"/>
+            <a:ext cx="2176272" cy="310896"/>
+          </a:xfrm>
+          <a:prstGeom prst="rect">
+            <a:avLst/>
+          </a:prstGeom>
+          <a:solidFill>
+            <a:srgbClr val="F4F6FC"/>
+          </a:solidFill>
+          <a:ln>
+            <a:noFill/>
+          </a:ln>
+          <a:effectLst/>
+        </p:spPr>
+        <p:style>
+          <a:lnRef idx="1">
+            <a:schemeClr val="accent1"/>
+          </a:lnRef>
+          <a:fillRef idx="3">
+            <a:schemeClr val="accent1"/>
+          </a:fillRef>
+          <a:effectRef idx="2">
+            <a:schemeClr val="accent1"/>
+          </a:effectRef>
+          <a:fontRef idx="minor">
+            <a:schemeClr val="lt1"/>
+          </a:fontRef>
+        </p:style>
+        <p:txBody>
+          <a:bodyPr rtlCol="0" anchor="ctr"/>
+          <a:lstStyle/>
+          <a:p>
+            <a:pPr algn="ctr"/>
+          </a:p>
+        </p:txBody>
+      </p:sp>
+      <p:sp>
+        <p:nvSpPr>
+          <p:cNvPr id="110" name="TextBox 109"/>
+          <p:cNvSpPr txBox="1"/>
+          <p:nvPr/>
+        </p:nvSpPr>
+        <p:spPr>
+          <a:xfrm>
+            <a:off x="15096744" y="6894576"/>
+            <a:ext cx="2066544" cy="310896"/>
+          </a:xfrm>
+          <a:prstGeom prst="rect">
+            <a:avLst/>
+          </a:prstGeom>
+          <a:noFill/>
+        </p:spPr>
+        <p:txBody>
+          <a:bodyPr wrap="square" anchor="ctr" lIns="0" rIns="0" tIns="0" bIns="0">
+            <a:spAutoFit/>
+          </a:bodyPr>
+          <a:lstStyle/>
+          <a:p>
+            <a:pPr algn="ctr">
+              <a:lnSpc>
+                <a:spcPct val="112000"/>
+              </a:lnSpc>
+            </a:pPr>
+            <a:r>
+              <a:rPr sz="1125" b="1">
+                <a:solidFill>
+                  <a:srgbClr val="1A1A1A"/>
+                </a:solidFill>
+                <a:latin typeface="Arial"/>
+                <a:ea typeface="Arial"/>
+              </a:rPr>
+              <a:t>DT23 · 회복기 주도권 상실</a:t>
+            </a:r>
+          </a:p>
+        </p:txBody>
+      </p:sp>
+      <p:sp>
+        <p:nvSpPr>
+          <p:cNvPr id="111" name="Rectangle 110"/>
+          <p:cNvSpPr/>
+          <p:nvPr/>
+        </p:nvSpPr>
+        <p:spPr>
+          <a:xfrm>
+            <a:off x="12499848" y="7278624"/>
+            <a:ext cx="2176272" cy="310896"/>
+          </a:xfrm>
+          <a:prstGeom prst="rect">
+            <a:avLst/>
+          </a:prstGeom>
+          <a:solidFill>
+            <a:srgbClr val="1428A0"/>
+          </a:solidFill>
+          <a:ln>
+            <a:noFill/>
+          </a:ln>
+          <a:effectLst/>
+        </p:spPr>
+        <p:style>
+          <a:lnRef idx="1">
+            <a:schemeClr val="accent1"/>
+          </a:lnRef>
+          <a:fillRef idx="3">
+            <a:schemeClr val="accent1"/>
+          </a:fillRef>
+          <a:effectRef idx="2">
+            <a:schemeClr val="accent1"/>
+          </a:effectRef>
+          <a:fontRef idx="minor">
+            <a:schemeClr val="lt1"/>
+          </a:fontRef>
+        </p:style>
+        <p:txBody>
+          <a:bodyPr rtlCol="0" anchor="ctr"/>
+          <a:lstStyle/>
+          <a:p>
+            <a:pPr algn="ctr"/>
+          </a:p>
+        </p:txBody>
+      </p:sp>
+      <p:sp>
+        <p:nvSpPr>
+          <p:cNvPr id="112" name="TextBox 111"/>
+          <p:cNvSpPr txBox="1"/>
+          <p:nvPr/>
+        </p:nvSpPr>
+        <p:spPr>
+          <a:xfrm>
+            <a:off x="12554712" y="7278624"/>
+            <a:ext cx="2066544" cy="310896"/>
+          </a:xfrm>
+          <a:prstGeom prst="rect">
+            <a:avLst/>
+          </a:prstGeom>
+          <a:noFill/>
+        </p:spPr>
+        <p:txBody>
+          <a:bodyPr wrap="square" anchor="ctr" lIns="0" rIns="0" tIns="0" bIns="0">
+            <a:spAutoFit/>
+          </a:bodyPr>
+          <a:lstStyle/>
+          <a:p>
+            <a:pPr algn="ctr">
+              <a:lnSpc>
+                <a:spcPct val="112000"/>
+              </a:lnSpc>
+            </a:pPr>
+            <a:r>
+              <a:rPr sz="1125" b="1">
+                <a:solidFill>
+                  <a:srgbClr val="FFFFFF"/>
+                </a:solidFill>
+                <a:latin typeface="Arial"/>
+                <a:ea typeface="Arial"/>
+              </a:rPr>
+              <a:t>2026 · 고객 시스템 진입</a:t>
+            </a:r>
+          </a:p>
+        </p:txBody>
+      </p:sp>
+      <p:sp>
+        <p:nvSpPr>
+          <p:cNvPr id="113" name="Right Arrow 112"/>
+          <p:cNvSpPr/>
+          <p:nvPr/>
+        </p:nvSpPr>
+        <p:spPr>
+          <a:xfrm>
+            <a:off x="14749272" y="7351775"/>
+            <a:ext cx="219456" cy="164592"/>
+          </a:xfrm>
+          <a:prstGeom prst="rightArrow">
+            <a:avLst/>
+          </a:prstGeom>
+          <a:solidFill>
+            <a:srgbClr val="1428A0"/>
+          </a:solidFill>
+          <a:ln>
+            <a:noFill/>
+          </a:ln>
+          <a:effectLst/>
+        </p:spPr>
+        <p:style>
+          <a:lnRef idx="1">
+            <a:schemeClr val="accent1"/>
+          </a:lnRef>
+          <a:fillRef idx="3">
+            <a:schemeClr val="accent1"/>
+          </a:fillRef>
+          <a:effectRef idx="2">
+            <a:schemeClr val="accent1"/>
+          </a:effectRef>
+          <a:fontRef idx="minor">
+            <a:schemeClr val="lt1"/>
+          </a:fontRef>
+        </p:style>
+        <p:txBody>
+          <a:bodyPr rtlCol="0" anchor="ctr"/>
+          <a:lstStyle/>
+          <a:p>
+            <a:pPr algn="ctr"/>
+          </a:p>
+        </p:txBody>
+      </p:sp>
+      <p:sp>
+        <p:nvSpPr>
+          <p:cNvPr id="114" name="Rectangle 113"/>
+          <p:cNvSpPr/>
+          <p:nvPr/>
+        </p:nvSpPr>
+        <p:spPr>
+          <a:xfrm>
+            <a:off x="15041880" y="7278624"/>
+            <a:ext cx="2176272" cy="310896"/>
+          </a:xfrm>
+          <a:prstGeom prst="rect">
+            <a:avLst/>
+          </a:prstGeom>
+          <a:solidFill>
+            <a:srgbClr val="1428A0"/>
+          </a:solidFill>
+          <a:ln>
+            <a:noFill/>
+          </a:ln>
+          <a:effectLst/>
+        </p:spPr>
+        <p:style>
+          <a:lnRef idx="1">
+            <a:schemeClr val="accent1"/>
+          </a:lnRef>
+          <a:fillRef idx="3">
+            <a:schemeClr val="accent1"/>
+          </a:fillRef>
+          <a:effectRef idx="2">
+            <a:schemeClr val="accent1"/>
+          </a:effectRef>
+          <a:fontRef idx="minor">
+            <a:schemeClr val="lt1"/>
+          </a:fontRef>
+        </p:style>
+        <p:txBody>
+          <a:bodyPr rtlCol="0" anchor="ctr"/>
+          <a:lstStyle/>
+          <a:p>
+            <a:pPr algn="ctr"/>
+          </a:p>
+        </p:txBody>
+      </p:sp>
+      <p:sp>
+        <p:nvSpPr>
+          <p:cNvPr id="115" name="TextBox 114"/>
+          <p:cNvSpPr txBox="1"/>
+          <p:nvPr/>
+        </p:nvSpPr>
+        <p:spPr>
+          <a:xfrm>
+            <a:off x="15096744" y="7278624"/>
+            <a:ext cx="2066544" cy="310896"/>
+          </a:xfrm>
+          <a:prstGeom prst="rect">
+            <a:avLst/>
+          </a:prstGeom>
+          <a:noFill/>
+        </p:spPr>
+        <p:txBody>
+          <a:bodyPr wrap="square" anchor="ctr" lIns="0" rIns="0" tIns="0" bIns="0">
+            <a:spAutoFit/>
+          </a:bodyPr>
+          <a:lstStyle/>
+          <a:p>
+            <a:pPr algn="ctr">
+              <a:lnSpc>
+                <a:spcPct val="112000"/>
+              </a:lnSpc>
+            </a:pPr>
+            <a:r>
+              <a:rPr sz="1125" b="1">
+                <a:solidFill>
+                  <a:srgbClr val="FFFFFF"/>
+                </a:solidFill>
+                <a:latin typeface="Arial"/>
+                <a:ea typeface="Arial"/>
+              </a:rPr>
+              <a:t>2027H2 · TCO 보증 수익원</a:t>
+            </a:r>
+          </a:p>
+        </p:txBody>
+      </p:sp>
+      <p:sp>
+        <p:nvSpPr>
+          <p:cNvPr id="116" name="Rectangle 115"/>
+          <p:cNvSpPr/>
+          <p:nvPr/>
+        </p:nvSpPr>
+        <p:spPr>
+          <a:xfrm>
+            <a:off x="12499848" y="7717536"/>
+            <a:ext cx="4718304" cy="10972"/>
+          </a:xfrm>
+          <a:prstGeom prst="rect">
+            <a:avLst/>
+          </a:prstGeom>
+          <a:solidFill>
+            <a:srgbClr val="D9D9D9"/>
+          </a:solidFill>
+          <a:ln>
+            <a:noFill/>
+          </a:ln>
+          <a:effectLst/>
+        </p:spPr>
+        <p:style>
+          <a:lnRef idx="1">
+            <a:schemeClr val="accent1"/>
+          </a:lnRef>
+          <a:fillRef idx="3">
+            <a:schemeClr val="accent1"/>
+          </a:fillRef>
+          <a:effectRef idx="2">
+            <a:schemeClr val="accent1"/>
+          </a:effectRef>
+          <a:fontRef idx="minor">
+            <a:schemeClr val="lt1"/>
+          </a:fontRef>
+        </p:style>
+        <p:txBody>
+          <a:bodyPr rtlCol="0" anchor="ctr"/>
+          <a:lstStyle/>
+          <a:p>
+            <a:pPr algn="ctr"/>
+          </a:p>
+        </p:txBody>
+      </p:sp>
+      <p:sp>
+        <p:nvSpPr>
+          <p:cNvPr id="117" name="TextBox 116"/>
+          <p:cNvSpPr txBox="1"/>
+          <p:nvPr/>
+        </p:nvSpPr>
+        <p:spPr>
+          <a:xfrm>
+            <a:off x="12499848" y="7790688"/>
+            <a:ext cx="4718304" cy="274320"/>
+          </a:xfrm>
+          <a:prstGeom prst="rect">
+            <a:avLst/>
+          </a:prstGeom>
+          <a:noFill/>
+        </p:spPr>
+        <p:txBody>
+          <a:bodyPr wrap="square" anchor="ctr" lIns="0" rIns="0" tIns="0" bIns="0">
+            <a:spAutoFit/>
+          </a:bodyPr>
+          <a:lstStyle/>
+          <a:p>
+            <a:pPr algn="l">
+              <a:lnSpc>
+                <a:spcPct val="112000"/>
+              </a:lnSpc>
+            </a:pPr>
+            <a:r>
+              <a:rPr sz="1275" b="1">
+                <a:solidFill>
+                  <a:srgbClr val="1428A0"/>
+                </a:solidFill>
+                <a:latin typeface="Arial"/>
+                <a:ea typeface="Arial"/>
+              </a:rPr>
+              <a:t>→ 4장  FDE·전략적 협약과 조직·인사·문화</a:t>
+            </a:r>
+          </a:p>
+        </p:txBody>
+      </p:sp>
+      <p:sp>
+        <p:nvSpPr>
+          <p:cNvPr id="118" name="Rectangle 117"/>
+          <p:cNvSpPr/>
+          <p:nvPr/>
+        </p:nvSpPr>
+        <p:spPr>
+          <a:xfrm>
+            <a:off x="722376" y="8613648"/>
+            <a:ext cx="16843248" cy="731520"/>
+          </a:xfrm>
+          <a:prstGeom prst="rect">
+            <a:avLst/>
+          </a:prstGeom>
+          <a:solidFill>
+            <a:srgbClr val="1428A0"/>
+          </a:solidFill>
+          <a:ln>
+            <a:noFill/>
+          </a:ln>
+          <a:effectLst/>
+        </p:spPr>
+        <p:style>
+          <a:lnRef idx="1">
+            <a:schemeClr val="accent1"/>
+          </a:lnRef>
+          <a:fillRef idx="3">
+            <a:schemeClr val="accent1"/>
+          </a:fillRef>
+          <a:effectRef idx="2">
+            <a:schemeClr val="accent1"/>
+          </a:effectRef>
+          <a:fontRef idx="minor">
+            <a:schemeClr val="lt1"/>
+          </a:fontRef>
+        </p:style>
+        <p:txBody>
+          <a:bodyPr rtlCol="0" anchor="ctr"/>
+          <a:lstStyle/>
+          <a:p>
+            <a:pPr algn="ctr"/>
+          </a:p>
+        </p:txBody>
+      </p:sp>
+      <p:sp>
+        <p:nvSpPr>
+          <p:cNvPr id="119" name="TextBox 118"/>
+          <p:cNvSpPr txBox="1"/>
+          <p:nvPr/>
+        </p:nvSpPr>
+        <p:spPr>
+          <a:xfrm>
+            <a:off x="1133856" y="8613648"/>
+            <a:ext cx="1463040" cy="731520"/>
+          </a:xfrm>
+          <a:prstGeom prst="rect">
+            <a:avLst/>
+          </a:prstGeom>
+          <a:noFill/>
+        </p:spPr>
+        <p:txBody>
+          <a:bodyPr wrap="square" anchor="ctr" lIns="0" rIns="0" tIns="0" bIns="0">
+            <a:spAutoFit/>
+          </a:bodyPr>
+          <a:lstStyle/>
+          <a:p>
+            <a:pPr algn="l">
+              <a:lnSpc>
+                <a:spcPct val="112000"/>
+              </a:lnSpc>
+            </a:pPr>
+            <a:r>
+              <a:rPr sz="1800" b="0">
+                <a:solidFill>
+                  <a:srgbClr val="FFFFFF"/>
+                </a:solidFill>
+                <a:latin typeface="Arial"/>
+                <a:ea typeface="Arial"/>
+              </a:rPr>
+              <a:t>결론</a:t>
+            </a:r>
+          </a:p>
+        </p:txBody>
+      </p:sp>
+      <p:sp>
+        <p:nvSpPr>
+          <p:cNvPr id="120" name="TextBox 119"/>
+          <p:cNvSpPr txBox="1"/>
+          <p:nvPr/>
+        </p:nvSpPr>
+        <p:spPr>
+          <a:xfrm>
+            <a:off x="2551176" y="8613648"/>
+            <a:ext cx="14648688" cy="731520"/>
+          </a:xfrm>
+          <a:prstGeom prst="rect">
+            <a:avLst/>
+          </a:prstGeom>
+          <a:noFill/>
+        </p:spPr>
+        <p:txBody>
+          <a:bodyPr wrap="square" anchor="ctr" lIns="0" rIns="0" tIns="0" bIns="0">
+            <a:spAutoFit/>
+          </a:bodyPr>
+          <a:lstStyle/>
+          <a:p>
+            <a:pPr algn="l">
+              <a:lnSpc>
+                <a:spcPct val="108000"/>
+              </a:lnSpc>
+            </a:pPr>
+            <a:r>
+              <a:rPr sz="1900" b="1">
+                <a:solidFill>
+                  <a:srgbClr val="FFFFFF"/>
+                </a:solidFill>
+                <a:latin typeface="Arial"/>
+                <a:ea typeface="Arial"/>
+              </a:rPr>
+              <a:t>요구사항은 다운턴 국면에서 정의되었고, 정의에 참여한 공급자가 선점했습니다. 차기 요구사항은 지금 고객 코드에서 정의되고 있습니다</a:t>
+            </a:r>
+          </a:p>
+        </p:txBody>
+      </p:sp>
+      <p:sp>
+        <p:nvSpPr>
+          <p:cNvPr id="121" name="TextBox 120"/>
+          <p:cNvSpPr txBox="1"/>
+          <p:nvPr/>
+        </p:nvSpPr>
+        <p:spPr>
+          <a:xfrm>
+            <a:off x="722376" y="9592056"/>
+            <a:ext cx="14264640" cy="310896"/>
+          </a:xfrm>
+          <a:prstGeom prst="rect">
+            <a:avLst/>
+          </a:prstGeom>
+          <a:noFill/>
+        </p:spPr>
+        <p:txBody>
+          <a:bodyPr wrap="square" anchor="t" lIns="0" rIns="0" tIns="0" bIns="0">
+            <a:spAutoFit/>
+          </a:bodyPr>
+          <a:lstStyle/>
+          <a:p>
+            <a:pPr algn="l">
+              <a:lnSpc>
+                <a:spcPct val="112000"/>
+              </a:lnSpc>
+            </a:pPr>
+            <a:r>
               <a:rPr sz="1600" b="0">
                 <a:solidFill>
                   <a:srgbClr val="555555"/>
@@ -7074,7 +8910,7 @@
       </p:sp>
       <p:sp>
         <p:nvSpPr>
-          <p:cNvPr id="79" name="TextBox 78"/>
+          <p:cNvPr id="122" name="TextBox 121"/>
           <p:cNvSpPr txBox="1"/>
           <p:nvPr/>
         </p:nvSpPr>

--- a/outputs/presentation/qlc-ssd-strategy.pptx
+++ b/outputs/presentation/qlc-ssd-strategy.pptx
@@ -645,7 +645,7 @@
           <a:lstStyle/>
           <a:p>
             <a:r>
-              <a:t>요구사항과 역량 한 장입니다. 리드의 인용은 베인 신문섭 파트너의 진단입니다. 승부는 칩을 많이 파는 기업이 아니라 고객의 아키텍처 안으로 들어가 수요를 함께 설계하는 기업이 가져간다. 이 장이 바로 그 안으로 들어가는 세 단계입니다. 앞 장의 결론을 잇습니다. 고객은 캐시 티어에서도 QLC의 TB당 TCO를 원하지만 캐시는 쓰기가 많고, 내구성은 미디어를 바꿔서가 아니라 고객 시스템이 데이터를 어떻게 놓느냐(배치 표준·캐시 관리자 정책)로 풀립니다. 그래서 디바이스에서 고객 시스템 안까지 올라가야 합니다. 갭 세 가지: 내구성(QLC 정격 0.075~0.6 vs TLC 1~3 DWPD, 10~40배), 스트림(RUH 2~8 vs 200+), 접점(KV 캐시 관리자 4종 코드에 배치·내구성 언급 0). 수단은 있습니다(CacheLib 실측 WAF 3.22→1.03, XFS write streams RocksDB -35%, ScaleFlux 유효 7~10 DWPD). 그림은 고객 시스템 5계층을 세 번 그리고 우리가 닿는 층을 색으로 표시하며, 각 층에 그 층을 구성하는 기술을 적었습니다. 응용·추론 엔진(vLLM·SGLang·TensorRT-LLM), KV 캐시 관리자(NVIDIA Dynamo KVBM·LMCache·Mooncake·Tencent FlexKV), I/O 라이브러리(NIXL·GPUDirect Storage·io_uring·SPDK/xNVMe), 커널·플랫폼(Linux 6.16 write streams·XFS/f2fs 스트림·NVIDIA CMX와 DOCA Memos), SSD 디바이스(컨트롤러·펌웨어 RUH·2Tb QLC·NVMe KV 확장·텔레메트리). Phase 1은 SSD 층만 우리 것입니다(KV-ready QLC). Phase 2는 캐시 관리자의 빈도 필터·퇴거 정책이 트레이스의 원천이고, I/O 라이브러리의 io_uring·GDS 백엔드에 write stream을 부착하며 커널 스트림과 CMX 힌트 매핑을 검증해 RUH 정책·WAF·유효 DWPD 실측을 공개합니다. Phase 3는 캐시 관리자 4종에 플러그인을 메인라인으로 머지하고, NIXL·xNVMe가 기본 백엔드가 되며, DOCA Memos와 배치 표준의 매핑을 NVIDIA와 공동 정의하고, 응용 층은 커넥터·스케줄러를 이해해 공용 TCO 모델(GPU당 동시 사용자·TTFT·전력)로 대화합니다. FDE(Forward Deployed Engineer)가 고객 옆에 상주합니다. 삼성 현 위치는 Phase 1 확보, Phase 2 진입: KV cache 백서 2종으로 측정 역량은 있으나 트레이스 기반 실측이 미공개이고 캐시 관리자 4종에 기여가 없습니다. 오케스트레이션 자체는 만들지 않습니다.</a:t>
+              <a:t>요구사항과 역량 한 장입니다. 리드의 인용은 베인 신문섭 파트너의 진단입니다. 승부는 칩을 많이 파는 기업이 아니라 고객의 아키텍처 안으로 들어가 수요를 함께 설계하는 기업이 가져간다. 이 장이 바로 그 안으로 들어가는 세 단계입니다. 앞 장의 결론을 잇습니다. 고객은 캐시 계층에서도 QLC의 TB당 TCO를 원하지만 캐시는 쓰기가 많고, 내구성은 미디어를 바꿔서가 아니라 고객 시스템이 데이터를 어떻게 놓느냐(배치 표준·캐시 관리자 정책)로 풀립니다. 그래서 디바이스에서 고객 시스템 안까지 올라가야 합니다. 갭 세 가지: 내구성(QLC 정격 0.075~0.6 vs TLC 1~3 DWPD, 10~40배), 스트림(RUH 2~8 vs 200+), 접점(KV 캐시 관리자 4종 코드에 배치·내구성 언급 0). 수단은 있습니다(CacheLib 실측 WAF 3.22→1.03, XFS write streams RocksDB -35%, ScaleFlux 유효 7~10 DWPD). 그림은 고객 시스템 5계층을 세 번 그리고 우리가 닿는 층을 색으로 표시하며, 각 층에 그 층을 구성하는 기술을 적었습니다. 응용·추론 엔진(vLLM·SGLang·TensorRT-LLM), KV 캐시 관리자(NVIDIA Dynamo KVBM·LMCache·Mooncake·Tencent FlexKV), I/O 라이브러리(NIXL·GPUDirect Storage·io_uring·SPDK/xNVMe), 커널·플랫폼(Linux 6.16 write streams·XFS/f2fs 스트림·NVIDIA CMX와 DOCA Memos), SSD 디바이스(컨트롤러·펌웨어 RUH·2Tb QLC·NVMe KV 확장·텔레메트리). Phase 1은 SSD 층만 우리 것입니다(KV-ready QLC). Phase 2는 캐시 관리자의 빈도 필터·퇴거 정책이 트레이스의 원천이고, I/O 라이브러리의 io_uring·GDS 백엔드에 write stream을 부착하며 커널 스트림과 CMX 힌트 매핑을 검증해 RUH 정책·WAF·유효 DWPD 실측을 공개합니다. Phase 3는 캐시 관리자 4종에 플러그인을 메인라인으로 머지하고, NIXL·xNVMe가 기본 백엔드가 되며, DOCA Memos와 배치 표준의 매핑을 NVIDIA와 공동 정의하고, 응용 층은 커넥터·스케줄러를 이해해 공용 TCO 모델(GPU당 동시 사용자·TTFT·전력)로 대화합니다. FDE(Forward Deployed Engineer)가 고객 옆에 상주합니다. 삼성 현 위치는 Phase 1 확보, Phase 2 진입: KV cache 백서 2종으로 측정 역량은 있으나 트레이스 기반 실측이 미공개이고 캐시 관리자 4종에 기여가 없습니다. 오케스트레이션 자체는 만들지 않습니다.</a:t>
             </a:r>
           </a:p>
         </p:txBody>

--- a/outputs/presentation/qlc-ssd-strategy.pptx
+++ b/outputs/presentation/qlc-ssd-strategy.pptx
@@ -3916,7 +3916,7 @@
                 <a:latin typeface="Arial"/>
                 <a:ea typeface="Arial"/>
               </a:rPr>
-              <a:t>DT19·DT23 두 다운턴과 QLC eSSD 연혁을 동일 시간축에 배치해 도출한 세 교훈이 이후 세 장의 논리적 전제입니다.</a:t>
+              <a:t>DT19·DT23 두 다운턴과 QLC eSSD 연혁을 동일 시간축에 놓고 도출한 세 교훈이 이후 세 장의 전제입니다.</a:t>
             </a:r>
           </a:p>
         </p:txBody>
@@ -3973,7 +3973,7 @@
         </p:nvSpPr>
         <p:spPr>
           <a:xfrm>
-            <a:off x="996696" y="3447288"/>
+            <a:off x="996696" y="3209544"/>
             <a:ext cx="16294608" cy="18288"/>
           </a:xfrm>
           <a:prstGeom prst="rect">
@@ -4017,7 +4017,7 @@
         </p:nvSpPr>
         <p:spPr>
           <a:xfrm>
-            <a:off x="1974372" y="3337560"/>
+            <a:off x="1974372" y="3099816"/>
             <a:ext cx="1564282" cy="237744"/>
           </a:xfrm>
           <a:prstGeom prst="rect">
@@ -4061,7 +4061,7 @@
         </p:nvSpPr>
         <p:spPr>
           <a:xfrm>
-            <a:off x="1791492" y="3611879"/>
+            <a:off x="1791492" y="3364992"/>
             <a:ext cx="3027322" cy="201168"/>
           </a:xfrm>
           <a:prstGeom prst="rect">
@@ -4088,7 +4088,7 @@
                 <a:latin typeface="Arial"/>
                 <a:ea typeface="Arial"/>
               </a:rPr>
-              <a:t>DT19 재고 조정 국면 · 매출 낙폭 -37.6%</a:t>
+              <a:t>DT19 재고 조정 · -37.6%</a:t>
             </a:r>
           </a:p>
         </p:txBody>
@@ -4101,7 +4101,7 @@
         </p:nvSpPr>
         <p:spPr>
           <a:xfrm>
-            <a:off x="6536862" y="3337560"/>
+            <a:off x="6536862" y="3099816"/>
             <a:ext cx="1955352" cy="237744"/>
           </a:xfrm>
           <a:prstGeom prst="rect">
@@ -4145,7 +4145,7 @@
         </p:nvSpPr>
         <p:spPr>
           <a:xfrm>
-            <a:off x="6353982" y="3611879"/>
+            <a:off x="6353982" y="3364992"/>
             <a:ext cx="3418392" cy="201168"/>
           </a:xfrm>
           <a:prstGeom prst="rect">
@@ -4172,7 +4172,7 @@
                 <a:latin typeface="Arial"/>
                 <a:ea typeface="Arial"/>
               </a:rPr>
-              <a:t>DT23 최대 낙폭 -45% · 진앙은 eSSD</a:t>
+              <a:t>DT23 최대 낙폭 -45% · 진앙 eSSD</a:t>
             </a:r>
           </a:p>
         </p:txBody>
@@ -4185,7 +4185,7 @@
         </p:nvSpPr>
         <p:spPr>
           <a:xfrm>
-            <a:off x="13380598" y="3337560"/>
+            <a:off x="13380598" y="3099816"/>
             <a:ext cx="977676" cy="237744"/>
           </a:xfrm>
           <a:prstGeom prst="rect">
@@ -4231,7 +4231,7 @@
         </p:nvSpPr>
         <p:spPr>
           <a:xfrm>
-            <a:off x="13106278" y="3611879"/>
+            <a:off x="13106278" y="3364992"/>
             <a:ext cx="2377440" cy="201168"/>
           </a:xfrm>
           <a:prstGeom prst="rect">
@@ -4258,7 +4258,7 @@
                 <a:latin typeface="Arial"/>
                 <a:ea typeface="Arial"/>
               </a:rPr>
-              <a:t>차기 전환점(e) · 가격 정상화 국면</a:t>
+              <a:t>차기 전환점(e) · 가격 정상화</a:t>
             </a:r>
           </a:p>
         </p:txBody>
@@ -4271,7 +4271,7 @@
         </p:nvSpPr>
         <p:spPr>
           <a:xfrm>
-            <a:off x="630936" y="3822191"/>
+            <a:off x="630936" y="3566160"/>
             <a:ext cx="731520" cy="182880"/>
           </a:xfrm>
           <a:prstGeom prst="rect">
@@ -4311,7 +4311,7 @@
         </p:nvSpPr>
         <p:spPr>
           <a:xfrm>
-            <a:off x="3238073" y="3822191"/>
+            <a:off x="3238073" y="3566160"/>
             <a:ext cx="731520" cy="182880"/>
           </a:xfrm>
           <a:prstGeom prst="rect">
@@ -4351,7 +4351,7 @@
         </p:nvSpPr>
         <p:spPr>
           <a:xfrm>
-            <a:off x="5845210" y="3822191"/>
+            <a:off x="5845210" y="3566160"/>
             <a:ext cx="731520" cy="182880"/>
           </a:xfrm>
           <a:prstGeom prst="rect">
@@ -4391,7 +4391,7 @@
         </p:nvSpPr>
         <p:spPr>
           <a:xfrm>
-            <a:off x="8452347" y="3822191"/>
+            <a:off x="8452347" y="3566160"/>
             <a:ext cx="731520" cy="182880"/>
           </a:xfrm>
           <a:prstGeom prst="rect">
@@ -4431,7 +4431,7 @@
         </p:nvSpPr>
         <p:spPr>
           <a:xfrm>
-            <a:off x="11059485" y="3822191"/>
+            <a:off x="11059485" y="3566160"/>
             <a:ext cx="731520" cy="182880"/>
           </a:xfrm>
           <a:prstGeom prst="rect">
@@ -4471,7 +4471,7 @@
         </p:nvSpPr>
         <p:spPr>
           <a:xfrm>
-            <a:off x="13666622" y="3822191"/>
+            <a:off x="13666622" y="3566160"/>
             <a:ext cx="731520" cy="182880"/>
           </a:xfrm>
           <a:prstGeom prst="rect">
@@ -4511,7 +4511,7 @@
         </p:nvSpPr>
         <p:spPr>
           <a:xfrm>
-            <a:off x="16273759" y="3822191"/>
+            <a:off x="16273759" y="3566160"/>
             <a:ext cx="731520" cy="182880"/>
           </a:xfrm>
           <a:prstGeom prst="rect">
@@ -4551,7 +4551,7 @@
         </p:nvSpPr>
         <p:spPr>
           <a:xfrm>
-            <a:off x="2618183" y="3383279"/>
+            <a:off x="2618183" y="3145536"/>
             <a:ext cx="146304" cy="146304"/>
           </a:xfrm>
           <a:prstGeom prst="ellipse">
@@ -4595,8 +4595,8 @@
         </p:nvSpPr>
         <p:spPr>
           <a:xfrm>
-            <a:off x="2685848" y="2889503"/>
-            <a:ext cx="10972" cy="457200"/>
+            <a:off x="2685848" y="2834640"/>
+            <a:ext cx="10972" cy="274320"/>
           </a:xfrm>
           <a:prstGeom prst="rect">
             <a:avLst/>
@@ -4639,8 +4639,8 @@
         </p:nvSpPr>
         <p:spPr>
           <a:xfrm>
-            <a:off x="1594055" y="2450591"/>
-            <a:ext cx="2194560" cy="219456"/>
+            <a:off x="1411175" y="2615184"/>
+            <a:ext cx="2560320" cy="219456"/>
           </a:xfrm>
           <a:prstGeom prst="rect">
             <a:avLst/>
@@ -4659,45 +4659,15 @@
               </a:lnSpc>
             </a:pPr>
             <a:r>
-              <a:rPr sz="1275" b="1">
+              <a:rPr sz="1125" b="1">
                 <a:solidFill>
                   <a:srgbClr val="1A1A1A"/>
                 </a:solidFill>
                 <a:latin typeface="Arial"/>
                 <a:ea typeface="Arial"/>
               </a:rPr>
-              <a:t>2019</a:t>
-            </a:r>
-          </a:p>
-        </p:txBody>
-      </p:sp>
-      <p:sp>
-        <p:nvSpPr>
-          <p:cNvPr id="25" name="TextBox 24"/>
-          <p:cNvSpPr txBox="1"/>
-          <p:nvPr/>
-        </p:nvSpPr>
-        <p:spPr>
-          <a:xfrm>
-            <a:off x="1594055" y="2651760"/>
-            <a:ext cx="2194560" cy="274320"/>
-          </a:xfrm>
-          <a:prstGeom prst="rect">
-            <a:avLst/>
-          </a:prstGeom>
-          <a:noFill/>
-        </p:spPr>
-        <p:txBody>
-          <a:bodyPr wrap="square" anchor="t" lIns="0" rIns="0" tIns="0" bIns="0">
-            <a:spAutoFit/>
-          </a:bodyPr>
-          <a:lstStyle/>
-          <a:p>
-            <a:pPr algn="ctr">
-              <a:lnSpc>
-                <a:spcPct val="100000"/>
-              </a:lnSpc>
-            </a:pPr>
+              <a:t>2019  </a:t>
+            </a:r>
             <a:r>
               <a:rPr sz="1125" b="0">
                 <a:solidFill>
@@ -4706,20 +4676,20 @@
                 <a:latin typeface="Arial"/>
                 <a:ea typeface="Arial"/>
               </a:rPr>
-              <a:t>DT19 중 HBM 조직 축소</a:t>
-            </a:r>
-          </a:p>
-        </p:txBody>
-      </p:sp>
-      <p:sp>
-        <p:nvSpPr>
-          <p:cNvPr id="26" name="Oval 25"/>
+              <a:t>HBM 조직 축소</a:t>
+            </a:r>
+          </a:p>
+        </p:txBody>
+      </p:sp>
+      <p:sp>
+        <p:nvSpPr>
+          <p:cNvPr id="25" name="Oval 24"/>
           <p:cNvSpPr/>
           <p:nvPr/>
         </p:nvSpPr>
         <p:spPr>
           <a:xfrm>
-            <a:off x="7376208" y="3383279"/>
+            <a:off x="7376208" y="3145536"/>
             <a:ext cx="146304" cy="146304"/>
           </a:xfrm>
           <a:prstGeom prst="ellipse">
@@ -4757,14 +4727,14 @@
       </p:sp>
       <p:sp>
         <p:nvSpPr>
-          <p:cNvPr id="27" name="Rectangle 26"/>
+          <p:cNvPr id="26" name="Rectangle 25"/>
           <p:cNvSpPr/>
           <p:nvPr/>
         </p:nvSpPr>
         <p:spPr>
           <a:xfrm>
-            <a:off x="7443874" y="3566160"/>
-            <a:ext cx="10972" cy="475488"/>
+            <a:off x="7443874" y="3328416"/>
+            <a:ext cx="10972" cy="402336"/>
           </a:xfrm>
           <a:prstGeom prst="rect">
             <a:avLst/>
@@ -4801,14 +4771,14 @@
       </p:sp>
       <p:sp>
         <p:nvSpPr>
-          <p:cNvPr id="28" name="TextBox 27"/>
+          <p:cNvPr id="27" name="TextBox 26"/>
           <p:cNvSpPr txBox="1"/>
           <p:nvPr/>
         </p:nvSpPr>
         <p:spPr>
           <a:xfrm>
-            <a:off x="6352080" y="4059935"/>
-            <a:ext cx="2194560" cy="219456"/>
+            <a:off x="6169200" y="3749039"/>
+            <a:ext cx="2560320" cy="219456"/>
           </a:xfrm>
           <a:prstGeom prst="rect">
             <a:avLst/>
@@ -4827,45 +4797,15 @@
               </a:lnSpc>
             </a:pPr>
             <a:r>
-              <a:rPr sz="1275" b="1">
+              <a:rPr sz="1125" b="1">
                 <a:solidFill>
                   <a:srgbClr val="1A1A1A"/>
                 </a:solidFill>
                 <a:latin typeface="Arial"/>
                 <a:ea typeface="Arial"/>
               </a:rPr>
-              <a:t>2022-12</a:t>
-            </a:r>
-          </a:p>
-        </p:txBody>
-      </p:sp>
-      <p:sp>
-        <p:nvSpPr>
-          <p:cNvPr id="29" name="TextBox 28"/>
-          <p:cNvSpPr txBox="1"/>
-          <p:nvPr/>
-        </p:nvSpPr>
-        <p:spPr>
-          <a:xfrm>
-            <a:off x="6352080" y="4261104"/>
-            <a:ext cx="2194560" cy="274320"/>
-          </a:xfrm>
-          <a:prstGeom prst="rect">
-            <a:avLst/>
-          </a:prstGeom>
-          <a:noFill/>
-        </p:spPr>
-        <p:txBody>
-          <a:bodyPr wrap="square" anchor="t" lIns="0" rIns="0" tIns="0" bIns="0">
-            <a:spAutoFit/>
-          </a:bodyPr>
-          <a:lstStyle/>
-          <a:p>
-            <a:pPr algn="ctr">
-              <a:lnSpc>
-                <a:spcPct val="100000"/>
-              </a:lnSpc>
-            </a:pPr>
+              <a:t>2022-12  </a:t>
+            </a:r>
             <a:r>
               <a:rPr sz="1125" b="0">
                 <a:solidFill>
@@ -4877,34 +4817,17 @@
               <a:t>데이터 배치 표준 비준</a:t>
             </a:r>
           </a:p>
-          <a:p>
-            <a:pPr algn="ctr">
-              <a:lnSpc>
-                <a:spcPct val="100000"/>
-              </a:lnSpc>
-            </a:pPr>
-            <a:r>
-              <a:rPr sz="1125" b="0">
-                <a:solidFill>
-                  <a:srgbClr val="555555"/>
-                </a:solidFill>
-                <a:latin typeface="Arial"/>
-                <a:ea typeface="Arial"/>
-              </a:rPr>
-              <a:t>eSSD 매출 -27% 국면</a:t>
-            </a:r>
-          </a:p>
-        </p:txBody>
-      </p:sp>
-      <p:sp>
-        <p:nvSpPr>
-          <p:cNvPr id="30" name="Oval 29"/>
+        </p:txBody>
+      </p:sp>
+      <p:sp>
+        <p:nvSpPr>
+          <p:cNvPr id="28" name="Oval 27"/>
           <p:cNvSpPr/>
           <p:nvPr/>
         </p:nvSpPr>
         <p:spPr>
           <a:xfrm>
-            <a:off x="8158349" y="3383279"/>
+            <a:off x="8158349" y="3145536"/>
             <a:ext cx="146304" cy="146304"/>
           </a:xfrm>
           <a:prstGeom prst="ellipse">
@@ -4942,14 +4865,14 @@
       </p:sp>
       <p:sp>
         <p:nvSpPr>
-          <p:cNvPr id="31" name="Rectangle 30"/>
+          <p:cNvPr id="29" name="Rectangle 28"/>
           <p:cNvSpPr/>
           <p:nvPr/>
         </p:nvSpPr>
         <p:spPr>
           <a:xfrm>
-            <a:off x="8226015" y="2889503"/>
-            <a:ext cx="10972" cy="457200"/>
+            <a:off x="8226015" y="2834640"/>
+            <a:ext cx="10972" cy="274320"/>
           </a:xfrm>
           <a:prstGeom prst="rect">
             <a:avLst/>
@@ -4986,14 +4909,14 @@
       </p:sp>
       <p:sp>
         <p:nvSpPr>
-          <p:cNvPr id="32" name="TextBox 31"/>
+          <p:cNvPr id="30" name="TextBox 29"/>
           <p:cNvSpPr txBox="1"/>
           <p:nvPr/>
         </p:nvSpPr>
         <p:spPr>
           <a:xfrm>
-            <a:off x="7134221" y="2450591"/>
-            <a:ext cx="2194560" cy="219456"/>
+            <a:off x="6951341" y="2615184"/>
+            <a:ext cx="2560320" cy="219456"/>
           </a:xfrm>
           <a:prstGeom prst="rect">
             <a:avLst/>
@@ -5012,45 +4935,15 @@
               </a:lnSpc>
             </a:pPr>
             <a:r>
-              <a:rPr sz="1275" b="1">
+              <a:rPr sz="1125" b="1">
                 <a:solidFill>
                   <a:srgbClr val="1A1A1A"/>
                 </a:solidFill>
                 <a:latin typeface="Arial"/>
                 <a:ea typeface="Arial"/>
               </a:rPr>
-              <a:t>2023-07</a:t>
-            </a:r>
-          </a:p>
-        </p:txBody>
-      </p:sp>
-      <p:sp>
-        <p:nvSpPr>
-          <p:cNvPr id="33" name="TextBox 32"/>
-          <p:cNvSpPr txBox="1"/>
-          <p:nvPr/>
-        </p:nvSpPr>
-        <p:spPr>
-          <a:xfrm>
-            <a:off x="7134221" y="2651760"/>
-            <a:ext cx="2194560" cy="274320"/>
-          </a:xfrm>
-          <a:prstGeom prst="rect">
-            <a:avLst/>
-          </a:prstGeom>
-          <a:noFill/>
-        </p:spPr>
-        <p:txBody>
-          <a:bodyPr wrap="square" anchor="t" lIns="0" rIns="0" tIns="0" bIns="0">
-            <a:spAutoFit/>
-          </a:bodyPr>
-          <a:lstStyle/>
-          <a:p>
-            <a:pPr algn="ctr">
-              <a:lnSpc>
-                <a:spcPct val="100000"/>
-              </a:lnSpc>
-            </a:pPr>
+              <a:t>2023-07  </a:t>
+            </a:r>
             <a:r>
               <a:rPr sz="1125" b="0">
                 <a:solidFill>
@@ -5059,37 +4952,20 @@
                 <a:latin typeface="Arial"/>
                 <a:ea typeface="Arial"/>
               </a:rPr>
-              <a:t>Solidigm 61.44TB QLC 출시</a:t>
-            </a:r>
-          </a:p>
-          <a:p>
-            <a:pPr algn="ctr">
-              <a:lnSpc>
-                <a:spcPct val="100000"/>
-              </a:lnSpc>
-            </a:pPr>
-            <a:r>
-              <a:rPr sz="1125" b="0">
-                <a:solidFill>
-                  <a:srgbClr val="555555"/>
-                </a:solidFill>
-                <a:latin typeface="Arial"/>
-                <a:ea typeface="Arial"/>
-              </a:rPr>
-              <a:t>삼성 대비 12개월 선행</a:t>
-            </a:r>
-          </a:p>
-        </p:txBody>
-      </p:sp>
-      <p:sp>
-        <p:nvSpPr>
-          <p:cNvPr id="34" name="Oval 33"/>
+              <a:t>Solidigm 61TB, 12개월 선행</a:t>
+            </a:r>
+          </a:p>
+        </p:txBody>
+      </p:sp>
+      <p:sp>
+        <p:nvSpPr>
+          <p:cNvPr id="31" name="Oval 30"/>
           <p:cNvSpPr/>
           <p:nvPr/>
         </p:nvSpPr>
         <p:spPr>
           <a:xfrm>
-            <a:off x="9722632" y="3383279"/>
+            <a:off x="9722632" y="3145536"/>
             <a:ext cx="146304" cy="146304"/>
           </a:xfrm>
           <a:prstGeom prst="ellipse">
@@ -5127,14 +5003,14 @@
       </p:sp>
       <p:sp>
         <p:nvSpPr>
-          <p:cNvPr id="35" name="Rectangle 34"/>
+          <p:cNvPr id="32" name="Rectangle 31"/>
           <p:cNvSpPr/>
           <p:nvPr/>
         </p:nvSpPr>
         <p:spPr>
           <a:xfrm>
-            <a:off x="9790297" y="3566160"/>
-            <a:ext cx="10972" cy="475488"/>
+            <a:off x="9790297" y="3328416"/>
+            <a:ext cx="10972" cy="402336"/>
           </a:xfrm>
           <a:prstGeom prst="rect">
             <a:avLst/>
@@ -5171,14 +5047,14 @@
       </p:sp>
       <p:sp>
         <p:nvSpPr>
-          <p:cNvPr id="36" name="TextBox 35"/>
+          <p:cNvPr id="33" name="TextBox 32"/>
           <p:cNvSpPr txBox="1"/>
           <p:nvPr/>
         </p:nvSpPr>
         <p:spPr>
           <a:xfrm>
-            <a:off x="8698504" y="4059935"/>
-            <a:ext cx="2194560" cy="219456"/>
+            <a:off x="8515624" y="3749039"/>
+            <a:ext cx="2560320" cy="219456"/>
           </a:xfrm>
           <a:prstGeom prst="rect">
             <a:avLst/>
@@ -5197,45 +5073,15 @@
               </a:lnSpc>
             </a:pPr>
             <a:r>
-              <a:rPr sz="1275" b="1">
+              <a:rPr sz="1125" b="1">
                 <a:solidFill>
                   <a:srgbClr val="1A1A1A"/>
                 </a:solidFill>
                 <a:latin typeface="Arial"/>
                 <a:ea typeface="Arial"/>
               </a:rPr>
-              <a:t>2024</a:t>
-            </a:r>
-          </a:p>
-        </p:txBody>
-      </p:sp>
-      <p:sp>
-        <p:nvSpPr>
-          <p:cNvPr id="37" name="TextBox 36"/>
-          <p:cNvSpPr txBox="1"/>
-          <p:nvPr/>
-        </p:nvSpPr>
-        <p:spPr>
-          <a:xfrm>
-            <a:off x="8698504" y="4261104"/>
-            <a:ext cx="2194560" cy="274320"/>
-          </a:xfrm>
-          <a:prstGeom prst="rect">
-            <a:avLst/>
-          </a:prstGeom>
-          <a:noFill/>
-        </p:spPr>
-        <p:txBody>
-          <a:bodyPr wrap="square" anchor="t" lIns="0" rIns="0" tIns="0" bIns="0">
-            <a:spAutoFit/>
-          </a:bodyPr>
-          <a:lstStyle/>
-          <a:p>
-            <a:pPr algn="ctr">
-              <a:lnSpc>
-                <a:spcPct val="100000"/>
-              </a:lnSpc>
-            </a:pPr>
+              <a:t>2024  </a:t>
+            </a:r>
             <a:r>
               <a:rPr sz="1125" b="0">
                 <a:solidFill>
@@ -5244,37 +5090,20 @@
                 <a:latin typeface="Arial"/>
                 <a:ea typeface="Arial"/>
               </a:rPr>
-              <a:t>QLC eSSD 비트 출하 30EB(4배)</a:t>
-            </a:r>
-          </a:p>
-          <a:p>
-            <a:pPr algn="ctr">
-              <a:lnSpc>
-                <a:spcPct val="100000"/>
-              </a:lnSpc>
-            </a:pPr>
-            <a:r>
-              <a:rPr sz="1125" b="0">
-                <a:solidFill>
-                  <a:srgbClr val="555555"/>
-                </a:solidFill>
-                <a:latin typeface="Arial"/>
-                <a:ea typeface="Arial"/>
-              </a:rPr>
-              <a:t>Solidigm 흑자 전환</a:t>
-            </a:r>
-          </a:p>
-        </p:txBody>
-      </p:sp>
-      <p:sp>
-        <p:nvSpPr>
-          <p:cNvPr id="38" name="Oval 37"/>
+              <a:t>비트 출하 30EB(4배)</a:t>
+            </a:r>
+          </a:p>
+        </p:txBody>
+      </p:sp>
+      <p:sp>
+        <p:nvSpPr>
+          <p:cNvPr id="34" name="Oval 33"/>
           <p:cNvSpPr/>
           <p:nvPr/>
         </p:nvSpPr>
         <p:spPr>
           <a:xfrm>
-            <a:off x="12134234" y="3383279"/>
+            <a:off x="12134234" y="3145536"/>
             <a:ext cx="146304" cy="146304"/>
           </a:xfrm>
           <a:prstGeom prst="ellipse">
@@ -5312,14 +5141,14 @@
       </p:sp>
       <p:sp>
         <p:nvSpPr>
-          <p:cNvPr id="39" name="Rectangle 38"/>
+          <p:cNvPr id="35" name="Rectangle 34"/>
           <p:cNvSpPr/>
           <p:nvPr/>
         </p:nvSpPr>
         <p:spPr>
           <a:xfrm>
-            <a:off x="12201899" y="2889503"/>
-            <a:ext cx="10972" cy="457200"/>
+            <a:off x="12201899" y="2834640"/>
+            <a:ext cx="10972" cy="274320"/>
           </a:xfrm>
           <a:prstGeom prst="rect">
             <a:avLst/>
@@ -5356,14 +5185,14 @@
       </p:sp>
       <p:sp>
         <p:nvSpPr>
-          <p:cNvPr id="40" name="TextBox 39"/>
+          <p:cNvPr id="36" name="TextBox 35"/>
           <p:cNvSpPr txBox="1"/>
           <p:nvPr/>
         </p:nvSpPr>
         <p:spPr>
           <a:xfrm>
-            <a:off x="11110106" y="2450591"/>
-            <a:ext cx="2194560" cy="219456"/>
+            <a:off x="10927226" y="2615184"/>
+            <a:ext cx="2560320" cy="219456"/>
           </a:xfrm>
           <a:prstGeom prst="rect">
             <a:avLst/>
@@ -5382,45 +5211,15 @@
               </a:lnSpc>
             </a:pPr>
             <a:r>
-              <a:rPr sz="1275" b="1">
+              <a:rPr sz="1125" b="1">
                 <a:solidFill>
                   <a:srgbClr val="1A1A1A"/>
                 </a:solidFill>
                 <a:latin typeface="Arial"/>
                 <a:ea typeface="Arial"/>
               </a:rPr>
-              <a:t>2026</a:t>
-            </a:r>
-          </a:p>
-        </p:txBody>
-      </p:sp>
-      <p:sp>
-        <p:nvSpPr>
-          <p:cNvPr id="41" name="TextBox 40"/>
-          <p:cNvSpPr txBox="1"/>
-          <p:nvPr/>
-        </p:nvSpPr>
-        <p:spPr>
-          <a:xfrm>
-            <a:off x="11110106" y="2651760"/>
-            <a:ext cx="2194560" cy="274320"/>
-          </a:xfrm>
-          <a:prstGeom prst="rect">
-            <a:avLst/>
-          </a:prstGeom>
-          <a:noFill/>
-        </p:spPr>
-        <p:txBody>
-          <a:bodyPr wrap="square" anchor="t" lIns="0" rIns="0" tIns="0" bIns="0">
-            <a:spAutoFit/>
-          </a:bodyPr>
-          <a:lstStyle/>
-          <a:p>
-            <a:pPr algn="ctr">
-              <a:lnSpc>
-                <a:spcPct val="100000"/>
-              </a:lnSpc>
-            </a:pPr>
+              <a:t>2026  </a:t>
+            </a:r>
             <a:r>
               <a:rPr sz="1125" b="0">
                 <a:solidFill>
@@ -5429,37 +5228,20 @@
                 <a:latin typeface="Arial"/>
                 <a:ea typeface="Arial"/>
               </a:rPr>
-              <a:t>KV 캐시 관리자 4종</a:t>
-            </a:r>
-          </a:p>
-          <a:p>
-            <a:pPr algn="ctr">
-              <a:lnSpc>
-                <a:spcPct val="100000"/>
-              </a:lnSpc>
-            </a:pPr>
-            <a:r>
-              <a:rPr sz="1125" b="0">
-                <a:solidFill>
-                  <a:srgbClr val="555555"/>
-                </a:solidFill>
-                <a:latin typeface="Arial"/>
-                <a:ea typeface="Arial"/>
-              </a:rPr>
-              <a:t>데이터 배치 규격 미정의</a:t>
-            </a:r>
-          </a:p>
-        </p:txBody>
-      </p:sp>
-      <p:sp>
-        <p:nvSpPr>
-          <p:cNvPr id="42" name="Oval 41"/>
+              <a:t>캐시 관리자 규격 미정의</a:t>
+            </a:r>
+          </a:p>
+        </p:txBody>
+      </p:sp>
+      <p:sp>
+        <p:nvSpPr>
+          <p:cNvPr id="37" name="Oval 36"/>
           <p:cNvSpPr/>
           <p:nvPr/>
         </p:nvSpPr>
         <p:spPr>
           <a:xfrm>
-            <a:off x="16827081" y="3383279"/>
+            <a:off x="16827081" y="3145536"/>
             <a:ext cx="146304" cy="146304"/>
           </a:xfrm>
           <a:prstGeom prst="ellipse">
@@ -5497,14 +5279,14 @@
       </p:sp>
       <p:sp>
         <p:nvSpPr>
-          <p:cNvPr id="43" name="Rectangle 42"/>
+          <p:cNvPr id="38" name="Rectangle 37"/>
           <p:cNvSpPr/>
           <p:nvPr/>
         </p:nvSpPr>
         <p:spPr>
           <a:xfrm>
-            <a:off x="16894747" y="3566160"/>
-            <a:ext cx="10972" cy="475488"/>
+            <a:off x="16894747" y="3328416"/>
+            <a:ext cx="10972" cy="402336"/>
           </a:xfrm>
           <a:prstGeom prst="rect">
             <a:avLst/>
@@ -5541,14 +5323,14 @@
       </p:sp>
       <p:sp>
         <p:nvSpPr>
-          <p:cNvPr id="44" name="TextBox 43"/>
+          <p:cNvPr id="39" name="TextBox 38"/>
           <p:cNvSpPr txBox="1"/>
           <p:nvPr/>
         </p:nvSpPr>
         <p:spPr>
           <a:xfrm>
-            <a:off x="15802953" y="4059935"/>
-            <a:ext cx="2194560" cy="219456"/>
+            <a:off x="14522793" y="3749039"/>
+            <a:ext cx="2596896" cy="219456"/>
           </a:xfrm>
           <a:prstGeom prst="rect">
             <a:avLst/>
@@ -5561,51 +5343,21 @@
           </a:bodyPr>
           <a:lstStyle/>
           <a:p>
-            <a:pPr algn="ctr">
+            <a:pPr algn="r">
               <a:lnSpc>
                 <a:spcPct val="112000"/>
               </a:lnSpc>
             </a:pPr>
             <a:r>
-              <a:rPr sz="1275" b="1">
+              <a:rPr sz="1125" b="1">
                 <a:solidFill>
                   <a:srgbClr val="1A1A1A"/>
                 </a:solidFill>
                 <a:latin typeface="Arial"/>
                 <a:ea typeface="Arial"/>
               </a:rPr>
-              <a:t>2030</a:t>
-            </a:r>
-          </a:p>
-        </p:txBody>
-      </p:sp>
-      <p:sp>
-        <p:nvSpPr>
-          <p:cNvPr id="45" name="TextBox 44"/>
-          <p:cNvSpPr txBox="1"/>
-          <p:nvPr/>
-        </p:nvSpPr>
-        <p:spPr>
-          <a:xfrm>
-            <a:off x="15802953" y="4261104"/>
-            <a:ext cx="2194560" cy="274320"/>
-          </a:xfrm>
-          <a:prstGeom prst="rect">
-            <a:avLst/>
-          </a:prstGeom>
-          <a:noFill/>
-        </p:spPr>
-        <p:txBody>
-          <a:bodyPr wrap="square" anchor="t" lIns="0" rIns="0" tIns="0" bIns="0">
-            <a:spAutoFit/>
-          </a:bodyPr>
-          <a:lstStyle/>
-          <a:p>
-            <a:pPr algn="ctr">
-              <a:lnSpc>
-                <a:spcPct val="100000"/>
-              </a:lnSpc>
-            </a:pPr>
+              <a:t>2030  </a:t>
+            </a:r>
             <a:r>
               <a:rPr sz="1125" b="0">
                 <a:solidFill>
@@ -5614,37 +5366,20 @@
                 <a:latin typeface="Arial"/>
                 <a:ea typeface="Arial"/>
               </a:rPr>
-              <a:t>QLC 비트 550EB(10배)</a:t>
-            </a:r>
-          </a:p>
-          <a:p>
-            <a:pPr algn="ctr">
-              <a:lnSpc>
-                <a:spcPct val="100000"/>
-              </a:lnSpc>
-            </a:pPr>
-            <a:r>
-              <a:rPr sz="1125" b="0">
-                <a:solidFill>
-                  <a:srgbClr val="555555"/>
-                </a:solidFill>
-                <a:latin typeface="Arial"/>
-                <a:ea typeface="Arial"/>
-              </a:rPr>
-              <a:t>매출 정체(e)</a:t>
-            </a:r>
-          </a:p>
-        </p:txBody>
-      </p:sp>
-      <p:sp>
-        <p:nvSpPr>
-          <p:cNvPr id="46" name="Rectangle 45"/>
+              <a:t>비트 10배 · 매출 정체(e)</a:t>
+            </a:r>
+          </a:p>
+        </p:txBody>
+      </p:sp>
+      <p:sp>
+        <p:nvSpPr>
+          <p:cNvPr id="40" name="Rectangle 39"/>
           <p:cNvSpPr/>
           <p:nvPr/>
         </p:nvSpPr>
         <p:spPr>
           <a:xfrm>
-            <a:off x="996696" y="4681728"/>
+            <a:off x="996696" y="4059936"/>
             <a:ext cx="7701369" cy="237744"/>
           </a:xfrm>
           <a:prstGeom prst="rect">
@@ -5684,13 +5419,13 @@
       </p:sp>
       <p:sp>
         <p:nvSpPr>
-          <p:cNvPr id="47" name="TextBox 46"/>
+          <p:cNvPr id="41" name="TextBox 40"/>
           <p:cNvSpPr txBox="1"/>
           <p:nvPr/>
         </p:nvSpPr>
         <p:spPr>
           <a:xfrm>
-            <a:off x="1124712" y="4681728"/>
+            <a:off x="1124712" y="4059936"/>
             <a:ext cx="7481913" cy="237744"/>
           </a:xfrm>
           <a:prstGeom prst="rect">
@@ -5724,13 +5459,13 @@
       </p:sp>
       <p:sp>
         <p:nvSpPr>
-          <p:cNvPr id="48" name="Rectangle 47"/>
+          <p:cNvPr id="42" name="Rectangle 41"/>
           <p:cNvSpPr/>
           <p:nvPr/>
         </p:nvSpPr>
         <p:spPr>
           <a:xfrm>
-            <a:off x="8818107" y="4681728"/>
+            <a:off x="8818107" y="4059936"/>
             <a:ext cx="3790663" cy="237744"/>
           </a:xfrm>
           <a:prstGeom prst="rect">
@@ -5770,13 +5505,13 @@
       </p:sp>
       <p:sp>
         <p:nvSpPr>
-          <p:cNvPr id="49" name="TextBox 48"/>
+          <p:cNvPr id="43" name="TextBox 42"/>
           <p:cNvSpPr txBox="1"/>
           <p:nvPr/>
         </p:nvSpPr>
         <p:spPr>
           <a:xfrm>
-            <a:off x="8946123" y="4681728"/>
+            <a:off x="8946123" y="4059936"/>
             <a:ext cx="3571207" cy="237744"/>
           </a:xfrm>
           <a:prstGeom prst="rect">
@@ -5810,13 +5545,13 @@
       </p:sp>
       <p:sp>
         <p:nvSpPr>
-          <p:cNvPr id="50" name="Rectangle 49"/>
+          <p:cNvPr id="44" name="Rectangle 43"/>
           <p:cNvSpPr/>
           <p:nvPr/>
         </p:nvSpPr>
         <p:spPr>
           <a:xfrm>
-            <a:off x="12728813" y="4681728"/>
+            <a:off x="12728813" y="4059936"/>
             <a:ext cx="4507626" cy="237744"/>
           </a:xfrm>
           <a:prstGeom prst="rect">
@@ -5854,13 +5589,13 @@
       </p:sp>
       <p:sp>
         <p:nvSpPr>
-          <p:cNvPr id="51" name="Rectangle 50"/>
+          <p:cNvPr id="45" name="Rectangle 44"/>
           <p:cNvSpPr/>
           <p:nvPr/>
         </p:nvSpPr>
         <p:spPr>
           <a:xfrm>
-            <a:off x="12728813" y="4681728"/>
+            <a:off x="12728813" y="4059936"/>
             <a:ext cx="54864" cy="237744"/>
           </a:xfrm>
           <a:prstGeom prst="rect">
@@ -5898,13 +5633,13 @@
       </p:sp>
       <p:sp>
         <p:nvSpPr>
-          <p:cNvPr id="52" name="TextBox 51"/>
+          <p:cNvPr id="46" name="TextBox 45"/>
           <p:cNvSpPr txBox="1"/>
           <p:nvPr/>
         </p:nvSpPr>
         <p:spPr>
           <a:xfrm>
-            <a:off x="12856829" y="4681728"/>
+            <a:off x="12856829" y="4059936"/>
             <a:ext cx="4288170" cy="237744"/>
           </a:xfrm>
           <a:prstGeom prst="rect">
@@ -5938,14 +5673,14 @@
       </p:sp>
       <p:sp>
         <p:nvSpPr>
-          <p:cNvPr id="53" name="Rectangle 52"/>
+          <p:cNvPr id="47" name="Rectangle 46"/>
           <p:cNvSpPr/>
           <p:nvPr/>
         </p:nvSpPr>
         <p:spPr>
           <a:xfrm>
-            <a:off x="722376" y="5102352"/>
-            <a:ext cx="5413248" cy="3072384"/>
+            <a:off x="722376" y="4425696"/>
+            <a:ext cx="5413248" cy="3986783"/>
           </a:xfrm>
           <a:prstGeom prst="rect">
             <a:avLst/>
@@ -5984,13 +5719,13 @@
       </p:sp>
       <p:sp>
         <p:nvSpPr>
-          <p:cNvPr id="54" name="TextBox 53"/>
+          <p:cNvPr id="48" name="TextBox 47"/>
           <p:cNvSpPr txBox="1"/>
           <p:nvPr/>
         </p:nvSpPr>
         <p:spPr>
           <a:xfrm>
-            <a:off x="1069848" y="5285232"/>
+            <a:off x="1069848" y="4590288"/>
             <a:ext cx="4718304" cy="274320"/>
           </a:xfrm>
           <a:prstGeom prst="rect">
@@ -6024,54 +5759,14 @@
       </p:sp>
       <p:sp>
         <p:nvSpPr>
-          <p:cNvPr id="55" name="TextBox 54"/>
+          <p:cNvPr id="49" name="TextBox 48"/>
           <p:cNvSpPr txBox="1"/>
           <p:nvPr/>
         </p:nvSpPr>
         <p:spPr>
           <a:xfrm>
-            <a:off x="1069848" y="5596128"/>
-            <a:ext cx="4718304" cy="585216"/>
-          </a:xfrm>
-          <a:prstGeom prst="rect">
-            <a:avLst/>
-          </a:prstGeom>
-          <a:noFill/>
-        </p:spPr>
-        <p:txBody>
-          <a:bodyPr wrap="square" anchor="t" lIns="0" rIns="0" tIns="0" bIns="0">
-            <a:spAutoFit/>
-          </a:bodyPr>
-          <a:lstStyle/>
-          <a:p>
-            <a:pPr algn="l">
-              <a:lnSpc>
-                <a:spcPct val="106000"/>
-              </a:lnSpc>
-            </a:pPr>
-            <a:r>
-              <a:rPr sz="1575" b="1">
-                <a:solidFill>
-                  <a:srgbClr val="1A1A1A"/>
-                </a:solidFill>
-                <a:latin typeface="Arial"/>
-                <a:ea typeface="Arial"/>
-              </a:rPr>
-              <a:t>수요 신호는 발주보다 약 2년 선행해 고객 규격·코드에 나타난다</a:t>
-            </a:r>
-          </a:p>
-        </p:txBody>
-      </p:sp>
-      <p:sp>
-        <p:nvSpPr>
-          <p:cNvPr id="56" name="TextBox 55"/>
-          <p:cNvSpPr txBox="1"/>
-          <p:nvPr/>
-        </p:nvSpPr>
-        <p:spPr>
-          <a:xfrm>
-            <a:off x="1069848" y="6483096"/>
-            <a:ext cx="1143000" cy="237744"/>
+            <a:off x="1069848" y="4901184"/>
+            <a:ext cx="1874519" cy="512064"/>
           </a:xfrm>
           <a:prstGeom prst="rect">
             <a:avLst/>
@@ -6090,28 +5785,28 @@
               </a:lnSpc>
             </a:pPr>
             <a:r>
-              <a:rPr sz="1125" b="1">
-                <a:solidFill>
-                  <a:srgbClr val="1A1A1A"/>
-                </a:solidFill>
-                <a:latin typeface="Arial"/>
-                <a:ea typeface="Arial"/>
-              </a:rPr>
-              <a:t>고객 규격 · 코드</a:t>
-            </a:r>
-          </a:p>
-        </p:txBody>
-      </p:sp>
-      <p:sp>
-        <p:nvSpPr>
-          <p:cNvPr id="57" name="TextBox 56"/>
+              <a:rPr sz="3000" b="1">
+                <a:solidFill>
+                  <a:srgbClr val="1428A0"/>
+                </a:solidFill>
+                <a:latin typeface="Arial"/>
+                <a:ea typeface="Arial"/>
+              </a:rPr>
+              <a:t>2년</a:t>
+            </a:r>
+          </a:p>
+        </p:txBody>
+      </p:sp>
+      <p:sp>
+        <p:nvSpPr>
+          <p:cNvPr id="50" name="TextBox 49"/>
           <p:cNvSpPr txBox="1"/>
           <p:nvPr/>
         </p:nvSpPr>
         <p:spPr>
           <a:xfrm>
-            <a:off x="1069848" y="7159752"/>
-            <a:ext cx="1143000" cy="237744"/>
+            <a:off x="2990088" y="4901184"/>
+            <a:ext cx="2798064" cy="512064"/>
           </a:xfrm>
           <a:prstGeom prst="rect">
             <a:avLst/>
@@ -6126,32 +5821,49 @@
           <a:p>
             <a:pPr algn="l">
               <a:lnSpc>
-                <a:spcPct val="112000"/>
-              </a:lnSpc>
-            </a:pPr>
-            <a:r>
-              <a:rPr sz="1125" b="1">
-                <a:solidFill>
-                  <a:srgbClr val="1A1A1A"/>
-                </a:solidFill>
-                <a:latin typeface="Arial"/>
-                <a:ea typeface="Arial"/>
-              </a:rPr>
-              <a:t>발주 · 비트 출하</a:t>
-            </a:r>
-          </a:p>
-        </p:txBody>
-      </p:sp>
-      <p:sp>
-        <p:nvSpPr>
-          <p:cNvPr id="58" name="Rectangle 57"/>
+                <a:spcPct val="104000"/>
+              </a:lnSpc>
+            </a:pPr>
+            <a:r>
+              <a:rPr sz="1275" b="0">
+                <a:solidFill>
+                  <a:srgbClr val="555555"/>
+                </a:solidFill>
+                <a:latin typeface="Arial"/>
+                <a:ea typeface="Arial"/>
+              </a:rPr>
+              <a:t>고객 규격·코드 신호가</a:t>
+            </a:r>
+          </a:p>
+          <a:p>
+            <a:pPr algn="l">
+              <a:lnSpc>
+                <a:spcPct val="104000"/>
+              </a:lnSpc>
+            </a:pPr>
+            <a:r>
+              <a:rPr sz="1275" b="0">
+                <a:solidFill>
+                  <a:srgbClr val="555555"/>
+                </a:solidFill>
+                <a:latin typeface="Arial"/>
+                <a:ea typeface="Arial"/>
+              </a:rPr>
+              <a:t>발주·출하에 선행</a:t>
+            </a:r>
+          </a:p>
+        </p:txBody>
+      </p:sp>
+      <p:sp>
+        <p:nvSpPr>
+          <p:cNvPr id="51" name="Rectangle 50"/>
           <p:cNvSpPr/>
           <p:nvPr/>
         </p:nvSpPr>
         <p:spPr>
           <a:xfrm>
-            <a:off x="2258568" y="6601968"/>
-            <a:ext cx="3529584" cy="13716"/>
+            <a:off x="1069848" y="5504688"/>
+            <a:ext cx="4718304" cy="10972"/>
           </a:xfrm>
           <a:prstGeom prst="rect">
             <a:avLst/>
@@ -6188,14 +5900,94 @@
       </p:sp>
       <p:sp>
         <p:nvSpPr>
-          <p:cNvPr id="59" name="Rectangle 58"/>
+          <p:cNvPr id="52" name="TextBox 51"/>
+          <p:cNvSpPr txBox="1"/>
+          <p:nvPr/>
+        </p:nvSpPr>
+        <p:spPr>
+          <a:xfrm>
+            <a:off x="1069848" y="5943600"/>
+            <a:ext cx="1188720" cy="256032"/>
+          </a:xfrm>
+          <a:prstGeom prst="rect">
+            <a:avLst/>
+          </a:prstGeom>
+          <a:noFill/>
+        </p:spPr>
+        <p:txBody>
+          <a:bodyPr wrap="square" anchor="ctr" lIns="0" rIns="0" tIns="0" bIns="0">
+            <a:spAutoFit/>
+          </a:bodyPr>
+          <a:lstStyle/>
+          <a:p>
+            <a:pPr algn="l">
+              <a:lnSpc>
+                <a:spcPct val="112000"/>
+              </a:lnSpc>
+            </a:pPr>
+            <a:r>
+              <a:rPr sz="1200" b="1">
+                <a:solidFill>
+                  <a:srgbClr val="1A1A1A"/>
+                </a:solidFill>
+                <a:latin typeface="Arial"/>
+                <a:ea typeface="Arial"/>
+              </a:rPr>
+              <a:t>고객 규격 · 코드</a:t>
+            </a:r>
+          </a:p>
+        </p:txBody>
+      </p:sp>
+      <p:sp>
+        <p:nvSpPr>
+          <p:cNvPr id="53" name="TextBox 52"/>
+          <p:cNvSpPr txBox="1"/>
+          <p:nvPr/>
+        </p:nvSpPr>
+        <p:spPr>
+          <a:xfrm>
+            <a:off x="1069848" y="7232903"/>
+            <a:ext cx="1188720" cy="256032"/>
+          </a:xfrm>
+          <a:prstGeom prst="rect">
+            <a:avLst/>
+          </a:prstGeom>
+          <a:noFill/>
+        </p:spPr>
+        <p:txBody>
+          <a:bodyPr wrap="square" anchor="ctr" lIns="0" rIns="0" tIns="0" bIns="0">
+            <a:spAutoFit/>
+          </a:bodyPr>
+          <a:lstStyle/>
+          <a:p>
+            <a:pPr algn="l">
+              <a:lnSpc>
+                <a:spcPct val="112000"/>
+              </a:lnSpc>
+            </a:pPr>
+            <a:r>
+              <a:rPr sz="1200" b="1">
+                <a:solidFill>
+                  <a:srgbClr val="1A1A1A"/>
+                </a:solidFill>
+                <a:latin typeface="Arial"/>
+                <a:ea typeface="Arial"/>
+              </a:rPr>
+              <a:t>발주 · 비트 출하</a:t>
+            </a:r>
+          </a:p>
+        </p:txBody>
+      </p:sp>
+      <p:sp>
+        <p:nvSpPr>
+          <p:cNvPr id="54" name="Rectangle 53"/>
           <p:cNvSpPr/>
           <p:nvPr/>
         </p:nvSpPr>
         <p:spPr>
           <a:xfrm>
-            <a:off x="2258568" y="7278624"/>
-            <a:ext cx="3529584" cy="13716"/>
+            <a:off x="2304288" y="6071616"/>
+            <a:ext cx="3483864" cy="18288"/>
           </a:xfrm>
           <a:prstGeom prst="rect">
             <a:avLst/>
@@ -6232,14 +6024,58 @@
       </p:sp>
       <p:sp>
         <p:nvSpPr>
-          <p:cNvPr id="60" name="Rectangle 59"/>
+          <p:cNvPr id="55" name="Rectangle 54"/>
           <p:cNvSpPr/>
           <p:nvPr/>
         </p:nvSpPr>
         <p:spPr>
           <a:xfrm>
-            <a:off x="2923702" y="6601968"/>
-            <a:ext cx="10972" cy="237743"/>
+            <a:off x="2304288" y="7360919"/>
+            <a:ext cx="3483864" cy="18288"/>
+          </a:xfrm>
+          <a:prstGeom prst="rect">
+            <a:avLst/>
+          </a:prstGeom>
+          <a:solidFill>
+            <a:srgbClr val="D9D9D9"/>
+          </a:solidFill>
+          <a:ln>
+            <a:noFill/>
+          </a:ln>
+          <a:effectLst/>
+        </p:spPr>
+        <p:style>
+          <a:lnRef idx="1">
+            <a:schemeClr val="accent1"/>
+          </a:lnRef>
+          <a:fillRef idx="3">
+            <a:schemeClr val="accent1"/>
+          </a:fillRef>
+          <a:effectRef idx="2">
+            <a:schemeClr val="accent1"/>
+          </a:effectRef>
+          <a:fontRef idx="minor">
+            <a:schemeClr val="lt1"/>
+          </a:fontRef>
+        </p:style>
+        <p:txBody>
+          <a:bodyPr rtlCol="0" anchor="ctr"/>
+          <a:lstStyle/>
+          <a:p>
+            <a:pPr algn="ctr"/>
+          </a:p>
+        </p:txBody>
+      </p:sp>
+      <p:sp>
+        <p:nvSpPr>
+          <p:cNvPr id="56" name="Rectangle 55"/>
+          <p:cNvSpPr/>
+          <p:nvPr/>
+        </p:nvSpPr>
+        <p:spPr>
+          <a:xfrm>
+            <a:off x="2958906" y="6071616"/>
+            <a:ext cx="14630" cy="507491"/>
           </a:xfrm>
           <a:prstGeom prst="rect">
             <a:avLst/>
@@ -6276,14 +6112,14 @@
       </p:sp>
       <p:sp>
         <p:nvSpPr>
-          <p:cNvPr id="61" name="Rectangle 60"/>
+          <p:cNvPr id="57" name="Rectangle 56"/>
           <p:cNvSpPr/>
           <p:nvPr/>
         </p:nvSpPr>
         <p:spPr>
           <a:xfrm>
-            <a:off x="4017873" y="7040880"/>
-            <a:ext cx="10972" cy="237743"/>
+            <a:off x="4038904" y="6853428"/>
+            <a:ext cx="14630" cy="507491"/>
           </a:xfrm>
           <a:prstGeom prst="rect">
             <a:avLst/>
@@ -6320,14 +6156,14 @@
       </p:sp>
       <p:sp>
         <p:nvSpPr>
-          <p:cNvPr id="62" name="Right Arrow 61"/>
+          <p:cNvPr id="58" name="Right Arrow 57"/>
           <p:cNvSpPr/>
           <p:nvPr/>
         </p:nvSpPr>
         <p:spPr>
           <a:xfrm>
-            <a:off x="2929188" y="6839712"/>
-            <a:ext cx="1094171" cy="201168"/>
+            <a:off x="2966222" y="6579107"/>
+            <a:ext cx="1079997" cy="274320"/>
           </a:xfrm>
           <a:prstGeom prst="rightArrow">
             <a:avLst/>
@@ -6364,14 +6200,14 @@
       </p:sp>
       <p:sp>
         <p:nvSpPr>
-          <p:cNvPr id="63" name="TextBox 62"/>
+          <p:cNvPr id="59" name="TextBox 58"/>
           <p:cNvSpPr txBox="1"/>
           <p:nvPr/>
         </p:nvSpPr>
         <p:spPr>
           <a:xfrm>
-            <a:off x="2929188" y="6839712"/>
-            <a:ext cx="1002731" cy="201168"/>
+            <a:off x="2966222" y="6579107"/>
+            <a:ext cx="970269" cy="274320"/>
           </a:xfrm>
           <a:prstGeom prst="rect">
             <a:avLst/>
@@ -6390,28 +6226,28 @@
               </a:lnSpc>
             </a:pPr>
             <a:r>
-              <a:rPr sz="1050" b="1">
+              <a:rPr sz="1200" b="1">
                 <a:solidFill>
                   <a:srgbClr val="1A1A1A"/>
                 </a:solidFill>
                 <a:latin typeface="Arial"/>
                 <a:ea typeface="Arial"/>
               </a:rPr>
-              <a:t>≈ 2년 선행</a:t>
-            </a:r>
-          </a:p>
-        </p:txBody>
-      </p:sp>
-      <p:sp>
-        <p:nvSpPr>
-          <p:cNvPr id="64" name="Oval 63"/>
+              <a:t>≈ 2년</a:t>
+            </a:r>
+          </a:p>
+        </p:txBody>
+      </p:sp>
+      <p:sp>
+        <p:nvSpPr>
+          <p:cNvPr id="60" name="Oval 59"/>
           <p:cNvSpPr/>
           <p:nvPr/>
         </p:nvSpPr>
         <p:spPr>
           <a:xfrm>
-            <a:off x="2846892" y="6519672"/>
-            <a:ext cx="164592" cy="164592"/>
+            <a:off x="2865638" y="5971032"/>
+            <a:ext cx="201168" cy="201168"/>
           </a:xfrm>
           <a:prstGeom prst="ellipse">
             <a:avLst/>
@@ -6448,13 +6284,13 @@
       </p:sp>
       <p:sp>
         <p:nvSpPr>
-          <p:cNvPr id="65" name="TextBox 64"/>
+          <p:cNvPr id="61" name="TextBox 60"/>
           <p:cNvSpPr txBox="1"/>
           <p:nvPr/>
         </p:nvSpPr>
         <p:spPr>
           <a:xfrm>
-            <a:off x="2654868" y="6236208"/>
+            <a:off x="2691902" y="5669280"/>
             <a:ext cx="2194560" cy="237744"/>
           </a:xfrm>
           <a:prstGeom prst="rect">
@@ -6474,7 +6310,7 @@
               </a:lnSpc>
             </a:pPr>
             <a:r>
-              <a:rPr sz="1050" b="0">
+              <a:rPr sz="1125" b="0">
                 <a:solidFill>
                   <a:srgbClr val="555555"/>
                 </a:solidFill>
@@ -6488,14 +6324,14 @@
       </p:sp>
       <p:sp>
         <p:nvSpPr>
-          <p:cNvPr id="66" name="Oval 65"/>
+          <p:cNvPr id="62" name="Oval 61"/>
           <p:cNvSpPr/>
           <p:nvPr/>
         </p:nvSpPr>
         <p:spPr>
           <a:xfrm>
-            <a:off x="3941064" y="7196328"/>
-            <a:ext cx="164592" cy="164592"/>
+            <a:off x="3945636" y="7260335"/>
+            <a:ext cx="201168" cy="201168"/>
           </a:xfrm>
           <a:prstGeom prst="ellipse">
             <a:avLst/>
@@ -6532,14 +6368,14 @@
       </p:sp>
       <p:sp>
         <p:nvSpPr>
-          <p:cNvPr id="67" name="TextBox 66"/>
+          <p:cNvPr id="63" name="TextBox 62"/>
           <p:cNvSpPr txBox="1"/>
           <p:nvPr/>
         </p:nvSpPr>
         <p:spPr>
           <a:xfrm>
-            <a:off x="3749040" y="7370064"/>
-            <a:ext cx="2011680" cy="237744"/>
+            <a:off x="3771900" y="7488936"/>
+            <a:ext cx="2194560" cy="237744"/>
           </a:xfrm>
           <a:prstGeom prst="rect">
             <a:avLst/>
@@ -6558,28 +6394,28 @@
               </a:lnSpc>
             </a:pPr>
             <a:r>
-              <a:rPr sz="1050" b="0">
+              <a:rPr sz="1125" b="0">
                 <a:solidFill>
                   <a:srgbClr val="555555"/>
                 </a:solidFill>
                 <a:latin typeface="Arial"/>
                 <a:ea typeface="Arial"/>
               </a:rPr>
-              <a:t>2024 QLC eSSD 비트 출하 30EB</a:t>
-            </a:r>
-          </a:p>
-        </p:txBody>
-      </p:sp>
-      <p:sp>
-        <p:nvSpPr>
-          <p:cNvPr id="68" name="Oval 67"/>
+              <a:t>2024 비트 출하 30EB</a:t>
+            </a:r>
+          </a:p>
+        </p:txBody>
+      </p:sp>
+      <p:sp>
+        <p:nvSpPr>
+          <p:cNvPr id="64" name="Oval 63"/>
           <p:cNvSpPr/>
           <p:nvPr/>
         </p:nvSpPr>
         <p:spPr>
           <a:xfrm>
-            <a:off x="5423489" y="6519672"/>
-            <a:ext cx="164592" cy="164592"/>
+            <a:off x="5408858" y="5971032"/>
+            <a:ext cx="201168" cy="201168"/>
           </a:xfrm>
           <a:prstGeom prst="ellipse">
             <a:avLst/>
@@ -6587,7 +6423,7 @@
           <a:solidFill>
             <a:srgbClr val="FFFFFF"/>
           </a:solidFill>
-          <a:ln w="19050">
+          <a:ln w="22225">
             <a:solidFill>
               <a:srgbClr val="1428A0"/>
             </a:solidFill>
@@ -6618,14 +6454,14 @@
       </p:sp>
       <p:sp>
         <p:nvSpPr>
-          <p:cNvPr id="69" name="TextBox 68"/>
+          <p:cNvPr id="65" name="TextBox 64"/>
           <p:cNvSpPr txBox="1"/>
           <p:nvPr/>
         </p:nvSpPr>
         <p:spPr>
           <a:xfrm>
-            <a:off x="3768425" y="6711696"/>
-            <a:ext cx="1965960" cy="365760"/>
+            <a:off x="3772082" y="6217920"/>
+            <a:ext cx="1965960" cy="402336"/>
           </a:xfrm>
           <a:prstGeom prst="rect">
             <a:avLst/>
@@ -6644,7 +6480,7 @@
               </a:lnSpc>
             </a:pPr>
             <a:r>
-              <a:rPr sz="1050" b="1">
+              <a:rPr sz="1125" b="1">
                 <a:solidFill>
                   <a:srgbClr val="1428A0"/>
                 </a:solidFill>
@@ -6661,7 +6497,7 @@
               </a:lnSpc>
             </a:pPr>
             <a:r>
-              <a:rPr sz="1050" b="1">
+              <a:rPr sz="1125" b="1">
                 <a:solidFill>
                   <a:srgbClr val="1428A0"/>
                 </a:solidFill>
@@ -6675,13 +6511,13 @@
       </p:sp>
       <p:sp>
         <p:nvSpPr>
-          <p:cNvPr id="70" name="Rectangle 69"/>
+          <p:cNvPr id="66" name="Rectangle 65"/>
           <p:cNvSpPr/>
           <p:nvPr/>
         </p:nvSpPr>
         <p:spPr>
           <a:xfrm>
-            <a:off x="1069848" y="7717536"/>
+            <a:off x="1069848" y="7955279"/>
             <a:ext cx="4718304" cy="10972"/>
           </a:xfrm>
           <a:prstGeom prst="rect">
@@ -6719,13 +6555,13 @@
       </p:sp>
       <p:sp>
         <p:nvSpPr>
-          <p:cNvPr id="71" name="TextBox 70"/>
+          <p:cNvPr id="67" name="TextBox 66"/>
           <p:cNvSpPr txBox="1"/>
           <p:nvPr/>
         </p:nvSpPr>
         <p:spPr>
           <a:xfrm>
-            <a:off x="1069848" y="7790688"/>
+            <a:off x="1069848" y="8028431"/>
             <a:ext cx="4718304" cy="274320"/>
           </a:xfrm>
           <a:prstGeom prst="rect">
@@ -6759,14 +6595,14 @@
       </p:sp>
       <p:sp>
         <p:nvSpPr>
-          <p:cNvPr id="72" name="Rectangle 71"/>
+          <p:cNvPr id="68" name="Rectangle 67"/>
           <p:cNvSpPr/>
           <p:nvPr/>
         </p:nvSpPr>
         <p:spPr>
           <a:xfrm>
-            <a:off x="6437376" y="5102352"/>
-            <a:ext cx="5413248" cy="3072384"/>
+            <a:off x="6437376" y="4425696"/>
+            <a:ext cx="5413248" cy="3986783"/>
           </a:xfrm>
           <a:prstGeom prst="rect">
             <a:avLst/>
@@ -6803,14 +6639,14 @@
       </p:sp>
       <p:sp>
         <p:nvSpPr>
-          <p:cNvPr id="73" name="Rectangle 72"/>
+          <p:cNvPr id="69" name="Rectangle 68"/>
           <p:cNvSpPr/>
           <p:nvPr/>
         </p:nvSpPr>
         <p:spPr>
           <a:xfrm>
-            <a:off x="6437376" y="5102352"/>
-            <a:ext cx="73152" cy="3072384"/>
+            <a:off x="6437376" y="4425696"/>
+            <a:ext cx="73152" cy="3986783"/>
           </a:xfrm>
           <a:prstGeom prst="rect">
             <a:avLst/>
@@ -6847,13 +6683,13 @@
       </p:sp>
       <p:sp>
         <p:nvSpPr>
-          <p:cNvPr id="74" name="TextBox 73"/>
+          <p:cNvPr id="70" name="TextBox 69"/>
           <p:cNvSpPr txBox="1"/>
           <p:nvPr/>
         </p:nvSpPr>
         <p:spPr>
           <a:xfrm>
-            <a:off x="6784848" y="5285232"/>
+            <a:off x="6784848" y="4590288"/>
             <a:ext cx="4718304" cy="274320"/>
           </a:xfrm>
           <a:prstGeom prst="rect">
@@ -6887,14 +6723,155 @@
       </p:sp>
       <p:sp>
         <p:nvSpPr>
-          <p:cNvPr id="75" name="TextBox 74"/>
+          <p:cNvPr id="71" name="TextBox 70"/>
           <p:cNvSpPr txBox="1"/>
           <p:nvPr/>
         </p:nvSpPr>
         <p:spPr>
           <a:xfrm>
-            <a:off x="6784848" y="5596128"/>
-            <a:ext cx="4718304" cy="585216"/>
+            <a:off x="6784848" y="4901184"/>
+            <a:ext cx="1874519" cy="512064"/>
+          </a:xfrm>
+          <a:prstGeom prst="rect">
+            <a:avLst/>
+          </a:prstGeom>
+          <a:noFill/>
+        </p:spPr>
+        <p:txBody>
+          <a:bodyPr wrap="square" anchor="ctr" lIns="0" rIns="0" tIns="0" bIns="0">
+            <a:spAutoFit/>
+          </a:bodyPr>
+          <a:lstStyle/>
+          <a:p>
+            <a:pPr algn="l">
+              <a:lnSpc>
+                <a:spcPct val="112000"/>
+              </a:lnSpc>
+            </a:pPr>
+            <a:r>
+              <a:rPr sz="3000" b="1">
+                <a:solidFill>
+                  <a:srgbClr val="1428A0"/>
+                </a:solidFill>
+                <a:latin typeface="Arial"/>
+                <a:ea typeface="Arial"/>
+              </a:rPr>
+              <a:t>12개월</a:t>
+            </a:r>
+          </a:p>
+        </p:txBody>
+      </p:sp>
+      <p:sp>
+        <p:nvSpPr>
+          <p:cNvPr id="72" name="TextBox 71"/>
+          <p:cNvSpPr txBox="1"/>
+          <p:nvPr/>
+        </p:nvSpPr>
+        <p:spPr>
+          <a:xfrm>
+            <a:off x="8705088" y="4901184"/>
+            <a:ext cx="2798064" cy="512064"/>
+          </a:xfrm>
+          <a:prstGeom prst="rect">
+            <a:avLst/>
+          </a:prstGeom>
+          <a:noFill/>
+        </p:spPr>
+        <p:txBody>
+          <a:bodyPr wrap="square" anchor="ctr" lIns="0" rIns="0" tIns="0" bIns="0">
+            <a:spAutoFit/>
+          </a:bodyPr>
+          <a:lstStyle/>
+          <a:p>
+            <a:pPr algn="l">
+              <a:lnSpc>
+                <a:spcPct val="104000"/>
+              </a:lnSpc>
+            </a:pPr>
+            <a:r>
+              <a:rPr sz="1275" b="0">
+                <a:solidFill>
+                  <a:srgbClr val="555555"/>
+                </a:solidFill>
+                <a:latin typeface="Arial"/>
+                <a:ea typeface="Arial"/>
+              </a:rPr>
+              <a:t>규격 정의 참여 vs 후발의</a:t>
+            </a:r>
+          </a:p>
+          <a:p>
+            <a:pPr algn="l">
+              <a:lnSpc>
+                <a:spcPct val="104000"/>
+              </a:lnSpc>
+            </a:pPr>
+            <a:r>
+              <a:rPr sz="1275" b="0">
+                <a:solidFill>
+                  <a:srgbClr val="555555"/>
+                </a:solidFill>
+                <a:latin typeface="Arial"/>
+                <a:ea typeface="Arial"/>
+              </a:rPr>
+              <a:t>출시 시점 격차</a:t>
+            </a:r>
+          </a:p>
+        </p:txBody>
+      </p:sp>
+      <p:sp>
+        <p:nvSpPr>
+          <p:cNvPr id="73" name="Rectangle 72"/>
+          <p:cNvSpPr/>
+          <p:nvPr/>
+        </p:nvSpPr>
+        <p:spPr>
+          <a:xfrm>
+            <a:off x="6784848" y="5504688"/>
+            <a:ext cx="4718304" cy="10972"/>
+          </a:xfrm>
+          <a:prstGeom prst="rect">
+            <a:avLst/>
+          </a:prstGeom>
+          <a:solidFill>
+            <a:srgbClr val="D9D9D9"/>
+          </a:solidFill>
+          <a:ln>
+            <a:noFill/>
+          </a:ln>
+          <a:effectLst/>
+        </p:spPr>
+        <p:style>
+          <a:lnRef idx="1">
+            <a:schemeClr val="accent1"/>
+          </a:lnRef>
+          <a:fillRef idx="3">
+            <a:schemeClr val="accent1"/>
+          </a:fillRef>
+          <a:effectRef idx="2">
+            <a:schemeClr val="accent1"/>
+          </a:effectRef>
+          <a:fontRef idx="minor">
+            <a:schemeClr val="lt1"/>
+          </a:fontRef>
+        </p:style>
+        <p:txBody>
+          <a:bodyPr rtlCol="0" anchor="ctr"/>
+          <a:lstStyle/>
+          <a:p>
+            <a:pPr algn="ctr"/>
+          </a:p>
+        </p:txBody>
+      </p:sp>
+      <p:sp>
+        <p:nvSpPr>
+          <p:cNvPr id="74" name="TextBox 73"/>
+          <p:cNvSpPr txBox="1"/>
+          <p:nvPr/>
+        </p:nvSpPr>
+        <p:spPr>
+          <a:xfrm>
+            <a:off x="6784848" y="5614416"/>
+            <a:ext cx="4718304" cy="201168"/>
           </a:xfrm>
           <a:prstGeom prst="rect">
             <a:avLst/>
@@ -6909,72 +6886,32 @@
           <a:p>
             <a:pPr algn="l">
               <a:lnSpc>
-                <a:spcPct val="106000"/>
-              </a:lnSpc>
-            </a:pPr>
-            <a:r>
-              <a:rPr sz="1575" b="1">
-                <a:solidFill>
-                  <a:srgbClr val="1A1A1A"/>
-                </a:solidFill>
-                <a:latin typeface="Arial"/>
-                <a:ea typeface="Arial"/>
-              </a:rPr>
-              <a:t>규격 정의에 참여한 공급자가 적중했다</a:t>
-            </a:r>
-          </a:p>
-        </p:txBody>
-      </p:sp>
-      <p:sp>
-        <p:nvSpPr>
-          <p:cNvPr id="76" name="TextBox 75"/>
+                <a:spcPct val="112000"/>
+              </a:lnSpc>
+            </a:pPr>
+            <a:r>
+              <a:rPr sz="1125" b="0">
+                <a:solidFill>
+                  <a:srgbClr val="8A8A8A"/>
+                </a:solidFill>
+                <a:latin typeface="Arial"/>
+                <a:ea typeface="Arial"/>
+              </a:rPr>
+              <a:t>61TB QLC 출시 · OCP 2022-10 예고 기준</a:t>
+            </a:r>
+          </a:p>
+        </p:txBody>
+      </p:sp>
+      <p:sp>
+        <p:nvSpPr>
+          <p:cNvPr id="75" name="TextBox 74"/>
           <p:cNvSpPr txBox="1"/>
           <p:nvPr/>
         </p:nvSpPr>
         <p:spPr>
           <a:xfrm>
-            <a:off x="6784848" y="6236208"/>
-            <a:ext cx="4718304" cy="201168"/>
-          </a:xfrm>
-          <a:prstGeom prst="rect">
-            <a:avLst/>
-          </a:prstGeom>
-          <a:noFill/>
-        </p:spPr>
-        <p:txBody>
-          <a:bodyPr wrap="square" anchor="t" lIns="0" rIns="0" tIns="0" bIns="0">
-            <a:spAutoFit/>
-          </a:bodyPr>
-          <a:lstStyle/>
-          <a:p>
-            <a:pPr algn="l">
-              <a:lnSpc>
-                <a:spcPct val="112000"/>
-              </a:lnSpc>
-            </a:pPr>
-            <a:r>
-              <a:rPr sz="1050" b="0">
-                <a:solidFill>
-                  <a:srgbClr val="8A8A8A"/>
-                </a:solidFill>
-                <a:latin typeface="Arial"/>
-                <a:ea typeface="Arial"/>
-              </a:rPr>
-              <a:t>61TB QLC 출시 · OCP 2022-10 예고 기준</a:t>
-            </a:r>
-          </a:p>
-        </p:txBody>
-      </p:sp>
-      <p:sp>
-        <p:nvSpPr>
-          <p:cNvPr id="77" name="TextBox 76"/>
-          <p:cNvSpPr txBox="1"/>
-          <p:nvPr/>
-        </p:nvSpPr>
-        <p:spPr>
-          <a:xfrm>
-            <a:off x="6784848" y="6455664"/>
-            <a:ext cx="822959" cy="219456"/>
+            <a:off x="6784848" y="5907024"/>
+            <a:ext cx="868680" cy="310896"/>
           </a:xfrm>
           <a:prstGeom prst="rect">
             <a:avLst/>
@@ -6993,7 +6930,7 @@
               </a:lnSpc>
             </a:pPr>
             <a:r>
-              <a:rPr sz="1125" b="1">
+              <a:rPr sz="1200" b="1">
                 <a:solidFill>
                   <a:srgbClr val="1A1A1A"/>
                 </a:solidFill>
@@ -7007,14 +6944,14 @@
       </p:sp>
       <p:sp>
         <p:nvSpPr>
-          <p:cNvPr id="78" name="Rectangle 77"/>
+          <p:cNvPr id="76" name="Rectangle 75"/>
           <p:cNvSpPr/>
           <p:nvPr/>
         </p:nvSpPr>
         <p:spPr>
           <a:xfrm>
-            <a:off x="7653528" y="6455664"/>
-            <a:ext cx="1649838" cy="219456"/>
+            <a:off x="7699248" y="5907024"/>
+            <a:ext cx="1630244" cy="310896"/>
           </a:xfrm>
           <a:prstGeom prst="rect">
             <a:avLst/>
@@ -7051,14 +6988,14 @@
       </p:sp>
       <p:sp>
         <p:nvSpPr>
-          <p:cNvPr id="79" name="TextBox 78"/>
+          <p:cNvPr id="77" name="TextBox 76"/>
           <p:cNvSpPr txBox="1"/>
           <p:nvPr/>
         </p:nvSpPr>
         <p:spPr>
           <a:xfrm>
-            <a:off x="9376518" y="6455664"/>
-            <a:ext cx="2126633" cy="219456"/>
+            <a:off x="9420932" y="5907024"/>
+            <a:ext cx="2082219" cy="310896"/>
           </a:xfrm>
           <a:prstGeom prst="rect">
             <a:avLst/>
@@ -7077,7 +7014,7 @@
               </a:lnSpc>
             </a:pPr>
             <a:r>
-              <a:rPr sz="1050" b="1">
+              <a:rPr sz="1125" b="1">
                 <a:solidFill>
                   <a:srgbClr val="1428A0"/>
                 </a:solidFill>
@@ -7091,14 +7028,14 @@
       </p:sp>
       <p:sp>
         <p:nvSpPr>
-          <p:cNvPr id="80" name="TextBox 79"/>
+          <p:cNvPr id="78" name="TextBox 77"/>
           <p:cNvSpPr txBox="1"/>
           <p:nvPr/>
         </p:nvSpPr>
         <p:spPr>
           <a:xfrm>
-            <a:off x="6784848" y="6729984"/>
-            <a:ext cx="822959" cy="219456"/>
+            <a:off x="6784848" y="6309360"/>
+            <a:ext cx="868680" cy="310896"/>
           </a:xfrm>
           <a:prstGeom prst="rect">
             <a:avLst/>
@@ -7117,7 +7054,7 @@
               </a:lnSpc>
             </a:pPr>
             <a:r>
-              <a:rPr sz="1125" b="1">
+              <a:rPr sz="1200" b="1">
                 <a:solidFill>
                   <a:srgbClr val="1A1A1A"/>
                 </a:solidFill>
@@ -7131,14 +7068,14 @@
       </p:sp>
       <p:sp>
         <p:nvSpPr>
-          <p:cNvPr id="81" name="Rectangle 80"/>
+          <p:cNvPr id="79" name="Rectangle 78"/>
           <p:cNvSpPr/>
           <p:nvPr/>
         </p:nvSpPr>
         <p:spPr>
           <a:xfrm>
-            <a:off x="7653528" y="6729984"/>
-            <a:ext cx="3849624" cy="219456"/>
+            <a:off x="7699248" y="6309360"/>
+            <a:ext cx="3803904" cy="310896"/>
           </a:xfrm>
           <a:prstGeom prst="rect">
             <a:avLst/>
@@ -7177,14 +7114,14 @@
       </p:sp>
       <p:sp>
         <p:nvSpPr>
-          <p:cNvPr id="82" name="TextBox 81"/>
+          <p:cNvPr id="80" name="TextBox 79"/>
           <p:cNvSpPr txBox="1"/>
           <p:nvPr/>
         </p:nvSpPr>
         <p:spPr>
           <a:xfrm>
-            <a:off x="7726680" y="6729984"/>
-            <a:ext cx="3703320" cy="219456"/>
+            <a:off x="7790688" y="6309360"/>
+            <a:ext cx="3621024" cy="310896"/>
           </a:xfrm>
           <a:prstGeom prst="rect">
             <a:avLst/>
@@ -7203,7 +7140,7 @@
               </a:lnSpc>
             </a:pPr>
             <a:r>
-              <a:rPr sz="1050" b="1">
+              <a:rPr sz="1125" b="1">
                 <a:solidFill>
                   <a:srgbClr val="555555"/>
                 </a:solidFill>
@@ -7217,13 +7154,13 @@
       </p:sp>
       <p:sp>
         <p:nvSpPr>
-          <p:cNvPr id="83" name="Rectangle 82"/>
+          <p:cNvPr id="81" name="Rectangle 80"/>
           <p:cNvSpPr/>
           <p:nvPr/>
         </p:nvSpPr>
         <p:spPr>
           <a:xfrm>
-            <a:off x="6784848" y="7022592"/>
+            <a:off x="6784848" y="6766560"/>
             <a:ext cx="4718304" cy="10972"/>
           </a:xfrm>
           <a:prstGeom prst="rect">
@@ -7261,14 +7198,14 @@
       </p:sp>
       <p:sp>
         <p:nvSpPr>
-          <p:cNvPr id="84" name="TextBox 83"/>
+          <p:cNvPr id="82" name="TextBox 81"/>
           <p:cNvSpPr txBox="1"/>
           <p:nvPr/>
         </p:nvSpPr>
         <p:spPr>
           <a:xfrm>
-            <a:off x="6784848" y="7077456"/>
-            <a:ext cx="4718304" cy="182880"/>
+            <a:off x="6784848" y="6858000"/>
+            <a:ext cx="4718304" cy="201168"/>
           </a:xfrm>
           <a:prstGeom prst="rect">
             <a:avLst/>
@@ -7287,7 +7224,7 @@
               </a:lnSpc>
             </a:pPr>
             <a:r>
-              <a:rPr sz="1050" b="0">
+              <a:rPr sz="1125" b="0">
                 <a:solidFill>
                   <a:srgbClr val="8A8A8A"/>
                 </a:solidFill>
@@ -7301,14 +7238,14 @@
       </p:sp>
       <p:sp>
         <p:nvSpPr>
-          <p:cNvPr id="85" name="Oval 84"/>
+          <p:cNvPr id="83" name="Oval 82"/>
           <p:cNvSpPr/>
           <p:nvPr/>
         </p:nvSpPr>
         <p:spPr>
           <a:xfrm>
-            <a:off x="7706197" y="7296912"/>
-            <a:ext cx="125089" cy="125089"/>
+            <a:off x="7775326" y="7132320"/>
+            <a:ext cx="180685" cy="180685"/>
           </a:xfrm>
           <a:prstGeom prst="ellipse">
             <a:avLst/>
@@ -7345,14 +7282,14 @@
       </p:sp>
       <p:sp>
         <p:nvSpPr>
-          <p:cNvPr id="86" name="Round Same Side Corner Rectangle 85"/>
+          <p:cNvPr id="84" name="Round Same Side Corner Rectangle 83"/>
           <p:cNvSpPr/>
           <p:nvPr/>
         </p:nvSpPr>
         <p:spPr>
           <a:xfrm>
-            <a:off x="7653528" y="7441752"/>
-            <a:ext cx="230428" cy="184343"/>
+            <a:off x="7699248" y="7341534"/>
+            <a:ext cx="332841" cy="266273"/>
           </a:xfrm>
           <a:prstGeom prst="round2SameRect">
             <a:avLst>
@@ -7392,14 +7329,14 @@
       </p:sp>
       <p:sp>
         <p:nvSpPr>
-          <p:cNvPr id="87" name="Rectangle 86"/>
+          <p:cNvPr id="85" name="Rectangle 84"/>
           <p:cNvSpPr/>
           <p:nvPr/>
         </p:nvSpPr>
         <p:spPr>
           <a:xfrm>
-            <a:off x="7920532" y="7443216"/>
-            <a:ext cx="237744" cy="45720"/>
+            <a:off x="8077809" y="7346289"/>
+            <a:ext cx="274320" cy="45720"/>
           </a:xfrm>
           <a:prstGeom prst="rect">
             <a:avLst/>
@@ -7436,14 +7373,14 @@
       </p:sp>
       <p:sp>
         <p:nvSpPr>
-          <p:cNvPr id="88" name="Oval 87"/>
+          <p:cNvPr id="86" name="Oval 85"/>
           <p:cNvSpPr/>
           <p:nvPr/>
         </p:nvSpPr>
         <p:spPr>
           <a:xfrm>
-            <a:off x="8247522" y="7296912"/>
-            <a:ext cx="125089" cy="125089"/>
+            <a:off x="8473927" y="7132320"/>
+            <a:ext cx="180685" cy="180685"/>
           </a:xfrm>
           <a:prstGeom prst="ellipse">
             <a:avLst/>
@@ -7480,14 +7417,14 @@
       </p:sp>
       <p:sp>
         <p:nvSpPr>
-          <p:cNvPr id="89" name="Round Same Side Corner Rectangle 88"/>
+          <p:cNvPr id="87" name="Round Same Side Corner Rectangle 86"/>
           <p:cNvSpPr/>
           <p:nvPr/>
         </p:nvSpPr>
         <p:spPr>
           <a:xfrm>
-            <a:off x="8194852" y="7441752"/>
-            <a:ext cx="230428" cy="184343"/>
+            <a:off x="8397849" y="7341534"/>
+            <a:ext cx="332841" cy="266273"/>
           </a:xfrm>
           <a:prstGeom prst="round2SameRect">
             <a:avLst>
@@ -7527,14 +7464,14 @@
       </p:sp>
       <p:sp>
         <p:nvSpPr>
-          <p:cNvPr id="90" name="TextBox 89"/>
+          <p:cNvPr id="88" name="TextBox 87"/>
           <p:cNvSpPr txBox="1"/>
           <p:nvPr/>
         </p:nvSpPr>
         <p:spPr>
           <a:xfrm>
-            <a:off x="8516721" y="7278624"/>
-            <a:ext cx="1828800" cy="365760"/>
+            <a:off x="8840419" y="7132320"/>
+            <a:ext cx="1508760" cy="475488"/>
           </a:xfrm>
           <a:prstGeom prst="rect">
             <a:avLst/>
@@ -7553,7 +7490,7 @@
               </a:lnSpc>
             </a:pPr>
             <a:r>
-              <a:rPr sz="1050" b="1">
+              <a:rPr sz="1125" b="1">
                 <a:solidFill>
                   <a:srgbClr val="1428A0"/>
                 </a:solidFill>
@@ -7570,7 +7507,7 @@
               </a:lnSpc>
             </a:pPr>
             <a:r>
-              <a:rPr sz="1050" b="0">
+              <a:rPr sz="1125" b="0">
                 <a:solidFill>
                   <a:srgbClr val="555555"/>
                 </a:solidFill>
@@ -7584,14 +7521,14 @@
       </p:sp>
       <p:sp>
         <p:nvSpPr>
-          <p:cNvPr id="91" name="Oval 90"/>
+          <p:cNvPr id="89" name="Oval 88"/>
           <p:cNvSpPr/>
           <p:nvPr/>
         </p:nvSpPr>
         <p:spPr>
           <a:xfrm>
-            <a:off x="10453055" y="7296912"/>
-            <a:ext cx="125089" cy="125089"/>
+            <a:off x="10498409" y="7132320"/>
+            <a:ext cx="180685" cy="180685"/>
           </a:xfrm>
           <a:prstGeom prst="ellipse">
             <a:avLst/>
@@ -7628,14 +7565,14 @@
       </p:sp>
       <p:sp>
         <p:nvSpPr>
-          <p:cNvPr id="92" name="Round Same Side Corner Rectangle 91"/>
+          <p:cNvPr id="90" name="Round Same Side Corner Rectangle 89"/>
           <p:cNvSpPr/>
           <p:nvPr/>
         </p:nvSpPr>
         <p:spPr>
           <a:xfrm>
-            <a:off x="10400385" y="7441752"/>
-            <a:ext cx="230428" cy="184343"/>
+            <a:off x="10422331" y="7341534"/>
+            <a:ext cx="332841" cy="266273"/>
           </a:xfrm>
           <a:prstGeom prst="round2SameRect">
             <a:avLst>
@@ -7675,14 +7612,14 @@
       </p:sp>
       <p:sp>
         <p:nvSpPr>
-          <p:cNvPr id="93" name="TextBox 92"/>
+          <p:cNvPr id="91" name="TextBox 90"/>
           <p:cNvSpPr txBox="1"/>
           <p:nvPr/>
         </p:nvSpPr>
         <p:spPr>
           <a:xfrm>
-            <a:off x="10703966" y="7278624"/>
-            <a:ext cx="780897" cy="365760"/>
+            <a:off x="10846612" y="7132320"/>
+            <a:ext cx="638251" cy="475488"/>
           </a:xfrm>
           <a:prstGeom prst="rect">
             <a:avLst/>
@@ -7701,7 +7638,7 @@
               </a:lnSpc>
             </a:pPr>
             <a:r>
-              <a:rPr sz="1050" b="1">
+              <a:rPr sz="1125" b="1">
                 <a:solidFill>
                   <a:srgbClr val="555555"/>
                 </a:solidFill>
@@ -7718,7 +7655,7 @@
               </a:lnSpc>
             </a:pPr>
             <a:r>
-              <a:rPr sz="1050" b="0">
+              <a:rPr sz="1125" b="0">
                 <a:solidFill>
                   <a:srgbClr val="555555"/>
                 </a:solidFill>
@@ -7732,13 +7669,13 @@
       </p:sp>
       <p:sp>
         <p:nvSpPr>
-          <p:cNvPr id="94" name="Rectangle 93"/>
+          <p:cNvPr id="92" name="Rectangle 91"/>
           <p:cNvSpPr/>
           <p:nvPr/>
         </p:nvSpPr>
         <p:spPr>
           <a:xfrm>
-            <a:off x="6784848" y="7717536"/>
+            <a:off x="6784848" y="7955279"/>
             <a:ext cx="4718304" cy="10972"/>
           </a:xfrm>
           <a:prstGeom prst="rect">
@@ -7776,13 +7713,13 @@
       </p:sp>
       <p:sp>
         <p:nvSpPr>
-          <p:cNvPr id="95" name="TextBox 94"/>
+          <p:cNvPr id="93" name="TextBox 92"/>
           <p:cNvSpPr txBox="1"/>
           <p:nvPr/>
         </p:nvSpPr>
         <p:spPr>
           <a:xfrm>
-            <a:off x="6784848" y="7790688"/>
+            <a:off x="6784848" y="8028431"/>
             <a:ext cx="4718304" cy="274320"/>
           </a:xfrm>
           <a:prstGeom prst="rect">
@@ -7816,14 +7753,14 @@
       </p:sp>
       <p:sp>
         <p:nvSpPr>
-          <p:cNvPr id="96" name="Rectangle 95"/>
+          <p:cNvPr id="94" name="Rectangle 93"/>
           <p:cNvSpPr/>
           <p:nvPr/>
         </p:nvSpPr>
         <p:spPr>
           <a:xfrm>
-            <a:off x="12152376" y="5102352"/>
-            <a:ext cx="5413248" cy="3072384"/>
+            <a:off x="12152376" y="4425696"/>
+            <a:ext cx="5413248" cy="3986783"/>
           </a:xfrm>
           <a:prstGeom prst="rect">
             <a:avLst/>
@@ -7862,13 +7799,13 @@
       </p:sp>
       <p:sp>
         <p:nvSpPr>
-          <p:cNvPr id="97" name="TextBox 96"/>
+          <p:cNvPr id="95" name="TextBox 94"/>
           <p:cNvSpPr txBox="1"/>
           <p:nvPr/>
         </p:nvSpPr>
         <p:spPr>
           <a:xfrm>
-            <a:off x="12499848" y="5285232"/>
+            <a:off x="12499848" y="4590288"/>
             <a:ext cx="4718304" cy="274320"/>
           </a:xfrm>
           <a:prstGeom prst="rect">
@@ -7902,14 +7839,155 @@
       </p:sp>
       <p:sp>
         <p:nvSpPr>
-          <p:cNvPr id="98" name="TextBox 97"/>
+          <p:cNvPr id="96" name="TextBox 95"/>
           <p:cNvSpPr txBox="1"/>
           <p:nvPr/>
         </p:nvSpPr>
         <p:spPr>
           <a:xfrm>
-            <a:off x="12499848" y="5596128"/>
-            <a:ext cx="4718304" cy="585216"/>
+            <a:off x="12499848" y="4901184"/>
+            <a:ext cx="1874519" cy="512064"/>
+          </a:xfrm>
+          <a:prstGeom prst="rect">
+            <a:avLst/>
+          </a:prstGeom>
+          <a:noFill/>
+        </p:spPr>
+        <p:txBody>
+          <a:bodyPr wrap="square" anchor="ctr" lIns="0" rIns="0" tIns="0" bIns="0">
+            <a:spAutoFit/>
+          </a:bodyPr>
+          <a:lstStyle/>
+          <a:p>
+            <a:pPr algn="l">
+              <a:lnSpc>
+                <a:spcPct val="112000"/>
+              </a:lnSpc>
+            </a:pPr>
+            <a:r>
+              <a:rPr sz="3000" b="1">
+                <a:solidFill>
+                  <a:srgbClr val="1428A0"/>
+                </a:solidFill>
+                <a:latin typeface="Arial"/>
+                <a:ea typeface="Arial"/>
+              </a:rPr>
+              <a:t>2027H2</a:t>
+            </a:r>
+          </a:p>
+        </p:txBody>
+      </p:sp>
+      <p:sp>
+        <p:nvSpPr>
+          <p:cNvPr id="97" name="TextBox 96"/>
+          <p:cNvSpPr txBox="1"/>
+          <p:nvPr/>
+        </p:nvSpPr>
+        <p:spPr>
+          <a:xfrm>
+            <a:off x="14420088" y="4901184"/>
+            <a:ext cx="2798064" cy="512064"/>
+          </a:xfrm>
+          <a:prstGeom prst="rect">
+            <a:avLst/>
+          </a:prstGeom>
+          <a:noFill/>
+        </p:spPr>
+        <p:txBody>
+          <a:bodyPr wrap="square" anchor="ctr" lIns="0" rIns="0" tIns="0" bIns="0">
+            <a:spAutoFit/>
+          </a:bodyPr>
+          <a:lstStyle/>
+          <a:p>
+            <a:pPr algn="l">
+              <a:lnSpc>
+                <a:spcPct val="104000"/>
+              </a:lnSpc>
+            </a:pPr>
+            <a:r>
+              <a:rPr sz="1275" b="0">
+                <a:solidFill>
+                  <a:srgbClr val="555555"/>
+                </a:solidFill>
+                <a:latin typeface="Arial"/>
+                <a:ea typeface="Arial"/>
+              </a:rPr>
+              <a:t>지금의 결정이 초기 조건이 되는</a:t>
+            </a:r>
+          </a:p>
+          <a:p>
+            <a:pPr algn="l">
+              <a:lnSpc>
+                <a:spcPct val="104000"/>
+              </a:lnSpc>
+            </a:pPr>
+            <a:r>
+              <a:rPr sz="1275" b="0">
+                <a:solidFill>
+                  <a:srgbClr val="555555"/>
+                </a:solidFill>
+                <a:latin typeface="Arial"/>
+                <a:ea typeface="Arial"/>
+              </a:rPr>
+              <a:t>차기 전환점</a:t>
+            </a:r>
+          </a:p>
+        </p:txBody>
+      </p:sp>
+      <p:sp>
+        <p:nvSpPr>
+          <p:cNvPr id="98" name="Rectangle 97"/>
+          <p:cNvSpPr/>
+          <p:nvPr/>
+        </p:nvSpPr>
+        <p:spPr>
+          <a:xfrm>
+            <a:off x="12499848" y="5504688"/>
+            <a:ext cx="4718304" cy="10972"/>
+          </a:xfrm>
+          <a:prstGeom prst="rect">
+            <a:avLst/>
+          </a:prstGeom>
+          <a:solidFill>
+            <a:srgbClr val="D9D9D9"/>
+          </a:solidFill>
+          <a:ln>
+            <a:noFill/>
+          </a:ln>
+          <a:effectLst/>
+        </p:spPr>
+        <p:style>
+          <a:lnRef idx="1">
+            <a:schemeClr val="accent1"/>
+          </a:lnRef>
+          <a:fillRef idx="3">
+            <a:schemeClr val="accent1"/>
+          </a:fillRef>
+          <a:effectRef idx="2">
+            <a:schemeClr val="accent1"/>
+          </a:effectRef>
+          <a:fontRef idx="minor">
+            <a:schemeClr val="lt1"/>
+          </a:fontRef>
+        </p:style>
+        <p:txBody>
+          <a:bodyPr rtlCol="0" anchor="ctr"/>
+          <a:lstStyle/>
+          <a:p>
+            <a:pPr algn="ctr"/>
+          </a:p>
+        </p:txBody>
+      </p:sp>
+      <p:sp>
+        <p:nvSpPr>
+          <p:cNvPr id="99" name="TextBox 98"/>
+          <p:cNvSpPr txBox="1"/>
+          <p:nvPr/>
+        </p:nvSpPr>
+        <p:spPr>
+          <a:xfrm>
+            <a:off x="12499848" y="5614416"/>
+            <a:ext cx="2157984" cy="201168"/>
           </a:xfrm>
           <a:prstGeom prst="rect">
             <a:avLst/>
@@ -7922,34 +8000,34 @@
           </a:bodyPr>
           <a:lstStyle/>
           <a:p>
-            <a:pPr algn="l">
-              <a:lnSpc>
-                <a:spcPct val="106000"/>
-              </a:lnSpc>
-            </a:pPr>
-            <a:r>
-              <a:rPr sz="1575" b="1">
-                <a:solidFill>
-                  <a:srgbClr val="1A1A1A"/>
-                </a:solidFill>
-                <a:latin typeface="Arial"/>
-                <a:ea typeface="Arial"/>
-              </a:rPr>
-              <a:t>직전 다운턴의 결정이 다음 다운턴의 초기 조건이다</a:t>
-            </a:r>
-          </a:p>
-        </p:txBody>
-      </p:sp>
-      <p:sp>
-        <p:nvSpPr>
-          <p:cNvPr id="99" name="TextBox 98"/>
+            <a:pPr algn="ctr">
+              <a:lnSpc>
+                <a:spcPct val="112000"/>
+              </a:lnSpc>
+            </a:pPr>
+            <a:r>
+              <a:rPr sz="1125" b="0">
+                <a:solidFill>
+                  <a:srgbClr val="8A8A8A"/>
+                </a:solidFill>
+                <a:latin typeface="Arial"/>
+                <a:ea typeface="Arial"/>
+              </a:rPr>
+              <a:t>직전 다운턴의 결정</a:t>
+            </a:r>
+          </a:p>
+        </p:txBody>
+      </p:sp>
+      <p:sp>
+        <p:nvSpPr>
+          <p:cNvPr id="100" name="TextBox 99"/>
           <p:cNvSpPr txBox="1"/>
           <p:nvPr/>
         </p:nvSpPr>
         <p:spPr>
           <a:xfrm>
-            <a:off x="12499848" y="6236208"/>
-            <a:ext cx="2176272" cy="201168"/>
+            <a:off x="15060168" y="5614416"/>
+            <a:ext cx="2157984" cy="201168"/>
           </a:xfrm>
           <a:prstGeom prst="rect">
             <a:avLst/>
@@ -7968,47 +8046,7 @@
               </a:lnSpc>
             </a:pPr>
             <a:r>
-              <a:rPr sz="1050" b="0">
-                <a:solidFill>
-                  <a:srgbClr val="8A8A8A"/>
-                </a:solidFill>
-                <a:latin typeface="Arial"/>
-                <a:ea typeface="Arial"/>
-              </a:rPr>
-              <a:t>직전 다운턴의 결정</a:t>
-            </a:r>
-          </a:p>
-        </p:txBody>
-      </p:sp>
-      <p:sp>
-        <p:nvSpPr>
-          <p:cNvPr id="100" name="TextBox 99"/>
-          <p:cNvSpPr txBox="1"/>
-          <p:nvPr/>
-        </p:nvSpPr>
-        <p:spPr>
-          <a:xfrm>
-            <a:off x="15041880" y="6236208"/>
-            <a:ext cx="2176272" cy="201168"/>
-          </a:xfrm>
-          <a:prstGeom prst="rect">
-            <a:avLst/>
-          </a:prstGeom>
-          <a:noFill/>
-        </p:spPr>
-        <p:txBody>
-          <a:bodyPr wrap="square" anchor="t" lIns="0" rIns="0" tIns="0" bIns="0">
-            <a:spAutoFit/>
-          </a:bodyPr>
-          <a:lstStyle/>
-          <a:p>
-            <a:pPr algn="ctr">
-              <a:lnSpc>
-                <a:spcPct val="112000"/>
-              </a:lnSpc>
-            </a:pPr>
-            <a:r>
-              <a:rPr sz="1050" b="0">
+              <a:rPr sz="1125" b="0">
                 <a:solidFill>
                   <a:srgbClr val="8A8A8A"/>
                 </a:solidFill>
@@ -8028,8 +8066,8 @@
         </p:nvSpPr>
         <p:spPr>
           <a:xfrm>
-            <a:off x="12499848" y="6510528"/>
-            <a:ext cx="2176272" cy="310896"/>
+            <a:off x="12499848" y="5925312"/>
+            <a:ext cx="2157984" cy="384048"/>
           </a:xfrm>
           <a:prstGeom prst="rect">
             <a:avLst/>
@@ -8074,8 +8112,8 @@
         </p:nvSpPr>
         <p:spPr>
           <a:xfrm>
-            <a:off x="12554712" y="6510528"/>
-            <a:ext cx="2066544" cy="310896"/>
+            <a:off x="12554712" y="5925312"/>
+            <a:ext cx="2048256" cy="384048"/>
           </a:xfrm>
           <a:prstGeom prst="rect">
             <a:avLst/>
@@ -8094,7 +8132,7 @@
               </a:lnSpc>
             </a:pPr>
             <a:r>
-              <a:rPr sz="1125" b="0">
+              <a:rPr sz="1200" b="0">
                 <a:solidFill>
                   <a:srgbClr val="1A1A1A"/>
                 </a:solidFill>
@@ -8114,8 +8152,8 @@
         </p:nvSpPr>
         <p:spPr>
           <a:xfrm>
-            <a:off x="14749272" y="6583680"/>
-            <a:ext cx="219456" cy="164592"/>
+            <a:off x="14740128" y="6016752"/>
+            <a:ext cx="237744" cy="201168"/>
           </a:xfrm>
           <a:prstGeom prst="rightArrow">
             <a:avLst/>
@@ -8158,8 +8196,8 @@
         </p:nvSpPr>
         <p:spPr>
           <a:xfrm>
-            <a:off x="15041880" y="6510528"/>
-            <a:ext cx="2176272" cy="310896"/>
+            <a:off x="15060168" y="5925312"/>
+            <a:ext cx="2157984" cy="384048"/>
           </a:xfrm>
           <a:prstGeom prst="rect">
             <a:avLst/>
@@ -8202,8 +8240,8 @@
         </p:nvSpPr>
         <p:spPr>
           <a:xfrm>
-            <a:off x="15096744" y="6510528"/>
-            <a:ext cx="2066544" cy="310896"/>
+            <a:off x="15115032" y="5925312"/>
+            <a:ext cx="2048256" cy="384048"/>
           </a:xfrm>
           <a:prstGeom prst="rect">
             <a:avLst/>
@@ -8222,7 +8260,7 @@
               </a:lnSpc>
             </a:pPr>
             <a:r>
-              <a:rPr sz="1125" b="1">
+              <a:rPr sz="1200" b="1">
                 <a:solidFill>
                   <a:srgbClr val="1A1A1A"/>
                 </a:solidFill>
@@ -8242,8 +8280,8 @@
         </p:nvSpPr>
         <p:spPr>
           <a:xfrm>
-            <a:off x="12499848" y="6894576"/>
-            <a:ext cx="2176272" cy="310896"/>
+            <a:off x="12499848" y="6437376"/>
+            <a:ext cx="2157984" cy="384048"/>
           </a:xfrm>
           <a:prstGeom prst="rect">
             <a:avLst/>
@@ -8288,8 +8326,8 @@
         </p:nvSpPr>
         <p:spPr>
           <a:xfrm>
-            <a:off x="12554712" y="6894576"/>
-            <a:ext cx="2066544" cy="310896"/>
+            <a:off x="12554712" y="6437376"/>
+            <a:ext cx="2048256" cy="384048"/>
           </a:xfrm>
           <a:prstGeom prst="rect">
             <a:avLst/>
@@ -8308,7 +8346,7 @@
               </a:lnSpc>
             </a:pPr>
             <a:r>
-              <a:rPr sz="1125" b="0">
+              <a:rPr sz="1200" b="0">
                 <a:solidFill>
                   <a:srgbClr val="1A1A1A"/>
                 </a:solidFill>
@@ -8328,8 +8366,8 @@
         </p:nvSpPr>
         <p:spPr>
           <a:xfrm>
-            <a:off x="14749272" y="6967728"/>
-            <a:ext cx="219456" cy="164592"/>
+            <a:off x="14740128" y="6528816"/>
+            <a:ext cx="237744" cy="201168"/>
           </a:xfrm>
           <a:prstGeom prst="rightArrow">
             <a:avLst/>
@@ -8372,8 +8410,8 @@
         </p:nvSpPr>
         <p:spPr>
           <a:xfrm>
-            <a:off x="15041880" y="6894576"/>
-            <a:ext cx="2176272" cy="310896"/>
+            <a:off x="15060168" y="6437376"/>
+            <a:ext cx="2157984" cy="384048"/>
           </a:xfrm>
           <a:prstGeom prst="rect">
             <a:avLst/>
@@ -8416,8 +8454,8 @@
         </p:nvSpPr>
         <p:spPr>
           <a:xfrm>
-            <a:off x="15096744" y="6894576"/>
-            <a:ext cx="2066544" cy="310896"/>
+            <a:off x="15115032" y="6437376"/>
+            <a:ext cx="2048256" cy="384048"/>
           </a:xfrm>
           <a:prstGeom prst="rect">
             <a:avLst/>
@@ -8436,14 +8474,14 @@
               </a:lnSpc>
             </a:pPr>
             <a:r>
-              <a:rPr sz="1125" b="1">
+              <a:rPr sz="1200" b="1">
                 <a:solidFill>
                   <a:srgbClr val="1A1A1A"/>
                 </a:solidFill>
                 <a:latin typeface="Arial"/>
                 <a:ea typeface="Arial"/>
               </a:rPr>
-              <a:t>DT23 · 회복기 주도권 상실</a:t>
+              <a:t>DT23 · 주도권 상실</a:t>
             </a:r>
           </a:p>
         </p:txBody>
@@ -8456,8 +8494,8 @@
         </p:nvSpPr>
         <p:spPr>
           <a:xfrm>
-            <a:off x="12499848" y="7278624"/>
-            <a:ext cx="2176272" cy="310896"/>
+            <a:off x="12499848" y="6949440"/>
+            <a:ext cx="2157984" cy="384048"/>
           </a:xfrm>
           <a:prstGeom prst="rect">
             <a:avLst/>
@@ -8500,8 +8538,8 @@
         </p:nvSpPr>
         <p:spPr>
           <a:xfrm>
-            <a:off x="12554712" y="7278624"/>
-            <a:ext cx="2066544" cy="310896"/>
+            <a:off x="12554712" y="6949440"/>
+            <a:ext cx="2048256" cy="384048"/>
           </a:xfrm>
           <a:prstGeom prst="rect">
             <a:avLst/>
@@ -8520,7 +8558,7 @@
               </a:lnSpc>
             </a:pPr>
             <a:r>
-              <a:rPr sz="1125" b="1">
+              <a:rPr sz="1200" b="1">
                 <a:solidFill>
                   <a:srgbClr val="FFFFFF"/>
                 </a:solidFill>
@@ -8540,8 +8578,8 @@
         </p:nvSpPr>
         <p:spPr>
           <a:xfrm>
-            <a:off x="14749272" y="7351775"/>
-            <a:ext cx="219456" cy="164592"/>
+            <a:off x="14740128" y="7040880"/>
+            <a:ext cx="237744" cy="201168"/>
           </a:xfrm>
           <a:prstGeom prst="rightArrow">
             <a:avLst/>
@@ -8584,8 +8622,8 @@
         </p:nvSpPr>
         <p:spPr>
           <a:xfrm>
-            <a:off x="15041880" y="7278624"/>
-            <a:ext cx="2176272" cy="310896"/>
+            <a:off x="15060168" y="6949440"/>
+            <a:ext cx="2157984" cy="384048"/>
           </a:xfrm>
           <a:prstGeom prst="rect">
             <a:avLst/>
@@ -8628,8 +8666,8 @@
         </p:nvSpPr>
         <p:spPr>
           <a:xfrm>
-            <a:off x="15096744" y="7278624"/>
-            <a:ext cx="2066544" cy="310896"/>
+            <a:off x="15115032" y="6949440"/>
+            <a:ext cx="2048256" cy="384048"/>
           </a:xfrm>
           <a:prstGeom prst="rect">
             <a:avLst/>
@@ -8648,14 +8686,14 @@
               </a:lnSpc>
             </a:pPr>
             <a:r>
-              <a:rPr sz="1125" b="1">
+              <a:rPr sz="1200" b="1">
                 <a:solidFill>
                   <a:srgbClr val="FFFFFF"/>
                 </a:solidFill>
                 <a:latin typeface="Arial"/>
                 <a:ea typeface="Arial"/>
               </a:rPr>
-              <a:t>2027H2 · TCO 보증 수익원</a:t>
+              <a:t>2027H2 · TCO 보증 수익</a:t>
             </a:r>
           </a:p>
         </p:txBody>
@@ -8668,7 +8706,7 @@
         </p:nvSpPr>
         <p:spPr>
           <a:xfrm>
-            <a:off x="12499848" y="7717536"/>
+            <a:off x="12499848" y="7955279"/>
             <a:ext cx="4718304" cy="10972"/>
           </a:xfrm>
           <a:prstGeom prst="rect">
@@ -8712,7 +8750,7 @@
         </p:nvSpPr>
         <p:spPr>
           <a:xfrm>
-            <a:off x="12499848" y="7790688"/>
+            <a:off x="12499848" y="8028431"/>
             <a:ext cx="4718304" cy="274320"/>
           </a:xfrm>
           <a:prstGeom prst="rect">

--- a/outputs/presentation/qlc-ssd-strategy.pptx
+++ b/outputs/presentation/qlc-ssd-strategy.pptx
@@ -506,7 +506,7 @@
           <a:lstStyle/>
           <a:p>
             <a:r>
-              <a:t>1장은 QLC의 내구성 격차를 어느 계층이 해소하는가를 네 지표로 답합니다. 왼쪽 차트는 인과 순서입니다. ① 셀의 한계: 비트/셀을 늘릴수록 셀이 견디는 P/E 사이클이 SLC 30K~100K에서 QLC 100~1K로 100배 감소했습니다. ② 컨트롤러의 보상: 같은 기간 RBER은 SLC 10의 -9~-7승에서 QLC 10의 -3~-2승으로 약 백만 배 상승했지만, 고객의 UBER 요구(JESD218: 클라이언트 10의 -15승, 엔터프라이즈 10의 -16승)는 고정이었습니다. 그 격차를 컨트롤러가 ECC로 보상했습니다. 1비트/512B에서 BCH 60비트/KB, LDPC 120비트/KB로 약 60배입니다. 셀은 보존·사이클링·리드 디스터브로 시간에 따라 변하는 산포를 단독으로 보정하지 못하므로, 이것이 NAND에서 SSD로의 1단계 이관입니다. ③ 결과: ECC는 BER을 보상하지만 P/E를 늘리지는 못합니다. 정격 DWPD는 X25-E SLC 17(2008, 2PB 보증 환산), S3700 eMLC 10(2012), P4510 TLC 0.7(2018), P5316 QLC 0.41(2021, 22,930TBW 환산), 최신 QLC 0.075~0.6으로 하락했는데, 추론 캐시 계층의 요구는 TLC 수준 1~3, ScaleFlux가 제시한 유효 요구는 7~10입니다. 10~40배 격차입니다. ④ 남은 변수: DWPD = P/E × (1+OP) ÷ (WAF × 365 × 년)에서 P/E는 셀, OP는 디바이스, 년과 요구 DWPD는 고객이 결정합니다. P/E가 100배 감소했으므로 남은 보상 변수는 WAF뿐이고, WAF는 랜덤 쓰기 대표값 3, CacheLib 배치 표준 미적용 3.22에서 적용 시 1.03이 됐습니다. 68% 감소, 유효 DWPD 3.1배입니다. WAF를 1로 낮추는 것은 컨트롤러가 아니라 호스트가 데이터 수명에 따라 배치를 결정할 때만 가능합니다. 오른쪽 위는 산식과 항별 결정 주체, 아래는 이관 구조의 반복입니다. 1단계는 요구 UBER 고정, RBER 악화, ECC로 보상. 2단계는 요구 DWPD 고정, P/E 악화, WAF로 보상. 3단계는 본 덱의 제안입니다. 호스트 계층의 배치 규격은 KV 캐시 관리자 코드에 아직 미정의이고, 삼성이 FDE 상주와 전략적 협약으로 고객과 규격을 공동 정의해 DWPD·TCO를 보증합니다. 결론: QLC의 호스트 협력은 선택이 아니라 산식의 귀결입니다. 그 규격이 언제 정의되는지가 2장입니다. RBER 대표값과 환산 DWPD의 등급은 보고서 부록 A F28~F35에 있습니다.</a:t>
+              <a:t>1장은 QLC의 내구성 격차를 어느 계층이 해소하는가를 네 지표로 답합니다. 왼쪽 차트는 인과 순서입니다. ① 셀의 한계: 비트/셀을 늘릴수록 셀이 견디는 P/E 사이클이 SLC 30K~100K에서 QLC 100~1K로 100배 감소했습니다. ② 컨트롤러의 보상: 같은 기간 RBER은 SLC 10의 -9~-7승에서 QLC 10의 -3~-2승으로 약 백만 배 상승했지만, 고객의 UBER 요구(JESD218: 클라이언트 10의 -15승, 엔터프라이즈 10의 -16승)는 고정이었습니다. 그 격차를 컨트롤러가 ECC로 보상했습니다. 1비트/512B에서 BCH 60비트/KB, LDPC 120비트/KB로 약 60배입니다. 셀은 보존·사이클링·리드 디스터브로 시간에 따라 변하는 산포를 단독으로 보정하지 못하므로, 이것이 NAND에서 SSD로의 1단계 이관이며 완결된 이관입니다. ③ 결과: ECC는 BER을 보상하지만 P/E를 늘리지는 못합니다. 정격 DWPD는 X25-E SLC 17(2008), S3700 eMLC 10(2012), P4510 TLC 0.7(2018), P5316 QLC 0.41(2021), 최신 QLC 0.075~0.6으로 하락했는데, 추론 캐시 계층의 요구는 TLC 수준 1~3, ScaleFlux가 제시한 유효 요구는 7~10입니다. 10~40배 격차입니다. ④ WAF: 2단계는 SSD 진영이 디바이스와 드라이버 안에서 워크로드에 적응하려 한 시도입니다. Multi-stream(2014)·AutoStream(2017)·FTL 핫/콜드 추정·NVMe IO 결정성(NVM Sets·Predictable Latency Mode, 2019)이 여기에 속합니다. 테일 지연 등 QoS와 성능은 개선했으나, 데이터의 수명은 호스트와 애플리케이션만 아는 정보라 디바이스가 완전히 감지할 수 없고, 실 워크로드의 WAF는 3 수준에 머물렀습니다(랜덤 쓰기 3.00, CacheLib 배치 표준 미적용 3.22). 3단계는 호스트 시스템 공동 설계입니다. 호스트가 데이터 수명을 지정(배치 표준)하고 캐시 관리자·애플리케이션 정책까지 함께 설계하면 WAF는 1.03이 됩니다. 68% 감소, 유효 DWPD 3.1배입니다. 오른쪽 위는 산식과 항별 결정 주체입니다. DWPD = P/E × (1+OP) ÷ (WAF × 365 × 년)에서 P/E는 셀, OP는 디바이스, 년과 요구 DWPD는 고객이 결정합니다. P/E가 100배 감소했으므로 남은 보상 변수는 WAF뿐입니다. 오른쪽 아래는 이관의 3단계입니다. 1단계 ECC는 UBER 요구를 충족해 완결됐고, 2단계 SSD 단독 최적화는 QoS·성능을 개선했으나 WAF를 낮추지 못해 DWPD 요구를 충족하지 못했으며, 3단계 호스트 시스템 공동 설계가 WAF를 1로 낮춰 DWPD 요구를 충족합니다. 본 덱 2~5장이 3단계입니다. 결론: QLC로 요구 DWPD를 충족하는 경로는 호스트 시스템 공동 설계뿐이며, 이는 산식의 귀결입니다. 그 규격이 언제 정의되는지가 2장입니다. 근거 등급은 보고서 부록 A F28~F40에 있습니다.</a:t>
             </a:r>
           </a:p>
         </p:txBody>
@@ -786,7 +786,7 @@
           <a:lstStyle/>
           <a:p>
             <a:r>
-              <a:t>5장은 4장의 3단계에 진입하는 수단과 이를 수행할 조직입니다. 리드의 인용은 송용호 AX/PI센터장의 발언이며, 왼쪽 박스 아래 인용도 같은 인터뷰입니다. 고객 관계가 곧 워크로드 접근권이라는 뜻이고, 미주 현지 채용과 FDE 상주가 그 대응입니다. 진입 수단은 두 가지이고 각각 선례가 있습니다. ① FDE 상주: 삼성 엔지니어가 고객 시스템에 진입합니다. Palantir가 창안한 역할(내부 코드명 Delta)로, 고객 환경 내부에 상주하며 실제 운영 제약 아래서 프로덕션 시스템을 직접 구축하고 청구 시간이 아니라 성과로 평가받습니다. 명시적 요구와 실제 요구의 간극을 현장에서 코드로 해소하고, 특정 고객용 해법이 제품 표준 기능으로 전환되는 피드백 루프를 만듭니다. 고객 락인의 동력이자 640% 주가 수익률의 원천으로 평가되고, Anthropic·OpenAI가 엔터프라이즈 GTM 모델로 채택했습니다(OpenAI는 2025년 초 FDE 팀 2명→10명 이상). 삼성은 Co-Design Pod를 FDE 모델로 운영하되, 메모리는 제조 리드타임이 길므로 시스템 아키텍트·TCO 모델링 역량을 결합합니다. ② 전략적 협약(SCA): 고객 워크로드·규격 접근권을 계약으로 확보합니다. 선례는 Micron↔Anthropic(2026-06-22): 공동 설계(HBM·DRAM·SSD를 Claude 학습·추론 워크로드에 맞춰 공동 최적화) + 다년 공급 + 운영 통합(Claude 사내 배치) + 자본(Series H)을 한 계약에 결합했습니다. Micron은 SCA 16건, 최소 계약매출 약 $100B, 예치금 $22B를 공시했습니다. 삼성·SK의 Anthropic 공급 계약에는 공동 설계 조항이 없으므로 삼성이 선제 제안합니다. 계약 시한은 공급 완화 전인 2027년 상반기까지입니다. 조직·인사·문화 세 축(전략·재무 축과 90일·1년·3년 타임라인은 위키 실행 전략 페이지 §2.1·§2.5·§3). 조직은 실리콘밸리 소프트웨어 자회사와 FDE Pod에 더해 시스템 소프트웨어 조직을 강화합니다. 인사는 고객 시스템(추론 엔진·KV 캐시 관리자·I/O·커널 코드)을 읽고 수정할 수 있는 시스템 소프트웨어 전문가의 채용·양성이 핵심이며, 미주 현지 채용을 확대하고 별도 보상 체계를 두며 본사 엔지니어는 상주 로테이션으로 양성합니다. 문화는 업스트림 우선을 넘어 오픈소스 생태계를 주도하는 기업 문화로 전환합니다. 기여자에서 메인테이너·커미터로, 삼성이 운영하는 레퍼런스 프로젝트에 외부 기여가 들어오게 하며, KV cache 실측을 업계 최초로 공개합니다. 하단 요약 체인은 5장의 논리입니다. 1장 산식: 보상 변수 WAF는 호스트 계층이 결정한다. 2장 시점: 규격은 다운턴 국면에 정의되며 차기 규격은 현재 미정의다. 3장 수요: 고객은 추론 캐시 계층에서도 TB당 TCO를 요구하고 제약 조건은 내구성이다. 4장 역량: 디바이스 → 워크로드 → 고객 시스템 3단계로 확장한다. 5장 실행: FDE 상주와 전략적 협약, 그리고 조직·인사·문화가 그 수단이다.</a:t>
+              <a:t>5장은 4장의 3단계에 진입하는 수단과 이를 수행할 조직입니다. 리드의 인용은 송용호 AX/PI센터장의 발언이며, 왼쪽 박스 아래 인용도 같은 인터뷰입니다. 고객 관계가 곧 워크로드 접근권이라는 뜻이고, 미주 현지 채용과 FDE 상주가 그 대응입니다. 진입 수단은 두 가지이고 각각 선례가 있습니다. ① FDE 상주: 삼성 엔지니어가 고객 시스템에 진입합니다. Palantir가 창안한 역할(내부 코드명 Delta)로, 고객 환경 내부에 상주하며 실제 운영 제약 아래서 프로덕션 시스템을 직접 구축하고 청구 시간이 아니라 성과로 평가받습니다. 명시적 요구와 실제 요구의 간극을 현장에서 코드로 해소하고, 특정 고객용 해법이 제품 표준 기능으로 전환되는 피드백 루프를 만듭니다. 고객 락인의 동력이자 640% 주가 수익률의 원천으로 평가되고, Anthropic·OpenAI가 엔터프라이즈 GTM 모델로 채택했습니다(OpenAI는 2025년 초 FDE 팀 2명→10명 이상). 삼성은 Co-Design Pod를 FDE 모델로 운영하되, 메모리는 제조 리드타임이 길므로 시스템 아키텍트·TCO 모델링 역량을 결합합니다. ② 전략적 협약(SCA): 고객 워크로드·규격 접근권을 계약으로 확보합니다. 선례는 Micron↔Anthropic(2026-06-22): 공동 설계(HBM·DRAM·SSD를 Claude 학습·추론 워크로드에 맞춰 공동 최적화) + 다년 공급 + 운영 통합(Claude 사내 배치) + 자본(Series H)을 한 계약에 결합했습니다. Micron은 SCA 16건, 최소 계약매출 약 $100B, 예치금 $22B를 공시했습니다. 삼성·SK의 Anthropic 공급 계약에는 공동 설계 조항이 없으므로 삼성이 선제 제안합니다. 계약 시한은 공급 완화 전인 2027년 상반기까지입니다. 조직·인사·문화 세 축(전략·재무 축과 90일·1년·3년 타임라인은 위키 실행 전략 페이지 §2.1·§2.5·§3). 조직은 실리콘밸리 소프트웨어 자회사와 FDE Pod에 더해 시스템 소프트웨어 조직을 강화합니다. 인사는 고객 시스템(추론 엔진·KV 캐시 관리자·I/O·커널 코드)을 읽고 수정할 수 있는 시스템 소프트웨어 전문가의 채용·양성이 핵심이며, 미주 현지 채용을 확대하고 별도 보상 체계를 두며 본사 엔지니어는 상주 로테이션으로 양성합니다. 문화는 업스트림 우선을 넘어 오픈소스 생태계를 주도하는 기업 문화로 전환합니다. 기여자에서 메인테이너·커미터로, 삼성이 운영하는 레퍼런스 프로젝트에 외부 기여가 들어오게 하며, KV cache 실측을 업계 최초로 공개합니다. 하단 요약 체인은 5장의 논리입니다. 1장 산식: SSD 단독 최적화로는 WAF ≈ 3, 호스트 공동 설계로만 1.0이다. 2장 시점: 규격은 다운턴 국면에 정의되며 차기 규격은 현재 미정의다. 3장 수요: 고객은 추론 캐시 계층에서도 TB당 TCO를 요구하고 제약 조건은 내구성이다. 4장 역량: 디바이스 → 워크로드 → 고객 시스템 3단계로 확장한다. 5장 실행: FDE 상주와 전략적 협약, 그리고 조직·인사·문화가 그 수단이다.</a:t>
             </a:r>
           </a:p>
         </p:txBody>
@@ -4845,7 +4845,7 @@
                 <a:latin typeface="Arial"/>
                 <a:ea typeface="Arial"/>
               </a:rPr>
-              <a:t>RBER 상승은 컨트롤러 ECC가 보상했고, P/E 감소의 보상 변수 WAF는 호스트 계층에 있습니다</a:t>
+              <a:t>ECC가 RBER을 보상했듯 P/E 감소는 WAF로 보상해야 하며, 이는 호스트 공동 설계로만 가능합니다</a:t>
             </a:r>
           </a:p>
         </p:txBody>
@@ -4885,7 +4885,7 @@
                 <a:latin typeface="Arial"/>
                 <a:ea typeface="Arial"/>
               </a:rPr>
-              <a:t>QLC의 내구성 격차를 어느 계층이 해소하는가: P/E · BER · DWPD · WAF 네 지표의 세대별 변화로 확인합니다.</a:t>
+              <a:t>QLC의 내구성 격차를 어느 계층이 해소하는가: SSD 단독 최적화는 QoS·성능은 개선했으나 WAF는 낮추지 못했습니다.</a:t>
             </a:r>
           </a:p>
         </p:txBody>
@@ -5913,7 +5913,7 @@
                 <a:latin typeface="Arial"/>
                 <a:ea typeface="Arial"/>
               </a:rPr>
-              <a:t>이관 구조의 반복 — 요구 고정 · 단품 지표 악화 · 상위 계층 보상</a:t>
+              <a:t>이관의 3단계 — 요구 고정 · 단품 지표 악화 · 보상 계층의 상승</a:t>
             </a:r>
           </a:p>
         </p:txBody>
@@ -5926,8 +5926,8 @@
         </p:nvSpPr>
         <p:spPr>
           <a:xfrm>
-            <a:off x="11556630" y="4480560"/>
-            <a:ext cx="5771249" cy="219456"/>
+            <a:off x="11556630" y="4462272"/>
+            <a:ext cx="3393809" cy="219456"/>
           </a:xfrm>
           <a:prstGeom prst="rect">
             <a:avLst/>
@@ -5960,14 +5960,54 @@
       </p:sp>
       <p:sp>
         <p:nvSpPr>
-          <p:cNvPr id="53" name="Rectangle 52"/>
+          <p:cNvPr id="53" name="TextBox 52"/>
+          <p:cNvSpPr txBox="1"/>
+          <p:nvPr/>
+        </p:nvSpPr>
+        <p:spPr>
+          <a:xfrm>
+            <a:off x="14950439" y="4462272"/>
+            <a:ext cx="2377440" cy="219456"/>
+          </a:xfrm>
+          <a:prstGeom prst="rect">
+            <a:avLst/>
+          </a:prstGeom>
+          <a:noFill/>
+        </p:spPr>
+        <p:txBody>
+          <a:bodyPr wrap="square" anchor="t" lIns="0" rIns="0" tIns="0" bIns="0">
+            <a:spAutoFit/>
+          </a:bodyPr>
+          <a:lstStyle/>
+          <a:p>
+            <a:pPr algn="r">
+              <a:lnSpc>
+                <a:spcPct val="112000"/>
+              </a:lnSpc>
+            </a:pPr>
+            <a:r>
+              <a:rPr sz="1050" b="1">
+                <a:solidFill>
+                  <a:srgbClr val="1428A0"/>
+                </a:solidFill>
+                <a:latin typeface="Arial"/>
+                <a:ea typeface="Arial"/>
+              </a:rPr>
+              <a:t>UBER 요구 충족</a:t>
+            </a:r>
+          </a:p>
+        </p:txBody>
+      </p:sp>
+      <p:sp>
+        <p:nvSpPr>
+          <p:cNvPr id="54" name="Rectangle 53"/>
           <p:cNvSpPr/>
           <p:nvPr/>
         </p:nvSpPr>
         <p:spPr>
           <a:xfrm>
-            <a:off x="11556630" y="4773168"/>
-            <a:ext cx="1716485" cy="731520"/>
+            <a:off x="11556630" y="4736592"/>
+            <a:ext cx="1716485" cy="786384"/>
           </a:xfrm>
           <a:prstGeom prst="rect">
             <a:avLst/>
@@ -6006,13 +6046,53 @@
       </p:sp>
       <p:sp>
         <p:nvSpPr>
-          <p:cNvPr id="54" name="TextBox 53"/>
-          <p:cNvSpPr txBox="1"/>
-          <p:nvPr/>
-        </p:nvSpPr>
-        <p:spPr>
-          <a:xfrm>
-            <a:off x="11648070" y="4846320"/>
+          <p:cNvPr id="55" name="TextBox 54"/>
+          <p:cNvSpPr txBox="1"/>
+          <p:nvPr/>
+        </p:nvSpPr>
+        <p:spPr>
+          <a:xfrm>
+            <a:off x="11648070" y="4791455"/>
+            <a:ext cx="1533605" cy="201168"/>
+          </a:xfrm>
+          <a:prstGeom prst="rect">
+            <a:avLst/>
+          </a:prstGeom>
+          <a:noFill/>
+        </p:spPr>
+        <p:txBody>
+          <a:bodyPr wrap="square" anchor="t" lIns="0" rIns="0" tIns="0" bIns="0">
+            <a:spAutoFit/>
+          </a:bodyPr>
+          <a:lstStyle/>
+          <a:p>
+            <a:pPr algn="l">
+              <a:lnSpc>
+                <a:spcPct val="112000"/>
+              </a:lnSpc>
+            </a:pPr>
+            <a:r>
+              <a:rPr sz="975" b="0">
+                <a:solidFill>
+                  <a:srgbClr val="8A8A8A"/>
+                </a:solidFill>
+                <a:latin typeface="Arial"/>
+                <a:ea typeface="Arial"/>
+              </a:rPr>
+              <a:t>셀</a:t>
+            </a:r>
+          </a:p>
+        </p:txBody>
+      </p:sp>
+      <p:sp>
+        <p:nvSpPr>
+          <p:cNvPr id="56" name="TextBox 55"/>
+          <p:cNvSpPr txBox="1"/>
+          <p:nvPr/>
+        </p:nvSpPr>
+        <p:spPr>
+          <a:xfrm>
+            <a:off x="11648070" y="4983479"/>
             <a:ext cx="1533605" cy="237744"/>
           </a:xfrm>
           <a:prstGeom prst="rect">
@@ -6032,67 +6112,67 @@
               </a:lnSpc>
             </a:pPr>
             <a:r>
-              <a:rPr sz="1050" b="0">
-                <a:solidFill>
-                  <a:srgbClr val="8A8A8A"/>
-                </a:solidFill>
-                <a:latin typeface="Arial"/>
-                <a:ea typeface="Arial"/>
-              </a:rPr>
-              <a:t>셀</a:t>
-            </a:r>
-          </a:p>
-        </p:txBody>
-      </p:sp>
-      <p:sp>
-        <p:nvSpPr>
-          <p:cNvPr id="55" name="TextBox 54"/>
-          <p:cNvSpPr txBox="1"/>
-          <p:nvPr/>
-        </p:nvSpPr>
-        <p:spPr>
-          <a:xfrm>
-            <a:off x="11648070" y="5084064"/>
-            <a:ext cx="1533605" cy="347472"/>
-          </a:xfrm>
-          <a:prstGeom prst="rect">
-            <a:avLst/>
-          </a:prstGeom>
-          <a:noFill/>
-        </p:spPr>
-        <p:txBody>
-          <a:bodyPr wrap="square" anchor="ctr" lIns="0" rIns="0" tIns="0" bIns="0">
+              <a:rPr sz="1200" b="1">
+                <a:solidFill>
+                  <a:srgbClr val="1A1A1A"/>
+                </a:solidFill>
+                <a:latin typeface="Arial"/>
+                <a:ea typeface="Arial"/>
+              </a:rPr>
+              <a:t>RBER 백만 배 ↑</a:t>
+            </a:r>
+          </a:p>
+        </p:txBody>
+      </p:sp>
+      <p:sp>
+        <p:nvSpPr>
+          <p:cNvPr id="57" name="TextBox 56"/>
+          <p:cNvSpPr txBox="1"/>
+          <p:nvPr/>
+        </p:nvSpPr>
+        <p:spPr>
+          <a:xfrm>
+            <a:off x="11648070" y="5221224"/>
+            <a:ext cx="1533605" cy="274320"/>
+          </a:xfrm>
+          <a:prstGeom prst="rect">
+            <a:avLst/>
+          </a:prstGeom>
+          <a:noFill/>
+        </p:spPr>
+        <p:txBody>
+          <a:bodyPr wrap="square" anchor="t" lIns="0" rIns="0" tIns="0" bIns="0">
             <a:spAutoFit/>
           </a:bodyPr>
           <a:lstStyle/>
           <a:p>
             <a:pPr algn="l">
               <a:lnSpc>
-                <a:spcPct val="112000"/>
-              </a:lnSpc>
-            </a:pPr>
-            <a:r>
-              <a:rPr sz="1200" b="1">
-                <a:solidFill>
-                  <a:srgbClr val="1A1A1A"/>
-                </a:solidFill>
-                <a:latin typeface="Arial"/>
-                <a:ea typeface="Arial"/>
-              </a:rPr>
-              <a:t>RBER 백만 배 ↑</a:t>
-            </a:r>
-          </a:p>
-        </p:txBody>
-      </p:sp>
-      <p:sp>
-        <p:nvSpPr>
-          <p:cNvPr id="56" name="Right Arrow 55"/>
+                <a:spcPct val="100000"/>
+              </a:lnSpc>
+            </a:pPr>
+            <a:r>
+              <a:rPr sz="875" b="0">
+                <a:solidFill>
+                  <a:srgbClr val="555555"/>
+                </a:solidFill>
+                <a:latin typeface="Arial"/>
+                <a:ea typeface="Arial"/>
+              </a:rPr>
+              <a:t>산포가 시간에 따라 변화</a:t>
+            </a:r>
+          </a:p>
+        </p:txBody>
+      </p:sp>
+      <p:sp>
+        <p:nvSpPr>
+          <p:cNvPr id="58" name="Right Arrow 57"/>
           <p:cNvSpPr/>
           <p:nvPr/>
         </p:nvSpPr>
         <p:spPr>
           <a:xfrm>
-            <a:off x="13318836" y="5047488"/>
+            <a:off x="13318836" y="5038344"/>
             <a:ext cx="219456" cy="182880"/>
           </a:xfrm>
           <a:prstGeom prst="rightArrow">
@@ -6130,14 +6210,14 @@
       </p:sp>
       <p:sp>
         <p:nvSpPr>
-          <p:cNvPr id="57" name="Rectangle 56"/>
+          <p:cNvPr id="59" name="Rectangle 58"/>
           <p:cNvSpPr/>
           <p:nvPr/>
         </p:nvSpPr>
         <p:spPr>
           <a:xfrm>
-            <a:off x="13584012" y="4773168"/>
-            <a:ext cx="1716485" cy="731520"/>
+            <a:off x="13584012" y="4736592"/>
+            <a:ext cx="1716485" cy="786384"/>
           </a:xfrm>
           <a:prstGeom prst="rect">
             <a:avLst/>
@@ -6174,13 +6254,53 @@
       </p:sp>
       <p:sp>
         <p:nvSpPr>
-          <p:cNvPr id="58" name="TextBox 57"/>
-          <p:cNvSpPr txBox="1"/>
-          <p:nvPr/>
-        </p:nvSpPr>
-        <p:spPr>
-          <a:xfrm>
-            <a:off x="13675452" y="4846320"/>
+          <p:cNvPr id="60" name="TextBox 59"/>
+          <p:cNvSpPr txBox="1"/>
+          <p:nvPr/>
+        </p:nvSpPr>
+        <p:spPr>
+          <a:xfrm>
+            <a:off x="13675452" y="4791455"/>
+            <a:ext cx="1533605" cy="201168"/>
+          </a:xfrm>
+          <a:prstGeom prst="rect">
+            <a:avLst/>
+          </a:prstGeom>
+          <a:noFill/>
+        </p:spPr>
+        <p:txBody>
+          <a:bodyPr wrap="square" anchor="t" lIns="0" rIns="0" tIns="0" bIns="0">
+            <a:spAutoFit/>
+          </a:bodyPr>
+          <a:lstStyle/>
+          <a:p>
+            <a:pPr algn="l">
+              <a:lnSpc>
+                <a:spcPct val="112000"/>
+              </a:lnSpc>
+            </a:pPr>
+            <a:r>
+              <a:rPr sz="975" b="0">
+                <a:solidFill>
+                  <a:srgbClr val="FFFFFF"/>
+                </a:solidFill>
+                <a:latin typeface="Arial"/>
+                <a:ea typeface="Arial"/>
+              </a:rPr>
+              <a:t>컨트롤러</a:t>
+            </a:r>
+          </a:p>
+        </p:txBody>
+      </p:sp>
+      <p:sp>
+        <p:nvSpPr>
+          <p:cNvPr id="61" name="TextBox 60"/>
+          <p:cNvSpPr txBox="1"/>
+          <p:nvPr/>
+        </p:nvSpPr>
+        <p:spPr>
+          <a:xfrm>
+            <a:off x="13675452" y="4983479"/>
             <a:ext cx="1533605" cy="237744"/>
           </a:xfrm>
           <a:prstGeom prst="rect">
@@ -6200,67 +6320,67 @@
               </a:lnSpc>
             </a:pPr>
             <a:r>
-              <a:rPr sz="1050" b="0">
+              <a:rPr sz="1200" b="1">
                 <a:solidFill>
                   <a:srgbClr val="FFFFFF"/>
                 </a:solidFill>
                 <a:latin typeface="Arial"/>
                 <a:ea typeface="Arial"/>
               </a:rPr>
-              <a:t>컨트롤러</a:t>
-            </a:r>
-          </a:p>
-        </p:txBody>
-      </p:sp>
-      <p:sp>
-        <p:nvSpPr>
-          <p:cNvPr id="59" name="TextBox 58"/>
-          <p:cNvSpPr txBox="1"/>
-          <p:nvPr/>
-        </p:nvSpPr>
-        <p:spPr>
-          <a:xfrm>
-            <a:off x="13675452" y="5084064"/>
-            <a:ext cx="1533605" cy="347472"/>
-          </a:xfrm>
-          <a:prstGeom prst="rect">
-            <a:avLst/>
-          </a:prstGeom>
-          <a:noFill/>
-        </p:spPr>
-        <p:txBody>
-          <a:bodyPr wrap="square" anchor="ctr" lIns="0" rIns="0" tIns="0" bIns="0">
+              <a:t>ECC 60배 ↑</a:t>
+            </a:r>
+          </a:p>
+        </p:txBody>
+      </p:sp>
+      <p:sp>
+        <p:nvSpPr>
+          <p:cNvPr id="62" name="TextBox 61"/>
+          <p:cNvSpPr txBox="1"/>
+          <p:nvPr/>
+        </p:nvSpPr>
+        <p:spPr>
+          <a:xfrm>
+            <a:off x="13675452" y="5221224"/>
+            <a:ext cx="1533605" cy="274320"/>
+          </a:xfrm>
+          <a:prstGeom prst="rect">
+            <a:avLst/>
+          </a:prstGeom>
+          <a:noFill/>
+        </p:spPr>
+        <p:txBody>
+          <a:bodyPr wrap="square" anchor="t" lIns="0" rIns="0" tIns="0" bIns="0">
             <a:spAutoFit/>
           </a:bodyPr>
           <a:lstStyle/>
           <a:p>
             <a:pPr algn="l">
               <a:lnSpc>
-                <a:spcPct val="112000"/>
-              </a:lnSpc>
-            </a:pPr>
-            <a:r>
-              <a:rPr sz="1200" b="1">
+                <a:spcPct val="100000"/>
+              </a:lnSpc>
+            </a:pPr>
+            <a:r>
+              <a:rPr sz="875" b="0">
                 <a:solidFill>
                   <a:srgbClr val="FFFFFF"/>
                 </a:solidFill>
                 <a:latin typeface="Arial"/>
                 <a:ea typeface="Arial"/>
               </a:rPr>
-              <a:t>ECC 60배 ↑</a:t>
-            </a:r>
-          </a:p>
-        </p:txBody>
-      </p:sp>
-      <p:sp>
-        <p:nvSpPr>
-          <p:cNvPr id="60" name="Right Arrow 59"/>
+              <a:t>1bit/512B → LDPC 120bit/KB</a:t>
+            </a:r>
+          </a:p>
+        </p:txBody>
+      </p:sp>
+      <p:sp>
+        <p:nvSpPr>
+          <p:cNvPr id="63" name="Right Arrow 62"/>
           <p:cNvSpPr/>
           <p:nvPr/>
         </p:nvSpPr>
         <p:spPr>
           <a:xfrm>
-            <a:off x="15346218" y="5047488"/>
+            <a:off x="15346218" y="5038344"/>
             <a:ext cx="219456" cy="182880"/>
           </a:xfrm>
           <a:prstGeom prst="rightArrow">
@@ -6298,14 +6418,14 @@
       </p:sp>
       <p:sp>
         <p:nvSpPr>
-          <p:cNvPr id="61" name="Rectangle 60"/>
+          <p:cNvPr id="64" name="Rectangle 63"/>
           <p:cNvSpPr/>
           <p:nvPr/>
         </p:nvSpPr>
         <p:spPr>
           <a:xfrm>
-            <a:off x="15611394" y="4773168"/>
-            <a:ext cx="1716485" cy="731520"/>
+            <a:off x="15611394" y="4736592"/>
+            <a:ext cx="1716485" cy="786384"/>
           </a:xfrm>
           <a:prstGeom prst="rect">
             <a:avLst/>
@@ -6344,13 +6464,53 @@
       </p:sp>
       <p:sp>
         <p:nvSpPr>
-          <p:cNvPr id="62" name="TextBox 61"/>
-          <p:cNvSpPr txBox="1"/>
-          <p:nvPr/>
-        </p:nvSpPr>
-        <p:spPr>
-          <a:xfrm>
-            <a:off x="15702834" y="4846320"/>
+          <p:cNvPr id="65" name="TextBox 64"/>
+          <p:cNvSpPr txBox="1"/>
+          <p:nvPr/>
+        </p:nvSpPr>
+        <p:spPr>
+          <a:xfrm>
+            <a:off x="15702834" y="4791455"/>
+            <a:ext cx="1533605" cy="201168"/>
+          </a:xfrm>
+          <a:prstGeom prst="rect">
+            <a:avLst/>
+          </a:prstGeom>
+          <a:noFill/>
+        </p:spPr>
+        <p:txBody>
+          <a:bodyPr wrap="square" anchor="t" lIns="0" rIns="0" tIns="0" bIns="0">
+            <a:spAutoFit/>
+          </a:bodyPr>
+          <a:lstStyle/>
+          <a:p>
+            <a:pPr algn="l">
+              <a:lnSpc>
+                <a:spcPct val="112000"/>
+              </a:lnSpc>
+            </a:pPr>
+            <a:r>
+              <a:rPr sz="975" b="0">
+                <a:solidFill>
+                  <a:srgbClr val="8A8A8A"/>
+                </a:solidFill>
+                <a:latin typeface="Arial"/>
+                <a:ea typeface="Arial"/>
+              </a:rPr>
+              <a:t>고객</a:t>
+            </a:r>
+          </a:p>
+        </p:txBody>
+      </p:sp>
+      <p:sp>
+        <p:nvSpPr>
+          <p:cNvPr id="66" name="TextBox 65"/>
+          <p:cNvSpPr txBox="1"/>
+          <p:nvPr/>
+        </p:nvSpPr>
+        <p:spPr>
+          <a:xfrm>
+            <a:off x="15702834" y="4983479"/>
             <a:ext cx="1533605" cy="237744"/>
           </a:xfrm>
           <a:prstGeom prst="rect">
@@ -6370,108 +6530,148 @@
               </a:lnSpc>
             </a:pPr>
             <a:r>
-              <a:rPr sz="1050" b="0">
+              <a:rPr sz="1200" b="1">
+                <a:solidFill>
+                  <a:srgbClr val="1A1A1A"/>
+                </a:solidFill>
+                <a:latin typeface="Arial"/>
+                <a:ea typeface="Arial"/>
+              </a:rPr>
+              <a:t>UBER 요구 충족</a:t>
+            </a:r>
+          </a:p>
+        </p:txBody>
+      </p:sp>
+      <p:sp>
+        <p:nvSpPr>
+          <p:cNvPr id="67" name="TextBox 66"/>
+          <p:cNvSpPr txBox="1"/>
+          <p:nvPr/>
+        </p:nvSpPr>
+        <p:spPr>
+          <a:xfrm>
+            <a:off x="15702834" y="5221224"/>
+            <a:ext cx="1533605" cy="274320"/>
+          </a:xfrm>
+          <a:prstGeom prst="rect">
+            <a:avLst/>
+          </a:prstGeom>
+          <a:noFill/>
+        </p:spPr>
+        <p:txBody>
+          <a:bodyPr wrap="square" anchor="t" lIns="0" rIns="0" tIns="0" bIns="0">
+            <a:spAutoFit/>
+          </a:bodyPr>
+          <a:lstStyle/>
+          <a:p>
+            <a:pPr algn="l">
+              <a:lnSpc>
+                <a:spcPct val="100000"/>
+              </a:lnSpc>
+            </a:pPr>
+            <a:r>
+              <a:rPr sz="875" b="0">
+                <a:solidFill>
+                  <a:srgbClr val="555555"/>
+                </a:solidFill>
+                <a:latin typeface="Arial"/>
+                <a:ea typeface="Arial"/>
+              </a:rPr>
+              <a:t>JESD218 유지</a:t>
+            </a:r>
+          </a:p>
+        </p:txBody>
+      </p:sp>
+      <p:sp>
+        <p:nvSpPr>
+          <p:cNvPr id="68" name="TextBox 67"/>
+          <p:cNvSpPr txBox="1"/>
+          <p:nvPr/>
+        </p:nvSpPr>
+        <p:spPr>
+          <a:xfrm>
+            <a:off x="11556630" y="5705856"/>
+            <a:ext cx="3393809" cy="219456"/>
+          </a:xfrm>
+          <a:prstGeom prst="rect">
+            <a:avLst/>
+          </a:prstGeom>
+          <a:noFill/>
+        </p:spPr>
+        <p:txBody>
+          <a:bodyPr wrap="square" anchor="t" lIns="0" rIns="0" tIns="0" bIns="0">
+            <a:spAutoFit/>
+          </a:bodyPr>
+          <a:lstStyle/>
+          <a:p>
+            <a:pPr algn="l">
+              <a:lnSpc>
+                <a:spcPct val="112000"/>
+              </a:lnSpc>
+            </a:pPr>
+            <a:r>
+              <a:rPr sz="1125" b="1">
+                <a:solidFill>
+                  <a:srgbClr val="1A1A1A"/>
+                </a:solidFill>
+                <a:latin typeface="Arial"/>
+                <a:ea typeface="Arial"/>
+              </a:rPr>
+              <a:t>2단계  SSD 단독 워크로드 최적화  (2014~2019)</a:t>
+            </a:r>
+          </a:p>
+        </p:txBody>
+      </p:sp>
+      <p:sp>
+        <p:nvSpPr>
+          <p:cNvPr id="69" name="TextBox 68"/>
+          <p:cNvSpPr txBox="1"/>
+          <p:nvPr/>
+        </p:nvSpPr>
+        <p:spPr>
+          <a:xfrm>
+            <a:off x="14950439" y="5705856"/>
+            <a:ext cx="2377440" cy="219456"/>
+          </a:xfrm>
+          <a:prstGeom prst="rect">
+            <a:avLst/>
+          </a:prstGeom>
+          <a:noFill/>
+        </p:spPr>
+        <p:txBody>
+          <a:bodyPr wrap="square" anchor="t" lIns="0" rIns="0" tIns="0" bIns="0">
+            <a:spAutoFit/>
+          </a:bodyPr>
+          <a:lstStyle/>
+          <a:p>
+            <a:pPr algn="r">
+              <a:lnSpc>
+                <a:spcPct val="112000"/>
+              </a:lnSpc>
+            </a:pPr>
+            <a:r>
+              <a:rPr sz="1050" b="1">
                 <a:solidFill>
                   <a:srgbClr val="8A8A8A"/>
                 </a:solidFill>
                 <a:latin typeface="Arial"/>
                 <a:ea typeface="Arial"/>
               </a:rPr>
-              <a:t>고객</a:t>
-            </a:r>
-          </a:p>
-        </p:txBody>
-      </p:sp>
-      <p:sp>
-        <p:nvSpPr>
-          <p:cNvPr id="63" name="TextBox 62"/>
-          <p:cNvSpPr txBox="1"/>
-          <p:nvPr/>
-        </p:nvSpPr>
-        <p:spPr>
-          <a:xfrm>
-            <a:off x="15702834" y="5084064"/>
-            <a:ext cx="1533605" cy="347472"/>
-          </a:xfrm>
-          <a:prstGeom prst="rect">
-            <a:avLst/>
-          </a:prstGeom>
-          <a:noFill/>
-        </p:spPr>
-        <p:txBody>
-          <a:bodyPr wrap="square" anchor="ctr" lIns="0" rIns="0" tIns="0" bIns="0">
-            <a:spAutoFit/>
-          </a:bodyPr>
-          <a:lstStyle/>
-          <a:p>
-            <a:pPr algn="l">
-              <a:lnSpc>
-                <a:spcPct val="112000"/>
-              </a:lnSpc>
-            </a:pPr>
-            <a:r>
-              <a:rPr sz="1200" b="1">
-                <a:solidFill>
-                  <a:srgbClr val="1A1A1A"/>
-                </a:solidFill>
-                <a:latin typeface="Arial"/>
-                <a:ea typeface="Arial"/>
-              </a:rPr>
-              <a:t>UBER 요구 유지</a:t>
-            </a:r>
-          </a:p>
-        </p:txBody>
-      </p:sp>
-      <p:sp>
-        <p:nvSpPr>
-          <p:cNvPr id="64" name="TextBox 63"/>
-          <p:cNvSpPr txBox="1"/>
-          <p:nvPr/>
-        </p:nvSpPr>
-        <p:spPr>
-          <a:xfrm>
-            <a:off x="11556630" y="5724144"/>
-            <a:ext cx="5771249" cy="219456"/>
-          </a:xfrm>
-          <a:prstGeom prst="rect">
-            <a:avLst/>
-          </a:prstGeom>
-          <a:noFill/>
-        </p:spPr>
-        <p:txBody>
-          <a:bodyPr wrap="square" anchor="t" lIns="0" rIns="0" tIns="0" bIns="0">
-            <a:spAutoFit/>
-          </a:bodyPr>
-          <a:lstStyle/>
-          <a:p>
-            <a:pPr algn="l">
-              <a:lnSpc>
-                <a:spcPct val="112000"/>
-              </a:lnSpc>
-            </a:pPr>
-            <a:r>
-              <a:rPr sz="1125" b="1">
-                <a:solidFill>
-                  <a:srgbClr val="1A1A1A"/>
-                </a:solidFill>
-                <a:latin typeface="Arial"/>
-                <a:ea typeface="Arial"/>
-              </a:rPr>
-              <a:t>2단계  SSD → 호스트  (2022~)</a:t>
-            </a:r>
-          </a:p>
-        </p:txBody>
-      </p:sp>
-      <p:sp>
-        <p:nvSpPr>
-          <p:cNvPr id="65" name="Rectangle 64"/>
+              <a:t>DWPD 요구 미충족 · 부분 성공</a:t>
+            </a:r>
+          </a:p>
+        </p:txBody>
+      </p:sp>
+      <p:sp>
+        <p:nvSpPr>
+          <p:cNvPr id="70" name="Rectangle 69"/>
           <p:cNvSpPr/>
           <p:nvPr/>
         </p:nvSpPr>
         <p:spPr>
           <a:xfrm>
-            <a:off x="11556630" y="6016752"/>
-            <a:ext cx="1716485" cy="731520"/>
+            <a:off x="11556630" y="5980176"/>
+            <a:ext cx="1716485" cy="786384"/>
           </a:xfrm>
           <a:prstGeom prst="rect">
             <a:avLst/>
@@ -6510,13 +6710,53 @@
       </p:sp>
       <p:sp>
         <p:nvSpPr>
-          <p:cNvPr id="66" name="TextBox 65"/>
-          <p:cNvSpPr txBox="1"/>
-          <p:nvPr/>
-        </p:nvSpPr>
-        <p:spPr>
-          <a:xfrm>
-            <a:off x="11648070" y="6089904"/>
+          <p:cNvPr id="71" name="TextBox 70"/>
+          <p:cNvSpPr txBox="1"/>
+          <p:nvPr/>
+        </p:nvSpPr>
+        <p:spPr>
+          <a:xfrm>
+            <a:off x="11648070" y="6035040"/>
+            <a:ext cx="1533605" cy="201168"/>
+          </a:xfrm>
+          <a:prstGeom prst="rect">
+            <a:avLst/>
+          </a:prstGeom>
+          <a:noFill/>
+        </p:spPr>
+        <p:txBody>
+          <a:bodyPr wrap="square" anchor="t" lIns="0" rIns="0" tIns="0" bIns="0">
+            <a:spAutoFit/>
+          </a:bodyPr>
+          <a:lstStyle/>
+          <a:p>
+            <a:pPr algn="l">
+              <a:lnSpc>
+                <a:spcPct val="112000"/>
+              </a:lnSpc>
+            </a:pPr>
+            <a:r>
+              <a:rPr sz="975" b="0">
+                <a:solidFill>
+                  <a:srgbClr val="8A8A8A"/>
+                </a:solidFill>
+                <a:latin typeface="Arial"/>
+                <a:ea typeface="Arial"/>
+              </a:rPr>
+              <a:t>셀 · SSD</a:t>
+            </a:r>
+          </a:p>
+        </p:txBody>
+      </p:sp>
+      <p:sp>
+        <p:nvSpPr>
+          <p:cNvPr id="72" name="TextBox 71"/>
+          <p:cNvSpPr txBox="1"/>
+          <p:nvPr/>
+        </p:nvSpPr>
+        <p:spPr>
+          <a:xfrm>
+            <a:off x="11648070" y="6227064"/>
             <a:ext cx="1533605" cy="237744"/>
           </a:xfrm>
           <a:prstGeom prst="rect">
@@ -6536,67 +6776,67 @@
               </a:lnSpc>
             </a:pPr>
             <a:r>
-              <a:rPr sz="1050" b="0">
-                <a:solidFill>
-                  <a:srgbClr val="8A8A8A"/>
-                </a:solidFill>
-                <a:latin typeface="Arial"/>
-                <a:ea typeface="Arial"/>
-              </a:rPr>
-              <a:t>셀 · SSD · DWPD 0.4</a:t>
-            </a:r>
-          </a:p>
-        </p:txBody>
-      </p:sp>
-      <p:sp>
-        <p:nvSpPr>
-          <p:cNvPr id="67" name="TextBox 66"/>
-          <p:cNvSpPr txBox="1"/>
-          <p:nvPr/>
-        </p:nvSpPr>
-        <p:spPr>
-          <a:xfrm>
-            <a:off x="11648070" y="6327648"/>
-            <a:ext cx="1533605" cy="347472"/>
-          </a:xfrm>
-          <a:prstGeom prst="rect">
-            <a:avLst/>
-          </a:prstGeom>
-          <a:noFill/>
-        </p:spPr>
-        <p:txBody>
-          <a:bodyPr wrap="square" anchor="ctr" lIns="0" rIns="0" tIns="0" bIns="0">
+              <a:rPr sz="1200" b="1">
+                <a:solidFill>
+                  <a:srgbClr val="1A1A1A"/>
+                </a:solidFill>
+                <a:latin typeface="Arial"/>
+                <a:ea typeface="Arial"/>
+              </a:rPr>
+              <a:t>P/E 100배 ↓</a:t>
+            </a:r>
+          </a:p>
+        </p:txBody>
+      </p:sp>
+      <p:sp>
+        <p:nvSpPr>
+          <p:cNvPr id="73" name="TextBox 72"/>
+          <p:cNvSpPr txBox="1"/>
+          <p:nvPr/>
+        </p:nvSpPr>
+        <p:spPr>
+          <a:xfrm>
+            <a:off x="11648070" y="6464808"/>
+            <a:ext cx="1533605" cy="274320"/>
+          </a:xfrm>
+          <a:prstGeom prst="rect">
+            <a:avLst/>
+          </a:prstGeom>
+          <a:noFill/>
+        </p:spPr>
+        <p:txBody>
+          <a:bodyPr wrap="square" anchor="t" lIns="0" rIns="0" tIns="0" bIns="0">
             <a:spAutoFit/>
           </a:bodyPr>
           <a:lstStyle/>
           <a:p>
             <a:pPr algn="l">
               <a:lnSpc>
-                <a:spcPct val="112000"/>
-              </a:lnSpc>
-            </a:pPr>
-            <a:r>
-              <a:rPr sz="1200" b="1">
-                <a:solidFill>
-                  <a:srgbClr val="1A1A1A"/>
-                </a:solidFill>
-                <a:latin typeface="Arial"/>
-                <a:ea typeface="Arial"/>
-              </a:rPr>
-              <a:t>P/E 100배 ↓</a:t>
-            </a:r>
-          </a:p>
-        </p:txBody>
-      </p:sp>
-      <p:sp>
-        <p:nvSpPr>
-          <p:cNvPr id="68" name="Right Arrow 67"/>
+                <a:spcPct val="100000"/>
+              </a:lnSpc>
+            </a:pPr>
+            <a:r>
+              <a:rPr sz="875" b="0">
+                <a:solidFill>
+                  <a:srgbClr val="555555"/>
+                </a:solidFill>
+                <a:latin typeface="Arial"/>
+                <a:ea typeface="Arial"/>
+              </a:rPr>
+              <a:t>정격 DWPD 0.4</a:t>
+            </a:r>
+          </a:p>
+        </p:txBody>
+      </p:sp>
+      <p:sp>
+        <p:nvSpPr>
+          <p:cNvPr id="74" name="Right Arrow 73"/>
           <p:cNvSpPr/>
           <p:nvPr/>
         </p:nvSpPr>
         <p:spPr>
           <a:xfrm>
-            <a:off x="13318836" y="6291072"/>
+            <a:off x="13318836" y="6281928"/>
             <a:ext cx="219456" cy="182880"/>
           </a:xfrm>
           <a:prstGeom prst="rightArrow">
@@ -6634,16 +6874,636 @@
       </p:sp>
       <p:sp>
         <p:nvSpPr>
-          <p:cNvPr id="69" name="Rectangle 68"/>
+          <p:cNvPr id="75" name="Rectangle 74"/>
           <p:cNvSpPr/>
           <p:nvPr/>
         </p:nvSpPr>
         <p:spPr>
           <a:xfrm>
-            <a:off x="13584012" y="6016752"/>
-            <a:ext cx="1716485" cy="731520"/>
-          </a:xfrm>
-          <a:prstGeom prst="rect">
+            <a:off x="13584012" y="5980176"/>
+            <a:ext cx="1716485" cy="786384"/>
+          </a:xfrm>
+          <a:prstGeom prst="rect">
+            <a:avLst/>
+          </a:prstGeom>
+          <a:solidFill>
+            <a:srgbClr val="AAB8E8"/>
+          </a:solidFill>
+          <a:ln>
+            <a:noFill/>
+          </a:ln>
+          <a:effectLst/>
+        </p:spPr>
+        <p:style>
+          <a:lnRef idx="1">
+            <a:schemeClr val="accent1"/>
+          </a:lnRef>
+          <a:fillRef idx="3">
+            <a:schemeClr val="accent1"/>
+          </a:fillRef>
+          <a:effectRef idx="2">
+            <a:schemeClr val="accent1"/>
+          </a:effectRef>
+          <a:fontRef idx="minor">
+            <a:schemeClr val="lt1"/>
+          </a:fontRef>
+        </p:style>
+        <p:txBody>
+          <a:bodyPr rtlCol="0" anchor="ctr"/>
+          <a:lstStyle/>
+          <a:p>
+            <a:pPr algn="ctr"/>
+          </a:p>
+        </p:txBody>
+      </p:sp>
+      <p:sp>
+        <p:nvSpPr>
+          <p:cNvPr id="76" name="TextBox 75"/>
+          <p:cNvSpPr txBox="1"/>
+          <p:nvPr/>
+        </p:nvSpPr>
+        <p:spPr>
+          <a:xfrm>
+            <a:off x="13675452" y="6035040"/>
+            <a:ext cx="1533605" cy="201168"/>
+          </a:xfrm>
+          <a:prstGeom prst="rect">
+            <a:avLst/>
+          </a:prstGeom>
+          <a:noFill/>
+        </p:spPr>
+        <p:txBody>
+          <a:bodyPr wrap="square" anchor="t" lIns="0" rIns="0" tIns="0" bIns="0">
+            <a:spAutoFit/>
+          </a:bodyPr>
+          <a:lstStyle/>
+          <a:p>
+            <a:pPr algn="l">
+              <a:lnSpc>
+                <a:spcPct val="112000"/>
+              </a:lnSpc>
+            </a:pPr>
+            <a:r>
+              <a:rPr sz="975" b="0">
+                <a:solidFill>
+                  <a:srgbClr val="1A1A1A"/>
+                </a:solidFill>
+                <a:latin typeface="Arial"/>
+                <a:ea typeface="Arial"/>
+              </a:rPr>
+              <a:t>SSD · 드라이버</a:t>
+            </a:r>
+          </a:p>
+        </p:txBody>
+      </p:sp>
+      <p:sp>
+        <p:nvSpPr>
+          <p:cNvPr id="77" name="TextBox 76"/>
+          <p:cNvSpPr txBox="1"/>
+          <p:nvPr/>
+        </p:nvSpPr>
+        <p:spPr>
+          <a:xfrm>
+            <a:off x="13675452" y="6227064"/>
+            <a:ext cx="1533605" cy="237744"/>
+          </a:xfrm>
+          <a:prstGeom prst="rect">
+            <a:avLst/>
+          </a:prstGeom>
+          <a:noFill/>
+        </p:spPr>
+        <p:txBody>
+          <a:bodyPr wrap="square" anchor="t" lIns="0" rIns="0" tIns="0" bIns="0">
+            <a:spAutoFit/>
+          </a:bodyPr>
+          <a:lstStyle/>
+          <a:p>
+            <a:pPr algn="l">
+              <a:lnSpc>
+                <a:spcPct val="112000"/>
+              </a:lnSpc>
+            </a:pPr>
+            <a:r>
+              <a:rPr sz="1200" b="1">
+                <a:solidFill>
+                  <a:srgbClr val="1A1A1A"/>
+                </a:solidFill>
+                <a:latin typeface="Arial"/>
+                <a:ea typeface="Arial"/>
+              </a:rPr>
+              <a:t>QoS · 성능 개선</a:t>
+            </a:r>
+          </a:p>
+        </p:txBody>
+      </p:sp>
+      <p:sp>
+        <p:nvSpPr>
+          <p:cNvPr id="78" name="TextBox 77"/>
+          <p:cNvSpPr txBox="1"/>
+          <p:nvPr/>
+        </p:nvSpPr>
+        <p:spPr>
+          <a:xfrm>
+            <a:off x="13675452" y="6464808"/>
+            <a:ext cx="1533605" cy="274320"/>
+          </a:xfrm>
+          <a:prstGeom prst="rect">
+            <a:avLst/>
+          </a:prstGeom>
+          <a:noFill/>
+        </p:spPr>
+        <p:txBody>
+          <a:bodyPr wrap="square" anchor="t" lIns="0" rIns="0" tIns="0" bIns="0">
+            <a:spAutoFit/>
+          </a:bodyPr>
+          <a:lstStyle/>
+          <a:p>
+            <a:pPr algn="l">
+              <a:lnSpc>
+                <a:spcPct val="100000"/>
+              </a:lnSpc>
+            </a:pPr>
+            <a:r>
+              <a:rPr sz="875" b="0">
+                <a:solidFill>
+                  <a:srgbClr val="555555"/>
+                </a:solidFill>
+                <a:latin typeface="Arial"/>
+                <a:ea typeface="Arial"/>
+              </a:rPr>
+              <a:t>핫/콜드 추정 · 스트림 · IO 결정성 → WAF ≈ 3 유지</a:t>
+            </a:r>
+          </a:p>
+        </p:txBody>
+      </p:sp>
+      <p:sp>
+        <p:nvSpPr>
+          <p:cNvPr id="79" name="Right Arrow 78"/>
+          <p:cNvSpPr/>
+          <p:nvPr/>
+        </p:nvSpPr>
+        <p:spPr>
+          <a:xfrm>
+            <a:off x="15346218" y="6281928"/>
+            <a:ext cx="219456" cy="182880"/>
+          </a:xfrm>
+          <a:prstGeom prst="rightArrow">
+            <a:avLst/>
+          </a:prstGeom>
+          <a:solidFill>
+            <a:srgbClr val="AAB8E8"/>
+          </a:solidFill>
+          <a:ln>
+            <a:noFill/>
+          </a:ln>
+          <a:effectLst/>
+        </p:spPr>
+        <p:style>
+          <a:lnRef idx="1">
+            <a:schemeClr val="accent1"/>
+          </a:lnRef>
+          <a:fillRef idx="3">
+            <a:schemeClr val="accent1"/>
+          </a:fillRef>
+          <a:effectRef idx="2">
+            <a:schemeClr val="accent1"/>
+          </a:effectRef>
+          <a:fontRef idx="minor">
+            <a:schemeClr val="lt1"/>
+          </a:fontRef>
+        </p:style>
+        <p:txBody>
+          <a:bodyPr rtlCol="0" anchor="ctr"/>
+          <a:lstStyle/>
+          <a:p>
+            <a:pPr algn="ctr"/>
+          </a:p>
+        </p:txBody>
+      </p:sp>
+      <p:sp>
+        <p:nvSpPr>
+          <p:cNvPr id="80" name="Rectangle 79"/>
+          <p:cNvSpPr/>
+          <p:nvPr/>
+        </p:nvSpPr>
+        <p:spPr>
+          <a:xfrm>
+            <a:off x="15611394" y="5980176"/>
+            <a:ext cx="1716485" cy="786384"/>
+          </a:xfrm>
+          <a:prstGeom prst="rect">
+            <a:avLst/>
+          </a:prstGeom>
+          <a:solidFill>
+            <a:srgbClr val="FFFFFF"/>
+          </a:solidFill>
+          <a:ln w="12700">
+            <a:solidFill>
+              <a:srgbClr val="8A8A8A"/>
+            </a:solidFill>
+          </a:ln>
+          <a:effectLst/>
+        </p:spPr>
+        <p:style>
+          <a:lnRef idx="1">
+            <a:schemeClr val="accent1"/>
+          </a:lnRef>
+          <a:fillRef idx="3">
+            <a:schemeClr val="accent1"/>
+          </a:fillRef>
+          <a:effectRef idx="2">
+            <a:schemeClr val="accent1"/>
+          </a:effectRef>
+          <a:fontRef idx="minor">
+            <a:schemeClr val="lt1"/>
+          </a:fontRef>
+        </p:style>
+        <p:txBody>
+          <a:bodyPr rtlCol="0" anchor="ctr"/>
+          <a:lstStyle/>
+          <a:p>
+            <a:pPr algn="ctr"/>
+          </a:p>
+        </p:txBody>
+      </p:sp>
+      <p:sp>
+        <p:nvSpPr>
+          <p:cNvPr id="81" name="TextBox 80"/>
+          <p:cNvSpPr txBox="1"/>
+          <p:nvPr/>
+        </p:nvSpPr>
+        <p:spPr>
+          <a:xfrm>
+            <a:off x="15702834" y="6035040"/>
+            <a:ext cx="1533605" cy="201168"/>
+          </a:xfrm>
+          <a:prstGeom prst="rect">
+            <a:avLst/>
+          </a:prstGeom>
+          <a:noFill/>
+        </p:spPr>
+        <p:txBody>
+          <a:bodyPr wrap="square" anchor="t" lIns="0" rIns="0" tIns="0" bIns="0">
+            <a:spAutoFit/>
+          </a:bodyPr>
+          <a:lstStyle/>
+          <a:p>
+            <a:pPr algn="l">
+              <a:lnSpc>
+                <a:spcPct val="112000"/>
+              </a:lnSpc>
+            </a:pPr>
+            <a:r>
+              <a:rPr sz="975" b="0">
+                <a:solidFill>
+                  <a:srgbClr val="8A8A8A"/>
+                </a:solidFill>
+                <a:latin typeface="Arial"/>
+                <a:ea typeface="Arial"/>
+              </a:rPr>
+              <a:t>고객</a:t>
+            </a:r>
+          </a:p>
+        </p:txBody>
+      </p:sp>
+      <p:sp>
+        <p:nvSpPr>
+          <p:cNvPr id="82" name="TextBox 81"/>
+          <p:cNvSpPr txBox="1"/>
+          <p:nvPr/>
+        </p:nvSpPr>
+        <p:spPr>
+          <a:xfrm>
+            <a:off x="15702834" y="6227064"/>
+            <a:ext cx="1533605" cy="237744"/>
+          </a:xfrm>
+          <a:prstGeom prst="rect">
+            <a:avLst/>
+          </a:prstGeom>
+          <a:noFill/>
+        </p:spPr>
+        <p:txBody>
+          <a:bodyPr wrap="square" anchor="t" lIns="0" rIns="0" tIns="0" bIns="0">
+            <a:spAutoFit/>
+          </a:bodyPr>
+          <a:lstStyle/>
+          <a:p>
+            <a:pPr algn="l">
+              <a:lnSpc>
+                <a:spcPct val="112000"/>
+              </a:lnSpc>
+            </a:pPr>
+            <a:r>
+              <a:rPr sz="1200" b="1">
+                <a:solidFill>
+                  <a:srgbClr val="555555"/>
+                </a:solidFill>
+                <a:latin typeface="Arial"/>
+                <a:ea typeface="Arial"/>
+              </a:rPr>
+              <a:t>DWPD 요구 미충족</a:t>
+            </a:r>
+          </a:p>
+        </p:txBody>
+      </p:sp>
+      <p:sp>
+        <p:nvSpPr>
+          <p:cNvPr id="83" name="TextBox 82"/>
+          <p:cNvSpPr txBox="1"/>
+          <p:nvPr/>
+        </p:nvSpPr>
+        <p:spPr>
+          <a:xfrm>
+            <a:off x="15702834" y="6464808"/>
+            <a:ext cx="1533605" cy="274320"/>
+          </a:xfrm>
+          <a:prstGeom prst="rect">
+            <a:avLst/>
+          </a:prstGeom>
+          <a:noFill/>
+        </p:spPr>
+        <p:txBody>
+          <a:bodyPr wrap="square" anchor="t" lIns="0" rIns="0" tIns="0" bIns="0">
+            <a:spAutoFit/>
+          </a:bodyPr>
+          <a:lstStyle/>
+          <a:p>
+            <a:pPr algn="l">
+              <a:lnSpc>
+                <a:spcPct val="100000"/>
+              </a:lnSpc>
+            </a:pPr>
+            <a:r>
+              <a:rPr sz="875" b="0">
+                <a:solidFill>
+                  <a:srgbClr val="8A8A8A"/>
+                </a:solidFill>
+                <a:latin typeface="Arial"/>
+                <a:ea typeface="Arial"/>
+              </a:rPr>
+              <a:t>격차 10~40배</a:t>
+            </a:r>
+          </a:p>
+        </p:txBody>
+      </p:sp>
+      <p:sp>
+        <p:nvSpPr>
+          <p:cNvPr id="84" name="TextBox 83"/>
+          <p:cNvSpPr txBox="1"/>
+          <p:nvPr/>
+        </p:nvSpPr>
+        <p:spPr>
+          <a:xfrm>
+            <a:off x="11556630" y="6949440"/>
+            <a:ext cx="3393809" cy="219456"/>
+          </a:xfrm>
+          <a:prstGeom prst="rect">
+            <a:avLst/>
+          </a:prstGeom>
+          <a:noFill/>
+        </p:spPr>
+        <p:txBody>
+          <a:bodyPr wrap="square" anchor="t" lIns="0" rIns="0" tIns="0" bIns="0">
+            <a:spAutoFit/>
+          </a:bodyPr>
+          <a:lstStyle/>
+          <a:p>
+            <a:pPr algn="l">
+              <a:lnSpc>
+                <a:spcPct val="112000"/>
+              </a:lnSpc>
+            </a:pPr>
+            <a:r>
+              <a:rPr sz="1125" b="1">
+                <a:solidFill>
+                  <a:srgbClr val="1428A0"/>
+                </a:solidFill>
+                <a:latin typeface="Arial"/>
+                <a:ea typeface="Arial"/>
+              </a:rPr>
+              <a:t>3단계  호스트 시스템 공동 설계  (2022~, 본 덱)</a:t>
+            </a:r>
+          </a:p>
+        </p:txBody>
+      </p:sp>
+      <p:sp>
+        <p:nvSpPr>
+          <p:cNvPr id="85" name="TextBox 84"/>
+          <p:cNvSpPr txBox="1"/>
+          <p:nvPr/>
+        </p:nvSpPr>
+        <p:spPr>
+          <a:xfrm>
+            <a:off x="14950439" y="6949440"/>
+            <a:ext cx="2377440" cy="219456"/>
+          </a:xfrm>
+          <a:prstGeom prst="rect">
+            <a:avLst/>
+          </a:prstGeom>
+          <a:noFill/>
+        </p:spPr>
+        <p:txBody>
+          <a:bodyPr wrap="square" anchor="t" lIns="0" rIns="0" tIns="0" bIns="0">
+            <a:spAutoFit/>
+          </a:bodyPr>
+          <a:lstStyle/>
+          <a:p>
+            <a:pPr algn="r">
+              <a:lnSpc>
+                <a:spcPct val="112000"/>
+              </a:lnSpc>
+            </a:pPr>
+            <a:r>
+              <a:rPr sz="1050" b="1">
+                <a:solidFill>
+                  <a:srgbClr val="1428A0"/>
+                </a:solidFill>
+                <a:latin typeface="Arial"/>
+                <a:ea typeface="Arial"/>
+              </a:rPr>
+              <a:t>DWPD 요구 충족 · 유일한 경로</a:t>
+            </a:r>
+          </a:p>
+        </p:txBody>
+      </p:sp>
+      <p:sp>
+        <p:nvSpPr>
+          <p:cNvPr id="86" name="Rectangle 85"/>
+          <p:cNvSpPr/>
+          <p:nvPr/>
+        </p:nvSpPr>
+        <p:spPr>
+          <a:xfrm>
+            <a:off x="11556630" y="7223760"/>
+            <a:ext cx="1716485" cy="786384"/>
+          </a:xfrm>
+          <a:prstGeom prst="rect">
+            <a:avLst/>
+          </a:prstGeom>
+          <a:solidFill>
+            <a:srgbClr val="FFFFFF"/>
+          </a:solidFill>
+          <a:ln w="9525">
+            <a:solidFill>
+              <a:srgbClr val="D9D9D9"/>
+            </a:solidFill>
+          </a:ln>
+          <a:effectLst/>
+        </p:spPr>
+        <p:style>
+          <a:lnRef idx="1">
+            <a:schemeClr val="accent1"/>
+          </a:lnRef>
+          <a:fillRef idx="3">
+            <a:schemeClr val="accent1"/>
+          </a:fillRef>
+          <a:effectRef idx="2">
+            <a:schemeClr val="accent1"/>
+          </a:effectRef>
+          <a:fontRef idx="minor">
+            <a:schemeClr val="lt1"/>
+          </a:fontRef>
+        </p:style>
+        <p:txBody>
+          <a:bodyPr rtlCol="0" anchor="ctr"/>
+          <a:lstStyle/>
+          <a:p>
+            <a:pPr algn="ctr"/>
+          </a:p>
+        </p:txBody>
+      </p:sp>
+      <p:sp>
+        <p:nvSpPr>
+          <p:cNvPr id="87" name="TextBox 86"/>
+          <p:cNvSpPr txBox="1"/>
+          <p:nvPr/>
+        </p:nvSpPr>
+        <p:spPr>
+          <a:xfrm>
+            <a:off x="11648070" y="7278624"/>
+            <a:ext cx="1533605" cy="201168"/>
+          </a:xfrm>
+          <a:prstGeom prst="rect">
+            <a:avLst/>
+          </a:prstGeom>
+          <a:noFill/>
+        </p:spPr>
+        <p:txBody>
+          <a:bodyPr wrap="square" anchor="t" lIns="0" rIns="0" tIns="0" bIns="0">
+            <a:spAutoFit/>
+          </a:bodyPr>
+          <a:lstStyle/>
+          <a:p>
+            <a:pPr algn="l">
+              <a:lnSpc>
+                <a:spcPct val="112000"/>
+              </a:lnSpc>
+            </a:pPr>
+            <a:r>
+              <a:rPr sz="975" b="0">
+                <a:solidFill>
+                  <a:srgbClr val="8A8A8A"/>
+                </a:solidFill>
+                <a:latin typeface="Arial"/>
+                <a:ea typeface="Arial"/>
+              </a:rPr>
+              <a:t>호스트 · 앱</a:t>
+            </a:r>
+          </a:p>
+        </p:txBody>
+      </p:sp>
+      <p:sp>
+        <p:nvSpPr>
+          <p:cNvPr id="88" name="TextBox 87"/>
+          <p:cNvSpPr txBox="1"/>
+          <p:nvPr/>
+        </p:nvSpPr>
+        <p:spPr>
+          <a:xfrm>
+            <a:off x="11648070" y="7470648"/>
+            <a:ext cx="1533605" cy="237744"/>
+          </a:xfrm>
+          <a:prstGeom prst="rect">
+            <a:avLst/>
+          </a:prstGeom>
+          <a:noFill/>
+        </p:spPr>
+        <p:txBody>
+          <a:bodyPr wrap="square" anchor="t" lIns="0" rIns="0" tIns="0" bIns="0">
+            <a:spAutoFit/>
+          </a:bodyPr>
+          <a:lstStyle/>
+          <a:p>
+            <a:pPr algn="l">
+              <a:lnSpc>
+                <a:spcPct val="112000"/>
+              </a:lnSpc>
+            </a:pPr>
+            <a:r>
+              <a:rPr sz="1200" b="1">
+                <a:solidFill>
+                  <a:srgbClr val="1A1A1A"/>
+                </a:solidFill>
+                <a:latin typeface="Arial"/>
+                <a:ea typeface="Arial"/>
+              </a:rPr>
+              <a:t>데이터 수명 지정</a:t>
+            </a:r>
+          </a:p>
+        </p:txBody>
+      </p:sp>
+      <p:sp>
+        <p:nvSpPr>
+          <p:cNvPr id="89" name="TextBox 88"/>
+          <p:cNvSpPr txBox="1"/>
+          <p:nvPr/>
+        </p:nvSpPr>
+        <p:spPr>
+          <a:xfrm>
+            <a:off x="11648070" y="7708392"/>
+            <a:ext cx="1533605" cy="274320"/>
+          </a:xfrm>
+          <a:prstGeom prst="rect">
+            <a:avLst/>
+          </a:prstGeom>
+          <a:noFill/>
+        </p:spPr>
+        <p:txBody>
+          <a:bodyPr wrap="square" anchor="t" lIns="0" rIns="0" tIns="0" bIns="0">
+            <a:spAutoFit/>
+          </a:bodyPr>
+          <a:lstStyle/>
+          <a:p>
+            <a:pPr algn="l">
+              <a:lnSpc>
+                <a:spcPct val="100000"/>
+              </a:lnSpc>
+            </a:pPr>
+            <a:r>
+              <a:rPr sz="875" b="0">
+                <a:solidFill>
+                  <a:srgbClr val="555555"/>
+                </a:solidFill>
+                <a:latin typeface="Arial"/>
+                <a:ea typeface="Arial"/>
+              </a:rPr>
+              <a:t>배치 표준 · 캐시 관리자 정책</a:t>
+            </a:r>
+          </a:p>
+        </p:txBody>
+      </p:sp>
+      <p:sp>
+        <p:nvSpPr>
+          <p:cNvPr id="90" name="Right Arrow 89"/>
+          <p:cNvSpPr/>
+          <p:nvPr/>
+        </p:nvSpPr>
+        <p:spPr>
+          <a:xfrm>
+            <a:off x="13318836" y="7525512"/>
+            <a:ext cx="219456" cy="182880"/>
+          </a:xfrm>
+          <a:prstGeom prst="rightArrow">
             <a:avLst/>
           </a:prstGeom>
           <a:solidFill>
@@ -6678,96 +7538,16 @@
       </p:sp>
       <p:sp>
         <p:nvSpPr>
-          <p:cNvPr id="70" name="TextBox 69"/>
-          <p:cNvSpPr txBox="1"/>
-          <p:nvPr/>
-        </p:nvSpPr>
-        <p:spPr>
-          <a:xfrm>
-            <a:off x="13675452" y="6089904"/>
-            <a:ext cx="1533605" cy="237744"/>
-          </a:xfrm>
-          <a:prstGeom prst="rect">
-            <a:avLst/>
-          </a:prstGeom>
-          <a:noFill/>
-        </p:spPr>
-        <p:txBody>
-          <a:bodyPr wrap="square" anchor="t" lIns="0" rIns="0" tIns="0" bIns="0">
-            <a:spAutoFit/>
-          </a:bodyPr>
-          <a:lstStyle/>
-          <a:p>
-            <a:pPr algn="l">
-              <a:lnSpc>
-                <a:spcPct val="112000"/>
-              </a:lnSpc>
-            </a:pPr>
-            <a:r>
-              <a:rPr sz="1050" b="0">
-                <a:solidFill>
-                  <a:srgbClr val="FFFFFF"/>
-                </a:solidFill>
-                <a:latin typeface="Arial"/>
-                <a:ea typeface="Arial"/>
-              </a:rPr>
-              <a:t>호스트 · 앱</a:t>
-            </a:r>
-          </a:p>
-        </p:txBody>
-      </p:sp>
-      <p:sp>
-        <p:nvSpPr>
-          <p:cNvPr id="71" name="TextBox 70"/>
-          <p:cNvSpPr txBox="1"/>
-          <p:nvPr/>
-        </p:nvSpPr>
-        <p:spPr>
-          <a:xfrm>
-            <a:off x="13675452" y="6327648"/>
-            <a:ext cx="1533605" cy="347472"/>
-          </a:xfrm>
-          <a:prstGeom prst="rect">
-            <a:avLst/>
-          </a:prstGeom>
-          <a:noFill/>
-        </p:spPr>
-        <p:txBody>
-          <a:bodyPr wrap="square" anchor="ctr" lIns="0" rIns="0" tIns="0" bIns="0">
-            <a:spAutoFit/>
-          </a:bodyPr>
-          <a:lstStyle/>
-          <a:p>
-            <a:pPr algn="l">
-              <a:lnSpc>
-                <a:spcPct val="112000"/>
-              </a:lnSpc>
-            </a:pPr>
-            <a:r>
-              <a:rPr sz="1200" b="1">
-                <a:solidFill>
-                  <a:srgbClr val="FFFFFF"/>
-                </a:solidFill>
-                <a:latin typeface="Arial"/>
-                <a:ea typeface="Arial"/>
-              </a:rPr>
-              <a:t>WAF 3.2 → 1.0</a:t>
-            </a:r>
-          </a:p>
-        </p:txBody>
-      </p:sp>
-      <p:sp>
-        <p:nvSpPr>
-          <p:cNvPr id="72" name="Right Arrow 71"/>
+          <p:cNvPr id="91" name="Rectangle 90"/>
           <p:cNvSpPr/>
           <p:nvPr/>
         </p:nvSpPr>
         <p:spPr>
           <a:xfrm>
-            <a:off x="15346218" y="6291072"/>
-            <a:ext cx="219456" cy="182880"/>
-          </a:xfrm>
-          <a:prstGeom prst="rightArrow">
+            <a:off x="13584012" y="7223760"/>
+            <a:ext cx="1716485" cy="786384"/>
+          </a:xfrm>
+          <a:prstGeom prst="rect">
             <a:avLst/>
           </a:prstGeom>
           <a:solidFill>
@@ -6802,14 +7582,178 @@
       </p:sp>
       <p:sp>
         <p:nvSpPr>
-          <p:cNvPr id="73" name="Rectangle 72"/>
+          <p:cNvPr id="92" name="TextBox 91"/>
+          <p:cNvSpPr txBox="1"/>
+          <p:nvPr/>
+        </p:nvSpPr>
+        <p:spPr>
+          <a:xfrm>
+            <a:off x="13675452" y="7278624"/>
+            <a:ext cx="1533605" cy="201168"/>
+          </a:xfrm>
+          <a:prstGeom prst="rect">
+            <a:avLst/>
+          </a:prstGeom>
+          <a:noFill/>
+        </p:spPr>
+        <p:txBody>
+          <a:bodyPr wrap="square" anchor="t" lIns="0" rIns="0" tIns="0" bIns="0">
+            <a:spAutoFit/>
+          </a:bodyPr>
+          <a:lstStyle/>
+          <a:p>
+            <a:pPr algn="l">
+              <a:lnSpc>
+                <a:spcPct val="112000"/>
+              </a:lnSpc>
+            </a:pPr>
+            <a:r>
+              <a:rPr sz="975" b="0">
+                <a:solidFill>
+                  <a:srgbClr val="FFFFFF"/>
+                </a:solidFill>
+                <a:latin typeface="Arial"/>
+                <a:ea typeface="Arial"/>
+              </a:rPr>
+              <a:t>삼성 · 고객 공동 설계</a:t>
+            </a:r>
+          </a:p>
+        </p:txBody>
+      </p:sp>
+      <p:sp>
+        <p:nvSpPr>
+          <p:cNvPr id="93" name="TextBox 92"/>
+          <p:cNvSpPr txBox="1"/>
+          <p:nvPr/>
+        </p:nvSpPr>
+        <p:spPr>
+          <a:xfrm>
+            <a:off x="13675452" y="7470648"/>
+            <a:ext cx="1533605" cy="237744"/>
+          </a:xfrm>
+          <a:prstGeom prst="rect">
+            <a:avLst/>
+          </a:prstGeom>
+          <a:noFill/>
+        </p:spPr>
+        <p:txBody>
+          <a:bodyPr wrap="square" anchor="t" lIns="0" rIns="0" tIns="0" bIns="0">
+            <a:spAutoFit/>
+          </a:bodyPr>
+          <a:lstStyle/>
+          <a:p>
+            <a:pPr algn="l">
+              <a:lnSpc>
+                <a:spcPct val="112000"/>
+              </a:lnSpc>
+            </a:pPr>
+            <a:r>
+              <a:rPr sz="1200" b="1">
+                <a:solidFill>
+                  <a:srgbClr val="FFFFFF"/>
+                </a:solidFill>
+                <a:latin typeface="Arial"/>
+                <a:ea typeface="Arial"/>
+              </a:rPr>
+              <a:t>WAF 3.2 → 1.0</a:t>
+            </a:r>
+          </a:p>
+        </p:txBody>
+      </p:sp>
+      <p:sp>
+        <p:nvSpPr>
+          <p:cNvPr id="94" name="TextBox 93"/>
+          <p:cNvSpPr txBox="1"/>
+          <p:nvPr/>
+        </p:nvSpPr>
+        <p:spPr>
+          <a:xfrm>
+            <a:off x="13675452" y="7708392"/>
+            <a:ext cx="1533605" cy="274320"/>
+          </a:xfrm>
+          <a:prstGeom prst="rect">
+            <a:avLst/>
+          </a:prstGeom>
+          <a:noFill/>
+        </p:spPr>
+        <p:txBody>
+          <a:bodyPr wrap="square" anchor="t" lIns="0" rIns="0" tIns="0" bIns="0">
+            <a:spAutoFit/>
+          </a:bodyPr>
+          <a:lstStyle/>
+          <a:p>
+            <a:pPr algn="l">
+              <a:lnSpc>
+                <a:spcPct val="100000"/>
+              </a:lnSpc>
+            </a:pPr>
+            <a:r>
+              <a:rPr sz="875" b="0">
+                <a:solidFill>
+                  <a:srgbClr val="FFFFFF"/>
+                </a:solidFill>
+                <a:latin typeface="Arial"/>
+                <a:ea typeface="Arial"/>
+              </a:rPr>
+              <a:t>FDE · SCA · 유효 DWPD ×3.1</a:t>
+            </a:r>
+          </a:p>
+        </p:txBody>
+      </p:sp>
+      <p:sp>
+        <p:nvSpPr>
+          <p:cNvPr id="95" name="Right Arrow 94"/>
           <p:cNvSpPr/>
           <p:nvPr/>
         </p:nvSpPr>
         <p:spPr>
           <a:xfrm>
-            <a:off x="15611394" y="6016752"/>
-            <a:ext cx="1716485" cy="731520"/>
+            <a:off x="15346218" y="7525512"/>
+            <a:ext cx="219456" cy="182880"/>
+          </a:xfrm>
+          <a:prstGeom prst="rightArrow">
+            <a:avLst/>
+          </a:prstGeom>
+          <a:solidFill>
+            <a:srgbClr val="1428A0"/>
+          </a:solidFill>
+          <a:ln>
+            <a:noFill/>
+          </a:ln>
+          <a:effectLst/>
+        </p:spPr>
+        <p:style>
+          <a:lnRef idx="1">
+            <a:schemeClr val="accent1"/>
+          </a:lnRef>
+          <a:fillRef idx="3">
+            <a:schemeClr val="accent1"/>
+          </a:fillRef>
+          <a:effectRef idx="2">
+            <a:schemeClr val="accent1"/>
+          </a:effectRef>
+          <a:fontRef idx="minor">
+            <a:schemeClr val="lt1"/>
+          </a:fontRef>
+        </p:style>
+        <p:txBody>
+          <a:bodyPr rtlCol="0" anchor="ctr"/>
+          <a:lstStyle/>
+          <a:p>
+            <a:pPr algn="ctr"/>
+          </a:p>
+        </p:txBody>
+      </p:sp>
+      <p:sp>
+        <p:nvSpPr>
+          <p:cNvPr id="96" name="Rectangle 95"/>
+          <p:cNvSpPr/>
+          <p:nvPr/>
+        </p:nvSpPr>
+        <p:spPr>
+          <a:xfrm>
+            <a:off x="15611394" y="7223760"/>
+            <a:ext cx="1716485" cy="786384"/>
           </a:xfrm>
           <a:prstGeom prst="rect">
             <a:avLst/>
@@ -6848,13 +7792,53 @@
       </p:sp>
       <p:sp>
         <p:nvSpPr>
-          <p:cNvPr id="74" name="TextBox 73"/>
-          <p:cNvSpPr txBox="1"/>
-          <p:nvPr/>
-        </p:nvSpPr>
-        <p:spPr>
-          <a:xfrm>
-            <a:off x="15702834" y="6089904"/>
+          <p:cNvPr id="97" name="TextBox 96"/>
+          <p:cNvSpPr txBox="1"/>
+          <p:nvPr/>
+        </p:nvSpPr>
+        <p:spPr>
+          <a:xfrm>
+            <a:off x="15702834" y="7278624"/>
+            <a:ext cx="1533605" cy="201168"/>
+          </a:xfrm>
+          <a:prstGeom prst="rect">
+            <a:avLst/>
+          </a:prstGeom>
+          <a:noFill/>
+        </p:spPr>
+        <p:txBody>
+          <a:bodyPr wrap="square" anchor="t" lIns="0" rIns="0" tIns="0" bIns="0">
+            <a:spAutoFit/>
+          </a:bodyPr>
+          <a:lstStyle/>
+          <a:p>
+            <a:pPr algn="l">
+              <a:lnSpc>
+                <a:spcPct val="112000"/>
+              </a:lnSpc>
+            </a:pPr>
+            <a:r>
+              <a:rPr sz="975" b="0">
+                <a:solidFill>
+                  <a:srgbClr val="8A8A8A"/>
+                </a:solidFill>
+                <a:latin typeface="Arial"/>
+                <a:ea typeface="Arial"/>
+              </a:rPr>
+              <a:t>고객</a:t>
+            </a:r>
+          </a:p>
+        </p:txBody>
+      </p:sp>
+      <p:sp>
+        <p:nvSpPr>
+          <p:cNvPr id="98" name="TextBox 97"/>
+          <p:cNvSpPr txBox="1"/>
+          <p:nvPr/>
+        </p:nvSpPr>
+        <p:spPr>
+          <a:xfrm>
+            <a:off x="15702834" y="7470648"/>
             <a:ext cx="1533605" cy="237744"/>
           </a:xfrm>
           <a:prstGeom prst="rect">
@@ -6874,236 +7858,70 @@
               </a:lnSpc>
             </a:pPr>
             <a:r>
-              <a:rPr sz="1050" b="0">
-                <a:solidFill>
-                  <a:srgbClr val="8A8A8A"/>
-                </a:solidFill>
-                <a:latin typeface="Arial"/>
-                <a:ea typeface="Arial"/>
-              </a:rPr>
-              <a:t>고객</a:t>
-            </a:r>
-          </a:p>
-        </p:txBody>
-      </p:sp>
-      <p:sp>
-        <p:nvSpPr>
-          <p:cNvPr id="75" name="TextBox 74"/>
-          <p:cNvSpPr txBox="1"/>
-          <p:nvPr/>
-        </p:nvSpPr>
-        <p:spPr>
-          <a:xfrm>
-            <a:off x="15702834" y="6327648"/>
-            <a:ext cx="1533605" cy="347472"/>
-          </a:xfrm>
-          <a:prstGeom prst="rect">
-            <a:avLst/>
-          </a:prstGeom>
-          <a:noFill/>
-        </p:spPr>
-        <p:txBody>
-          <a:bodyPr wrap="square" anchor="ctr" lIns="0" rIns="0" tIns="0" bIns="0">
+              <a:rPr sz="1200" b="1">
+                <a:solidFill>
+                  <a:srgbClr val="1A1A1A"/>
+                </a:solidFill>
+                <a:latin typeface="Arial"/>
+                <a:ea typeface="Arial"/>
+              </a:rPr>
+              <a:t>DWPD 요구 충족</a:t>
+            </a:r>
+          </a:p>
+        </p:txBody>
+      </p:sp>
+      <p:sp>
+        <p:nvSpPr>
+          <p:cNvPr id="99" name="TextBox 98"/>
+          <p:cNvSpPr txBox="1"/>
+          <p:nvPr/>
+        </p:nvSpPr>
+        <p:spPr>
+          <a:xfrm>
+            <a:off x="15702834" y="7708392"/>
+            <a:ext cx="1533605" cy="274320"/>
+          </a:xfrm>
+          <a:prstGeom prst="rect">
+            <a:avLst/>
+          </a:prstGeom>
+          <a:noFill/>
+        </p:spPr>
+        <p:txBody>
+          <a:bodyPr wrap="square" anchor="t" lIns="0" rIns="0" tIns="0" bIns="0">
             <a:spAutoFit/>
           </a:bodyPr>
           <a:lstStyle/>
           <a:p>
             <a:pPr algn="l">
               <a:lnSpc>
-                <a:spcPct val="112000"/>
-              </a:lnSpc>
-            </a:pPr>
-            <a:r>
-              <a:rPr sz="1200" b="1">
-                <a:solidFill>
-                  <a:srgbClr val="1A1A1A"/>
-                </a:solidFill>
-                <a:latin typeface="Arial"/>
-                <a:ea typeface="Arial"/>
-              </a:rPr>
-              <a:t>DWPD 요구 유지</a:t>
-            </a:r>
-          </a:p>
-        </p:txBody>
-      </p:sp>
-      <p:sp>
-        <p:nvSpPr>
-          <p:cNvPr id="76" name="TextBox 75"/>
-          <p:cNvSpPr txBox="1"/>
-          <p:nvPr/>
-        </p:nvSpPr>
-        <p:spPr>
-          <a:xfrm>
-            <a:off x="11556630" y="6967728"/>
-            <a:ext cx="5771249" cy="219456"/>
-          </a:xfrm>
-          <a:prstGeom prst="rect">
-            <a:avLst/>
-          </a:prstGeom>
-          <a:noFill/>
-        </p:spPr>
-        <p:txBody>
-          <a:bodyPr wrap="square" anchor="t" lIns="0" rIns="0" tIns="0" bIns="0">
-            <a:spAutoFit/>
-          </a:bodyPr>
-          <a:lstStyle/>
-          <a:p>
-            <a:pPr algn="l">
-              <a:lnSpc>
-                <a:spcPct val="112000"/>
-              </a:lnSpc>
-            </a:pPr>
-            <a:r>
-              <a:rPr sz="1125" b="1">
-                <a:solidFill>
-                  <a:srgbClr val="1428A0"/>
-                </a:solidFill>
-                <a:latin typeface="Arial"/>
-                <a:ea typeface="Arial"/>
-              </a:rPr>
-              <a:t>3단계  호스트 → 고객 시스템 공동 설계  (본 덱 2~5장)</a:t>
-            </a:r>
-          </a:p>
-        </p:txBody>
-      </p:sp>
-      <p:sp>
-        <p:nvSpPr>
-          <p:cNvPr id="77" name="Rectangle 76"/>
+                <a:spcPct val="100000"/>
+              </a:lnSpc>
+            </a:pPr>
+            <a:r>
+              <a:rPr sz="875" b="0">
+                <a:solidFill>
+                  <a:srgbClr val="555555"/>
+                </a:solidFill>
+                <a:latin typeface="Arial"/>
+                <a:ea typeface="Arial"/>
+              </a:rPr>
+              <a:t>QLC로 정격 내 수명 보증</a:t>
+            </a:r>
+          </a:p>
+        </p:txBody>
+      </p:sp>
+      <p:sp>
+        <p:nvSpPr>
+          <p:cNvPr id="100" name="Rectangle 99"/>
           <p:cNvSpPr/>
           <p:nvPr/>
         </p:nvSpPr>
         <p:spPr>
           <a:xfrm>
-            <a:off x="11556630" y="7260336"/>
-            <a:ext cx="1716485" cy="731520"/>
-          </a:xfrm>
-          <a:prstGeom prst="rect">
-            <a:avLst/>
-          </a:prstGeom>
-          <a:solidFill>
-            <a:srgbClr val="FFFFFF"/>
-          </a:solidFill>
-          <a:ln w="9525">
-            <a:solidFill>
-              <a:srgbClr val="D9D9D9"/>
-            </a:solidFill>
-          </a:ln>
-          <a:effectLst/>
-        </p:spPr>
-        <p:style>
-          <a:lnRef idx="1">
-            <a:schemeClr val="accent1"/>
-          </a:lnRef>
-          <a:fillRef idx="3">
-            <a:schemeClr val="accent1"/>
-          </a:fillRef>
-          <a:effectRef idx="2">
-            <a:schemeClr val="accent1"/>
-          </a:effectRef>
-          <a:fontRef idx="minor">
-            <a:schemeClr val="lt1"/>
-          </a:fontRef>
-        </p:style>
-        <p:txBody>
-          <a:bodyPr rtlCol="0" anchor="ctr"/>
-          <a:lstStyle/>
-          <a:p>
-            <a:pPr algn="ctr"/>
-          </a:p>
-        </p:txBody>
-      </p:sp>
-      <p:sp>
-        <p:nvSpPr>
-          <p:cNvPr id="78" name="TextBox 77"/>
-          <p:cNvSpPr txBox="1"/>
-          <p:nvPr/>
-        </p:nvSpPr>
-        <p:spPr>
-          <a:xfrm>
-            <a:off x="11648070" y="7333488"/>
-            <a:ext cx="1533605" cy="237744"/>
-          </a:xfrm>
-          <a:prstGeom prst="rect">
-            <a:avLst/>
-          </a:prstGeom>
-          <a:noFill/>
-        </p:spPr>
-        <p:txBody>
-          <a:bodyPr wrap="square" anchor="t" lIns="0" rIns="0" tIns="0" bIns="0">
-            <a:spAutoFit/>
-          </a:bodyPr>
-          <a:lstStyle/>
-          <a:p>
-            <a:pPr algn="l">
-              <a:lnSpc>
-                <a:spcPct val="112000"/>
-              </a:lnSpc>
-            </a:pPr>
-            <a:r>
-              <a:rPr sz="1050" b="0">
-                <a:solidFill>
-                  <a:srgbClr val="8A8A8A"/>
-                </a:solidFill>
-                <a:latin typeface="Arial"/>
-                <a:ea typeface="Arial"/>
-              </a:rPr>
-              <a:t>KV 캐시 관리자</a:t>
-            </a:r>
-          </a:p>
-        </p:txBody>
-      </p:sp>
-      <p:sp>
-        <p:nvSpPr>
-          <p:cNvPr id="79" name="TextBox 78"/>
-          <p:cNvSpPr txBox="1"/>
-          <p:nvPr/>
-        </p:nvSpPr>
-        <p:spPr>
-          <a:xfrm>
-            <a:off x="11648070" y="7571232"/>
-            <a:ext cx="1533605" cy="347472"/>
-          </a:xfrm>
-          <a:prstGeom prst="rect">
-            <a:avLst/>
-          </a:prstGeom>
-          <a:noFill/>
-        </p:spPr>
-        <p:txBody>
-          <a:bodyPr wrap="square" anchor="ctr" lIns="0" rIns="0" tIns="0" bIns="0">
-            <a:spAutoFit/>
-          </a:bodyPr>
-          <a:lstStyle/>
-          <a:p>
-            <a:pPr algn="l">
-              <a:lnSpc>
-                <a:spcPct val="112000"/>
-              </a:lnSpc>
-            </a:pPr>
-            <a:r>
-              <a:rPr sz="1200" b="1">
-                <a:solidFill>
-                  <a:srgbClr val="1A1A1A"/>
-                </a:solidFill>
-                <a:latin typeface="Arial"/>
-                <a:ea typeface="Arial"/>
-              </a:rPr>
-              <a:t>배치 규격 미정의</a:t>
-            </a:r>
-          </a:p>
-        </p:txBody>
-      </p:sp>
-      <p:sp>
-        <p:nvSpPr>
-          <p:cNvPr id="80" name="Right Arrow 79"/>
-          <p:cNvSpPr/>
-          <p:nvPr/>
-        </p:nvSpPr>
-        <p:spPr>
-          <a:xfrm>
-            <a:off x="13318836" y="7534656"/>
-            <a:ext cx="219456" cy="182880"/>
-          </a:xfrm>
-          <a:prstGeom prst="rightArrow">
+            <a:off x="722376" y="8613648"/>
+            <a:ext cx="16843248" cy="731520"/>
+          </a:xfrm>
+          <a:prstGeom prst="rect">
             <a:avLst/>
           </a:prstGeom>
           <a:solidFill>
@@ -7138,345 +7956,7 @@
       </p:sp>
       <p:sp>
         <p:nvSpPr>
-          <p:cNvPr id="81" name="Rectangle 80"/>
-          <p:cNvSpPr/>
-          <p:nvPr/>
-        </p:nvSpPr>
-        <p:spPr>
-          <a:xfrm>
-            <a:off x="13584012" y="7260336"/>
-            <a:ext cx="1716485" cy="731520"/>
-          </a:xfrm>
-          <a:prstGeom prst="rect">
-            <a:avLst/>
-          </a:prstGeom>
-          <a:solidFill>
-            <a:srgbClr val="1428A0"/>
-          </a:solidFill>
-          <a:ln>
-            <a:noFill/>
-          </a:ln>
-          <a:effectLst/>
-        </p:spPr>
-        <p:style>
-          <a:lnRef idx="1">
-            <a:schemeClr val="accent1"/>
-          </a:lnRef>
-          <a:fillRef idx="3">
-            <a:schemeClr val="accent1"/>
-          </a:fillRef>
-          <a:effectRef idx="2">
-            <a:schemeClr val="accent1"/>
-          </a:effectRef>
-          <a:fontRef idx="minor">
-            <a:schemeClr val="lt1"/>
-          </a:fontRef>
-        </p:style>
-        <p:txBody>
-          <a:bodyPr rtlCol="0" anchor="ctr"/>
-          <a:lstStyle/>
-          <a:p>
-            <a:pPr algn="ctr"/>
-          </a:p>
-        </p:txBody>
-      </p:sp>
-      <p:sp>
-        <p:nvSpPr>
-          <p:cNvPr id="82" name="TextBox 81"/>
-          <p:cNvSpPr txBox="1"/>
-          <p:nvPr/>
-        </p:nvSpPr>
-        <p:spPr>
-          <a:xfrm>
-            <a:off x="13675452" y="7333488"/>
-            <a:ext cx="1533605" cy="237744"/>
-          </a:xfrm>
-          <a:prstGeom prst="rect">
-            <a:avLst/>
-          </a:prstGeom>
-          <a:noFill/>
-        </p:spPr>
-        <p:txBody>
-          <a:bodyPr wrap="square" anchor="t" lIns="0" rIns="0" tIns="0" bIns="0">
-            <a:spAutoFit/>
-          </a:bodyPr>
-          <a:lstStyle/>
-          <a:p>
-            <a:pPr algn="l">
-              <a:lnSpc>
-                <a:spcPct val="112000"/>
-              </a:lnSpc>
-            </a:pPr>
-            <a:r>
-              <a:rPr sz="1050" b="0">
-                <a:solidFill>
-                  <a:srgbClr val="FFFFFF"/>
-                </a:solidFill>
-                <a:latin typeface="Arial"/>
-                <a:ea typeface="Arial"/>
-              </a:rPr>
-              <a:t>삼성 · FDE · SCA</a:t>
-            </a:r>
-          </a:p>
-        </p:txBody>
-      </p:sp>
-      <p:sp>
-        <p:nvSpPr>
-          <p:cNvPr id="83" name="TextBox 82"/>
-          <p:cNvSpPr txBox="1"/>
-          <p:nvPr/>
-        </p:nvSpPr>
-        <p:spPr>
-          <a:xfrm>
-            <a:off x="13675452" y="7571232"/>
-            <a:ext cx="1533605" cy="347472"/>
-          </a:xfrm>
-          <a:prstGeom prst="rect">
-            <a:avLst/>
-          </a:prstGeom>
-          <a:noFill/>
-        </p:spPr>
-        <p:txBody>
-          <a:bodyPr wrap="square" anchor="ctr" lIns="0" rIns="0" tIns="0" bIns="0">
-            <a:spAutoFit/>
-          </a:bodyPr>
-          <a:lstStyle/>
-          <a:p>
-            <a:pPr algn="l">
-              <a:lnSpc>
-                <a:spcPct val="112000"/>
-              </a:lnSpc>
-            </a:pPr>
-            <a:r>
-              <a:rPr sz="1200" b="1">
-                <a:solidFill>
-                  <a:srgbClr val="FFFFFF"/>
-                </a:solidFill>
-                <a:latin typeface="Arial"/>
-                <a:ea typeface="Arial"/>
-              </a:rPr>
-              <a:t>규격 공동 정의</a:t>
-            </a:r>
-          </a:p>
-        </p:txBody>
-      </p:sp>
-      <p:sp>
-        <p:nvSpPr>
-          <p:cNvPr id="84" name="Right Arrow 83"/>
-          <p:cNvSpPr/>
-          <p:nvPr/>
-        </p:nvSpPr>
-        <p:spPr>
-          <a:xfrm>
-            <a:off x="15346218" y="7534656"/>
-            <a:ext cx="219456" cy="182880"/>
-          </a:xfrm>
-          <a:prstGeom prst="rightArrow">
-            <a:avLst/>
-          </a:prstGeom>
-          <a:solidFill>
-            <a:srgbClr val="1428A0"/>
-          </a:solidFill>
-          <a:ln>
-            <a:noFill/>
-          </a:ln>
-          <a:effectLst/>
-        </p:spPr>
-        <p:style>
-          <a:lnRef idx="1">
-            <a:schemeClr val="accent1"/>
-          </a:lnRef>
-          <a:fillRef idx="3">
-            <a:schemeClr val="accent1"/>
-          </a:fillRef>
-          <a:effectRef idx="2">
-            <a:schemeClr val="accent1"/>
-          </a:effectRef>
-          <a:fontRef idx="minor">
-            <a:schemeClr val="lt1"/>
-          </a:fontRef>
-        </p:style>
-        <p:txBody>
-          <a:bodyPr rtlCol="0" anchor="ctr"/>
-          <a:lstStyle/>
-          <a:p>
-            <a:pPr algn="ctr"/>
-          </a:p>
-        </p:txBody>
-      </p:sp>
-      <p:sp>
-        <p:nvSpPr>
-          <p:cNvPr id="85" name="Rectangle 84"/>
-          <p:cNvSpPr/>
-          <p:nvPr/>
-        </p:nvSpPr>
-        <p:spPr>
-          <a:xfrm>
-            <a:off x="15611394" y="7260336"/>
-            <a:ext cx="1716485" cy="731520"/>
-          </a:xfrm>
-          <a:prstGeom prst="rect">
-            <a:avLst/>
-          </a:prstGeom>
-          <a:solidFill>
-            <a:srgbClr val="F4F6FC"/>
-          </a:solidFill>
-          <a:ln w="12700">
-            <a:solidFill>
-              <a:srgbClr val="AAB8E8"/>
-            </a:solidFill>
-          </a:ln>
-          <a:effectLst/>
-        </p:spPr>
-        <p:style>
-          <a:lnRef idx="1">
-            <a:schemeClr val="accent1"/>
-          </a:lnRef>
-          <a:fillRef idx="3">
-            <a:schemeClr val="accent1"/>
-          </a:fillRef>
-          <a:effectRef idx="2">
-            <a:schemeClr val="accent1"/>
-          </a:effectRef>
-          <a:fontRef idx="minor">
-            <a:schemeClr val="lt1"/>
-          </a:fontRef>
-        </p:style>
-        <p:txBody>
-          <a:bodyPr rtlCol="0" anchor="ctr"/>
-          <a:lstStyle/>
-          <a:p>
-            <a:pPr algn="ctr"/>
-          </a:p>
-        </p:txBody>
-      </p:sp>
-      <p:sp>
-        <p:nvSpPr>
-          <p:cNvPr id="86" name="TextBox 85"/>
-          <p:cNvSpPr txBox="1"/>
-          <p:nvPr/>
-        </p:nvSpPr>
-        <p:spPr>
-          <a:xfrm>
-            <a:off x="15702834" y="7333488"/>
-            <a:ext cx="1533605" cy="237744"/>
-          </a:xfrm>
-          <a:prstGeom prst="rect">
-            <a:avLst/>
-          </a:prstGeom>
-          <a:noFill/>
-        </p:spPr>
-        <p:txBody>
-          <a:bodyPr wrap="square" anchor="t" lIns="0" rIns="0" tIns="0" bIns="0">
-            <a:spAutoFit/>
-          </a:bodyPr>
-          <a:lstStyle/>
-          <a:p>
-            <a:pPr algn="l">
-              <a:lnSpc>
-                <a:spcPct val="112000"/>
-              </a:lnSpc>
-            </a:pPr>
-            <a:r>
-              <a:rPr sz="1050" b="0">
-                <a:solidFill>
-                  <a:srgbClr val="8A8A8A"/>
-                </a:solidFill>
-                <a:latin typeface="Arial"/>
-                <a:ea typeface="Arial"/>
-              </a:rPr>
-              <a:t>고객</a:t>
-            </a:r>
-          </a:p>
-        </p:txBody>
-      </p:sp>
-      <p:sp>
-        <p:nvSpPr>
-          <p:cNvPr id="87" name="TextBox 86"/>
-          <p:cNvSpPr txBox="1"/>
-          <p:nvPr/>
-        </p:nvSpPr>
-        <p:spPr>
-          <a:xfrm>
-            <a:off x="15702834" y="7571232"/>
-            <a:ext cx="1533605" cy="347472"/>
-          </a:xfrm>
-          <a:prstGeom prst="rect">
-            <a:avLst/>
-          </a:prstGeom>
-          <a:noFill/>
-        </p:spPr>
-        <p:txBody>
-          <a:bodyPr wrap="square" anchor="ctr" lIns="0" rIns="0" tIns="0" bIns="0">
-            <a:spAutoFit/>
-          </a:bodyPr>
-          <a:lstStyle/>
-          <a:p>
-            <a:pPr algn="l">
-              <a:lnSpc>
-                <a:spcPct val="112000"/>
-              </a:lnSpc>
-            </a:pPr>
-            <a:r>
-              <a:rPr sz="1200" b="1">
-                <a:solidFill>
-                  <a:srgbClr val="1A1A1A"/>
-                </a:solidFill>
-                <a:latin typeface="Arial"/>
-                <a:ea typeface="Arial"/>
-              </a:rPr>
-              <a:t>DWPD · TCO 보증</a:t>
-            </a:r>
-          </a:p>
-        </p:txBody>
-      </p:sp>
-      <p:sp>
-        <p:nvSpPr>
-          <p:cNvPr id="88" name="Rectangle 87"/>
-          <p:cNvSpPr/>
-          <p:nvPr/>
-        </p:nvSpPr>
-        <p:spPr>
-          <a:xfrm>
-            <a:off x="722376" y="8613648"/>
-            <a:ext cx="16843248" cy="731520"/>
-          </a:xfrm>
-          <a:prstGeom prst="rect">
-            <a:avLst/>
-          </a:prstGeom>
-          <a:solidFill>
-            <a:srgbClr val="1428A0"/>
-          </a:solidFill>
-          <a:ln>
-            <a:noFill/>
-          </a:ln>
-          <a:effectLst/>
-        </p:spPr>
-        <p:style>
-          <a:lnRef idx="1">
-            <a:schemeClr val="accent1"/>
-          </a:lnRef>
-          <a:fillRef idx="3">
-            <a:schemeClr val="accent1"/>
-          </a:fillRef>
-          <a:effectRef idx="2">
-            <a:schemeClr val="accent1"/>
-          </a:effectRef>
-          <a:fontRef idx="minor">
-            <a:schemeClr val="lt1"/>
-          </a:fontRef>
-        </p:style>
-        <p:txBody>
-          <a:bodyPr rtlCol="0" anchor="ctr"/>
-          <a:lstStyle/>
-          <a:p>
-            <a:pPr algn="ctr"/>
-          </a:p>
-        </p:txBody>
-      </p:sp>
-      <p:sp>
-        <p:nvSpPr>
-          <p:cNvPr id="89" name="TextBox 88"/>
+          <p:cNvPr id="101" name="TextBox 100"/>
           <p:cNvSpPr txBox="1"/>
           <p:nvPr/>
         </p:nvSpPr>
@@ -7516,7 +7996,7 @@
       </p:sp>
       <p:sp>
         <p:nvSpPr>
-          <p:cNvPr id="90" name="TextBox 89"/>
+          <p:cNvPr id="102" name="TextBox 101"/>
           <p:cNvSpPr txBox="1"/>
           <p:nvPr/>
         </p:nvSpPr>
@@ -7566,14 +8046,14 @@
                 <a:latin typeface="Arial"/>
                 <a:ea typeface="Arial"/>
               </a:rPr>
-              <a:t>QLC의 호스트 협력은 선택이 아니라 산식의 귀결입니다</a:t>
-            </a:r>
-          </a:p>
-        </p:txBody>
-      </p:sp>
-      <p:sp>
-        <p:nvSpPr>
-          <p:cNvPr id="91" name="Rectangle 90"/>
+              <a:t>QLC로 요구 DWPD를 충족하는 경로는 호스트 시스템 공동 설계뿐이며, 이는 산식의 귀결입니다</a:t>
+            </a:r>
+          </a:p>
+        </p:txBody>
+      </p:sp>
+      <p:sp>
+        <p:nvSpPr>
+          <p:cNvPr id="103" name="Rectangle 102"/>
           <p:cNvSpPr/>
           <p:nvPr/>
         </p:nvSpPr>
@@ -7617,7 +8097,7 @@
       </p:sp>
       <p:sp>
         <p:nvSpPr>
-          <p:cNvPr id="92" name="Rectangle 91"/>
+          <p:cNvPr id="104" name="Rectangle 103"/>
           <p:cNvSpPr/>
           <p:nvPr/>
         </p:nvSpPr>
@@ -7661,7 +8141,7 @@
       </p:sp>
       <p:sp>
         <p:nvSpPr>
-          <p:cNvPr id="93" name="TextBox 92"/>
+          <p:cNvPr id="105" name="TextBox 104"/>
           <p:cNvSpPr txBox="1"/>
           <p:nvPr/>
         </p:nvSpPr>
@@ -7718,7 +8198,7 @@
       </p:sp>
       <p:sp>
         <p:nvSpPr>
-          <p:cNvPr id="94" name="TextBox 93"/>
+          <p:cNvPr id="106" name="TextBox 105"/>
           <p:cNvSpPr txBox="1"/>
           <p:nvPr/>
         </p:nvSpPr>
@@ -7751,14 +8231,14 @@
                 <a:latin typeface="Arial"/>
                 <a:ea typeface="Arial"/>
               </a:rPr>
-              <a:t>출처: JESD218(UBER·보존), ATP·Kioxia(DWPD 산식·WAF 3), Intel X25-E·S3700·P4510 및 Solidigm P5316 사양(정격 DWPD), Mielke·Cai(RBER), WD ECC/DSP 백서(LDPC 120bit/KB), CacheLib FDP(WAF) · RBER 대표값·환산 DWPD 등급은 보고서 부록 A F28~F35</a:t>
-            </a:r>
-          </a:p>
-        </p:txBody>
-      </p:sp>
-      <p:sp>
-        <p:nvSpPr>
-          <p:cNvPr id="95" name="TextBox 94"/>
+              <a:t>출처: JESD218(UBER·보존), ATP·Kioxia(DWPD 산식·WAF 3), Intel X25-E·S3700·P4510 및 Solidigm P5316 사양(정격 DWPD), Mielke·Cai(RBER), WD ECC/DSP 백서(LDPC 120bit/KB), CacheLib FDP(WAF), HotStorage'14·SYSTOR'17·NVMe 1.4(SSD 단독 최적화) · 등급은 보고서 부록 A F28~F40</a:t>
+            </a:r>
+          </a:p>
+        </p:txBody>
+      </p:sp>
+      <p:sp>
+        <p:nvSpPr>
+          <p:cNvPr id="107" name="TextBox 106"/>
           <p:cNvSpPr txBox="1"/>
           <p:nvPr/>
         </p:nvSpPr>
@@ -26863,7 +27343,7 @@
                 <a:latin typeface="Arial"/>
                 <a:ea typeface="Arial"/>
               </a:rPr>
-              <a:t>보상 변수 WAF는</a:t>
+              <a:t>SSD 단독은 WAF ≈ 3</a:t>
             </a:r>
           </a:p>
           <a:p>
@@ -26880,7 +27360,7 @@
                 <a:latin typeface="Arial"/>
                 <a:ea typeface="Arial"/>
               </a:rPr>
-              <a:t>호스트 계층이 결정</a:t>
+              <a:t>호스트 공동 설계로만 1.0</a:t>
             </a:r>
           </a:p>
         </p:txBody>

--- a/outputs/presentation/qlc-ssd-strategy.pptx
+++ b/outputs/presentation/qlc-ssd-strategy.pptx
@@ -506,7 +506,7 @@
           <a:lstStyle/>
           <a:p>
             <a:r>
-              <a:t>1장은 QLC의 내구성 격차를 어느 계층이 해소하는가를 네 지표로 답합니다. 왼쪽 차트는 인과 순서입니다. ① 셀의 한계: 비트/셀을 늘릴수록 셀이 견디는 P/E 사이클이 SLC 30K~100K에서 QLC 100~1K로 100배 감소했습니다. ② 컨트롤러의 보상: 같은 기간 RBER은 SLC 10의 -9~-7승에서 QLC 10의 -3~-2승으로 약 백만 배 상승했지만, 고객의 UBER 요구(JESD218: 클라이언트 10의 -15승, 엔터프라이즈 10의 -16승)는 고정이었습니다. 그 격차를 컨트롤러가 ECC로 보상했습니다. 1비트/512B에서 BCH 60비트/KB, LDPC 120비트/KB로 약 60배입니다. 셀은 보존·사이클링·리드 디스터브로 시간에 따라 변하는 산포를 단독으로 보정하지 못하므로, 이것이 NAND에서 SSD로의 1단계 이관이며 완결된 이관입니다. ③ 결과: ECC는 BER을 보상하지만 P/E를 늘리지는 못합니다. 정격 DWPD는 X25-E SLC 17(2008), S3700 eMLC 10(2012), P4510 TLC 0.7(2018), P5316 QLC 0.41(2021), 최신 QLC 0.075~0.6으로 하락했는데, 추론 캐시 계층의 요구는 TLC 수준 1~3, ScaleFlux가 제시한 유효 요구는 7~10입니다. 10~40배 격차입니다. ④ WAF: 2단계는 SSD 진영이 디바이스와 드라이버 안에서 워크로드에 적응하려 한 시도입니다. Multi-stream(2014)·AutoStream(2017)·FTL 핫/콜드 추정·NVMe IO 결정성(NVM Sets·Predictable Latency Mode, 2019)이 여기에 속합니다. 테일 지연 등 QoS와 성능은 개선했으나, 데이터의 수명은 호스트와 애플리케이션만 아는 정보라 디바이스가 완전히 감지할 수 없고, 실 워크로드의 WAF는 3 수준에 머물렀습니다(랜덤 쓰기 3.00, CacheLib 배치 표준 미적용 3.22). 3단계는 호스트 시스템 공동 설계입니다. 호스트가 데이터 수명을 지정(배치 표준)하고 캐시 관리자·애플리케이션 정책까지 함께 설계하면 WAF는 1.03이 됩니다. 68% 감소, 유효 DWPD 3.1배입니다. 오른쪽 위는 산식과 항별 결정 주체입니다. DWPD = P/E × (1+OP) ÷ (WAF × 365 × 년)에서 P/E는 셀, OP는 디바이스, 년과 요구 DWPD는 고객이 결정합니다. P/E가 100배 감소했으므로 남은 보상 변수는 WAF뿐입니다. 오른쪽 아래는 이관의 3단계입니다. 1단계 ECC는 UBER 요구를 충족해 완결됐고, 2단계 SSD 단독 최적화는 QoS·성능을 개선했으나 WAF를 낮추지 못해 DWPD 요구를 충족하지 못했으며, 3단계 호스트 시스템 공동 설계가 WAF를 1로 낮춰 DWPD 요구를 충족합니다. 본 덱 2~5장이 3단계입니다. 결론: QLC로 요구 DWPD를 충족하는 경로는 호스트 시스템 공동 설계뿐이며, 이는 산식의 귀결입니다. 그 규격이 언제 정의되는지가 2장입니다. 근거 등급은 보고서 부록 A F28~F40에 있습니다.</a:t>
+              <a:t>1장은 QLC의 내구성 격차를 어느 계층이 해소하는가를 네 지표로 답합니다. 왼쪽 차트는 인과 순서입니다. ① 셀의 한계: 비트/셀을 늘릴수록 셀이 견디는 P/E 사이클이 SLC 30K~100K에서 QLC 100~1K로 100배 감소했습니다. ② 컨트롤러의 보상: 같은 기간 RBER은 SLC 10의 -9~-7승에서 QLC 10의 -3~-2승으로 약 백만 배 상승했지만, 고객의 UBER 요구(JESD218: 클라이언트 10의 -15승, 엔터프라이즈 10의 -16승)는 고정이었습니다. 그 격차를 컨트롤러가 ECC로 보상했습니다. 1비트/512B에서 BCH 60비트/KB, LDPC 120비트/KB로 약 60배입니다. 셀은 보존·사이클링·리드 디스터브로 시간에 따라 변하는 산포를 단독으로 보정하지 못하므로, 이것이 NAND에서 SSD로의 1단계 이관이며 완결된 이관입니다. ③ 결과: ECC는 BER을 보상하지만 P/E를 늘리지는 못합니다. 정격 DWPD는 X25-E SLC 17(2008), S3700 eMLC 10(2012), P4510 TLC 0.7(2018), P5316 QLC 0.41(2021), 최신 QLC 0.075~0.6으로 하락했는데, 추론 캐시 계층의 요구는 TLC 수준 1~3, ScaleFlux가 제시한 유효 요구는 7~10입니다. 10~40배 격차입니다. ④ WAF: 2단계는 SSD 진영이 디바이스와 드라이버 안에서 워크로드에 적응하려 한 시도입니다. Multi-stream(2014)·AutoStream(2017)·FTL 핫/콜드 추정·NVMe IO 결정성(NVM Sets·Predictable Latency Mode, 2019)이 여기에 속합니다. 테일 지연 등 QoS와 성능은 개선했으나, 데이터의 수명은 호스트와 애플리케이션만 아는 정보라 디바이스가 완전히 감지할 수 없고, 실 워크로드의 WAF는 3 수준에 머물렀습니다(랜덤 쓰기 3.00, CacheLib 배치 표준 미적용 3.22). 3단계는 호스트 시스템 공동 설계입니다. 호스트가 데이터 수명을 지정(배치 표준)하고 캐시 관리자·애플리케이션 정책까지 함께 설계하면 WAF는 1.03이 됩니다. 68% 감소, 유효 DWPD 3.1배입니다. 오른쪽 위는 산식과 항별 결정 주체입니다. DWPD = P/E × (1+OP) ÷ (WAF × 365 × 년)에서 P/E는 셀, OP는 디바이스, 년과 요구 DWPD는 고객이 결정합니다. P/E가 100배 감소했으므로 남은 보상 변수는 WAF뿐입니다. 오른쪽 아래는 이관의 3단계입니다. 1단계 ECC는 UBER 요구를 충족해 완결됐고, 2단계 SSD 단독 최적화는 QoS·성능을 개선했으나 WAF를 낮추지 못해 DWPD 요구를 충족하지 못했으며, 3단계 호스트 시스템 공동 설계가 WAF를 1로 낮춰 DWPD 요구를 충족합니다. 본 덱 2~5장이 3단계입니다. 결론: QLC로 요구 DWPD를 충족하는 경로는 호스트 시스템 공동 설계뿐이며, 이는 산식의 귀결입니다. 그 규격이 언제 정의되는지가 2장입니다. 하단 스트립은 병렬 축입니다. 내구성 축과 별개로 신뢰성 축에서도 같은 구조가 진행 중입니다. 요구는 JESD218 기능 고장률 FFR 3% 이하로 고정인데, SSD당 NAND 다이 수는 S3700 800GB 128개(2012)에서 Kioxia LC9 245TB 1,024개(2025, 2Tb 다이 32단 스택 32패키지)로 8배 늘었습니다. 보호가 없으면 SSD 고장률은 다이 수에 비례하므로, 칩 면적이 커질수록 수율이 떨어지는 것과 같은 원리로 다이 고장률을 8배 낮추거나 다이 고장을 허용해야 합니다. 다이 고장률 개선이 기술적 한계에 닿자 해법은 SSD 계층으로 이관됐습니다. 다이 RAID(Micron RAIN, 슈퍼페이지 XOR 패리티 다이), 여분 다이, 다이 은퇴와 감량 운영(삼성 Fail-in-Place PM1733: 다이 고장 시 데이터 재배치 후 4~8GB 감량 운영)입니다. 이 해법들은 패리티와 예비 용량 오버헤드를 키우므로 다이 수가 계속 늘면 SSD 단독으로는 부족해질 수 있고, 상위 계층은 이미 준비 중입니다. OCP SMART의 XOR 복구 카운트로 호스트가 다이 복구를 관측하고, Microsoft Hyrax처럼 플랫폼이 감량 운영을 수용하며, 드라이브 간 소거 부호가 SSD 고장을 흡수합니다. 근거 등급은 보고서 부록 A F28~F47에 있습니다.</a:t>
             </a:r>
           </a:p>
         </p:txBody>
@@ -4951,7 +4951,7 @@
         <p:spPr>
           <a:xfrm>
             <a:off x="722376" y="2560320"/>
-            <a:ext cx="10285615" cy="5852160"/>
+            <a:ext cx="8678487" cy="4937760"/>
           </a:xfrm>
           <a:prstGeom prst="rect">
             <a:avLst/>
@@ -4966,8 +4966,8 @@
         </p:nvSpPr>
         <p:spPr>
           <a:xfrm>
-            <a:off x="11318886" y="2560320"/>
-            <a:ext cx="6246737" cy="1243584"/>
+            <a:off x="9711759" y="2560320"/>
+            <a:ext cx="7853864" cy="1243584"/>
           </a:xfrm>
           <a:prstGeom prst="rect">
             <a:avLst/>
@@ -5012,8 +5012,8 @@
         </p:nvSpPr>
         <p:spPr>
           <a:xfrm>
-            <a:off x="11556630" y="2670048"/>
-            <a:ext cx="5771249" cy="256032"/>
+            <a:off x="9949503" y="2670048"/>
+            <a:ext cx="7378376" cy="256032"/>
           </a:xfrm>
           <a:prstGeom prst="rect">
             <a:avLst/>
@@ -5052,7 +5052,7 @@
         </p:nvSpPr>
         <p:spPr>
           <a:xfrm>
-            <a:off x="11415591" y="3054096"/>
+            <a:off x="10612027" y="3054096"/>
             <a:ext cx="932688" cy="420624"/>
           </a:xfrm>
           <a:prstGeom prst="rect">
@@ -5098,7 +5098,7 @@
         </p:nvSpPr>
         <p:spPr>
           <a:xfrm>
-            <a:off x="11415591" y="3054096"/>
+            <a:off x="10612027" y="3054096"/>
             <a:ext cx="932688" cy="420624"/>
           </a:xfrm>
           <a:prstGeom prst="rect">
@@ -5138,7 +5138,7 @@
         </p:nvSpPr>
         <p:spPr>
           <a:xfrm>
-            <a:off x="11324151" y="3511296"/>
+            <a:off x="10520587" y="3511296"/>
             <a:ext cx="1115568" cy="201168"/>
           </a:xfrm>
           <a:prstGeom prst="rect">
@@ -5178,7 +5178,7 @@
         </p:nvSpPr>
         <p:spPr>
           <a:xfrm>
-            <a:off x="12403143" y="3054096"/>
+            <a:off x="11599579" y="3054096"/>
             <a:ext cx="237744" cy="420624"/>
           </a:xfrm>
           <a:prstGeom prst="rect">
@@ -5218,7 +5218,7 @@
         </p:nvSpPr>
         <p:spPr>
           <a:xfrm>
-            <a:off x="12695751" y="3054096"/>
+            <a:off x="11892187" y="3054096"/>
             <a:ext cx="932688" cy="420624"/>
           </a:xfrm>
           <a:prstGeom prst="rect">
@@ -5264,7 +5264,7 @@
         </p:nvSpPr>
         <p:spPr>
           <a:xfrm>
-            <a:off x="12695751" y="3054096"/>
+            <a:off x="11892187" y="3054096"/>
             <a:ext cx="932688" cy="420624"/>
           </a:xfrm>
           <a:prstGeom prst="rect">
@@ -5304,7 +5304,7 @@
         </p:nvSpPr>
         <p:spPr>
           <a:xfrm>
-            <a:off x="12604311" y="3511296"/>
+            <a:off x="11800747" y="3511296"/>
             <a:ext cx="1115568" cy="201168"/>
           </a:xfrm>
           <a:prstGeom prst="rect">
@@ -5344,7 +5344,7 @@
         </p:nvSpPr>
         <p:spPr>
           <a:xfrm>
-            <a:off x="13683303" y="3054096"/>
+            <a:off x="12879739" y="3054096"/>
             <a:ext cx="237744" cy="420624"/>
           </a:xfrm>
           <a:prstGeom prst="rect">
@@ -5384,7 +5384,7 @@
         </p:nvSpPr>
         <p:spPr>
           <a:xfrm>
-            <a:off x="13975911" y="3054096"/>
+            <a:off x="13172347" y="3054096"/>
             <a:ext cx="932688" cy="420624"/>
           </a:xfrm>
           <a:prstGeom prst="rect">
@@ -5430,7 +5430,7 @@
         </p:nvSpPr>
         <p:spPr>
           <a:xfrm>
-            <a:off x="13975911" y="3054096"/>
+            <a:off x="13172347" y="3054096"/>
             <a:ext cx="932688" cy="420624"/>
           </a:xfrm>
           <a:prstGeom prst="rect">
@@ -5470,7 +5470,7 @@
         </p:nvSpPr>
         <p:spPr>
           <a:xfrm>
-            <a:off x="13884471" y="3511296"/>
+            <a:off x="13080907" y="3511296"/>
             <a:ext cx="1115568" cy="201168"/>
           </a:xfrm>
           <a:prstGeom prst="rect">
@@ -5510,7 +5510,7 @@
         </p:nvSpPr>
         <p:spPr>
           <a:xfrm>
-            <a:off x="14963463" y="3054096"/>
+            <a:off x="14159899" y="3054096"/>
             <a:ext cx="237744" cy="420624"/>
           </a:xfrm>
           <a:prstGeom prst="rect">
@@ -5550,7 +5550,7 @@
         </p:nvSpPr>
         <p:spPr>
           <a:xfrm>
-            <a:off x="15256071" y="3054096"/>
+            <a:off x="14452507" y="3054096"/>
             <a:ext cx="932688" cy="420624"/>
           </a:xfrm>
           <a:prstGeom prst="rect">
@@ -5594,7 +5594,7 @@
         </p:nvSpPr>
         <p:spPr>
           <a:xfrm>
-            <a:off x="15256071" y="3054096"/>
+            <a:off x="14452507" y="3054096"/>
             <a:ext cx="932688" cy="420624"/>
           </a:xfrm>
           <a:prstGeom prst="rect">
@@ -5634,7 +5634,7 @@
         </p:nvSpPr>
         <p:spPr>
           <a:xfrm>
-            <a:off x="15164631" y="3511296"/>
+            <a:off x="14361067" y="3511296"/>
             <a:ext cx="1115568" cy="201168"/>
           </a:xfrm>
           <a:prstGeom prst="rect">
@@ -5674,7 +5674,7 @@
         </p:nvSpPr>
         <p:spPr>
           <a:xfrm>
-            <a:off x="16243623" y="3054096"/>
+            <a:off x="15440059" y="3054096"/>
             <a:ext cx="237744" cy="420624"/>
           </a:xfrm>
           <a:prstGeom prst="rect">
@@ -5714,7 +5714,7 @@
         </p:nvSpPr>
         <p:spPr>
           <a:xfrm>
-            <a:off x="16536231" y="3054096"/>
+            <a:off x="15732667" y="3054096"/>
             <a:ext cx="932688" cy="420624"/>
           </a:xfrm>
           <a:prstGeom prst="rect">
@@ -5760,7 +5760,7 @@
         </p:nvSpPr>
         <p:spPr>
           <a:xfrm>
-            <a:off x="16536231" y="3054096"/>
+            <a:off x="15732667" y="3054096"/>
             <a:ext cx="932688" cy="420624"/>
           </a:xfrm>
           <a:prstGeom prst="rect">
@@ -5800,7 +5800,7 @@
         </p:nvSpPr>
         <p:spPr>
           <a:xfrm>
-            <a:off x="16444791" y="3511296"/>
+            <a:off x="15641227" y="3511296"/>
             <a:ext cx="1115568" cy="201168"/>
           </a:xfrm>
           <a:prstGeom prst="rect">
@@ -5840,8 +5840,8 @@
         </p:nvSpPr>
         <p:spPr>
           <a:xfrm>
-            <a:off x="11318886" y="3968496"/>
-            <a:ext cx="6246737" cy="4462272"/>
+            <a:off x="9711759" y="3968496"/>
+            <a:ext cx="7853864" cy="3529583"/>
           </a:xfrm>
           <a:prstGeom prst="rect">
             <a:avLst/>
@@ -5886,8 +5886,8 @@
         </p:nvSpPr>
         <p:spPr>
           <a:xfrm>
-            <a:off x="11556630" y="4078224"/>
-            <a:ext cx="5771249" cy="256032"/>
+            <a:off x="9949503" y="4078224"/>
+            <a:ext cx="7378376" cy="256032"/>
           </a:xfrm>
           <a:prstGeom prst="rect">
             <a:avLst/>
@@ -5926,8 +5926,8 @@
         </p:nvSpPr>
         <p:spPr>
           <a:xfrm>
-            <a:off x="11556630" y="4462272"/>
-            <a:ext cx="3393809" cy="219456"/>
+            <a:off x="9949503" y="4425696"/>
+            <a:ext cx="5000936" cy="219456"/>
           </a:xfrm>
           <a:prstGeom prst="rect">
             <a:avLst/>
@@ -5966,7 +5966,7 @@
         </p:nvSpPr>
         <p:spPr>
           <a:xfrm>
-            <a:off x="14950439" y="4462272"/>
+            <a:off x="14950439" y="4425696"/>
             <a:ext cx="2377440" cy="219456"/>
           </a:xfrm>
           <a:prstGeom prst="rect">
@@ -6006,8 +6006,8 @@
         </p:nvSpPr>
         <p:spPr>
           <a:xfrm>
-            <a:off x="11556630" y="4736592"/>
-            <a:ext cx="1716485" cy="786384"/>
+            <a:off x="9949503" y="4700016"/>
+            <a:ext cx="2252194" cy="676656"/>
           </a:xfrm>
           <a:prstGeom prst="rect">
             <a:avLst/>
@@ -6052,8 +6052,8 @@
         </p:nvSpPr>
         <p:spPr>
           <a:xfrm>
-            <a:off x="11648070" y="4791455"/>
-            <a:ext cx="1533605" cy="201168"/>
+            <a:off x="10040943" y="4754879"/>
+            <a:ext cx="2069314" cy="201168"/>
           </a:xfrm>
           <a:prstGeom prst="rect">
             <a:avLst/>
@@ -6092,8 +6092,8 @@
         </p:nvSpPr>
         <p:spPr>
           <a:xfrm>
-            <a:off x="11648070" y="4983479"/>
-            <a:ext cx="1533605" cy="237744"/>
+            <a:off x="10040943" y="4946904"/>
+            <a:ext cx="2069314" cy="237744"/>
           </a:xfrm>
           <a:prstGeom prst="rect">
             <a:avLst/>
@@ -6132,8 +6132,8 @@
         </p:nvSpPr>
         <p:spPr>
           <a:xfrm>
-            <a:off x="11648070" y="5221224"/>
-            <a:ext cx="1533605" cy="274320"/>
+            <a:off x="10040943" y="5157216"/>
+            <a:ext cx="2069314" cy="201168"/>
           </a:xfrm>
           <a:prstGeom prst="rect">
             <a:avLst/>
@@ -6172,7 +6172,7 @@
         </p:nvSpPr>
         <p:spPr>
           <a:xfrm>
-            <a:off x="13318836" y="5038344"/>
+            <a:off x="12247418" y="4946904"/>
             <a:ext cx="219456" cy="182880"/>
           </a:xfrm>
           <a:prstGeom prst="rightArrow">
@@ -6216,8 +6216,8 @@
         </p:nvSpPr>
         <p:spPr>
           <a:xfrm>
-            <a:off x="13584012" y="4736592"/>
-            <a:ext cx="1716485" cy="786384"/>
+            <a:off x="12512594" y="4700016"/>
+            <a:ext cx="2252194" cy="676656"/>
           </a:xfrm>
           <a:prstGeom prst="rect">
             <a:avLst/>
@@ -6260,8 +6260,8 @@
         </p:nvSpPr>
         <p:spPr>
           <a:xfrm>
-            <a:off x="13675452" y="4791455"/>
-            <a:ext cx="1533605" cy="201168"/>
+            <a:off x="12604034" y="4754879"/>
+            <a:ext cx="2069314" cy="201168"/>
           </a:xfrm>
           <a:prstGeom prst="rect">
             <a:avLst/>
@@ -6300,8 +6300,8 @@
         </p:nvSpPr>
         <p:spPr>
           <a:xfrm>
-            <a:off x="13675452" y="4983479"/>
-            <a:ext cx="1533605" cy="237744"/>
+            <a:off x="12604034" y="4946904"/>
+            <a:ext cx="2069314" cy="237744"/>
           </a:xfrm>
           <a:prstGeom prst="rect">
             <a:avLst/>
@@ -6340,8 +6340,8 @@
         </p:nvSpPr>
         <p:spPr>
           <a:xfrm>
-            <a:off x="13675452" y="5221224"/>
-            <a:ext cx="1533605" cy="274320"/>
+            <a:off x="12604034" y="5157216"/>
+            <a:ext cx="2069314" cy="201168"/>
           </a:xfrm>
           <a:prstGeom prst="rect">
             <a:avLst/>
@@ -6380,7 +6380,7 @@
         </p:nvSpPr>
         <p:spPr>
           <a:xfrm>
-            <a:off x="15346218" y="5038344"/>
+            <a:off x="14810509" y="4946904"/>
             <a:ext cx="219456" cy="182880"/>
           </a:xfrm>
           <a:prstGeom prst="rightArrow">
@@ -6424,8 +6424,8 @@
         </p:nvSpPr>
         <p:spPr>
           <a:xfrm>
-            <a:off x="15611394" y="4736592"/>
-            <a:ext cx="1716485" cy="786384"/>
+            <a:off x="15075685" y="4700016"/>
+            <a:ext cx="2252194" cy="676656"/>
           </a:xfrm>
           <a:prstGeom prst="rect">
             <a:avLst/>
@@ -6470,8 +6470,8 @@
         </p:nvSpPr>
         <p:spPr>
           <a:xfrm>
-            <a:off x="15702834" y="4791455"/>
-            <a:ext cx="1533605" cy="201168"/>
+            <a:off x="15167125" y="4754879"/>
+            <a:ext cx="2069314" cy="201168"/>
           </a:xfrm>
           <a:prstGeom prst="rect">
             <a:avLst/>
@@ -6510,8 +6510,8 @@
         </p:nvSpPr>
         <p:spPr>
           <a:xfrm>
-            <a:off x="15702834" y="4983479"/>
-            <a:ext cx="1533605" cy="237744"/>
+            <a:off x="15167125" y="4946904"/>
+            <a:ext cx="2069314" cy="237744"/>
           </a:xfrm>
           <a:prstGeom prst="rect">
             <a:avLst/>
@@ -6550,8 +6550,8 @@
         </p:nvSpPr>
         <p:spPr>
           <a:xfrm>
-            <a:off x="15702834" y="5221224"/>
-            <a:ext cx="1533605" cy="274320"/>
+            <a:off x="15167125" y="5157216"/>
+            <a:ext cx="2069314" cy="201168"/>
           </a:xfrm>
           <a:prstGeom prst="rect">
             <a:avLst/>
@@ -6590,8 +6590,8 @@
         </p:nvSpPr>
         <p:spPr>
           <a:xfrm>
-            <a:off x="11556630" y="5705856"/>
-            <a:ext cx="3393809" cy="219456"/>
+            <a:off x="9949503" y="5495544"/>
+            <a:ext cx="5000936" cy="219456"/>
           </a:xfrm>
           <a:prstGeom prst="rect">
             <a:avLst/>
@@ -6630,7 +6630,7 @@
         </p:nvSpPr>
         <p:spPr>
           <a:xfrm>
-            <a:off x="14950439" y="5705856"/>
+            <a:off x="14950439" y="5495544"/>
             <a:ext cx="2377440" cy="219456"/>
           </a:xfrm>
           <a:prstGeom prst="rect">
@@ -6670,8 +6670,8 @@
         </p:nvSpPr>
         <p:spPr>
           <a:xfrm>
-            <a:off x="11556630" y="5980176"/>
-            <a:ext cx="1716485" cy="786384"/>
+            <a:off x="9949503" y="5769864"/>
+            <a:ext cx="2252194" cy="676656"/>
           </a:xfrm>
           <a:prstGeom prst="rect">
             <a:avLst/>
@@ -6716,8 +6716,8 @@
         </p:nvSpPr>
         <p:spPr>
           <a:xfrm>
-            <a:off x="11648070" y="6035040"/>
-            <a:ext cx="1533605" cy="201168"/>
+            <a:off x="10040943" y="5824727"/>
+            <a:ext cx="2069314" cy="201168"/>
           </a:xfrm>
           <a:prstGeom prst="rect">
             <a:avLst/>
@@ -6756,8 +6756,8 @@
         </p:nvSpPr>
         <p:spPr>
           <a:xfrm>
-            <a:off x="11648070" y="6227064"/>
-            <a:ext cx="1533605" cy="237744"/>
+            <a:off x="10040943" y="6016752"/>
+            <a:ext cx="2069314" cy="237744"/>
           </a:xfrm>
           <a:prstGeom prst="rect">
             <a:avLst/>
@@ -6796,8 +6796,8 @@
         </p:nvSpPr>
         <p:spPr>
           <a:xfrm>
-            <a:off x="11648070" y="6464808"/>
-            <a:ext cx="1533605" cy="274320"/>
+            <a:off x="10040943" y="6227064"/>
+            <a:ext cx="2069314" cy="201168"/>
           </a:xfrm>
           <a:prstGeom prst="rect">
             <a:avLst/>
@@ -6836,7 +6836,7 @@
         </p:nvSpPr>
         <p:spPr>
           <a:xfrm>
-            <a:off x="13318836" y="6281928"/>
+            <a:off x="12247418" y="6016752"/>
             <a:ext cx="219456" cy="182880"/>
           </a:xfrm>
           <a:prstGeom prst="rightArrow">
@@ -6880,8 +6880,8 @@
         </p:nvSpPr>
         <p:spPr>
           <a:xfrm>
-            <a:off x="13584012" y="5980176"/>
-            <a:ext cx="1716485" cy="786384"/>
+            <a:off x="12512594" y="5769864"/>
+            <a:ext cx="2252194" cy="676656"/>
           </a:xfrm>
           <a:prstGeom prst="rect">
             <a:avLst/>
@@ -6924,8 +6924,8 @@
         </p:nvSpPr>
         <p:spPr>
           <a:xfrm>
-            <a:off x="13675452" y="6035040"/>
-            <a:ext cx="1533605" cy="201168"/>
+            <a:off x="12604034" y="5824727"/>
+            <a:ext cx="2069314" cy="201168"/>
           </a:xfrm>
           <a:prstGeom prst="rect">
             <a:avLst/>
@@ -6964,8 +6964,8 @@
         </p:nvSpPr>
         <p:spPr>
           <a:xfrm>
-            <a:off x="13675452" y="6227064"/>
-            <a:ext cx="1533605" cy="237744"/>
+            <a:off x="12604034" y="6016752"/>
+            <a:ext cx="2069314" cy="237744"/>
           </a:xfrm>
           <a:prstGeom prst="rect">
             <a:avLst/>
@@ -7004,8 +7004,8 @@
         </p:nvSpPr>
         <p:spPr>
           <a:xfrm>
-            <a:off x="13675452" y="6464808"/>
-            <a:ext cx="1533605" cy="274320"/>
+            <a:off x="12604034" y="6227064"/>
+            <a:ext cx="2069314" cy="201168"/>
           </a:xfrm>
           <a:prstGeom prst="rect">
             <a:avLst/>
@@ -7031,7 +7031,7 @@
                 <a:latin typeface="Arial"/>
                 <a:ea typeface="Arial"/>
               </a:rPr>
-              <a:t>핫/콜드 추정 · 스트림 · IO 결정성 → WAF ≈ 3 유지</a:t>
+              <a:t>추정 배치 · 스트림 · IOD → WAF ≈ 3</a:t>
             </a:r>
           </a:p>
         </p:txBody>
@@ -7044,7 +7044,7 @@
         </p:nvSpPr>
         <p:spPr>
           <a:xfrm>
-            <a:off x="15346218" y="6281928"/>
+            <a:off x="14810509" y="6016752"/>
             <a:ext cx="219456" cy="182880"/>
           </a:xfrm>
           <a:prstGeom prst="rightArrow">
@@ -7088,8 +7088,8 @@
         </p:nvSpPr>
         <p:spPr>
           <a:xfrm>
-            <a:off x="15611394" y="5980176"/>
-            <a:ext cx="1716485" cy="786384"/>
+            <a:off x="15075685" y="5769864"/>
+            <a:ext cx="2252194" cy="676656"/>
           </a:xfrm>
           <a:prstGeom prst="rect">
             <a:avLst/>
@@ -7134,8 +7134,8 @@
         </p:nvSpPr>
         <p:spPr>
           <a:xfrm>
-            <a:off x="15702834" y="6035040"/>
-            <a:ext cx="1533605" cy="201168"/>
+            <a:off x="15167125" y="5824727"/>
+            <a:ext cx="2069314" cy="201168"/>
           </a:xfrm>
           <a:prstGeom prst="rect">
             <a:avLst/>
@@ -7174,8 +7174,8 @@
         </p:nvSpPr>
         <p:spPr>
           <a:xfrm>
-            <a:off x="15702834" y="6227064"/>
-            <a:ext cx="1533605" cy="237744"/>
+            <a:off x="15167125" y="6016752"/>
+            <a:ext cx="2069314" cy="237744"/>
           </a:xfrm>
           <a:prstGeom prst="rect">
             <a:avLst/>
@@ -7214,8 +7214,8 @@
         </p:nvSpPr>
         <p:spPr>
           <a:xfrm>
-            <a:off x="15702834" y="6464808"/>
-            <a:ext cx="1533605" cy="274320"/>
+            <a:off x="15167125" y="6227064"/>
+            <a:ext cx="2069314" cy="201168"/>
           </a:xfrm>
           <a:prstGeom prst="rect">
             <a:avLst/>
@@ -7254,8 +7254,8 @@
         </p:nvSpPr>
         <p:spPr>
           <a:xfrm>
-            <a:off x="11556630" y="6949440"/>
-            <a:ext cx="3393809" cy="219456"/>
+            <a:off x="9949503" y="6565392"/>
+            <a:ext cx="5000936" cy="219456"/>
           </a:xfrm>
           <a:prstGeom prst="rect">
             <a:avLst/>
@@ -7294,7 +7294,7 @@
         </p:nvSpPr>
         <p:spPr>
           <a:xfrm>
-            <a:off x="14950439" y="6949440"/>
+            <a:off x="14950439" y="6565392"/>
             <a:ext cx="2377440" cy="219456"/>
           </a:xfrm>
           <a:prstGeom prst="rect">
@@ -7334,8 +7334,8 @@
         </p:nvSpPr>
         <p:spPr>
           <a:xfrm>
-            <a:off x="11556630" y="7223760"/>
-            <a:ext cx="1716485" cy="786384"/>
+            <a:off x="9949503" y="6839712"/>
+            <a:ext cx="2252194" cy="676656"/>
           </a:xfrm>
           <a:prstGeom prst="rect">
             <a:avLst/>
@@ -7380,8 +7380,8 @@
         </p:nvSpPr>
         <p:spPr>
           <a:xfrm>
-            <a:off x="11648070" y="7278624"/>
-            <a:ext cx="1533605" cy="201168"/>
+            <a:off x="10040943" y="6894575"/>
+            <a:ext cx="2069314" cy="201168"/>
           </a:xfrm>
           <a:prstGeom prst="rect">
             <a:avLst/>
@@ -7420,8 +7420,8 @@
         </p:nvSpPr>
         <p:spPr>
           <a:xfrm>
-            <a:off x="11648070" y="7470648"/>
-            <a:ext cx="1533605" cy="237744"/>
+            <a:off x="10040943" y="7086600"/>
+            <a:ext cx="2069314" cy="237744"/>
           </a:xfrm>
           <a:prstGeom prst="rect">
             <a:avLst/>
@@ -7460,8 +7460,8 @@
         </p:nvSpPr>
         <p:spPr>
           <a:xfrm>
-            <a:off x="11648070" y="7708392"/>
-            <a:ext cx="1533605" cy="274320"/>
+            <a:off x="10040943" y="7296912"/>
+            <a:ext cx="2069314" cy="201168"/>
           </a:xfrm>
           <a:prstGeom prst="rect">
             <a:avLst/>
@@ -7500,7 +7500,7 @@
         </p:nvSpPr>
         <p:spPr>
           <a:xfrm>
-            <a:off x="13318836" y="7525512"/>
+            <a:off x="12247418" y="7086600"/>
             <a:ext cx="219456" cy="182880"/>
           </a:xfrm>
           <a:prstGeom prst="rightArrow">
@@ -7544,8 +7544,8 @@
         </p:nvSpPr>
         <p:spPr>
           <a:xfrm>
-            <a:off x="13584012" y="7223760"/>
-            <a:ext cx="1716485" cy="786384"/>
+            <a:off x="12512594" y="6839712"/>
+            <a:ext cx="2252194" cy="676656"/>
           </a:xfrm>
           <a:prstGeom prst="rect">
             <a:avLst/>
@@ -7588,8 +7588,8 @@
         </p:nvSpPr>
         <p:spPr>
           <a:xfrm>
-            <a:off x="13675452" y="7278624"/>
-            <a:ext cx="1533605" cy="201168"/>
+            <a:off x="12604034" y="6894575"/>
+            <a:ext cx="2069314" cy="201168"/>
           </a:xfrm>
           <a:prstGeom prst="rect">
             <a:avLst/>
@@ -7628,8 +7628,8 @@
         </p:nvSpPr>
         <p:spPr>
           <a:xfrm>
-            <a:off x="13675452" y="7470648"/>
-            <a:ext cx="1533605" cy="237744"/>
+            <a:off x="12604034" y="7086600"/>
+            <a:ext cx="2069314" cy="237744"/>
           </a:xfrm>
           <a:prstGeom prst="rect">
             <a:avLst/>
@@ -7668,8 +7668,8 @@
         </p:nvSpPr>
         <p:spPr>
           <a:xfrm>
-            <a:off x="13675452" y="7708392"/>
-            <a:ext cx="1533605" cy="274320"/>
+            <a:off x="12604034" y="7296912"/>
+            <a:ext cx="2069314" cy="201168"/>
           </a:xfrm>
           <a:prstGeom prst="rect">
             <a:avLst/>
@@ -7708,7 +7708,7 @@
         </p:nvSpPr>
         <p:spPr>
           <a:xfrm>
-            <a:off x="15346218" y="7525512"/>
+            <a:off x="14810509" y="7086600"/>
             <a:ext cx="219456" cy="182880"/>
           </a:xfrm>
           <a:prstGeom prst="rightArrow">
@@ -7752,8 +7752,8 @@
         </p:nvSpPr>
         <p:spPr>
           <a:xfrm>
-            <a:off x="15611394" y="7223760"/>
-            <a:ext cx="1716485" cy="786384"/>
+            <a:off x="15075685" y="6839712"/>
+            <a:ext cx="2252194" cy="676656"/>
           </a:xfrm>
           <a:prstGeom prst="rect">
             <a:avLst/>
@@ -7798,8 +7798,8 @@
         </p:nvSpPr>
         <p:spPr>
           <a:xfrm>
-            <a:off x="15702834" y="7278624"/>
-            <a:ext cx="1533605" cy="201168"/>
+            <a:off x="15167125" y="6894575"/>
+            <a:ext cx="2069314" cy="201168"/>
           </a:xfrm>
           <a:prstGeom prst="rect">
             <a:avLst/>
@@ -7838,8 +7838,8 @@
         </p:nvSpPr>
         <p:spPr>
           <a:xfrm>
-            <a:off x="15702834" y="7470648"/>
-            <a:ext cx="1533605" cy="237744"/>
+            <a:off x="15167125" y="7086600"/>
+            <a:ext cx="2069314" cy="237744"/>
           </a:xfrm>
           <a:prstGeom prst="rect">
             <a:avLst/>
@@ -7878,8 +7878,8 @@
         </p:nvSpPr>
         <p:spPr>
           <a:xfrm>
-            <a:off x="15702834" y="7708392"/>
-            <a:ext cx="1533605" cy="274320"/>
+            <a:off x="15167125" y="7296912"/>
+            <a:ext cx="2069314" cy="201168"/>
           </a:xfrm>
           <a:prstGeom prst="rect">
             <a:avLst/>
@@ -7918,8 +7918,571 @@
         </p:nvSpPr>
         <p:spPr>
           <a:xfrm>
-            <a:off x="722376" y="8613648"/>
-            <a:ext cx="16843248" cy="731520"/>
+            <a:off x="722376" y="7644383"/>
+            <a:ext cx="16843248" cy="859536"/>
+          </a:xfrm>
+          <a:prstGeom prst="rect">
+            <a:avLst/>
+          </a:prstGeom>
+          <a:solidFill>
+            <a:srgbClr val="FFFFFF"/>
+          </a:solidFill>
+          <a:ln w="9525">
+            <a:solidFill>
+              <a:srgbClr val="D9D9D9"/>
+            </a:solidFill>
+          </a:ln>
+          <a:effectLst/>
+        </p:spPr>
+        <p:style>
+          <a:lnRef idx="1">
+            <a:schemeClr val="accent1"/>
+          </a:lnRef>
+          <a:fillRef idx="3">
+            <a:schemeClr val="accent1"/>
+          </a:fillRef>
+          <a:effectRef idx="2">
+            <a:schemeClr val="accent1"/>
+          </a:effectRef>
+          <a:fontRef idx="minor">
+            <a:schemeClr val="lt1"/>
+          </a:fontRef>
+        </p:style>
+        <p:txBody>
+          <a:bodyPr rtlCol="0" anchor="ctr"/>
+          <a:lstStyle/>
+          <a:p>
+            <a:pPr algn="ctr"/>
+          </a:p>
+        </p:txBody>
+      </p:sp>
+      <p:sp>
+        <p:nvSpPr>
+          <p:cNvPr id="101" name="Rectangle 100"/>
+          <p:cNvSpPr/>
+          <p:nvPr/>
+        </p:nvSpPr>
+        <p:spPr>
+          <a:xfrm>
+            <a:off x="722376" y="7644383"/>
+            <a:ext cx="54864" cy="859536"/>
+          </a:xfrm>
+          <a:prstGeom prst="rect">
+            <a:avLst/>
+          </a:prstGeom>
+          <a:solidFill>
+            <a:srgbClr val="3C5AC8"/>
+          </a:solidFill>
+          <a:ln>
+            <a:noFill/>
+          </a:ln>
+          <a:effectLst/>
+        </p:spPr>
+        <p:style>
+          <a:lnRef idx="1">
+            <a:schemeClr val="accent1"/>
+          </a:lnRef>
+          <a:fillRef idx="3">
+            <a:schemeClr val="accent1"/>
+          </a:fillRef>
+          <a:effectRef idx="2">
+            <a:schemeClr val="accent1"/>
+          </a:effectRef>
+          <a:fontRef idx="minor">
+            <a:schemeClr val="lt1"/>
+          </a:fontRef>
+        </p:style>
+        <p:txBody>
+          <a:bodyPr rtlCol="0" anchor="ctr"/>
+          <a:lstStyle/>
+          <a:p>
+            <a:pPr algn="ctr"/>
+          </a:p>
+        </p:txBody>
+      </p:sp>
+      <p:sp>
+        <p:nvSpPr>
+          <p:cNvPr id="102" name="TextBox 101"/>
+          <p:cNvSpPr txBox="1"/>
+          <p:nvPr/>
+        </p:nvSpPr>
+        <p:spPr>
+          <a:xfrm>
+            <a:off x="941832" y="7735823"/>
+            <a:ext cx="1828800" cy="219456"/>
+          </a:xfrm>
+          <a:prstGeom prst="rect">
+            <a:avLst/>
+          </a:prstGeom>
+          <a:noFill/>
+        </p:spPr>
+        <p:txBody>
+          <a:bodyPr wrap="square" anchor="t" lIns="0" rIns="0" tIns="0" bIns="0">
+            <a:spAutoFit/>
+          </a:bodyPr>
+          <a:lstStyle/>
+          <a:p>
+            <a:pPr algn="l">
+              <a:lnSpc>
+                <a:spcPct val="112000"/>
+              </a:lnSpc>
+            </a:pPr>
+            <a:r>
+              <a:rPr sz="1125" b="1">
+                <a:solidFill>
+                  <a:srgbClr val="1428A0"/>
+                </a:solidFill>
+                <a:latin typeface="Arial"/>
+                <a:ea typeface="Arial"/>
+              </a:rPr>
+              <a:t>병렬 축 · 다이 고장률</a:t>
+            </a:r>
+          </a:p>
+        </p:txBody>
+      </p:sp>
+      <p:sp>
+        <p:nvSpPr>
+          <p:cNvPr id="103" name="TextBox 102"/>
+          <p:cNvSpPr txBox="1"/>
+          <p:nvPr/>
+        </p:nvSpPr>
+        <p:spPr>
+          <a:xfrm>
+            <a:off x="941832" y="7973567"/>
+            <a:ext cx="1828800" cy="365760"/>
+          </a:xfrm>
+          <a:prstGeom prst="rect">
+            <a:avLst/>
+          </a:prstGeom>
+          <a:noFill/>
+        </p:spPr>
+        <p:txBody>
+          <a:bodyPr wrap="square" anchor="t" lIns="0" rIns="0" tIns="0" bIns="0">
+            <a:spAutoFit/>
+          </a:bodyPr>
+          <a:lstStyle/>
+          <a:p>
+            <a:pPr algn="l">
+              <a:lnSpc>
+                <a:spcPct val="100000"/>
+              </a:lnSpc>
+            </a:pPr>
+            <a:r>
+              <a:rPr sz="975" b="1">
+                <a:solidFill>
+                  <a:srgbClr val="1A1A1A"/>
+                </a:solidFill>
+                <a:latin typeface="Arial"/>
+                <a:ea typeface="Arial"/>
+              </a:rPr>
+              <a:t>요구 FFR ≤ 3% 고정</a:t>
+            </a:r>
+          </a:p>
+          <a:p>
+            <a:pPr algn="l">
+              <a:lnSpc>
+                <a:spcPct val="100000"/>
+              </a:lnSpc>
+            </a:pPr>
+            <a:r>
+              <a:rPr sz="900" b="0">
+                <a:solidFill>
+                  <a:srgbClr val="555555"/>
+                </a:solidFill>
+                <a:latin typeface="Arial"/>
+                <a:ea typeface="Arial"/>
+              </a:rPr>
+              <a:t>JESD218 · 다이 수는 8배 ↑</a:t>
+            </a:r>
+          </a:p>
+        </p:txBody>
+      </p:sp>
+      <p:sp>
+        <p:nvSpPr>
+          <p:cNvPr id="104" name="TextBox 103"/>
+          <p:cNvSpPr txBox="1"/>
+          <p:nvPr/>
+        </p:nvSpPr>
+        <p:spPr>
+          <a:xfrm>
+            <a:off x="2871216" y="7717536"/>
+            <a:ext cx="2880360" cy="182880"/>
+          </a:xfrm>
+          <a:prstGeom prst="rect">
+            <a:avLst/>
+          </a:prstGeom>
+          <a:noFill/>
+        </p:spPr>
+        <p:txBody>
+          <a:bodyPr wrap="square" anchor="t" lIns="0" rIns="0" tIns="0" bIns="0">
+            <a:spAutoFit/>
+          </a:bodyPr>
+          <a:lstStyle/>
+          <a:p>
+            <a:pPr algn="l">
+              <a:lnSpc>
+                <a:spcPct val="112000"/>
+              </a:lnSpc>
+            </a:pPr>
+            <a:r>
+              <a:rPr sz="875" b="0">
+                <a:solidFill>
+                  <a:srgbClr val="8A8A8A"/>
+                </a:solidFill>
+                <a:latin typeface="Arial"/>
+                <a:ea typeface="Arial"/>
+              </a:rPr>
+              <a:t>SSD당 NAND 다이 수 (용량 ÷ 다이 밀도 환산)</a:t>
+            </a:r>
+          </a:p>
+        </p:txBody>
+      </p:sp>
+      <p:sp>
+        <p:nvSpPr>
+          <p:cNvPr id="105" name="Rectangle 104"/>
+          <p:cNvSpPr/>
+          <p:nvPr/>
+        </p:nvSpPr>
+        <p:spPr>
+          <a:xfrm>
+            <a:off x="2871216" y="8129016"/>
+            <a:ext cx="310896" cy="45720"/>
+          </a:xfrm>
+          <a:prstGeom prst="rect">
+            <a:avLst/>
+          </a:prstGeom>
+          <a:solidFill>
+            <a:srgbClr val="AAB8E8"/>
+          </a:solidFill>
+          <a:ln>
+            <a:noFill/>
+          </a:ln>
+          <a:effectLst/>
+        </p:spPr>
+        <p:style>
+          <a:lnRef idx="1">
+            <a:schemeClr val="accent1"/>
+          </a:lnRef>
+          <a:fillRef idx="3">
+            <a:schemeClr val="accent1"/>
+          </a:fillRef>
+          <a:effectRef idx="2">
+            <a:schemeClr val="accent1"/>
+          </a:effectRef>
+          <a:fontRef idx="minor">
+            <a:schemeClr val="lt1"/>
+          </a:fontRef>
+        </p:style>
+        <p:txBody>
+          <a:bodyPr rtlCol="0" anchor="ctr"/>
+          <a:lstStyle/>
+          <a:p>
+            <a:pPr algn="ctr"/>
+          </a:p>
+        </p:txBody>
+      </p:sp>
+      <p:sp>
+        <p:nvSpPr>
+          <p:cNvPr id="106" name="TextBox 105"/>
+          <p:cNvSpPr txBox="1"/>
+          <p:nvPr/>
+        </p:nvSpPr>
+        <p:spPr>
+          <a:xfrm>
+            <a:off x="2688336" y="8193024"/>
+            <a:ext cx="676656" cy="164592"/>
+          </a:xfrm>
+          <a:prstGeom prst="rect">
+            <a:avLst/>
+          </a:prstGeom>
+          <a:noFill/>
+        </p:spPr>
+        <p:txBody>
+          <a:bodyPr wrap="square" anchor="t" lIns="0" rIns="0" tIns="0" bIns="0">
+            <a:spAutoFit/>
+          </a:bodyPr>
+          <a:lstStyle/>
+          <a:p>
+            <a:pPr algn="ctr">
+              <a:lnSpc>
+                <a:spcPct val="112000"/>
+              </a:lnSpc>
+            </a:pPr>
+            <a:r>
+              <a:rPr sz="825" b="0">
+                <a:solidFill>
+                  <a:srgbClr val="555555"/>
+                </a:solidFill>
+                <a:latin typeface="Arial"/>
+                <a:ea typeface="Arial"/>
+              </a:rPr>
+              <a:t>'12  128</a:t>
+            </a:r>
+          </a:p>
+        </p:txBody>
+      </p:sp>
+      <p:sp>
+        <p:nvSpPr>
+          <p:cNvPr id="107" name="Rectangle 106"/>
+          <p:cNvSpPr/>
+          <p:nvPr/>
+        </p:nvSpPr>
+        <p:spPr>
+          <a:xfrm>
+            <a:off x="3513582" y="8129016"/>
+            <a:ext cx="310896" cy="45720"/>
+          </a:xfrm>
+          <a:prstGeom prst="rect">
+            <a:avLst/>
+          </a:prstGeom>
+          <a:solidFill>
+            <a:srgbClr val="AAB8E8"/>
+          </a:solidFill>
+          <a:ln>
+            <a:noFill/>
+          </a:ln>
+          <a:effectLst/>
+        </p:spPr>
+        <p:style>
+          <a:lnRef idx="1">
+            <a:schemeClr val="accent1"/>
+          </a:lnRef>
+          <a:fillRef idx="3">
+            <a:schemeClr val="accent1"/>
+          </a:fillRef>
+          <a:effectRef idx="2">
+            <a:schemeClr val="accent1"/>
+          </a:effectRef>
+          <a:fontRef idx="minor">
+            <a:schemeClr val="lt1"/>
+          </a:fontRef>
+        </p:style>
+        <p:txBody>
+          <a:bodyPr rtlCol="0" anchor="ctr"/>
+          <a:lstStyle/>
+          <a:p>
+            <a:pPr algn="ctr"/>
+          </a:p>
+        </p:txBody>
+      </p:sp>
+      <p:sp>
+        <p:nvSpPr>
+          <p:cNvPr id="108" name="TextBox 107"/>
+          <p:cNvSpPr txBox="1"/>
+          <p:nvPr/>
+        </p:nvSpPr>
+        <p:spPr>
+          <a:xfrm>
+            <a:off x="3330702" y="8193024"/>
+            <a:ext cx="676656" cy="164592"/>
+          </a:xfrm>
+          <a:prstGeom prst="rect">
+            <a:avLst/>
+          </a:prstGeom>
+          <a:noFill/>
+        </p:spPr>
+        <p:txBody>
+          <a:bodyPr wrap="square" anchor="t" lIns="0" rIns="0" tIns="0" bIns="0">
+            <a:spAutoFit/>
+          </a:bodyPr>
+          <a:lstStyle/>
+          <a:p>
+            <a:pPr algn="ctr">
+              <a:lnSpc>
+                <a:spcPct val="112000"/>
+              </a:lnSpc>
+            </a:pPr>
+            <a:r>
+              <a:rPr sz="825" b="0">
+                <a:solidFill>
+                  <a:srgbClr val="555555"/>
+                </a:solidFill>
+                <a:latin typeface="Arial"/>
+                <a:ea typeface="Arial"/>
+              </a:rPr>
+              <a:t>'18  144</a:t>
+            </a:r>
+          </a:p>
+        </p:txBody>
+      </p:sp>
+      <p:sp>
+        <p:nvSpPr>
+          <p:cNvPr id="109" name="Rectangle 108"/>
+          <p:cNvSpPr/>
+          <p:nvPr/>
+        </p:nvSpPr>
+        <p:spPr>
+          <a:xfrm>
+            <a:off x="4155948" y="8110728"/>
+            <a:ext cx="310896" cy="64008"/>
+          </a:xfrm>
+          <a:prstGeom prst="rect">
+            <a:avLst/>
+          </a:prstGeom>
+          <a:solidFill>
+            <a:srgbClr val="AAB8E8"/>
+          </a:solidFill>
+          <a:ln>
+            <a:noFill/>
+          </a:ln>
+          <a:effectLst/>
+        </p:spPr>
+        <p:style>
+          <a:lnRef idx="1">
+            <a:schemeClr val="accent1"/>
+          </a:lnRef>
+          <a:fillRef idx="3">
+            <a:schemeClr val="accent1"/>
+          </a:fillRef>
+          <a:effectRef idx="2">
+            <a:schemeClr val="accent1"/>
+          </a:effectRef>
+          <a:fontRef idx="minor">
+            <a:schemeClr val="lt1"/>
+          </a:fontRef>
+        </p:style>
+        <p:txBody>
+          <a:bodyPr rtlCol="0" anchor="ctr"/>
+          <a:lstStyle/>
+          <a:p>
+            <a:pPr algn="ctr"/>
+          </a:p>
+        </p:txBody>
+      </p:sp>
+      <p:sp>
+        <p:nvSpPr>
+          <p:cNvPr id="110" name="TextBox 109"/>
+          <p:cNvSpPr txBox="1"/>
+          <p:nvPr/>
+        </p:nvSpPr>
+        <p:spPr>
+          <a:xfrm>
+            <a:off x="3973068" y="8193024"/>
+            <a:ext cx="676656" cy="164592"/>
+          </a:xfrm>
+          <a:prstGeom prst="rect">
+            <a:avLst/>
+          </a:prstGeom>
+          <a:noFill/>
+        </p:spPr>
+        <p:txBody>
+          <a:bodyPr wrap="square" anchor="t" lIns="0" rIns="0" tIns="0" bIns="0">
+            <a:spAutoFit/>
+          </a:bodyPr>
+          <a:lstStyle/>
+          <a:p>
+            <a:pPr algn="ctr">
+              <a:lnSpc>
+                <a:spcPct val="112000"/>
+              </a:lnSpc>
+            </a:pPr>
+            <a:r>
+              <a:rPr sz="825" b="0">
+                <a:solidFill>
+                  <a:srgbClr val="555555"/>
+                </a:solidFill>
+                <a:latin typeface="Arial"/>
+                <a:ea typeface="Arial"/>
+              </a:rPr>
+              <a:t>'21  256</a:t>
+            </a:r>
+          </a:p>
+        </p:txBody>
+      </p:sp>
+      <p:sp>
+        <p:nvSpPr>
+          <p:cNvPr id="111" name="Rectangle 110"/>
+          <p:cNvSpPr/>
+          <p:nvPr/>
+        </p:nvSpPr>
+        <p:spPr>
+          <a:xfrm>
+            <a:off x="4798314" y="8046720"/>
+            <a:ext cx="310896" cy="128016"/>
+          </a:xfrm>
+          <a:prstGeom prst="rect">
+            <a:avLst/>
+          </a:prstGeom>
+          <a:solidFill>
+            <a:srgbClr val="AAB8E8"/>
+          </a:solidFill>
+          <a:ln>
+            <a:noFill/>
+          </a:ln>
+          <a:effectLst/>
+        </p:spPr>
+        <p:style>
+          <a:lnRef idx="1">
+            <a:schemeClr val="accent1"/>
+          </a:lnRef>
+          <a:fillRef idx="3">
+            <a:schemeClr val="accent1"/>
+          </a:fillRef>
+          <a:effectRef idx="2">
+            <a:schemeClr val="accent1"/>
+          </a:effectRef>
+          <a:fontRef idx="minor">
+            <a:schemeClr val="lt1"/>
+          </a:fontRef>
+        </p:style>
+        <p:txBody>
+          <a:bodyPr rtlCol="0" anchor="ctr"/>
+          <a:lstStyle/>
+          <a:p>
+            <a:pPr algn="ctr"/>
+          </a:p>
+        </p:txBody>
+      </p:sp>
+      <p:sp>
+        <p:nvSpPr>
+          <p:cNvPr id="112" name="TextBox 111"/>
+          <p:cNvSpPr txBox="1"/>
+          <p:nvPr/>
+        </p:nvSpPr>
+        <p:spPr>
+          <a:xfrm>
+            <a:off x="4615434" y="8193024"/>
+            <a:ext cx="676656" cy="164592"/>
+          </a:xfrm>
+          <a:prstGeom prst="rect">
+            <a:avLst/>
+          </a:prstGeom>
+          <a:noFill/>
+        </p:spPr>
+        <p:txBody>
+          <a:bodyPr wrap="square" anchor="t" lIns="0" rIns="0" tIns="0" bIns="0">
+            <a:spAutoFit/>
+          </a:bodyPr>
+          <a:lstStyle/>
+          <a:p>
+            <a:pPr algn="ctr">
+              <a:lnSpc>
+                <a:spcPct val="112000"/>
+              </a:lnSpc>
+            </a:pPr>
+            <a:r>
+              <a:rPr sz="825" b="0">
+                <a:solidFill>
+                  <a:srgbClr val="555555"/>
+                </a:solidFill>
+                <a:latin typeface="Arial"/>
+                <a:ea typeface="Arial"/>
+              </a:rPr>
+              <a:t>'23  512</a:t>
+            </a:r>
+          </a:p>
+        </p:txBody>
+      </p:sp>
+      <p:sp>
+        <p:nvSpPr>
+          <p:cNvPr id="113" name="Rectangle 112"/>
+          <p:cNvSpPr/>
+          <p:nvPr/>
+        </p:nvSpPr>
+        <p:spPr>
+          <a:xfrm>
+            <a:off x="5440679" y="7918704"/>
+            <a:ext cx="310896" cy="256032"/>
           </a:xfrm>
           <a:prstGeom prst="rect">
             <a:avLst/>
@@ -7956,7 +8519,676 @@
       </p:sp>
       <p:sp>
         <p:nvSpPr>
-          <p:cNvPr id="101" name="TextBox 100"/>
+          <p:cNvPr id="114" name="TextBox 113"/>
+          <p:cNvSpPr txBox="1"/>
+          <p:nvPr/>
+        </p:nvSpPr>
+        <p:spPr>
+          <a:xfrm>
+            <a:off x="5257799" y="8193024"/>
+            <a:ext cx="676656" cy="164592"/>
+          </a:xfrm>
+          <a:prstGeom prst="rect">
+            <a:avLst/>
+          </a:prstGeom>
+          <a:noFill/>
+        </p:spPr>
+        <p:txBody>
+          <a:bodyPr wrap="square" anchor="t" lIns="0" rIns="0" tIns="0" bIns="0">
+            <a:spAutoFit/>
+          </a:bodyPr>
+          <a:lstStyle/>
+          <a:p>
+            <a:pPr algn="ctr">
+              <a:lnSpc>
+                <a:spcPct val="112000"/>
+              </a:lnSpc>
+            </a:pPr>
+            <a:r>
+              <a:rPr sz="825" b="1">
+                <a:solidFill>
+                  <a:srgbClr val="1A1A1A"/>
+                </a:solidFill>
+                <a:latin typeface="Arial"/>
+                <a:ea typeface="Arial"/>
+              </a:rPr>
+              <a:t>'25  1,024</a:t>
+            </a:r>
+          </a:p>
+        </p:txBody>
+      </p:sp>
+      <p:sp>
+        <p:nvSpPr>
+          <p:cNvPr id="115" name="Rectangle 114"/>
+          <p:cNvSpPr/>
+          <p:nvPr/>
+        </p:nvSpPr>
+        <p:spPr>
+          <a:xfrm>
+            <a:off x="6025896" y="7708392"/>
+            <a:ext cx="3535680" cy="731520"/>
+          </a:xfrm>
+          <a:prstGeom prst="rect">
+            <a:avLst/>
+          </a:prstGeom>
+          <a:solidFill>
+            <a:srgbClr val="FFFFFF"/>
+          </a:solidFill>
+          <a:ln w="9525">
+            <a:solidFill>
+              <a:srgbClr val="D9D9D9"/>
+            </a:solidFill>
+          </a:ln>
+          <a:effectLst/>
+        </p:spPr>
+        <p:style>
+          <a:lnRef idx="1">
+            <a:schemeClr val="accent1"/>
+          </a:lnRef>
+          <a:fillRef idx="3">
+            <a:schemeClr val="accent1"/>
+          </a:fillRef>
+          <a:effectRef idx="2">
+            <a:schemeClr val="accent1"/>
+          </a:effectRef>
+          <a:fontRef idx="minor">
+            <a:schemeClr val="lt1"/>
+          </a:fontRef>
+        </p:style>
+        <p:txBody>
+          <a:bodyPr rtlCol="0" anchor="ctr"/>
+          <a:lstStyle/>
+          <a:p>
+            <a:pPr algn="ctr"/>
+          </a:p>
+        </p:txBody>
+      </p:sp>
+      <p:sp>
+        <p:nvSpPr>
+          <p:cNvPr id="116" name="TextBox 115"/>
+          <p:cNvSpPr txBox="1"/>
+          <p:nvPr/>
+        </p:nvSpPr>
+        <p:spPr>
+          <a:xfrm>
+            <a:off x="6135624" y="7744967"/>
+            <a:ext cx="3316224" cy="164592"/>
+          </a:xfrm>
+          <a:prstGeom prst="rect">
+            <a:avLst/>
+          </a:prstGeom>
+          <a:noFill/>
+        </p:spPr>
+        <p:txBody>
+          <a:bodyPr wrap="square" anchor="t" lIns="0" rIns="0" tIns="0" bIns="0">
+            <a:spAutoFit/>
+          </a:bodyPr>
+          <a:lstStyle/>
+          <a:p>
+            <a:pPr algn="l">
+              <a:lnSpc>
+                <a:spcPct val="112000"/>
+              </a:lnSpc>
+            </a:pPr>
+            <a:r>
+              <a:rPr sz="875" b="0">
+                <a:solidFill>
+                  <a:srgbClr val="8A8A8A"/>
+                </a:solidFill>
+                <a:latin typeface="Arial"/>
+                <a:ea typeface="Arial"/>
+              </a:rPr>
+              <a:t>다이 (단품)</a:t>
+            </a:r>
+          </a:p>
+        </p:txBody>
+      </p:sp>
+      <p:sp>
+        <p:nvSpPr>
+          <p:cNvPr id="117" name="TextBox 116"/>
+          <p:cNvSpPr txBox="1"/>
+          <p:nvPr/>
+        </p:nvSpPr>
+        <p:spPr>
+          <a:xfrm>
+            <a:off x="6135624" y="7900416"/>
+            <a:ext cx="3316224" cy="201168"/>
+          </a:xfrm>
+          <a:prstGeom prst="rect">
+            <a:avLst/>
+          </a:prstGeom>
+          <a:noFill/>
+        </p:spPr>
+        <p:txBody>
+          <a:bodyPr wrap="square" anchor="t" lIns="0" rIns="0" tIns="0" bIns="0">
+            <a:spAutoFit/>
+          </a:bodyPr>
+          <a:lstStyle/>
+          <a:p>
+            <a:pPr algn="l">
+              <a:lnSpc>
+                <a:spcPct val="112000"/>
+              </a:lnSpc>
+            </a:pPr>
+            <a:r>
+              <a:rPr sz="1125" b="1">
+                <a:solidFill>
+                  <a:srgbClr val="1A1A1A"/>
+                </a:solidFill>
+                <a:latin typeface="Arial"/>
+                <a:ea typeface="Arial"/>
+              </a:rPr>
+              <a:t>다이 수 8배 ↑ → 다이 고장률 8배 ↓ 필요</a:t>
+            </a:r>
+          </a:p>
+        </p:txBody>
+      </p:sp>
+      <p:sp>
+        <p:nvSpPr>
+          <p:cNvPr id="118" name="TextBox 117"/>
+          <p:cNvSpPr txBox="1"/>
+          <p:nvPr/>
+        </p:nvSpPr>
+        <p:spPr>
+          <a:xfrm>
+            <a:off x="6135624" y="8101583"/>
+            <a:ext cx="3316224" cy="320040"/>
+          </a:xfrm>
+          <a:prstGeom prst="rect">
+            <a:avLst/>
+          </a:prstGeom>
+          <a:noFill/>
+        </p:spPr>
+        <p:txBody>
+          <a:bodyPr wrap="square" anchor="t" lIns="0" rIns="0" tIns="0" bIns="0">
+            <a:spAutoFit/>
+          </a:bodyPr>
+          <a:lstStyle/>
+          <a:p>
+            <a:pPr algn="l">
+              <a:lnSpc>
+                <a:spcPct val="100000"/>
+              </a:lnSpc>
+            </a:pPr>
+            <a:r>
+              <a:rPr sz="825" b="0">
+                <a:solidFill>
+                  <a:srgbClr val="555555"/>
+                </a:solidFill>
+                <a:latin typeface="Arial"/>
+                <a:ea typeface="Arial"/>
+              </a:rPr>
+              <a:t>SSD 고장률 ≈ N × 다이 고장률 · 칩 면적↔수율과 같은 원리 · 다이 고장률 개선은 기술적 한계</a:t>
+            </a:r>
+          </a:p>
+        </p:txBody>
+      </p:sp>
+      <p:sp>
+        <p:nvSpPr>
+          <p:cNvPr id="119" name="Right Arrow 118"/>
+          <p:cNvSpPr/>
+          <p:nvPr/>
+        </p:nvSpPr>
+        <p:spPr>
+          <a:xfrm>
+            <a:off x="9634728" y="7982712"/>
+            <a:ext cx="219456" cy="182880"/>
+          </a:xfrm>
+          <a:prstGeom prst="rightArrow">
+            <a:avLst/>
+          </a:prstGeom>
+          <a:solidFill>
+            <a:srgbClr val="1428A0"/>
+          </a:solidFill>
+          <a:ln>
+            <a:noFill/>
+          </a:ln>
+          <a:effectLst/>
+        </p:spPr>
+        <p:style>
+          <a:lnRef idx="1">
+            <a:schemeClr val="accent1"/>
+          </a:lnRef>
+          <a:fillRef idx="3">
+            <a:schemeClr val="accent1"/>
+          </a:fillRef>
+          <a:effectRef idx="2">
+            <a:schemeClr val="accent1"/>
+          </a:effectRef>
+          <a:fontRef idx="minor">
+            <a:schemeClr val="lt1"/>
+          </a:fontRef>
+        </p:style>
+        <p:txBody>
+          <a:bodyPr rtlCol="0" anchor="ctr"/>
+          <a:lstStyle/>
+          <a:p>
+            <a:pPr algn="ctr"/>
+          </a:p>
+        </p:txBody>
+      </p:sp>
+      <p:sp>
+        <p:nvSpPr>
+          <p:cNvPr id="120" name="Rectangle 119"/>
+          <p:cNvSpPr/>
+          <p:nvPr/>
+        </p:nvSpPr>
+        <p:spPr>
+          <a:xfrm>
+            <a:off x="9927336" y="7708392"/>
+            <a:ext cx="3535680" cy="731520"/>
+          </a:xfrm>
+          <a:prstGeom prst="rect">
+            <a:avLst/>
+          </a:prstGeom>
+          <a:solidFill>
+            <a:srgbClr val="AAB8E8"/>
+          </a:solidFill>
+          <a:ln>
+            <a:noFill/>
+          </a:ln>
+          <a:effectLst/>
+        </p:spPr>
+        <p:style>
+          <a:lnRef idx="1">
+            <a:schemeClr val="accent1"/>
+          </a:lnRef>
+          <a:fillRef idx="3">
+            <a:schemeClr val="accent1"/>
+          </a:fillRef>
+          <a:effectRef idx="2">
+            <a:schemeClr val="accent1"/>
+          </a:effectRef>
+          <a:fontRef idx="minor">
+            <a:schemeClr val="lt1"/>
+          </a:fontRef>
+        </p:style>
+        <p:txBody>
+          <a:bodyPr rtlCol="0" anchor="ctr"/>
+          <a:lstStyle/>
+          <a:p>
+            <a:pPr algn="ctr"/>
+          </a:p>
+        </p:txBody>
+      </p:sp>
+      <p:sp>
+        <p:nvSpPr>
+          <p:cNvPr id="121" name="TextBox 120"/>
+          <p:cNvSpPr txBox="1"/>
+          <p:nvPr/>
+        </p:nvSpPr>
+        <p:spPr>
+          <a:xfrm>
+            <a:off x="10037064" y="7744967"/>
+            <a:ext cx="3316224" cy="164592"/>
+          </a:xfrm>
+          <a:prstGeom prst="rect">
+            <a:avLst/>
+          </a:prstGeom>
+          <a:noFill/>
+        </p:spPr>
+        <p:txBody>
+          <a:bodyPr wrap="square" anchor="t" lIns="0" rIns="0" tIns="0" bIns="0">
+            <a:spAutoFit/>
+          </a:bodyPr>
+          <a:lstStyle/>
+          <a:p>
+            <a:pPr algn="l">
+              <a:lnSpc>
+                <a:spcPct val="112000"/>
+              </a:lnSpc>
+            </a:pPr>
+            <a:r>
+              <a:rPr sz="875" b="0">
+                <a:solidFill>
+                  <a:srgbClr val="1A1A1A"/>
+                </a:solidFill>
+                <a:latin typeface="Arial"/>
+                <a:ea typeface="Arial"/>
+              </a:rPr>
+              <a:t>SSD 내부 (현재 해법)</a:t>
+            </a:r>
+          </a:p>
+        </p:txBody>
+      </p:sp>
+      <p:sp>
+        <p:nvSpPr>
+          <p:cNvPr id="122" name="TextBox 121"/>
+          <p:cNvSpPr txBox="1"/>
+          <p:nvPr/>
+        </p:nvSpPr>
+        <p:spPr>
+          <a:xfrm>
+            <a:off x="10037064" y="7900416"/>
+            <a:ext cx="3316224" cy="201168"/>
+          </a:xfrm>
+          <a:prstGeom prst="rect">
+            <a:avLst/>
+          </a:prstGeom>
+          <a:noFill/>
+        </p:spPr>
+        <p:txBody>
+          <a:bodyPr wrap="square" anchor="t" lIns="0" rIns="0" tIns="0" bIns="0">
+            <a:spAutoFit/>
+          </a:bodyPr>
+          <a:lstStyle/>
+          <a:p>
+            <a:pPr algn="l">
+              <a:lnSpc>
+                <a:spcPct val="112000"/>
+              </a:lnSpc>
+            </a:pPr>
+            <a:r>
+              <a:rPr sz="1125" b="1">
+                <a:solidFill>
+                  <a:srgbClr val="1A1A1A"/>
+                </a:solidFill>
+                <a:latin typeface="Arial"/>
+                <a:ea typeface="Arial"/>
+              </a:rPr>
+              <a:t>다이 RAID · 여분 다이 · 다이 은퇴</a:t>
+            </a:r>
+          </a:p>
+        </p:txBody>
+      </p:sp>
+      <p:sp>
+        <p:nvSpPr>
+          <p:cNvPr id="123" name="TextBox 122"/>
+          <p:cNvSpPr txBox="1"/>
+          <p:nvPr/>
+        </p:nvSpPr>
+        <p:spPr>
+          <a:xfrm>
+            <a:off x="10037064" y="8101583"/>
+            <a:ext cx="3316224" cy="320040"/>
+          </a:xfrm>
+          <a:prstGeom prst="rect">
+            <a:avLst/>
+          </a:prstGeom>
+          <a:noFill/>
+        </p:spPr>
+        <p:txBody>
+          <a:bodyPr wrap="square" anchor="t" lIns="0" rIns="0" tIns="0" bIns="0">
+            <a:spAutoFit/>
+          </a:bodyPr>
+          <a:lstStyle/>
+          <a:p>
+            <a:pPr algn="l">
+              <a:lnSpc>
+                <a:spcPct val="100000"/>
+              </a:lnSpc>
+            </a:pPr>
+            <a:r>
+              <a:rPr sz="825" b="0">
+                <a:solidFill>
+                  <a:srgbClr val="555555"/>
+                </a:solidFill>
+                <a:latin typeface="Arial"/>
+                <a:ea typeface="Arial"/>
+              </a:rPr>
+              <a:t>Micron RAIN(XOR 패리티 다이) · 삼성 Fail-in-Place(PM1733, 감량 운영) · 패리티·예비 용량 오버헤드 ↑</a:t>
+            </a:r>
+          </a:p>
+        </p:txBody>
+      </p:sp>
+      <p:sp>
+        <p:nvSpPr>
+          <p:cNvPr id="124" name="Right Arrow 123"/>
+          <p:cNvSpPr/>
+          <p:nvPr/>
+        </p:nvSpPr>
+        <p:spPr>
+          <a:xfrm>
+            <a:off x="13536168" y="7982712"/>
+            <a:ext cx="219456" cy="182880"/>
+          </a:xfrm>
+          <a:prstGeom prst="rightArrow">
+            <a:avLst/>
+          </a:prstGeom>
+          <a:solidFill>
+            <a:srgbClr val="AAB8E8"/>
+          </a:solidFill>
+          <a:ln>
+            <a:noFill/>
+          </a:ln>
+          <a:effectLst/>
+        </p:spPr>
+        <p:style>
+          <a:lnRef idx="1">
+            <a:schemeClr val="accent1"/>
+          </a:lnRef>
+          <a:fillRef idx="3">
+            <a:schemeClr val="accent1"/>
+          </a:fillRef>
+          <a:effectRef idx="2">
+            <a:schemeClr val="accent1"/>
+          </a:effectRef>
+          <a:fontRef idx="minor">
+            <a:schemeClr val="lt1"/>
+          </a:fontRef>
+        </p:style>
+        <p:txBody>
+          <a:bodyPr rtlCol="0" anchor="ctr"/>
+          <a:lstStyle/>
+          <a:p>
+            <a:pPr algn="ctr"/>
+          </a:p>
+        </p:txBody>
+      </p:sp>
+      <p:sp>
+        <p:nvSpPr>
+          <p:cNvPr id="125" name="Rectangle 124"/>
+          <p:cNvSpPr/>
+          <p:nvPr/>
+        </p:nvSpPr>
+        <p:spPr>
+          <a:xfrm>
+            <a:off x="13828776" y="7708392"/>
+            <a:ext cx="3535680" cy="731520"/>
+          </a:xfrm>
+          <a:prstGeom prst="rect">
+            <a:avLst/>
+          </a:prstGeom>
+          <a:solidFill>
+            <a:srgbClr val="F4F6FC"/>
+          </a:solidFill>
+          <a:ln w="12700">
+            <a:solidFill>
+              <a:srgbClr val="1428A0"/>
+            </a:solidFill>
+            <a:prstDash val="dash"/>
+          </a:ln>
+          <a:effectLst/>
+        </p:spPr>
+        <p:style>
+          <a:lnRef idx="1">
+            <a:schemeClr val="accent1"/>
+          </a:lnRef>
+          <a:fillRef idx="3">
+            <a:schemeClr val="accent1"/>
+          </a:fillRef>
+          <a:effectRef idx="2">
+            <a:schemeClr val="accent1"/>
+          </a:effectRef>
+          <a:fontRef idx="minor">
+            <a:schemeClr val="lt1"/>
+          </a:fontRef>
+        </p:style>
+        <p:txBody>
+          <a:bodyPr rtlCol="0" anchor="ctr"/>
+          <a:lstStyle/>
+          <a:p>
+            <a:pPr algn="ctr"/>
+          </a:p>
+        </p:txBody>
+      </p:sp>
+      <p:sp>
+        <p:nvSpPr>
+          <p:cNvPr id="126" name="TextBox 125"/>
+          <p:cNvSpPr txBox="1"/>
+          <p:nvPr/>
+        </p:nvSpPr>
+        <p:spPr>
+          <a:xfrm>
+            <a:off x="13938504" y="7744967"/>
+            <a:ext cx="3316224" cy="164592"/>
+          </a:xfrm>
+          <a:prstGeom prst="rect">
+            <a:avLst/>
+          </a:prstGeom>
+          <a:noFill/>
+        </p:spPr>
+        <p:txBody>
+          <a:bodyPr wrap="square" anchor="t" lIns="0" rIns="0" tIns="0" bIns="0">
+            <a:spAutoFit/>
+          </a:bodyPr>
+          <a:lstStyle/>
+          <a:p>
+            <a:pPr algn="l">
+              <a:lnSpc>
+                <a:spcPct val="112000"/>
+              </a:lnSpc>
+            </a:pPr>
+            <a:r>
+              <a:rPr sz="875" b="0">
+                <a:solidFill>
+                  <a:srgbClr val="1428A0"/>
+                </a:solidFill>
+                <a:latin typeface="Arial"/>
+                <a:ea typeface="Arial"/>
+              </a:rPr>
+              <a:t>상위 계층 (SSD 단독 한계 시)</a:t>
+            </a:r>
+          </a:p>
+        </p:txBody>
+      </p:sp>
+      <p:sp>
+        <p:nvSpPr>
+          <p:cNvPr id="127" name="TextBox 126"/>
+          <p:cNvSpPr txBox="1"/>
+          <p:nvPr/>
+        </p:nvSpPr>
+        <p:spPr>
+          <a:xfrm>
+            <a:off x="13938504" y="7900416"/>
+            <a:ext cx="3316224" cy="201168"/>
+          </a:xfrm>
+          <a:prstGeom prst="rect">
+            <a:avLst/>
+          </a:prstGeom>
+          <a:noFill/>
+        </p:spPr>
+        <p:txBody>
+          <a:bodyPr wrap="square" anchor="t" lIns="0" rIns="0" tIns="0" bIns="0">
+            <a:spAutoFit/>
+          </a:bodyPr>
+          <a:lstStyle/>
+          <a:p>
+            <a:pPr algn="l">
+              <a:lnSpc>
+                <a:spcPct val="112000"/>
+              </a:lnSpc>
+            </a:pPr>
+            <a:r>
+              <a:rPr sz="1125" b="1">
+                <a:solidFill>
+                  <a:srgbClr val="1A1A1A"/>
+                </a:solidFill>
+                <a:latin typeface="Arial"/>
+                <a:ea typeface="Arial"/>
+              </a:rPr>
+              <a:t>감량 운영 수용 · 호스트 소거 부호</a:t>
+            </a:r>
+          </a:p>
+        </p:txBody>
+      </p:sp>
+      <p:sp>
+        <p:nvSpPr>
+          <p:cNvPr id="128" name="TextBox 127"/>
+          <p:cNvSpPr txBox="1"/>
+          <p:nvPr/>
+        </p:nvSpPr>
+        <p:spPr>
+          <a:xfrm>
+            <a:off x="13938504" y="8101583"/>
+            <a:ext cx="3316224" cy="320040"/>
+          </a:xfrm>
+          <a:prstGeom prst="rect">
+            <a:avLst/>
+          </a:prstGeom>
+          <a:noFill/>
+        </p:spPr>
+        <p:txBody>
+          <a:bodyPr wrap="square" anchor="t" lIns="0" rIns="0" tIns="0" bIns="0">
+            <a:spAutoFit/>
+          </a:bodyPr>
+          <a:lstStyle/>
+          <a:p>
+            <a:pPr algn="l">
+              <a:lnSpc>
+                <a:spcPct val="100000"/>
+              </a:lnSpc>
+            </a:pPr>
+            <a:r>
+              <a:rPr sz="825" b="0">
+                <a:solidFill>
+                  <a:srgbClr val="555555"/>
+                </a:solidFill>
+                <a:latin typeface="Arial"/>
+                <a:ea typeface="Arial"/>
+              </a:rPr>
+              <a:t>OCP SMART XOR 복구 카운트(호스트 관측) · 플랫폼 fail-in-place(MS Hyrax) · 드라이브 간 소거 부호</a:t>
+            </a:r>
+          </a:p>
+        </p:txBody>
+      </p:sp>
+      <p:sp>
+        <p:nvSpPr>
+          <p:cNvPr id="129" name="Rectangle 128"/>
+          <p:cNvSpPr/>
+          <p:nvPr/>
+        </p:nvSpPr>
+        <p:spPr>
+          <a:xfrm>
+            <a:off x="722376" y="8613648"/>
+            <a:ext cx="16843248" cy="731520"/>
+          </a:xfrm>
+          <a:prstGeom prst="rect">
+            <a:avLst/>
+          </a:prstGeom>
+          <a:solidFill>
+            <a:srgbClr val="1428A0"/>
+          </a:solidFill>
+          <a:ln>
+            <a:noFill/>
+          </a:ln>
+          <a:effectLst/>
+        </p:spPr>
+        <p:style>
+          <a:lnRef idx="1">
+            <a:schemeClr val="accent1"/>
+          </a:lnRef>
+          <a:fillRef idx="3">
+            <a:schemeClr val="accent1"/>
+          </a:fillRef>
+          <a:effectRef idx="2">
+            <a:schemeClr val="accent1"/>
+          </a:effectRef>
+          <a:fontRef idx="minor">
+            <a:schemeClr val="lt1"/>
+          </a:fontRef>
+        </p:style>
+        <p:txBody>
+          <a:bodyPr rtlCol="0" anchor="ctr"/>
+          <a:lstStyle/>
+          <a:p>
+            <a:pPr algn="ctr"/>
+          </a:p>
+        </p:txBody>
+      </p:sp>
+      <p:sp>
+        <p:nvSpPr>
+          <p:cNvPr id="130" name="TextBox 129"/>
           <p:cNvSpPr txBox="1"/>
           <p:nvPr/>
         </p:nvSpPr>
@@ -7996,7 +9228,7 @@
       </p:sp>
       <p:sp>
         <p:nvSpPr>
-          <p:cNvPr id="102" name="TextBox 101"/>
+          <p:cNvPr id="131" name="TextBox 130"/>
           <p:cNvSpPr txBox="1"/>
           <p:nvPr/>
         </p:nvSpPr>
@@ -8022,14 +9254,14 @@
               </a:lnSpc>
             </a:pPr>
             <a:r>
-              <a:rPr sz="1700" b="1">
+              <a:rPr sz="1650" b="1">
                 <a:solidFill>
                   <a:srgbClr val="FFFFFF"/>
                 </a:solidFill>
                 <a:latin typeface="Arial"/>
                 <a:ea typeface="Arial"/>
               </a:rPr>
-              <a:t>요구(UBER·DWPD)는 고정, 단품 지표(RBER·P/E)는 악화, 격차는 상위 계층의 변수(ECC·WAF)가 보상해 왔습니다.</a:t>
+              <a:t>요구(UBER·DWPD·FFR)는 고정, 단품 지표(RBER·P/E·다이 수)는 악화, 격차는 상위 계층이 보상해 왔습니다.</a:t>
             </a:r>
           </a:p>
           <a:p>
@@ -8039,7 +9271,7 @@
               </a:lnSpc>
             </a:pPr>
             <a:r>
-              <a:rPr sz="1700" b="1">
+              <a:rPr sz="1650" b="1">
                 <a:solidFill>
                   <a:srgbClr val="FFFFFF"/>
                 </a:solidFill>
@@ -8053,7 +9285,7 @@
       </p:sp>
       <p:sp>
         <p:nvSpPr>
-          <p:cNvPr id="103" name="Rectangle 102"/>
+          <p:cNvPr id="132" name="Rectangle 131"/>
           <p:cNvSpPr/>
           <p:nvPr/>
         </p:nvSpPr>
@@ -8097,7 +9329,7 @@
       </p:sp>
       <p:sp>
         <p:nvSpPr>
-          <p:cNvPr id="104" name="Rectangle 103"/>
+          <p:cNvPr id="133" name="Rectangle 132"/>
           <p:cNvSpPr/>
           <p:nvPr/>
         </p:nvSpPr>
@@ -8141,7 +9373,7 @@
       </p:sp>
       <p:sp>
         <p:nvSpPr>
-          <p:cNvPr id="105" name="TextBox 104"/>
+          <p:cNvPr id="134" name="TextBox 133"/>
           <p:cNvSpPr txBox="1"/>
           <p:nvPr/>
         </p:nvSpPr>
@@ -8198,7 +9430,7 @@
       </p:sp>
       <p:sp>
         <p:nvSpPr>
-          <p:cNvPr id="106" name="TextBox 105"/>
+          <p:cNvPr id="135" name="TextBox 134"/>
           <p:cNvSpPr txBox="1"/>
           <p:nvPr/>
         </p:nvSpPr>
@@ -8231,14 +9463,14 @@
                 <a:latin typeface="Arial"/>
                 <a:ea typeface="Arial"/>
               </a:rPr>
-              <a:t>출처: JESD218(UBER·보존), ATP·Kioxia(DWPD 산식·WAF 3), Intel X25-E·S3700·P4510 및 Solidigm P5316 사양(정격 DWPD), Mielke·Cai(RBER), WD ECC/DSP 백서(LDPC 120bit/KB), CacheLib FDP(WAF), HotStorage'14·SYSTOR'17·NVMe 1.4(SSD 단독 최적화) · 등급은 보고서 부록 A F28~F40</a:t>
-            </a:r>
-          </a:p>
-        </p:txBody>
-      </p:sp>
-      <p:sp>
-        <p:nvSpPr>
-          <p:cNvPr id="107" name="TextBox 106"/>
+              <a:t>출처: JESD218(UBER·FFR), ATP·Kioxia(DWPD 산식), Intel·Solidigm 사양(정격 DWPD·다이 수), Mielke·Cai(RBER·다이 패리티), WD(LDPC), CacheLib FDP(WAF), HotStorage'14·SYSTOR'17·NVMe 1.4, Kioxia LC9·삼성 FIP·OCP SMART·MS Hyrax · 등급은 보고서 부록 A F28~F47</a:t>
+            </a:r>
+          </a:p>
+        </p:txBody>
+      </p:sp>
+      <p:sp>
+        <p:nvSpPr>
+          <p:cNvPr id="136" name="TextBox 135"/>
           <p:cNvSpPr txBox="1"/>
           <p:nvPr/>
         </p:nvSpPr>

--- a/outputs/presentation/qlc-ssd-strategy.pptx
+++ b/outputs/presentation/qlc-ssd-strategy.pptx
@@ -506,7 +506,7 @@
           <a:lstStyle/>
           <a:p>
             <a:r>
-              <a:t>1장은 QLC의 내구성 격차를 어느 계층이 해소하는가를 네 지표로 답합니다. 왼쪽 차트는 인과 순서입니다. ① 셀의 한계: 비트/셀을 늘릴수록 셀이 견디는 P/E 사이클이 SLC 30K~100K에서 QLC 100~1K로 100배 감소했습니다. ② 컨트롤러의 보상: 같은 기간 RBER은 SLC 10의 -9~-7승에서 QLC 10의 -3~-2승으로 약 백만 배 상승했지만, 고객의 UBER 요구(JESD218: 클라이언트 10의 -15승, 엔터프라이즈 10의 -16승)는 고정이었습니다. 그 격차를 컨트롤러가 ECC로 보상했습니다. 1비트/512B에서 BCH 60비트/KB, LDPC 120비트/KB로 약 60배입니다. 셀은 보존·사이클링·리드 디스터브로 시간에 따라 변하는 산포를 단독으로 보정하지 못하므로, 이것이 NAND에서 SSD로의 1단계 이관이며 완결된 이관입니다. ③ 결과: ECC는 BER을 보상하지만 P/E를 늘리지는 못합니다. 정격 DWPD는 X25-E SLC 17(2008), S3700 eMLC 10(2012), P4510 TLC 0.7(2018), P5316 QLC 0.41(2021), 최신 QLC 0.075~0.6으로 하락했는데, 추론 캐시 계층의 요구는 TLC 수준 1~3, ScaleFlux가 제시한 유효 요구는 7~10입니다. 10~40배 격차입니다. ④ WAF: 2단계는 SSD 진영이 디바이스와 드라이버 안에서 워크로드에 적응하려 한 시도입니다. Multi-stream(2014)·AutoStream(2017)·FTL 핫/콜드 추정·NVMe IO 결정성(NVM Sets·Predictable Latency Mode, 2019)이 여기에 속합니다. 테일 지연 등 QoS와 성능은 개선했으나, 데이터의 수명은 호스트와 애플리케이션만 아는 정보라 디바이스가 완전히 감지할 수 없고, 실 워크로드의 WAF는 3 수준에 머물렀습니다(랜덤 쓰기 3.00, CacheLib 배치 표준 미적용 3.22). 3단계는 호스트 시스템 공동 설계입니다. 호스트가 데이터 수명을 지정(배치 표준)하고 캐시 관리자·애플리케이션 정책까지 함께 설계하면 WAF는 1.03이 됩니다. 68% 감소, 유효 DWPD 3.1배입니다. 오른쪽 위는 산식과 항별 결정 주체입니다. DWPD = P/E × (1+OP) ÷ (WAF × 365 × 년)에서 P/E는 셀, OP는 디바이스, 년과 요구 DWPD는 고객이 결정합니다. P/E가 100배 감소했으므로 남은 보상 변수는 WAF뿐입니다. 오른쪽 아래는 이관의 3단계입니다. 1단계 ECC는 UBER 요구를 충족해 완결됐고, 2단계 SSD 단독 최적화는 QoS·성능을 개선했으나 WAF를 낮추지 못해 DWPD 요구를 충족하지 못했으며, 3단계 호스트 시스템 공동 설계가 WAF를 1로 낮춰 DWPD 요구를 충족합니다. 본 덱 2~5장이 3단계입니다. 결론: QLC로 요구 DWPD를 충족하는 경로는 호스트 시스템 공동 설계뿐이며, 이는 산식의 귀결입니다. 그 규격이 언제 정의되는지가 2장입니다. 하단 스트립은 병렬 축입니다. 내구성 축과 별개로 신뢰성 축에서도 같은 구조가 진행 중입니다. 요구는 JESD218 기능 고장률 FFR 3% 이하로 고정인데, SSD당 NAND 다이 수는 S3700 800GB 128개(2012)에서 Kioxia LC9 245TB 1,024개(2025, 2Tb 다이 32단 스택 32패키지)로 8배 늘었습니다. 보호가 없으면 SSD 고장률은 다이 수에 비례하므로, 칩 면적이 커질수록 수율이 떨어지는 것과 같은 원리로 다이 고장률을 8배 낮추거나 다이 고장을 허용해야 합니다. 다이 고장률 개선이 기술적 한계에 닿자 해법은 SSD 계층으로 이관됐습니다. 다이 RAID(Micron RAIN, 슈퍼페이지 XOR 패리티 다이), 여분 다이, 다이 은퇴와 감량 운영(삼성 Fail-in-Place PM1733: 다이 고장 시 데이터 재배치 후 4~8GB 감량 운영)입니다. 이 해법들은 패리티와 예비 용량 오버헤드를 키우므로 다이 수가 계속 늘면 SSD 단독으로는 부족해질 수 있고, 상위 계층은 이미 준비 중입니다. OCP SMART의 XOR 복구 카운트로 호스트가 다이 복구를 관측하고, Microsoft Hyrax처럼 플랫폼이 감량 운영을 수용하며, 드라이브 간 소거 부호가 SSD 고장을 흡수합니다. 근거 등급은 보고서 부록 A F28~F47에 있습니다.</a:t>
+              <a:t>1장은 이관 매트릭스입니다. 열은 이관 단계이고 행은 두 축입니다. 요구는 고객이 정하고 고정입니다. 단품 지표는 셀과 다이의 지표이며 세대마다 악화됩니다. 보상은 먼저 SSD 계층에서, 다음은 호스트·시스템 계층에서 이뤄집니다. 두 행 사이의 산식 DWPD = P/E × (1+OP) ÷ WAF ÷ 365 × 년은 각 항의 결정 주체가 열과 대응함을 보입니다. P/E는 셀, OP는 SSD, WAF는 호스트·앱, 년과 요구 DWPD는 고객입니다. 내구성 행. 요구: 추론 캐시 계층은 DWPD 1~3(현재 TLC 수준, ScaleFlux 제시 유효 요구 7~10), UBER는 JESD218 기준 10의 -15승·-16승으로 고정입니다. 단품: 비트/셀을 늘릴수록 P/E 사이클은 SLC 30K~100K에서 QLC 100~1K로 100배 감소했고, RBER은 약 백만 배 상승했습니다. 보존·사이클링·리드 디스터브로 시간에 따라 변하는 산포는 셀 단독으로 보정할 수 없습니다. SSD 계층: 1단계 컨트롤러 ECC는 1비트/512B에서 LDPC 120비트/KB로 60배 강화돼 UBER 요구를 충족했습니다. 완결된 이관입니다. 2단계 SSD 단독 워크로드 최적화(2014~2019: Multi-stream·AutoStream·FTL 핫/콜드 추정·NVMe IO 결정성)는 QoS와 성능은 개선했으나 데이터 수명을 SSD가 감지할 수 없어 실 워크로드 WAF는 3 수준에 머물렀고, 정격 DWPD는 17에서 0.4로 내려와 요구 1~3과 10~40배 격차가 생겼습니다. 부분 성공입니다. 호스트·시스템 계층: 3단계 호스트 시스템 공동 설계는 호스트가 데이터 수명을 지정(배치 표준)하고 캐시 관리자·애플리케이션 정책까지 함께 설계해 WAF를 3.22에서 1.03으로 낮췄습니다. 68% 감소, 유효 DWPD 3.1배이며 DWPD 요구를 충족합니다. QLC로 요구 DWPD를 충족하는 유일한 경로이고 본 덱 2~5장이 이 단계입니다. 신뢰성 행. 요구: JESD218 기능 고장률 FFR 3% 이하로 고정입니다. 보호가 없으면 SSD 고장률은 다이 수 N에 비례하므로 칩 면적이 커질수록 수율이 떨어지는 것과 같은 구조입니다. 단품: SSD당 NAND 다이 수는 S3700 800GB 128개(2012)에서 Kioxia LC9 245TB 1,024개(2025, 2Tb 다이 32단 스택 32패키지)로 8배 늘었고, 같은 FFR을 지키려면 다이 고장률을 8배 낮추거나 다이 고장을 허용해야 합니다. 다이 고장률 개선은 기술적 한계에 닿았습니다. SSD 계층(현재 해법): 다이 RAID(Micron RAIN, 슈퍼페이지 XOR 패리티 다이), 여분 다이, 다이 은퇴와 감량 운영(삼성 Fail-in-Place PM1733: 고장 다이를 제외하고 4~8GB 감량 운영)입니다. 패리티와 예비 용량 오버헤드가 다이 수와 함께 증가합니다. 상위 계층(SSD 단독 한계 시): OCP SMART의 XOR 복구 카운트로 호스트가 다이 복구를 관측하고, Microsoft Hyrax처럼 플랫폼이 감량 운영을 수용하며, 드라이브 간 소거 부호가 SSD 고장을 흡수합니다. 결론: 두 축 모두 요구는 고정이고 단품은 악화되며 보상은 상위 계층으로 이관됩니다. QLC로 요구 DWPD를 충족하는 경로는 호스트 시스템 공동 설계뿐이며 이는 산식의 귀결입니다. 그 규격이 언제 정의되는지가 2장입니다. 근거 등급은 보고서 부록 A F28~F47에 있습니다.</a:t>
             </a:r>
           </a:p>
         </p:txBody>
@@ -4845,7 +4845,7 @@
                 <a:latin typeface="Arial"/>
                 <a:ea typeface="Arial"/>
               </a:rPr>
-              <a:t>ECC가 RBER을 보상했듯 P/E 감소는 WAF로 보상해야 하며, 이는 호스트 공동 설계로만 가능합니다</a:t>
+              <a:t>요구는 고정, 단품은 악화, 보상은 상위 계층으로: QLC의 DWPD는 호스트 공동 설계로만 충족됩니다</a:t>
             </a:r>
           </a:p>
         </p:txBody>
@@ -4885,7 +4885,7 @@
                 <a:latin typeface="Arial"/>
                 <a:ea typeface="Arial"/>
               </a:rPr>
-              <a:t>QLC의 내구성 격차를 어느 계층이 해소하는가: SSD 단독 최적화는 QoS·성능은 개선했으나 WAF는 낮추지 못했습니다.</a:t>
+              <a:t>내구성 축과 신뢰성 축 모두 같은 구조입니다. SSD 단독 최적화는 QoS·성능은 개선했으나 WAF는 낮추지 못했습니다.</a:t>
             </a:r>
           </a:p>
         </p:txBody>
@@ -4934,40 +4934,142 @@
           </a:p>
         </p:txBody>
       </p:sp>
-      <p:pic>
-        <p:nvPicPr>
-          <p:cNvPr id="28" name="Picture 27" descr="solution_metrics_chart.png"/>
-          <p:cNvPicPr>
-            <a:picLocks noChangeAspect="1"/>
-          </p:cNvPicPr>
-          <p:nvPr/>
-        </p:nvPicPr>
-        <p:blipFill>
-          <a:blip r:embed="rId2"/>
-          <a:stretch>
-            <a:fillRect/>
-          </a:stretch>
-        </p:blipFill>
-        <p:spPr>
-          <a:xfrm>
-            <a:off x="722376" y="2560320"/>
-            <a:ext cx="8678487" cy="4937760"/>
-          </a:xfrm>
-          <a:prstGeom prst="rect">
-            <a:avLst/>
-          </a:prstGeom>
-        </p:spPr>
-      </p:pic>
-      <p:sp>
-        <p:nvSpPr>
-          <p:cNvPr id="29" name="Rectangle 28"/>
+      <p:sp>
+        <p:nvSpPr>
+          <p:cNvPr id="28" name="Rectangle 27"/>
           <p:cNvSpPr/>
           <p:nvPr/>
         </p:nvSpPr>
         <p:spPr>
           <a:xfrm>
-            <a:off x="9711759" y="2560320"/>
-            <a:ext cx="7853864" cy="1243584"/>
+            <a:off x="2039112" y="2560320"/>
+            <a:ext cx="3675888" cy="512064"/>
+          </a:xfrm>
+          <a:prstGeom prst="rect">
+            <a:avLst/>
+          </a:prstGeom>
+          <a:solidFill>
+            <a:srgbClr val="F4F6FC"/>
+          </a:solidFill>
+          <a:ln w="9525">
+            <a:solidFill>
+              <a:srgbClr val="D9D9D9"/>
+            </a:solidFill>
+          </a:ln>
+          <a:effectLst/>
+        </p:spPr>
+        <p:style>
+          <a:lnRef idx="1">
+            <a:schemeClr val="accent1"/>
+          </a:lnRef>
+          <a:fillRef idx="3">
+            <a:schemeClr val="accent1"/>
+          </a:fillRef>
+          <a:effectRef idx="2">
+            <a:schemeClr val="accent1"/>
+          </a:effectRef>
+          <a:fontRef idx="minor">
+            <a:schemeClr val="lt1"/>
+          </a:fontRef>
+        </p:style>
+        <p:txBody>
+          <a:bodyPr rtlCol="0" anchor="ctr"/>
+          <a:lstStyle/>
+          <a:p>
+            <a:pPr algn="ctr"/>
+          </a:p>
+        </p:txBody>
+      </p:sp>
+      <p:sp>
+        <p:nvSpPr>
+          <p:cNvPr id="29" name="TextBox 28"/>
+          <p:cNvSpPr txBox="1"/>
+          <p:nvPr/>
+        </p:nvSpPr>
+        <p:spPr>
+          <a:xfrm>
+            <a:off x="2167128" y="2615184"/>
+            <a:ext cx="3419856" cy="237744"/>
+          </a:xfrm>
+          <a:prstGeom prst="rect">
+            <a:avLst/>
+          </a:prstGeom>
+          <a:noFill/>
+        </p:spPr>
+        <p:txBody>
+          <a:bodyPr wrap="square" anchor="t" lIns="0" rIns="0" tIns="0" bIns="0">
+            <a:spAutoFit/>
+          </a:bodyPr>
+          <a:lstStyle/>
+          <a:p>
+            <a:pPr algn="l">
+              <a:lnSpc>
+                <a:spcPct val="112000"/>
+              </a:lnSpc>
+            </a:pPr>
+            <a:r>
+              <a:rPr sz="1350" b="1">
+                <a:solidFill>
+                  <a:srgbClr val="1428A0"/>
+                </a:solidFill>
+                <a:latin typeface="Arial"/>
+                <a:ea typeface="Arial"/>
+              </a:rPr>
+              <a:t>요구</a:t>
+            </a:r>
+          </a:p>
+        </p:txBody>
+      </p:sp>
+      <p:sp>
+        <p:nvSpPr>
+          <p:cNvPr id="30" name="TextBox 29"/>
+          <p:cNvSpPr txBox="1"/>
+          <p:nvPr/>
+        </p:nvSpPr>
+        <p:spPr>
+          <a:xfrm>
+            <a:off x="2167128" y="2843784"/>
+            <a:ext cx="3419856" cy="201168"/>
+          </a:xfrm>
+          <a:prstGeom prst="rect">
+            <a:avLst/>
+          </a:prstGeom>
+          <a:noFill/>
+        </p:spPr>
+        <p:txBody>
+          <a:bodyPr wrap="square" anchor="t" lIns="0" rIns="0" tIns="0" bIns="0">
+            <a:spAutoFit/>
+          </a:bodyPr>
+          <a:lstStyle/>
+          <a:p>
+            <a:pPr algn="l">
+              <a:lnSpc>
+                <a:spcPct val="112000"/>
+              </a:lnSpc>
+            </a:pPr>
+            <a:r>
+              <a:rPr sz="975" b="0">
+                <a:solidFill>
+                  <a:srgbClr val="555555"/>
+                </a:solidFill>
+                <a:latin typeface="Arial"/>
+                <a:ea typeface="Arial"/>
+              </a:rPr>
+              <a:t>고객이 정한다 · 고정</a:t>
+            </a:r>
+          </a:p>
+        </p:txBody>
+      </p:sp>
+      <p:sp>
+        <p:nvSpPr>
+          <p:cNvPr id="31" name="Rectangle 30"/>
+          <p:cNvSpPr/>
+          <p:nvPr/>
+        </p:nvSpPr>
+        <p:spPr>
+          <a:xfrm>
+            <a:off x="5989320" y="2560320"/>
+            <a:ext cx="3675888" cy="512064"/>
           </a:xfrm>
           <a:prstGeom prst="rect">
             <a:avLst/>
@@ -5006,14 +5108,14 @@
       </p:sp>
       <p:sp>
         <p:nvSpPr>
-          <p:cNvPr id="30" name="TextBox 29"/>
-          <p:cNvSpPr txBox="1"/>
-          <p:nvPr/>
-        </p:nvSpPr>
-        <p:spPr>
-          <a:xfrm>
-            <a:off x="9949503" y="2670048"/>
-            <a:ext cx="7378376" cy="256032"/>
+          <p:cNvPr id="32" name="TextBox 31"/>
+          <p:cNvSpPr txBox="1"/>
+          <p:nvPr/>
+        </p:nvSpPr>
+        <p:spPr>
+          <a:xfrm>
+            <a:off x="6117336" y="2615184"/>
+            <a:ext cx="3419856" cy="237744"/>
           </a:xfrm>
           <a:prstGeom prst="rect">
             <a:avLst/>
@@ -5032,28 +5134,1707 @@
               </a:lnSpc>
             </a:pPr>
             <a:r>
-              <a:rPr sz="1500" b="1">
+              <a:rPr sz="1350" b="1">
                 <a:solidFill>
                   <a:srgbClr val="1428A0"/>
                 </a:solidFill>
                 <a:latin typeface="Arial"/>
                 <a:ea typeface="Arial"/>
               </a:rPr>
-              <a:t>DWPD 산식 — 항별 결정 주체</a:t>
-            </a:r>
-          </a:p>
-        </p:txBody>
-      </p:sp>
-      <p:sp>
-        <p:nvSpPr>
-          <p:cNvPr id="31" name="Rectangle 30"/>
+              <a:t>단품 지표</a:t>
+            </a:r>
+          </a:p>
+        </p:txBody>
+      </p:sp>
+      <p:sp>
+        <p:nvSpPr>
+          <p:cNvPr id="33" name="TextBox 32"/>
+          <p:cNvSpPr txBox="1"/>
+          <p:nvPr/>
+        </p:nvSpPr>
+        <p:spPr>
+          <a:xfrm>
+            <a:off x="6117336" y="2843784"/>
+            <a:ext cx="3419856" cy="201168"/>
+          </a:xfrm>
+          <a:prstGeom prst="rect">
+            <a:avLst/>
+          </a:prstGeom>
+          <a:noFill/>
+        </p:spPr>
+        <p:txBody>
+          <a:bodyPr wrap="square" anchor="t" lIns="0" rIns="0" tIns="0" bIns="0">
+            <a:spAutoFit/>
+          </a:bodyPr>
+          <a:lstStyle/>
+          <a:p>
+            <a:pPr algn="l">
+              <a:lnSpc>
+                <a:spcPct val="112000"/>
+              </a:lnSpc>
+            </a:pPr>
+            <a:r>
+              <a:rPr sz="975" b="0">
+                <a:solidFill>
+                  <a:srgbClr val="555555"/>
+                </a:solidFill>
+                <a:latin typeface="Arial"/>
+                <a:ea typeface="Arial"/>
+              </a:rPr>
+              <a:t>셀 · 다이 · 세대마다 악화</a:t>
+            </a:r>
+          </a:p>
+        </p:txBody>
+      </p:sp>
+      <p:sp>
+        <p:nvSpPr>
+          <p:cNvPr id="34" name="Right Arrow 33"/>
           <p:cNvSpPr/>
           <p:nvPr/>
         </p:nvSpPr>
         <p:spPr>
           <a:xfrm>
-            <a:off x="10612027" y="3054096"/>
-            <a:ext cx="932688" cy="420624"/>
+            <a:off x="9692640" y="2715768"/>
+            <a:ext cx="219456" cy="201168"/>
+          </a:xfrm>
+          <a:prstGeom prst="rightArrow">
+            <a:avLst/>
+          </a:prstGeom>
+          <a:solidFill>
+            <a:srgbClr val="AAB8E8"/>
+          </a:solidFill>
+          <a:ln>
+            <a:noFill/>
+          </a:ln>
+          <a:effectLst/>
+        </p:spPr>
+        <p:style>
+          <a:lnRef idx="1">
+            <a:schemeClr val="accent1"/>
+          </a:lnRef>
+          <a:fillRef idx="3">
+            <a:schemeClr val="accent1"/>
+          </a:fillRef>
+          <a:effectRef idx="2">
+            <a:schemeClr val="accent1"/>
+          </a:effectRef>
+          <a:fontRef idx="minor">
+            <a:schemeClr val="lt1"/>
+          </a:fontRef>
+        </p:style>
+        <p:txBody>
+          <a:bodyPr rtlCol="0" anchor="ctr"/>
+          <a:lstStyle/>
+          <a:p>
+            <a:pPr algn="ctr"/>
+          </a:p>
+        </p:txBody>
+      </p:sp>
+      <p:sp>
+        <p:nvSpPr>
+          <p:cNvPr id="35" name="Rectangle 34"/>
+          <p:cNvSpPr/>
+          <p:nvPr/>
+        </p:nvSpPr>
+        <p:spPr>
+          <a:xfrm>
+            <a:off x="9939528" y="2560320"/>
+            <a:ext cx="3675888" cy="512064"/>
+          </a:xfrm>
+          <a:prstGeom prst="rect">
+            <a:avLst/>
+          </a:prstGeom>
+          <a:solidFill>
+            <a:srgbClr val="FFFFFF"/>
+          </a:solidFill>
+          <a:ln w="9525">
+            <a:solidFill>
+              <a:srgbClr val="D9D9D9"/>
+            </a:solidFill>
+          </a:ln>
+          <a:effectLst/>
+        </p:spPr>
+        <p:style>
+          <a:lnRef idx="1">
+            <a:schemeClr val="accent1"/>
+          </a:lnRef>
+          <a:fillRef idx="3">
+            <a:schemeClr val="accent1"/>
+          </a:fillRef>
+          <a:effectRef idx="2">
+            <a:schemeClr val="accent1"/>
+          </a:effectRef>
+          <a:fontRef idx="minor">
+            <a:schemeClr val="lt1"/>
+          </a:fontRef>
+        </p:style>
+        <p:txBody>
+          <a:bodyPr rtlCol="0" anchor="ctr"/>
+          <a:lstStyle/>
+          <a:p>
+            <a:pPr algn="ctr"/>
+          </a:p>
+        </p:txBody>
+      </p:sp>
+      <p:sp>
+        <p:nvSpPr>
+          <p:cNvPr id="36" name="TextBox 35"/>
+          <p:cNvSpPr txBox="1"/>
+          <p:nvPr/>
+        </p:nvSpPr>
+        <p:spPr>
+          <a:xfrm>
+            <a:off x="10067544" y="2615184"/>
+            <a:ext cx="3419856" cy="237744"/>
+          </a:xfrm>
+          <a:prstGeom prst="rect">
+            <a:avLst/>
+          </a:prstGeom>
+          <a:noFill/>
+        </p:spPr>
+        <p:txBody>
+          <a:bodyPr wrap="square" anchor="t" lIns="0" rIns="0" tIns="0" bIns="0">
+            <a:spAutoFit/>
+          </a:bodyPr>
+          <a:lstStyle/>
+          <a:p>
+            <a:pPr algn="l">
+              <a:lnSpc>
+                <a:spcPct val="112000"/>
+              </a:lnSpc>
+            </a:pPr>
+            <a:r>
+              <a:rPr sz="1350" b="1">
+                <a:solidFill>
+                  <a:srgbClr val="1428A0"/>
+                </a:solidFill>
+                <a:latin typeface="Arial"/>
+                <a:ea typeface="Arial"/>
+              </a:rPr>
+              <a:t>SSD 계층의 보상</a:t>
+            </a:r>
+          </a:p>
+        </p:txBody>
+      </p:sp>
+      <p:sp>
+        <p:nvSpPr>
+          <p:cNvPr id="37" name="TextBox 36"/>
+          <p:cNvSpPr txBox="1"/>
+          <p:nvPr/>
+        </p:nvSpPr>
+        <p:spPr>
+          <a:xfrm>
+            <a:off x="10067544" y="2843784"/>
+            <a:ext cx="3419856" cy="201168"/>
+          </a:xfrm>
+          <a:prstGeom prst="rect">
+            <a:avLst/>
+          </a:prstGeom>
+          <a:noFill/>
+        </p:spPr>
+        <p:txBody>
+          <a:bodyPr wrap="square" anchor="t" lIns="0" rIns="0" tIns="0" bIns="0">
+            <a:spAutoFit/>
+          </a:bodyPr>
+          <a:lstStyle/>
+          <a:p>
+            <a:pPr algn="l">
+              <a:lnSpc>
+                <a:spcPct val="112000"/>
+              </a:lnSpc>
+            </a:pPr>
+            <a:r>
+              <a:rPr sz="975" b="0">
+                <a:solidFill>
+                  <a:srgbClr val="555555"/>
+                </a:solidFill>
+                <a:latin typeface="Arial"/>
+                <a:ea typeface="Arial"/>
+              </a:rPr>
+              <a:t>1단계 ECC(완결) · 2단계 단독 최적화(부분 성공)</a:t>
+            </a:r>
+          </a:p>
+        </p:txBody>
+      </p:sp>
+      <p:sp>
+        <p:nvSpPr>
+          <p:cNvPr id="38" name="Right Arrow 37"/>
+          <p:cNvSpPr/>
+          <p:nvPr/>
+        </p:nvSpPr>
+        <p:spPr>
+          <a:xfrm>
+            <a:off x="13642848" y="2715768"/>
+            <a:ext cx="219456" cy="201168"/>
+          </a:xfrm>
+          <a:prstGeom prst="rightArrow">
+            <a:avLst/>
+          </a:prstGeom>
+          <a:solidFill>
+            <a:srgbClr val="1428A0"/>
+          </a:solidFill>
+          <a:ln>
+            <a:noFill/>
+          </a:ln>
+          <a:effectLst/>
+        </p:spPr>
+        <p:style>
+          <a:lnRef idx="1">
+            <a:schemeClr val="accent1"/>
+          </a:lnRef>
+          <a:fillRef idx="3">
+            <a:schemeClr val="accent1"/>
+          </a:fillRef>
+          <a:effectRef idx="2">
+            <a:schemeClr val="accent1"/>
+          </a:effectRef>
+          <a:fontRef idx="minor">
+            <a:schemeClr val="lt1"/>
+          </a:fontRef>
+        </p:style>
+        <p:txBody>
+          <a:bodyPr rtlCol="0" anchor="ctr"/>
+          <a:lstStyle/>
+          <a:p>
+            <a:pPr algn="ctr"/>
+          </a:p>
+        </p:txBody>
+      </p:sp>
+      <p:sp>
+        <p:nvSpPr>
+          <p:cNvPr id="39" name="Rectangle 38"/>
+          <p:cNvSpPr/>
+          <p:nvPr/>
+        </p:nvSpPr>
+        <p:spPr>
+          <a:xfrm>
+            <a:off x="13889736" y="2560320"/>
+            <a:ext cx="3675888" cy="512064"/>
+          </a:xfrm>
+          <a:prstGeom prst="rect">
+            <a:avLst/>
+          </a:prstGeom>
+          <a:solidFill>
+            <a:srgbClr val="1428A0"/>
+          </a:solidFill>
+          <a:ln>
+            <a:noFill/>
+          </a:ln>
+          <a:effectLst/>
+        </p:spPr>
+        <p:style>
+          <a:lnRef idx="1">
+            <a:schemeClr val="accent1"/>
+          </a:lnRef>
+          <a:fillRef idx="3">
+            <a:schemeClr val="accent1"/>
+          </a:fillRef>
+          <a:effectRef idx="2">
+            <a:schemeClr val="accent1"/>
+          </a:effectRef>
+          <a:fontRef idx="minor">
+            <a:schemeClr val="lt1"/>
+          </a:fontRef>
+        </p:style>
+        <p:txBody>
+          <a:bodyPr rtlCol="0" anchor="ctr"/>
+          <a:lstStyle/>
+          <a:p>
+            <a:pPr algn="ctr"/>
+          </a:p>
+        </p:txBody>
+      </p:sp>
+      <p:sp>
+        <p:nvSpPr>
+          <p:cNvPr id="40" name="TextBox 39"/>
+          <p:cNvSpPr txBox="1"/>
+          <p:nvPr/>
+        </p:nvSpPr>
+        <p:spPr>
+          <a:xfrm>
+            <a:off x="14017752" y="2615184"/>
+            <a:ext cx="3419856" cy="237744"/>
+          </a:xfrm>
+          <a:prstGeom prst="rect">
+            <a:avLst/>
+          </a:prstGeom>
+          <a:noFill/>
+        </p:spPr>
+        <p:txBody>
+          <a:bodyPr wrap="square" anchor="t" lIns="0" rIns="0" tIns="0" bIns="0">
+            <a:spAutoFit/>
+          </a:bodyPr>
+          <a:lstStyle/>
+          <a:p>
+            <a:pPr algn="l">
+              <a:lnSpc>
+                <a:spcPct val="112000"/>
+              </a:lnSpc>
+            </a:pPr>
+            <a:r>
+              <a:rPr sz="1350" b="1">
+                <a:solidFill>
+                  <a:srgbClr val="FFFFFF"/>
+                </a:solidFill>
+                <a:latin typeface="Arial"/>
+                <a:ea typeface="Arial"/>
+              </a:rPr>
+              <a:t>호스트 · 시스템 계층의 보상</a:t>
+            </a:r>
+          </a:p>
+        </p:txBody>
+      </p:sp>
+      <p:sp>
+        <p:nvSpPr>
+          <p:cNvPr id="41" name="TextBox 40"/>
+          <p:cNvSpPr txBox="1"/>
+          <p:nvPr/>
+        </p:nvSpPr>
+        <p:spPr>
+          <a:xfrm>
+            <a:off x="14017752" y="2843784"/>
+            <a:ext cx="3419856" cy="201168"/>
+          </a:xfrm>
+          <a:prstGeom prst="rect">
+            <a:avLst/>
+          </a:prstGeom>
+          <a:noFill/>
+        </p:spPr>
+        <p:txBody>
+          <a:bodyPr wrap="square" anchor="t" lIns="0" rIns="0" tIns="0" bIns="0">
+            <a:spAutoFit/>
+          </a:bodyPr>
+          <a:lstStyle/>
+          <a:p>
+            <a:pPr algn="l">
+              <a:lnSpc>
+                <a:spcPct val="112000"/>
+              </a:lnSpc>
+            </a:pPr>
+            <a:r>
+              <a:rPr sz="975" b="0">
+                <a:solidFill>
+                  <a:srgbClr val="FFFFFF"/>
+                </a:solidFill>
+                <a:latin typeface="Arial"/>
+                <a:ea typeface="Arial"/>
+              </a:rPr>
+              <a:t>3단계 공동 설계 (2022~, 본 덱 2~5장)</a:t>
+            </a:r>
+          </a:p>
+        </p:txBody>
+      </p:sp>
+      <p:sp>
+        <p:nvSpPr>
+          <p:cNvPr id="42" name="TextBox 41"/>
+          <p:cNvSpPr txBox="1"/>
+          <p:nvPr/>
+        </p:nvSpPr>
+        <p:spPr>
+          <a:xfrm>
+            <a:off x="722376" y="2560320"/>
+            <a:ext cx="1188720" cy="512064"/>
+          </a:xfrm>
+          <a:prstGeom prst="rect">
+            <a:avLst/>
+          </a:prstGeom>
+          <a:noFill/>
+        </p:spPr>
+        <p:txBody>
+          <a:bodyPr wrap="square" anchor="ctr" lIns="0" rIns="0" tIns="0" bIns="0">
+            <a:spAutoFit/>
+          </a:bodyPr>
+          <a:lstStyle/>
+          <a:p>
+            <a:pPr algn="l">
+              <a:lnSpc>
+                <a:spcPct val="112000"/>
+              </a:lnSpc>
+            </a:pPr>
+            <a:r>
+              <a:rPr sz="1050" b="1">
+                <a:solidFill>
+                  <a:srgbClr val="8A8A8A"/>
+                </a:solidFill>
+                <a:latin typeface="Arial"/>
+                <a:ea typeface="Arial"/>
+              </a:rPr>
+              <a:t>이관 단계 →</a:t>
+            </a:r>
+          </a:p>
+        </p:txBody>
+      </p:sp>
+      <p:sp>
+        <p:nvSpPr>
+          <p:cNvPr id="43" name="Rectangle 42"/>
+          <p:cNvSpPr/>
+          <p:nvPr/>
+        </p:nvSpPr>
+        <p:spPr>
+          <a:xfrm>
+            <a:off x="2039112" y="3145536"/>
+            <a:ext cx="15526512" cy="493776"/>
+          </a:xfrm>
+          <a:prstGeom prst="rect">
+            <a:avLst/>
+          </a:prstGeom>
+          <a:solidFill>
+            <a:srgbClr val="FFFFFF"/>
+          </a:solidFill>
+          <a:ln w="9525">
+            <a:solidFill>
+              <a:srgbClr val="D9D9D9"/>
+            </a:solidFill>
+          </a:ln>
+          <a:effectLst/>
+        </p:spPr>
+        <p:style>
+          <a:lnRef idx="1">
+            <a:schemeClr val="accent1"/>
+          </a:lnRef>
+          <a:fillRef idx="3">
+            <a:schemeClr val="accent1"/>
+          </a:fillRef>
+          <a:effectRef idx="2">
+            <a:schemeClr val="accent1"/>
+          </a:effectRef>
+          <a:fontRef idx="minor">
+            <a:schemeClr val="lt1"/>
+          </a:fontRef>
+        </p:style>
+        <p:txBody>
+          <a:bodyPr rtlCol="0" anchor="ctr"/>
+          <a:lstStyle/>
+          <a:p>
+            <a:pPr algn="ctr"/>
+          </a:p>
+        </p:txBody>
+      </p:sp>
+      <p:sp>
+        <p:nvSpPr>
+          <p:cNvPr id="44" name="TextBox 43"/>
+          <p:cNvSpPr txBox="1"/>
+          <p:nvPr/>
+        </p:nvSpPr>
+        <p:spPr>
+          <a:xfrm>
+            <a:off x="722376" y="3145536"/>
+            <a:ext cx="1188720" cy="493776"/>
+          </a:xfrm>
+          <a:prstGeom prst="rect">
+            <a:avLst/>
+          </a:prstGeom>
+          <a:noFill/>
+        </p:spPr>
+        <p:txBody>
+          <a:bodyPr wrap="square" anchor="ctr" lIns="0" rIns="0" tIns="0" bIns="0">
+            <a:spAutoFit/>
+          </a:bodyPr>
+          <a:lstStyle/>
+          <a:p>
+            <a:pPr algn="l">
+              <a:lnSpc>
+                <a:spcPct val="100000"/>
+              </a:lnSpc>
+            </a:pPr>
+            <a:r>
+              <a:rPr sz="1050" b="1">
+                <a:solidFill>
+                  <a:srgbClr val="1428A0"/>
+                </a:solidFill>
+                <a:latin typeface="Arial"/>
+                <a:ea typeface="Arial"/>
+              </a:rPr>
+              <a:t>DWPD 산식</a:t>
+            </a:r>
+          </a:p>
+          <a:p>
+            <a:pPr algn="l">
+              <a:lnSpc>
+                <a:spcPct val="100000"/>
+              </a:lnSpc>
+            </a:pPr>
+            <a:r>
+              <a:rPr sz="900" b="0">
+                <a:solidFill>
+                  <a:srgbClr val="8A8A8A"/>
+                </a:solidFill>
+                <a:latin typeface="Arial"/>
+                <a:ea typeface="Arial"/>
+              </a:rPr>
+              <a:t>항별 결정 주체</a:t>
+            </a:r>
+          </a:p>
+        </p:txBody>
+      </p:sp>
+      <p:sp>
+        <p:nvSpPr>
+          <p:cNvPr id="45" name="Rectangle 44"/>
+          <p:cNvSpPr/>
+          <p:nvPr/>
+        </p:nvSpPr>
+        <p:spPr>
+          <a:xfrm>
+            <a:off x="6483096" y="3209544"/>
+            <a:ext cx="1005840" cy="274320"/>
+          </a:xfrm>
+          <a:prstGeom prst="rect">
+            <a:avLst/>
+          </a:prstGeom>
+          <a:solidFill>
+            <a:srgbClr val="F4F6FC"/>
+          </a:solidFill>
+          <a:ln w="9525">
+            <a:solidFill>
+              <a:srgbClr val="AAB8E8"/>
+            </a:solidFill>
+          </a:ln>
+          <a:effectLst/>
+        </p:spPr>
+        <p:style>
+          <a:lnRef idx="1">
+            <a:schemeClr val="accent1"/>
+          </a:lnRef>
+          <a:fillRef idx="3">
+            <a:schemeClr val="accent1"/>
+          </a:fillRef>
+          <a:effectRef idx="2">
+            <a:schemeClr val="accent1"/>
+          </a:effectRef>
+          <a:fontRef idx="minor">
+            <a:schemeClr val="lt1"/>
+          </a:fontRef>
+        </p:style>
+        <p:txBody>
+          <a:bodyPr rtlCol="0" anchor="ctr"/>
+          <a:lstStyle/>
+          <a:p>
+            <a:pPr algn="ctr"/>
+          </a:p>
+        </p:txBody>
+      </p:sp>
+      <p:sp>
+        <p:nvSpPr>
+          <p:cNvPr id="46" name="TextBox 45"/>
+          <p:cNvSpPr txBox="1"/>
+          <p:nvPr/>
+        </p:nvSpPr>
+        <p:spPr>
+          <a:xfrm>
+            <a:off x="6483096" y="3209544"/>
+            <a:ext cx="1005840" cy="274320"/>
+          </a:xfrm>
+          <a:prstGeom prst="rect">
+            <a:avLst/>
+          </a:prstGeom>
+          <a:noFill/>
+        </p:spPr>
+        <p:txBody>
+          <a:bodyPr wrap="square" anchor="ctr" lIns="0" rIns="0" tIns="0" bIns="0">
+            <a:spAutoFit/>
+          </a:bodyPr>
+          <a:lstStyle/>
+          <a:p>
+            <a:pPr algn="ctr">
+              <a:lnSpc>
+                <a:spcPct val="112000"/>
+              </a:lnSpc>
+            </a:pPr>
+            <a:r>
+              <a:rPr sz="1125" b="1">
+                <a:solidFill>
+                  <a:srgbClr val="1A1A1A"/>
+                </a:solidFill>
+                <a:latin typeface="Arial"/>
+                <a:ea typeface="Arial"/>
+              </a:rPr>
+              <a:t>DWPD</a:t>
+            </a:r>
+          </a:p>
+        </p:txBody>
+      </p:sp>
+      <p:sp>
+        <p:nvSpPr>
+          <p:cNvPr id="47" name="TextBox 46"/>
+          <p:cNvSpPr txBox="1"/>
+          <p:nvPr/>
+        </p:nvSpPr>
+        <p:spPr>
+          <a:xfrm>
+            <a:off x="6391656" y="3493007"/>
+            <a:ext cx="1188720" cy="164592"/>
+          </a:xfrm>
+          <a:prstGeom prst="rect">
+            <a:avLst/>
+          </a:prstGeom>
+          <a:noFill/>
+        </p:spPr>
+        <p:txBody>
+          <a:bodyPr wrap="square" anchor="t" lIns="0" rIns="0" tIns="0" bIns="0">
+            <a:spAutoFit/>
+          </a:bodyPr>
+          <a:lstStyle/>
+          <a:p>
+            <a:pPr algn="ctr">
+              <a:lnSpc>
+                <a:spcPct val="112000"/>
+              </a:lnSpc>
+            </a:pPr>
+            <a:r>
+              <a:rPr sz="850" b="0">
+                <a:solidFill>
+                  <a:srgbClr val="8A8A8A"/>
+                </a:solidFill>
+                <a:latin typeface="Arial"/>
+                <a:ea typeface="Arial"/>
+              </a:rPr>
+              <a:t>요구</a:t>
+            </a:r>
+          </a:p>
+        </p:txBody>
+      </p:sp>
+      <p:sp>
+        <p:nvSpPr>
+          <p:cNvPr id="48" name="TextBox 47"/>
+          <p:cNvSpPr txBox="1"/>
+          <p:nvPr/>
+        </p:nvSpPr>
+        <p:spPr>
+          <a:xfrm>
+            <a:off x="7562088" y="3209544"/>
+            <a:ext cx="256032" cy="274320"/>
+          </a:xfrm>
+          <a:prstGeom prst="rect">
+            <a:avLst/>
+          </a:prstGeom>
+          <a:noFill/>
+        </p:spPr>
+        <p:txBody>
+          <a:bodyPr wrap="square" anchor="ctr" lIns="0" rIns="0" tIns="0" bIns="0">
+            <a:spAutoFit/>
+          </a:bodyPr>
+          <a:lstStyle/>
+          <a:p>
+            <a:pPr algn="ctr">
+              <a:lnSpc>
+                <a:spcPct val="112000"/>
+              </a:lnSpc>
+            </a:pPr>
+            <a:r>
+              <a:rPr sz="1300" b="0">
+                <a:solidFill>
+                  <a:srgbClr val="555555"/>
+                </a:solidFill>
+                <a:latin typeface="Arial"/>
+                <a:ea typeface="Arial"/>
+              </a:rPr>
+              <a:t>=</a:t>
+            </a:r>
+          </a:p>
+        </p:txBody>
+      </p:sp>
+      <p:sp>
+        <p:nvSpPr>
+          <p:cNvPr id="49" name="Rectangle 48"/>
+          <p:cNvSpPr/>
+          <p:nvPr/>
+        </p:nvSpPr>
+        <p:spPr>
+          <a:xfrm>
+            <a:off x="7891271" y="3209544"/>
+            <a:ext cx="1005840" cy="274320"/>
+          </a:xfrm>
+          <a:prstGeom prst="rect">
+            <a:avLst/>
+          </a:prstGeom>
+          <a:solidFill>
+            <a:srgbClr val="FFFFFF"/>
+          </a:solidFill>
+          <a:ln w="9525">
+            <a:solidFill>
+              <a:srgbClr val="D9D9D9"/>
+            </a:solidFill>
+          </a:ln>
+          <a:effectLst/>
+        </p:spPr>
+        <p:style>
+          <a:lnRef idx="1">
+            <a:schemeClr val="accent1"/>
+          </a:lnRef>
+          <a:fillRef idx="3">
+            <a:schemeClr val="accent1"/>
+          </a:fillRef>
+          <a:effectRef idx="2">
+            <a:schemeClr val="accent1"/>
+          </a:effectRef>
+          <a:fontRef idx="minor">
+            <a:schemeClr val="lt1"/>
+          </a:fontRef>
+        </p:style>
+        <p:txBody>
+          <a:bodyPr rtlCol="0" anchor="ctr"/>
+          <a:lstStyle/>
+          <a:p>
+            <a:pPr algn="ctr"/>
+          </a:p>
+        </p:txBody>
+      </p:sp>
+      <p:sp>
+        <p:nvSpPr>
+          <p:cNvPr id="50" name="TextBox 49"/>
+          <p:cNvSpPr txBox="1"/>
+          <p:nvPr/>
+        </p:nvSpPr>
+        <p:spPr>
+          <a:xfrm>
+            <a:off x="7891271" y="3209544"/>
+            <a:ext cx="1005840" cy="274320"/>
+          </a:xfrm>
+          <a:prstGeom prst="rect">
+            <a:avLst/>
+          </a:prstGeom>
+          <a:noFill/>
+        </p:spPr>
+        <p:txBody>
+          <a:bodyPr wrap="square" anchor="ctr" lIns="0" rIns="0" tIns="0" bIns="0">
+            <a:spAutoFit/>
+          </a:bodyPr>
+          <a:lstStyle/>
+          <a:p>
+            <a:pPr algn="ctr">
+              <a:lnSpc>
+                <a:spcPct val="112000"/>
+              </a:lnSpc>
+            </a:pPr>
+            <a:r>
+              <a:rPr sz="1125" b="1">
+                <a:solidFill>
+                  <a:srgbClr val="1A1A1A"/>
+                </a:solidFill>
+                <a:latin typeface="Arial"/>
+                <a:ea typeface="Arial"/>
+              </a:rPr>
+              <a:t>P/E</a:t>
+            </a:r>
+          </a:p>
+        </p:txBody>
+      </p:sp>
+      <p:sp>
+        <p:nvSpPr>
+          <p:cNvPr id="51" name="TextBox 50"/>
+          <p:cNvSpPr txBox="1"/>
+          <p:nvPr/>
+        </p:nvSpPr>
+        <p:spPr>
+          <a:xfrm>
+            <a:off x="7799831" y="3493007"/>
+            <a:ext cx="1188720" cy="164592"/>
+          </a:xfrm>
+          <a:prstGeom prst="rect">
+            <a:avLst/>
+          </a:prstGeom>
+          <a:noFill/>
+        </p:spPr>
+        <p:txBody>
+          <a:bodyPr wrap="square" anchor="t" lIns="0" rIns="0" tIns="0" bIns="0">
+            <a:spAutoFit/>
+          </a:bodyPr>
+          <a:lstStyle/>
+          <a:p>
+            <a:pPr algn="ctr">
+              <a:lnSpc>
+                <a:spcPct val="112000"/>
+              </a:lnSpc>
+            </a:pPr>
+            <a:r>
+              <a:rPr sz="850" b="0">
+                <a:solidFill>
+                  <a:srgbClr val="8A8A8A"/>
+                </a:solidFill>
+                <a:latin typeface="Arial"/>
+                <a:ea typeface="Arial"/>
+              </a:rPr>
+              <a:t>단품(셀)</a:t>
+            </a:r>
+          </a:p>
+        </p:txBody>
+      </p:sp>
+      <p:sp>
+        <p:nvSpPr>
+          <p:cNvPr id="52" name="TextBox 51"/>
+          <p:cNvSpPr txBox="1"/>
+          <p:nvPr/>
+        </p:nvSpPr>
+        <p:spPr>
+          <a:xfrm>
+            <a:off x="8970263" y="3209544"/>
+            <a:ext cx="256032" cy="274320"/>
+          </a:xfrm>
+          <a:prstGeom prst="rect">
+            <a:avLst/>
+          </a:prstGeom>
+          <a:noFill/>
+        </p:spPr>
+        <p:txBody>
+          <a:bodyPr wrap="square" anchor="ctr" lIns="0" rIns="0" tIns="0" bIns="0">
+            <a:spAutoFit/>
+          </a:bodyPr>
+          <a:lstStyle/>
+          <a:p>
+            <a:pPr algn="ctr">
+              <a:lnSpc>
+                <a:spcPct val="112000"/>
+              </a:lnSpc>
+            </a:pPr>
+            <a:r>
+              <a:rPr sz="1300" b="0">
+                <a:solidFill>
+                  <a:srgbClr val="555555"/>
+                </a:solidFill>
+                <a:latin typeface="Arial"/>
+                <a:ea typeface="Arial"/>
+              </a:rPr>
+              <a:t>×</a:t>
+            </a:r>
+          </a:p>
+        </p:txBody>
+      </p:sp>
+      <p:sp>
+        <p:nvSpPr>
+          <p:cNvPr id="53" name="Rectangle 52"/>
+          <p:cNvSpPr/>
+          <p:nvPr/>
+        </p:nvSpPr>
+        <p:spPr>
+          <a:xfrm>
+            <a:off x="9299447" y="3209544"/>
+            <a:ext cx="1005840" cy="274320"/>
+          </a:xfrm>
+          <a:prstGeom prst="rect">
+            <a:avLst/>
+          </a:prstGeom>
+          <a:solidFill>
+            <a:srgbClr val="FFFFFF"/>
+          </a:solidFill>
+          <a:ln w="9525">
+            <a:solidFill>
+              <a:srgbClr val="D9D9D9"/>
+            </a:solidFill>
+          </a:ln>
+          <a:effectLst/>
+        </p:spPr>
+        <p:style>
+          <a:lnRef idx="1">
+            <a:schemeClr val="accent1"/>
+          </a:lnRef>
+          <a:fillRef idx="3">
+            <a:schemeClr val="accent1"/>
+          </a:fillRef>
+          <a:effectRef idx="2">
+            <a:schemeClr val="accent1"/>
+          </a:effectRef>
+          <a:fontRef idx="minor">
+            <a:schemeClr val="lt1"/>
+          </a:fontRef>
+        </p:style>
+        <p:txBody>
+          <a:bodyPr rtlCol="0" anchor="ctr"/>
+          <a:lstStyle/>
+          <a:p>
+            <a:pPr algn="ctr"/>
+          </a:p>
+        </p:txBody>
+      </p:sp>
+      <p:sp>
+        <p:nvSpPr>
+          <p:cNvPr id="54" name="TextBox 53"/>
+          <p:cNvSpPr txBox="1"/>
+          <p:nvPr/>
+        </p:nvSpPr>
+        <p:spPr>
+          <a:xfrm>
+            <a:off x="9299447" y="3209544"/>
+            <a:ext cx="1005840" cy="274320"/>
+          </a:xfrm>
+          <a:prstGeom prst="rect">
+            <a:avLst/>
+          </a:prstGeom>
+          <a:noFill/>
+        </p:spPr>
+        <p:txBody>
+          <a:bodyPr wrap="square" anchor="ctr" lIns="0" rIns="0" tIns="0" bIns="0">
+            <a:spAutoFit/>
+          </a:bodyPr>
+          <a:lstStyle/>
+          <a:p>
+            <a:pPr algn="ctr">
+              <a:lnSpc>
+                <a:spcPct val="112000"/>
+              </a:lnSpc>
+            </a:pPr>
+            <a:r>
+              <a:rPr sz="1125" b="1">
+                <a:solidFill>
+                  <a:srgbClr val="1A1A1A"/>
+                </a:solidFill>
+                <a:latin typeface="Arial"/>
+                <a:ea typeface="Arial"/>
+              </a:rPr>
+              <a:t>1 + OP</a:t>
+            </a:r>
+          </a:p>
+        </p:txBody>
+      </p:sp>
+      <p:sp>
+        <p:nvSpPr>
+          <p:cNvPr id="55" name="TextBox 54"/>
+          <p:cNvSpPr txBox="1"/>
+          <p:nvPr/>
+        </p:nvSpPr>
+        <p:spPr>
+          <a:xfrm>
+            <a:off x="9208007" y="3493007"/>
+            <a:ext cx="1188720" cy="164592"/>
+          </a:xfrm>
+          <a:prstGeom prst="rect">
+            <a:avLst/>
+          </a:prstGeom>
+          <a:noFill/>
+        </p:spPr>
+        <p:txBody>
+          <a:bodyPr wrap="square" anchor="t" lIns="0" rIns="0" tIns="0" bIns="0">
+            <a:spAutoFit/>
+          </a:bodyPr>
+          <a:lstStyle/>
+          <a:p>
+            <a:pPr algn="ctr">
+              <a:lnSpc>
+                <a:spcPct val="112000"/>
+              </a:lnSpc>
+            </a:pPr>
+            <a:r>
+              <a:rPr sz="850" b="0">
+                <a:solidFill>
+                  <a:srgbClr val="8A8A8A"/>
+                </a:solidFill>
+                <a:latin typeface="Arial"/>
+                <a:ea typeface="Arial"/>
+              </a:rPr>
+              <a:t>SSD</a:t>
+            </a:r>
+          </a:p>
+        </p:txBody>
+      </p:sp>
+      <p:sp>
+        <p:nvSpPr>
+          <p:cNvPr id="56" name="TextBox 55"/>
+          <p:cNvSpPr txBox="1"/>
+          <p:nvPr/>
+        </p:nvSpPr>
+        <p:spPr>
+          <a:xfrm>
+            <a:off x="10378439" y="3209544"/>
+            <a:ext cx="256032" cy="274320"/>
+          </a:xfrm>
+          <a:prstGeom prst="rect">
+            <a:avLst/>
+          </a:prstGeom>
+          <a:noFill/>
+        </p:spPr>
+        <p:txBody>
+          <a:bodyPr wrap="square" anchor="ctr" lIns="0" rIns="0" tIns="0" bIns="0">
+            <a:spAutoFit/>
+          </a:bodyPr>
+          <a:lstStyle/>
+          <a:p>
+            <a:pPr algn="ctr">
+              <a:lnSpc>
+                <a:spcPct val="112000"/>
+              </a:lnSpc>
+            </a:pPr>
+            <a:r>
+              <a:rPr sz="1300" b="0">
+                <a:solidFill>
+                  <a:srgbClr val="555555"/>
+                </a:solidFill>
+                <a:latin typeface="Arial"/>
+                <a:ea typeface="Arial"/>
+              </a:rPr>
+              <a:t>÷</a:t>
+            </a:r>
+          </a:p>
+        </p:txBody>
+      </p:sp>
+      <p:sp>
+        <p:nvSpPr>
+          <p:cNvPr id="57" name="Rectangle 56"/>
+          <p:cNvSpPr/>
+          <p:nvPr/>
+        </p:nvSpPr>
+        <p:spPr>
+          <a:xfrm>
+            <a:off x="10707623" y="3209544"/>
+            <a:ext cx="1005840" cy="274320"/>
+          </a:xfrm>
+          <a:prstGeom prst="rect">
+            <a:avLst/>
+          </a:prstGeom>
+          <a:solidFill>
+            <a:srgbClr val="1428A0"/>
+          </a:solidFill>
+          <a:ln>
+            <a:noFill/>
+          </a:ln>
+          <a:effectLst/>
+        </p:spPr>
+        <p:style>
+          <a:lnRef idx="1">
+            <a:schemeClr val="accent1"/>
+          </a:lnRef>
+          <a:fillRef idx="3">
+            <a:schemeClr val="accent1"/>
+          </a:fillRef>
+          <a:effectRef idx="2">
+            <a:schemeClr val="accent1"/>
+          </a:effectRef>
+          <a:fontRef idx="minor">
+            <a:schemeClr val="lt1"/>
+          </a:fontRef>
+        </p:style>
+        <p:txBody>
+          <a:bodyPr rtlCol="0" anchor="ctr"/>
+          <a:lstStyle/>
+          <a:p>
+            <a:pPr algn="ctr"/>
+          </a:p>
+        </p:txBody>
+      </p:sp>
+      <p:sp>
+        <p:nvSpPr>
+          <p:cNvPr id="58" name="TextBox 57"/>
+          <p:cNvSpPr txBox="1"/>
+          <p:nvPr/>
+        </p:nvSpPr>
+        <p:spPr>
+          <a:xfrm>
+            <a:off x="10707623" y="3209544"/>
+            <a:ext cx="1005840" cy="274320"/>
+          </a:xfrm>
+          <a:prstGeom prst="rect">
+            <a:avLst/>
+          </a:prstGeom>
+          <a:noFill/>
+        </p:spPr>
+        <p:txBody>
+          <a:bodyPr wrap="square" anchor="ctr" lIns="0" rIns="0" tIns="0" bIns="0">
+            <a:spAutoFit/>
+          </a:bodyPr>
+          <a:lstStyle/>
+          <a:p>
+            <a:pPr algn="ctr">
+              <a:lnSpc>
+                <a:spcPct val="112000"/>
+              </a:lnSpc>
+            </a:pPr>
+            <a:r>
+              <a:rPr sz="1125" b="1">
+                <a:solidFill>
+                  <a:srgbClr val="FFFFFF"/>
+                </a:solidFill>
+                <a:latin typeface="Arial"/>
+                <a:ea typeface="Arial"/>
+              </a:rPr>
+              <a:t>WAF</a:t>
+            </a:r>
+          </a:p>
+        </p:txBody>
+      </p:sp>
+      <p:sp>
+        <p:nvSpPr>
+          <p:cNvPr id="59" name="TextBox 58"/>
+          <p:cNvSpPr txBox="1"/>
+          <p:nvPr/>
+        </p:nvSpPr>
+        <p:spPr>
+          <a:xfrm>
+            <a:off x="10616183" y="3493007"/>
+            <a:ext cx="1188720" cy="164592"/>
+          </a:xfrm>
+          <a:prstGeom prst="rect">
+            <a:avLst/>
+          </a:prstGeom>
+          <a:noFill/>
+        </p:spPr>
+        <p:txBody>
+          <a:bodyPr wrap="square" anchor="t" lIns="0" rIns="0" tIns="0" bIns="0">
+            <a:spAutoFit/>
+          </a:bodyPr>
+          <a:lstStyle/>
+          <a:p>
+            <a:pPr algn="ctr">
+              <a:lnSpc>
+                <a:spcPct val="112000"/>
+              </a:lnSpc>
+            </a:pPr>
+            <a:r>
+              <a:rPr sz="850" b="1">
+                <a:solidFill>
+                  <a:srgbClr val="1428A0"/>
+                </a:solidFill>
+                <a:latin typeface="Arial"/>
+                <a:ea typeface="Arial"/>
+              </a:rPr>
+              <a:t>호스트 · 앱</a:t>
+            </a:r>
+          </a:p>
+        </p:txBody>
+      </p:sp>
+      <p:sp>
+        <p:nvSpPr>
+          <p:cNvPr id="60" name="TextBox 59"/>
+          <p:cNvSpPr txBox="1"/>
+          <p:nvPr/>
+        </p:nvSpPr>
+        <p:spPr>
+          <a:xfrm>
+            <a:off x="11786615" y="3209544"/>
+            <a:ext cx="256032" cy="274320"/>
+          </a:xfrm>
+          <a:prstGeom prst="rect">
+            <a:avLst/>
+          </a:prstGeom>
+          <a:noFill/>
+        </p:spPr>
+        <p:txBody>
+          <a:bodyPr wrap="square" anchor="ctr" lIns="0" rIns="0" tIns="0" bIns="0">
+            <a:spAutoFit/>
+          </a:bodyPr>
+          <a:lstStyle/>
+          <a:p>
+            <a:pPr algn="ctr">
+              <a:lnSpc>
+                <a:spcPct val="112000"/>
+              </a:lnSpc>
+            </a:pPr>
+            <a:r>
+              <a:rPr sz="1300" b="0">
+                <a:solidFill>
+                  <a:srgbClr val="555555"/>
+                </a:solidFill>
+                <a:latin typeface="Arial"/>
+                <a:ea typeface="Arial"/>
+              </a:rPr>
+              <a:t>÷</a:t>
+            </a:r>
+          </a:p>
+        </p:txBody>
+      </p:sp>
+      <p:sp>
+        <p:nvSpPr>
+          <p:cNvPr id="61" name="Rectangle 60"/>
+          <p:cNvSpPr/>
+          <p:nvPr/>
+        </p:nvSpPr>
+        <p:spPr>
+          <a:xfrm>
+            <a:off x="12115799" y="3209544"/>
+            <a:ext cx="1005840" cy="274320"/>
+          </a:xfrm>
+          <a:prstGeom prst="rect">
+            <a:avLst/>
+          </a:prstGeom>
+          <a:solidFill>
+            <a:srgbClr val="F4F6FC"/>
+          </a:solidFill>
+          <a:ln w="9525">
+            <a:solidFill>
+              <a:srgbClr val="AAB8E8"/>
+            </a:solidFill>
+          </a:ln>
+          <a:effectLst/>
+        </p:spPr>
+        <p:style>
+          <a:lnRef idx="1">
+            <a:schemeClr val="accent1"/>
+          </a:lnRef>
+          <a:fillRef idx="3">
+            <a:schemeClr val="accent1"/>
+          </a:fillRef>
+          <a:effectRef idx="2">
+            <a:schemeClr val="accent1"/>
+          </a:effectRef>
+          <a:fontRef idx="minor">
+            <a:schemeClr val="lt1"/>
+          </a:fontRef>
+        </p:style>
+        <p:txBody>
+          <a:bodyPr rtlCol="0" anchor="ctr"/>
+          <a:lstStyle/>
+          <a:p>
+            <a:pPr algn="ctr"/>
+          </a:p>
+        </p:txBody>
+      </p:sp>
+      <p:sp>
+        <p:nvSpPr>
+          <p:cNvPr id="62" name="TextBox 61"/>
+          <p:cNvSpPr txBox="1"/>
+          <p:nvPr/>
+        </p:nvSpPr>
+        <p:spPr>
+          <a:xfrm>
+            <a:off x="12115799" y="3209544"/>
+            <a:ext cx="1005840" cy="274320"/>
+          </a:xfrm>
+          <a:prstGeom prst="rect">
+            <a:avLst/>
+          </a:prstGeom>
+          <a:noFill/>
+        </p:spPr>
+        <p:txBody>
+          <a:bodyPr wrap="square" anchor="ctr" lIns="0" rIns="0" tIns="0" bIns="0">
+            <a:spAutoFit/>
+          </a:bodyPr>
+          <a:lstStyle/>
+          <a:p>
+            <a:pPr algn="ctr">
+              <a:lnSpc>
+                <a:spcPct val="112000"/>
+              </a:lnSpc>
+            </a:pPr>
+            <a:r>
+              <a:rPr sz="1125" b="1">
+                <a:solidFill>
+                  <a:srgbClr val="1A1A1A"/>
+                </a:solidFill>
+                <a:latin typeface="Arial"/>
+                <a:ea typeface="Arial"/>
+              </a:rPr>
+              <a:t>365 × 년</a:t>
+            </a:r>
+          </a:p>
+        </p:txBody>
+      </p:sp>
+      <p:sp>
+        <p:nvSpPr>
+          <p:cNvPr id="63" name="TextBox 62"/>
+          <p:cNvSpPr txBox="1"/>
+          <p:nvPr/>
+        </p:nvSpPr>
+        <p:spPr>
+          <a:xfrm>
+            <a:off x="12024359" y="3493007"/>
+            <a:ext cx="1188720" cy="164592"/>
+          </a:xfrm>
+          <a:prstGeom prst="rect">
+            <a:avLst/>
+          </a:prstGeom>
+          <a:noFill/>
+        </p:spPr>
+        <p:txBody>
+          <a:bodyPr wrap="square" anchor="t" lIns="0" rIns="0" tIns="0" bIns="0">
+            <a:spAutoFit/>
+          </a:bodyPr>
+          <a:lstStyle/>
+          <a:p>
+            <a:pPr algn="ctr">
+              <a:lnSpc>
+                <a:spcPct val="112000"/>
+              </a:lnSpc>
+            </a:pPr>
+            <a:r>
+              <a:rPr sz="850" b="0">
+                <a:solidFill>
+                  <a:srgbClr val="8A8A8A"/>
+                </a:solidFill>
+                <a:latin typeface="Arial"/>
+                <a:ea typeface="Arial"/>
+              </a:rPr>
+              <a:t>요구</a:t>
+            </a:r>
+          </a:p>
+        </p:txBody>
+      </p:sp>
+      <p:sp>
+        <p:nvSpPr>
+          <p:cNvPr id="64" name="Rectangle 63"/>
+          <p:cNvSpPr/>
+          <p:nvPr/>
+        </p:nvSpPr>
+        <p:spPr>
+          <a:xfrm>
+            <a:off x="722376" y="3730752"/>
+            <a:ext cx="1188720" cy="2505456"/>
+          </a:xfrm>
+          <a:prstGeom prst="rect">
+            <a:avLst/>
+          </a:prstGeom>
+          <a:solidFill>
+            <a:srgbClr val="F4F6FC"/>
+          </a:solidFill>
+          <a:ln>
+            <a:noFill/>
+          </a:ln>
+          <a:effectLst/>
+        </p:spPr>
+        <p:style>
+          <a:lnRef idx="1">
+            <a:schemeClr val="accent1"/>
+          </a:lnRef>
+          <a:fillRef idx="3">
+            <a:schemeClr val="accent1"/>
+          </a:fillRef>
+          <a:effectRef idx="2">
+            <a:schemeClr val="accent1"/>
+          </a:effectRef>
+          <a:fontRef idx="minor">
+            <a:schemeClr val="lt1"/>
+          </a:fontRef>
+        </p:style>
+        <p:txBody>
+          <a:bodyPr rtlCol="0" anchor="ctr"/>
+          <a:lstStyle/>
+          <a:p>
+            <a:pPr algn="ctr"/>
+          </a:p>
+        </p:txBody>
+      </p:sp>
+      <p:sp>
+        <p:nvSpPr>
+          <p:cNvPr id="65" name="Rectangle 64"/>
+          <p:cNvSpPr/>
+          <p:nvPr/>
+        </p:nvSpPr>
+        <p:spPr>
+          <a:xfrm>
+            <a:off x="722376" y="3730752"/>
+            <a:ext cx="54864" cy="2505456"/>
+          </a:xfrm>
+          <a:prstGeom prst="rect">
+            <a:avLst/>
+          </a:prstGeom>
+          <a:solidFill>
+            <a:srgbClr val="1428A0"/>
+          </a:solidFill>
+          <a:ln>
+            <a:noFill/>
+          </a:ln>
+          <a:effectLst/>
+        </p:spPr>
+        <p:style>
+          <a:lnRef idx="1">
+            <a:schemeClr val="accent1"/>
+          </a:lnRef>
+          <a:fillRef idx="3">
+            <a:schemeClr val="accent1"/>
+          </a:fillRef>
+          <a:effectRef idx="2">
+            <a:schemeClr val="accent1"/>
+          </a:effectRef>
+          <a:fontRef idx="minor">
+            <a:schemeClr val="lt1"/>
+          </a:fontRef>
+        </p:style>
+        <p:txBody>
+          <a:bodyPr rtlCol="0" anchor="ctr"/>
+          <a:lstStyle/>
+          <a:p>
+            <a:pPr algn="ctr"/>
+          </a:p>
+        </p:txBody>
+      </p:sp>
+      <p:sp>
+        <p:nvSpPr>
+          <p:cNvPr id="66" name="TextBox 65"/>
+          <p:cNvSpPr txBox="1"/>
+          <p:nvPr/>
+        </p:nvSpPr>
+        <p:spPr>
+          <a:xfrm>
+            <a:off x="886968" y="3877056"/>
+            <a:ext cx="950976" cy="274320"/>
+          </a:xfrm>
+          <a:prstGeom prst="rect">
+            <a:avLst/>
+          </a:prstGeom>
+          <a:noFill/>
+        </p:spPr>
+        <p:txBody>
+          <a:bodyPr wrap="square" anchor="t" lIns="0" rIns="0" tIns="0" bIns="0">
+            <a:spAutoFit/>
+          </a:bodyPr>
+          <a:lstStyle/>
+          <a:p>
+            <a:pPr algn="l">
+              <a:lnSpc>
+                <a:spcPct val="112000"/>
+              </a:lnSpc>
+            </a:pPr>
+            <a:r>
+              <a:rPr sz="1275" b="1">
+                <a:solidFill>
+                  <a:srgbClr val="1428A0"/>
+                </a:solidFill>
+                <a:latin typeface="Arial"/>
+                <a:ea typeface="Arial"/>
+              </a:rPr>
+              <a:t>내구성 축</a:t>
+            </a:r>
+          </a:p>
+        </p:txBody>
+      </p:sp>
+      <p:sp>
+        <p:nvSpPr>
+          <p:cNvPr id="67" name="TextBox 66"/>
+          <p:cNvSpPr txBox="1"/>
+          <p:nvPr/>
+        </p:nvSpPr>
+        <p:spPr>
+          <a:xfrm>
+            <a:off x="886968" y="4187952"/>
+            <a:ext cx="950976" cy="548640"/>
+          </a:xfrm>
+          <a:prstGeom prst="rect">
+            <a:avLst/>
+          </a:prstGeom>
+          <a:noFill/>
+        </p:spPr>
+        <p:txBody>
+          <a:bodyPr wrap="square" anchor="t" lIns="0" rIns="0" tIns="0" bIns="0">
+            <a:spAutoFit/>
+          </a:bodyPr>
+          <a:lstStyle/>
+          <a:p>
+            <a:pPr algn="l">
+              <a:lnSpc>
+                <a:spcPct val="100000"/>
+              </a:lnSpc>
+            </a:pPr>
+            <a:r>
+              <a:rPr sz="975" b="0">
+                <a:solidFill>
+                  <a:srgbClr val="555555"/>
+                </a:solidFill>
+                <a:latin typeface="Arial"/>
+                <a:ea typeface="Arial"/>
+              </a:rPr>
+              <a:t>P/E · BER</a:t>
+            </a:r>
+          </a:p>
+          <a:p>
+            <a:pPr algn="l">
+              <a:lnSpc>
+                <a:spcPct val="100000"/>
+              </a:lnSpc>
+            </a:pPr>
+            <a:r>
+              <a:rPr sz="975" b="0">
+                <a:solidFill>
+                  <a:srgbClr val="555555"/>
+                </a:solidFill>
+                <a:latin typeface="Arial"/>
+                <a:ea typeface="Arial"/>
+              </a:rPr>
+              <a:t>DWPD · WAF</a:t>
+            </a:r>
+          </a:p>
+        </p:txBody>
+      </p:sp>
+      <p:sp>
+        <p:nvSpPr>
+          <p:cNvPr id="68" name="Rectangle 67"/>
+          <p:cNvSpPr/>
+          <p:nvPr/>
+        </p:nvSpPr>
+        <p:spPr>
+          <a:xfrm>
+            <a:off x="722376" y="6345936"/>
+            <a:ext cx="1188720" cy="2139696"/>
+          </a:xfrm>
+          <a:prstGeom prst="rect">
+            <a:avLst/>
+          </a:prstGeom>
+          <a:solidFill>
+            <a:srgbClr val="F4F6FC"/>
+          </a:solidFill>
+          <a:ln>
+            <a:noFill/>
+          </a:ln>
+          <a:effectLst/>
+        </p:spPr>
+        <p:style>
+          <a:lnRef idx="1">
+            <a:schemeClr val="accent1"/>
+          </a:lnRef>
+          <a:fillRef idx="3">
+            <a:schemeClr val="accent1"/>
+          </a:fillRef>
+          <a:effectRef idx="2">
+            <a:schemeClr val="accent1"/>
+          </a:effectRef>
+          <a:fontRef idx="minor">
+            <a:schemeClr val="lt1"/>
+          </a:fontRef>
+        </p:style>
+        <p:txBody>
+          <a:bodyPr rtlCol="0" anchor="ctr"/>
+          <a:lstStyle/>
+          <a:p>
+            <a:pPr algn="ctr"/>
+          </a:p>
+        </p:txBody>
+      </p:sp>
+      <p:sp>
+        <p:nvSpPr>
+          <p:cNvPr id="69" name="Rectangle 68"/>
+          <p:cNvSpPr/>
+          <p:nvPr/>
+        </p:nvSpPr>
+        <p:spPr>
+          <a:xfrm>
+            <a:off x="722376" y="6345936"/>
+            <a:ext cx="54864" cy="2139696"/>
+          </a:xfrm>
+          <a:prstGeom prst="rect">
+            <a:avLst/>
+          </a:prstGeom>
+          <a:solidFill>
+            <a:srgbClr val="1428A0"/>
+          </a:solidFill>
+          <a:ln>
+            <a:noFill/>
+          </a:ln>
+          <a:effectLst/>
+        </p:spPr>
+        <p:style>
+          <a:lnRef idx="1">
+            <a:schemeClr val="accent1"/>
+          </a:lnRef>
+          <a:fillRef idx="3">
+            <a:schemeClr val="accent1"/>
+          </a:fillRef>
+          <a:effectRef idx="2">
+            <a:schemeClr val="accent1"/>
+          </a:effectRef>
+          <a:fontRef idx="minor">
+            <a:schemeClr val="lt1"/>
+          </a:fontRef>
+        </p:style>
+        <p:txBody>
+          <a:bodyPr rtlCol="0" anchor="ctr"/>
+          <a:lstStyle/>
+          <a:p>
+            <a:pPr algn="ctr"/>
+          </a:p>
+        </p:txBody>
+      </p:sp>
+      <p:sp>
+        <p:nvSpPr>
+          <p:cNvPr id="70" name="TextBox 69"/>
+          <p:cNvSpPr txBox="1"/>
+          <p:nvPr/>
+        </p:nvSpPr>
+        <p:spPr>
+          <a:xfrm>
+            <a:off x="886968" y="6492240"/>
+            <a:ext cx="950976" cy="274320"/>
+          </a:xfrm>
+          <a:prstGeom prst="rect">
+            <a:avLst/>
+          </a:prstGeom>
+          <a:noFill/>
+        </p:spPr>
+        <p:txBody>
+          <a:bodyPr wrap="square" anchor="t" lIns="0" rIns="0" tIns="0" bIns="0">
+            <a:spAutoFit/>
+          </a:bodyPr>
+          <a:lstStyle/>
+          <a:p>
+            <a:pPr algn="l">
+              <a:lnSpc>
+                <a:spcPct val="112000"/>
+              </a:lnSpc>
+            </a:pPr>
+            <a:r>
+              <a:rPr sz="1275" b="1">
+                <a:solidFill>
+                  <a:srgbClr val="1428A0"/>
+                </a:solidFill>
+                <a:latin typeface="Arial"/>
+                <a:ea typeface="Arial"/>
+              </a:rPr>
+              <a:t>신뢰성 축</a:t>
+            </a:r>
+          </a:p>
+        </p:txBody>
+      </p:sp>
+      <p:sp>
+        <p:nvSpPr>
+          <p:cNvPr id="71" name="TextBox 70"/>
+          <p:cNvSpPr txBox="1"/>
+          <p:nvPr/>
+        </p:nvSpPr>
+        <p:spPr>
+          <a:xfrm>
+            <a:off x="886968" y="6803136"/>
+            <a:ext cx="950976" cy="548640"/>
+          </a:xfrm>
+          <a:prstGeom prst="rect">
+            <a:avLst/>
+          </a:prstGeom>
+          <a:noFill/>
+        </p:spPr>
+        <p:txBody>
+          <a:bodyPr wrap="square" anchor="t" lIns="0" rIns="0" tIns="0" bIns="0">
+            <a:spAutoFit/>
+          </a:bodyPr>
+          <a:lstStyle/>
+          <a:p>
+            <a:pPr algn="l">
+              <a:lnSpc>
+                <a:spcPct val="100000"/>
+              </a:lnSpc>
+            </a:pPr>
+            <a:r>
+              <a:rPr sz="975" b="0">
+                <a:solidFill>
+                  <a:srgbClr val="555555"/>
+                </a:solidFill>
+                <a:latin typeface="Arial"/>
+                <a:ea typeface="Arial"/>
+              </a:rPr>
+              <a:t>다이 수</a:t>
+            </a:r>
+          </a:p>
+          <a:p>
+            <a:pPr algn="l">
+              <a:lnSpc>
+                <a:spcPct val="100000"/>
+              </a:lnSpc>
+            </a:pPr>
+            <a:r>
+              <a:rPr sz="975" b="0">
+                <a:solidFill>
+                  <a:srgbClr val="555555"/>
+                </a:solidFill>
+                <a:latin typeface="Arial"/>
+                <a:ea typeface="Arial"/>
+              </a:rPr>
+              <a:t>다이 고장률</a:t>
+            </a:r>
+          </a:p>
+        </p:txBody>
+      </p:sp>
+      <p:sp>
+        <p:nvSpPr>
+          <p:cNvPr id="72" name="Rectangle 71"/>
+          <p:cNvSpPr/>
+          <p:nvPr/>
+        </p:nvSpPr>
+        <p:spPr>
+          <a:xfrm>
+            <a:off x="2039112" y="3730752"/>
+            <a:ext cx="3675888" cy="2505456"/>
           </a:xfrm>
           <a:prstGeom prst="rect">
             <a:avLst/>
@@ -5092,14 +6873,54 @@
       </p:sp>
       <p:sp>
         <p:nvSpPr>
-          <p:cNvPr id="32" name="TextBox 31"/>
-          <p:cNvSpPr txBox="1"/>
-          <p:nvPr/>
-        </p:nvSpPr>
-        <p:spPr>
-          <a:xfrm>
-            <a:off x="10612027" y="3054096"/>
-            <a:ext cx="932688" cy="420624"/>
+          <p:cNvPr id="73" name="TextBox 72"/>
+          <p:cNvSpPr txBox="1"/>
+          <p:nvPr/>
+        </p:nvSpPr>
+        <p:spPr>
+          <a:xfrm>
+            <a:off x="2167128" y="3858768"/>
+            <a:ext cx="3419856" cy="182880"/>
+          </a:xfrm>
+          <a:prstGeom prst="rect">
+            <a:avLst/>
+          </a:prstGeom>
+          <a:noFill/>
+        </p:spPr>
+        <p:txBody>
+          <a:bodyPr wrap="square" anchor="t" lIns="0" rIns="0" tIns="0" bIns="0">
+            <a:spAutoFit/>
+          </a:bodyPr>
+          <a:lstStyle/>
+          <a:p>
+            <a:pPr algn="l">
+              <a:lnSpc>
+                <a:spcPct val="112000"/>
+              </a:lnSpc>
+            </a:pPr>
+            <a:r>
+              <a:rPr sz="975" b="0">
+                <a:solidFill>
+                  <a:srgbClr val="8A8A8A"/>
+                </a:solidFill>
+                <a:latin typeface="Arial"/>
+                <a:ea typeface="Arial"/>
+              </a:rPr>
+              <a:t>추론 캐시 계층 요구</a:t>
+            </a:r>
+          </a:p>
+        </p:txBody>
+      </p:sp>
+      <p:sp>
+        <p:nvSpPr>
+          <p:cNvPr id="74" name="TextBox 73"/>
+          <p:cNvSpPr txBox="1"/>
+          <p:nvPr/>
+        </p:nvSpPr>
+        <p:spPr>
+          <a:xfrm>
+            <a:off x="2167128" y="4059936"/>
+            <a:ext cx="3419856" cy="457200"/>
           </a:xfrm>
           <a:prstGeom prst="rect">
             <a:avLst/>
@@ -5112,34 +6933,34 @@
           </a:bodyPr>
           <a:lstStyle/>
           <a:p>
-            <a:pPr algn="ctr">
+            <a:pPr algn="l">
               <a:lnSpc>
                 <a:spcPct val="112000"/>
               </a:lnSpc>
             </a:pPr>
             <a:r>
-              <a:rPr sz="1350" b="1">
-                <a:solidFill>
-                  <a:srgbClr val="1A1A1A"/>
-                </a:solidFill>
-                <a:latin typeface="Arial"/>
-                <a:ea typeface="Arial"/>
-              </a:rPr>
-              <a:t>DWPD</a:t>
-            </a:r>
-          </a:p>
-        </p:txBody>
-      </p:sp>
-      <p:sp>
-        <p:nvSpPr>
-          <p:cNvPr id="33" name="TextBox 32"/>
-          <p:cNvSpPr txBox="1"/>
-          <p:nvPr/>
-        </p:nvSpPr>
-        <p:spPr>
-          <a:xfrm>
-            <a:off x="10520587" y="3511296"/>
-            <a:ext cx="1115568" cy="201168"/>
+              <a:rPr sz="2600" b="1">
+                <a:solidFill>
+                  <a:srgbClr val="1428A0"/>
+                </a:solidFill>
+                <a:latin typeface="Arial"/>
+                <a:ea typeface="Arial"/>
+              </a:rPr>
+              <a:t>DWPD 1~3</a:t>
+            </a:r>
+          </a:p>
+        </p:txBody>
+      </p:sp>
+      <p:sp>
+        <p:nvSpPr>
+          <p:cNvPr id="75" name="TextBox 74"/>
+          <p:cNvSpPr txBox="1"/>
+          <p:nvPr/>
+        </p:nvSpPr>
+        <p:spPr>
+          <a:xfrm>
+            <a:off x="2167128" y="4535424"/>
+            <a:ext cx="3419856" cy="365760"/>
           </a:xfrm>
           <a:prstGeom prst="rect">
             <a:avLst/>
@@ -5152,7 +6973,91 @@
           </a:bodyPr>
           <a:lstStyle/>
           <a:p>
-            <a:pPr algn="ctr">
+            <a:pPr algn="l">
+              <a:lnSpc>
+                <a:spcPct val="100000"/>
+              </a:lnSpc>
+            </a:pPr>
+            <a:r>
+              <a:rPr sz="900" b="0">
+                <a:solidFill>
+                  <a:srgbClr val="555555"/>
+                </a:solidFill>
+                <a:latin typeface="Arial"/>
+                <a:ea typeface="Arial"/>
+              </a:rPr>
+              <a:t>현재 TLC 수준 · ScaleFlux 제시 유효 요구 7~10</a:t>
+            </a:r>
+          </a:p>
+        </p:txBody>
+      </p:sp>
+      <p:sp>
+        <p:nvSpPr>
+          <p:cNvPr id="76" name="Rectangle 75"/>
+          <p:cNvSpPr/>
+          <p:nvPr/>
+        </p:nvSpPr>
+        <p:spPr>
+          <a:xfrm>
+            <a:off x="2167128" y="4974336"/>
+            <a:ext cx="3419856" cy="10972"/>
+          </a:xfrm>
+          <a:prstGeom prst="rect">
+            <a:avLst/>
+          </a:prstGeom>
+          <a:solidFill>
+            <a:srgbClr val="AAB8E8"/>
+          </a:solidFill>
+          <a:ln>
+            <a:noFill/>
+          </a:ln>
+          <a:effectLst/>
+        </p:spPr>
+        <p:style>
+          <a:lnRef idx="1">
+            <a:schemeClr val="accent1"/>
+          </a:lnRef>
+          <a:fillRef idx="3">
+            <a:schemeClr val="accent1"/>
+          </a:fillRef>
+          <a:effectRef idx="2">
+            <a:schemeClr val="accent1"/>
+          </a:effectRef>
+          <a:fontRef idx="minor">
+            <a:schemeClr val="lt1"/>
+          </a:fontRef>
+        </p:style>
+        <p:txBody>
+          <a:bodyPr rtlCol="0" anchor="ctr"/>
+          <a:lstStyle/>
+          <a:p>
+            <a:pPr algn="ctr"/>
+          </a:p>
+        </p:txBody>
+      </p:sp>
+      <p:sp>
+        <p:nvSpPr>
+          <p:cNvPr id="77" name="TextBox 76"/>
+          <p:cNvSpPr txBox="1"/>
+          <p:nvPr/>
+        </p:nvSpPr>
+        <p:spPr>
+          <a:xfrm>
+            <a:off x="2167128" y="5065776"/>
+            <a:ext cx="3419856" cy="182880"/>
+          </a:xfrm>
+          <a:prstGeom prst="rect">
+            <a:avLst/>
+          </a:prstGeom>
+          <a:noFill/>
+        </p:spPr>
+        <p:txBody>
+          <a:bodyPr wrap="square" anchor="t" lIns="0" rIns="0" tIns="0" bIns="0">
+            <a:spAutoFit/>
+          </a:bodyPr>
+          <a:lstStyle/>
+          <a:p>
+            <a:pPr algn="l">
               <a:lnSpc>
                 <a:spcPct val="112000"/>
               </a:lnSpc>
@@ -5165,21 +7070,21 @@
                 <a:latin typeface="Arial"/>
                 <a:ea typeface="Arial"/>
               </a:rPr>
-              <a:t>고객 요구</a:t>
-            </a:r>
-          </a:p>
-        </p:txBody>
-      </p:sp>
-      <p:sp>
-        <p:nvSpPr>
-          <p:cNvPr id="34" name="TextBox 33"/>
-          <p:cNvSpPr txBox="1"/>
-          <p:nvPr/>
-        </p:nvSpPr>
-        <p:spPr>
-          <a:xfrm>
-            <a:off x="11599579" y="3054096"/>
-            <a:ext cx="237744" cy="420624"/>
+              <a:t>신뢰성 요구 · JESD218</a:t>
+            </a:r>
+          </a:p>
+        </p:txBody>
+      </p:sp>
+      <p:sp>
+        <p:nvSpPr>
+          <p:cNvPr id="78" name="TextBox 77"/>
+          <p:cNvSpPr txBox="1"/>
+          <p:nvPr/>
+        </p:nvSpPr>
+        <p:spPr>
+          <a:xfrm>
+            <a:off x="2167128" y="5266944"/>
+            <a:ext cx="3419856" cy="457200"/>
           </a:xfrm>
           <a:prstGeom prst="rect">
             <a:avLst/>
@@ -5192,34 +7097,104 @@
           </a:bodyPr>
           <a:lstStyle/>
           <a:p>
-            <a:pPr algn="ctr">
+            <a:pPr algn="l">
               <a:lnSpc>
                 <a:spcPct val="112000"/>
               </a:lnSpc>
             </a:pPr>
             <a:r>
-              <a:rPr sz="1500" b="0">
+              <a:rPr sz="2200" b="1">
+                <a:solidFill>
+                  <a:srgbClr val="1428A0"/>
+                </a:solidFill>
+                <a:latin typeface="Arial"/>
+                <a:ea typeface="Arial"/>
+              </a:rPr>
+              <a:t>UBER 10</a:t>
+            </a:r>
+            <a:r>
+              <a:rPr sz="1300" b="1" baseline="30000">
+                <a:solidFill>
+                  <a:srgbClr val="1428A0"/>
+                </a:solidFill>
+                <a:latin typeface="Arial"/>
+                <a:ea typeface="Arial"/>
+              </a:rPr>
+              <a:t>-15</a:t>
+            </a:r>
+            <a:r>
+              <a:rPr sz="2200" b="1">
+                <a:solidFill>
+                  <a:srgbClr val="1428A0"/>
+                </a:solidFill>
+                <a:latin typeface="Arial"/>
+                <a:ea typeface="Arial"/>
+              </a:rPr>
+              <a:t> · 10</a:t>
+            </a:r>
+            <a:r>
+              <a:rPr sz="1300" b="1" baseline="30000">
+                <a:solidFill>
+                  <a:srgbClr val="1428A0"/>
+                </a:solidFill>
+                <a:latin typeface="Arial"/>
+                <a:ea typeface="Arial"/>
+              </a:rPr>
+              <a:t>-16</a:t>
+            </a:r>
+          </a:p>
+        </p:txBody>
+      </p:sp>
+      <p:sp>
+        <p:nvSpPr>
+          <p:cNvPr id="79" name="TextBox 78"/>
+          <p:cNvSpPr txBox="1"/>
+          <p:nvPr/>
+        </p:nvSpPr>
+        <p:spPr>
+          <a:xfrm>
+            <a:off x="2167128" y="5742432"/>
+            <a:ext cx="3419856" cy="365760"/>
+          </a:xfrm>
+          <a:prstGeom prst="rect">
+            <a:avLst/>
+          </a:prstGeom>
+          <a:noFill/>
+        </p:spPr>
+        <p:txBody>
+          <a:bodyPr wrap="square" anchor="t" lIns="0" rIns="0" tIns="0" bIns="0">
+            <a:spAutoFit/>
+          </a:bodyPr>
+          <a:lstStyle/>
+          <a:p>
+            <a:pPr algn="l">
+              <a:lnSpc>
+                <a:spcPct val="100000"/>
+              </a:lnSpc>
+            </a:pPr>
+            <a:r>
+              <a:rPr sz="900" b="0">
                 <a:solidFill>
                   <a:srgbClr val="555555"/>
                 </a:solidFill>
                 <a:latin typeface="Arial"/>
                 <a:ea typeface="Arial"/>
               </a:rPr>
-              <a:t>=</a:t>
-            </a:r>
-          </a:p>
-        </p:txBody>
-      </p:sp>
-      <p:sp>
-        <p:nvSpPr>
-          <p:cNvPr id="35" name="Rectangle 34"/>
+              <a:t>클라이언트 · 엔터프라이즈 · 보존 1년@30°C / 3개월@40°C</a:t>
+            </a:r>
+          </a:p>
+        </p:txBody>
+      </p:sp>
+      <p:sp>
+        <p:nvSpPr>
+          <p:cNvPr id="80" name="Rectangle 79"/>
           <p:cNvSpPr/>
           <p:nvPr/>
         </p:nvSpPr>
         <p:spPr>
           <a:xfrm>
-            <a:off x="11892187" y="3054096"/>
-            <a:ext cx="932688" cy="420624"/>
+            <a:off x="5989320" y="3730752"/>
+            <a:ext cx="3675888" cy="2505456"/>
           </a:xfrm>
           <a:prstGeom prst="rect">
             <a:avLst/>
@@ -5256,56 +7231,40 @@
           </a:p>
         </p:txBody>
       </p:sp>
-      <p:sp>
-        <p:nvSpPr>
-          <p:cNvPr id="36" name="TextBox 35"/>
-          <p:cNvSpPr txBox="1"/>
-          <p:nvPr/>
-        </p:nvSpPr>
-        <p:spPr>
-          <a:xfrm>
-            <a:off x="11892187" y="3054096"/>
-            <a:ext cx="932688" cy="420624"/>
-          </a:xfrm>
-          <a:prstGeom prst="rect">
-            <a:avLst/>
-          </a:prstGeom>
-          <a:noFill/>
-        </p:spPr>
-        <p:txBody>
-          <a:bodyPr wrap="square" anchor="ctr" lIns="0" rIns="0" tIns="0" bIns="0">
-            <a:spAutoFit/>
-          </a:bodyPr>
-          <a:lstStyle/>
-          <a:p>
-            <a:pPr algn="ctr">
-              <a:lnSpc>
-                <a:spcPct val="112000"/>
-              </a:lnSpc>
-            </a:pPr>
-            <a:r>
-              <a:rPr sz="1350" b="1">
-                <a:solidFill>
-                  <a:srgbClr val="1A1A1A"/>
-                </a:solidFill>
-                <a:latin typeface="Arial"/>
-                <a:ea typeface="Arial"/>
-              </a:rPr>
-              <a:t>P/E</a:t>
-            </a:r>
-          </a:p>
-        </p:txBody>
-      </p:sp>
-      <p:sp>
-        <p:nvSpPr>
-          <p:cNvPr id="37" name="TextBox 36"/>
-          <p:cNvSpPr txBox="1"/>
-          <p:nvPr/>
-        </p:nvSpPr>
-        <p:spPr>
-          <a:xfrm>
-            <a:off x="11800747" y="3511296"/>
-            <a:ext cx="1115568" cy="201168"/>
+      <p:pic>
+        <p:nvPicPr>
+          <p:cNvPr id="81" name="Picture 80" descr="ladder_cell_component.png"/>
+          <p:cNvPicPr>
+            <a:picLocks noChangeAspect="1"/>
+          </p:cNvPicPr>
+          <p:nvPr/>
+        </p:nvPicPr>
+        <p:blipFill>
+          <a:blip r:embed="rId2"/>
+          <a:stretch>
+            <a:fillRect/>
+          </a:stretch>
+        </p:blipFill>
+        <p:spPr>
+          <a:xfrm>
+            <a:off x="6080760" y="3822191"/>
+            <a:ext cx="3493008" cy="1941961"/>
+          </a:xfrm>
+          <a:prstGeom prst="rect">
+            <a:avLst/>
+          </a:prstGeom>
+        </p:spPr>
+      </p:pic>
+      <p:sp>
+        <p:nvSpPr>
+          <p:cNvPr id="82" name="TextBox 81"/>
+          <p:cNvSpPr txBox="1"/>
+          <p:nvPr/>
+        </p:nvSpPr>
+        <p:spPr>
+          <a:xfrm>
+            <a:off x="6117336" y="5852160"/>
+            <a:ext cx="3419856" cy="329184"/>
           </a:xfrm>
           <a:prstGeom prst="rect">
             <a:avLst/>
@@ -5318,74 +7277,34 @@
           </a:bodyPr>
           <a:lstStyle/>
           <a:p>
-            <a:pPr algn="ctr">
-              <a:lnSpc>
-                <a:spcPct val="112000"/>
-              </a:lnSpc>
-            </a:pPr>
-            <a:r>
-              <a:rPr sz="975" b="0">
-                <a:solidFill>
-                  <a:srgbClr val="8A8A8A"/>
-                </a:solidFill>
-                <a:latin typeface="Arial"/>
-                <a:ea typeface="Arial"/>
-              </a:rPr>
-              <a:t>셀 · 다이</a:t>
-            </a:r>
-          </a:p>
-        </p:txBody>
-      </p:sp>
-      <p:sp>
-        <p:nvSpPr>
-          <p:cNvPr id="38" name="TextBox 37"/>
-          <p:cNvSpPr txBox="1"/>
-          <p:nvPr/>
-        </p:nvSpPr>
-        <p:spPr>
-          <a:xfrm>
-            <a:off x="12879739" y="3054096"/>
-            <a:ext cx="237744" cy="420624"/>
-          </a:xfrm>
-          <a:prstGeom prst="rect">
-            <a:avLst/>
-          </a:prstGeom>
-          <a:noFill/>
-        </p:spPr>
-        <p:txBody>
-          <a:bodyPr wrap="square" anchor="ctr" lIns="0" rIns="0" tIns="0" bIns="0">
-            <a:spAutoFit/>
-          </a:bodyPr>
-          <a:lstStyle/>
-          <a:p>
-            <a:pPr algn="ctr">
-              <a:lnSpc>
-                <a:spcPct val="112000"/>
-              </a:lnSpc>
-            </a:pPr>
-            <a:r>
-              <a:rPr sz="1500" b="0">
+            <a:pPr algn="l">
+              <a:lnSpc>
+                <a:spcPct val="100000"/>
+              </a:lnSpc>
+            </a:pPr>
+            <a:r>
+              <a:rPr sz="850" b="0">
                 <a:solidFill>
                   <a:srgbClr val="555555"/>
                 </a:solidFill>
                 <a:latin typeface="Arial"/>
                 <a:ea typeface="Arial"/>
               </a:rPr>
-              <a:t>×</a:t>
-            </a:r>
-          </a:p>
-        </p:txBody>
-      </p:sp>
-      <p:sp>
-        <p:nvSpPr>
-          <p:cNvPr id="39" name="Rectangle 38"/>
+              <a:t>비트/셀 ↑ → 산포 마진 ↓ · 보존·사이클링·리드 디스터브로 시간에 따라 변하는 산포는 셀 단독으로 보정 불가</a:t>
+            </a:r>
+          </a:p>
+        </p:txBody>
+      </p:sp>
+      <p:sp>
+        <p:nvSpPr>
+          <p:cNvPr id="83" name="Rectangle 82"/>
           <p:cNvSpPr/>
           <p:nvPr/>
         </p:nvSpPr>
         <p:spPr>
           <a:xfrm>
-            <a:off x="13172347" y="3054096"/>
-            <a:ext cx="932688" cy="420624"/>
+            <a:off x="9939528" y="3730752"/>
+            <a:ext cx="3675888" cy="2505456"/>
           </a:xfrm>
           <a:prstGeom prst="rect">
             <a:avLst/>
@@ -5424,134 +7343,60 @@
       </p:sp>
       <p:sp>
         <p:nvSpPr>
-          <p:cNvPr id="40" name="TextBox 39"/>
-          <p:cNvSpPr txBox="1"/>
-          <p:nvPr/>
-        </p:nvSpPr>
-        <p:spPr>
-          <a:xfrm>
-            <a:off x="13172347" y="3054096"/>
-            <a:ext cx="932688" cy="420624"/>
-          </a:xfrm>
-          <a:prstGeom prst="rect">
-            <a:avLst/>
-          </a:prstGeom>
-          <a:noFill/>
-        </p:spPr>
-        <p:txBody>
-          <a:bodyPr wrap="square" anchor="ctr" lIns="0" rIns="0" tIns="0" bIns="0">
-            <a:spAutoFit/>
-          </a:bodyPr>
-          <a:lstStyle/>
-          <a:p>
-            <a:pPr algn="ctr">
-              <a:lnSpc>
-                <a:spcPct val="112000"/>
-              </a:lnSpc>
-            </a:pPr>
-            <a:r>
-              <a:rPr sz="1350" b="1">
-                <a:solidFill>
-                  <a:srgbClr val="1A1A1A"/>
-                </a:solidFill>
-                <a:latin typeface="Arial"/>
-                <a:ea typeface="Arial"/>
-              </a:rPr>
-              <a:t>1 + OP</a:t>
-            </a:r>
-          </a:p>
-        </p:txBody>
-      </p:sp>
-      <p:sp>
-        <p:nvSpPr>
-          <p:cNvPr id="41" name="TextBox 40"/>
-          <p:cNvSpPr txBox="1"/>
-          <p:nvPr/>
-        </p:nvSpPr>
-        <p:spPr>
-          <a:xfrm>
-            <a:off x="13080907" y="3511296"/>
-            <a:ext cx="1115568" cy="201168"/>
-          </a:xfrm>
-          <a:prstGeom prst="rect">
-            <a:avLst/>
-          </a:prstGeom>
-          <a:noFill/>
-        </p:spPr>
-        <p:txBody>
-          <a:bodyPr wrap="square" anchor="t" lIns="0" rIns="0" tIns="0" bIns="0">
-            <a:spAutoFit/>
-          </a:bodyPr>
-          <a:lstStyle/>
-          <a:p>
-            <a:pPr algn="ctr">
-              <a:lnSpc>
-                <a:spcPct val="112000"/>
-              </a:lnSpc>
-            </a:pPr>
-            <a:r>
-              <a:rPr sz="975" b="0">
-                <a:solidFill>
-                  <a:srgbClr val="8A8A8A"/>
-                </a:solidFill>
-                <a:latin typeface="Arial"/>
-                <a:ea typeface="Arial"/>
-              </a:rPr>
-              <a:t>디바이스</a:t>
-            </a:r>
-          </a:p>
-        </p:txBody>
-      </p:sp>
-      <p:sp>
-        <p:nvSpPr>
-          <p:cNvPr id="42" name="TextBox 41"/>
-          <p:cNvSpPr txBox="1"/>
-          <p:nvPr/>
-        </p:nvSpPr>
-        <p:spPr>
-          <a:xfrm>
-            <a:off x="14159899" y="3054096"/>
-            <a:ext cx="237744" cy="420624"/>
-          </a:xfrm>
-          <a:prstGeom prst="rect">
-            <a:avLst/>
-          </a:prstGeom>
-          <a:noFill/>
-        </p:spPr>
-        <p:txBody>
-          <a:bodyPr wrap="square" anchor="ctr" lIns="0" rIns="0" tIns="0" bIns="0">
-            <a:spAutoFit/>
-          </a:bodyPr>
-          <a:lstStyle/>
-          <a:p>
-            <a:pPr algn="ctr">
-              <a:lnSpc>
-                <a:spcPct val="112000"/>
-              </a:lnSpc>
-            </a:pPr>
-            <a:r>
-              <a:rPr sz="1500" b="0">
-                <a:solidFill>
-                  <a:srgbClr val="555555"/>
-                </a:solidFill>
-                <a:latin typeface="Arial"/>
-                <a:ea typeface="Arial"/>
-              </a:rPr>
-              <a:t>÷</a:t>
-            </a:r>
-          </a:p>
-        </p:txBody>
-      </p:sp>
-      <p:sp>
-        <p:nvSpPr>
-          <p:cNvPr id="43" name="Rectangle 42"/>
+          <p:cNvPr id="84" name="Rectangle 83"/>
           <p:cNvSpPr/>
           <p:nvPr/>
         </p:nvSpPr>
         <p:spPr>
           <a:xfrm>
-            <a:off x="14452507" y="3054096"/>
-            <a:ext cx="932688" cy="420624"/>
+            <a:off x="10030968" y="3822191"/>
+            <a:ext cx="3493008" cy="658368"/>
+          </a:xfrm>
+          <a:prstGeom prst="rect">
+            <a:avLst/>
+          </a:prstGeom>
+          <a:solidFill>
+            <a:srgbClr val="FFFFFF"/>
+          </a:solidFill>
+          <a:ln w="12700">
+            <a:solidFill>
+              <a:srgbClr val="1428A0"/>
+            </a:solidFill>
+          </a:ln>
+          <a:effectLst/>
+        </p:spPr>
+        <p:style>
+          <a:lnRef idx="1">
+            <a:schemeClr val="accent1"/>
+          </a:lnRef>
+          <a:fillRef idx="3">
+            <a:schemeClr val="accent1"/>
+          </a:fillRef>
+          <a:effectRef idx="2">
+            <a:schemeClr val="accent1"/>
+          </a:effectRef>
+          <a:fontRef idx="minor">
+            <a:schemeClr val="lt1"/>
+          </a:fontRef>
+        </p:style>
+        <p:txBody>
+          <a:bodyPr rtlCol="0" anchor="ctr"/>
+          <a:lstStyle/>
+          <a:p>
+            <a:pPr algn="ctr"/>
+          </a:p>
+        </p:txBody>
+      </p:sp>
+      <p:sp>
+        <p:nvSpPr>
+          <p:cNvPr id="85" name="Rectangle 84"/>
+          <p:cNvSpPr/>
+          <p:nvPr/>
+        </p:nvSpPr>
+        <p:spPr>
+          <a:xfrm>
+            <a:off x="10030968" y="3822191"/>
+            <a:ext cx="54864" cy="658368"/>
           </a:xfrm>
           <a:prstGeom prst="rect">
             <a:avLst/>
@@ -5588,14 +7433,632 @@
       </p:sp>
       <p:sp>
         <p:nvSpPr>
-          <p:cNvPr id="44" name="TextBox 43"/>
-          <p:cNvSpPr txBox="1"/>
-          <p:nvPr/>
-        </p:nvSpPr>
-        <p:spPr>
-          <a:xfrm>
-            <a:off x="14452507" y="3054096"/>
-            <a:ext cx="932688" cy="420624"/>
+          <p:cNvPr id="86" name="TextBox 85"/>
+          <p:cNvSpPr txBox="1"/>
+          <p:nvPr/>
+        </p:nvSpPr>
+        <p:spPr>
+          <a:xfrm>
+            <a:off x="10177272" y="3877055"/>
+            <a:ext cx="2011680" cy="182880"/>
+          </a:xfrm>
+          <a:prstGeom prst="rect">
+            <a:avLst/>
+          </a:prstGeom>
+          <a:noFill/>
+        </p:spPr>
+        <p:txBody>
+          <a:bodyPr wrap="square" anchor="t" lIns="0" rIns="0" tIns="0" bIns="0">
+            <a:spAutoFit/>
+          </a:bodyPr>
+          <a:lstStyle/>
+          <a:p>
+            <a:pPr algn="l">
+              <a:lnSpc>
+                <a:spcPct val="112000"/>
+              </a:lnSpc>
+            </a:pPr>
+            <a:r>
+              <a:rPr sz="975" b="0">
+                <a:solidFill>
+                  <a:srgbClr val="8A8A8A"/>
+                </a:solidFill>
+                <a:latin typeface="Arial"/>
+                <a:ea typeface="Arial"/>
+              </a:rPr>
+              <a:t>1단계 · 컨트롤러 ECC (1991~)</a:t>
+            </a:r>
+          </a:p>
+        </p:txBody>
+      </p:sp>
+      <p:sp>
+        <p:nvSpPr>
+          <p:cNvPr id="87" name="TextBox 86"/>
+          <p:cNvSpPr txBox="1"/>
+          <p:nvPr/>
+        </p:nvSpPr>
+        <p:spPr>
+          <a:xfrm>
+            <a:off x="12152376" y="3877055"/>
+            <a:ext cx="1280160" cy="201168"/>
+          </a:xfrm>
+          <a:prstGeom prst="rect">
+            <a:avLst/>
+          </a:prstGeom>
+          <a:noFill/>
+        </p:spPr>
+        <p:txBody>
+          <a:bodyPr wrap="square" anchor="t" lIns="0" rIns="0" tIns="0" bIns="0">
+            <a:spAutoFit/>
+          </a:bodyPr>
+          <a:lstStyle/>
+          <a:p>
+            <a:pPr algn="r">
+              <a:lnSpc>
+                <a:spcPct val="112000"/>
+              </a:lnSpc>
+            </a:pPr>
+            <a:r>
+              <a:rPr sz="975" b="1">
+                <a:solidFill>
+                  <a:srgbClr val="1428A0"/>
+                </a:solidFill>
+                <a:latin typeface="Arial"/>
+                <a:ea typeface="Arial"/>
+              </a:rPr>
+              <a:t>UBER 요구 충족</a:t>
+            </a:r>
+          </a:p>
+        </p:txBody>
+      </p:sp>
+      <p:sp>
+        <p:nvSpPr>
+          <p:cNvPr id="88" name="TextBox 87"/>
+          <p:cNvSpPr txBox="1"/>
+          <p:nvPr/>
+        </p:nvSpPr>
+        <p:spPr>
+          <a:xfrm>
+            <a:off x="10177272" y="4069079"/>
+            <a:ext cx="3255264" cy="237744"/>
+          </a:xfrm>
+          <a:prstGeom prst="rect">
+            <a:avLst/>
+          </a:prstGeom>
+          <a:noFill/>
+        </p:spPr>
+        <p:txBody>
+          <a:bodyPr wrap="square" anchor="t" lIns="0" rIns="0" tIns="0" bIns="0">
+            <a:spAutoFit/>
+          </a:bodyPr>
+          <a:lstStyle/>
+          <a:p>
+            <a:pPr algn="l">
+              <a:lnSpc>
+                <a:spcPct val="112000"/>
+              </a:lnSpc>
+            </a:pPr>
+            <a:r>
+              <a:rPr sz="1125" b="1">
+                <a:solidFill>
+                  <a:srgbClr val="1A1A1A"/>
+                </a:solidFill>
+                <a:latin typeface="Arial"/>
+                <a:ea typeface="Arial"/>
+              </a:rPr>
+              <a:t>ECC 1 bit/512B → LDPC 120 bit/KB · 60배 ↑</a:t>
+            </a:r>
+          </a:p>
+        </p:txBody>
+      </p:sp>
+      <p:sp>
+        <p:nvSpPr>
+          <p:cNvPr id="89" name="TextBox 88"/>
+          <p:cNvSpPr txBox="1"/>
+          <p:nvPr/>
+        </p:nvSpPr>
+        <p:spPr>
+          <a:xfrm>
+            <a:off x="10177272" y="4297679"/>
+            <a:ext cx="3255264" cy="201168"/>
+          </a:xfrm>
+          <a:prstGeom prst="rect">
+            <a:avLst/>
+          </a:prstGeom>
+          <a:noFill/>
+        </p:spPr>
+        <p:txBody>
+          <a:bodyPr wrap="square" anchor="t" lIns="0" rIns="0" tIns="0" bIns="0">
+            <a:spAutoFit/>
+          </a:bodyPr>
+          <a:lstStyle/>
+          <a:p>
+            <a:pPr algn="l">
+              <a:lnSpc>
+                <a:spcPct val="112000"/>
+              </a:lnSpc>
+            </a:pPr>
+            <a:r>
+              <a:rPr sz="850" b="0">
+                <a:solidFill>
+                  <a:srgbClr val="555555"/>
+                </a:solidFill>
+                <a:latin typeface="Arial"/>
+                <a:ea typeface="Arial"/>
+              </a:rPr>
+              <a:t>RBER 백만 배 상승분을 컨트롤러가 흡수 · 완결된 이관</a:t>
+            </a:r>
+          </a:p>
+        </p:txBody>
+      </p:sp>
+      <p:sp>
+        <p:nvSpPr>
+          <p:cNvPr id="90" name="Rectangle 89"/>
+          <p:cNvSpPr/>
+          <p:nvPr/>
+        </p:nvSpPr>
+        <p:spPr>
+          <a:xfrm>
+            <a:off x="10030968" y="4571999"/>
+            <a:ext cx="3493008" cy="1572768"/>
+          </a:xfrm>
+          <a:prstGeom prst="rect">
+            <a:avLst/>
+          </a:prstGeom>
+          <a:solidFill>
+            <a:srgbClr val="AAB8E8"/>
+          </a:solidFill>
+          <a:ln>
+            <a:noFill/>
+          </a:ln>
+          <a:effectLst/>
+        </p:spPr>
+        <p:style>
+          <a:lnRef idx="1">
+            <a:schemeClr val="accent1"/>
+          </a:lnRef>
+          <a:fillRef idx="3">
+            <a:schemeClr val="accent1"/>
+          </a:fillRef>
+          <a:effectRef idx="2">
+            <a:schemeClr val="accent1"/>
+          </a:effectRef>
+          <a:fontRef idx="minor">
+            <a:schemeClr val="lt1"/>
+          </a:fontRef>
+        </p:style>
+        <p:txBody>
+          <a:bodyPr rtlCol="0" anchor="ctr"/>
+          <a:lstStyle/>
+          <a:p>
+            <a:pPr algn="ctr"/>
+          </a:p>
+        </p:txBody>
+      </p:sp>
+      <p:sp>
+        <p:nvSpPr>
+          <p:cNvPr id="91" name="TextBox 90"/>
+          <p:cNvSpPr txBox="1"/>
+          <p:nvPr/>
+        </p:nvSpPr>
+        <p:spPr>
+          <a:xfrm>
+            <a:off x="10177272" y="4626863"/>
+            <a:ext cx="2194560" cy="182880"/>
+          </a:xfrm>
+          <a:prstGeom prst="rect">
+            <a:avLst/>
+          </a:prstGeom>
+          <a:noFill/>
+        </p:spPr>
+        <p:txBody>
+          <a:bodyPr wrap="square" anchor="t" lIns="0" rIns="0" tIns="0" bIns="0">
+            <a:spAutoFit/>
+          </a:bodyPr>
+          <a:lstStyle/>
+          <a:p>
+            <a:pPr algn="l">
+              <a:lnSpc>
+                <a:spcPct val="112000"/>
+              </a:lnSpc>
+            </a:pPr>
+            <a:r>
+              <a:rPr sz="975" b="0">
+                <a:solidFill>
+                  <a:srgbClr val="1A1A1A"/>
+                </a:solidFill>
+                <a:latin typeface="Arial"/>
+                <a:ea typeface="Arial"/>
+              </a:rPr>
+              <a:t>2단계 · SSD 단독 최적화</a:t>
+            </a:r>
+          </a:p>
+        </p:txBody>
+      </p:sp>
+      <p:sp>
+        <p:nvSpPr>
+          <p:cNvPr id="92" name="TextBox 91"/>
+          <p:cNvSpPr txBox="1"/>
+          <p:nvPr/>
+        </p:nvSpPr>
+        <p:spPr>
+          <a:xfrm>
+            <a:off x="12152376" y="4626863"/>
+            <a:ext cx="1280160" cy="201168"/>
+          </a:xfrm>
+          <a:prstGeom prst="rect">
+            <a:avLst/>
+          </a:prstGeom>
+          <a:noFill/>
+        </p:spPr>
+        <p:txBody>
+          <a:bodyPr wrap="square" anchor="t" lIns="0" rIns="0" tIns="0" bIns="0">
+            <a:spAutoFit/>
+          </a:bodyPr>
+          <a:lstStyle/>
+          <a:p>
+            <a:pPr algn="r">
+              <a:lnSpc>
+                <a:spcPct val="112000"/>
+              </a:lnSpc>
+            </a:pPr>
+            <a:r>
+              <a:rPr sz="975" b="1">
+                <a:solidFill>
+                  <a:srgbClr val="8A8A8A"/>
+                </a:solidFill>
+                <a:latin typeface="Arial"/>
+                <a:ea typeface="Arial"/>
+              </a:rPr>
+              <a:t>DWPD 요구 미충족</a:t>
+            </a:r>
+          </a:p>
+        </p:txBody>
+      </p:sp>
+      <p:sp>
+        <p:nvSpPr>
+          <p:cNvPr id="93" name="TextBox 92"/>
+          <p:cNvSpPr txBox="1"/>
+          <p:nvPr/>
+        </p:nvSpPr>
+        <p:spPr>
+          <a:xfrm>
+            <a:off x="10177272" y="4818888"/>
+            <a:ext cx="3255264" cy="237744"/>
+          </a:xfrm>
+          <a:prstGeom prst="rect">
+            <a:avLst/>
+          </a:prstGeom>
+          <a:noFill/>
+        </p:spPr>
+        <p:txBody>
+          <a:bodyPr wrap="square" anchor="t" lIns="0" rIns="0" tIns="0" bIns="0">
+            <a:spAutoFit/>
+          </a:bodyPr>
+          <a:lstStyle/>
+          <a:p>
+            <a:pPr algn="l">
+              <a:lnSpc>
+                <a:spcPct val="112000"/>
+              </a:lnSpc>
+            </a:pPr>
+            <a:r>
+              <a:rPr sz="1125" b="1">
+                <a:solidFill>
+                  <a:srgbClr val="1A1A1A"/>
+                </a:solidFill>
+                <a:latin typeface="Arial"/>
+                <a:ea typeface="Arial"/>
+              </a:rPr>
+              <a:t>QoS · 성능 개선, WAF ≈ 3 · 부분 성공</a:t>
+            </a:r>
+          </a:p>
+        </p:txBody>
+      </p:sp>
+      <p:sp>
+        <p:nvSpPr>
+          <p:cNvPr id="94" name="TextBox 93"/>
+          <p:cNvSpPr txBox="1"/>
+          <p:nvPr/>
+        </p:nvSpPr>
+        <p:spPr>
+          <a:xfrm>
+            <a:off x="10177272" y="5047488"/>
+            <a:ext cx="3255264" cy="201168"/>
+          </a:xfrm>
+          <a:prstGeom prst="rect">
+            <a:avLst/>
+          </a:prstGeom>
+          <a:noFill/>
+        </p:spPr>
+        <p:txBody>
+          <a:bodyPr wrap="square" anchor="t" lIns="0" rIns="0" tIns="0" bIns="0">
+            <a:spAutoFit/>
+          </a:bodyPr>
+          <a:lstStyle/>
+          <a:p>
+            <a:pPr algn="l">
+              <a:lnSpc>
+                <a:spcPct val="112000"/>
+              </a:lnSpc>
+            </a:pPr>
+            <a:r>
+              <a:rPr sz="850" b="0">
+                <a:solidFill>
+                  <a:srgbClr val="555555"/>
+                </a:solidFill>
+                <a:latin typeface="Arial"/>
+                <a:ea typeface="Arial"/>
+              </a:rPr>
+              <a:t>'14~'19 추정 배치·스트림·IOD · SSD는 데이터 수명 감지 불가</a:t>
+            </a:r>
+          </a:p>
+        </p:txBody>
+      </p:sp>
+      <p:pic>
+        <p:nvPicPr>
+          <p:cNvPr id="95" name="Picture 94" descr="ladder_cell_dwpd.png"/>
+          <p:cNvPicPr>
+            <a:picLocks noChangeAspect="1"/>
+          </p:cNvPicPr>
+          <p:nvPr/>
+        </p:nvPicPr>
+        <p:blipFill>
+          <a:blip r:embed="rId3"/>
+          <a:stretch>
+            <a:fillRect/>
+          </a:stretch>
+        </p:blipFill>
+        <p:spPr>
+          <a:xfrm>
+            <a:off x="10291572" y="5248655"/>
+            <a:ext cx="2971800" cy="878983"/>
+          </a:xfrm>
+          <a:prstGeom prst="rect">
+            <a:avLst/>
+          </a:prstGeom>
+        </p:spPr>
+      </p:pic>
+      <p:sp>
+        <p:nvSpPr>
+          <p:cNvPr id="96" name="Rectangle 95"/>
+          <p:cNvSpPr/>
+          <p:nvPr/>
+        </p:nvSpPr>
+        <p:spPr>
+          <a:xfrm>
+            <a:off x="13889736" y="3730752"/>
+            <a:ext cx="3675888" cy="2505456"/>
+          </a:xfrm>
+          <a:prstGeom prst="rect">
+            <a:avLst/>
+          </a:prstGeom>
+          <a:solidFill>
+            <a:srgbClr val="FFFFFF"/>
+          </a:solidFill>
+          <a:ln w="19050">
+            <a:solidFill>
+              <a:srgbClr val="1428A0"/>
+            </a:solidFill>
+          </a:ln>
+          <a:effectLst/>
+        </p:spPr>
+        <p:style>
+          <a:lnRef idx="1">
+            <a:schemeClr val="accent1"/>
+          </a:lnRef>
+          <a:fillRef idx="3">
+            <a:schemeClr val="accent1"/>
+          </a:fillRef>
+          <a:effectRef idx="2">
+            <a:schemeClr val="accent1"/>
+          </a:effectRef>
+          <a:fontRef idx="minor">
+            <a:schemeClr val="lt1"/>
+          </a:fontRef>
+        </p:style>
+        <p:txBody>
+          <a:bodyPr rtlCol="0" anchor="ctr"/>
+          <a:lstStyle/>
+          <a:p>
+            <a:pPr algn="ctr"/>
+          </a:p>
+        </p:txBody>
+      </p:sp>
+      <p:sp>
+        <p:nvSpPr>
+          <p:cNvPr id="97" name="TextBox 96"/>
+          <p:cNvSpPr txBox="1"/>
+          <p:nvPr/>
+        </p:nvSpPr>
+        <p:spPr>
+          <a:xfrm>
+            <a:off x="14017752" y="3840480"/>
+            <a:ext cx="2377440" cy="182880"/>
+          </a:xfrm>
+          <a:prstGeom prst="rect">
+            <a:avLst/>
+          </a:prstGeom>
+          <a:noFill/>
+        </p:spPr>
+        <p:txBody>
+          <a:bodyPr wrap="square" anchor="t" lIns="0" rIns="0" tIns="0" bIns="0">
+            <a:spAutoFit/>
+          </a:bodyPr>
+          <a:lstStyle/>
+          <a:p>
+            <a:pPr algn="l">
+              <a:lnSpc>
+                <a:spcPct val="112000"/>
+              </a:lnSpc>
+            </a:pPr>
+            <a:r>
+              <a:rPr sz="975" b="0">
+                <a:solidFill>
+                  <a:srgbClr val="8A8A8A"/>
+                </a:solidFill>
+                <a:latin typeface="Arial"/>
+                <a:ea typeface="Arial"/>
+              </a:rPr>
+              <a:t>3단계 · 호스트 시스템 공동 설계 (2022~)</a:t>
+            </a:r>
+          </a:p>
+        </p:txBody>
+      </p:sp>
+      <p:sp>
+        <p:nvSpPr>
+          <p:cNvPr id="98" name="TextBox 97"/>
+          <p:cNvSpPr txBox="1"/>
+          <p:nvPr/>
+        </p:nvSpPr>
+        <p:spPr>
+          <a:xfrm>
+            <a:off x="16157448" y="3840480"/>
+            <a:ext cx="1280160" cy="201168"/>
+          </a:xfrm>
+          <a:prstGeom prst="rect">
+            <a:avLst/>
+          </a:prstGeom>
+          <a:noFill/>
+        </p:spPr>
+        <p:txBody>
+          <a:bodyPr wrap="square" anchor="t" lIns="0" rIns="0" tIns="0" bIns="0">
+            <a:spAutoFit/>
+          </a:bodyPr>
+          <a:lstStyle/>
+          <a:p>
+            <a:pPr algn="r">
+              <a:lnSpc>
+                <a:spcPct val="112000"/>
+              </a:lnSpc>
+            </a:pPr>
+            <a:r>
+              <a:rPr sz="975" b="1">
+                <a:solidFill>
+                  <a:srgbClr val="1428A0"/>
+                </a:solidFill>
+                <a:latin typeface="Arial"/>
+                <a:ea typeface="Arial"/>
+              </a:rPr>
+              <a:t>DWPD 요구 충족</a:t>
+            </a:r>
+          </a:p>
+        </p:txBody>
+      </p:sp>
+      <p:sp>
+        <p:nvSpPr>
+          <p:cNvPr id="99" name="TextBox 98"/>
+          <p:cNvSpPr txBox="1"/>
+          <p:nvPr/>
+        </p:nvSpPr>
+        <p:spPr>
+          <a:xfrm>
+            <a:off x="14017752" y="4041648"/>
+            <a:ext cx="3419856" cy="237744"/>
+          </a:xfrm>
+          <a:prstGeom prst="rect">
+            <a:avLst/>
+          </a:prstGeom>
+          <a:noFill/>
+        </p:spPr>
+        <p:txBody>
+          <a:bodyPr wrap="square" anchor="t" lIns="0" rIns="0" tIns="0" bIns="0">
+            <a:spAutoFit/>
+          </a:bodyPr>
+          <a:lstStyle/>
+          <a:p>
+            <a:pPr algn="l">
+              <a:lnSpc>
+                <a:spcPct val="112000"/>
+              </a:lnSpc>
+            </a:pPr>
+            <a:r>
+              <a:rPr sz="1125" b="1">
+                <a:solidFill>
+                  <a:srgbClr val="1428A0"/>
+                </a:solidFill>
+                <a:latin typeface="Arial"/>
+                <a:ea typeface="Arial"/>
+              </a:rPr>
+              <a:t>호스트가 데이터 수명을 지정 → WAF 3.2 → 1.0</a:t>
+            </a:r>
+          </a:p>
+        </p:txBody>
+      </p:sp>
+      <p:sp>
+        <p:nvSpPr>
+          <p:cNvPr id="100" name="TextBox 99"/>
+          <p:cNvSpPr txBox="1"/>
+          <p:nvPr/>
+        </p:nvSpPr>
+        <p:spPr>
+          <a:xfrm>
+            <a:off x="14017752" y="4279392"/>
+            <a:ext cx="3419856" cy="201168"/>
+          </a:xfrm>
+          <a:prstGeom prst="rect">
+            <a:avLst/>
+          </a:prstGeom>
+          <a:noFill/>
+        </p:spPr>
+        <p:txBody>
+          <a:bodyPr wrap="square" anchor="t" lIns="0" rIns="0" tIns="0" bIns="0">
+            <a:spAutoFit/>
+          </a:bodyPr>
+          <a:lstStyle/>
+          <a:p>
+            <a:pPr algn="l">
+              <a:lnSpc>
+                <a:spcPct val="112000"/>
+              </a:lnSpc>
+            </a:pPr>
+            <a:r>
+              <a:rPr sz="850" b="0">
+                <a:solidFill>
+                  <a:srgbClr val="555555"/>
+                </a:solidFill>
+                <a:latin typeface="Arial"/>
+                <a:ea typeface="Arial"/>
+              </a:rPr>
+              <a:t>배치 표준 · 캐시 관리자 정책 · FDE·SCA 공동 설계 = 본 덱 2~5장</a:t>
+            </a:r>
+          </a:p>
+        </p:txBody>
+      </p:sp>
+      <p:pic>
+        <p:nvPicPr>
+          <p:cNvPr id="101" name="Picture 100" descr="ladder_cell_waf.png"/>
+          <p:cNvPicPr>
+            <a:picLocks noChangeAspect="1"/>
+          </p:cNvPicPr>
+          <p:nvPr/>
+        </p:nvPicPr>
+        <p:blipFill>
+          <a:blip r:embed="rId4"/>
+          <a:stretch>
+            <a:fillRect/>
+          </a:stretch>
+        </p:blipFill>
+        <p:spPr>
+          <a:xfrm>
+            <a:off x="14090904" y="4535424"/>
+            <a:ext cx="3273552" cy="1198766"/>
+          </a:xfrm>
+          <a:prstGeom prst="rect">
+            <a:avLst/>
+          </a:prstGeom>
+        </p:spPr>
+      </p:pic>
+      <p:sp>
+        <p:nvSpPr>
+          <p:cNvPr id="102" name="TextBox 101"/>
+          <p:cNvSpPr txBox="1"/>
+          <p:nvPr/>
+        </p:nvSpPr>
+        <p:spPr>
+          <a:xfrm>
+            <a:off x="14017752" y="5870448"/>
+            <a:ext cx="3419856" cy="310896"/>
           </a:xfrm>
           <a:prstGeom prst="rect">
             <a:avLst/>
@@ -5608,52 +8071,12 @@
           </a:bodyPr>
           <a:lstStyle/>
           <a:p>
-            <a:pPr algn="ctr">
+            <a:pPr algn="l">
               <a:lnSpc>
                 <a:spcPct val="112000"/>
               </a:lnSpc>
             </a:pPr>
             <a:r>
-              <a:rPr sz="1350" b="1">
-                <a:solidFill>
-                  <a:srgbClr val="FFFFFF"/>
-                </a:solidFill>
-                <a:latin typeface="Arial"/>
-                <a:ea typeface="Arial"/>
-              </a:rPr>
-              <a:t>WAF</a:t>
-            </a:r>
-          </a:p>
-        </p:txBody>
-      </p:sp>
-      <p:sp>
-        <p:nvSpPr>
-          <p:cNvPr id="45" name="TextBox 44"/>
-          <p:cNvSpPr txBox="1"/>
-          <p:nvPr/>
-        </p:nvSpPr>
-        <p:spPr>
-          <a:xfrm>
-            <a:off x="14361067" y="3511296"/>
-            <a:ext cx="1115568" cy="201168"/>
-          </a:xfrm>
-          <a:prstGeom prst="rect">
-            <a:avLst/>
-          </a:prstGeom>
-          <a:noFill/>
-        </p:spPr>
-        <p:txBody>
-          <a:bodyPr wrap="square" anchor="t" lIns="0" rIns="0" tIns="0" bIns="0">
-            <a:spAutoFit/>
-          </a:bodyPr>
-          <a:lstStyle/>
-          <a:p>
-            <a:pPr algn="ctr">
-              <a:lnSpc>
-                <a:spcPct val="112000"/>
-              </a:lnSpc>
-            </a:pPr>
-            <a:r>
               <a:rPr sz="975" b="1">
                 <a:solidFill>
                   <a:srgbClr val="1428A0"/>
@@ -5661,61 +8084,21 @@
                 <a:latin typeface="Arial"/>
                 <a:ea typeface="Arial"/>
               </a:rPr>
-              <a:t>호스트 · 앱</a:t>
-            </a:r>
-          </a:p>
-        </p:txBody>
-      </p:sp>
-      <p:sp>
-        <p:nvSpPr>
-          <p:cNvPr id="46" name="TextBox 45"/>
-          <p:cNvSpPr txBox="1"/>
-          <p:nvPr/>
-        </p:nvSpPr>
-        <p:spPr>
-          <a:xfrm>
-            <a:off x="15440059" y="3054096"/>
-            <a:ext cx="237744" cy="420624"/>
-          </a:xfrm>
-          <a:prstGeom prst="rect">
-            <a:avLst/>
-          </a:prstGeom>
-          <a:noFill/>
-        </p:spPr>
-        <p:txBody>
-          <a:bodyPr wrap="square" anchor="ctr" lIns="0" rIns="0" tIns="0" bIns="0">
-            <a:spAutoFit/>
-          </a:bodyPr>
-          <a:lstStyle/>
-          <a:p>
-            <a:pPr algn="ctr">
-              <a:lnSpc>
-                <a:spcPct val="112000"/>
-              </a:lnSpc>
-            </a:pPr>
-            <a:r>
-              <a:rPr sz="1500" b="0">
-                <a:solidFill>
-                  <a:srgbClr val="555555"/>
-                </a:solidFill>
-                <a:latin typeface="Arial"/>
-                <a:ea typeface="Arial"/>
-              </a:rPr>
-              <a:t>÷</a:t>
-            </a:r>
-          </a:p>
-        </p:txBody>
-      </p:sp>
-      <p:sp>
-        <p:nvSpPr>
-          <p:cNvPr id="47" name="Rectangle 46"/>
+              <a:t>QLC로 요구 DWPD를 충족하는 유일한 경로 · 산식의 귀결</a:t>
+            </a:r>
+          </a:p>
+        </p:txBody>
+      </p:sp>
+      <p:sp>
+        <p:nvSpPr>
+          <p:cNvPr id="103" name="Rectangle 102"/>
           <p:cNvSpPr/>
           <p:nvPr/>
         </p:nvSpPr>
         <p:spPr>
           <a:xfrm>
-            <a:off x="15732667" y="3054096"/>
-            <a:ext cx="932688" cy="420624"/>
+            <a:off x="2039112" y="6345936"/>
+            <a:ext cx="3675888" cy="2139696"/>
           </a:xfrm>
           <a:prstGeom prst="rect">
             <a:avLst/>
@@ -5754,14 +8137,54 @@
       </p:sp>
       <p:sp>
         <p:nvSpPr>
-          <p:cNvPr id="48" name="TextBox 47"/>
-          <p:cNvSpPr txBox="1"/>
-          <p:nvPr/>
-        </p:nvSpPr>
-        <p:spPr>
-          <a:xfrm>
-            <a:off x="15732667" y="3054096"/>
-            <a:ext cx="932688" cy="420624"/>
+          <p:cNvPr id="104" name="TextBox 103"/>
+          <p:cNvSpPr txBox="1"/>
+          <p:nvPr/>
+        </p:nvSpPr>
+        <p:spPr>
+          <a:xfrm>
+            <a:off x="2167128" y="6473952"/>
+            <a:ext cx="3419856" cy="182880"/>
+          </a:xfrm>
+          <a:prstGeom prst="rect">
+            <a:avLst/>
+          </a:prstGeom>
+          <a:noFill/>
+        </p:spPr>
+        <p:txBody>
+          <a:bodyPr wrap="square" anchor="t" lIns="0" rIns="0" tIns="0" bIns="0">
+            <a:spAutoFit/>
+          </a:bodyPr>
+          <a:lstStyle/>
+          <a:p>
+            <a:pPr algn="l">
+              <a:lnSpc>
+                <a:spcPct val="112000"/>
+              </a:lnSpc>
+            </a:pPr>
+            <a:r>
+              <a:rPr sz="975" b="0">
+                <a:solidFill>
+                  <a:srgbClr val="8A8A8A"/>
+                </a:solidFill>
+                <a:latin typeface="Arial"/>
+                <a:ea typeface="Arial"/>
+              </a:rPr>
+              <a:t>기능 고장률 요구 · JESD218</a:t>
+            </a:r>
+          </a:p>
+        </p:txBody>
+      </p:sp>
+      <p:sp>
+        <p:nvSpPr>
+          <p:cNvPr id="105" name="TextBox 104"/>
+          <p:cNvSpPr txBox="1"/>
+          <p:nvPr/>
+        </p:nvSpPr>
+        <p:spPr>
+          <a:xfrm>
+            <a:off x="2167128" y="6711696"/>
+            <a:ext cx="3419856" cy="548640"/>
           </a:xfrm>
           <a:prstGeom prst="rect">
             <a:avLst/>
@@ -5774,74 +8197,108 @@
           </a:bodyPr>
           <a:lstStyle/>
           <a:p>
-            <a:pPr algn="ctr">
+            <a:pPr algn="l">
               <a:lnSpc>
                 <a:spcPct val="112000"/>
               </a:lnSpc>
             </a:pPr>
             <a:r>
-              <a:rPr sz="1350" b="1">
+              <a:rPr sz="3000" b="1">
+                <a:solidFill>
+                  <a:srgbClr val="1428A0"/>
+                </a:solidFill>
+                <a:latin typeface="Arial"/>
+                <a:ea typeface="Arial"/>
+              </a:rPr>
+              <a:t>FFR ≤ 3%</a:t>
+            </a:r>
+          </a:p>
+        </p:txBody>
+      </p:sp>
+      <p:sp>
+        <p:nvSpPr>
+          <p:cNvPr id="106" name="TextBox 105"/>
+          <p:cNvSpPr txBox="1"/>
+          <p:nvPr/>
+        </p:nvSpPr>
+        <p:spPr>
+          <a:xfrm>
+            <a:off x="2167128" y="7333488"/>
+            <a:ext cx="3419856" cy="822960"/>
+          </a:xfrm>
+          <a:prstGeom prst="rect">
+            <a:avLst/>
+          </a:prstGeom>
+          <a:noFill/>
+        </p:spPr>
+        <p:txBody>
+          <a:bodyPr wrap="square" anchor="t" lIns="0" rIns="0" tIns="0" bIns="0">
+            <a:spAutoFit/>
+          </a:bodyPr>
+          <a:lstStyle/>
+          <a:p>
+            <a:pPr algn="l">
+              <a:lnSpc>
+                <a:spcPct val="106000"/>
+              </a:lnSpc>
+            </a:pPr>
+            <a:r>
+              <a:rPr sz="975" b="0">
+                <a:solidFill>
+                  <a:srgbClr val="555555"/>
+                </a:solidFill>
+                <a:latin typeface="Arial"/>
+                <a:ea typeface="Arial"/>
+              </a:rPr>
+              <a:t>클라이언트 · 엔터프라이즈 공통 · 고정</a:t>
+            </a:r>
+          </a:p>
+          <a:p>
+            <a:pPr algn="l">
+              <a:lnSpc>
+                <a:spcPct val="106000"/>
+              </a:lnSpc>
+            </a:pPr>
+            <a:r>
+              <a:rPr sz="975" b="1">
                 <a:solidFill>
                   <a:srgbClr val="1A1A1A"/>
                 </a:solidFill>
                 <a:latin typeface="Arial"/>
                 <a:ea typeface="Arial"/>
               </a:rPr>
-              <a:t>365 × 년</a:t>
-            </a:r>
-          </a:p>
-        </p:txBody>
-      </p:sp>
-      <p:sp>
-        <p:nvSpPr>
-          <p:cNvPr id="49" name="TextBox 48"/>
-          <p:cNvSpPr txBox="1"/>
-          <p:nvPr/>
-        </p:nvSpPr>
-        <p:spPr>
-          <a:xfrm>
-            <a:off x="15641227" y="3511296"/>
-            <a:ext cx="1115568" cy="201168"/>
-          </a:xfrm>
-          <a:prstGeom prst="rect">
-            <a:avLst/>
-          </a:prstGeom>
-          <a:noFill/>
-        </p:spPr>
-        <p:txBody>
-          <a:bodyPr wrap="square" anchor="t" lIns="0" rIns="0" tIns="0" bIns="0">
-            <a:spAutoFit/>
-          </a:bodyPr>
-          <a:lstStyle/>
-          <a:p>
-            <a:pPr algn="ctr">
-              <a:lnSpc>
-                <a:spcPct val="112000"/>
-              </a:lnSpc>
-            </a:pPr>
-            <a:r>
-              <a:rPr sz="975" b="0">
-                <a:solidFill>
-                  <a:srgbClr val="8A8A8A"/>
-                </a:solidFill>
-                <a:latin typeface="Arial"/>
-                <a:ea typeface="Arial"/>
-              </a:rPr>
-              <a:t>고객 요구</a:t>
-            </a:r>
-          </a:p>
-        </p:txBody>
-      </p:sp>
-      <p:sp>
-        <p:nvSpPr>
-          <p:cNvPr id="50" name="Rectangle 49"/>
+              <a:t>보호 없는 SSD 고장률 ≈ N × 다이 고장률</a:t>
+            </a:r>
+          </a:p>
+          <a:p>
+            <a:pPr algn="l">
+              <a:lnSpc>
+                <a:spcPct val="106000"/>
+              </a:lnSpc>
+            </a:pPr>
+            <a:r>
+              <a:rPr sz="900" b="0">
+                <a:solidFill>
+                  <a:srgbClr val="555555"/>
+                </a:solidFill>
+                <a:latin typeface="Arial"/>
+                <a:ea typeface="Arial"/>
+              </a:rPr>
+              <a:t>칩 면적이 클수록 수율이 떨어지는 것과 같은 구조</a:t>
+            </a:r>
+          </a:p>
+        </p:txBody>
+      </p:sp>
+      <p:sp>
+        <p:nvSpPr>
+          <p:cNvPr id="107" name="Rectangle 106"/>
           <p:cNvSpPr/>
           <p:nvPr/>
         </p:nvSpPr>
         <p:spPr>
           <a:xfrm>
-            <a:off x="9711759" y="3968496"/>
-            <a:ext cx="7853864" cy="3529583"/>
+            <a:off x="5989320" y="6345936"/>
+            <a:ext cx="3675888" cy="2139696"/>
           </a:xfrm>
           <a:prstGeom prst="rect">
             <a:avLst/>
@@ -5878,16 +8335,40 @@
           </a:p>
         </p:txBody>
       </p:sp>
-      <p:sp>
-        <p:nvSpPr>
-          <p:cNvPr id="51" name="TextBox 50"/>
-          <p:cNvSpPr txBox="1"/>
-          <p:nvPr/>
-        </p:nvSpPr>
-        <p:spPr>
-          <a:xfrm>
-            <a:off x="9949503" y="4078224"/>
-            <a:ext cx="7378376" cy="256032"/>
+      <p:pic>
+        <p:nvPicPr>
+          <p:cNvPr id="108" name="Picture 107" descr="ladder_cell_dies.png"/>
+          <p:cNvPicPr>
+            <a:picLocks noChangeAspect="1"/>
+          </p:cNvPicPr>
+          <p:nvPr/>
+        </p:nvPicPr>
+        <p:blipFill>
+          <a:blip r:embed="rId5"/>
+          <a:stretch>
+            <a:fillRect/>
+          </a:stretch>
+        </p:blipFill>
+        <p:spPr>
+          <a:xfrm>
+            <a:off x="6080760" y="6437376"/>
+            <a:ext cx="3493008" cy="1433352"/>
+          </a:xfrm>
+          <a:prstGeom prst="rect">
+            <a:avLst/>
+          </a:prstGeom>
+        </p:spPr>
+      </p:pic>
+      <p:sp>
+        <p:nvSpPr>
+          <p:cNvPr id="109" name="TextBox 108"/>
+          <p:cNvSpPr txBox="1"/>
+          <p:nvPr/>
+        </p:nvSpPr>
+        <p:spPr>
+          <a:xfrm>
+            <a:off x="6117336" y="8010144"/>
+            <a:ext cx="3419856" cy="420624"/>
           </a:xfrm>
           <a:prstGeom prst="rect">
             <a:avLst/>
@@ -5902,123 +8383,41 @@
           <a:p>
             <a:pPr algn="l">
               <a:lnSpc>
-                <a:spcPct val="112000"/>
-              </a:lnSpc>
-            </a:pPr>
-            <a:r>
-              <a:rPr sz="1500" b="1">
-                <a:solidFill>
-                  <a:srgbClr val="1428A0"/>
-                </a:solidFill>
-                <a:latin typeface="Arial"/>
-                <a:ea typeface="Arial"/>
-              </a:rPr>
-              <a:t>이관의 3단계 — 요구 고정 · 단품 지표 악화 · 보상 계층의 상승</a:t>
-            </a:r>
-          </a:p>
-        </p:txBody>
-      </p:sp>
-      <p:sp>
-        <p:nvSpPr>
-          <p:cNvPr id="52" name="TextBox 51"/>
-          <p:cNvSpPr txBox="1"/>
-          <p:nvPr/>
-        </p:nvSpPr>
-        <p:spPr>
-          <a:xfrm>
-            <a:off x="9949503" y="4425696"/>
-            <a:ext cx="5000936" cy="219456"/>
-          </a:xfrm>
-          <a:prstGeom prst="rect">
-            <a:avLst/>
-          </a:prstGeom>
-          <a:noFill/>
-        </p:spPr>
-        <p:txBody>
-          <a:bodyPr wrap="square" anchor="t" lIns="0" rIns="0" tIns="0" bIns="0">
-            <a:spAutoFit/>
-          </a:bodyPr>
-          <a:lstStyle/>
-          <a:p>
-            <a:pPr algn="l">
-              <a:lnSpc>
-                <a:spcPct val="112000"/>
-              </a:lnSpc>
-            </a:pPr>
-            <a:r>
-              <a:rPr sz="1125" b="1">
-                <a:solidFill>
-                  <a:srgbClr val="1A1A1A"/>
-                </a:solidFill>
-                <a:latin typeface="Arial"/>
-                <a:ea typeface="Arial"/>
-              </a:rPr>
-              <a:t>1단계  NAND → SSD  (1991~)</a:t>
-            </a:r>
-          </a:p>
-        </p:txBody>
-      </p:sp>
-      <p:sp>
-        <p:nvSpPr>
-          <p:cNvPr id="53" name="TextBox 52"/>
-          <p:cNvSpPr txBox="1"/>
-          <p:nvPr/>
-        </p:nvSpPr>
-        <p:spPr>
-          <a:xfrm>
-            <a:off x="14950439" y="4425696"/>
-            <a:ext cx="2377440" cy="219456"/>
-          </a:xfrm>
-          <a:prstGeom prst="rect">
-            <a:avLst/>
-          </a:prstGeom>
-          <a:noFill/>
-        </p:spPr>
-        <p:txBody>
-          <a:bodyPr wrap="square" anchor="t" lIns="0" rIns="0" tIns="0" bIns="0">
-            <a:spAutoFit/>
-          </a:bodyPr>
-          <a:lstStyle/>
-          <a:p>
-            <a:pPr algn="r">
-              <a:lnSpc>
-                <a:spcPct val="112000"/>
-              </a:lnSpc>
-            </a:pPr>
-            <a:r>
-              <a:rPr sz="1050" b="1">
-                <a:solidFill>
-                  <a:srgbClr val="1428A0"/>
-                </a:solidFill>
-                <a:latin typeface="Arial"/>
-                <a:ea typeface="Arial"/>
-              </a:rPr>
-              <a:t>UBER 요구 충족</a:t>
-            </a:r>
-          </a:p>
-        </p:txBody>
-      </p:sp>
-      <p:sp>
-        <p:nvSpPr>
-          <p:cNvPr id="54" name="Rectangle 53"/>
+                <a:spcPct val="100000"/>
+              </a:lnSpc>
+            </a:pPr>
+            <a:r>
+              <a:rPr sz="850" b="0">
+                <a:solidFill>
+                  <a:srgbClr val="555555"/>
+                </a:solidFill>
+                <a:latin typeface="Arial"/>
+                <a:ea typeface="Arial"/>
+              </a:rPr>
+              <a:t>다이 수 8배 ↑ → 같은 FFR을 지키려면 다이 고장률 8배 ↓ 또는 다이 고장 허용 필요 · 다이 고장률 개선은 기술적 한계</a:t>
+            </a:r>
+          </a:p>
+        </p:txBody>
+      </p:sp>
+      <p:sp>
+        <p:nvSpPr>
+          <p:cNvPr id="110" name="Rectangle 109"/>
           <p:cNvSpPr/>
           <p:nvPr/>
         </p:nvSpPr>
         <p:spPr>
           <a:xfrm>
-            <a:off x="9949503" y="4700016"/>
-            <a:ext cx="2252194" cy="676656"/>
+            <a:off x="9939528" y="6345936"/>
+            <a:ext cx="3675888" cy="2139696"/>
           </a:xfrm>
           <a:prstGeom prst="rect">
             <a:avLst/>
           </a:prstGeom>
           <a:solidFill>
-            <a:srgbClr val="FFFFFF"/>
+            <a:srgbClr val="AAB8E8"/>
           </a:solidFill>
-          <a:ln w="9525">
-            <a:solidFill>
-              <a:srgbClr val="D9D9D9"/>
-            </a:solidFill>
+          <a:ln>
+            <a:noFill/>
           </a:ln>
           <a:effectLst/>
         </p:spPr>
@@ -6046,14 +8445,14 @@
       </p:sp>
       <p:sp>
         <p:nvSpPr>
-          <p:cNvPr id="55" name="TextBox 54"/>
-          <p:cNvSpPr txBox="1"/>
-          <p:nvPr/>
-        </p:nvSpPr>
-        <p:spPr>
-          <a:xfrm>
-            <a:off x="10040943" y="4754879"/>
-            <a:ext cx="2069314" cy="201168"/>
+          <p:cNvPr id="111" name="TextBox 110"/>
+          <p:cNvSpPr txBox="1"/>
+          <p:nvPr/>
+        </p:nvSpPr>
+        <p:spPr>
+          <a:xfrm>
+            <a:off x="10067544" y="6455664"/>
+            <a:ext cx="2377440" cy="182880"/>
           </a:xfrm>
           <a:prstGeom prst="rect">
             <a:avLst/>
@@ -6074,26 +8473,66 @@
             <a:r>
               <a:rPr sz="975" b="0">
                 <a:solidFill>
+                  <a:srgbClr val="1A1A1A"/>
+                </a:solidFill>
+                <a:latin typeface="Arial"/>
+                <a:ea typeface="Arial"/>
+              </a:rPr>
+              <a:t>현재 해법 · SSD 내부</a:t>
+            </a:r>
+          </a:p>
+        </p:txBody>
+      </p:sp>
+      <p:sp>
+        <p:nvSpPr>
+          <p:cNvPr id="112" name="TextBox 111"/>
+          <p:cNvSpPr txBox="1"/>
+          <p:nvPr/>
+        </p:nvSpPr>
+        <p:spPr>
+          <a:xfrm>
+            <a:off x="12207240" y="6455664"/>
+            <a:ext cx="1280160" cy="201168"/>
+          </a:xfrm>
+          <a:prstGeom prst="rect">
+            <a:avLst/>
+          </a:prstGeom>
+          <a:noFill/>
+        </p:spPr>
+        <p:txBody>
+          <a:bodyPr wrap="square" anchor="t" lIns="0" rIns="0" tIns="0" bIns="0">
+            <a:spAutoFit/>
+          </a:bodyPr>
+          <a:lstStyle/>
+          <a:p>
+            <a:pPr algn="r">
+              <a:lnSpc>
+                <a:spcPct val="112000"/>
+              </a:lnSpc>
+            </a:pPr>
+            <a:r>
+              <a:rPr sz="975" b="1">
+                <a:solidFill>
                   <a:srgbClr val="8A8A8A"/>
                 </a:solidFill>
                 <a:latin typeface="Arial"/>
                 <a:ea typeface="Arial"/>
               </a:rPr>
-              <a:t>셀</a:t>
-            </a:r>
-          </a:p>
-        </p:txBody>
-      </p:sp>
-      <p:sp>
-        <p:nvSpPr>
-          <p:cNvPr id="56" name="TextBox 55"/>
-          <p:cNvSpPr txBox="1"/>
-          <p:nvPr/>
-        </p:nvSpPr>
-        <p:spPr>
-          <a:xfrm>
-            <a:off x="10040943" y="4946904"/>
-            <a:ext cx="2069314" cy="237744"/>
+              <a:t>오버헤드 ↑</a:t>
+            </a:r>
+          </a:p>
+        </p:txBody>
+      </p:sp>
+      <p:sp>
+        <p:nvSpPr>
+          <p:cNvPr id="113" name="TextBox 112"/>
+          <p:cNvSpPr txBox="1"/>
+          <p:nvPr/>
+        </p:nvSpPr>
+        <p:spPr>
+          <a:xfrm>
+            <a:off x="10067544" y="6675120"/>
+            <a:ext cx="3419856" cy="237744"/>
           </a:xfrm>
           <a:prstGeom prst="rect">
             <a:avLst/>
@@ -6112,70 +8551,30 @@
               </a:lnSpc>
             </a:pPr>
             <a:r>
-              <a:rPr sz="1200" b="1">
+              <a:rPr sz="1275" b="1">
                 <a:solidFill>
                   <a:srgbClr val="1A1A1A"/>
                 </a:solidFill>
                 <a:latin typeface="Arial"/>
                 <a:ea typeface="Arial"/>
               </a:rPr>
-              <a:t>RBER 백만 배 ↑</a:t>
-            </a:r>
-          </a:p>
-        </p:txBody>
-      </p:sp>
-      <p:sp>
-        <p:nvSpPr>
-          <p:cNvPr id="57" name="TextBox 56"/>
-          <p:cNvSpPr txBox="1"/>
-          <p:nvPr/>
-        </p:nvSpPr>
-        <p:spPr>
-          <a:xfrm>
-            <a:off x="10040943" y="5157216"/>
-            <a:ext cx="2069314" cy="201168"/>
-          </a:xfrm>
-          <a:prstGeom prst="rect">
-            <a:avLst/>
-          </a:prstGeom>
-          <a:noFill/>
-        </p:spPr>
-        <p:txBody>
-          <a:bodyPr wrap="square" anchor="t" lIns="0" rIns="0" tIns="0" bIns="0">
-            <a:spAutoFit/>
-          </a:bodyPr>
-          <a:lstStyle/>
-          <a:p>
-            <a:pPr algn="l">
-              <a:lnSpc>
-                <a:spcPct val="100000"/>
-              </a:lnSpc>
-            </a:pPr>
-            <a:r>
-              <a:rPr sz="875" b="0">
-                <a:solidFill>
-                  <a:srgbClr val="555555"/>
-                </a:solidFill>
-                <a:latin typeface="Arial"/>
-                <a:ea typeface="Arial"/>
-              </a:rPr>
-              <a:t>산포가 시간에 따라 변화</a:t>
-            </a:r>
-          </a:p>
-        </p:txBody>
-      </p:sp>
-      <p:sp>
-        <p:nvSpPr>
-          <p:cNvPr id="58" name="Right Arrow 57"/>
+              <a:t>다이 RAID · 여분 다이 · 다이 은퇴</a:t>
+            </a:r>
+          </a:p>
+        </p:txBody>
+      </p:sp>
+      <p:sp>
+        <p:nvSpPr>
+          <p:cNvPr id="114" name="Rectangle 113"/>
           <p:cNvSpPr/>
           <p:nvPr/>
         </p:nvSpPr>
         <p:spPr>
           <a:xfrm>
-            <a:off x="12247418" y="4946904"/>
-            <a:ext cx="219456" cy="182880"/>
-          </a:xfrm>
-          <a:prstGeom prst="rightArrow">
+            <a:off x="10067544" y="7077456"/>
+            <a:ext cx="109728" cy="109728"/>
+          </a:xfrm>
+          <a:prstGeom prst="rect">
             <a:avLst/>
           </a:prstGeom>
           <a:solidFill>
@@ -6210,14 +8609,64 @@
       </p:sp>
       <p:sp>
         <p:nvSpPr>
-          <p:cNvPr id="59" name="Rectangle 58"/>
+          <p:cNvPr id="115" name="TextBox 114"/>
+          <p:cNvSpPr txBox="1"/>
+          <p:nvPr/>
+        </p:nvSpPr>
+        <p:spPr>
+          <a:xfrm>
+            <a:off x="10268712" y="7004304"/>
+            <a:ext cx="3218688" cy="384048"/>
+          </a:xfrm>
+          <a:prstGeom prst="rect">
+            <a:avLst/>
+          </a:prstGeom>
+          <a:noFill/>
+        </p:spPr>
+        <p:txBody>
+          <a:bodyPr wrap="square" anchor="t" lIns="0" rIns="0" tIns="0" bIns="0">
+            <a:spAutoFit/>
+          </a:bodyPr>
+          <a:lstStyle/>
+          <a:p>
+            <a:pPr algn="l">
+              <a:lnSpc>
+                <a:spcPct val="100000"/>
+              </a:lnSpc>
+            </a:pPr>
+            <a:r>
+              <a:rPr sz="975" b="1">
+                <a:solidFill>
+                  <a:srgbClr val="1A1A1A"/>
+                </a:solidFill>
+                <a:latin typeface="Arial"/>
+                <a:ea typeface="Arial"/>
+              </a:rPr>
+              <a:t>다이 패리티  </a:t>
+            </a:r>
+            <a:r>
+              <a:rPr sz="900" b="0">
+                <a:solidFill>
+                  <a:srgbClr val="555555"/>
+                </a:solidFill>
+                <a:latin typeface="Arial"/>
+                <a:ea typeface="Arial"/>
+              </a:rPr>
+              <a:t>슈퍼페이지 XOR 패리티 다이 (Micron RAIN)</a:t>
+            </a:r>
+          </a:p>
+        </p:txBody>
+      </p:sp>
+      <p:sp>
+        <p:nvSpPr>
+          <p:cNvPr id="116" name="Rectangle 115"/>
           <p:cNvSpPr/>
           <p:nvPr/>
         </p:nvSpPr>
         <p:spPr>
           <a:xfrm>
-            <a:off x="12512594" y="4700016"/>
-            <a:ext cx="2252194" cy="676656"/>
+            <a:off x="10067544" y="7534656"/>
+            <a:ext cx="109728" cy="109728"/>
           </a:xfrm>
           <a:prstGeom prst="rect">
             <a:avLst/>
@@ -6254,14 +8703,14 @@
       </p:sp>
       <p:sp>
         <p:nvSpPr>
-          <p:cNvPr id="60" name="TextBox 59"/>
-          <p:cNvSpPr txBox="1"/>
-          <p:nvPr/>
-        </p:nvSpPr>
-        <p:spPr>
-          <a:xfrm>
-            <a:off x="12604034" y="4754879"/>
-            <a:ext cx="2069314" cy="201168"/>
+          <p:cNvPr id="117" name="TextBox 116"/>
+          <p:cNvSpPr txBox="1"/>
+          <p:nvPr/>
+        </p:nvSpPr>
+        <p:spPr>
+          <a:xfrm>
+            <a:off x="10268712" y="7461504"/>
+            <a:ext cx="3218688" cy="384048"/>
           </a:xfrm>
           <a:prstGeom prst="rect">
             <a:avLst/>
@@ -6276,114 +8725,44 @@
           <a:p>
             <a:pPr algn="l">
               <a:lnSpc>
-                <a:spcPct val="112000"/>
-              </a:lnSpc>
-            </a:pPr>
-            <a:r>
-              <a:rPr sz="975" b="0">
-                <a:solidFill>
-                  <a:srgbClr val="FFFFFF"/>
-                </a:solidFill>
-                <a:latin typeface="Arial"/>
-                <a:ea typeface="Arial"/>
-              </a:rPr>
-              <a:t>컨트롤러</a:t>
-            </a:r>
-          </a:p>
-        </p:txBody>
-      </p:sp>
-      <p:sp>
-        <p:nvSpPr>
-          <p:cNvPr id="61" name="TextBox 60"/>
-          <p:cNvSpPr txBox="1"/>
-          <p:nvPr/>
-        </p:nvSpPr>
-        <p:spPr>
-          <a:xfrm>
-            <a:off x="12604034" y="4946904"/>
-            <a:ext cx="2069314" cy="237744"/>
-          </a:xfrm>
-          <a:prstGeom prst="rect">
-            <a:avLst/>
-          </a:prstGeom>
-          <a:noFill/>
-        </p:spPr>
-        <p:txBody>
-          <a:bodyPr wrap="square" anchor="t" lIns="0" rIns="0" tIns="0" bIns="0">
-            <a:spAutoFit/>
-          </a:bodyPr>
-          <a:lstStyle/>
-          <a:p>
-            <a:pPr algn="l">
-              <a:lnSpc>
-                <a:spcPct val="112000"/>
-              </a:lnSpc>
-            </a:pPr>
-            <a:r>
-              <a:rPr sz="1200" b="1">
-                <a:solidFill>
-                  <a:srgbClr val="FFFFFF"/>
-                </a:solidFill>
-                <a:latin typeface="Arial"/>
-                <a:ea typeface="Arial"/>
-              </a:rPr>
-              <a:t>ECC 60배 ↑</a:t>
-            </a:r>
-          </a:p>
-        </p:txBody>
-      </p:sp>
-      <p:sp>
-        <p:nvSpPr>
-          <p:cNvPr id="62" name="TextBox 61"/>
-          <p:cNvSpPr txBox="1"/>
-          <p:nvPr/>
-        </p:nvSpPr>
-        <p:spPr>
-          <a:xfrm>
-            <a:off x="12604034" y="5157216"/>
-            <a:ext cx="2069314" cy="201168"/>
-          </a:xfrm>
-          <a:prstGeom prst="rect">
-            <a:avLst/>
-          </a:prstGeom>
-          <a:noFill/>
-        </p:spPr>
-        <p:txBody>
-          <a:bodyPr wrap="square" anchor="t" lIns="0" rIns="0" tIns="0" bIns="0">
-            <a:spAutoFit/>
-          </a:bodyPr>
-          <a:lstStyle/>
-          <a:p>
-            <a:pPr algn="l">
-              <a:lnSpc>
                 <a:spcPct val="100000"/>
               </a:lnSpc>
             </a:pPr>
             <a:r>
-              <a:rPr sz="875" b="0">
-                <a:solidFill>
-                  <a:srgbClr val="FFFFFF"/>
-                </a:solidFill>
-                <a:latin typeface="Arial"/>
-                <a:ea typeface="Arial"/>
-              </a:rPr>
-              <a:t>1bit/512B → LDPC 120bit/KB</a:t>
-            </a:r>
-          </a:p>
-        </p:txBody>
-      </p:sp>
-      <p:sp>
-        <p:nvSpPr>
-          <p:cNvPr id="63" name="Right Arrow 62"/>
+              <a:rPr sz="975" b="1">
+                <a:solidFill>
+                  <a:srgbClr val="1A1A1A"/>
+                </a:solidFill>
+                <a:latin typeface="Arial"/>
+                <a:ea typeface="Arial"/>
+              </a:rPr>
+              <a:t>여분 다이 · 은퇴  </a:t>
+            </a:r>
+            <a:r>
+              <a:rPr sz="900" b="0">
+                <a:solidFill>
+                  <a:srgbClr val="555555"/>
+                </a:solidFill>
+                <a:latin typeface="Arial"/>
+                <a:ea typeface="Arial"/>
+              </a:rPr>
+              <a:t>삼성 Fail-in-Place(PM1733): 고장 다이 제외, 4~8GB 감량 운영</a:t>
+            </a:r>
+          </a:p>
+        </p:txBody>
+      </p:sp>
+      <p:sp>
+        <p:nvSpPr>
+          <p:cNvPr id="118" name="Rectangle 117"/>
           <p:cNvSpPr/>
           <p:nvPr/>
         </p:nvSpPr>
         <p:spPr>
           <a:xfrm>
-            <a:off x="14810509" y="4946904"/>
-            <a:ext cx="219456" cy="182880"/>
-          </a:xfrm>
-          <a:prstGeom prst="rightArrow">
+            <a:off x="10067544" y="7991856"/>
+            <a:ext cx="109728" cy="109728"/>
+          </a:xfrm>
+          <a:prstGeom prst="rect">
             <a:avLst/>
           </a:prstGeom>
           <a:solidFill>
@@ -6418,60 +8797,14 @@
       </p:sp>
       <p:sp>
         <p:nvSpPr>
-          <p:cNvPr id="64" name="Rectangle 63"/>
-          <p:cNvSpPr/>
-          <p:nvPr/>
-        </p:nvSpPr>
-        <p:spPr>
-          <a:xfrm>
-            <a:off x="15075685" y="4700016"/>
-            <a:ext cx="2252194" cy="676656"/>
-          </a:xfrm>
-          <a:prstGeom prst="rect">
-            <a:avLst/>
-          </a:prstGeom>
-          <a:solidFill>
-            <a:srgbClr val="F4F6FC"/>
-          </a:solidFill>
-          <a:ln w="12700">
-            <a:solidFill>
-              <a:srgbClr val="AAB8E8"/>
-            </a:solidFill>
-          </a:ln>
-          <a:effectLst/>
-        </p:spPr>
-        <p:style>
-          <a:lnRef idx="1">
-            <a:schemeClr val="accent1"/>
-          </a:lnRef>
-          <a:fillRef idx="3">
-            <a:schemeClr val="accent1"/>
-          </a:fillRef>
-          <a:effectRef idx="2">
-            <a:schemeClr val="accent1"/>
-          </a:effectRef>
-          <a:fontRef idx="minor">
-            <a:schemeClr val="lt1"/>
-          </a:fontRef>
-        </p:style>
-        <p:txBody>
-          <a:bodyPr rtlCol="0" anchor="ctr"/>
-          <a:lstStyle/>
-          <a:p>
-            <a:pPr algn="ctr"/>
-          </a:p>
-        </p:txBody>
-      </p:sp>
-      <p:sp>
-        <p:nvSpPr>
-          <p:cNvPr id="65" name="TextBox 64"/>
-          <p:cNvSpPr txBox="1"/>
-          <p:nvPr/>
-        </p:nvSpPr>
-        <p:spPr>
-          <a:xfrm>
-            <a:off x="15167125" y="4754879"/>
-            <a:ext cx="2069314" cy="201168"/>
+          <p:cNvPr id="119" name="TextBox 118"/>
+          <p:cNvSpPr txBox="1"/>
+          <p:nvPr/>
+        </p:nvSpPr>
+        <p:spPr>
+          <a:xfrm>
+            <a:off x="10268712" y="7918704"/>
+            <a:ext cx="3218688" cy="384048"/>
           </a:xfrm>
           <a:prstGeom prst="rect">
             <a:avLst/>
@@ -6486,2284 +8819,29 @@
           <a:p>
             <a:pPr algn="l">
               <a:lnSpc>
-                <a:spcPct val="112000"/>
-              </a:lnSpc>
-            </a:pPr>
-            <a:r>
-              <a:rPr sz="975" b="0">
-                <a:solidFill>
-                  <a:srgbClr val="8A8A8A"/>
-                </a:solidFill>
-                <a:latin typeface="Arial"/>
-                <a:ea typeface="Arial"/>
-              </a:rPr>
-              <a:t>고객</a:t>
-            </a:r>
-          </a:p>
-        </p:txBody>
-      </p:sp>
-      <p:sp>
-        <p:nvSpPr>
-          <p:cNvPr id="66" name="TextBox 65"/>
-          <p:cNvSpPr txBox="1"/>
-          <p:nvPr/>
-        </p:nvSpPr>
-        <p:spPr>
-          <a:xfrm>
-            <a:off x="15167125" y="4946904"/>
-            <a:ext cx="2069314" cy="237744"/>
-          </a:xfrm>
-          <a:prstGeom prst="rect">
-            <a:avLst/>
-          </a:prstGeom>
-          <a:noFill/>
-        </p:spPr>
-        <p:txBody>
-          <a:bodyPr wrap="square" anchor="t" lIns="0" rIns="0" tIns="0" bIns="0">
-            <a:spAutoFit/>
-          </a:bodyPr>
-          <a:lstStyle/>
-          <a:p>
-            <a:pPr algn="l">
-              <a:lnSpc>
-                <a:spcPct val="112000"/>
-              </a:lnSpc>
-            </a:pPr>
-            <a:r>
-              <a:rPr sz="1200" b="1">
+                <a:spcPct val="100000"/>
+              </a:lnSpc>
+            </a:pPr>
+            <a:r>
+              <a:rPr sz="975" b="1">
                 <a:solidFill>
                   <a:srgbClr val="1A1A1A"/>
                 </a:solidFill>
                 <a:latin typeface="Arial"/>
                 <a:ea typeface="Arial"/>
               </a:rPr>
-              <a:t>UBER 요구 충족</a:t>
-            </a:r>
-          </a:p>
-        </p:txBody>
-      </p:sp>
-      <p:sp>
-        <p:nvSpPr>
-          <p:cNvPr id="67" name="TextBox 66"/>
-          <p:cNvSpPr txBox="1"/>
-          <p:nvPr/>
-        </p:nvSpPr>
-        <p:spPr>
-          <a:xfrm>
-            <a:off x="15167125" y="5157216"/>
-            <a:ext cx="2069314" cy="201168"/>
-          </a:xfrm>
-          <a:prstGeom prst="rect">
-            <a:avLst/>
-          </a:prstGeom>
-          <a:noFill/>
-        </p:spPr>
-        <p:txBody>
-          <a:bodyPr wrap="square" anchor="t" lIns="0" rIns="0" tIns="0" bIns="0">
-            <a:spAutoFit/>
-          </a:bodyPr>
-          <a:lstStyle/>
-          <a:p>
-            <a:pPr algn="l">
-              <a:lnSpc>
-                <a:spcPct val="100000"/>
-              </a:lnSpc>
-            </a:pPr>
-            <a:r>
-              <a:rPr sz="875" b="0">
+              <a:t>비용  </a:t>
+            </a:r>
+            <a:r>
+              <a:rPr sz="900" b="0">
                 <a:solidFill>
                   <a:srgbClr val="555555"/>
                 </a:solidFill>
                 <a:latin typeface="Arial"/>
                 <a:ea typeface="Arial"/>
               </a:rPr>
-              <a:t>JESD218 유지</a:t>
-            </a:r>
-          </a:p>
-        </p:txBody>
-      </p:sp>
-      <p:sp>
-        <p:nvSpPr>
-          <p:cNvPr id="68" name="TextBox 67"/>
-          <p:cNvSpPr txBox="1"/>
-          <p:nvPr/>
-        </p:nvSpPr>
-        <p:spPr>
-          <a:xfrm>
-            <a:off x="9949503" y="5495544"/>
-            <a:ext cx="5000936" cy="219456"/>
-          </a:xfrm>
-          <a:prstGeom prst="rect">
-            <a:avLst/>
-          </a:prstGeom>
-          <a:noFill/>
-        </p:spPr>
-        <p:txBody>
-          <a:bodyPr wrap="square" anchor="t" lIns="0" rIns="0" tIns="0" bIns="0">
-            <a:spAutoFit/>
-          </a:bodyPr>
-          <a:lstStyle/>
-          <a:p>
-            <a:pPr algn="l">
-              <a:lnSpc>
-                <a:spcPct val="112000"/>
-              </a:lnSpc>
-            </a:pPr>
-            <a:r>
-              <a:rPr sz="1125" b="1">
-                <a:solidFill>
-                  <a:srgbClr val="1A1A1A"/>
-                </a:solidFill>
-                <a:latin typeface="Arial"/>
-                <a:ea typeface="Arial"/>
-              </a:rPr>
-              <a:t>2단계  SSD 단독 워크로드 최적화  (2014~2019)</a:t>
-            </a:r>
-          </a:p>
-        </p:txBody>
-      </p:sp>
-      <p:sp>
-        <p:nvSpPr>
-          <p:cNvPr id="69" name="TextBox 68"/>
-          <p:cNvSpPr txBox="1"/>
-          <p:nvPr/>
-        </p:nvSpPr>
-        <p:spPr>
-          <a:xfrm>
-            <a:off x="14950439" y="5495544"/>
-            <a:ext cx="2377440" cy="219456"/>
-          </a:xfrm>
-          <a:prstGeom prst="rect">
-            <a:avLst/>
-          </a:prstGeom>
-          <a:noFill/>
-        </p:spPr>
-        <p:txBody>
-          <a:bodyPr wrap="square" anchor="t" lIns="0" rIns="0" tIns="0" bIns="0">
-            <a:spAutoFit/>
-          </a:bodyPr>
-          <a:lstStyle/>
-          <a:p>
-            <a:pPr algn="r">
-              <a:lnSpc>
-                <a:spcPct val="112000"/>
-              </a:lnSpc>
-            </a:pPr>
-            <a:r>
-              <a:rPr sz="1050" b="1">
-                <a:solidFill>
-                  <a:srgbClr val="8A8A8A"/>
-                </a:solidFill>
-                <a:latin typeface="Arial"/>
-                <a:ea typeface="Arial"/>
-              </a:rPr>
-              <a:t>DWPD 요구 미충족 · 부분 성공</a:t>
-            </a:r>
-          </a:p>
-        </p:txBody>
-      </p:sp>
-      <p:sp>
-        <p:nvSpPr>
-          <p:cNvPr id="70" name="Rectangle 69"/>
-          <p:cNvSpPr/>
-          <p:nvPr/>
-        </p:nvSpPr>
-        <p:spPr>
-          <a:xfrm>
-            <a:off x="9949503" y="5769864"/>
-            <a:ext cx="2252194" cy="676656"/>
-          </a:xfrm>
-          <a:prstGeom prst="rect">
-            <a:avLst/>
-          </a:prstGeom>
-          <a:solidFill>
-            <a:srgbClr val="FFFFFF"/>
-          </a:solidFill>
-          <a:ln w="9525">
-            <a:solidFill>
-              <a:srgbClr val="D9D9D9"/>
-            </a:solidFill>
-          </a:ln>
-          <a:effectLst/>
-        </p:spPr>
-        <p:style>
-          <a:lnRef idx="1">
-            <a:schemeClr val="accent1"/>
-          </a:lnRef>
-          <a:fillRef idx="3">
-            <a:schemeClr val="accent1"/>
-          </a:fillRef>
-          <a:effectRef idx="2">
-            <a:schemeClr val="accent1"/>
-          </a:effectRef>
-          <a:fontRef idx="minor">
-            <a:schemeClr val="lt1"/>
-          </a:fontRef>
-        </p:style>
-        <p:txBody>
-          <a:bodyPr rtlCol="0" anchor="ctr"/>
-          <a:lstStyle/>
-          <a:p>
-            <a:pPr algn="ctr"/>
-          </a:p>
-        </p:txBody>
-      </p:sp>
-      <p:sp>
-        <p:nvSpPr>
-          <p:cNvPr id="71" name="TextBox 70"/>
-          <p:cNvSpPr txBox="1"/>
-          <p:nvPr/>
-        </p:nvSpPr>
-        <p:spPr>
-          <a:xfrm>
-            <a:off x="10040943" y="5824727"/>
-            <a:ext cx="2069314" cy="201168"/>
-          </a:xfrm>
-          <a:prstGeom prst="rect">
-            <a:avLst/>
-          </a:prstGeom>
-          <a:noFill/>
-        </p:spPr>
-        <p:txBody>
-          <a:bodyPr wrap="square" anchor="t" lIns="0" rIns="0" tIns="0" bIns="0">
-            <a:spAutoFit/>
-          </a:bodyPr>
-          <a:lstStyle/>
-          <a:p>
-            <a:pPr algn="l">
-              <a:lnSpc>
-                <a:spcPct val="112000"/>
-              </a:lnSpc>
-            </a:pPr>
-            <a:r>
-              <a:rPr sz="975" b="0">
-                <a:solidFill>
-                  <a:srgbClr val="8A8A8A"/>
-                </a:solidFill>
-                <a:latin typeface="Arial"/>
-                <a:ea typeface="Arial"/>
-              </a:rPr>
-              <a:t>셀 · SSD</a:t>
-            </a:r>
-          </a:p>
-        </p:txBody>
-      </p:sp>
-      <p:sp>
-        <p:nvSpPr>
-          <p:cNvPr id="72" name="TextBox 71"/>
-          <p:cNvSpPr txBox="1"/>
-          <p:nvPr/>
-        </p:nvSpPr>
-        <p:spPr>
-          <a:xfrm>
-            <a:off x="10040943" y="6016752"/>
-            <a:ext cx="2069314" cy="237744"/>
-          </a:xfrm>
-          <a:prstGeom prst="rect">
-            <a:avLst/>
-          </a:prstGeom>
-          <a:noFill/>
-        </p:spPr>
-        <p:txBody>
-          <a:bodyPr wrap="square" anchor="t" lIns="0" rIns="0" tIns="0" bIns="0">
-            <a:spAutoFit/>
-          </a:bodyPr>
-          <a:lstStyle/>
-          <a:p>
-            <a:pPr algn="l">
-              <a:lnSpc>
-                <a:spcPct val="112000"/>
-              </a:lnSpc>
-            </a:pPr>
-            <a:r>
-              <a:rPr sz="1200" b="1">
-                <a:solidFill>
-                  <a:srgbClr val="1A1A1A"/>
-                </a:solidFill>
-                <a:latin typeface="Arial"/>
-                <a:ea typeface="Arial"/>
-              </a:rPr>
-              <a:t>P/E 100배 ↓</a:t>
-            </a:r>
-          </a:p>
-        </p:txBody>
-      </p:sp>
-      <p:sp>
-        <p:nvSpPr>
-          <p:cNvPr id="73" name="TextBox 72"/>
-          <p:cNvSpPr txBox="1"/>
-          <p:nvPr/>
-        </p:nvSpPr>
-        <p:spPr>
-          <a:xfrm>
-            <a:off x="10040943" y="6227064"/>
-            <a:ext cx="2069314" cy="201168"/>
-          </a:xfrm>
-          <a:prstGeom prst="rect">
-            <a:avLst/>
-          </a:prstGeom>
-          <a:noFill/>
-        </p:spPr>
-        <p:txBody>
-          <a:bodyPr wrap="square" anchor="t" lIns="0" rIns="0" tIns="0" bIns="0">
-            <a:spAutoFit/>
-          </a:bodyPr>
-          <a:lstStyle/>
-          <a:p>
-            <a:pPr algn="l">
-              <a:lnSpc>
-                <a:spcPct val="100000"/>
-              </a:lnSpc>
-            </a:pPr>
-            <a:r>
-              <a:rPr sz="875" b="0">
-                <a:solidFill>
-                  <a:srgbClr val="555555"/>
-                </a:solidFill>
-                <a:latin typeface="Arial"/>
-                <a:ea typeface="Arial"/>
-              </a:rPr>
-              <a:t>정격 DWPD 0.4</a:t>
-            </a:r>
-          </a:p>
-        </p:txBody>
-      </p:sp>
-      <p:sp>
-        <p:nvSpPr>
-          <p:cNvPr id="74" name="Right Arrow 73"/>
-          <p:cNvSpPr/>
-          <p:nvPr/>
-        </p:nvSpPr>
-        <p:spPr>
-          <a:xfrm>
-            <a:off x="12247418" y="6016752"/>
-            <a:ext cx="219456" cy="182880"/>
-          </a:xfrm>
-          <a:prstGeom prst="rightArrow">
-            <a:avLst/>
-          </a:prstGeom>
-          <a:solidFill>
-            <a:srgbClr val="1428A0"/>
-          </a:solidFill>
-          <a:ln>
-            <a:noFill/>
-          </a:ln>
-          <a:effectLst/>
-        </p:spPr>
-        <p:style>
-          <a:lnRef idx="1">
-            <a:schemeClr val="accent1"/>
-          </a:lnRef>
-          <a:fillRef idx="3">
-            <a:schemeClr val="accent1"/>
-          </a:fillRef>
-          <a:effectRef idx="2">
-            <a:schemeClr val="accent1"/>
-          </a:effectRef>
-          <a:fontRef idx="minor">
-            <a:schemeClr val="lt1"/>
-          </a:fontRef>
-        </p:style>
-        <p:txBody>
-          <a:bodyPr rtlCol="0" anchor="ctr"/>
-          <a:lstStyle/>
-          <a:p>
-            <a:pPr algn="ctr"/>
-          </a:p>
-        </p:txBody>
-      </p:sp>
-      <p:sp>
-        <p:nvSpPr>
-          <p:cNvPr id="75" name="Rectangle 74"/>
-          <p:cNvSpPr/>
-          <p:nvPr/>
-        </p:nvSpPr>
-        <p:spPr>
-          <a:xfrm>
-            <a:off x="12512594" y="5769864"/>
-            <a:ext cx="2252194" cy="676656"/>
-          </a:xfrm>
-          <a:prstGeom prst="rect">
-            <a:avLst/>
-          </a:prstGeom>
-          <a:solidFill>
-            <a:srgbClr val="AAB8E8"/>
-          </a:solidFill>
-          <a:ln>
-            <a:noFill/>
-          </a:ln>
-          <a:effectLst/>
-        </p:spPr>
-        <p:style>
-          <a:lnRef idx="1">
-            <a:schemeClr val="accent1"/>
-          </a:lnRef>
-          <a:fillRef idx="3">
-            <a:schemeClr val="accent1"/>
-          </a:fillRef>
-          <a:effectRef idx="2">
-            <a:schemeClr val="accent1"/>
-          </a:effectRef>
-          <a:fontRef idx="minor">
-            <a:schemeClr val="lt1"/>
-          </a:fontRef>
-        </p:style>
-        <p:txBody>
-          <a:bodyPr rtlCol="0" anchor="ctr"/>
-          <a:lstStyle/>
-          <a:p>
-            <a:pPr algn="ctr"/>
-          </a:p>
-        </p:txBody>
-      </p:sp>
-      <p:sp>
-        <p:nvSpPr>
-          <p:cNvPr id="76" name="TextBox 75"/>
-          <p:cNvSpPr txBox="1"/>
-          <p:nvPr/>
-        </p:nvSpPr>
-        <p:spPr>
-          <a:xfrm>
-            <a:off x="12604034" y="5824727"/>
-            <a:ext cx="2069314" cy="201168"/>
-          </a:xfrm>
-          <a:prstGeom prst="rect">
-            <a:avLst/>
-          </a:prstGeom>
-          <a:noFill/>
-        </p:spPr>
-        <p:txBody>
-          <a:bodyPr wrap="square" anchor="t" lIns="0" rIns="0" tIns="0" bIns="0">
-            <a:spAutoFit/>
-          </a:bodyPr>
-          <a:lstStyle/>
-          <a:p>
-            <a:pPr algn="l">
-              <a:lnSpc>
-                <a:spcPct val="112000"/>
-              </a:lnSpc>
-            </a:pPr>
-            <a:r>
-              <a:rPr sz="975" b="0">
-                <a:solidFill>
-                  <a:srgbClr val="1A1A1A"/>
-                </a:solidFill>
-                <a:latin typeface="Arial"/>
-                <a:ea typeface="Arial"/>
-              </a:rPr>
-              <a:t>SSD · 드라이버</a:t>
-            </a:r>
-          </a:p>
-        </p:txBody>
-      </p:sp>
-      <p:sp>
-        <p:nvSpPr>
-          <p:cNvPr id="77" name="TextBox 76"/>
-          <p:cNvSpPr txBox="1"/>
-          <p:nvPr/>
-        </p:nvSpPr>
-        <p:spPr>
-          <a:xfrm>
-            <a:off x="12604034" y="6016752"/>
-            <a:ext cx="2069314" cy="237744"/>
-          </a:xfrm>
-          <a:prstGeom prst="rect">
-            <a:avLst/>
-          </a:prstGeom>
-          <a:noFill/>
-        </p:spPr>
-        <p:txBody>
-          <a:bodyPr wrap="square" anchor="t" lIns="0" rIns="0" tIns="0" bIns="0">
-            <a:spAutoFit/>
-          </a:bodyPr>
-          <a:lstStyle/>
-          <a:p>
-            <a:pPr algn="l">
-              <a:lnSpc>
-                <a:spcPct val="112000"/>
-              </a:lnSpc>
-            </a:pPr>
-            <a:r>
-              <a:rPr sz="1200" b="1">
-                <a:solidFill>
-                  <a:srgbClr val="1A1A1A"/>
-                </a:solidFill>
-                <a:latin typeface="Arial"/>
-                <a:ea typeface="Arial"/>
-              </a:rPr>
-              <a:t>QoS · 성능 개선</a:t>
-            </a:r>
-          </a:p>
-        </p:txBody>
-      </p:sp>
-      <p:sp>
-        <p:nvSpPr>
-          <p:cNvPr id="78" name="TextBox 77"/>
-          <p:cNvSpPr txBox="1"/>
-          <p:nvPr/>
-        </p:nvSpPr>
-        <p:spPr>
-          <a:xfrm>
-            <a:off x="12604034" y="6227064"/>
-            <a:ext cx="2069314" cy="201168"/>
-          </a:xfrm>
-          <a:prstGeom prst="rect">
-            <a:avLst/>
-          </a:prstGeom>
-          <a:noFill/>
-        </p:spPr>
-        <p:txBody>
-          <a:bodyPr wrap="square" anchor="t" lIns="0" rIns="0" tIns="0" bIns="0">
-            <a:spAutoFit/>
-          </a:bodyPr>
-          <a:lstStyle/>
-          <a:p>
-            <a:pPr algn="l">
-              <a:lnSpc>
-                <a:spcPct val="100000"/>
-              </a:lnSpc>
-            </a:pPr>
-            <a:r>
-              <a:rPr sz="875" b="0">
-                <a:solidFill>
-                  <a:srgbClr val="555555"/>
-                </a:solidFill>
-                <a:latin typeface="Arial"/>
-                <a:ea typeface="Arial"/>
-              </a:rPr>
-              <a:t>추정 배치 · 스트림 · IOD → WAF ≈ 3</a:t>
-            </a:r>
-          </a:p>
-        </p:txBody>
-      </p:sp>
-      <p:sp>
-        <p:nvSpPr>
-          <p:cNvPr id="79" name="Right Arrow 78"/>
-          <p:cNvSpPr/>
-          <p:nvPr/>
-        </p:nvSpPr>
-        <p:spPr>
-          <a:xfrm>
-            <a:off x="14810509" y="6016752"/>
-            <a:ext cx="219456" cy="182880"/>
-          </a:xfrm>
-          <a:prstGeom prst="rightArrow">
-            <a:avLst/>
-          </a:prstGeom>
-          <a:solidFill>
-            <a:srgbClr val="AAB8E8"/>
-          </a:solidFill>
-          <a:ln>
-            <a:noFill/>
-          </a:ln>
-          <a:effectLst/>
-        </p:spPr>
-        <p:style>
-          <a:lnRef idx="1">
-            <a:schemeClr val="accent1"/>
-          </a:lnRef>
-          <a:fillRef idx="3">
-            <a:schemeClr val="accent1"/>
-          </a:fillRef>
-          <a:effectRef idx="2">
-            <a:schemeClr val="accent1"/>
-          </a:effectRef>
-          <a:fontRef idx="minor">
-            <a:schemeClr val="lt1"/>
-          </a:fontRef>
-        </p:style>
-        <p:txBody>
-          <a:bodyPr rtlCol="0" anchor="ctr"/>
-          <a:lstStyle/>
-          <a:p>
-            <a:pPr algn="ctr"/>
-          </a:p>
-        </p:txBody>
-      </p:sp>
-      <p:sp>
-        <p:nvSpPr>
-          <p:cNvPr id="80" name="Rectangle 79"/>
-          <p:cNvSpPr/>
-          <p:nvPr/>
-        </p:nvSpPr>
-        <p:spPr>
-          <a:xfrm>
-            <a:off x="15075685" y="5769864"/>
-            <a:ext cx="2252194" cy="676656"/>
-          </a:xfrm>
-          <a:prstGeom prst="rect">
-            <a:avLst/>
-          </a:prstGeom>
-          <a:solidFill>
-            <a:srgbClr val="FFFFFF"/>
-          </a:solidFill>
-          <a:ln w="12700">
-            <a:solidFill>
-              <a:srgbClr val="8A8A8A"/>
-            </a:solidFill>
-          </a:ln>
-          <a:effectLst/>
-        </p:spPr>
-        <p:style>
-          <a:lnRef idx="1">
-            <a:schemeClr val="accent1"/>
-          </a:lnRef>
-          <a:fillRef idx="3">
-            <a:schemeClr val="accent1"/>
-          </a:fillRef>
-          <a:effectRef idx="2">
-            <a:schemeClr val="accent1"/>
-          </a:effectRef>
-          <a:fontRef idx="minor">
-            <a:schemeClr val="lt1"/>
-          </a:fontRef>
-        </p:style>
-        <p:txBody>
-          <a:bodyPr rtlCol="0" anchor="ctr"/>
-          <a:lstStyle/>
-          <a:p>
-            <a:pPr algn="ctr"/>
-          </a:p>
-        </p:txBody>
-      </p:sp>
-      <p:sp>
-        <p:nvSpPr>
-          <p:cNvPr id="81" name="TextBox 80"/>
-          <p:cNvSpPr txBox="1"/>
-          <p:nvPr/>
-        </p:nvSpPr>
-        <p:spPr>
-          <a:xfrm>
-            <a:off x="15167125" y="5824727"/>
-            <a:ext cx="2069314" cy="201168"/>
-          </a:xfrm>
-          <a:prstGeom prst="rect">
-            <a:avLst/>
-          </a:prstGeom>
-          <a:noFill/>
-        </p:spPr>
-        <p:txBody>
-          <a:bodyPr wrap="square" anchor="t" lIns="0" rIns="0" tIns="0" bIns="0">
-            <a:spAutoFit/>
-          </a:bodyPr>
-          <a:lstStyle/>
-          <a:p>
-            <a:pPr algn="l">
-              <a:lnSpc>
-                <a:spcPct val="112000"/>
-              </a:lnSpc>
-            </a:pPr>
-            <a:r>
-              <a:rPr sz="975" b="0">
-                <a:solidFill>
-                  <a:srgbClr val="8A8A8A"/>
-                </a:solidFill>
-                <a:latin typeface="Arial"/>
-                <a:ea typeface="Arial"/>
-              </a:rPr>
-              <a:t>고객</a:t>
-            </a:r>
-          </a:p>
-        </p:txBody>
-      </p:sp>
-      <p:sp>
-        <p:nvSpPr>
-          <p:cNvPr id="82" name="TextBox 81"/>
-          <p:cNvSpPr txBox="1"/>
-          <p:nvPr/>
-        </p:nvSpPr>
-        <p:spPr>
-          <a:xfrm>
-            <a:off x="15167125" y="6016752"/>
-            <a:ext cx="2069314" cy="237744"/>
-          </a:xfrm>
-          <a:prstGeom prst="rect">
-            <a:avLst/>
-          </a:prstGeom>
-          <a:noFill/>
-        </p:spPr>
-        <p:txBody>
-          <a:bodyPr wrap="square" anchor="t" lIns="0" rIns="0" tIns="0" bIns="0">
-            <a:spAutoFit/>
-          </a:bodyPr>
-          <a:lstStyle/>
-          <a:p>
-            <a:pPr algn="l">
-              <a:lnSpc>
-                <a:spcPct val="112000"/>
-              </a:lnSpc>
-            </a:pPr>
-            <a:r>
-              <a:rPr sz="1200" b="1">
-                <a:solidFill>
-                  <a:srgbClr val="555555"/>
-                </a:solidFill>
-                <a:latin typeface="Arial"/>
-                <a:ea typeface="Arial"/>
-              </a:rPr>
-              <a:t>DWPD 요구 미충족</a:t>
-            </a:r>
-          </a:p>
-        </p:txBody>
-      </p:sp>
-      <p:sp>
-        <p:nvSpPr>
-          <p:cNvPr id="83" name="TextBox 82"/>
-          <p:cNvSpPr txBox="1"/>
-          <p:nvPr/>
-        </p:nvSpPr>
-        <p:spPr>
-          <a:xfrm>
-            <a:off x="15167125" y="6227064"/>
-            <a:ext cx="2069314" cy="201168"/>
-          </a:xfrm>
-          <a:prstGeom prst="rect">
-            <a:avLst/>
-          </a:prstGeom>
-          <a:noFill/>
-        </p:spPr>
-        <p:txBody>
-          <a:bodyPr wrap="square" anchor="t" lIns="0" rIns="0" tIns="0" bIns="0">
-            <a:spAutoFit/>
-          </a:bodyPr>
-          <a:lstStyle/>
-          <a:p>
-            <a:pPr algn="l">
-              <a:lnSpc>
-                <a:spcPct val="100000"/>
-              </a:lnSpc>
-            </a:pPr>
-            <a:r>
-              <a:rPr sz="875" b="0">
-                <a:solidFill>
-                  <a:srgbClr val="8A8A8A"/>
-                </a:solidFill>
-                <a:latin typeface="Arial"/>
-                <a:ea typeface="Arial"/>
-              </a:rPr>
-              <a:t>격차 10~40배</a:t>
-            </a:r>
-          </a:p>
-        </p:txBody>
-      </p:sp>
-      <p:sp>
-        <p:nvSpPr>
-          <p:cNvPr id="84" name="TextBox 83"/>
-          <p:cNvSpPr txBox="1"/>
-          <p:nvPr/>
-        </p:nvSpPr>
-        <p:spPr>
-          <a:xfrm>
-            <a:off x="9949503" y="6565392"/>
-            <a:ext cx="5000936" cy="219456"/>
-          </a:xfrm>
-          <a:prstGeom prst="rect">
-            <a:avLst/>
-          </a:prstGeom>
-          <a:noFill/>
-        </p:spPr>
-        <p:txBody>
-          <a:bodyPr wrap="square" anchor="t" lIns="0" rIns="0" tIns="0" bIns="0">
-            <a:spAutoFit/>
-          </a:bodyPr>
-          <a:lstStyle/>
-          <a:p>
-            <a:pPr algn="l">
-              <a:lnSpc>
-                <a:spcPct val="112000"/>
-              </a:lnSpc>
-            </a:pPr>
-            <a:r>
-              <a:rPr sz="1125" b="1">
-                <a:solidFill>
-                  <a:srgbClr val="1428A0"/>
-                </a:solidFill>
-                <a:latin typeface="Arial"/>
-                <a:ea typeface="Arial"/>
-              </a:rPr>
-              <a:t>3단계  호스트 시스템 공동 설계  (2022~, 본 덱)</a:t>
-            </a:r>
-          </a:p>
-        </p:txBody>
-      </p:sp>
-      <p:sp>
-        <p:nvSpPr>
-          <p:cNvPr id="85" name="TextBox 84"/>
-          <p:cNvSpPr txBox="1"/>
-          <p:nvPr/>
-        </p:nvSpPr>
-        <p:spPr>
-          <a:xfrm>
-            <a:off x="14950439" y="6565392"/>
-            <a:ext cx="2377440" cy="219456"/>
-          </a:xfrm>
-          <a:prstGeom prst="rect">
-            <a:avLst/>
-          </a:prstGeom>
-          <a:noFill/>
-        </p:spPr>
-        <p:txBody>
-          <a:bodyPr wrap="square" anchor="t" lIns="0" rIns="0" tIns="0" bIns="0">
-            <a:spAutoFit/>
-          </a:bodyPr>
-          <a:lstStyle/>
-          <a:p>
-            <a:pPr algn="r">
-              <a:lnSpc>
-                <a:spcPct val="112000"/>
-              </a:lnSpc>
-            </a:pPr>
-            <a:r>
-              <a:rPr sz="1050" b="1">
-                <a:solidFill>
-                  <a:srgbClr val="1428A0"/>
-                </a:solidFill>
-                <a:latin typeface="Arial"/>
-                <a:ea typeface="Arial"/>
-              </a:rPr>
-              <a:t>DWPD 요구 충족 · 유일한 경로</a:t>
-            </a:r>
-          </a:p>
-        </p:txBody>
-      </p:sp>
-      <p:sp>
-        <p:nvSpPr>
-          <p:cNvPr id="86" name="Rectangle 85"/>
-          <p:cNvSpPr/>
-          <p:nvPr/>
-        </p:nvSpPr>
-        <p:spPr>
-          <a:xfrm>
-            <a:off x="9949503" y="6839712"/>
-            <a:ext cx="2252194" cy="676656"/>
-          </a:xfrm>
-          <a:prstGeom prst="rect">
-            <a:avLst/>
-          </a:prstGeom>
-          <a:solidFill>
-            <a:srgbClr val="FFFFFF"/>
-          </a:solidFill>
-          <a:ln w="9525">
-            <a:solidFill>
-              <a:srgbClr val="D9D9D9"/>
-            </a:solidFill>
-          </a:ln>
-          <a:effectLst/>
-        </p:spPr>
-        <p:style>
-          <a:lnRef idx="1">
-            <a:schemeClr val="accent1"/>
-          </a:lnRef>
-          <a:fillRef idx="3">
-            <a:schemeClr val="accent1"/>
-          </a:fillRef>
-          <a:effectRef idx="2">
-            <a:schemeClr val="accent1"/>
-          </a:effectRef>
-          <a:fontRef idx="minor">
-            <a:schemeClr val="lt1"/>
-          </a:fontRef>
-        </p:style>
-        <p:txBody>
-          <a:bodyPr rtlCol="0" anchor="ctr"/>
-          <a:lstStyle/>
-          <a:p>
-            <a:pPr algn="ctr"/>
-          </a:p>
-        </p:txBody>
-      </p:sp>
-      <p:sp>
-        <p:nvSpPr>
-          <p:cNvPr id="87" name="TextBox 86"/>
-          <p:cNvSpPr txBox="1"/>
-          <p:nvPr/>
-        </p:nvSpPr>
-        <p:spPr>
-          <a:xfrm>
-            <a:off x="10040943" y="6894575"/>
-            <a:ext cx="2069314" cy="201168"/>
-          </a:xfrm>
-          <a:prstGeom prst="rect">
-            <a:avLst/>
-          </a:prstGeom>
-          <a:noFill/>
-        </p:spPr>
-        <p:txBody>
-          <a:bodyPr wrap="square" anchor="t" lIns="0" rIns="0" tIns="0" bIns="0">
-            <a:spAutoFit/>
-          </a:bodyPr>
-          <a:lstStyle/>
-          <a:p>
-            <a:pPr algn="l">
-              <a:lnSpc>
-                <a:spcPct val="112000"/>
-              </a:lnSpc>
-            </a:pPr>
-            <a:r>
-              <a:rPr sz="975" b="0">
-                <a:solidFill>
-                  <a:srgbClr val="8A8A8A"/>
-                </a:solidFill>
-                <a:latin typeface="Arial"/>
-                <a:ea typeface="Arial"/>
-              </a:rPr>
-              <a:t>호스트 · 앱</a:t>
-            </a:r>
-          </a:p>
-        </p:txBody>
-      </p:sp>
-      <p:sp>
-        <p:nvSpPr>
-          <p:cNvPr id="88" name="TextBox 87"/>
-          <p:cNvSpPr txBox="1"/>
-          <p:nvPr/>
-        </p:nvSpPr>
-        <p:spPr>
-          <a:xfrm>
-            <a:off x="10040943" y="7086600"/>
-            <a:ext cx="2069314" cy="237744"/>
-          </a:xfrm>
-          <a:prstGeom prst="rect">
-            <a:avLst/>
-          </a:prstGeom>
-          <a:noFill/>
-        </p:spPr>
-        <p:txBody>
-          <a:bodyPr wrap="square" anchor="t" lIns="0" rIns="0" tIns="0" bIns="0">
-            <a:spAutoFit/>
-          </a:bodyPr>
-          <a:lstStyle/>
-          <a:p>
-            <a:pPr algn="l">
-              <a:lnSpc>
-                <a:spcPct val="112000"/>
-              </a:lnSpc>
-            </a:pPr>
-            <a:r>
-              <a:rPr sz="1200" b="1">
-                <a:solidFill>
-                  <a:srgbClr val="1A1A1A"/>
-                </a:solidFill>
-                <a:latin typeface="Arial"/>
-                <a:ea typeface="Arial"/>
-              </a:rPr>
-              <a:t>데이터 수명 지정</a:t>
-            </a:r>
-          </a:p>
-        </p:txBody>
-      </p:sp>
-      <p:sp>
-        <p:nvSpPr>
-          <p:cNvPr id="89" name="TextBox 88"/>
-          <p:cNvSpPr txBox="1"/>
-          <p:nvPr/>
-        </p:nvSpPr>
-        <p:spPr>
-          <a:xfrm>
-            <a:off x="10040943" y="7296912"/>
-            <a:ext cx="2069314" cy="201168"/>
-          </a:xfrm>
-          <a:prstGeom prst="rect">
-            <a:avLst/>
-          </a:prstGeom>
-          <a:noFill/>
-        </p:spPr>
-        <p:txBody>
-          <a:bodyPr wrap="square" anchor="t" lIns="0" rIns="0" tIns="0" bIns="0">
-            <a:spAutoFit/>
-          </a:bodyPr>
-          <a:lstStyle/>
-          <a:p>
-            <a:pPr algn="l">
-              <a:lnSpc>
-                <a:spcPct val="100000"/>
-              </a:lnSpc>
-            </a:pPr>
-            <a:r>
-              <a:rPr sz="875" b="0">
-                <a:solidFill>
-                  <a:srgbClr val="555555"/>
-                </a:solidFill>
-                <a:latin typeface="Arial"/>
-                <a:ea typeface="Arial"/>
-              </a:rPr>
-              <a:t>배치 표준 · 캐시 관리자 정책</a:t>
-            </a:r>
-          </a:p>
-        </p:txBody>
-      </p:sp>
-      <p:sp>
-        <p:nvSpPr>
-          <p:cNvPr id="90" name="Right Arrow 89"/>
-          <p:cNvSpPr/>
-          <p:nvPr/>
-        </p:nvSpPr>
-        <p:spPr>
-          <a:xfrm>
-            <a:off x="12247418" y="7086600"/>
-            <a:ext cx="219456" cy="182880"/>
-          </a:xfrm>
-          <a:prstGeom prst="rightArrow">
-            <a:avLst/>
-          </a:prstGeom>
-          <a:solidFill>
-            <a:srgbClr val="1428A0"/>
-          </a:solidFill>
-          <a:ln>
-            <a:noFill/>
-          </a:ln>
-          <a:effectLst/>
-        </p:spPr>
-        <p:style>
-          <a:lnRef idx="1">
-            <a:schemeClr val="accent1"/>
-          </a:lnRef>
-          <a:fillRef idx="3">
-            <a:schemeClr val="accent1"/>
-          </a:fillRef>
-          <a:effectRef idx="2">
-            <a:schemeClr val="accent1"/>
-          </a:effectRef>
-          <a:fontRef idx="minor">
-            <a:schemeClr val="lt1"/>
-          </a:fontRef>
-        </p:style>
-        <p:txBody>
-          <a:bodyPr rtlCol="0" anchor="ctr"/>
-          <a:lstStyle/>
-          <a:p>
-            <a:pPr algn="ctr"/>
-          </a:p>
-        </p:txBody>
-      </p:sp>
-      <p:sp>
-        <p:nvSpPr>
-          <p:cNvPr id="91" name="Rectangle 90"/>
-          <p:cNvSpPr/>
-          <p:nvPr/>
-        </p:nvSpPr>
-        <p:spPr>
-          <a:xfrm>
-            <a:off x="12512594" y="6839712"/>
-            <a:ext cx="2252194" cy="676656"/>
-          </a:xfrm>
-          <a:prstGeom prst="rect">
-            <a:avLst/>
-          </a:prstGeom>
-          <a:solidFill>
-            <a:srgbClr val="1428A0"/>
-          </a:solidFill>
-          <a:ln>
-            <a:noFill/>
-          </a:ln>
-          <a:effectLst/>
-        </p:spPr>
-        <p:style>
-          <a:lnRef idx="1">
-            <a:schemeClr val="accent1"/>
-          </a:lnRef>
-          <a:fillRef idx="3">
-            <a:schemeClr val="accent1"/>
-          </a:fillRef>
-          <a:effectRef idx="2">
-            <a:schemeClr val="accent1"/>
-          </a:effectRef>
-          <a:fontRef idx="minor">
-            <a:schemeClr val="lt1"/>
-          </a:fontRef>
-        </p:style>
-        <p:txBody>
-          <a:bodyPr rtlCol="0" anchor="ctr"/>
-          <a:lstStyle/>
-          <a:p>
-            <a:pPr algn="ctr"/>
-          </a:p>
-        </p:txBody>
-      </p:sp>
-      <p:sp>
-        <p:nvSpPr>
-          <p:cNvPr id="92" name="TextBox 91"/>
-          <p:cNvSpPr txBox="1"/>
-          <p:nvPr/>
-        </p:nvSpPr>
-        <p:spPr>
-          <a:xfrm>
-            <a:off x="12604034" y="6894575"/>
-            <a:ext cx="2069314" cy="201168"/>
-          </a:xfrm>
-          <a:prstGeom prst="rect">
-            <a:avLst/>
-          </a:prstGeom>
-          <a:noFill/>
-        </p:spPr>
-        <p:txBody>
-          <a:bodyPr wrap="square" anchor="t" lIns="0" rIns="0" tIns="0" bIns="0">
-            <a:spAutoFit/>
-          </a:bodyPr>
-          <a:lstStyle/>
-          <a:p>
-            <a:pPr algn="l">
-              <a:lnSpc>
-                <a:spcPct val="112000"/>
-              </a:lnSpc>
-            </a:pPr>
-            <a:r>
-              <a:rPr sz="975" b="0">
-                <a:solidFill>
-                  <a:srgbClr val="FFFFFF"/>
-                </a:solidFill>
-                <a:latin typeface="Arial"/>
-                <a:ea typeface="Arial"/>
-              </a:rPr>
-              <a:t>삼성 · 고객 공동 설계</a:t>
-            </a:r>
-          </a:p>
-        </p:txBody>
-      </p:sp>
-      <p:sp>
-        <p:nvSpPr>
-          <p:cNvPr id="93" name="TextBox 92"/>
-          <p:cNvSpPr txBox="1"/>
-          <p:nvPr/>
-        </p:nvSpPr>
-        <p:spPr>
-          <a:xfrm>
-            <a:off x="12604034" y="7086600"/>
-            <a:ext cx="2069314" cy="237744"/>
-          </a:xfrm>
-          <a:prstGeom prst="rect">
-            <a:avLst/>
-          </a:prstGeom>
-          <a:noFill/>
-        </p:spPr>
-        <p:txBody>
-          <a:bodyPr wrap="square" anchor="t" lIns="0" rIns="0" tIns="0" bIns="0">
-            <a:spAutoFit/>
-          </a:bodyPr>
-          <a:lstStyle/>
-          <a:p>
-            <a:pPr algn="l">
-              <a:lnSpc>
-                <a:spcPct val="112000"/>
-              </a:lnSpc>
-            </a:pPr>
-            <a:r>
-              <a:rPr sz="1200" b="1">
-                <a:solidFill>
-                  <a:srgbClr val="FFFFFF"/>
-                </a:solidFill>
-                <a:latin typeface="Arial"/>
-                <a:ea typeface="Arial"/>
-              </a:rPr>
-              <a:t>WAF 3.2 → 1.0</a:t>
-            </a:r>
-          </a:p>
-        </p:txBody>
-      </p:sp>
-      <p:sp>
-        <p:nvSpPr>
-          <p:cNvPr id="94" name="TextBox 93"/>
-          <p:cNvSpPr txBox="1"/>
-          <p:nvPr/>
-        </p:nvSpPr>
-        <p:spPr>
-          <a:xfrm>
-            <a:off x="12604034" y="7296912"/>
-            <a:ext cx="2069314" cy="201168"/>
-          </a:xfrm>
-          <a:prstGeom prst="rect">
-            <a:avLst/>
-          </a:prstGeom>
-          <a:noFill/>
-        </p:spPr>
-        <p:txBody>
-          <a:bodyPr wrap="square" anchor="t" lIns="0" rIns="0" tIns="0" bIns="0">
-            <a:spAutoFit/>
-          </a:bodyPr>
-          <a:lstStyle/>
-          <a:p>
-            <a:pPr algn="l">
-              <a:lnSpc>
-                <a:spcPct val="100000"/>
-              </a:lnSpc>
-            </a:pPr>
-            <a:r>
-              <a:rPr sz="875" b="0">
-                <a:solidFill>
-                  <a:srgbClr val="FFFFFF"/>
-                </a:solidFill>
-                <a:latin typeface="Arial"/>
-                <a:ea typeface="Arial"/>
-              </a:rPr>
-              <a:t>FDE · SCA · 유효 DWPD ×3.1</a:t>
-            </a:r>
-          </a:p>
-        </p:txBody>
-      </p:sp>
-      <p:sp>
-        <p:nvSpPr>
-          <p:cNvPr id="95" name="Right Arrow 94"/>
-          <p:cNvSpPr/>
-          <p:nvPr/>
-        </p:nvSpPr>
-        <p:spPr>
-          <a:xfrm>
-            <a:off x="14810509" y="7086600"/>
-            <a:ext cx="219456" cy="182880"/>
-          </a:xfrm>
-          <a:prstGeom prst="rightArrow">
-            <a:avLst/>
-          </a:prstGeom>
-          <a:solidFill>
-            <a:srgbClr val="1428A0"/>
-          </a:solidFill>
-          <a:ln>
-            <a:noFill/>
-          </a:ln>
-          <a:effectLst/>
-        </p:spPr>
-        <p:style>
-          <a:lnRef idx="1">
-            <a:schemeClr val="accent1"/>
-          </a:lnRef>
-          <a:fillRef idx="3">
-            <a:schemeClr val="accent1"/>
-          </a:fillRef>
-          <a:effectRef idx="2">
-            <a:schemeClr val="accent1"/>
-          </a:effectRef>
-          <a:fontRef idx="minor">
-            <a:schemeClr val="lt1"/>
-          </a:fontRef>
-        </p:style>
-        <p:txBody>
-          <a:bodyPr rtlCol="0" anchor="ctr"/>
-          <a:lstStyle/>
-          <a:p>
-            <a:pPr algn="ctr"/>
-          </a:p>
-        </p:txBody>
-      </p:sp>
-      <p:sp>
-        <p:nvSpPr>
-          <p:cNvPr id="96" name="Rectangle 95"/>
-          <p:cNvSpPr/>
-          <p:nvPr/>
-        </p:nvSpPr>
-        <p:spPr>
-          <a:xfrm>
-            <a:off x="15075685" y="6839712"/>
-            <a:ext cx="2252194" cy="676656"/>
-          </a:xfrm>
-          <a:prstGeom prst="rect">
-            <a:avLst/>
-          </a:prstGeom>
-          <a:solidFill>
-            <a:srgbClr val="F4F6FC"/>
-          </a:solidFill>
-          <a:ln w="12700">
-            <a:solidFill>
-              <a:srgbClr val="AAB8E8"/>
-            </a:solidFill>
-          </a:ln>
-          <a:effectLst/>
-        </p:spPr>
-        <p:style>
-          <a:lnRef idx="1">
-            <a:schemeClr val="accent1"/>
-          </a:lnRef>
-          <a:fillRef idx="3">
-            <a:schemeClr val="accent1"/>
-          </a:fillRef>
-          <a:effectRef idx="2">
-            <a:schemeClr val="accent1"/>
-          </a:effectRef>
-          <a:fontRef idx="minor">
-            <a:schemeClr val="lt1"/>
-          </a:fontRef>
-        </p:style>
-        <p:txBody>
-          <a:bodyPr rtlCol="0" anchor="ctr"/>
-          <a:lstStyle/>
-          <a:p>
-            <a:pPr algn="ctr"/>
-          </a:p>
-        </p:txBody>
-      </p:sp>
-      <p:sp>
-        <p:nvSpPr>
-          <p:cNvPr id="97" name="TextBox 96"/>
-          <p:cNvSpPr txBox="1"/>
-          <p:nvPr/>
-        </p:nvSpPr>
-        <p:spPr>
-          <a:xfrm>
-            <a:off x="15167125" y="6894575"/>
-            <a:ext cx="2069314" cy="201168"/>
-          </a:xfrm>
-          <a:prstGeom prst="rect">
-            <a:avLst/>
-          </a:prstGeom>
-          <a:noFill/>
-        </p:spPr>
-        <p:txBody>
-          <a:bodyPr wrap="square" anchor="t" lIns="0" rIns="0" tIns="0" bIns="0">
-            <a:spAutoFit/>
-          </a:bodyPr>
-          <a:lstStyle/>
-          <a:p>
-            <a:pPr algn="l">
-              <a:lnSpc>
-                <a:spcPct val="112000"/>
-              </a:lnSpc>
-            </a:pPr>
-            <a:r>
-              <a:rPr sz="975" b="0">
-                <a:solidFill>
-                  <a:srgbClr val="8A8A8A"/>
-                </a:solidFill>
-                <a:latin typeface="Arial"/>
-                <a:ea typeface="Arial"/>
-              </a:rPr>
-              <a:t>고객</a:t>
-            </a:r>
-          </a:p>
-        </p:txBody>
-      </p:sp>
-      <p:sp>
-        <p:nvSpPr>
-          <p:cNvPr id="98" name="TextBox 97"/>
-          <p:cNvSpPr txBox="1"/>
-          <p:nvPr/>
-        </p:nvSpPr>
-        <p:spPr>
-          <a:xfrm>
-            <a:off x="15167125" y="7086600"/>
-            <a:ext cx="2069314" cy="237744"/>
-          </a:xfrm>
-          <a:prstGeom prst="rect">
-            <a:avLst/>
-          </a:prstGeom>
-          <a:noFill/>
-        </p:spPr>
-        <p:txBody>
-          <a:bodyPr wrap="square" anchor="t" lIns="0" rIns="0" tIns="0" bIns="0">
-            <a:spAutoFit/>
-          </a:bodyPr>
-          <a:lstStyle/>
-          <a:p>
-            <a:pPr algn="l">
-              <a:lnSpc>
-                <a:spcPct val="112000"/>
-              </a:lnSpc>
-            </a:pPr>
-            <a:r>
-              <a:rPr sz="1200" b="1">
-                <a:solidFill>
-                  <a:srgbClr val="1A1A1A"/>
-                </a:solidFill>
-                <a:latin typeface="Arial"/>
-                <a:ea typeface="Arial"/>
-              </a:rPr>
-              <a:t>DWPD 요구 충족</a:t>
-            </a:r>
-          </a:p>
-        </p:txBody>
-      </p:sp>
-      <p:sp>
-        <p:nvSpPr>
-          <p:cNvPr id="99" name="TextBox 98"/>
-          <p:cNvSpPr txBox="1"/>
-          <p:nvPr/>
-        </p:nvSpPr>
-        <p:spPr>
-          <a:xfrm>
-            <a:off x="15167125" y="7296912"/>
-            <a:ext cx="2069314" cy="201168"/>
-          </a:xfrm>
-          <a:prstGeom prst="rect">
-            <a:avLst/>
-          </a:prstGeom>
-          <a:noFill/>
-        </p:spPr>
-        <p:txBody>
-          <a:bodyPr wrap="square" anchor="t" lIns="0" rIns="0" tIns="0" bIns="0">
-            <a:spAutoFit/>
-          </a:bodyPr>
-          <a:lstStyle/>
-          <a:p>
-            <a:pPr algn="l">
-              <a:lnSpc>
-                <a:spcPct val="100000"/>
-              </a:lnSpc>
-            </a:pPr>
-            <a:r>
-              <a:rPr sz="875" b="0">
-                <a:solidFill>
-                  <a:srgbClr val="555555"/>
-                </a:solidFill>
-                <a:latin typeface="Arial"/>
-                <a:ea typeface="Arial"/>
-              </a:rPr>
-              <a:t>QLC로 정격 내 수명 보증</a:t>
-            </a:r>
-          </a:p>
-        </p:txBody>
-      </p:sp>
-      <p:sp>
-        <p:nvSpPr>
-          <p:cNvPr id="100" name="Rectangle 99"/>
-          <p:cNvSpPr/>
-          <p:nvPr/>
-        </p:nvSpPr>
-        <p:spPr>
-          <a:xfrm>
-            <a:off x="722376" y="7644383"/>
-            <a:ext cx="16843248" cy="859536"/>
-          </a:xfrm>
-          <a:prstGeom prst="rect">
-            <a:avLst/>
-          </a:prstGeom>
-          <a:solidFill>
-            <a:srgbClr val="FFFFFF"/>
-          </a:solidFill>
-          <a:ln w="9525">
-            <a:solidFill>
-              <a:srgbClr val="D9D9D9"/>
-            </a:solidFill>
-          </a:ln>
-          <a:effectLst/>
-        </p:spPr>
-        <p:style>
-          <a:lnRef idx="1">
-            <a:schemeClr val="accent1"/>
-          </a:lnRef>
-          <a:fillRef idx="3">
-            <a:schemeClr val="accent1"/>
-          </a:fillRef>
-          <a:effectRef idx="2">
-            <a:schemeClr val="accent1"/>
-          </a:effectRef>
-          <a:fontRef idx="minor">
-            <a:schemeClr val="lt1"/>
-          </a:fontRef>
-        </p:style>
-        <p:txBody>
-          <a:bodyPr rtlCol="0" anchor="ctr"/>
-          <a:lstStyle/>
-          <a:p>
-            <a:pPr algn="ctr"/>
-          </a:p>
-        </p:txBody>
-      </p:sp>
-      <p:sp>
-        <p:nvSpPr>
-          <p:cNvPr id="101" name="Rectangle 100"/>
-          <p:cNvSpPr/>
-          <p:nvPr/>
-        </p:nvSpPr>
-        <p:spPr>
-          <a:xfrm>
-            <a:off x="722376" y="7644383"/>
-            <a:ext cx="54864" cy="859536"/>
-          </a:xfrm>
-          <a:prstGeom prst="rect">
-            <a:avLst/>
-          </a:prstGeom>
-          <a:solidFill>
-            <a:srgbClr val="3C5AC8"/>
-          </a:solidFill>
-          <a:ln>
-            <a:noFill/>
-          </a:ln>
-          <a:effectLst/>
-        </p:spPr>
-        <p:style>
-          <a:lnRef idx="1">
-            <a:schemeClr val="accent1"/>
-          </a:lnRef>
-          <a:fillRef idx="3">
-            <a:schemeClr val="accent1"/>
-          </a:fillRef>
-          <a:effectRef idx="2">
-            <a:schemeClr val="accent1"/>
-          </a:effectRef>
-          <a:fontRef idx="minor">
-            <a:schemeClr val="lt1"/>
-          </a:fontRef>
-        </p:style>
-        <p:txBody>
-          <a:bodyPr rtlCol="0" anchor="ctr"/>
-          <a:lstStyle/>
-          <a:p>
-            <a:pPr algn="ctr"/>
-          </a:p>
-        </p:txBody>
-      </p:sp>
-      <p:sp>
-        <p:nvSpPr>
-          <p:cNvPr id="102" name="TextBox 101"/>
-          <p:cNvSpPr txBox="1"/>
-          <p:nvPr/>
-        </p:nvSpPr>
-        <p:spPr>
-          <a:xfrm>
-            <a:off x="941832" y="7735823"/>
-            <a:ext cx="1828800" cy="219456"/>
-          </a:xfrm>
-          <a:prstGeom prst="rect">
-            <a:avLst/>
-          </a:prstGeom>
-          <a:noFill/>
-        </p:spPr>
-        <p:txBody>
-          <a:bodyPr wrap="square" anchor="t" lIns="0" rIns="0" tIns="0" bIns="0">
-            <a:spAutoFit/>
-          </a:bodyPr>
-          <a:lstStyle/>
-          <a:p>
-            <a:pPr algn="l">
-              <a:lnSpc>
-                <a:spcPct val="112000"/>
-              </a:lnSpc>
-            </a:pPr>
-            <a:r>
-              <a:rPr sz="1125" b="1">
-                <a:solidFill>
-                  <a:srgbClr val="1428A0"/>
-                </a:solidFill>
-                <a:latin typeface="Arial"/>
-                <a:ea typeface="Arial"/>
-              </a:rPr>
-              <a:t>병렬 축 · 다이 고장률</a:t>
-            </a:r>
-          </a:p>
-        </p:txBody>
-      </p:sp>
-      <p:sp>
-        <p:nvSpPr>
-          <p:cNvPr id="103" name="TextBox 102"/>
-          <p:cNvSpPr txBox="1"/>
-          <p:nvPr/>
-        </p:nvSpPr>
-        <p:spPr>
-          <a:xfrm>
-            <a:off x="941832" y="7973567"/>
-            <a:ext cx="1828800" cy="365760"/>
-          </a:xfrm>
-          <a:prstGeom prst="rect">
-            <a:avLst/>
-          </a:prstGeom>
-          <a:noFill/>
-        </p:spPr>
-        <p:txBody>
-          <a:bodyPr wrap="square" anchor="t" lIns="0" rIns="0" tIns="0" bIns="0">
-            <a:spAutoFit/>
-          </a:bodyPr>
-          <a:lstStyle/>
-          <a:p>
-            <a:pPr algn="l">
-              <a:lnSpc>
-                <a:spcPct val="100000"/>
-              </a:lnSpc>
-            </a:pPr>
-            <a:r>
-              <a:rPr sz="975" b="1">
-                <a:solidFill>
-                  <a:srgbClr val="1A1A1A"/>
-                </a:solidFill>
-                <a:latin typeface="Arial"/>
-                <a:ea typeface="Arial"/>
-              </a:rPr>
-              <a:t>요구 FFR ≤ 3% 고정</a:t>
-            </a:r>
-          </a:p>
-          <a:p>
-            <a:pPr algn="l">
-              <a:lnSpc>
-                <a:spcPct val="100000"/>
-              </a:lnSpc>
-            </a:pPr>
-            <a:r>
-              <a:rPr sz="900" b="0">
-                <a:solidFill>
-                  <a:srgbClr val="555555"/>
-                </a:solidFill>
-                <a:latin typeface="Arial"/>
-                <a:ea typeface="Arial"/>
-              </a:rPr>
-              <a:t>JESD218 · 다이 수는 8배 ↑</a:t>
-            </a:r>
-          </a:p>
-        </p:txBody>
-      </p:sp>
-      <p:sp>
-        <p:nvSpPr>
-          <p:cNvPr id="104" name="TextBox 103"/>
-          <p:cNvSpPr txBox="1"/>
-          <p:nvPr/>
-        </p:nvSpPr>
-        <p:spPr>
-          <a:xfrm>
-            <a:off x="2871216" y="7717536"/>
-            <a:ext cx="2880360" cy="182880"/>
-          </a:xfrm>
-          <a:prstGeom prst="rect">
-            <a:avLst/>
-          </a:prstGeom>
-          <a:noFill/>
-        </p:spPr>
-        <p:txBody>
-          <a:bodyPr wrap="square" anchor="t" lIns="0" rIns="0" tIns="0" bIns="0">
-            <a:spAutoFit/>
-          </a:bodyPr>
-          <a:lstStyle/>
-          <a:p>
-            <a:pPr algn="l">
-              <a:lnSpc>
-                <a:spcPct val="112000"/>
-              </a:lnSpc>
-            </a:pPr>
-            <a:r>
-              <a:rPr sz="875" b="0">
-                <a:solidFill>
-                  <a:srgbClr val="8A8A8A"/>
-                </a:solidFill>
-                <a:latin typeface="Arial"/>
-                <a:ea typeface="Arial"/>
-              </a:rPr>
-              <a:t>SSD당 NAND 다이 수 (용량 ÷ 다이 밀도 환산)</a:t>
-            </a:r>
-          </a:p>
-        </p:txBody>
-      </p:sp>
-      <p:sp>
-        <p:nvSpPr>
-          <p:cNvPr id="105" name="Rectangle 104"/>
-          <p:cNvSpPr/>
-          <p:nvPr/>
-        </p:nvSpPr>
-        <p:spPr>
-          <a:xfrm>
-            <a:off x="2871216" y="8129016"/>
-            <a:ext cx="310896" cy="45720"/>
-          </a:xfrm>
-          <a:prstGeom prst="rect">
-            <a:avLst/>
-          </a:prstGeom>
-          <a:solidFill>
-            <a:srgbClr val="AAB8E8"/>
-          </a:solidFill>
-          <a:ln>
-            <a:noFill/>
-          </a:ln>
-          <a:effectLst/>
-        </p:spPr>
-        <p:style>
-          <a:lnRef idx="1">
-            <a:schemeClr val="accent1"/>
-          </a:lnRef>
-          <a:fillRef idx="3">
-            <a:schemeClr val="accent1"/>
-          </a:fillRef>
-          <a:effectRef idx="2">
-            <a:schemeClr val="accent1"/>
-          </a:effectRef>
-          <a:fontRef idx="minor">
-            <a:schemeClr val="lt1"/>
-          </a:fontRef>
-        </p:style>
-        <p:txBody>
-          <a:bodyPr rtlCol="0" anchor="ctr"/>
-          <a:lstStyle/>
-          <a:p>
-            <a:pPr algn="ctr"/>
-          </a:p>
-        </p:txBody>
-      </p:sp>
-      <p:sp>
-        <p:nvSpPr>
-          <p:cNvPr id="106" name="TextBox 105"/>
-          <p:cNvSpPr txBox="1"/>
-          <p:nvPr/>
-        </p:nvSpPr>
-        <p:spPr>
-          <a:xfrm>
-            <a:off x="2688336" y="8193024"/>
-            <a:ext cx="676656" cy="164592"/>
-          </a:xfrm>
-          <a:prstGeom prst="rect">
-            <a:avLst/>
-          </a:prstGeom>
-          <a:noFill/>
-        </p:spPr>
-        <p:txBody>
-          <a:bodyPr wrap="square" anchor="t" lIns="0" rIns="0" tIns="0" bIns="0">
-            <a:spAutoFit/>
-          </a:bodyPr>
-          <a:lstStyle/>
-          <a:p>
-            <a:pPr algn="ctr">
-              <a:lnSpc>
-                <a:spcPct val="112000"/>
-              </a:lnSpc>
-            </a:pPr>
-            <a:r>
-              <a:rPr sz="825" b="0">
-                <a:solidFill>
-                  <a:srgbClr val="555555"/>
-                </a:solidFill>
-                <a:latin typeface="Arial"/>
-                <a:ea typeface="Arial"/>
-              </a:rPr>
-              <a:t>'12  128</a:t>
-            </a:r>
-          </a:p>
-        </p:txBody>
-      </p:sp>
-      <p:sp>
-        <p:nvSpPr>
-          <p:cNvPr id="107" name="Rectangle 106"/>
-          <p:cNvSpPr/>
-          <p:nvPr/>
-        </p:nvSpPr>
-        <p:spPr>
-          <a:xfrm>
-            <a:off x="3513582" y="8129016"/>
-            <a:ext cx="310896" cy="45720"/>
-          </a:xfrm>
-          <a:prstGeom prst="rect">
-            <a:avLst/>
-          </a:prstGeom>
-          <a:solidFill>
-            <a:srgbClr val="AAB8E8"/>
-          </a:solidFill>
-          <a:ln>
-            <a:noFill/>
-          </a:ln>
-          <a:effectLst/>
-        </p:spPr>
-        <p:style>
-          <a:lnRef idx="1">
-            <a:schemeClr val="accent1"/>
-          </a:lnRef>
-          <a:fillRef idx="3">
-            <a:schemeClr val="accent1"/>
-          </a:fillRef>
-          <a:effectRef idx="2">
-            <a:schemeClr val="accent1"/>
-          </a:effectRef>
-          <a:fontRef idx="minor">
-            <a:schemeClr val="lt1"/>
-          </a:fontRef>
-        </p:style>
-        <p:txBody>
-          <a:bodyPr rtlCol="0" anchor="ctr"/>
-          <a:lstStyle/>
-          <a:p>
-            <a:pPr algn="ctr"/>
-          </a:p>
-        </p:txBody>
-      </p:sp>
-      <p:sp>
-        <p:nvSpPr>
-          <p:cNvPr id="108" name="TextBox 107"/>
-          <p:cNvSpPr txBox="1"/>
-          <p:nvPr/>
-        </p:nvSpPr>
-        <p:spPr>
-          <a:xfrm>
-            <a:off x="3330702" y="8193024"/>
-            <a:ext cx="676656" cy="164592"/>
-          </a:xfrm>
-          <a:prstGeom prst="rect">
-            <a:avLst/>
-          </a:prstGeom>
-          <a:noFill/>
-        </p:spPr>
-        <p:txBody>
-          <a:bodyPr wrap="square" anchor="t" lIns="0" rIns="0" tIns="0" bIns="0">
-            <a:spAutoFit/>
-          </a:bodyPr>
-          <a:lstStyle/>
-          <a:p>
-            <a:pPr algn="ctr">
-              <a:lnSpc>
-                <a:spcPct val="112000"/>
-              </a:lnSpc>
-            </a:pPr>
-            <a:r>
-              <a:rPr sz="825" b="0">
-                <a:solidFill>
-                  <a:srgbClr val="555555"/>
-                </a:solidFill>
-                <a:latin typeface="Arial"/>
-                <a:ea typeface="Arial"/>
-              </a:rPr>
-              <a:t>'18  144</a:t>
-            </a:r>
-          </a:p>
-        </p:txBody>
-      </p:sp>
-      <p:sp>
-        <p:nvSpPr>
-          <p:cNvPr id="109" name="Rectangle 108"/>
-          <p:cNvSpPr/>
-          <p:nvPr/>
-        </p:nvSpPr>
-        <p:spPr>
-          <a:xfrm>
-            <a:off x="4155948" y="8110728"/>
-            <a:ext cx="310896" cy="64008"/>
-          </a:xfrm>
-          <a:prstGeom prst="rect">
-            <a:avLst/>
-          </a:prstGeom>
-          <a:solidFill>
-            <a:srgbClr val="AAB8E8"/>
-          </a:solidFill>
-          <a:ln>
-            <a:noFill/>
-          </a:ln>
-          <a:effectLst/>
-        </p:spPr>
-        <p:style>
-          <a:lnRef idx="1">
-            <a:schemeClr val="accent1"/>
-          </a:lnRef>
-          <a:fillRef idx="3">
-            <a:schemeClr val="accent1"/>
-          </a:fillRef>
-          <a:effectRef idx="2">
-            <a:schemeClr val="accent1"/>
-          </a:effectRef>
-          <a:fontRef idx="minor">
-            <a:schemeClr val="lt1"/>
-          </a:fontRef>
-        </p:style>
-        <p:txBody>
-          <a:bodyPr rtlCol="0" anchor="ctr"/>
-          <a:lstStyle/>
-          <a:p>
-            <a:pPr algn="ctr"/>
-          </a:p>
-        </p:txBody>
-      </p:sp>
-      <p:sp>
-        <p:nvSpPr>
-          <p:cNvPr id="110" name="TextBox 109"/>
-          <p:cNvSpPr txBox="1"/>
-          <p:nvPr/>
-        </p:nvSpPr>
-        <p:spPr>
-          <a:xfrm>
-            <a:off x="3973068" y="8193024"/>
-            <a:ext cx="676656" cy="164592"/>
-          </a:xfrm>
-          <a:prstGeom prst="rect">
-            <a:avLst/>
-          </a:prstGeom>
-          <a:noFill/>
-        </p:spPr>
-        <p:txBody>
-          <a:bodyPr wrap="square" anchor="t" lIns="0" rIns="0" tIns="0" bIns="0">
-            <a:spAutoFit/>
-          </a:bodyPr>
-          <a:lstStyle/>
-          <a:p>
-            <a:pPr algn="ctr">
-              <a:lnSpc>
-                <a:spcPct val="112000"/>
-              </a:lnSpc>
-            </a:pPr>
-            <a:r>
-              <a:rPr sz="825" b="0">
-                <a:solidFill>
-                  <a:srgbClr val="555555"/>
-                </a:solidFill>
-                <a:latin typeface="Arial"/>
-                <a:ea typeface="Arial"/>
-              </a:rPr>
-              <a:t>'21  256</a:t>
-            </a:r>
-          </a:p>
-        </p:txBody>
-      </p:sp>
-      <p:sp>
-        <p:nvSpPr>
-          <p:cNvPr id="111" name="Rectangle 110"/>
-          <p:cNvSpPr/>
-          <p:nvPr/>
-        </p:nvSpPr>
-        <p:spPr>
-          <a:xfrm>
-            <a:off x="4798314" y="8046720"/>
-            <a:ext cx="310896" cy="128016"/>
-          </a:xfrm>
-          <a:prstGeom prst="rect">
-            <a:avLst/>
-          </a:prstGeom>
-          <a:solidFill>
-            <a:srgbClr val="AAB8E8"/>
-          </a:solidFill>
-          <a:ln>
-            <a:noFill/>
-          </a:ln>
-          <a:effectLst/>
-        </p:spPr>
-        <p:style>
-          <a:lnRef idx="1">
-            <a:schemeClr val="accent1"/>
-          </a:lnRef>
-          <a:fillRef idx="3">
-            <a:schemeClr val="accent1"/>
-          </a:fillRef>
-          <a:effectRef idx="2">
-            <a:schemeClr val="accent1"/>
-          </a:effectRef>
-          <a:fontRef idx="minor">
-            <a:schemeClr val="lt1"/>
-          </a:fontRef>
-        </p:style>
-        <p:txBody>
-          <a:bodyPr rtlCol="0" anchor="ctr"/>
-          <a:lstStyle/>
-          <a:p>
-            <a:pPr algn="ctr"/>
-          </a:p>
-        </p:txBody>
-      </p:sp>
-      <p:sp>
-        <p:nvSpPr>
-          <p:cNvPr id="112" name="TextBox 111"/>
-          <p:cNvSpPr txBox="1"/>
-          <p:nvPr/>
-        </p:nvSpPr>
-        <p:spPr>
-          <a:xfrm>
-            <a:off x="4615434" y="8193024"/>
-            <a:ext cx="676656" cy="164592"/>
-          </a:xfrm>
-          <a:prstGeom prst="rect">
-            <a:avLst/>
-          </a:prstGeom>
-          <a:noFill/>
-        </p:spPr>
-        <p:txBody>
-          <a:bodyPr wrap="square" anchor="t" lIns="0" rIns="0" tIns="0" bIns="0">
-            <a:spAutoFit/>
-          </a:bodyPr>
-          <a:lstStyle/>
-          <a:p>
-            <a:pPr algn="ctr">
-              <a:lnSpc>
-                <a:spcPct val="112000"/>
-              </a:lnSpc>
-            </a:pPr>
-            <a:r>
-              <a:rPr sz="825" b="0">
-                <a:solidFill>
-                  <a:srgbClr val="555555"/>
-                </a:solidFill>
-                <a:latin typeface="Arial"/>
-                <a:ea typeface="Arial"/>
-              </a:rPr>
-              <a:t>'23  512</a:t>
-            </a:r>
-          </a:p>
-        </p:txBody>
-      </p:sp>
-      <p:sp>
-        <p:nvSpPr>
-          <p:cNvPr id="113" name="Rectangle 112"/>
-          <p:cNvSpPr/>
-          <p:nvPr/>
-        </p:nvSpPr>
-        <p:spPr>
-          <a:xfrm>
-            <a:off x="5440679" y="7918704"/>
-            <a:ext cx="310896" cy="256032"/>
-          </a:xfrm>
-          <a:prstGeom prst="rect">
-            <a:avLst/>
-          </a:prstGeom>
-          <a:solidFill>
-            <a:srgbClr val="1428A0"/>
-          </a:solidFill>
-          <a:ln>
-            <a:noFill/>
-          </a:ln>
-          <a:effectLst/>
-        </p:spPr>
-        <p:style>
-          <a:lnRef idx="1">
-            <a:schemeClr val="accent1"/>
-          </a:lnRef>
-          <a:fillRef idx="3">
-            <a:schemeClr val="accent1"/>
-          </a:fillRef>
-          <a:effectRef idx="2">
-            <a:schemeClr val="accent1"/>
-          </a:effectRef>
-          <a:fontRef idx="minor">
-            <a:schemeClr val="lt1"/>
-          </a:fontRef>
-        </p:style>
-        <p:txBody>
-          <a:bodyPr rtlCol="0" anchor="ctr"/>
-          <a:lstStyle/>
-          <a:p>
-            <a:pPr algn="ctr"/>
-          </a:p>
-        </p:txBody>
-      </p:sp>
-      <p:sp>
-        <p:nvSpPr>
-          <p:cNvPr id="114" name="TextBox 113"/>
-          <p:cNvSpPr txBox="1"/>
-          <p:nvPr/>
-        </p:nvSpPr>
-        <p:spPr>
-          <a:xfrm>
-            <a:off x="5257799" y="8193024"/>
-            <a:ext cx="676656" cy="164592"/>
-          </a:xfrm>
-          <a:prstGeom prst="rect">
-            <a:avLst/>
-          </a:prstGeom>
-          <a:noFill/>
-        </p:spPr>
-        <p:txBody>
-          <a:bodyPr wrap="square" anchor="t" lIns="0" rIns="0" tIns="0" bIns="0">
-            <a:spAutoFit/>
-          </a:bodyPr>
-          <a:lstStyle/>
-          <a:p>
-            <a:pPr algn="ctr">
-              <a:lnSpc>
-                <a:spcPct val="112000"/>
-              </a:lnSpc>
-            </a:pPr>
-            <a:r>
-              <a:rPr sz="825" b="1">
-                <a:solidFill>
-                  <a:srgbClr val="1A1A1A"/>
-                </a:solidFill>
-                <a:latin typeface="Arial"/>
-                <a:ea typeface="Arial"/>
-              </a:rPr>
-              <a:t>'25  1,024</a:t>
-            </a:r>
-          </a:p>
-        </p:txBody>
-      </p:sp>
-      <p:sp>
-        <p:nvSpPr>
-          <p:cNvPr id="115" name="Rectangle 114"/>
-          <p:cNvSpPr/>
-          <p:nvPr/>
-        </p:nvSpPr>
-        <p:spPr>
-          <a:xfrm>
-            <a:off x="6025896" y="7708392"/>
-            <a:ext cx="3535680" cy="731520"/>
-          </a:xfrm>
-          <a:prstGeom prst="rect">
-            <a:avLst/>
-          </a:prstGeom>
-          <a:solidFill>
-            <a:srgbClr val="FFFFFF"/>
-          </a:solidFill>
-          <a:ln w="9525">
-            <a:solidFill>
-              <a:srgbClr val="D9D9D9"/>
-            </a:solidFill>
-          </a:ln>
-          <a:effectLst/>
-        </p:spPr>
-        <p:style>
-          <a:lnRef idx="1">
-            <a:schemeClr val="accent1"/>
-          </a:lnRef>
-          <a:fillRef idx="3">
-            <a:schemeClr val="accent1"/>
-          </a:fillRef>
-          <a:effectRef idx="2">
-            <a:schemeClr val="accent1"/>
-          </a:effectRef>
-          <a:fontRef idx="minor">
-            <a:schemeClr val="lt1"/>
-          </a:fontRef>
-        </p:style>
-        <p:txBody>
-          <a:bodyPr rtlCol="0" anchor="ctr"/>
-          <a:lstStyle/>
-          <a:p>
-            <a:pPr algn="ctr"/>
-          </a:p>
-        </p:txBody>
-      </p:sp>
-      <p:sp>
-        <p:nvSpPr>
-          <p:cNvPr id="116" name="TextBox 115"/>
-          <p:cNvSpPr txBox="1"/>
-          <p:nvPr/>
-        </p:nvSpPr>
-        <p:spPr>
-          <a:xfrm>
-            <a:off x="6135624" y="7744967"/>
-            <a:ext cx="3316224" cy="164592"/>
-          </a:xfrm>
-          <a:prstGeom prst="rect">
-            <a:avLst/>
-          </a:prstGeom>
-          <a:noFill/>
-        </p:spPr>
-        <p:txBody>
-          <a:bodyPr wrap="square" anchor="t" lIns="0" rIns="0" tIns="0" bIns="0">
-            <a:spAutoFit/>
-          </a:bodyPr>
-          <a:lstStyle/>
-          <a:p>
-            <a:pPr algn="l">
-              <a:lnSpc>
-                <a:spcPct val="112000"/>
-              </a:lnSpc>
-            </a:pPr>
-            <a:r>
-              <a:rPr sz="875" b="0">
-                <a:solidFill>
-                  <a:srgbClr val="8A8A8A"/>
-                </a:solidFill>
-                <a:latin typeface="Arial"/>
-                <a:ea typeface="Arial"/>
-              </a:rPr>
-              <a:t>다이 (단품)</a:t>
-            </a:r>
-          </a:p>
-        </p:txBody>
-      </p:sp>
-      <p:sp>
-        <p:nvSpPr>
-          <p:cNvPr id="117" name="TextBox 116"/>
-          <p:cNvSpPr txBox="1"/>
-          <p:nvPr/>
-        </p:nvSpPr>
-        <p:spPr>
-          <a:xfrm>
-            <a:off x="6135624" y="7900416"/>
-            <a:ext cx="3316224" cy="201168"/>
-          </a:xfrm>
-          <a:prstGeom prst="rect">
-            <a:avLst/>
-          </a:prstGeom>
-          <a:noFill/>
-        </p:spPr>
-        <p:txBody>
-          <a:bodyPr wrap="square" anchor="t" lIns="0" rIns="0" tIns="0" bIns="0">
-            <a:spAutoFit/>
-          </a:bodyPr>
-          <a:lstStyle/>
-          <a:p>
-            <a:pPr algn="l">
-              <a:lnSpc>
-                <a:spcPct val="112000"/>
-              </a:lnSpc>
-            </a:pPr>
-            <a:r>
-              <a:rPr sz="1125" b="1">
-                <a:solidFill>
-                  <a:srgbClr val="1A1A1A"/>
-                </a:solidFill>
-                <a:latin typeface="Arial"/>
-                <a:ea typeface="Arial"/>
-              </a:rPr>
-              <a:t>다이 수 8배 ↑ → 다이 고장률 8배 ↓ 필요</a:t>
-            </a:r>
-          </a:p>
-        </p:txBody>
-      </p:sp>
-      <p:sp>
-        <p:nvSpPr>
-          <p:cNvPr id="118" name="TextBox 117"/>
-          <p:cNvSpPr txBox="1"/>
-          <p:nvPr/>
-        </p:nvSpPr>
-        <p:spPr>
-          <a:xfrm>
-            <a:off x="6135624" y="8101583"/>
-            <a:ext cx="3316224" cy="320040"/>
-          </a:xfrm>
-          <a:prstGeom prst="rect">
-            <a:avLst/>
-          </a:prstGeom>
-          <a:noFill/>
-        </p:spPr>
-        <p:txBody>
-          <a:bodyPr wrap="square" anchor="t" lIns="0" rIns="0" tIns="0" bIns="0">
-            <a:spAutoFit/>
-          </a:bodyPr>
-          <a:lstStyle/>
-          <a:p>
-            <a:pPr algn="l">
-              <a:lnSpc>
-                <a:spcPct val="100000"/>
-              </a:lnSpc>
-            </a:pPr>
-            <a:r>
-              <a:rPr sz="825" b="0">
-                <a:solidFill>
-                  <a:srgbClr val="555555"/>
-                </a:solidFill>
-                <a:latin typeface="Arial"/>
-                <a:ea typeface="Arial"/>
-              </a:rPr>
-              <a:t>SSD 고장률 ≈ N × 다이 고장률 · 칩 면적↔수율과 같은 원리 · 다이 고장률 개선은 기술적 한계</a:t>
-            </a:r>
-          </a:p>
-        </p:txBody>
-      </p:sp>
-      <p:sp>
-        <p:nvSpPr>
-          <p:cNvPr id="119" name="Right Arrow 118"/>
-          <p:cNvSpPr/>
-          <p:nvPr/>
-        </p:nvSpPr>
-        <p:spPr>
-          <a:xfrm>
-            <a:off x="9634728" y="7982712"/>
-            <a:ext cx="219456" cy="182880"/>
-          </a:xfrm>
-          <a:prstGeom prst="rightArrow">
-            <a:avLst/>
-          </a:prstGeom>
-          <a:solidFill>
-            <a:srgbClr val="1428A0"/>
-          </a:solidFill>
-          <a:ln>
-            <a:noFill/>
-          </a:ln>
-          <a:effectLst/>
-        </p:spPr>
-        <p:style>
-          <a:lnRef idx="1">
-            <a:schemeClr val="accent1"/>
-          </a:lnRef>
-          <a:fillRef idx="3">
-            <a:schemeClr val="accent1"/>
-          </a:fillRef>
-          <a:effectRef idx="2">
-            <a:schemeClr val="accent1"/>
-          </a:effectRef>
-          <a:fontRef idx="minor">
-            <a:schemeClr val="lt1"/>
-          </a:fontRef>
-        </p:style>
-        <p:txBody>
-          <a:bodyPr rtlCol="0" anchor="ctr"/>
-          <a:lstStyle/>
-          <a:p>
-            <a:pPr algn="ctr"/>
+              <a:t>패리티 · 예비 용량 오버헤드가 다이 수와 함께 증가</a:t>
+            </a:r>
           </a:p>
         </p:txBody>
       </p:sp>
@@ -8775,216 +8853,8 @@
         </p:nvSpPr>
         <p:spPr>
           <a:xfrm>
-            <a:off x="9927336" y="7708392"/>
-            <a:ext cx="3535680" cy="731520"/>
-          </a:xfrm>
-          <a:prstGeom prst="rect">
-            <a:avLst/>
-          </a:prstGeom>
-          <a:solidFill>
-            <a:srgbClr val="AAB8E8"/>
-          </a:solidFill>
-          <a:ln>
-            <a:noFill/>
-          </a:ln>
-          <a:effectLst/>
-        </p:spPr>
-        <p:style>
-          <a:lnRef idx="1">
-            <a:schemeClr val="accent1"/>
-          </a:lnRef>
-          <a:fillRef idx="3">
-            <a:schemeClr val="accent1"/>
-          </a:fillRef>
-          <a:effectRef idx="2">
-            <a:schemeClr val="accent1"/>
-          </a:effectRef>
-          <a:fontRef idx="minor">
-            <a:schemeClr val="lt1"/>
-          </a:fontRef>
-        </p:style>
-        <p:txBody>
-          <a:bodyPr rtlCol="0" anchor="ctr"/>
-          <a:lstStyle/>
-          <a:p>
-            <a:pPr algn="ctr"/>
-          </a:p>
-        </p:txBody>
-      </p:sp>
-      <p:sp>
-        <p:nvSpPr>
-          <p:cNvPr id="121" name="TextBox 120"/>
-          <p:cNvSpPr txBox="1"/>
-          <p:nvPr/>
-        </p:nvSpPr>
-        <p:spPr>
-          <a:xfrm>
-            <a:off x="10037064" y="7744967"/>
-            <a:ext cx="3316224" cy="164592"/>
-          </a:xfrm>
-          <a:prstGeom prst="rect">
-            <a:avLst/>
-          </a:prstGeom>
-          <a:noFill/>
-        </p:spPr>
-        <p:txBody>
-          <a:bodyPr wrap="square" anchor="t" lIns="0" rIns="0" tIns="0" bIns="0">
-            <a:spAutoFit/>
-          </a:bodyPr>
-          <a:lstStyle/>
-          <a:p>
-            <a:pPr algn="l">
-              <a:lnSpc>
-                <a:spcPct val="112000"/>
-              </a:lnSpc>
-            </a:pPr>
-            <a:r>
-              <a:rPr sz="875" b="0">
-                <a:solidFill>
-                  <a:srgbClr val="1A1A1A"/>
-                </a:solidFill>
-                <a:latin typeface="Arial"/>
-                <a:ea typeface="Arial"/>
-              </a:rPr>
-              <a:t>SSD 내부 (현재 해법)</a:t>
-            </a:r>
-          </a:p>
-        </p:txBody>
-      </p:sp>
-      <p:sp>
-        <p:nvSpPr>
-          <p:cNvPr id="122" name="TextBox 121"/>
-          <p:cNvSpPr txBox="1"/>
-          <p:nvPr/>
-        </p:nvSpPr>
-        <p:spPr>
-          <a:xfrm>
-            <a:off x="10037064" y="7900416"/>
-            <a:ext cx="3316224" cy="201168"/>
-          </a:xfrm>
-          <a:prstGeom prst="rect">
-            <a:avLst/>
-          </a:prstGeom>
-          <a:noFill/>
-        </p:spPr>
-        <p:txBody>
-          <a:bodyPr wrap="square" anchor="t" lIns="0" rIns="0" tIns="0" bIns="0">
-            <a:spAutoFit/>
-          </a:bodyPr>
-          <a:lstStyle/>
-          <a:p>
-            <a:pPr algn="l">
-              <a:lnSpc>
-                <a:spcPct val="112000"/>
-              </a:lnSpc>
-            </a:pPr>
-            <a:r>
-              <a:rPr sz="1125" b="1">
-                <a:solidFill>
-                  <a:srgbClr val="1A1A1A"/>
-                </a:solidFill>
-                <a:latin typeface="Arial"/>
-                <a:ea typeface="Arial"/>
-              </a:rPr>
-              <a:t>다이 RAID · 여분 다이 · 다이 은퇴</a:t>
-            </a:r>
-          </a:p>
-        </p:txBody>
-      </p:sp>
-      <p:sp>
-        <p:nvSpPr>
-          <p:cNvPr id="123" name="TextBox 122"/>
-          <p:cNvSpPr txBox="1"/>
-          <p:nvPr/>
-        </p:nvSpPr>
-        <p:spPr>
-          <a:xfrm>
-            <a:off x="10037064" y="8101583"/>
-            <a:ext cx="3316224" cy="320040"/>
-          </a:xfrm>
-          <a:prstGeom prst="rect">
-            <a:avLst/>
-          </a:prstGeom>
-          <a:noFill/>
-        </p:spPr>
-        <p:txBody>
-          <a:bodyPr wrap="square" anchor="t" lIns="0" rIns="0" tIns="0" bIns="0">
-            <a:spAutoFit/>
-          </a:bodyPr>
-          <a:lstStyle/>
-          <a:p>
-            <a:pPr algn="l">
-              <a:lnSpc>
-                <a:spcPct val="100000"/>
-              </a:lnSpc>
-            </a:pPr>
-            <a:r>
-              <a:rPr sz="825" b="0">
-                <a:solidFill>
-                  <a:srgbClr val="555555"/>
-                </a:solidFill>
-                <a:latin typeface="Arial"/>
-                <a:ea typeface="Arial"/>
-              </a:rPr>
-              <a:t>Micron RAIN(XOR 패리티 다이) · 삼성 Fail-in-Place(PM1733, 감량 운영) · 패리티·예비 용량 오버헤드 ↑</a:t>
-            </a:r>
-          </a:p>
-        </p:txBody>
-      </p:sp>
-      <p:sp>
-        <p:nvSpPr>
-          <p:cNvPr id="124" name="Right Arrow 123"/>
-          <p:cNvSpPr/>
-          <p:nvPr/>
-        </p:nvSpPr>
-        <p:spPr>
-          <a:xfrm>
-            <a:off x="13536168" y="7982712"/>
-            <a:ext cx="219456" cy="182880"/>
-          </a:xfrm>
-          <a:prstGeom prst="rightArrow">
-            <a:avLst/>
-          </a:prstGeom>
-          <a:solidFill>
-            <a:srgbClr val="AAB8E8"/>
-          </a:solidFill>
-          <a:ln>
-            <a:noFill/>
-          </a:ln>
-          <a:effectLst/>
-        </p:spPr>
-        <p:style>
-          <a:lnRef idx="1">
-            <a:schemeClr val="accent1"/>
-          </a:lnRef>
-          <a:fillRef idx="3">
-            <a:schemeClr val="accent1"/>
-          </a:fillRef>
-          <a:effectRef idx="2">
-            <a:schemeClr val="accent1"/>
-          </a:effectRef>
-          <a:fontRef idx="minor">
-            <a:schemeClr val="lt1"/>
-          </a:fontRef>
-        </p:style>
-        <p:txBody>
-          <a:bodyPr rtlCol="0" anchor="ctr"/>
-          <a:lstStyle/>
-          <a:p>
-            <a:pPr algn="ctr"/>
-          </a:p>
-        </p:txBody>
-      </p:sp>
-      <p:sp>
-        <p:nvSpPr>
-          <p:cNvPr id="125" name="Rectangle 124"/>
-          <p:cNvSpPr/>
-          <p:nvPr/>
-        </p:nvSpPr>
-        <p:spPr>
-          <a:xfrm>
-            <a:off x="13828776" y="7708392"/>
-            <a:ext cx="3535680" cy="731520"/>
+            <a:off x="13889736" y="6345936"/>
+            <a:ext cx="3675888" cy="2139696"/>
           </a:xfrm>
           <a:prstGeom prst="rect">
             <a:avLst/>
@@ -9024,14 +8894,14 @@
       </p:sp>
       <p:sp>
         <p:nvSpPr>
-          <p:cNvPr id="126" name="TextBox 125"/>
-          <p:cNvSpPr txBox="1"/>
-          <p:nvPr/>
-        </p:nvSpPr>
-        <p:spPr>
-          <a:xfrm>
-            <a:off x="13938504" y="7744967"/>
-            <a:ext cx="3316224" cy="164592"/>
+          <p:cNvPr id="121" name="TextBox 120"/>
+          <p:cNvSpPr txBox="1"/>
+          <p:nvPr/>
+        </p:nvSpPr>
+        <p:spPr>
+          <a:xfrm>
+            <a:off x="14017752" y="6455664"/>
+            <a:ext cx="2377440" cy="182880"/>
           </a:xfrm>
           <a:prstGeom prst="rect">
             <a:avLst/>
@@ -9050,28 +8920,28 @@
               </a:lnSpc>
             </a:pPr>
             <a:r>
-              <a:rPr sz="875" b="0">
+              <a:rPr sz="975" b="0">
                 <a:solidFill>
                   <a:srgbClr val="1428A0"/>
                 </a:solidFill>
                 <a:latin typeface="Arial"/>
                 <a:ea typeface="Arial"/>
               </a:rPr>
-              <a:t>상위 계층 (SSD 단독 한계 시)</a:t>
-            </a:r>
-          </a:p>
-        </p:txBody>
-      </p:sp>
-      <p:sp>
-        <p:nvSpPr>
-          <p:cNvPr id="127" name="TextBox 126"/>
-          <p:cNvSpPr txBox="1"/>
-          <p:nvPr/>
-        </p:nvSpPr>
-        <p:spPr>
-          <a:xfrm>
-            <a:off x="13938504" y="7900416"/>
-            <a:ext cx="3316224" cy="201168"/>
+              <a:t>SSD 단독 한계 시 · 상위 계층</a:t>
+            </a:r>
+          </a:p>
+        </p:txBody>
+      </p:sp>
+      <p:sp>
+        <p:nvSpPr>
+          <p:cNvPr id="122" name="TextBox 121"/>
+          <p:cNvSpPr txBox="1"/>
+          <p:nvPr/>
+        </p:nvSpPr>
+        <p:spPr>
+          <a:xfrm>
+            <a:off x="16157448" y="6455664"/>
+            <a:ext cx="1280160" cy="201168"/>
           </a:xfrm>
           <a:prstGeom prst="rect">
             <a:avLst/>
@@ -9084,13 +8954,53 @@
           </a:bodyPr>
           <a:lstStyle/>
           <a:p>
+            <a:pPr algn="r">
+              <a:lnSpc>
+                <a:spcPct val="112000"/>
+              </a:lnSpc>
+            </a:pPr>
+            <a:r>
+              <a:rPr sz="975" b="1">
+                <a:solidFill>
+                  <a:srgbClr val="1428A0"/>
+                </a:solidFill>
+                <a:latin typeface="Arial"/>
+                <a:ea typeface="Arial"/>
+              </a:rPr>
+              <a:t>준비 중</a:t>
+            </a:r>
+          </a:p>
+        </p:txBody>
+      </p:sp>
+      <p:sp>
+        <p:nvSpPr>
+          <p:cNvPr id="123" name="TextBox 122"/>
+          <p:cNvSpPr txBox="1"/>
+          <p:nvPr/>
+        </p:nvSpPr>
+        <p:spPr>
+          <a:xfrm>
+            <a:off x="14017752" y="6675120"/>
+            <a:ext cx="3419856" cy="237744"/>
+          </a:xfrm>
+          <a:prstGeom prst="rect">
+            <a:avLst/>
+          </a:prstGeom>
+          <a:noFill/>
+        </p:spPr>
+        <p:txBody>
+          <a:bodyPr wrap="square" anchor="t" lIns="0" rIns="0" tIns="0" bIns="0">
+            <a:spAutoFit/>
+          </a:bodyPr>
+          <a:lstStyle/>
+          <a:p>
             <a:pPr algn="l">
               <a:lnSpc>
                 <a:spcPct val="112000"/>
               </a:lnSpc>
             </a:pPr>
             <a:r>
-              <a:rPr sz="1125" b="1">
+              <a:rPr sz="1275" b="1">
                 <a:solidFill>
                   <a:srgbClr val="1A1A1A"/>
                 </a:solidFill>
@@ -9104,56 +9014,16 @@
       </p:sp>
       <p:sp>
         <p:nvSpPr>
-          <p:cNvPr id="128" name="TextBox 127"/>
-          <p:cNvSpPr txBox="1"/>
-          <p:nvPr/>
-        </p:nvSpPr>
-        <p:spPr>
-          <a:xfrm>
-            <a:off x="13938504" y="8101583"/>
-            <a:ext cx="3316224" cy="320040"/>
-          </a:xfrm>
-          <a:prstGeom prst="rect">
-            <a:avLst/>
-          </a:prstGeom>
-          <a:noFill/>
-        </p:spPr>
-        <p:txBody>
-          <a:bodyPr wrap="square" anchor="t" lIns="0" rIns="0" tIns="0" bIns="0">
-            <a:spAutoFit/>
-          </a:bodyPr>
-          <a:lstStyle/>
-          <a:p>
-            <a:pPr algn="l">
-              <a:lnSpc>
-                <a:spcPct val="100000"/>
-              </a:lnSpc>
-            </a:pPr>
-            <a:r>
-              <a:rPr sz="825" b="0">
-                <a:solidFill>
-                  <a:srgbClr val="555555"/>
-                </a:solidFill>
-                <a:latin typeface="Arial"/>
-                <a:ea typeface="Arial"/>
-              </a:rPr>
-              <a:t>OCP SMART XOR 복구 카운트(호스트 관측) · 플랫폼 fail-in-place(MS Hyrax) · 드라이브 간 소거 부호</a:t>
-            </a:r>
-          </a:p>
-        </p:txBody>
-      </p:sp>
-      <p:sp>
-        <p:nvSpPr>
-          <p:cNvPr id="129" name="Rectangle 128"/>
+          <p:cNvPr id="124" name="Oval 123"/>
           <p:cNvSpPr/>
           <p:nvPr/>
         </p:nvSpPr>
         <p:spPr>
           <a:xfrm>
-            <a:off x="722376" y="8613648"/>
-            <a:ext cx="16843248" cy="731520"/>
-          </a:xfrm>
-          <a:prstGeom prst="rect">
+            <a:off x="14017752" y="7077456"/>
+            <a:ext cx="109728" cy="109728"/>
+          </a:xfrm>
+          <a:prstGeom prst="ellipse">
             <a:avLst/>
           </a:prstGeom>
           <a:solidFill>
@@ -9188,7 +9058,289 @@
       </p:sp>
       <p:sp>
         <p:nvSpPr>
-          <p:cNvPr id="130" name="TextBox 129"/>
+          <p:cNvPr id="125" name="TextBox 124"/>
+          <p:cNvSpPr txBox="1"/>
+          <p:nvPr/>
+        </p:nvSpPr>
+        <p:spPr>
+          <a:xfrm>
+            <a:off x="14218920" y="7004304"/>
+            <a:ext cx="3218688" cy="384048"/>
+          </a:xfrm>
+          <a:prstGeom prst="rect">
+            <a:avLst/>
+          </a:prstGeom>
+          <a:noFill/>
+        </p:spPr>
+        <p:txBody>
+          <a:bodyPr wrap="square" anchor="t" lIns="0" rIns="0" tIns="0" bIns="0">
+            <a:spAutoFit/>
+          </a:bodyPr>
+          <a:lstStyle/>
+          <a:p>
+            <a:pPr algn="l">
+              <a:lnSpc>
+                <a:spcPct val="100000"/>
+              </a:lnSpc>
+            </a:pPr>
+            <a:r>
+              <a:rPr sz="975" b="1">
+                <a:solidFill>
+                  <a:srgbClr val="1A1A1A"/>
+                </a:solidFill>
+                <a:latin typeface="Arial"/>
+                <a:ea typeface="Arial"/>
+              </a:rPr>
+              <a:t>호스트 관측  </a:t>
+            </a:r>
+            <a:r>
+              <a:rPr sz="900" b="0">
+                <a:solidFill>
+                  <a:srgbClr val="555555"/>
+                </a:solidFill>
+                <a:latin typeface="Arial"/>
+                <a:ea typeface="Arial"/>
+              </a:rPr>
+              <a:t>OCP SMART XOR 복구 카운트로 다이 복구 이벤트를 하이퍼스케일러가 감시</a:t>
+            </a:r>
+          </a:p>
+        </p:txBody>
+      </p:sp>
+      <p:sp>
+        <p:nvSpPr>
+          <p:cNvPr id="126" name="Oval 125"/>
+          <p:cNvSpPr/>
+          <p:nvPr/>
+        </p:nvSpPr>
+        <p:spPr>
+          <a:xfrm>
+            <a:off x="14017752" y="7534656"/>
+            <a:ext cx="109728" cy="109728"/>
+          </a:xfrm>
+          <a:prstGeom prst="ellipse">
+            <a:avLst/>
+          </a:prstGeom>
+          <a:solidFill>
+            <a:srgbClr val="1428A0"/>
+          </a:solidFill>
+          <a:ln>
+            <a:noFill/>
+          </a:ln>
+          <a:effectLst/>
+        </p:spPr>
+        <p:style>
+          <a:lnRef idx="1">
+            <a:schemeClr val="accent1"/>
+          </a:lnRef>
+          <a:fillRef idx="3">
+            <a:schemeClr val="accent1"/>
+          </a:fillRef>
+          <a:effectRef idx="2">
+            <a:schemeClr val="accent1"/>
+          </a:effectRef>
+          <a:fontRef idx="minor">
+            <a:schemeClr val="lt1"/>
+          </a:fontRef>
+        </p:style>
+        <p:txBody>
+          <a:bodyPr rtlCol="0" anchor="ctr"/>
+          <a:lstStyle/>
+          <a:p>
+            <a:pPr algn="ctr"/>
+          </a:p>
+        </p:txBody>
+      </p:sp>
+      <p:sp>
+        <p:nvSpPr>
+          <p:cNvPr id="127" name="TextBox 126"/>
+          <p:cNvSpPr txBox="1"/>
+          <p:nvPr/>
+        </p:nvSpPr>
+        <p:spPr>
+          <a:xfrm>
+            <a:off x="14218920" y="7461504"/>
+            <a:ext cx="3218688" cy="384048"/>
+          </a:xfrm>
+          <a:prstGeom prst="rect">
+            <a:avLst/>
+          </a:prstGeom>
+          <a:noFill/>
+        </p:spPr>
+        <p:txBody>
+          <a:bodyPr wrap="square" anchor="t" lIns="0" rIns="0" tIns="0" bIns="0">
+            <a:spAutoFit/>
+          </a:bodyPr>
+          <a:lstStyle/>
+          <a:p>
+            <a:pPr algn="l">
+              <a:lnSpc>
+                <a:spcPct val="100000"/>
+              </a:lnSpc>
+            </a:pPr>
+            <a:r>
+              <a:rPr sz="975" b="1">
+                <a:solidFill>
+                  <a:srgbClr val="1A1A1A"/>
+                </a:solidFill>
+                <a:latin typeface="Arial"/>
+                <a:ea typeface="Arial"/>
+              </a:rPr>
+              <a:t>플랫폼 수용  </a:t>
+            </a:r>
+            <a:r>
+              <a:rPr sz="900" b="0">
+                <a:solidFill>
+                  <a:srgbClr val="555555"/>
+                </a:solidFill>
+                <a:latin typeface="Arial"/>
+                <a:ea typeface="Arial"/>
+              </a:rPr>
+              <a:t>고장 부품의 감량 운영을 스케줄러가 흡수 (Microsoft Hyrax, 수리 -50~60%)</a:t>
+            </a:r>
+          </a:p>
+        </p:txBody>
+      </p:sp>
+      <p:sp>
+        <p:nvSpPr>
+          <p:cNvPr id="128" name="Oval 127"/>
+          <p:cNvSpPr/>
+          <p:nvPr/>
+        </p:nvSpPr>
+        <p:spPr>
+          <a:xfrm>
+            <a:off x="14017752" y="7991856"/>
+            <a:ext cx="109728" cy="109728"/>
+          </a:xfrm>
+          <a:prstGeom prst="ellipse">
+            <a:avLst/>
+          </a:prstGeom>
+          <a:solidFill>
+            <a:srgbClr val="1428A0"/>
+          </a:solidFill>
+          <a:ln>
+            <a:noFill/>
+          </a:ln>
+          <a:effectLst/>
+        </p:spPr>
+        <p:style>
+          <a:lnRef idx="1">
+            <a:schemeClr val="accent1"/>
+          </a:lnRef>
+          <a:fillRef idx="3">
+            <a:schemeClr val="accent1"/>
+          </a:fillRef>
+          <a:effectRef idx="2">
+            <a:schemeClr val="accent1"/>
+          </a:effectRef>
+          <a:fontRef idx="minor">
+            <a:schemeClr val="lt1"/>
+          </a:fontRef>
+        </p:style>
+        <p:txBody>
+          <a:bodyPr rtlCol="0" anchor="ctr"/>
+          <a:lstStyle/>
+          <a:p>
+            <a:pPr algn="ctr"/>
+          </a:p>
+        </p:txBody>
+      </p:sp>
+      <p:sp>
+        <p:nvSpPr>
+          <p:cNvPr id="129" name="TextBox 128"/>
+          <p:cNvSpPr txBox="1"/>
+          <p:nvPr/>
+        </p:nvSpPr>
+        <p:spPr>
+          <a:xfrm>
+            <a:off x="14218920" y="7918704"/>
+            <a:ext cx="3218688" cy="384048"/>
+          </a:xfrm>
+          <a:prstGeom prst="rect">
+            <a:avLst/>
+          </a:prstGeom>
+          <a:noFill/>
+        </p:spPr>
+        <p:txBody>
+          <a:bodyPr wrap="square" anchor="t" lIns="0" rIns="0" tIns="0" bIns="0">
+            <a:spAutoFit/>
+          </a:bodyPr>
+          <a:lstStyle/>
+          <a:p>
+            <a:pPr algn="l">
+              <a:lnSpc>
+                <a:spcPct val="100000"/>
+              </a:lnSpc>
+            </a:pPr>
+            <a:r>
+              <a:rPr sz="975" b="1">
+                <a:solidFill>
+                  <a:srgbClr val="1A1A1A"/>
+                </a:solidFill>
+                <a:latin typeface="Arial"/>
+                <a:ea typeface="Arial"/>
+              </a:rPr>
+              <a:t>드라이브 간  </a:t>
+            </a:r>
+            <a:r>
+              <a:rPr sz="900" b="0">
+                <a:solidFill>
+                  <a:srgbClr val="555555"/>
+                </a:solidFill>
+                <a:latin typeface="Arial"/>
+                <a:ea typeface="Arial"/>
+              </a:rPr>
+              <a:t>소거 부호 · 복제가 SSD 단위 고장을 이미 흡수</a:t>
+            </a:r>
+          </a:p>
+        </p:txBody>
+      </p:sp>
+      <p:sp>
+        <p:nvSpPr>
+          <p:cNvPr id="130" name="Rectangle 129"/>
+          <p:cNvSpPr/>
+          <p:nvPr/>
+        </p:nvSpPr>
+        <p:spPr>
+          <a:xfrm>
+            <a:off x="722376" y="8613648"/>
+            <a:ext cx="16843248" cy="731520"/>
+          </a:xfrm>
+          <a:prstGeom prst="rect">
+            <a:avLst/>
+          </a:prstGeom>
+          <a:solidFill>
+            <a:srgbClr val="1428A0"/>
+          </a:solidFill>
+          <a:ln>
+            <a:noFill/>
+          </a:ln>
+          <a:effectLst/>
+        </p:spPr>
+        <p:style>
+          <a:lnRef idx="1">
+            <a:schemeClr val="accent1"/>
+          </a:lnRef>
+          <a:fillRef idx="3">
+            <a:schemeClr val="accent1"/>
+          </a:fillRef>
+          <a:effectRef idx="2">
+            <a:schemeClr val="accent1"/>
+          </a:effectRef>
+          <a:fontRef idx="minor">
+            <a:schemeClr val="lt1"/>
+          </a:fontRef>
+        </p:style>
+        <p:txBody>
+          <a:bodyPr rtlCol="0" anchor="ctr"/>
+          <a:lstStyle/>
+          <a:p>
+            <a:pPr algn="ctr"/>
+          </a:p>
+        </p:txBody>
+      </p:sp>
+      <p:sp>
+        <p:nvSpPr>
+          <p:cNvPr id="131" name="TextBox 130"/>
           <p:cNvSpPr txBox="1"/>
           <p:nvPr/>
         </p:nvSpPr>
@@ -9228,7 +9380,7 @@
       </p:sp>
       <p:sp>
         <p:nvSpPr>
-          <p:cNvPr id="131" name="TextBox 130"/>
+          <p:cNvPr id="132" name="TextBox 131"/>
           <p:cNvSpPr txBox="1"/>
           <p:nvPr/>
         </p:nvSpPr>
@@ -9285,7 +9437,7 @@
       </p:sp>
       <p:sp>
         <p:nvSpPr>
-          <p:cNvPr id="132" name="Rectangle 131"/>
+          <p:cNvPr id="133" name="Rectangle 132"/>
           <p:cNvSpPr/>
           <p:nvPr/>
         </p:nvSpPr>
@@ -9329,7 +9481,7 @@
       </p:sp>
       <p:sp>
         <p:nvSpPr>
-          <p:cNvPr id="133" name="Rectangle 132"/>
+          <p:cNvPr id="134" name="Rectangle 133"/>
           <p:cNvSpPr/>
           <p:nvPr/>
         </p:nvSpPr>
@@ -9373,7 +9525,7 @@
       </p:sp>
       <p:sp>
         <p:nvSpPr>
-          <p:cNvPr id="134" name="TextBox 133"/>
+          <p:cNvPr id="135" name="TextBox 134"/>
           <p:cNvSpPr txBox="1"/>
           <p:nvPr/>
         </p:nvSpPr>
@@ -9430,7 +9582,7 @@
       </p:sp>
       <p:sp>
         <p:nvSpPr>
-          <p:cNvPr id="135" name="TextBox 134"/>
+          <p:cNvPr id="136" name="TextBox 135"/>
           <p:cNvSpPr txBox="1"/>
           <p:nvPr/>
         </p:nvSpPr>
@@ -9470,7 +9622,7 @@
       </p:sp>
       <p:sp>
         <p:nvSpPr>
-          <p:cNvPr id="136" name="TextBox 135"/>
+          <p:cNvPr id="137" name="TextBox 136"/>
           <p:cNvSpPr txBox="1"/>
           <p:nvPr/>
         </p:nvSpPr>

--- a/outputs/presentation/qlc-ssd-strategy.pptx
+++ b/outputs/presentation/qlc-ssd-strategy.pptx
@@ -505,7 +505,7 @@
           <a:lstStyle/>
           <a:p>
             <a:r>
-              <a:t>1장은 문제 제기입니다. 두 다운턴의 교훈에서 출발해 지금의 요구가 어디로 이동했는지, 왜 해법이 필요한지를 보입니다. 상단 타임라인은 DT19(재고 조정 국면, 매출 낙폭 -37.6%)와 DT23(최대 낙폭 -45%, 진앙 eSSD) 두 다운턴 구간과 QLC eSSD 연혁을 동일 시간축에 배치한 것입니다. 교훈 1, 수요 센싱: 수요 신호는 발주보다 약 2년 선행하여 고객의 규격·표준·소스 코드에 나타납니다. DT23 국면인 4Q22에 eSSD 매출이 27% 감소하는 동안 Meta·Google은 데이터 배치 표준을 비준했고, 비트 출하는 2년 뒤인 2024년에 30EB로 급증했습니다. 현재의 등가 신호는 KV 캐시 관리자 4종의 코드에 배치·내구성 규격이 미정의라는 사실이며, 규격 정의 주체가 선점 가능한 구간입니다. 교훈 2, 고객 협업: 규격 정의에 참여한 공급자가 적중했습니다. Solidigm은 61TB QLC를 삼성보다 12개월 먼저 출시했고, HBM4는 NVIDIA와 규격을 공동 정의한 SK hynix가 주도권을 확보했습니다. 교훈 3, 의사결정 시점: 직전 다운턴의 결정이 다음 다운턴의 초기 조건이 됩니다. DT19의 무감산 성공 경험이 DT23 국면 오판으로, DT19의 HBM 조직 축소가 DT23 회복기 주도권 상실로 이어졌습니다. 차기 전환점은 2027년 하반기 가격 정상화 국면입니다. 우측 문제 제기 패널은 요구의 이동입니다. 세 국면의 구매 기준은 일관되게 용량 계층의 TB당 TCO였고(초기 원가·랙 밀도, 현재 전력·공급 확보), 향후 국면의 기준은 GPU당 컨텍스트 용량과 토큰당 비용입니다. 바뀐 것은 워크로드의 쓰기 비중입니다. 초기 국면은 읽기 중심이라 0.3~0.6 DWPD로 충족됐지만, KV 캐시 SSD 오프로드가 만드는 추론 캐시 계층은 쓰기 집약적이어서 현재 TLC 1~3 DWPD가 담당합니다. 용량은 61TB에서 122~245TB로 커졌습니다. 수요 모델은 QLC 비트가 2025년 대비 2030년 10배, 2030년 추론 캐시 계층 수요는 350EB이며, 요구 1~3 DWPD와 QLC 정격 0.075~0.6 DWPD 사이에는 10~40배 격차가 있습니다. 결론: 대용량 QLC로 1~3 DWPD를 충족할 해법이 필요합니다. 송용호 AX/PI센터장의 인용은 그 해법이 고객 시스템 안에서 나와야 하는 이유입니다. 지금까지 이런 문제를 어느 계층이 풀어 왔는지가 2장입니다. 근거는 위키 qlc-ssd-market.md §3.4·§3.5, 수요 모델은 §4.3.</a:t>
+              <a:t>1장은 문제 제기입니다. 결론은 내리지 않고, 고용량 QLC에서 DWPD를 높일 해법이 필요한 상황임을 세웁니다. 상단 타임라인의 세 구간이 아래 세 패널과 정렬돼 있습니다. 과거의 교훈, 지금 요구의 이동, 그리고 해법이 필요한 문제입니다. 왼쪽 패널, 교훈. DT19(재고 조정, -37.6%)와 DT23(최대 낙폭 -45%, 진앙 eSSD)에서 세 가지를 배웠습니다. 교훈 1 수요 센싱: 수요 신호는 발주보다 약 2년 먼저 고객의 규격·표준·소스 코드에 나타납니다. 2022년 12월 데이터 배치 표준 비준이 2024년 비트 출하 30EB로 이어졌고, 지금의 등가 신호는 KV 캐시 관리자 코드에 배치·내구성 규격이 미정의라는 사실입니다. 교훈 2 고객 협업: 규격 정의에 참여한 공급자가 선점했습니다. Solidigm은 61TB QLC를 12개월 먼저 출시했고, HBM4는 NVIDIA와 규격을 공동 정의한 SK hynix가 주도권을 확보했습니다. 교훈 3 의사결정 시점: 직전 다운턴의 결정이 다음 다운턴의 초기 조건입니다. DT19의 무감산 성공이 DT23 국면 오판으로, HBM 조직 축소가 주도권 상실로 이어졌고, 차기 전환점은 2027년 하반기 가격 정상화 국면입니다. 각 교훈 끝의 번호는 이 덱에서 그 교훈을 받는 장입니다. 가운데 패널, 지금 요구의 이동. 구매 기준은 TB당 TCO(원가·전력·밀도)에서 GPU당 컨텍스트 용량·토큰당 비용으로, 드라이브 용량은 61TB(2023)에서 245TB(2025, 다이 8배)로, 요구 DWPD는 읽기 중심 0.3~0.6에서 KV 캐시 쓰기 집약 1~3으로 이동했습니다. 세 국면의 구매 기준은 일관되게 TB당 TCO였고, 바뀐 것은 쓰기 비중과 용량입니다. 오른쪽 패널, 문제. 요구 1~3 DWPD와 고용량 QLC 정격 0.075~0.6 DWPD 사이에는 10~40배 격차가 있습니다. 수요 모델은 QLC 비트 2025년 대비 2030년 10배, 2030년 추론 캐시 계층 수요 350EB입니다. 그래서 고용량 QLC에서 DWPD를 높일 해법이 필요합니다. 어느 계층이 해결할 수 있는가가 2장의 질문입니다. 송용호 AX/PI센터장의 인용은 그 답이 고객 시스템의 이해에서 나와야 함을 시사합니다. 근거는 위키 qlc-ssd-market.md §3.4·§3.5, 수요 모델은 §4.3.</a:t>
             </a:r>
           </a:p>
         </p:txBody>
@@ -4594,7 +4594,7 @@
                 <a:latin typeface="Arial"/>
                 <a:ea typeface="Arial"/>
               </a:rPr>
-              <a:t>다운턴의 교훈은 고객 요구 적중이고, AI 수요는 요구를 대용량·높은 DWPD로 이동시킵니다</a:t>
+              <a:t>AI 추론 수요는 고용량 QLC에 높은 DWPD를 요구하며, 이를 충족할 해법이 필요한 상황입니다</a:t>
             </a:r>
           </a:p>
         </p:txBody>
@@ -4634,7 +4634,7 @@
                 <a:latin typeface="Arial"/>
                 <a:ea typeface="Arial"/>
               </a:rPr>
-              <a:t>두 다운턴은 요구가 고객 시스템 안에서 먼저 관측됨을 보였고, 지금 그 요구는 추론 캐시 계층의 대용량·높은 DWPD입니다.</a:t>
+              <a:t>두 다운턴의 교훈은 요구를 고객 시스템 안에서 먼저 관측하라는 것이었고, 지금 그 요구는 대용량과 높은 DWPD로 이동하고 있습니다.</a:t>
             </a:r>
           </a:p>
         </p:txBody>
@@ -4691,7 +4691,7 @@
         </p:nvSpPr>
         <p:spPr>
           <a:xfrm>
-            <a:off x="996696" y="3209544"/>
+            <a:off x="996696" y="3154680"/>
             <a:ext cx="16294608" cy="18288"/>
           </a:xfrm>
           <a:prstGeom prst="rect">
@@ -4735,7 +4735,7 @@
         </p:nvSpPr>
         <p:spPr>
           <a:xfrm>
-            <a:off x="1974372" y="3099816"/>
+            <a:off x="1974372" y="3044952"/>
             <a:ext cx="1564282" cy="237744"/>
           </a:xfrm>
           <a:prstGeom prst="rect">
@@ -4779,7 +4779,7 @@
         </p:nvSpPr>
         <p:spPr>
           <a:xfrm>
-            <a:off x="1791492" y="3364992"/>
+            <a:off x="1791492" y="3310128"/>
             <a:ext cx="3027322" cy="201168"/>
           </a:xfrm>
           <a:prstGeom prst="rect">
@@ -4819,7 +4819,7 @@
         </p:nvSpPr>
         <p:spPr>
           <a:xfrm>
-            <a:off x="6536862" y="3099816"/>
+            <a:off x="6536862" y="3044952"/>
             <a:ext cx="1955352" cy="237744"/>
           </a:xfrm>
           <a:prstGeom prst="rect">
@@ -4863,7 +4863,7 @@
         </p:nvSpPr>
         <p:spPr>
           <a:xfrm>
-            <a:off x="6353982" y="3364992"/>
+            <a:off x="6353982" y="3310128"/>
             <a:ext cx="3418392" cy="201168"/>
           </a:xfrm>
           <a:prstGeom prst="rect">
@@ -4903,7 +4903,7 @@
         </p:nvSpPr>
         <p:spPr>
           <a:xfrm>
-            <a:off x="13380598" y="3099816"/>
+            <a:off x="13380598" y="3044952"/>
             <a:ext cx="977676" cy="237744"/>
           </a:xfrm>
           <a:prstGeom prst="rect">
@@ -4949,7 +4949,7 @@
         </p:nvSpPr>
         <p:spPr>
           <a:xfrm>
-            <a:off x="13106278" y="3364992"/>
+            <a:off x="13106278" y="3310128"/>
             <a:ext cx="2377440" cy="201168"/>
           </a:xfrm>
           <a:prstGeom prst="rect">
@@ -4989,7 +4989,7 @@
         </p:nvSpPr>
         <p:spPr>
           <a:xfrm>
-            <a:off x="630936" y="3566160"/>
+            <a:off x="630936" y="3511296"/>
             <a:ext cx="731520" cy="182880"/>
           </a:xfrm>
           <a:prstGeom prst="rect">
@@ -5029,7 +5029,7 @@
         </p:nvSpPr>
         <p:spPr>
           <a:xfrm>
-            <a:off x="3238073" y="3566160"/>
+            <a:off x="3238073" y="3511296"/>
             <a:ext cx="731520" cy="182880"/>
           </a:xfrm>
           <a:prstGeom prst="rect">
@@ -5069,7 +5069,7 @@
         </p:nvSpPr>
         <p:spPr>
           <a:xfrm>
-            <a:off x="5845210" y="3566160"/>
+            <a:off x="5845210" y="3511296"/>
             <a:ext cx="731520" cy="182880"/>
           </a:xfrm>
           <a:prstGeom prst="rect">
@@ -5109,7 +5109,7 @@
         </p:nvSpPr>
         <p:spPr>
           <a:xfrm>
-            <a:off x="8452347" y="3566160"/>
+            <a:off x="8452347" y="3511296"/>
             <a:ext cx="731520" cy="182880"/>
           </a:xfrm>
           <a:prstGeom prst="rect">
@@ -5149,7 +5149,7 @@
         </p:nvSpPr>
         <p:spPr>
           <a:xfrm>
-            <a:off x="11059485" y="3566160"/>
+            <a:off x="11059485" y="3511296"/>
             <a:ext cx="731520" cy="182880"/>
           </a:xfrm>
           <a:prstGeom prst="rect">
@@ -5189,7 +5189,7 @@
         </p:nvSpPr>
         <p:spPr>
           <a:xfrm>
-            <a:off x="13666622" y="3566160"/>
+            <a:off x="13666622" y="3511296"/>
             <a:ext cx="731520" cy="182880"/>
           </a:xfrm>
           <a:prstGeom prst="rect">
@@ -5229,7 +5229,7 @@
         </p:nvSpPr>
         <p:spPr>
           <a:xfrm>
-            <a:off x="16273759" y="3566160"/>
+            <a:off x="16273759" y="3511296"/>
             <a:ext cx="731520" cy="182880"/>
           </a:xfrm>
           <a:prstGeom prst="rect">
@@ -5269,7 +5269,7 @@
         </p:nvSpPr>
         <p:spPr>
           <a:xfrm>
-            <a:off x="2618183" y="3145536"/>
+            <a:off x="2618183" y="3090672"/>
             <a:ext cx="146304" cy="146304"/>
           </a:xfrm>
           <a:prstGeom prst="ellipse">
@@ -5313,7 +5313,7 @@
         </p:nvSpPr>
         <p:spPr>
           <a:xfrm>
-            <a:off x="2685848" y="2834640"/>
+            <a:off x="2685848" y="2779776"/>
             <a:ext cx="10972" cy="274320"/>
           </a:xfrm>
           <a:prstGeom prst="rect">
@@ -5357,7 +5357,7 @@
         </p:nvSpPr>
         <p:spPr>
           <a:xfrm>
-            <a:off x="1411175" y="2615184"/>
+            <a:off x="1411175" y="2560320"/>
             <a:ext cx="2560320" cy="219456"/>
           </a:xfrm>
           <a:prstGeom prst="rect">
@@ -5407,7 +5407,7 @@
         </p:nvSpPr>
         <p:spPr>
           <a:xfrm>
-            <a:off x="7376208" y="3145536"/>
+            <a:off x="7376208" y="3090672"/>
             <a:ext cx="146304" cy="146304"/>
           </a:xfrm>
           <a:prstGeom prst="ellipse">
@@ -5451,7 +5451,7 @@
         </p:nvSpPr>
         <p:spPr>
           <a:xfrm>
-            <a:off x="7443874" y="3328416"/>
+            <a:off x="7443874" y="3273552"/>
             <a:ext cx="10972" cy="402336"/>
           </a:xfrm>
           <a:prstGeom prst="rect">
@@ -5495,7 +5495,7 @@
         </p:nvSpPr>
         <p:spPr>
           <a:xfrm>
-            <a:off x="6169200" y="3749039"/>
+            <a:off x="6169200" y="3694176"/>
             <a:ext cx="2560320" cy="219456"/>
           </a:xfrm>
           <a:prstGeom prst="rect">
@@ -5545,7 +5545,7 @@
         </p:nvSpPr>
         <p:spPr>
           <a:xfrm>
-            <a:off x="8158349" y="3145536"/>
+            <a:off x="8158349" y="3090672"/>
             <a:ext cx="146304" cy="146304"/>
           </a:xfrm>
           <a:prstGeom prst="ellipse">
@@ -5589,7 +5589,7 @@
         </p:nvSpPr>
         <p:spPr>
           <a:xfrm>
-            <a:off x="8226015" y="2834640"/>
+            <a:off x="8226015" y="2779776"/>
             <a:ext cx="10972" cy="274320"/>
           </a:xfrm>
           <a:prstGeom prst="rect">
@@ -5633,7 +5633,7 @@
         </p:nvSpPr>
         <p:spPr>
           <a:xfrm>
-            <a:off x="6951341" y="2615184"/>
+            <a:off x="6951341" y="2560320"/>
             <a:ext cx="2560320" cy="219456"/>
           </a:xfrm>
           <a:prstGeom prst="rect">
@@ -5683,7 +5683,7 @@
         </p:nvSpPr>
         <p:spPr>
           <a:xfrm>
-            <a:off x="9722632" y="3145536"/>
+            <a:off x="9722632" y="3090672"/>
             <a:ext cx="146304" cy="146304"/>
           </a:xfrm>
           <a:prstGeom prst="ellipse">
@@ -5727,7 +5727,7 @@
         </p:nvSpPr>
         <p:spPr>
           <a:xfrm>
-            <a:off x="9790297" y="3328416"/>
+            <a:off x="9790297" y="3273552"/>
             <a:ext cx="10972" cy="402336"/>
           </a:xfrm>
           <a:prstGeom prst="rect">
@@ -5771,7 +5771,7 @@
         </p:nvSpPr>
         <p:spPr>
           <a:xfrm>
-            <a:off x="8515624" y="3749039"/>
+            <a:off x="8515624" y="3694176"/>
             <a:ext cx="2560320" cy="219456"/>
           </a:xfrm>
           <a:prstGeom prst="rect">
@@ -5821,7 +5821,7 @@
         </p:nvSpPr>
         <p:spPr>
           <a:xfrm>
-            <a:off x="12134234" y="3145536"/>
+            <a:off x="12134234" y="3090672"/>
             <a:ext cx="146304" cy="146304"/>
           </a:xfrm>
           <a:prstGeom prst="ellipse">
@@ -5865,7 +5865,7 @@
         </p:nvSpPr>
         <p:spPr>
           <a:xfrm>
-            <a:off x="12201899" y="2834640"/>
+            <a:off x="12201899" y="2779776"/>
             <a:ext cx="10972" cy="274320"/>
           </a:xfrm>
           <a:prstGeom prst="rect">
@@ -5909,7 +5909,7 @@
         </p:nvSpPr>
         <p:spPr>
           <a:xfrm>
-            <a:off x="10927226" y="2615184"/>
+            <a:off x="10927226" y="2560320"/>
             <a:ext cx="2560320" cy="219456"/>
           </a:xfrm>
           <a:prstGeom prst="rect">
@@ -5959,7 +5959,7 @@
         </p:nvSpPr>
         <p:spPr>
           <a:xfrm>
-            <a:off x="16827081" y="3145536"/>
+            <a:off x="16827081" y="3090672"/>
             <a:ext cx="146304" cy="146304"/>
           </a:xfrm>
           <a:prstGeom prst="ellipse">
@@ -6003,7 +6003,7 @@
         </p:nvSpPr>
         <p:spPr>
           <a:xfrm>
-            <a:off x="16894747" y="3328416"/>
+            <a:off x="16894747" y="3273552"/>
             <a:ext cx="10972" cy="402336"/>
           </a:xfrm>
           <a:prstGeom prst="rect">
@@ -6047,7 +6047,7 @@
         </p:nvSpPr>
         <p:spPr>
           <a:xfrm>
-            <a:off x="14522793" y="3749039"/>
+            <a:off x="14522793" y="3694176"/>
             <a:ext cx="2596896" cy="219456"/>
           </a:xfrm>
           <a:prstGeom prst="rect">
@@ -6097,8 +6097,8 @@
         </p:nvSpPr>
         <p:spPr>
           <a:xfrm>
-            <a:off x="722376" y="4151376"/>
-            <a:ext cx="3816096" cy="4261103"/>
+            <a:off x="722376" y="4059935"/>
+            <a:ext cx="8031723" cy="4370832"/>
           </a:xfrm>
           <a:prstGeom prst="rect">
             <a:avLst/>
@@ -6137,14 +6137,58 @@
       </p:sp>
       <p:sp>
         <p:nvSpPr>
-          <p:cNvPr id="57" name="TextBox 56"/>
-          <p:cNvSpPr txBox="1"/>
-          <p:nvPr/>
-        </p:nvSpPr>
-        <p:spPr>
-          <a:xfrm>
-            <a:off x="996696" y="4297680"/>
-            <a:ext cx="3304032" cy="256032"/>
+          <p:cNvPr id="57" name="Rectangle 56"/>
+          <p:cNvSpPr/>
+          <p:nvPr/>
+        </p:nvSpPr>
+        <p:spPr>
+          <a:xfrm>
+            <a:off x="722376" y="4059935"/>
+            <a:ext cx="8031723" cy="45720"/>
+          </a:xfrm>
+          <a:prstGeom prst="rect">
+            <a:avLst/>
+          </a:prstGeom>
+          <a:solidFill>
+            <a:srgbClr val="AAB8E8"/>
+          </a:solidFill>
+          <a:ln>
+            <a:noFill/>
+          </a:ln>
+          <a:effectLst/>
+        </p:spPr>
+        <p:style>
+          <a:lnRef idx="1">
+            <a:schemeClr val="accent1"/>
+          </a:lnRef>
+          <a:fillRef idx="3">
+            <a:schemeClr val="accent1"/>
+          </a:fillRef>
+          <a:effectRef idx="2">
+            <a:schemeClr val="accent1"/>
+          </a:effectRef>
+          <a:fontRef idx="minor">
+            <a:schemeClr val="lt1"/>
+          </a:fontRef>
+        </p:style>
+        <p:txBody>
+          <a:bodyPr rtlCol="0" anchor="ctr"/>
+          <a:lstStyle/>
+          <a:p>
+            <a:pPr algn="ctr"/>
+          </a:p>
+        </p:txBody>
+      </p:sp>
+      <p:sp>
+        <p:nvSpPr>
+          <p:cNvPr id="58" name="TextBox 57"/>
+          <p:cNvSpPr txBox="1"/>
+          <p:nvPr/>
+        </p:nvSpPr>
+        <p:spPr>
+          <a:xfrm>
+            <a:off x="960120" y="4206240"/>
+            <a:ext cx="7556235" cy="256032"/>
           </a:xfrm>
           <a:prstGeom prst="rect">
             <a:avLst/>
@@ -6163,125 +6207,38 @@
               </a:lnSpc>
             </a:pPr>
             <a:r>
-              <a:rPr sz="1500" b="1">
+              <a:rPr sz="1350" b="1">
                 <a:solidFill>
                   <a:srgbClr val="1428A0"/>
                 </a:solidFill>
                 <a:latin typeface="Arial"/>
                 <a:ea typeface="Arial"/>
               </a:rPr>
-              <a:t>교훈 1 · 수요 센싱</a:t>
-            </a:r>
-          </a:p>
-        </p:txBody>
-      </p:sp>
-      <p:sp>
-        <p:nvSpPr>
-          <p:cNvPr id="58" name="TextBox 57"/>
-          <p:cNvSpPr txBox="1"/>
-          <p:nvPr/>
-        </p:nvSpPr>
-        <p:spPr>
-          <a:xfrm>
-            <a:off x="996696" y="4590288"/>
-            <a:ext cx="1417320" cy="475488"/>
-          </a:xfrm>
-          <a:prstGeom prst="rect">
-            <a:avLst/>
-          </a:prstGeom>
-          <a:noFill/>
-        </p:spPr>
-        <p:txBody>
-          <a:bodyPr wrap="square" anchor="ctr" lIns="0" rIns="0" tIns="0" bIns="0">
-            <a:spAutoFit/>
-          </a:bodyPr>
-          <a:lstStyle/>
-          <a:p>
-            <a:pPr algn="l">
-              <a:lnSpc>
-                <a:spcPct val="112000"/>
-              </a:lnSpc>
-            </a:pPr>
-            <a:r>
-              <a:rPr sz="2600" b="1">
-                <a:solidFill>
-                  <a:srgbClr val="1428A0"/>
-                </a:solidFill>
-                <a:latin typeface="Arial"/>
-                <a:ea typeface="Arial"/>
-              </a:rPr>
-              <a:t>2년</a:t>
-            </a:r>
-          </a:p>
-        </p:txBody>
-      </p:sp>
-      <p:sp>
-        <p:nvSpPr>
-          <p:cNvPr id="59" name="TextBox 58"/>
-          <p:cNvSpPr txBox="1"/>
-          <p:nvPr/>
-        </p:nvSpPr>
-        <p:spPr>
-          <a:xfrm>
-            <a:off x="2459736" y="4590288"/>
-            <a:ext cx="1840992" cy="475488"/>
-          </a:xfrm>
-          <a:prstGeom prst="rect">
-            <a:avLst/>
-          </a:prstGeom>
-          <a:noFill/>
-        </p:spPr>
-        <p:txBody>
-          <a:bodyPr wrap="square" anchor="ctr" lIns="0" rIns="0" tIns="0" bIns="0">
-            <a:spAutoFit/>
-          </a:bodyPr>
-          <a:lstStyle/>
-          <a:p>
-            <a:pPr algn="l">
-              <a:lnSpc>
-                <a:spcPct val="102000"/>
-              </a:lnSpc>
-            </a:pPr>
+              <a:t>교훈 · 두 다운턴이 가르친 것</a:t>
+            </a:r>
             <a:r>
               <a:rPr sz="1050" b="0">
                 <a:solidFill>
-                  <a:srgbClr val="555555"/>
-                </a:solidFill>
-                <a:latin typeface="Arial"/>
-                <a:ea typeface="Arial"/>
-              </a:rPr>
-              <a:t>고객 규격·코드 신호가</a:t>
-            </a:r>
-          </a:p>
-          <a:p>
-            <a:pPr algn="l">
-              <a:lnSpc>
-                <a:spcPct val="102000"/>
-              </a:lnSpc>
-            </a:pPr>
-            <a:r>
-              <a:rPr sz="1050" b="0">
-                <a:solidFill>
-                  <a:srgbClr val="555555"/>
-                </a:solidFill>
-                <a:latin typeface="Arial"/>
-                <a:ea typeface="Arial"/>
-              </a:rPr>
-              <a:t>발주·출하에 선행</a:t>
-            </a:r>
-          </a:p>
-        </p:txBody>
-      </p:sp>
-      <p:sp>
-        <p:nvSpPr>
-          <p:cNvPr id="60" name="Rectangle 59"/>
+                  <a:srgbClr val="8A8A8A"/>
+                </a:solidFill>
+                <a:latin typeface="Arial"/>
+                <a:ea typeface="Arial"/>
+              </a:rPr>
+              <a:t>   2018~2023</a:t>
+            </a:r>
+          </a:p>
+        </p:txBody>
+      </p:sp>
+      <p:sp>
+        <p:nvSpPr>
+          <p:cNvPr id="59" name="Rectangle 58"/>
           <p:cNvSpPr/>
           <p:nvPr/>
         </p:nvSpPr>
         <p:spPr>
           <a:xfrm>
-            <a:off x="996696" y="5157216"/>
-            <a:ext cx="3304032" cy="10972"/>
+            <a:off x="960120" y="4517136"/>
+            <a:ext cx="7556235" cy="10972"/>
           </a:xfrm>
           <a:prstGeom prst="rect">
             <a:avLst/>
@@ -6318,14 +6275,54 @@
       </p:sp>
       <p:sp>
         <p:nvSpPr>
+          <p:cNvPr id="60" name="TextBox 59"/>
+          <p:cNvSpPr txBox="1"/>
+          <p:nvPr/>
+        </p:nvSpPr>
+        <p:spPr>
+          <a:xfrm>
+            <a:off x="960120" y="4608575"/>
+            <a:ext cx="1207008" cy="1164336"/>
+          </a:xfrm>
+          <a:prstGeom prst="rect">
+            <a:avLst/>
+          </a:prstGeom>
+          <a:noFill/>
+        </p:spPr>
+        <p:txBody>
+          <a:bodyPr wrap="square" anchor="ctr" lIns="0" rIns="0" tIns="0" bIns="0">
+            <a:spAutoFit/>
+          </a:bodyPr>
+          <a:lstStyle/>
+          <a:p>
+            <a:pPr algn="l">
+              <a:lnSpc>
+                <a:spcPct val="112000"/>
+              </a:lnSpc>
+            </a:pPr>
+            <a:r>
+              <a:rPr sz="2200" b="1">
+                <a:solidFill>
+                  <a:srgbClr val="1428A0"/>
+                </a:solidFill>
+                <a:latin typeface="Arial"/>
+                <a:ea typeface="Arial"/>
+              </a:rPr>
+              <a:t>2년</a:t>
+            </a:r>
+          </a:p>
+        </p:txBody>
+      </p:sp>
+      <p:sp>
+        <p:nvSpPr>
           <p:cNvPr id="61" name="TextBox 60"/>
           <p:cNvSpPr txBox="1"/>
           <p:nvPr/>
         </p:nvSpPr>
         <p:spPr>
           <a:xfrm>
-            <a:off x="996696" y="5641848"/>
-            <a:ext cx="914400" cy="256032"/>
+            <a:off x="2167128" y="4663439"/>
+            <a:ext cx="2212848" cy="1109472"/>
           </a:xfrm>
           <a:prstGeom prst="rect">
             <a:avLst/>
@@ -6340,32 +6337,116 @@
           <a:p>
             <a:pPr algn="l">
               <a:lnSpc>
+                <a:spcPct val="106000"/>
+              </a:lnSpc>
+            </a:pPr>
+            <a:r>
+              <a:rPr sz="1050" b="0">
+                <a:solidFill>
+                  <a:srgbClr val="8A8A8A"/>
+                </a:solidFill>
+                <a:latin typeface="Arial"/>
+                <a:ea typeface="Arial"/>
+              </a:rPr>
+              <a:t>교훈 1 · </a:t>
+            </a:r>
+            <a:r>
+              <a:rPr sz="1125" b="1">
+                <a:solidFill>
+                  <a:srgbClr val="1A1A1A"/>
+                </a:solidFill>
+                <a:latin typeface="Arial"/>
+                <a:ea typeface="Arial"/>
+              </a:rPr>
+              <a:t>수요 센싱</a:t>
+            </a:r>
+          </a:p>
+          <a:p>
+            <a:pPr algn="l">
+              <a:lnSpc>
+                <a:spcPct val="106000"/>
+              </a:lnSpc>
+            </a:pPr>
+            <a:r>
+              <a:rPr sz="975" b="1">
+                <a:solidFill>
+                  <a:srgbClr val="1A1A1A"/>
+                </a:solidFill>
+                <a:latin typeface="Arial"/>
+                <a:ea typeface="Arial"/>
+              </a:rPr>
+              <a:t>고객 규격·코드 신호가 발주·출하에 약 2년 선행</a:t>
+            </a:r>
+          </a:p>
+          <a:p>
+            <a:pPr algn="l">
+              <a:lnSpc>
+                <a:spcPct val="106000"/>
+              </a:lnSpc>
+            </a:pPr>
+            <a:r>
+              <a:rPr sz="900" b="0">
+                <a:solidFill>
+                  <a:srgbClr val="555555"/>
+                </a:solidFill>
+                <a:latin typeface="Arial"/>
+                <a:ea typeface="Arial"/>
+              </a:rPr>
+              <a:t>총량 지표는 다운턴을, 고객 규격은 차기 요구를 보였다</a:t>
+            </a:r>
+          </a:p>
+        </p:txBody>
+      </p:sp>
+      <p:sp>
+        <p:nvSpPr>
+          <p:cNvPr id="62" name="TextBox 61"/>
+          <p:cNvSpPr txBox="1"/>
+          <p:nvPr/>
+        </p:nvSpPr>
+        <p:spPr>
+          <a:xfrm>
+            <a:off x="4517136" y="4828031"/>
+            <a:ext cx="694944" cy="219456"/>
+          </a:xfrm>
+          <a:prstGeom prst="rect">
+            <a:avLst/>
+          </a:prstGeom>
+          <a:noFill/>
+        </p:spPr>
+        <p:txBody>
+          <a:bodyPr wrap="square" anchor="ctr" lIns="0" rIns="0" tIns="0" bIns="0">
+            <a:spAutoFit/>
+          </a:bodyPr>
+          <a:lstStyle/>
+          <a:p>
+            <a:pPr algn="l">
+              <a:lnSpc>
                 <a:spcPct val="112000"/>
               </a:lnSpc>
             </a:pPr>
             <a:r>
-              <a:rPr sz="1000" b="1">
+              <a:rPr sz="950" b="1">
                 <a:solidFill>
                   <a:srgbClr val="1A1A1A"/>
                 </a:solidFill>
                 <a:latin typeface="Arial"/>
                 <a:ea typeface="Arial"/>
               </a:rPr>
-              <a:t>고객 규격·코드</a:t>
-            </a:r>
-          </a:p>
-        </p:txBody>
-      </p:sp>
-      <p:sp>
-        <p:nvSpPr>
-          <p:cNvPr id="62" name="TextBox 61"/>
-          <p:cNvSpPr txBox="1"/>
-          <p:nvPr/>
-        </p:nvSpPr>
-        <p:spPr>
-          <a:xfrm>
-            <a:off x="996696" y="7187183"/>
-            <a:ext cx="914400" cy="256032"/>
+              <a:t>규격·코드</a:t>
+            </a:r>
+          </a:p>
+        </p:txBody>
+      </p:sp>
+      <p:sp>
+        <p:nvSpPr>
+          <p:cNvPr id="63" name="TextBox 62"/>
+          <p:cNvSpPr txBox="1"/>
+          <p:nvPr/>
+        </p:nvSpPr>
+        <p:spPr>
+          <a:xfrm>
+            <a:off x="4517136" y="5352287"/>
+            <a:ext cx="694944" cy="219456"/>
           </a:xfrm>
           <a:prstGeom prst="rect">
             <a:avLst/>
@@ -6384,28 +6465,28 @@
               </a:lnSpc>
             </a:pPr>
             <a:r>
-              <a:rPr sz="1000" b="1">
+              <a:rPr sz="950" b="1">
                 <a:solidFill>
                   <a:srgbClr val="1A1A1A"/>
                 </a:solidFill>
                 <a:latin typeface="Arial"/>
                 <a:ea typeface="Arial"/>
               </a:rPr>
-              <a:t>발주·비트 출하</a:t>
-            </a:r>
-          </a:p>
-        </p:txBody>
-      </p:sp>
-      <p:sp>
-        <p:nvSpPr>
-          <p:cNvPr id="63" name="Rectangle 62"/>
+              <a:t>발주·출하</a:t>
+            </a:r>
+          </a:p>
+        </p:txBody>
+      </p:sp>
+      <p:sp>
+        <p:nvSpPr>
+          <p:cNvPr id="64" name="Rectangle 63"/>
           <p:cNvSpPr/>
           <p:nvPr/>
         </p:nvSpPr>
         <p:spPr>
           <a:xfrm>
-            <a:off x="1929384" y="5769864"/>
-            <a:ext cx="2371344" cy="18288"/>
+            <a:off x="5230368" y="4937759"/>
+            <a:ext cx="2874507" cy="14630"/>
           </a:xfrm>
           <a:prstGeom prst="rect">
             <a:avLst/>
@@ -6442,14 +6523,14 @@
       </p:sp>
       <p:sp>
         <p:nvSpPr>
-          <p:cNvPr id="64" name="Rectangle 63"/>
+          <p:cNvPr id="65" name="Rectangle 64"/>
           <p:cNvSpPr/>
           <p:nvPr/>
         </p:nvSpPr>
         <p:spPr>
           <a:xfrm>
-            <a:off x="1929384" y="7315199"/>
-            <a:ext cx="2371344" cy="18288"/>
+            <a:off x="5230368" y="5462015"/>
+            <a:ext cx="2874507" cy="14630"/>
           </a:xfrm>
           <a:prstGeom prst="rect">
             <a:avLst/>
@@ -6486,16 +6567,16 @@
       </p:sp>
       <p:sp>
         <p:nvSpPr>
-          <p:cNvPr id="65" name="Rectangle 64"/>
+          <p:cNvPr id="66" name="Right Arrow 65"/>
           <p:cNvSpPr/>
           <p:nvPr/>
         </p:nvSpPr>
         <p:spPr>
           <a:xfrm>
-            <a:off x="2372624" y="5769864"/>
-            <a:ext cx="14630" cy="635507"/>
-          </a:xfrm>
-          <a:prstGeom prst="rect">
+            <a:off x="5611680" y="5099303"/>
+            <a:ext cx="909283" cy="201168"/>
+          </a:xfrm>
+          <a:prstGeom prst="rightArrow">
             <a:avLst/>
           </a:prstGeom>
           <a:solidFill>
@@ -6530,16 +6611,327 @@
       </p:sp>
       <p:sp>
         <p:nvSpPr>
-          <p:cNvPr id="66" name="Rectangle 65"/>
+          <p:cNvPr id="67" name="TextBox 66"/>
+          <p:cNvSpPr txBox="1"/>
+          <p:nvPr/>
+        </p:nvSpPr>
+        <p:spPr>
+          <a:xfrm>
+            <a:off x="5611680" y="5099303"/>
+            <a:ext cx="836131" cy="201168"/>
+          </a:xfrm>
+          <a:prstGeom prst="rect">
+            <a:avLst/>
+          </a:prstGeom>
+          <a:noFill/>
+        </p:spPr>
+        <p:txBody>
+          <a:bodyPr wrap="square" anchor="ctr" lIns="0" rIns="0" tIns="0" bIns="0">
+            <a:spAutoFit/>
+          </a:bodyPr>
+          <a:lstStyle/>
+          <a:p>
+            <a:pPr algn="ctr">
+              <a:lnSpc>
+                <a:spcPct val="112000"/>
+              </a:lnSpc>
+            </a:pPr>
+            <a:r>
+              <a:rPr sz="900" b="1">
+                <a:solidFill>
+                  <a:srgbClr val="1A1A1A"/>
+                </a:solidFill>
+                <a:latin typeface="Arial"/>
+                <a:ea typeface="Arial"/>
+              </a:rPr>
+              <a:t>≈2년</a:t>
+            </a:r>
+          </a:p>
+        </p:txBody>
+      </p:sp>
+      <p:sp>
+        <p:nvSpPr>
+          <p:cNvPr id="68" name="Oval 67"/>
           <p:cNvSpPr/>
           <p:nvPr/>
         </p:nvSpPr>
         <p:spPr>
           <a:xfrm>
-            <a:off x="3107740" y="6679692"/>
-            <a:ext cx="14630" cy="635507"/>
-          </a:xfrm>
-          <a:prstGeom prst="rect">
+            <a:off x="5529384" y="4855463"/>
+            <a:ext cx="164592" cy="164592"/>
+          </a:xfrm>
+          <a:prstGeom prst="ellipse">
+            <a:avLst/>
+          </a:prstGeom>
+          <a:solidFill>
+            <a:srgbClr val="1428A0"/>
+          </a:solidFill>
+          <a:ln>
+            <a:noFill/>
+          </a:ln>
+          <a:effectLst/>
+        </p:spPr>
+        <p:style>
+          <a:lnRef idx="1">
+            <a:schemeClr val="accent1"/>
+          </a:lnRef>
+          <a:fillRef idx="3">
+            <a:schemeClr val="accent1"/>
+          </a:fillRef>
+          <a:effectRef idx="2">
+            <a:schemeClr val="accent1"/>
+          </a:effectRef>
+          <a:fontRef idx="minor">
+            <a:schemeClr val="lt1"/>
+          </a:fontRef>
+        </p:style>
+        <p:txBody>
+          <a:bodyPr rtlCol="0" anchor="ctr"/>
+          <a:lstStyle/>
+          <a:p>
+            <a:pPr algn="ctr"/>
+          </a:p>
+        </p:txBody>
+      </p:sp>
+      <p:sp>
+        <p:nvSpPr>
+          <p:cNvPr id="69" name="TextBox 68"/>
+          <p:cNvSpPr txBox="1"/>
+          <p:nvPr/>
+        </p:nvSpPr>
+        <p:spPr>
+          <a:xfrm>
+            <a:off x="5428800" y="4645151"/>
+            <a:ext cx="1463040" cy="182880"/>
+          </a:xfrm>
+          <a:prstGeom prst="rect">
+            <a:avLst/>
+          </a:prstGeom>
+          <a:noFill/>
+        </p:spPr>
+        <p:txBody>
+          <a:bodyPr wrap="square" anchor="t" lIns="0" rIns="0" tIns="0" bIns="0">
+            <a:spAutoFit/>
+          </a:bodyPr>
+          <a:lstStyle/>
+          <a:p>
+            <a:pPr algn="l">
+              <a:lnSpc>
+                <a:spcPct val="112000"/>
+              </a:lnSpc>
+            </a:pPr>
+            <a:r>
+              <a:rPr sz="875" b="0">
+                <a:solidFill>
+                  <a:srgbClr val="555555"/>
+                </a:solidFill>
+                <a:latin typeface="Arial"/>
+                <a:ea typeface="Arial"/>
+              </a:rPr>
+              <a:t>'22-12 배치 표준 비준</a:t>
+            </a:r>
+          </a:p>
+        </p:txBody>
+      </p:sp>
+      <p:sp>
+        <p:nvSpPr>
+          <p:cNvPr id="70" name="Oval 69"/>
+          <p:cNvSpPr/>
+          <p:nvPr/>
+        </p:nvSpPr>
+        <p:spPr>
+          <a:xfrm>
+            <a:off x="6438667" y="5379720"/>
+            <a:ext cx="164592" cy="164592"/>
+          </a:xfrm>
+          <a:prstGeom prst="ellipse">
+            <a:avLst/>
+          </a:prstGeom>
+          <a:solidFill>
+            <a:srgbClr val="1428A0"/>
+          </a:solidFill>
+          <a:ln>
+            <a:noFill/>
+          </a:ln>
+          <a:effectLst/>
+        </p:spPr>
+        <p:style>
+          <a:lnRef idx="1">
+            <a:schemeClr val="accent1"/>
+          </a:lnRef>
+          <a:fillRef idx="3">
+            <a:schemeClr val="accent1"/>
+          </a:fillRef>
+          <a:effectRef idx="2">
+            <a:schemeClr val="accent1"/>
+          </a:effectRef>
+          <a:fontRef idx="minor">
+            <a:schemeClr val="lt1"/>
+          </a:fontRef>
+        </p:style>
+        <p:txBody>
+          <a:bodyPr rtlCol="0" anchor="ctr"/>
+          <a:lstStyle/>
+          <a:p>
+            <a:pPr algn="ctr"/>
+          </a:p>
+        </p:txBody>
+      </p:sp>
+      <p:sp>
+        <p:nvSpPr>
+          <p:cNvPr id="71" name="TextBox 70"/>
+          <p:cNvSpPr txBox="1"/>
+          <p:nvPr/>
+        </p:nvSpPr>
+        <p:spPr>
+          <a:xfrm>
+            <a:off x="6338083" y="5553455"/>
+            <a:ext cx="1463040" cy="182880"/>
+          </a:xfrm>
+          <a:prstGeom prst="rect">
+            <a:avLst/>
+          </a:prstGeom>
+          <a:noFill/>
+        </p:spPr>
+        <p:txBody>
+          <a:bodyPr wrap="square" anchor="t" lIns="0" rIns="0" tIns="0" bIns="0">
+            <a:spAutoFit/>
+          </a:bodyPr>
+          <a:lstStyle/>
+          <a:p>
+            <a:pPr algn="l">
+              <a:lnSpc>
+                <a:spcPct val="112000"/>
+              </a:lnSpc>
+            </a:pPr>
+            <a:r>
+              <a:rPr sz="875" b="0">
+                <a:solidFill>
+                  <a:srgbClr val="555555"/>
+                </a:solidFill>
+                <a:latin typeface="Arial"/>
+                <a:ea typeface="Arial"/>
+              </a:rPr>
+              <a:t>'24 비트 출하 30EB</a:t>
+            </a:r>
+          </a:p>
+        </p:txBody>
+      </p:sp>
+      <p:sp>
+        <p:nvSpPr>
+          <p:cNvPr id="72" name="Oval 71"/>
+          <p:cNvSpPr/>
+          <p:nvPr/>
+        </p:nvSpPr>
+        <p:spPr>
+          <a:xfrm>
+            <a:off x="7670599" y="4855463"/>
+            <a:ext cx="164592" cy="164592"/>
+          </a:xfrm>
+          <a:prstGeom prst="ellipse">
+            <a:avLst/>
+          </a:prstGeom>
+          <a:solidFill>
+            <a:srgbClr val="FFFFFF"/>
+          </a:solidFill>
+          <a:ln w="19050">
+            <a:solidFill>
+              <a:srgbClr val="1428A0"/>
+            </a:solidFill>
+          </a:ln>
+          <a:effectLst/>
+        </p:spPr>
+        <p:style>
+          <a:lnRef idx="1">
+            <a:schemeClr val="accent1"/>
+          </a:lnRef>
+          <a:fillRef idx="3">
+            <a:schemeClr val="accent1"/>
+          </a:fillRef>
+          <a:effectRef idx="2">
+            <a:schemeClr val="accent1"/>
+          </a:effectRef>
+          <a:fontRef idx="minor">
+            <a:schemeClr val="lt1"/>
+          </a:fontRef>
+        </p:style>
+        <p:txBody>
+          <a:bodyPr rtlCol="0" anchor="ctr"/>
+          <a:lstStyle/>
+          <a:p>
+            <a:pPr algn="ctr"/>
+          </a:p>
+        </p:txBody>
+      </p:sp>
+      <p:sp>
+        <p:nvSpPr>
+          <p:cNvPr id="73" name="TextBox 72"/>
+          <p:cNvSpPr txBox="1"/>
+          <p:nvPr/>
+        </p:nvSpPr>
+        <p:spPr>
+          <a:xfrm>
+            <a:off x="6381295" y="5029199"/>
+            <a:ext cx="1508760" cy="329184"/>
+          </a:xfrm>
+          <a:prstGeom prst="rect">
+            <a:avLst/>
+          </a:prstGeom>
+          <a:noFill/>
+        </p:spPr>
+        <p:txBody>
+          <a:bodyPr wrap="square" anchor="t" lIns="0" rIns="0" tIns="0" bIns="0">
+            <a:spAutoFit/>
+          </a:bodyPr>
+          <a:lstStyle/>
+          <a:p>
+            <a:pPr algn="r">
+              <a:lnSpc>
+                <a:spcPct val="100000"/>
+              </a:lnSpc>
+            </a:pPr>
+            <a:r>
+              <a:rPr sz="875" b="1">
+                <a:solidFill>
+                  <a:srgbClr val="1428A0"/>
+                </a:solidFill>
+                <a:latin typeface="Arial"/>
+                <a:ea typeface="Arial"/>
+              </a:rPr>
+              <a:t>'26 KV 캐시 규격 미정의</a:t>
+            </a:r>
+          </a:p>
+          <a:p>
+            <a:pPr algn="r">
+              <a:lnSpc>
+                <a:spcPct val="100000"/>
+              </a:lnSpc>
+            </a:pPr>
+            <a:r>
+              <a:rPr sz="875" b="1">
+                <a:solidFill>
+                  <a:srgbClr val="1428A0"/>
+                </a:solidFill>
+                <a:latin typeface="Arial"/>
+                <a:ea typeface="Arial"/>
+              </a:rPr>
+              <a:t>= 선점 구간</a:t>
+            </a:r>
+          </a:p>
+        </p:txBody>
+      </p:sp>
+      <p:sp>
+        <p:nvSpPr>
+          <p:cNvPr id="74" name="Oval 73"/>
+          <p:cNvSpPr/>
+          <p:nvPr/>
+        </p:nvSpPr>
+        <p:spPr>
+          <a:xfrm>
+            <a:off x="8242035" y="5071871"/>
+            <a:ext cx="237744" cy="237744"/>
+          </a:xfrm>
+          <a:prstGeom prst="ellipse">
             <a:avLst/>
           </a:prstGeom>
           <a:solidFill>
@@ -6574,20 +6966,60 @@
       </p:sp>
       <p:sp>
         <p:nvSpPr>
-          <p:cNvPr id="67" name="Right Arrow 66"/>
+          <p:cNvPr id="75" name="TextBox 74"/>
+          <p:cNvSpPr txBox="1"/>
+          <p:nvPr/>
+        </p:nvSpPr>
+        <p:spPr>
+          <a:xfrm>
+            <a:off x="8242035" y="5071871"/>
+            <a:ext cx="237744" cy="237744"/>
+          </a:xfrm>
+          <a:prstGeom prst="rect">
+            <a:avLst/>
+          </a:prstGeom>
+          <a:noFill/>
+        </p:spPr>
+        <p:txBody>
+          <a:bodyPr wrap="square" anchor="ctr" lIns="0" rIns="0" tIns="0" bIns="0">
+            <a:spAutoFit/>
+          </a:bodyPr>
+          <a:lstStyle/>
+          <a:p>
+            <a:pPr algn="ctr">
+              <a:lnSpc>
+                <a:spcPct val="112000"/>
+              </a:lnSpc>
+            </a:pPr>
+            <a:r>
+              <a:rPr sz="1000" b="1">
+                <a:solidFill>
+                  <a:srgbClr val="1A1A1A"/>
+                </a:solidFill>
+                <a:latin typeface="Arial"/>
+                <a:ea typeface="Arial"/>
+              </a:rPr>
+              <a:t>2</a:t>
+            </a:r>
+          </a:p>
+        </p:txBody>
+      </p:sp>
+      <p:sp>
+        <p:nvSpPr>
+          <p:cNvPr id="76" name="Rectangle 75"/>
           <p:cNvSpPr/>
           <p:nvPr/>
         </p:nvSpPr>
         <p:spPr>
           <a:xfrm>
-            <a:off x="2379939" y="6405371"/>
-            <a:ext cx="735116" cy="274320"/>
-          </a:xfrm>
-          <a:prstGeom prst="rightArrow">
+            <a:off x="960120" y="5818632"/>
+            <a:ext cx="7556235" cy="10972"/>
+          </a:xfrm>
+          <a:prstGeom prst="rect">
             <a:avLst/>
           </a:prstGeom>
           <a:solidFill>
-            <a:srgbClr val="AAB8E8"/>
+            <a:srgbClr val="D9D9D9"/>
           </a:solidFill>
           <a:ln>
             <a:noFill/>
@@ -6618,14 +7050,14 @@
       </p:sp>
       <p:sp>
         <p:nvSpPr>
-          <p:cNvPr id="68" name="TextBox 67"/>
-          <p:cNvSpPr txBox="1"/>
-          <p:nvPr/>
-        </p:nvSpPr>
-        <p:spPr>
-          <a:xfrm>
-            <a:off x="2379939" y="6405371"/>
-            <a:ext cx="643676" cy="274320"/>
+          <p:cNvPr id="77" name="TextBox 76"/>
+          <p:cNvSpPr txBox="1"/>
+          <p:nvPr/>
+        </p:nvSpPr>
+        <p:spPr>
+          <a:xfrm>
+            <a:off x="960120" y="5864352"/>
+            <a:ext cx="1207008" cy="1164336"/>
           </a:xfrm>
           <a:prstGeom prst="rect">
             <a:avLst/>
@@ -6638,36 +7070,200 @@
           </a:bodyPr>
           <a:lstStyle/>
           <a:p>
-            <a:pPr algn="ctr">
+            <a:pPr algn="l">
               <a:lnSpc>
                 <a:spcPct val="112000"/>
               </a:lnSpc>
             </a:pPr>
             <a:r>
-              <a:rPr sz="1050" b="1">
+              <a:rPr sz="2200" b="1">
+                <a:solidFill>
+                  <a:srgbClr val="1428A0"/>
+                </a:solidFill>
+                <a:latin typeface="Arial"/>
+                <a:ea typeface="Arial"/>
+              </a:rPr>
+              <a:t>12개월</a:t>
+            </a:r>
+          </a:p>
+        </p:txBody>
+      </p:sp>
+      <p:sp>
+        <p:nvSpPr>
+          <p:cNvPr id="78" name="TextBox 77"/>
+          <p:cNvSpPr txBox="1"/>
+          <p:nvPr/>
+        </p:nvSpPr>
+        <p:spPr>
+          <a:xfrm>
+            <a:off x="2167128" y="5919215"/>
+            <a:ext cx="2212848" cy="1109472"/>
+          </a:xfrm>
+          <a:prstGeom prst="rect">
+            <a:avLst/>
+          </a:prstGeom>
+          <a:noFill/>
+        </p:spPr>
+        <p:txBody>
+          <a:bodyPr wrap="square" anchor="ctr" lIns="0" rIns="0" tIns="0" bIns="0">
+            <a:spAutoFit/>
+          </a:bodyPr>
+          <a:lstStyle/>
+          <a:p>
+            <a:pPr algn="l">
+              <a:lnSpc>
+                <a:spcPct val="106000"/>
+              </a:lnSpc>
+            </a:pPr>
+            <a:r>
+              <a:rPr sz="1050" b="0">
+                <a:solidFill>
+                  <a:srgbClr val="8A8A8A"/>
+                </a:solidFill>
+                <a:latin typeface="Arial"/>
+                <a:ea typeface="Arial"/>
+              </a:rPr>
+              <a:t>교훈 2 · </a:t>
+            </a:r>
+            <a:r>
+              <a:rPr sz="1125" b="1">
                 <a:solidFill>
                   <a:srgbClr val="1A1A1A"/>
                 </a:solidFill>
                 <a:latin typeface="Arial"/>
                 <a:ea typeface="Arial"/>
               </a:rPr>
-              <a:t>≈2년</a:t>
-            </a:r>
-          </a:p>
-        </p:txBody>
-      </p:sp>
-      <p:sp>
-        <p:nvSpPr>
-          <p:cNvPr id="69" name="Oval 68"/>
+              <a:t>고객 협업</a:t>
+            </a:r>
+          </a:p>
+          <a:p>
+            <a:pPr algn="l">
+              <a:lnSpc>
+                <a:spcPct val="106000"/>
+              </a:lnSpc>
+            </a:pPr>
+            <a:r>
+              <a:rPr sz="975" b="1">
+                <a:solidFill>
+                  <a:srgbClr val="1A1A1A"/>
+                </a:solidFill>
+                <a:latin typeface="Arial"/>
+                <a:ea typeface="Arial"/>
+              </a:rPr>
+              <a:t>규격 정의에 참여한 공급자가 선점</a:t>
+            </a:r>
+          </a:p>
+          <a:p>
+            <a:pPr algn="l">
+              <a:lnSpc>
+                <a:spcPct val="106000"/>
+              </a:lnSpc>
+            </a:pPr>
+            <a:r>
+              <a:rPr sz="900" b="0">
+                <a:solidFill>
+                  <a:srgbClr val="555555"/>
+                </a:solidFill>
+                <a:latin typeface="Arial"/>
+                <a:ea typeface="Arial"/>
+              </a:rPr>
+              <a:t>다운턴 극복의 결정 변수는 방어가 아니라 요구 적중</a:t>
+            </a:r>
+          </a:p>
+        </p:txBody>
+      </p:sp>
+      <p:sp>
+        <p:nvSpPr>
+          <p:cNvPr id="79" name="TextBox 78"/>
+          <p:cNvSpPr txBox="1"/>
+          <p:nvPr/>
+        </p:nvSpPr>
+        <p:spPr>
+          <a:xfrm>
+            <a:off x="4517136" y="5955791"/>
+            <a:ext cx="3587739" cy="182880"/>
+          </a:xfrm>
+          <a:prstGeom prst="rect">
+            <a:avLst/>
+          </a:prstGeom>
+          <a:noFill/>
+        </p:spPr>
+        <p:txBody>
+          <a:bodyPr wrap="square" anchor="t" lIns="0" rIns="0" tIns="0" bIns="0">
+            <a:spAutoFit/>
+          </a:bodyPr>
+          <a:lstStyle/>
+          <a:p>
+            <a:pPr algn="l">
+              <a:lnSpc>
+                <a:spcPct val="112000"/>
+              </a:lnSpc>
+            </a:pPr>
+            <a:r>
+              <a:rPr sz="875" b="0">
+                <a:solidFill>
+                  <a:srgbClr val="8A8A8A"/>
+                </a:solidFill>
+                <a:latin typeface="Arial"/>
+                <a:ea typeface="Arial"/>
+              </a:rPr>
+              <a:t>61TB QLC 출시 · OCP '22-10 예고 기준</a:t>
+            </a:r>
+          </a:p>
+        </p:txBody>
+      </p:sp>
+      <p:sp>
+        <p:nvSpPr>
+          <p:cNvPr id="80" name="TextBox 79"/>
+          <p:cNvSpPr txBox="1"/>
+          <p:nvPr/>
+        </p:nvSpPr>
+        <p:spPr>
+          <a:xfrm>
+            <a:off x="4517136" y="6193535"/>
+            <a:ext cx="594359" cy="237744"/>
+          </a:xfrm>
+          <a:prstGeom prst="rect">
+            <a:avLst/>
+          </a:prstGeom>
+          <a:noFill/>
+        </p:spPr>
+        <p:txBody>
+          <a:bodyPr wrap="square" anchor="ctr" lIns="0" rIns="0" tIns="0" bIns="0">
+            <a:spAutoFit/>
+          </a:bodyPr>
+          <a:lstStyle/>
+          <a:p>
+            <a:pPr algn="l">
+              <a:lnSpc>
+                <a:spcPct val="112000"/>
+              </a:lnSpc>
+            </a:pPr>
+            <a:r>
+              <a:rPr sz="950" b="1">
+                <a:solidFill>
+                  <a:srgbClr val="1A1A1A"/>
+                </a:solidFill>
+                <a:latin typeface="Arial"/>
+                <a:ea typeface="Arial"/>
+              </a:rPr>
+              <a:t>Solidigm</a:t>
+            </a:r>
+          </a:p>
+        </p:txBody>
+      </p:sp>
+      <p:sp>
+        <p:nvSpPr>
+          <p:cNvPr id="81" name="Rectangle 80"/>
           <p:cNvSpPr/>
           <p:nvPr/>
         </p:nvSpPr>
         <p:spPr>
           <a:xfrm>
-            <a:off x="2279355" y="5669279"/>
-            <a:ext cx="201168" cy="201168"/>
-          </a:xfrm>
-          <a:prstGeom prst="ellipse">
+            <a:off x="5157216" y="6193535"/>
+            <a:ext cx="1263282" cy="237744"/>
+          </a:xfrm>
+          <a:prstGeom prst="rect">
             <a:avLst/>
           </a:prstGeom>
           <a:solidFill>
@@ -6702,22 +7298,22 @@
       </p:sp>
       <p:sp>
         <p:nvSpPr>
-          <p:cNvPr id="70" name="TextBox 69"/>
-          <p:cNvSpPr txBox="1"/>
-          <p:nvPr/>
-        </p:nvSpPr>
-        <p:spPr>
-          <a:xfrm>
-            <a:off x="2151339" y="5385816"/>
-            <a:ext cx="1828800" cy="219456"/>
-          </a:xfrm>
-          <a:prstGeom prst="rect">
-            <a:avLst/>
-          </a:prstGeom>
-          <a:noFill/>
-        </p:spPr>
-        <p:txBody>
-          <a:bodyPr wrap="square" anchor="t" lIns="0" rIns="0" tIns="0" bIns="0">
+          <p:cNvPr id="82" name="TextBox 81"/>
+          <p:cNvSpPr txBox="1"/>
+          <p:nvPr/>
+        </p:nvSpPr>
+        <p:spPr>
+          <a:xfrm>
+            <a:off x="6493650" y="6193535"/>
+            <a:ext cx="1611225" cy="237744"/>
+          </a:xfrm>
+          <a:prstGeom prst="rect">
+            <a:avLst/>
+          </a:prstGeom>
+          <a:noFill/>
+        </p:spPr>
+        <p:txBody>
+          <a:bodyPr wrap="square" anchor="ctr" lIns="0" rIns="0" tIns="0" bIns="0">
             <a:spAutoFit/>
           </a:bodyPr>
           <a:lstStyle/>
@@ -6728,80 +7324,36 @@
               </a:lnSpc>
             </a:pPr>
             <a:r>
-              <a:rPr sz="1000" b="0">
-                <a:solidFill>
-                  <a:srgbClr val="555555"/>
-                </a:solidFill>
-                <a:latin typeface="Arial"/>
-                <a:ea typeface="Arial"/>
-              </a:rPr>
-              <a:t>2022-12 배치 표준 비준</a:t>
-            </a:r>
-          </a:p>
-        </p:txBody>
-      </p:sp>
-      <p:sp>
-        <p:nvSpPr>
-          <p:cNvPr id="71" name="Oval 70"/>
-          <p:cNvSpPr/>
-          <p:nvPr/>
-        </p:nvSpPr>
-        <p:spPr>
-          <a:xfrm>
-            <a:off x="3014472" y="7214615"/>
-            <a:ext cx="201168" cy="201168"/>
-          </a:xfrm>
-          <a:prstGeom prst="ellipse">
-            <a:avLst/>
-          </a:prstGeom>
-          <a:solidFill>
-            <a:srgbClr val="1428A0"/>
-          </a:solidFill>
-          <a:ln>
-            <a:noFill/>
-          </a:ln>
-          <a:effectLst/>
-        </p:spPr>
-        <p:style>
-          <a:lnRef idx="1">
-            <a:schemeClr val="accent1"/>
-          </a:lnRef>
-          <a:fillRef idx="3">
-            <a:schemeClr val="accent1"/>
-          </a:fillRef>
-          <a:effectRef idx="2">
-            <a:schemeClr val="accent1"/>
-          </a:effectRef>
-          <a:fontRef idx="minor">
-            <a:schemeClr val="lt1"/>
-          </a:fontRef>
-        </p:style>
-        <p:txBody>
-          <a:bodyPr rtlCol="0" anchor="ctr"/>
-          <a:lstStyle/>
-          <a:p>
-            <a:pPr algn="ctr"/>
-          </a:p>
-        </p:txBody>
-      </p:sp>
-      <p:sp>
-        <p:nvSpPr>
-          <p:cNvPr id="72" name="TextBox 71"/>
-          <p:cNvSpPr txBox="1"/>
-          <p:nvPr/>
-        </p:nvSpPr>
-        <p:spPr>
-          <a:xfrm>
-            <a:off x="2886456" y="7443215"/>
-            <a:ext cx="1828800" cy="219456"/>
-          </a:xfrm>
-          <a:prstGeom prst="rect">
-            <a:avLst/>
-          </a:prstGeom>
-          <a:noFill/>
-        </p:spPr>
-        <p:txBody>
-          <a:bodyPr wrap="square" anchor="t" lIns="0" rIns="0" tIns="0" bIns="0">
+              <a:rPr sz="875" b="1">
+                <a:solidFill>
+                  <a:srgbClr val="1428A0"/>
+                </a:solidFill>
+                <a:latin typeface="Arial"/>
+                <a:ea typeface="Arial"/>
+              </a:rPr>
+              <a:t>'23-07 · 규격 정의 참여</a:t>
+            </a:r>
+          </a:p>
+        </p:txBody>
+      </p:sp>
+      <p:sp>
+        <p:nvSpPr>
+          <p:cNvPr id="83" name="TextBox 82"/>
+          <p:cNvSpPr txBox="1"/>
+          <p:nvPr/>
+        </p:nvSpPr>
+        <p:spPr>
+          <a:xfrm>
+            <a:off x="4517136" y="6504431"/>
+            <a:ext cx="594359" cy="237744"/>
+          </a:xfrm>
+          <a:prstGeom prst="rect">
+            <a:avLst/>
+          </a:prstGeom>
+          <a:noFill/>
+        </p:spPr>
+        <p:txBody>
+          <a:bodyPr wrap="square" anchor="ctr" lIns="0" rIns="0" tIns="0" bIns="0">
             <a:spAutoFit/>
           </a:bodyPr>
           <a:lstStyle/>
@@ -6812,520 +7364,14 @@
               </a:lnSpc>
             </a:pPr>
             <a:r>
-              <a:rPr sz="1000" b="0">
-                <a:solidFill>
-                  <a:srgbClr val="555555"/>
-                </a:solidFill>
-                <a:latin typeface="Arial"/>
-                <a:ea typeface="Arial"/>
-              </a:rPr>
-              <a:t>2024 비트 출하 30EB</a:t>
-            </a:r>
-          </a:p>
-        </p:txBody>
-      </p:sp>
-      <p:sp>
-        <p:nvSpPr>
-          <p:cNvPr id="73" name="Oval 72"/>
-          <p:cNvSpPr/>
-          <p:nvPr/>
-        </p:nvSpPr>
-        <p:spPr>
-          <a:xfrm>
-            <a:off x="4010436" y="5669279"/>
-            <a:ext cx="201168" cy="201168"/>
-          </a:xfrm>
-          <a:prstGeom prst="ellipse">
-            <a:avLst/>
-          </a:prstGeom>
-          <a:solidFill>
-            <a:srgbClr val="FFFFFF"/>
-          </a:solidFill>
-          <a:ln w="22225">
-            <a:solidFill>
-              <a:srgbClr val="1428A0"/>
-            </a:solidFill>
-          </a:ln>
-          <a:effectLst/>
-        </p:spPr>
-        <p:style>
-          <a:lnRef idx="1">
-            <a:schemeClr val="accent1"/>
-          </a:lnRef>
-          <a:fillRef idx="3">
-            <a:schemeClr val="accent1"/>
-          </a:fillRef>
-          <a:effectRef idx="2">
-            <a:schemeClr val="accent1"/>
-          </a:effectRef>
-          <a:fontRef idx="minor">
-            <a:schemeClr val="lt1"/>
-          </a:fontRef>
-        </p:style>
-        <p:txBody>
-          <a:bodyPr rtlCol="0" anchor="ctr"/>
-          <a:lstStyle/>
-          <a:p>
-            <a:pPr algn="ctr"/>
-          </a:p>
-        </p:txBody>
-      </p:sp>
-      <p:sp>
-        <p:nvSpPr>
-          <p:cNvPr id="74" name="TextBox 73"/>
-          <p:cNvSpPr txBox="1"/>
-          <p:nvPr/>
-        </p:nvSpPr>
-        <p:spPr>
-          <a:xfrm>
-            <a:off x="2419380" y="5916168"/>
-            <a:ext cx="1874519" cy="402336"/>
-          </a:xfrm>
-          <a:prstGeom prst="rect">
-            <a:avLst/>
-          </a:prstGeom>
-          <a:noFill/>
-        </p:spPr>
-        <p:txBody>
-          <a:bodyPr wrap="square" anchor="t" lIns="0" rIns="0" tIns="0" bIns="0">
-            <a:spAutoFit/>
-          </a:bodyPr>
-          <a:lstStyle/>
-          <a:p>
-            <a:pPr algn="r">
-              <a:lnSpc>
-                <a:spcPct val="100000"/>
-              </a:lnSpc>
-            </a:pPr>
-            <a:r>
-              <a:rPr sz="1000" b="1">
-                <a:solidFill>
-                  <a:srgbClr val="1428A0"/>
-                </a:solidFill>
-                <a:latin typeface="Arial"/>
-                <a:ea typeface="Arial"/>
-              </a:rPr>
-              <a:t>2026 KV 캐시 관리자 코드</a:t>
-            </a:r>
-          </a:p>
-          <a:p>
-            <a:pPr algn="r">
-              <a:lnSpc>
-                <a:spcPct val="100000"/>
-              </a:lnSpc>
-            </a:pPr>
-            <a:r>
-              <a:rPr sz="1000" b="1">
-                <a:solidFill>
-                  <a:srgbClr val="1428A0"/>
-                </a:solidFill>
-                <a:latin typeface="Arial"/>
-                <a:ea typeface="Arial"/>
-              </a:rPr>
-              <a:t>배치 규격 미정의 = 선점 구간</a:t>
-            </a:r>
-          </a:p>
-        </p:txBody>
-      </p:sp>
-      <p:sp>
-        <p:nvSpPr>
-          <p:cNvPr id="75" name="Rectangle 74"/>
-          <p:cNvSpPr/>
-          <p:nvPr/>
-        </p:nvSpPr>
-        <p:spPr>
-          <a:xfrm>
-            <a:off x="996696" y="7955279"/>
-            <a:ext cx="3304032" cy="10972"/>
-          </a:xfrm>
-          <a:prstGeom prst="rect">
-            <a:avLst/>
-          </a:prstGeom>
-          <a:solidFill>
-            <a:srgbClr val="D9D9D9"/>
-          </a:solidFill>
-          <a:ln>
-            <a:noFill/>
-          </a:ln>
-          <a:effectLst/>
-        </p:spPr>
-        <p:style>
-          <a:lnRef idx="1">
-            <a:schemeClr val="accent1"/>
-          </a:lnRef>
-          <a:fillRef idx="3">
-            <a:schemeClr val="accent1"/>
-          </a:fillRef>
-          <a:effectRef idx="2">
-            <a:schemeClr val="accent1"/>
-          </a:effectRef>
-          <a:fontRef idx="minor">
-            <a:schemeClr val="lt1"/>
-          </a:fontRef>
-        </p:style>
-        <p:txBody>
-          <a:bodyPr rtlCol="0" anchor="ctr"/>
-          <a:lstStyle/>
-          <a:p>
-            <a:pPr algn="ctr"/>
-          </a:p>
-        </p:txBody>
-      </p:sp>
-      <p:sp>
-        <p:nvSpPr>
-          <p:cNvPr id="76" name="Oval 75"/>
-          <p:cNvSpPr/>
-          <p:nvPr/>
-        </p:nvSpPr>
-        <p:spPr>
-          <a:xfrm>
-            <a:off x="996696" y="8055863"/>
-            <a:ext cx="237744" cy="237744"/>
-          </a:xfrm>
-          <a:prstGeom prst="ellipse">
-            <a:avLst/>
-          </a:prstGeom>
-          <a:solidFill>
-            <a:srgbClr val="1428A0"/>
-          </a:solidFill>
-          <a:ln>
-            <a:noFill/>
-          </a:ln>
-          <a:effectLst/>
-        </p:spPr>
-        <p:style>
-          <a:lnRef idx="1">
-            <a:schemeClr val="accent1"/>
-          </a:lnRef>
-          <a:fillRef idx="3">
-            <a:schemeClr val="accent1"/>
-          </a:fillRef>
-          <a:effectRef idx="2">
-            <a:schemeClr val="accent1"/>
-          </a:effectRef>
-          <a:fontRef idx="minor">
-            <a:schemeClr val="lt1"/>
-          </a:fontRef>
-        </p:style>
-        <p:txBody>
-          <a:bodyPr rtlCol="0" anchor="ctr"/>
-          <a:lstStyle/>
-          <a:p>
-            <a:pPr algn="ctr"/>
-          </a:p>
-        </p:txBody>
-      </p:sp>
-      <p:sp>
-        <p:nvSpPr>
-          <p:cNvPr id="77" name="TextBox 76"/>
-          <p:cNvSpPr txBox="1"/>
-          <p:nvPr/>
-        </p:nvSpPr>
-        <p:spPr>
-          <a:xfrm>
-            <a:off x="996696" y="8055863"/>
-            <a:ext cx="237744" cy="237744"/>
-          </a:xfrm>
-          <a:prstGeom prst="rect">
-            <a:avLst/>
-          </a:prstGeom>
-          <a:noFill/>
-        </p:spPr>
-        <p:txBody>
-          <a:bodyPr wrap="square" anchor="ctr" lIns="0" rIns="0" tIns="0" bIns="0">
-            <a:spAutoFit/>
-          </a:bodyPr>
-          <a:lstStyle/>
-          <a:p>
-            <a:pPr algn="ctr">
-              <a:lnSpc>
-                <a:spcPct val="112000"/>
-              </a:lnSpc>
-            </a:pPr>
-            <a:r>
-              <a:rPr sz="1100" b="1">
-                <a:solidFill>
-                  <a:srgbClr val="FFFFFF"/>
-                </a:solidFill>
-                <a:latin typeface="Arial"/>
-                <a:ea typeface="Arial"/>
-              </a:rPr>
-              <a:t>2</a:t>
-            </a:r>
-          </a:p>
-        </p:txBody>
-      </p:sp>
-      <p:sp>
-        <p:nvSpPr>
-          <p:cNvPr id="78" name="TextBox 77"/>
-          <p:cNvSpPr txBox="1"/>
-          <p:nvPr/>
-        </p:nvSpPr>
-        <p:spPr>
-          <a:xfrm>
-            <a:off x="1307592" y="8037575"/>
-            <a:ext cx="2993136" cy="274320"/>
-          </a:xfrm>
-          <a:prstGeom prst="rect">
-            <a:avLst/>
-          </a:prstGeom>
-          <a:noFill/>
-        </p:spPr>
-        <p:txBody>
-          <a:bodyPr wrap="square" anchor="ctr" lIns="0" rIns="0" tIns="0" bIns="0">
-            <a:spAutoFit/>
-          </a:bodyPr>
-          <a:lstStyle/>
-          <a:p>
-            <a:pPr algn="l">
-              <a:lnSpc>
-                <a:spcPct val="112000"/>
-              </a:lnSpc>
-            </a:pPr>
-            <a:r>
-              <a:rPr sz="1125" b="1">
-                <a:solidFill>
-                  <a:srgbClr val="1428A0"/>
-                </a:solidFill>
-                <a:latin typeface="Arial"/>
-                <a:ea typeface="Arial"/>
-              </a:rPr>
-              <a:t>해법 사다리  </a:t>
-            </a:r>
-            <a:r>
-              <a:rPr sz="1050" b="0">
-                <a:solidFill>
-                  <a:srgbClr val="555555"/>
-                </a:solidFill>
-                <a:latin typeface="Arial"/>
-                <a:ea typeface="Arial"/>
-              </a:rPr>
-              <a:t>규격은 호스트 계층에서 정의</a:t>
-            </a:r>
-          </a:p>
-        </p:txBody>
-      </p:sp>
-      <p:sp>
-        <p:nvSpPr>
-          <p:cNvPr id="79" name="Rectangle 78"/>
-          <p:cNvSpPr/>
-          <p:nvPr/>
-        </p:nvSpPr>
-        <p:spPr>
-          <a:xfrm>
-            <a:off x="4812792" y="4151376"/>
-            <a:ext cx="3816096" cy="4261103"/>
-          </a:xfrm>
-          <a:prstGeom prst="rect">
-            <a:avLst/>
-          </a:prstGeom>
-          <a:solidFill>
-            <a:srgbClr val="F4F6FC"/>
-          </a:solidFill>
-          <a:ln>
-            <a:noFill/>
-          </a:ln>
-          <a:effectLst/>
-        </p:spPr>
-        <p:style>
-          <a:lnRef idx="1">
-            <a:schemeClr val="accent1"/>
-          </a:lnRef>
-          <a:fillRef idx="3">
-            <a:schemeClr val="accent1"/>
-          </a:fillRef>
-          <a:effectRef idx="2">
-            <a:schemeClr val="accent1"/>
-          </a:effectRef>
-          <a:fontRef idx="minor">
-            <a:schemeClr val="lt1"/>
-          </a:fontRef>
-        </p:style>
-        <p:txBody>
-          <a:bodyPr rtlCol="0" anchor="ctr"/>
-          <a:lstStyle/>
-          <a:p>
-            <a:pPr algn="ctr"/>
-          </a:p>
-        </p:txBody>
-      </p:sp>
-      <p:sp>
-        <p:nvSpPr>
-          <p:cNvPr id="80" name="Rectangle 79"/>
-          <p:cNvSpPr/>
-          <p:nvPr/>
-        </p:nvSpPr>
-        <p:spPr>
-          <a:xfrm>
-            <a:off x="4812792" y="4151376"/>
-            <a:ext cx="73152" cy="4261103"/>
-          </a:xfrm>
-          <a:prstGeom prst="rect">
-            <a:avLst/>
-          </a:prstGeom>
-          <a:solidFill>
-            <a:srgbClr val="1428A0"/>
-          </a:solidFill>
-          <a:ln>
-            <a:noFill/>
-          </a:ln>
-          <a:effectLst/>
-        </p:spPr>
-        <p:style>
-          <a:lnRef idx="1">
-            <a:schemeClr val="accent1"/>
-          </a:lnRef>
-          <a:fillRef idx="3">
-            <a:schemeClr val="accent1"/>
-          </a:fillRef>
-          <a:effectRef idx="2">
-            <a:schemeClr val="accent1"/>
-          </a:effectRef>
-          <a:fontRef idx="minor">
-            <a:schemeClr val="lt1"/>
-          </a:fontRef>
-        </p:style>
-        <p:txBody>
-          <a:bodyPr rtlCol="0" anchor="ctr"/>
-          <a:lstStyle/>
-          <a:p>
-            <a:pPr algn="ctr"/>
-          </a:p>
-        </p:txBody>
-      </p:sp>
-      <p:sp>
-        <p:nvSpPr>
-          <p:cNvPr id="81" name="TextBox 80"/>
-          <p:cNvSpPr txBox="1"/>
-          <p:nvPr/>
-        </p:nvSpPr>
-        <p:spPr>
-          <a:xfrm>
-            <a:off x="5087112" y="4297680"/>
-            <a:ext cx="3304032" cy="256032"/>
-          </a:xfrm>
-          <a:prstGeom prst="rect">
-            <a:avLst/>
-          </a:prstGeom>
-          <a:noFill/>
-        </p:spPr>
-        <p:txBody>
-          <a:bodyPr wrap="square" anchor="t" lIns="0" rIns="0" tIns="0" bIns="0">
-            <a:spAutoFit/>
-          </a:bodyPr>
-          <a:lstStyle/>
-          <a:p>
-            <a:pPr algn="l">
-              <a:lnSpc>
-                <a:spcPct val="112000"/>
-              </a:lnSpc>
-            </a:pPr>
-            <a:r>
-              <a:rPr sz="1500" b="1">
-                <a:solidFill>
-                  <a:srgbClr val="1428A0"/>
-                </a:solidFill>
-                <a:latin typeface="Arial"/>
-                <a:ea typeface="Arial"/>
-              </a:rPr>
-              <a:t>교훈 2 · 고객 협업</a:t>
-            </a:r>
-          </a:p>
-        </p:txBody>
-      </p:sp>
-      <p:sp>
-        <p:nvSpPr>
-          <p:cNvPr id="82" name="TextBox 81"/>
-          <p:cNvSpPr txBox="1"/>
-          <p:nvPr/>
-        </p:nvSpPr>
-        <p:spPr>
-          <a:xfrm>
-            <a:off x="5087112" y="4590288"/>
-            <a:ext cx="1417320" cy="475488"/>
-          </a:xfrm>
-          <a:prstGeom prst="rect">
-            <a:avLst/>
-          </a:prstGeom>
-          <a:noFill/>
-        </p:spPr>
-        <p:txBody>
-          <a:bodyPr wrap="square" anchor="ctr" lIns="0" rIns="0" tIns="0" bIns="0">
-            <a:spAutoFit/>
-          </a:bodyPr>
-          <a:lstStyle/>
-          <a:p>
-            <a:pPr algn="l">
-              <a:lnSpc>
-                <a:spcPct val="112000"/>
-              </a:lnSpc>
-            </a:pPr>
-            <a:r>
-              <a:rPr sz="2600" b="1">
-                <a:solidFill>
-                  <a:srgbClr val="1428A0"/>
-                </a:solidFill>
-                <a:latin typeface="Arial"/>
-                <a:ea typeface="Arial"/>
-              </a:rPr>
-              <a:t>12개월</a:t>
-            </a:r>
-          </a:p>
-        </p:txBody>
-      </p:sp>
-      <p:sp>
-        <p:nvSpPr>
-          <p:cNvPr id="83" name="TextBox 82"/>
-          <p:cNvSpPr txBox="1"/>
-          <p:nvPr/>
-        </p:nvSpPr>
-        <p:spPr>
-          <a:xfrm>
-            <a:off x="6550152" y="4590288"/>
-            <a:ext cx="1840992" cy="475488"/>
-          </a:xfrm>
-          <a:prstGeom prst="rect">
-            <a:avLst/>
-          </a:prstGeom>
-          <a:noFill/>
-        </p:spPr>
-        <p:txBody>
-          <a:bodyPr wrap="square" anchor="ctr" lIns="0" rIns="0" tIns="0" bIns="0">
-            <a:spAutoFit/>
-          </a:bodyPr>
-          <a:lstStyle/>
-          <a:p>
-            <a:pPr algn="l">
-              <a:lnSpc>
-                <a:spcPct val="102000"/>
-              </a:lnSpc>
-            </a:pPr>
-            <a:r>
-              <a:rPr sz="1050" b="0">
-                <a:solidFill>
-                  <a:srgbClr val="555555"/>
-                </a:solidFill>
-                <a:latin typeface="Arial"/>
-                <a:ea typeface="Arial"/>
-              </a:rPr>
-              <a:t>규격 정의 참여 vs 후발의</a:t>
-            </a:r>
-          </a:p>
-          <a:p>
-            <a:pPr algn="l">
-              <a:lnSpc>
-                <a:spcPct val="102000"/>
-              </a:lnSpc>
-            </a:pPr>
-            <a:r>
-              <a:rPr sz="1050" b="0">
-                <a:solidFill>
-                  <a:srgbClr val="555555"/>
-                </a:solidFill>
-                <a:latin typeface="Arial"/>
-                <a:ea typeface="Arial"/>
-              </a:rPr>
-              <a:t>출시 시점 격차</a:t>
+              <a:rPr sz="950" b="1">
+                <a:solidFill>
+                  <a:srgbClr val="1A1A1A"/>
+                </a:solidFill>
+                <a:latin typeface="Arial"/>
+                <a:ea typeface="Arial"/>
+              </a:rPr>
+              <a:t>삼성</a:t>
             </a:r>
           </a:p>
         </p:txBody>
@@ -7338,256 +7384,8 @@
         </p:nvSpPr>
         <p:spPr>
           <a:xfrm>
-            <a:off x="5087112" y="5157216"/>
-            <a:ext cx="3304032" cy="10972"/>
-          </a:xfrm>
-          <a:prstGeom prst="rect">
-            <a:avLst/>
-          </a:prstGeom>
-          <a:solidFill>
-            <a:srgbClr val="D9D9D9"/>
-          </a:solidFill>
-          <a:ln>
-            <a:noFill/>
-          </a:ln>
-          <a:effectLst/>
-        </p:spPr>
-        <p:style>
-          <a:lnRef idx="1">
-            <a:schemeClr val="accent1"/>
-          </a:lnRef>
-          <a:fillRef idx="3">
-            <a:schemeClr val="accent1"/>
-          </a:fillRef>
-          <a:effectRef idx="2">
-            <a:schemeClr val="accent1"/>
-          </a:effectRef>
-          <a:fontRef idx="minor">
-            <a:schemeClr val="lt1"/>
-          </a:fontRef>
-        </p:style>
-        <p:txBody>
-          <a:bodyPr rtlCol="0" anchor="ctr"/>
-          <a:lstStyle/>
-          <a:p>
-            <a:pPr algn="ctr"/>
-          </a:p>
-        </p:txBody>
-      </p:sp>
-      <p:sp>
-        <p:nvSpPr>
-          <p:cNvPr id="85" name="TextBox 84"/>
-          <p:cNvSpPr txBox="1"/>
-          <p:nvPr/>
-        </p:nvSpPr>
-        <p:spPr>
-          <a:xfrm>
-            <a:off x="5087112" y="5266944"/>
-            <a:ext cx="3304032" cy="201168"/>
-          </a:xfrm>
-          <a:prstGeom prst="rect">
-            <a:avLst/>
-          </a:prstGeom>
-          <a:noFill/>
-        </p:spPr>
-        <p:txBody>
-          <a:bodyPr wrap="square" anchor="t" lIns="0" rIns="0" tIns="0" bIns="0">
-            <a:spAutoFit/>
-          </a:bodyPr>
-          <a:lstStyle/>
-          <a:p>
-            <a:pPr algn="l">
-              <a:lnSpc>
-                <a:spcPct val="112000"/>
-              </a:lnSpc>
-            </a:pPr>
-            <a:r>
-              <a:rPr sz="1000" b="0">
-                <a:solidFill>
-                  <a:srgbClr val="8A8A8A"/>
-                </a:solidFill>
-                <a:latin typeface="Arial"/>
-                <a:ea typeface="Arial"/>
-              </a:rPr>
-              <a:t>61TB QLC 출시 · OCP 2022-10 예고 기준</a:t>
-            </a:r>
-          </a:p>
-        </p:txBody>
-      </p:sp>
-      <p:sp>
-        <p:nvSpPr>
-          <p:cNvPr id="86" name="TextBox 85"/>
-          <p:cNvSpPr txBox="1"/>
-          <p:nvPr/>
-        </p:nvSpPr>
-        <p:spPr>
-          <a:xfrm>
-            <a:off x="5087112" y="5559552"/>
-            <a:ext cx="685800" cy="310896"/>
-          </a:xfrm>
-          <a:prstGeom prst="rect">
-            <a:avLst/>
-          </a:prstGeom>
-          <a:noFill/>
-        </p:spPr>
-        <p:txBody>
-          <a:bodyPr wrap="square" anchor="ctr" lIns="0" rIns="0" tIns="0" bIns="0">
-            <a:spAutoFit/>
-          </a:bodyPr>
-          <a:lstStyle/>
-          <a:p>
-            <a:pPr algn="l">
-              <a:lnSpc>
-                <a:spcPct val="112000"/>
-              </a:lnSpc>
-            </a:pPr>
-            <a:r>
-              <a:rPr sz="1050" b="1">
-                <a:solidFill>
-                  <a:srgbClr val="1A1A1A"/>
-                </a:solidFill>
-                <a:latin typeface="Arial"/>
-                <a:ea typeface="Arial"/>
-              </a:rPr>
-              <a:t>Solidigm</a:t>
-            </a:r>
-          </a:p>
-        </p:txBody>
-      </p:sp>
-      <p:sp>
-        <p:nvSpPr>
-          <p:cNvPr id="87" name="Rectangle 86"/>
-          <p:cNvSpPr/>
-          <p:nvPr/>
-        </p:nvSpPr>
-        <p:spPr>
-          <a:xfrm>
-            <a:off x="5818632" y="5559552"/>
-            <a:ext cx="1102505" cy="310896"/>
-          </a:xfrm>
-          <a:prstGeom prst="rect">
-            <a:avLst/>
-          </a:prstGeom>
-          <a:solidFill>
-            <a:srgbClr val="1428A0"/>
-          </a:solidFill>
-          <a:ln>
-            <a:noFill/>
-          </a:ln>
-          <a:effectLst/>
-        </p:spPr>
-        <p:style>
-          <a:lnRef idx="1">
-            <a:schemeClr val="accent1"/>
-          </a:lnRef>
-          <a:fillRef idx="3">
-            <a:schemeClr val="accent1"/>
-          </a:fillRef>
-          <a:effectRef idx="2">
-            <a:schemeClr val="accent1"/>
-          </a:effectRef>
-          <a:fontRef idx="minor">
-            <a:schemeClr val="lt1"/>
-          </a:fontRef>
-        </p:style>
-        <p:txBody>
-          <a:bodyPr rtlCol="0" anchor="ctr"/>
-          <a:lstStyle/>
-          <a:p>
-            <a:pPr algn="ctr"/>
-          </a:p>
-        </p:txBody>
-      </p:sp>
-      <p:sp>
-        <p:nvSpPr>
-          <p:cNvPr id="88" name="TextBox 87"/>
-          <p:cNvSpPr txBox="1"/>
-          <p:nvPr/>
-        </p:nvSpPr>
-        <p:spPr>
-          <a:xfrm>
-            <a:off x="6994289" y="5559552"/>
-            <a:ext cx="1396854" cy="310896"/>
-          </a:xfrm>
-          <a:prstGeom prst="rect">
-            <a:avLst/>
-          </a:prstGeom>
-          <a:noFill/>
-        </p:spPr>
-        <p:txBody>
-          <a:bodyPr wrap="square" anchor="ctr" lIns="0" rIns="0" tIns="0" bIns="0">
-            <a:spAutoFit/>
-          </a:bodyPr>
-          <a:lstStyle/>
-          <a:p>
-            <a:pPr algn="l">
-              <a:lnSpc>
-                <a:spcPct val="112000"/>
-              </a:lnSpc>
-            </a:pPr>
-            <a:r>
-              <a:rPr sz="1000" b="1">
-                <a:solidFill>
-                  <a:srgbClr val="1428A0"/>
-                </a:solidFill>
-                <a:latin typeface="Arial"/>
-                <a:ea typeface="Arial"/>
-              </a:rPr>
-              <a:t>'23-07 규격 정의 참여</a:t>
-            </a:r>
-          </a:p>
-        </p:txBody>
-      </p:sp>
-      <p:sp>
-        <p:nvSpPr>
-          <p:cNvPr id="89" name="TextBox 88"/>
-          <p:cNvSpPr txBox="1"/>
-          <p:nvPr/>
-        </p:nvSpPr>
-        <p:spPr>
-          <a:xfrm>
-            <a:off x="5087112" y="5980176"/>
-            <a:ext cx="685800" cy="310896"/>
-          </a:xfrm>
-          <a:prstGeom prst="rect">
-            <a:avLst/>
-          </a:prstGeom>
-          <a:noFill/>
-        </p:spPr>
-        <p:txBody>
-          <a:bodyPr wrap="square" anchor="ctr" lIns="0" rIns="0" tIns="0" bIns="0">
-            <a:spAutoFit/>
-          </a:bodyPr>
-          <a:lstStyle/>
-          <a:p>
-            <a:pPr algn="l">
-              <a:lnSpc>
-                <a:spcPct val="112000"/>
-              </a:lnSpc>
-            </a:pPr>
-            <a:r>
-              <a:rPr sz="1050" b="1">
-                <a:solidFill>
-                  <a:srgbClr val="1A1A1A"/>
-                </a:solidFill>
-                <a:latin typeface="Arial"/>
-                <a:ea typeface="Arial"/>
-              </a:rPr>
-              <a:t>삼성</a:t>
-            </a:r>
-          </a:p>
-        </p:txBody>
-      </p:sp>
-      <p:sp>
-        <p:nvSpPr>
-          <p:cNvPr id="90" name="Rectangle 89"/>
-          <p:cNvSpPr/>
-          <p:nvPr/>
-        </p:nvSpPr>
-        <p:spPr>
-          <a:xfrm>
-            <a:off x="5818632" y="5980176"/>
-            <a:ext cx="2572512" cy="310896"/>
+            <a:off x="5157216" y="6504431"/>
+            <a:ext cx="2947659" cy="237744"/>
           </a:xfrm>
           <a:prstGeom prst="rect">
             <a:avLst/>
@@ -7626,14 +7424,14 @@
       </p:sp>
       <p:sp>
         <p:nvSpPr>
-          <p:cNvPr id="91" name="TextBox 90"/>
-          <p:cNvSpPr txBox="1"/>
-          <p:nvPr/>
-        </p:nvSpPr>
-        <p:spPr>
-          <a:xfrm>
-            <a:off x="5910072" y="5980176"/>
-            <a:ext cx="2389632" cy="310896"/>
+          <p:cNvPr id="85" name="TextBox 84"/>
+          <p:cNvSpPr txBox="1"/>
+          <p:nvPr/>
+        </p:nvSpPr>
+        <p:spPr>
+          <a:xfrm>
+            <a:off x="5230368" y="6504431"/>
+            <a:ext cx="2801355" cy="237744"/>
           </a:xfrm>
           <a:prstGeom prst="rect">
             <a:avLst/>
@@ -7652,28 +7450,162 @@
               </a:lnSpc>
             </a:pPr>
             <a:r>
+              <a:rPr sz="875" b="1">
+                <a:solidFill>
+                  <a:srgbClr val="555555"/>
+                </a:solidFill>
+                <a:latin typeface="Arial"/>
+                <a:ea typeface="Arial"/>
+              </a:rPr>
+              <a:t>'24-07 · 12개월 후발</a:t>
+            </a:r>
+          </a:p>
+        </p:txBody>
+      </p:sp>
+      <p:sp>
+        <p:nvSpPr>
+          <p:cNvPr id="86" name="TextBox 85"/>
+          <p:cNvSpPr txBox="1"/>
+          <p:nvPr/>
+        </p:nvSpPr>
+        <p:spPr>
+          <a:xfrm>
+            <a:off x="4517136" y="6833615"/>
+            <a:ext cx="3587739" cy="329184"/>
+          </a:xfrm>
+          <a:prstGeom prst="rect">
+            <a:avLst/>
+          </a:prstGeom>
+          <a:noFill/>
+        </p:spPr>
+        <p:txBody>
+          <a:bodyPr wrap="square" anchor="t" lIns="0" rIns="0" tIns="0" bIns="0">
+            <a:spAutoFit/>
+          </a:bodyPr>
+          <a:lstStyle/>
+          <a:p>
+            <a:pPr algn="l">
+              <a:lnSpc>
+                <a:spcPct val="100000"/>
+              </a:lnSpc>
+            </a:pPr>
+            <a:r>
+              <a:rPr sz="875" b="1">
+                <a:solidFill>
+                  <a:srgbClr val="1A1A1A"/>
+                </a:solidFill>
+                <a:latin typeface="Arial"/>
+                <a:ea typeface="Arial"/>
+              </a:rPr>
+              <a:t>HBM4  </a:t>
+            </a:r>
+            <a:r>
+              <a:rPr sz="875" b="0">
+                <a:solidFill>
+                  <a:srgbClr val="555555"/>
+                </a:solidFill>
+                <a:latin typeface="Arial"/>
+                <a:ea typeface="Arial"/>
+              </a:rPr>
+              <a:t>SK hynix ↔ NVIDIA 규격 공동 정의 → 주도권 · 삼성 후발</a:t>
+            </a:r>
+          </a:p>
+        </p:txBody>
+      </p:sp>
+      <p:sp>
+        <p:nvSpPr>
+          <p:cNvPr id="87" name="Oval 86"/>
+          <p:cNvSpPr/>
+          <p:nvPr/>
+        </p:nvSpPr>
+        <p:spPr>
+          <a:xfrm>
+            <a:off x="8242035" y="6327648"/>
+            <a:ext cx="237744" cy="237744"/>
+          </a:xfrm>
+          <a:prstGeom prst="ellipse">
+            <a:avLst/>
+          </a:prstGeom>
+          <a:solidFill>
+            <a:srgbClr val="AAB8E8"/>
+          </a:solidFill>
+          <a:ln>
+            <a:noFill/>
+          </a:ln>
+          <a:effectLst/>
+        </p:spPr>
+        <p:style>
+          <a:lnRef idx="1">
+            <a:schemeClr val="accent1"/>
+          </a:lnRef>
+          <a:fillRef idx="3">
+            <a:schemeClr val="accent1"/>
+          </a:fillRef>
+          <a:effectRef idx="2">
+            <a:schemeClr val="accent1"/>
+          </a:effectRef>
+          <a:fontRef idx="minor">
+            <a:schemeClr val="lt1"/>
+          </a:fontRef>
+        </p:style>
+        <p:txBody>
+          <a:bodyPr rtlCol="0" anchor="ctr"/>
+          <a:lstStyle/>
+          <a:p>
+            <a:pPr algn="ctr"/>
+          </a:p>
+        </p:txBody>
+      </p:sp>
+      <p:sp>
+        <p:nvSpPr>
+          <p:cNvPr id="88" name="TextBox 87"/>
+          <p:cNvSpPr txBox="1"/>
+          <p:nvPr/>
+        </p:nvSpPr>
+        <p:spPr>
+          <a:xfrm>
+            <a:off x="8242035" y="6327648"/>
+            <a:ext cx="237744" cy="237744"/>
+          </a:xfrm>
+          <a:prstGeom prst="rect">
+            <a:avLst/>
+          </a:prstGeom>
+          <a:noFill/>
+        </p:spPr>
+        <p:txBody>
+          <a:bodyPr wrap="square" anchor="ctr" lIns="0" rIns="0" tIns="0" bIns="0">
+            <a:spAutoFit/>
+          </a:bodyPr>
+          <a:lstStyle/>
+          <a:p>
+            <a:pPr algn="ctr">
+              <a:lnSpc>
+                <a:spcPct val="112000"/>
+              </a:lnSpc>
+            </a:pPr>
+            <a:r>
               <a:rPr sz="1000" b="1">
                 <a:solidFill>
-                  <a:srgbClr val="555555"/>
-                </a:solidFill>
-                <a:latin typeface="Arial"/>
-                <a:ea typeface="Arial"/>
-              </a:rPr>
-              <a:t>'24-07 · 12개월 후발</a:t>
-            </a:r>
-          </a:p>
-        </p:txBody>
-      </p:sp>
-      <p:sp>
-        <p:nvSpPr>
-          <p:cNvPr id="92" name="Rectangle 91"/>
+                  <a:srgbClr val="1A1A1A"/>
+                </a:solidFill>
+                <a:latin typeface="Arial"/>
+                <a:ea typeface="Arial"/>
+              </a:rPr>
+              <a:t>3</a:t>
+            </a:r>
+          </a:p>
+        </p:txBody>
+      </p:sp>
+      <p:sp>
+        <p:nvSpPr>
+          <p:cNvPr id="89" name="Rectangle 88"/>
           <p:cNvSpPr/>
           <p:nvPr/>
         </p:nvSpPr>
         <p:spPr>
           <a:xfrm>
-            <a:off x="5087112" y="6473952"/>
-            <a:ext cx="3304032" cy="10972"/>
+            <a:off x="960120" y="7074408"/>
+            <a:ext cx="7556235" cy="10972"/>
           </a:xfrm>
           <a:prstGeom prst="rect">
             <a:avLst/>
@@ -7710,22 +7642,22 @@
       </p:sp>
       <p:sp>
         <p:nvSpPr>
-          <p:cNvPr id="93" name="TextBox 92"/>
-          <p:cNvSpPr txBox="1"/>
-          <p:nvPr/>
-        </p:nvSpPr>
-        <p:spPr>
-          <a:xfrm>
-            <a:off x="5087112" y="6583680"/>
-            <a:ext cx="3304032" cy="201168"/>
-          </a:xfrm>
-          <a:prstGeom prst="rect">
-            <a:avLst/>
-          </a:prstGeom>
-          <a:noFill/>
-        </p:spPr>
-        <p:txBody>
-          <a:bodyPr wrap="square" anchor="t" lIns="0" rIns="0" tIns="0" bIns="0">
+          <p:cNvPr id="90" name="TextBox 89"/>
+          <p:cNvSpPr txBox="1"/>
+          <p:nvPr/>
+        </p:nvSpPr>
+        <p:spPr>
+          <a:xfrm>
+            <a:off x="960120" y="7120128"/>
+            <a:ext cx="1207008" cy="1164336"/>
+          </a:xfrm>
+          <a:prstGeom prst="rect">
+            <a:avLst/>
+          </a:prstGeom>
+          <a:noFill/>
+        </p:spPr>
+        <p:txBody>
+          <a:bodyPr wrap="square" anchor="ctr" lIns="0" rIns="0" tIns="0" bIns="0">
             <a:spAutoFit/>
           </a:bodyPr>
           <a:lstStyle/>
@@ -7736,489 +7668,112 @@
               </a:lnSpc>
             </a:pPr>
             <a:r>
-              <a:rPr sz="1000" b="0">
+              <a:rPr sz="2200" b="1">
+                <a:solidFill>
+                  <a:srgbClr val="1428A0"/>
+                </a:solidFill>
+                <a:latin typeface="Arial"/>
+                <a:ea typeface="Arial"/>
+              </a:rPr>
+              <a:t>2027H2</a:t>
+            </a:r>
+          </a:p>
+        </p:txBody>
+      </p:sp>
+      <p:sp>
+        <p:nvSpPr>
+          <p:cNvPr id="91" name="TextBox 90"/>
+          <p:cNvSpPr txBox="1"/>
+          <p:nvPr/>
+        </p:nvSpPr>
+        <p:spPr>
+          <a:xfrm>
+            <a:off x="2167128" y="7174992"/>
+            <a:ext cx="2212848" cy="1109472"/>
+          </a:xfrm>
+          <a:prstGeom prst="rect">
+            <a:avLst/>
+          </a:prstGeom>
+          <a:noFill/>
+        </p:spPr>
+        <p:txBody>
+          <a:bodyPr wrap="square" anchor="ctr" lIns="0" rIns="0" tIns="0" bIns="0">
+            <a:spAutoFit/>
+          </a:bodyPr>
+          <a:lstStyle/>
+          <a:p>
+            <a:pPr algn="l">
+              <a:lnSpc>
+                <a:spcPct val="106000"/>
+              </a:lnSpc>
+            </a:pPr>
+            <a:r>
+              <a:rPr sz="1050" b="0">
                 <a:solidFill>
                   <a:srgbClr val="8A8A8A"/>
                 </a:solidFill>
                 <a:latin typeface="Arial"/>
                 <a:ea typeface="Arial"/>
               </a:rPr>
-              <a:t>HBM4 규격 정의</a:t>
-            </a:r>
-          </a:p>
-        </p:txBody>
-      </p:sp>
-      <p:sp>
-        <p:nvSpPr>
-          <p:cNvPr id="94" name="Oval 93"/>
+              <a:t>교훈 3 · </a:t>
+            </a:r>
+            <a:r>
+              <a:rPr sz="1125" b="1">
+                <a:solidFill>
+                  <a:srgbClr val="1A1A1A"/>
+                </a:solidFill>
+                <a:latin typeface="Arial"/>
+                <a:ea typeface="Arial"/>
+              </a:rPr>
+              <a:t>의사결정 시점</a:t>
+            </a:r>
+          </a:p>
+          <a:p>
+            <a:pPr algn="l">
+              <a:lnSpc>
+                <a:spcPct val="106000"/>
+              </a:lnSpc>
+            </a:pPr>
+            <a:r>
+              <a:rPr sz="975" b="1">
+                <a:solidFill>
+                  <a:srgbClr val="1A1A1A"/>
+                </a:solidFill>
+                <a:latin typeface="Arial"/>
+                <a:ea typeface="Arial"/>
+              </a:rPr>
+              <a:t>직전 다운턴의 결정이 다음 다운턴의 초기 조건</a:t>
+            </a:r>
+          </a:p>
+          <a:p>
+            <a:pPr algn="l">
+              <a:lnSpc>
+                <a:spcPct val="106000"/>
+              </a:lnSpc>
+            </a:pPr>
+            <a:r>
+              <a:rPr sz="900" b="0">
+                <a:solidFill>
+                  <a:srgbClr val="555555"/>
+                </a:solidFill>
+                <a:latin typeface="Arial"/>
+                <a:ea typeface="Arial"/>
+              </a:rPr>
+              <a:t>차기 전환점은 2027년 하반기 가격 정상화 국면</a:t>
+            </a:r>
+          </a:p>
+        </p:txBody>
+      </p:sp>
+      <p:sp>
+        <p:nvSpPr>
+          <p:cNvPr id="92" name="Rectangle 91"/>
           <p:cNvSpPr/>
           <p:nvPr/>
         </p:nvSpPr>
         <p:spPr>
           <a:xfrm>
-            <a:off x="5894710" y="6858000"/>
-            <a:ext cx="180685" cy="180685"/>
-          </a:xfrm>
-          <a:prstGeom prst="ellipse">
-            <a:avLst/>
-          </a:prstGeom>
-          <a:solidFill>
-            <a:srgbClr val="1428A0"/>
-          </a:solidFill>
-          <a:ln>
-            <a:noFill/>
-          </a:ln>
-          <a:effectLst/>
-        </p:spPr>
-        <p:style>
-          <a:lnRef idx="1">
-            <a:schemeClr val="accent1"/>
-          </a:lnRef>
-          <a:fillRef idx="3">
-            <a:schemeClr val="accent1"/>
-          </a:fillRef>
-          <a:effectRef idx="2">
-            <a:schemeClr val="accent1"/>
-          </a:effectRef>
-          <a:fontRef idx="minor">
-            <a:schemeClr val="lt1"/>
-          </a:fontRef>
-        </p:style>
-        <p:txBody>
-          <a:bodyPr rtlCol="0" anchor="ctr"/>
-          <a:lstStyle/>
-          <a:p>
-            <a:pPr algn="ctr"/>
-          </a:p>
-        </p:txBody>
-      </p:sp>
-      <p:sp>
-        <p:nvSpPr>
-          <p:cNvPr id="95" name="Round Same Side Corner Rectangle 94"/>
-          <p:cNvSpPr/>
-          <p:nvPr/>
-        </p:nvSpPr>
-        <p:spPr>
-          <a:xfrm>
-            <a:off x="5818632" y="7067214"/>
-            <a:ext cx="332841" cy="266273"/>
-          </a:xfrm>
-          <a:prstGeom prst="round2SameRect">
-            <a:avLst>
-              <a:gd name="adj1" fmla="val 50000"/>
-              <a:gd name="adj2" fmla="val 0"/>
-            </a:avLst>
-          </a:prstGeom>
-          <a:solidFill>
-            <a:srgbClr val="1428A0"/>
-          </a:solidFill>
-          <a:ln>
-            <a:noFill/>
-          </a:ln>
-          <a:effectLst/>
-        </p:spPr>
-        <p:style>
-          <a:lnRef idx="1">
-            <a:schemeClr val="accent1"/>
-          </a:lnRef>
-          <a:fillRef idx="3">
-            <a:schemeClr val="accent1"/>
-          </a:fillRef>
-          <a:effectRef idx="2">
-            <a:schemeClr val="accent1"/>
-          </a:effectRef>
-          <a:fontRef idx="minor">
-            <a:schemeClr val="lt1"/>
-          </a:fontRef>
-        </p:style>
-        <p:txBody>
-          <a:bodyPr rtlCol="0" anchor="ctr"/>
-          <a:lstStyle/>
-          <a:p>
-            <a:pPr algn="ctr"/>
-          </a:p>
-        </p:txBody>
-      </p:sp>
-      <p:sp>
-        <p:nvSpPr>
-          <p:cNvPr id="96" name="Rectangle 95"/>
-          <p:cNvSpPr/>
-          <p:nvPr/>
-        </p:nvSpPr>
-        <p:spPr>
-          <a:xfrm>
-            <a:off x="6197193" y="7071969"/>
-            <a:ext cx="256032" cy="45720"/>
-          </a:xfrm>
-          <a:prstGeom prst="rect">
-            <a:avLst/>
-          </a:prstGeom>
-          <a:solidFill>
-            <a:srgbClr val="1428A0"/>
-          </a:solidFill>
-          <a:ln>
-            <a:noFill/>
-          </a:ln>
-          <a:effectLst/>
-        </p:spPr>
-        <p:style>
-          <a:lnRef idx="1">
-            <a:schemeClr val="accent1"/>
-          </a:lnRef>
-          <a:fillRef idx="3">
-            <a:schemeClr val="accent1"/>
-          </a:fillRef>
-          <a:effectRef idx="2">
-            <a:schemeClr val="accent1"/>
-          </a:effectRef>
-          <a:fontRef idx="minor">
-            <a:schemeClr val="lt1"/>
-          </a:fontRef>
-        </p:style>
-        <p:txBody>
-          <a:bodyPr rtlCol="0" anchor="ctr"/>
-          <a:lstStyle/>
-          <a:p>
-            <a:pPr algn="ctr"/>
-          </a:p>
-        </p:txBody>
-      </p:sp>
-      <p:sp>
-        <p:nvSpPr>
-          <p:cNvPr id="97" name="Oval 96"/>
-          <p:cNvSpPr/>
-          <p:nvPr/>
-        </p:nvSpPr>
-        <p:spPr>
-          <a:xfrm>
-            <a:off x="6575023" y="6858000"/>
-            <a:ext cx="180685" cy="180685"/>
-          </a:xfrm>
-          <a:prstGeom prst="ellipse">
-            <a:avLst/>
-          </a:prstGeom>
-          <a:solidFill>
-            <a:srgbClr val="1428A0"/>
-          </a:solidFill>
-          <a:ln>
-            <a:noFill/>
-          </a:ln>
-          <a:effectLst/>
-        </p:spPr>
-        <p:style>
-          <a:lnRef idx="1">
-            <a:schemeClr val="accent1"/>
-          </a:lnRef>
-          <a:fillRef idx="3">
-            <a:schemeClr val="accent1"/>
-          </a:fillRef>
-          <a:effectRef idx="2">
-            <a:schemeClr val="accent1"/>
-          </a:effectRef>
-          <a:fontRef idx="minor">
-            <a:schemeClr val="lt1"/>
-          </a:fontRef>
-        </p:style>
-        <p:txBody>
-          <a:bodyPr rtlCol="0" anchor="ctr"/>
-          <a:lstStyle/>
-          <a:p>
-            <a:pPr algn="ctr"/>
-          </a:p>
-        </p:txBody>
-      </p:sp>
-      <p:sp>
-        <p:nvSpPr>
-          <p:cNvPr id="98" name="Round Same Side Corner Rectangle 97"/>
-          <p:cNvSpPr/>
-          <p:nvPr/>
-        </p:nvSpPr>
-        <p:spPr>
-          <a:xfrm>
-            <a:off x="6498945" y="7067214"/>
-            <a:ext cx="332841" cy="266273"/>
-          </a:xfrm>
-          <a:prstGeom prst="round2SameRect">
-            <a:avLst>
-              <a:gd name="adj1" fmla="val 50000"/>
-              <a:gd name="adj2" fmla="val 0"/>
-            </a:avLst>
-          </a:prstGeom>
-          <a:solidFill>
-            <a:srgbClr val="1428A0"/>
-          </a:solidFill>
-          <a:ln>
-            <a:noFill/>
-          </a:ln>
-          <a:effectLst/>
-        </p:spPr>
-        <p:style>
-          <a:lnRef idx="1">
-            <a:schemeClr val="accent1"/>
-          </a:lnRef>
-          <a:fillRef idx="3">
-            <a:schemeClr val="accent1"/>
-          </a:fillRef>
-          <a:effectRef idx="2">
-            <a:schemeClr val="accent1"/>
-          </a:effectRef>
-          <a:fontRef idx="minor">
-            <a:schemeClr val="lt1"/>
-          </a:fontRef>
-        </p:style>
-        <p:txBody>
-          <a:bodyPr rtlCol="0" anchor="ctr"/>
-          <a:lstStyle/>
-          <a:p>
-            <a:pPr algn="ctr"/>
-          </a:p>
-        </p:txBody>
-      </p:sp>
-      <p:sp>
-        <p:nvSpPr>
-          <p:cNvPr id="99" name="TextBox 98"/>
-          <p:cNvSpPr txBox="1"/>
-          <p:nvPr/>
-        </p:nvSpPr>
-        <p:spPr>
-          <a:xfrm>
-            <a:off x="6941515" y="6821424"/>
-            <a:ext cx="1449628" cy="548640"/>
-          </a:xfrm>
-          <a:prstGeom prst="rect">
-            <a:avLst/>
-          </a:prstGeom>
-          <a:noFill/>
-        </p:spPr>
-        <p:txBody>
-          <a:bodyPr wrap="square" anchor="ctr" lIns="0" rIns="0" tIns="0" bIns="0">
-            <a:spAutoFit/>
-          </a:bodyPr>
-          <a:lstStyle/>
-          <a:p>
-            <a:pPr algn="l">
-              <a:lnSpc>
-                <a:spcPct val="100000"/>
-              </a:lnSpc>
-            </a:pPr>
-            <a:r>
-              <a:rPr sz="975" b="1">
-                <a:solidFill>
-                  <a:srgbClr val="1428A0"/>
-                </a:solidFill>
-                <a:latin typeface="Arial"/>
-                <a:ea typeface="Arial"/>
-              </a:rPr>
-              <a:t>SK hynix ↔ NVIDIA 공동 정의</a:t>
-            </a:r>
-          </a:p>
-          <a:p>
-            <a:pPr algn="l">
-              <a:lnSpc>
-                <a:spcPct val="100000"/>
-              </a:lnSpc>
-            </a:pPr>
-            <a:r>
-              <a:rPr sz="975" b="0">
-                <a:solidFill>
-                  <a:srgbClr val="555555"/>
-                </a:solidFill>
-                <a:latin typeface="Arial"/>
-                <a:ea typeface="Arial"/>
-              </a:rPr>
-              <a:t>→ 주도권 · 삼성은 후발 대응</a:t>
-            </a:r>
-          </a:p>
-        </p:txBody>
-      </p:sp>
-      <p:sp>
-        <p:nvSpPr>
-          <p:cNvPr id="100" name="Rectangle 99"/>
-          <p:cNvSpPr/>
-          <p:nvPr/>
-        </p:nvSpPr>
-        <p:spPr>
-          <a:xfrm>
-            <a:off x="5087112" y="7955279"/>
-            <a:ext cx="3304032" cy="10972"/>
-          </a:xfrm>
-          <a:prstGeom prst="rect">
-            <a:avLst/>
-          </a:prstGeom>
-          <a:solidFill>
-            <a:srgbClr val="D9D9D9"/>
-          </a:solidFill>
-          <a:ln>
-            <a:noFill/>
-          </a:ln>
-          <a:effectLst/>
-        </p:spPr>
-        <p:style>
-          <a:lnRef idx="1">
-            <a:schemeClr val="accent1"/>
-          </a:lnRef>
-          <a:fillRef idx="3">
-            <a:schemeClr val="accent1"/>
-          </a:fillRef>
-          <a:effectRef idx="2">
-            <a:schemeClr val="accent1"/>
-          </a:effectRef>
-          <a:fontRef idx="minor">
-            <a:schemeClr val="lt1"/>
-          </a:fontRef>
-        </p:style>
-        <p:txBody>
-          <a:bodyPr rtlCol="0" anchor="ctr"/>
-          <a:lstStyle/>
-          <a:p>
-            <a:pPr algn="ctr"/>
-          </a:p>
-        </p:txBody>
-      </p:sp>
-      <p:sp>
-        <p:nvSpPr>
-          <p:cNvPr id="101" name="Oval 100"/>
-          <p:cNvSpPr/>
-          <p:nvPr/>
-        </p:nvSpPr>
-        <p:spPr>
-          <a:xfrm>
-            <a:off x="5087112" y="8055863"/>
-            <a:ext cx="237744" cy="237744"/>
-          </a:xfrm>
-          <a:prstGeom prst="ellipse">
-            <a:avLst/>
-          </a:prstGeom>
-          <a:solidFill>
-            <a:srgbClr val="1428A0"/>
-          </a:solidFill>
-          <a:ln>
-            <a:noFill/>
-          </a:ln>
-          <a:effectLst/>
-        </p:spPr>
-        <p:style>
-          <a:lnRef idx="1">
-            <a:schemeClr val="accent1"/>
-          </a:lnRef>
-          <a:fillRef idx="3">
-            <a:schemeClr val="accent1"/>
-          </a:fillRef>
-          <a:effectRef idx="2">
-            <a:schemeClr val="accent1"/>
-          </a:effectRef>
-          <a:fontRef idx="minor">
-            <a:schemeClr val="lt1"/>
-          </a:fontRef>
-        </p:style>
-        <p:txBody>
-          <a:bodyPr rtlCol="0" anchor="ctr"/>
-          <a:lstStyle/>
-          <a:p>
-            <a:pPr algn="ctr"/>
-          </a:p>
-        </p:txBody>
-      </p:sp>
-      <p:sp>
-        <p:nvSpPr>
-          <p:cNvPr id="102" name="TextBox 101"/>
-          <p:cNvSpPr txBox="1"/>
-          <p:nvPr/>
-        </p:nvSpPr>
-        <p:spPr>
-          <a:xfrm>
-            <a:off x="5087112" y="8055863"/>
-            <a:ext cx="237744" cy="237744"/>
-          </a:xfrm>
-          <a:prstGeom prst="rect">
-            <a:avLst/>
-          </a:prstGeom>
-          <a:noFill/>
-        </p:spPr>
-        <p:txBody>
-          <a:bodyPr wrap="square" anchor="ctr" lIns="0" rIns="0" tIns="0" bIns="0">
-            <a:spAutoFit/>
-          </a:bodyPr>
-          <a:lstStyle/>
-          <a:p>
-            <a:pPr algn="ctr">
-              <a:lnSpc>
-                <a:spcPct val="112000"/>
-              </a:lnSpc>
-            </a:pPr>
-            <a:r>
-              <a:rPr sz="1100" b="1">
-                <a:solidFill>
-                  <a:srgbClr val="FFFFFF"/>
-                </a:solidFill>
-                <a:latin typeface="Arial"/>
-                <a:ea typeface="Arial"/>
-              </a:rPr>
-              <a:t>3</a:t>
-            </a:r>
-          </a:p>
-        </p:txBody>
-      </p:sp>
-      <p:sp>
-        <p:nvSpPr>
-          <p:cNvPr id="103" name="TextBox 102"/>
-          <p:cNvSpPr txBox="1"/>
-          <p:nvPr/>
-        </p:nvSpPr>
-        <p:spPr>
-          <a:xfrm>
-            <a:off x="5398008" y="8037575"/>
-            <a:ext cx="2993136" cy="274320"/>
-          </a:xfrm>
-          <a:prstGeom prst="rect">
-            <a:avLst/>
-          </a:prstGeom>
-          <a:noFill/>
-        </p:spPr>
-        <p:txBody>
-          <a:bodyPr wrap="square" anchor="ctr" lIns="0" rIns="0" tIns="0" bIns="0">
-            <a:spAutoFit/>
-          </a:bodyPr>
-          <a:lstStyle/>
-          <a:p>
-            <a:pPr algn="l">
-              <a:lnSpc>
-                <a:spcPct val="112000"/>
-              </a:lnSpc>
-            </a:pPr>
-            <a:r>
-              <a:rPr sz="1125" b="1">
-                <a:solidFill>
-                  <a:srgbClr val="1428A0"/>
-                </a:solidFill>
-                <a:latin typeface="Arial"/>
-                <a:ea typeface="Arial"/>
-              </a:rPr>
-              <a:t>역량  </a:t>
-            </a:r>
-            <a:r>
-              <a:rPr sz="1050" b="0">
-                <a:solidFill>
-                  <a:srgbClr val="555555"/>
-                </a:solidFill>
-                <a:latin typeface="Arial"/>
-                <a:ea typeface="Arial"/>
-              </a:rPr>
-              <a:t>고객 시스템까지 3단계</a:t>
-            </a:r>
-          </a:p>
-        </p:txBody>
-      </p:sp>
-      <p:sp>
-        <p:nvSpPr>
-          <p:cNvPr id="104" name="Rectangle 103"/>
-          <p:cNvSpPr/>
-          <p:nvPr/>
-        </p:nvSpPr>
-        <p:spPr>
-          <a:xfrm>
-            <a:off x="8903208" y="4151376"/>
-            <a:ext cx="3816096" cy="4261103"/>
+            <a:off x="4517136" y="7229856"/>
+            <a:ext cx="1638421" cy="246888"/>
           </a:xfrm>
           <a:prstGeom prst="rect">
             <a:avLst/>
@@ -8257,157 +7812,60 @@
       </p:sp>
       <p:sp>
         <p:nvSpPr>
-          <p:cNvPr id="105" name="TextBox 104"/>
-          <p:cNvSpPr txBox="1"/>
-          <p:nvPr/>
-        </p:nvSpPr>
-        <p:spPr>
-          <a:xfrm>
-            <a:off x="9177528" y="4297680"/>
-            <a:ext cx="3304032" cy="256032"/>
-          </a:xfrm>
-          <a:prstGeom prst="rect">
-            <a:avLst/>
-          </a:prstGeom>
-          <a:noFill/>
-        </p:spPr>
-        <p:txBody>
-          <a:bodyPr wrap="square" anchor="t" lIns="0" rIns="0" tIns="0" bIns="0">
-            <a:spAutoFit/>
-          </a:bodyPr>
-          <a:lstStyle/>
-          <a:p>
-            <a:pPr algn="l">
+          <p:cNvPr id="93" name="TextBox 92"/>
+          <p:cNvSpPr txBox="1"/>
+          <p:nvPr/>
+        </p:nvSpPr>
+        <p:spPr>
+          <a:xfrm>
+            <a:off x="4544568" y="7229856"/>
+            <a:ext cx="1583557" cy="246888"/>
+          </a:xfrm>
+          <a:prstGeom prst="rect">
+            <a:avLst/>
+          </a:prstGeom>
+          <a:noFill/>
+        </p:spPr>
+        <p:txBody>
+          <a:bodyPr wrap="square" anchor="ctr" lIns="0" rIns="0" tIns="0" bIns="0">
+            <a:spAutoFit/>
+          </a:bodyPr>
+          <a:lstStyle/>
+          <a:p>
+            <a:pPr algn="ctr">
               <a:lnSpc>
                 <a:spcPct val="112000"/>
               </a:lnSpc>
             </a:pPr>
             <a:r>
-              <a:rPr sz="1500" b="1">
-                <a:solidFill>
-                  <a:srgbClr val="1428A0"/>
-                </a:solidFill>
-                <a:latin typeface="Arial"/>
-                <a:ea typeface="Arial"/>
-              </a:rPr>
-              <a:t>교훈 3 · 의사결정 시점</a:t>
-            </a:r>
-          </a:p>
-        </p:txBody>
-      </p:sp>
-      <p:sp>
-        <p:nvSpPr>
-          <p:cNvPr id="106" name="TextBox 105"/>
-          <p:cNvSpPr txBox="1"/>
-          <p:nvPr/>
-        </p:nvSpPr>
-        <p:spPr>
-          <a:xfrm>
-            <a:off x="9177528" y="4590288"/>
-            <a:ext cx="1417320" cy="475488"/>
-          </a:xfrm>
-          <a:prstGeom prst="rect">
-            <a:avLst/>
-          </a:prstGeom>
-          <a:noFill/>
-        </p:spPr>
-        <p:txBody>
-          <a:bodyPr wrap="square" anchor="ctr" lIns="0" rIns="0" tIns="0" bIns="0">
-            <a:spAutoFit/>
-          </a:bodyPr>
-          <a:lstStyle/>
-          <a:p>
-            <a:pPr algn="l">
-              <a:lnSpc>
-                <a:spcPct val="112000"/>
-              </a:lnSpc>
-            </a:pPr>
-            <a:r>
-              <a:rPr sz="2600" b="1">
-                <a:solidFill>
-                  <a:srgbClr val="1428A0"/>
-                </a:solidFill>
-                <a:latin typeface="Arial"/>
-                <a:ea typeface="Arial"/>
-              </a:rPr>
-              <a:t>2027H2</a:t>
-            </a:r>
-          </a:p>
-        </p:txBody>
-      </p:sp>
-      <p:sp>
-        <p:nvSpPr>
-          <p:cNvPr id="107" name="TextBox 106"/>
-          <p:cNvSpPr txBox="1"/>
-          <p:nvPr/>
-        </p:nvSpPr>
-        <p:spPr>
-          <a:xfrm>
-            <a:off x="10640568" y="4590288"/>
-            <a:ext cx="1840992" cy="475488"/>
-          </a:xfrm>
-          <a:prstGeom prst="rect">
-            <a:avLst/>
-          </a:prstGeom>
-          <a:noFill/>
-        </p:spPr>
-        <p:txBody>
-          <a:bodyPr wrap="square" anchor="ctr" lIns="0" rIns="0" tIns="0" bIns="0">
-            <a:spAutoFit/>
-          </a:bodyPr>
-          <a:lstStyle/>
-          <a:p>
-            <a:pPr algn="l">
-              <a:lnSpc>
-                <a:spcPct val="102000"/>
-              </a:lnSpc>
-            </a:pPr>
-            <a:r>
-              <a:rPr sz="1050" b="0">
-                <a:solidFill>
-                  <a:srgbClr val="555555"/>
-                </a:solidFill>
-                <a:latin typeface="Arial"/>
-                <a:ea typeface="Arial"/>
-              </a:rPr>
-              <a:t>현재의 결정이 초기 조건이</a:t>
-            </a:r>
-          </a:p>
-          <a:p>
-            <a:pPr algn="l">
-              <a:lnSpc>
-                <a:spcPct val="102000"/>
-              </a:lnSpc>
-            </a:pPr>
-            <a:r>
-              <a:rPr sz="1050" b="0">
-                <a:solidFill>
-                  <a:srgbClr val="555555"/>
-                </a:solidFill>
-                <a:latin typeface="Arial"/>
-                <a:ea typeface="Arial"/>
-              </a:rPr>
-              <a:t>되는 차기 전환점</a:t>
-            </a:r>
-          </a:p>
-        </p:txBody>
-      </p:sp>
-      <p:sp>
-        <p:nvSpPr>
-          <p:cNvPr id="108" name="Rectangle 107"/>
+              <a:rPr sz="875" b="0">
+                <a:solidFill>
+                  <a:srgbClr val="1A1A1A"/>
+                </a:solidFill>
+                <a:latin typeface="Arial"/>
+                <a:ea typeface="Arial"/>
+              </a:rPr>
+              <a:t>DT19 무감산 성공</a:t>
+            </a:r>
+          </a:p>
+        </p:txBody>
+      </p:sp>
+      <p:sp>
+        <p:nvSpPr>
+          <p:cNvPr id="94" name="Right Arrow 93"/>
           <p:cNvSpPr/>
           <p:nvPr/>
         </p:nvSpPr>
         <p:spPr>
           <a:xfrm>
-            <a:off x="9177528" y="5157216"/>
-            <a:ext cx="3304032" cy="10972"/>
-          </a:xfrm>
-          <a:prstGeom prst="rect">
+            <a:off x="6210421" y="7284719"/>
+            <a:ext cx="201168" cy="137160"/>
+          </a:xfrm>
+          <a:prstGeom prst="rightArrow">
             <a:avLst/>
           </a:prstGeom>
           <a:solidFill>
-            <a:srgbClr val="D9D9D9"/>
+            <a:srgbClr val="AAB8E8"/>
           </a:solidFill>
           <a:ln>
             <a:noFill/>
@@ -8438,22 +7896,66 @@
       </p:sp>
       <p:sp>
         <p:nvSpPr>
-          <p:cNvPr id="109" name="TextBox 108"/>
-          <p:cNvSpPr txBox="1"/>
-          <p:nvPr/>
-        </p:nvSpPr>
-        <p:spPr>
-          <a:xfrm>
-            <a:off x="9177528" y="5266944"/>
-            <a:ext cx="1469136" cy="201168"/>
-          </a:xfrm>
-          <a:prstGeom prst="rect">
-            <a:avLst/>
-          </a:prstGeom>
-          <a:noFill/>
-        </p:spPr>
-        <p:txBody>
-          <a:bodyPr wrap="square" anchor="t" lIns="0" rIns="0" tIns="0" bIns="0">
+          <p:cNvPr id="95" name="Rectangle 94"/>
+          <p:cNvSpPr/>
+          <p:nvPr/>
+        </p:nvSpPr>
+        <p:spPr>
+          <a:xfrm>
+            <a:off x="6466453" y="7229856"/>
+            <a:ext cx="1638421" cy="246888"/>
+          </a:xfrm>
+          <a:prstGeom prst="rect">
+            <a:avLst/>
+          </a:prstGeom>
+          <a:solidFill>
+            <a:srgbClr val="F4F6FC"/>
+          </a:solidFill>
+          <a:ln>
+            <a:noFill/>
+          </a:ln>
+          <a:effectLst/>
+        </p:spPr>
+        <p:style>
+          <a:lnRef idx="1">
+            <a:schemeClr val="accent1"/>
+          </a:lnRef>
+          <a:fillRef idx="3">
+            <a:schemeClr val="accent1"/>
+          </a:fillRef>
+          <a:effectRef idx="2">
+            <a:schemeClr val="accent1"/>
+          </a:effectRef>
+          <a:fontRef idx="minor">
+            <a:schemeClr val="lt1"/>
+          </a:fontRef>
+        </p:style>
+        <p:txBody>
+          <a:bodyPr rtlCol="0" anchor="ctr"/>
+          <a:lstStyle/>
+          <a:p>
+            <a:pPr algn="ctr"/>
+          </a:p>
+        </p:txBody>
+      </p:sp>
+      <p:sp>
+        <p:nvSpPr>
+          <p:cNvPr id="96" name="TextBox 95"/>
+          <p:cNvSpPr txBox="1"/>
+          <p:nvPr/>
+        </p:nvSpPr>
+        <p:spPr>
+          <a:xfrm>
+            <a:off x="6493885" y="7229856"/>
+            <a:ext cx="1583557" cy="246888"/>
+          </a:xfrm>
+          <a:prstGeom prst="rect">
+            <a:avLst/>
+          </a:prstGeom>
+          <a:noFill/>
+        </p:spPr>
+        <p:txBody>
+          <a:bodyPr wrap="square" anchor="ctr" lIns="0" rIns="0" tIns="0" bIns="0">
             <a:spAutoFit/>
           </a:bodyPr>
           <a:lstStyle/>
@@ -8464,68 +7966,28 @@
               </a:lnSpc>
             </a:pPr>
             <a:r>
-              <a:rPr sz="1000" b="0">
-                <a:solidFill>
-                  <a:srgbClr val="8A8A8A"/>
-                </a:solidFill>
-                <a:latin typeface="Arial"/>
-                <a:ea typeface="Arial"/>
-              </a:rPr>
-              <a:t>직전 다운턴의 결정</a:t>
-            </a:r>
-          </a:p>
-        </p:txBody>
-      </p:sp>
-      <p:sp>
-        <p:nvSpPr>
-          <p:cNvPr id="110" name="TextBox 109"/>
-          <p:cNvSpPr txBox="1"/>
-          <p:nvPr/>
-        </p:nvSpPr>
-        <p:spPr>
-          <a:xfrm>
-            <a:off x="11012424" y="5266944"/>
-            <a:ext cx="1469136" cy="201168"/>
-          </a:xfrm>
-          <a:prstGeom prst="rect">
-            <a:avLst/>
-          </a:prstGeom>
-          <a:noFill/>
-        </p:spPr>
-        <p:txBody>
-          <a:bodyPr wrap="square" anchor="t" lIns="0" rIns="0" tIns="0" bIns="0">
-            <a:spAutoFit/>
-          </a:bodyPr>
-          <a:lstStyle/>
-          <a:p>
-            <a:pPr algn="ctr">
-              <a:lnSpc>
-                <a:spcPct val="112000"/>
-              </a:lnSpc>
-            </a:pPr>
-            <a:r>
-              <a:rPr sz="1000" b="0">
-                <a:solidFill>
-                  <a:srgbClr val="8A8A8A"/>
-                </a:solidFill>
-                <a:latin typeface="Arial"/>
-                <a:ea typeface="Arial"/>
-              </a:rPr>
-              <a:t>다음 다운턴의 초기 조건</a:t>
-            </a:r>
-          </a:p>
-        </p:txBody>
-      </p:sp>
-      <p:sp>
-        <p:nvSpPr>
-          <p:cNvPr id="111" name="Rectangle 110"/>
+              <a:rPr sz="875" b="1">
+                <a:solidFill>
+                  <a:srgbClr val="1A1A1A"/>
+                </a:solidFill>
+                <a:latin typeface="Arial"/>
+                <a:ea typeface="Arial"/>
+              </a:rPr>
+              <a:t>DT23 국면 오판</a:t>
+            </a:r>
+          </a:p>
+        </p:txBody>
+      </p:sp>
+      <p:sp>
+        <p:nvSpPr>
+          <p:cNvPr id="97" name="Rectangle 96"/>
           <p:cNvSpPr/>
           <p:nvPr/>
         </p:nvSpPr>
         <p:spPr>
           <a:xfrm>
-            <a:off x="9177528" y="5577840"/>
-            <a:ext cx="1469136" cy="384048"/>
+            <a:off x="4517136" y="7559039"/>
+            <a:ext cx="1638421" cy="246888"/>
           </a:xfrm>
           <a:prstGeom prst="rect">
             <a:avLst/>
@@ -8564,14 +8026,14 @@
       </p:sp>
       <p:sp>
         <p:nvSpPr>
-          <p:cNvPr id="112" name="TextBox 111"/>
-          <p:cNvSpPr txBox="1"/>
-          <p:nvPr/>
-        </p:nvSpPr>
-        <p:spPr>
-          <a:xfrm>
-            <a:off x="9214104" y="5577840"/>
-            <a:ext cx="1395984" cy="384048"/>
+          <p:cNvPr id="98" name="TextBox 97"/>
+          <p:cNvSpPr txBox="1"/>
+          <p:nvPr/>
+        </p:nvSpPr>
+        <p:spPr>
+          <a:xfrm>
+            <a:off x="4544568" y="7559039"/>
+            <a:ext cx="1583557" cy="246888"/>
           </a:xfrm>
           <a:prstGeom prst="rect">
             <a:avLst/>
@@ -8590,28 +8052,28 @@
               </a:lnSpc>
             </a:pPr>
             <a:r>
-              <a:rPr sz="975" b="0">
+              <a:rPr sz="875" b="0">
                 <a:solidFill>
                   <a:srgbClr val="1A1A1A"/>
                 </a:solidFill>
                 <a:latin typeface="Arial"/>
                 <a:ea typeface="Arial"/>
               </a:rPr>
-              <a:t>DT19 무감산 성공</a:t>
-            </a:r>
-          </a:p>
-        </p:txBody>
-      </p:sp>
-      <p:sp>
-        <p:nvSpPr>
-          <p:cNvPr id="113" name="Right Arrow 112"/>
+              <a:t>DT19 HBM 조직 축소</a:t>
+            </a:r>
+          </a:p>
+        </p:txBody>
+      </p:sp>
+      <p:sp>
+        <p:nvSpPr>
+          <p:cNvPr id="99" name="Right Arrow 98"/>
           <p:cNvSpPr/>
           <p:nvPr/>
         </p:nvSpPr>
         <p:spPr>
           <a:xfrm>
-            <a:off x="10719816" y="5669279"/>
-            <a:ext cx="219456" cy="201168"/>
+            <a:off x="6210421" y="7613904"/>
+            <a:ext cx="201168" cy="137160"/>
           </a:xfrm>
           <a:prstGeom prst="rightArrow">
             <a:avLst/>
@@ -8648,14 +8110,14 @@
       </p:sp>
       <p:sp>
         <p:nvSpPr>
-          <p:cNvPr id="114" name="Rectangle 113"/>
+          <p:cNvPr id="100" name="Rectangle 99"/>
           <p:cNvSpPr/>
           <p:nvPr/>
         </p:nvSpPr>
         <p:spPr>
           <a:xfrm>
-            <a:off x="11012424" y="5577840"/>
-            <a:ext cx="1469136" cy="384048"/>
+            <a:off x="6466453" y="7559039"/>
+            <a:ext cx="1638421" cy="246888"/>
           </a:xfrm>
           <a:prstGeom prst="rect">
             <a:avLst/>
@@ -8692,14 +8154,14 @@
       </p:sp>
       <p:sp>
         <p:nvSpPr>
-          <p:cNvPr id="115" name="TextBox 114"/>
-          <p:cNvSpPr txBox="1"/>
-          <p:nvPr/>
-        </p:nvSpPr>
-        <p:spPr>
-          <a:xfrm>
-            <a:off x="11049000" y="5577840"/>
-            <a:ext cx="1395984" cy="384048"/>
+          <p:cNvPr id="101" name="TextBox 100"/>
+          <p:cNvSpPr txBox="1"/>
+          <p:nvPr/>
+        </p:nvSpPr>
+        <p:spPr>
+          <a:xfrm>
+            <a:off x="6493885" y="7559039"/>
+            <a:ext cx="1583557" cy="246888"/>
           </a:xfrm>
           <a:prstGeom prst="rect">
             <a:avLst/>
@@ -8718,28 +8180,324 @@
               </a:lnSpc>
             </a:pPr>
             <a:r>
-              <a:rPr sz="975" b="1">
+              <a:rPr sz="875" b="1">
                 <a:solidFill>
                   <a:srgbClr val="1A1A1A"/>
                 </a:solidFill>
                 <a:latin typeface="Arial"/>
                 <a:ea typeface="Arial"/>
               </a:rPr>
-              <a:t>DT23 국면 오판</a:t>
-            </a:r>
-          </a:p>
-        </p:txBody>
-      </p:sp>
-      <p:sp>
-        <p:nvSpPr>
-          <p:cNvPr id="116" name="Rectangle 115"/>
+              <a:t>DT23 주도권 상실</a:t>
+            </a:r>
+          </a:p>
+        </p:txBody>
+      </p:sp>
+      <p:sp>
+        <p:nvSpPr>
+          <p:cNvPr id="102" name="Rectangle 101"/>
           <p:cNvSpPr/>
           <p:nvPr/>
         </p:nvSpPr>
         <p:spPr>
           <a:xfrm>
-            <a:off x="9177528" y="6108192"/>
-            <a:ext cx="1469136" cy="384048"/>
+            <a:off x="4517136" y="7888223"/>
+            <a:ext cx="1638421" cy="246888"/>
+          </a:xfrm>
+          <a:prstGeom prst="rect">
+            <a:avLst/>
+          </a:prstGeom>
+          <a:solidFill>
+            <a:srgbClr val="1428A0"/>
+          </a:solidFill>
+          <a:ln>
+            <a:noFill/>
+          </a:ln>
+          <a:effectLst/>
+        </p:spPr>
+        <p:style>
+          <a:lnRef idx="1">
+            <a:schemeClr val="accent1"/>
+          </a:lnRef>
+          <a:fillRef idx="3">
+            <a:schemeClr val="accent1"/>
+          </a:fillRef>
+          <a:effectRef idx="2">
+            <a:schemeClr val="accent1"/>
+          </a:effectRef>
+          <a:fontRef idx="minor">
+            <a:schemeClr val="lt1"/>
+          </a:fontRef>
+        </p:style>
+        <p:txBody>
+          <a:bodyPr rtlCol="0" anchor="ctr"/>
+          <a:lstStyle/>
+          <a:p>
+            <a:pPr algn="ctr"/>
+          </a:p>
+        </p:txBody>
+      </p:sp>
+      <p:sp>
+        <p:nvSpPr>
+          <p:cNvPr id="103" name="TextBox 102"/>
+          <p:cNvSpPr txBox="1"/>
+          <p:nvPr/>
+        </p:nvSpPr>
+        <p:spPr>
+          <a:xfrm>
+            <a:off x="4544568" y="7888223"/>
+            <a:ext cx="1583557" cy="246888"/>
+          </a:xfrm>
+          <a:prstGeom prst="rect">
+            <a:avLst/>
+          </a:prstGeom>
+          <a:noFill/>
+        </p:spPr>
+        <p:txBody>
+          <a:bodyPr wrap="square" anchor="ctr" lIns="0" rIns="0" tIns="0" bIns="0">
+            <a:spAutoFit/>
+          </a:bodyPr>
+          <a:lstStyle/>
+          <a:p>
+            <a:pPr algn="ctr">
+              <a:lnSpc>
+                <a:spcPct val="112000"/>
+              </a:lnSpc>
+            </a:pPr>
+            <a:r>
+              <a:rPr sz="875" b="1">
+                <a:solidFill>
+                  <a:srgbClr val="FFFFFF"/>
+                </a:solidFill>
+                <a:latin typeface="Arial"/>
+                <a:ea typeface="Arial"/>
+              </a:rPr>
+              <a:t>2026 고객 시스템 진입</a:t>
+            </a:r>
+          </a:p>
+        </p:txBody>
+      </p:sp>
+      <p:sp>
+        <p:nvSpPr>
+          <p:cNvPr id="104" name="Right Arrow 103"/>
+          <p:cNvSpPr/>
+          <p:nvPr/>
+        </p:nvSpPr>
+        <p:spPr>
+          <a:xfrm>
+            <a:off x="6210421" y="7943087"/>
+            <a:ext cx="201168" cy="137160"/>
+          </a:xfrm>
+          <a:prstGeom prst="rightArrow">
+            <a:avLst/>
+          </a:prstGeom>
+          <a:solidFill>
+            <a:srgbClr val="1428A0"/>
+          </a:solidFill>
+          <a:ln>
+            <a:noFill/>
+          </a:ln>
+          <a:effectLst/>
+        </p:spPr>
+        <p:style>
+          <a:lnRef idx="1">
+            <a:schemeClr val="accent1"/>
+          </a:lnRef>
+          <a:fillRef idx="3">
+            <a:schemeClr val="accent1"/>
+          </a:fillRef>
+          <a:effectRef idx="2">
+            <a:schemeClr val="accent1"/>
+          </a:effectRef>
+          <a:fontRef idx="minor">
+            <a:schemeClr val="lt1"/>
+          </a:fontRef>
+        </p:style>
+        <p:txBody>
+          <a:bodyPr rtlCol="0" anchor="ctr"/>
+          <a:lstStyle/>
+          <a:p>
+            <a:pPr algn="ctr"/>
+          </a:p>
+        </p:txBody>
+      </p:sp>
+      <p:sp>
+        <p:nvSpPr>
+          <p:cNvPr id="105" name="Rectangle 104"/>
+          <p:cNvSpPr/>
+          <p:nvPr/>
+        </p:nvSpPr>
+        <p:spPr>
+          <a:xfrm>
+            <a:off x="6466453" y="7888223"/>
+            <a:ext cx="1638421" cy="246888"/>
+          </a:xfrm>
+          <a:prstGeom prst="rect">
+            <a:avLst/>
+          </a:prstGeom>
+          <a:solidFill>
+            <a:srgbClr val="1428A0"/>
+          </a:solidFill>
+          <a:ln>
+            <a:noFill/>
+          </a:ln>
+          <a:effectLst/>
+        </p:spPr>
+        <p:style>
+          <a:lnRef idx="1">
+            <a:schemeClr val="accent1"/>
+          </a:lnRef>
+          <a:fillRef idx="3">
+            <a:schemeClr val="accent1"/>
+          </a:fillRef>
+          <a:effectRef idx="2">
+            <a:schemeClr val="accent1"/>
+          </a:effectRef>
+          <a:fontRef idx="minor">
+            <a:schemeClr val="lt1"/>
+          </a:fontRef>
+        </p:style>
+        <p:txBody>
+          <a:bodyPr rtlCol="0" anchor="ctr"/>
+          <a:lstStyle/>
+          <a:p>
+            <a:pPr algn="ctr"/>
+          </a:p>
+        </p:txBody>
+      </p:sp>
+      <p:sp>
+        <p:nvSpPr>
+          <p:cNvPr id="106" name="TextBox 105"/>
+          <p:cNvSpPr txBox="1"/>
+          <p:nvPr/>
+        </p:nvSpPr>
+        <p:spPr>
+          <a:xfrm>
+            <a:off x="6493885" y="7888223"/>
+            <a:ext cx="1583557" cy="246888"/>
+          </a:xfrm>
+          <a:prstGeom prst="rect">
+            <a:avLst/>
+          </a:prstGeom>
+          <a:noFill/>
+        </p:spPr>
+        <p:txBody>
+          <a:bodyPr wrap="square" anchor="ctr" lIns="0" rIns="0" tIns="0" bIns="0">
+            <a:spAutoFit/>
+          </a:bodyPr>
+          <a:lstStyle/>
+          <a:p>
+            <a:pPr algn="ctr">
+              <a:lnSpc>
+                <a:spcPct val="112000"/>
+              </a:lnSpc>
+            </a:pPr>
+            <a:r>
+              <a:rPr sz="875" b="1">
+                <a:solidFill>
+                  <a:srgbClr val="FFFFFF"/>
+                </a:solidFill>
+                <a:latin typeface="Arial"/>
+                <a:ea typeface="Arial"/>
+              </a:rPr>
+              <a:t>2027H2 TCO 보증 수익</a:t>
+            </a:r>
+          </a:p>
+        </p:txBody>
+      </p:sp>
+      <p:sp>
+        <p:nvSpPr>
+          <p:cNvPr id="107" name="Oval 106"/>
+          <p:cNvSpPr/>
+          <p:nvPr/>
+        </p:nvSpPr>
+        <p:spPr>
+          <a:xfrm>
+            <a:off x="8242035" y="7583424"/>
+            <a:ext cx="237744" cy="237744"/>
+          </a:xfrm>
+          <a:prstGeom prst="ellipse">
+            <a:avLst/>
+          </a:prstGeom>
+          <a:solidFill>
+            <a:srgbClr val="AAB8E8"/>
+          </a:solidFill>
+          <a:ln>
+            <a:noFill/>
+          </a:ln>
+          <a:effectLst/>
+        </p:spPr>
+        <p:style>
+          <a:lnRef idx="1">
+            <a:schemeClr val="accent1"/>
+          </a:lnRef>
+          <a:fillRef idx="3">
+            <a:schemeClr val="accent1"/>
+          </a:fillRef>
+          <a:effectRef idx="2">
+            <a:schemeClr val="accent1"/>
+          </a:effectRef>
+          <a:fontRef idx="minor">
+            <a:schemeClr val="lt1"/>
+          </a:fontRef>
+        </p:style>
+        <p:txBody>
+          <a:bodyPr rtlCol="0" anchor="ctr"/>
+          <a:lstStyle/>
+          <a:p>
+            <a:pPr algn="ctr"/>
+          </a:p>
+        </p:txBody>
+      </p:sp>
+      <p:sp>
+        <p:nvSpPr>
+          <p:cNvPr id="108" name="TextBox 107"/>
+          <p:cNvSpPr txBox="1"/>
+          <p:nvPr/>
+        </p:nvSpPr>
+        <p:spPr>
+          <a:xfrm>
+            <a:off x="8242035" y="7583424"/>
+            <a:ext cx="237744" cy="237744"/>
+          </a:xfrm>
+          <a:prstGeom prst="rect">
+            <a:avLst/>
+          </a:prstGeom>
+          <a:noFill/>
+        </p:spPr>
+        <p:txBody>
+          <a:bodyPr wrap="square" anchor="ctr" lIns="0" rIns="0" tIns="0" bIns="0">
+            <a:spAutoFit/>
+          </a:bodyPr>
+          <a:lstStyle/>
+          <a:p>
+            <a:pPr algn="ctr">
+              <a:lnSpc>
+                <a:spcPct val="112000"/>
+              </a:lnSpc>
+            </a:pPr>
+            <a:r>
+              <a:rPr sz="1000" b="1">
+                <a:solidFill>
+                  <a:srgbClr val="1A1A1A"/>
+                </a:solidFill>
+                <a:latin typeface="Arial"/>
+                <a:ea typeface="Arial"/>
+              </a:rPr>
+              <a:t>4</a:t>
+            </a:r>
+          </a:p>
+        </p:txBody>
+      </p:sp>
+      <p:sp>
+        <p:nvSpPr>
+          <p:cNvPr id="109" name="Rectangle 108"/>
+          <p:cNvSpPr/>
+          <p:nvPr/>
+        </p:nvSpPr>
+        <p:spPr>
+          <a:xfrm>
+            <a:off x="8882115" y="4059935"/>
+            <a:ext cx="3782689" cy="4370832"/>
           </a:xfrm>
           <a:prstGeom prst="rect">
             <a:avLst/>
@@ -8778,56 +8536,16 @@
       </p:sp>
       <p:sp>
         <p:nvSpPr>
-          <p:cNvPr id="117" name="TextBox 116"/>
-          <p:cNvSpPr txBox="1"/>
-          <p:nvPr/>
-        </p:nvSpPr>
-        <p:spPr>
-          <a:xfrm>
-            <a:off x="9214104" y="6108192"/>
-            <a:ext cx="1395984" cy="384048"/>
-          </a:xfrm>
-          <a:prstGeom prst="rect">
-            <a:avLst/>
-          </a:prstGeom>
-          <a:noFill/>
-        </p:spPr>
-        <p:txBody>
-          <a:bodyPr wrap="square" anchor="ctr" lIns="0" rIns="0" tIns="0" bIns="0">
-            <a:spAutoFit/>
-          </a:bodyPr>
-          <a:lstStyle/>
-          <a:p>
-            <a:pPr algn="ctr">
-              <a:lnSpc>
-                <a:spcPct val="112000"/>
-              </a:lnSpc>
-            </a:pPr>
-            <a:r>
-              <a:rPr sz="975" b="0">
-                <a:solidFill>
-                  <a:srgbClr val="1A1A1A"/>
-                </a:solidFill>
-                <a:latin typeface="Arial"/>
-                <a:ea typeface="Arial"/>
-              </a:rPr>
-              <a:t>DT19 HBM 조직 축소</a:t>
-            </a:r>
-          </a:p>
-        </p:txBody>
-      </p:sp>
-      <p:sp>
-        <p:nvSpPr>
-          <p:cNvPr id="118" name="Right Arrow 117"/>
+          <p:cNvPr id="110" name="Rectangle 109"/>
           <p:cNvSpPr/>
           <p:nvPr/>
         </p:nvSpPr>
         <p:spPr>
           <a:xfrm>
-            <a:off x="10719816" y="6199631"/>
-            <a:ext cx="219456" cy="201168"/>
-          </a:xfrm>
-          <a:prstGeom prst="rightArrow">
+            <a:off x="8882115" y="4059935"/>
+            <a:ext cx="3782689" cy="45720"/>
+          </a:xfrm>
+          <a:prstGeom prst="rect">
             <a:avLst/>
           </a:prstGeom>
           <a:solidFill>
@@ -8862,310 +8580,64 @@
       </p:sp>
       <p:sp>
         <p:nvSpPr>
-          <p:cNvPr id="119" name="Rectangle 118"/>
+          <p:cNvPr id="111" name="TextBox 110"/>
+          <p:cNvSpPr txBox="1"/>
+          <p:nvPr/>
+        </p:nvSpPr>
+        <p:spPr>
+          <a:xfrm>
+            <a:off x="9119859" y="4206240"/>
+            <a:ext cx="3307201" cy="256032"/>
+          </a:xfrm>
+          <a:prstGeom prst="rect">
+            <a:avLst/>
+          </a:prstGeom>
+          <a:noFill/>
+        </p:spPr>
+        <p:txBody>
+          <a:bodyPr wrap="square" anchor="t" lIns="0" rIns="0" tIns="0" bIns="0">
+            <a:spAutoFit/>
+          </a:bodyPr>
+          <a:lstStyle/>
+          <a:p>
+            <a:pPr algn="l">
+              <a:lnSpc>
+                <a:spcPct val="112000"/>
+              </a:lnSpc>
+            </a:pPr>
+            <a:r>
+              <a:rPr sz="1350" b="1">
+                <a:solidFill>
+                  <a:srgbClr val="1428A0"/>
+                </a:solidFill>
+                <a:latin typeface="Arial"/>
+                <a:ea typeface="Arial"/>
+              </a:rPr>
+              <a:t>지금 · 요구의 이동</a:t>
+            </a:r>
+            <a:r>
+              <a:rPr sz="1050" b="0">
+                <a:solidFill>
+                  <a:srgbClr val="8A8A8A"/>
+                </a:solidFill>
+                <a:latin typeface="Arial"/>
+                <a:ea typeface="Arial"/>
+              </a:rPr>
+              <a:t>   2024~2026</a:t>
+            </a:r>
+          </a:p>
+        </p:txBody>
+      </p:sp>
+      <p:sp>
+        <p:nvSpPr>
+          <p:cNvPr id="112" name="Rectangle 111"/>
           <p:cNvSpPr/>
           <p:nvPr/>
         </p:nvSpPr>
         <p:spPr>
           <a:xfrm>
-            <a:off x="11012424" y="6108192"/>
-            <a:ext cx="1469136" cy="384048"/>
-          </a:xfrm>
-          <a:prstGeom prst="rect">
-            <a:avLst/>
-          </a:prstGeom>
-          <a:solidFill>
-            <a:srgbClr val="F4F6FC"/>
-          </a:solidFill>
-          <a:ln>
-            <a:noFill/>
-          </a:ln>
-          <a:effectLst/>
-        </p:spPr>
-        <p:style>
-          <a:lnRef idx="1">
-            <a:schemeClr val="accent1"/>
-          </a:lnRef>
-          <a:fillRef idx="3">
-            <a:schemeClr val="accent1"/>
-          </a:fillRef>
-          <a:effectRef idx="2">
-            <a:schemeClr val="accent1"/>
-          </a:effectRef>
-          <a:fontRef idx="minor">
-            <a:schemeClr val="lt1"/>
-          </a:fontRef>
-        </p:style>
-        <p:txBody>
-          <a:bodyPr rtlCol="0" anchor="ctr"/>
-          <a:lstStyle/>
-          <a:p>
-            <a:pPr algn="ctr"/>
-          </a:p>
-        </p:txBody>
-      </p:sp>
-      <p:sp>
-        <p:nvSpPr>
-          <p:cNvPr id="120" name="TextBox 119"/>
-          <p:cNvSpPr txBox="1"/>
-          <p:nvPr/>
-        </p:nvSpPr>
-        <p:spPr>
-          <a:xfrm>
-            <a:off x="11049000" y="6108192"/>
-            <a:ext cx="1395984" cy="384048"/>
-          </a:xfrm>
-          <a:prstGeom prst="rect">
-            <a:avLst/>
-          </a:prstGeom>
-          <a:noFill/>
-        </p:spPr>
-        <p:txBody>
-          <a:bodyPr wrap="square" anchor="ctr" lIns="0" rIns="0" tIns="0" bIns="0">
-            <a:spAutoFit/>
-          </a:bodyPr>
-          <a:lstStyle/>
-          <a:p>
-            <a:pPr algn="ctr">
-              <a:lnSpc>
-                <a:spcPct val="112000"/>
-              </a:lnSpc>
-            </a:pPr>
-            <a:r>
-              <a:rPr sz="975" b="1">
-                <a:solidFill>
-                  <a:srgbClr val="1A1A1A"/>
-                </a:solidFill>
-                <a:latin typeface="Arial"/>
-                <a:ea typeface="Arial"/>
-              </a:rPr>
-              <a:t>DT23 주도권 상실</a:t>
-            </a:r>
-          </a:p>
-        </p:txBody>
-      </p:sp>
-      <p:sp>
-        <p:nvSpPr>
-          <p:cNvPr id="121" name="Rectangle 120"/>
-          <p:cNvSpPr/>
-          <p:nvPr/>
-        </p:nvSpPr>
-        <p:spPr>
-          <a:xfrm>
-            <a:off x="9177528" y="6638544"/>
-            <a:ext cx="1469136" cy="384048"/>
-          </a:xfrm>
-          <a:prstGeom prst="rect">
-            <a:avLst/>
-          </a:prstGeom>
-          <a:solidFill>
-            <a:srgbClr val="1428A0"/>
-          </a:solidFill>
-          <a:ln>
-            <a:noFill/>
-          </a:ln>
-          <a:effectLst/>
-        </p:spPr>
-        <p:style>
-          <a:lnRef idx="1">
-            <a:schemeClr val="accent1"/>
-          </a:lnRef>
-          <a:fillRef idx="3">
-            <a:schemeClr val="accent1"/>
-          </a:fillRef>
-          <a:effectRef idx="2">
-            <a:schemeClr val="accent1"/>
-          </a:effectRef>
-          <a:fontRef idx="minor">
-            <a:schemeClr val="lt1"/>
-          </a:fontRef>
-        </p:style>
-        <p:txBody>
-          <a:bodyPr rtlCol="0" anchor="ctr"/>
-          <a:lstStyle/>
-          <a:p>
-            <a:pPr algn="ctr"/>
-          </a:p>
-        </p:txBody>
-      </p:sp>
-      <p:sp>
-        <p:nvSpPr>
-          <p:cNvPr id="122" name="TextBox 121"/>
-          <p:cNvSpPr txBox="1"/>
-          <p:nvPr/>
-        </p:nvSpPr>
-        <p:spPr>
-          <a:xfrm>
-            <a:off x="9214104" y="6638544"/>
-            <a:ext cx="1395984" cy="384048"/>
-          </a:xfrm>
-          <a:prstGeom prst="rect">
-            <a:avLst/>
-          </a:prstGeom>
-          <a:noFill/>
-        </p:spPr>
-        <p:txBody>
-          <a:bodyPr wrap="square" anchor="ctr" lIns="0" rIns="0" tIns="0" bIns="0">
-            <a:spAutoFit/>
-          </a:bodyPr>
-          <a:lstStyle/>
-          <a:p>
-            <a:pPr algn="ctr">
-              <a:lnSpc>
-                <a:spcPct val="112000"/>
-              </a:lnSpc>
-            </a:pPr>
-            <a:r>
-              <a:rPr sz="975" b="1">
-                <a:solidFill>
-                  <a:srgbClr val="FFFFFF"/>
-                </a:solidFill>
-                <a:latin typeface="Arial"/>
-                <a:ea typeface="Arial"/>
-              </a:rPr>
-              <a:t>2026 고객 시스템 진입</a:t>
-            </a:r>
-          </a:p>
-        </p:txBody>
-      </p:sp>
-      <p:sp>
-        <p:nvSpPr>
-          <p:cNvPr id="123" name="Right Arrow 122"/>
-          <p:cNvSpPr/>
-          <p:nvPr/>
-        </p:nvSpPr>
-        <p:spPr>
-          <a:xfrm>
-            <a:off x="10719816" y="6729983"/>
-            <a:ext cx="219456" cy="201168"/>
-          </a:xfrm>
-          <a:prstGeom prst="rightArrow">
-            <a:avLst/>
-          </a:prstGeom>
-          <a:solidFill>
-            <a:srgbClr val="1428A0"/>
-          </a:solidFill>
-          <a:ln>
-            <a:noFill/>
-          </a:ln>
-          <a:effectLst/>
-        </p:spPr>
-        <p:style>
-          <a:lnRef idx="1">
-            <a:schemeClr val="accent1"/>
-          </a:lnRef>
-          <a:fillRef idx="3">
-            <a:schemeClr val="accent1"/>
-          </a:fillRef>
-          <a:effectRef idx="2">
-            <a:schemeClr val="accent1"/>
-          </a:effectRef>
-          <a:fontRef idx="minor">
-            <a:schemeClr val="lt1"/>
-          </a:fontRef>
-        </p:style>
-        <p:txBody>
-          <a:bodyPr rtlCol="0" anchor="ctr"/>
-          <a:lstStyle/>
-          <a:p>
-            <a:pPr algn="ctr"/>
-          </a:p>
-        </p:txBody>
-      </p:sp>
-      <p:sp>
-        <p:nvSpPr>
-          <p:cNvPr id="124" name="Rectangle 123"/>
-          <p:cNvSpPr/>
-          <p:nvPr/>
-        </p:nvSpPr>
-        <p:spPr>
-          <a:xfrm>
-            <a:off x="11012424" y="6638544"/>
-            <a:ext cx="1469136" cy="384048"/>
-          </a:xfrm>
-          <a:prstGeom prst="rect">
-            <a:avLst/>
-          </a:prstGeom>
-          <a:solidFill>
-            <a:srgbClr val="1428A0"/>
-          </a:solidFill>
-          <a:ln>
-            <a:noFill/>
-          </a:ln>
-          <a:effectLst/>
-        </p:spPr>
-        <p:style>
-          <a:lnRef idx="1">
-            <a:schemeClr val="accent1"/>
-          </a:lnRef>
-          <a:fillRef idx="3">
-            <a:schemeClr val="accent1"/>
-          </a:fillRef>
-          <a:effectRef idx="2">
-            <a:schemeClr val="accent1"/>
-          </a:effectRef>
-          <a:fontRef idx="minor">
-            <a:schemeClr val="lt1"/>
-          </a:fontRef>
-        </p:style>
-        <p:txBody>
-          <a:bodyPr rtlCol="0" anchor="ctr"/>
-          <a:lstStyle/>
-          <a:p>
-            <a:pPr algn="ctr"/>
-          </a:p>
-        </p:txBody>
-      </p:sp>
-      <p:sp>
-        <p:nvSpPr>
-          <p:cNvPr id="125" name="TextBox 124"/>
-          <p:cNvSpPr txBox="1"/>
-          <p:nvPr/>
-        </p:nvSpPr>
-        <p:spPr>
-          <a:xfrm>
-            <a:off x="11049000" y="6638544"/>
-            <a:ext cx="1395984" cy="384048"/>
-          </a:xfrm>
-          <a:prstGeom prst="rect">
-            <a:avLst/>
-          </a:prstGeom>
-          <a:noFill/>
-        </p:spPr>
-        <p:txBody>
-          <a:bodyPr wrap="square" anchor="ctr" lIns="0" rIns="0" tIns="0" bIns="0">
-            <a:spAutoFit/>
-          </a:bodyPr>
-          <a:lstStyle/>
-          <a:p>
-            <a:pPr algn="ctr">
-              <a:lnSpc>
-                <a:spcPct val="112000"/>
-              </a:lnSpc>
-            </a:pPr>
-            <a:r>
-              <a:rPr sz="975" b="1">
-                <a:solidFill>
-                  <a:srgbClr val="FFFFFF"/>
-                </a:solidFill>
-                <a:latin typeface="Arial"/>
-                <a:ea typeface="Arial"/>
-              </a:rPr>
-              <a:t>2027H2 TCO 보증 수익</a:t>
-            </a:r>
-          </a:p>
-        </p:txBody>
-      </p:sp>
-      <p:sp>
-        <p:nvSpPr>
-          <p:cNvPr id="126" name="Rectangle 125"/>
-          <p:cNvSpPr/>
-          <p:nvPr/>
-        </p:nvSpPr>
-        <p:spPr>
-          <a:xfrm>
-            <a:off x="9177528" y="7955279"/>
-            <a:ext cx="3304032" cy="10972"/>
+            <a:off x="9119859" y="4517136"/>
+            <a:ext cx="3307201" cy="10972"/>
           </a:xfrm>
           <a:prstGeom prst="rect">
             <a:avLst/>
@@ -9202,316 +8674,54 @@
       </p:sp>
       <p:sp>
         <p:nvSpPr>
-          <p:cNvPr id="127" name="Oval 126"/>
+          <p:cNvPr id="113" name="TextBox 112"/>
+          <p:cNvSpPr txBox="1"/>
+          <p:nvPr/>
+        </p:nvSpPr>
+        <p:spPr>
+          <a:xfrm>
+            <a:off x="9119859" y="4626864"/>
+            <a:ext cx="3307201" cy="182880"/>
+          </a:xfrm>
+          <a:prstGeom prst="rect">
+            <a:avLst/>
+          </a:prstGeom>
+          <a:noFill/>
+        </p:spPr>
+        <p:txBody>
+          <a:bodyPr wrap="square" anchor="t" lIns="0" rIns="0" tIns="0" bIns="0">
+            <a:spAutoFit/>
+          </a:bodyPr>
+          <a:lstStyle/>
+          <a:p>
+            <a:pPr algn="l">
+              <a:lnSpc>
+                <a:spcPct val="112000"/>
+              </a:lnSpc>
+            </a:pPr>
+            <a:r>
+              <a:rPr sz="950" b="0">
+                <a:solidFill>
+                  <a:srgbClr val="8A8A8A"/>
+                </a:solidFill>
+                <a:latin typeface="Arial"/>
+                <a:ea typeface="Arial"/>
+              </a:rPr>
+              <a:t>구매 기준</a:t>
+            </a:r>
+          </a:p>
+        </p:txBody>
+      </p:sp>
+      <p:sp>
+        <p:nvSpPr>
+          <p:cNvPr id="114" name="Rectangle 113"/>
           <p:cNvSpPr/>
           <p:nvPr/>
         </p:nvSpPr>
         <p:spPr>
           <a:xfrm>
-            <a:off x="9177528" y="8055863"/>
-            <a:ext cx="237744" cy="237744"/>
-          </a:xfrm>
-          <a:prstGeom prst="ellipse">
-            <a:avLst/>
-          </a:prstGeom>
-          <a:solidFill>
-            <a:srgbClr val="1428A0"/>
-          </a:solidFill>
-          <a:ln>
-            <a:noFill/>
-          </a:ln>
-          <a:effectLst/>
-        </p:spPr>
-        <p:style>
-          <a:lnRef idx="1">
-            <a:schemeClr val="accent1"/>
-          </a:lnRef>
-          <a:fillRef idx="3">
-            <a:schemeClr val="accent1"/>
-          </a:fillRef>
-          <a:effectRef idx="2">
-            <a:schemeClr val="accent1"/>
-          </a:effectRef>
-          <a:fontRef idx="minor">
-            <a:schemeClr val="lt1"/>
-          </a:fontRef>
-        </p:style>
-        <p:txBody>
-          <a:bodyPr rtlCol="0" anchor="ctr"/>
-          <a:lstStyle/>
-          <a:p>
-            <a:pPr algn="ctr"/>
-          </a:p>
-        </p:txBody>
-      </p:sp>
-      <p:sp>
-        <p:nvSpPr>
-          <p:cNvPr id="128" name="TextBox 127"/>
-          <p:cNvSpPr txBox="1"/>
-          <p:nvPr/>
-        </p:nvSpPr>
-        <p:spPr>
-          <a:xfrm>
-            <a:off x="9177528" y="8055863"/>
-            <a:ext cx="237744" cy="237744"/>
-          </a:xfrm>
-          <a:prstGeom prst="rect">
-            <a:avLst/>
-          </a:prstGeom>
-          <a:noFill/>
-        </p:spPr>
-        <p:txBody>
-          <a:bodyPr wrap="square" anchor="ctr" lIns="0" rIns="0" tIns="0" bIns="0">
-            <a:spAutoFit/>
-          </a:bodyPr>
-          <a:lstStyle/>
-          <a:p>
-            <a:pPr algn="ctr">
-              <a:lnSpc>
-                <a:spcPct val="112000"/>
-              </a:lnSpc>
-            </a:pPr>
-            <a:r>
-              <a:rPr sz="1100" b="1">
-                <a:solidFill>
-                  <a:srgbClr val="FFFFFF"/>
-                </a:solidFill>
-                <a:latin typeface="Arial"/>
-                <a:ea typeface="Arial"/>
-              </a:rPr>
-              <a:t>4</a:t>
-            </a:r>
-          </a:p>
-        </p:txBody>
-      </p:sp>
-      <p:sp>
-        <p:nvSpPr>
-          <p:cNvPr id="129" name="TextBox 128"/>
-          <p:cNvSpPr txBox="1"/>
-          <p:nvPr/>
-        </p:nvSpPr>
-        <p:spPr>
-          <a:xfrm>
-            <a:off x="9488424" y="8037575"/>
-            <a:ext cx="2993136" cy="274320"/>
-          </a:xfrm>
-          <a:prstGeom prst="rect">
-            <a:avLst/>
-          </a:prstGeom>
-          <a:noFill/>
-        </p:spPr>
-        <p:txBody>
-          <a:bodyPr wrap="square" anchor="ctr" lIns="0" rIns="0" tIns="0" bIns="0">
-            <a:spAutoFit/>
-          </a:bodyPr>
-          <a:lstStyle/>
-          <a:p>
-            <a:pPr algn="l">
-              <a:lnSpc>
-                <a:spcPct val="112000"/>
-              </a:lnSpc>
-            </a:pPr>
-            <a:r>
-              <a:rPr sz="1125" b="1">
-                <a:solidFill>
-                  <a:srgbClr val="1428A0"/>
-                </a:solidFill>
-                <a:latin typeface="Arial"/>
-                <a:ea typeface="Arial"/>
-              </a:rPr>
-              <a:t>실행  </a:t>
-            </a:r>
-            <a:r>
-              <a:rPr sz="1050" b="0">
-                <a:solidFill>
-                  <a:srgbClr val="555555"/>
-                </a:solidFill>
-                <a:latin typeface="Arial"/>
-                <a:ea typeface="Arial"/>
-              </a:rPr>
-              <a:t>FDE · 협약 · 조직</a:t>
-            </a:r>
-          </a:p>
-        </p:txBody>
-      </p:sp>
-      <p:sp>
-        <p:nvSpPr>
-          <p:cNvPr id="130" name="Rectangle 129"/>
-          <p:cNvSpPr/>
-          <p:nvPr/>
-        </p:nvSpPr>
-        <p:spPr>
-          <a:xfrm>
-            <a:off x="12993624" y="4151376"/>
-            <a:ext cx="4572000" cy="4261103"/>
-          </a:xfrm>
-          <a:prstGeom prst="rect">
-            <a:avLst/>
-          </a:prstGeom>
-          <a:solidFill>
-            <a:srgbClr val="F4F6FC"/>
-          </a:solidFill>
-          <a:ln>
-            <a:noFill/>
-          </a:ln>
-          <a:effectLst/>
-        </p:spPr>
-        <p:style>
-          <a:lnRef idx="1">
-            <a:schemeClr val="accent1"/>
-          </a:lnRef>
-          <a:fillRef idx="3">
-            <a:schemeClr val="accent1"/>
-          </a:fillRef>
-          <a:effectRef idx="2">
-            <a:schemeClr val="accent1"/>
-          </a:effectRef>
-          <a:fontRef idx="minor">
-            <a:schemeClr val="lt1"/>
-          </a:fontRef>
-        </p:style>
-        <p:txBody>
-          <a:bodyPr rtlCol="0" anchor="ctr"/>
-          <a:lstStyle/>
-          <a:p>
-            <a:pPr algn="ctr"/>
-          </a:p>
-        </p:txBody>
-      </p:sp>
-      <p:sp>
-        <p:nvSpPr>
-          <p:cNvPr id="131" name="Rectangle 130"/>
-          <p:cNvSpPr/>
-          <p:nvPr/>
-        </p:nvSpPr>
-        <p:spPr>
-          <a:xfrm>
-            <a:off x="12993624" y="4151376"/>
-            <a:ext cx="73152" cy="4261103"/>
-          </a:xfrm>
-          <a:prstGeom prst="rect">
-            <a:avLst/>
-          </a:prstGeom>
-          <a:solidFill>
-            <a:srgbClr val="1428A0"/>
-          </a:solidFill>
-          <a:ln>
-            <a:noFill/>
-          </a:ln>
-          <a:effectLst/>
-        </p:spPr>
-        <p:style>
-          <a:lnRef idx="1">
-            <a:schemeClr val="accent1"/>
-          </a:lnRef>
-          <a:fillRef idx="3">
-            <a:schemeClr val="accent1"/>
-          </a:fillRef>
-          <a:effectRef idx="2">
-            <a:schemeClr val="accent1"/>
-          </a:effectRef>
-          <a:fontRef idx="minor">
-            <a:schemeClr val="lt1"/>
-          </a:fontRef>
-        </p:style>
-        <p:txBody>
-          <a:bodyPr rtlCol="0" anchor="ctr"/>
-          <a:lstStyle/>
-          <a:p>
-            <a:pPr algn="ctr"/>
-          </a:p>
-        </p:txBody>
-      </p:sp>
-      <p:sp>
-        <p:nvSpPr>
-          <p:cNvPr id="132" name="TextBox 131"/>
-          <p:cNvSpPr txBox="1"/>
-          <p:nvPr/>
-        </p:nvSpPr>
-        <p:spPr>
-          <a:xfrm>
-            <a:off x="13267944" y="4297680"/>
-            <a:ext cx="4096512" cy="256032"/>
-          </a:xfrm>
-          <a:prstGeom prst="rect">
-            <a:avLst/>
-          </a:prstGeom>
-          <a:noFill/>
-        </p:spPr>
-        <p:txBody>
-          <a:bodyPr wrap="square" anchor="t" lIns="0" rIns="0" tIns="0" bIns="0">
-            <a:spAutoFit/>
-          </a:bodyPr>
-          <a:lstStyle/>
-          <a:p>
-            <a:pPr algn="l">
-              <a:lnSpc>
-                <a:spcPct val="112000"/>
-              </a:lnSpc>
-            </a:pPr>
-            <a:r>
-              <a:rPr sz="1500" b="1">
-                <a:solidFill>
-                  <a:srgbClr val="1428A0"/>
-                </a:solidFill>
-                <a:latin typeface="Arial"/>
-                <a:ea typeface="Arial"/>
-              </a:rPr>
-              <a:t>문제 제기 · 요구의 이동</a:t>
-            </a:r>
-          </a:p>
-        </p:txBody>
-      </p:sp>
-      <p:sp>
-        <p:nvSpPr>
-          <p:cNvPr id="133" name="TextBox 132"/>
-          <p:cNvSpPr txBox="1"/>
-          <p:nvPr/>
-        </p:nvSpPr>
-        <p:spPr>
-          <a:xfrm>
-            <a:off x="13267944" y="4572000"/>
-            <a:ext cx="4096512" cy="201168"/>
-          </a:xfrm>
-          <a:prstGeom prst="rect">
-            <a:avLst/>
-          </a:prstGeom>
-          <a:noFill/>
-        </p:spPr>
-        <p:txBody>
-          <a:bodyPr wrap="square" anchor="t" lIns="0" rIns="0" tIns="0" bIns="0">
-            <a:spAutoFit/>
-          </a:bodyPr>
-          <a:lstStyle/>
-          <a:p>
-            <a:pPr algn="l">
-              <a:lnSpc>
-                <a:spcPct val="112000"/>
-              </a:lnSpc>
-            </a:pPr>
-            <a:r>
-              <a:rPr sz="1000" b="0">
-                <a:solidFill>
-                  <a:srgbClr val="555555"/>
-                </a:solidFill>
-                <a:latin typeface="Arial"/>
-                <a:ea typeface="Arial"/>
-              </a:rPr>
-              <a:t>AI 수요가 구매 기준을 추론 캐시 계층으로 옮기고 있습니다</a:t>
-            </a:r>
-          </a:p>
-        </p:txBody>
-      </p:sp>
-      <p:sp>
-        <p:nvSpPr>
-          <p:cNvPr id="134" name="Rectangle 133"/>
-          <p:cNvSpPr/>
-          <p:nvPr/>
-        </p:nvSpPr>
-        <p:spPr>
-          <a:xfrm>
-            <a:off x="13267944" y="4828032"/>
-            <a:ext cx="4096512" cy="512064"/>
+            <a:off x="9119859" y="4846320"/>
+            <a:ext cx="1188720" cy="713232"/>
           </a:xfrm>
           <a:prstGeom prst="rect">
             <a:avLst/>
@@ -9550,14 +8760,14 @@
       </p:sp>
       <p:sp>
         <p:nvSpPr>
-          <p:cNvPr id="135" name="TextBox 134"/>
-          <p:cNvSpPr txBox="1"/>
-          <p:nvPr/>
-        </p:nvSpPr>
-        <p:spPr>
-          <a:xfrm>
-            <a:off x="13377672" y="4855464"/>
-            <a:ext cx="1051560" cy="457200"/>
+          <p:cNvPr id="115" name="TextBox 114"/>
+          <p:cNvSpPr txBox="1"/>
+          <p:nvPr/>
+        </p:nvSpPr>
+        <p:spPr>
+          <a:xfrm>
+            <a:off x="9193011" y="4892040"/>
+            <a:ext cx="1042416" cy="621792"/>
           </a:xfrm>
           <a:prstGeom prst="rect">
             <a:avLst/>
@@ -9576,28 +8786,192 @@
               </a:lnSpc>
             </a:pPr>
             <a:r>
-              <a:rPr sz="1000" b="1">
+              <a:rPr sz="1125" b="1">
+                <a:solidFill>
+                  <a:srgbClr val="555555"/>
+                </a:solidFill>
+                <a:latin typeface="Arial"/>
+                <a:ea typeface="Arial"/>
+              </a:rPr>
+              <a:t>TB당 TCO</a:t>
+            </a:r>
+          </a:p>
+          <a:p>
+            <a:pPr algn="l">
+              <a:lnSpc>
+                <a:spcPct val="100000"/>
+              </a:lnSpc>
+            </a:pPr>
+            <a:r>
+              <a:rPr sz="850" b="0">
                 <a:solidFill>
                   <a:srgbClr val="8A8A8A"/>
                 </a:solidFill>
                 <a:latin typeface="Arial"/>
                 <a:ea typeface="Arial"/>
               </a:rPr>
-              <a:t>초기 '18~'23</a:t>
-            </a:r>
-          </a:p>
-        </p:txBody>
-      </p:sp>
-      <p:sp>
-        <p:nvSpPr>
-          <p:cNvPr id="136" name="TextBox 135"/>
-          <p:cNvSpPr txBox="1"/>
-          <p:nvPr/>
-        </p:nvSpPr>
-        <p:spPr>
-          <a:xfrm>
-            <a:off x="14438376" y="4864608"/>
-            <a:ext cx="2852928" cy="237744"/>
+              <a:t>원가 · 전력 · 밀도</a:t>
+            </a:r>
+          </a:p>
+        </p:txBody>
+      </p:sp>
+      <p:sp>
+        <p:nvSpPr>
+          <p:cNvPr id="116" name="Right Arrow 115"/>
+          <p:cNvSpPr/>
+          <p:nvPr/>
+        </p:nvSpPr>
+        <p:spPr>
+          <a:xfrm>
+            <a:off x="10363443" y="5120640"/>
+            <a:ext cx="201168" cy="164592"/>
+          </a:xfrm>
+          <a:prstGeom prst="rightArrow">
+            <a:avLst/>
+          </a:prstGeom>
+          <a:solidFill>
+            <a:srgbClr val="1428A0"/>
+          </a:solidFill>
+          <a:ln>
+            <a:noFill/>
+          </a:ln>
+          <a:effectLst/>
+        </p:spPr>
+        <p:style>
+          <a:lnRef idx="1">
+            <a:schemeClr val="accent1"/>
+          </a:lnRef>
+          <a:fillRef idx="3">
+            <a:schemeClr val="accent1"/>
+          </a:fillRef>
+          <a:effectRef idx="2">
+            <a:schemeClr val="accent1"/>
+          </a:effectRef>
+          <a:fontRef idx="minor">
+            <a:schemeClr val="lt1"/>
+          </a:fontRef>
+        </p:style>
+        <p:txBody>
+          <a:bodyPr rtlCol="0" anchor="ctr"/>
+          <a:lstStyle/>
+          <a:p>
+            <a:pPr algn="ctr"/>
+          </a:p>
+        </p:txBody>
+      </p:sp>
+      <p:sp>
+        <p:nvSpPr>
+          <p:cNvPr id="117" name="Rectangle 116"/>
+          <p:cNvSpPr/>
+          <p:nvPr/>
+        </p:nvSpPr>
+        <p:spPr>
+          <a:xfrm>
+            <a:off x="10619475" y="4846320"/>
+            <a:ext cx="1807585" cy="713232"/>
+          </a:xfrm>
+          <a:prstGeom prst="rect">
+            <a:avLst/>
+          </a:prstGeom>
+          <a:solidFill>
+            <a:srgbClr val="F4F6FC"/>
+          </a:solidFill>
+          <a:ln w="12700">
+            <a:solidFill>
+              <a:srgbClr val="1428A0"/>
+            </a:solidFill>
+          </a:ln>
+          <a:effectLst/>
+        </p:spPr>
+        <p:style>
+          <a:lnRef idx="1">
+            <a:schemeClr val="accent1"/>
+          </a:lnRef>
+          <a:fillRef idx="3">
+            <a:schemeClr val="accent1"/>
+          </a:fillRef>
+          <a:effectRef idx="2">
+            <a:schemeClr val="accent1"/>
+          </a:effectRef>
+          <a:fontRef idx="minor">
+            <a:schemeClr val="lt1"/>
+          </a:fontRef>
+        </p:style>
+        <p:txBody>
+          <a:bodyPr rtlCol="0" anchor="ctr"/>
+          <a:lstStyle/>
+          <a:p>
+            <a:pPr algn="ctr"/>
+          </a:p>
+        </p:txBody>
+      </p:sp>
+      <p:sp>
+        <p:nvSpPr>
+          <p:cNvPr id="118" name="TextBox 117"/>
+          <p:cNvSpPr txBox="1"/>
+          <p:nvPr/>
+        </p:nvSpPr>
+        <p:spPr>
+          <a:xfrm>
+            <a:off x="10692627" y="4892040"/>
+            <a:ext cx="1661281" cy="621792"/>
+          </a:xfrm>
+          <a:prstGeom prst="rect">
+            <a:avLst/>
+          </a:prstGeom>
+          <a:noFill/>
+        </p:spPr>
+        <p:txBody>
+          <a:bodyPr wrap="square" anchor="ctr" lIns="0" rIns="0" tIns="0" bIns="0">
+            <a:spAutoFit/>
+          </a:bodyPr>
+          <a:lstStyle/>
+          <a:p>
+            <a:pPr algn="l">
+              <a:lnSpc>
+                <a:spcPct val="100000"/>
+              </a:lnSpc>
+            </a:pPr>
+            <a:r>
+              <a:rPr sz="1125" b="1">
+                <a:solidFill>
+                  <a:srgbClr val="1428A0"/>
+                </a:solidFill>
+                <a:latin typeface="Arial"/>
+                <a:ea typeface="Arial"/>
+              </a:rPr>
+              <a:t>GPU당 컨텍스트 용량 · 토큰당 비용</a:t>
+            </a:r>
+          </a:p>
+          <a:p>
+            <a:pPr algn="l">
+              <a:lnSpc>
+                <a:spcPct val="100000"/>
+              </a:lnSpc>
+            </a:pPr>
+            <a:r>
+              <a:rPr sz="850" b="0">
+                <a:solidFill>
+                  <a:srgbClr val="555555"/>
+                </a:solidFill>
+                <a:latin typeface="Arial"/>
+                <a:ea typeface="Arial"/>
+              </a:rPr>
+              <a:t>추론 캐시 계층</a:t>
+            </a:r>
+          </a:p>
+        </p:txBody>
+      </p:sp>
+      <p:sp>
+        <p:nvSpPr>
+          <p:cNvPr id="119" name="TextBox 118"/>
+          <p:cNvSpPr txBox="1"/>
+          <p:nvPr/>
+        </p:nvSpPr>
+        <p:spPr>
+          <a:xfrm>
+            <a:off x="9119859" y="5705856"/>
+            <a:ext cx="3307201" cy="182880"/>
           </a:xfrm>
           <a:prstGeom prst="rect">
             <a:avLst/>
@@ -9616,68 +8990,28 @@
               </a:lnSpc>
             </a:pPr>
             <a:r>
-              <a:rPr sz="1100" b="1">
-                <a:solidFill>
-                  <a:srgbClr val="1A1A1A"/>
-                </a:solidFill>
-                <a:latin typeface="Arial"/>
-                <a:ea typeface="Arial"/>
-              </a:rPr>
-              <a:t>TB당 TCO: 원가 · 랙 밀도</a:t>
-            </a:r>
-          </a:p>
-        </p:txBody>
-      </p:sp>
-      <p:sp>
-        <p:nvSpPr>
-          <p:cNvPr id="137" name="TextBox 136"/>
-          <p:cNvSpPr txBox="1"/>
-          <p:nvPr/>
-        </p:nvSpPr>
-        <p:spPr>
-          <a:xfrm>
-            <a:off x="14438376" y="5093208"/>
-            <a:ext cx="2852928" cy="237744"/>
-          </a:xfrm>
-          <a:prstGeom prst="rect">
-            <a:avLst/>
-          </a:prstGeom>
-          <a:noFill/>
-        </p:spPr>
-        <p:txBody>
-          <a:bodyPr wrap="square" anchor="t" lIns="0" rIns="0" tIns="0" bIns="0">
-            <a:spAutoFit/>
-          </a:bodyPr>
-          <a:lstStyle/>
-          <a:p>
-            <a:pPr algn="l">
-              <a:lnSpc>
-                <a:spcPct val="112000"/>
-              </a:lnSpc>
-            </a:pPr>
-            <a:r>
-              <a:rPr sz="900" b="0">
-                <a:solidFill>
-                  <a:srgbClr val="555555"/>
-                </a:solidFill>
-                <a:latin typeface="Arial"/>
-                <a:ea typeface="Arial"/>
-              </a:rPr>
-              <a:t>읽기 중심 · 0.3~0.6 DWPD로 충족 · 61TB</a:t>
-            </a:r>
-          </a:p>
-        </p:txBody>
-      </p:sp>
-      <p:sp>
-        <p:nvSpPr>
-          <p:cNvPr id="138" name="Rectangle 137"/>
+              <a:rPr sz="950" b="0">
+                <a:solidFill>
+                  <a:srgbClr val="8A8A8A"/>
+                </a:solidFill>
+                <a:latin typeface="Arial"/>
+                <a:ea typeface="Arial"/>
+              </a:rPr>
+              <a:t>드라이브 용량</a:t>
+            </a:r>
+          </a:p>
+        </p:txBody>
+      </p:sp>
+      <p:sp>
+        <p:nvSpPr>
+          <p:cNvPr id="120" name="Rectangle 119"/>
           <p:cNvSpPr/>
           <p:nvPr/>
         </p:nvSpPr>
         <p:spPr>
           <a:xfrm>
-            <a:off x="13267944" y="5394960"/>
-            <a:ext cx="4096512" cy="512064"/>
+            <a:off x="9119859" y="5925312"/>
+            <a:ext cx="1188720" cy="713232"/>
           </a:xfrm>
           <a:prstGeom prst="rect">
             <a:avLst/>
@@ -9716,14 +9050,890 @@
       </p:sp>
       <p:sp>
         <p:nvSpPr>
+          <p:cNvPr id="121" name="TextBox 120"/>
+          <p:cNvSpPr txBox="1"/>
+          <p:nvPr/>
+        </p:nvSpPr>
+        <p:spPr>
+          <a:xfrm>
+            <a:off x="9193011" y="5971032"/>
+            <a:ext cx="1042416" cy="621792"/>
+          </a:xfrm>
+          <a:prstGeom prst="rect">
+            <a:avLst/>
+          </a:prstGeom>
+          <a:noFill/>
+        </p:spPr>
+        <p:txBody>
+          <a:bodyPr wrap="square" anchor="ctr" lIns="0" rIns="0" tIns="0" bIns="0">
+            <a:spAutoFit/>
+          </a:bodyPr>
+          <a:lstStyle/>
+          <a:p>
+            <a:pPr algn="l">
+              <a:lnSpc>
+                <a:spcPct val="100000"/>
+              </a:lnSpc>
+            </a:pPr>
+            <a:r>
+              <a:rPr sz="1125" b="1">
+                <a:solidFill>
+                  <a:srgbClr val="555555"/>
+                </a:solidFill>
+                <a:latin typeface="Arial"/>
+                <a:ea typeface="Arial"/>
+              </a:rPr>
+              <a:t>61TB</a:t>
+            </a:r>
+          </a:p>
+          <a:p>
+            <a:pPr algn="l">
+              <a:lnSpc>
+                <a:spcPct val="100000"/>
+              </a:lnSpc>
+            </a:pPr>
+            <a:r>
+              <a:rPr sz="850" b="0">
+                <a:solidFill>
+                  <a:srgbClr val="8A8A8A"/>
+                </a:solidFill>
+                <a:latin typeface="Arial"/>
+                <a:ea typeface="Arial"/>
+              </a:rPr>
+              <a:t>2023 · 1Tb 다이</a:t>
+            </a:r>
+          </a:p>
+        </p:txBody>
+      </p:sp>
+      <p:sp>
+        <p:nvSpPr>
+          <p:cNvPr id="122" name="Right Arrow 121"/>
+          <p:cNvSpPr/>
+          <p:nvPr/>
+        </p:nvSpPr>
+        <p:spPr>
+          <a:xfrm>
+            <a:off x="10363443" y="6199632"/>
+            <a:ext cx="201168" cy="164592"/>
+          </a:xfrm>
+          <a:prstGeom prst="rightArrow">
+            <a:avLst/>
+          </a:prstGeom>
+          <a:solidFill>
+            <a:srgbClr val="1428A0"/>
+          </a:solidFill>
+          <a:ln>
+            <a:noFill/>
+          </a:ln>
+          <a:effectLst/>
+        </p:spPr>
+        <p:style>
+          <a:lnRef idx="1">
+            <a:schemeClr val="accent1"/>
+          </a:lnRef>
+          <a:fillRef idx="3">
+            <a:schemeClr val="accent1"/>
+          </a:fillRef>
+          <a:effectRef idx="2">
+            <a:schemeClr val="accent1"/>
+          </a:effectRef>
+          <a:fontRef idx="minor">
+            <a:schemeClr val="lt1"/>
+          </a:fontRef>
+        </p:style>
+        <p:txBody>
+          <a:bodyPr rtlCol="0" anchor="ctr"/>
+          <a:lstStyle/>
+          <a:p>
+            <a:pPr algn="ctr"/>
+          </a:p>
+        </p:txBody>
+      </p:sp>
+      <p:sp>
+        <p:nvSpPr>
+          <p:cNvPr id="123" name="Rectangle 122"/>
+          <p:cNvSpPr/>
+          <p:nvPr/>
+        </p:nvSpPr>
+        <p:spPr>
+          <a:xfrm>
+            <a:off x="10619475" y="5925312"/>
+            <a:ext cx="1807585" cy="713232"/>
+          </a:xfrm>
+          <a:prstGeom prst="rect">
+            <a:avLst/>
+          </a:prstGeom>
+          <a:solidFill>
+            <a:srgbClr val="F4F6FC"/>
+          </a:solidFill>
+          <a:ln w="12700">
+            <a:solidFill>
+              <a:srgbClr val="1428A0"/>
+            </a:solidFill>
+          </a:ln>
+          <a:effectLst/>
+        </p:spPr>
+        <p:style>
+          <a:lnRef idx="1">
+            <a:schemeClr val="accent1"/>
+          </a:lnRef>
+          <a:fillRef idx="3">
+            <a:schemeClr val="accent1"/>
+          </a:fillRef>
+          <a:effectRef idx="2">
+            <a:schemeClr val="accent1"/>
+          </a:effectRef>
+          <a:fontRef idx="minor">
+            <a:schemeClr val="lt1"/>
+          </a:fontRef>
+        </p:style>
+        <p:txBody>
+          <a:bodyPr rtlCol="0" anchor="ctr"/>
+          <a:lstStyle/>
+          <a:p>
+            <a:pPr algn="ctr"/>
+          </a:p>
+        </p:txBody>
+      </p:sp>
+      <p:sp>
+        <p:nvSpPr>
+          <p:cNvPr id="124" name="TextBox 123"/>
+          <p:cNvSpPr txBox="1"/>
+          <p:nvPr/>
+        </p:nvSpPr>
+        <p:spPr>
+          <a:xfrm>
+            <a:off x="10692627" y="5971032"/>
+            <a:ext cx="1661281" cy="621792"/>
+          </a:xfrm>
+          <a:prstGeom prst="rect">
+            <a:avLst/>
+          </a:prstGeom>
+          <a:noFill/>
+        </p:spPr>
+        <p:txBody>
+          <a:bodyPr wrap="square" anchor="ctr" lIns="0" rIns="0" tIns="0" bIns="0">
+            <a:spAutoFit/>
+          </a:bodyPr>
+          <a:lstStyle/>
+          <a:p>
+            <a:pPr algn="l">
+              <a:lnSpc>
+                <a:spcPct val="100000"/>
+              </a:lnSpc>
+            </a:pPr>
+            <a:r>
+              <a:rPr sz="1125" b="1">
+                <a:solidFill>
+                  <a:srgbClr val="1428A0"/>
+                </a:solidFill>
+                <a:latin typeface="Arial"/>
+                <a:ea typeface="Arial"/>
+              </a:rPr>
+              <a:t>245TB</a:t>
+            </a:r>
+          </a:p>
+          <a:p>
+            <a:pPr algn="l">
+              <a:lnSpc>
+                <a:spcPct val="100000"/>
+              </a:lnSpc>
+            </a:pPr>
+            <a:r>
+              <a:rPr sz="850" b="0">
+                <a:solidFill>
+                  <a:srgbClr val="555555"/>
+                </a:solidFill>
+                <a:latin typeface="Arial"/>
+                <a:ea typeface="Arial"/>
+              </a:rPr>
+              <a:t>2025 · 다이 8배 ↑</a:t>
+            </a:r>
+          </a:p>
+        </p:txBody>
+      </p:sp>
+      <p:sp>
+        <p:nvSpPr>
+          <p:cNvPr id="125" name="TextBox 124"/>
+          <p:cNvSpPr txBox="1"/>
+          <p:nvPr/>
+        </p:nvSpPr>
+        <p:spPr>
+          <a:xfrm>
+            <a:off x="9119859" y="6784848"/>
+            <a:ext cx="3307201" cy="182880"/>
+          </a:xfrm>
+          <a:prstGeom prst="rect">
+            <a:avLst/>
+          </a:prstGeom>
+          <a:noFill/>
+        </p:spPr>
+        <p:txBody>
+          <a:bodyPr wrap="square" anchor="t" lIns="0" rIns="0" tIns="0" bIns="0">
+            <a:spAutoFit/>
+          </a:bodyPr>
+          <a:lstStyle/>
+          <a:p>
+            <a:pPr algn="l">
+              <a:lnSpc>
+                <a:spcPct val="112000"/>
+              </a:lnSpc>
+            </a:pPr>
+            <a:r>
+              <a:rPr sz="950" b="0">
+                <a:solidFill>
+                  <a:srgbClr val="8A8A8A"/>
+                </a:solidFill>
+                <a:latin typeface="Arial"/>
+                <a:ea typeface="Arial"/>
+              </a:rPr>
+              <a:t>요구 DWPD</a:t>
+            </a:r>
+          </a:p>
+        </p:txBody>
+      </p:sp>
+      <p:sp>
+        <p:nvSpPr>
+          <p:cNvPr id="126" name="Rectangle 125"/>
+          <p:cNvSpPr/>
+          <p:nvPr/>
+        </p:nvSpPr>
+        <p:spPr>
+          <a:xfrm>
+            <a:off x="9119859" y="7004304"/>
+            <a:ext cx="1188720" cy="713232"/>
+          </a:xfrm>
+          <a:prstGeom prst="rect">
+            <a:avLst/>
+          </a:prstGeom>
+          <a:solidFill>
+            <a:srgbClr val="FFFFFF"/>
+          </a:solidFill>
+          <a:ln w="9525">
+            <a:solidFill>
+              <a:srgbClr val="D9D9D9"/>
+            </a:solidFill>
+          </a:ln>
+          <a:effectLst/>
+        </p:spPr>
+        <p:style>
+          <a:lnRef idx="1">
+            <a:schemeClr val="accent1"/>
+          </a:lnRef>
+          <a:fillRef idx="3">
+            <a:schemeClr val="accent1"/>
+          </a:fillRef>
+          <a:effectRef idx="2">
+            <a:schemeClr val="accent1"/>
+          </a:effectRef>
+          <a:fontRef idx="minor">
+            <a:schemeClr val="lt1"/>
+          </a:fontRef>
+        </p:style>
+        <p:txBody>
+          <a:bodyPr rtlCol="0" anchor="ctr"/>
+          <a:lstStyle/>
+          <a:p>
+            <a:pPr algn="ctr"/>
+          </a:p>
+        </p:txBody>
+      </p:sp>
+      <p:sp>
+        <p:nvSpPr>
+          <p:cNvPr id="127" name="TextBox 126"/>
+          <p:cNvSpPr txBox="1"/>
+          <p:nvPr/>
+        </p:nvSpPr>
+        <p:spPr>
+          <a:xfrm>
+            <a:off x="9193011" y="7050024"/>
+            <a:ext cx="1042416" cy="621792"/>
+          </a:xfrm>
+          <a:prstGeom prst="rect">
+            <a:avLst/>
+          </a:prstGeom>
+          <a:noFill/>
+        </p:spPr>
+        <p:txBody>
+          <a:bodyPr wrap="square" anchor="ctr" lIns="0" rIns="0" tIns="0" bIns="0">
+            <a:spAutoFit/>
+          </a:bodyPr>
+          <a:lstStyle/>
+          <a:p>
+            <a:pPr algn="l">
+              <a:lnSpc>
+                <a:spcPct val="100000"/>
+              </a:lnSpc>
+            </a:pPr>
+            <a:r>
+              <a:rPr sz="1125" b="1">
+                <a:solidFill>
+                  <a:srgbClr val="555555"/>
+                </a:solidFill>
+                <a:latin typeface="Arial"/>
+                <a:ea typeface="Arial"/>
+              </a:rPr>
+              <a:t>0.3~0.6</a:t>
+            </a:r>
+          </a:p>
+          <a:p>
+            <a:pPr algn="l">
+              <a:lnSpc>
+                <a:spcPct val="100000"/>
+              </a:lnSpc>
+            </a:pPr>
+            <a:r>
+              <a:rPr sz="850" b="0">
+                <a:solidFill>
+                  <a:srgbClr val="8A8A8A"/>
+                </a:solidFill>
+                <a:latin typeface="Arial"/>
+                <a:ea typeface="Arial"/>
+              </a:rPr>
+              <a:t>읽기 중심 워크로드</a:t>
+            </a:r>
+          </a:p>
+        </p:txBody>
+      </p:sp>
+      <p:sp>
+        <p:nvSpPr>
+          <p:cNvPr id="128" name="Right Arrow 127"/>
+          <p:cNvSpPr/>
+          <p:nvPr/>
+        </p:nvSpPr>
+        <p:spPr>
+          <a:xfrm>
+            <a:off x="10363443" y="7278624"/>
+            <a:ext cx="201168" cy="164592"/>
+          </a:xfrm>
+          <a:prstGeom prst="rightArrow">
+            <a:avLst/>
+          </a:prstGeom>
+          <a:solidFill>
+            <a:srgbClr val="1428A0"/>
+          </a:solidFill>
+          <a:ln>
+            <a:noFill/>
+          </a:ln>
+          <a:effectLst/>
+        </p:spPr>
+        <p:style>
+          <a:lnRef idx="1">
+            <a:schemeClr val="accent1"/>
+          </a:lnRef>
+          <a:fillRef idx="3">
+            <a:schemeClr val="accent1"/>
+          </a:fillRef>
+          <a:effectRef idx="2">
+            <a:schemeClr val="accent1"/>
+          </a:effectRef>
+          <a:fontRef idx="minor">
+            <a:schemeClr val="lt1"/>
+          </a:fontRef>
+        </p:style>
+        <p:txBody>
+          <a:bodyPr rtlCol="0" anchor="ctr"/>
+          <a:lstStyle/>
+          <a:p>
+            <a:pPr algn="ctr"/>
+          </a:p>
+        </p:txBody>
+      </p:sp>
+      <p:sp>
+        <p:nvSpPr>
+          <p:cNvPr id="129" name="Rectangle 128"/>
+          <p:cNvSpPr/>
+          <p:nvPr/>
+        </p:nvSpPr>
+        <p:spPr>
+          <a:xfrm>
+            <a:off x="10619475" y="7004304"/>
+            <a:ext cx="1807585" cy="713232"/>
+          </a:xfrm>
+          <a:prstGeom prst="rect">
+            <a:avLst/>
+          </a:prstGeom>
+          <a:solidFill>
+            <a:srgbClr val="F4F6FC"/>
+          </a:solidFill>
+          <a:ln w="12700">
+            <a:solidFill>
+              <a:srgbClr val="1428A0"/>
+            </a:solidFill>
+          </a:ln>
+          <a:effectLst/>
+        </p:spPr>
+        <p:style>
+          <a:lnRef idx="1">
+            <a:schemeClr val="accent1"/>
+          </a:lnRef>
+          <a:fillRef idx="3">
+            <a:schemeClr val="accent1"/>
+          </a:fillRef>
+          <a:effectRef idx="2">
+            <a:schemeClr val="accent1"/>
+          </a:effectRef>
+          <a:fontRef idx="minor">
+            <a:schemeClr val="lt1"/>
+          </a:fontRef>
+        </p:style>
+        <p:txBody>
+          <a:bodyPr rtlCol="0" anchor="ctr"/>
+          <a:lstStyle/>
+          <a:p>
+            <a:pPr algn="ctr"/>
+          </a:p>
+        </p:txBody>
+      </p:sp>
+      <p:sp>
+        <p:nvSpPr>
+          <p:cNvPr id="130" name="TextBox 129"/>
+          <p:cNvSpPr txBox="1"/>
+          <p:nvPr/>
+        </p:nvSpPr>
+        <p:spPr>
+          <a:xfrm>
+            <a:off x="10692627" y="7050024"/>
+            <a:ext cx="1661281" cy="621792"/>
+          </a:xfrm>
+          <a:prstGeom prst="rect">
+            <a:avLst/>
+          </a:prstGeom>
+          <a:noFill/>
+        </p:spPr>
+        <p:txBody>
+          <a:bodyPr wrap="square" anchor="ctr" lIns="0" rIns="0" tIns="0" bIns="0">
+            <a:spAutoFit/>
+          </a:bodyPr>
+          <a:lstStyle/>
+          <a:p>
+            <a:pPr algn="l">
+              <a:lnSpc>
+                <a:spcPct val="100000"/>
+              </a:lnSpc>
+            </a:pPr>
+            <a:r>
+              <a:rPr sz="1125" b="1">
+                <a:solidFill>
+                  <a:srgbClr val="1428A0"/>
+                </a:solidFill>
+                <a:latin typeface="Arial"/>
+                <a:ea typeface="Arial"/>
+              </a:rPr>
+              <a:t>1~3</a:t>
+            </a:r>
+          </a:p>
+          <a:p>
+            <a:pPr algn="l">
+              <a:lnSpc>
+                <a:spcPct val="100000"/>
+              </a:lnSpc>
+            </a:pPr>
+            <a:r>
+              <a:rPr sz="850" b="0">
+                <a:solidFill>
+                  <a:srgbClr val="555555"/>
+                </a:solidFill>
+                <a:latin typeface="Arial"/>
+                <a:ea typeface="Arial"/>
+              </a:rPr>
+              <a:t>KV 캐시 쓰기 집약 · 현재 TLC 담당</a:t>
+            </a:r>
+          </a:p>
+        </p:txBody>
+      </p:sp>
+      <p:sp>
+        <p:nvSpPr>
+          <p:cNvPr id="131" name="TextBox 130"/>
+          <p:cNvSpPr txBox="1"/>
+          <p:nvPr/>
+        </p:nvSpPr>
+        <p:spPr>
+          <a:xfrm>
+            <a:off x="9119859" y="7918704"/>
+            <a:ext cx="3307201" cy="420624"/>
+          </a:xfrm>
+          <a:prstGeom prst="rect">
+            <a:avLst/>
+          </a:prstGeom>
+          <a:noFill/>
+        </p:spPr>
+        <p:txBody>
+          <a:bodyPr wrap="square" anchor="t" lIns="0" rIns="0" tIns="0" bIns="0">
+            <a:spAutoFit/>
+          </a:bodyPr>
+          <a:lstStyle/>
+          <a:p>
+            <a:pPr algn="l">
+              <a:lnSpc>
+                <a:spcPct val="102000"/>
+              </a:lnSpc>
+            </a:pPr>
+            <a:r>
+              <a:rPr sz="900" b="0">
+                <a:solidFill>
+                  <a:srgbClr val="555555"/>
+                </a:solidFill>
+                <a:latin typeface="Arial"/>
+                <a:ea typeface="Arial"/>
+              </a:rPr>
+              <a:t>세 국면의 구매 기준은 일관되게 TB당 TCO였고, 바뀐 것은 워크로드의 쓰기 비중과 드라이브당 용량입니다</a:t>
+            </a:r>
+          </a:p>
+        </p:txBody>
+      </p:sp>
+      <p:sp>
+        <p:nvSpPr>
+          <p:cNvPr id="132" name="Rectangle 131"/>
+          <p:cNvSpPr/>
+          <p:nvPr/>
+        </p:nvSpPr>
+        <p:spPr>
+          <a:xfrm>
+            <a:off x="12792821" y="4059935"/>
+            <a:ext cx="4772802" cy="4370832"/>
+          </a:xfrm>
+          <a:prstGeom prst="rect">
+            <a:avLst/>
+          </a:prstGeom>
+          <a:solidFill>
+            <a:srgbClr val="F4F6FC"/>
+          </a:solidFill>
+          <a:ln>
+            <a:noFill/>
+          </a:ln>
+          <a:effectLst/>
+        </p:spPr>
+        <p:style>
+          <a:lnRef idx="1">
+            <a:schemeClr val="accent1"/>
+          </a:lnRef>
+          <a:fillRef idx="3">
+            <a:schemeClr val="accent1"/>
+          </a:fillRef>
+          <a:effectRef idx="2">
+            <a:schemeClr val="accent1"/>
+          </a:effectRef>
+          <a:fontRef idx="minor">
+            <a:schemeClr val="lt1"/>
+          </a:fontRef>
+        </p:style>
+        <p:txBody>
+          <a:bodyPr rtlCol="0" anchor="ctr"/>
+          <a:lstStyle/>
+          <a:p>
+            <a:pPr algn="ctr"/>
+          </a:p>
+        </p:txBody>
+      </p:sp>
+      <p:sp>
+        <p:nvSpPr>
+          <p:cNvPr id="133" name="Rectangle 132"/>
+          <p:cNvSpPr/>
+          <p:nvPr/>
+        </p:nvSpPr>
+        <p:spPr>
+          <a:xfrm>
+            <a:off x="12792821" y="4059935"/>
+            <a:ext cx="4772802" cy="45720"/>
+          </a:xfrm>
+          <a:prstGeom prst="rect">
+            <a:avLst/>
+          </a:prstGeom>
+          <a:solidFill>
+            <a:srgbClr val="1428A0"/>
+          </a:solidFill>
+          <a:ln>
+            <a:noFill/>
+          </a:ln>
+          <a:effectLst/>
+        </p:spPr>
+        <p:style>
+          <a:lnRef idx="1">
+            <a:schemeClr val="accent1"/>
+          </a:lnRef>
+          <a:fillRef idx="3">
+            <a:schemeClr val="accent1"/>
+          </a:fillRef>
+          <a:effectRef idx="2">
+            <a:schemeClr val="accent1"/>
+          </a:effectRef>
+          <a:fontRef idx="minor">
+            <a:schemeClr val="lt1"/>
+          </a:fontRef>
+        </p:style>
+        <p:txBody>
+          <a:bodyPr rtlCol="0" anchor="ctr"/>
+          <a:lstStyle/>
+          <a:p>
+            <a:pPr algn="ctr"/>
+          </a:p>
+        </p:txBody>
+      </p:sp>
+      <p:sp>
+        <p:nvSpPr>
+          <p:cNvPr id="134" name="TextBox 133"/>
+          <p:cNvSpPr txBox="1"/>
+          <p:nvPr/>
+        </p:nvSpPr>
+        <p:spPr>
+          <a:xfrm>
+            <a:off x="13030565" y="4206240"/>
+            <a:ext cx="4297314" cy="256032"/>
+          </a:xfrm>
+          <a:prstGeom prst="rect">
+            <a:avLst/>
+          </a:prstGeom>
+          <a:noFill/>
+        </p:spPr>
+        <p:txBody>
+          <a:bodyPr wrap="square" anchor="t" lIns="0" rIns="0" tIns="0" bIns="0">
+            <a:spAutoFit/>
+          </a:bodyPr>
+          <a:lstStyle/>
+          <a:p>
+            <a:pPr algn="l">
+              <a:lnSpc>
+                <a:spcPct val="112000"/>
+              </a:lnSpc>
+            </a:pPr>
+            <a:r>
+              <a:rPr sz="1350" b="1">
+                <a:solidFill>
+                  <a:srgbClr val="1428A0"/>
+                </a:solidFill>
+                <a:latin typeface="Arial"/>
+                <a:ea typeface="Arial"/>
+              </a:rPr>
+              <a:t>문제 · 해법이 필요한 상황</a:t>
+            </a:r>
+            <a:r>
+              <a:rPr sz="1050" b="0">
+                <a:solidFill>
+                  <a:srgbClr val="8A8A8A"/>
+                </a:solidFill>
+                <a:latin typeface="Arial"/>
+                <a:ea typeface="Arial"/>
+              </a:rPr>
+              <a:t>   2027~2030</a:t>
+            </a:r>
+          </a:p>
+        </p:txBody>
+      </p:sp>
+      <p:sp>
+        <p:nvSpPr>
+          <p:cNvPr id="135" name="Rectangle 134"/>
+          <p:cNvSpPr/>
+          <p:nvPr/>
+        </p:nvSpPr>
+        <p:spPr>
+          <a:xfrm>
+            <a:off x="13030565" y="4517136"/>
+            <a:ext cx="4297314" cy="10972"/>
+          </a:xfrm>
+          <a:prstGeom prst="rect">
+            <a:avLst/>
+          </a:prstGeom>
+          <a:solidFill>
+            <a:srgbClr val="D9D9D9"/>
+          </a:solidFill>
+          <a:ln>
+            <a:noFill/>
+          </a:ln>
+          <a:effectLst/>
+        </p:spPr>
+        <p:style>
+          <a:lnRef idx="1">
+            <a:schemeClr val="accent1"/>
+          </a:lnRef>
+          <a:fillRef idx="3">
+            <a:schemeClr val="accent1"/>
+          </a:fillRef>
+          <a:effectRef idx="2">
+            <a:schemeClr val="accent1"/>
+          </a:effectRef>
+          <a:fontRef idx="minor">
+            <a:schemeClr val="lt1"/>
+          </a:fontRef>
+        </p:style>
+        <p:txBody>
+          <a:bodyPr rtlCol="0" anchor="ctr"/>
+          <a:lstStyle/>
+          <a:p>
+            <a:pPr algn="ctr"/>
+          </a:p>
+        </p:txBody>
+      </p:sp>
+      <p:sp>
+        <p:nvSpPr>
+          <p:cNvPr id="136" name="TextBox 135"/>
+          <p:cNvSpPr txBox="1"/>
+          <p:nvPr/>
+        </p:nvSpPr>
+        <p:spPr>
+          <a:xfrm>
+            <a:off x="13030565" y="4608575"/>
+            <a:ext cx="4297314" cy="182880"/>
+          </a:xfrm>
+          <a:prstGeom prst="rect">
+            <a:avLst/>
+          </a:prstGeom>
+          <a:noFill/>
+        </p:spPr>
+        <p:txBody>
+          <a:bodyPr wrap="square" anchor="t" lIns="0" rIns="0" tIns="0" bIns="0">
+            <a:spAutoFit/>
+          </a:bodyPr>
+          <a:lstStyle/>
+          <a:p>
+            <a:pPr algn="l">
+              <a:lnSpc>
+                <a:spcPct val="112000"/>
+              </a:lnSpc>
+            </a:pPr>
+            <a:r>
+              <a:rPr sz="950" b="0">
+                <a:solidFill>
+                  <a:srgbClr val="8A8A8A"/>
+                </a:solidFill>
+                <a:latin typeface="Arial"/>
+                <a:ea typeface="Arial"/>
+              </a:rPr>
+              <a:t>요구 1~3 DWPD vs 고용량 QLC 정격 0.075~0.6 DWPD</a:t>
+            </a:r>
+          </a:p>
+        </p:txBody>
+      </p:sp>
+      <p:sp>
+        <p:nvSpPr>
+          <p:cNvPr id="137" name="TextBox 136"/>
+          <p:cNvSpPr txBox="1"/>
+          <p:nvPr/>
+        </p:nvSpPr>
+        <p:spPr>
+          <a:xfrm>
+            <a:off x="13030565" y="4791455"/>
+            <a:ext cx="4297314" cy="566928"/>
+          </a:xfrm>
+          <a:prstGeom prst="rect">
+            <a:avLst/>
+          </a:prstGeom>
+          <a:noFill/>
+        </p:spPr>
+        <p:txBody>
+          <a:bodyPr wrap="square" anchor="ctr" lIns="0" rIns="0" tIns="0" bIns="0">
+            <a:spAutoFit/>
+          </a:bodyPr>
+          <a:lstStyle/>
+          <a:p>
+            <a:pPr algn="l">
+              <a:lnSpc>
+                <a:spcPct val="112000"/>
+              </a:lnSpc>
+            </a:pPr>
+            <a:r>
+              <a:rPr sz="3000" b="1">
+                <a:solidFill>
+                  <a:srgbClr val="1428A0"/>
+                </a:solidFill>
+                <a:latin typeface="Arial"/>
+                <a:ea typeface="Arial"/>
+              </a:rPr>
+              <a:t>10~40배 격차</a:t>
+            </a:r>
+          </a:p>
+        </p:txBody>
+      </p:sp>
+      <p:sp>
+        <p:nvSpPr>
+          <p:cNvPr id="138" name="TextBox 137"/>
+          <p:cNvSpPr txBox="1"/>
+          <p:nvPr/>
+        </p:nvSpPr>
+        <p:spPr>
+          <a:xfrm>
+            <a:off x="13030565" y="5431536"/>
+            <a:ext cx="2057217" cy="384048"/>
+          </a:xfrm>
+          <a:prstGeom prst="rect">
+            <a:avLst/>
+          </a:prstGeom>
+          <a:noFill/>
+        </p:spPr>
+        <p:txBody>
+          <a:bodyPr wrap="square" anchor="ctr" lIns="0" rIns="0" tIns="0" bIns="0">
+            <a:spAutoFit/>
+          </a:bodyPr>
+          <a:lstStyle/>
+          <a:p>
+            <a:pPr algn="l">
+              <a:lnSpc>
+                <a:spcPct val="112000"/>
+              </a:lnSpc>
+            </a:pPr>
+            <a:r>
+              <a:rPr sz="2000" b="1">
+                <a:solidFill>
+                  <a:srgbClr val="1428A0"/>
+                </a:solidFill>
+                <a:latin typeface="Arial"/>
+                <a:ea typeface="Arial"/>
+              </a:rPr>
+              <a:t>10배</a:t>
+            </a:r>
+          </a:p>
+        </p:txBody>
+      </p:sp>
+      <p:sp>
+        <p:nvSpPr>
           <p:cNvPr id="139" name="TextBox 138"/>
           <p:cNvSpPr txBox="1"/>
           <p:nvPr/>
         </p:nvSpPr>
         <p:spPr>
           <a:xfrm>
-            <a:off x="13377672" y="5422392"/>
-            <a:ext cx="1051560" cy="457200"/>
+            <a:off x="13030565" y="5815583"/>
+            <a:ext cx="2057217" cy="201168"/>
+          </a:xfrm>
+          <a:prstGeom prst="rect">
+            <a:avLst/>
+          </a:prstGeom>
+          <a:noFill/>
+        </p:spPr>
+        <p:txBody>
+          <a:bodyPr wrap="square" anchor="t" lIns="0" rIns="0" tIns="0" bIns="0">
+            <a:spAutoFit/>
+          </a:bodyPr>
+          <a:lstStyle/>
+          <a:p>
+            <a:pPr algn="l">
+              <a:lnSpc>
+                <a:spcPct val="112000"/>
+              </a:lnSpc>
+            </a:pPr>
+            <a:r>
+              <a:rPr sz="875" b="0">
+                <a:solidFill>
+                  <a:srgbClr val="555555"/>
+                </a:solidFill>
+                <a:latin typeface="Arial"/>
+                <a:ea typeface="Arial"/>
+              </a:rPr>
+              <a:t>QLC 비트 '25 → '30 (e)</a:t>
+            </a:r>
+          </a:p>
+        </p:txBody>
+      </p:sp>
+      <p:sp>
+        <p:nvSpPr>
+          <p:cNvPr id="140" name="TextBox 139"/>
+          <p:cNvSpPr txBox="1"/>
+          <p:nvPr/>
+        </p:nvSpPr>
+        <p:spPr>
+          <a:xfrm>
+            <a:off x="15270662" y="5431536"/>
+            <a:ext cx="2057217" cy="384048"/>
           </a:xfrm>
           <a:prstGeom prst="rect">
             <a:avLst/>
@@ -9738,32 +9948,32 @@
           <a:p>
             <a:pPr algn="l">
               <a:lnSpc>
-                <a:spcPct val="100000"/>
-              </a:lnSpc>
-            </a:pPr>
-            <a:r>
-              <a:rPr sz="1000" b="1">
-                <a:solidFill>
-                  <a:srgbClr val="8A8A8A"/>
-                </a:solidFill>
-                <a:latin typeface="Arial"/>
-                <a:ea typeface="Arial"/>
-              </a:rPr>
-              <a:t>현재 '24~'26</a:t>
-            </a:r>
-          </a:p>
-        </p:txBody>
-      </p:sp>
-      <p:sp>
-        <p:nvSpPr>
-          <p:cNvPr id="140" name="TextBox 139"/>
-          <p:cNvSpPr txBox="1"/>
-          <p:nvPr/>
-        </p:nvSpPr>
-        <p:spPr>
-          <a:xfrm>
-            <a:off x="14438376" y="5431536"/>
-            <a:ext cx="2852928" cy="237744"/>
+                <a:spcPct val="112000"/>
+              </a:lnSpc>
+            </a:pPr>
+            <a:r>
+              <a:rPr sz="2000" b="1">
+                <a:solidFill>
+                  <a:srgbClr val="1428A0"/>
+                </a:solidFill>
+                <a:latin typeface="Arial"/>
+                <a:ea typeface="Arial"/>
+              </a:rPr>
+              <a:t>350EB</a:t>
+            </a:r>
+          </a:p>
+        </p:txBody>
+      </p:sp>
+      <p:sp>
+        <p:nvSpPr>
+          <p:cNvPr id="141" name="TextBox 140"/>
+          <p:cNvSpPr txBox="1"/>
+          <p:nvPr/>
+        </p:nvSpPr>
+        <p:spPr>
+          <a:xfrm>
+            <a:off x="15270662" y="5815583"/>
+            <a:ext cx="2057217" cy="201168"/>
           </a:xfrm>
           <a:prstGeom prst="rect">
             <a:avLst/>
@@ -9782,54 +9992,14 @@
               </a:lnSpc>
             </a:pPr>
             <a:r>
-              <a:rPr sz="1100" b="1">
-                <a:solidFill>
-                  <a:srgbClr val="1A1A1A"/>
-                </a:solidFill>
-                <a:latin typeface="Arial"/>
-                <a:ea typeface="Arial"/>
-              </a:rPr>
-              <a:t>TB당 TCO: 전력 · 공급 확보</a:t>
-            </a:r>
-          </a:p>
-        </p:txBody>
-      </p:sp>
-      <p:sp>
-        <p:nvSpPr>
-          <p:cNvPr id="141" name="TextBox 140"/>
-          <p:cNvSpPr txBox="1"/>
-          <p:nvPr/>
-        </p:nvSpPr>
-        <p:spPr>
-          <a:xfrm>
-            <a:off x="14438376" y="5660136"/>
-            <a:ext cx="2852928" cy="237744"/>
-          </a:xfrm>
-          <a:prstGeom prst="rect">
-            <a:avLst/>
-          </a:prstGeom>
-          <a:noFill/>
-        </p:spPr>
-        <p:txBody>
-          <a:bodyPr wrap="square" anchor="t" lIns="0" rIns="0" tIns="0" bIns="0">
-            <a:spAutoFit/>
-          </a:bodyPr>
-          <a:lstStyle/>
-          <a:p>
-            <a:pPr algn="l">
-              <a:lnSpc>
-                <a:spcPct val="112000"/>
-              </a:lnSpc>
-            </a:pPr>
-            <a:r>
-              <a:rPr sz="900" b="0">
+              <a:rPr sz="875" b="0">
                 <a:solidFill>
                   <a:srgbClr val="555555"/>
                 </a:solidFill>
                 <a:latin typeface="Arial"/>
                 <a:ea typeface="Arial"/>
               </a:rPr>
-              <a:t>읽기 중심 유지 · 쓰기 계층은 TLC · 122~245TB</a:t>
+              <a:t>2030 추론 캐시 계층 수요 (e)</a:t>
             </a:r>
           </a:p>
         </p:txBody>
@@ -9842,8 +10012,8 @@
         </p:nvSpPr>
         <p:spPr>
           <a:xfrm>
-            <a:off x="13267944" y="5961888"/>
-            <a:ext cx="4096512" cy="512064"/>
+            <a:off x="13030565" y="6163055"/>
+            <a:ext cx="4297314" cy="859536"/>
           </a:xfrm>
           <a:prstGeom prst="rect">
             <a:avLst/>
@@ -9888,8 +10058,8 @@
         </p:nvSpPr>
         <p:spPr>
           <a:xfrm>
-            <a:off x="13377672" y="5989320"/>
-            <a:ext cx="1051560" cy="457200"/>
+            <a:off x="13176869" y="6217919"/>
+            <a:ext cx="4004706" cy="749808"/>
           </a:xfrm>
           <a:prstGeom prst="rect">
             <a:avLst/>
@@ -9904,504 +10074,49 @@
           <a:p>
             <a:pPr algn="l">
               <a:lnSpc>
-                <a:spcPct val="100000"/>
-              </a:lnSpc>
-            </a:pPr>
-            <a:r>
-              <a:rPr sz="1000" b="1">
+                <a:spcPct val="106000"/>
+              </a:lnSpc>
+            </a:pPr>
+            <a:r>
+              <a:rPr sz="1275" b="1">
                 <a:solidFill>
                   <a:srgbClr val="1428A0"/>
                 </a:solidFill>
                 <a:latin typeface="Arial"/>
                 <a:ea typeface="Arial"/>
               </a:rPr>
-              <a:t>향후 '27~'30</a:t>
-            </a:r>
-          </a:p>
-        </p:txBody>
-      </p:sp>
-      <p:sp>
-        <p:nvSpPr>
-          <p:cNvPr id="144" name="TextBox 143"/>
-          <p:cNvSpPr txBox="1"/>
-          <p:nvPr/>
-        </p:nvSpPr>
-        <p:spPr>
-          <a:xfrm>
-            <a:off x="14438376" y="5998464"/>
-            <a:ext cx="2852928" cy="237744"/>
-          </a:xfrm>
-          <a:prstGeom prst="rect">
-            <a:avLst/>
-          </a:prstGeom>
-          <a:noFill/>
-        </p:spPr>
-        <p:txBody>
-          <a:bodyPr wrap="square" anchor="t" lIns="0" rIns="0" tIns="0" bIns="0">
-            <a:spAutoFit/>
-          </a:bodyPr>
-          <a:lstStyle/>
+              <a:t>고용량 QLC에서 DWPD를 높일 해법이 필요합니다</a:t>
+            </a:r>
+          </a:p>
           <a:p>
             <a:pPr algn="l">
               <a:lnSpc>
-                <a:spcPct val="112000"/>
-              </a:lnSpc>
-            </a:pPr>
-            <a:r>
-              <a:rPr sz="1100" b="1">
-                <a:solidFill>
-                  <a:srgbClr val="1A1A1A"/>
-                </a:solidFill>
-                <a:latin typeface="Arial"/>
-                <a:ea typeface="Arial"/>
-              </a:rPr>
-              <a:t>GPU당 컨텍스트 용량 · 토큰당 비용</a:t>
-            </a:r>
-          </a:p>
-        </p:txBody>
-      </p:sp>
-      <p:sp>
-        <p:nvSpPr>
-          <p:cNvPr id="145" name="TextBox 144"/>
-          <p:cNvSpPr txBox="1"/>
-          <p:nvPr/>
-        </p:nvSpPr>
-        <p:spPr>
-          <a:xfrm>
-            <a:off x="14438376" y="6227064"/>
-            <a:ext cx="2852928" cy="237744"/>
-          </a:xfrm>
-          <a:prstGeom prst="rect">
-            <a:avLst/>
-          </a:prstGeom>
-          <a:noFill/>
-        </p:spPr>
-        <p:txBody>
-          <a:bodyPr wrap="square" anchor="t" lIns="0" rIns="0" tIns="0" bIns="0">
-            <a:spAutoFit/>
-          </a:bodyPr>
-          <a:lstStyle/>
-          <a:p>
-            <a:pPr algn="l">
-              <a:lnSpc>
-                <a:spcPct val="112000"/>
-              </a:lnSpc>
-            </a:pPr>
-            <a:r>
-              <a:rPr sz="900" b="0">
+                <a:spcPct val="106000"/>
+              </a:lnSpc>
+            </a:pPr>
+            <a:r>
+              <a:rPr sz="975" b="0">
                 <a:solidFill>
                   <a:srgbClr val="555555"/>
                 </a:solidFill>
                 <a:latin typeface="Arial"/>
                 <a:ea typeface="Arial"/>
               </a:rPr>
-              <a:t>KV 캐시 SSD 오프로드 · 쓰기 집약 → 1~3 DWPD</a:t>
-            </a:r>
-          </a:p>
-        </p:txBody>
-      </p:sp>
-      <p:sp>
-        <p:nvSpPr>
-          <p:cNvPr id="146" name="TextBox 145"/>
-          <p:cNvSpPr txBox="1"/>
-          <p:nvPr/>
-        </p:nvSpPr>
-        <p:spPr>
-          <a:xfrm>
-            <a:off x="13267944" y="6547104"/>
-            <a:ext cx="1304544" cy="329184"/>
-          </a:xfrm>
-          <a:prstGeom prst="rect">
-            <a:avLst/>
-          </a:prstGeom>
-          <a:noFill/>
-        </p:spPr>
-        <p:txBody>
-          <a:bodyPr wrap="square" anchor="ctr" lIns="0" rIns="0" tIns="0" bIns="0">
-            <a:spAutoFit/>
-          </a:bodyPr>
-          <a:lstStyle/>
-          <a:p>
-            <a:pPr algn="l">
-              <a:lnSpc>
-                <a:spcPct val="112000"/>
-              </a:lnSpc>
-            </a:pPr>
-            <a:r>
-              <a:rPr sz="1800" b="1">
-                <a:solidFill>
-                  <a:srgbClr val="1428A0"/>
-                </a:solidFill>
-                <a:latin typeface="Arial"/>
-                <a:ea typeface="Arial"/>
-              </a:rPr>
-              <a:t>10배</a:t>
-            </a:r>
-          </a:p>
-        </p:txBody>
-      </p:sp>
-      <p:sp>
-        <p:nvSpPr>
-          <p:cNvPr id="147" name="TextBox 146"/>
-          <p:cNvSpPr txBox="1"/>
-          <p:nvPr/>
-        </p:nvSpPr>
-        <p:spPr>
-          <a:xfrm>
-            <a:off x="13267944" y="6876288"/>
-            <a:ext cx="1304544" cy="329184"/>
-          </a:xfrm>
-          <a:prstGeom prst="rect">
-            <a:avLst/>
-          </a:prstGeom>
-          <a:noFill/>
-        </p:spPr>
-        <p:txBody>
-          <a:bodyPr wrap="square" anchor="t" lIns="0" rIns="0" tIns="0" bIns="0">
-            <a:spAutoFit/>
-          </a:bodyPr>
-          <a:lstStyle/>
-          <a:p>
-            <a:pPr algn="l">
-              <a:lnSpc>
-                <a:spcPct val="100000"/>
-              </a:lnSpc>
-            </a:pPr>
-            <a:r>
-              <a:rPr sz="875" b="0">
-                <a:solidFill>
-                  <a:srgbClr val="555555"/>
-                </a:solidFill>
-                <a:latin typeface="Arial"/>
-                <a:ea typeface="Arial"/>
-              </a:rPr>
-              <a:t>QLC 비트</a:t>
-            </a:r>
-          </a:p>
-          <a:p>
-            <a:pPr algn="l">
-              <a:lnSpc>
-                <a:spcPct val="100000"/>
-              </a:lnSpc>
-            </a:pPr>
-            <a:r>
-              <a:rPr sz="875" b="0">
-                <a:solidFill>
-                  <a:srgbClr val="555555"/>
-                </a:solidFill>
-                <a:latin typeface="Arial"/>
-                <a:ea typeface="Arial"/>
-              </a:rPr>
-              <a:t>'25 → '30</a:t>
-            </a:r>
-          </a:p>
-        </p:txBody>
-      </p:sp>
-      <p:sp>
-        <p:nvSpPr>
-          <p:cNvPr id="148" name="TextBox 147"/>
-          <p:cNvSpPr txBox="1"/>
-          <p:nvPr/>
-        </p:nvSpPr>
-        <p:spPr>
-          <a:xfrm>
-            <a:off x="14663928" y="6547104"/>
-            <a:ext cx="1304544" cy="329184"/>
-          </a:xfrm>
-          <a:prstGeom prst="rect">
-            <a:avLst/>
-          </a:prstGeom>
-          <a:noFill/>
-        </p:spPr>
-        <p:txBody>
-          <a:bodyPr wrap="square" anchor="ctr" lIns="0" rIns="0" tIns="0" bIns="0">
-            <a:spAutoFit/>
-          </a:bodyPr>
-          <a:lstStyle/>
-          <a:p>
-            <a:pPr algn="l">
-              <a:lnSpc>
-                <a:spcPct val="112000"/>
-              </a:lnSpc>
-            </a:pPr>
-            <a:r>
-              <a:rPr sz="1800" b="1">
-                <a:solidFill>
-                  <a:srgbClr val="1428A0"/>
-                </a:solidFill>
-                <a:latin typeface="Arial"/>
-                <a:ea typeface="Arial"/>
-              </a:rPr>
-              <a:t>350EB</a:t>
-            </a:r>
-          </a:p>
-        </p:txBody>
-      </p:sp>
-      <p:sp>
-        <p:nvSpPr>
-          <p:cNvPr id="149" name="TextBox 148"/>
-          <p:cNvSpPr txBox="1"/>
-          <p:nvPr/>
-        </p:nvSpPr>
-        <p:spPr>
-          <a:xfrm>
-            <a:off x="14663928" y="6876288"/>
-            <a:ext cx="1304544" cy="329184"/>
-          </a:xfrm>
-          <a:prstGeom prst="rect">
-            <a:avLst/>
-          </a:prstGeom>
-          <a:noFill/>
-        </p:spPr>
-        <p:txBody>
-          <a:bodyPr wrap="square" anchor="t" lIns="0" rIns="0" tIns="0" bIns="0">
-            <a:spAutoFit/>
-          </a:bodyPr>
-          <a:lstStyle/>
-          <a:p>
-            <a:pPr algn="l">
-              <a:lnSpc>
-                <a:spcPct val="100000"/>
-              </a:lnSpc>
-            </a:pPr>
-            <a:r>
-              <a:rPr sz="875" b="0">
-                <a:solidFill>
-                  <a:srgbClr val="555555"/>
-                </a:solidFill>
-                <a:latin typeface="Arial"/>
-                <a:ea typeface="Arial"/>
-              </a:rPr>
-              <a:t>2030 추론 캐시</a:t>
-            </a:r>
-          </a:p>
-          <a:p>
-            <a:pPr algn="l">
-              <a:lnSpc>
-                <a:spcPct val="100000"/>
-              </a:lnSpc>
-            </a:pPr>
-            <a:r>
-              <a:rPr sz="875" b="0">
-                <a:solidFill>
-                  <a:srgbClr val="555555"/>
-                </a:solidFill>
-                <a:latin typeface="Arial"/>
-                <a:ea typeface="Arial"/>
-              </a:rPr>
-              <a:t>계층 수요</a:t>
-            </a:r>
-          </a:p>
-        </p:txBody>
-      </p:sp>
-      <p:sp>
-        <p:nvSpPr>
-          <p:cNvPr id="150" name="TextBox 149"/>
-          <p:cNvSpPr txBox="1"/>
-          <p:nvPr/>
-        </p:nvSpPr>
-        <p:spPr>
-          <a:xfrm>
-            <a:off x="16059912" y="6547104"/>
-            <a:ext cx="1304544" cy="329184"/>
-          </a:xfrm>
-          <a:prstGeom prst="rect">
-            <a:avLst/>
-          </a:prstGeom>
-          <a:noFill/>
-        </p:spPr>
-        <p:txBody>
-          <a:bodyPr wrap="square" anchor="ctr" lIns="0" rIns="0" tIns="0" bIns="0">
-            <a:spAutoFit/>
-          </a:bodyPr>
-          <a:lstStyle/>
-          <a:p>
-            <a:pPr algn="l">
-              <a:lnSpc>
-                <a:spcPct val="112000"/>
-              </a:lnSpc>
-            </a:pPr>
-            <a:r>
-              <a:rPr sz="1800" b="1">
-                <a:solidFill>
-                  <a:srgbClr val="1428A0"/>
-                </a:solidFill>
-                <a:latin typeface="Arial"/>
-                <a:ea typeface="Arial"/>
-              </a:rPr>
-              <a:t>10~40배</a:t>
-            </a:r>
-          </a:p>
-        </p:txBody>
-      </p:sp>
-      <p:sp>
-        <p:nvSpPr>
-          <p:cNvPr id="151" name="TextBox 150"/>
-          <p:cNvSpPr txBox="1"/>
-          <p:nvPr/>
-        </p:nvSpPr>
-        <p:spPr>
-          <a:xfrm>
-            <a:off x="16059912" y="6876288"/>
-            <a:ext cx="1304544" cy="329184"/>
-          </a:xfrm>
-          <a:prstGeom prst="rect">
-            <a:avLst/>
-          </a:prstGeom>
-          <a:noFill/>
-        </p:spPr>
-        <p:txBody>
-          <a:bodyPr wrap="square" anchor="t" lIns="0" rIns="0" tIns="0" bIns="0">
-            <a:spAutoFit/>
-          </a:bodyPr>
-          <a:lstStyle/>
-          <a:p>
-            <a:pPr algn="l">
-              <a:lnSpc>
-                <a:spcPct val="100000"/>
-              </a:lnSpc>
-            </a:pPr>
-            <a:r>
-              <a:rPr sz="875" b="0">
-                <a:solidFill>
-                  <a:srgbClr val="555555"/>
-                </a:solidFill>
-                <a:latin typeface="Arial"/>
-                <a:ea typeface="Arial"/>
-              </a:rPr>
-              <a:t>요구 1~3 vs QLC</a:t>
-            </a:r>
-          </a:p>
-          <a:p>
-            <a:pPr algn="l">
-              <a:lnSpc>
-                <a:spcPct val="100000"/>
-              </a:lnSpc>
-            </a:pPr>
-            <a:r>
-              <a:rPr sz="875" b="0">
-                <a:solidFill>
-                  <a:srgbClr val="555555"/>
-                </a:solidFill>
-                <a:latin typeface="Arial"/>
-                <a:ea typeface="Arial"/>
-              </a:rPr>
-              <a:t>정격 0.075~0.6 DWPD</a:t>
-            </a:r>
-          </a:p>
-        </p:txBody>
-      </p:sp>
-      <p:sp>
-        <p:nvSpPr>
-          <p:cNvPr id="152" name="Rectangle 151"/>
+              <a:t>어느 계층이 해결할 수 있는가 → 2장 해법 사다리</a:t>
+            </a:r>
+          </a:p>
+        </p:txBody>
+      </p:sp>
+      <p:sp>
+        <p:nvSpPr>
+          <p:cNvPr id="144" name="Rectangle 143"/>
           <p:cNvSpPr/>
           <p:nvPr/>
         </p:nvSpPr>
         <p:spPr>
           <a:xfrm>
-            <a:off x="13267944" y="7242048"/>
-            <a:ext cx="4096512" cy="10972"/>
-          </a:xfrm>
-          <a:prstGeom prst="rect">
-            <a:avLst/>
-          </a:prstGeom>
-          <a:solidFill>
-            <a:srgbClr val="AAB8E8"/>
-          </a:solidFill>
-          <a:ln>
-            <a:noFill/>
-          </a:ln>
-          <a:effectLst/>
-        </p:spPr>
-        <p:style>
-          <a:lnRef idx="1">
-            <a:schemeClr val="accent1"/>
-          </a:lnRef>
-          <a:fillRef idx="3">
-            <a:schemeClr val="accent1"/>
-          </a:fillRef>
-          <a:effectRef idx="2">
-            <a:schemeClr val="accent1"/>
-          </a:effectRef>
-          <a:fontRef idx="minor">
-            <a:schemeClr val="lt1"/>
-          </a:fontRef>
-        </p:style>
-        <p:txBody>
-          <a:bodyPr rtlCol="0" anchor="ctr"/>
-          <a:lstStyle/>
-          <a:p>
-            <a:pPr algn="ctr"/>
-          </a:p>
-        </p:txBody>
-      </p:sp>
-      <p:sp>
-        <p:nvSpPr>
-          <p:cNvPr id="153" name="TextBox 152"/>
-          <p:cNvSpPr txBox="1"/>
-          <p:nvPr/>
-        </p:nvSpPr>
-        <p:spPr>
-          <a:xfrm>
-            <a:off x="13267944" y="7296912"/>
-            <a:ext cx="4096512" cy="402336"/>
-          </a:xfrm>
-          <a:prstGeom prst="rect">
-            <a:avLst/>
-          </a:prstGeom>
-          <a:noFill/>
-        </p:spPr>
-        <p:txBody>
-          <a:bodyPr wrap="square" anchor="t" lIns="0" rIns="0" tIns="0" bIns="0">
-            <a:spAutoFit/>
-          </a:bodyPr>
-          <a:lstStyle/>
-          <a:p>
-            <a:pPr algn="l">
-              <a:lnSpc>
-                <a:spcPct val="102000"/>
-              </a:lnSpc>
-            </a:pPr>
-            <a:r>
-              <a:rPr sz="1125" b="1">
-                <a:solidFill>
-                  <a:srgbClr val="1428A0"/>
-                </a:solidFill>
-                <a:latin typeface="Arial"/>
-                <a:ea typeface="Arial"/>
-              </a:rPr>
-              <a:t>대용량 QLC로 1~3 DWPD를 충족할 해법이 필요합니다</a:t>
-            </a:r>
-          </a:p>
-          <a:p>
-            <a:pPr algn="l">
-              <a:lnSpc>
-                <a:spcPct val="102000"/>
-              </a:lnSpc>
-            </a:pPr>
-            <a:r>
-              <a:rPr sz="950" b="0">
-                <a:solidFill>
-                  <a:srgbClr val="555555"/>
-                </a:solidFill>
-                <a:latin typeface="Arial"/>
-                <a:ea typeface="Arial"/>
-              </a:rPr>
-              <a:t>정격 QLC 0.075~0.6 DWPD로는 격차 10~40배 → 2장 해법 사다리</a:t>
-            </a:r>
-          </a:p>
-        </p:txBody>
-      </p:sp>
-      <p:sp>
-        <p:nvSpPr>
-          <p:cNvPr id="154" name="Rectangle 153"/>
-          <p:cNvSpPr/>
-          <p:nvPr/>
-        </p:nvSpPr>
-        <p:spPr>
-          <a:xfrm>
-            <a:off x="13267944" y="7790688"/>
-            <a:ext cx="54864" cy="548640"/>
+            <a:off x="13030565" y="7589520"/>
+            <a:ext cx="54864" cy="713232"/>
           </a:xfrm>
           <a:prstGeom prst="rect">
             <a:avLst/>
@@ -10438,14 +10153,14 @@
       </p:sp>
       <p:sp>
         <p:nvSpPr>
-          <p:cNvPr id="155" name="TextBox 154"/>
-          <p:cNvSpPr txBox="1"/>
-          <p:nvPr/>
-        </p:nvSpPr>
-        <p:spPr>
-          <a:xfrm>
-            <a:off x="13469112" y="7790688"/>
-            <a:ext cx="3895344" cy="548640"/>
+          <p:cNvPr id="145" name="TextBox 144"/>
+          <p:cNvSpPr txBox="1"/>
+          <p:nvPr/>
+        </p:nvSpPr>
+        <p:spPr>
+          <a:xfrm>
+            <a:off x="13231733" y="7589520"/>
+            <a:ext cx="4096146" cy="713232"/>
           </a:xfrm>
           <a:prstGeom prst="rect">
             <a:avLst/>
@@ -10464,7 +10179,7 @@
               </a:lnSpc>
             </a:pPr>
             <a:r>
-              <a:rPr sz="925" b="1">
+              <a:rPr sz="950" b="1">
                 <a:solidFill>
                   <a:srgbClr val="1A1A1A"/>
                 </a:solidFill>
@@ -10481,7 +10196,7 @@
               </a:lnSpc>
             </a:pPr>
             <a:r>
-              <a:rPr sz="775" b="0">
+              <a:rPr sz="800" b="0">
                 <a:solidFill>
                   <a:srgbClr val="8A8A8A"/>
                 </a:solidFill>
@@ -10495,7 +10210,7 @@
       </p:sp>
       <p:sp>
         <p:nvSpPr>
-          <p:cNvPr id="156" name="Rectangle 155"/>
+          <p:cNvPr id="146" name="Rectangle 145"/>
           <p:cNvSpPr/>
           <p:nvPr/>
         </p:nvSpPr>
@@ -10539,7 +10254,7 @@
       </p:sp>
       <p:sp>
         <p:nvSpPr>
-          <p:cNvPr id="157" name="TextBox 156"/>
+          <p:cNvPr id="147" name="TextBox 146"/>
           <p:cNvSpPr txBox="1"/>
           <p:nvPr/>
         </p:nvSpPr>
@@ -10572,14 +10287,14 @@
                 <a:latin typeface="Arial"/>
                 <a:ea typeface="Arial"/>
               </a:rPr>
-              <a:t>결론</a:t>
-            </a:r>
-          </a:p>
-        </p:txBody>
-      </p:sp>
-      <p:sp>
-        <p:nvSpPr>
-          <p:cNvPr id="158" name="TextBox 157"/>
+              <a:t>문제</a:t>
+            </a:r>
+          </a:p>
+        </p:txBody>
+      </p:sp>
+      <p:sp>
+        <p:nvSpPr>
+          <p:cNvPr id="148" name="TextBox 147"/>
           <p:cNvSpPr txBox="1"/>
           <p:nvPr/>
         </p:nvSpPr>
@@ -10629,14 +10344,14 @@
                 <a:latin typeface="Arial"/>
                 <a:ea typeface="Arial"/>
               </a:rPr>
-              <a:t>차기 요구는 추론 캐시 계층의 대용량·1~3 DWPD이며, QLC 정격 0.075~0.6으로는 충족되지 않습니다</a:t>
-            </a:r>
-          </a:p>
-        </p:txBody>
-      </p:sp>
-      <p:sp>
-        <p:nvSpPr>
-          <p:cNvPr id="159" name="Rectangle 158"/>
+              <a:t>차기 요구는 고용량 QLC의 1~3 DWPD이며, 정격 0.075~0.6 DWPD와는 10~40배 격차가 있습니다</a:t>
+            </a:r>
+          </a:p>
+        </p:txBody>
+      </p:sp>
+      <p:sp>
+        <p:nvSpPr>
+          <p:cNvPr id="149" name="Rectangle 148"/>
           <p:cNvSpPr/>
           <p:nvPr/>
         </p:nvSpPr>
@@ -10680,7 +10395,7 @@
       </p:sp>
       <p:sp>
         <p:nvSpPr>
-          <p:cNvPr id="160" name="Rectangle 159"/>
+          <p:cNvPr id="150" name="Rectangle 149"/>
           <p:cNvSpPr/>
           <p:nvPr/>
         </p:nvSpPr>
@@ -10724,7 +10439,7 @@
       </p:sp>
       <p:sp>
         <p:nvSpPr>
-          <p:cNvPr id="161" name="TextBox 160"/>
+          <p:cNvPr id="151" name="TextBox 150"/>
           <p:cNvSpPr txBox="1"/>
           <p:nvPr/>
         </p:nvSpPr>
@@ -10781,7 +10496,7 @@
       </p:sp>
       <p:sp>
         <p:nvSpPr>
-          <p:cNvPr id="162" name="TextBox 161"/>
+          <p:cNvPr id="152" name="TextBox 151"/>
           <p:cNvSpPr txBox="1"/>
           <p:nvPr/>
         </p:nvSpPr>
@@ -10814,14 +10529,14 @@
                 <a:latin typeface="Arial"/>
                 <a:ea typeface="Arial"/>
               </a:rPr>
-              <a:t>출처: 위키 다운턴 역사 20년(DT19·DT23 낙폭), fdp-host-ssd-platform §2.5(Solidigm 61TB), QLC 연혁 소스(배치 표준 비준·30EB), GitHub README(캐시 관리자 4종), TrendForce·SanDisk FMS 2026·Meta(수요 모델, 2026~2030 추정), StorageReview(DWPD)</a:t>
-            </a:r>
-          </a:p>
-        </p:txBody>
-      </p:sp>
-      <p:sp>
-        <p:nvSpPr>
-          <p:cNvPr id="163" name="TextBox 162"/>
+              <a:t>출처: 위키 다운턴 역사 20년(DT19·DT23 낙폭), fdp-host-ssd-platform §2.5(Solidigm 61TB), QLC 연혁 소스(배치 표준 비준·30EB), GitHub README(캐시 관리자 4종), TrendForce·SanDisk FMS 2026·Meta(수요 모델, 2026~2030 추정), Kioxia LC9(245TB), StorageReview(DWPD)</a:t>
+            </a:r>
+          </a:p>
+        </p:txBody>
+      </p:sp>
+      <p:sp>
+        <p:nvSpPr>
+          <p:cNvPr id="153" name="TextBox 152"/>
           <p:cNvSpPr txBox="1"/>
           <p:nvPr/>
         </p:nvSpPr>

--- a/outputs/presentation/qlc-ssd-strategy.pptx
+++ b/outputs/presentation/qlc-ssd-strategy.pptx
@@ -507,7 +507,7 @@
           <a:lstStyle/>
           <a:p>
             <a:r>
-              <a:t>1장은 문제 제기입니다. 결론은 내리지 않고, 고용량 QLC에서 DWPD를 높일 해법이 필요한 상황임을 세웁니다. 상단 타임라인의 세 구간이 아래 세 패널과 정렬돼 있습니다. 과거의 교훈, 지금 요구의 이동, 그리고 해법이 필요한 문제입니다. 왼쪽 패널, 교훈. DT19(재고 조정, -37.6%)와 DT23(최대 낙폭 -45%, 진앙 eSSD)에서 세 가지를 배웠습니다. 교훈 1 수요 센싱: 수요 신호는 발주보다 약 2년 먼저 고객의 규격·표준·소스 코드에 나타납니다. 2022년 12월 데이터 배치 표준 비준이 2024년 비트 출하 30EB로 이어졌고, 지금의 등가 신호는 KV 캐시 관리자 코드에 배치·내구성 규격이 미정의라는 사실입니다. 교훈 2 고객 협업: 규격 정의에 참여한 공급자가 선점했습니다. Solidigm은 61TB QLC를 12개월 먼저 출시했고, HBM4는 NVIDIA와 규격을 공동 정의한 SK hynix가 주도권을 확보했습니다. 교훈 3 의사결정 시점: 직전 다운턴의 결정이 다음 다운턴의 초기 조건입니다. DT19의 무감산 성공이 DT23 국면 오판으로, HBM 조직 축소가 주도권 상실로 이어졌고, 차기 전환점은 2027년 하반기 가격 정상화 국면입니다. 각 교훈 끝의 번호는 이 덱에서 그 교훈을 받는 장입니다. 가운데 패널, 지금 요구의 이동. 구매 기준은 TB당 TCO(원가·전력·밀도)에서 GPU당 컨텍스트 용량·토큰당 비용으로, 드라이브 용량은 61TB(2023)에서 245TB(2025, 다이 8배)로, 요구 DWPD는 읽기 중심 0.3~0.6에서 KV 캐시 쓰기 집약 1~3으로 이동했습니다. 세 국면의 구매 기준은 일관되게 TB당 TCO였고, 바뀐 것은 쓰기 비중과 용량입니다. 오른쪽 패널, 문제. 동급 용량으로 비교하면 61TB QLC 정격 0.58~1.0(P5336·6550 ION), 245TB QLC 0.3(LC9)과 KV 캐시 계층 TLC 1~3(CM9) 사이에는 2~10배 격차가 있습니다. 최저 정격 0.075와 3을 짝지은 극단 조합만 40배입니다. KV 캐시의 쓰기 강도 자체도 프레임워크에 따라 크게 달라(CHEOPS 2025: 읽기 2.0GiB/s vs 쓰기 11MiB/s) 실측이 필요합니다. 수요 모델은 QLC 비트 2025년 대비 2030년 10배, 2030년 추론 캐시 계층 수요 350EB입니다. 그래서 고용량 QLC에서 DWPD를 높일 해법이 필요합니다. 고용량화는 두 축을 낳습니다. 다이 8배가 만드는 신뢰성 축은 2장에서 SSD 내부 해법으로 닫히고, DWPD 격차는 3장에서 어느 계층이 닫을 수 있는지를 봅니다. 송용호 AX/PI센터장의 인용은 그 답이 고객 시스템의 이해에서 나와야 함을 시사합니다. 근거는 위키 qlc-ssd-market.md §3.4·§3.5, 수요 모델은 §4.3.</a:t>
+              <a:t>1장은 문제 제기입니다. 결론은 내리지 않고, 고용량 QLC에서 DWPD를 높일 해법이 필요한 상황임을 세웁니다. 상단 타임라인의 세 구간이 아래 세 패널과 정렬돼 있습니다. 과거의 교훈, 지금 요구의 이동, 그리고 해법이 필요한 문제입니다. 왼쪽 패널, 교훈. DT19(재고 조정, -37.6%)와 DT23(최대 낙폭 -45%, 진앙 eSSD)에서 세 가지를 배웠습니다. 교훈 1 수요 센싱: 수요 신호는 발주보다 약 2년 먼저 고객의 규격·표준·소스 코드에 나타납니다. 2022년 12월 데이터 배치 표준 비준이 2024년 비트 출하 30EB로 이어졌고, 지금의 등가 신호는 KV 캐시 관리자 코드에 배치·내구성 규격이 미정의라는 사실입니다. 교훈 2 고객 협업: 규격 정의에 참여한 공급자가 선점했습니다. Solidigm은 61TB QLC를 12개월 먼저 출시했고, HBM4는 NVIDIA와 규격을 공동 정의한 SK hynix가 주도권을 확보했습니다. 교훈 3 의사결정 시점: 직전 다운턴의 결정이 다음 다운턴의 초기 조건입니다. DT19의 무감산 성공이 DT23 국면 오판으로, HBM 조직 축소가 주도권 상실로 이어졌고, 차기 전환점은 2027년 하반기 가격 정상화 국면입니다. 각 교훈 끝의 번호는 이 덱에서 그 교훈을 받는 장입니다. 가운데 패널, 지금 요구의 이동. 구매 기준은 TB당 TCO(원가·전력·밀도)에서 GPU당 컨텍스트 용량·토큰당 비용으로, 드라이브 용량은 61TB(2023)에서 245TB(2025, 다이 8배)로, 요구 DWPD는 읽기 중심 0.3~0.6에서 KV 캐시 쓰기 집약 1~3으로 이동했습니다. 세 국면의 구매 기준은 일관되게 TB당 TCO였고, 바뀐 것은 쓰기 비중과 용량입니다. 오른쪽 패널, 문제. 동급 용량으로 비교하면 61TB QLC 정격 0.58~1.0(P5336·6550 ION), 245TB QLC 0.3(LC9)과 KV 캐시 계층 TLC 1~3(CM9) 사이에는 2~10배 격차가 있습니다. 최저 정격 0.075와 3을 짝지은 극단 조합만 40배입니다. KV 캐시의 쓰기 강도 자체도 프레임워크에 따라 크게 달라(CHEOPS 2025: 읽기 2.0GiB/s vs 쓰기 11MiB/s) 실측이 필요합니다. 수요 모델은 QLC 비트 2025년 대비 2030년 10배, 2030년 추론 캐시 계층 수요 350EB입니다. 그래서 고용량 QLC에서 DWPD를 높일 해법이 필요합니다. 고용량화는 두 축을 낳습니다. 다이 8배가 만드는 신뢰성 축은 2장에서 SSD 내부 설계로 충족되고, DWPD 격차는 3장에서 어느 계층이 충족할 수 있는지를 봅니다. 송용호 AX/PI센터장의 인용은 그 답이 고객 시스템의 이해에서 나와야 함을 시사합니다. 근거는 위키 qlc-ssd-market.md §3.4·§3.5, 수요 모델은 §4.3.</a:t>
             </a:r>
           </a:p>
         </p:txBody>
@@ -577,7 +577,7 @@
           <a:lstStyle/>
           <a:p>
             <a:r>
-              <a:t>2장은 신뢰성 축, 고용량화가 낳는 첫째 축입니다. 3장의 내구성 축과 구조는 같지만 해결 주체가 다릅니다. 요구는 JESD218 기능 고장률 FFR 3% 이하로 고정인데, SSD당 NAND 다이 수는 S3700 800GB 128개(2012)에서 Kioxia LC9 245TB 1,024개(2025, 2Tb 다이 32단 스택 32패키지)로 8배 늘었습니다. 보호가 없으면 SSD 고장률은 다이 수 N에 비례하므로, 같은 FFR을 지키기 위한 다이 고장률 상한은 1−0.97^(1/N)로 128다이에서 2.4×10⁻⁴, 1,024다이에서 3.0×10⁻⁵입니다. 8배 엄격해진 것입니다. 칩 면적이 커질수록 수율이 떨어지는 포아송 모델과 같은 구조이며, 다이 고장률 개선은 기술적 한계에 접근하고 있습니다. 해법은 다이가 아니라 SSD 계층에 있습니다. 단일 다이 고장을 허용하면 상한이 p에서 p² 차수로 완화되기 때문입니다(독립 고장 모델, 오른쪽 차트의 점선). 첫째, 다이 패리티: 슈퍼페이지를 여러 다이에 걸쳐 구성하고 패리티 다이에 XOR를 저장해 단일 다이 고장을 복구합니다(Micron RAIN, Cai 외 논문). 비용은 패리티 다이 용량이며 다이 수가 늘수록 스트라이프 설계를 재최적화해야 합니다. 둘째, 여분 다이·다이 은퇴·감량 운영: 고장 다이를 감지해 데이터를 재배치하고 고장 다이를 제외한 채 운영합니다. 삼성 PM1733의 Fail-in-Place가 플레인 4GB·다이 8GB 감량 운영으로 이를 상용화했습니다. 비용은 예비 용량과 감량 시 고객 용량 계약 조건입니다. 셋째, 텔레메트리·사전 예측: 다이별 RBER 추이·XOR 복구 횟수·리드 리트라이로 징후를 감지해 사전 은퇴시킵니다. OCP SMART Cloud Health 로그의 XOR 복구 카운트가 표준 필드입니다. 호스트·플랫폼은 관측과 수용만 합니다. SSD가 노출한 지표를 관측하고(OCP SMART C0), 감량 운영을 플랫폼이 수용하며(Microsoft Hyrax), 드라이브 간 소거 부호가 SSD 단위 고장을 흡수합니다. 다이 고장의 해결 주체는 SSD이고 호스트 협력은 규격에 한정됩니다. 삼성 과제는 1,024다이급에서 패리티·예비 비율을 FFR과 용량 오버헤드 사이에서 재최적화하고, FIP 감량 정책과 텔레메트리 필드를 OCP에 규격으로 제안하며, 다이 고장 예측 모델을 6장의 수명 보증과 연결하는 것입니다. 결론: 이 축은 SSD 안에서 닫히고 호스트에는 지표만 제공합니다. 그러나 둘째 축 DWPD는 SSD 안에서 닫히지 않았고, 어느 계층이 닫을 수 있는지가 3장입니다. 근거는 소스 §9 F41~F47, 고장률 상한은 독립 고장 모델입니다.</a:t>
+              <a:t>2장은 신뢰성 축, 고용량화가 낳는 첫째 축입니다. 3장의 내구성 축과 구조는 같지만 해결 주체가 다릅니다. 요구는 JESD218 기능 고장률 FFR 3% 이하로 고정인데, SSD당 NAND 다이 수는 S3700 800GB 128개(2012)에서 Kioxia LC9 245TB 1,024개(2025, 2Tb 다이 32단 스택 32패키지)로 8배 늘었습니다. 보호가 없으면 SSD 고장률은 다이 수 N에 비례하므로, 같은 FFR을 지키기 위한 다이 고장률 상한은 1−0.97^(1/N)로 128다이에서 2.4×10⁻⁴, 1,024다이에서 3.0×10⁻⁵입니다. 8배 엄격해진 것입니다. 칩 면적이 커질수록 수율이 떨어지는 포아송 모델과 같은 구조이며, 다이 고장률 개선은 기술적 한계에 접근하고 있습니다. 해법은 다이가 아니라 SSD 계층에 있습니다. 단일 다이 고장을 허용하면 상한이 p에서 p² 차수로 완화되기 때문입니다(독립 고장 모델, 오른쪽 차트의 점선). 첫째, 다이 패리티: 슈퍼페이지를 여러 다이에 걸쳐 구성하고 패리티 다이에 XOR를 저장해 단일 다이 고장을 복구합니다(Micron RAIN, Cai 외 논문). 비용은 패리티 다이 용량이며 다이 수가 늘수록 스트라이프 설계를 재최적화해야 합니다. 둘째, 여분 다이·다이 은퇴·감량 운영: 고장 다이를 감지해 데이터를 재배치하고 고장 다이를 제외한 채 운영합니다. 삼성 PM1733의 Fail-in-Place가 플레인 4GB·다이 8GB 감량 운영으로 이를 상용화했습니다. 비용은 예비 용량과 감량 시 고객 용량 계약 조건입니다. 셋째, 텔레메트리·사전 예측: 다이별 RBER 추이·XOR 복구 횟수·리드 리트라이로 징후를 감지해 사전 은퇴시킵니다. OCP SMART Cloud Health 로그의 XOR 복구 카운트가 표준 필드입니다. 호스트·플랫폼은 관측과 수용만 합니다. SSD가 노출한 지표를 관측하고(OCP SMART C0), 감량 운영을 플랫폼이 수용하며(Microsoft Hyrax), 드라이브 간 소거 부호가 SSD 단위 고장을 흡수합니다. 다이 고장의 해결 주체는 SSD이고 호스트 협력은 규격에 한정됩니다. 삼성 과제는 1,024다이급에서 패리티·예비 비율을 FFR과 용량 오버헤드 사이에서 재최적화하고, FIP 감량 정책과 텔레메트리 필드를 OCP에 규격으로 제안하며, 다이 고장 예측 모델을 6장의 수명 보증과 연결하는 것입니다. 결론: 이 축은 SSD 내부에서 충족되고 호스트에는 지표만 제공합니다. 그러나 둘째 축 DWPD는 SSD 내부에서 충족되지 않았고, 어느 계층이 충족할 수 있는지가 3장입니다. 근거는 소스 §9 F41~F47, 고장률 상한은 독립 고장 모델입니다.</a:t>
             </a:r>
           </a:p>
         </p:txBody>
@@ -647,7 +647,7 @@
           <a:lstStyle/>
           <a:p>
             <a:r>
-              <a:t>3장은 이관 매트릭스입니다. 고용량 QLC의 DWPD 격차를 받아, 지금까지 단품이 못 푼 문제를 어느 계층이 풀어 왔는지의 경향을 보이고 호스트 시스템 수준 해법이 왜 필요한지를 세웁니다. 열은 이관 단계(요구 → 단품 지표 → SSD 계층의 보상 → 호스트·시스템 계층의 보상), 행은 내구성 축입니다. 산식 DWPD = P/E × (1+OP) ÷ WAF ÷ 365 × 년의 각 항은 결정 주체가 열과 대응합니다. 요구: 추론 캐시 계층 제품은 DWPD 1~3(TLC), UBER는 JESD218 기준으로 고정입니다. 단품: P/E 사이클은 SLC 30K~100K에서 QLC 100~1K로 100배 감소, RBER은 약 백만 배 상승했고 셀은 시간에 따라 변하는 산포를 단독으로 보정하지 못합니다. SSD 계층: 1단계 컨트롤러 ECC(1비트/512B → LDPC 120비트/KB, 60배)는 UBER 요구를 충족해 완결됐습니다. 2단계 SSD 단독 워크로드 최적화(2014~2019: Multi-stream·AutoStream·FTL 핫/콜드 추정·NVMe IO 결정성)는 QoS·성능은 개선했으나 데이터 수명을 SSD가 감지할 수 없어 실 워크로드 WAF는 3 수준에 머물렀고, 정격 DWPD는 17에서 0.4로 내려왔습니다. 호스트·시스템 계층: 3단계 호스트 공동 설계는 호스트가 데이터 수명을 지정해 WAF를 약 3에서 약 1로 낮춥니다. 범용 랜덤 워크로드 실측(삼성·NVM Express, 50% 사용률)과 CacheLib 실측(3.22 → 1.03)이 근거이고, 데이터베이스 영역에서는 호스트 쓰기 패턴만으로 SSD WAF 1을 보장한 VLDB 2026 연구가 있습니다. 다만 KV 캐시 워크로드의 FDP WAF 실측은 공개 문헌에 없으므로 이 장의 주장은 검증할 가설이며, 4장 Phase 2 실측이 그 검증입니다. 하단 지렛대 스트립이 이 장의 핵심 정정입니다. 호스트 배치 하나로는 격차가 닫히지 않습니다. WAF 지렛대는 유효 DWPD 약 2.9배이고, 동급 비교 격차는 2~10배이므로 다이 세대(P/E), OP, SLC 캐시·쓰기 정형, 보증연수·TBW 기준, 워크로드 재정의(어드미션·TLC 혼합 계층)와 결합해야 요구에 도달합니다. 이 축들은 모두 병행 중이며 본 보고는 호스트 축만 다룹니다. 호스트·고객 쪽 지렛대가 다수라는 점이 공동 설계의 근거입니다. 결론: 호스트 공동 설계는 QLC DWPD의 남은 지렛대이며, 다른 축과 결합해 격차를 닫습니다. 신뢰성 축(다이 수·고장률)은 2장에서 보였듯 SSD 안에서 닫히지만, DWPD 축의 남은 지렛대는 SSD 밖 호스트가 쥐고 있습니다. 그래서 고객 협업과 새로운 역량이 필요하고, 그 역량이 4장입니다. 근거 등급은 보고서 부록 A F28~F54에 있습니다.</a:t>
+              <a:t>3장은 이관 매트릭스입니다. 고용량 QLC의 DWPD 격차를 받아, 지금까지 단품이 못 푼 문제를 어느 계층이 풀어 왔는지의 경향을 보이고 호스트 시스템 수준 해법이 왜 필요한지를 세웁니다. 열은 이관 단계(요구 → 단품 지표 → SSD 계층의 보상 → 호스트·시스템 계층의 보상), 행은 내구성 축입니다. 산식 DWPD = P/E × (1+OP) ÷ WAF ÷ 365 × 년의 각 항은 결정 주체가 열과 대응합니다. 요구: 추론 캐시 계층 제품은 DWPD 1~3(TLC), UBER는 JESD218 기준으로 고정입니다. 단품: P/E 사이클은 SLC 30K~100K에서 QLC 100~1K로 100배 감소, RBER은 약 백만 배 상승했고 셀은 시간에 따라 변하는 산포를 단독으로 보정하지 못합니다. SSD 계층: 1단계 컨트롤러 ECC(1비트/512B → LDPC 120비트/KB, 60배)는 UBER 요구를 충족해 완결됐습니다. 2단계 SSD 단독 워크로드 최적화(2014~2019: Multi-stream·AutoStream·FTL 핫/콜드 추정·NVMe IO 결정성)는 QoS·성능은 개선했으나 데이터 수명을 SSD가 감지할 수 없어 실 워크로드 WAF는 3 수준에 머물렀고, 정격 DWPD는 17에서 0.4로 내려왔습니다. 호스트·시스템 계층: 3단계 호스트 공동 설계는 호스트가 데이터 수명을 지정해 WAF를 약 3에서 약 1로 낮춥니다. 범용 랜덤 워크로드 실측(삼성·NVM Express, 50% 사용률)과 CacheLib 실측(3.22 → 1.03)이 근거이고, 데이터베이스 영역에서는 호스트 쓰기 패턴만으로 SSD WAF 1을 보장한 VLDB 2026 연구가 있습니다. 다만 KV 캐시 워크로드의 FDP WAF 실측은 공개 문헌에 없으므로 이 장의 주장은 검증할 가설이며, 4장 Phase 2 실측이 그 검증입니다. 하단 격차 축소 변수 스트립이 이 장의 핵심 정정입니다. 호스트 배치 하나로는 격차가 해소되지 않습니다. WAF 변수는 유효 DWPD 약 2.9배이고, 동급 비교 격차는 2~10배이므로 다이 세대(P/E), OP, SLC 캐시·쓰기 정형, 보증연수·TBW 기준, 워크로드 재정의(어드미션·TLC 혼합 계층)와 결합해야 요구에 도달합니다. 이 축들은 모두 병행 중이며 본 보고는 호스트 축만 다룹니다. 호스트·고객 쪽 변수가 다수라는 점이 공동 설계의 근거입니다. 결론: 호스트 공동 설계는 QLC DWPD의 잔여 변수이며, 다른 축과 결합해 격차를 줄입니다. 신뢰성 축(다이 수·고장률)은 2장에서 보였듯 SSD 내부에서 충족되지만, DWPD 축의 잔여 변수 WAF는 SSD 밖 호스트가 결정합니다. 그래서 고객 협업과 새로운 역량이 필요하고, 그 역량이 4장입니다. 근거 등급은 보고서 부록 A F28~F54에 있습니다.</a:t>
             </a:r>
           </a:p>
         </p:txBody>
@@ -5096,7 +5096,7 @@
                 <a:latin typeface="Arial"/>
                 <a:ea typeface="Arial"/>
               </a:rPr>
-              <a:t>AI 추론 수요는 고용량 QLC에 높은 DWPD를 요구하며, 이를 충족할 해법이 필요한 상황입니다</a:t>
+              <a:t>AI 추론 수요는 QLC에 고용량·1~3 DWPD를 요구하며, 신뢰성·내구성 두 축의 해법이 필요합니다</a:t>
             </a:r>
           </a:p>
         </p:txBody>
@@ -12342,7 +12342,7 @@
                 <a:latin typeface="Arial"/>
                 <a:ea typeface="Arial"/>
               </a:rPr>
-              <a:t>다이 수 8배 증가로 다이 고장률 요구가 8배 엄격해졌지만, 이 축은 SSD 내부 해법으로 닫힙니다</a:t>
+              <a:t>첫째 축 신뢰성은 다이 수 8배 증가로 요구가 8배 엄격해지나, SSD 내부 설계로 충족됩니다</a:t>
             </a:r>
           </a:p>
         </p:txBody>
@@ -12382,7 +12382,7 @@
                 <a:latin typeface="Arial"/>
                 <a:ea typeface="Arial"/>
               </a:rPr>
-              <a:t>고용량화의 첫째 축입니다. 다이 패리티·여분 다이·감량 운영·텔레메트리 예측으로 SSD 설계 안에서 대응하고, 호스트에는 관측 지표만 제공합니다.</a:t>
+              <a:t>요구 FFR ≤ 3%는 고정인 반면 SSD당 다이 수는 128 → 1,024로 늘었습니다. 호스트에는 관측 지표만 제공합니다.</a:t>
             </a:r>
           </a:p>
         </p:txBody>
@@ -14209,7 +14209,7 @@
                 <a:latin typeface="Arial"/>
                 <a:ea typeface="Arial"/>
               </a:rPr>
-              <a:t>이 축은 SSD 내부에서 닫히지만, 둘째 축 DWPD는 SSD 안에서 닫히지 않았습니다</a:t>
+              <a:t>이 축은 SSD 내부에서 충족되지만, 둘째 축 내구성(DWPD)은 SSD 내부에서 충족되지 않았습니다</a:t>
             </a:r>
           </a:p>
         </p:txBody>
@@ -15686,7 +15686,7 @@
                 <a:latin typeface="Arial"/>
                 <a:ea typeface="Arial"/>
               </a:rPr>
-              <a:t>요구는 고정, 단품은 악화, 보상은 상위 계층으로: 남은 지렛대 WAF는 호스트에 있습니다</a:t>
+              <a:t>둘째 축 내구성은 SSD 단독 최적화로 WAF ≈3에 머물렀고, 잔여 변수 WAF는 호스트가 결정합니다</a:t>
             </a:r>
           </a:p>
         </p:txBody>
@@ -15726,7 +15726,7 @@
                 <a:latin typeface="Arial"/>
                 <a:ea typeface="Arial"/>
               </a:rPr>
-              <a:t>신뢰성과 달리 DWPD 격차는 SSD 안에서 닫히지 않았습니다. SSD 단독 최적화는 QoS·성능은 개선했으나 WAF는 낮추지 못했습니다.</a:t>
+              <a:t>요구(UBER·DWPD)는 고정, 단품 지표(RBER·P/E)는 악화, 격차는 상위 계층이 보상해 왔습니다. 1단계 ECC 완결, 2단계 단독 최적화는 부분 성공.</a:t>
             </a:r>
           </a:p>
         </p:txBody>
@@ -18740,7 +18740,7 @@
                 <a:latin typeface="Arial"/>
                 <a:ea typeface="Arial"/>
               </a:rPr>
-              <a:t>호스트가 쥔 남은 지렛대(×2.9) · KV 캐시 실측은 Phase 2 검증 대상</a:t>
+              <a:t>호스트가 결정하는 잔여 변수(유효 DWPD ×2.9) · KV 캐시 실측은 Phase 2 검증 대상</a:t>
             </a:r>
           </a:p>
         </p:txBody>
@@ -18868,8 +18868,8 @@
                 <a:latin typeface="Arial"/>
                 <a:ea typeface="Arial"/>
               </a:rPr>
-              <a:t>격차를 닫는
-지렛대</a:t>
+              <a:t>격차 축소
+변수</a:t>
             </a:r>
           </a:p>
         </p:txBody>
@@ -19944,7 +19944,7 @@
                 <a:latin typeface="Arial"/>
                 <a:ea typeface="Arial"/>
               </a:rPr>
-              <a:t>호스트 배치 하나로는 격차(동급 비교 2~10배)가 닫히지 않습니다. WAF ×2.9는 다이 세대·OP·보증연수·워크로드 재정의와 결합해 요구에 도달하며, 이 중 호스트·고객 쪽 지렛대가 다수라는 점이 공동 설계의 근거입니다</a:t>
+              <a:t>호스트 배치 하나로는 격차(동급 비교 2~10배)가 해소되지 않습니다. WAF ×2.9는 다이 세대·OP·보증연수·워크로드 재정의와 결합해 요구에 도달하며, 이 중 호스트·고객 측 변수가 다수라는 점이 공동 설계의 근거입니다</a:t>
             </a:r>
           </a:p>
         </p:txBody>
@@ -20068,7 +20068,7 @@
                 <a:latin typeface="Arial"/>
                 <a:ea typeface="Arial"/>
               </a:rPr>
-              <a:t>요구는 고정, 단품은 악화, 격차는 상위 계층이 보상해 왔고, 남은 지렛대 WAF는 SSD 밖 호스트에 있습니다.</a:t>
+              <a:t>요구는 고정, 단품은 악화, 격차는 상위 계층이 보상해 왔고, 잔여 변수 WAF는 SSD 밖 호스트가 결정합니다.</a:t>
             </a:r>
           </a:p>
           <a:p>
@@ -20085,7 +20085,7 @@
                 <a:latin typeface="Arial"/>
                 <a:ea typeface="Arial"/>
               </a:rPr>
-              <a:t>다이 세대·OP·보증연수와 병행하되, 이 지렛대는 고객 협업과 새로운 역량을 요구합니다</a:t>
+              <a:t>다이 세대·OP·보증연수와 병행하되, 이 변수는 고객 협업과 새로운 역량을 요구합니다</a:t>
             </a:r>
           </a:p>
         </p:txBody>
@@ -21560,7 +21560,7 @@
                 <a:latin typeface="Arial"/>
                 <a:ea typeface="Arial"/>
               </a:rPr>
-              <a:t>남은 지렛대 WAF는 호스트 배치에 있으므로, 고객 시스템까지 3단계로 역량을 확장합니다</a:t>
+              <a:t>따라서 WAF 저감은 고객 시스템까지 3단계 공동 설계 역량을 요구하며, 삼성은 현재 1단계입니다</a:t>
             </a:r>
           </a:p>
         </p:txBody>
@@ -26853,7 +26853,7 @@
                 <a:latin typeface="Arial"/>
                 <a:ea typeface="Arial"/>
               </a:rPr>
-              <a:t>FDE 상주는 워크로드를 여는 고객에 집중하고, 그 외 고객은 업스트림·규격 채널로 협업합니다</a:t>
+              <a:t>3단계 진입은 워크로드를 개방하는 고객에 FDE를 집중하고, 그 외는 업스트림·규격으로 협업합니다</a:t>
             </a:r>
           </a:p>
         </p:txBody>
@@ -31782,7 +31782,7 @@
                 <a:latin typeface="Arial"/>
                 <a:ea typeface="Arial"/>
               </a:rPr>
-              <a:t>유효 DWPD 보증은 워크로드 리스크를 안으므로 텔레메트리 기반 조건부 보증으로 설계합니다</a:t>
+              <a:t>유효 DWPD 보증은 WAF 변동 리스크를 수반하므로 텔레메트리 기반 조건부 보증으로 설계합니다</a:t>
             </a:r>
           </a:p>
         </p:txBody>

--- a/outputs/presentation/qlc-ssd-strategy.pptx
+++ b/outputs/presentation/qlc-ssd-strategy.pptx
@@ -787,7 +787,7 @@
           <a:lstStyle/>
           <a:p>
             <a:r>
-              <a:t>5장은 실행입니다. 4장의 3단계에 진입하는 수단을 고객 유형별로 나누고, 개발실 내부에서 실행 가능한 범위만 담았습니다. 리드의 인용은 송용호 AX/PI센터장의 발언입니다. FDE 상주는 모든 고객에 적용하지 않습니다. 조건은 세 가지입니다. 트레이스와 KV 수명 정책 접근을 허용하는가, 캐시 관리자 코드를 자체 운영하는가, 물량과 규격 파급력이 있는가. 이 조건을 만족하는 AI 랩(Anthropic·OpenAI)과 NVIDIA 생태계(CMX·Dynamo KVBM·NIXL)에 Pod 3~5명을 집중합니다. AI 랩은 전략적 협약의 공동 설계 조항으로 접근하며 Micron↔Anthropic이 선례이고, 캐시 관리자 정책을 함께 정의해 수명 보증 레퍼런스를 확보합니다. NVIDIA 생태계는 CMX 첫 공급 관계를 활용해 KVBM 플러그인을 메인라인에 머지하고 생태계 기본 디바이스가 됩니다. 하이퍼스케일러는 보안·중립성 때문에 내부 코드 상주가 불가하므로 OCP 규격과 업스트림(CacheLib·XFS·커널) 채널로 협업합니다. OEM·네오클라우드는 자체 캐시 스택이 없으므로 레퍼런스 스택(vLLM + LMCache + 삼성 QLC)과 공용 TCO 모델로 확산합니다. 개발실 내부 실행은 별도 투자 없이 개발 자원 재배치로 합니다. 조직: 시스템 소프트웨어 조직 강화, 개발실 소속 Co-Design Pod, 미주 법인 협업. 인사: 고객 코드를 읽고 고칠 수 있는 시스템 SW 전문가 채용·양성(정원 내), 본사 엔지니어 상주 로테이션, 성과 평가는 머지·실측 공개·디자인인. 문화: 오픈소스 메인테이너 배출, 업스트림 우선, KV 캐시 실측 업계 최초 공개. 자회사 설립, 별도 보상 체계, 지분 참여, 결정 요청은 위키에만 두고 덱에서는 제외했습니다. 단계별 통과 조건은 90일(등대 고객 트레이스 확보·KV 캐시 실측 공개·플러그인 PR), 12개월(메인라인 머지·유효 DWPD 1 이상 실증·조건부 보증 초안), 2027년 상반기(디자인인 1사·협약 공동 설계 조항 제안·레퍼런스 스택 공개)이며 각 단계의 증명이 다음 단계의 승인 근거입니다. 판돈은 락인으로 얻는 점유율입니다. 수요 모델에서 2030년 추론 캐시 계층 350EB 중 QLC는 호스트 협력이 성립할 때 조건부 상방 175EB(50%)이고, 성립하지 않으면 TLC가 유지됩니다. 디자인인 1사당 점유율 변화는 사내 수치로 확인합니다. 비용은 Pod 인력 3~5명 × 1~2사 재배치와 정원 내 채용이며 별도 투자가 없습니다. 실행의 마지막 리스크인 수명 보증·SLA가 6장입니다.</a:t>
+              <a:t>5장은 실행입니다. 3단계 역량을 어떻게 얻느냐, 즉 고객 시스템 안으로 들어가는 두 수단을 그림 하나로 보입니다. 왼쪽은 삼성 개발실이 제공하는 것이고, 오른쪽은 고객 시스템의 계층이며, 가운데 두 화살표가 주고받는 관계입니다. 위쪽 화살표 ① FDE 상주는 삼성이 보내는 것입니다. 상주 엔지니어가 고객 시스템 안에서 요구를 코드로 구현하고, 업스트림에 기여하며, 워크로드 실측을 공개합니다. 아래쪽 화살표 ② 접근권 확보는 삼성이 받는 것입니다. 워크로드 트레이스, KV 수명 정책, 규격 접근권이며 계약 시한은 2027년 상반기입니다. 공급이 완화되기 전에 락인을 걸어야 하기 때문입니다. 가운데 왼쪽 카드가 고객 선별입니다. FDE를 모든 고객에 보낼 수는 없으므로 세 조건으로 거릅니다. 트레이스 접근을 허용하는가, 캐시 관리자 코드를 자체 운영하는가, 물량과 규격에 파급력이 있는가. AI 랩과 NVIDIA 생태계가 조건을 충족하므로 FDE를 상주시키고, 하이퍼스케일러는 보안과 중립성 때문에 내부 코드 상주가 불가하므로 업스트림과 OCP 규격으로, OEM과 네오클라우드는 레퍼런스 스택으로 넓힙니다. 오른쪽 카드가 선례입니다. Palantir의 FDE는 고객 현장에 상주해 요구를 코드로 구현하고 성과로 평가받는 모델이고, 고객 락인의 동력으로 평가받아 Anthropic과 OpenAI가 시장 진입 모델로 채택했습니다. Micron과 Anthropic의 전략적 협약은 공동 설계, 다년 공급, 운영 통합, 자본을 한 계약에 결합해 워크로드와 규격 접근권을 확보한 사례입니다. 중요한 것은 삼성과 SK의 Anthropic 공급 계약에는 공동 설계 조항이 없다는 점이고, 이것을 삼성이 먼저 제안하자는 것이 이 장의 요청입니다. 오른쪽 고객 시스템 그림에서 삼성이 지금 닿는 층은 SSD뿐입니다. FDE가 KV 캐시 관리자 층에 상주하고 I/O 라이브러리와 커널에 코드를 머지하면서 위로 올라갑니다. 하단 세 타일은 개발실 내부 실행입니다. 조직은 시스템 소프트웨어 조직 강화와 개발실 소속 Co-Design Pod, 인사는 고객 코드를 읽고 고치는 전문가 채용과 상주 로테이션, 문화는 오픈소스 메인테이너 배출과 KV 캐시 실측의 업계 최초 공개입니다. 자회사나 별도 보상 체계는 두지 않습니다. 마지막 줄이 통과 조건과 판돈입니다. 90일에 트레이스 확보와 실측 공개, 12개월에 메인라인 머지와 유효 DWPD 1 이상 실증과 WAF 급등 대응 시제품, 2027년 상반기에 디자인인 1사와 공동 설계 조항 제안입니다. 판돈은 락인으로 얻는 캐시 계층 점유율이고 비용은 개발실 개발 자원 재배치이며 별도 투자는 없습니다.</a:t>
             </a:r>
           </a:p>
         </p:txBody>
@@ -29048,1781 +29048,14 @@
       </p:sp>
       <p:sp>
         <p:nvSpPr>
-          <p:cNvPr id="32" name="TextBox 31"/>
-          <p:cNvSpPr txBox="1"/>
+          <p:cNvPr id="32" name="Rectangle 31"/>
+          <p:cNvSpPr/>
           <p:nvPr/>
         </p:nvSpPr>
         <p:spPr>
           <a:xfrm>
             <a:off x="722376" y="2560320"/>
-            <a:ext cx="10881360" cy="237744"/>
-          </a:xfrm>
-          <a:prstGeom prst="rect">
-            <a:avLst/>
-          </a:prstGeom>
-          <a:noFill/>
-        </p:spPr>
-        <p:txBody>
-          <a:bodyPr wrap="square" anchor="t" lIns="0" rIns="0" tIns="0" bIns="0">
-            <a:spAutoFit/>
-          </a:bodyPr>
-          <a:lstStyle/>
-          <a:p>
-            <a:pPr algn="l">
-              <a:lnSpc>
-                <a:spcPct val="112000"/>
-              </a:lnSpc>
-            </a:pPr>
-            <a:r>
-              <a:rPr sz="1350" b="1">
-                <a:solidFill>
-                  <a:srgbClr val="1428A0"/>
-                </a:solidFill>
-                <a:latin typeface="Arial"/>
-                <a:ea typeface="Arial"/>
-              </a:rPr>
-              <a:t>고객 선별 · 협업 채널</a:t>
-            </a:r>
-            <a:r>
-              <a:rPr sz="1000" b="0">
-                <a:solidFill>
-                  <a:srgbClr val="8A8A8A"/>
-                </a:solidFill>
-                <a:latin typeface="Arial"/>
-                <a:ea typeface="Arial"/>
-              </a:rPr>
-              <a:t>   FDE 상주 조건: ① 트레이스·KV 정책 접근 허용  ② 캐시 관리자 코드를 자체 운영  ③ 물량·규격 파급력</a:t>
-            </a:r>
-          </a:p>
-        </p:txBody>
-      </p:sp>
-      <p:sp>
-        <p:nvSpPr>
-          <p:cNvPr id="33" name="TextBox 32"/>
-          <p:cNvSpPr txBox="1"/>
-          <p:nvPr/>
-        </p:nvSpPr>
-        <p:spPr>
-          <a:xfrm>
-            <a:off x="795528" y="2889503"/>
-            <a:ext cx="2002536" cy="219456"/>
-          </a:xfrm>
-          <a:prstGeom prst="rect">
-            <a:avLst/>
-          </a:prstGeom>
-          <a:noFill/>
-        </p:spPr>
-        <p:txBody>
-          <a:bodyPr wrap="square" anchor="t" lIns="0" rIns="0" tIns="0" bIns="0">
-            <a:spAutoFit/>
-          </a:bodyPr>
-          <a:lstStyle/>
-          <a:p>
-            <a:pPr algn="l">
-              <a:lnSpc>
-                <a:spcPct val="112000"/>
-              </a:lnSpc>
-            </a:pPr>
-            <a:r>
-              <a:rPr sz="975" b="1">
-                <a:solidFill>
-                  <a:srgbClr val="8A8A8A"/>
-                </a:solidFill>
-                <a:latin typeface="Arial"/>
-                <a:ea typeface="Arial"/>
-              </a:rPr>
-              <a:t>고객 유형</a:t>
-            </a:r>
-          </a:p>
-        </p:txBody>
-      </p:sp>
-      <p:sp>
-        <p:nvSpPr>
-          <p:cNvPr id="34" name="TextBox 33"/>
-          <p:cNvSpPr txBox="1"/>
-          <p:nvPr/>
-        </p:nvSpPr>
-        <p:spPr>
-          <a:xfrm>
-            <a:off x="2944368" y="2889503"/>
-            <a:ext cx="1865376" cy="219456"/>
-          </a:xfrm>
-          <a:prstGeom prst="rect">
-            <a:avLst/>
-          </a:prstGeom>
-          <a:noFill/>
-        </p:spPr>
-        <p:txBody>
-          <a:bodyPr wrap="square" anchor="t" lIns="0" rIns="0" tIns="0" bIns="0">
-            <a:spAutoFit/>
-          </a:bodyPr>
-          <a:lstStyle/>
-          <a:p>
-            <a:pPr algn="l">
-              <a:lnSpc>
-                <a:spcPct val="112000"/>
-              </a:lnSpc>
-            </a:pPr>
-            <a:r>
-              <a:rPr sz="975" b="1">
-                <a:solidFill>
-                  <a:srgbClr val="8A8A8A"/>
-                </a:solidFill>
-                <a:latin typeface="Arial"/>
-                <a:ea typeface="Arial"/>
-              </a:rPr>
-              <a:t>워크로드 접근</a:t>
-            </a:r>
-          </a:p>
-        </p:txBody>
-      </p:sp>
-      <p:sp>
-        <p:nvSpPr>
-          <p:cNvPr id="35" name="TextBox 34"/>
-          <p:cNvSpPr txBox="1"/>
-          <p:nvPr/>
-        </p:nvSpPr>
-        <p:spPr>
-          <a:xfrm>
-            <a:off x="4956048" y="2889503"/>
-            <a:ext cx="2002536" cy="219456"/>
-          </a:xfrm>
-          <a:prstGeom prst="rect">
-            <a:avLst/>
-          </a:prstGeom>
-          <a:noFill/>
-        </p:spPr>
-        <p:txBody>
-          <a:bodyPr wrap="square" anchor="t" lIns="0" rIns="0" tIns="0" bIns="0">
-            <a:spAutoFit/>
-          </a:bodyPr>
-          <a:lstStyle/>
-          <a:p>
-            <a:pPr algn="l">
-              <a:lnSpc>
-                <a:spcPct val="112000"/>
-              </a:lnSpc>
-            </a:pPr>
-            <a:r>
-              <a:rPr sz="975" b="1">
-                <a:solidFill>
-                  <a:srgbClr val="8A8A8A"/>
-                </a:solidFill>
-                <a:latin typeface="Arial"/>
-                <a:ea typeface="Arial"/>
-              </a:rPr>
-              <a:t>협업 채널</a:t>
-            </a:r>
-          </a:p>
-        </p:txBody>
-      </p:sp>
-      <p:sp>
-        <p:nvSpPr>
-          <p:cNvPr id="36" name="TextBox 35"/>
-          <p:cNvSpPr txBox="1"/>
-          <p:nvPr/>
-        </p:nvSpPr>
-        <p:spPr>
-          <a:xfrm>
-            <a:off x="7104888" y="2889503"/>
-            <a:ext cx="1728216" cy="219456"/>
-          </a:xfrm>
-          <a:prstGeom prst="rect">
-            <a:avLst/>
-          </a:prstGeom>
-          <a:noFill/>
-        </p:spPr>
-        <p:txBody>
-          <a:bodyPr wrap="square" anchor="t" lIns="0" rIns="0" tIns="0" bIns="0">
-            <a:spAutoFit/>
-          </a:bodyPr>
-          <a:lstStyle/>
-          <a:p>
-            <a:pPr algn="l">
-              <a:lnSpc>
-                <a:spcPct val="112000"/>
-              </a:lnSpc>
-            </a:pPr>
-            <a:r>
-              <a:rPr sz="975" b="1">
-                <a:solidFill>
-                  <a:srgbClr val="8A8A8A"/>
-                </a:solidFill>
-                <a:latin typeface="Arial"/>
-                <a:ea typeface="Arial"/>
-              </a:rPr>
-              <a:t>삼성 방식</a:t>
-            </a:r>
-          </a:p>
-        </p:txBody>
-      </p:sp>
-      <p:sp>
-        <p:nvSpPr>
-          <p:cNvPr id="37" name="TextBox 36"/>
-          <p:cNvSpPr txBox="1"/>
-          <p:nvPr/>
-        </p:nvSpPr>
-        <p:spPr>
-          <a:xfrm>
-            <a:off x="8979407" y="2889503"/>
-            <a:ext cx="2551176" cy="219456"/>
-          </a:xfrm>
-          <a:prstGeom prst="rect">
-            <a:avLst/>
-          </a:prstGeom>
-          <a:noFill/>
-        </p:spPr>
-        <p:txBody>
-          <a:bodyPr wrap="square" anchor="t" lIns="0" rIns="0" tIns="0" bIns="0">
-            <a:spAutoFit/>
-          </a:bodyPr>
-          <a:lstStyle/>
-          <a:p>
-            <a:pPr algn="l">
-              <a:lnSpc>
-                <a:spcPct val="112000"/>
-              </a:lnSpc>
-            </a:pPr>
-            <a:r>
-              <a:rPr sz="975" b="1">
-                <a:solidFill>
-                  <a:srgbClr val="8A8A8A"/>
-                </a:solidFill>
-                <a:latin typeface="Arial"/>
-                <a:ea typeface="Arial"/>
-              </a:rPr>
-              <a:t>효과 극대화 포인트</a:t>
-            </a:r>
-          </a:p>
-        </p:txBody>
-      </p:sp>
-      <p:sp>
-        <p:nvSpPr>
-          <p:cNvPr id="38" name="Rectangle 37"/>
-          <p:cNvSpPr/>
-          <p:nvPr/>
-        </p:nvSpPr>
-        <p:spPr>
-          <a:xfrm>
-            <a:off x="722376" y="3145535"/>
-            <a:ext cx="10881360" cy="10972"/>
-          </a:xfrm>
-          <a:prstGeom prst="rect">
-            <a:avLst/>
-          </a:prstGeom>
-          <a:solidFill>
-            <a:srgbClr val="8A8A8A"/>
-          </a:solidFill>
-          <a:ln>
-            <a:noFill/>
-          </a:ln>
-          <a:effectLst/>
-        </p:spPr>
-        <p:style>
-          <a:lnRef idx="1">
-            <a:schemeClr val="accent1"/>
-          </a:lnRef>
-          <a:fillRef idx="3">
-            <a:schemeClr val="accent1"/>
-          </a:fillRef>
-          <a:effectRef idx="2">
-            <a:schemeClr val="accent1"/>
-          </a:effectRef>
-          <a:fontRef idx="minor">
-            <a:schemeClr val="lt1"/>
-          </a:fontRef>
-        </p:style>
-        <p:txBody>
-          <a:bodyPr rtlCol="0" anchor="ctr"/>
-          <a:lstStyle/>
-          <a:p>
-            <a:pPr algn="ctr"/>
-          </a:p>
-        </p:txBody>
-      </p:sp>
-      <p:sp>
-        <p:nvSpPr>
-          <p:cNvPr id="39" name="Rectangle 38"/>
-          <p:cNvSpPr/>
-          <p:nvPr/>
-        </p:nvSpPr>
-        <p:spPr>
-          <a:xfrm>
-            <a:off x="722376" y="3255263"/>
-            <a:ext cx="10881360" cy="822960"/>
-          </a:xfrm>
-          <a:prstGeom prst="rect">
-            <a:avLst/>
-          </a:prstGeom>
-          <a:solidFill>
-            <a:srgbClr val="F4F6FC"/>
-          </a:solidFill>
-          <a:ln>
-            <a:noFill/>
-          </a:ln>
-          <a:effectLst/>
-        </p:spPr>
-        <p:style>
-          <a:lnRef idx="1">
-            <a:schemeClr val="accent1"/>
-          </a:lnRef>
-          <a:fillRef idx="3">
-            <a:schemeClr val="accent1"/>
-          </a:fillRef>
-          <a:effectRef idx="2">
-            <a:schemeClr val="accent1"/>
-          </a:effectRef>
-          <a:fontRef idx="minor">
-            <a:schemeClr val="lt1"/>
-          </a:fontRef>
-        </p:style>
-        <p:txBody>
-          <a:bodyPr rtlCol="0" anchor="ctr"/>
-          <a:lstStyle/>
-          <a:p>
-            <a:pPr algn="ctr"/>
-          </a:p>
-        </p:txBody>
-      </p:sp>
-      <p:sp>
-        <p:nvSpPr>
-          <p:cNvPr id="40" name="Rectangle 39"/>
-          <p:cNvSpPr/>
-          <p:nvPr/>
-        </p:nvSpPr>
-        <p:spPr>
-          <a:xfrm>
-            <a:off x="722376" y="3255263"/>
-            <a:ext cx="54864" cy="822960"/>
-          </a:xfrm>
-          <a:prstGeom prst="rect">
-            <a:avLst/>
-          </a:prstGeom>
-          <a:solidFill>
-            <a:srgbClr val="1428A0"/>
-          </a:solidFill>
-          <a:ln>
-            <a:noFill/>
-          </a:ln>
-          <a:effectLst/>
-        </p:spPr>
-        <p:style>
-          <a:lnRef idx="1">
-            <a:schemeClr val="accent1"/>
-          </a:lnRef>
-          <a:fillRef idx="3">
-            <a:schemeClr val="accent1"/>
-          </a:fillRef>
-          <a:effectRef idx="2">
-            <a:schemeClr val="accent1"/>
-          </a:effectRef>
-          <a:fontRef idx="minor">
-            <a:schemeClr val="lt1"/>
-          </a:fontRef>
-        </p:style>
-        <p:txBody>
-          <a:bodyPr rtlCol="0" anchor="ctr"/>
-          <a:lstStyle/>
-          <a:p>
-            <a:pPr algn="ctr"/>
-          </a:p>
-        </p:txBody>
-      </p:sp>
-      <p:sp>
-        <p:nvSpPr>
-          <p:cNvPr id="41" name="TextBox 40"/>
-          <p:cNvSpPr txBox="1"/>
-          <p:nvPr/>
-        </p:nvSpPr>
-        <p:spPr>
-          <a:xfrm>
-            <a:off x="832104" y="3310127"/>
-            <a:ext cx="1929384" cy="731520"/>
-          </a:xfrm>
-          <a:prstGeom prst="rect">
-            <a:avLst/>
-          </a:prstGeom>
-          <a:noFill/>
-        </p:spPr>
-        <p:txBody>
-          <a:bodyPr wrap="square" anchor="ctr" lIns="0" rIns="0" tIns="0" bIns="0">
-            <a:spAutoFit/>
-          </a:bodyPr>
-          <a:lstStyle/>
-          <a:p>
-            <a:pPr algn="l">
-              <a:lnSpc>
-                <a:spcPct val="104000"/>
-              </a:lnSpc>
-            </a:pPr>
-            <a:r>
-              <a:rPr sz="1125" b="1">
-                <a:solidFill>
-                  <a:srgbClr val="1428A0"/>
-                </a:solidFill>
-                <a:latin typeface="Arial"/>
-                <a:ea typeface="Arial"/>
-              </a:rPr>
-              <a:t>AI 랩</a:t>
-            </a:r>
-          </a:p>
-          <a:p>
-            <a:pPr algn="l">
-              <a:lnSpc>
-                <a:spcPct val="104000"/>
-              </a:lnSpc>
-            </a:pPr>
-            <a:r>
-              <a:rPr sz="900" b="0">
-                <a:solidFill>
-                  <a:srgbClr val="555555"/>
-                </a:solidFill>
-                <a:latin typeface="Arial"/>
-                <a:ea typeface="Arial"/>
-              </a:rPr>
-              <a:t>Anthropic · OpenAI</a:t>
-            </a:r>
-          </a:p>
-        </p:txBody>
-      </p:sp>
-      <p:sp>
-        <p:nvSpPr>
-          <p:cNvPr id="42" name="TextBox 41"/>
-          <p:cNvSpPr txBox="1"/>
-          <p:nvPr/>
-        </p:nvSpPr>
-        <p:spPr>
-          <a:xfrm>
-            <a:off x="2980944" y="3310127"/>
-            <a:ext cx="1792224" cy="731520"/>
-          </a:xfrm>
-          <a:prstGeom prst="rect">
-            <a:avLst/>
-          </a:prstGeom>
-          <a:noFill/>
-        </p:spPr>
-        <p:txBody>
-          <a:bodyPr wrap="square" anchor="ctr" lIns="0" rIns="0" tIns="0" bIns="0">
-            <a:spAutoFit/>
-          </a:bodyPr>
-          <a:lstStyle/>
-          <a:p>
-            <a:pPr algn="l">
-              <a:lnSpc>
-                <a:spcPct val="104000"/>
-              </a:lnSpc>
-            </a:pPr>
-            <a:r>
-              <a:rPr sz="950" b="0">
-                <a:solidFill>
-                  <a:srgbClr val="555555"/>
-                </a:solidFill>
-                <a:latin typeface="Arial"/>
-                <a:ea typeface="Arial"/>
-              </a:rPr>
-              <a:t>협약 시 트레이스 · KV 수명 정책 공유</a:t>
-            </a:r>
-          </a:p>
-        </p:txBody>
-      </p:sp>
-      <p:sp>
-        <p:nvSpPr>
-          <p:cNvPr id="43" name="TextBox 42"/>
-          <p:cNvSpPr txBox="1"/>
-          <p:nvPr/>
-        </p:nvSpPr>
-        <p:spPr>
-          <a:xfrm>
-            <a:off x="4992624" y="3310127"/>
-            <a:ext cx="1929384" cy="731520"/>
-          </a:xfrm>
-          <a:prstGeom prst="rect">
-            <a:avLst/>
-          </a:prstGeom>
-          <a:noFill/>
-        </p:spPr>
-        <p:txBody>
-          <a:bodyPr wrap="square" anchor="ctr" lIns="0" rIns="0" tIns="0" bIns="0">
-            <a:spAutoFit/>
-          </a:bodyPr>
-          <a:lstStyle/>
-          <a:p>
-            <a:pPr algn="l">
-              <a:lnSpc>
-                <a:spcPct val="104000"/>
-              </a:lnSpc>
-            </a:pPr>
-            <a:r>
-              <a:rPr sz="950" b="0">
-                <a:solidFill>
-                  <a:srgbClr val="555555"/>
-                </a:solidFill>
-                <a:latin typeface="Arial"/>
-                <a:ea typeface="Arial"/>
-              </a:rPr>
-              <a:t>전략적 협약(SCA)의</a:t>
-            </a:r>
-          </a:p>
-          <a:p>
-            <a:pPr algn="l">
-              <a:lnSpc>
-                <a:spcPct val="104000"/>
-              </a:lnSpc>
-            </a:pPr>
-            <a:r>
-              <a:rPr sz="950" b="0">
-                <a:solidFill>
-                  <a:srgbClr val="555555"/>
-                </a:solidFill>
-                <a:latin typeface="Arial"/>
-                <a:ea typeface="Arial"/>
-              </a:rPr>
-              <a:t>공동 설계 조항</a:t>
-            </a:r>
-          </a:p>
-        </p:txBody>
-      </p:sp>
-      <p:sp>
-        <p:nvSpPr>
-          <p:cNvPr id="44" name="TextBox 43"/>
-          <p:cNvSpPr txBox="1"/>
-          <p:nvPr/>
-        </p:nvSpPr>
-        <p:spPr>
-          <a:xfrm>
-            <a:off x="7141464" y="3310127"/>
-            <a:ext cx="1655063" cy="731520"/>
-          </a:xfrm>
-          <a:prstGeom prst="rect">
-            <a:avLst/>
-          </a:prstGeom>
-          <a:noFill/>
-        </p:spPr>
-        <p:txBody>
-          <a:bodyPr wrap="square" anchor="ctr" lIns="0" rIns="0" tIns="0" bIns="0">
-            <a:spAutoFit/>
-          </a:bodyPr>
-          <a:lstStyle/>
-          <a:p>
-            <a:pPr algn="l">
-              <a:lnSpc>
-                <a:spcPct val="104000"/>
-              </a:lnSpc>
-            </a:pPr>
-            <a:r>
-              <a:rPr sz="1000" b="1">
-                <a:solidFill>
-                  <a:srgbClr val="1428A0"/>
-                </a:solidFill>
-                <a:latin typeface="Arial"/>
-                <a:ea typeface="Arial"/>
-              </a:rPr>
-              <a:t>FDE 상주</a:t>
-            </a:r>
-          </a:p>
-          <a:p>
-            <a:pPr algn="l">
-              <a:lnSpc>
-                <a:spcPct val="104000"/>
-              </a:lnSpc>
-            </a:pPr>
-            <a:r>
-              <a:rPr sz="1000" b="1">
-                <a:solidFill>
-                  <a:srgbClr val="1428A0"/>
-                </a:solidFill>
-                <a:latin typeface="Arial"/>
-                <a:ea typeface="Arial"/>
-              </a:rPr>
-              <a:t>Pod 3~5명</a:t>
-            </a:r>
-          </a:p>
-        </p:txBody>
-      </p:sp>
-      <p:sp>
-        <p:nvSpPr>
-          <p:cNvPr id="45" name="TextBox 44"/>
-          <p:cNvSpPr txBox="1"/>
-          <p:nvPr/>
-        </p:nvSpPr>
-        <p:spPr>
-          <a:xfrm>
-            <a:off x="9015983" y="3310127"/>
-            <a:ext cx="2478024" cy="731520"/>
-          </a:xfrm>
-          <a:prstGeom prst="rect">
-            <a:avLst/>
-          </a:prstGeom>
-          <a:noFill/>
-        </p:spPr>
-        <p:txBody>
-          <a:bodyPr wrap="square" anchor="ctr" lIns="0" rIns="0" tIns="0" bIns="0">
-            <a:spAutoFit/>
-          </a:bodyPr>
-          <a:lstStyle/>
-          <a:p>
-            <a:pPr algn="l">
-              <a:lnSpc>
-                <a:spcPct val="104000"/>
-              </a:lnSpc>
-            </a:pPr>
-            <a:r>
-              <a:rPr sz="900" b="0">
-                <a:solidFill>
-                  <a:srgbClr val="555555"/>
-                </a:solidFill>
-                <a:latin typeface="Arial"/>
-                <a:ea typeface="Arial"/>
-              </a:rPr>
-              <a:t>Micron↔Anthropic 선례 · 캐시 관리자 정책을 함께 정의해 수명 보증 레퍼런스 확보 · 로고 효과</a:t>
-            </a:r>
-          </a:p>
-        </p:txBody>
-      </p:sp>
-      <p:sp>
-        <p:nvSpPr>
-          <p:cNvPr id="46" name="Rectangle 45"/>
-          <p:cNvSpPr/>
-          <p:nvPr/>
-        </p:nvSpPr>
-        <p:spPr>
-          <a:xfrm>
-            <a:off x="722376" y="4123944"/>
-            <a:ext cx="10881360" cy="7315"/>
-          </a:xfrm>
-          <a:prstGeom prst="rect">
-            <a:avLst/>
-          </a:prstGeom>
-          <a:solidFill>
-            <a:srgbClr val="D9D9D9"/>
-          </a:solidFill>
-          <a:ln>
-            <a:noFill/>
-          </a:ln>
-          <a:effectLst/>
-        </p:spPr>
-        <p:style>
-          <a:lnRef idx="1">
-            <a:schemeClr val="accent1"/>
-          </a:lnRef>
-          <a:fillRef idx="3">
-            <a:schemeClr val="accent1"/>
-          </a:fillRef>
-          <a:effectRef idx="2">
-            <a:schemeClr val="accent1"/>
-          </a:effectRef>
-          <a:fontRef idx="minor">
-            <a:schemeClr val="lt1"/>
-          </a:fontRef>
-        </p:style>
-        <p:txBody>
-          <a:bodyPr rtlCol="0" anchor="ctr"/>
-          <a:lstStyle/>
-          <a:p>
-            <a:pPr algn="ctr"/>
-          </a:p>
-        </p:txBody>
-      </p:sp>
-      <p:sp>
-        <p:nvSpPr>
-          <p:cNvPr id="47" name="Rectangle 46"/>
-          <p:cNvSpPr/>
-          <p:nvPr/>
-        </p:nvSpPr>
-        <p:spPr>
-          <a:xfrm>
-            <a:off x="722376" y="4169663"/>
-            <a:ext cx="10881360" cy="822960"/>
-          </a:xfrm>
-          <a:prstGeom prst="rect">
-            <a:avLst/>
-          </a:prstGeom>
-          <a:solidFill>
-            <a:srgbClr val="F4F6FC"/>
-          </a:solidFill>
-          <a:ln>
-            <a:noFill/>
-          </a:ln>
-          <a:effectLst/>
-        </p:spPr>
-        <p:style>
-          <a:lnRef idx="1">
-            <a:schemeClr val="accent1"/>
-          </a:lnRef>
-          <a:fillRef idx="3">
-            <a:schemeClr val="accent1"/>
-          </a:fillRef>
-          <a:effectRef idx="2">
-            <a:schemeClr val="accent1"/>
-          </a:effectRef>
-          <a:fontRef idx="minor">
-            <a:schemeClr val="lt1"/>
-          </a:fontRef>
-        </p:style>
-        <p:txBody>
-          <a:bodyPr rtlCol="0" anchor="ctr"/>
-          <a:lstStyle/>
-          <a:p>
-            <a:pPr algn="ctr"/>
-          </a:p>
-        </p:txBody>
-      </p:sp>
-      <p:sp>
-        <p:nvSpPr>
-          <p:cNvPr id="48" name="Rectangle 47"/>
-          <p:cNvSpPr/>
-          <p:nvPr/>
-        </p:nvSpPr>
-        <p:spPr>
-          <a:xfrm>
-            <a:off x="722376" y="4169663"/>
-            <a:ext cx="54864" cy="822960"/>
-          </a:xfrm>
-          <a:prstGeom prst="rect">
-            <a:avLst/>
-          </a:prstGeom>
-          <a:solidFill>
-            <a:srgbClr val="1428A0"/>
-          </a:solidFill>
-          <a:ln>
-            <a:noFill/>
-          </a:ln>
-          <a:effectLst/>
-        </p:spPr>
-        <p:style>
-          <a:lnRef idx="1">
-            <a:schemeClr val="accent1"/>
-          </a:lnRef>
-          <a:fillRef idx="3">
-            <a:schemeClr val="accent1"/>
-          </a:fillRef>
-          <a:effectRef idx="2">
-            <a:schemeClr val="accent1"/>
-          </a:effectRef>
-          <a:fontRef idx="minor">
-            <a:schemeClr val="lt1"/>
-          </a:fontRef>
-        </p:style>
-        <p:txBody>
-          <a:bodyPr rtlCol="0" anchor="ctr"/>
-          <a:lstStyle/>
-          <a:p>
-            <a:pPr algn="ctr"/>
-          </a:p>
-        </p:txBody>
-      </p:sp>
-      <p:sp>
-        <p:nvSpPr>
-          <p:cNvPr id="49" name="TextBox 48"/>
-          <p:cNvSpPr txBox="1"/>
-          <p:nvPr/>
-        </p:nvSpPr>
-        <p:spPr>
-          <a:xfrm>
-            <a:off x="832104" y="4224527"/>
-            <a:ext cx="1929384" cy="731520"/>
-          </a:xfrm>
-          <a:prstGeom prst="rect">
-            <a:avLst/>
-          </a:prstGeom>
-          <a:noFill/>
-        </p:spPr>
-        <p:txBody>
-          <a:bodyPr wrap="square" anchor="ctr" lIns="0" rIns="0" tIns="0" bIns="0">
-            <a:spAutoFit/>
-          </a:bodyPr>
-          <a:lstStyle/>
-          <a:p>
-            <a:pPr algn="l">
-              <a:lnSpc>
-                <a:spcPct val="104000"/>
-              </a:lnSpc>
-            </a:pPr>
-            <a:r>
-              <a:rPr sz="1125" b="1">
-                <a:solidFill>
-                  <a:srgbClr val="1428A0"/>
-                </a:solidFill>
-                <a:latin typeface="Arial"/>
-                <a:ea typeface="Arial"/>
-              </a:rPr>
-              <a:t>NVIDIA 생태계</a:t>
-            </a:r>
-          </a:p>
-          <a:p>
-            <a:pPr algn="l">
-              <a:lnSpc>
-                <a:spcPct val="104000"/>
-              </a:lnSpc>
-            </a:pPr>
-            <a:r>
-              <a:rPr sz="900" b="0">
-                <a:solidFill>
-                  <a:srgbClr val="555555"/>
-                </a:solidFill>
-                <a:latin typeface="Arial"/>
-                <a:ea typeface="Arial"/>
-              </a:rPr>
-              <a:t>CMX · Dynamo KVBM · NIXL</a:t>
-            </a:r>
-          </a:p>
-        </p:txBody>
-      </p:sp>
-      <p:sp>
-        <p:nvSpPr>
-          <p:cNvPr id="50" name="TextBox 49"/>
-          <p:cNvSpPr txBox="1"/>
-          <p:nvPr/>
-        </p:nvSpPr>
-        <p:spPr>
-          <a:xfrm>
-            <a:off x="2980944" y="4224527"/>
-            <a:ext cx="1792224" cy="731520"/>
-          </a:xfrm>
-          <a:prstGeom prst="rect">
-            <a:avLst/>
-          </a:prstGeom>
-          <a:noFill/>
-        </p:spPr>
-        <p:txBody>
-          <a:bodyPr wrap="square" anchor="ctr" lIns="0" rIns="0" tIns="0" bIns="0">
-            <a:spAutoFit/>
-          </a:bodyPr>
-          <a:lstStyle/>
-          <a:p>
-            <a:pPr algn="l">
-              <a:lnSpc>
-                <a:spcPct val="104000"/>
-              </a:lnSpc>
-            </a:pPr>
-            <a:r>
-              <a:rPr sz="950" b="0">
-                <a:solidFill>
-                  <a:srgbClr val="555555"/>
-                </a:solidFill>
-                <a:latin typeface="Arial"/>
-                <a:ea typeface="Arial"/>
-              </a:rPr>
-              <a:t>파트너 프로그램 · 레퍼런스 스택 코드</a:t>
-            </a:r>
-          </a:p>
-        </p:txBody>
-      </p:sp>
-      <p:sp>
-        <p:nvSpPr>
-          <p:cNvPr id="51" name="TextBox 50"/>
-          <p:cNvSpPr txBox="1"/>
-          <p:nvPr/>
-        </p:nvSpPr>
-        <p:spPr>
-          <a:xfrm>
-            <a:off x="4992624" y="4224527"/>
-            <a:ext cx="1929384" cy="731520"/>
-          </a:xfrm>
-          <a:prstGeom prst="rect">
-            <a:avLst/>
-          </a:prstGeom>
-          <a:noFill/>
-        </p:spPr>
-        <p:txBody>
-          <a:bodyPr wrap="square" anchor="ctr" lIns="0" rIns="0" tIns="0" bIns="0">
-            <a:spAutoFit/>
-          </a:bodyPr>
-          <a:lstStyle/>
-          <a:p>
-            <a:pPr algn="l">
-              <a:lnSpc>
-                <a:spcPct val="104000"/>
-              </a:lnSpc>
-            </a:pPr>
-            <a:r>
-              <a:rPr sz="950" b="0">
-                <a:solidFill>
-                  <a:srgbClr val="555555"/>
-                </a:solidFill>
-                <a:latin typeface="Arial"/>
-                <a:ea typeface="Arial"/>
-              </a:rPr>
-              <a:t>플러그인 · CMX 힌트 매핑</a:t>
-            </a:r>
-          </a:p>
-          <a:p>
-            <a:pPr algn="l">
-              <a:lnSpc>
-                <a:spcPct val="104000"/>
-              </a:lnSpc>
-            </a:pPr>
-            <a:r>
-              <a:rPr sz="950" b="0">
-                <a:solidFill>
-                  <a:srgbClr val="555555"/>
-                </a:solidFill>
-                <a:latin typeface="Arial"/>
-                <a:ea typeface="Arial"/>
-              </a:rPr>
-              <a:t>공동 정의</a:t>
-            </a:r>
-          </a:p>
-        </p:txBody>
-      </p:sp>
-      <p:sp>
-        <p:nvSpPr>
-          <p:cNvPr id="52" name="TextBox 51"/>
-          <p:cNvSpPr txBox="1"/>
-          <p:nvPr/>
-        </p:nvSpPr>
-        <p:spPr>
-          <a:xfrm>
-            <a:off x="7141464" y="4224527"/>
-            <a:ext cx="1655063" cy="731520"/>
-          </a:xfrm>
-          <a:prstGeom prst="rect">
-            <a:avLst/>
-          </a:prstGeom>
-          <a:noFill/>
-        </p:spPr>
-        <p:txBody>
-          <a:bodyPr wrap="square" anchor="ctr" lIns="0" rIns="0" tIns="0" bIns="0">
-            <a:spAutoFit/>
-          </a:bodyPr>
-          <a:lstStyle/>
-          <a:p>
-            <a:pPr algn="l">
-              <a:lnSpc>
-                <a:spcPct val="104000"/>
-              </a:lnSpc>
-            </a:pPr>
-            <a:r>
-              <a:rPr sz="1000" b="1">
-                <a:solidFill>
-                  <a:srgbClr val="1428A0"/>
-                </a:solidFill>
-                <a:latin typeface="Arial"/>
-                <a:ea typeface="Arial"/>
-              </a:rPr>
-              <a:t>FDE 상주</a:t>
-            </a:r>
-          </a:p>
-          <a:p>
-            <a:pPr algn="l">
-              <a:lnSpc>
-                <a:spcPct val="104000"/>
-              </a:lnSpc>
-            </a:pPr>
-            <a:r>
-              <a:rPr sz="1000" b="1">
-                <a:solidFill>
-                  <a:srgbClr val="1428A0"/>
-                </a:solidFill>
-                <a:latin typeface="Arial"/>
-                <a:ea typeface="Arial"/>
-              </a:rPr>
-              <a:t>플랫폼 팀 파견</a:t>
-            </a:r>
-          </a:p>
-        </p:txBody>
-      </p:sp>
-      <p:sp>
-        <p:nvSpPr>
-          <p:cNvPr id="53" name="TextBox 52"/>
-          <p:cNvSpPr txBox="1"/>
-          <p:nvPr/>
-        </p:nvSpPr>
-        <p:spPr>
-          <a:xfrm>
-            <a:off x="9015983" y="4224527"/>
-            <a:ext cx="2478024" cy="731520"/>
-          </a:xfrm>
-          <a:prstGeom prst="rect">
-            <a:avLst/>
-          </a:prstGeom>
-          <a:noFill/>
-        </p:spPr>
-        <p:txBody>
-          <a:bodyPr wrap="square" anchor="ctr" lIns="0" rIns="0" tIns="0" bIns="0">
-            <a:spAutoFit/>
-          </a:bodyPr>
-          <a:lstStyle/>
-          <a:p>
-            <a:pPr algn="l">
-              <a:lnSpc>
-                <a:spcPct val="104000"/>
-              </a:lnSpc>
-            </a:pPr>
-            <a:r>
-              <a:rPr sz="900" b="0">
-                <a:solidFill>
-                  <a:srgbClr val="555555"/>
-                </a:solidFill>
-                <a:latin typeface="Arial"/>
-                <a:ea typeface="Arial"/>
-              </a:rPr>
-              <a:t>CMX 첫 공급 관계 활용 · KVBM 플러그인 메인라인 머지 → 생태계 기본 디바이스</a:t>
-            </a:r>
-          </a:p>
-        </p:txBody>
-      </p:sp>
-      <p:sp>
-        <p:nvSpPr>
-          <p:cNvPr id="54" name="Rectangle 53"/>
-          <p:cNvSpPr/>
-          <p:nvPr/>
-        </p:nvSpPr>
-        <p:spPr>
-          <a:xfrm>
-            <a:off x="722376" y="5038344"/>
-            <a:ext cx="10881360" cy="7315"/>
-          </a:xfrm>
-          <a:prstGeom prst="rect">
-            <a:avLst/>
-          </a:prstGeom>
-          <a:solidFill>
-            <a:srgbClr val="D9D9D9"/>
-          </a:solidFill>
-          <a:ln>
-            <a:noFill/>
-          </a:ln>
-          <a:effectLst/>
-        </p:spPr>
-        <p:style>
-          <a:lnRef idx="1">
-            <a:schemeClr val="accent1"/>
-          </a:lnRef>
-          <a:fillRef idx="3">
-            <a:schemeClr val="accent1"/>
-          </a:fillRef>
-          <a:effectRef idx="2">
-            <a:schemeClr val="accent1"/>
-          </a:effectRef>
-          <a:fontRef idx="minor">
-            <a:schemeClr val="lt1"/>
-          </a:fontRef>
-        </p:style>
-        <p:txBody>
-          <a:bodyPr rtlCol="0" anchor="ctr"/>
-          <a:lstStyle/>
-          <a:p>
-            <a:pPr algn="ctr"/>
-          </a:p>
-        </p:txBody>
-      </p:sp>
-      <p:sp>
-        <p:nvSpPr>
-          <p:cNvPr id="55" name="TextBox 54"/>
-          <p:cNvSpPr txBox="1"/>
-          <p:nvPr/>
-        </p:nvSpPr>
-        <p:spPr>
-          <a:xfrm>
-            <a:off x="832104" y="5138927"/>
-            <a:ext cx="1929384" cy="731520"/>
-          </a:xfrm>
-          <a:prstGeom prst="rect">
-            <a:avLst/>
-          </a:prstGeom>
-          <a:noFill/>
-        </p:spPr>
-        <p:txBody>
-          <a:bodyPr wrap="square" anchor="ctr" lIns="0" rIns="0" tIns="0" bIns="0">
-            <a:spAutoFit/>
-          </a:bodyPr>
-          <a:lstStyle/>
-          <a:p>
-            <a:pPr algn="l">
-              <a:lnSpc>
-                <a:spcPct val="104000"/>
-              </a:lnSpc>
-            </a:pPr>
-            <a:r>
-              <a:rPr sz="1125" b="1">
-                <a:solidFill>
-                  <a:srgbClr val="1A1A1A"/>
-                </a:solidFill>
-                <a:latin typeface="Arial"/>
-                <a:ea typeface="Arial"/>
-              </a:rPr>
-              <a:t>하이퍼스케일러</a:t>
-            </a:r>
-          </a:p>
-          <a:p>
-            <a:pPr algn="l">
-              <a:lnSpc>
-                <a:spcPct val="104000"/>
-              </a:lnSpc>
-            </a:pPr>
-            <a:r>
-              <a:rPr sz="900" b="0">
-                <a:solidFill>
-                  <a:srgbClr val="555555"/>
-                </a:solidFill>
-                <a:latin typeface="Arial"/>
-                <a:ea typeface="Arial"/>
-              </a:rPr>
-              <a:t>Meta · Google · MS · AWS</a:t>
-            </a:r>
-          </a:p>
-        </p:txBody>
-      </p:sp>
-      <p:sp>
-        <p:nvSpPr>
-          <p:cNvPr id="56" name="TextBox 55"/>
-          <p:cNvSpPr txBox="1"/>
-          <p:nvPr/>
-        </p:nvSpPr>
-        <p:spPr>
-          <a:xfrm>
-            <a:off x="2980944" y="5138927"/>
-            <a:ext cx="1792224" cy="731520"/>
-          </a:xfrm>
-          <a:prstGeom prst="rect">
-            <a:avLst/>
-          </a:prstGeom>
-          <a:noFill/>
-        </p:spPr>
-        <p:txBody>
-          <a:bodyPr wrap="square" anchor="ctr" lIns="0" rIns="0" tIns="0" bIns="0">
-            <a:spAutoFit/>
-          </a:bodyPr>
-          <a:lstStyle/>
-          <a:p>
-            <a:pPr algn="l">
-              <a:lnSpc>
-                <a:spcPct val="104000"/>
-              </a:lnSpc>
-            </a:pPr>
-            <a:r>
-              <a:rPr sz="950" b="0">
-                <a:solidFill>
-                  <a:srgbClr val="555555"/>
-                </a:solidFill>
-                <a:latin typeface="Arial"/>
-                <a:ea typeface="Arial"/>
-              </a:rPr>
-              <a:t>내부 코드 상주 불가</a:t>
-            </a:r>
-          </a:p>
-          <a:p>
-            <a:pPr algn="l">
-              <a:lnSpc>
-                <a:spcPct val="104000"/>
-              </a:lnSpc>
-            </a:pPr>
-            <a:r>
-              <a:rPr sz="950" b="0">
-                <a:solidFill>
-                  <a:srgbClr val="555555"/>
-                </a:solidFill>
-                <a:latin typeface="Arial"/>
-                <a:ea typeface="Arial"/>
-              </a:rPr>
-              <a:t>(보안 · 중립성)</a:t>
-            </a:r>
-          </a:p>
-        </p:txBody>
-      </p:sp>
-      <p:sp>
-        <p:nvSpPr>
-          <p:cNvPr id="57" name="TextBox 56"/>
-          <p:cNvSpPr txBox="1"/>
-          <p:nvPr/>
-        </p:nvSpPr>
-        <p:spPr>
-          <a:xfrm>
-            <a:off x="4992624" y="5138927"/>
-            <a:ext cx="1929384" cy="731520"/>
-          </a:xfrm>
-          <a:prstGeom prst="rect">
-            <a:avLst/>
-          </a:prstGeom>
-          <a:noFill/>
-        </p:spPr>
-        <p:txBody>
-          <a:bodyPr wrap="square" anchor="ctr" lIns="0" rIns="0" tIns="0" bIns="0">
-            <a:spAutoFit/>
-          </a:bodyPr>
-          <a:lstStyle/>
-          <a:p>
-            <a:pPr algn="l">
-              <a:lnSpc>
-                <a:spcPct val="104000"/>
-              </a:lnSpc>
-            </a:pPr>
-            <a:r>
-              <a:rPr sz="950" b="0">
-                <a:solidFill>
-                  <a:srgbClr val="555555"/>
-                </a:solidFill>
-                <a:latin typeface="Arial"/>
-                <a:ea typeface="Arial"/>
-              </a:rPr>
-              <a:t>OCP 규격 · 업스트림</a:t>
-            </a:r>
-          </a:p>
-          <a:p>
-            <a:pPr algn="l">
-              <a:lnSpc>
-                <a:spcPct val="104000"/>
-              </a:lnSpc>
-            </a:pPr>
-            <a:r>
-              <a:rPr sz="950" b="0">
-                <a:solidFill>
-                  <a:srgbClr val="555555"/>
-                </a:solidFill>
-                <a:latin typeface="Arial"/>
-                <a:ea typeface="Arial"/>
-              </a:rPr>
-              <a:t>(CacheLib · XFS · 커널)</a:t>
-            </a:r>
-          </a:p>
-        </p:txBody>
-      </p:sp>
-      <p:sp>
-        <p:nvSpPr>
-          <p:cNvPr id="58" name="TextBox 57"/>
-          <p:cNvSpPr txBox="1"/>
-          <p:nvPr/>
-        </p:nvSpPr>
-        <p:spPr>
-          <a:xfrm>
-            <a:off x="7141464" y="5138927"/>
-            <a:ext cx="1655063" cy="731520"/>
-          </a:xfrm>
-          <a:prstGeom prst="rect">
-            <a:avLst/>
-          </a:prstGeom>
-          <a:noFill/>
-        </p:spPr>
-        <p:txBody>
-          <a:bodyPr wrap="square" anchor="ctr" lIns="0" rIns="0" tIns="0" bIns="0">
-            <a:spAutoFit/>
-          </a:bodyPr>
-          <a:lstStyle/>
-          <a:p>
-            <a:pPr algn="l">
-              <a:lnSpc>
-                <a:spcPct val="104000"/>
-              </a:lnSpc>
-            </a:pPr>
-            <a:r>
-              <a:rPr sz="1000" b="1">
-                <a:solidFill>
-                  <a:srgbClr val="1A1A1A"/>
-                </a:solidFill>
-                <a:latin typeface="Arial"/>
-                <a:ea typeface="Arial"/>
-              </a:rPr>
-              <a:t>업스트림 기여</a:t>
-            </a:r>
-          </a:p>
-          <a:p>
-            <a:pPr algn="l">
-              <a:lnSpc>
-                <a:spcPct val="104000"/>
-              </a:lnSpc>
-            </a:pPr>
-            <a:r>
-              <a:rPr sz="1000" b="1">
-                <a:solidFill>
-                  <a:srgbClr val="1A1A1A"/>
-                </a:solidFill>
-                <a:latin typeface="Arial"/>
-                <a:ea typeface="Arial"/>
-              </a:rPr>
-              <a:t>OCP 규격 제안</a:t>
-            </a:r>
-          </a:p>
-        </p:txBody>
-      </p:sp>
-      <p:sp>
-        <p:nvSpPr>
-          <p:cNvPr id="59" name="TextBox 58"/>
-          <p:cNvSpPr txBox="1"/>
-          <p:nvPr/>
-        </p:nvSpPr>
-        <p:spPr>
-          <a:xfrm>
-            <a:off x="9015983" y="5138927"/>
-            <a:ext cx="2478024" cy="731520"/>
-          </a:xfrm>
-          <a:prstGeom prst="rect">
-            <a:avLst/>
-          </a:prstGeom>
-          <a:noFill/>
-        </p:spPr>
-        <p:txBody>
-          <a:bodyPr wrap="square" anchor="ctr" lIns="0" rIns="0" tIns="0" bIns="0">
-            <a:spAutoFit/>
-          </a:bodyPr>
-          <a:lstStyle/>
-          <a:p>
-            <a:pPr algn="l">
-              <a:lnSpc>
-                <a:spcPct val="104000"/>
-              </a:lnSpc>
-            </a:pPr>
-            <a:r>
-              <a:rPr sz="900" b="0">
-                <a:solidFill>
-                  <a:srgbClr val="555555"/>
-                </a:solidFill>
-                <a:latin typeface="Arial"/>
-                <a:ea typeface="Arial"/>
-              </a:rPr>
-              <a:t>배치 표준 공동 주도 이력 · OCP 텔레메트리·FIP 규격 · 실측 공개로 신뢰 확보</a:t>
-            </a:r>
-          </a:p>
-        </p:txBody>
-      </p:sp>
-      <p:sp>
-        <p:nvSpPr>
-          <p:cNvPr id="60" name="Rectangle 59"/>
-          <p:cNvSpPr/>
-          <p:nvPr/>
-        </p:nvSpPr>
-        <p:spPr>
-          <a:xfrm>
-            <a:off x="722376" y="5952744"/>
-            <a:ext cx="10881360" cy="7315"/>
-          </a:xfrm>
-          <a:prstGeom prst="rect">
-            <a:avLst/>
-          </a:prstGeom>
-          <a:solidFill>
-            <a:srgbClr val="D9D9D9"/>
-          </a:solidFill>
-          <a:ln>
-            <a:noFill/>
-          </a:ln>
-          <a:effectLst/>
-        </p:spPr>
-        <p:style>
-          <a:lnRef idx="1">
-            <a:schemeClr val="accent1"/>
-          </a:lnRef>
-          <a:fillRef idx="3">
-            <a:schemeClr val="accent1"/>
-          </a:fillRef>
-          <a:effectRef idx="2">
-            <a:schemeClr val="accent1"/>
-          </a:effectRef>
-          <a:fontRef idx="minor">
-            <a:schemeClr val="lt1"/>
-          </a:fontRef>
-        </p:style>
-        <p:txBody>
-          <a:bodyPr rtlCol="0" anchor="ctr"/>
-          <a:lstStyle/>
-          <a:p>
-            <a:pPr algn="ctr"/>
-          </a:p>
-        </p:txBody>
-      </p:sp>
-      <p:sp>
-        <p:nvSpPr>
-          <p:cNvPr id="61" name="TextBox 60"/>
-          <p:cNvSpPr txBox="1"/>
-          <p:nvPr/>
-        </p:nvSpPr>
-        <p:spPr>
-          <a:xfrm>
-            <a:off x="832104" y="6053327"/>
-            <a:ext cx="1929384" cy="731520"/>
-          </a:xfrm>
-          <a:prstGeom prst="rect">
-            <a:avLst/>
-          </a:prstGeom>
-          <a:noFill/>
-        </p:spPr>
-        <p:txBody>
-          <a:bodyPr wrap="square" anchor="ctr" lIns="0" rIns="0" tIns="0" bIns="0">
-            <a:spAutoFit/>
-          </a:bodyPr>
-          <a:lstStyle/>
-          <a:p>
-            <a:pPr algn="l">
-              <a:lnSpc>
-                <a:spcPct val="104000"/>
-              </a:lnSpc>
-            </a:pPr>
-            <a:r>
-              <a:rPr sz="1125" b="1">
-                <a:solidFill>
-                  <a:srgbClr val="1A1A1A"/>
-                </a:solidFill>
-                <a:latin typeface="Arial"/>
-                <a:ea typeface="Arial"/>
-              </a:rPr>
-              <a:t>OEM · 네오클라우드</a:t>
-            </a:r>
-          </a:p>
-          <a:p>
-            <a:pPr algn="l">
-              <a:lnSpc>
-                <a:spcPct val="104000"/>
-              </a:lnSpc>
-            </a:pPr>
-            <a:r>
-              <a:rPr sz="900" b="0">
-                <a:solidFill>
-                  <a:srgbClr val="555555"/>
-                </a:solidFill>
-                <a:latin typeface="Arial"/>
-                <a:ea typeface="Arial"/>
-              </a:rPr>
-              <a:t>자체 캐시 스택 없음</a:t>
-            </a:r>
-          </a:p>
-        </p:txBody>
-      </p:sp>
-      <p:sp>
-        <p:nvSpPr>
-          <p:cNvPr id="62" name="TextBox 61"/>
-          <p:cNvSpPr txBox="1"/>
-          <p:nvPr/>
-        </p:nvSpPr>
-        <p:spPr>
-          <a:xfrm>
-            <a:off x="2980944" y="6053327"/>
-            <a:ext cx="1792224" cy="731520"/>
-          </a:xfrm>
-          <a:prstGeom prst="rect">
-            <a:avLst/>
-          </a:prstGeom>
-          <a:noFill/>
-        </p:spPr>
-        <p:txBody>
-          <a:bodyPr wrap="square" anchor="ctr" lIns="0" rIns="0" tIns="0" bIns="0">
-            <a:spAutoFit/>
-          </a:bodyPr>
-          <a:lstStyle/>
-          <a:p>
-            <a:pPr algn="l">
-              <a:lnSpc>
-                <a:spcPct val="104000"/>
-              </a:lnSpc>
-            </a:pPr>
-            <a:r>
-              <a:rPr sz="950" b="0">
-                <a:solidFill>
-                  <a:srgbClr val="555555"/>
-                </a:solidFill>
-                <a:latin typeface="Arial"/>
-                <a:ea typeface="Arial"/>
-              </a:rPr>
-              <a:t>삼성 레퍼런스 스택 채택</a:t>
-            </a:r>
-          </a:p>
-        </p:txBody>
-      </p:sp>
-      <p:sp>
-        <p:nvSpPr>
-          <p:cNvPr id="63" name="TextBox 62"/>
-          <p:cNvSpPr txBox="1"/>
-          <p:nvPr/>
-        </p:nvSpPr>
-        <p:spPr>
-          <a:xfrm>
-            <a:off x="4992624" y="6053327"/>
-            <a:ext cx="1929384" cy="731520"/>
-          </a:xfrm>
-          <a:prstGeom prst="rect">
-            <a:avLst/>
-          </a:prstGeom>
-          <a:noFill/>
-        </p:spPr>
-        <p:txBody>
-          <a:bodyPr wrap="square" anchor="ctr" lIns="0" rIns="0" tIns="0" bIns="0">
-            <a:spAutoFit/>
-          </a:bodyPr>
-          <a:lstStyle/>
-          <a:p>
-            <a:pPr algn="l">
-              <a:lnSpc>
-                <a:spcPct val="104000"/>
-              </a:lnSpc>
-            </a:pPr>
-            <a:r>
-              <a:rPr sz="950" b="0">
-                <a:solidFill>
-                  <a:srgbClr val="555555"/>
-                </a:solidFill>
-                <a:latin typeface="Arial"/>
-                <a:ea typeface="Arial"/>
-              </a:rPr>
-              <a:t>레퍼런스 아키텍처</a:t>
-            </a:r>
-          </a:p>
-          <a:p>
-            <a:pPr algn="l">
-              <a:lnSpc>
-                <a:spcPct val="104000"/>
-              </a:lnSpc>
-            </a:pPr>
-            <a:r>
-              <a:rPr sz="950" b="0">
-                <a:solidFill>
-                  <a:srgbClr val="555555"/>
-                </a:solidFill>
-                <a:latin typeface="Arial"/>
-                <a:ea typeface="Arial"/>
-              </a:rPr>
-              <a:t>(vLLM + LMCache + QLC)</a:t>
-            </a:r>
-          </a:p>
-        </p:txBody>
-      </p:sp>
-      <p:sp>
-        <p:nvSpPr>
-          <p:cNvPr id="64" name="TextBox 63"/>
-          <p:cNvSpPr txBox="1"/>
-          <p:nvPr/>
-        </p:nvSpPr>
-        <p:spPr>
-          <a:xfrm>
-            <a:off x="7141464" y="6053327"/>
-            <a:ext cx="1655063" cy="731520"/>
-          </a:xfrm>
-          <a:prstGeom prst="rect">
-            <a:avLst/>
-          </a:prstGeom>
-          <a:noFill/>
-        </p:spPr>
-        <p:txBody>
-          <a:bodyPr wrap="square" anchor="ctr" lIns="0" rIns="0" tIns="0" bIns="0">
-            <a:spAutoFit/>
-          </a:bodyPr>
-          <a:lstStyle/>
-          <a:p>
-            <a:pPr algn="l">
-              <a:lnSpc>
-                <a:spcPct val="104000"/>
-              </a:lnSpc>
-            </a:pPr>
-            <a:r>
-              <a:rPr sz="1000" b="1">
-                <a:solidFill>
-                  <a:srgbClr val="1A1A1A"/>
-                </a:solidFill>
-                <a:latin typeface="Arial"/>
-                <a:ea typeface="Arial"/>
-              </a:rPr>
-              <a:t>레퍼런스 스택</a:t>
-            </a:r>
-          </a:p>
-          <a:p>
-            <a:pPr algn="l">
-              <a:lnSpc>
-                <a:spcPct val="104000"/>
-              </a:lnSpc>
-            </a:pPr>
-            <a:r>
-              <a:rPr sz="1000" b="1">
-                <a:solidFill>
-                  <a:srgbClr val="1A1A1A"/>
-                </a:solidFill>
-                <a:latin typeface="Arial"/>
-                <a:ea typeface="Arial"/>
-              </a:rPr>
-              <a:t>공용 TCO 모델</a:t>
-            </a:r>
-          </a:p>
-        </p:txBody>
-      </p:sp>
-      <p:sp>
-        <p:nvSpPr>
-          <p:cNvPr id="65" name="TextBox 64"/>
-          <p:cNvSpPr txBox="1"/>
-          <p:nvPr/>
-        </p:nvSpPr>
-        <p:spPr>
-          <a:xfrm>
-            <a:off x="9015983" y="6053327"/>
-            <a:ext cx="2478024" cy="731520"/>
-          </a:xfrm>
-          <a:prstGeom prst="rect">
-            <a:avLst/>
-          </a:prstGeom>
-          <a:noFill/>
-        </p:spPr>
-        <p:txBody>
-          <a:bodyPr wrap="square" anchor="ctr" lIns="0" rIns="0" tIns="0" bIns="0">
-            <a:spAutoFit/>
-          </a:bodyPr>
-          <a:lstStyle/>
-          <a:p>
-            <a:pPr algn="l">
-              <a:lnSpc>
-                <a:spcPct val="104000"/>
-              </a:lnSpc>
-            </a:pPr>
-            <a:r>
-              <a:rPr sz="900" b="0">
-                <a:solidFill>
-                  <a:srgbClr val="555555"/>
-                </a:solidFill>
-                <a:latin typeface="Arial"/>
-                <a:ea typeface="Arial"/>
-              </a:rPr>
-              <a:t>검증된 스택 제공으로 디자인인 · FDE 없이 확산 · 실측 데이터 재사용</a:t>
-            </a:r>
-          </a:p>
-        </p:txBody>
-      </p:sp>
-      <p:sp>
-        <p:nvSpPr>
-          <p:cNvPr id="66" name="Rectangle 65"/>
-          <p:cNvSpPr/>
-          <p:nvPr/>
-        </p:nvSpPr>
-        <p:spPr>
-          <a:xfrm>
-            <a:off x="722376" y="6867144"/>
-            <a:ext cx="10881360" cy="7315"/>
-          </a:xfrm>
-          <a:prstGeom prst="rect">
-            <a:avLst/>
-          </a:prstGeom>
-          <a:solidFill>
-            <a:srgbClr val="D9D9D9"/>
-          </a:solidFill>
-          <a:ln>
-            <a:noFill/>
-          </a:ln>
-          <a:effectLst/>
-        </p:spPr>
-        <p:style>
-          <a:lnRef idx="1">
-            <a:schemeClr val="accent1"/>
-          </a:lnRef>
-          <a:fillRef idx="3">
-            <a:schemeClr val="accent1"/>
-          </a:fillRef>
-          <a:effectRef idx="2">
-            <a:schemeClr val="accent1"/>
-          </a:effectRef>
-          <a:fontRef idx="minor">
-            <a:schemeClr val="lt1"/>
-          </a:fontRef>
-        </p:style>
-        <p:txBody>
-          <a:bodyPr rtlCol="0" anchor="ctr"/>
-          <a:lstStyle/>
-          <a:p>
-            <a:pPr algn="ctr"/>
-          </a:p>
-        </p:txBody>
-      </p:sp>
-      <p:sp>
-        <p:nvSpPr>
-          <p:cNvPr id="67" name="TextBox 66"/>
-          <p:cNvSpPr txBox="1"/>
-          <p:nvPr/>
-        </p:nvSpPr>
-        <p:spPr>
-          <a:xfrm>
-            <a:off x="722376" y="6931151"/>
-            <a:ext cx="10881360" cy="219456"/>
-          </a:xfrm>
-          <a:prstGeom prst="rect">
-            <a:avLst/>
-          </a:prstGeom>
-          <a:noFill/>
-        </p:spPr>
-        <p:txBody>
-          <a:bodyPr wrap="square" anchor="t" lIns="0" rIns="0" tIns="0" bIns="0">
-            <a:spAutoFit/>
-          </a:bodyPr>
-          <a:lstStyle/>
-          <a:p>
-            <a:pPr algn="l">
-              <a:lnSpc>
-                <a:spcPct val="100000"/>
-              </a:lnSpc>
-            </a:pPr>
-            <a:r>
-              <a:rPr sz="950" b="1">
-                <a:solidFill>
-                  <a:srgbClr val="1A1A1A"/>
-                </a:solidFill>
-                <a:latin typeface="Arial"/>
-                <a:ea typeface="Arial"/>
-              </a:rPr>
-              <a:t>선례  </a:t>
-            </a:r>
-            <a:r>
-              <a:rPr sz="875" b="0">
-                <a:solidFill>
-                  <a:srgbClr val="555555"/>
-                </a:solidFill>
-                <a:latin typeface="Arial"/>
-                <a:ea typeface="Arial"/>
-              </a:rPr>
-              <a:t>Palantir FDE(상주 · 성과 평가 · Anthropic·OpenAI GTM 채택) · Micron↔Anthropic SCA 2026-06(공동 설계 + 다년 공급 + 운영 통합 + 자본) · 삼성·SK의 Anthropic 계약엔 공동 설계 조항 부재</a:t>
-            </a:r>
-          </a:p>
-        </p:txBody>
-      </p:sp>
-      <p:sp>
-        <p:nvSpPr>
-          <p:cNvPr id="68" name="TextBox 67"/>
-          <p:cNvSpPr txBox="1"/>
-          <p:nvPr/>
-        </p:nvSpPr>
-        <p:spPr>
-          <a:xfrm>
-            <a:off x="722376" y="7223759"/>
-            <a:ext cx="10881360" cy="219456"/>
-          </a:xfrm>
-          <a:prstGeom prst="rect">
-            <a:avLst/>
-          </a:prstGeom>
-          <a:noFill/>
-        </p:spPr>
-        <p:txBody>
-          <a:bodyPr wrap="square" anchor="t" lIns="0" rIns="0" tIns="0" bIns="0">
-            <a:spAutoFit/>
-          </a:bodyPr>
-          <a:lstStyle/>
-          <a:p>
-            <a:pPr algn="l">
-              <a:lnSpc>
-                <a:spcPct val="112000"/>
-              </a:lnSpc>
-            </a:pPr>
-            <a:r>
-              <a:rPr sz="1125" b="1">
-                <a:solidFill>
-                  <a:srgbClr val="1428A0"/>
-                </a:solidFill>
-                <a:latin typeface="Arial"/>
-                <a:ea typeface="Arial"/>
-              </a:rPr>
-              <a:t>단계별 통과 조건</a:t>
-            </a:r>
-            <a:r>
-              <a:rPr sz="950" b="0">
-                <a:solidFill>
-                  <a:srgbClr val="8A8A8A"/>
-                </a:solidFill>
-                <a:latin typeface="Arial"/>
-                <a:ea typeface="Arial"/>
-              </a:rPr>
-              <a:t>   각 단계의 증명이 다음 단계의 승인 근거</a:t>
-            </a:r>
-          </a:p>
-        </p:txBody>
-      </p:sp>
-      <p:sp>
-        <p:nvSpPr>
-          <p:cNvPr id="69" name="Rectangle 68"/>
-          <p:cNvSpPr/>
-          <p:nvPr/>
-        </p:nvSpPr>
-        <p:spPr>
-          <a:xfrm>
-            <a:off x="722376" y="7498079"/>
-            <a:ext cx="3493008" cy="896112"/>
+            <a:ext cx="2880360" cy="3529584"/>
           </a:xfrm>
           <a:prstGeom prst="rect">
             <a:avLst/>
@@ -30861,22 +29094,22 @@
       </p:sp>
       <p:sp>
         <p:nvSpPr>
-          <p:cNvPr id="70" name="TextBox 69"/>
-          <p:cNvSpPr txBox="1"/>
-          <p:nvPr/>
-        </p:nvSpPr>
-        <p:spPr>
-          <a:xfrm>
-            <a:off x="850392" y="7552944"/>
-            <a:ext cx="868680" cy="274320"/>
-          </a:xfrm>
-          <a:prstGeom prst="rect">
-            <a:avLst/>
-          </a:prstGeom>
-          <a:noFill/>
-        </p:spPr>
-        <p:txBody>
-          <a:bodyPr wrap="square" anchor="ctr" lIns="0" rIns="0" tIns="0" bIns="0">
+          <p:cNvPr id="33" name="TextBox 32"/>
+          <p:cNvSpPr txBox="1"/>
+          <p:nvPr/>
+        </p:nvSpPr>
+        <p:spPr>
+          <a:xfrm>
+            <a:off x="923544" y="2706624"/>
+            <a:ext cx="2478024" cy="274320"/>
+          </a:xfrm>
+          <a:prstGeom prst="rect">
+            <a:avLst/>
+          </a:prstGeom>
+          <a:noFill/>
+        </p:spPr>
+        <p:txBody>
+          <a:bodyPr wrap="square" anchor="t" lIns="0" rIns="0" tIns="0" bIns="0">
             <a:spAutoFit/>
           </a:bodyPr>
           <a:lstStyle/>
@@ -30887,74 +29120,74 @@
               </a:lnSpc>
             </a:pPr>
             <a:r>
-              <a:rPr sz="1275" b="1">
+              <a:rPr sz="1500" b="1">
                 <a:solidFill>
                   <a:srgbClr val="1428A0"/>
                 </a:solidFill>
                 <a:latin typeface="Arial"/>
                 <a:ea typeface="Arial"/>
               </a:rPr>
-              <a:t>90일</a:t>
-            </a:r>
-          </a:p>
-        </p:txBody>
-      </p:sp>
-      <p:sp>
-        <p:nvSpPr>
-          <p:cNvPr id="71" name="TextBox 70"/>
-          <p:cNvSpPr txBox="1"/>
-          <p:nvPr/>
-        </p:nvSpPr>
-        <p:spPr>
-          <a:xfrm>
-            <a:off x="1691640" y="7543800"/>
-            <a:ext cx="2395728" cy="804672"/>
-          </a:xfrm>
-          <a:prstGeom prst="rect">
-            <a:avLst/>
-          </a:prstGeom>
-          <a:noFill/>
-        </p:spPr>
-        <p:txBody>
-          <a:bodyPr wrap="square" anchor="ctr" lIns="0" rIns="0" tIns="0" bIns="0">
-            <a:spAutoFit/>
-          </a:bodyPr>
-          <a:lstStyle/>
-          <a:p>
-            <a:pPr algn="l">
-              <a:lnSpc>
-                <a:spcPct val="104000"/>
-              </a:lnSpc>
-            </a:pPr>
-            <a:r>
-              <a:rPr sz="900" b="0">
-                <a:solidFill>
-                  <a:srgbClr val="555555"/>
-                </a:solidFill>
-                <a:latin typeface="Arial"/>
-                <a:ea typeface="Arial"/>
-              </a:rPr>
-              <a:t>등대 고객 1사 트레이스 확보 · KV 캐시 실측(WAF·유효 DWPD) 공개 · 캐시 관리자 플러그인 PR 1건</a:t>
-            </a:r>
-          </a:p>
-        </p:txBody>
-      </p:sp>
-      <p:sp>
-        <p:nvSpPr>
-          <p:cNvPr id="72" name="Right Arrow 71"/>
+              <a:t>삼성 개발실</a:t>
+            </a:r>
+          </a:p>
+        </p:txBody>
+      </p:sp>
+      <p:sp>
+        <p:nvSpPr>
+          <p:cNvPr id="34" name="TextBox 33"/>
+          <p:cNvSpPr txBox="1"/>
+          <p:nvPr/>
+        </p:nvSpPr>
+        <p:spPr>
+          <a:xfrm>
+            <a:off x="923544" y="2980944"/>
+            <a:ext cx="2478024" cy="201168"/>
+          </a:xfrm>
+          <a:prstGeom prst="rect">
+            <a:avLst/>
+          </a:prstGeom>
+          <a:noFill/>
+        </p:spPr>
+        <p:txBody>
+          <a:bodyPr wrap="square" anchor="t" lIns="0" rIns="0" tIns="0" bIns="0">
+            <a:spAutoFit/>
+          </a:bodyPr>
+          <a:lstStyle/>
+          <a:p>
+            <a:pPr algn="l">
+              <a:lnSpc>
+                <a:spcPct val="112000"/>
+              </a:lnSpc>
+            </a:pPr>
+            <a:r>
+              <a:rPr sz="1000" b="0">
+                <a:solidFill>
+                  <a:srgbClr val="8A8A8A"/>
+                </a:solidFill>
+                <a:latin typeface="Arial"/>
+                <a:ea typeface="Arial"/>
+              </a:rPr>
+              <a:t>삼성이 제공하는 것</a:t>
+            </a:r>
+          </a:p>
+        </p:txBody>
+      </p:sp>
+      <p:sp>
+        <p:nvSpPr>
+          <p:cNvPr id="35" name="Rectangle 34"/>
           <p:cNvSpPr/>
           <p:nvPr/>
         </p:nvSpPr>
         <p:spPr>
           <a:xfrm>
-            <a:off x="4233672" y="7863840"/>
-            <a:ext cx="164592" cy="164592"/>
-          </a:xfrm>
-          <a:prstGeom prst="rightArrow">
+            <a:off x="960120" y="3392423"/>
+            <a:ext cx="109728" cy="109728"/>
+          </a:xfrm>
+          <a:prstGeom prst="rect">
             <a:avLst/>
           </a:prstGeom>
           <a:solidFill>
-            <a:srgbClr val="AAB8E8"/>
+            <a:srgbClr val="1428A0"/>
           </a:solidFill>
           <a:ln>
             <a:noFill/>
@@ -30985,14 +29218,534 @@
       </p:sp>
       <p:sp>
         <p:nvSpPr>
-          <p:cNvPr id="73" name="Rectangle 72"/>
+          <p:cNvPr id="36" name="TextBox 35"/>
+          <p:cNvSpPr txBox="1"/>
+          <p:nvPr/>
+        </p:nvSpPr>
+        <p:spPr>
+          <a:xfrm>
+            <a:off x="1161288" y="3328415"/>
+            <a:ext cx="2240280" cy="475488"/>
+          </a:xfrm>
+          <a:prstGeom prst="rect">
+            <a:avLst/>
+          </a:prstGeom>
+          <a:noFill/>
+        </p:spPr>
+        <p:txBody>
+          <a:bodyPr wrap="square" anchor="t" lIns="0" rIns="0" tIns="0" bIns="0">
+            <a:spAutoFit/>
+          </a:bodyPr>
+          <a:lstStyle/>
+          <a:p>
+            <a:pPr algn="l">
+              <a:lnSpc>
+                <a:spcPct val="102000"/>
+              </a:lnSpc>
+            </a:pPr>
+            <a:r>
+              <a:rPr sz="1125" b="1">
+                <a:solidFill>
+                  <a:srgbClr val="1A1A1A"/>
+                </a:solidFill>
+                <a:latin typeface="Arial"/>
+                <a:ea typeface="Arial"/>
+              </a:rPr>
+              <a:t>KV-ready QLC + 수명 보증</a:t>
+            </a:r>
+          </a:p>
+        </p:txBody>
+      </p:sp>
+      <p:sp>
+        <p:nvSpPr>
+          <p:cNvPr id="37" name="Rectangle 36"/>
           <p:cNvSpPr/>
           <p:nvPr/>
         </p:nvSpPr>
         <p:spPr>
           <a:xfrm>
-            <a:off x="4416552" y="7498079"/>
-            <a:ext cx="3493008" cy="896112"/>
+            <a:off x="960120" y="3904487"/>
+            <a:ext cx="109728" cy="109728"/>
+          </a:xfrm>
+          <a:prstGeom prst="rect">
+            <a:avLst/>
+          </a:prstGeom>
+          <a:solidFill>
+            <a:srgbClr val="1428A0"/>
+          </a:solidFill>
+          <a:ln>
+            <a:noFill/>
+          </a:ln>
+          <a:effectLst/>
+        </p:spPr>
+        <p:style>
+          <a:lnRef idx="1">
+            <a:schemeClr val="accent1"/>
+          </a:lnRef>
+          <a:fillRef idx="3">
+            <a:schemeClr val="accent1"/>
+          </a:fillRef>
+          <a:effectRef idx="2">
+            <a:schemeClr val="accent1"/>
+          </a:effectRef>
+          <a:fontRef idx="minor">
+            <a:schemeClr val="lt1"/>
+          </a:fontRef>
+        </p:style>
+        <p:txBody>
+          <a:bodyPr rtlCol="0" anchor="ctr"/>
+          <a:lstStyle/>
+          <a:p>
+            <a:pPr algn="ctr"/>
+          </a:p>
+        </p:txBody>
+      </p:sp>
+      <p:sp>
+        <p:nvSpPr>
+          <p:cNvPr id="38" name="TextBox 37"/>
+          <p:cNvSpPr txBox="1"/>
+          <p:nvPr/>
+        </p:nvSpPr>
+        <p:spPr>
+          <a:xfrm>
+            <a:off x="1161288" y="3840479"/>
+            <a:ext cx="2240280" cy="475488"/>
+          </a:xfrm>
+          <a:prstGeom prst="rect">
+            <a:avLst/>
+          </a:prstGeom>
+          <a:noFill/>
+        </p:spPr>
+        <p:txBody>
+          <a:bodyPr wrap="square" anchor="t" lIns="0" rIns="0" tIns="0" bIns="0">
+            <a:spAutoFit/>
+          </a:bodyPr>
+          <a:lstStyle/>
+          <a:p>
+            <a:pPr algn="l">
+              <a:lnSpc>
+                <a:spcPct val="102000"/>
+              </a:lnSpc>
+            </a:pPr>
+            <a:r>
+              <a:rPr sz="1125" b="1">
+                <a:solidFill>
+                  <a:srgbClr val="1A1A1A"/>
+                </a:solidFill>
+                <a:latin typeface="Arial"/>
+                <a:ea typeface="Arial"/>
+              </a:rPr>
+              <a:t>FDE (고객 상주 엔지니어)</a:t>
+            </a:r>
+          </a:p>
+        </p:txBody>
+      </p:sp>
+      <p:sp>
+        <p:nvSpPr>
+          <p:cNvPr id="39" name="Rectangle 38"/>
+          <p:cNvSpPr/>
+          <p:nvPr/>
+        </p:nvSpPr>
+        <p:spPr>
+          <a:xfrm>
+            <a:off x="960120" y="4416552"/>
+            <a:ext cx="109728" cy="109728"/>
+          </a:xfrm>
+          <a:prstGeom prst="rect">
+            <a:avLst/>
+          </a:prstGeom>
+          <a:solidFill>
+            <a:srgbClr val="1428A0"/>
+          </a:solidFill>
+          <a:ln>
+            <a:noFill/>
+          </a:ln>
+          <a:effectLst/>
+        </p:spPr>
+        <p:style>
+          <a:lnRef idx="1">
+            <a:schemeClr val="accent1"/>
+          </a:lnRef>
+          <a:fillRef idx="3">
+            <a:schemeClr val="accent1"/>
+          </a:fillRef>
+          <a:effectRef idx="2">
+            <a:schemeClr val="accent1"/>
+          </a:effectRef>
+          <a:fontRef idx="minor">
+            <a:schemeClr val="lt1"/>
+          </a:fontRef>
+        </p:style>
+        <p:txBody>
+          <a:bodyPr rtlCol="0" anchor="ctr"/>
+          <a:lstStyle/>
+          <a:p>
+            <a:pPr algn="ctr"/>
+          </a:p>
+        </p:txBody>
+      </p:sp>
+      <p:sp>
+        <p:nvSpPr>
+          <p:cNvPr id="40" name="TextBox 39"/>
+          <p:cNvSpPr txBox="1"/>
+          <p:nvPr/>
+        </p:nvSpPr>
+        <p:spPr>
+          <a:xfrm>
+            <a:off x="1161288" y="4352544"/>
+            <a:ext cx="2240280" cy="475488"/>
+          </a:xfrm>
+          <a:prstGeom prst="rect">
+            <a:avLst/>
+          </a:prstGeom>
+          <a:noFill/>
+        </p:spPr>
+        <p:txBody>
+          <a:bodyPr wrap="square" anchor="t" lIns="0" rIns="0" tIns="0" bIns="0">
+            <a:spAutoFit/>
+          </a:bodyPr>
+          <a:lstStyle/>
+          <a:p>
+            <a:pPr algn="l">
+              <a:lnSpc>
+                <a:spcPct val="102000"/>
+              </a:lnSpc>
+            </a:pPr>
+            <a:r>
+              <a:rPr sz="1125" b="1">
+                <a:solidFill>
+                  <a:srgbClr val="1A1A1A"/>
+                </a:solidFill>
+                <a:latin typeface="Arial"/>
+                <a:ea typeface="Arial"/>
+              </a:rPr>
+              <a:t>업스트림 코드 · 공용 TCO 모델</a:t>
+            </a:r>
+          </a:p>
+        </p:txBody>
+      </p:sp>
+      <p:sp>
+        <p:nvSpPr>
+          <p:cNvPr id="41" name="Rectangle 40"/>
+          <p:cNvSpPr/>
+          <p:nvPr/>
+        </p:nvSpPr>
+        <p:spPr>
+          <a:xfrm>
+            <a:off x="960120" y="4928616"/>
+            <a:ext cx="109728" cy="109728"/>
+          </a:xfrm>
+          <a:prstGeom prst="rect">
+            <a:avLst/>
+          </a:prstGeom>
+          <a:solidFill>
+            <a:srgbClr val="1428A0"/>
+          </a:solidFill>
+          <a:ln>
+            <a:noFill/>
+          </a:ln>
+          <a:effectLst/>
+        </p:spPr>
+        <p:style>
+          <a:lnRef idx="1">
+            <a:schemeClr val="accent1"/>
+          </a:lnRef>
+          <a:fillRef idx="3">
+            <a:schemeClr val="accent1"/>
+          </a:fillRef>
+          <a:effectRef idx="2">
+            <a:schemeClr val="accent1"/>
+          </a:effectRef>
+          <a:fontRef idx="minor">
+            <a:schemeClr val="lt1"/>
+          </a:fontRef>
+        </p:style>
+        <p:txBody>
+          <a:bodyPr rtlCol="0" anchor="ctr"/>
+          <a:lstStyle/>
+          <a:p>
+            <a:pPr algn="ctr"/>
+          </a:p>
+        </p:txBody>
+      </p:sp>
+      <p:sp>
+        <p:nvSpPr>
+          <p:cNvPr id="42" name="TextBox 41"/>
+          <p:cNvSpPr txBox="1"/>
+          <p:nvPr/>
+        </p:nvSpPr>
+        <p:spPr>
+          <a:xfrm>
+            <a:off x="1161288" y="4864608"/>
+            <a:ext cx="2240280" cy="475488"/>
+          </a:xfrm>
+          <a:prstGeom prst="rect">
+            <a:avLst/>
+          </a:prstGeom>
+          <a:noFill/>
+        </p:spPr>
+        <p:txBody>
+          <a:bodyPr wrap="square" anchor="t" lIns="0" rIns="0" tIns="0" bIns="0">
+            <a:spAutoFit/>
+          </a:bodyPr>
+          <a:lstStyle/>
+          <a:p>
+            <a:pPr algn="l">
+              <a:lnSpc>
+                <a:spcPct val="102000"/>
+              </a:lnSpc>
+            </a:pPr>
+            <a:r>
+              <a:rPr sz="1125" b="1">
+                <a:solidFill>
+                  <a:srgbClr val="1A1A1A"/>
+                </a:solidFill>
+                <a:latin typeface="Arial"/>
+                <a:ea typeface="Arial"/>
+              </a:rPr>
+              <a:t>WAF 급등 감지 · 런타임 대응</a:t>
+            </a:r>
+          </a:p>
+        </p:txBody>
+      </p:sp>
+      <p:sp>
+        <p:nvSpPr>
+          <p:cNvPr id="43" name="Rectangle 42"/>
+          <p:cNvSpPr/>
+          <p:nvPr/>
+        </p:nvSpPr>
+        <p:spPr>
+          <a:xfrm>
+            <a:off x="923544" y="5157216"/>
+            <a:ext cx="54864" cy="841248"/>
+          </a:xfrm>
+          <a:prstGeom prst="rect">
+            <a:avLst/>
+          </a:prstGeom>
+          <a:solidFill>
+            <a:srgbClr val="1428A0"/>
+          </a:solidFill>
+          <a:ln>
+            <a:noFill/>
+          </a:ln>
+          <a:effectLst/>
+        </p:spPr>
+        <p:style>
+          <a:lnRef idx="1">
+            <a:schemeClr val="accent1"/>
+          </a:lnRef>
+          <a:fillRef idx="3">
+            <a:schemeClr val="accent1"/>
+          </a:fillRef>
+          <a:effectRef idx="2">
+            <a:schemeClr val="accent1"/>
+          </a:effectRef>
+          <a:fontRef idx="minor">
+            <a:schemeClr val="lt1"/>
+          </a:fontRef>
+        </p:style>
+        <p:txBody>
+          <a:bodyPr rtlCol="0" anchor="ctr"/>
+          <a:lstStyle/>
+          <a:p>
+            <a:pPr algn="ctr"/>
+          </a:p>
+        </p:txBody>
+      </p:sp>
+      <p:sp>
+        <p:nvSpPr>
+          <p:cNvPr id="44" name="TextBox 43"/>
+          <p:cNvSpPr txBox="1"/>
+          <p:nvPr/>
+        </p:nvSpPr>
+        <p:spPr>
+          <a:xfrm>
+            <a:off x="1124712" y="5157216"/>
+            <a:ext cx="2276856" cy="841248"/>
+          </a:xfrm>
+          <a:prstGeom prst="rect">
+            <a:avLst/>
+          </a:prstGeom>
+          <a:noFill/>
+        </p:spPr>
+        <p:txBody>
+          <a:bodyPr wrap="square" anchor="ctr" lIns="0" rIns="0" tIns="0" bIns="0">
+            <a:spAutoFit/>
+          </a:bodyPr>
+          <a:lstStyle/>
+          <a:p>
+            <a:pPr algn="l">
+              <a:lnSpc>
+                <a:spcPct val="106000"/>
+              </a:lnSpc>
+            </a:pPr>
+            <a:r>
+              <a:rPr sz="950" b="1">
+                <a:solidFill>
+                  <a:srgbClr val="1A1A1A"/>
+                </a:solidFill>
+                <a:latin typeface="Arial"/>
+                <a:ea typeface="Arial"/>
+              </a:rPr>
+              <a:t>「고객의 집에 가서 저녁을 같이 먹는 것, 삼성은 상상할 수 없는 일이지만 SK하이닉스는 한다」</a:t>
+            </a:r>
+          </a:p>
+          <a:p>
+            <a:pPr algn="l">
+              <a:lnSpc>
+                <a:spcPct val="106000"/>
+              </a:lnSpc>
+            </a:pPr>
+            <a:r>
+              <a:rPr sz="800" b="0">
+                <a:solidFill>
+                  <a:srgbClr val="8A8A8A"/>
+                </a:solidFill>
+                <a:latin typeface="Arial"/>
+                <a:ea typeface="Arial"/>
+              </a:rPr>
+              <a:t>송용호 · 고객 관계 = 워크로드 접근권</a:t>
+            </a:r>
+          </a:p>
+        </p:txBody>
+      </p:sp>
+      <p:sp>
+        <p:nvSpPr>
+          <p:cNvPr id="45" name="Right Arrow 44"/>
+          <p:cNvSpPr/>
+          <p:nvPr/>
+        </p:nvSpPr>
+        <p:spPr>
+          <a:xfrm>
+            <a:off x="3822191" y="2560320"/>
+            <a:ext cx="9235440" cy="676656"/>
+          </a:xfrm>
+          <a:prstGeom prst="rightArrow">
+            <a:avLst>
+              <a:gd name="adj1" fmla="val 86000"/>
+              <a:gd name="adj2" fmla="val 50000"/>
+            </a:avLst>
+          </a:prstGeom>
+          <a:solidFill>
+            <a:srgbClr val="1428A0"/>
+          </a:solidFill>
+          <a:ln>
+            <a:noFill/>
+          </a:ln>
+          <a:effectLst/>
+        </p:spPr>
+        <p:style>
+          <a:lnRef idx="1">
+            <a:schemeClr val="accent1"/>
+          </a:lnRef>
+          <a:fillRef idx="3">
+            <a:schemeClr val="accent1"/>
+          </a:fillRef>
+          <a:effectRef idx="2">
+            <a:schemeClr val="accent1"/>
+          </a:effectRef>
+          <a:fontRef idx="minor">
+            <a:schemeClr val="lt1"/>
+          </a:fontRef>
+        </p:style>
+        <p:txBody>
+          <a:bodyPr rtlCol="0" anchor="ctr"/>
+          <a:lstStyle/>
+          <a:p>
+            <a:pPr algn="ctr"/>
+          </a:p>
+        </p:txBody>
+      </p:sp>
+      <p:sp>
+        <p:nvSpPr>
+          <p:cNvPr id="46" name="TextBox 45"/>
+          <p:cNvSpPr txBox="1"/>
+          <p:nvPr/>
+        </p:nvSpPr>
+        <p:spPr>
+          <a:xfrm>
+            <a:off x="4133087" y="2633472"/>
+            <a:ext cx="8046719" cy="256032"/>
+          </a:xfrm>
+          <a:prstGeom prst="rect">
+            <a:avLst/>
+          </a:prstGeom>
+          <a:noFill/>
+        </p:spPr>
+        <p:txBody>
+          <a:bodyPr wrap="square" anchor="t" lIns="0" rIns="0" tIns="0" bIns="0">
+            <a:spAutoFit/>
+          </a:bodyPr>
+          <a:lstStyle/>
+          <a:p>
+            <a:pPr algn="l">
+              <a:lnSpc>
+                <a:spcPct val="112000"/>
+              </a:lnSpc>
+            </a:pPr>
+            <a:r>
+              <a:rPr sz="1500" b="1">
+                <a:solidFill>
+                  <a:srgbClr val="FFFFFF"/>
+                </a:solidFill>
+                <a:latin typeface="Arial"/>
+                <a:ea typeface="Arial"/>
+              </a:rPr>
+              <a:t>① FDE 상주 : 삼성 엔지니어가 고객 시스템 안으로</a:t>
+            </a:r>
+          </a:p>
+        </p:txBody>
+      </p:sp>
+      <p:sp>
+        <p:nvSpPr>
+          <p:cNvPr id="47" name="TextBox 46"/>
+          <p:cNvSpPr txBox="1"/>
+          <p:nvPr/>
+        </p:nvSpPr>
+        <p:spPr>
+          <a:xfrm>
+            <a:off x="4133087" y="2907791"/>
+            <a:ext cx="8046719" cy="219456"/>
+          </a:xfrm>
+          <a:prstGeom prst="rect">
+            <a:avLst/>
+          </a:prstGeom>
+          <a:noFill/>
+        </p:spPr>
+        <p:txBody>
+          <a:bodyPr wrap="square" anchor="t" lIns="0" rIns="0" tIns="0" bIns="0">
+            <a:spAutoFit/>
+          </a:bodyPr>
+          <a:lstStyle/>
+          <a:p>
+            <a:pPr algn="l">
+              <a:lnSpc>
+                <a:spcPct val="112000"/>
+              </a:lnSpc>
+            </a:pPr>
+            <a:r>
+              <a:rPr sz="1050" b="0">
+                <a:solidFill>
+                  <a:srgbClr val="AAB8E8"/>
+                </a:solidFill>
+                <a:latin typeface="Arial"/>
+                <a:ea typeface="Arial"/>
+              </a:rPr>
+              <a:t>상주 엔지니어 · 업스트림 코드 · 워크로드 실측 공개</a:t>
+            </a:r>
+          </a:p>
+        </p:txBody>
+      </p:sp>
+      <p:sp>
+        <p:nvSpPr>
+          <p:cNvPr id="48" name="Rectangle 47"/>
+          <p:cNvSpPr/>
+          <p:nvPr/>
+        </p:nvSpPr>
+        <p:spPr>
+          <a:xfrm>
+            <a:off x="3822191" y="3364992"/>
+            <a:ext cx="4526280" cy="1920239"/>
           </a:xfrm>
           <a:prstGeom prst="rect">
             <a:avLst/>
@@ -31031,14 +29784,182 @@
       </p:sp>
       <p:sp>
         <p:nvSpPr>
-          <p:cNvPr id="74" name="TextBox 73"/>
-          <p:cNvSpPr txBox="1"/>
-          <p:nvPr/>
-        </p:nvSpPr>
-        <p:spPr>
-          <a:xfrm>
-            <a:off x="4544568" y="7552944"/>
-            <a:ext cx="868680" cy="274320"/>
+          <p:cNvPr id="49" name="TextBox 48"/>
+          <p:cNvSpPr txBox="1"/>
+          <p:nvPr/>
+        </p:nvSpPr>
+        <p:spPr>
+          <a:xfrm>
+            <a:off x="4005072" y="3456432"/>
+            <a:ext cx="4160520" cy="219456"/>
+          </a:xfrm>
+          <a:prstGeom prst="rect">
+            <a:avLst/>
+          </a:prstGeom>
+          <a:noFill/>
+        </p:spPr>
+        <p:txBody>
+          <a:bodyPr wrap="square" anchor="t" lIns="0" rIns="0" tIns="0" bIns="0">
+            <a:spAutoFit/>
+          </a:bodyPr>
+          <a:lstStyle/>
+          <a:p>
+            <a:pPr algn="l">
+              <a:lnSpc>
+                <a:spcPct val="112000"/>
+              </a:lnSpc>
+            </a:pPr>
+            <a:r>
+              <a:rPr sz="1200" b="1">
+                <a:solidFill>
+                  <a:srgbClr val="1428A0"/>
+                </a:solidFill>
+                <a:latin typeface="Arial"/>
+                <a:ea typeface="Arial"/>
+              </a:rPr>
+              <a:t>고객 선별 · 채널</a:t>
+            </a:r>
+          </a:p>
+        </p:txBody>
+      </p:sp>
+      <p:sp>
+        <p:nvSpPr>
+          <p:cNvPr id="50" name="TextBox 49"/>
+          <p:cNvSpPr txBox="1"/>
+          <p:nvPr/>
+        </p:nvSpPr>
+        <p:spPr>
+          <a:xfrm>
+            <a:off x="4005072" y="3666744"/>
+            <a:ext cx="4160520" cy="201168"/>
+          </a:xfrm>
+          <a:prstGeom prst="rect">
+            <a:avLst/>
+          </a:prstGeom>
+          <a:noFill/>
+        </p:spPr>
+        <p:txBody>
+          <a:bodyPr wrap="square" anchor="t" lIns="0" rIns="0" tIns="0" bIns="0">
+            <a:spAutoFit/>
+          </a:bodyPr>
+          <a:lstStyle/>
+          <a:p>
+            <a:pPr algn="l">
+              <a:lnSpc>
+                <a:spcPct val="112000"/>
+              </a:lnSpc>
+            </a:pPr>
+            <a:r>
+              <a:rPr sz="850" b="0">
+                <a:solidFill>
+                  <a:srgbClr val="8A8A8A"/>
+                </a:solidFill>
+                <a:latin typeface="Arial"/>
+                <a:ea typeface="Arial"/>
+              </a:rPr>
+              <a:t>FDE 상주 조건 · ① 트레이스 접근 ② 캐시 관리자 자체 운영 ③ 물량·규격 파급력</a:t>
+            </a:r>
+          </a:p>
+        </p:txBody>
+      </p:sp>
+      <p:sp>
+        <p:nvSpPr>
+          <p:cNvPr id="51" name="Rectangle 50"/>
+          <p:cNvSpPr/>
+          <p:nvPr/>
+        </p:nvSpPr>
+        <p:spPr>
+          <a:xfrm>
+            <a:off x="3968496" y="3913632"/>
+            <a:ext cx="4233672" cy="256031"/>
+          </a:xfrm>
+          <a:prstGeom prst="rect">
+            <a:avLst/>
+          </a:prstGeom>
+          <a:solidFill>
+            <a:srgbClr val="F4F6FC"/>
+          </a:solidFill>
+          <a:ln>
+            <a:noFill/>
+          </a:ln>
+          <a:effectLst/>
+        </p:spPr>
+        <p:style>
+          <a:lnRef idx="1">
+            <a:schemeClr val="accent1"/>
+          </a:lnRef>
+          <a:fillRef idx="3">
+            <a:schemeClr val="accent1"/>
+          </a:fillRef>
+          <a:effectRef idx="2">
+            <a:schemeClr val="accent1"/>
+          </a:effectRef>
+          <a:fontRef idx="minor">
+            <a:schemeClr val="lt1"/>
+          </a:fontRef>
+        </p:style>
+        <p:txBody>
+          <a:bodyPr rtlCol="0" anchor="ctr"/>
+          <a:lstStyle/>
+          <a:p>
+            <a:pPr algn="ctr"/>
+          </a:p>
+        </p:txBody>
+      </p:sp>
+      <p:sp>
+        <p:nvSpPr>
+          <p:cNvPr id="52" name="Rectangle 51"/>
+          <p:cNvSpPr/>
+          <p:nvPr/>
+        </p:nvSpPr>
+        <p:spPr>
+          <a:xfrm>
+            <a:off x="3968496" y="3913632"/>
+            <a:ext cx="45720" cy="256031"/>
+          </a:xfrm>
+          <a:prstGeom prst="rect">
+            <a:avLst/>
+          </a:prstGeom>
+          <a:solidFill>
+            <a:srgbClr val="1428A0"/>
+          </a:solidFill>
+          <a:ln>
+            <a:noFill/>
+          </a:ln>
+          <a:effectLst/>
+        </p:spPr>
+        <p:style>
+          <a:lnRef idx="1">
+            <a:schemeClr val="accent1"/>
+          </a:lnRef>
+          <a:fillRef idx="3">
+            <a:schemeClr val="accent1"/>
+          </a:fillRef>
+          <a:effectRef idx="2">
+            <a:schemeClr val="accent1"/>
+          </a:effectRef>
+          <a:fontRef idx="minor">
+            <a:schemeClr val="lt1"/>
+          </a:fontRef>
+        </p:style>
+        <p:txBody>
+          <a:bodyPr rtlCol="0" anchor="ctr"/>
+          <a:lstStyle/>
+          <a:p>
+            <a:pPr algn="ctr"/>
+          </a:p>
+        </p:txBody>
+      </p:sp>
+      <p:sp>
+        <p:nvSpPr>
+          <p:cNvPr id="53" name="TextBox 52"/>
+          <p:cNvSpPr txBox="1"/>
+          <p:nvPr/>
+        </p:nvSpPr>
+        <p:spPr>
+          <a:xfrm>
+            <a:off x="4096511" y="3913632"/>
+            <a:ext cx="2103120" cy="256031"/>
           </a:xfrm>
           <a:prstGeom prst="rect">
             <a:avLst/>
@@ -31053,32 +29974,221 @@
           <a:p>
             <a:pPr algn="l">
               <a:lnSpc>
+                <a:spcPct val="100000"/>
+              </a:lnSpc>
+            </a:pPr>
+            <a:r>
+              <a:rPr sz="1000" b="1">
+                <a:solidFill>
+                  <a:srgbClr val="1428A0"/>
+                </a:solidFill>
+                <a:latin typeface="Arial"/>
+                <a:ea typeface="Arial"/>
+              </a:rPr>
+              <a:t>AI 랩</a:t>
+            </a:r>
+          </a:p>
+          <a:p>
+            <a:pPr algn="l">
+              <a:lnSpc>
+                <a:spcPct val="100000"/>
+              </a:lnSpc>
+            </a:pPr>
+            <a:r>
+              <a:rPr sz="825" b="0">
+                <a:solidFill>
+                  <a:srgbClr val="555555"/>
+                </a:solidFill>
+                <a:latin typeface="Arial"/>
+                <a:ea typeface="Arial"/>
+              </a:rPr>
+              <a:t>Anthropic · OpenAI</a:t>
+            </a:r>
+          </a:p>
+        </p:txBody>
+      </p:sp>
+      <p:sp>
+        <p:nvSpPr>
+          <p:cNvPr id="54" name="Right Arrow 53"/>
+          <p:cNvSpPr/>
+          <p:nvPr/>
+        </p:nvSpPr>
+        <p:spPr>
+          <a:xfrm>
+            <a:off x="6217920" y="3977639"/>
+            <a:ext cx="182880" cy="128016"/>
+          </a:xfrm>
+          <a:prstGeom prst="rightArrow">
+            <a:avLst/>
+          </a:prstGeom>
+          <a:solidFill>
+            <a:srgbClr val="1428A0"/>
+          </a:solidFill>
+          <a:ln>
+            <a:noFill/>
+          </a:ln>
+          <a:effectLst/>
+        </p:spPr>
+        <p:style>
+          <a:lnRef idx="1">
+            <a:schemeClr val="accent1"/>
+          </a:lnRef>
+          <a:fillRef idx="3">
+            <a:schemeClr val="accent1"/>
+          </a:fillRef>
+          <a:effectRef idx="2">
+            <a:schemeClr val="accent1"/>
+          </a:effectRef>
+          <a:fontRef idx="minor">
+            <a:schemeClr val="lt1"/>
+          </a:fontRef>
+        </p:style>
+        <p:txBody>
+          <a:bodyPr rtlCol="0" anchor="ctr"/>
+          <a:lstStyle/>
+          <a:p>
+            <a:pPr algn="ctr"/>
+          </a:p>
+        </p:txBody>
+      </p:sp>
+      <p:sp>
+        <p:nvSpPr>
+          <p:cNvPr id="55" name="TextBox 54"/>
+          <p:cNvSpPr txBox="1"/>
+          <p:nvPr/>
+        </p:nvSpPr>
+        <p:spPr>
+          <a:xfrm>
+            <a:off x="6492240" y="3913632"/>
+            <a:ext cx="1691640" cy="256031"/>
+          </a:xfrm>
+          <a:prstGeom prst="rect">
+            <a:avLst/>
+          </a:prstGeom>
+          <a:noFill/>
+        </p:spPr>
+        <p:txBody>
+          <a:bodyPr wrap="square" anchor="ctr" lIns="0" rIns="0" tIns="0" bIns="0">
+            <a:spAutoFit/>
+          </a:bodyPr>
+          <a:lstStyle/>
+          <a:p>
+            <a:pPr algn="l">
+              <a:lnSpc>
                 <a:spcPct val="112000"/>
               </a:lnSpc>
             </a:pPr>
             <a:r>
-              <a:rPr sz="1275" b="1">
+              <a:rPr sz="1000" b="1">
                 <a:solidFill>
                   <a:srgbClr val="1428A0"/>
                 </a:solidFill>
                 <a:latin typeface="Arial"/>
                 <a:ea typeface="Arial"/>
               </a:rPr>
-              <a:t>12개월</a:t>
-            </a:r>
-          </a:p>
-        </p:txBody>
-      </p:sp>
-      <p:sp>
-        <p:nvSpPr>
-          <p:cNvPr id="75" name="TextBox 74"/>
-          <p:cNvSpPr txBox="1"/>
-          <p:nvPr/>
-        </p:nvSpPr>
-        <p:spPr>
-          <a:xfrm>
-            <a:off x="5385816" y="7543800"/>
-            <a:ext cx="2395728" cy="804672"/>
+              <a:t>FDE 상주 Pod 3~5명</a:t>
+            </a:r>
+          </a:p>
+        </p:txBody>
+      </p:sp>
+      <p:sp>
+        <p:nvSpPr>
+          <p:cNvPr id="56" name="Rectangle 55"/>
+          <p:cNvSpPr/>
+          <p:nvPr/>
+        </p:nvSpPr>
+        <p:spPr>
+          <a:xfrm>
+            <a:off x="3968496" y="4224528"/>
+            <a:ext cx="4233672" cy="256031"/>
+          </a:xfrm>
+          <a:prstGeom prst="rect">
+            <a:avLst/>
+          </a:prstGeom>
+          <a:solidFill>
+            <a:srgbClr val="F4F6FC"/>
+          </a:solidFill>
+          <a:ln>
+            <a:noFill/>
+          </a:ln>
+          <a:effectLst/>
+        </p:spPr>
+        <p:style>
+          <a:lnRef idx="1">
+            <a:schemeClr val="accent1"/>
+          </a:lnRef>
+          <a:fillRef idx="3">
+            <a:schemeClr val="accent1"/>
+          </a:fillRef>
+          <a:effectRef idx="2">
+            <a:schemeClr val="accent1"/>
+          </a:effectRef>
+          <a:fontRef idx="minor">
+            <a:schemeClr val="lt1"/>
+          </a:fontRef>
+        </p:style>
+        <p:txBody>
+          <a:bodyPr rtlCol="0" anchor="ctr"/>
+          <a:lstStyle/>
+          <a:p>
+            <a:pPr algn="ctr"/>
+          </a:p>
+        </p:txBody>
+      </p:sp>
+      <p:sp>
+        <p:nvSpPr>
+          <p:cNvPr id="57" name="Rectangle 56"/>
+          <p:cNvSpPr/>
+          <p:nvPr/>
+        </p:nvSpPr>
+        <p:spPr>
+          <a:xfrm>
+            <a:off x="3968496" y="4224528"/>
+            <a:ext cx="45720" cy="256031"/>
+          </a:xfrm>
+          <a:prstGeom prst="rect">
+            <a:avLst/>
+          </a:prstGeom>
+          <a:solidFill>
+            <a:srgbClr val="1428A0"/>
+          </a:solidFill>
+          <a:ln>
+            <a:noFill/>
+          </a:ln>
+          <a:effectLst/>
+        </p:spPr>
+        <p:style>
+          <a:lnRef idx="1">
+            <a:schemeClr val="accent1"/>
+          </a:lnRef>
+          <a:fillRef idx="3">
+            <a:schemeClr val="accent1"/>
+          </a:fillRef>
+          <a:effectRef idx="2">
+            <a:schemeClr val="accent1"/>
+          </a:effectRef>
+          <a:fontRef idx="minor">
+            <a:schemeClr val="lt1"/>
+          </a:fontRef>
+        </p:style>
+        <p:txBody>
+          <a:bodyPr rtlCol="0" anchor="ctr"/>
+          <a:lstStyle/>
+          <a:p>
+            <a:pPr algn="ctr"/>
+          </a:p>
+        </p:txBody>
+      </p:sp>
+      <p:sp>
+        <p:nvSpPr>
+          <p:cNvPr id="58" name="TextBox 57"/>
+          <p:cNvSpPr txBox="1"/>
+          <p:nvPr/>
+        </p:nvSpPr>
+        <p:spPr>
+          <a:xfrm>
+            <a:off x="4096511" y="4224528"/>
+            <a:ext cx="2103120" cy="256031"/>
           </a:xfrm>
           <a:prstGeom prst="rect">
             <a:avLst/>
@@ -31093,32 +30203,190 @@
           <a:p>
             <a:pPr algn="l">
               <a:lnSpc>
-                <a:spcPct val="104000"/>
-              </a:lnSpc>
-            </a:pPr>
-            <a:r>
-              <a:rPr sz="900" b="0">
+                <a:spcPct val="100000"/>
+              </a:lnSpc>
+            </a:pPr>
+            <a:r>
+              <a:rPr sz="1000" b="1">
+                <a:solidFill>
+                  <a:srgbClr val="1428A0"/>
+                </a:solidFill>
+                <a:latin typeface="Arial"/>
+                <a:ea typeface="Arial"/>
+              </a:rPr>
+              <a:t>NVIDIA 생태계</a:t>
+            </a:r>
+          </a:p>
+          <a:p>
+            <a:pPr algn="l">
+              <a:lnSpc>
+                <a:spcPct val="100000"/>
+              </a:lnSpc>
+            </a:pPr>
+            <a:r>
+              <a:rPr sz="825" b="0">
                 <a:solidFill>
                   <a:srgbClr val="555555"/>
                 </a:solidFill>
                 <a:latin typeface="Arial"/>
                 <a:ea typeface="Arial"/>
               </a:rPr>
-              <a:t>플러그인 메인라인 머지 · 고객 워크로드에서 QLC 유효 DWPD ≥ 1 실증 · WAF 급등 감지·대응 시제품(6장)</a:t>
-            </a:r>
-          </a:p>
-        </p:txBody>
-      </p:sp>
-      <p:sp>
-        <p:nvSpPr>
-          <p:cNvPr id="76" name="Right Arrow 75"/>
+              <a:t>CMX · Dynamo KVBM · NIXL</a:t>
+            </a:r>
+          </a:p>
+        </p:txBody>
+      </p:sp>
+      <p:sp>
+        <p:nvSpPr>
+          <p:cNvPr id="59" name="Right Arrow 58"/>
           <p:cNvSpPr/>
           <p:nvPr/>
         </p:nvSpPr>
         <p:spPr>
           <a:xfrm>
-            <a:off x="7927848" y="7863840"/>
-            <a:ext cx="164592" cy="164592"/>
+            <a:off x="6217920" y="4288536"/>
+            <a:ext cx="182880" cy="128016"/>
+          </a:xfrm>
+          <a:prstGeom prst="rightArrow">
+            <a:avLst/>
+          </a:prstGeom>
+          <a:solidFill>
+            <a:srgbClr val="1428A0"/>
+          </a:solidFill>
+          <a:ln>
+            <a:noFill/>
+          </a:ln>
+          <a:effectLst/>
+        </p:spPr>
+        <p:style>
+          <a:lnRef idx="1">
+            <a:schemeClr val="accent1"/>
+          </a:lnRef>
+          <a:fillRef idx="3">
+            <a:schemeClr val="accent1"/>
+          </a:fillRef>
+          <a:effectRef idx="2">
+            <a:schemeClr val="accent1"/>
+          </a:effectRef>
+          <a:fontRef idx="minor">
+            <a:schemeClr val="lt1"/>
+          </a:fontRef>
+        </p:style>
+        <p:txBody>
+          <a:bodyPr rtlCol="0" anchor="ctr"/>
+          <a:lstStyle/>
+          <a:p>
+            <a:pPr algn="ctr"/>
+          </a:p>
+        </p:txBody>
+      </p:sp>
+      <p:sp>
+        <p:nvSpPr>
+          <p:cNvPr id="60" name="TextBox 59"/>
+          <p:cNvSpPr txBox="1"/>
+          <p:nvPr/>
+        </p:nvSpPr>
+        <p:spPr>
+          <a:xfrm>
+            <a:off x="6492240" y="4224528"/>
+            <a:ext cx="1691640" cy="256031"/>
+          </a:xfrm>
+          <a:prstGeom prst="rect">
+            <a:avLst/>
+          </a:prstGeom>
+          <a:noFill/>
+        </p:spPr>
+        <p:txBody>
+          <a:bodyPr wrap="square" anchor="ctr" lIns="0" rIns="0" tIns="0" bIns="0">
+            <a:spAutoFit/>
+          </a:bodyPr>
+          <a:lstStyle/>
+          <a:p>
+            <a:pPr algn="l">
+              <a:lnSpc>
+                <a:spcPct val="112000"/>
+              </a:lnSpc>
+            </a:pPr>
+            <a:r>
+              <a:rPr sz="1000" b="1">
+                <a:solidFill>
+                  <a:srgbClr val="1428A0"/>
+                </a:solidFill>
+                <a:latin typeface="Arial"/>
+                <a:ea typeface="Arial"/>
+              </a:rPr>
+              <a:t>FDE 플랫폼 팀 파견</a:t>
+            </a:r>
+          </a:p>
+        </p:txBody>
+      </p:sp>
+      <p:sp>
+        <p:nvSpPr>
+          <p:cNvPr id="61" name="TextBox 60"/>
+          <p:cNvSpPr txBox="1"/>
+          <p:nvPr/>
+        </p:nvSpPr>
+        <p:spPr>
+          <a:xfrm>
+            <a:off x="4096511" y="4535424"/>
+            <a:ext cx="2103120" cy="256031"/>
+          </a:xfrm>
+          <a:prstGeom prst="rect">
+            <a:avLst/>
+          </a:prstGeom>
+          <a:noFill/>
+        </p:spPr>
+        <p:txBody>
+          <a:bodyPr wrap="square" anchor="ctr" lIns="0" rIns="0" tIns="0" bIns="0">
+            <a:spAutoFit/>
+          </a:bodyPr>
+          <a:lstStyle/>
+          <a:p>
+            <a:pPr algn="l">
+              <a:lnSpc>
+                <a:spcPct val="100000"/>
+              </a:lnSpc>
+            </a:pPr>
+            <a:r>
+              <a:rPr sz="1000" b="1">
+                <a:solidFill>
+                  <a:srgbClr val="1A1A1A"/>
+                </a:solidFill>
+                <a:latin typeface="Arial"/>
+                <a:ea typeface="Arial"/>
+              </a:rPr>
+              <a:t>하이퍼스케일러</a:t>
+            </a:r>
+          </a:p>
+          <a:p>
+            <a:pPr algn="l">
+              <a:lnSpc>
+                <a:spcPct val="100000"/>
+              </a:lnSpc>
+            </a:pPr>
+            <a:r>
+              <a:rPr sz="825" b="0">
+                <a:solidFill>
+                  <a:srgbClr val="555555"/>
+                </a:solidFill>
+                <a:latin typeface="Arial"/>
+                <a:ea typeface="Arial"/>
+              </a:rPr>
+              <a:t>Meta · Google · MS · AWS</a:t>
+            </a:r>
+          </a:p>
+        </p:txBody>
+      </p:sp>
+      <p:sp>
+        <p:nvSpPr>
+          <p:cNvPr id="62" name="Right Arrow 61"/>
+          <p:cNvSpPr/>
+          <p:nvPr/>
+        </p:nvSpPr>
+        <p:spPr>
+          <a:xfrm>
+            <a:off x="6217920" y="4599431"/>
+            <a:ext cx="182880" cy="128016"/>
           </a:xfrm>
           <a:prstGeom prst="rightArrow">
             <a:avLst/>
@@ -31155,14 +30423,3187 @@
       </p:sp>
       <p:sp>
         <p:nvSpPr>
-          <p:cNvPr id="77" name="Rectangle 76"/>
+          <p:cNvPr id="63" name="TextBox 62"/>
+          <p:cNvSpPr txBox="1"/>
+          <p:nvPr/>
+        </p:nvSpPr>
+        <p:spPr>
+          <a:xfrm>
+            <a:off x="6492240" y="4535424"/>
+            <a:ext cx="1691640" cy="256031"/>
+          </a:xfrm>
+          <a:prstGeom prst="rect">
+            <a:avLst/>
+          </a:prstGeom>
+          <a:noFill/>
+        </p:spPr>
+        <p:txBody>
+          <a:bodyPr wrap="square" anchor="ctr" lIns="0" rIns="0" tIns="0" bIns="0">
+            <a:spAutoFit/>
+          </a:bodyPr>
+          <a:lstStyle/>
+          <a:p>
+            <a:pPr algn="l">
+              <a:lnSpc>
+                <a:spcPct val="112000"/>
+              </a:lnSpc>
+            </a:pPr>
+            <a:r>
+              <a:rPr sz="1000" b="1">
+                <a:solidFill>
+                  <a:srgbClr val="555555"/>
+                </a:solidFill>
+                <a:latin typeface="Arial"/>
+                <a:ea typeface="Arial"/>
+              </a:rPr>
+              <a:t>업스트림 · OCP 규격</a:t>
+            </a:r>
+          </a:p>
+        </p:txBody>
+      </p:sp>
+      <p:sp>
+        <p:nvSpPr>
+          <p:cNvPr id="64" name="TextBox 63"/>
+          <p:cNvSpPr txBox="1"/>
+          <p:nvPr/>
+        </p:nvSpPr>
+        <p:spPr>
+          <a:xfrm>
+            <a:off x="4096511" y="4846320"/>
+            <a:ext cx="2103120" cy="256031"/>
+          </a:xfrm>
+          <a:prstGeom prst="rect">
+            <a:avLst/>
+          </a:prstGeom>
+          <a:noFill/>
+        </p:spPr>
+        <p:txBody>
+          <a:bodyPr wrap="square" anchor="ctr" lIns="0" rIns="0" tIns="0" bIns="0">
+            <a:spAutoFit/>
+          </a:bodyPr>
+          <a:lstStyle/>
+          <a:p>
+            <a:pPr algn="l">
+              <a:lnSpc>
+                <a:spcPct val="100000"/>
+              </a:lnSpc>
+            </a:pPr>
+            <a:r>
+              <a:rPr sz="1000" b="1">
+                <a:solidFill>
+                  <a:srgbClr val="1A1A1A"/>
+                </a:solidFill>
+                <a:latin typeface="Arial"/>
+                <a:ea typeface="Arial"/>
+              </a:rPr>
+              <a:t>OEM · 네오클라우드</a:t>
+            </a:r>
+          </a:p>
+          <a:p>
+            <a:pPr algn="l">
+              <a:lnSpc>
+                <a:spcPct val="100000"/>
+              </a:lnSpc>
+            </a:pPr>
+            <a:r>
+              <a:rPr sz="825" b="0">
+                <a:solidFill>
+                  <a:srgbClr val="555555"/>
+                </a:solidFill>
+                <a:latin typeface="Arial"/>
+                <a:ea typeface="Arial"/>
+              </a:rPr>
+              <a:t>자체 캐시 스택 없음</a:t>
+            </a:r>
+          </a:p>
+        </p:txBody>
+      </p:sp>
+      <p:sp>
+        <p:nvSpPr>
+          <p:cNvPr id="65" name="Right Arrow 64"/>
           <p:cNvSpPr/>
           <p:nvPr/>
         </p:nvSpPr>
         <p:spPr>
           <a:xfrm>
-            <a:off x="8110728" y="7498079"/>
-            <a:ext cx="3493008" cy="896112"/>
+            <a:off x="6217920" y="4910327"/>
+            <a:ext cx="182880" cy="128016"/>
+          </a:xfrm>
+          <a:prstGeom prst="rightArrow">
+            <a:avLst/>
+          </a:prstGeom>
+          <a:solidFill>
+            <a:srgbClr val="AAB8E8"/>
+          </a:solidFill>
+          <a:ln>
+            <a:noFill/>
+          </a:ln>
+          <a:effectLst/>
+        </p:spPr>
+        <p:style>
+          <a:lnRef idx="1">
+            <a:schemeClr val="accent1"/>
+          </a:lnRef>
+          <a:fillRef idx="3">
+            <a:schemeClr val="accent1"/>
+          </a:fillRef>
+          <a:effectRef idx="2">
+            <a:schemeClr val="accent1"/>
+          </a:effectRef>
+          <a:fontRef idx="minor">
+            <a:schemeClr val="lt1"/>
+          </a:fontRef>
+        </p:style>
+        <p:txBody>
+          <a:bodyPr rtlCol="0" anchor="ctr"/>
+          <a:lstStyle/>
+          <a:p>
+            <a:pPr algn="ctr"/>
+          </a:p>
+        </p:txBody>
+      </p:sp>
+      <p:sp>
+        <p:nvSpPr>
+          <p:cNvPr id="66" name="TextBox 65"/>
+          <p:cNvSpPr txBox="1"/>
+          <p:nvPr/>
+        </p:nvSpPr>
+        <p:spPr>
+          <a:xfrm>
+            <a:off x="6492240" y="4846320"/>
+            <a:ext cx="1691640" cy="256031"/>
+          </a:xfrm>
+          <a:prstGeom prst="rect">
+            <a:avLst/>
+          </a:prstGeom>
+          <a:noFill/>
+        </p:spPr>
+        <p:txBody>
+          <a:bodyPr wrap="square" anchor="ctr" lIns="0" rIns="0" tIns="0" bIns="0">
+            <a:spAutoFit/>
+          </a:bodyPr>
+          <a:lstStyle/>
+          <a:p>
+            <a:pPr algn="l">
+              <a:lnSpc>
+                <a:spcPct val="112000"/>
+              </a:lnSpc>
+            </a:pPr>
+            <a:r>
+              <a:rPr sz="1000" b="1">
+                <a:solidFill>
+                  <a:srgbClr val="555555"/>
+                </a:solidFill>
+                <a:latin typeface="Arial"/>
+                <a:ea typeface="Arial"/>
+              </a:rPr>
+              <a:t>레퍼런스 스택 제공</a:t>
+            </a:r>
+          </a:p>
+        </p:txBody>
+      </p:sp>
+      <p:sp>
+        <p:nvSpPr>
+          <p:cNvPr id="67" name="Rectangle 66"/>
+          <p:cNvSpPr/>
+          <p:nvPr/>
+        </p:nvSpPr>
+        <p:spPr>
+          <a:xfrm>
+            <a:off x="8531351" y="3364992"/>
+            <a:ext cx="4526280" cy="1920239"/>
+          </a:xfrm>
+          <a:prstGeom prst="rect">
+            <a:avLst/>
+          </a:prstGeom>
+          <a:solidFill>
+            <a:srgbClr val="FFFFFF"/>
+          </a:solidFill>
+          <a:ln w="9525">
+            <a:solidFill>
+              <a:srgbClr val="D9D9D9"/>
+            </a:solidFill>
+          </a:ln>
+          <a:effectLst/>
+        </p:spPr>
+        <p:style>
+          <a:lnRef idx="1">
+            <a:schemeClr val="accent1"/>
+          </a:lnRef>
+          <a:fillRef idx="3">
+            <a:schemeClr val="accent1"/>
+          </a:fillRef>
+          <a:effectRef idx="2">
+            <a:schemeClr val="accent1"/>
+          </a:effectRef>
+          <a:fontRef idx="minor">
+            <a:schemeClr val="lt1"/>
+          </a:fontRef>
+        </p:style>
+        <p:txBody>
+          <a:bodyPr rtlCol="0" anchor="ctr"/>
+          <a:lstStyle/>
+          <a:p>
+            <a:pPr algn="ctr"/>
+          </a:p>
+        </p:txBody>
+      </p:sp>
+      <p:sp>
+        <p:nvSpPr>
+          <p:cNvPr id="68" name="TextBox 67"/>
+          <p:cNvSpPr txBox="1"/>
+          <p:nvPr/>
+        </p:nvSpPr>
+        <p:spPr>
+          <a:xfrm>
+            <a:off x="8714231" y="3456432"/>
+            <a:ext cx="4160520" cy="219456"/>
+          </a:xfrm>
+          <a:prstGeom prst="rect">
+            <a:avLst/>
+          </a:prstGeom>
+          <a:noFill/>
+        </p:spPr>
+        <p:txBody>
+          <a:bodyPr wrap="square" anchor="t" lIns="0" rIns="0" tIns="0" bIns="0">
+            <a:spAutoFit/>
+          </a:bodyPr>
+          <a:lstStyle/>
+          <a:p>
+            <a:pPr algn="l">
+              <a:lnSpc>
+                <a:spcPct val="112000"/>
+              </a:lnSpc>
+            </a:pPr>
+            <a:r>
+              <a:rPr sz="1200" b="0">
+                <a:solidFill>
+                  <a:srgbClr val="8A8A8A"/>
+                </a:solidFill>
+                <a:latin typeface="Arial"/>
+                <a:ea typeface="Arial"/>
+              </a:rPr>
+              <a:t>선례 · </a:t>
+            </a:r>
+            <a:r>
+              <a:rPr sz="1200" b="1">
+                <a:solidFill>
+                  <a:srgbClr val="1428A0"/>
+                </a:solidFill>
+                <a:latin typeface="Arial"/>
+                <a:ea typeface="Arial"/>
+              </a:rPr>
+              <a:t>Palantir FDE</a:t>
+            </a:r>
+            <a:r>
+              <a:rPr sz="900" b="0">
+                <a:solidFill>
+                  <a:srgbClr val="555555"/>
+                </a:solidFill>
+                <a:latin typeface="Arial"/>
+                <a:ea typeface="Arial"/>
+              </a:rPr>
+              <a:t>   상주 → 코드 → 성과 평가</a:t>
+            </a:r>
+          </a:p>
+        </p:txBody>
+      </p:sp>
+      <p:sp>
+        <p:nvSpPr>
+          <p:cNvPr id="69" name="Oval 68"/>
+          <p:cNvSpPr/>
+          <p:nvPr/>
+        </p:nvSpPr>
+        <p:spPr>
+          <a:xfrm>
+            <a:off x="8800551" y="3730752"/>
+            <a:ext cx="118140" cy="118140"/>
+          </a:xfrm>
+          <a:prstGeom prst="ellipse">
+            <a:avLst/>
+          </a:prstGeom>
+          <a:solidFill>
+            <a:srgbClr val="1428A0"/>
+          </a:solidFill>
+          <a:ln>
+            <a:noFill/>
+          </a:ln>
+          <a:effectLst/>
+        </p:spPr>
+        <p:style>
+          <a:lnRef idx="1">
+            <a:schemeClr val="accent1"/>
+          </a:lnRef>
+          <a:fillRef idx="3">
+            <a:schemeClr val="accent1"/>
+          </a:fillRef>
+          <a:effectRef idx="2">
+            <a:schemeClr val="accent1"/>
+          </a:effectRef>
+          <a:fontRef idx="minor">
+            <a:schemeClr val="lt1"/>
+          </a:fontRef>
+        </p:style>
+        <p:txBody>
+          <a:bodyPr rtlCol="0" anchor="ctr"/>
+          <a:lstStyle/>
+          <a:p>
+            <a:pPr algn="ctr"/>
+          </a:p>
+        </p:txBody>
+      </p:sp>
+      <p:sp>
+        <p:nvSpPr>
+          <p:cNvPr id="70" name="Round Same Side Corner Rectangle 69"/>
+          <p:cNvSpPr/>
+          <p:nvPr/>
+        </p:nvSpPr>
+        <p:spPr>
+          <a:xfrm>
+            <a:off x="8750807" y="3867546"/>
+            <a:ext cx="217627" cy="174101"/>
+          </a:xfrm>
+          <a:prstGeom prst="round2SameRect">
+            <a:avLst>
+              <a:gd name="adj1" fmla="val 50000"/>
+              <a:gd name="adj2" fmla="val 0"/>
+            </a:avLst>
+          </a:prstGeom>
+          <a:solidFill>
+            <a:srgbClr val="1428A0"/>
+          </a:solidFill>
+          <a:ln>
+            <a:noFill/>
+          </a:ln>
+          <a:effectLst/>
+        </p:spPr>
+        <p:style>
+          <a:lnRef idx="1">
+            <a:schemeClr val="accent1"/>
+          </a:lnRef>
+          <a:fillRef idx="3">
+            <a:schemeClr val="accent1"/>
+          </a:fillRef>
+          <a:effectRef idx="2">
+            <a:schemeClr val="accent1"/>
+          </a:effectRef>
+          <a:fontRef idx="minor">
+            <a:schemeClr val="lt1"/>
+          </a:fontRef>
+        </p:style>
+        <p:txBody>
+          <a:bodyPr rtlCol="0" anchor="ctr"/>
+          <a:lstStyle/>
+          <a:p>
+            <a:pPr algn="ctr"/>
+          </a:p>
+        </p:txBody>
+      </p:sp>
+      <p:sp>
+        <p:nvSpPr>
+          <p:cNvPr id="71" name="Oval 70"/>
+          <p:cNvSpPr/>
+          <p:nvPr/>
+        </p:nvSpPr>
+        <p:spPr>
+          <a:xfrm>
+            <a:off x="9073042" y="3730752"/>
+            <a:ext cx="118140" cy="118140"/>
+          </a:xfrm>
+          <a:prstGeom prst="ellipse">
+            <a:avLst/>
+          </a:prstGeom>
+          <a:solidFill>
+            <a:srgbClr val="1428A0"/>
+          </a:solidFill>
+          <a:ln>
+            <a:noFill/>
+          </a:ln>
+          <a:effectLst/>
+        </p:spPr>
+        <p:style>
+          <a:lnRef idx="1">
+            <a:schemeClr val="accent1"/>
+          </a:lnRef>
+          <a:fillRef idx="3">
+            <a:schemeClr val="accent1"/>
+          </a:fillRef>
+          <a:effectRef idx="2">
+            <a:schemeClr val="accent1"/>
+          </a:effectRef>
+          <a:fontRef idx="minor">
+            <a:schemeClr val="lt1"/>
+          </a:fontRef>
+        </p:style>
+        <p:txBody>
+          <a:bodyPr rtlCol="0" anchor="ctr"/>
+          <a:lstStyle/>
+          <a:p>
+            <a:pPr algn="ctr"/>
+          </a:p>
+        </p:txBody>
+      </p:sp>
+      <p:sp>
+        <p:nvSpPr>
+          <p:cNvPr id="72" name="Round Same Side Corner Rectangle 71"/>
+          <p:cNvSpPr/>
+          <p:nvPr/>
+        </p:nvSpPr>
+        <p:spPr>
+          <a:xfrm>
+            <a:off x="9023299" y="3867546"/>
+            <a:ext cx="217627" cy="174101"/>
+          </a:xfrm>
+          <a:prstGeom prst="round2SameRect">
+            <a:avLst>
+              <a:gd name="adj1" fmla="val 50000"/>
+              <a:gd name="adj2" fmla="val 0"/>
+            </a:avLst>
+          </a:prstGeom>
+          <a:solidFill>
+            <a:srgbClr val="1428A0"/>
+          </a:solidFill>
+          <a:ln>
+            <a:noFill/>
+          </a:ln>
+          <a:effectLst/>
+        </p:spPr>
+        <p:style>
+          <a:lnRef idx="1">
+            <a:schemeClr val="accent1"/>
+          </a:lnRef>
+          <a:fillRef idx="3">
+            <a:schemeClr val="accent1"/>
+          </a:fillRef>
+          <a:effectRef idx="2">
+            <a:schemeClr val="accent1"/>
+          </a:effectRef>
+          <a:fontRef idx="minor">
+            <a:schemeClr val="lt1"/>
+          </a:fontRef>
+        </p:style>
+        <p:txBody>
+          <a:bodyPr rtlCol="0" anchor="ctr"/>
+          <a:lstStyle/>
+          <a:p>
+            <a:pPr algn="ctr"/>
+          </a:p>
+        </p:txBody>
+      </p:sp>
+      <p:sp>
+        <p:nvSpPr>
+          <p:cNvPr id="73" name="Oval 72"/>
+          <p:cNvSpPr/>
+          <p:nvPr/>
+        </p:nvSpPr>
+        <p:spPr>
+          <a:xfrm>
+            <a:off x="9345533" y="3730752"/>
+            <a:ext cx="118140" cy="118140"/>
+          </a:xfrm>
+          <a:prstGeom prst="ellipse">
+            <a:avLst/>
+          </a:prstGeom>
+          <a:solidFill>
+            <a:srgbClr val="1428A0"/>
+          </a:solidFill>
+          <a:ln>
+            <a:noFill/>
+          </a:ln>
+          <a:effectLst/>
+        </p:spPr>
+        <p:style>
+          <a:lnRef idx="1">
+            <a:schemeClr val="accent1"/>
+          </a:lnRef>
+          <a:fillRef idx="3">
+            <a:schemeClr val="accent1"/>
+          </a:fillRef>
+          <a:effectRef idx="2">
+            <a:schemeClr val="accent1"/>
+          </a:effectRef>
+          <a:fontRef idx="minor">
+            <a:schemeClr val="lt1"/>
+          </a:fontRef>
+        </p:style>
+        <p:txBody>
+          <a:bodyPr rtlCol="0" anchor="ctr"/>
+          <a:lstStyle/>
+          <a:p>
+            <a:pPr algn="ctr"/>
+          </a:p>
+        </p:txBody>
+      </p:sp>
+      <p:sp>
+        <p:nvSpPr>
+          <p:cNvPr id="74" name="Round Same Side Corner Rectangle 73"/>
+          <p:cNvSpPr/>
+          <p:nvPr/>
+        </p:nvSpPr>
+        <p:spPr>
+          <a:xfrm>
+            <a:off x="9295790" y="3867546"/>
+            <a:ext cx="217627" cy="174101"/>
+          </a:xfrm>
+          <a:prstGeom prst="round2SameRect">
+            <a:avLst>
+              <a:gd name="adj1" fmla="val 50000"/>
+              <a:gd name="adj2" fmla="val 0"/>
+            </a:avLst>
+          </a:prstGeom>
+          <a:solidFill>
+            <a:srgbClr val="1428A0"/>
+          </a:solidFill>
+          <a:ln>
+            <a:noFill/>
+          </a:ln>
+          <a:effectLst/>
+        </p:spPr>
+        <p:style>
+          <a:lnRef idx="1">
+            <a:schemeClr val="accent1"/>
+          </a:lnRef>
+          <a:fillRef idx="3">
+            <a:schemeClr val="accent1"/>
+          </a:fillRef>
+          <a:effectRef idx="2">
+            <a:schemeClr val="accent1"/>
+          </a:effectRef>
+          <a:fontRef idx="minor">
+            <a:schemeClr val="lt1"/>
+          </a:fontRef>
+        </p:style>
+        <p:txBody>
+          <a:bodyPr rtlCol="0" anchor="ctr"/>
+          <a:lstStyle/>
+          <a:p>
+            <a:pPr algn="ctr"/>
+          </a:p>
+        </p:txBody>
+      </p:sp>
+      <p:sp>
+        <p:nvSpPr>
+          <p:cNvPr id="75" name="Right Arrow 74"/>
+          <p:cNvSpPr/>
+          <p:nvPr/>
+        </p:nvSpPr>
+        <p:spPr>
+          <a:xfrm>
+            <a:off x="9623145" y="3822191"/>
+            <a:ext cx="237744" cy="146304"/>
+          </a:xfrm>
+          <a:prstGeom prst="rightArrow">
+            <a:avLst/>
+          </a:prstGeom>
+          <a:solidFill>
+            <a:srgbClr val="AAB8E8"/>
+          </a:solidFill>
+          <a:ln>
+            <a:noFill/>
+          </a:ln>
+          <a:effectLst/>
+        </p:spPr>
+        <p:style>
+          <a:lnRef idx="1">
+            <a:schemeClr val="accent1"/>
+          </a:lnRef>
+          <a:fillRef idx="3">
+            <a:schemeClr val="accent1"/>
+          </a:fillRef>
+          <a:effectRef idx="2">
+            <a:schemeClr val="accent1"/>
+          </a:effectRef>
+          <a:fontRef idx="minor">
+            <a:schemeClr val="lt1"/>
+          </a:fontRef>
+        </p:style>
+        <p:txBody>
+          <a:bodyPr rtlCol="0" anchor="ctr"/>
+          <a:lstStyle/>
+          <a:p>
+            <a:pPr algn="ctr"/>
+          </a:p>
+        </p:txBody>
+      </p:sp>
+      <p:sp>
+        <p:nvSpPr>
+          <p:cNvPr id="76" name="Rectangle 75"/>
+          <p:cNvSpPr/>
+          <p:nvPr/>
+        </p:nvSpPr>
+        <p:spPr>
+          <a:xfrm>
+            <a:off x="9934041" y="3712464"/>
+            <a:ext cx="1133856" cy="347472"/>
+          </a:xfrm>
+          <a:prstGeom prst="rect">
+            <a:avLst/>
+          </a:prstGeom>
+          <a:solidFill>
+            <a:srgbClr val="FFFFFF"/>
+          </a:solidFill>
+          <a:ln w="12700">
+            <a:solidFill>
+              <a:srgbClr val="1428A0"/>
+            </a:solidFill>
+          </a:ln>
+          <a:effectLst/>
+        </p:spPr>
+        <p:style>
+          <a:lnRef idx="1">
+            <a:schemeClr val="accent1"/>
+          </a:lnRef>
+          <a:fillRef idx="3">
+            <a:schemeClr val="accent1"/>
+          </a:fillRef>
+          <a:effectRef idx="2">
+            <a:schemeClr val="accent1"/>
+          </a:effectRef>
+          <a:fontRef idx="minor">
+            <a:schemeClr val="lt1"/>
+          </a:fontRef>
+        </p:style>
+        <p:txBody>
+          <a:bodyPr rtlCol="0" anchor="ctr"/>
+          <a:lstStyle/>
+          <a:p>
+            <a:pPr algn="ctr"/>
+          </a:p>
+        </p:txBody>
+      </p:sp>
+      <p:sp>
+        <p:nvSpPr>
+          <p:cNvPr id="77" name="TextBox 76"/>
+          <p:cNvSpPr txBox="1"/>
+          <p:nvPr/>
+        </p:nvSpPr>
+        <p:spPr>
+          <a:xfrm>
+            <a:off x="9934041" y="3712464"/>
+            <a:ext cx="1133856" cy="347472"/>
+          </a:xfrm>
+          <a:prstGeom prst="rect">
+            <a:avLst/>
+          </a:prstGeom>
+          <a:noFill/>
+        </p:spPr>
+        <p:txBody>
+          <a:bodyPr wrap="square" anchor="ctr" lIns="0" rIns="0" tIns="0" bIns="0">
+            <a:spAutoFit/>
+          </a:bodyPr>
+          <a:lstStyle/>
+          <a:p>
+            <a:pPr algn="ctr">
+              <a:lnSpc>
+                <a:spcPct val="112000"/>
+              </a:lnSpc>
+            </a:pPr>
+            <a:r>
+              <a:rPr sz="1000" b="1">
+                <a:solidFill>
+                  <a:srgbClr val="1A1A1A"/>
+                </a:solidFill>
+                <a:latin typeface="Arial"/>
+                <a:ea typeface="Arial"/>
+              </a:rPr>
+              <a:t>고객 현장</a:t>
+            </a:r>
+          </a:p>
+        </p:txBody>
+      </p:sp>
+      <p:sp>
+        <p:nvSpPr>
+          <p:cNvPr id="78" name="TextBox 77"/>
+          <p:cNvSpPr txBox="1"/>
+          <p:nvPr/>
+        </p:nvSpPr>
+        <p:spPr>
+          <a:xfrm>
+            <a:off x="8750807" y="4096512"/>
+            <a:ext cx="4087368" cy="201168"/>
+          </a:xfrm>
+          <a:prstGeom prst="rect">
+            <a:avLst/>
+          </a:prstGeom>
+          <a:noFill/>
+        </p:spPr>
+        <p:txBody>
+          <a:bodyPr wrap="square" anchor="t" lIns="0" rIns="0" tIns="0" bIns="0">
+            <a:spAutoFit/>
+          </a:bodyPr>
+          <a:lstStyle/>
+          <a:p>
+            <a:pPr algn="l">
+              <a:lnSpc>
+                <a:spcPct val="112000"/>
+              </a:lnSpc>
+            </a:pPr>
+            <a:r>
+              <a:rPr sz="875" b="0">
+                <a:solidFill>
+                  <a:srgbClr val="555555"/>
+                </a:solidFill>
+                <a:latin typeface="Arial"/>
+                <a:ea typeface="Arial"/>
+              </a:rPr>
+              <a:t>주가 수익률 640% · 고객 락인의 동력 · Anthropic · OpenAI가 GTM 모델로 채택</a:t>
+            </a:r>
+          </a:p>
+        </p:txBody>
+      </p:sp>
+      <p:sp>
+        <p:nvSpPr>
+          <p:cNvPr id="79" name="Rectangle 78"/>
+          <p:cNvSpPr/>
+          <p:nvPr/>
+        </p:nvSpPr>
+        <p:spPr>
+          <a:xfrm>
+            <a:off x="8714231" y="4334256"/>
+            <a:ext cx="4160520" cy="10972"/>
+          </a:xfrm>
+          <a:prstGeom prst="rect">
+            <a:avLst/>
+          </a:prstGeom>
+          <a:solidFill>
+            <a:srgbClr val="D9D9D9"/>
+          </a:solidFill>
+          <a:ln>
+            <a:noFill/>
+          </a:ln>
+          <a:effectLst/>
+        </p:spPr>
+        <p:style>
+          <a:lnRef idx="1">
+            <a:schemeClr val="accent1"/>
+          </a:lnRef>
+          <a:fillRef idx="3">
+            <a:schemeClr val="accent1"/>
+          </a:fillRef>
+          <a:effectRef idx="2">
+            <a:schemeClr val="accent1"/>
+          </a:effectRef>
+          <a:fontRef idx="minor">
+            <a:schemeClr val="lt1"/>
+          </a:fontRef>
+        </p:style>
+        <p:txBody>
+          <a:bodyPr rtlCol="0" anchor="ctr"/>
+          <a:lstStyle/>
+          <a:p>
+            <a:pPr algn="ctr"/>
+          </a:p>
+        </p:txBody>
+      </p:sp>
+      <p:sp>
+        <p:nvSpPr>
+          <p:cNvPr id="80" name="TextBox 79"/>
+          <p:cNvSpPr txBox="1"/>
+          <p:nvPr/>
+        </p:nvSpPr>
+        <p:spPr>
+          <a:xfrm>
+            <a:off x="8714231" y="4389120"/>
+            <a:ext cx="4160520" cy="219456"/>
+          </a:xfrm>
+          <a:prstGeom prst="rect">
+            <a:avLst/>
+          </a:prstGeom>
+          <a:noFill/>
+        </p:spPr>
+        <p:txBody>
+          <a:bodyPr wrap="square" anchor="t" lIns="0" rIns="0" tIns="0" bIns="0">
+            <a:spAutoFit/>
+          </a:bodyPr>
+          <a:lstStyle/>
+          <a:p>
+            <a:pPr algn="l">
+              <a:lnSpc>
+                <a:spcPct val="112000"/>
+              </a:lnSpc>
+            </a:pPr>
+            <a:r>
+              <a:rPr sz="1200" b="0">
+                <a:solidFill>
+                  <a:srgbClr val="8A8A8A"/>
+                </a:solidFill>
+                <a:latin typeface="Arial"/>
+                <a:ea typeface="Arial"/>
+              </a:rPr>
+              <a:t>선례 · </a:t>
+            </a:r>
+            <a:r>
+              <a:rPr sz="1200" b="1">
+                <a:solidFill>
+                  <a:srgbClr val="1428A0"/>
+                </a:solidFill>
+                <a:latin typeface="Arial"/>
+                <a:ea typeface="Arial"/>
+              </a:rPr>
+              <a:t>Micron ↔ Anthropic SCA</a:t>
+            </a:r>
+            <a:r>
+              <a:rPr sz="900" b="0">
+                <a:solidFill>
+                  <a:srgbClr val="555555"/>
+                </a:solidFill>
+                <a:latin typeface="Arial"/>
+                <a:ea typeface="Arial"/>
+              </a:rPr>
+              <a:t>   2026-06</a:t>
+            </a:r>
+          </a:p>
+        </p:txBody>
+      </p:sp>
+      <p:sp>
+        <p:nvSpPr>
+          <p:cNvPr id="81" name="Rectangle 80"/>
+          <p:cNvSpPr/>
+          <p:nvPr/>
+        </p:nvSpPr>
+        <p:spPr>
+          <a:xfrm>
+            <a:off x="8750807" y="4663440"/>
+            <a:ext cx="1024128" cy="256032"/>
+          </a:xfrm>
+          <a:prstGeom prst="rect">
+            <a:avLst/>
+          </a:prstGeom>
+          <a:solidFill>
+            <a:srgbClr val="1428A0"/>
+          </a:solidFill>
+          <a:ln>
+            <a:noFill/>
+          </a:ln>
+          <a:effectLst/>
+        </p:spPr>
+        <p:style>
+          <a:lnRef idx="1">
+            <a:schemeClr val="accent1"/>
+          </a:lnRef>
+          <a:fillRef idx="3">
+            <a:schemeClr val="accent1"/>
+          </a:fillRef>
+          <a:effectRef idx="2">
+            <a:schemeClr val="accent1"/>
+          </a:effectRef>
+          <a:fontRef idx="minor">
+            <a:schemeClr val="lt1"/>
+          </a:fontRef>
+        </p:style>
+        <p:txBody>
+          <a:bodyPr rtlCol="0" anchor="ctr"/>
+          <a:lstStyle/>
+          <a:p>
+            <a:pPr algn="ctr"/>
+          </a:p>
+        </p:txBody>
+      </p:sp>
+      <p:sp>
+        <p:nvSpPr>
+          <p:cNvPr id="82" name="TextBox 81"/>
+          <p:cNvSpPr txBox="1"/>
+          <p:nvPr/>
+        </p:nvSpPr>
+        <p:spPr>
+          <a:xfrm>
+            <a:off x="8750807" y="4663440"/>
+            <a:ext cx="1024128" cy="256032"/>
+          </a:xfrm>
+          <a:prstGeom prst="rect">
+            <a:avLst/>
+          </a:prstGeom>
+          <a:noFill/>
+        </p:spPr>
+        <p:txBody>
+          <a:bodyPr wrap="square" anchor="ctr" lIns="0" rIns="0" tIns="0" bIns="0">
+            <a:spAutoFit/>
+          </a:bodyPr>
+          <a:lstStyle/>
+          <a:p>
+            <a:pPr algn="ctr">
+              <a:lnSpc>
+                <a:spcPct val="112000"/>
+              </a:lnSpc>
+            </a:pPr>
+            <a:r>
+              <a:rPr sz="950" b="1">
+                <a:solidFill>
+                  <a:srgbClr val="FFFFFF"/>
+                </a:solidFill>
+                <a:latin typeface="Arial"/>
+                <a:ea typeface="Arial"/>
+              </a:rPr>
+              <a:t>공동 설계</a:t>
+            </a:r>
+          </a:p>
+        </p:txBody>
+      </p:sp>
+      <p:sp>
+        <p:nvSpPr>
+          <p:cNvPr id="83" name="Rectangle 82"/>
+          <p:cNvSpPr/>
+          <p:nvPr/>
+        </p:nvSpPr>
+        <p:spPr>
+          <a:xfrm>
+            <a:off x="9866376" y="4663440"/>
+            <a:ext cx="1024128" cy="256032"/>
+          </a:xfrm>
+          <a:prstGeom prst="rect">
+            <a:avLst/>
+          </a:prstGeom>
+          <a:solidFill>
+            <a:srgbClr val="AAB8E8"/>
+          </a:solidFill>
+          <a:ln>
+            <a:noFill/>
+          </a:ln>
+          <a:effectLst/>
+        </p:spPr>
+        <p:style>
+          <a:lnRef idx="1">
+            <a:schemeClr val="accent1"/>
+          </a:lnRef>
+          <a:fillRef idx="3">
+            <a:schemeClr val="accent1"/>
+          </a:fillRef>
+          <a:effectRef idx="2">
+            <a:schemeClr val="accent1"/>
+          </a:effectRef>
+          <a:fontRef idx="minor">
+            <a:schemeClr val="lt1"/>
+          </a:fontRef>
+        </p:style>
+        <p:txBody>
+          <a:bodyPr rtlCol="0" anchor="ctr"/>
+          <a:lstStyle/>
+          <a:p>
+            <a:pPr algn="ctr"/>
+          </a:p>
+        </p:txBody>
+      </p:sp>
+      <p:sp>
+        <p:nvSpPr>
+          <p:cNvPr id="84" name="TextBox 83"/>
+          <p:cNvSpPr txBox="1"/>
+          <p:nvPr/>
+        </p:nvSpPr>
+        <p:spPr>
+          <a:xfrm>
+            <a:off x="9866376" y="4663440"/>
+            <a:ext cx="1024128" cy="256032"/>
+          </a:xfrm>
+          <a:prstGeom prst="rect">
+            <a:avLst/>
+          </a:prstGeom>
+          <a:noFill/>
+        </p:spPr>
+        <p:txBody>
+          <a:bodyPr wrap="square" anchor="ctr" lIns="0" rIns="0" tIns="0" bIns="0">
+            <a:spAutoFit/>
+          </a:bodyPr>
+          <a:lstStyle/>
+          <a:p>
+            <a:pPr algn="ctr">
+              <a:lnSpc>
+                <a:spcPct val="112000"/>
+              </a:lnSpc>
+            </a:pPr>
+            <a:r>
+              <a:rPr sz="950" b="1">
+                <a:solidFill>
+                  <a:srgbClr val="1A1A1A"/>
+                </a:solidFill>
+                <a:latin typeface="Arial"/>
+                <a:ea typeface="Arial"/>
+              </a:rPr>
+              <a:t>다년 공급</a:t>
+            </a:r>
+          </a:p>
+        </p:txBody>
+      </p:sp>
+      <p:sp>
+        <p:nvSpPr>
+          <p:cNvPr id="85" name="Rectangle 84"/>
+          <p:cNvSpPr/>
+          <p:nvPr/>
+        </p:nvSpPr>
+        <p:spPr>
+          <a:xfrm>
+            <a:off x="8750807" y="4974336"/>
+            <a:ext cx="1024128" cy="256032"/>
+          </a:xfrm>
+          <a:prstGeom prst="rect">
+            <a:avLst/>
+          </a:prstGeom>
+          <a:solidFill>
+            <a:srgbClr val="AAB8E8"/>
+          </a:solidFill>
+          <a:ln>
+            <a:noFill/>
+          </a:ln>
+          <a:effectLst/>
+        </p:spPr>
+        <p:style>
+          <a:lnRef idx="1">
+            <a:schemeClr val="accent1"/>
+          </a:lnRef>
+          <a:fillRef idx="3">
+            <a:schemeClr val="accent1"/>
+          </a:fillRef>
+          <a:effectRef idx="2">
+            <a:schemeClr val="accent1"/>
+          </a:effectRef>
+          <a:fontRef idx="minor">
+            <a:schemeClr val="lt1"/>
+          </a:fontRef>
+        </p:style>
+        <p:txBody>
+          <a:bodyPr rtlCol="0" anchor="ctr"/>
+          <a:lstStyle/>
+          <a:p>
+            <a:pPr algn="ctr"/>
+          </a:p>
+        </p:txBody>
+      </p:sp>
+      <p:sp>
+        <p:nvSpPr>
+          <p:cNvPr id="86" name="TextBox 85"/>
+          <p:cNvSpPr txBox="1"/>
+          <p:nvPr/>
+        </p:nvSpPr>
+        <p:spPr>
+          <a:xfrm>
+            <a:off x="8750807" y="4974336"/>
+            <a:ext cx="1024128" cy="256032"/>
+          </a:xfrm>
+          <a:prstGeom prst="rect">
+            <a:avLst/>
+          </a:prstGeom>
+          <a:noFill/>
+        </p:spPr>
+        <p:txBody>
+          <a:bodyPr wrap="square" anchor="ctr" lIns="0" rIns="0" tIns="0" bIns="0">
+            <a:spAutoFit/>
+          </a:bodyPr>
+          <a:lstStyle/>
+          <a:p>
+            <a:pPr algn="ctr">
+              <a:lnSpc>
+                <a:spcPct val="112000"/>
+              </a:lnSpc>
+            </a:pPr>
+            <a:r>
+              <a:rPr sz="950" b="1">
+                <a:solidFill>
+                  <a:srgbClr val="1A1A1A"/>
+                </a:solidFill>
+                <a:latin typeface="Arial"/>
+                <a:ea typeface="Arial"/>
+              </a:rPr>
+              <a:t>운영 통합</a:t>
+            </a:r>
+          </a:p>
+        </p:txBody>
+      </p:sp>
+      <p:sp>
+        <p:nvSpPr>
+          <p:cNvPr id="87" name="Rectangle 86"/>
+          <p:cNvSpPr/>
+          <p:nvPr/>
+        </p:nvSpPr>
+        <p:spPr>
+          <a:xfrm>
+            <a:off x="9866376" y="4974336"/>
+            <a:ext cx="1024128" cy="256032"/>
+          </a:xfrm>
+          <a:prstGeom prst="rect">
+            <a:avLst/>
+          </a:prstGeom>
+          <a:solidFill>
+            <a:srgbClr val="AAB8E8"/>
+          </a:solidFill>
+          <a:ln>
+            <a:noFill/>
+          </a:ln>
+          <a:effectLst/>
+        </p:spPr>
+        <p:style>
+          <a:lnRef idx="1">
+            <a:schemeClr val="accent1"/>
+          </a:lnRef>
+          <a:fillRef idx="3">
+            <a:schemeClr val="accent1"/>
+          </a:fillRef>
+          <a:effectRef idx="2">
+            <a:schemeClr val="accent1"/>
+          </a:effectRef>
+          <a:fontRef idx="minor">
+            <a:schemeClr val="lt1"/>
+          </a:fontRef>
+        </p:style>
+        <p:txBody>
+          <a:bodyPr rtlCol="0" anchor="ctr"/>
+          <a:lstStyle/>
+          <a:p>
+            <a:pPr algn="ctr"/>
+          </a:p>
+        </p:txBody>
+      </p:sp>
+      <p:sp>
+        <p:nvSpPr>
+          <p:cNvPr id="88" name="TextBox 87"/>
+          <p:cNvSpPr txBox="1"/>
+          <p:nvPr/>
+        </p:nvSpPr>
+        <p:spPr>
+          <a:xfrm>
+            <a:off x="9866376" y="4974336"/>
+            <a:ext cx="1024128" cy="256032"/>
+          </a:xfrm>
+          <a:prstGeom prst="rect">
+            <a:avLst/>
+          </a:prstGeom>
+          <a:noFill/>
+        </p:spPr>
+        <p:txBody>
+          <a:bodyPr wrap="square" anchor="ctr" lIns="0" rIns="0" tIns="0" bIns="0">
+            <a:spAutoFit/>
+          </a:bodyPr>
+          <a:lstStyle/>
+          <a:p>
+            <a:pPr algn="ctr">
+              <a:lnSpc>
+                <a:spcPct val="112000"/>
+              </a:lnSpc>
+            </a:pPr>
+            <a:r>
+              <a:rPr sz="950" b="1">
+                <a:solidFill>
+                  <a:srgbClr val="1A1A1A"/>
+                </a:solidFill>
+                <a:latin typeface="Arial"/>
+                <a:ea typeface="Arial"/>
+              </a:rPr>
+              <a:t>자본</a:t>
+            </a:r>
+          </a:p>
+        </p:txBody>
+      </p:sp>
+      <p:sp>
+        <p:nvSpPr>
+          <p:cNvPr id="89" name="TextBox 88"/>
+          <p:cNvSpPr txBox="1"/>
+          <p:nvPr/>
+        </p:nvSpPr>
+        <p:spPr>
+          <a:xfrm>
+            <a:off x="11055095" y="4608576"/>
+            <a:ext cx="1783080" cy="603504"/>
+          </a:xfrm>
+          <a:prstGeom prst="rect">
+            <a:avLst/>
+          </a:prstGeom>
+          <a:noFill/>
+        </p:spPr>
+        <p:txBody>
+          <a:bodyPr wrap="square" anchor="ctr" lIns="0" rIns="0" tIns="0" bIns="0">
+            <a:spAutoFit/>
+          </a:bodyPr>
+          <a:lstStyle/>
+          <a:p>
+            <a:pPr algn="l">
+              <a:lnSpc>
+                <a:spcPct val="106000"/>
+              </a:lnSpc>
+            </a:pPr>
+            <a:r>
+              <a:rPr sz="900" b="0">
+                <a:solidFill>
+                  <a:srgbClr val="555555"/>
+                </a:solidFill>
+                <a:latin typeface="Arial"/>
+                <a:ea typeface="Arial"/>
+              </a:rPr>
+              <a:t>네 요소를 한 계약에 · Micron SCA 16건</a:t>
+            </a:r>
+          </a:p>
+          <a:p>
+            <a:pPr algn="l">
+              <a:lnSpc>
+                <a:spcPct val="106000"/>
+              </a:lnSpc>
+            </a:pPr>
+            <a:r>
+              <a:rPr sz="900" b="1">
+                <a:solidFill>
+                  <a:srgbClr val="1A1A1A"/>
+                </a:solidFill>
+                <a:latin typeface="Arial"/>
+                <a:ea typeface="Arial"/>
+              </a:rPr>
+              <a:t>삼성 · SK의 Anthropic 계약엔 공동 설계 조항 부재</a:t>
+            </a:r>
+          </a:p>
+          <a:p>
+            <a:pPr algn="l">
+              <a:lnSpc>
+                <a:spcPct val="106000"/>
+              </a:lnSpc>
+            </a:pPr>
+            <a:r>
+              <a:rPr sz="925" b="1">
+                <a:solidFill>
+                  <a:srgbClr val="1428A0"/>
+                </a:solidFill>
+                <a:latin typeface="Arial"/>
+                <a:ea typeface="Arial"/>
+              </a:rPr>
+              <a:t>→ 삼성이 선제 제안</a:t>
+            </a:r>
+          </a:p>
+        </p:txBody>
+      </p:sp>
+      <p:sp>
+        <p:nvSpPr>
+          <p:cNvPr id="90" name="Left Arrow 89"/>
+          <p:cNvSpPr/>
+          <p:nvPr/>
+        </p:nvSpPr>
+        <p:spPr>
+          <a:xfrm>
+            <a:off x="3822191" y="5413248"/>
+            <a:ext cx="9235440" cy="676656"/>
+          </a:xfrm>
+          <a:prstGeom prst="leftArrow">
+            <a:avLst>
+              <a:gd name="adj1" fmla="val 86000"/>
+              <a:gd name="adj2" fmla="val 50000"/>
+            </a:avLst>
+          </a:prstGeom>
+          <a:solidFill>
+            <a:srgbClr val="AAB8E8"/>
+          </a:solidFill>
+          <a:ln>
+            <a:noFill/>
+          </a:ln>
+          <a:effectLst/>
+        </p:spPr>
+        <p:style>
+          <a:lnRef idx="1">
+            <a:schemeClr val="accent1"/>
+          </a:lnRef>
+          <a:fillRef idx="3">
+            <a:schemeClr val="accent1"/>
+          </a:fillRef>
+          <a:effectRef idx="2">
+            <a:schemeClr val="accent1"/>
+          </a:effectRef>
+          <a:fontRef idx="minor">
+            <a:schemeClr val="lt1"/>
+          </a:fontRef>
+        </p:style>
+        <p:txBody>
+          <a:bodyPr rtlCol="0" anchor="ctr"/>
+          <a:lstStyle/>
+          <a:p>
+            <a:pPr algn="ctr"/>
+          </a:p>
+        </p:txBody>
+      </p:sp>
+      <p:sp>
+        <p:nvSpPr>
+          <p:cNvPr id="91" name="TextBox 90"/>
+          <p:cNvSpPr txBox="1"/>
+          <p:nvPr/>
+        </p:nvSpPr>
+        <p:spPr>
+          <a:xfrm>
+            <a:off x="4828031" y="5486400"/>
+            <a:ext cx="7955279" cy="256032"/>
+          </a:xfrm>
+          <a:prstGeom prst="rect">
+            <a:avLst/>
+          </a:prstGeom>
+          <a:noFill/>
+        </p:spPr>
+        <p:txBody>
+          <a:bodyPr wrap="square" anchor="t" lIns="0" rIns="0" tIns="0" bIns="0">
+            <a:spAutoFit/>
+          </a:bodyPr>
+          <a:lstStyle/>
+          <a:p>
+            <a:pPr algn="l">
+              <a:lnSpc>
+                <a:spcPct val="112000"/>
+              </a:lnSpc>
+            </a:pPr>
+            <a:r>
+              <a:rPr sz="1500" b="1">
+                <a:solidFill>
+                  <a:srgbClr val="1428A0"/>
+                </a:solidFill>
+                <a:latin typeface="Arial"/>
+                <a:ea typeface="Arial"/>
+              </a:rPr>
+              <a:t>② 접근권 확보 : 워크로드 트레이스 · KV 수명 정책 · 규격</a:t>
+            </a:r>
+          </a:p>
+        </p:txBody>
+      </p:sp>
+      <p:sp>
+        <p:nvSpPr>
+          <p:cNvPr id="92" name="TextBox 91"/>
+          <p:cNvSpPr txBox="1"/>
+          <p:nvPr/>
+        </p:nvSpPr>
+        <p:spPr>
+          <a:xfrm>
+            <a:off x="4828031" y="5760720"/>
+            <a:ext cx="7955279" cy="219456"/>
+          </a:xfrm>
+          <a:prstGeom prst="rect">
+            <a:avLst/>
+          </a:prstGeom>
+          <a:noFill/>
+        </p:spPr>
+        <p:txBody>
+          <a:bodyPr wrap="square" anchor="t" lIns="0" rIns="0" tIns="0" bIns="0">
+            <a:spAutoFit/>
+          </a:bodyPr>
+          <a:lstStyle/>
+          <a:p>
+            <a:pPr algn="l">
+              <a:lnSpc>
+                <a:spcPct val="112000"/>
+              </a:lnSpc>
+            </a:pPr>
+            <a:r>
+              <a:rPr sz="1050" b="0">
+                <a:solidFill>
+                  <a:srgbClr val="555555"/>
+                </a:solidFill>
+                <a:latin typeface="Arial"/>
+                <a:ea typeface="Arial"/>
+              </a:rPr>
+              <a:t>계약 시한 2027년 상반기 — 공급 완화 전에 락인</a:t>
+            </a:r>
+          </a:p>
+        </p:txBody>
+      </p:sp>
+      <p:sp>
+        <p:nvSpPr>
+          <p:cNvPr id="93" name="Rectangle 92"/>
+          <p:cNvSpPr/>
+          <p:nvPr/>
+        </p:nvSpPr>
+        <p:spPr>
+          <a:xfrm>
+            <a:off x="13277088" y="2560320"/>
+            <a:ext cx="4288536" cy="3529584"/>
+          </a:xfrm>
+          <a:prstGeom prst="rect">
+            <a:avLst/>
+          </a:prstGeom>
+          <a:solidFill>
+            <a:srgbClr val="FFFFFF"/>
+          </a:solidFill>
+          <a:ln w="9525">
+            <a:solidFill>
+              <a:srgbClr val="D9D9D9"/>
+            </a:solidFill>
+          </a:ln>
+          <a:effectLst/>
+        </p:spPr>
+        <p:style>
+          <a:lnRef idx="1">
+            <a:schemeClr val="accent1"/>
+          </a:lnRef>
+          <a:fillRef idx="3">
+            <a:schemeClr val="accent1"/>
+          </a:fillRef>
+          <a:effectRef idx="2">
+            <a:schemeClr val="accent1"/>
+          </a:effectRef>
+          <a:fontRef idx="minor">
+            <a:schemeClr val="lt1"/>
+          </a:fontRef>
+        </p:style>
+        <p:txBody>
+          <a:bodyPr rtlCol="0" anchor="ctr"/>
+          <a:lstStyle/>
+          <a:p>
+            <a:pPr algn="ctr"/>
+          </a:p>
+        </p:txBody>
+      </p:sp>
+      <p:sp>
+        <p:nvSpPr>
+          <p:cNvPr id="94" name="TextBox 93"/>
+          <p:cNvSpPr txBox="1"/>
+          <p:nvPr/>
+        </p:nvSpPr>
+        <p:spPr>
+          <a:xfrm>
+            <a:off x="13478256" y="2706624"/>
+            <a:ext cx="3886200" cy="274320"/>
+          </a:xfrm>
+          <a:prstGeom prst="rect">
+            <a:avLst/>
+          </a:prstGeom>
+          <a:noFill/>
+        </p:spPr>
+        <p:txBody>
+          <a:bodyPr wrap="square" anchor="t" lIns="0" rIns="0" tIns="0" bIns="0">
+            <a:spAutoFit/>
+          </a:bodyPr>
+          <a:lstStyle/>
+          <a:p>
+            <a:pPr algn="l">
+              <a:lnSpc>
+                <a:spcPct val="112000"/>
+              </a:lnSpc>
+            </a:pPr>
+            <a:r>
+              <a:rPr sz="1500" b="1">
+                <a:solidFill>
+                  <a:srgbClr val="1428A0"/>
+                </a:solidFill>
+                <a:latin typeface="Arial"/>
+                <a:ea typeface="Arial"/>
+              </a:rPr>
+              <a:t>고객 시스템</a:t>
+            </a:r>
+          </a:p>
+        </p:txBody>
+      </p:sp>
+      <p:sp>
+        <p:nvSpPr>
+          <p:cNvPr id="95" name="TextBox 94"/>
+          <p:cNvSpPr txBox="1"/>
+          <p:nvPr/>
+        </p:nvSpPr>
+        <p:spPr>
+          <a:xfrm>
+            <a:off x="13478256" y="2980944"/>
+            <a:ext cx="3886200" cy="201168"/>
+          </a:xfrm>
+          <a:prstGeom prst="rect">
+            <a:avLst/>
+          </a:prstGeom>
+          <a:noFill/>
+        </p:spPr>
+        <p:txBody>
+          <a:bodyPr wrap="square" anchor="t" lIns="0" rIns="0" tIns="0" bIns="0">
+            <a:spAutoFit/>
+          </a:bodyPr>
+          <a:lstStyle/>
+          <a:p>
+            <a:pPr algn="l">
+              <a:lnSpc>
+                <a:spcPct val="112000"/>
+              </a:lnSpc>
+            </a:pPr>
+            <a:r>
+              <a:rPr sz="1000" b="0">
+                <a:solidFill>
+                  <a:srgbClr val="8A8A8A"/>
+                </a:solidFill>
+                <a:latin typeface="Arial"/>
+                <a:ea typeface="Arial"/>
+              </a:rPr>
+              <a:t>삼성 인력 · 코드의 진입 계층</a:t>
+            </a:r>
+          </a:p>
+        </p:txBody>
+      </p:sp>
+      <p:sp>
+        <p:nvSpPr>
+          <p:cNvPr id="96" name="Rectangle 95"/>
+          <p:cNvSpPr/>
+          <p:nvPr/>
+        </p:nvSpPr>
+        <p:spPr>
+          <a:xfrm>
+            <a:off x="13478256" y="3328415"/>
+            <a:ext cx="2916936" cy="420624"/>
+          </a:xfrm>
+          <a:prstGeom prst="rect">
+            <a:avLst/>
+          </a:prstGeom>
+          <a:solidFill>
+            <a:srgbClr val="FFFFFF"/>
+          </a:solidFill>
+          <a:ln w="9525">
+            <a:solidFill>
+              <a:srgbClr val="D9D9D9"/>
+            </a:solidFill>
+          </a:ln>
+          <a:effectLst/>
+        </p:spPr>
+        <p:style>
+          <a:lnRef idx="1">
+            <a:schemeClr val="accent1"/>
+          </a:lnRef>
+          <a:fillRef idx="3">
+            <a:schemeClr val="accent1"/>
+          </a:fillRef>
+          <a:effectRef idx="2">
+            <a:schemeClr val="accent1"/>
+          </a:effectRef>
+          <a:fontRef idx="minor">
+            <a:schemeClr val="lt1"/>
+          </a:fontRef>
+        </p:style>
+        <p:txBody>
+          <a:bodyPr rtlCol="0" anchor="ctr"/>
+          <a:lstStyle/>
+          <a:p>
+            <a:pPr algn="ctr"/>
+          </a:p>
+        </p:txBody>
+      </p:sp>
+      <p:sp>
+        <p:nvSpPr>
+          <p:cNvPr id="97" name="TextBox 96"/>
+          <p:cNvSpPr txBox="1"/>
+          <p:nvPr/>
+        </p:nvSpPr>
+        <p:spPr>
+          <a:xfrm>
+            <a:off x="13615416" y="3328415"/>
+            <a:ext cx="2642616" cy="420624"/>
+          </a:xfrm>
+          <a:prstGeom prst="rect">
+            <a:avLst/>
+          </a:prstGeom>
+          <a:noFill/>
+        </p:spPr>
+        <p:txBody>
+          <a:bodyPr wrap="square" anchor="ctr" lIns="0" rIns="0" tIns="0" bIns="0">
+            <a:spAutoFit/>
+          </a:bodyPr>
+          <a:lstStyle/>
+          <a:p>
+            <a:pPr algn="l">
+              <a:lnSpc>
+                <a:spcPct val="112000"/>
+              </a:lnSpc>
+            </a:pPr>
+            <a:r>
+              <a:rPr sz="1200" b="0">
+                <a:solidFill>
+                  <a:srgbClr val="555555"/>
+                </a:solidFill>
+                <a:latin typeface="Arial"/>
+                <a:ea typeface="Arial"/>
+              </a:rPr>
+              <a:t>응용 · 추론 엔진</a:t>
+            </a:r>
+          </a:p>
+        </p:txBody>
+      </p:sp>
+      <p:sp>
+        <p:nvSpPr>
+          <p:cNvPr id="98" name="Rectangle 97"/>
+          <p:cNvSpPr/>
+          <p:nvPr/>
+        </p:nvSpPr>
+        <p:spPr>
+          <a:xfrm>
+            <a:off x="13478256" y="3831335"/>
+            <a:ext cx="2916936" cy="420624"/>
+          </a:xfrm>
+          <a:prstGeom prst="rect">
+            <a:avLst/>
+          </a:prstGeom>
+          <a:solidFill>
+            <a:srgbClr val="AAB8E8"/>
+          </a:solidFill>
+          <a:ln>
+            <a:noFill/>
+          </a:ln>
+          <a:effectLst/>
+        </p:spPr>
+        <p:style>
+          <a:lnRef idx="1">
+            <a:schemeClr val="accent1"/>
+          </a:lnRef>
+          <a:fillRef idx="3">
+            <a:schemeClr val="accent1"/>
+          </a:fillRef>
+          <a:effectRef idx="2">
+            <a:schemeClr val="accent1"/>
+          </a:effectRef>
+          <a:fontRef idx="minor">
+            <a:schemeClr val="lt1"/>
+          </a:fontRef>
+        </p:style>
+        <p:txBody>
+          <a:bodyPr rtlCol="0" anchor="ctr"/>
+          <a:lstStyle/>
+          <a:p>
+            <a:pPr algn="ctr"/>
+          </a:p>
+        </p:txBody>
+      </p:sp>
+      <p:sp>
+        <p:nvSpPr>
+          <p:cNvPr id="99" name="TextBox 98"/>
+          <p:cNvSpPr txBox="1"/>
+          <p:nvPr/>
+        </p:nvSpPr>
+        <p:spPr>
+          <a:xfrm>
+            <a:off x="13615416" y="3831335"/>
+            <a:ext cx="2642616" cy="420624"/>
+          </a:xfrm>
+          <a:prstGeom prst="rect">
+            <a:avLst/>
+          </a:prstGeom>
+          <a:noFill/>
+        </p:spPr>
+        <p:txBody>
+          <a:bodyPr wrap="square" anchor="ctr" lIns="0" rIns="0" tIns="0" bIns="0">
+            <a:spAutoFit/>
+          </a:bodyPr>
+          <a:lstStyle/>
+          <a:p>
+            <a:pPr algn="l">
+              <a:lnSpc>
+                <a:spcPct val="112000"/>
+              </a:lnSpc>
+            </a:pPr>
+            <a:r>
+              <a:rPr sz="1200" b="1">
+                <a:solidFill>
+                  <a:srgbClr val="1A1A1A"/>
+                </a:solidFill>
+                <a:latin typeface="Arial"/>
+                <a:ea typeface="Arial"/>
+              </a:rPr>
+              <a:t>KV 캐시 관리자</a:t>
+            </a:r>
+          </a:p>
+        </p:txBody>
+      </p:sp>
+      <p:sp>
+        <p:nvSpPr>
+          <p:cNvPr id="100" name="Rectangle 99"/>
+          <p:cNvSpPr/>
+          <p:nvPr/>
+        </p:nvSpPr>
+        <p:spPr>
+          <a:xfrm>
+            <a:off x="13478256" y="4334256"/>
+            <a:ext cx="2916936" cy="420624"/>
+          </a:xfrm>
+          <a:prstGeom prst="rect">
+            <a:avLst/>
+          </a:prstGeom>
+          <a:solidFill>
+            <a:srgbClr val="AAB8E8"/>
+          </a:solidFill>
+          <a:ln>
+            <a:noFill/>
+          </a:ln>
+          <a:effectLst/>
+        </p:spPr>
+        <p:style>
+          <a:lnRef idx="1">
+            <a:schemeClr val="accent1"/>
+          </a:lnRef>
+          <a:fillRef idx="3">
+            <a:schemeClr val="accent1"/>
+          </a:fillRef>
+          <a:effectRef idx="2">
+            <a:schemeClr val="accent1"/>
+          </a:effectRef>
+          <a:fontRef idx="minor">
+            <a:schemeClr val="lt1"/>
+          </a:fontRef>
+        </p:style>
+        <p:txBody>
+          <a:bodyPr rtlCol="0" anchor="ctr"/>
+          <a:lstStyle/>
+          <a:p>
+            <a:pPr algn="ctr"/>
+          </a:p>
+        </p:txBody>
+      </p:sp>
+      <p:sp>
+        <p:nvSpPr>
+          <p:cNvPr id="101" name="TextBox 100"/>
+          <p:cNvSpPr txBox="1"/>
+          <p:nvPr/>
+        </p:nvSpPr>
+        <p:spPr>
+          <a:xfrm>
+            <a:off x="13615416" y="4334256"/>
+            <a:ext cx="2642616" cy="420624"/>
+          </a:xfrm>
+          <a:prstGeom prst="rect">
+            <a:avLst/>
+          </a:prstGeom>
+          <a:noFill/>
+        </p:spPr>
+        <p:txBody>
+          <a:bodyPr wrap="square" anchor="ctr" lIns="0" rIns="0" tIns="0" bIns="0">
+            <a:spAutoFit/>
+          </a:bodyPr>
+          <a:lstStyle/>
+          <a:p>
+            <a:pPr algn="l">
+              <a:lnSpc>
+                <a:spcPct val="112000"/>
+              </a:lnSpc>
+            </a:pPr>
+            <a:r>
+              <a:rPr sz="1200" b="1">
+                <a:solidFill>
+                  <a:srgbClr val="1A1A1A"/>
+                </a:solidFill>
+                <a:latin typeface="Arial"/>
+                <a:ea typeface="Arial"/>
+              </a:rPr>
+              <a:t>I/O 라이브러리 · 커널</a:t>
+            </a:r>
+          </a:p>
+        </p:txBody>
+      </p:sp>
+      <p:sp>
+        <p:nvSpPr>
+          <p:cNvPr id="102" name="Rectangle 101"/>
+          <p:cNvSpPr/>
+          <p:nvPr/>
+        </p:nvSpPr>
+        <p:spPr>
+          <a:xfrm>
+            <a:off x="13478256" y="4837176"/>
+            <a:ext cx="2916936" cy="420624"/>
+          </a:xfrm>
+          <a:prstGeom prst="rect">
+            <a:avLst/>
+          </a:prstGeom>
+          <a:solidFill>
+            <a:srgbClr val="1428A0"/>
+          </a:solidFill>
+          <a:ln>
+            <a:noFill/>
+          </a:ln>
+          <a:effectLst/>
+        </p:spPr>
+        <p:style>
+          <a:lnRef idx="1">
+            <a:schemeClr val="accent1"/>
+          </a:lnRef>
+          <a:fillRef idx="3">
+            <a:schemeClr val="accent1"/>
+          </a:fillRef>
+          <a:effectRef idx="2">
+            <a:schemeClr val="accent1"/>
+          </a:effectRef>
+          <a:fontRef idx="minor">
+            <a:schemeClr val="lt1"/>
+          </a:fontRef>
+        </p:style>
+        <p:txBody>
+          <a:bodyPr rtlCol="0" anchor="ctr"/>
+          <a:lstStyle/>
+          <a:p>
+            <a:pPr algn="ctr"/>
+          </a:p>
+        </p:txBody>
+      </p:sp>
+      <p:sp>
+        <p:nvSpPr>
+          <p:cNvPr id="103" name="TextBox 102"/>
+          <p:cNvSpPr txBox="1"/>
+          <p:nvPr/>
+        </p:nvSpPr>
+        <p:spPr>
+          <a:xfrm>
+            <a:off x="13615416" y="4837176"/>
+            <a:ext cx="2642616" cy="420624"/>
+          </a:xfrm>
+          <a:prstGeom prst="rect">
+            <a:avLst/>
+          </a:prstGeom>
+          <a:noFill/>
+        </p:spPr>
+        <p:txBody>
+          <a:bodyPr wrap="square" anchor="ctr" lIns="0" rIns="0" tIns="0" bIns="0">
+            <a:spAutoFit/>
+          </a:bodyPr>
+          <a:lstStyle/>
+          <a:p>
+            <a:pPr algn="l">
+              <a:lnSpc>
+                <a:spcPct val="112000"/>
+              </a:lnSpc>
+            </a:pPr>
+            <a:r>
+              <a:rPr sz="1200" b="1">
+                <a:solidFill>
+                  <a:srgbClr val="FFFFFF"/>
+                </a:solidFill>
+                <a:latin typeface="Arial"/>
+                <a:ea typeface="Arial"/>
+              </a:rPr>
+              <a:t>SSD : 삼성 QLC</a:t>
+            </a:r>
+          </a:p>
+        </p:txBody>
+      </p:sp>
+      <p:sp>
+        <p:nvSpPr>
+          <p:cNvPr id="104" name="Oval 103"/>
+          <p:cNvSpPr/>
+          <p:nvPr/>
+        </p:nvSpPr>
+        <p:spPr>
+          <a:xfrm>
+            <a:off x="16566367" y="3849623"/>
+            <a:ext cx="145938" cy="145938"/>
+          </a:xfrm>
+          <a:prstGeom prst="ellipse">
+            <a:avLst/>
+          </a:prstGeom>
+          <a:solidFill>
+            <a:srgbClr val="1428A0"/>
+          </a:solidFill>
+          <a:ln>
+            <a:noFill/>
+          </a:ln>
+          <a:effectLst/>
+        </p:spPr>
+        <p:style>
+          <a:lnRef idx="1">
+            <a:schemeClr val="accent1"/>
+          </a:lnRef>
+          <a:fillRef idx="3">
+            <a:schemeClr val="accent1"/>
+          </a:fillRef>
+          <a:effectRef idx="2">
+            <a:schemeClr val="accent1"/>
+          </a:effectRef>
+          <a:fontRef idx="minor">
+            <a:schemeClr val="lt1"/>
+          </a:fontRef>
+        </p:style>
+        <p:txBody>
+          <a:bodyPr rtlCol="0" anchor="ctr"/>
+          <a:lstStyle/>
+          <a:p>
+            <a:pPr algn="ctr"/>
+          </a:p>
+        </p:txBody>
+      </p:sp>
+      <p:sp>
+        <p:nvSpPr>
+          <p:cNvPr id="105" name="Round Same Side Corner Rectangle 104"/>
+          <p:cNvSpPr/>
+          <p:nvPr/>
+        </p:nvSpPr>
+        <p:spPr>
+          <a:xfrm>
+            <a:off x="16504920" y="4018605"/>
+            <a:ext cx="268833" cy="215066"/>
+          </a:xfrm>
+          <a:prstGeom prst="round2SameRect">
+            <a:avLst>
+              <a:gd name="adj1" fmla="val 50000"/>
+              <a:gd name="adj2" fmla="val 0"/>
+            </a:avLst>
+          </a:prstGeom>
+          <a:solidFill>
+            <a:srgbClr val="1428A0"/>
+          </a:solidFill>
+          <a:ln>
+            <a:noFill/>
+          </a:ln>
+          <a:effectLst/>
+        </p:spPr>
+        <p:style>
+          <a:lnRef idx="1">
+            <a:schemeClr val="accent1"/>
+          </a:lnRef>
+          <a:fillRef idx="3">
+            <a:schemeClr val="accent1"/>
+          </a:fillRef>
+          <a:effectRef idx="2">
+            <a:schemeClr val="accent1"/>
+          </a:effectRef>
+          <a:fontRef idx="minor">
+            <a:schemeClr val="lt1"/>
+          </a:fontRef>
+        </p:style>
+        <p:txBody>
+          <a:bodyPr rtlCol="0" anchor="ctr"/>
+          <a:lstStyle/>
+          <a:p>
+            <a:pPr algn="ctr"/>
+          </a:p>
+        </p:txBody>
+      </p:sp>
+      <p:sp>
+        <p:nvSpPr>
+          <p:cNvPr id="106" name="TextBox 105"/>
+          <p:cNvSpPr txBox="1"/>
+          <p:nvPr/>
+        </p:nvSpPr>
+        <p:spPr>
+          <a:xfrm>
+            <a:off x="16828617" y="3831335"/>
+            <a:ext cx="640080" cy="420624"/>
+          </a:xfrm>
+          <a:prstGeom prst="rect">
+            <a:avLst/>
+          </a:prstGeom>
+          <a:noFill/>
+        </p:spPr>
+        <p:txBody>
+          <a:bodyPr wrap="square" anchor="ctr" lIns="0" rIns="0" tIns="0" bIns="0">
+            <a:spAutoFit/>
+          </a:bodyPr>
+          <a:lstStyle/>
+          <a:p>
+            <a:pPr algn="l">
+              <a:lnSpc>
+                <a:spcPct val="112000"/>
+              </a:lnSpc>
+            </a:pPr>
+            <a:r>
+              <a:rPr sz="1050" b="1">
+                <a:solidFill>
+                  <a:srgbClr val="1428A0"/>
+                </a:solidFill>
+                <a:latin typeface="Arial"/>
+                <a:ea typeface="Arial"/>
+              </a:rPr>
+              <a:t>FDE</a:t>
+            </a:r>
+          </a:p>
+        </p:txBody>
+      </p:sp>
+      <p:sp>
+        <p:nvSpPr>
+          <p:cNvPr id="107" name="TextBox 106"/>
+          <p:cNvSpPr txBox="1"/>
+          <p:nvPr/>
+        </p:nvSpPr>
+        <p:spPr>
+          <a:xfrm>
+            <a:off x="16504920" y="4334256"/>
+            <a:ext cx="859536" cy="420624"/>
+          </a:xfrm>
+          <a:prstGeom prst="rect">
+            <a:avLst/>
+          </a:prstGeom>
+          <a:noFill/>
+        </p:spPr>
+        <p:txBody>
+          <a:bodyPr wrap="square" anchor="ctr" lIns="0" rIns="0" tIns="0" bIns="0">
+            <a:spAutoFit/>
+          </a:bodyPr>
+          <a:lstStyle/>
+          <a:p>
+            <a:pPr algn="l">
+              <a:lnSpc>
+                <a:spcPct val="112000"/>
+              </a:lnSpc>
+            </a:pPr>
+            <a:r>
+              <a:rPr sz="1000" b="0">
+                <a:solidFill>
+                  <a:srgbClr val="555555"/>
+                </a:solidFill>
+                <a:latin typeface="Arial"/>
+                <a:ea typeface="Arial"/>
+              </a:rPr>
+              <a:t>코드 머지</a:t>
+            </a:r>
+          </a:p>
+        </p:txBody>
+      </p:sp>
+      <p:pic>
+        <p:nvPicPr>
+          <p:cNvPr id="108" name="Picture 107" descr="anthropic.png"/>
+          <p:cNvPicPr>
+            <a:picLocks noChangeAspect="1"/>
+          </p:cNvPicPr>
+          <p:nvPr/>
+        </p:nvPicPr>
+        <p:blipFill>
+          <a:blip r:embed="rId2"/>
+          <a:stretch>
+            <a:fillRect/>
+          </a:stretch>
+        </p:blipFill>
+        <p:spPr>
+          <a:xfrm>
+            <a:off x="13551408" y="5586650"/>
+            <a:ext cx="1296794" cy="146970"/>
+          </a:xfrm>
+          <a:prstGeom prst="rect">
+            <a:avLst/>
+          </a:prstGeom>
+        </p:spPr>
+      </p:pic>
+      <p:pic>
+        <p:nvPicPr>
+          <p:cNvPr id="109" name="Picture 108" descr="openai.png"/>
+          <p:cNvPicPr>
+            <a:picLocks noChangeAspect="1"/>
+          </p:cNvPicPr>
+          <p:nvPr/>
+        </p:nvPicPr>
+        <p:blipFill>
+          <a:blip r:embed="rId3"/>
+          <a:stretch>
+            <a:fillRect/>
+          </a:stretch>
+        </p:blipFill>
+        <p:spPr>
+          <a:xfrm>
+            <a:off x="14965786" y="5586650"/>
+            <a:ext cx="598520" cy="146970"/>
+          </a:xfrm>
+          <a:prstGeom prst="rect">
+            <a:avLst/>
+          </a:prstGeom>
+        </p:spPr>
+      </p:pic>
+      <p:pic>
+        <p:nvPicPr>
+          <p:cNvPr id="110" name="Picture 109" descr="nvidia.png"/>
+          <p:cNvPicPr>
+            <a:picLocks noChangeAspect="1"/>
+          </p:cNvPicPr>
+          <p:nvPr/>
+        </p:nvPicPr>
+        <p:blipFill>
+          <a:blip r:embed="rId4"/>
+          <a:stretch>
+            <a:fillRect/>
+          </a:stretch>
+        </p:blipFill>
+        <p:spPr>
+          <a:xfrm>
+            <a:off x="15681886" y="5586650"/>
+            <a:ext cx="769029" cy="146970"/>
+          </a:xfrm>
+          <a:prstGeom prst="rect">
+            <a:avLst/>
+          </a:prstGeom>
+        </p:spPr>
+      </p:pic>
+      <p:pic>
+        <p:nvPicPr>
+          <p:cNvPr id="111" name="Picture 110" descr="meta.png"/>
+          <p:cNvPicPr>
+            <a:picLocks noChangeAspect="1"/>
+          </p:cNvPicPr>
+          <p:nvPr/>
+        </p:nvPicPr>
+        <p:blipFill>
+          <a:blip r:embed="rId5"/>
+          <a:stretch>
+            <a:fillRect/>
+          </a:stretch>
+        </p:blipFill>
+        <p:spPr>
+          <a:xfrm>
+            <a:off x="16568496" y="5586650"/>
+            <a:ext cx="722803" cy="146970"/>
+          </a:xfrm>
+          <a:prstGeom prst="rect">
+            <a:avLst/>
+          </a:prstGeom>
+        </p:spPr>
+      </p:pic>
+      <p:sp>
+        <p:nvSpPr>
+          <p:cNvPr id="112" name="Rectangle 111"/>
+          <p:cNvSpPr/>
+          <p:nvPr/>
+        </p:nvSpPr>
+        <p:spPr>
+          <a:xfrm>
+            <a:off x="722376" y="6291072"/>
+            <a:ext cx="5468112" cy="914400"/>
+          </a:xfrm>
+          <a:prstGeom prst="rect">
+            <a:avLst/>
+          </a:prstGeom>
+          <a:solidFill>
+            <a:srgbClr val="FFFFFF"/>
+          </a:solidFill>
+          <a:ln w="9525">
+            <a:solidFill>
+              <a:srgbClr val="D9D9D9"/>
+            </a:solidFill>
+          </a:ln>
+          <a:effectLst/>
+        </p:spPr>
+        <p:style>
+          <a:lnRef idx="1">
+            <a:schemeClr val="accent1"/>
+          </a:lnRef>
+          <a:fillRef idx="3">
+            <a:schemeClr val="accent1"/>
+          </a:fillRef>
+          <a:effectRef idx="2">
+            <a:schemeClr val="accent1"/>
+          </a:effectRef>
+          <a:fontRef idx="minor">
+            <a:schemeClr val="lt1"/>
+          </a:fontRef>
+        </p:style>
+        <p:txBody>
+          <a:bodyPr rtlCol="0" anchor="ctr"/>
+          <a:lstStyle/>
+          <a:p>
+            <a:pPr algn="ctr"/>
+          </a:p>
+        </p:txBody>
+      </p:sp>
+      <p:sp>
+        <p:nvSpPr>
+          <p:cNvPr id="113" name="Rectangle 112"/>
+          <p:cNvSpPr/>
+          <p:nvPr/>
+        </p:nvSpPr>
+        <p:spPr>
+          <a:xfrm>
+            <a:off x="722376" y="6291072"/>
+            <a:ext cx="731520" cy="914400"/>
+          </a:xfrm>
+          <a:prstGeom prst="rect">
+            <a:avLst/>
+          </a:prstGeom>
+          <a:solidFill>
+            <a:srgbClr val="1428A0"/>
+          </a:solidFill>
+          <a:ln>
+            <a:noFill/>
+          </a:ln>
+          <a:effectLst/>
+        </p:spPr>
+        <p:style>
+          <a:lnRef idx="1">
+            <a:schemeClr val="accent1"/>
+          </a:lnRef>
+          <a:fillRef idx="3">
+            <a:schemeClr val="accent1"/>
+          </a:fillRef>
+          <a:effectRef idx="2">
+            <a:schemeClr val="accent1"/>
+          </a:effectRef>
+          <a:fontRef idx="minor">
+            <a:schemeClr val="lt1"/>
+          </a:fontRef>
+        </p:style>
+        <p:txBody>
+          <a:bodyPr rtlCol="0" anchor="ctr"/>
+          <a:lstStyle/>
+          <a:p>
+            <a:pPr algn="ctr"/>
+          </a:p>
+        </p:txBody>
+      </p:sp>
+      <p:sp>
+        <p:nvSpPr>
+          <p:cNvPr id="114" name="TextBox 113"/>
+          <p:cNvSpPr txBox="1"/>
+          <p:nvPr/>
+        </p:nvSpPr>
+        <p:spPr>
+          <a:xfrm>
+            <a:off x="722376" y="6291072"/>
+            <a:ext cx="731520" cy="914400"/>
+          </a:xfrm>
+          <a:prstGeom prst="rect">
+            <a:avLst/>
+          </a:prstGeom>
+          <a:noFill/>
+        </p:spPr>
+        <p:txBody>
+          <a:bodyPr wrap="square" anchor="ctr" lIns="0" rIns="0" tIns="0" bIns="0">
+            <a:spAutoFit/>
+          </a:bodyPr>
+          <a:lstStyle/>
+          <a:p>
+            <a:pPr algn="ctr">
+              <a:lnSpc>
+                <a:spcPct val="112000"/>
+              </a:lnSpc>
+            </a:pPr>
+            <a:r>
+              <a:rPr sz="1400" b="1">
+                <a:solidFill>
+                  <a:srgbClr val="FFFFFF"/>
+                </a:solidFill>
+                <a:latin typeface="Arial"/>
+                <a:ea typeface="Arial"/>
+              </a:rPr>
+              <a:t>조직</a:t>
+            </a:r>
+          </a:p>
+        </p:txBody>
+      </p:sp>
+      <p:sp>
+        <p:nvSpPr>
+          <p:cNvPr id="115" name="TextBox 114"/>
+          <p:cNvSpPr txBox="1"/>
+          <p:nvPr/>
+        </p:nvSpPr>
+        <p:spPr>
+          <a:xfrm>
+            <a:off x="1600200" y="6382512"/>
+            <a:ext cx="4443984" cy="237744"/>
+          </a:xfrm>
+          <a:prstGeom prst="rect">
+            <a:avLst/>
+          </a:prstGeom>
+          <a:noFill/>
+        </p:spPr>
+        <p:txBody>
+          <a:bodyPr wrap="square" anchor="t" lIns="0" rIns="0" tIns="0" bIns="0">
+            <a:spAutoFit/>
+          </a:bodyPr>
+          <a:lstStyle/>
+          <a:p>
+            <a:pPr algn="l">
+              <a:lnSpc>
+                <a:spcPct val="112000"/>
+              </a:lnSpc>
+            </a:pPr>
+            <a:r>
+              <a:rPr sz="1125" b="1">
+                <a:solidFill>
+                  <a:srgbClr val="1A1A1A"/>
+                </a:solidFill>
+                <a:latin typeface="Arial"/>
+                <a:ea typeface="Arial"/>
+              </a:rPr>
+              <a:t>시스템 소프트웨어 조직 강화</a:t>
+            </a:r>
+          </a:p>
+        </p:txBody>
+      </p:sp>
+      <p:sp>
+        <p:nvSpPr>
+          <p:cNvPr id="116" name="TextBox 115"/>
+          <p:cNvSpPr txBox="1"/>
+          <p:nvPr/>
+        </p:nvSpPr>
+        <p:spPr>
+          <a:xfrm>
+            <a:off x="1600200" y="6620256"/>
+            <a:ext cx="4443984" cy="512064"/>
+          </a:xfrm>
+          <a:prstGeom prst="rect">
+            <a:avLst/>
+          </a:prstGeom>
+          <a:noFill/>
+        </p:spPr>
+        <p:txBody>
+          <a:bodyPr wrap="square" anchor="t" lIns="0" rIns="0" tIns="0" bIns="0">
+            <a:spAutoFit/>
+          </a:bodyPr>
+          <a:lstStyle/>
+          <a:p>
+            <a:pPr algn="l">
+              <a:lnSpc>
+                <a:spcPct val="106000"/>
+              </a:lnSpc>
+            </a:pPr>
+            <a:r>
+              <a:rPr sz="925" b="0">
+                <a:solidFill>
+                  <a:srgbClr val="555555"/>
+                </a:solidFill>
+                <a:latin typeface="Arial"/>
+                <a:ea typeface="Arial"/>
+              </a:rPr>
+              <a:t>Co-Design Pod 3~5명 · 개발실 소속 · 선별 고객 1~2사 상주</a:t>
+            </a:r>
+          </a:p>
+          <a:p>
+            <a:pPr algn="l">
+              <a:lnSpc>
+                <a:spcPct val="106000"/>
+              </a:lnSpc>
+            </a:pPr>
+            <a:r>
+              <a:rPr sz="925" b="0">
+                <a:solidFill>
+                  <a:srgbClr val="555555"/>
+                </a:solidFill>
+                <a:latin typeface="Arial"/>
+                <a:ea typeface="Arial"/>
+              </a:rPr>
+              <a:t>미주 법인 협업 · 고객 시간대 대응</a:t>
+            </a:r>
+          </a:p>
+        </p:txBody>
+      </p:sp>
+      <p:sp>
+        <p:nvSpPr>
+          <p:cNvPr id="117" name="Rectangle 116"/>
+          <p:cNvSpPr/>
+          <p:nvPr/>
+        </p:nvSpPr>
+        <p:spPr>
+          <a:xfrm>
+            <a:off x="6409944" y="6291072"/>
+            <a:ext cx="5468112" cy="914400"/>
+          </a:xfrm>
+          <a:prstGeom prst="rect">
+            <a:avLst/>
+          </a:prstGeom>
+          <a:solidFill>
+            <a:srgbClr val="FFFFFF"/>
+          </a:solidFill>
+          <a:ln w="9525">
+            <a:solidFill>
+              <a:srgbClr val="D9D9D9"/>
+            </a:solidFill>
+          </a:ln>
+          <a:effectLst/>
+        </p:spPr>
+        <p:style>
+          <a:lnRef idx="1">
+            <a:schemeClr val="accent1"/>
+          </a:lnRef>
+          <a:fillRef idx="3">
+            <a:schemeClr val="accent1"/>
+          </a:fillRef>
+          <a:effectRef idx="2">
+            <a:schemeClr val="accent1"/>
+          </a:effectRef>
+          <a:fontRef idx="minor">
+            <a:schemeClr val="lt1"/>
+          </a:fontRef>
+        </p:style>
+        <p:txBody>
+          <a:bodyPr rtlCol="0" anchor="ctr"/>
+          <a:lstStyle/>
+          <a:p>
+            <a:pPr algn="ctr"/>
+          </a:p>
+        </p:txBody>
+      </p:sp>
+      <p:sp>
+        <p:nvSpPr>
+          <p:cNvPr id="118" name="Rectangle 117"/>
+          <p:cNvSpPr/>
+          <p:nvPr/>
+        </p:nvSpPr>
+        <p:spPr>
+          <a:xfrm>
+            <a:off x="6409944" y="6291072"/>
+            <a:ext cx="731520" cy="914400"/>
+          </a:xfrm>
+          <a:prstGeom prst="rect">
+            <a:avLst/>
+          </a:prstGeom>
+          <a:solidFill>
+            <a:srgbClr val="1428A0"/>
+          </a:solidFill>
+          <a:ln>
+            <a:noFill/>
+          </a:ln>
+          <a:effectLst/>
+        </p:spPr>
+        <p:style>
+          <a:lnRef idx="1">
+            <a:schemeClr val="accent1"/>
+          </a:lnRef>
+          <a:fillRef idx="3">
+            <a:schemeClr val="accent1"/>
+          </a:fillRef>
+          <a:effectRef idx="2">
+            <a:schemeClr val="accent1"/>
+          </a:effectRef>
+          <a:fontRef idx="minor">
+            <a:schemeClr val="lt1"/>
+          </a:fontRef>
+        </p:style>
+        <p:txBody>
+          <a:bodyPr rtlCol="0" anchor="ctr"/>
+          <a:lstStyle/>
+          <a:p>
+            <a:pPr algn="ctr"/>
+          </a:p>
+        </p:txBody>
+      </p:sp>
+      <p:sp>
+        <p:nvSpPr>
+          <p:cNvPr id="119" name="TextBox 118"/>
+          <p:cNvSpPr txBox="1"/>
+          <p:nvPr/>
+        </p:nvSpPr>
+        <p:spPr>
+          <a:xfrm>
+            <a:off x="6409944" y="6291072"/>
+            <a:ext cx="731520" cy="914400"/>
+          </a:xfrm>
+          <a:prstGeom prst="rect">
+            <a:avLst/>
+          </a:prstGeom>
+          <a:noFill/>
+        </p:spPr>
+        <p:txBody>
+          <a:bodyPr wrap="square" anchor="ctr" lIns="0" rIns="0" tIns="0" bIns="0">
+            <a:spAutoFit/>
+          </a:bodyPr>
+          <a:lstStyle/>
+          <a:p>
+            <a:pPr algn="ctr">
+              <a:lnSpc>
+                <a:spcPct val="112000"/>
+              </a:lnSpc>
+            </a:pPr>
+            <a:r>
+              <a:rPr sz="1400" b="1">
+                <a:solidFill>
+                  <a:srgbClr val="FFFFFF"/>
+                </a:solidFill>
+                <a:latin typeface="Arial"/>
+                <a:ea typeface="Arial"/>
+              </a:rPr>
+              <a:t>인사</a:t>
+            </a:r>
+          </a:p>
+        </p:txBody>
+      </p:sp>
+      <p:sp>
+        <p:nvSpPr>
+          <p:cNvPr id="120" name="TextBox 119"/>
+          <p:cNvSpPr txBox="1"/>
+          <p:nvPr/>
+        </p:nvSpPr>
+        <p:spPr>
+          <a:xfrm>
+            <a:off x="7287768" y="6382512"/>
+            <a:ext cx="4443984" cy="237744"/>
+          </a:xfrm>
+          <a:prstGeom prst="rect">
+            <a:avLst/>
+          </a:prstGeom>
+          <a:noFill/>
+        </p:spPr>
+        <p:txBody>
+          <a:bodyPr wrap="square" anchor="t" lIns="0" rIns="0" tIns="0" bIns="0">
+            <a:spAutoFit/>
+          </a:bodyPr>
+          <a:lstStyle/>
+          <a:p>
+            <a:pPr algn="l">
+              <a:lnSpc>
+                <a:spcPct val="112000"/>
+              </a:lnSpc>
+            </a:pPr>
+            <a:r>
+              <a:rPr sz="1125" b="1">
+                <a:solidFill>
+                  <a:srgbClr val="1A1A1A"/>
+                </a:solidFill>
+                <a:latin typeface="Arial"/>
+                <a:ea typeface="Arial"/>
+              </a:rPr>
+              <a:t>고객 시스템을 아는 시스템 SW 전문가 채용 · 양성</a:t>
+            </a:r>
+          </a:p>
+        </p:txBody>
+      </p:sp>
+      <p:sp>
+        <p:nvSpPr>
+          <p:cNvPr id="121" name="TextBox 120"/>
+          <p:cNvSpPr txBox="1"/>
+          <p:nvPr/>
+        </p:nvSpPr>
+        <p:spPr>
+          <a:xfrm>
+            <a:off x="7287768" y="6620256"/>
+            <a:ext cx="4443984" cy="512064"/>
+          </a:xfrm>
+          <a:prstGeom prst="rect">
+            <a:avLst/>
+          </a:prstGeom>
+          <a:noFill/>
+        </p:spPr>
+        <p:txBody>
+          <a:bodyPr wrap="square" anchor="t" lIns="0" rIns="0" tIns="0" bIns="0">
+            <a:spAutoFit/>
+          </a:bodyPr>
+          <a:lstStyle/>
+          <a:p>
+            <a:pPr algn="l">
+              <a:lnSpc>
+                <a:spcPct val="106000"/>
+              </a:lnSpc>
+            </a:pPr>
+            <a:r>
+              <a:rPr sz="925" b="0">
+                <a:solidFill>
+                  <a:srgbClr val="555555"/>
+                </a:solidFill>
+                <a:latin typeface="Arial"/>
+                <a:ea typeface="Arial"/>
+              </a:rPr>
+              <a:t>채용 기준 = 고객 코드를 읽고 고치는가</a:t>
+            </a:r>
+          </a:p>
+          <a:p>
+            <a:pPr algn="l">
+              <a:lnSpc>
+                <a:spcPct val="106000"/>
+              </a:lnSpc>
+            </a:pPr>
+            <a:r>
+              <a:rPr sz="925" b="0">
+                <a:solidFill>
+                  <a:srgbClr val="555555"/>
+                </a:solidFill>
+                <a:latin typeface="Arial"/>
+                <a:ea typeface="Arial"/>
+              </a:rPr>
+              <a:t>본사 엔지니어 상주 로테이션 3~6개월 · 평가 = 머지·실측·디자인인</a:t>
+            </a:r>
+          </a:p>
+        </p:txBody>
+      </p:sp>
+      <p:sp>
+        <p:nvSpPr>
+          <p:cNvPr id="122" name="Rectangle 121"/>
+          <p:cNvSpPr/>
+          <p:nvPr/>
+        </p:nvSpPr>
+        <p:spPr>
+          <a:xfrm>
+            <a:off x="12097512" y="6291072"/>
+            <a:ext cx="5468112" cy="914400"/>
+          </a:xfrm>
+          <a:prstGeom prst="rect">
+            <a:avLst/>
+          </a:prstGeom>
+          <a:solidFill>
+            <a:srgbClr val="FFFFFF"/>
+          </a:solidFill>
+          <a:ln w="9525">
+            <a:solidFill>
+              <a:srgbClr val="D9D9D9"/>
+            </a:solidFill>
+          </a:ln>
+          <a:effectLst/>
+        </p:spPr>
+        <p:style>
+          <a:lnRef idx="1">
+            <a:schemeClr val="accent1"/>
+          </a:lnRef>
+          <a:fillRef idx="3">
+            <a:schemeClr val="accent1"/>
+          </a:fillRef>
+          <a:effectRef idx="2">
+            <a:schemeClr val="accent1"/>
+          </a:effectRef>
+          <a:fontRef idx="minor">
+            <a:schemeClr val="lt1"/>
+          </a:fontRef>
+        </p:style>
+        <p:txBody>
+          <a:bodyPr rtlCol="0" anchor="ctr"/>
+          <a:lstStyle/>
+          <a:p>
+            <a:pPr algn="ctr"/>
+          </a:p>
+        </p:txBody>
+      </p:sp>
+      <p:sp>
+        <p:nvSpPr>
+          <p:cNvPr id="123" name="Rectangle 122"/>
+          <p:cNvSpPr/>
+          <p:nvPr/>
+        </p:nvSpPr>
+        <p:spPr>
+          <a:xfrm>
+            <a:off x="12097512" y="6291072"/>
+            <a:ext cx="731520" cy="914400"/>
+          </a:xfrm>
+          <a:prstGeom prst="rect">
+            <a:avLst/>
+          </a:prstGeom>
+          <a:solidFill>
+            <a:srgbClr val="1428A0"/>
+          </a:solidFill>
+          <a:ln>
+            <a:noFill/>
+          </a:ln>
+          <a:effectLst/>
+        </p:spPr>
+        <p:style>
+          <a:lnRef idx="1">
+            <a:schemeClr val="accent1"/>
+          </a:lnRef>
+          <a:fillRef idx="3">
+            <a:schemeClr val="accent1"/>
+          </a:fillRef>
+          <a:effectRef idx="2">
+            <a:schemeClr val="accent1"/>
+          </a:effectRef>
+          <a:fontRef idx="minor">
+            <a:schemeClr val="lt1"/>
+          </a:fontRef>
+        </p:style>
+        <p:txBody>
+          <a:bodyPr rtlCol="0" anchor="ctr"/>
+          <a:lstStyle/>
+          <a:p>
+            <a:pPr algn="ctr"/>
+          </a:p>
+        </p:txBody>
+      </p:sp>
+      <p:sp>
+        <p:nvSpPr>
+          <p:cNvPr id="124" name="TextBox 123"/>
+          <p:cNvSpPr txBox="1"/>
+          <p:nvPr/>
+        </p:nvSpPr>
+        <p:spPr>
+          <a:xfrm>
+            <a:off x="12097512" y="6291072"/>
+            <a:ext cx="731520" cy="914400"/>
+          </a:xfrm>
+          <a:prstGeom prst="rect">
+            <a:avLst/>
+          </a:prstGeom>
+          <a:noFill/>
+        </p:spPr>
+        <p:txBody>
+          <a:bodyPr wrap="square" anchor="ctr" lIns="0" rIns="0" tIns="0" bIns="0">
+            <a:spAutoFit/>
+          </a:bodyPr>
+          <a:lstStyle/>
+          <a:p>
+            <a:pPr algn="ctr">
+              <a:lnSpc>
+                <a:spcPct val="112000"/>
+              </a:lnSpc>
+            </a:pPr>
+            <a:r>
+              <a:rPr sz="1400" b="1">
+                <a:solidFill>
+                  <a:srgbClr val="FFFFFF"/>
+                </a:solidFill>
+                <a:latin typeface="Arial"/>
+                <a:ea typeface="Arial"/>
+              </a:rPr>
+              <a:t>문화</a:t>
+            </a:r>
+          </a:p>
+        </p:txBody>
+      </p:sp>
+      <p:sp>
+        <p:nvSpPr>
+          <p:cNvPr id="125" name="TextBox 124"/>
+          <p:cNvSpPr txBox="1"/>
+          <p:nvPr/>
+        </p:nvSpPr>
+        <p:spPr>
+          <a:xfrm>
+            <a:off x="12975336" y="6382512"/>
+            <a:ext cx="4443984" cy="237744"/>
+          </a:xfrm>
+          <a:prstGeom prst="rect">
+            <a:avLst/>
+          </a:prstGeom>
+          <a:noFill/>
+        </p:spPr>
+        <p:txBody>
+          <a:bodyPr wrap="square" anchor="t" lIns="0" rIns="0" tIns="0" bIns="0">
+            <a:spAutoFit/>
+          </a:bodyPr>
+          <a:lstStyle/>
+          <a:p>
+            <a:pPr algn="l">
+              <a:lnSpc>
+                <a:spcPct val="112000"/>
+              </a:lnSpc>
+            </a:pPr>
+            <a:r>
+              <a:rPr sz="1125" b="1">
+                <a:solidFill>
+                  <a:srgbClr val="1A1A1A"/>
+                </a:solidFill>
+                <a:latin typeface="Arial"/>
+                <a:ea typeface="Arial"/>
+              </a:rPr>
+              <a:t>오픈소스 생태계를 주도하는 문화</a:t>
+            </a:r>
+          </a:p>
+        </p:txBody>
+      </p:sp>
+      <p:sp>
+        <p:nvSpPr>
+          <p:cNvPr id="126" name="TextBox 125"/>
+          <p:cNvSpPr txBox="1"/>
+          <p:nvPr/>
+        </p:nvSpPr>
+        <p:spPr>
+          <a:xfrm>
+            <a:off x="12975336" y="6620256"/>
+            <a:ext cx="4443984" cy="512064"/>
+          </a:xfrm>
+          <a:prstGeom prst="rect">
+            <a:avLst/>
+          </a:prstGeom>
+          <a:noFill/>
+        </p:spPr>
+        <p:txBody>
+          <a:bodyPr wrap="square" anchor="t" lIns="0" rIns="0" tIns="0" bIns="0">
+            <a:spAutoFit/>
+          </a:bodyPr>
+          <a:lstStyle/>
+          <a:p>
+            <a:pPr algn="l">
+              <a:lnSpc>
+                <a:spcPct val="106000"/>
+              </a:lnSpc>
+            </a:pPr>
+            <a:r>
+              <a:rPr sz="925" b="0">
+                <a:solidFill>
+                  <a:srgbClr val="555555"/>
+                </a:solidFill>
+                <a:latin typeface="Arial"/>
+                <a:ea typeface="Arial"/>
+              </a:rPr>
+              <a:t>메인테이너 · 커미터 배출 · 업스트림 우선</a:t>
+            </a:r>
+          </a:p>
+          <a:p>
+            <a:pPr algn="l">
+              <a:lnSpc>
+                <a:spcPct val="106000"/>
+              </a:lnSpc>
+            </a:pPr>
+            <a:r>
+              <a:rPr sz="925" b="0">
+                <a:solidFill>
+                  <a:srgbClr val="555555"/>
+                </a:solidFill>
+                <a:latin typeface="Arial"/>
+                <a:ea typeface="Arial"/>
+              </a:rPr>
+              <a:t>KV 캐시 실측(WAF · 유효 DWPD) 업계 최초 공개</a:t>
+            </a:r>
+          </a:p>
+        </p:txBody>
+      </p:sp>
+      <p:sp>
+        <p:nvSpPr>
+          <p:cNvPr id="127" name="TextBox 126"/>
+          <p:cNvSpPr txBox="1"/>
+          <p:nvPr/>
+        </p:nvSpPr>
+        <p:spPr>
+          <a:xfrm>
+            <a:off x="722376" y="7351775"/>
+            <a:ext cx="11155680" cy="201168"/>
+          </a:xfrm>
+          <a:prstGeom prst="rect">
+            <a:avLst/>
+          </a:prstGeom>
+          <a:noFill/>
+        </p:spPr>
+        <p:txBody>
+          <a:bodyPr wrap="square" anchor="t" lIns="0" rIns="0" tIns="0" bIns="0">
+            <a:spAutoFit/>
+          </a:bodyPr>
+          <a:lstStyle/>
+          <a:p>
+            <a:pPr algn="l">
+              <a:lnSpc>
+                <a:spcPct val="112000"/>
+              </a:lnSpc>
+            </a:pPr>
+            <a:r>
+              <a:rPr sz="1125" b="1">
+                <a:solidFill>
+                  <a:srgbClr val="1428A0"/>
+                </a:solidFill>
+                <a:latin typeface="Arial"/>
+                <a:ea typeface="Arial"/>
+              </a:rPr>
+              <a:t>단계별 통과 조건</a:t>
+            </a:r>
+            <a:r>
+              <a:rPr sz="950" b="0">
+                <a:solidFill>
+                  <a:srgbClr val="8A8A8A"/>
+                </a:solidFill>
+                <a:latin typeface="Arial"/>
+                <a:ea typeface="Arial"/>
+              </a:rPr>
+              <a:t>   각 단계의 증명이 다음 단계의 승인 근거</a:t>
+            </a:r>
+          </a:p>
+        </p:txBody>
+      </p:sp>
+      <p:sp>
+        <p:nvSpPr>
+          <p:cNvPr id="128" name="Rectangle 127"/>
+          <p:cNvSpPr/>
+          <p:nvPr/>
+        </p:nvSpPr>
+        <p:spPr>
+          <a:xfrm>
+            <a:off x="722376" y="7607807"/>
+            <a:ext cx="3596640" cy="822960"/>
+          </a:xfrm>
+          <a:prstGeom prst="rect">
+            <a:avLst/>
+          </a:prstGeom>
+          <a:solidFill>
+            <a:srgbClr val="FFFFFF"/>
+          </a:solidFill>
+          <a:ln w="9525">
+            <a:solidFill>
+              <a:srgbClr val="D9D9D9"/>
+            </a:solidFill>
+          </a:ln>
+          <a:effectLst/>
+        </p:spPr>
+        <p:style>
+          <a:lnRef idx="1">
+            <a:schemeClr val="accent1"/>
+          </a:lnRef>
+          <a:fillRef idx="3">
+            <a:schemeClr val="accent1"/>
+          </a:fillRef>
+          <a:effectRef idx="2">
+            <a:schemeClr val="accent1"/>
+          </a:effectRef>
+          <a:fontRef idx="minor">
+            <a:schemeClr val="lt1"/>
+          </a:fontRef>
+        </p:style>
+        <p:txBody>
+          <a:bodyPr rtlCol="0" anchor="ctr"/>
+          <a:lstStyle/>
+          <a:p>
+            <a:pPr algn="ctr"/>
+          </a:p>
+        </p:txBody>
+      </p:sp>
+      <p:sp>
+        <p:nvSpPr>
+          <p:cNvPr id="129" name="TextBox 128"/>
+          <p:cNvSpPr txBox="1"/>
+          <p:nvPr/>
+        </p:nvSpPr>
+        <p:spPr>
+          <a:xfrm>
+            <a:off x="850392" y="7662671"/>
+            <a:ext cx="822960" cy="256032"/>
+          </a:xfrm>
+          <a:prstGeom prst="rect">
+            <a:avLst/>
+          </a:prstGeom>
+          <a:noFill/>
+        </p:spPr>
+        <p:txBody>
+          <a:bodyPr wrap="square" anchor="ctr" lIns="0" rIns="0" tIns="0" bIns="0">
+            <a:spAutoFit/>
+          </a:bodyPr>
+          <a:lstStyle/>
+          <a:p>
+            <a:pPr algn="l">
+              <a:lnSpc>
+                <a:spcPct val="112000"/>
+              </a:lnSpc>
+            </a:pPr>
+            <a:r>
+              <a:rPr sz="1200" b="1">
+                <a:solidFill>
+                  <a:srgbClr val="1428A0"/>
+                </a:solidFill>
+                <a:latin typeface="Arial"/>
+                <a:ea typeface="Arial"/>
+              </a:rPr>
+              <a:t>90일</a:t>
+            </a:r>
+          </a:p>
+        </p:txBody>
+      </p:sp>
+      <p:sp>
+        <p:nvSpPr>
+          <p:cNvPr id="130" name="TextBox 129"/>
+          <p:cNvSpPr txBox="1"/>
+          <p:nvPr/>
+        </p:nvSpPr>
+        <p:spPr>
+          <a:xfrm>
+            <a:off x="1655064" y="7653527"/>
+            <a:ext cx="2535936" cy="731520"/>
+          </a:xfrm>
+          <a:prstGeom prst="rect">
+            <a:avLst/>
+          </a:prstGeom>
+          <a:noFill/>
+        </p:spPr>
+        <p:txBody>
+          <a:bodyPr wrap="square" anchor="ctr" lIns="0" rIns="0" tIns="0" bIns="0">
+            <a:spAutoFit/>
+          </a:bodyPr>
+          <a:lstStyle/>
+          <a:p>
+            <a:pPr algn="l">
+              <a:lnSpc>
+                <a:spcPct val="106000"/>
+              </a:lnSpc>
+            </a:pPr>
+            <a:r>
+              <a:rPr sz="900" b="0">
+                <a:solidFill>
+                  <a:srgbClr val="555555"/>
+                </a:solidFill>
+                <a:latin typeface="Arial"/>
+                <a:ea typeface="Arial"/>
+              </a:rPr>
+              <a:t>등대 고객 1사 트레이스 확보 · KV 캐시 실측(WAF · 유효 DWPD) 공개 · 캐시 관리자 플러그인 PR 1건</a:t>
+            </a:r>
+          </a:p>
+        </p:txBody>
+      </p:sp>
+      <p:sp>
+        <p:nvSpPr>
+          <p:cNvPr id="131" name="Right Arrow 130"/>
+          <p:cNvSpPr/>
+          <p:nvPr/>
+        </p:nvSpPr>
+        <p:spPr>
+          <a:xfrm>
+            <a:off x="4328159" y="7946136"/>
+            <a:ext cx="164592" cy="146304"/>
+          </a:xfrm>
+          <a:prstGeom prst="rightArrow">
+            <a:avLst/>
+          </a:prstGeom>
+          <a:solidFill>
+            <a:srgbClr val="AAB8E8"/>
+          </a:solidFill>
+          <a:ln>
+            <a:noFill/>
+          </a:ln>
+          <a:effectLst/>
+        </p:spPr>
+        <p:style>
+          <a:lnRef idx="1">
+            <a:schemeClr val="accent1"/>
+          </a:lnRef>
+          <a:fillRef idx="3">
+            <a:schemeClr val="accent1"/>
+          </a:fillRef>
+          <a:effectRef idx="2">
+            <a:schemeClr val="accent1"/>
+          </a:effectRef>
+          <a:fontRef idx="minor">
+            <a:schemeClr val="lt1"/>
+          </a:fontRef>
+        </p:style>
+        <p:txBody>
+          <a:bodyPr rtlCol="0" anchor="ctr"/>
+          <a:lstStyle/>
+          <a:p>
+            <a:pPr algn="ctr"/>
+          </a:p>
+        </p:txBody>
+      </p:sp>
+      <p:sp>
+        <p:nvSpPr>
+          <p:cNvPr id="132" name="Rectangle 131"/>
+          <p:cNvSpPr/>
+          <p:nvPr/>
+        </p:nvSpPr>
+        <p:spPr>
+          <a:xfrm>
+            <a:off x="4501896" y="7607807"/>
+            <a:ext cx="3596640" cy="822960"/>
+          </a:xfrm>
+          <a:prstGeom prst="rect">
+            <a:avLst/>
+          </a:prstGeom>
+          <a:solidFill>
+            <a:srgbClr val="FFFFFF"/>
+          </a:solidFill>
+          <a:ln w="9525">
+            <a:solidFill>
+              <a:srgbClr val="D9D9D9"/>
+            </a:solidFill>
+          </a:ln>
+          <a:effectLst/>
+        </p:spPr>
+        <p:style>
+          <a:lnRef idx="1">
+            <a:schemeClr val="accent1"/>
+          </a:lnRef>
+          <a:fillRef idx="3">
+            <a:schemeClr val="accent1"/>
+          </a:fillRef>
+          <a:effectRef idx="2">
+            <a:schemeClr val="accent1"/>
+          </a:effectRef>
+          <a:fontRef idx="minor">
+            <a:schemeClr val="lt1"/>
+          </a:fontRef>
+        </p:style>
+        <p:txBody>
+          <a:bodyPr rtlCol="0" anchor="ctr"/>
+          <a:lstStyle/>
+          <a:p>
+            <a:pPr algn="ctr"/>
+          </a:p>
+        </p:txBody>
+      </p:sp>
+      <p:sp>
+        <p:nvSpPr>
+          <p:cNvPr id="133" name="TextBox 132"/>
+          <p:cNvSpPr txBox="1"/>
+          <p:nvPr/>
+        </p:nvSpPr>
+        <p:spPr>
+          <a:xfrm>
+            <a:off x="4629911" y="7662671"/>
+            <a:ext cx="822960" cy="256032"/>
+          </a:xfrm>
+          <a:prstGeom prst="rect">
+            <a:avLst/>
+          </a:prstGeom>
+          <a:noFill/>
+        </p:spPr>
+        <p:txBody>
+          <a:bodyPr wrap="square" anchor="ctr" lIns="0" rIns="0" tIns="0" bIns="0">
+            <a:spAutoFit/>
+          </a:bodyPr>
+          <a:lstStyle/>
+          <a:p>
+            <a:pPr algn="l">
+              <a:lnSpc>
+                <a:spcPct val="112000"/>
+              </a:lnSpc>
+            </a:pPr>
+            <a:r>
+              <a:rPr sz="1200" b="1">
+                <a:solidFill>
+                  <a:srgbClr val="1428A0"/>
+                </a:solidFill>
+                <a:latin typeface="Arial"/>
+                <a:ea typeface="Arial"/>
+              </a:rPr>
+              <a:t>12개월</a:t>
+            </a:r>
+          </a:p>
+        </p:txBody>
+      </p:sp>
+      <p:sp>
+        <p:nvSpPr>
+          <p:cNvPr id="134" name="TextBox 133"/>
+          <p:cNvSpPr txBox="1"/>
+          <p:nvPr/>
+        </p:nvSpPr>
+        <p:spPr>
+          <a:xfrm>
+            <a:off x="5434584" y="7653527"/>
+            <a:ext cx="2535936" cy="731520"/>
+          </a:xfrm>
+          <a:prstGeom prst="rect">
+            <a:avLst/>
+          </a:prstGeom>
+          <a:noFill/>
+        </p:spPr>
+        <p:txBody>
+          <a:bodyPr wrap="square" anchor="ctr" lIns="0" rIns="0" tIns="0" bIns="0">
+            <a:spAutoFit/>
+          </a:bodyPr>
+          <a:lstStyle/>
+          <a:p>
+            <a:pPr algn="l">
+              <a:lnSpc>
+                <a:spcPct val="106000"/>
+              </a:lnSpc>
+            </a:pPr>
+            <a:r>
+              <a:rPr sz="900" b="0">
+                <a:solidFill>
+                  <a:srgbClr val="555555"/>
+                </a:solidFill>
+                <a:latin typeface="Arial"/>
+                <a:ea typeface="Arial"/>
+              </a:rPr>
+              <a:t>플러그인 메인라인 머지 · 고객 워크로드에서 QLC 유효 DWPD ≥ 1 실증 · WAF 급등 감지·대응 시제품(6장)</a:t>
+            </a:r>
+          </a:p>
+        </p:txBody>
+      </p:sp>
+      <p:sp>
+        <p:nvSpPr>
+          <p:cNvPr id="135" name="Right Arrow 134"/>
+          <p:cNvSpPr/>
+          <p:nvPr/>
+        </p:nvSpPr>
+        <p:spPr>
+          <a:xfrm>
+            <a:off x="8107679" y="7946136"/>
+            <a:ext cx="164592" cy="146304"/>
+          </a:xfrm>
+          <a:prstGeom prst="rightArrow">
+            <a:avLst/>
+          </a:prstGeom>
+          <a:solidFill>
+            <a:srgbClr val="AAB8E8"/>
+          </a:solidFill>
+          <a:ln>
+            <a:noFill/>
+          </a:ln>
+          <a:effectLst/>
+        </p:spPr>
+        <p:style>
+          <a:lnRef idx="1">
+            <a:schemeClr val="accent1"/>
+          </a:lnRef>
+          <a:fillRef idx="3">
+            <a:schemeClr val="accent1"/>
+          </a:fillRef>
+          <a:effectRef idx="2">
+            <a:schemeClr val="accent1"/>
+          </a:effectRef>
+          <a:fontRef idx="minor">
+            <a:schemeClr val="lt1"/>
+          </a:fontRef>
+        </p:style>
+        <p:txBody>
+          <a:bodyPr rtlCol="0" anchor="ctr"/>
+          <a:lstStyle/>
+          <a:p>
+            <a:pPr algn="ctr"/>
+          </a:p>
+        </p:txBody>
+      </p:sp>
+      <p:sp>
+        <p:nvSpPr>
+          <p:cNvPr id="136" name="Rectangle 135"/>
+          <p:cNvSpPr/>
+          <p:nvPr/>
+        </p:nvSpPr>
+        <p:spPr>
+          <a:xfrm>
+            <a:off x="8281415" y="7607807"/>
+            <a:ext cx="3596640" cy="822960"/>
           </a:xfrm>
           <a:prstGeom prst="rect">
             <a:avLst/>
@@ -31201,14 +33642,14 @@
       </p:sp>
       <p:sp>
         <p:nvSpPr>
-          <p:cNvPr id="78" name="TextBox 77"/>
-          <p:cNvSpPr txBox="1"/>
-          <p:nvPr/>
-        </p:nvSpPr>
-        <p:spPr>
-          <a:xfrm>
-            <a:off x="8238744" y="7552944"/>
-            <a:ext cx="868680" cy="274320"/>
+          <p:cNvPr id="137" name="TextBox 136"/>
+          <p:cNvSpPr txBox="1"/>
+          <p:nvPr/>
+        </p:nvSpPr>
+        <p:spPr>
+          <a:xfrm>
+            <a:off x="8409431" y="7662671"/>
+            <a:ext cx="822960" cy="256032"/>
           </a:xfrm>
           <a:prstGeom prst="rect">
             <a:avLst/>
@@ -31227,7 +33668,7 @@
               </a:lnSpc>
             </a:pPr>
             <a:r>
-              <a:rPr sz="1275" b="1">
+              <a:rPr sz="1200" b="1">
                 <a:solidFill>
                   <a:srgbClr val="1428A0"/>
                 </a:solidFill>
@@ -31241,14 +33682,14 @@
       </p:sp>
       <p:sp>
         <p:nvSpPr>
-          <p:cNvPr id="79" name="TextBox 78"/>
-          <p:cNvSpPr txBox="1"/>
-          <p:nvPr/>
-        </p:nvSpPr>
-        <p:spPr>
-          <a:xfrm>
-            <a:off x="9079992" y="7543800"/>
-            <a:ext cx="2395728" cy="804672"/>
+          <p:cNvPr id="138" name="TextBox 137"/>
+          <p:cNvSpPr txBox="1"/>
+          <p:nvPr/>
+        </p:nvSpPr>
+        <p:spPr>
+          <a:xfrm>
+            <a:off x="9214103" y="7653527"/>
+            <a:ext cx="2535936" cy="731520"/>
           </a:xfrm>
           <a:prstGeom prst="rect">
             <a:avLst/>
@@ -31263,7 +33704,7 @@
           <a:p>
             <a:pPr algn="l">
               <a:lnSpc>
-                <a:spcPct val="104000"/>
+                <a:spcPct val="106000"/>
               </a:lnSpc>
             </a:pPr>
             <a:r>
@@ -31281,75 +33722,23 @@
       </p:sp>
       <p:sp>
         <p:nvSpPr>
-          <p:cNvPr id="80" name="TextBox 79"/>
-          <p:cNvSpPr txBox="1"/>
-          <p:nvPr/>
-        </p:nvSpPr>
-        <p:spPr>
-          <a:xfrm>
-            <a:off x="11878056" y="2560320"/>
-            <a:ext cx="5687567" cy="237744"/>
-          </a:xfrm>
-          <a:prstGeom prst="rect">
-            <a:avLst/>
-          </a:prstGeom>
-          <a:noFill/>
-        </p:spPr>
-        <p:txBody>
-          <a:bodyPr wrap="square" anchor="t" lIns="0" rIns="0" tIns="0" bIns="0">
-            <a:spAutoFit/>
-          </a:bodyPr>
-          <a:lstStyle/>
-          <a:p>
-            <a:pPr algn="l">
-              <a:lnSpc>
-                <a:spcPct val="112000"/>
-              </a:lnSpc>
-            </a:pPr>
-            <a:r>
-              <a:rPr sz="1350" b="1">
-                <a:solidFill>
-                  <a:srgbClr val="1428A0"/>
-                </a:solidFill>
-                <a:latin typeface="Arial"/>
-                <a:ea typeface="Arial"/>
-              </a:rPr>
-              <a:t>개발실 내부 실행</a:t>
-            </a:r>
-            <a:r>
-              <a:rPr sz="1000" b="0">
-                <a:solidFill>
-                  <a:srgbClr val="8A8A8A"/>
-                </a:solidFill>
-                <a:latin typeface="Arial"/>
-                <a:ea typeface="Arial"/>
-              </a:rPr>
-              <a:t>   별도 투자 없이 개발 자원 재배치로</a:t>
-            </a:r>
-          </a:p>
-        </p:txBody>
-      </p:sp>
-      <p:sp>
-        <p:nvSpPr>
-          <p:cNvPr id="81" name="Rectangle 80"/>
+          <p:cNvPr id="139" name="Rectangle 138"/>
           <p:cNvSpPr/>
           <p:nvPr/>
         </p:nvSpPr>
         <p:spPr>
           <a:xfrm>
-            <a:off x="11878056" y="2889503"/>
-            <a:ext cx="5687567" cy="1060704"/>
+            <a:off x="12152376" y="7351775"/>
+            <a:ext cx="5413248" cy="1078992"/>
           </a:xfrm>
           <a:prstGeom prst="rect">
             <a:avLst/>
           </a:prstGeom>
           <a:solidFill>
-            <a:srgbClr val="FFFFFF"/>
+            <a:srgbClr val="F4F6FC"/>
           </a:solidFill>
-          <a:ln w="9525">
-            <a:solidFill>
-              <a:srgbClr val="D9D9D9"/>
-            </a:solidFill>
+          <a:ln>
+            <a:noFill/>
           </a:ln>
           <a:effectLst/>
         </p:spPr>
@@ -31377,14 +33766,14 @@
       </p:sp>
       <p:sp>
         <p:nvSpPr>
-          <p:cNvPr id="82" name="Rectangle 81"/>
+          <p:cNvPr id="140" name="Rectangle 139"/>
           <p:cNvSpPr/>
           <p:nvPr/>
         </p:nvSpPr>
         <p:spPr>
           <a:xfrm>
-            <a:off x="11878056" y="2889503"/>
-            <a:ext cx="731520" cy="1060704"/>
+            <a:off x="12152376" y="7351775"/>
+            <a:ext cx="54864" cy="1078992"/>
           </a:xfrm>
           <a:prstGeom prst="rect">
             <a:avLst/>
@@ -31421,14 +33810,54 @@
       </p:sp>
       <p:sp>
         <p:nvSpPr>
-          <p:cNvPr id="83" name="TextBox 82"/>
-          <p:cNvSpPr txBox="1"/>
-          <p:nvPr/>
-        </p:nvSpPr>
-        <p:spPr>
-          <a:xfrm>
-            <a:off x="11878056" y="2889503"/>
-            <a:ext cx="731520" cy="1060704"/>
+          <p:cNvPr id="141" name="TextBox 140"/>
+          <p:cNvSpPr txBox="1"/>
+          <p:nvPr/>
+        </p:nvSpPr>
+        <p:spPr>
+          <a:xfrm>
+            <a:off x="12371832" y="7424927"/>
+            <a:ext cx="2468880" cy="182880"/>
+          </a:xfrm>
+          <a:prstGeom prst="rect">
+            <a:avLst/>
+          </a:prstGeom>
+          <a:noFill/>
+        </p:spPr>
+        <p:txBody>
+          <a:bodyPr wrap="square" anchor="t" lIns="0" rIns="0" tIns="0" bIns="0">
+            <a:spAutoFit/>
+          </a:bodyPr>
+          <a:lstStyle/>
+          <a:p>
+            <a:pPr algn="l">
+              <a:lnSpc>
+                <a:spcPct val="112000"/>
+              </a:lnSpc>
+            </a:pPr>
+            <a:r>
+              <a:rPr sz="925" b="0">
+                <a:solidFill>
+                  <a:srgbClr val="8A8A8A"/>
+                </a:solidFill>
+                <a:latin typeface="Arial"/>
+                <a:ea typeface="Arial"/>
+              </a:rPr>
+              <a:t>판돈 · 락인으로 얻는 점유율</a:t>
+            </a:r>
+          </a:p>
+        </p:txBody>
+      </p:sp>
+      <p:sp>
+        <p:nvSpPr>
+          <p:cNvPr id="142" name="TextBox 141"/>
+          <p:cNvSpPr txBox="1"/>
+          <p:nvPr/>
+        </p:nvSpPr>
+        <p:spPr>
+          <a:xfrm>
+            <a:off x="12371832" y="7607807"/>
+            <a:ext cx="2468880" cy="347472"/>
           </a:xfrm>
           <a:prstGeom prst="rect">
             <a:avLst/>
@@ -31441,34 +33870,114 @@
           </a:bodyPr>
           <a:lstStyle/>
           <a:p>
-            <a:pPr algn="ctr">
+            <a:pPr algn="l">
               <a:lnSpc>
                 <a:spcPct val="112000"/>
               </a:lnSpc>
             </a:pPr>
             <a:r>
-              <a:rPr sz="1500" b="1">
-                <a:solidFill>
-                  <a:srgbClr val="FFFFFF"/>
-                </a:solidFill>
-                <a:latin typeface="Arial"/>
-                <a:ea typeface="Arial"/>
-              </a:rPr>
-              <a:t>조직</a:t>
-            </a:r>
-          </a:p>
-        </p:txBody>
-      </p:sp>
-      <p:sp>
-        <p:nvSpPr>
-          <p:cNvPr id="84" name="TextBox 83"/>
-          <p:cNvSpPr txBox="1"/>
-          <p:nvPr/>
-        </p:nvSpPr>
-        <p:spPr>
-          <a:xfrm>
-            <a:off x="12746736" y="2889503"/>
-            <a:ext cx="4681727" cy="1060704"/>
+              <a:rPr sz="1350" b="1">
+                <a:solidFill>
+                  <a:srgbClr val="1428A0"/>
+                </a:solidFill>
+                <a:latin typeface="Arial"/>
+                <a:ea typeface="Arial"/>
+              </a:rPr>
+              <a:t>캐시 계층 QLC 0 → 50%</a:t>
+            </a:r>
+          </a:p>
+        </p:txBody>
+      </p:sp>
+      <p:sp>
+        <p:nvSpPr>
+          <p:cNvPr id="143" name="TextBox 142"/>
+          <p:cNvSpPr txBox="1"/>
+          <p:nvPr/>
+        </p:nvSpPr>
+        <p:spPr>
+          <a:xfrm>
+            <a:off x="12371832" y="7973567"/>
+            <a:ext cx="2468880" cy="384048"/>
+          </a:xfrm>
+          <a:prstGeom prst="rect">
+            <a:avLst/>
+          </a:prstGeom>
+          <a:noFill/>
+        </p:spPr>
+        <p:txBody>
+          <a:bodyPr wrap="square" anchor="t" lIns="0" rIns="0" tIns="0" bIns="0">
+            <a:spAutoFit/>
+          </a:bodyPr>
+          <a:lstStyle/>
+          <a:p>
+            <a:pPr algn="l">
+              <a:lnSpc>
+                <a:spcPct val="102000"/>
+              </a:lnSpc>
+            </a:pPr>
+            <a:r>
+              <a:rPr sz="850" b="0">
+                <a:solidFill>
+                  <a:srgbClr val="555555"/>
+                </a:solidFill>
+                <a:latin typeface="Arial"/>
+                <a:ea typeface="Arial"/>
+              </a:rPr>
+              <a:t>2030 추론 캐시 350EB 중 QLC 175EB(조건부 상방) · 락인 없으면 TLC 유지</a:t>
+            </a:r>
+          </a:p>
+        </p:txBody>
+      </p:sp>
+      <p:sp>
+        <p:nvSpPr>
+          <p:cNvPr id="144" name="TextBox 143"/>
+          <p:cNvSpPr txBox="1"/>
+          <p:nvPr/>
+        </p:nvSpPr>
+        <p:spPr>
+          <a:xfrm>
+            <a:off x="15023592" y="7424927"/>
+            <a:ext cx="2468880" cy="182880"/>
+          </a:xfrm>
+          <a:prstGeom prst="rect">
+            <a:avLst/>
+          </a:prstGeom>
+          <a:noFill/>
+        </p:spPr>
+        <p:txBody>
+          <a:bodyPr wrap="square" anchor="t" lIns="0" rIns="0" tIns="0" bIns="0">
+            <a:spAutoFit/>
+          </a:bodyPr>
+          <a:lstStyle/>
+          <a:p>
+            <a:pPr algn="l">
+              <a:lnSpc>
+                <a:spcPct val="112000"/>
+              </a:lnSpc>
+            </a:pPr>
+            <a:r>
+              <a:rPr sz="925" b="0">
+                <a:solidFill>
+                  <a:srgbClr val="8A8A8A"/>
+                </a:solidFill>
+                <a:latin typeface="Arial"/>
+                <a:ea typeface="Arial"/>
+              </a:rPr>
+              <a:t>비용 · 개발실 자원 투입</a:t>
+            </a:r>
+          </a:p>
+        </p:txBody>
+      </p:sp>
+      <p:sp>
+        <p:nvSpPr>
+          <p:cNvPr id="145" name="TextBox 144"/>
+          <p:cNvSpPr txBox="1"/>
+          <p:nvPr/>
+        </p:nvSpPr>
+        <p:spPr>
+          <a:xfrm>
+            <a:off x="15023592" y="7607807"/>
+            <a:ext cx="2468880" cy="347472"/>
           </a:xfrm>
           <a:prstGeom prst="rect">
             <a:avLst/>
@@ -31483,112 +33992,72 @@
           <a:p>
             <a:pPr algn="l">
               <a:lnSpc>
-                <a:spcPct val="108000"/>
-              </a:lnSpc>
-            </a:pPr>
-            <a:r>
-              <a:rPr sz="1050" b="1">
-                <a:solidFill>
-                  <a:srgbClr val="1A1A1A"/>
-                </a:solidFill>
-                <a:latin typeface="Arial"/>
-                <a:ea typeface="Arial"/>
-              </a:rPr>
-              <a:t>시스템 소프트웨어 조직 강화 (캐시 관리자 · I/O · 커널)</a:t>
-            </a:r>
-          </a:p>
-          <a:p>
-            <a:pPr algn="l">
-              <a:lnSpc>
-                <a:spcPct val="108000"/>
-              </a:lnSpc>
-            </a:pPr>
-            <a:r>
-              <a:rPr sz="975" b="0">
+                <a:spcPct val="112000"/>
+              </a:lnSpc>
+            </a:pPr>
+            <a:r>
+              <a:rPr sz="1350" b="1">
+                <a:solidFill>
+                  <a:srgbClr val="1428A0"/>
+                </a:solidFill>
+                <a:latin typeface="Arial"/>
+                <a:ea typeface="Arial"/>
+              </a:rPr>
+              <a:t>별도 투자 없음</a:t>
+            </a:r>
+          </a:p>
+        </p:txBody>
+      </p:sp>
+      <p:sp>
+        <p:nvSpPr>
+          <p:cNvPr id="146" name="TextBox 145"/>
+          <p:cNvSpPr txBox="1"/>
+          <p:nvPr/>
+        </p:nvSpPr>
+        <p:spPr>
+          <a:xfrm>
+            <a:off x="15023592" y="7973567"/>
+            <a:ext cx="2468880" cy="384048"/>
+          </a:xfrm>
+          <a:prstGeom prst="rect">
+            <a:avLst/>
+          </a:prstGeom>
+          <a:noFill/>
+        </p:spPr>
+        <p:txBody>
+          <a:bodyPr wrap="square" anchor="t" lIns="0" rIns="0" tIns="0" bIns="0">
+            <a:spAutoFit/>
+          </a:bodyPr>
+          <a:lstStyle/>
+          <a:p>
+            <a:pPr algn="l">
+              <a:lnSpc>
+                <a:spcPct val="102000"/>
+              </a:lnSpc>
+            </a:pPr>
+            <a:r>
+              <a:rPr sz="850" b="0">
                 <a:solidFill>
                   <a:srgbClr val="555555"/>
                 </a:solidFill>
                 <a:latin typeface="Arial"/>
                 <a:ea typeface="Arial"/>
               </a:rPr>
-              <a:t>Co-Design Pod 3~5명 · 개발실 소속 · 선별 고객 1~2사</a:t>
-            </a:r>
-          </a:p>
-          <a:p>
-            <a:pPr algn="l">
-              <a:lnSpc>
-                <a:spcPct val="108000"/>
-              </a:lnSpc>
-            </a:pPr>
-            <a:r>
-              <a:rPr sz="975" b="0">
-                <a:solidFill>
-                  <a:srgbClr val="555555"/>
-                </a:solidFill>
-                <a:latin typeface="Arial"/>
-                <a:ea typeface="Arial"/>
-              </a:rPr>
-              <a:t>미주 법인 협업 · 고객 시간대 대응</a:t>
-            </a:r>
-          </a:p>
-        </p:txBody>
-      </p:sp>
-      <p:sp>
-        <p:nvSpPr>
-          <p:cNvPr id="85" name="Rectangle 84"/>
+              <a:t>Pod 3~5명 × 1~2사 재배치 · 채용은 정원 내 · 실측 공개는 보안 검토만</a:t>
+            </a:r>
+          </a:p>
+        </p:txBody>
+      </p:sp>
+      <p:sp>
+        <p:nvSpPr>
+          <p:cNvPr id="147" name="Rectangle 146"/>
           <p:cNvSpPr/>
           <p:nvPr/>
         </p:nvSpPr>
         <p:spPr>
           <a:xfrm>
-            <a:off x="11878056" y="4059935"/>
-            <a:ext cx="5687567" cy="1060704"/>
-          </a:xfrm>
-          <a:prstGeom prst="rect">
-            <a:avLst/>
-          </a:prstGeom>
-          <a:solidFill>
-            <a:srgbClr val="FFFFFF"/>
-          </a:solidFill>
-          <a:ln w="9525">
-            <a:solidFill>
-              <a:srgbClr val="D9D9D9"/>
-            </a:solidFill>
-          </a:ln>
-          <a:effectLst/>
-        </p:spPr>
-        <p:style>
-          <a:lnRef idx="1">
-            <a:schemeClr val="accent1"/>
-          </a:lnRef>
-          <a:fillRef idx="3">
-            <a:schemeClr val="accent1"/>
-          </a:fillRef>
-          <a:effectRef idx="2">
-            <a:schemeClr val="accent1"/>
-          </a:effectRef>
-          <a:fontRef idx="minor">
-            <a:schemeClr val="lt1"/>
-          </a:fontRef>
-        </p:style>
-        <p:txBody>
-          <a:bodyPr rtlCol="0" anchor="ctr"/>
-          <a:lstStyle/>
-          <a:p>
-            <a:pPr algn="ctr"/>
-          </a:p>
-        </p:txBody>
-      </p:sp>
-      <p:sp>
-        <p:nvSpPr>
-          <p:cNvPr id="86" name="Rectangle 85"/>
-          <p:cNvSpPr/>
-          <p:nvPr/>
-        </p:nvSpPr>
-        <p:spPr>
-          <a:xfrm>
-            <a:off x="11878056" y="4059935"/>
-            <a:ext cx="731520" cy="1060704"/>
+            <a:off x="722376" y="8613648"/>
+            <a:ext cx="16843248" cy="731520"/>
           </a:xfrm>
           <a:prstGeom prst="rect">
             <a:avLst/>
@@ -31625,697 +34094,7 @@
       </p:sp>
       <p:sp>
         <p:nvSpPr>
-          <p:cNvPr id="87" name="TextBox 86"/>
-          <p:cNvSpPr txBox="1"/>
-          <p:nvPr/>
-        </p:nvSpPr>
-        <p:spPr>
-          <a:xfrm>
-            <a:off x="11878056" y="4059935"/>
-            <a:ext cx="731520" cy="1060704"/>
-          </a:xfrm>
-          <a:prstGeom prst="rect">
-            <a:avLst/>
-          </a:prstGeom>
-          <a:noFill/>
-        </p:spPr>
-        <p:txBody>
-          <a:bodyPr wrap="square" anchor="ctr" lIns="0" rIns="0" tIns="0" bIns="0">
-            <a:spAutoFit/>
-          </a:bodyPr>
-          <a:lstStyle/>
-          <a:p>
-            <a:pPr algn="ctr">
-              <a:lnSpc>
-                <a:spcPct val="112000"/>
-              </a:lnSpc>
-            </a:pPr>
-            <a:r>
-              <a:rPr sz="1500" b="1">
-                <a:solidFill>
-                  <a:srgbClr val="FFFFFF"/>
-                </a:solidFill>
-                <a:latin typeface="Arial"/>
-                <a:ea typeface="Arial"/>
-              </a:rPr>
-              <a:t>인사</a:t>
-            </a:r>
-          </a:p>
-        </p:txBody>
-      </p:sp>
-      <p:sp>
-        <p:nvSpPr>
-          <p:cNvPr id="88" name="TextBox 87"/>
-          <p:cNvSpPr txBox="1"/>
-          <p:nvPr/>
-        </p:nvSpPr>
-        <p:spPr>
-          <a:xfrm>
-            <a:off x="12746736" y="4059935"/>
-            <a:ext cx="4681727" cy="1060704"/>
-          </a:xfrm>
-          <a:prstGeom prst="rect">
-            <a:avLst/>
-          </a:prstGeom>
-          <a:noFill/>
-        </p:spPr>
-        <p:txBody>
-          <a:bodyPr wrap="square" anchor="ctr" lIns="0" rIns="0" tIns="0" bIns="0">
-            <a:spAutoFit/>
-          </a:bodyPr>
-          <a:lstStyle/>
-          <a:p>
-            <a:pPr algn="l">
-              <a:lnSpc>
-                <a:spcPct val="108000"/>
-              </a:lnSpc>
-            </a:pPr>
-            <a:r>
-              <a:rPr sz="1050" b="1">
-                <a:solidFill>
-                  <a:srgbClr val="1A1A1A"/>
-                </a:solidFill>
-                <a:latin typeface="Arial"/>
-                <a:ea typeface="Arial"/>
-              </a:rPr>
-              <a:t>시스템 SW 전문가 채용·양성 · 기준 = 고객 코드를 읽고 고치는가</a:t>
-            </a:r>
-          </a:p>
-          <a:p>
-            <a:pPr algn="l">
-              <a:lnSpc>
-                <a:spcPct val="108000"/>
-              </a:lnSpc>
-            </a:pPr>
-            <a:r>
-              <a:rPr sz="975" b="0">
-                <a:solidFill>
-                  <a:srgbClr val="555555"/>
-                </a:solidFill>
-                <a:latin typeface="Arial"/>
-                <a:ea typeface="Arial"/>
-              </a:rPr>
-              <a:t>본사 엔지니어 상주 로테이션 (3~6개월)</a:t>
-            </a:r>
-          </a:p>
-          <a:p>
-            <a:pPr algn="l">
-              <a:lnSpc>
-                <a:spcPct val="108000"/>
-              </a:lnSpc>
-            </a:pPr>
-            <a:r>
-              <a:rPr sz="975" b="0">
-                <a:solidFill>
-                  <a:srgbClr val="555555"/>
-                </a:solidFill>
-                <a:latin typeface="Arial"/>
-                <a:ea typeface="Arial"/>
-              </a:rPr>
-              <a:t>성과 평가 = 머지 · 실측 공개 · 디자인인</a:t>
-            </a:r>
-          </a:p>
-        </p:txBody>
-      </p:sp>
-      <p:sp>
-        <p:nvSpPr>
-          <p:cNvPr id="89" name="Rectangle 88"/>
-          <p:cNvSpPr/>
-          <p:nvPr/>
-        </p:nvSpPr>
-        <p:spPr>
-          <a:xfrm>
-            <a:off x="11878056" y="5230367"/>
-            <a:ext cx="5687567" cy="1060704"/>
-          </a:xfrm>
-          <a:prstGeom prst="rect">
-            <a:avLst/>
-          </a:prstGeom>
-          <a:solidFill>
-            <a:srgbClr val="FFFFFF"/>
-          </a:solidFill>
-          <a:ln w="9525">
-            <a:solidFill>
-              <a:srgbClr val="D9D9D9"/>
-            </a:solidFill>
-          </a:ln>
-          <a:effectLst/>
-        </p:spPr>
-        <p:style>
-          <a:lnRef idx="1">
-            <a:schemeClr val="accent1"/>
-          </a:lnRef>
-          <a:fillRef idx="3">
-            <a:schemeClr val="accent1"/>
-          </a:fillRef>
-          <a:effectRef idx="2">
-            <a:schemeClr val="accent1"/>
-          </a:effectRef>
-          <a:fontRef idx="minor">
-            <a:schemeClr val="lt1"/>
-          </a:fontRef>
-        </p:style>
-        <p:txBody>
-          <a:bodyPr rtlCol="0" anchor="ctr"/>
-          <a:lstStyle/>
-          <a:p>
-            <a:pPr algn="ctr"/>
-          </a:p>
-        </p:txBody>
-      </p:sp>
-      <p:sp>
-        <p:nvSpPr>
-          <p:cNvPr id="90" name="Rectangle 89"/>
-          <p:cNvSpPr/>
-          <p:nvPr/>
-        </p:nvSpPr>
-        <p:spPr>
-          <a:xfrm>
-            <a:off x="11878056" y="5230367"/>
-            <a:ext cx="731520" cy="1060704"/>
-          </a:xfrm>
-          <a:prstGeom prst="rect">
-            <a:avLst/>
-          </a:prstGeom>
-          <a:solidFill>
-            <a:srgbClr val="1428A0"/>
-          </a:solidFill>
-          <a:ln>
-            <a:noFill/>
-          </a:ln>
-          <a:effectLst/>
-        </p:spPr>
-        <p:style>
-          <a:lnRef idx="1">
-            <a:schemeClr val="accent1"/>
-          </a:lnRef>
-          <a:fillRef idx="3">
-            <a:schemeClr val="accent1"/>
-          </a:fillRef>
-          <a:effectRef idx="2">
-            <a:schemeClr val="accent1"/>
-          </a:effectRef>
-          <a:fontRef idx="minor">
-            <a:schemeClr val="lt1"/>
-          </a:fontRef>
-        </p:style>
-        <p:txBody>
-          <a:bodyPr rtlCol="0" anchor="ctr"/>
-          <a:lstStyle/>
-          <a:p>
-            <a:pPr algn="ctr"/>
-          </a:p>
-        </p:txBody>
-      </p:sp>
-      <p:sp>
-        <p:nvSpPr>
-          <p:cNvPr id="91" name="TextBox 90"/>
-          <p:cNvSpPr txBox="1"/>
-          <p:nvPr/>
-        </p:nvSpPr>
-        <p:spPr>
-          <a:xfrm>
-            <a:off x="11878056" y="5230367"/>
-            <a:ext cx="731520" cy="1060704"/>
-          </a:xfrm>
-          <a:prstGeom prst="rect">
-            <a:avLst/>
-          </a:prstGeom>
-          <a:noFill/>
-        </p:spPr>
-        <p:txBody>
-          <a:bodyPr wrap="square" anchor="ctr" lIns="0" rIns="0" tIns="0" bIns="0">
-            <a:spAutoFit/>
-          </a:bodyPr>
-          <a:lstStyle/>
-          <a:p>
-            <a:pPr algn="ctr">
-              <a:lnSpc>
-                <a:spcPct val="112000"/>
-              </a:lnSpc>
-            </a:pPr>
-            <a:r>
-              <a:rPr sz="1500" b="1">
-                <a:solidFill>
-                  <a:srgbClr val="FFFFFF"/>
-                </a:solidFill>
-                <a:latin typeface="Arial"/>
-                <a:ea typeface="Arial"/>
-              </a:rPr>
-              <a:t>문화</a:t>
-            </a:r>
-          </a:p>
-        </p:txBody>
-      </p:sp>
-      <p:sp>
-        <p:nvSpPr>
-          <p:cNvPr id="92" name="TextBox 91"/>
-          <p:cNvSpPr txBox="1"/>
-          <p:nvPr/>
-        </p:nvSpPr>
-        <p:spPr>
-          <a:xfrm>
-            <a:off x="12746736" y="5230367"/>
-            <a:ext cx="4681727" cy="1060704"/>
-          </a:xfrm>
-          <a:prstGeom prst="rect">
-            <a:avLst/>
-          </a:prstGeom>
-          <a:noFill/>
-        </p:spPr>
-        <p:txBody>
-          <a:bodyPr wrap="square" anchor="ctr" lIns="0" rIns="0" tIns="0" bIns="0">
-            <a:spAutoFit/>
-          </a:bodyPr>
-          <a:lstStyle/>
-          <a:p>
-            <a:pPr algn="l">
-              <a:lnSpc>
-                <a:spcPct val="108000"/>
-              </a:lnSpc>
-            </a:pPr>
-            <a:r>
-              <a:rPr sz="1050" b="1">
-                <a:solidFill>
-                  <a:srgbClr val="1A1A1A"/>
-                </a:solidFill>
-                <a:latin typeface="Arial"/>
-                <a:ea typeface="Arial"/>
-              </a:rPr>
-              <a:t>오픈소스 메인테이너·커미터 배출 · 업스트림 우선</a:t>
-            </a:r>
-          </a:p>
-          <a:p>
-            <a:pPr algn="l">
-              <a:lnSpc>
-                <a:spcPct val="108000"/>
-              </a:lnSpc>
-            </a:pPr>
-            <a:r>
-              <a:rPr sz="975" b="0">
-                <a:solidFill>
-                  <a:srgbClr val="555555"/>
-                </a:solidFill>
-                <a:latin typeface="Arial"/>
-                <a:ea typeface="Arial"/>
-              </a:rPr>
-              <a:t>KV 캐시 실측(WAF · 유효 DWPD) 업계 최초 공개</a:t>
-            </a:r>
-          </a:p>
-          <a:p>
-            <a:pPr algn="l">
-              <a:lnSpc>
-                <a:spcPct val="108000"/>
-              </a:lnSpc>
-            </a:pPr>
-            <a:r>
-              <a:rPr sz="975" b="0">
-                <a:solidFill>
-                  <a:srgbClr val="555555"/>
-                </a:solidFill>
-                <a:latin typeface="Arial"/>
-                <a:ea typeface="Arial"/>
-              </a:rPr>
-              <a:t>레퍼런스 프로젝트 운영으로 외부 기여 유입</a:t>
-            </a:r>
-          </a:p>
-        </p:txBody>
-      </p:sp>
-      <p:sp>
-        <p:nvSpPr>
-          <p:cNvPr id="93" name="Rectangle 92"/>
-          <p:cNvSpPr/>
-          <p:nvPr/>
-        </p:nvSpPr>
-        <p:spPr>
-          <a:xfrm>
-            <a:off x="11878056" y="6419087"/>
-            <a:ext cx="5687567" cy="2011680"/>
-          </a:xfrm>
-          <a:prstGeom prst="rect">
-            <a:avLst/>
-          </a:prstGeom>
-          <a:solidFill>
-            <a:srgbClr val="F4F6FC"/>
-          </a:solidFill>
-          <a:ln>
-            <a:noFill/>
-          </a:ln>
-          <a:effectLst/>
-        </p:spPr>
-        <p:style>
-          <a:lnRef idx="1">
-            <a:schemeClr val="accent1"/>
-          </a:lnRef>
-          <a:fillRef idx="3">
-            <a:schemeClr val="accent1"/>
-          </a:fillRef>
-          <a:effectRef idx="2">
-            <a:schemeClr val="accent1"/>
-          </a:effectRef>
-          <a:fontRef idx="minor">
-            <a:schemeClr val="lt1"/>
-          </a:fontRef>
-        </p:style>
-        <p:txBody>
-          <a:bodyPr rtlCol="0" anchor="ctr"/>
-          <a:lstStyle/>
-          <a:p>
-            <a:pPr algn="ctr"/>
-          </a:p>
-        </p:txBody>
-      </p:sp>
-      <p:sp>
-        <p:nvSpPr>
-          <p:cNvPr id="94" name="Rectangle 93"/>
-          <p:cNvSpPr/>
-          <p:nvPr/>
-        </p:nvSpPr>
-        <p:spPr>
-          <a:xfrm>
-            <a:off x="11878056" y="6419087"/>
-            <a:ext cx="54864" cy="2011680"/>
-          </a:xfrm>
-          <a:prstGeom prst="rect">
-            <a:avLst/>
-          </a:prstGeom>
-          <a:solidFill>
-            <a:srgbClr val="1428A0"/>
-          </a:solidFill>
-          <a:ln>
-            <a:noFill/>
-          </a:ln>
-          <a:effectLst/>
-        </p:spPr>
-        <p:style>
-          <a:lnRef idx="1">
-            <a:schemeClr val="accent1"/>
-          </a:lnRef>
-          <a:fillRef idx="3">
-            <a:schemeClr val="accent1"/>
-          </a:fillRef>
-          <a:effectRef idx="2">
-            <a:schemeClr val="accent1"/>
-          </a:effectRef>
-          <a:fontRef idx="minor">
-            <a:schemeClr val="lt1"/>
-          </a:fontRef>
-        </p:style>
-        <p:txBody>
-          <a:bodyPr rtlCol="0" anchor="ctr"/>
-          <a:lstStyle/>
-          <a:p>
-            <a:pPr algn="ctr"/>
-          </a:p>
-        </p:txBody>
-      </p:sp>
-      <p:sp>
-        <p:nvSpPr>
-          <p:cNvPr id="95" name="TextBox 94"/>
-          <p:cNvSpPr txBox="1"/>
-          <p:nvPr/>
-        </p:nvSpPr>
-        <p:spPr>
-          <a:xfrm>
-            <a:off x="12079224" y="6510527"/>
-            <a:ext cx="2615183" cy="182880"/>
-          </a:xfrm>
-          <a:prstGeom prst="rect">
-            <a:avLst/>
-          </a:prstGeom>
-          <a:noFill/>
-        </p:spPr>
-        <p:txBody>
-          <a:bodyPr wrap="square" anchor="t" lIns="0" rIns="0" tIns="0" bIns="0">
-            <a:spAutoFit/>
-          </a:bodyPr>
-          <a:lstStyle/>
-          <a:p>
-            <a:pPr algn="l">
-              <a:lnSpc>
-                <a:spcPct val="112000"/>
-              </a:lnSpc>
-            </a:pPr>
-            <a:r>
-              <a:rPr sz="950" b="0">
-                <a:solidFill>
-                  <a:srgbClr val="8A8A8A"/>
-                </a:solidFill>
-                <a:latin typeface="Arial"/>
-                <a:ea typeface="Arial"/>
-              </a:rPr>
-              <a:t>판돈 · 락인으로 얻는 점유율</a:t>
-            </a:r>
-          </a:p>
-        </p:txBody>
-      </p:sp>
-      <p:sp>
-        <p:nvSpPr>
-          <p:cNvPr id="96" name="TextBox 95"/>
-          <p:cNvSpPr txBox="1"/>
-          <p:nvPr/>
-        </p:nvSpPr>
-        <p:spPr>
-          <a:xfrm>
-            <a:off x="12079224" y="6693407"/>
-            <a:ext cx="2615183" cy="402336"/>
-          </a:xfrm>
-          <a:prstGeom prst="rect">
-            <a:avLst/>
-          </a:prstGeom>
-          <a:noFill/>
-        </p:spPr>
-        <p:txBody>
-          <a:bodyPr wrap="square" anchor="ctr" lIns="0" rIns="0" tIns="0" bIns="0">
-            <a:spAutoFit/>
-          </a:bodyPr>
-          <a:lstStyle/>
-          <a:p>
-            <a:pPr algn="l">
-              <a:lnSpc>
-                <a:spcPct val="112000"/>
-              </a:lnSpc>
-            </a:pPr>
-            <a:r>
-              <a:rPr sz="1500" b="1">
-                <a:solidFill>
-                  <a:srgbClr val="1428A0"/>
-                </a:solidFill>
-                <a:latin typeface="Arial"/>
-                <a:ea typeface="Arial"/>
-              </a:rPr>
-              <a:t>캐시 계층 QLC 0 → 50%</a:t>
-            </a:r>
-          </a:p>
-        </p:txBody>
-      </p:sp>
-      <p:sp>
-        <p:nvSpPr>
-          <p:cNvPr id="97" name="TextBox 96"/>
-          <p:cNvSpPr txBox="1"/>
-          <p:nvPr/>
-        </p:nvSpPr>
-        <p:spPr>
-          <a:xfrm>
-            <a:off x="12079224" y="7095743"/>
-            <a:ext cx="2615183" cy="1280160"/>
-          </a:xfrm>
-          <a:prstGeom prst="rect">
-            <a:avLst/>
-          </a:prstGeom>
-          <a:noFill/>
-        </p:spPr>
-        <p:txBody>
-          <a:bodyPr wrap="square" anchor="t" lIns="0" rIns="0" tIns="0" bIns="0">
-            <a:spAutoFit/>
-          </a:bodyPr>
-          <a:lstStyle/>
-          <a:p>
-            <a:pPr algn="l">
-              <a:lnSpc>
-                <a:spcPct val="100000"/>
-              </a:lnSpc>
-            </a:pPr>
-            <a:r>
-              <a:rPr sz="875" b="0">
-                <a:solidFill>
-                  <a:srgbClr val="555555"/>
-                </a:solidFill>
-                <a:latin typeface="Arial"/>
-                <a:ea typeface="Arial"/>
-              </a:rPr>
-              <a:t>2030 추론 캐시 350EB 중 QLC 175EB(조건부 상방) · 락인 없으면 TLC 유지 · 디자인인 1사당 점유율 [사내 확인]</a:t>
-            </a:r>
-          </a:p>
-        </p:txBody>
-      </p:sp>
-      <p:sp>
-        <p:nvSpPr>
-          <p:cNvPr id="98" name="TextBox 97"/>
-          <p:cNvSpPr txBox="1"/>
-          <p:nvPr/>
-        </p:nvSpPr>
-        <p:spPr>
-          <a:xfrm>
-            <a:off x="14840712" y="6510527"/>
-            <a:ext cx="2615183" cy="182880"/>
-          </a:xfrm>
-          <a:prstGeom prst="rect">
-            <a:avLst/>
-          </a:prstGeom>
-          <a:noFill/>
-        </p:spPr>
-        <p:txBody>
-          <a:bodyPr wrap="square" anchor="t" lIns="0" rIns="0" tIns="0" bIns="0">
-            <a:spAutoFit/>
-          </a:bodyPr>
-          <a:lstStyle/>
-          <a:p>
-            <a:pPr algn="l">
-              <a:lnSpc>
-                <a:spcPct val="112000"/>
-              </a:lnSpc>
-            </a:pPr>
-            <a:r>
-              <a:rPr sz="950" b="0">
-                <a:solidFill>
-                  <a:srgbClr val="8A8A8A"/>
-                </a:solidFill>
-                <a:latin typeface="Arial"/>
-                <a:ea typeface="Arial"/>
-              </a:rPr>
-              <a:t>비용 · 개발실 자원 투입</a:t>
-            </a:r>
-          </a:p>
-        </p:txBody>
-      </p:sp>
-      <p:sp>
-        <p:nvSpPr>
-          <p:cNvPr id="99" name="TextBox 98"/>
-          <p:cNvSpPr txBox="1"/>
-          <p:nvPr/>
-        </p:nvSpPr>
-        <p:spPr>
-          <a:xfrm>
-            <a:off x="14840712" y="6693407"/>
-            <a:ext cx="2615183" cy="402336"/>
-          </a:xfrm>
-          <a:prstGeom prst="rect">
-            <a:avLst/>
-          </a:prstGeom>
-          <a:noFill/>
-        </p:spPr>
-        <p:txBody>
-          <a:bodyPr wrap="square" anchor="ctr" lIns="0" rIns="0" tIns="0" bIns="0">
-            <a:spAutoFit/>
-          </a:bodyPr>
-          <a:lstStyle/>
-          <a:p>
-            <a:pPr algn="l">
-              <a:lnSpc>
-                <a:spcPct val="112000"/>
-              </a:lnSpc>
-            </a:pPr>
-            <a:r>
-              <a:rPr sz="1500" b="1">
-                <a:solidFill>
-                  <a:srgbClr val="1428A0"/>
-                </a:solidFill>
-                <a:latin typeface="Arial"/>
-                <a:ea typeface="Arial"/>
-              </a:rPr>
-              <a:t>별도 투자 없음</a:t>
-            </a:r>
-          </a:p>
-        </p:txBody>
-      </p:sp>
-      <p:sp>
-        <p:nvSpPr>
-          <p:cNvPr id="100" name="TextBox 99"/>
-          <p:cNvSpPr txBox="1"/>
-          <p:nvPr/>
-        </p:nvSpPr>
-        <p:spPr>
-          <a:xfrm>
-            <a:off x="14840712" y="7095743"/>
-            <a:ext cx="2615183" cy="1280160"/>
-          </a:xfrm>
-          <a:prstGeom prst="rect">
-            <a:avLst/>
-          </a:prstGeom>
-          <a:noFill/>
-        </p:spPr>
-        <p:txBody>
-          <a:bodyPr wrap="square" anchor="t" lIns="0" rIns="0" tIns="0" bIns="0">
-            <a:spAutoFit/>
-          </a:bodyPr>
-          <a:lstStyle/>
-          <a:p>
-            <a:pPr algn="l">
-              <a:lnSpc>
-                <a:spcPct val="100000"/>
-              </a:lnSpc>
-            </a:pPr>
-            <a:r>
-              <a:rPr sz="875" b="0">
-                <a:solidFill>
-                  <a:srgbClr val="555555"/>
-                </a:solidFill>
-                <a:latin typeface="Arial"/>
-                <a:ea typeface="Arial"/>
-              </a:rPr>
-              <a:t>Pod 인력 3~5명 × 1~2사 재배치 · 시스템 SW 채용은 정원 내 · 실측 공개는 보안 검토만</a:t>
-            </a:r>
-          </a:p>
-        </p:txBody>
-      </p:sp>
-      <p:sp>
-        <p:nvSpPr>
-          <p:cNvPr id="101" name="Rectangle 100"/>
-          <p:cNvSpPr/>
-          <p:nvPr/>
-        </p:nvSpPr>
-        <p:spPr>
-          <a:xfrm>
-            <a:off x="722376" y="8613648"/>
-            <a:ext cx="16843248" cy="731520"/>
-          </a:xfrm>
-          <a:prstGeom prst="rect">
-            <a:avLst/>
-          </a:prstGeom>
-          <a:solidFill>
-            <a:srgbClr val="1428A0"/>
-          </a:solidFill>
-          <a:ln>
-            <a:noFill/>
-          </a:ln>
-          <a:effectLst/>
-        </p:spPr>
-        <p:style>
-          <a:lnRef idx="1">
-            <a:schemeClr val="accent1"/>
-          </a:lnRef>
-          <a:fillRef idx="3">
-            <a:schemeClr val="accent1"/>
-          </a:fillRef>
-          <a:effectRef idx="2">
-            <a:schemeClr val="accent1"/>
-          </a:effectRef>
-          <a:fontRef idx="minor">
-            <a:schemeClr val="lt1"/>
-          </a:fontRef>
-        </p:style>
-        <p:txBody>
-          <a:bodyPr rtlCol="0" anchor="ctr"/>
-          <a:lstStyle/>
-          <a:p>
-            <a:pPr algn="ctr"/>
-          </a:p>
-        </p:txBody>
-      </p:sp>
-      <p:sp>
-        <p:nvSpPr>
-          <p:cNvPr id="102" name="TextBox 101"/>
+          <p:cNvPr id="148" name="TextBox 147"/>
           <p:cNvSpPr txBox="1"/>
           <p:nvPr/>
         </p:nvSpPr>
@@ -32355,7 +34134,7 @@
       </p:sp>
       <p:sp>
         <p:nvSpPr>
-          <p:cNvPr id="103" name="TextBox 102"/>
+          <p:cNvPr id="149" name="TextBox 148"/>
           <p:cNvSpPr txBox="1"/>
           <p:nvPr/>
         </p:nvSpPr>
@@ -32388,7 +34167,7 @@
                 <a:latin typeface="Arial"/>
                 <a:ea typeface="Arial"/>
               </a:rPr>
-              <a:t>FDE는 워크로드를 여는 1~2사에 집중해 효과를 극대화하고, 나머지 고객은 업스트림·규격·레퍼런스 채널로 넓힙니다.</a:t>
+              <a:t>FDE 상주로 고객 시스템에 들어가고, 전략적 협약으로 워크로드·규격 접근권을 받습니다. 두 수단 모두 업계 선례가 있습니다.</a:t>
             </a:r>
           </a:p>
           <a:p>
@@ -32412,7 +34191,7 @@
       </p:sp>
       <p:sp>
         <p:nvSpPr>
-          <p:cNvPr id="104" name="Rectangle 103"/>
+          <p:cNvPr id="150" name="Rectangle 149"/>
           <p:cNvSpPr/>
           <p:nvPr/>
         </p:nvSpPr>
@@ -32456,7 +34235,7 @@
       </p:sp>
       <p:sp>
         <p:nvSpPr>
-          <p:cNvPr id="105" name="Rectangle 104"/>
+          <p:cNvPr id="151" name="Rectangle 150"/>
           <p:cNvSpPr/>
           <p:nvPr/>
         </p:nvSpPr>
@@ -32500,7 +34279,7 @@
       </p:sp>
       <p:sp>
         <p:nvSpPr>
-          <p:cNvPr id="106" name="TextBox 105"/>
+          <p:cNvPr id="152" name="TextBox 151"/>
           <p:cNvSpPr txBox="1"/>
           <p:nvPr/>
         </p:nvSpPr>
@@ -32557,7 +34336,7 @@
       </p:sp>
       <p:sp>
         <p:nvSpPr>
-          <p:cNvPr id="107" name="TextBox 106"/>
+          <p:cNvPr id="153" name="TextBox 152"/>
           <p:cNvSpPr txBox="1"/>
           <p:nvPr/>
         </p:nvSpPr>
@@ -32590,14 +34369,14 @@
                 <a:latin typeface="Arial"/>
                 <a:ea typeface="Arial"/>
               </a:rPr>
-              <a:t>출처: Pragmatic Engineer·FDE Academy(Palantir FDE), Micron IR 2026-06-22·10-Q(SCA), NVIDIA CMX·Dynamo 문서, OCP 사양, 위키 qlc-execution-strategy(개발실 범위) · 점유율 수치는 위키 수요 모델 §4.3 조건부 상방, 사내 수치는 [사내 확인]</a:t>
-            </a:r>
-          </a:p>
-        </p:txBody>
-      </p:sp>
-      <p:sp>
-        <p:nvSpPr>
-          <p:cNvPr id="108" name="TextBox 107"/>
+              <a:t>출처: Pragmatic Engineer·FDE Academy(Palantir FDE), Micron IR 2026-06-22·10-Q(SCA 16건·$22B), SK hynix 뉴스룸, 내부 인터뷰(송용호 2026-09-03) · 규모·시점은 추정, 사내 수치는 [사내 확인]</a:t>
+            </a:r>
+          </a:p>
+        </p:txBody>
+      </p:sp>
+      <p:sp>
+        <p:nvSpPr>
+          <p:cNvPr id="154" name="TextBox 153"/>
           <p:cNvSpPr txBox="1"/>
           <p:nvPr/>
         </p:nvSpPr>

--- a/outputs/presentation/qlc-ssd-strategy.pptx
+++ b/outputs/presentation/qlc-ssd-strategy.pptx
@@ -787,7 +787,7 @@
           <a:lstStyle/>
           <a:p>
             <a:r>
-              <a:t>5장은 실행입니다. 3단계 역량을 어떻게 얻느냐, 즉 고객 시스템 안으로 들어가는 두 수단을 그림 하나로 보입니다. 왼쪽은 삼성 개발실이 제공하는 것이고, 오른쪽은 고객 시스템의 계층이며, 가운데 두 화살표가 주고받는 관계입니다. 위쪽 화살표 ① FDE 상주는 삼성이 보내는 것입니다. 상주 엔지니어가 고객 시스템 안에서 요구를 코드로 구현하고, 업스트림에 기여하며, 워크로드 실측을 공개합니다. 아래쪽 화살표 ② 접근권 확보는 삼성이 받는 것입니다. 워크로드 트레이스, KV 수명 정책, 규격 접근권이며 계약 시한은 2027년 상반기입니다. 공급이 완화되기 전에 락인을 걸어야 하기 때문입니다. 가운데 왼쪽 카드가 고객 선별입니다. FDE를 모든 고객에 보낼 수는 없으므로 세 조건으로 거릅니다. 트레이스 접근을 허용하는가, 캐시 관리자 코드를 자체 운영하는가, 물량과 규격에 파급력이 있는가. AI 랩과 NVIDIA 생태계가 조건을 충족하므로 FDE를 상주시키고, 하이퍼스케일러는 보안과 중립성 때문에 내부 코드 상주가 불가하므로 업스트림과 OCP 규격으로, OEM과 네오클라우드는 레퍼런스 스택으로 넓힙니다. 오른쪽 카드가 선례입니다. Palantir의 FDE는 고객 현장에 상주해 요구를 코드로 구현하고 성과로 평가받는 모델이고, 고객 락인의 동력으로 평가받아 Anthropic과 OpenAI가 시장 진입 모델로 채택했습니다. Micron과 Anthropic의 전략적 협약은 공동 설계, 다년 공급, 운영 통합, 자본을 한 계약에 결합해 워크로드와 규격 접근권을 확보한 사례입니다. 중요한 것은 삼성과 SK의 Anthropic 공급 계약에는 공동 설계 조항이 없다는 점이고, 이것을 삼성이 먼저 제안하자는 것이 이 장의 요청입니다. 오른쪽 고객 시스템 그림에서 삼성이 지금 닿는 층은 SSD뿐입니다. FDE가 KV 캐시 관리자 층에 상주하고 I/O 라이브러리와 커널에 코드를 머지하면서 위로 올라갑니다. 하단 세 타일은 개발실 내부 실행입니다. 조직은 시스템 소프트웨어 조직 강화와 개발실 소속 Co-Design Pod, 인사는 고객 코드를 읽고 고치는 전문가 채용과 상주 로테이션, 문화는 오픈소스 메인테이너 배출과 KV 캐시 실측의 업계 최초 공개입니다. 자회사나 별도 보상 체계는 두지 않습니다. 마지막 줄이 통과 조건과 판돈입니다. 90일에 트레이스 확보와 실측 공개, 12개월에 메인라인 머지와 유효 DWPD 1 이상 실증과 WAF 급등 대응 시제품, 2027년 상반기에 디자인인 1사와 공동 설계 조항 제안입니다. 판돈은 락인으로 얻는 캐시 계층 점유율이고 비용은 개발실 개발 자원 재배치이며 별도 투자는 없습니다.</a:t>
+              <a:t>5장은 실행입니다. 3단계 역량을 어떻게 얻느냐, 즉 고객 시스템 안으로 들어가는 두 수단을 그림 하나로 보입니다. 왼쪽은 삼성 개발실이 제공하는 것이고, 오른쪽은 고객 시스템의 계층이며, 가운데 두 화살표가 주고받는 관계입니다. 위쪽 화살표 ① FDE 상주는 삼성이 보내는 것입니다. 상주 엔지니어가 고객 시스템 안에서 요구를 코드로 구현하고, 업스트림에 기여하며, 워크로드 실측을 공개합니다. 아래쪽 화살표 ② 접근권 확보는 삼성이 받는 것입니다. 워크로드 트레이스, KV 수명 정책, 규격 접근권이며 계약 시한은 2027년 상반기입니다. 공급이 완화되기 전에 락인을 걸어야 하기 때문입니다. 가운데 왼쪽 카드가 고객 선별입니다. FDE를 모든 고객에 보낼 수는 없으므로 세 조건으로 거릅니다. 트레이스 접근을 허용하는가, 캐시 관리자 코드를 자체 운영하는가, 물량과 규격에 파급력이 있는가. AI 랩과 NVIDIA 생태계가 조건을 충족하므로 FDE를 상주시키고, 하이퍼스케일러는 보안과 중립성 때문에 내부 코드 상주가 불가하므로 업스트림과 OCP 규격으로, OEM과 네오클라우드는 레퍼런스 스택으로 넓힙니다. 오른쪽 카드가 선례입니다. Palantir의 FDE는 고객 현장에 상주해 요구를 코드로 구현하고 성과로 평가받는 모델이고, 고객 락인의 동력으로 평가받아 Anthropic과 OpenAI가 시장 진입 모델로 채택했습니다. Micron과 Anthropic의 전략적 협약은 공동 설계, 다년 공급, 운영 통합, 자본을 한 계약에 결합해 워크로드와 규격 접근권을 확보한 사례입니다. 중요한 것은 삼성과 SK의 Anthropic 공급 계약에는 공동 설계 조항이 없다는 점이고, 이것을 삼성이 먼저 제안하자는 것이 이 장의 요청입니다. 오른쪽 고객 시스템 그림에서 삼성이 지금 닿는 층은 SSD뿐입니다. FDE가 KV 캐시 관리자 층에 상주하고 I/O 라이브러리와 커널에 코드를 머지하면서 위로 올라갑니다. 하단 세 타일은 개발실 내부 실행입니다. 조직은 시스템 소프트웨어 조직 강화와 개발실 소속 Co-Design Pod, 인사는 고객 코드를 읽고 고치는 전문가 채용과 상주 로테이션, 문화는 오픈소스 메인테이너 배출과 KV 캐시 실측의 업계 최초 공개입니다. 자회사나 별도 보상 체계는 두지 않습니다. 마지막 줄이 판돈과 비용입니다. 판돈은 락인으로 얻는 캐시 계층 점유율입니다. 2030년 추론 캐시 350EB 가운데 QLC는 호스트 협력이 성립할 때 조건부 상방 175EB이고, 성립하지 않으면 TLC가 유지됩니다. 비용은 개발실 개발 자원 재배치이며 별도 투자는 없습니다. 단계별 통과 조건(90일·12개월·2027년 상반기)은 슬라이드에서 빼고 보고서 5장 4절에 둡니다. 질문이 나오면 그 표로 답합니다.</a:t>
             </a:r>
           </a:p>
         </p:txBody>
@@ -29055,7 +29055,7 @@
         <p:spPr>
           <a:xfrm>
             <a:off x="722376" y="2560320"/>
-            <a:ext cx="2880360" cy="3529584"/>
+            <a:ext cx="2880360" cy="3749039"/>
           </a:xfrm>
           <a:prstGeom prst="rect">
             <a:avLst/>
@@ -29516,7 +29516,7 @@
         </p:nvSpPr>
         <p:spPr>
           <a:xfrm>
-            <a:off x="923544" y="5157216"/>
+            <a:off x="923544" y="5376671"/>
             <a:ext cx="54864" cy="841248"/>
           </a:xfrm>
           <a:prstGeom prst="rect">
@@ -29560,7 +29560,7 @@
         </p:nvSpPr>
         <p:spPr>
           <a:xfrm>
-            <a:off x="1124712" y="5157216"/>
+            <a:off x="1124712" y="5376671"/>
             <a:ext cx="2276856" cy="841248"/>
           </a:xfrm>
           <a:prstGeom prst="rect">
@@ -29745,7 +29745,7 @@
         <p:spPr>
           <a:xfrm>
             <a:off x="3822191" y="3364992"/>
-            <a:ext cx="4526280" cy="1920239"/>
+            <a:ext cx="4526280" cy="2139695"/>
           </a:xfrm>
           <a:prstGeom prst="rect">
             <a:avLst/>
@@ -29871,7 +29871,7 @@
         <p:spPr>
           <a:xfrm>
             <a:off x="3968496" y="3913632"/>
-            <a:ext cx="4233672" cy="256031"/>
+            <a:ext cx="4233672" cy="310895"/>
           </a:xfrm>
           <a:prstGeom prst="rect">
             <a:avLst/>
@@ -29915,7 +29915,7 @@
         <p:spPr>
           <a:xfrm>
             <a:off x="3968496" y="3913632"/>
-            <a:ext cx="45720" cy="256031"/>
+            <a:ext cx="45720" cy="310895"/>
           </a:xfrm>
           <a:prstGeom prst="rect">
             <a:avLst/>
@@ -29959,7 +29959,7 @@
         <p:spPr>
           <a:xfrm>
             <a:off x="4096511" y="3913632"/>
-            <a:ext cx="2103120" cy="256031"/>
+            <a:ext cx="2103120" cy="310895"/>
           </a:xfrm>
           <a:prstGeom prst="rect">
             <a:avLst/>
@@ -30015,7 +30015,7 @@
         </p:nvSpPr>
         <p:spPr>
           <a:xfrm>
-            <a:off x="6217920" y="3977639"/>
+            <a:off x="6217920" y="4005072"/>
             <a:ext cx="182880" cy="128016"/>
           </a:xfrm>
           <a:prstGeom prst="rightArrow">
@@ -30060,7 +30060,7 @@
         <p:spPr>
           <a:xfrm>
             <a:off x="6492240" y="3913632"/>
-            <a:ext cx="1691640" cy="256031"/>
+            <a:ext cx="1691640" cy="310895"/>
           </a:xfrm>
           <a:prstGeom prst="rect">
             <a:avLst/>
@@ -30099,8 +30099,8 @@
         </p:nvSpPr>
         <p:spPr>
           <a:xfrm>
-            <a:off x="3968496" y="4224528"/>
-            <a:ext cx="4233672" cy="256031"/>
+            <a:off x="3968496" y="4279392"/>
+            <a:ext cx="4233672" cy="310895"/>
           </a:xfrm>
           <a:prstGeom prst="rect">
             <a:avLst/>
@@ -30143,8 +30143,8 @@
         </p:nvSpPr>
         <p:spPr>
           <a:xfrm>
-            <a:off x="3968496" y="4224528"/>
-            <a:ext cx="45720" cy="256031"/>
+            <a:off x="3968496" y="4279392"/>
+            <a:ext cx="45720" cy="310895"/>
           </a:xfrm>
           <a:prstGeom prst="rect">
             <a:avLst/>
@@ -30187,8 +30187,8 @@
         </p:nvSpPr>
         <p:spPr>
           <a:xfrm>
-            <a:off x="4096511" y="4224528"/>
-            <a:ext cx="2103120" cy="256031"/>
+            <a:off x="4096511" y="4279392"/>
+            <a:ext cx="2103120" cy="310895"/>
           </a:xfrm>
           <a:prstGeom prst="rect">
             <a:avLst/>
@@ -30244,7 +30244,7 @@
         </p:nvSpPr>
         <p:spPr>
           <a:xfrm>
-            <a:off x="6217920" y="4288536"/>
+            <a:off x="6217920" y="4370831"/>
             <a:ext cx="182880" cy="128016"/>
           </a:xfrm>
           <a:prstGeom prst="rightArrow">
@@ -30288,8 +30288,8 @@
         </p:nvSpPr>
         <p:spPr>
           <a:xfrm>
-            <a:off x="6492240" y="4224528"/>
-            <a:ext cx="1691640" cy="256031"/>
+            <a:off x="6492240" y="4279392"/>
+            <a:ext cx="1691640" cy="310895"/>
           </a:xfrm>
           <a:prstGeom prst="rect">
             <a:avLst/>
@@ -30328,8 +30328,8 @@
         </p:nvSpPr>
         <p:spPr>
           <a:xfrm>
-            <a:off x="4096511" y="4535424"/>
-            <a:ext cx="2103120" cy="256031"/>
+            <a:off x="4096511" y="4645151"/>
+            <a:ext cx="2103120" cy="310895"/>
           </a:xfrm>
           <a:prstGeom prst="rect">
             <a:avLst/>
@@ -30385,7 +30385,7 @@
         </p:nvSpPr>
         <p:spPr>
           <a:xfrm>
-            <a:off x="6217920" y="4599431"/>
+            <a:off x="6217920" y="4736591"/>
             <a:ext cx="182880" cy="128016"/>
           </a:xfrm>
           <a:prstGeom prst="rightArrow">
@@ -30429,8 +30429,8 @@
         </p:nvSpPr>
         <p:spPr>
           <a:xfrm>
-            <a:off x="6492240" y="4535424"/>
-            <a:ext cx="1691640" cy="256031"/>
+            <a:off x="6492240" y="4645151"/>
+            <a:ext cx="1691640" cy="310895"/>
           </a:xfrm>
           <a:prstGeom prst="rect">
             <a:avLst/>
@@ -30469,8 +30469,8 @@
         </p:nvSpPr>
         <p:spPr>
           <a:xfrm>
-            <a:off x="4096511" y="4846320"/>
-            <a:ext cx="2103120" cy="256031"/>
+            <a:off x="4096511" y="5010911"/>
+            <a:ext cx="2103120" cy="310895"/>
           </a:xfrm>
           <a:prstGeom prst="rect">
             <a:avLst/>
@@ -30526,7 +30526,7 @@
         </p:nvSpPr>
         <p:spPr>
           <a:xfrm>
-            <a:off x="6217920" y="4910327"/>
+            <a:off x="6217920" y="5102351"/>
             <a:ext cx="182880" cy="128016"/>
           </a:xfrm>
           <a:prstGeom prst="rightArrow">
@@ -30570,8 +30570,8 @@
         </p:nvSpPr>
         <p:spPr>
           <a:xfrm>
-            <a:off x="6492240" y="4846320"/>
-            <a:ext cx="1691640" cy="256031"/>
+            <a:off x="6492240" y="5010911"/>
+            <a:ext cx="1691640" cy="310895"/>
           </a:xfrm>
           <a:prstGeom prst="rect">
             <a:avLst/>
@@ -30611,7 +30611,7 @@
         <p:spPr>
           <a:xfrm>
             <a:off x="8531351" y="3364992"/>
-            <a:ext cx="4526280" cy="1920239"/>
+            <a:ext cx="4526280" cy="2139695"/>
           </a:xfrm>
           <a:prstGeom prst="rect">
             <a:avLst/>
@@ -31673,7 +31673,7 @@
         </p:nvSpPr>
         <p:spPr>
           <a:xfrm>
-            <a:off x="3822191" y="5413248"/>
+            <a:off x="3822191" y="5632703"/>
             <a:ext cx="9235440" cy="676656"/>
           </a:xfrm>
           <a:prstGeom prst="leftArrow">
@@ -31720,7 +31720,7 @@
         </p:nvSpPr>
         <p:spPr>
           <a:xfrm>
-            <a:off x="4828031" y="5486400"/>
+            <a:off x="4828031" y="5705855"/>
             <a:ext cx="7955279" cy="256032"/>
           </a:xfrm>
           <a:prstGeom prst="rect">
@@ -31760,7 +31760,7 @@
         </p:nvSpPr>
         <p:spPr>
           <a:xfrm>
-            <a:off x="4828031" y="5760720"/>
+            <a:off x="4828031" y="5980175"/>
             <a:ext cx="7955279" cy="219456"/>
           </a:xfrm>
           <a:prstGeom prst="rect">
@@ -31801,7 +31801,7 @@
         <p:spPr>
           <a:xfrm>
             <a:off x="13277088" y="2560320"/>
-            <a:ext cx="4288536" cy="3529584"/>
+            <a:ext cx="4288536" cy="3749039"/>
           </a:xfrm>
           <a:prstGeom prst="rect">
             <a:avLst/>
@@ -32443,7 +32443,7 @@
         </p:blipFill>
         <p:spPr>
           <a:xfrm>
-            <a:off x="13551408" y="5586650"/>
+            <a:off x="13551408" y="5806106"/>
             <a:ext cx="1296794" cy="146970"/>
           </a:xfrm>
           <a:prstGeom prst="rect">
@@ -32467,7 +32467,7 @@
         </p:blipFill>
         <p:spPr>
           <a:xfrm>
-            <a:off x="14965786" y="5586650"/>
+            <a:off x="14965786" y="5806106"/>
             <a:ext cx="598520" cy="146970"/>
           </a:xfrm>
           <a:prstGeom prst="rect">
@@ -32491,7 +32491,7 @@
         </p:blipFill>
         <p:spPr>
           <a:xfrm>
-            <a:off x="15681886" y="5586650"/>
+            <a:off x="15681886" y="5806106"/>
             <a:ext cx="769029" cy="146970"/>
           </a:xfrm>
           <a:prstGeom prst="rect">
@@ -32515,7 +32515,7 @@
         </p:blipFill>
         <p:spPr>
           <a:xfrm>
-            <a:off x="16568496" y="5586650"/>
+            <a:off x="16568496" y="5806106"/>
             <a:ext cx="722803" cy="146970"/>
           </a:xfrm>
           <a:prstGeom prst="rect">
@@ -32531,8 +32531,8 @@
         </p:nvSpPr>
         <p:spPr>
           <a:xfrm>
-            <a:off x="722376" y="6291072"/>
-            <a:ext cx="5468112" cy="914400"/>
+            <a:off x="722376" y="6510527"/>
+            <a:ext cx="5468112" cy="969264"/>
           </a:xfrm>
           <a:prstGeom prst="rect">
             <a:avLst/>
@@ -32577,8 +32577,8 @@
         </p:nvSpPr>
         <p:spPr>
           <a:xfrm>
-            <a:off x="722376" y="6291072"/>
-            <a:ext cx="731520" cy="914400"/>
+            <a:off x="722376" y="6510527"/>
+            <a:ext cx="731520" cy="969264"/>
           </a:xfrm>
           <a:prstGeom prst="rect">
             <a:avLst/>
@@ -32621,8 +32621,8 @@
         </p:nvSpPr>
         <p:spPr>
           <a:xfrm>
-            <a:off x="722376" y="6291072"/>
-            <a:ext cx="731520" cy="914400"/>
+            <a:off x="722376" y="6510527"/>
+            <a:ext cx="731520" cy="969264"/>
           </a:xfrm>
           <a:prstGeom prst="rect">
             <a:avLst/>
@@ -32661,7 +32661,7 @@
         </p:nvSpPr>
         <p:spPr>
           <a:xfrm>
-            <a:off x="1600200" y="6382512"/>
+            <a:off x="1600200" y="6620255"/>
             <a:ext cx="4443984" cy="237744"/>
           </a:xfrm>
           <a:prstGeom prst="rect">
@@ -32701,8 +32701,8 @@
         </p:nvSpPr>
         <p:spPr>
           <a:xfrm>
-            <a:off x="1600200" y="6620256"/>
-            <a:ext cx="4443984" cy="512064"/>
+            <a:off x="1600200" y="6857999"/>
+            <a:ext cx="4443984" cy="530352"/>
           </a:xfrm>
           <a:prstGeom prst="rect">
             <a:avLst/>
@@ -32717,7 +32717,7 @@
           <a:p>
             <a:pPr algn="l">
               <a:lnSpc>
-                <a:spcPct val="106000"/>
+                <a:spcPct val="108000"/>
               </a:lnSpc>
             </a:pPr>
             <a:r>
@@ -32734,7 +32734,7 @@
           <a:p>
             <a:pPr algn="l">
               <a:lnSpc>
-                <a:spcPct val="106000"/>
+                <a:spcPct val="108000"/>
               </a:lnSpc>
             </a:pPr>
             <a:r>
@@ -32758,8 +32758,8 @@
         </p:nvSpPr>
         <p:spPr>
           <a:xfrm>
-            <a:off x="6409944" y="6291072"/>
-            <a:ext cx="5468112" cy="914400"/>
+            <a:off x="6409944" y="6510527"/>
+            <a:ext cx="5468112" cy="969264"/>
           </a:xfrm>
           <a:prstGeom prst="rect">
             <a:avLst/>
@@ -32804,8 +32804,8 @@
         </p:nvSpPr>
         <p:spPr>
           <a:xfrm>
-            <a:off x="6409944" y="6291072"/>
-            <a:ext cx="731520" cy="914400"/>
+            <a:off x="6409944" y="6510527"/>
+            <a:ext cx="731520" cy="969264"/>
           </a:xfrm>
           <a:prstGeom prst="rect">
             <a:avLst/>
@@ -32848,8 +32848,8 @@
         </p:nvSpPr>
         <p:spPr>
           <a:xfrm>
-            <a:off x="6409944" y="6291072"/>
-            <a:ext cx="731520" cy="914400"/>
+            <a:off x="6409944" y="6510527"/>
+            <a:ext cx="731520" cy="969264"/>
           </a:xfrm>
           <a:prstGeom prst="rect">
             <a:avLst/>
@@ -32888,7 +32888,7 @@
         </p:nvSpPr>
         <p:spPr>
           <a:xfrm>
-            <a:off x="7287768" y="6382512"/>
+            <a:off x="7287768" y="6620255"/>
             <a:ext cx="4443984" cy="237744"/>
           </a:xfrm>
           <a:prstGeom prst="rect">
@@ -32928,8 +32928,8 @@
         </p:nvSpPr>
         <p:spPr>
           <a:xfrm>
-            <a:off x="7287768" y="6620256"/>
-            <a:ext cx="4443984" cy="512064"/>
+            <a:off x="7287768" y="6857999"/>
+            <a:ext cx="4443984" cy="530352"/>
           </a:xfrm>
           <a:prstGeom prst="rect">
             <a:avLst/>
@@ -32944,7 +32944,7 @@
           <a:p>
             <a:pPr algn="l">
               <a:lnSpc>
-                <a:spcPct val="106000"/>
+                <a:spcPct val="108000"/>
               </a:lnSpc>
             </a:pPr>
             <a:r>
@@ -32961,7 +32961,7 @@
           <a:p>
             <a:pPr algn="l">
               <a:lnSpc>
-                <a:spcPct val="106000"/>
+                <a:spcPct val="108000"/>
               </a:lnSpc>
             </a:pPr>
             <a:r>
@@ -32985,8 +32985,8 @@
         </p:nvSpPr>
         <p:spPr>
           <a:xfrm>
-            <a:off x="12097512" y="6291072"/>
-            <a:ext cx="5468112" cy="914400"/>
+            <a:off x="12097512" y="6510527"/>
+            <a:ext cx="5468112" cy="969264"/>
           </a:xfrm>
           <a:prstGeom prst="rect">
             <a:avLst/>
@@ -33031,8 +33031,8 @@
         </p:nvSpPr>
         <p:spPr>
           <a:xfrm>
-            <a:off x="12097512" y="6291072"/>
-            <a:ext cx="731520" cy="914400"/>
+            <a:off x="12097512" y="6510527"/>
+            <a:ext cx="731520" cy="969264"/>
           </a:xfrm>
           <a:prstGeom prst="rect">
             <a:avLst/>
@@ -33075,8 +33075,8 @@
         </p:nvSpPr>
         <p:spPr>
           <a:xfrm>
-            <a:off x="12097512" y="6291072"/>
-            <a:ext cx="731520" cy="914400"/>
+            <a:off x="12097512" y="6510527"/>
+            <a:ext cx="731520" cy="969264"/>
           </a:xfrm>
           <a:prstGeom prst="rect">
             <a:avLst/>
@@ -33115,7 +33115,7 @@
         </p:nvSpPr>
         <p:spPr>
           <a:xfrm>
-            <a:off x="12975336" y="6382512"/>
+            <a:off x="12975336" y="6620255"/>
             <a:ext cx="4443984" cy="237744"/>
           </a:xfrm>
           <a:prstGeom prst="rect">
@@ -33155,8 +33155,8 @@
         </p:nvSpPr>
         <p:spPr>
           <a:xfrm>
-            <a:off x="12975336" y="6620256"/>
-            <a:ext cx="4443984" cy="512064"/>
+            <a:off x="12975336" y="6857999"/>
+            <a:ext cx="4443984" cy="530352"/>
           </a:xfrm>
           <a:prstGeom prst="rect">
             <a:avLst/>
@@ -33171,7 +33171,7 @@
           <a:p>
             <a:pPr algn="l">
               <a:lnSpc>
-                <a:spcPct val="106000"/>
+                <a:spcPct val="108000"/>
               </a:lnSpc>
             </a:pPr>
             <a:r>
@@ -33188,7 +33188,7 @@
           <a:p>
             <a:pPr algn="l">
               <a:lnSpc>
-                <a:spcPct val="106000"/>
+                <a:spcPct val="108000"/>
               </a:lnSpc>
             </a:pPr>
             <a:r>
@@ -33206,530 +33206,14 @@
       </p:sp>
       <p:sp>
         <p:nvSpPr>
-          <p:cNvPr id="127" name="TextBox 126"/>
-          <p:cNvSpPr txBox="1"/>
-          <p:nvPr/>
-        </p:nvSpPr>
-        <p:spPr>
-          <a:xfrm>
-            <a:off x="722376" y="7351775"/>
-            <a:ext cx="11155680" cy="201168"/>
-          </a:xfrm>
-          <a:prstGeom prst="rect">
-            <a:avLst/>
-          </a:prstGeom>
-          <a:noFill/>
-        </p:spPr>
-        <p:txBody>
-          <a:bodyPr wrap="square" anchor="t" lIns="0" rIns="0" tIns="0" bIns="0">
-            <a:spAutoFit/>
-          </a:bodyPr>
-          <a:lstStyle/>
-          <a:p>
-            <a:pPr algn="l">
-              <a:lnSpc>
-                <a:spcPct val="112000"/>
-              </a:lnSpc>
-            </a:pPr>
-            <a:r>
-              <a:rPr sz="1125" b="1">
-                <a:solidFill>
-                  <a:srgbClr val="1428A0"/>
-                </a:solidFill>
-                <a:latin typeface="Arial"/>
-                <a:ea typeface="Arial"/>
-              </a:rPr>
-              <a:t>단계별 통과 조건</a:t>
-            </a:r>
-            <a:r>
-              <a:rPr sz="950" b="0">
-                <a:solidFill>
-                  <a:srgbClr val="8A8A8A"/>
-                </a:solidFill>
-                <a:latin typeface="Arial"/>
-                <a:ea typeface="Arial"/>
-              </a:rPr>
-              <a:t>   각 단계의 증명이 다음 단계의 승인 근거</a:t>
-            </a:r>
-          </a:p>
-        </p:txBody>
-      </p:sp>
-      <p:sp>
-        <p:nvSpPr>
-          <p:cNvPr id="128" name="Rectangle 127"/>
+          <p:cNvPr id="127" name="Rectangle 126"/>
           <p:cNvSpPr/>
           <p:nvPr/>
         </p:nvSpPr>
         <p:spPr>
           <a:xfrm>
-            <a:off x="722376" y="7607807"/>
-            <a:ext cx="3596640" cy="822960"/>
-          </a:xfrm>
-          <a:prstGeom prst="rect">
-            <a:avLst/>
-          </a:prstGeom>
-          <a:solidFill>
-            <a:srgbClr val="FFFFFF"/>
-          </a:solidFill>
-          <a:ln w="9525">
-            <a:solidFill>
-              <a:srgbClr val="D9D9D9"/>
-            </a:solidFill>
-          </a:ln>
-          <a:effectLst/>
-        </p:spPr>
-        <p:style>
-          <a:lnRef idx="1">
-            <a:schemeClr val="accent1"/>
-          </a:lnRef>
-          <a:fillRef idx="3">
-            <a:schemeClr val="accent1"/>
-          </a:fillRef>
-          <a:effectRef idx="2">
-            <a:schemeClr val="accent1"/>
-          </a:effectRef>
-          <a:fontRef idx="minor">
-            <a:schemeClr val="lt1"/>
-          </a:fontRef>
-        </p:style>
-        <p:txBody>
-          <a:bodyPr rtlCol="0" anchor="ctr"/>
-          <a:lstStyle/>
-          <a:p>
-            <a:pPr algn="ctr"/>
-          </a:p>
-        </p:txBody>
-      </p:sp>
-      <p:sp>
-        <p:nvSpPr>
-          <p:cNvPr id="129" name="TextBox 128"/>
-          <p:cNvSpPr txBox="1"/>
-          <p:nvPr/>
-        </p:nvSpPr>
-        <p:spPr>
-          <a:xfrm>
-            <a:off x="850392" y="7662671"/>
-            <a:ext cx="822960" cy="256032"/>
-          </a:xfrm>
-          <a:prstGeom prst="rect">
-            <a:avLst/>
-          </a:prstGeom>
-          <a:noFill/>
-        </p:spPr>
-        <p:txBody>
-          <a:bodyPr wrap="square" anchor="ctr" lIns="0" rIns="0" tIns="0" bIns="0">
-            <a:spAutoFit/>
-          </a:bodyPr>
-          <a:lstStyle/>
-          <a:p>
-            <a:pPr algn="l">
-              <a:lnSpc>
-                <a:spcPct val="112000"/>
-              </a:lnSpc>
-            </a:pPr>
-            <a:r>
-              <a:rPr sz="1200" b="1">
-                <a:solidFill>
-                  <a:srgbClr val="1428A0"/>
-                </a:solidFill>
-                <a:latin typeface="Arial"/>
-                <a:ea typeface="Arial"/>
-              </a:rPr>
-              <a:t>90일</a:t>
-            </a:r>
-          </a:p>
-        </p:txBody>
-      </p:sp>
-      <p:sp>
-        <p:nvSpPr>
-          <p:cNvPr id="130" name="TextBox 129"/>
-          <p:cNvSpPr txBox="1"/>
-          <p:nvPr/>
-        </p:nvSpPr>
-        <p:spPr>
-          <a:xfrm>
-            <a:off x="1655064" y="7653527"/>
-            <a:ext cx="2535936" cy="731520"/>
-          </a:xfrm>
-          <a:prstGeom prst="rect">
-            <a:avLst/>
-          </a:prstGeom>
-          <a:noFill/>
-        </p:spPr>
-        <p:txBody>
-          <a:bodyPr wrap="square" anchor="ctr" lIns="0" rIns="0" tIns="0" bIns="0">
-            <a:spAutoFit/>
-          </a:bodyPr>
-          <a:lstStyle/>
-          <a:p>
-            <a:pPr algn="l">
-              <a:lnSpc>
-                <a:spcPct val="106000"/>
-              </a:lnSpc>
-            </a:pPr>
-            <a:r>
-              <a:rPr sz="900" b="0">
-                <a:solidFill>
-                  <a:srgbClr val="555555"/>
-                </a:solidFill>
-                <a:latin typeface="Arial"/>
-                <a:ea typeface="Arial"/>
-              </a:rPr>
-              <a:t>등대 고객 1사 트레이스 확보 · KV 캐시 실측(WAF · 유효 DWPD) 공개 · 캐시 관리자 플러그인 PR 1건</a:t>
-            </a:r>
-          </a:p>
-        </p:txBody>
-      </p:sp>
-      <p:sp>
-        <p:nvSpPr>
-          <p:cNvPr id="131" name="Right Arrow 130"/>
-          <p:cNvSpPr/>
-          <p:nvPr/>
-        </p:nvSpPr>
-        <p:spPr>
-          <a:xfrm>
-            <a:off x="4328159" y="7946136"/>
-            <a:ext cx="164592" cy="146304"/>
-          </a:xfrm>
-          <a:prstGeom prst="rightArrow">
-            <a:avLst/>
-          </a:prstGeom>
-          <a:solidFill>
-            <a:srgbClr val="AAB8E8"/>
-          </a:solidFill>
-          <a:ln>
-            <a:noFill/>
-          </a:ln>
-          <a:effectLst/>
-        </p:spPr>
-        <p:style>
-          <a:lnRef idx="1">
-            <a:schemeClr val="accent1"/>
-          </a:lnRef>
-          <a:fillRef idx="3">
-            <a:schemeClr val="accent1"/>
-          </a:fillRef>
-          <a:effectRef idx="2">
-            <a:schemeClr val="accent1"/>
-          </a:effectRef>
-          <a:fontRef idx="minor">
-            <a:schemeClr val="lt1"/>
-          </a:fontRef>
-        </p:style>
-        <p:txBody>
-          <a:bodyPr rtlCol="0" anchor="ctr"/>
-          <a:lstStyle/>
-          <a:p>
-            <a:pPr algn="ctr"/>
-          </a:p>
-        </p:txBody>
-      </p:sp>
-      <p:sp>
-        <p:nvSpPr>
-          <p:cNvPr id="132" name="Rectangle 131"/>
-          <p:cNvSpPr/>
-          <p:nvPr/>
-        </p:nvSpPr>
-        <p:spPr>
-          <a:xfrm>
-            <a:off x="4501896" y="7607807"/>
-            <a:ext cx="3596640" cy="822960"/>
-          </a:xfrm>
-          <a:prstGeom prst="rect">
-            <a:avLst/>
-          </a:prstGeom>
-          <a:solidFill>
-            <a:srgbClr val="FFFFFF"/>
-          </a:solidFill>
-          <a:ln w="9525">
-            <a:solidFill>
-              <a:srgbClr val="D9D9D9"/>
-            </a:solidFill>
-          </a:ln>
-          <a:effectLst/>
-        </p:spPr>
-        <p:style>
-          <a:lnRef idx="1">
-            <a:schemeClr val="accent1"/>
-          </a:lnRef>
-          <a:fillRef idx="3">
-            <a:schemeClr val="accent1"/>
-          </a:fillRef>
-          <a:effectRef idx="2">
-            <a:schemeClr val="accent1"/>
-          </a:effectRef>
-          <a:fontRef idx="minor">
-            <a:schemeClr val="lt1"/>
-          </a:fontRef>
-        </p:style>
-        <p:txBody>
-          <a:bodyPr rtlCol="0" anchor="ctr"/>
-          <a:lstStyle/>
-          <a:p>
-            <a:pPr algn="ctr"/>
-          </a:p>
-        </p:txBody>
-      </p:sp>
-      <p:sp>
-        <p:nvSpPr>
-          <p:cNvPr id="133" name="TextBox 132"/>
-          <p:cNvSpPr txBox="1"/>
-          <p:nvPr/>
-        </p:nvSpPr>
-        <p:spPr>
-          <a:xfrm>
-            <a:off x="4629911" y="7662671"/>
-            <a:ext cx="822960" cy="256032"/>
-          </a:xfrm>
-          <a:prstGeom prst="rect">
-            <a:avLst/>
-          </a:prstGeom>
-          <a:noFill/>
-        </p:spPr>
-        <p:txBody>
-          <a:bodyPr wrap="square" anchor="ctr" lIns="0" rIns="0" tIns="0" bIns="0">
-            <a:spAutoFit/>
-          </a:bodyPr>
-          <a:lstStyle/>
-          <a:p>
-            <a:pPr algn="l">
-              <a:lnSpc>
-                <a:spcPct val="112000"/>
-              </a:lnSpc>
-            </a:pPr>
-            <a:r>
-              <a:rPr sz="1200" b="1">
-                <a:solidFill>
-                  <a:srgbClr val="1428A0"/>
-                </a:solidFill>
-                <a:latin typeface="Arial"/>
-                <a:ea typeface="Arial"/>
-              </a:rPr>
-              <a:t>12개월</a:t>
-            </a:r>
-          </a:p>
-        </p:txBody>
-      </p:sp>
-      <p:sp>
-        <p:nvSpPr>
-          <p:cNvPr id="134" name="TextBox 133"/>
-          <p:cNvSpPr txBox="1"/>
-          <p:nvPr/>
-        </p:nvSpPr>
-        <p:spPr>
-          <a:xfrm>
-            <a:off x="5434584" y="7653527"/>
-            <a:ext cx="2535936" cy="731520"/>
-          </a:xfrm>
-          <a:prstGeom prst="rect">
-            <a:avLst/>
-          </a:prstGeom>
-          <a:noFill/>
-        </p:spPr>
-        <p:txBody>
-          <a:bodyPr wrap="square" anchor="ctr" lIns="0" rIns="0" tIns="0" bIns="0">
-            <a:spAutoFit/>
-          </a:bodyPr>
-          <a:lstStyle/>
-          <a:p>
-            <a:pPr algn="l">
-              <a:lnSpc>
-                <a:spcPct val="106000"/>
-              </a:lnSpc>
-            </a:pPr>
-            <a:r>
-              <a:rPr sz="900" b="0">
-                <a:solidFill>
-                  <a:srgbClr val="555555"/>
-                </a:solidFill>
-                <a:latin typeface="Arial"/>
-                <a:ea typeface="Arial"/>
-              </a:rPr>
-              <a:t>플러그인 메인라인 머지 · 고객 워크로드에서 QLC 유효 DWPD ≥ 1 실증 · WAF 급등 감지·대응 시제품(6장)</a:t>
-            </a:r>
-          </a:p>
-        </p:txBody>
-      </p:sp>
-      <p:sp>
-        <p:nvSpPr>
-          <p:cNvPr id="135" name="Right Arrow 134"/>
-          <p:cNvSpPr/>
-          <p:nvPr/>
-        </p:nvSpPr>
-        <p:spPr>
-          <a:xfrm>
-            <a:off x="8107679" y="7946136"/>
-            <a:ext cx="164592" cy="146304"/>
-          </a:xfrm>
-          <a:prstGeom prst="rightArrow">
-            <a:avLst/>
-          </a:prstGeom>
-          <a:solidFill>
-            <a:srgbClr val="AAB8E8"/>
-          </a:solidFill>
-          <a:ln>
-            <a:noFill/>
-          </a:ln>
-          <a:effectLst/>
-        </p:spPr>
-        <p:style>
-          <a:lnRef idx="1">
-            <a:schemeClr val="accent1"/>
-          </a:lnRef>
-          <a:fillRef idx="3">
-            <a:schemeClr val="accent1"/>
-          </a:fillRef>
-          <a:effectRef idx="2">
-            <a:schemeClr val="accent1"/>
-          </a:effectRef>
-          <a:fontRef idx="minor">
-            <a:schemeClr val="lt1"/>
-          </a:fontRef>
-        </p:style>
-        <p:txBody>
-          <a:bodyPr rtlCol="0" anchor="ctr"/>
-          <a:lstStyle/>
-          <a:p>
-            <a:pPr algn="ctr"/>
-          </a:p>
-        </p:txBody>
-      </p:sp>
-      <p:sp>
-        <p:nvSpPr>
-          <p:cNvPr id="136" name="Rectangle 135"/>
-          <p:cNvSpPr/>
-          <p:nvPr/>
-        </p:nvSpPr>
-        <p:spPr>
-          <a:xfrm>
-            <a:off x="8281415" y="7607807"/>
-            <a:ext cx="3596640" cy="822960"/>
-          </a:xfrm>
-          <a:prstGeom prst="rect">
-            <a:avLst/>
-          </a:prstGeom>
-          <a:solidFill>
-            <a:srgbClr val="F4F6FC"/>
-          </a:solidFill>
-          <a:ln w="12700">
-            <a:solidFill>
-              <a:srgbClr val="1428A0"/>
-            </a:solidFill>
-          </a:ln>
-          <a:effectLst/>
-        </p:spPr>
-        <p:style>
-          <a:lnRef idx="1">
-            <a:schemeClr val="accent1"/>
-          </a:lnRef>
-          <a:fillRef idx="3">
-            <a:schemeClr val="accent1"/>
-          </a:fillRef>
-          <a:effectRef idx="2">
-            <a:schemeClr val="accent1"/>
-          </a:effectRef>
-          <a:fontRef idx="minor">
-            <a:schemeClr val="lt1"/>
-          </a:fontRef>
-        </p:style>
-        <p:txBody>
-          <a:bodyPr rtlCol="0" anchor="ctr"/>
-          <a:lstStyle/>
-          <a:p>
-            <a:pPr algn="ctr"/>
-          </a:p>
-        </p:txBody>
-      </p:sp>
-      <p:sp>
-        <p:nvSpPr>
-          <p:cNvPr id="137" name="TextBox 136"/>
-          <p:cNvSpPr txBox="1"/>
-          <p:nvPr/>
-        </p:nvSpPr>
-        <p:spPr>
-          <a:xfrm>
-            <a:off x="8409431" y="7662671"/>
-            <a:ext cx="822960" cy="256032"/>
-          </a:xfrm>
-          <a:prstGeom prst="rect">
-            <a:avLst/>
-          </a:prstGeom>
-          <a:noFill/>
-        </p:spPr>
-        <p:txBody>
-          <a:bodyPr wrap="square" anchor="ctr" lIns="0" rIns="0" tIns="0" bIns="0">
-            <a:spAutoFit/>
-          </a:bodyPr>
-          <a:lstStyle/>
-          <a:p>
-            <a:pPr algn="l">
-              <a:lnSpc>
-                <a:spcPct val="112000"/>
-              </a:lnSpc>
-            </a:pPr>
-            <a:r>
-              <a:rPr sz="1200" b="1">
-                <a:solidFill>
-                  <a:srgbClr val="1428A0"/>
-                </a:solidFill>
-                <a:latin typeface="Arial"/>
-                <a:ea typeface="Arial"/>
-              </a:rPr>
-              <a:t>2027H1</a:t>
-            </a:r>
-          </a:p>
-        </p:txBody>
-      </p:sp>
-      <p:sp>
-        <p:nvSpPr>
-          <p:cNvPr id="138" name="TextBox 137"/>
-          <p:cNvSpPr txBox="1"/>
-          <p:nvPr/>
-        </p:nvSpPr>
-        <p:spPr>
-          <a:xfrm>
-            <a:off x="9214103" y="7653527"/>
-            <a:ext cx="2535936" cy="731520"/>
-          </a:xfrm>
-          <a:prstGeom prst="rect">
-            <a:avLst/>
-          </a:prstGeom>
-          <a:noFill/>
-        </p:spPr>
-        <p:txBody>
-          <a:bodyPr wrap="square" anchor="ctr" lIns="0" rIns="0" tIns="0" bIns="0">
-            <a:spAutoFit/>
-          </a:bodyPr>
-          <a:lstStyle/>
-          <a:p>
-            <a:pPr algn="l">
-              <a:lnSpc>
-                <a:spcPct val="106000"/>
-              </a:lnSpc>
-            </a:pPr>
-            <a:r>
-              <a:rPr sz="900" b="0">
-                <a:solidFill>
-                  <a:srgbClr val="555555"/>
-                </a:solidFill>
-                <a:latin typeface="Arial"/>
-                <a:ea typeface="Arial"/>
-              </a:rPr>
-              <a:t>디자인인 1사 · 협약에 공동 설계 조항 제안 · 레퍼런스 스택 공개 → 공급 완화 전 락인</a:t>
-            </a:r>
-          </a:p>
-        </p:txBody>
-      </p:sp>
-      <p:sp>
-        <p:nvSpPr>
-          <p:cNvPr id="139" name="Rectangle 138"/>
-          <p:cNvSpPr/>
-          <p:nvPr/>
-        </p:nvSpPr>
-        <p:spPr>
-          <a:xfrm>
-            <a:off x="12152376" y="7351775"/>
-            <a:ext cx="5413248" cy="1078992"/>
+            <a:off x="722376" y="7626096"/>
+            <a:ext cx="16843248" cy="804672"/>
           </a:xfrm>
           <a:prstGeom prst="rect">
             <a:avLst/>
@@ -33766,14 +33250,14 @@
       </p:sp>
       <p:sp>
         <p:nvSpPr>
-          <p:cNvPr id="140" name="Rectangle 139"/>
+          <p:cNvPr id="128" name="Rectangle 127"/>
           <p:cNvSpPr/>
           <p:nvPr/>
         </p:nvSpPr>
         <p:spPr>
           <a:xfrm>
-            <a:off x="12152376" y="7351775"/>
-            <a:ext cx="54864" cy="1078992"/>
+            <a:off x="722376" y="7626096"/>
+            <a:ext cx="54864" cy="804672"/>
           </a:xfrm>
           <a:prstGeom prst="rect">
             <a:avLst/>
@@ -33810,14 +33294,14 @@
       </p:sp>
       <p:sp>
         <p:nvSpPr>
-          <p:cNvPr id="141" name="TextBox 140"/>
-          <p:cNvSpPr txBox="1"/>
-          <p:nvPr/>
-        </p:nvSpPr>
-        <p:spPr>
-          <a:xfrm>
-            <a:off x="12371832" y="7424927"/>
-            <a:ext cx="2468880" cy="182880"/>
+          <p:cNvPr id="129" name="TextBox 128"/>
+          <p:cNvSpPr txBox="1"/>
+          <p:nvPr/>
+        </p:nvSpPr>
+        <p:spPr>
+          <a:xfrm>
+            <a:off x="996696" y="7717536"/>
+            <a:ext cx="8092440" cy="201168"/>
           </a:xfrm>
           <a:prstGeom prst="rect">
             <a:avLst/>
@@ -33836,28 +33320,148 @@
               </a:lnSpc>
             </a:pPr>
             <a:r>
+              <a:rPr sz="975" b="0">
+                <a:solidFill>
+                  <a:srgbClr val="8A8A8A"/>
+                </a:solidFill>
+                <a:latin typeface="Arial"/>
+                <a:ea typeface="Arial"/>
+              </a:rPr>
+              <a:t>판돈 · 락인으로 얻는 점유율</a:t>
+            </a:r>
+          </a:p>
+        </p:txBody>
+      </p:sp>
+      <p:sp>
+        <p:nvSpPr>
+          <p:cNvPr id="130" name="TextBox 129"/>
+          <p:cNvSpPr txBox="1"/>
+          <p:nvPr/>
+        </p:nvSpPr>
+        <p:spPr>
+          <a:xfrm>
+            <a:off x="996696" y="7918704"/>
+            <a:ext cx="4754880" cy="310896"/>
+          </a:xfrm>
+          <a:prstGeom prst="rect">
+            <a:avLst/>
+          </a:prstGeom>
+          <a:noFill/>
+        </p:spPr>
+        <p:txBody>
+          <a:bodyPr wrap="square" anchor="ctr" lIns="0" rIns="0" tIns="0" bIns="0">
+            <a:spAutoFit/>
+          </a:bodyPr>
+          <a:lstStyle/>
+          <a:p>
+            <a:pPr algn="l">
+              <a:lnSpc>
+                <a:spcPct val="112000"/>
+              </a:lnSpc>
+            </a:pPr>
+            <a:r>
+              <a:rPr sz="1500" b="1">
+                <a:solidFill>
+                  <a:srgbClr val="1428A0"/>
+                </a:solidFill>
+                <a:latin typeface="Arial"/>
+                <a:ea typeface="Arial"/>
+              </a:rPr>
+              <a:t>캐시 계층 QLC 0 → 50%</a:t>
+            </a:r>
+          </a:p>
+        </p:txBody>
+      </p:sp>
+      <p:sp>
+        <p:nvSpPr>
+          <p:cNvPr id="131" name="TextBox 130"/>
+          <p:cNvSpPr txBox="1"/>
+          <p:nvPr/>
+        </p:nvSpPr>
+        <p:spPr>
+          <a:xfrm>
+            <a:off x="5897880" y="7918704"/>
+            <a:ext cx="3191256" cy="310896"/>
+          </a:xfrm>
+          <a:prstGeom prst="rect">
+            <a:avLst/>
+          </a:prstGeom>
+          <a:noFill/>
+        </p:spPr>
+        <p:txBody>
+          <a:bodyPr wrap="square" anchor="ctr" lIns="0" rIns="0" tIns="0" bIns="0">
+            <a:spAutoFit/>
+          </a:bodyPr>
+          <a:lstStyle/>
+          <a:p>
+            <a:pPr algn="l">
+              <a:lnSpc>
+                <a:spcPct val="112000"/>
+              </a:lnSpc>
+            </a:pPr>
+            <a:r>
               <a:rPr sz="925" b="0">
                 <a:solidFill>
+                  <a:srgbClr val="555555"/>
+                </a:solidFill>
+                <a:latin typeface="Arial"/>
+                <a:ea typeface="Arial"/>
+              </a:rPr>
+              <a:t>2030 추론 캐시 350EB 중 QLC 175EB(조건부 상방) · 락인 없으면 TLC 유지 · 디자인인 1사당 점유율 [사내 확인]</a:t>
+            </a:r>
+          </a:p>
+        </p:txBody>
+      </p:sp>
+      <p:sp>
+        <p:nvSpPr>
+          <p:cNvPr id="132" name="TextBox 131"/>
+          <p:cNvSpPr txBox="1"/>
+          <p:nvPr/>
+        </p:nvSpPr>
+        <p:spPr>
+          <a:xfrm>
+            <a:off x="9308592" y="7717536"/>
+            <a:ext cx="8092440" cy="201168"/>
+          </a:xfrm>
+          <a:prstGeom prst="rect">
+            <a:avLst/>
+          </a:prstGeom>
+          <a:noFill/>
+        </p:spPr>
+        <p:txBody>
+          <a:bodyPr wrap="square" anchor="t" lIns="0" rIns="0" tIns="0" bIns="0">
+            <a:spAutoFit/>
+          </a:bodyPr>
+          <a:lstStyle/>
+          <a:p>
+            <a:pPr algn="l">
+              <a:lnSpc>
+                <a:spcPct val="112000"/>
+              </a:lnSpc>
+            </a:pPr>
+            <a:r>
+              <a:rPr sz="975" b="0">
+                <a:solidFill>
                   <a:srgbClr val="8A8A8A"/>
                 </a:solidFill>
                 <a:latin typeface="Arial"/>
                 <a:ea typeface="Arial"/>
               </a:rPr>
-              <a:t>판돈 · 락인으로 얻는 점유율</a:t>
-            </a:r>
-          </a:p>
-        </p:txBody>
-      </p:sp>
-      <p:sp>
-        <p:nvSpPr>
-          <p:cNvPr id="142" name="TextBox 141"/>
-          <p:cNvSpPr txBox="1"/>
-          <p:nvPr/>
-        </p:nvSpPr>
-        <p:spPr>
-          <a:xfrm>
-            <a:off x="12371832" y="7607807"/>
-            <a:ext cx="2468880" cy="347472"/>
+              <a:t>비용 · 개발실 자원 투입</a:t>
+            </a:r>
+          </a:p>
+        </p:txBody>
+      </p:sp>
+      <p:sp>
+        <p:nvSpPr>
+          <p:cNvPr id="133" name="TextBox 132"/>
+          <p:cNvSpPr txBox="1"/>
+          <p:nvPr/>
+        </p:nvSpPr>
+        <p:spPr>
+          <a:xfrm>
+            <a:off x="9308592" y="7918704"/>
+            <a:ext cx="4754880" cy="310896"/>
           </a:xfrm>
           <a:prstGeom prst="rect">
             <a:avLst/>
@@ -33876,181 +33480,61 @@
               </a:lnSpc>
             </a:pPr>
             <a:r>
-              <a:rPr sz="1350" b="1">
+              <a:rPr sz="1500" b="1">
                 <a:solidFill>
                   <a:srgbClr val="1428A0"/>
                 </a:solidFill>
                 <a:latin typeface="Arial"/>
                 <a:ea typeface="Arial"/>
               </a:rPr>
-              <a:t>캐시 계층 QLC 0 → 50%</a:t>
-            </a:r>
-          </a:p>
-        </p:txBody>
-      </p:sp>
-      <p:sp>
-        <p:nvSpPr>
-          <p:cNvPr id="143" name="TextBox 142"/>
-          <p:cNvSpPr txBox="1"/>
-          <p:nvPr/>
-        </p:nvSpPr>
-        <p:spPr>
-          <a:xfrm>
-            <a:off x="12371832" y="7973567"/>
-            <a:ext cx="2468880" cy="384048"/>
-          </a:xfrm>
-          <a:prstGeom prst="rect">
-            <a:avLst/>
-          </a:prstGeom>
-          <a:noFill/>
-        </p:spPr>
-        <p:txBody>
-          <a:bodyPr wrap="square" anchor="t" lIns="0" rIns="0" tIns="0" bIns="0">
-            <a:spAutoFit/>
-          </a:bodyPr>
-          <a:lstStyle/>
-          <a:p>
-            <a:pPr algn="l">
-              <a:lnSpc>
-                <a:spcPct val="102000"/>
-              </a:lnSpc>
-            </a:pPr>
-            <a:r>
-              <a:rPr sz="850" b="0">
+              <a:t>별도 투자 없음</a:t>
+            </a:r>
+          </a:p>
+        </p:txBody>
+      </p:sp>
+      <p:sp>
+        <p:nvSpPr>
+          <p:cNvPr id="134" name="TextBox 133"/>
+          <p:cNvSpPr txBox="1"/>
+          <p:nvPr/>
+        </p:nvSpPr>
+        <p:spPr>
+          <a:xfrm>
+            <a:off x="14209776" y="7918704"/>
+            <a:ext cx="3191256" cy="310896"/>
+          </a:xfrm>
+          <a:prstGeom prst="rect">
+            <a:avLst/>
+          </a:prstGeom>
+          <a:noFill/>
+        </p:spPr>
+        <p:txBody>
+          <a:bodyPr wrap="square" anchor="ctr" lIns="0" rIns="0" tIns="0" bIns="0">
+            <a:spAutoFit/>
+          </a:bodyPr>
+          <a:lstStyle/>
+          <a:p>
+            <a:pPr algn="l">
+              <a:lnSpc>
+                <a:spcPct val="112000"/>
+              </a:lnSpc>
+            </a:pPr>
+            <a:r>
+              <a:rPr sz="925" b="0">
                 <a:solidFill>
                   <a:srgbClr val="555555"/>
                 </a:solidFill>
                 <a:latin typeface="Arial"/>
                 <a:ea typeface="Arial"/>
               </a:rPr>
-              <a:t>2030 추론 캐시 350EB 중 QLC 175EB(조건부 상방) · 락인 없으면 TLC 유지</a:t>
-            </a:r>
-          </a:p>
-        </p:txBody>
-      </p:sp>
-      <p:sp>
-        <p:nvSpPr>
-          <p:cNvPr id="144" name="TextBox 143"/>
-          <p:cNvSpPr txBox="1"/>
-          <p:nvPr/>
-        </p:nvSpPr>
-        <p:spPr>
-          <a:xfrm>
-            <a:off x="15023592" y="7424927"/>
-            <a:ext cx="2468880" cy="182880"/>
-          </a:xfrm>
-          <a:prstGeom prst="rect">
-            <a:avLst/>
-          </a:prstGeom>
-          <a:noFill/>
-        </p:spPr>
-        <p:txBody>
-          <a:bodyPr wrap="square" anchor="t" lIns="0" rIns="0" tIns="0" bIns="0">
-            <a:spAutoFit/>
-          </a:bodyPr>
-          <a:lstStyle/>
-          <a:p>
-            <a:pPr algn="l">
-              <a:lnSpc>
-                <a:spcPct val="112000"/>
-              </a:lnSpc>
-            </a:pPr>
-            <a:r>
-              <a:rPr sz="925" b="0">
-                <a:solidFill>
-                  <a:srgbClr val="8A8A8A"/>
-                </a:solidFill>
-                <a:latin typeface="Arial"/>
-                <a:ea typeface="Arial"/>
-              </a:rPr>
-              <a:t>비용 · 개발실 자원 투입</a:t>
-            </a:r>
-          </a:p>
-        </p:txBody>
-      </p:sp>
-      <p:sp>
-        <p:nvSpPr>
-          <p:cNvPr id="145" name="TextBox 144"/>
-          <p:cNvSpPr txBox="1"/>
-          <p:nvPr/>
-        </p:nvSpPr>
-        <p:spPr>
-          <a:xfrm>
-            <a:off x="15023592" y="7607807"/>
-            <a:ext cx="2468880" cy="347472"/>
-          </a:xfrm>
-          <a:prstGeom prst="rect">
-            <a:avLst/>
-          </a:prstGeom>
-          <a:noFill/>
-        </p:spPr>
-        <p:txBody>
-          <a:bodyPr wrap="square" anchor="ctr" lIns="0" rIns="0" tIns="0" bIns="0">
-            <a:spAutoFit/>
-          </a:bodyPr>
-          <a:lstStyle/>
-          <a:p>
-            <a:pPr algn="l">
-              <a:lnSpc>
-                <a:spcPct val="112000"/>
-              </a:lnSpc>
-            </a:pPr>
-            <a:r>
-              <a:rPr sz="1350" b="1">
-                <a:solidFill>
-                  <a:srgbClr val="1428A0"/>
-                </a:solidFill>
-                <a:latin typeface="Arial"/>
-                <a:ea typeface="Arial"/>
-              </a:rPr>
-              <a:t>별도 투자 없음</a:t>
-            </a:r>
-          </a:p>
-        </p:txBody>
-      </p:sp>
-      <p:sp>
-        <p:nvSpPr>
-          <p:cNvPr id="146" name="TextBox 145"/>
-          <p:cNvSpPr txBox="1"/>
-          <p:nvPr/>
-        </p:nvSpPr>
-        <p:spPr>
-          <a:xfrm>
-            <a:off x="15023592" y="7973567"/>
-            <a:ext cx="2468880" cy="384048"/>
-          </a:xfrm>
-          <a:prstGeom prst="rect">
-            <a:avLst/>
-          </a:prstGeom>
-          <a:noFill/>
-        </p:spPr>
-        <p:txBody>
-          <a:bodyPr wrap="square" anchor="t" lIns="0" rIns="0" tIns="0" bIns="0">
-            <a:spAutoFit/>
-          </a:bodyPr>
-          <a:lstStyle/>
-          <a:p>
-            <a:pPr algn="l">
-              <a:lnSpc>
-                <a:spcPct val="102000"/>
-              </a:lnSpc>
-            </a:pPr>
-            <a:r>
-              <a:rPr sz="850" b="0">
-                <a:solidFill>
-                  <a:srgbClr val="555555"/>
-                </a:solidFill>
-                <a:latin typeface="Arial"/>
-                <a:ea typeface="Arial"/>
-              </a:rPr>
-              <a:t>Pod 3~5명 × 1~2사 재배치 · 채용은 정원 내 · 실측 공개는 보안 검토만</a:t>
-            </a:r>
-          </a:p>
-        </p:txBody>
-      </p:sp>
-      <p:sp>
-        <p:nvSpPr>
-          <p:cNvPr id="147" name="Rectangle 146"/>
+              <a:t>Pod 인력 3~5명 × 1~2사 재배치 · 시스템 SW 채용은 정원 내 · 실측 공개는 보안 검토만</a:t>
+            </a:r>
+          </a:p>
+        </p:txBody>
+      </p:sp>
+      <p:sp>
+        <p:nvSpPr>
+          <p:cNvPr id="135" name="Rectangle 134"/>
           <p:cNvSpPr/>
           <p:nvPr/>
         </p:nvSpPr>
@@ -34094,7 +33578,7 @@
       </p:sp>
       <p:sp>
         <p:nvSpPr>
-          <p:cNvPr id="148" name="TextBox 147"/>
+          <p:cNvPr id="136" name="TextBox 135"/>
           <p:cNvSpPr txBox="1"/>
           <p:nvPr/>
         </p:nvSpPr>
@@ -34134,7 +33618,7 @@
       </p:sp>
       <p:sp>
         <p:nvSpPr>
-          <p:cNvPr id="149" name="TextBox 148"/>
+          <p:cNvPr id="137" name="TextBox 136"/>
           <p:cNvSpPr txBox="1"/>
           <p:nvPr/>
         </p:nvSpPr>
@@ -34191,7 +33675,7 @@
       </p:sp>
       <p:sp>
         <p:nvSpPr>
-          <p:cNvPr id="150" name="Rectangle 149"/>
+          <p:cNvPr id="138" name="Rectangle 137"/>
           <p:cNvSpPr/>
           <p:nvPr/>
         </p:nvSpPr>
@@ -34235,7 +33719,7 @@
       </p:sp>
       <p:sp>
         <p:nvSpPr>
-          <p:cNvPr id="151" name="Rectangle 150"/>
+          <p:cNvPr id="139" name="Rectangle 138"/>
           <p:cNvSpPr/>
           <p:nvPr/>
         </p:nvSpPr>
@@ -34279,7 +33763,7 @@
       </p:sp>
       <p:sp>
         <p:nvSpPr>
-          <p:cNvPr id="152" name="TextBox 151"/>
+          <p:cNvPr id="140" name="TextBox 139"/>
           <p:cNvSpPr txBox="1"/>
           <p:nvPr/>
         </p:nvSpPr>
@@ -34336,7 +33820,7 @@
       </p:sp>
       <p:sp>
         <p:nvSpPr>
-          <p:cNvPr id="153" name="TextBox 152"/>
+          <p:cNvPr id="141" name="TextBox 140"/>
           <p:cNvSpPr txBox="1"/>
           <p:nvPr/>
         </p:nvSpPr>
@@ -34376,7 +33860,7 @@
       </p:sp>
       <p:sp>
         <p:nvSpPr>
-          <p:cNvPr id="154" name="TextBox 153"/>
+          <p:cNvPr id="142" name="TextBox 141"/>
           <p:cNvSpPr txBox="1"/>
           <p:nvPr/>
         </p:nvSpPr>

--- a/outputs/presentation/qlc-ssd-strategy.pptx
+++ b/outputs/presentation/qlc-ssd-strategy.pptx
@@ -787,7 +787,7 @@
           <a:lstStyle/>
           <a:p>
             <a:r>
-              <a:t>5장은 실행입니다. 3단계 역량을 어떻게 얻느냐, 즉 고객 시스템 안으로 들어가는 두 수단을 그림 하나로 보입니다. 왼쪽은 삼성 개발실이 제공하는 것이고, 오른쪽은 고객 시스템의 계층이며, 가운데 두 화살표가 주고받는 관계입니다. 위쪽 화살표 ① FDE 상주는 삼성이 보내는 것입니다. 상주 엔지니어가 고객 시스템 안에서 요구를 코드로 구현하고, 업스트림에 기여하며, 워크로드 실측을 공개합니다. 아래쪽 화살표 ② 접근권 확보는 삼성이 받는 것입니다. 워크로드 트레이스, KV 수명 정책, 규격 접근권이며 계약 시한은 2027년 상반기입니다. 공급이 완화되기 전에 락인을 걸어야 하기 때문입니다. 가운데 왼쪽 카드가 고객 선별입니다. FDE를 모든 고객에 보낼 수는 없으므로 세 조건으로 거릅니다. 트레이스 접근을 허용하는가, 캐시 관리자 코드를 자체 운영하는가, 물량과 규격에 파급력이 있는가. AI 랩과 NVIDIA 생태계가 조건을 충족하므로 FDE를 상주시키고, 하이퍼스케일러는 보안과 중립성 때문에 내부 코드 상주가 불가하므로 업스트림과 OCP 규격으로, OEM과 네오클라우드는 레퍼런스 스택으로 넓힙니다. 오른쪽 카드가 선례입니다. Palantir의 FDE는 고객 현장에 상주해 요구를 코드로 구현하고 성과로 평가받는 모델이고, 고객 락인의 동력으로 평가받아 Anthropic과 OpenAI가 시장 진입 모델로 채택했습니다. Micron과 Anthropic의 전략적 협약은 공동 설계, 다년 공급, 운영 통합, 자본을 한 계약에 결합해 워크로드와 규격 접근권을 확보한 사례입니다. 중요한 것은 삼성과 SK의 Anthropic 공급 계약에는 공동 설계 조항이 없다는 점이고, 이것을 삼성이 먼저 제안하자는 것이 이 장의 요청입니다. 오른쪽 고객 시스템 그림에서 삼성이 지금 닿는 층은 SSD뿐입니다. FDE가 KV 캐시 관리자 층에 상주하고 I/O 라이브러리와 커널에 코드를 머지하면서 위로 올라갑니다. 하단 세 타일은 개발실 내부 실행입니다. 조직은 시스템 소프트웨어 조직 강화와 개발실 소속 Co-Design Pod, 인사는 고객 코드를 읽고 고치는 전문가 채용과 상주 로테이션, 문화는 오픈소스 메인테이너 배출과 KV 캐시 실측의 업계 최초 공개입니다. 자회사나 별도 보상 체계는 두지 않습니다. 마지막 줄이 판돈과 비용입니다. 판돈은 락인으로 얻는 캐시 계층 점유율입니다. 2030년 추론 캐시 350EB 가운데 QLC는 호스트 협력이 성립할 때 조건부 상방 175EB이고, 성립하지 않으면 TLC가 유지됩니다. 비용은 개발실 개발 자원 재배치이며 별도 투자는 없습니다. 단계별 통과 조건(90일·12개월·2027년 상반기)은 슬라이드에서 빼고 보고서 5장 4절에 둡니다. 질문이 나오면 그 표로 답합니다.</a:t>
+              <a:t>5장은 실행입니다. 3단계 역량을 어떻게 얻느냐, 즉 고객 시스템 안으로 들어가는 두 수단을 그림 하나로 보입니다. 왼쪽은 삼성 개발실이 제공하는 것이고, 오른쪽은 고객 시스템의 계층이며, 가운데 두 화살표가 주고받는 관계입니다. 위쪽 화살표 ① FDE 상주는 삼성이 보내는 것입니다. 상주 엔지니어가 고객 시스템 안에서 요구를 코드로 구현하고, 업스트림에 기여하며, 워크로드 실측을 공개합니다. 아래쪽 화살표 ② 접근권 확보는 삼성이 받는 것입니다. 워크로드 트레이스, KV 수명 정책, 규격 접근권이며 계약 시한은 2027년 상반기입니다. 공급이 완화되기 전에 락인을 걸어야 하기 때문입니다. 가운데 왼쪽 카드가 고객 선별입니다. FDE를 모든 고객에 보낼 수는 없으므로 세 조건으로 거릅니다. 트레이스 접근을 허용하는가, 캐시 관리자 코드를 자체 운영하는가, 물량과 규격에 파급력이 있는가. AI 랩과 NVIDIA 생태계가 조건을 충족하므로 FDE를 상주시키고, 하이퍼스케일러는 보안과 중립성 때문에 내부 코드 상주가 불가하므로 업스트림과 OCP 규격으로, OEM과 네오클라우드는 레퍼런스 스택으로 넓힙니다. 오른쪽 카드가 선례입니다. Palantir의 FDE는 고객 현장에 상주해 요구를 코드로 구현하고 성과로 평가받는 모델이고, 고객 락인의 동력으로 평가받아 Anthropic과 OpenAI가 시장 진입 모델로 채택했습니다. Micron과 Anthropic의 전략적 협약은 공동 설계, 다년 공급, 운영 통합, 자본을 한 계약에 결합해 워크로드와 규격 접근권을 확보한 사례입니다. 중요한 것은 삼성과 SK의 Anthropic 공급 계약에는 공동 설계 조항이 없다는 점이고, 이것을 삼성이 먼저 제안하자는 것이 이 장의 요청입니다. 오른쪽 고객 시스템 그림에서 삼성이 지금 닿는 층은 SSD뿐입니다. FDE가 KV 캐시 관리자 층에 상주하고 I/O 라이브러리와 커널에 코드를 머지하면서 위로 올라갑니다. 하단 세 타일은 개발실 내부 실행입니다. 조직은 시스템 소프트웨어 조직 강화와 개발실 소속 Co-Design Pod, 인사는 고객 코드를 읽고 고치는 전문가 채용과 상주 로테이션, 문화는 오픈소스 메인테이너 배출과 KV 캐시 실측의 업계 최초 공개입니다. 자회사나 별도 보상 체계는 두지 않습니다. 단계별 통과 조건(90일·12개월·2027년 상반기)과 판돈·비용은 슬라이드에서 빼고 보고서 5장 4절과 5절에 두었습니다. 질문이 나오면 그 표로 답합니다. 판돈은 락인으로 얻는 캐시 계층 점유율이고, 2030년 추론 캐시 350EB 가운데 QLC는 호스트 협력이 성립할 때 조건부 상방 175EB입니다. 비용은 개발실 개발 자원 재배치이며 별도 투자는 없습니다.</a:t>
             </a:r>
           </a:p>
         </p:txBody>
@@ -29055,7 +29055,7 @@
         <p:spPr>
           <a:xfrm>
             <a:off x="722376" y="2560320"/>
-            <a:ext cx="2880360" cy="3749039"/>
+            <a:ext cx="2880360" cy="4443984"/>
           </a:xfrm>
           <a:prstGeom prst="rect">
             <a:avLst/>
@@ -29180,8 +29180,8 @@
         </p:nvSpPr>
         <p:spPr>
           <a:xfrm>
-            <a:off x="960120" y="3392423"/>
-            <a:ext cx="109728" cy="109728"/>
+            <a:off x="960120" y="3483863"/>
+            <a:ext cx="118872" cy="118872"/>
           </a:xfrm>
           <a:prstGeom prst="rect">
             <a:avLst/>
@@ -29224,8 +29224,8 @@
         </p:nvSpPr>
         <p:spPr>
           <a:xfrm>
-            <a:off x="1161288" y="3328415"/>
-            <a:ext cx="2240280" cy="475488"/>
+            <a:off x="1179576" y="3401568"/>
+            <a:ext cx="2221991" cy="512064"/>
           </a:xfrm>
           <a:prstGeom prst="rect">
             <a:avLst/>
@@ -29244,7 +29244,7 @@
               </a:lnSpc>
             </a:pPr>
             <a:r>
-              <a:rPr sz="1125" b="1">
+              <a:rPr sz="1200" b="1">
                 <a:solidFill>
                   <a:srgbClr val="1A1A1A"/>
                 </a:solidFill>
@@ -29264,8 +29264,8 @@
         </p:nvSpPr>
         <p:spPr>
           <a:xfrm>
-            <a:off x="960120" y="3904487"/>
-            <a:ext cx="109728" cy="109728"/>
+            <a:off x="960120" y="4087368"/>
+            <a:ext cx="118872" cy="118872"/>
           </a:xfrm>
           <a:prstGeom prst="rect">
             <a:avLst/>
@@ -29308,8 +29308,8 @@
         </p:nvSpPr>
         <p:spPr>
           <a:xfrm>
-            <a:off x="1161288" y="3840479"/>
-            <a:ext cx="2240280" cy="475488"/>
+            <a:off x="1179576" y="4005072"/>
+            <a:ext cx="2221991" cy="512064"/>
           </a:xfrm>
           <a:prstGeom prst="rect">
             <a:avLst/>
@@ -29328,7 +29328,7 @@
               </a:lnSpc>
             </a:pPr>
             <a:r>
-              <a:rPr sz="1125" b="1">
+              <a:rPr sz="1200" b="1">
                 <a:solidFill>
                   <a:srgbClr val="1A1A1A"/>
                 </a:solidFill>
@@ -29348,8 +29348,8 @@
         </p:nvSpPr>
         <p:spPr>
           <a:xfrm>
-            <a:off x="960120" y="4416552"/>
-            <a:ext cx="109728" cy="109728"/>
+            <a:off x="960120" y="4690872"/>
+            <a:ext cx="118872" cy="118872"/>
           </a:xfrm>
           <a:prstGeom prst="rect">
             <a:avLst/>
@@ -29392,8 +29392,8 @@
         </p:nvSpPr>
         <p:spPr>
           <a:xfrm>
-            <a:off x="1161288" y="4352544"/>
-            <a:ext cx="2240280" cy="475488"/>
+            <a:off x="1179576" y="4608576"/>
+            <a:ext cx="2221991" cy="512064"/>
           </a:xfrm>
           <a:prstGeom prst="rect">
             <a:avLst/>
@@ -29412,7 +29412,7 @@
               </a:lnSpc>
             </a:pPr>
             <a:r>
-              <a:rPr sz="1125" b="1">
+              <a:rPr sz="1200" b="1">
                 <a:solidFill>
                   <a:srgbClr val="1A1A1A"/>
                 </a:solidFill>
@@ -29432,8 +29432,8 @@
         </p:nvSpPr>
         <p:spPr>
           <a:xfrm>
-            <a:off x="960120" y="4928616"/>
-            <a:ext cx="109728" cy="109728"/>
+            <a:off x="960120" y="5294376"/>
+            <a:ext cx="118872" cy="118872"/>
           </a:xfrm>
           <a:prstGeom prst="rect">
             <a:avLst/>
@@ -29476,8 +29476,8 @@
         </p:nvSpPr>
         <p:spPr>
           <a:xfrm>
-            <a:off x="1161288" y="4864608"/>
-            <a:ext cx="2240280" cy="475488"/>
+            <a:off x="1179576" y="5212080"/>
+            <a:ext cx="2221991" cy="512064"/>
           </a:xfrm>
           <a:prstGeom prst="rect">
             <a:avLst/>
@@ -29496,7 +29496,7 @@
               </a:lnSpc>
             </a:pPr>
             <a:r>
-              <a:rPr sz="1125" b="1">
+              <a:rPr sz="1200" b="1">
                 <a:solidFill>
                   <a:srgbClr val="1A1A1A"/>
                 </a:solidFill>
@@ -29516,8 +29516,8 @@
         </p:nvSpPr>
         <p:spPr>
           <a:xfrm>
-            <a:off x="923544" y="5376671"/>
-            <a:ext cx="54864" cy="841248"/>
+            <a:off x="923544" y="5907024"/>
+            <a:ext cx="54864" cy="969264"/>
           </a:xfrm>
           <a:prstGeom prst="rect">
             <a:avLst/>
@@ -29560,8 +29560,8 @@
         </p:nvSpPr>
         <p:spPr>
           <a:xfrm>
-            <a:off x="1124712" y="5376671"/>
-            <a:ext cx="2276856" cy="841248"/>
+            <a:off x="1124712" y="5907024"/>
+            <a:ext cx="2276856" cy="969264"/>
           </a:xfrm>
           <a:prstGeom prst="rect">
             <a:avLst/>
@@ -29580,7 +29580,7 @@
               </a:lnSpc>
             </a:pPr>
             <a:r>
-              <a:rPr sz="950" b="1">
+              <a:rPr sz="1050" b="1">
                 <a:solidFill>
                   <a:srgbClr val="1A1A1A"/>
                 </a:solidFill>
@@ -29597,7 +29597,7 @@
               </a:lnSpc>
             </a:pPr>
             <a:r>
-              <a:rPr sz="800" b="0">
+              <a:rPr sz="900" b="0">
                 <a:solidFill>
                   <a:srgbClr val="8A8A8A"/>
                 </a:solidFill>
@@ -29618,7 +29618,7 @@
         <p:spPr>
           <a:xfrm>
             <a:off x="3822191" y="2560320"/>
-            <a:ext cx="9235440" cy="676656"/>
+            <a:ext cx="9235440" cy="731520"/>
           </a:xfrm>
           <a:prstGeom prst="rightArrow">
             <a:avLst>
@@ -29744,8 +29744,8 @@
         </p:nvSpPr>
         <p:spPr>
           <a:xfrm>
-            <a:off x="3822191" y="3364992"/>
-            <a:ext cx="4526280" cy="2139695"/>
+            <a:off x="3822191" y="3419856"/>
+            <a:ext cx="4526280" cy="2724912"/>
           </a:xfrm>
           <a:prstGeom prst="rect">
             <a:avLst/>
@@ -29790,7 +29790,7 @@
         </p:nvSpPr>
         <p:spPr>
           <a:xfrm>
-            <a:off x="4005072" y="3456432"/>
+            <a:off x="4005072" y="3511296"/>
             <a:ext cx="4160520" cy="219456"/>
           </a:xfrm>
           <a:prstGeom prst="rect">
@@ -29830,7 +29830,7 @@
         </p:nvSpPr>
         <p:spPr>
           <a:xfrm>
-            <a:off x="4005072" y="3666744"/>
+            <a:off x="4005072" y="3721607"/>
             <a:ext cx="4160520" cy="201168"/>
           </a:xfrm>
           <a:prstGeom prst="rect">
@@ -29870,8 +29870,8 @@
         </p:nvSpPr>
         <p:spPr>
           <a:xfrm>
-            <a:off x="3968496" y="3913632"/>
-            <a:ext cx="4233672" cy="310895"/>
+            <a:off x="3968496" y="3968496"/>
+            <a:ext cx="4233672" cy="457200"/>
           </a:xfrm>
           <a:prstGeom prst="rect">
             <a:avLst/>
@@ -29914,8 +29914,8 @@
         </p:nvSpPr>
         <p:spPr>
           <a:xfrm>
-            <a:off x="3968496" y="3913632"/>
-            <a:ext cx="45720" cy="310895"/>
+            <a:off x="3968496" y="3968496"/>
+            <a:ext cx="45720" cy="457200"/>
           </a:xfrm>
           <a:prstGeom prst="rect">
             <a:avLst/>
@@ -29958,8 +29958,8 @@
         </p:nvSpPr>
         <p:spPr>
           <a:xfrm>
-            <a:off x="4096511" y="3913632"/>
-            <a:ext cx="2103120" cy="310895"/>
+            <a:off x="4096511" y="3968496"/>
+            <a:ext cx="2194560" cy="457200"/>
           </a:xfrm>
           <a:prstGeom prst="rect">
             <a:avLst/>
@@ -29974,11 +29974,11 @@
           <a:p>
             <a:pPr algn="l">
               <a:lnSpc>
-                <a:spcPct val="100000"/>
-              </a:lnSpc>
-            </a:pPr>
-            <a:r>
-              <a:rPr sz="1000" b="1">
+                <a:spcPct val="104000"/>
+              </a:lnSpc>
+            </a:pPr>
+            <a:r>
+              <a:rPr sz="1125" b="1">
                 <a:solidFill>
                   <a:srgbClr val="1428A0"/>
                 </a:solidFill>
@@ -29991,11 +29991,11 @@
           <a:p>
             <a:pPr algn="l">
               <a:lnSpc>
-                <a:spcPct val="100000"/>
-              </a:lnSpc>
-            </a:pPr>
-            <a:r>
-              <a:rPr sz="825" b="0">
+                <a:spcPct val="104000"/>
+              </a:lnSpc>
+            </a:pPr>
+            <a:r>
+              <a:rPr sz="900" b="0">
                 <a:solidFill>
                   <a:srgbClr val="555555"/>
                 </a:solidFill>
@@ -30015,8 +30015,8 @@
         </p:nvSpPr>
         <p:spPr>
           <a:xfrm>
-            <a:off x="6217920" y="4005072"/>
-            <a:ext cx="182880" cy="128016"/>
+            <a:off x="6327648" y="4123944"/>
+            <a:ext cx="201168" cy="146304"/>
           </a:xfrm>
           <a:prstGeom prst="rightArrow">
             <a:avLst/>
@@ -30059,8 +30059,8 @@
         </p:nvSpPr>
         <p:spPr>
           <a:xfrm>
-            <a:off x="6492240" y="3913632"/>
-            <a:ext cx="1691640" cy="310895"/>
+            <a:off x="6620256" y="3968496"/>
+            <a:ext cx="1563624" cy="457200"/>
           </a:xfrm>
           <a:prstGeom prst="rect">
             <a:avLst/>
@@ -30079,7 +30079,7 @@
               </a:lnSpc>
             </a:pPr>
             <a:r>
-              <a:rPr sz="1000" b="1">
+              <a:rPr sz="1125" b="1">
                 <a:solidFill>
                   <a:srgbClr val="1428A0"/>
                 </a:solidFill>
@@ -30099,8 +30099,8 @@
         </p:nvSpPr>
         <p:spPr>
           <a:xfrm>
-            <a:off x="3968496" y="4279392"/>
-            <a:ext cx="4233672" cy="310895"/>
+            <a:off x="3968496" y="4480560"/>
+            <a:ext cx="4233672" cy="457200"/>
           </a:xfrm>
           <a:prstGeom prst="rect">
             <a:avLst/>
@@ -30143,8 +30143,8 @@
         </p:nvSpPr>
         <p:spPr>
           <a:xfrm>
-            <a:off x="3968496" y="4279392"/>
-            <a:ext cx="45720" cy="310895"/>
+            <a:off x="3968496" y="4480560"/>
+            <a:ext cx="45720" cy="457200"/>
           </a:xfrm>
           <a:prstGeom prst="rect">
             <a:avLst/>
@@ -30187,8 +30187,8 @@
         </p:nvSpPr>
         <p:spPr>
           <a:xfrm>
-            <a:off x="4096511" y="4279392"/>
-            <a:ext cx="2103120" cy="310895"/>
+            <a:off x="4096511" y="4480560"/>
+            <a:ext cx="2194560" cy="457200"/>
           </a:xfrm>
           <a:prstGeom prst="rect">
             <a:avLst/>
@@ -30203,11 +30203,11 @@
           <a:p>
             <a:pPr algn="l">
               <a:lnSpc>
-                <a:spcPct val="100000"/>
-              </a:lnSpc>
-            </a:pPr>
-            <a:r>
-              <a:rPr sz="1000" b="1">
+                <a:spcPct val="104000"/>
+              </a:lnSpc>
+            </a:pPr>
+            <a:r>
+              <a:rPr sz="1125" b="1">
                 <a:solidFill>
                   <a:srgbClr val="1428A0"/>
                 </a:solidFill>
@@ -30220,11 +30220,11 @@
           <a:p>
             <a:pPr algn="l">
               <a:lnSpc>
-                <a:spcPct val="100000"/>
-              </a:lnSpc>
-            </a:pPr>
-            <a:r>
-              <a:rPr sz="825" b="0">
+                <a:spcPct val="104000"/>
+              </a:lnSpc>
+            </a:pPr>
+            <a:r>
+              <a:rPr sz="900" b="0">
                 <a:solidFill>
                   <a:srgbClr val="555555"/>
                 </a:solidFill>
@@ -30244,8 +30244,8 @@
         </p:nvSpPr>
         <p:spPr>
           <a:xfrm>
-            <a:off x="6217920" y="4370831"/>
-            <a:ext cx="182880" cy="128016"/>
+            <a:off x="6327648" y="4636008"/>
+            <a:ext cx="201168" cy="146304"/>
           </a:xfrm>
           <a:prstGeom prst="rightArrow">
             <a:avLst/>
@@ -30288,8 +30288,8 @@
         </p:nvSpPr>
         <p:spPr>
           <a:xfrm>
-            <a:off x="6492240" y="4279392"/>
-            <a:ext cx="1691640" cy="310895"/>
+            <a:off x="6620256" y="4480560"/>
+            <a:ext cx="1563624" cy="457200"/>
           </a:xfrm>
           <a:prstGeom prst="rect">
             <a:avLst/>
@@ -30308,7 +30308,7 @@
               </a:lnSpc>
             </a:pPr>
             <a:r>
-              <a:rPr sz="1000" b="1">
+              <a:rPr sz="1125" b="1">
                 <a:solidFill>
                   <a:srgbClr val="1428A0"/>
                 </a:solidFill>
@@ -30328,8 +30328,8 @@
         </p:nvSpPr>
         <p:spPr>
           <a:xfrm>
-            <a:off x="4096511" y="4645151"/>
-            <a:ext cx="2103120" cy="310895"/>
+            <a:off x="4096511" y="4992624"/>
+            <a:ext cx="2194560" cy="457200"/>
           </a:xfrm>
           <a:prstGeom prst="rect">
             <a:avLst/>
@@ -30344,11 +30344,11 @@
           <a:p>
             <a:pPr algn="l">
               <a:lnSpc>
-                <a:spcPct val="100000"/>
-              </a:lnSpc>
-            </a:pPr>
-            <a:r>
-              <a:rPr sz="1000" b="1">
+                <a:spcPct val="104000"/>
+              </a:lnSpc>
+            </a:pPr>
+            <a:r>
+              <a:rPr sz="1125" b="1">
                 <a:solidFill>
                   <a:srgbClr val="1A1A1A"/>
                 </a:solidFill>
@@ -30361,11 +30361,11 @@
           <a:p>
             <a:pPr algn="l">
               <a:lnSpc>
-                <a:spcPct val="100000"/>
-              </a:lnSpc>
-            </a:pPr>
-            <a:r>
-              <a:rPr sz="825" b="0">
+                <a:spcPct val="104000"/>
+              </a:lnSpc>
+            </a:pPr>
+            <a:r>
+              <a:rPr sz="900" b="0">
                 <a:solidFill>
                   <a:srgbClr val="555555"/>
                 </a:solidFill>
@@ -30385,8 +30385,8 @@
         </p:nvSpPr>
         <p:spPr>
           <a:xfrm>
-            <a:off x="6217920" y="4736591"/>
-            <a:ext cx="182880" cy="128016"/>
+            <a:off x="6327648" y="5148072"/>
+            <a:ext cx="201168" cy="146304"/>
           </a:xfrm>
           <a:prstGeom prst="rightArrow">
             <a:avLst/>
@@ -30429,8 +30429,8 @@
         </p:nvSpPr>
         <p:spPr>
           <a:xfrm>
-            <a:off x="6492240" y="4645151"/>
-            <a:ext cx="1691640" cy="310895"/>
+            <a:off x="6620256" y="4992624"/>
+            <a:ext cx="1563624" cy="457200"/>
           </a:xfrm>
           <a:prstGeom prst="rect">
             <a:avLst/>
@@ -30449,7 +30449,7 @@
               </a:lnSpc>
             </a:pPr>
             <a:r>
-              <a:rPr sz="1000" b="1">
+              <a:rPr sz="1125" b="1">
                 <a:solidFill>
                   <a:srgbClr val="555555"/>
                 </a:solidFill>
@@ -30469,8 +30469,8 @@
         </p:nvSpPr>
         <p:spPr>
           <a:xfrm>
-            <a:off x="4096511" y="5010911"/>
-            <a:ext cx="2103120" cy="310895"/>
+            <a:off x="4096511" y="5504688"/>
+            <a:ext cx="2194560" cy="457200"/>
           </a:xfrm>
           <a:prstGeom prst="rect">
             <a:avLst/>
@@ -30485,11 +30485,11 @@
           <a:p>
             <a:pPr algn="l">
               <a:lnSpc>
-                <a:spcPct val="100000"/>
-              </a:lnSpc>
-            </a:pPr>
-            <a:r>
-              <a:rPr sz="1000" b="1">
+                <a:spcPct val="104000"/>
+              </a:lnSpc>
+            </a:pPr>
+            <a:r>
+              <a:rPr sz="1125" b="1">
                 <a:solidFill>
                   <a:srgbClr val="1A1A1A"/>
                 </a:solidFill>
@@ -30502,11 +30502,11 @@
           <a:p>
             <a:pPr algn="l">
               <a:lnSpc>
-                <a:spcPct val="100000"/>
-              </a:lnSpc>
-            </a:pPr>
-            <a:r>
-              <a:rPr sz="825" b="0">
+                <a:spcPct val="104000"/>
+              </a:lnSpc>
+            </a:pPr>
+            <a:r>
+              <a:rPr sz="900" b="0">
                 <a:solidFill>
                   <a:srgbClr val="555555"/>
                 </a:solidFill>
@@ -30526,8 +30526,8 @@
         </p:nvSpPr>
         <p:spPr>
           <a:xfrm>
-            <a:off x="6217920" y="5102351"/>
-            <a:ext cx="182880" cy="128016"/>
+            <a:off x="6327648" y="5660136"/>
+            <a:ext cx="201168" cy="146304"/>
           </a:xfrm>
           <a:prstGeom prst="rightArrow">
             <a:avLst/>
@@ -30570,8 +30570,8 @@
         </p:nvSpPr>
         <p:spPr>
           <a:xfrm>
-            <a:off x="6492240" y="5010911"/>
-            <a:ext cx="1691640" cy="310895"/>
+            <a:off x="6620256" y="5504688"/>
+            <a:ext cx="1563624" cy="457200"/>
           </a:xfrm>
           <a:prstGeom prst="rect">
             <a:avLst/>
@@ -30590,7 +30590,7 @@
               </a:lnSpc>
             </a:pPr>
             <a:r>
-              <a:rPr sz="1000" b="1">
+              <a:rPr sz="1125" b="1">
                 <a:solidFill>
                   <a:srgbClr val="555555"/>
                 </a:solidFill>
@@ -30610,8 +30610,8 @@
         </p:nvSpPr>
         <p:spPr>
           <a:xfrm>
-            <a:off x="8531351" y="3364992"/>
-            <a:ext cx="4526280" cy="2139695"/>
+            <a:off x="8531351" y="3419856"/>
+            <a:ext cx="4526280" cy="2724912"/>
           </a:xfrm>
           <a:prstGeom prst="rect">
             <a:avLst/>
@@ -30656,7 +30656,7 @@
         </p:nvSpPr>
         <p:spPr>
           <a:xfrm>
-            <a:off x="8714231" y="3456432"/>
+            <a:off x="8714231" y="3511296"/>
             <a:ext cx="4160520" cy="219456"/>
           </a:xfrm>
           <a:prstGeom prst="rect">
@@ -30716,8 +30716,8 @@
         </p:nvSpPr>
         <p:spPr>
           <a:xfrm>
-            <a:off x="8800551" y="3730752"/>
-            <a:ext cx="118140" cy="118140"/>
+            <a:off x="8830543" y="3840480"/>
+            <a:ext cx="145938" cy="145938"/>
           </a:xfrm>
           <a:prstGeom prst="ellipse">
             <a:avLst/>
@@ -30760,8 +30760,8 @@
         </p:nvSpPr>
         <p:spPr>
           <a:xfrm>
-            <a:off x="8750807" y="3867546"/>
-            <a:ext cx="217627" cy="174101"/>
+            <a:off x="8769095" y="4009461"/>
+            <a:ext cx="268833" cy="215066"/>
           </a:xfrm>
           <a:prstGeom prst="round2SameRect">
             <a:avLst>
@@ -30807,8 +30807,8 @@
         </p:nvSpPr>
         <p:spPr>
           <a:xfrm>
-            <a:off x="9073042" y="3730752"/>
-            <a:ext cx="118140" cy="118140"/>
+            <a:off x="9172529" y="3840480"/>
+            <a:ext cx="145938" cy="145938"/>
           </a:xfrm>
           <a:prstGeom prst="ellipse">
             <a:avLst/>
@@ -30851,8 +30851,8 @@
         </p:nvSpPr>
         <p:spPr>
           <a:xfrm>
-            <a:off x="9023299" y="3867546"/>
-            <a:ext cx="217627" cy="174101"/>
+            <a:off x="9111081" y="4009461"/>
+            <a:ext cx="268833" cy="215066"/>
           </a:xfrm>
           <a:prstGeom prst="round2SameRect">
             <a:avLst>
@@ -30898,8 +30898,8 @@
         </p:nvSpPr>
         <p:spPr>
           <a:xfrm>
-            <a:off x="9345533" y="3730752"/>
-            <a:ext cx="118140" cy="118140"/>
+            <a:off x="9514514" y="3840480"/>
+            <a:ext cx="145938" cy="145938"/>
           </a:xfrm>
           <a:prstGeom prst="ellipse">
             <a:avLst/>
@@ -30942,8 +30942,8 @@
         </p:nvSpPr>
         <p:spPr>
           <a:xfrm>
-            <a:off x="9295790" y="3867546"/>
-            <a:ext cx="217627" cy="174101"/>
+            <a:off x="9453067" y="4009461"/>
+            <a:ext cx="268833" cy="215066"/>
           </a:xfrm>
           <a:prstGeom prst="round2SameRect">
             <a:avLst>
@@ -30989,8 +30989,8 @@
         </p:nvSpPr>
         <p:spPr>
           <a:xfrm>
-            <a:off x="9623145" y="3822191"/>
-            <a:ext cx="237744" cy="146304"/>
+            <a:off x="9868204" y="3959352"/>
+            <a:ext cx="274320" cy="164592"/>
           </a:xfrm>
           <a:prstGeom prst="rightArrow">
             <a:avLst/>
@@ -31033,8 +31033,8 @@
         </p:nvSpPr>
         <p:spPr>
           <a:xfrm>
-            <a:off x="9934041" y="3712464"/>
-            <a:ext cx="1133856" cy="347472"/>
+            <a:off x="10215676" y="3822192"/>
+            <a:ext cx="1207008" cy="420624"/>
           </a:xfrm>
           <a:prstGeom prst="rect">
             <a:avLst/>
@@ -31079,8 +31079,8 @@
         </p:nvSpPr>
         <p:spPr>
           <a:xfrm>
-            <a:off x="9934041" y="3712464"/>
-            <a:ext cx="1133856" cy="347472"/>
+            <a:off x="10215676" y="3822192"/>
+            <a:ext cx="1207008" cy="420624"/>
           </a:xfrm>
           <a:prstGeom prst="rect">
             <a:avLst/>
@@ -31099,7 +31099,7 @@
               </a:lnSpc>
             </a:pPr>
             <a:r>
-              <a:rPr sz="1000" b="1">
+              <a:rPr sz="1125" b="1">
                 <a:solidFill>
                   <a:srgbClr val="1A1A1A"/>
                 </a:solidFill>
@@ -31119,8 +31119,8 @@
         </p:nvSpPr>
         <p:spPr>
           <a:xfrm>
-            <a:off x="8750807" y="4096512"/>
-            <a:ext cx="4087368" cy="201168"/>
+            <a:off x="8769095" y="4334256"/>
+            <a:ext cx="4050791" cy="402336"/>
           </a:xfrm>
           <a:prstGeom prst="rect">
             <a:avLst/>
@@ -31135,18 +31135,35 @@
           <a:p>
             <a:pPr algn="l">
               <a:lnSpc>
-                <a:spcPct val="112000"/>
-              </a:lnSpc>
-            </a:pPr>
-            <a:r>
-              <a:rPr sz="875" b="0">
+                <a:spcPct val="108000"/>
+              </a:lnSpc>
+            </a:pPr>
+            <a:r>
+              <a:rPr sz="950" b="0">
                 <a:solidFill>
                   <a:srgbClr val="555555"/>
                 </a:solidFill>
                 <a:latin typeface="Arial"/>
                 <a:ea typeface="Arial"/>
               </a:rPr>
-              <a:t>주가 수익률 640% · 고객 락인의 동력 · Anthropic · OpenAI가 GTM 모델로 채택</a:t>
+              <a:t>요구를 코드로 구현하고 성과로 평가 · 주가 수익률 640%</a:t>
+            </a:r>
+          </a:p>
+          <a:p>
+            <a:pPr algn="l">
+              <a:lnSpc>
+                <a:spcPct val="108000"/>
+              </a:lnSpc>
+            </a:pPr>
+            <a:r>
+              <a:rPr sz="950" b="0">
+                <a:solidFill>
+                  <a:srgbClr val="555555"/>
+                </a:solidFill>
+                <a:latin typeface="Arial"/>
+                <a:ea typeface="Arial"/>
+              </a:rPr>
+              <a:t>Anthropic · OpenAI가 GTM 모델로 채택</a:t>
             </a:r>
           </a:p>
         </p:txBody>
@@ -31159,8 +31176,8 @@
         </p:nvSpPr>
         <p:spPr>
           <a:xfrm>
-            <a:off x="8714231" y="4334256"/>
-            <a:ext cx="4160520" cy="10972"/>
+            <a:off x="8732519" y="4773168"/>
+            <a:ext cx="4123944" cy="10972"/>
           </a:xfrm>
           <a:prstGeom prst="rect">
             <a:avLst/>
@@ -31203,8 +31220,8 @@
         </p:nvSpPr>
         <p:spPr>
           <a:xfrm>
-            <a:off x="8714231" y="4389120"/>
-            <a:ext cx="4160520" cy="219456"/>
+            <a:off x="8732519" y="4846320"/>
+            <a:ext cx="4123944" cy="237744"/>
           </a:xfrm>
           <a:prstGeom prst="rect">
             <a:avLst/>
@@ -31223,7 +31240,7 @@
               </a:lnSpc>
             </a:pPr>
             <a:r>
-              <a:rPr sz="1200" b="0">
+              <a:rPr sz="1275" b="0">
                 <a:solidFill>
                   <a:srgbClr val="8A8A8A"/>
                 </a:solidFill>
@@ -31233,7 +31250,7 @@
               <a:t>선례 · </a:t>
             </a:r>
             <a:r>
-              <a:rPr sz="1200" b="1">
+              <a:rPr sz="1275" b="1">
                 <a:solidFill>
                   <a:srgbClr val="1428A0"/>
                 </a:solidFill>
@@ -31243,7 +31260,7 @@
               <a:t>Micron ↔ Anthropic SCA</a:t>
             </a:r>
             <a:r>
-              <a:rPr sz="900" b="0">
+              <a:rPr sz="950" b="0">
                 <a:solidFill>
                   <a:srgbClr val="555555"/>
                 </a:solidFill>
@@ -31263,8 +31280,8 @@
         </p:nvSpPr>
         <p:spPr>
           <a:xfrm>
-            <a:off x="8750807" y="4663440"/>
-            <a:ext cx="1024128" cy="256032"/>
+            <a:off x="8769095" y="5157216"/>
+            <a:ext cx="1097280" cy="292608"/>
           </a:xfrm>
           <a:prstGeom prst="rect">
             <a:avLst/>
@@ -31307,8 +31324,8 @@
         </p:nvSpPr>
         <p:spPr>
           <a:xfrm>
-            <a:off x="8750807" y="4663440"/>
-            <a:ext cx="1024128" cy="256032"/>
+            <a:off x="8769095" y="5157216"/>
+            <a:ext cx="1097280" cy="292608"/>
           </a:xfrm>
           <a:prstGeom prst="rect">
             <a:avLst/>
@@ -31327,7 +31344,7 @@
               </a:lnSpc>
             </a:pPr>
             <a:r>
-              <a:rPr sz="950" b="1">
+              <a:rPr sz="1000" b="1">
                 <a:solidFill>
                   <a:srgbClr val="FFFFFF"/>
                 </a:solidFill>
@@ -31347,8 +31364,8 @@
         </p:nvSpPr>
         <p:spPr>
           <a:xfrm>
-            <a:off x="9866376" y="4663440"/>
-            <a:ext cx="1024128" cy="256032"/>
+            <a:off x="9976103" y="5157216"/>
+            <a:ext cx="1097280" cy="292608"/>
           </a:xfrm>
           <a:prstGeom prst="rect">
             <a:avLst/>
@@ -31391,8 +31408,8 @@
         </p:nvSpPr>
         <p:spPr>
           <a:xfrm>
-            <a:off x="9866376" y="4663440"/>
-            <a:ext cx="1024128" cy="256032"/>
+            <a:off x="9976103" y="5157216"/>
+            <a:ext cx="1097280" cy="292608"/>
           </a:xfrm>
           <a:prstGeom prst="rect">
             <a:avLst/>
@@ -31411,7 +31428,7 @@
               </a:lnSpc>
             </a:pPr>
             <a:r>
-              <a:rPr sz="950" b="1">
+              <a:rPr sz="1000" b="1">
                 <a:solidFill>
                   <a:srgbClr val="1A1A1A"/>
                 </a:solidFill>
@@ -31431,8 +31448,8 @@
         </p:nvSpPr>
         <p:spPr>
           <a:xfrm>
-            <a:off x="8750807" y="4974336"/>
-            <a:ext cx="1024128" cy="256032"/>
+            <a:off x="8769095" y="5522976"/>
+            <a:ext cx="1097280" cy="292608"/>
           </a:xfrm>
           <a:prstGeom prst="rect">
             <a:avLst/>
@@ -31475,8 +31492,8 @@
         </p:nvSpPr>
         <p:spPr>
           <a:xfrm>
-            <a:off x="8750807" y="4974336"/>
-            <a:ext cx="1024128" cy="256032"/>
+            <a:off x="8769095" y="5522976"/>
+            <a:ext cx="1097280" cy="292608"/>
           </a:xfrm>
           <a:prstGeom prst="rect">
             <a:avLst/>
@@ -31495,7 +31512,7 @@
               </a:lnSpc>
             </a:pPr>
             <a:r>
-              <a:rPr sz="950" b="1">
+              <a:rPr sz="1000" b="1">
                 <a:solidFill>
                   <a:srgbClr val="1A1A1A"/>
                 </a:solidFill>
@@ -31515,8 +31532,8 @@
         </p:nvSpPr>
         <p:spPr>
           <a:xfrm>
-            <a:off x="9866376" y="4974336"/>
-            <a:ext cx="1024128" cy="256032"/>
+            <a:off x="9976103" y="5522976"/>
+            <a:ext cx="1097280" cy="292608"/>
           </a:xfrm>
           <a:prstGeom prst="rect">
             <a:avLst/>
@@ -31559,8 +31576,8 @@
         </p:nvSpPr>
         <p:spPr>
           <a:xfrm>
-            <a:off x="9866376" y="4974336"/>
-            <a:ext cx="1024128" cy="256032"/>
+            <a:off x="9976103" y="5522976"/>
+            <a:ext cx="1097280" cy="292608"/>
           </a:xfrm>
           <a:prstGeom prst="rect">
             <a:avLst/>
@@ -31579,6 +31596,63 @@
               </a:lnSpc>
             </a:pPr>
             <a:r>
+              <a:rPr sz="1000" b="1">
+                <a:solidFill>
+                  <a:srgbClr val="1A1A1A"/>
+                </a:solidFill>
+                <a:latin typeface="Arial"/>
+                <a:ea typeface="Arial"/>
+              </a:rPr>
+              <a:t>자본</a:t>
+            </a:r>
+          </a:p>
+        </p:txBody>
+      </p:sp>
+      <p:sp>
+        <p:nvSpPr>
+          <p:cNvPr id="89" name="TextBox 88"/>
+          <p:cNvSpPr txBox="1"/>
+          <p:nvPr/>
+        </p:nvSpPr>
+        <p:spPr>
+          <a:xfrm>
+            <a:off x="11274551" y="5138927"/>
+            <a:ext cx="1545336" cy="676656"/>
+          </a:xfrm>
+          <a:prstGeom prst="rect">
+            <a:avLst/>
+          </a:prstGeom>
+          <a:noFill/>
+        </p:spPr>
+        <p:txBody>
+          <a:bodyPr wrap="square" anchor="ctr" lIns="0" rIns="0" tIns="0" bIns="0">
+            <a:spAutoFit/>
+          </a:bodyPr>
+          <a:lstStyle/>
+          <a:p>
+            <a:pPr algn="l">
+              <a:lnSpc>
+                <a:spcPct val="108000"/>
+              </a:lnSpc>
+            </a:pPr>
+            <a:r>
+              <a:rPr sz="950" b="0">
+                <a:solidFill>
+                  <a:srgbClr val="555555"/>
+                </a:solidFill>
+                <a:latin typeface="Arial"/>
+                <a:ea typeface="Arial"/>
+              </a:rPr>
+              <a:t>네 요소를 한 계약에 결합</a:t>
+            </a:r>
+          </a:p>
+          <a:p>
+            <a:pPr algn="l">
+              <a:lnSpc>
+                <a:spcPct val="108000"/>
+              </a:lnSpc>
+            </a:pPr>
+            <a:r>
               <a:rPr sz="950" b="1">
                 <a:solidFill>
                   <a:srgbClr val="1A1A1A"/>
@@ -31586,95 +31660,61 @@
                 <a:latin typeface="Arial"/>
                 <a:ea typeface="Arial"/>
               </a:rPr>
-              <a:t>자본</a:t>
-            </a:r>
-          </a:p>
-        </p:txBody>
-      </p:sp>
-      <p:sp>
-        <p:nvSpPr>
-          <p:cNvPr id="89" name="TextBox 88"/>
-          <p:cNvSpPr txBox="1"/>
-          <p:nvPr/>
-        </p:nvSpPr>
-        <p:spPr>
-          <a:xfrm>
-            <a:off x="11055095" y="4608576"/>
-            <a:ext cx="1783080" cy="603504"/>
-          </a:xfrm>
-          <a:prstGeom prst="rect">
-            <a:avLst/>
-          </a:prstGeom>
-          <a:noFill/>
-        </p:spPr>
-        <p:txBody>
-          <a:bodyPr wrap="square" anchor="ctr" lIns="0" rIns="0" tIns="0" bIns="0">
-            <a:spAutoFit/>
-          </a:bodyPr>
-          <a:lstStyle/>
-          <a:p>
-            <a:pPr algn="l">
-              <a:lnSpc>
-                <a:spcPct val="106000"/>
-              </a:lnSpc>
-            </a:pPr>
-            <a:r>
-              <a:rPr sz="900" b="0">
-                <a:solidFill>
-                  <a:srgbClr val="555555"/>
-                </a:solidFill>
-                <a:latin typeface="Arial"/>
-                <a:ea typeface="Arial"/>
-              </a:rPr>
-              <a:t>네 요소를 한 계약에 · Micron SCA 16건</a:t>
-            </a:r>
-          </a:p>
-          <a:p>
-            <a:pPr algn="l">
-              <a:lnSpc>
-                <a:spcPct val="106000"/>
-              </a:lnSpc>
-            </a:pPr>
-            <a:r>
-              <a:rPr sz="900" b="1">
-                <a:solidFill>
-                  <a:srgbClr val="1A1A1A"/>
-                </a:solidFill>
-                <a:latin typeface="Arial"/>
-                <a:ea typeface="Arial"/>
-              </a:rPr>
-              <a:t>삼성 · SK의 Anthropic 계약엔 공동 설계 조항 부재</a:t>
-            </a:r>
-          </a:p>
-          <a:p>
-            <a:pPr algn="l">
-              <a:lnSpc>
-                <a:spcPct val="106000"/>
-              </a:lnSpc>
-            </a:pPr>
-            <a:r>
-              <a:rPr sz="925" b="1">
+              <a:t>Micron SCA 16건 · 최소 매출 약 $100B</a:t>
+            </a:r>
+          </a:p>
+        </p:txBody>
+      </p:sp>
+      <p:sp>
+        <p:nvSpPr>
+          <p:cNvPr id="90" name="TextBox 89"/>
+          <p:cNvSpPr txBox="1"/>
+          <p:nvPr/>
+        </p:nvSpPr>
+        <p:spPr>
+          <a:xfrm>
+            <a:off x="8769095" y="5833872"/>
+            <a:ext cx="4050791" cy="256032"/>
+          </a:xfrm>
+          <a:prstGeom prst="rect">
+            <a:avLst/>
+          </a:prstGeom>
+          <a:noFill/>
+        </p:spPr>
+        <p:txBody>
+          <a:bodyPr wrap="square" anchor="t" lIns="0" rIns="0" tIns="0" bIns="0">
+            <a:spAutoFit/>
+          </a:bodyPr>
+          <a:lstStyle/>
+          <a:p>
+            <a:pPr algn="l">
+              <a:lnSpc>
+                <a:spcPct val="112000"/>
+              </a:lnSpc>
+            </a:pPr>
+            <a:r>
+              <a:rPr sz="975" b="1">
                 <a:solidFill>
                   <a:srgbClr val="1428A0"/>
                 </a:solidFill>
                 <a:latin typeface="Arial"/>
                 <a:ea typeface="Arial"/>
               </a:rPr>
-              <a:t>→ 삼성이 선제 제안</a:t>
-            </a:r>
-          </a:p>
-        </p:txBody>
-      </p:sp>
-      <p:sp>
-        <p:nvSpPr>
-          <p:cNvPr id="90" name="Left Arrow 89"/>
+              <a:t>삼성 · SK의 Anthropic 계약엔 공동 설계 조항 부재 → 삼성이 선제 제안</a:t>
+            </a:r>
+          </a:p>
+        </p:txBody>
+      </p:sp>
+      <p:sp>
+        <p:nvSpPr>
+          <p:cNvPr id="91" name="Left Arrow 90"/>
           <p:cNvSpPr/>
           <p:nvPr/>
         </p:nvSpPr>
         <p:spPr>
           <a:xfrm>
-            <a:off x="3822191" y="5632703"/>
-            <a:ext cx="9235440" cy="676656"/>
+            <a:off x="3822191" y="6272784"/>
+            <a:ext cx="9235440" cy="731520"/>
           </a:xfrm>
           <a:prstGeom prst="leftArrow">
             <a:avLst>
@@ -31714,13 +31754,13 @@
       </p:sp>
       <p:sp>
         <p:nvSpPr>
-          <p:cNvPr id="91" name="TextBox 90"/>
-          <p:cNvSpPr txBox="1"/>
-          <p:nvPr/>
-        </p:nvSpPr>
-        <p:spPr>
-          <a:xfrm>
-            <a:off x="4828031" y="5705855"/>
+          <p:cNvPr id="92" name="TextBox 91"/>
+          <p:cNvSpPr txBox="1"/>
+          <p:nvPr/>
+        </p:nvSpPr>
+        <p:spPr>
+          <a:xfrm>
+            <a:off x="4828031" y="6345936"/>
             <a:ext cx="7955279" cy="256032"/>
           </a:xfrm>
           <a:prstGeom prst="rect">
@@ -31754,13 +31794,13 @@
       </p:sp>
       <p:sp>
         <p:nvSpPr>
-          <p:cNvPr id="92" name="TextBox 91"/>
-          <p:cNvSpPr txBox="1"/>
-          <p:nvPr/>
-        </p:nvSpPr>
-        <p:spPr>
-          <a:xfrm>
-            <a:off x="4828031" y="5980175"/>
+          <p:cNvPr id="93" name="TextBox 92"/>
+          <p:cNvSpPr txBox="1"/>
+          <p:nvPr/>
+        </p:nvSpPr>
+        <p:spPr>
+          <a:xfrm>
+            <a:off x="4828031" y="6620256"/>
             <a:ext cx="7955279" cy="219456"/>
           </a:xfrm>
           <a:prstGeom prst="rect">
@@ -31794,14 +31834,14 @@
       </p:sp>
       <p:sp>
         <p:nvSpPr>
-          <p:cNvPr id="93" name="Rectangle 92"/>
+          <p:cNvPr id="94" name="Rectangle 93"/>
           <p:cNvSpPr/>
           <p:nvPr/>
         </p:nvSpPr>
         <p:spPr>
           <a:xfrm>
             <a:off x="13277088" y="2560320"/>
-            <a:ext cx="4288536" cy="3749039"/>
+            <a:ext cx="4288536" cy="4443984"/>
           </a:xfrm>
           <a:prstGeom prst="rect">
             <a:avLst/>
@@ -31840,7 +31880,7 @@
       </p:sp>
       <p:sp>
         <p:nvSpPr>
-          <p:cNvPr id="94" name="TextBox 93"/>
+          <p:cNvPr id="95" name="TextBox 94"/>
           <p:cNvSpPr txBox="1"/>
           <p:nvPr/>
         </p:nvSpPr>
@@ -31880,7 +31920,7 @@
       </p:sp>
       <p:sp>
         <p:nvSpPr>
-          <p:cNvPr id="95" name="TextBox 94"/>
+          <p:cNvPr id="96" name="TextBox 95"/>
           <p:cNvSpPr txBox="1"/>
           <p:nvPr/>
         </p:nvSpPr>
@@ -31920,14 +31960,14 @@
       </p:sp>
       <p:sp>
         <p:nvSpPr>
-          <p:cNvPr id="96" name="Rectangle 95"/>
+          <p:cNvPr id="97" name="Rectangle 96"/>
           <p:cNvSpPr/>
           <p:nvPr/>
         </p:nvSpPr>
         <p:spPr>
           <a:xfrm>
-            <a:off x="13478256" y="3328415"/>
-            <a:ext cx="2916936" cy="420624"/>
+            <a:off x="13478256" y="3401568"/>
+            <a:ext cx="2916936" cy="512064"/>
           </a:xfrm>
           <a:prstGeom prst="rect">
             <a:avLst/>
@@ -31966,14 +32006,14 @@
       </p:sp>
       <p:sp>
         <p:nvSpPr>
-          <p:cNvPr id="97" name="TextBox 96"/>
-          <p:cNvSpPr txBox="1"/>
-          <p:nvPr/>
-        </p:nvSpPr>
-        <p:spPr>
-          <a:xfrm>
-            <a:off x="13615416" y="3328415"/>
-            <a:ext cx="2642616" cy="420624"/>
+          <p:cNvPr id="98" name="TextBox 97"/>
+          <p:cNvSpPr txBox="1"/>
+          <p:nvPr/>
+        </p:nvSpPr>
+        <p:spPr>
+          <a:xfrm>
+            <a:off x="13615416" y="3401568"/>
+            <a:ext cx="2642616" cy="512064"/>
           </a:xfrm>
           <a:prstGeom prst="rect">
             <a:avLst/>
@@ -31992,7 +32032,7 @@
               </a:lnSpc>
             </a:pPr>
             <a:r>
-              <a:rPr sz="1200" b="0">
+              <a:rPr sz="1275" b="0">
                 <a:solidFill>
                   <a:srgbClr val="555555"/>
                 </a:solidFill>
@@ -32006,14 +32046,14 @@
       </p:sp>
       <p:sp>
         <p:nvSpPr>
-          <p:cNvPr id="98" name="Rectangle 97"/>
+          <p:cNvPr id="99" name="Rectangle 98"/>
           <p:cNvSpPr/>
           <p:nvPr/>
         </p:nvSpPr>
         <p:spPr>
           <a:xfrm>
-            <a:off x="13478256" y="3831335"/>
-            <a:ext cx="2916936" cy="420624"/>
+            <a:off x="13478256" y="4023359"/>
+            <a:ext cx="2916936" cy="512064"/>
           </a:xfrm>
           <a:prstGeom prst="rect">
             <a:avLst/>
@@ -32050,14 +32090,14 @@
       </p:sp>
       <p:sp>
         <p:nvSpPr>
-          <p:cNvPr id="99" name="TextBox 98"/>
-          <p:cNvSpPr txBox="1"/>
-          <p:nvPr/>
-        </p:nvSpPr>
-        <p:spPr>
-          <a:xfrm>
-            <a:off x="13615416" y="3831335"/>
-            <a:ext cx="2642616" cy="420624"/>
+          <p:cNvPr id="100" name="TextBox 99"/>
+          <p:cNvSpPr txBox="1"/>
+          <p:nvPr/>
+        </p:nvSpPr>
+        <p:spPr>
+          <a:xfrm>
+            <a:off x="13615416" y="4023359"/>
+            <a:ext cx="2642616" cy="512064"/>
           </a:xfrm>
           <a:prstGeom prst="rect">
             <a:avLst/>
@@ -32076,7 +32116,7 @@
               </a:lnSpc>
             </a:pPr>
             <a:r>
-              <a:rPr sz="1200" b="1">
+              <a:rPr sz="1275" b="1">
                 <a:solidFill>
                   <a:srgbClr val="1A1A1A"/>
                 </a:solidFill>
@@ -32090,14 +32130,14 @@
       </p:sp>
       <p:sp>
         <p:nvSpPr>
-          <p:cNvPr id="100" name="Rectangle 99"/>
+          <p:cNvPr id="101" name="Rectangle 100"/>
           <p:cNvSpPr/>
           <p:nvPr/>
         </p:nvSpPr>
         <p:spPr>
           <a:xfrm>
-            <a:off x="13478256" y="4334256"/>
-            <a:ext cx="2916936" cy="420624"/>
+            <a:off x="13478256" y="4645152"/>
+            <a:ext cx="2916936" cy="512064"/>
           </a:xfrm>
           <a:prstGeom prst="rect">
             <a:avLst/>
@@ -32134,14 +32174,14 @@
       </p:sp>
       <p:sp>
         <p:nvSpPr>
-          <p:cNvPr id="101" name="TextBox 100"/>
-          <p:cNvSpPr txBox="1"/>
-          <p:nvPr/>
-        </p:nvSpPr>
-        <p:spPr>
-          <a:xfrm>
-            <a:off x="13615416" y="4334256"/>
-            <a:ext cx="2642616" cy="420624"/>
+          <p:cNvPr id="102" name="TextBox 101"/>
+          <p:cNvSpPr txBox="1"/>
+          <p:nvPr/>
+        </p:nvSpPr>
+        <p:spPr>
+          <a:xfrm>
+            <a:off x="13615416" y="4645152"/>
+            <a:ext cx="2642616" cy="512064"/>
           </a:xfrm>
           <a:prstGeom prst="rect">
             <a:avLst/>
@@ -32160,7 +32200,7 @@
               </a:lnSpc>
             </a:pPr>
             <a:r>
-              <a:rPr sz="1200" b="1">
+              <a:rPr sz="1275" b="1">
                 <a:solidFill>
                   <a:srgbClr val="1A1A1A"/>
                 </a:solidFill>
@@ -32174,14 +32214,14 @@
       </p:sp>
       <p:sp>
         <p:nvSpPr>
-          <p:cNvPr id="102" name="Rectangle 101"/>
+          <p:cNvPr id="103" name="Rectangle 102"/>
           <p:cNvSpPr/>
           <p:nvPr/>
         </p:nvSpPr>
         <p:spPr>
           <a:xfrm>
-            <a:off x="13478256" y="4837176"/>
-            <a:ext cx="2916936" cy="420624"/>
+            <a:off x="13478256" y="5266944"/>
+            <a:ext cx="2916936" cy="512064"/>
           </a:xfrm>
           <a:prstGeom prst="rect">
             <a:avLst/>
@@ -32218,14 +32258,14 @@
       </p:sp>
       <p:sp>
         <p:nvSpPr>
-          <p:cNvPr id="103" name="TextBox 102"/>
-          <p:cNvSpPr txBox="1"/>
-          <p:nvPr/>
-        </p:nvSpPr>
-        <p:spPr>
-          <a:xfrm>
-            <a:off x="13615416" y="4837176"/>
-            <a:ext cx="2642616" cy="420624"/>
+          <p:cNvPr id="104" name="TextBox 103"/>
+          <p:cNvSpPr txBox="1"/>
+          <p:nvPr/>
+        </p:nvSpPr>
+        <p:spPr>
+          <a:xfrm>
+            <a:off x="13615416" y="5266944"/>
+            <a:ext cx="2642616" cy="512064"/>
           </a:xfrm>
           <a:prstGeom prst="rect">
             <a:avLst/>
@@ -32244,7 +32284,7 @@
               </a:lnSpc>
             </a:pPr>
             <a:r>
-              <a:rPr sz="1200" b="1">
+              <a:rPr sz="1275" b="1">
                 <a:solidFill>
                   <a:srgbClr val="FFFFFF"/>
                 </a:solidFill>
@@ -32258,14 +32298,14 @@
       </p:sp>
       <p:sp>
         <p:nvSpPr>
-          <p:cNvPr id="104" name="Oval 103"/>
+          <p:cNvPr id="105" name="Oval 104"/>
           <p:cNvSpPr/>
           <p:nvPr/>
         </p:nvSpPr>
         <p:spPr>
           <a:xfrm>
-            <a:off x="16566367" y="3849623"/>
-            <a:ext cx="145938" cy="145938"/>
+            <a:off x="16572219" y="4078223"/>
+            <a:ext cx="159837" cy="159837"/>
           </a:xfrm>
           <a:prstGeom prst="ellipse">
             <a:avLst/>
@@ -32302,14 +32342,14 @@
       </p:sp>
       <p:sp>
         <p:nvSpPr>
-          <p:cNvPr id="105" name="Round Same Side Corner Rectangle 104"/>
+          <p:cNvPr id="106" name="Round Same Side Corner Rectangle 105"/>
           <p:cNvSpPr/>
           <p:nvPr/>
         </p:nvSpPr>
         <p:spPr>
           <a:xfrm>
-            <a:off x="16504920" y="4018605"/>
-            <a:ext cx="268833" cy="215066"/>
+            <a:off x="16504920" y="4263298"/>
+            <a:ext cx="294436" cy="235549"/>
           </a:xfrm>
           <a:prstGeom prst="round2SameRect">
             <a:avLst>
@@ -32349,14 +32389,14 @@
       </p:sp>
       <p:sp>
         <p:nvSpPr>
-          <p:cNvPr id="106" name="TextBox 105"/>
-          <p:cNvSpPr txBox="1"/>
-          <p:nvPr/>
-        </p:nvSpPr>
-        <p:spPr>
-          <a:xfrm>
-            <a:off x="16828617" y="3831335"/>
-            <a:ext cx="640080" cy="420624"/>
+          <p:cNvPr id="107" name="TextBox 106"/>
+          <p:cNvSpPr txBox="1"/>
+          <p:nvPr/>
+        </p:nvSpPr>
+        <p:spPr>
+          <a:xfrm>
+            <a:off x="16872508" y="4023359"/>
+            <a:ext cx="731520" cy="512064"/>
           </a:xfrm>
           <a:prstGeom prst="rect">
             <a:avLst/>
@@ -32375,7 +32415,7 @@
               </a:lnSpc>
             </a:pPr>
             <a:r>
-              <a:rPr sz="1050" b="1">
+              <a:rPr sz="1125" b="1">
                 <a:solidFill>
                   <a:srgbClr val="1428A0"/>
                 </a:solidFill>
@@ -32389,14 +32429,14 @@
       </p:sp>
       <p:sp>
         <p:nvSpPr>
-          <p:cNvPr id="107" name="TextBox 106"/>
-          <p:cNvSpPr txBox="1"/>
-          <p:nvPr/>
-        </p:nvSpPr>
-        <p:spPr>
-          <a:xfrm>
-            <a:off x="16504920" y="4334256"/>
-            <a:ext cx="859536" cy="420624"/>
+          <p:cNvPr id="108" name="TextBox 107"/>
+          <p:cNvSpPr txBox="1"/>
+          <p:nvPr/>
+        </p:nvSpPr>
+        <p:spPr>
+          <a:xfrm>
+            <a:off x="16504920" y="4645152"/>
+            <a:ext cx="859536" cy="512064"/>
           </a:xfrm>
           <a:prstGeom prst="rect">
             <a:avLst/>
@@ -32415,7 +32455,7 @@
               </a:lnSpc>
             </a:pPr>
             <a:r>
-              <a:rPr sz="1000" b="0">
+              <a:rPr sz="1050" b="0">
                 <a:solidFill>
                   <a:srgbClr val="555555"/>
                 </a:solidFill>
@@ -32429,7 +32469,7 @@
       </p:sp>
       <p:pic>
         <p:nvPicPr>
-          <p:cNvPr id="108" name="Picture 107" descr="anthropic.png"/>
+          <p:cNvPr id="109" name="Picture 108" descr="anthropic.png"/>
           <p:cNvPicPr>
             <a:picLocks noChangeAspect="1"/>
           </p:cNvPicPr>
@@ -32443,8 +32483,8 @@
         </p:blipFill>
         <p:spPr>
           <a:xfrm>
-            <a:off x="13551408" y="5806106"/>
-            <a:ext cx="1296794" cy="146970"/>
+            <a:off x="13551408" y="6409303"/>
+            <a:ext cx="1302212" cy="147584"/>
           </a:xfrm>
           <a:prstGeom prst="rect">
             <a:avLst/>
@@ -32453,7 +32493,7 @@
       </p:pic>
       <p:pic>
         <p:nvPicPr>
-          <p:cNvPr id="109" name="Picture 108" descr="openai.png"/>
+          <p:cNvPr id="110" name="Picture 109" descr="openai.png"/>
           <p:cNvPicPr>
             <a:picLocks noChangeAspect="1"/>
           </p:cNvPicPr>
@@ -32467,8 +32507,8 @@
         </p:blipFill>
         <p:spPr>
           <a:xfrm>
-            <a:off x="14965786" y="5806106"/>
-            <a:ext cx="598520" cy="146970"/>
+            <a:off x="14966487" y="6409303"/>
+            <a:ext cx="601021" cy="147584"/>
           </a:xfrm>
           <a:prstGeom prst="rect">
             <a:avLst/>
@@ -32477,7 +32517,7 @@
       </p:pic>
       <p:pic>
         <p:nvPicPr>
-          <p:cNvPr id="110" name="Picture 109" descr="nvidia.png"/>
+          <p:cNvPr id="111" name="Picture 110" descr="nvidia.png"/>
           <p:cNvPicPr>
             <a:picLocks noChangeAspect="1"/>
           </p:cNvPicPr>
@@ -32491,8 +32531,8 @@
         </p:blipFill>
         <p:spPr>
           <a:xfrm>
-            <a:off x="15681886" y="5806106"/>
-            <a:ext cx="769029" cy="146970"/>
+            <a:off x="15680370" y="6409303"/>
+            <a:ext cx="772242" cy="147584"/>
           </a:xfrm>
           <a:prstGeom prst="rect">
             <a:avLst/>
@@ -32501,7 +32541,7 @@
       </p:pic>
       <p:pic>
         <p:nvPicPr>
-          <p:cNvPr id="111" name="Picture 110" descr="meta.png"/>
+          <p:cNvPr id="112" name="Picture 111" descr="meta.png"/>
           <p:cNvPicPr>
             <a:picLocks noChangeAspect="1"/>
           </p:cNvPicPr>
@@ -32515,8 +32555,8 @@
         </p:blipFill>
         <p:spPr>
           <a:xfrm>
-            <a:off x="16568496" y="5806106"/>
-            <a:ext cx="722803" cy="146970"/>
+            <a:off x="16565476" y="6409303"/>
+            <a:ext cx="725823" cy="147584"/>
           </a:xfrm>
           <a:prstGeom prst="rect">
             <a:avLst/>
@@ -32525,14 +32565,14 @@
       </p:pic>
       <p:sp>
         <p:nvSpPr>
-          <p:cNvPr id="112" name="Rectangle 111"/>
+          <p:cNvPr id="113" name="Rectangle 112"/>
           <p:cNvSpPr/>
           <p:nvPr/>
         </p:nvSpPr>
         <p:spPr>
           <a:xfrm>
-            <a:off x="722376" y="6510527"/>
-            <a:ext cx="5468112" cy="969264"/>
+            <a:off x="722376" y="7223760"/>
+            <a:ext cx="5468112" cy="1207008"/>
           </a:xfrm>
           <a:prstGeom prst="rect">
             <a:avLst/>
@@ -32571,14 +32611,14 @@
       </p:sp>
       <p:sp>
         <p:nvSpPr>
-          <p:cNvPr id="113" name="Rectangle 112"/>
+          <p:cNvPr id="114" name="Rectangle 113"/>
           <p:cNvSpPr/>
           <p:nvPr/>
         </p:nvSpPr>
         <p:spPr>
           <a:xfrm>
-            <a:off x="722376" y="6510527"/>
-            <a:ext cx="731520" cy="969264"/>
+            <a:off x="722376" y="7223760"/>
+            <a:ext cx="804672" cy="1207008"/>
           </a:xfrm>
           <a:prstGeom prst="rect">
             <a:avLst/>
@@ -32615,14 +32655,14 @@
       </p:sp>
       <p:sp>
         <p:nvSpPr>
-          <p:cNvPr id="114" name="TextBox 113"/>
-          <p:cNvSpPr txBox="1"/>
-          <p:nvPr/>
-        </p:nvSpPr>
-        <p:spPr>
-          <a:xfrm>
-            <a:off x="722376" y="6510527"/>
-            <a:ext cx="731520" cy="969264"/>
+          <p:cNvPr id="115" name="TextBox 114"/>
+          <p:cNvSpPr txBox="1"/>
+          <p:nvPr/>
+        </p:nvSpPr>
+        <p:spPr>
+          <a:xfrm>
+            <a:off x="722376" y="7223760"/>
+            <a:ext cx="804672" cy="1207008"/>
           </a:xfrm>
           <a:prstGeom prst="rect">
             <a:avLst/>
@@ -32641,7 +32681,7 @@
               </a:lnSpc>
             </a:pPr>
             <a:r>
-              <a:rPr sz="1400" b="1">
+              <a:rPr sz="1500" b="1">
                 <a:solidFill>
                   <a:srgbClr val="FFFFFF"/>
                 </a:solidFill>
@@ -32655,14 +32695,14 @@
       </p:sp>
       <p:sp>
         <p:nvSpPr>
-          <p:cNvPr id="115" name="TextBox 114"/>
-          <p:cNvSpPr txBox="1"/>
-          <p:nvPr/>
-        </p:nvSpPr>
-        <p:spPr>
-          <a:xfrm>
-            <a:off x="1600200" y="6620255"/>
-            <a:ext cx="4443984" cy="237744"/>
+          <p:cNvPr id="116" name="TextBox 115"/>
+          <p:cNvSpPr txBox="1"/>
+          <p:nvPr/>
+        </p:nvSpPr>
+        <p:spPr>
+          <a:xfrm>
+            <a:off x="1691640" y="7370064"/>
+            <a:ext cx="4334256" cy="274320"/>
           </a:xfrm>
           <a:prstGeom prst="rect">
             <a:avLst/>
@@ -32681,7 +32721,7 @@
               </a:lnSpc>
             </a:pPr>
             <a:r>
-              <a:rPr sz="1125" b="1">
+              <a:rPr sz="1200" b="1">
                 <a:solidFill>
                   <a:srgbClr val="1A1A1A"/>
                 </a:solidFill>
@@ -32695,14 +32735,14 @@
       </p:sp>
       <p:sp>
         <p:nvSpPr>
-          <p:cNvPr id="116" name="TextBox 115"/>
-          <p:cNvSpPr txBox="1"/>
-          <p:nvPr/>
-        </p:nvSpPr>
-        <p:spPr>
-          <a:xfrm>
-            <a:off x="1600200" y="6857999"/>
-            <a:ext cx="4443984" cy="530352"/>
+          <p:cNvPr id="117" name="TextBox 116"/>
+          <p:cNvSpPr txBox="1"/>
+          <p:nvPr/>
+        </p:nvSpPr>
+        <p:spPr>
+          <a:xfrm>
+            <a:off x="1691640" y="7662672"/>
+            <a:ext cx="4334256" cy="658368"/>
           </a:xfrm>
           <a:prstGeom prst="rect">
             <a:avLst/>
@@ -32717,49 +32757,49 @@
           <a:p>
             <a:pPr algn="l">
               <a:lnSpc>
-                <a:spcPct val="108000"/>
-              </a:lnSpc>
-            </a:pPr>
-            <a:r>
-              <a:rPr sz="925" b="0">
+                <a:spcPct val="112000"/>
+              </a:lnSpc>
+            </a:pPr>
+            <a:r>
+              <a:rPr sz="1000" b="0">
                 <a:solidFill>
                   <a:srgbClr val="555555"/>
                 </a:solidFill>
                 <a:latin typeface="Arial"/>
                 <a:ea typeface="Arial"/>
               </a:rPr>
-              <a:t>Co-Design Pod 3~5명 · 개발실 소속 · 선별 고객 1~2사 상주</a:t>
-            </a:r>
-          </a:p>
-          <a:p>
-            <a:pPr algn="l">
-              <a:lnSpc>
-                <a:spcPct val="108000"/>
-              </a:lnSpc>
-            </a:pPr>
-            <a:r>
-              <a:rPr sz="925" b="0">
+              <a:t>Co-Design Pod 3~5명 · 개발실 소속</a:t>
+            </a:r>
+          </a:p>
+          <a:p>
+            <a:pPr algn="l">
+              <a:lnSpc>
+                <a:spcPct val="112000"/>
+              </a:lnSpc>
+            </a:pPr>
+            <a:r>
+              <a:rPr sz="1000" b="0">
                 <a:solidFill>
                   <a:srgbClr val="555555"/>
                 </a:solidFill>
                 <a:latin typeface="Arial"/>
                 <a:ea typeface="Arial"/>
               </a:rPr>
-              <a:t>미주 법인 협업 · 고객 시간대 대응</a:t>
-            </a:r>
-          </a:p>
-        </p:txBody>
-      </p:sp>
-      <p:sp>
-        <p:nvSpPr>
-          <p:cNvPr id="117" name="Rectangle 116"/>
+              <a:t>선별 고객 1~2사 상주 · 미주 법인 협업</a:t>
+            </a:r>
+          </a:p>
+        </p:txBody>
+      </p:sp>
+      <p:sp>
+        <p:nvSpPr>
+          <p:cNvPr id="118" name="Rectangle 117"/>
           <p:cNvSpPr/>
           <p:nvPr/>
         </p:nvSpPr>
         <p:spPr>
           <a:xfrm>
-            <a:off x="6409944" y="6510527"/>
-            <a:ext cx="5468112" cy="969264"/>
+            <a:off x="6409944" y="7223760"/>
+            <a:ext cx="5468112" cy="1207008"/>
           </a:xfrm>
           <a:prstGeom prst="rect">
             <a:avLst/>
@@ -32798,14 +32838,14 @@
       </p:sp>
       <p:sp>
         <p:nvSpPr>
-          <p:cNvPr id="118" name="Rectangle 117"/>
+          <p:cNvPr id="119" name="Rectangle 118"/>
           <p:cNvSpPr/>
           <p:nvPr/>
         </p:nvSpPr>
         <p:spPr>
           <a:xfrm>
-            <a:off x="6409944" y="6510527"/>
-            <a:ext cx="731520" cy="969264"/>
+            <a:off x="6409944" y="7223760"/>
+            <a:ext cx="804672" cy="1207008"/>
           </a:xfrm>
           <a:prstGeom prst="rect">
             <a:avLst/>
@@ -32842,14 +32882,14 @@
       </p:sp>
       <p:sp>
         <p:nvSpPr>
-          <p:cNvPr id="119" name="TextBox 118"/>
-          <p:cNvSpPr txBox="1"/>
-          <p:nvPr/>
-        </p:nvSpPr>
-        <p:spPr>
-          <a:xfrm>
-            <a:off x="6409944" y="6510527"/>
-            <a:ext cx="731520" cy="969264"/>
+          <p:cNvPr id="120" name="TextBox 119"/>
+          <p:cNvSpPr txBox="1"/>
+          <p:nvPr/>
+        </p:nvSpPr>
+        <p:spPr>
+          <a:xfrm>
+            <a:off x="6409944" y="7223760"/>
+            <a:ext cx="804672" cy="1207008"/>
           </a:xfrm>
           <a:prstGeom prst="rect">
             <a:avLst/>
@@ -32868,7 +32908,7 @@
               </a:lnSpc>
             </a:pPr>
             <a:r>
-              <a:rPr sz="1400" b="1">
+              <a:rPr sz="1500" b="1">
                 <a:solidFill>
                   <a:srgbClr val="FFFFFF"/>
                 </a:solidFill>
@@ -32882,14 +32922,14 @@
       </p:sp>
       <p:sp>
         <p:nvSpPr>
-          <p:cNvPr id="120" name="TextBox 119"/>
-          <p:cNvSpPr txBox="1"/>
-          <p:nvPr/>
-        </p:nvSpPr>
-        <p:spPr>
-          <a:xfrm>
-            <a:off x="7287768" y="6620255"/>
-            <a:ext cx="4443984" cy="237744"/>
+          <p:cNvPr id="121" name="TextBox 120"/>
+          <p:cNvSpPr txBox="1"/>
+          <p:nvPr/>
+        </p:nvSpPr>
+        <p:spPr>
+          <a:xfrm>
+            <a:off x="7379208" y="7370064"/>
+            <a:ext cx="4334256" cy="274320"/>
           </a:xfrm>
           <a:prstGeom prst="rect">
             <a:avLst/>
@@ -32908,7 +32948,7 @@
               </a:lnSpc>
             </a:pPr>
             <a:r>
-              <a:rPr sz="1125" b="1">
+              <a:rPr sz="1200" b="1">
                 <a:solidFill>
                   <a:srgbClr val="1A1A1A"/>
                 </a:solidFill>
@@ -32922,14 +32962,14 @@
       </p:sp>
       <p:sp>
         <p:nvSpPr>
-          <p:cNvPr id="121" name="TextBox 120"/>
-          <p:cNvSpPr txBox="1"/>
-          <p:nvPr/>
-        </p:nvSpPr>
-        <p:spPr>
-          <a:xfrm>
-            <a:off x="7287768" y="6857999"/>
-            <a:ext cx="4443984" cy="530352"/>
+          <p:cNvPr id="122" name="TextBox 121"/>
+          <p:cNvSpPr txBox="1"/>
+          <p:nvPr/>
+        </p:nvSpPr>
+        <p:spPr>
+          <a:xfrm>
+            <a:off x="7379208" y="7662672"/>
+            <a:ext cx="4334256" cy="658368"/>
           </a:xfrm>
           <a:prstGeom prst="rect">
             <a:avLst/>
@@ -32944,11 +32984,11 @@
           <a:p>
             <a:pPr algn="l">
               <a:lnSpc>
-                <a:spcPct val="108000"/>
-              </a:lnSpc>
-            </a:pPr>
-            <a:r>
-              <a:rPr sz="925" b="0">
+                <a:spcPct val="112000"/>
+              </a:lnSpc>
+            </a:pPr>
+            <a:r>
+              <a:rPr sz="1000" b="0">
                 <a:solidFill>
                   <a:srgbClr val="555555"/>
                 </a:solidFill>
@@ -32961,32 +33001,49 @@
           <a:p>
             <a:pPr algn="l">
               <a:lnSpc>
-                <a:spcPct val="108000"/>
-              </a:lnSpc>
-            </a:pPr>
-            <a:r>
-              <a:rPr sz="925" b="0">
+                <a:spcPct val="112000"/>
+              </a:lnSpc>
+            </a:pPr>
+            <a:r>
+              <a:rPr sz="1000" b="0">
                 <a:solidFill>
                   <a:srgbClr val="555555"/>
                 </a:solidFill>
                 <a:latin typeface="Arial"/>
                 <a:ea typeface="Arial"/>
               </a:rPr>
-              <a:t>본사 엔지니어 상주 로테이션 3~6개월 · 평가 = 머지·실측·디자인인</a:t>
-            </a:r>
-          </a:p>
-        </p:txBody>
-      </p:sp>
-      <p:sp>
-        <p:nvSpPr>
-          <p:cNvPr id="122" name="Rectangle 121"/>
+              <a:t>본사 엔지니어 상주 로테이션 3~6개월</a:t>
+            </a:r>
+          </a:p>
+          <a:p>
+            <a:pPr algn="l">
+              <a:lnSpc>
+                <a:spcPct val="112000"/>
+              </a:lnSpc>
+            </a:pPr>
+            <a:r>
+              <a:rPr sz="1000" b="0">
+                <a:solidFill>
+                  <a:srgbClr val="555555"/>
+                </a:solidFill>
+                <a:latin typeface="Arial"/>
+                <a:ea typeface="Arial"/>
+              </a:rPr>
+              <a:t>평가 = 머지 · 실측 공개 · 디자인인</a:t>
+            </a:r>
+          </a:p>
+        </p:txBody>
+      </p:sp>
+      <p:sp>
+        <p:nvSpPr>
+          <p:cNvPr id="123" name="Rectangle 122"/>
           <p:cNvSpPr/>
           <p:nvPr/>
         </p:nvSpPr>
         <p:spPr>
           <a:xfrm>
-            <a:off x="12097512" y="6510527"/>
-            <a:ext cx="5468112" cy="969264"/>
+            <a:off x="12097512" y="7223760"/>
+            <a:ext cx="5468112" cy="1207008"/>
           </a:xfrm>
           <a:prstGeom prst="rect">
             <a:avLst/>
@@ -33025,14 +33082,14 @@
       </p:sp>
       <p:sp>
         <p:nvSpPr>
-          <p:cNvPr id="123" name="Rectangle 122"/>
+          <p:cNvPr id="124" name="Rectangle 123"/>
           <p:cNvSpPr/>
           <p:nvPr/>
         </p:nvSpPr>
         <p:spPr>
           <a:xfrm>
-            <a:off x="12097512" y="6510527"/>
-            <a:ext cx="731520" cy="969264"/>
+            <a:off x="12097512" y="7223760"/>
+            <a:ext cx="804672" cy="1207008"/>
           </a:xfrm>
           <a:prstGeom prst="rect">
             <a:avLst/>
@@ -33069,14 +33126,14 @@
       </p:sp>
       <p:sp>
         <p:nvSpPr>
-          <p:cNvPr id="124" name="TextBox 123"/>
-          <p:cNvSpPr txBox="1"/>
-          <p:nvPr/>
-        </p:nvSpPr>
-        <p:spPr>
-          <a:xfrm>
-            <a:off x="12097512" y="6510527"/>
-            <a:ext cx="731520" cy="969264"/>
+          <p:cNvPr id="125" name="TextBox 124"/>
+          <p:cNvSpPr txBox="1"/>
+          <p:nvPr/>
+        </p:nvSpPr>
+        <p:spPr>
+          <a:xfrm>
+            <a:off x="12097512" y="7223760"/>
+            <a:ext cx="804672" cy="1207008"/>
           </a:xfrm>
           <a:prstGeom prst="rect">
             <a:avLst/>
@@ -33095,7 +33152,7 @@
               </a:lnSpc>
             </a:pPr>
             <a:r>
-              <a:rPr sz="1400" b="1">
+              <a:rPr sz="1500" b="1">
                 <a:solidFill>
                   <a:srgbClr val="FFFFFF"/>
                 </a:solidFill>
@@ -33109,14 +33166,14 @@
       </p:sp>
       <p:sp>
         <p:nvSpPr>
-          <p:cNvPr id="125" name="TextBox 124"/>
-          <p:cNvSpPr txBox="1"/>
-          <p:nvPr/>
-        </p:nvSpPr>
-        <p:spPr>
-          <a:xfrm>
-            <a:off x="12975336" y="6620255"/>
-            <a:ext cx="4443984" cy="237744"/>
+          <p:cNvPr id="126" name="TextBox 125"/>
+          <p:cNvSpPr txBox="1"/>
+          <p:nvPr/>
+        </p:nvSpPr>
+        <p:spPr>
+          <a:xfrm>
+            <a:off x="13066776" y="7370064"/>
+            <a:ext cx="4334256" cy="274320"/>
           </a:xfrm>
           <a:prstGeom prst="rect">
             <a:avLst/>
@@ -33135,7 +33192,7 @@
               </a:lnSpc>
             </a:pPr>
             <a:r>
-              <a:rPr sz="1125" b="1">
+              <a:rPr sz="1200" b="1">
                 <a:solidFill>
                   <a:srgbClr val="1A1A1A"/>
                 </a:solidFill>
@@ -33149,14 +33206,14 @@
       </p:sp>
       <p:sp>
         <p:nvSpPr>
-          <p:cNvPr id="126" name="TextBox 125"/>
-          <p:cNvSpPr txBox="1"/>
-          <p:nvPr/>
-        </p:nvSpPr>
-        <p:spPr>
-          <a:xfrm>
-            <a:off x="12975336" y="6857999"/>
-            <a:ext cx="4443984" cy="530352"/>
+          <p:cNvPr id="127" name="TextBox 126"/>
+          <p:cNvSpPr txBox="1"/>
+          <p:nvPr/>
+        </p:nvSpPr>
+        <p:spPr>
+          <a:xfrm>
+            <a:off x="13066776" y="7662672"/>
+            <a:ext cx="4334256" cy="658368"/>
           </a:xfrm>
           <a:prstGeom prst="rect">
             <a:avLst/>
@@ -33171,11 +33228,11 @@
           <a:p>
             <a:pPr algn="l">
               <a:lnSpc>
-                <a:spcPct val="108000"/>
-              </a:lnSpc>
-            </a:pPr>
-            <a:r>
-              <a:rPr sz="925" b="0">
+                <a:spcPct val="112000"/>
+              </a:lnSpc>
+            </a:pPr>
+            <a:r>
+              <a:rPr sz="1000" b="0">
                 <a:solidFill>
                   <a:srgbClr val="555555"/>
                 </a:solidFill>
@@ -33188,11 +33245,11 @@
           <a:p>
             <a:pPr algn="l">
               <a:lnSpc>
-                <a:spcPct val="108000"/>
-              </a:lnSpc>
-            </a:pPr>
-            <a:r>
-              <a:rPr sz="925" b="0">
+                <a:spcPct val="112000"/>
+              </a:lnSpc>
+            </a:pPr>
+            <a:r>
+              <a:rPr sz="1000" b="0">
                 <a:solidFill>
                   <a:srgbClr val="555555"/>
                 </a:solidFill>
@@ -33201,50 +33258,6 @@
               </a:rPr>
               <a:t>KV 캐시 실측(WAF · 유효 DWPD) 업계 최초 공개</a:t>
             </a:r>
-          </a:p>
-        </p:txBody>
-      </p:sp>
-      <p:sp>
-        <p:nvSpPr>
-          <p:cNvPr id="127" name="Rectangle 126"/>
-          <p:cNvSpPr/>
-          <p:nvPr/>
-        </p:nvSpPr>
-        <p:spPr>
-          <a:xfrm>
-            <a:off x="722376" y="7626096"/>
-            <a:ext cx="16843248" cy="804672"/>
-          </a:xfrm>
-          <a:prstGeom prst="rect">
-            <a:avLst/>
-          </a:prstGeom>
-          <a:solidFill>
-            <a:srgbClr val="F4F6FC"/>
-          </a:solidFill>
-          <a:ln>
-            <a:noFill/>
-          </a:ln>
-          <a:effectLst/>
-        </p:spPr>
-        <p:style>
-          <a:lnRef idx="1">
-            <a:schemeClr val="accent1"/>
-          </a:lnRef>
-          <a:fillRef idx="3">
-            <a:schemeClr val="accent1"/>
-          </a:fillRef>
-          <a:effectRef idx="2">
-            <a:schemeClr val="accent1"/>
-          </a:effectRef>
-          <a:fontRef idx="minor">
-            <a:schemeClr val="lt1"/>
-          </a:fontRef>
-        </p:style>
-        <p:txBody>
-          <a:bodyPr rtlCol="0" anchor="ctr"/>
-          <a:lstStyle/>
-          <a:p>
-            <a:pPr algn="ctr"/>
           </a:p>
         </p:txBody>
       </p:sp>
@@ -33256,8 +33269,8 @@
         </p:nvSpPr>
         <p:spPr>
           <a:xfrm>
-            <a:off x="722376" y="7626096"/>
-            <a:ext cx="54864" cy="804672"/>
+            <a:off x="722376" y="8613648"/>
+            <a:ext cx="16843248" cy="731520"/>
           </a:xfrm>
           <a:prstGeom prst="rect">
             <a:avLst/>
@@ -33300,290 +33313,6 @@
         </p:nvSpPr>
         <p:spPr>
           <a:xfrm>
-            <a:off x="996696" y="7717536"/>
-            <a:ext cx="8092440" cy="201168"/>
-          </a:xfrm>
-          <a:prstGeom prst="rect">
-            <a:avLst/>
-          </a:prstGeom>
-          <a:noFill/>
-        </p:spPr>
-        <p:txBody>
-          <a:bodyPr wrap="square" anchor="t" lIns="0" rIns="0" tIns="0" bIns="0">
-            <a:spAutoFit/>
-          </a:bodyPr>
-          <a:lstStyle/>
-          <a:p>
-            <a:pPr algn="l">
-              <a:lnSpc>
-                <a:spcPct val="112000"/>
-              </a:lnSpc>
-            </a:pPr>
-            <a:r>
-              <a:rPr sz="975" b="0">
-                <a:solidFill>
-                  <a:srgbClr val="8A8A8A"/>
-                </a:solidFill>
-                <a:latin typeface="Arial"/>
-                <a:ea typeface="Arial"/>
-              </a:rPr>
-              <a:t>판돈 · 락인으로 얻는 점유율</a:t>
-            </a:r>
-          </a:p>
-        </p:txBody>
-      </p:sp>
-      <p:sp>
-        <p:nvSpPr>
-          <p:cNvPr id="130" name="TextBox 129"/>
-          <p:cNvSpPr txBox="1"/>
-          <p:nvPr/>
-        </p:nvSpPr>
-        <p:spPr>
-          <a:xfrm>
-            <a:off x="996696" y="7918704"/>
-            <a:ext cx="4754880" cy="310896"/>
-          </a:xfrm>
-          <a:prstGeom prst="rect">
-            <a:avLst/>
-          </a:prstGeom>
-          <a:noFill/>
-        </p:spPr>
-        <p:txBody>
-          <a:bodyPr wrap="square" anchor="ctr" lIns="0" rIns="0" tIns="0" bIns="0">
-            <a:spAutoFit/>
-          </a:bodyPr>
-          <a:lstStyle/>
-          <a:p>
-            <a:pPr algn="l">
-              <a:lnSpc>
-                <a:spcPct val="112000"/>
-              </a:lnSpc>
-            </a:pPr>
-            <a:r>
-              <a:rPr sz="1500" b="1">
-                <a:solidFill>
-                  <a:srgbClr val="1428A0"/>
-                </a:solidFill>
-                <a:latin typeface="Arial"/>
-                <a:ea typeface="Arial"/>
-              </a:rPr>
-              <a:t>캐시 계층 QLC 0 → 50%</a:t>
-            </a:r>
-          </a:p>
-        </p:txBody>
-      </p:sp>
-      <p:sp>
-        <p:nvSpPr>
-          <p:cNvPr id="131" name="TextBox 130"/>
-          <p:cNvSpPr txBox="1"/>
-          <p:nvPr/>
-        </p:nvSpPr>
-        <p:spPr>
-          <a:xfrm>
-            <a:off x="5897880" y="7918704"/>
-            <a:ext cx="3191256" cy="310896"/>
-          </a:xfrm>
-          <a:prstGeom prst="rect">
-            <a:avLst/>
-          </a:prstGeom>
-          <a:noFill/>
-        </p:spPr>
-        <p:txBody>
-          <a:bodyPr wrap="square" anchor="ctr" lIns="0" rIns="0" tIns="0" bIns="0">
-            <a:spAutoFit/>
-          </a:bodyPr>
-          <a:lstStyle/>
-          <a:p>
-            <a:pPr algn="l">
-              <a:lnSpc>
-                <a:spcPct val="112000"/>
-              </a:lnSpc>
-            </a:pPr>
-            <a:r>
-              <a:rPr sz="925" b="0">
-                <a:solidFill>
-                  <a:srgbClr val="555555"/>
-                </a:solidFill>
-                <a:latin typeface="Arial"/>
-                <a:ea typeface="Arial"/>
-              </a:rPr>
-              <a:t>2030 추론 캐시 350EB 중 QLC 175EB(조건부 상방) · 락인 없으면 TLC 유지 · 디자인인 1사당 점유율 [사내 확인]</a:t>
-            </a:r>
-          </a:p>
-        </p:txBody>
-      </p:sp>
-      <p:sp>
-        <p:nvSpPr>
-          <p:cNvPr id="132" name="TextBox 131"/>
-          <p:cNvSpPr txBox="1"/>
-          <p:nvPr/>
-        </p:nvSpPr>
-        <p:spPr>
-          <a:xfrm>
-            <a:off x="9308592" y="7717536"/>
-            <a:ext cx="8092440" cy="201168"/>
-          </a:xfrm>
-          <a:prstGeom prst="rect">
-            <a:avLst/>
-          </a:prstGeom>
-          <a:noFill/>
-        </p:spPr>
-        <p:txBody>
-          <a:bodyPr wrap="square" anchor="t" lIns="0" rIns="0" tIns="0" bIns="0">
-            <a:spAutoFit/>
-          </a:bodyPr>
-          <a:lstStyle/>
-          <a:p>
-            <a:pPr algn="l">
-              <a:lnSpc>
-                <a:spcPct val="112000"/>
-              </a:lnSpc>
-            </a:pPr>
-            <a:r>
-              <a:rPr sz="975" b="0">
-                <a:solidFill>
-                  <a:srgbClr val="8A8A8A"/>
-                </a:solidFill>
-                <a:latin typeface="Arial"/>
-                <a:ea typeface="Arial"/>
-              </a:rPr>
-              <a:t>비용 · 개발실 자원 투입</a:t>
-            </a:r>
-          </a:p>
-        </p:txBody>
-      </p:sp>
-      <p:sp>
-        <p:nvSpPr>
-          <p:cNvPr id="133" name="TextBox 132"/>
-          <p:cNvSpPr txBox="1"/>
-          <p:nvPr/>
-        </p:nvSpPr>
-        <p:spPr>
-          <a:xfrm>
-            <a:off x="9308592" y="7918704"/>
-            <a:ext cx="4754880" cy="310896"/>
-          </a:xfrm>
-          <a:prstGeom prst="rect">
-            <a:avLst/>
-          </a:prstGeom>
-          <a:noFill/>
-        </p:spPr>
-        <p:txBody>
-          <a:bodyPr wrap="square" anchor="ctr" lIns="0" rIns="0" tIns="0" bIns="0">
-            <a:spAutoFit/>
-          </a:bodyPr>
-          <a:lstStyle/>
-          <a:p>
-            <a:pPr algn="l">
-              <a:lnSpc>
-                <a:spcPct val="112000"/>
-              </a:lnSpc>
-            </a:pPr>
-            <a:r>
-              <a:rPr sz="1500" b="1">
-                <a:solidFill>
-                  <a:srgbClr val="1428A0"/>
-                </a:solidFill>
-                <a:latin typeface="Arial"/>
-                <a:ea typeface="Arial"/>
-              </a:rPr>
-              <a:t>별도 투자 없음</a:t>
-            </a:r>
-          </a:p>
-        </p:txBody>
-      </p:sp>
-      <p:sp>
-        <p:nvSpPr>
-          <p:cNvPr id="134" name="TextBox 133"/>
-          <p:cNvSpPr txBox="1"/>
-          <p:nvPr/>
-        </p:nvSpPr>
-        <p:spPr>
-          <a:xfrm>
-            <a:off x="14209776" y="7918704"/>
-            <a:ext cx="3191256" cy="310896"/>
-          </a:xfrm>
-          <a:prstGeom prst="rect">
-            <a:avLst/>
-          </a:prstGeom>
-          <a:noFill/>
-        </p:spPr>
-        <p:txBody>
-          <a:bodyPr wrap="square" anchor="ctr" lIns="0" rIns="0" tIns="0" bIns="0">
-            <a:spAutoFit/>
-          </a:bodyPr>
-          <a:lstStyle/>
-          <a:p>
-            <a:pPr algn="l">
-              <a:lnSpc>
-                <a:spcPct val="112000"/>
-              </a:lnSpc>
-            </a:pPr>
-            <a:r>
-              <a:rPr sz="925" b="0">
-                <a:solidFill>
-                  <a:srgbClr val="555555"/>
-                </a:solidFill>
-                <a:latin typeface="Arial"/>
-                <a:ea typeface="Arial"/>
-              </a:rPr>
-              <a:t>Pod 인력 3~5명 × 1~2사 재배치 · 시스템 SW 채용은 정원 내 · 실측 공개는 보안 검토만</a:t>
-            </a:r>
-          </a:p>
-        </p:txBody>
-      </p:sp>
-      <p:sp>
-        <p:nvSpPr>
-          <p:cNvPr id="135" name="Rectangle 134"/>
-          <p:cNvSpPr/>
-          <p:nvPr/>
-        </p:nvSpPr>
-        <p:spPr>
-          <a:xfrm>
-            <a:off x="722376" y="8613648"/>
-            <a:ext cx="16843248" cy="731520"/>
-          </a:xfrm>
-          <a:prstGeom prst="rect">
-            <a:avLst/>
-          </a:prstGeom>
-          <a:solidFill>
-            <a:srgbClr val="1428A0"/>
-          </a:solidFill>
-          <a:ln>
-            <a:noFill/>
-          </a:ln>
-          <a:effectLst/>
-        </p:spPr>
-        <p:style>
-          <a:lnRef idx="1">
-            <a:schemeClr val="accent1"/>
-          </a:lnRef>
-          <a:fillRef idx="3">
-            <a:schemeClr val="accent1"/>
-          </a:fillRef>
-          <a:effectRef idx="2">
-            <a:schemeClr val="accent1"/>
-          </a:effectRef>
-          <a:fontRef idx="minor">
-            <a:schemeClr val="lt1"/>
-          </a:fontRef>
-        </p:style>
-        <p:txBody>
-          <a:bodyPr rtlCol="0" anchor="ctr"/>
-          <a:lstStyle/>
-          <a:p>
-            <a:pPr algn="ctr"/>
-          </a:p>
-        </p:txBody>
-      </p:sp>
-      <p:sp>
-        <p:nvSpPr>
-          <p:cNvPr id="136" name="TextBox 135"/>
-          <p:cNvSpPr txBox="1"/>
-          <p:nvPr/>
-        </p:nvSpPr>
-        <p:spPr>
-          <a:xfrm>
             <a:off x="1133856" y="8613648"/>
             <a:ext cx="1463040" cy="731520"/>
           </a:xfrm>
@@ -33618,7 +33347,7 @@
       </p:sp>
       <p:sp>
         <p:nvSpPr>
-          <p:cNvPr id="137" name="TextBox 136"/>
+          <p:cNvPr id="130" name="TextBox 129"/>
           <p:cNvSpPr txBox="1"/>
           <p:nvPr/>
         </p:nvSpPr>
@@ -33668,14 +33397,14 @@
                 <a:latin typeface="Arial"/>
                 <a:ea typeface="Arial"/>
               </a:rPr>
-              <a:t>판돈은 락인으로 얻는 캐시 계층 점유율, 비용은 개발실 개발 자원 투입입니다</a:t>
-            </a:r>
-          </a:p>
-        </p:txBody>
-      </p:sp>
-      <p:sp>
-        <p:nvSpPr>
-          <p:cNvPr id="138" name="Rectangle 137"/>
+              <a:t>개발실은 조직·인사·문화 세 축을 그 실행에 맞춥니다</a:t>
+            </a:r>
+          </a:p>
+        </p:txBody>
+      </p:sp>
+      <p:sp>
+        <p:nvSpPr>
+          <p:cNvPr id="131" name="Rectangle 130"/>
           <p:cNvSpPr/>
           <p:nvPr/>
         </p:nvSpPr>
@@ -33719,7 +33448,7 @@
       </p:sp>
       <p:sp>
         <p:nvSpPr>
-          <p:cNvPr id="139" name="Rectangle 138"/>
+          <p:cNvPr id="132" name="Rectangle 131"/>
           <p:cNvSpPr/>
           <p:nvPr/>
         </p:nvSpPr>
@@ -33763,7 +33492,7 @@
       </p:sp>
       <p:sp>
         <p:nvSpPr>
-          <p:cNvPr id="140" name="TextBox 139"/>
+          <p:cNvPr id="133" name="TextBox 132"/>
           <p:cNvSpPr txBox="1"/>
           <p:nvPr/>
         </p:nvSpPr>
@@ -33820,7 +33549,7 @@
       </p:sp>
       <p:sp>
         <p:nvSpPr>
-          <p:cNvPr id="141" name="TextBox 140"/>
+          <p:cNvPr id="134" name="TextBox 133"/>
           <p:cNvSpPr txBox="1"/>
           <p:nvPr/>
         </p:nvSpPr>
@@ -33860,7 +33589,7 @@
       </p:sp>
       <p:sp>
         <p:nvSpPr>
-          <p:cNvPr id="142" name="TextBox 141"/>
+          <p:cNvPr id="135" name="TextBox 134"/>
           <p:cNvSpPr txBox="1"/>
           <p:nvPr/>
         </p:nvSpPr>

--- a/outputs/presentation/qlc-ssd-strategy.pptx
+++ b/outputs/presentation/qlc-ssd-strategy.pptx
@@ -508,7 +508,7 @@
           <a:lstStyle/>
           <a:p>
             <a:r>
-              <a:t>1장은 문제 제기입니다. 결론은 내리지 않고, 고용량 QLC에서 DWPD를 높일 해법이 필요한 상황임을 세웁니다. 왼쪽이 교훈, 가운데가 지금 수요의 이동, 오른쪽이 문제입니다. 왼쪽 교훈입니다. 두 레인은 같은 기술을 가진 두 회사의 다른 판단입니다. SK하이닉스는 2013년 AMD와 HBM을 공동 개발했고, 2021년 10월 JEDEC 표준보다 먼저 HBM3 개발을 마쳐 2022년 6월 NVIDIA에 업계 최초로 공급했으며, 2023년 한 해 동안 유일한 양산사였습니다. 그 결과가 2025년 6월 DRAM 매출 1위로, 1992년 이후 처음 있는 역전이었습니다. 2026년 6월에는 NVIDIA와 다년 기술 파트너십을 맺고 Vera Rubin용 메모리를 공동 개발합니다. 아래 레인이 삼성입니다. 중요한 것은 기술이 없지 않았다는 점입니다. 업계 최초 HBM2E는 2019년 3월 삼성이 발표했습니다. 같은 해에 HBM 시장 성장률이 과대평가됐다는 판단으로 전담 조직이 후순위가 됐고, 2024년 4월에야 전담 팀이 재구성되어 5년의 공백이 생겼으며, 12단 HBM3E는 2025년 9월에야 NVIDIA 퀄을 통과해 Blackwell 사이클을 놓쳤습니다. 2019년 조직 판단은 CNBC 보도 계열의 단일 출처이므로 그 점을 밝혀 둡니다. 그리고 그 해 삼성은 감산도 CapEx 삭감도 하지 않았습니다. 돈이 아니라 우선순위의 문제였습니다. 교훈을 한 줄로 쓰면 기술이 없어서가 아니라 시장을 작게 봤기 때문입니다. 그리고 구속력 있는 규격은 표준이 아니라 고객의 사양이었습니다. JEDEC HBM4 표준은 최대 8Gbps인데 NVIDIA는 10에서 13Gbps를 요구했고, 승부는 그 위에서 갈렸습니다. 삼성도 표준 제정 9개사 중 하나였으므로 테이블에 앉았는지가 아니라 고객 사양에 맞췄는지가 변수였습니다. 다만 이 교훈을 영구적 판정으로 쓰면 안 됩니다. 삼성은 2025년 4분기 DRAM 1위를 탈환했고, 2026년 2월 업계 최초로 상용 HBM4를 출하했으며, 2026년 2분기 HBM 점유율은 33%로 직전 분기 대비 12%포인트 올랐습니다. 되돌릴 수 있다는 것도 같은 기록이 보여 줍니다. 변수는 판단을 끊지 않는 것이고, 다음 수요에서 같은 판단을 다시 해야 합니다. 가운데가 지금의 수요입니다. 구매 기준은 2008년에서 2012년의 성능과 용량당 가격에서, 2012년에서 2021년의 QoS와 지연 꼬리로 옮겨 갔습니다. OCP 사양 v2.0이 2021년 7월 지연 모니터를 의무화하면서 제도화됐습니다. 2022년 이후는 용량 밀도와 전력 효율, 물량 확보가 상위 기준입니다. 그 위에 새 축이 하나 올라왔습니다. KV 캐시 오프로드가 만드는 내구성 요구입니다. 추론 캐시 계층은 쓰기가 몰리는 첫 대용량 계층이고, Kioxia는 이 계층 제품으로 CM9 TLC 3 DWPD를 지목했습니다. 추론 수요는 연평균 86%로 학습의 16%보다 훨씬 빠르게 큽니다. 오른쪽이 문제입니다. 요구 1에서 3 DWPD는 TLC로는 이미 충족됩니다. 그런데 고객은 QLC를 원합니다. 용량 밀도가 245TB급으로 네 배이고 TB당 가격이 20에서 30% 싸기 때문입니다. 반면 QLC의 정격은 0.6으로 요구와 2배에서 5배 거리가 있습니다. 고객은 QLC의 밀도와 원가로 TLC의 내구성을 요구하는 셈이고, 이 간극을 메우는 것이 우리가 풀 문제입니다. 고용량화는 두 축의 문제를 낳습니다. 다이 수가 만드는 신뢰성 축이 2장, DWPD 격차가 만드는 내구성 축이 3장입니다.</a:t>
+              <a:t>1장은 문제 제기입니다. 결론은 내리지 않고, 고용량 QLC에서 DWPD를 높일 해법이 필요한 상황임을 세웁니다. 왼쪽이 교훈, 가운데가 지금 수요의 이동, 오른쪽이 문제입니다. 왼쪽 교훈입니다. 두 레인은 같은 기술을 가진 두 회사의 다른 판단입니다. SK하이닉스는 2013년 AMD와 HBM을 공동 개발했고, 2021년 10월 JEDEC 표준보다 먼저 HBM3 개발을 마쳐 2022년 6월 NVIDIA에 업계 최초로 공급했으며, 2023년 한 해 동안 유일한 양산사였습니다. 그 결과가 2025년 6월 DRAM 매출 1위로, 1992년 이후 처음 있는 역전이었습니다. 2026년 6월에는 NVIDIA와 다년 기술 파트너십을 맺고 Vera Rubin용 메모리를 공동 개발합니다. 아래 레인이 삼성입니다. 중요한 것은 기술이 없지 않았다는 점입니다. 업계 최초 HBM2E는 2019년 3월 삼성이 발표했습니다. 같은 해에 HBM 시장 성장률이 과대평가됐다는 판단으로 전담 조직이 후순위가 됐고, 2024년 4월에야 전담 팀이 재구성되어 5년의 공백이 생겼으며, 12단 HBM3E는 2025년 9월에야 NVIDIA 퀄을 통과해 Blackwell 사이클을 놓쳤습니다. 2019년 조직 판단은 CNBC 보도 계열의 단일 출처이므로 그 점을 밝혀 둡니다. 그리고 그 해 삼성은 감산도 CapEx 삭감도 하지 않았습니다. 돈이 아니라 우선순위의 문제였습니다. 교훈을 한 줄로 쓰면 기술이 없어서가 아니라 시장을 작게 봤기 때문입니다. 그리고 구속력 있는 규격은 표준이 아니라 고객의 사양이었습니다. JEDEC HBM4 표준은 최대 8Gbps인데 NVIDIA는 10에서 13Gbps를 요구했고, 승부는 그 위에서 갈렸습니다. 삼성도 표준 제정 9개사 중 하나였으므로 테이블에 앉았는지가 아니라 고객 사양에 맞췄는지가 변수였습니다. 다만 이 교훈을 영구적 판정으로 쓰면 안 됩니다. 삼성은 2025년 4분기 DRAM 1위를 탈환했고, 2026년 2월 업계 최초로 상용 HBM4를 출하했으며, 2026년 2분기 HBM 점유율은 33%로 직전 분기 대비 12%포인트 올랐습니다. 되돌릴 수 있다는 것도 같은 기록이 보여 줍니다. 변수는 판단을 끊지 않는 것이고, 다음 수요에서 같은 판단을 다시 해야 합니다. 가운데가 지금의 수요입니다. 먼저 구매 기준입니다. 2008년에서 2012년은 성능과 용량당 가격, 2012년에서 2021년은 QoS와 지연 꼬리였습니다. OCP 사양 v2.0이 2021년 7월 지연 모니터를 의무화하면서 제도화됐습니다. 2022년 이후는 용량 밀도와 전력 효율, 물량 확보가 상위 기준입니다. 그 위에 새 수요가 올라왔습니다. 여기가 이번에 추가한 부분입니다. AI 메모리 수요가 HBM 밖으로 넘치고 있습니다. 추론에서 컨텍스트가 길어지고 동시 사용자가 늘면 KV 캐시가 GPU의 HBM을 먼저 채웁니다. HBM은 가속기당 용량이 고정된 계층이라 더 담을 수 없고, 넘친 것은 CPU DRAM으로 내려옵니다. DRAM도 용량당 단가가 벽이어서 다시 넘치고, 그 아래에서 받는 것이 NVMe SSD입니다. 이것은 제 해석이 아니라 NVIDIA Dynamo의 KV 블록 매니저가 실제로 쓰는 4단 위계입니다. G1이 GPU HBM, G2가 CPU DRAM, G3가 로컬 또는 풀 NVMe SSD, G4가 원격 스토리지입니다. NVIDIA는 여기서 더 나아가 CMX로 이 계층을 컨텍스트 메모리 스토리지라는 플랫폼으로 규정했습니다. 시장에서도 같은 말이 나옵니다. TrendForce는 2026년 8월 18일에 Vera Rubin의 HBM에서 NAND로의 스필오버라고 적었고, CMX가 6월 저점 대비 TLC 현물가 반등을 견인했다고 했습니다. 규모로는 CMX의 NAND 소요가 2026년 35엑사바이트에서 2027년 100엑사바이트 이상으로 추정되고, 이것은 SanDisk가 따로 발표한 KV 캐시 수요 2027년 75에서 100엑사바이트와 독립적인 경로인데 같은 자리에서 만납니다. 삼성은 이미 V낸드 캐파의 약 60%를 CMX 대응에 배정한 것으로 보도됐습니다. 이 두 숫자는 보도와 분석가 추정 계열이므로 등급을 낮춰 읽어야 합니다. 한 가지는 분명히 해 두겠습니다. HBM 수요가 줄어서 스토리지로 옮겨 간 것이 아닙니다. HBM은 계속 늘고 있고, 그 위에서 넘친 몫이 새로 스토리지 계층을 열었다는 뜻입니다. 대체가 아니라 스필오버입니다. 그래서 SSD에 오는 요구가 내구성입니다. 추론 수요는 연평균 86%로 학습의 16%보다 훨씬 빠르게 크고, 추론 캐시 계층은 쓰기가 몰리는 첫 대용량 계층입니다. Kioxia는 이 계층 제품으로 CM9 TLC 3 DWPD를 지목했습니다. 요구는 1에서 3 DWPD입니다. 오른쪽이 문제입니다. 요구 1에서 3 DWPD는 TLC로는 이미 충족됩니다. 그런데 고객은 QLC를 원합니다. 용량 밀도가 245TB급으로 네 배이고 TB당 가격이 20에서 30% 싸기 때문입니다. 반면 QLC의 정격은 0.6으로 요구와 2배에서 5배 거리가 있습니다. 고객은 QLC의 밀도와 원가로 TLC의 내구성을 요구하는 셈이고, 이 간극을 메우는 것이 우리가 풀 문제입니다. 고용량화는 두 축의 문제를 낳습니다. 다이 수가 만드는 신뢰성 축이 2장, DWPD 격차가 만드는 내구성 축이 3장입니다.</a:t>
             </a:r>
           </a:p>
         </p:txBody>
@@ -5387,7 +5387,7 @@
                 <a:latin typeface="Arial"/>
                 <a:ea typeface="Arial"/>
               </a:rPr>
-              <a:t>HBM이 보여 준 것은 기술의 차이가 아니라 시장을 보는 눈의 차이였습니다. 다음 수요는 이미 고객의 구매 기준 안에서 움직이고 있습니다.</a:t>
+              <a:t>HBM이 보여 준 것은 기술의 차이가 아니라 시장을 보는 눈의 차이였습니다. 그리고 그 수요는 지금 HBM에서 넘쳐 스토리지 계층으로 내려오고 있습니다.</a:t>
             </a:r>
           </a:p>
         </p:txBody>
@@ -5445,7 +5445,7 @@
         <p:spPr>
           <a:xfrm>
             <a:off x="722376" y="2560320"/>
-            <a:ext cx="6675120" cy="5870448"/>
+            <a:ext cx="6035040" cy="5870448"/>
           </a:xfrm>
           <a:prstGeom prst="rect">
             <a:avLst/>
@@ -5491,7 +5491,7 @@
         <p:spPr>
           <a:xfrm>
             <a:off x="722376" y="2560320"/>
-            <a:ext cx="6675120" cy="45720"/>
+            <a:ext cx="6035040" cy="45720"/>
           </a:xfrm>
           <a:prstGeom prst="rect">
             <a:avLst/>
@@ -5535,7 +5535,7 @@
         <p:spPr>
           <a:xfrm>
             <a:off x="941832" y="2706624"/>
-            <a:ext cx="6236208" cy="274320"/>
+            <a:ext cx="5596127" cy="274320"/>
           </a:xfrm>
           <a:prstGeom prst="rect">
             <a:avLst/>
@@ -5585,7 +5585,7 @@
         <p:spPr>
           <a:xfrm>
             <a:off x="941832" y="2980944"/>
-            <a:ext cx="6236208" cy="219456"/>
+            <a:ext cx="5596127" cy="219456"/>
           </a:xfrm>
           <a:prstGeom prst="rect">
             <a:avLst/>
@@ -5625,7 +5625,7 @@
         <p:spPr>
           <a:xfrm>
             <a:off x="1929384" y="4315968"/>
-            <a:ext cx="5120640" cy="27432"/>
+            <a:ext cx="4480559" cy="27432"/>
           </a:xfrm>
           <a:prstGeom prst="rect">
             <a:avLst/>
@@ -5709,7 +5709,7 @@
         <p:spPr>
           <a:xfrm>
             <a:off x="1929384" y="4937760"/>
-            <a:ext cx="5120640" cy="27432"/>
+            <a:ext cx="4480559" cy="27432"/>
           </a:xfrm>
           <a:prstGeom prst="rect">
             <a:avLst/>
@@ -5832,7 +5832,7 @@
         </p:nvSpPr>
         <p:spPr>
           <a:xfrm>
-            <a:off x="3069694" y="6089904"/>
+            <a:off x="2881435" y="6089904"/>
             <a:ext cx="731520" cy="182880"/>
           </a:xfrm>
           <a:prstGeom prst="rect">
@@ -5872,7 +5872,7 @@
         </p:nvSpPr>
         <p:spPr>
           <a:xfrm>
-            <a:off x="4575765" y="6089904"/>
+            <a:off x="4199247" y="6089904"/>
             <a:ext cx="731520" cy="182880"/>
           </a:xfrm>
           <a:prstGeom prst="rect">
@@ -5912,7 +5912,7 @@
         </p:nvSpPr>
         <p:spPr>
           <a:xfrm>
-            <a:off x="6081835" y="6089904"/>
+            <a:off x="5517059" y="6089904"/>
             <a:ext cx="731520" cy="182880"/>
           </a:xfrm>
           <a:prstGeom prst="rect">
@@ -5952,7 +5952,7 @@
         </p:nvSpPr>
         <p:spPr>
           <a:xfrm>
-            <a:off x="2185953" y="4247388"/>
+            <a:off x="2143595" y="4247388"/>
             <a:ext cx="164592" cy="164592"/>
           </a:xfrm>
           <a:prstGeom prst="ellipse">
@@ -5996,7 +5996,7 @@
         </p:nvSpPr>
         <p:spPr>
           <a:xfrm>
-            <a:off x="2260934" y="4041648"/>
+            <a:off x="2218576" y="4041648"/>
             <a:ext cx="14630" cy="219456"/>
           </a:xfrm>
           <a:prstGeom prst="rect">
@@ -6040,7 +6040,7 @@
         </p:nvSpPr>
         <p:spPr>
           <a:xfrm>
-            <a:off x="1390425" y="3511296"/>
+            <a:off x="1348067" y="3511296"/>
             <a:ext cx="1755648" cy="512064"/>
           </a:xfrm>
           <a:prstGeom prst="rect">
@@ -6097,7 +6097,7 @@
         </p:nvSpPr>
         <p:spPr>
           <a:xfrm>
-            <a:off x="5235746" y="4247388"/>
+            <a:off x="4812164" y="4247388"/>
             <a:ext cx="164592" cy="164592"/>
           </a:xfrm>
           <a:prstGeom prst="ellipse">
@@ -6141,7 +6141,7 @@
         </p:nvSpPr>
         <p:spPr>
           <a:xfrm>
-            <a:off x="5310727" y="4041648"/>
+            <a:off x="4887145" y="4041648"/>
             <a:ext cx="14630" cy="219456"/>
           </a:xfrm>
           <a:prstGeom prst="rect">
@@ -6185,7 +6185,7 @@
         </p:nvSpPr>
         <p:spPr>
           <a:xfrm>
-            <a:off x="4440218" y="2980944"/>
+            <a:off x="4016636" y="2980944"/>
             <a:ext cx="1755648" cy="512064"/>
           </a:xfrm>
           <a:prstGeom prst="rect">
@@ -6259,7 +6259,7 @@
         </p:nvSpPr>
         <p:spPr>
           <a:xfrm>
-            <a:off x="6553558" y="4247388"/>
+            <a:off x="5965249" y="4247388"/>
             <a:ext cx="164592" cy="164592"/>
           </a:xfrm>
           <a:prstGeom prst="ellipse">
@@ -6303,7 +6303,7 @@
         </p:nvSpPr>
         <p:spPr>
           <a:xfrm>
-            <a:off x="6628539" y="4041648"/>
+            <a:off x="6040230" y="4041648"/>
             <a:ext cx="14630" cy="219456"/>
           </a:xfrm>
           <a:prstGeom prst="rect">
@@ -6347,7 +6347,7 @@
         </p:nvSpPr>
         <p:spPr>
           <a:xfrm>
-            <a:off x="5367528" y="3511296"/>
+            <a:off x="4727448" y="3511296"/>
             <a:ext cx="1755648" cy="512064"/>
           </a:xfrm>
           <a:prstGeom prst="rect">
@@ -6421,7 +6421,7 @@
         </p:nvSpPr>
         <p:spPr>
           <a:xfrm>
-            <a:off x="4181497" y="4869180"/>
+            <a:off x="3889696" y="4869180"/>
             <a:ext cx="164592" cy="164592"/>
           </a:xfrm>
           <a:prstGeom prst="ellipse">
@@ -6467,7 +6467,7 @@
         </p:nvSpPr>
         <p:spPr>
           <a:xfrm>
-            <a:off x="4256478" y="5029200"/>
+            <a:off x="3964677" y="5029200"/>
             <a:ext cx="14630" cy="182880"/>
           </a:xfrm>
           <a:prstGeom prst="rect">
@@ -6511,7 +6511,7 @@
         </p:nvSpPr>
         <p:spPr>
           <a:xfrm>
-            <a:off x="3385969" y="5230368"/>
+            <a:off x="3094168" y="5230368"/>
             <a:ext cx="1755648" cy="512064"/>
           </a:xfrm>
           <a:prstGeom prst="rect">
@@ -6585,7 +6585,7 @@
         </p:nvSpPr>
         <p:spPr>
           <a:xfrm>
-            <a:off x="6101737" y="4869180"/>
+            <a:off x="5569906" y="4869180"/>
             <a:ext cx="164592" cy="164592"/>
           </a:xfrm>
           <a:prstGeom prst="ellipse">
@@ -6631,7 +6631,7 @@
         </p:nvSpPr>
         <p:spPr>
           <a:xfrm>
-            <a:off x="6176718" y="5029200"/>
+            <a:off x="5644887" y="5029200"/>
             <a:ext cx="14630" cy="182880"/>
           </a:xfrm>
           <a:prstGeom prst="rect">
@@ -6675,7 +6675,7 @@
         </p:nvSpPr>
         <p:spPr>
           <a:xfrm>
-            <a:off x="5306209" y="5760720"/>
+            <a:off x="4727448" y="5760720"/>
             <a:ext cx="1755648" cy="512064"/>
           </a:xfrm>
           <a:prstGeom prst="rect">
@@ -6732,7 +6732,7 @@
         </p:nvSpPr>
         <p:spPr>
           <a:xfrm>
-            <a:off x="6628862" y="4869180"/>
+            <a:off x="6031140" y="4869180"/>
             <a:ext cx="164592" cy="164592"/>
           </a:xfrm>
           <a:prstGeom prst="ellipse">
@@ -6778,7 +6778,7 @@
         </p:nvSpPr>
         <p:spPr>
           <a:xfrm>
-            <a:off x="6703842" y="5029200"/>
+            <a:off x="6106121" y="5029200"/>
             <a:ext cx="14630" cy="182880"/>
           </a:xfrm>
           <a:prstGeom prst="rect">
@@ -6822,7 +6822,7 @@
         </p:nvSpPr>
         <p:spPr>
           <a:xfrm>
-            <a:off x="5367528" y="5230368"/>
+            <a:off x="4727448" y="5230368"/>
             <a:ext cx="1755648" cy="512064"/>
           </a:xfrm>
           <a:prstGeom prst="rect">
@@ -6896,7 +6896,7 @@
         </p:nvSpPr>
         <p:spPr>
           <a:xfrm>
-            <a:off x="2004687" y="4480559"/>
+            <a:off x="1995274" y="4480559"/>
             <a:ext cx="3108960" cy="365760"/>
           </a:xfrm>
           <a:prstGeom prst="rect">
@@ -6954,7 +6954,7 @@
         <p:spPr>
           <a:xfrm>
             <a:off x="996696" y="6327648"/>
-            <a:ext cx="6126480" cy="786384"/>
+            <a:ext cx="5486400" cy="786384"/>
           </a:xfrm>
           <a:prstGeom prst="rect">
             <a:avLst/>
@@ -6998,7 +6998,7 @@
         <p:spPr>
           <a:xfrm>
             <a:off x="1234440" y="6419088"/>
-            <a:ext cx="5650992" cy="274320"/>
+            <a:ext cx="5010912" cy="274320"/>
           </a:xfrm>
           <a:prstGeom prst="rect">
             <a:avLst/>
@@ -7038,7 +7038,7 @@
         <p:spPr>
           <a:xfrm>
             <a:off x="1234440" y="6729984"/>
-            <a:ext cx="5650992" cy="292608"/>
+            <a:ext cx="5010912" cy="292608"/>
           </a:xfrm>
           <a:prstGeom prst="rect">
             <a:avLst/>
@@ -7078,7 +7078,7 @@
         <p:spPr>
           <a:xfrm>
             <a:off x="996696" y="7260336"/>
-            <a:ext cx="6126480" cy="219456"/>
+            <a:ext cx="5486400" cy="219456"/>
           </a:xfrm>
           <a:prstGeom prst="rect">
             <a:avLst/>
@@ -7118,7 +7118,7 @@
         <p:spPr>
           <a:xfrm>
             <a:off x="996696" y="7516367"/>
-            <a:ext cx="1956816" cy="566928"/>
+            <a:ext cx="1743455" cy="566928"/>
           </a:xfrm>
           <a:prstGeom prst="rect">
             <a:avLst/>
@@ -7164,7 +7164,7 @@
         <p:spPr>
           <a:xfrm>
             <a:off x="1124712" y="7552944"/>
-            <a:ext cx="1700784" cy="201168"/>
+            <a:ext cx="1487423" cy="201168"/>
           </a:xfrm>
           <a:prstGeom prst="rect">
             <a:avLst/>
@@ -7204,7 +7204,7 @@
         <p:spPr>
           <a:xfrm>
             <a:off x="1124712" y="7754112"/>
-            <a:ext cx="1700784" cy="310896"/>
+            <a:ext cx="1487423" cy="310896"/>
           </a:xfrm>
           <a:prstGeom prst="rect">
             <a:avLst/>
@@ -7243,8 +7243,8 @@
         </p:nvSpPr>
         <p:spPr>
           <a:xfrm>
-            <a:off x="3081528" y="7516367"/>
-            <a:ext cx="1956816" cy="566928"/>
+            <a:off x="2868168" y="7516367"/>
+            <a:ext cx="1743455" cy="566928"/>
           </a:xfrm>
           <a:prstGeom prst="rect">
             <a:avLst/>
@@ -7289,8 +7289,8 @@
         </p:nvSpPr>
         <p:spPr>
           <a:xfrm>
-            <a:off x="3209544" y="7552944"/>
-            <a:ext cx="1700784" cy="201168"/>
+            <a:off x="2996184" y="7552944"/>
+            <a:ext cx="1487423" cy="201168"/>
           </a:xfrm>
           <a:prstGeom prst="rect">
             <a:avLst/>
@@ -7329,8 +7329,8 @@
         </p:nvSpPr>
         <p:spPr>
           <a:xfrm>
-            <a:off x="3209544" y="7754112"/>
-            <a:ext cx="1700784" cy="310896"/>
+            <a:off x="2996184" y="7754112"/>
+            <a:ext cx="1487423" cy="310896"/>
           </a:xfrm>
           <a:prstGeom prst="rect">
             <a:avLst/>
@@ -7369,8 +7369,8 @@
         </p:nvSpPr>
         <p:spPr>
           <a:xfrm>
-            <a:off x="5166360" y="7516367"/>
-            <a:ext cx="1956816" cy="566928"/>
+            <a:off x="4739639" y="7516367"/>
+            <a:ext cx="1743455" cy="566928"/>
           </a:xfrm>
           <a:prstGeom prst="rect">
             <a:avLst/>
@@ -7415,8 +7415,8 @@
         </p:nvSpPr>
         <p:spPr>
           <a:xfrm>
-            <a:off x="5294376" y="7552944"/>
-            <a:ext cx="1700784" cy="201168"/>
+            <a:off x="4867655" y="7552944"/>
+            <a:ext cx="1487423" cy="201168"/>
           </a:xfrm>
           <a:prstGeom prst="rect">
             <a:avLst/>
@@ -7455,8 +7455,8 @@
         </p:nvSpPr>
         <p:spPr>
           <a:xfrm>
-            <a:off x="5294376" y="7754112"/>
-            <a:ext cx="1700784" cy="310896"/>
+            <a:off x="4867655" y="7754112"/>
+            <a:ext cx="1487423" cy="310896"/>
           </a:xfrm>
           <a:prstGeom prst="rect">
             <a:avLst/>
@@ -7496,7 +7496,7 @@
         <p:spPr>
           <a:xfrm>
             <a:off x="996696" y="8156448"/>
-            <a:ext cx="6126480" cy="219456"/>
+            <a:ext cx="5486400" cy="219456"/>
           </a:xfrm>
           <a:prstGeom prst="rect">
             <a:avLst/>
@@ -7535,8 +7535,8 @@
         </p:nvSpPr>
         <p:spPr>
           <a:xfrm>
-            <a:off x="7616952" y="2560320"/>
-            <a:ext cx="5029200" cy="5870448"/>
+            <a:off x="6976872" y="2560320"/>
+            <a:ext cx="5760720" cy="5870448"/>
           </a:xfrm>
           <a:prstGeom prst="rect">
             <a:avLst/>
@@ -7581,8 +7581,8 @@
         </p:nvSpPr>
         <p:spPr>
           <a:xfrm>
-            <a:off x="7616952" y="2560320"/>
-            <a:ext cx="5029200" cy="45720"/>
+            <a:off x="6976872" y="2560320"/>
+            <a:ext cx="5760720" cy="45720"/>
           </a:xfrm>
           <a:prstGeom prst="rect">
             <a:avLst/>
@@ -7625,8 +7625,8 @@
         </p:nvSpPr>
         <p:spPr>
           <a:xfrm>
-            <a:off x="7836408" y="2706624"/>
-            <a:ext cx="4590288" cy="274320"/>
+            <a:off x="7196328" y="2706624"/>
+            <a:ext cx="5321808" cy="274320"/>
           </a:xfrm>
           <a:prstGeom prst="rect">
             <a:avLst/>
@@ -7662,7 +7662,7 @@
                 <a:latin typeface="Arial"/>
                 <a:ea typeface="Arial"/>
               </a:rPr>
-              <a:t>지금 · 구매 기준의 이동</a:t>
+              <a:t>지금 · 같은 수요가 스토리지로</a:t>
             </a:r>
           </a:p>
         </p:txBody>
@@ -7675,8 +7675,8 @@
         </p:nvSpPr>
         <p:spPr>
           <a:xfrm>
-            <a:off x="7836408" y="2980944"/>
-            <a:ext cx="4590288" cy="219456"/>
+            <a:off x="7196328" y="2980944"/>
+            <a:ext cx="5321808" cy="219456"/>
           </a:xfrm>
           <a:prstGeom prst="rect">
             <a:avLst/>
@@ -7702,21 +7702,61 @@
                 <a:latin typeface="Arial"/>
                 <a:ea typeface="Arial"/>
               </a:rPr>
-              <a:t>고객이 무엇으로 고르는가</a:t>
-            </a:r>
-          </a:p>
-        </p:txBody>
-      </p:sp>
-      <p:sp>
-        <p:nvSpPr>
-          <p:cNvPr id="85" name="Rectangle 84"/>
-          <p:cNvSpPr/>
-          <p:nvPr/>
-        </p:nvSpPr>
-        <p:spPr>
-          <a:xfrm>
-            <a:off x="7891272" y="3346703"/>
-            <a:ext cx="4480560" cy="859536"/>
+              <a:t>HBM에서 넘친 것이 NAND로 내려온다</a:t>
+            </a:r>
+          </a:p>
+        </p:txBody>
+      </p:sp>
+      <p:sp>
+        <p:nvSpPr>
+          <p:cNvPr id="85" name="TextBox 84"/>
+          <p:cNvSpPr txBox="1"/>
+          <p:nvPr/>
+        </p:nvSpPr>
+        <p:spPr>
+          <a:xfrm>
+            <a:off x="7251192" y="3310127"/>
+            <a:ext cx="5212080" cy="182880"/>
+          </a:xfrm>
+          <a:prstGeom prst="rect">
+            <a:avLst/>
+          </a:prstGeom>
+          <a:noFill/>
+        </p:spPr>
+        <p:txBody>
+          <a:bodyPr wrap="square" anchor="t" lIns="0" rIns="0" tIns="0" bIns="0">
+            <a:spAutoFit/>
+          </a:bodyPr>
+          <a:lstStyle/>
+          <a:p>
+            <a:pPr algn="l">
+              <a:lnSpc>
+                <a:spcPct val="112000"/>
+              </a:lnSpc>
+            </a:pPr>
+            <a:r>
+              <a:rPr sz="950" b="0">
+                <a:solidFill>
+                  <a:srgbClr val="8A8A8A"/>
+                </a:solidFill>
+                <a:latin typeface="Arial"/>
+                <a:ea typeface="Arial"/>
+              </a:rPr>
+              <a:t>구매 기준은 이렇게 움직여 왔습니다</a:t>
+            </a:r>
+          </a:p>
+        </p:txBody>
+      </p:sp>
+      <p:sp>
+        <p:nvSpPr>
+          <p:cNvPr id="86" name="Rectangle 85"/>
+          <p:cNvSpPr/>
+          <p:nvPr/>
+        </p:nvSpPr>
+        <p:spPr>
+          <a:xfrm>
+            <a:off x="7251192" y="3511296"/>
+            <a:ext cx="1591056" cy="640080"/>
           </a:xfrm>
           <a:prstGeom prst="rect">
             <a:avLst/>
@@ -7755,14 +7795,14 @@
       </p:sp>
       <p:sp>
         <p:nvSpPr>
-          <p:cNvPr id="86" name="TextBox 85"/>
-          <p:cNvSpPr txBox="1"/>
-          <p:nvPr/>
-        </p:nvSpPr>
-        <p:spPr>
-          <a:xfrm>
-            <a:off x="8074152" y="3419856"/>
-            <a:ext cx="4114800" cy="182880"/>
+          <p:cNvPr id="87" name="TextBox 86"/>
+          <p:cNvSpPr txBox="1"/>
+          <p:nvPr/>
+        </p:nvSpPr>
+        <p:spPr>
+          <a:xfrm>
+            <a:off x="7324344" y="3566160"/>
+            <a:ext cx="1444752" cy="164592"/>
           </a:xfrm>
           <a:prstGeom prst="rect">
             <a:avLst/>
@@ -7775,34 +7815,34 @@
           </a:bodyPr>
           <a:lstStyle/>
           <a:p>
-            <a:pPr algn="l">
+            <a:pPr algn="ctr">
               <a:lnSpc>
                 <a:spcPct val="112000"/>
               </a:lnSpc>
             </a:pPr>
             <a:r>
-              <a:rPr sz="950" b="0">
+              <a:rPr sz="875" b="0">
                 <a:solidFill>
                   <a:srgbClr val="8A8A8A"/>
                 </a:solidFill>
                 <a:latin typeface="Arial"/>
                 <a:ea typeface="Arial"/>
               </a:rPr>
-              <a:t>2008 ~ 2012</a:t>
-            </a:r>
-          </a:p>
-        </p:txBody>
-      </p:sp>
-      <p:sp>
-        <p:nvSpPr>
-          <p:cNvPr id="87" name="TextBox 86"/>
-          <p:cNvSpPr txBox="1"/>
-          <p:nvPr/>
-        </p:nvSpPr>
-        <p:spPr>
-          <a:xfrm>
-            <a:off x="8074152" y="3602735"/>
-            <a:ext cx="4114800" cy="274320"/>
+              <a:t>2008~12</a:t>
+            </a:r>
+          </a:p>
+        </p:txBody>
+      </p:sp>
+      <p:sp>
+        <p:nvSpPr>
+          <p:cNvPr id="88" name="TextBox 87"/>
+          <p:cNvSpPr txBox="1"/>
+          <p:nvPr/>
+        </p:nvSpPr>
+        <p:spPr>
+          <a:xfrm>
+            <a:off x="7306055" y="3739896"/>
+            <a:ext cx="1481328" cy="347472"/>
           </a:xfrm>
           <a:prstGeom prst="rect">
             <a:avLst/>
@@ -7815,13 +7855,13 @@
           </a:bodyPr>
           <a:lstStyle/>
           <a:p>
-            <a:pPr algn="l">
-              <a:lnSpc>
-                <a:spcPct val="112000"/>
-              </a:lnSpc>
-            </a:pPr>
-            <a:r>
-              <a:rPr sz="1400" b="1">
+            <a:pPr algn="ctr">
+              <a:lnSpc>
+                <a:spcPct val="100000"/>
+              </a:lnSpc>
+            </a:pPr>
+            <a:r>
+              <a:rPr sz="1050" b="1">
                 <a:solidFill>
                   <a:srgbClr val="1A1A1A"/>
                 </a:solidFill>
@@ -7835,56 +7875,16 @@
       </p:sp>
       <p:sp>
         <p:nvSpPr>
-          <p:cNvPr id="88" name="TextBox 87"/>
-          <p:cNvSpPr txBox="1"/>
-          <p:nvPr/>
-        </p:nvSpPr>
-        <p:spPr>
-          <a:xfrm>
-            <a:off x="8074152" y="3895344"/>
-            <a:ext cx="4114800" cy="237744"/>
-          </a:xfrm>
-          <a:prstGeom prst="rect">
-            <a:avLst/>
-          </a:prstGeom>
-          <a:noFill/>
-        </p:spPr>
-        <p:txBody>
-          <a:bodyPr wrap="square" anchor="t" lIns="0" rIns="0" tIns="0" bIns="0">
-            <a:spAutoFit/>
-          </a:bodyPr>
-          <a:lstStyle/>
-          <a:p>
-            <a:pPr algn="l">
-              <a:lnSpc>
-                <a:spcPct val="112000"/>
-              </a:lnSpc>
-            </a:pPr>
-            <a:r>
-              <a:rPr sz="950" b="0">
-                <a:solidFill>
-                  <a:srgbClr val="555555"/>
-                </a:solidFill>
-                <a:latin typeface="Arial"/>
-                <a:ea typeface="Arial"/>
-              </a:rPr>
-              <a:t>IOPS · 대역폭</a:t>
-            </a:r>
-          </a:p>
-        </p:txBody>
-      </p:sp>
-      <p:sp>
-        <p:nvSpPr>
-          <p:cNvPr id="89" name="Down Arrow 88"/>
-          <p:cNvSpPr/>
-          <p:nvPr/>
-        </p:nvSpPr>
-        <p:spPr>
-          <a:xfrm>
-            <a:off x="10040112" y="4187952"/>
-            <a:ext cx="182880" cy="146304"/>
-          </a:xfrm>
-          <a:prstGeom prst="downArrow">
+          <p:cNvPr id="89" name="Right Arrow 88"/>
+          <p:cNvSpPr/>
+          <p:nvPr/>
+        </p:nvSpPr>
+        <p:spPr>
+          <a:xfrm>
+            <a:off x="8878824" y="3749039"/>
+            <a:ext cx="146303" cy="164592"/>
+          </a:xfrm>
+          <a:prstGeom prst="rightArrow">
             <a:avLst/>
           </a:prstGeom>
           <a:solidFill>
@@ -7925,8 +7925,8 @@
         </p:nvSpPr>
         <p:spPr>
           <a:xfrm>
-            <a:off x="7891272" y="4315968"/>
-            <a:ext cx="4480560" cy="859536"/>
+            <a:off x="9061704" y="3511296"/>
+            <a:ext cx="1591056" cy="640080"/>
           </a:xfrm>
           <a:prstGeom prst="rect">
             <a:avLst/>
@@ -7971,8 +7971,8 @@
         </p:nvSpPr>
         <p:spPr>
           <a:xfrm>
-            <a:off x="8074152" y="4389120"/>
-            <a:ext cx="4114800" cy="182880"/>
+            <a:off x="9134856" y="3566160"/>
+            <a:ext cx="1444752" cy="164592"/>
           </a:xfrm>
           <a:prstGeom prst="rect">
             <a:avLst/>
@@ -7985,20 +7985,20 @@
           </a:bodyPr>
           <a:lstStyle/>
           <a:p>
-            <a:pPr algn="l">
+            <a:pPr algn="ctr">
               <a:lnSpc>
                 <a:spcPct val="112000"/>
               </a:lnSpc>
             </a:pPr>
             <a:r>
-              <a:rPr sz="950" b="0">
+              <a:rPr sz="875" b="0">
                 <a:solidFill>
                   <a:srgbClr val="8A8A8A"/>
                 </a:solidFill>
                 <a:latin typeface="Arial"/>
                 <a:ea typeface="Arial"/>
               </a:rPr>
-              <a:t>2012 ~ 2021</a:t>
+              <a:t>2012~21</a:t>
             </a:r>
           </a:p>
         </p:txBody>
@@ -8011,8 +8011,8 @@
         </p:nvSpPr>
         <p:spPr>
           <a:xfrm>
-            <a:off x="8074152" y="4572000"/>
-            <a:ext cx="4114800" cy="274320"/>
+            <a:off x="9116568" y="3739896"/>
+            <a:ext cx="1481328" cy="347472"/>
           </a:xfrm>
           <a:prstGeom prst="rect">
             <a:avLst/>
@@ -8025,13 +8025,13 @@
           </a:bodyPr>
           <a:lstStyle/>
           <a:p>
-            <a:pPr algn="l">
-              <a:lnSpc>
-                <a:spcPct val="112000"/>
-              </a:lnSpc>
-            </a:pPr>
-            <a:r>
-              <a:rPr sz="1400" b="1">
+            <a:pPr algn="ctr">
+              <a:lnSpc>
+                <a:spcPct val="100000"/>
+              </a:lnSpc>
+            </a:pPr>
+            <a:r>
+              <a:rPr sz="1050" b="1">
                 <a:solidFill>
                   <a:srgbClr val="1A1A1A"/>
                 </a:solidFill>
@@ -8045,56 +8045,16 @@
       </p:sp>
       <p:sp>
         <p:nvSpPr>
-          <p:cNvPr id="93" name="TextBox 92"/>
-          <p:cNvSpPr txBox="1"/>
-          <p:nvPr/>
-        </p:nvSpPr>
-        <p:spPr>
-          <a:xfrm>
-            <a:off x="8074152" y="4864607"/>
-            <a:ext cx="4114800" cy="237744"/>
-          </a:xfrm>
-          <a:prstGeom prst="rect">
-            <a:avLst/>
-          </a:prstGeom>
-          <a:noFill/>
-        </p:spPr>
-        <p:txBody>
-          <a:bodyPr wrap="square" anchor="t" lIns="0" rIns="0" tIns="0" bIns="0">
-            <a:spAutoFit/>
-          </a:bodyPr>
-          <a:lstStyle/>
-          <a:p>
-            <a:pPr algn="l">
-              <a:lnSpc>
-                <a:spcPct val="112000"/>
-              </a:lnSpc>
-            </a:pPr>
-            <a:r>
-              <a:rPr sz="950" b="0">
-                <a:solidFill>
-                  <a:srgbClr val="555555"/>
-                </a:solidFill>
-                <a:latin typeface="Arial"/>
-                <a:ea typeface="Arial"/>
-              </a:rPr>
-              <a:t>99.9999% 지연이 조달 요건으로</a:t>
-            </a:r>
-          </a:p>
-        </p:txBody>
-      </p:sp>
-      <p:sp>
-        <p:nvSpPr>
-          <p:cNvPr id="94" name="Down Arrow 93"/>
-          <p:cNvSpPr/>
-          <p:nvPr/>
-        </p:nvSpPr>
-        <p:spPr>
-          <a:xfrm>
-            <a:off x="10040112" y="5157216"/>
-            <a:ext cx="182880" cy="146304"/>
-          </a:xfrm>
-          <a:prstGeom prst="downArrow">
+          <p:cNvPr id="93" name="Right Arrow 92"/>
+          <p:cNvSpPr/>
+          <p:nvPr/>
+        </p:nvSpPr>
+        <p:spPr>
+          <a:xfrm>
+            <a:off x="10689336" y="3749039"/>
+            <a:ext cx="146303" cy="164592"/>
+          </a:xfrm>
+          <a:prstGeom prst="rightArrow">
             <a:avLst/>
           </a:prstGeom>
           <a:solidFill>
@@ -8129,14 +8089,14 @@
       </p:sp>
       <p:sp>
         <p:nvSpPr>
-          <p:cNvPr id="95" name="Rectangle 94"/>
-          <p:cNvSpPr/>
-          <p:nvPr/>
-        </p:nvSpPr>
-        <p:spPr>
-          <a:xfrm>
-            <a:off x="7891272" y="5285231"/>
-            <a:ext cx="4480560" cy="859536"/>
+          <p:cNvPr id="94" name="Rectangle 93"/>
+          <p:cNvSpPr/>
+          <p:nvPr/>
+        </p:nvSpPr>
+        <p:spPr>
+          <a:xfrm>
+            <a:off x="10872216" y="3511296"/>
+            <a:ext cx="1591056" cy="640080"/>
           </a:xfrm>
           <a:prstGeom prst="rect">
             <a:avLst/>
@@ -8173,14 +8133,54 @@
       </p:sp>
       <p:sp>
         <p:nvSpPr>
+          <p:cNvPr id="95" name="TextBox 94"/>
+          <p:cNvSpPr txBox="1"/>
+          <p:nvPr/>
+        </p:nvSpPr>
+        <p:spPr>
+          <a:xfrm>
+            <a:off x="10945368" y="3566160"/>
+            <a:ext cx="1444752" cy="164592"/>
+          </a:xfrm>
+          <a:prstGeom prst="rect">
+            <a:avLst/>
+          </a:prstGeom>
+          <a:noFill/>
+        </p:spPr>
+        <p:txBody>
+          <a:bodyPr wrap="square" anchor="t" lIns="0" rIns="0" tIns="0" bIns="0">
+            <a:spAutoFit/>
+          </a:bodyPr>
+          <a:lstStyle/>
+          <a:p>
+            <a:pPr algn="ctr">
+              <a:lnSpc>
+                <a:spcPct val="112000"/>
+              </a:lnSpc>
+            </a:pPr>
+            <a:r>
+              <a:rPr sz="875" b="0">
+                <a:solidFill>
+                  <a:srgbClr val="AAB8E8"/>
+                </a:solidFill>
+                <a:latin typeface="Arial"/>
+                <a:ea typeface="Arial"/>
+              </a:rPr>
+              <a:t>2022~26</a:t>
+            </a:r>
+          </a:p>
+        </p:txBody>
+      </p:sp>
+      <p:sp>
+        <p:nvSpPr>
           <p:cNvPr id="96" name="TextBox 95"/>
           <p:cNvSpPr txBox="1"/>
           <p:nvPr/>
         </p:nvSpPr>
         <p:spPr>
           <a:xfrm>
-            <a:off x="8074152" y="5358383"/>
-            <a:ext cx="4114800" cy="182880"/>
+            <a:off x="10927080" y="3739896"/>
+            <a:ext cx="1481328" cy="347472"/>
           </a:xfrm>
           <a:prstGeom prst="rect">
             <a:avLst/>
@@ -8193,6 +8193,46 @@
           </a:bodyPr>
           <a:lstStyle/>
           <a:p>
+            <a:pPr algn="ctr">
+              <a:lnSpc>
+                <a:spcPct val="100000"/>
+              </a:lnSpc>
+            </a:pPr>
+            <a:r>
+              <a:rPr sz="1050" b="1">
+                <a:solidFill>
+                  <a:srgbClr val="FFFFFF"/>
+                </a:solidFill>
+                <a:latin typeface="Arial"/>
+                <a:ea typeface="Arial"/>
+              </a:rPr>
+              <a:t>밀도 · 전력 · 물량</a:t>
+            </a:r>
+          </a:p>
+        </p:txBody>
+      </p:sp>
+      <p:sp>
+        <p:nvSpPr>
+          <p:cNvPr id="97" name="TextBox 96"/>
+          <p:cNvSpPr txBox="1"/>
+          <p:nvPr/>
+        </p:nvSpPr>
+        <p:spPr>
+          <a:xfrm>
+            <a:off x="7251192" y="4297680"/>
+            <a:ext cx="5212080" cy="201168"/>
+          </a:xfrm>
+          <a:prstGeom prst="rect">
+            <a:avLst/>
+          </a:prstGeom>
+          <a:noFill/>
+        </p:spPr>
+        <p:txBody>
+          <a:bodyPr wrap="square" anchor="t" lIns="0" rIns="0" tIns="0" bIns="0">
+            <a:spAutoFit/>
+          </a:bodyPr>
+          <a:lstStyle/>
+          <a:p>
             <a:pPr algn="l">
               <a:lnSpc>
                 <a:spcPct val="112000"/>
@@ -8201,26 +8241,498 @@
             <a:r>
               <a:rPr sz="950" b="0">
                 <a:solidFill>
+                  <a:srgbClr val="8A8A8A"/>
+                </a:solidFill>
+                <a:latin typeface="Arial"/>
+                <a:ea typeface="Arial"/>
+              </a:rPr>
+              <a:t>그 위에 새 수요가 올라왔습니다   </a:t>
+            </a:r>
+            <a:r>
+              <a:rPr sz="1050" b="1">
+                <a:solidFill>
+                  <a:srgbClr val="1428A0"/>
+                </a:solidFill>
+                <a:latin typeface="Arial"/>
+                <a:ea typeface="Arial"/>
+              </a:rPr>
+              <a:t>AI 메모리 수요가 HBM 밖으로 넘칩니다</a:t>
+            </a:r>
+          </a:p>
+        </p:txBody>
+      </p:sp>
+      <p:sp>
+        <p:nvSpPr>
+          <p:cNvPr id="98" name="Rectangle 97"/>
+          <p:cNvSpPr/>
+          <p:nvPr/>
+        </p:nvSpPr>
+        <p:spPr>
+          <a:xfrm>
+            <a:off x="7251192" y="4535424"/>
+            <a:ext cx="5212080" cy="512064"/>
+          </a:xfrm>
+          <a:prstGeom prst="rect">
+            <a:avLst/>
+          </a:prstGeom>
+          <a:solidFill>
+            <a:srgbClr val="1428A0"/>
+          </a:solidFill>
+          <a:ln>
+            <a:noFill/>
+          </a:ln>
+          <a:effectLst/>
+        </p:spPr>
+        <p:style>
+          <a:lnRef idx="1">
+            <a:schemeClr val="accent1"/>
+          </a:lnRef>
+          <a:fillRef idx="3">
+            <a:schemeClr val="accent1"/>
+          </a:fillRef>
+          <a:effectRef idx="2">
+            <a:schemeClr val="accent1"/>
+          </a:effectRef>
+          <a:fontRef idx="minor">
+            <a:schemeClr val="lt1"/>
+          </a:fontRef>
+        </p:style>
+        <p:txBody>
+          <a:bodyPr rtlCol="0" anchor="ctr"/>
+          <a:lstStyle/>
+          <a:p>
+            <a:pPr algn="ctr"/>
+          </a:p>
+        </p:txBody>
+      </p:sp>
+      <p:sp>
+        <p:nvSpPr>
+          <p:cNvPr id="99" name="Rectangle 98"/>
+          <p:cNvSpPr/>
+          <p:nvPr/>
+        </p:nvSpPr>
+        <p:spPr>
+          <a:xfrm>
+            <a:off x="7251192" y="4535424"/>
+            <a:ext cx="530352" cy="512064"/>
+          </a:xfrm>
+          <a:prstGeom prst="rect">
+            <a:avLst/>
+          </a:prstGeom>
+          <a:solidFill>
+            <a:srgbClr val="3C5AC8"/>
+          </a:solidFill>
+          <a:ln>
+            <a:noFill/>
+          </a:ln>
+          <a:effectLst/>
+        </p:spPr>
+        <p:style>
+          <a:lnRef idx="1">
+            <a:schemeClr val="accent1"/>
+          </a:lnRef>
+          <a:fillRef idx="3">
+            <a:schemeClr val="accent1"/>
+          </a:fillRef>
+          <a:effectRef idx="2">
+            <a:schemeClr val="accent1"/>
+          </a:effectRef>
+          <a:fontRef idx="minor">
+            <a:schemeClr val="lt1"/>
+          </a:fontRef>
+        </p:style>
+        <p:txBody>
+          <a:bodyPr rtlCol="0" anchor="ctr"/>
+          <a:lstStyle/>
+          <a:p>
+            <a:pPr algn="ctr"/>
+          </a:p>
+        </p:txBody>
+      </p:sp>
+      <p:sp>
+        <p:nvSpPr>
+          <p:cNvPr id="100" name="TextBox 99"/>
+          <p:cNvSpPr txBox="1"/>
+          <p:nvPr/>
+        </p:nvSpPr>
+        <p:spPr>
+          <a:xfrm>
+            <a:off x="7251192" y="4535424"/>
+            <a:ext cx="530352" cy="512064"/>
+          </a:xfrm>
+          <a:prstGeom prst="rect">
+            <a:avLst/>
+          </a:prstGeom>
+          <a:noFill/>
+        </p:spPr>
+        <p:txBody>
+          <a:bodyPr wrap="square" anchor="ctr" lIns="0" rIns="0" tIns="0" bIns="0">
+            <a:spAutoFit/>
+          </a:bodyPr>
+          <a:lstStyle/>
+          <a:p>
+            <a:pPr algn="ctr">
+              <a:lnSpc>
+                <a:spcPct val="112000"/>
+              </a:lnSpc>
+            </a:pPr>
+            <a:r>
+              <a:rPr sz="1125" b="1">
+                <a:solidFill>
+                  <a:srgbClr val="FFFFFF"/>
+                </a:solidFill>
+                <a:latin typeface="Arial"/>
+                <a:ea typeface="Arial"/>
+              </a:rPr>
+              <a:t>G1</a:t>
+            </a:r>
+          </a:p>
+        </p:txBody>
+      </p:sp>
+      <p:sp>
+        <p:nvSpPr>
+          <p:cNvPr id="101" name="TextBox 100"/>
+          <p:cNvSpPr txBox="1"/>
+          <p:nvPr/>
+        </p:nvSpPr>
+        <p:spPr>
+          <a:xfrm>
+            <a:off x="7909560" y="4599432"/>
+            <a:ext cx="1664208" cy="228600"/>
+          </a:xfrm>
+          <a:prstGeom prst="rect">
+            <a:avLst/>
+          </a:prstGeom>
+          <a:noFill/>
+        </p:spPr>
+        <p:txBody>
+          <a:bodyPr wrap="square" anchor="t" lIns="0" rIns="0" tIns="0" bIns="0">
+            <a:spAutoFit/>
+          </a:bodyPr>
+          <a:lstStyle/>
+          <a:p>
+            <a:pPr algn="l">
+              <a:lnSpc>
+                <a:spcPct val="112000"/>
+              </a:lnSpc>
+            </a:pPr>
+            <a:r>
+              <a:rPr sz="1275" b="1">
+                <a:solidFill>
+                  <a:srgbClr val="FFFFFF"/>
+                </a:solidFill>
+                <a:latin typeface="Arial"/>
+                <a:ea typeface="Arial"/>
+              </a:rPr>
+              <a:t>GPU HBM</a:t>
+            </a:r>
+          </a:p>
+        </p:txBody>
+      </p:sp>
+      <p:sp>
+        <p:nvSpPr>
+          <p:cNvPr id="102" name="TextBox 101"/>
+          <p:cNvSpPr txBox="1"/>
+          <p:nvPr/>
+        </p:nvSpPr>
+        <p:spPr>
+          <a:xfrm>
+            <a:off x="7909560" y="4828032"/>
+            <a:ext cx="1664208" cy="173736"/>
+          </a:xfrm>
+          <a:prstGeom prst="rect">
+            <a:avLst/>
+          </a:prstGeom>
+          <a:noFill/>
+        </p:spPr>
+        <p:txBody>
+          <a:bodyPr wrap="square" anchor="t" lIns="0" rIns="0" tIns="0" bIns="0">
+            <a:spAutoFit/>
+          </a:bodyPr>
+          <a:lstStyle/>
+          <a:p>
+            <a:pPr algn="l">
+              <a:lnSpc>
+                <a:spcPct val="112000"/>
+              </a:lnSpc>
+            </a:pPr>
+            <a:r>
+              <a:rPr sz="875" b="0">
+                <a:solidFill>
                   <a:srgbClr val="AAB8E8"/>
                 </a:solidFill>
                 <a:latin typeface="Arial"/>
                 <a:ea typeface="Arial"/>
               </a:rPr>
-              <a:t>2022 ~ 2026</a:t>
-            </a:r>
-          </a:p>
-        </p:txBody>
-      </p:sp>
-      <p:sp>
-        <p:nvSpPr>
-          <p:cNvPr id="97" name="TextBox 96"/>
-          <p:cNvSpPr txBox="1"/>
-          <p:nvPr/>
-        </p:nvSpPr>
-        <p:spPr>
-          <a:xfrm>
-            <a:off x="8074152" y="5541264"/>
-            <a:ext cx="4114800" cy="274320"/>
+              <a:t>용량이 고정된 계층</a:t>
+            </a:r>
+          </a:p>
+        </p:txBody>
+      </p:sp>
+      <p:sp>
+        <p:nvSpPr>
+          <p:cNvPr id="103" name="TextBox 102"/>
+          <p:cNvSpPr txBox="1"/>
+          <p:nvPr/>
+        </p:nvSpPr>
+        <p:spPr>
+          <a:xfrm>
+            <a:off x="9646920" y="4572000"/>
+            <a:ext cx="2688336" cy="438912"/>
+          </a:xfrm>
+          <a:prstGeom prst="rect">
+            <a:avLst/>
+          </a:prstGeom>
+          <a:noFill/>
+        </p:spPr>
+        <p:txBody>
+          <a:bodyPr wrap="square" anchor="ctr" lIns="0" rIns="0" tIns="0" bIns="0">
+            <a:spAutoFit/>
+          </a:bodyPr>
+          <a:lstStyle/>
+          <a:p>
+            <a:pPr algn="l">
+              <a:lnSpc>
+                <a:spcPct val="104000"/>
+              </a:lnSpc>
+            </a:pPr>
+            <a:r>
+              <a:rPr sz="950" b="0">
+                <a:solidFill>
+                  <a:srgbClr val="AAB8E8"/>
+                </a:solidFill>
+                <a:latin typeface="Arial"/>
+                <a:ea typeface="Arial"/>
+              </a:rPr>
+              <a:t>길어진 컨텍스트가 먼저 채웁니다</a:t>
+            </a:r>
+          </a:p>
+        </p:txBody>
+      </p:sp>
+      <p:sp>
+        <p:nvSpPr>
+          <p:cNvPr id="104" name="Down Arrow 103"/>
+          <p:cNvSpPr/>
+          <p:nvPr/>
+        </p:nvSpPr>
+        <p:spPr>
+          <a:xfrm>
+            <a:off x="7443216" y="5056631"/>
+            <a:ext cx="146304" cy="146304"/>
+          </a:xfrm>
+          <a:prstGeom prst="downArrow">
+            <a:avLst/>
+          </a:prstGeom>
+          <a:solidFill>
+            <a:srgbClr val="3C5AC8"/>
+          </a:solidFill>
+          <a:ln>
+            <a:noFill/>
+          </a:ln>
+          <a:effectLst/>
+        </p:spPr>
+        <p:style>
+          <a:lnRef idx="1">
+            <a:schemeClr val="accent1"/>
+          </a:lnRef>
+          <a:fillRef idx="3">
+            <a:schemeClr val="accent1"/>
+          </a:fillRef>
+          <a:effectRef idx="2">
+            <a:schemeClr val="accent1"/>
+          </a:effectRef>
+          <a:fontRef idx="minor">
+            <a:schemeClr val="lt1"/>
+          </a:fontRef>
+        </p:style>
+        <p:txBody>
+          <a:bodyPr rtlCol="0" anchor="ctr"/>
+          <a:lstStyle/>
+          <a:p>
+            <a:pPr algn="ctr"/>
+          </a:p>
+        </p:txBody>
+      </p:sp>
+      <p:sp>
+        <p:nvSpPr>
+          <p:cNvPr id="105" name="TextBox 104"/>
+          <p:cNvSpPr txBox="1"/>
+          <p:nvPr/>
+        </p:nvSpPr>
+        <p:spPr>
+          <a:xfrm>
+            <a:off x="7671816" y="5047488"/>
+            <a:ext cx="4700016" cy="164592"/>
+          </a:xfrm>
+          <a:prstGeom prst="rect">
+            <a:avLst/>
+          </a:prstGeom>
+          <a:noFill/>
+        </p:spPr>
+        <p:txBody>
+          <a:bodyPr wrap="square" anchor="ctr" lIns="0" rIns="0" tIns="0" bIns="0">
+            <a:spAutoFit/>
+          </a:bodyPr>
+          <a:lstStyle/>
+          <a:p>
+            <a:pPr algn="l">
+              <a:lnSpc>
+                <a:spcPct val="112000"/>
+              </a:lnSpc>
+            </a:pPr>
+            <a:r>
+              <a:rPr sz="900" b="1">
+                <a:solidFill>
+                  <a:srgbClr val="3C5AC8"/>
+                </a:solidFill>
+                <a:latin typeface="Arial"/>
+                <a:ea typeface="Arial"/>
+              </a:rPr>
+              <a:t>넘친다</a:t>
+            </a:r>
+          </a:p>
+        </p:txBody>
+      </p:sp>
+      <p:sp>
+        <p:nvSpPr>
+          <p:cNvPr id="106" name="Rectangle 105"/>
+          <p:cNvSpPr/>
+          <p:nvPr/>
+        </p:nvSpPr>
+        <p:spPr>
+          <a:xfrm>
+            <a:off x="7251192" y="5212080"/>
+            <a:ext cx="5212080" cy="512064"/>
+          </a:xfrm>
+          <a:prstGeom prst="rect">
+            <a:avLst/>
+          </a:prstGeom>
+          <a:solidFill>
+            <a:srgbClr val="F4F6FC"/>
+          </a:solidFill>
+          <a:ln w="9525">
+            <a:solidFill>
+              <a:srgbClr val="D9D9D9"/>
+            </a:solidFill>
+          </a:ln>
+          <a:effectLst/>
+        </p:spPr>
+        <p:style>
+          <a:lnRef idx="1">
+            <a:schemeClr val="accent1"/>
+          </a:lnRef>
+          <a:fillRef idx="3">
+            <a:schemeClr val="accent1"/>
+          </a:fillRef>
+          <a:effectRef idx="2">
+            <a:schemeClr val="accent1"/>
+          </a:effectRef>
+          <a:fontRef idx="minor">
+            <a:schemeClr val="lt1"/>
+          </a:fontRef>
+        </p:style>
+        <p:txBody>
+          <a:bodyPr rtlCol="0" anchor="ctr"/>
+          <a:lstStyle/>
+          <a:p>
+            <a:pPr algn="ctr"/>
+          </a:p>
+        </p:txBody>
+      </p:sp>
+      <p:sp>
+        <p:nvSpPr>
+          <p:cNvPr id="107" name="Rectangle 106"/>
+          <p:cNvSpPr/>
+          <p:nvPr/>
+        </p:nvSpPr>
+        <p:spPr>
+          <a:xfrm>
+            <a:off x="7251192" y="5212080"/>
+            <a:ext cx="530352" cy="512064"/>
+          </a:xfrm>
+          <a:prstGeom prst="rect">
+            <a:avLst/>
+          </a:prstGeom>
+          <a:solidFill>
+            <a:srgbClr val="AAB8E8"/>
+          </a:solidFill>
+          <a:ln>
+            <a:noFill/>
+          </a:ln>
+          <a:effectLst/>
+        </p:spPr>
+        <p:style>
+          <a:lnRef idx="1">
+            <a:schemeClr val="accent1"/>
+          </a:lnRef>
+          <a:fillRef idx="3">
+            <a:schemeClr val="accent1"/>
+          </a:fillRef>
+          <a:effectRef idx="2">
+            <a:schemeClr val="accent1"/>
+          </a:effectRef>
+          <a:fontRef idx="minor">
+            <a:schemeClr val="lt1"/>
+          </a:fontRef>
+        </p:style>
+        <p:txBody>
+          <a:bodyPr rtlCol="0" anchor="ctr"/>
+          <a:lstStyle/>
+          <a:p>
+            <a:pPr algn="ctr"/>
+          </a:p>
+        </p:txBody>
+      </p:sp>
+      <p:sp>
+        <p:nvSpPr>
+          <p:cNvPr id="108" name="TextBox 107"/>
+          <p:cNvSpPr txBox="1"/>
+          <p:nvPr/>
+        </p:nvSpPr>
+        <p:spPr>
+          <a:xfrm>
+            <a:off x="7251192" y="5212080"/>
+            <a:ext cx="530352" cy="512064"/>
+          </a:xfrm>
+          <a:prstGeom prst="rect">
+            <a:avLst/>
+          </a:prstGeom>
+          <a:noFill/>
+        </p:spPr>
+        <p:txBody>
+          <a:bodyPr wrap="square" anchor="ctr" lIns="0" rIns="0" tIns="0" bIns="0">
+            <a:spAutoFit/>
+          </a:bodyPr>
+          <a:lstStyle/>
+          <a:p>
+            <a:pPr algn="ctr">
+              <a:lnSpc>
+                <a:spcPct val="112000"/>
+              </a:lnSpc>
+            </a:pPr>
+            <a:r>
+              <a:rPr sz="1125" b="1">
+                <a:solidFill>
+                  <a:srgbClr val="FFFFFF"/>
+                </a:solidFill>
+                <a:latin typeface="Arial"/>
+                <a:ea typeface="Arial"/>
+              </a:rPr>
+              <a:t>G2</a:t>
+            </a:r>
+          </a:p>
+        </p:txBody>
+      </p:sp>
+      <p:sp>
+        <p:nvSpPr>
+          <p:cNvPr id="109" name="TextBox 108"/>
+          <p:cNvSpPr txBox="1"/>
+          <p:nvPr/>
+        </p:nvSpPr>
+        <p:spPr>
+          <a:xfrm>
+            <a:off x="7909560" y="5276088"/>
+            <a:ext cx="1664208" cy="228600"/>
           </a:xfrm>
           <a:prstGeom prst="rect">
             <a:avLst/>
@@ -8239,28 +8751,322 @@
               </a:lnSpc>
             </a:pPr>
             <a:r>
-              <a:rPr sz="1400" b="1">
+              <a:rPr sz="1275" b="1">
+                <a:solidFill>
+                  <a:srgbClr val="1A1A1A"/>
+                </a:solidFill>
+                <a:latin typeface="Arial"/>
+                <a:ea typeface="Arial"/>
+              </a:rPr>
+              <a:t>CPU DRAM</a:t>
+            </a:r>
+          </a:p>
+        </p:txBody>
+      </p:sp>
+      <p:sp>
+        <p:nvSpPr>
+          <p:cNvPr id="110" name="TextBox 109"/>
+          <p:cNvSpPr txBox="1"/>
+          <p:nvPr/>
+        </p:nvSpPr>
+        <p:spPr>
+          <a:xfrm>
+            <a:off x="7909560" y="5504688"/>
+            <a:ext cx="1664208" cy="173736"/>
+          </a:xfrm>
+          <a:prstGeom prst="rect">
+            <a:avLst/>
+          </a:prstGeom>
+          <a:noFill/>
+        </p:spPr>
+        <p:txBody>
+          <a:bodyPr wrap="square" anchor="t" lIns="0" rIns="0" tIns="0" bIns="0">
+            <a:spAutoFit/>
+          </a:bodyPr>
+          <a:lstStyle/>
+          <a:p>
+            <a:pPr algn="l">
+              <a:lnSpc>
+                <a:spcPct val="112000"/>
+              </a:lnSpc>
+            </a:pPr>
+            <a:r>
+              <a:rPr sz="875" b="0">
+                <a:solidFill>
+                  <a:srgbClr val="8A8A8A"/>
+                </a:solidFill>
+                <a:latin typeface="Arial"/>
+                <a:ea typeface="Arial"/>
+              </a:rPr>
+              <a:t>노드 안팎의 확장</a:t>
+            </a:r>
+          </a:p>
+        </p:txBody>
+      </p:sp>
+      <p:sp>
+        <p:nvSpPr>
+          <p:cNvPr id="111" name="TextBox 110"/>
+          <p:cNvSpPr txBox="1"/>
+          <p:nvPr/>
+        </p:nvSpPr>
+        <p:spPr>
+          <a:xfrm>
+            <a:off x="9646920" y="5248656"/>
+            <a:ext cx="2688336" cy="438912"/>
+          </a:xfrm>
+          <a:prstGeom prst="rect">
+            <a:avLst/>
+          </a:prstGeom>
+          <a:noFill/>
+        </p:spPr>
+        <p:txBody>
+          <a:bodyPr wrap="square" anchor="ctr" lIns="0" rIns="0" tIns="0" bIns="0">
+            <a:spAutoFit/>
+          </a:bodyPr>
+          <a:lstStyle/>
+          <a:p>
+            <a:pPr algn="l">
+              <a:lnSpc>
+                <a:spcPct val="104000"/>
+              </a:lnSpc>
+            </a:pPr>
+            <a:r>
+              <a:rPr sz="950" b="0">
+                <a:solidFill>
+                  <a:srgbClr val="555555"/>
+                </a:solidFill>
+                <a:latin typeface="Arial"/>
+                <a:ea typeface="Arial"/>
+              </a:rPr>
+              <a:t>용량당 단가가 벽입니다</a:t>
+            </a:r>
+          </a:p>
+        </p:txBody>
+      </p:sp>
+      <p:sp>
+        <p:nvSpPr>
+          <p:cNvPr id="112" name="Down Arrow 111"/>
+          <p:cNvSpPr/>
+          <p:nvPr/>
+        </p:nvSpPr>
+        <p:spPr>
+          <a:xfrm>
+            <a:off x="7443216" y="5733288"/>
+            <a:ext cx="146304" cy="146304"/>
+          </a:xfrm>
+          <a:prstGeom prst="downArrow">
+            <a:avLst/>
+          </a:prstGeom>
+          <a:solidFill>
+            <a:srgbClr val="3C5AC8"/>
+          </a:solidFill>
+          <a:ln>
+            <a:noFill/>
+          </a:ln>
+          <a:effectLst/>
+        </p:spPr>
+        <p:style>
+          <a:lnRef idx="1">
+            <a:schemeClr val="accent1"/>
+          </a:lnRef>
+          <a:fillRef idx="3">
+            <a:schemeClr val="accent1"/>
+          </a:fillRef>
+          <a:effectRef idx="2">
+            <a:schemeClr val="accent1"/>
+          </a:effectRef>
+          <a:fontRef idx="minor">
+            <a:schemeClr val="lt1"/>
+          </a:fontRef>
+        </p:style>
+        <p:txBody>
+          <a:bodyPr rtlCol="0" anchor="ctr"/>
+          <a:lstStyle/>
+          <a:p>
+            <a:pPr algn="ctr"/>
+          </a:p>
+        </p:txBody>
+      </p:sp>
+      <p:sp>
+        <p:nvSpPr>
+          <p:cNvPr id="113" name="TextBox 112"/>
+          <p:cNvSpPr txBox="1"/>
+          <p:nvPr/>
+        </p:nvSpPr>
+        <p:spPr>
+          <a:xfrm>
+            <a:off x="7671816" y="5724144"/>
+            <a:ext cx="4700016" cy="164592"/>
+          </a:xfrm>
+          <a:prstGeom prst="rect">
+            <a:avLst/>
+          </a:prstGeom>
+          <a:noFill/>
+        </p:spPr>
+        <p:txBody>
+          <a:bodyPr wrap="square" anchor="ctr" lIns="0" rIns="0" tIns="0" bIns="0">
+            <a:spAutoFit/>
+          </a:bodyPr>
+          <a:lstStyle/>
+          <a:p>
+            <a:pPr algn="l">
+              <a:lnSpc>
+                <a:spcPct val="112000"/>
+              </a:lnSpc>
+            </a:pPr>
+            <a:r>
+              <a:rPr sz="900" b="1">
+                <a:solidFill>
+                  <a:srgbClr val="3C5AC8"/>
+                </a:solidFill>
+                <a:latin typeface="Arial"/>
+                <a:ea typeface="Arial"/>
+              </a:rPr>
+              <a:t>다시 넘친다</a:t>
+            </a:r>
+          </a:p>
+        </p:txBody>
+      </p:sp>
+      <p:sp>
+        <p:nvSpPr>
+          <p:cNvPr id="114" name="Rectangle 113"/>
+          <p:cNvSpPr/>
+          <p:nvPr/>
+        </p:nvSpPr>
+        <p:spPr>
+          <a:xfrm>
+            <a:off x="7251192" y="5888736"/>
+            <a:ext cx="5212080" cy="512064"/>
+          </a:xfrm>
+          <a:prstGeom prst="rect">
+            <a:avLst/>
+          </a:prstGeom>
+          <a:solidFill>
+            <a:srgbClr val="FFFFFF"/>
+          </a:solidFill>
+          <a:ln w="19050">
+            <a:solidFill>
+              <a:srgbClr val="1428A0"/>
+            </a:solidFill>
+          </a:ln>
+          <a:effectLst/>
+        </p:spPr>
+        <p:style>
+          <a:lnRef idx="1">
+            <a:schemeClr val="accent1"/>
+          </a:lnRef>
+          <a:fillRef idx="3">
+            <a:schemeClr val="accent1"/>
+          </a:fillRef>
+          <a:effectRef idx="2">
+            <a:schemeClr val="accent1"/>
+          </a:effectRef>
+          <a:fontRef idx="minor">
+            <a:schemeClr val="lt1"/>
+          </a:fontRef>
+        </p:style>
+        <p:txBody>
+          <a:bodyPr rtlCol="0" anchor="ctr"/>
+          <a:lstStyle/>
+          <a:p>
+            <a:pPr algn="ctr"/>
+          </a:p>
+        </p:txBody>
+      </p:sp>
+      <p:sp>
+        <p:nvSpPr>
+          <p:cNvPr id="115" name="Rectangle 114"/>
+          <p:cNvSpPr/>
+          <p:nvPr/>
+        </p:nvSpPr>
+        <p:spPr>
+          <a:xfrm>
+            <a:off x="7251192" y="5888736"/>
+            <a:ext cx="530352" cy="512064"/>
+          </a:xfrm>
+          <a:prstGeom prst="rect">
+            <a:avLst/>
+          </a:prstGeom>
+          <a:solidFill>
+            <a:srgbClr val="1428A0"/>
+          </a:solidFill>
+          <a:ln>
+            <a:noFill/>
+          </a:ln>
+          <a:effectLst/>
+        </p:spPr>
+        <p:style>
+          <a:lnRef idx="1">
+            <a:schemeClr val="accent1"/>
+          </a:lnRef>
+          <a:fillRef idx="3">
+            <a:schemeClr val="accent1"/>
+          </a:fillRef>
+          <a:effectRef idx="2">
+            <a:schemeClr val="accent1"/>
+          </a:effectRef>
+          <a:fontRef idx="minor">
+            <a:schemeClr val="lt1"/>
+          </a:fontRef>
+        </p:style>
+        <p:txBody>
+          <a:bodyPr rtlCol="0" anchor="ctr"/>
+          <a:lstStyle/>
+          <a:p>
+            <a:pPr algn="ctr"/>
+          </a:p>
+        </p:txBody>
+      </p:sp>
+      <p:sp>
+        <p:nvSpPr>
+          <p:cNvPr id="116" name="TextBox 115"/>
+          <p:cNvSpPr txBox="1"/>
+          <p:nvPr/>
+        </p:nvSpPr>
+        <p:spPr>
+          <a:xfrm>
+            <a:off x="7251192" y="5888736"/>
+            <a:ext cx="530352" cy="512064"/>
+          </a:xfrm>
+          <a:prstGeom prst="rect">
+            <a:avLst/>
+          </a:prstGeom>
+          <a:noFill/>
+        </p:spPr>
+        <p:txBody>
+          <a:bodyPr wrap="square" anchor="ctr" lIns="0" rIns="0" tIns="0" bIns="0">
+            <a:spAutoFit/>
+          </a:bodyPr>
+          <a:lstStyle/>
+          <a:p>
+            <a:pPr algn="ctr">
+              <a:lnSpc>
+                <a:spcPct val="112000"/>
+              </a:lnSpc>
+            </a:pPr>
+            <a:r>
+              <a:rPr sz="1125" b="1">
                 <a:solidFill>
                   <a:srgbClr val="FFFFFF"/>
                 </a:solidFill>
                 <a:latin typeface="Arial"/>
                 <a:ea typeface="Arial"/>
               </a:rPr>
-              <a:t>용량 밀도 · 전력 · 물량</a:t>
-            </a:r>
-          </a:p>
-        </p:txBody>
-      </p:sp>
-      <p:sp>
-        <p:nvSpPr>
-          <p:cNvPr id="98" name="TextBox 97"/>
-          <p:cNvSpPr txBox="1"/>
-          <p:nvPr/>
-        </p:nvSpPr>
-        <p:spPr>
-          <a:xfrm>
-            <a:off x="8074152" y="5833871"/>
-            <a:ext cx="4114800" cy="237744"/>
+              <a:t>G3</a:t>
+            </a:r>
+          </a:p>
+        </p:txBody>
+      </p:sp>
+      <p:sp>
+        <p:nvSpPr>
+          <p:cNvPr id="117" name="TextBox 116"/>
+          <p:cNvSpPr txBox="1"/>
+          <p:nvPr/>
+        </p:nvSpPr>
+        <p:spPr>
+          <a:xfrm>
+            <a:off x="7909560" y="5952744"/>
+            <a:ext cx="1664208" cy="228600"/>
           </a:xfrm>
           <a:prstGeom prst="rect">
             <a:avLst/>
@@ -8279,28 +9085,432 @@
               </a:lnSpc>
             </a:pPr>
             <a:r>
+              <a:rPr sz="1275" b="1">
+                <a:solidFill>
+                  <a:srgbClr val="1428A0"/>
+                </a:solidFill>
+                <a:latin typeface="Arial"/>
+                <a:ea typeface="Arial"/>
+              </a:rPr>
+              <a:t>NVMe SSD</a:t>
+            </a:r>
+          </a:p>
+        </p:txBody>
+      </p:sp>
+      <p:sp>
+        <p:nvSpPr>
+          <p:cNvPr id="118" name="TextBox 117"/>
+          <p:cNvSpPr txBox="1"/>
+          <p:nvPr/>
+        </p:nvSpPr>
+        <p:spPr>
+          <a:xfrm>
+            <a:off x="7909560" y="6181344"/>
+            <a:ext cx="1664208" cy="173736"/>
+          </a:xfrm>
+          <a:prstGeom prst="rect">
+            <a:avLst/>
+          </a:prstGeom>
+          <a:noFill/>
+        </p:spPr>
+        <p:txBody>
+          <a:bodyPr wrap="square" anchor="t" lIns="0" rIns="0" tIns="0" bIns="0">
+            <a:spAutoFit/>
+          </a:bodyPr>
+          <a:lstStyle/>
+          <a:p>
+            <a:pPr algn="l">
+              <a:lnSpc>
+                <a:spcPct val="112000"/>
+              </a:lnSpc>
+            </a:pPr>
+            <a:r>
+              <a:rPr sz="875" b="0">
+                <a:solidFill>
+                  <a:srgbClr val="8A8A8A"/>
+                </a:solidFill>
+                <a:latin typeface="Arial"/>
+                <a:ea typeface="Arial"/>
+              </a:rPr>
+              <a:t>새로 열린 계층</a:t>
+            </a:r>
+          </a:p>
+        </p:txBody>
+      </p:sp>
+      <p:sp>
+        <p:nvSpPr>
+          <p:cNvPr id="119" name="TextBox 118"/>
+          <p:cNvSpPr txBox="1"/>
+          <p:nvPr/>
+        </p:nvSpPr>
+        <p:spPr>
+          <a:xfrm>
+            <a:off x="9646920" y="5925312"/>
+            <a:ext cx="2688336" cy="438912"/>
+          </a:xfrm>
+          <a:prstGeom prst="rect">
+            <a:avLst/>
+          </a:prstGeom>
+          <a:noFill/>
+        </p:spPr>
+        <p:txBody>
+          <a:bodyPr wrap="square" anchor="ctr" lIns="0" rIns="0" tIns="0" bIns="0">
+            <a:spAutoFit/>
+          </a:bodyPr>
+          <a:lstStyle/>
+          <a:p>
+            <a:pPr algn="l">
+              <a:lnSpc>
+                <a:spcPct val="104000"/>
+              </a:lnSpc>
+            </a:pPr>
+            <a:r>
               <a:rPr sz="950" b="0">
                 <a:solidFill>
-                  <a:srgbClr val="AAB8E8"/>
-                </a:solidFill>
-                <a:latin typeface="Arial"/>
-                <a:ea typeface="Arial"/>
-              </a:rPr>
-              <a:t>슬롯당 TB · TB당 와트 · 공급 보장</a:t>
-            </a:r>
-          </a:p>
-        </p:txBody>
-      </p:sp>
-      <p:sp>
-        <p:nvSpPr>
-          <p:cNvPr id="99" name="Rectangle 98"/>
-          <p:cNvSpPr/>
-          <p:nvPr/>
-        </p:nvSpPr>
-        <p:spPr>
-          <a:xfrm>
-            <a:off x="7891272" y="6400800"/>
-            <a:ext cx="4480560" cy="1481328"/>
+                  <a:srgbClr val="555555"/>
+                </a:solidFill>
+                <a:latin typeface="Arial"/>
+                <a:ea typeface="Arial"/>
+              </a:rPr>
+              <a:t>쓰기가 몰리는 첫 대용량 계층</a:t>
+            </a:r>
+          </a:p>
+        </p:txBody>
+      </p:sp>
+      <p:sp>
+        <p:nvSpPr>
+          <p:cNvPr id="120" name="TextBox 119"/>
+          <p:cNvSpPr txBox="1"/>
+          <p:nvPr/>
+        </p:nvSpPr>
+        <p:spPr>
+          <a:xfrm>
+            <a:off x="7251192" y="6446520"/>
+            <a:ext cx="5212080" cy="182880"/>
+          </a:xfrm>
+          <a:prstGeom prst="rect">
+            <a:avLst/>
+          </a:prstGeom>
+          <a:noFill/>
+        </p:spPr>
+        <p:txBody>
+          <a:bodyPr wrap="square" anchor="t" lIns="0" rIns="0" tIns="0" bIns="0">
+            <a:spAutoFit/>
+          </a:bodyPr>
+          <a:lstStyle/>
+          <a:p>
+            <a:pPr algn="l">
+              <a:lnSpc>
+                <a:spcPct val="112000"/>
+              </a:lnSpc>
+            </a:pPr>
+            <a:r>
+              <a:rPr sz="875" b="0">
+                <a:solidFill>
+                  <a:srgbClr val="8A8A8A"/>
+                </a:solidFill>
+                <a:latin typeface="Arial"/>
+                <a:ea typeface="Arial"/>
+              </a:rPr>
+              <a:t>NVIDIA Dynamo KVBM의 4단 위계 · HBM 수요가 준 것이 아니라 넘친 것이 내려왔습니다</a:t>
+            </a:r>
+          </a:p>
+        </p:txBody>
+      </p:sp>
+      <p:sp>
+        <p:nvSpPr>
+          <p:cNvPr id="121" name="Rectangle 120"/>
+          <p:cNvSpPr/>
+          <p:nvPr/>
+        </p:nvSpPr>
+        <p:spPr>
+          <a:xfrm>
+            <a:off x="7251192" y="6693408"/>
+            <a:ext cx="5212080" cy="804672"/>
+          </a:xfrm>
+          <a:prstGeom prst="rect">
+            <a:avLst/>
+          </a:prstGeom>
+          <a:solidFill>
+            <a:srgbClr val="F4F6FC"/>
+          </a:solidFill>
+          <a:ln>
+            <a:noFill/>
+          </a:ln>
+          <a:effectLst/>
+        </p:spPr>
+        <p:style>
+          <a:lnRef idx="1">
+            <a:schemeClr val="accent1"/>
+          </a:lnRef>
+          <a:fillRef idx="3">
+            <a:schemeClr val="accent1"/>
+          </a:fillRef>
+          <a:effectRef idx="2">
+            <a:schemeClr val="accent1"/>
+          </a:effectRef>
+          <a:fontRef idx="minor">
+            <a:schemeClr val="lt1"/>
+          </a:fontRef>
+        </p:style>
+        <p:txBody>
+          <a:bodyPr rtlCol="0" anchor="ctr"/>
+          <a:lstStyle/>
+          <a:p>
+            <a:pPr algn="ctr"/>
+          </a:p>
+        </p:txBody>
+      </p:sp>
+      <p:sp>
+        <p:nvSpPr>
+          <p:cNvPr id="122" name="TextBox 121"/>
+          <p:cNvSpPr txBox="1"/>
+          <p:nvPr/>
+        </p:nvSpPr>
+        <p:spPr>
+          <a:xfrm>
+            <a:off x="7415783" y="6748272"/>
+            <a:ext cx="4882896" cy="219456"/>
+          </a:xfrm>
+          <a:prstGeom prst="rect">
+            <a:avLst/>
+          </a:prstGeom>
+          <a:noFill/>
+        </p:spPr>
+        <p:txBody>
+          <a:bodyPr wrap="square" anchor="t" lIns="0" rIns="0" tIns="0" bIns="0">
+            <a:spAutoFit/>
+          </a:bodyPr>
+          <a:lstStyle/>
+          <a:p>
+            <a:pPr algn="l">
+              <a:lnSpc>
+                <a:spcPct val="112000"/>
+              </a:lnSpc>
+            </a:pPr>
+            <a:r>
+              <a:rPr sz="1125" b="1">
+                <a:solidFill>
+                  <a:srgbClr val="1428A0"/>
+                </a:solidFill>
+                <a:latin typeface="Arial"/>
+                <a:ea typeface="Arial"/>
+              </a:rPr>
+              <a:t>「Vera Rubin의 HBM → NAND 스필오버」</a:t>
+            </a:r>
+          </a:p>
+        </p:txBody>
+      </p:sp>
+      <p:sp>
+        <p:nvSpPr>
+          <p:cNvPr id="123" name="TextBox 122"/>
+          <p:cNvSpPr txBox="1"/>
+          <p:nvPr/>
+        </p:nvSpPr>
+        <p:spPr>
+          <a:xfrm>
+            <a:off x="7415783" y="6958584"/>
+            <a:ext cx="4882896" cy="182880"/>
+          </a:xfrm>
+          <a:prstGeom prst="rect">
+            <a:avLst/>
+          </a:prstGeom>
+          <a:noFill/>
+        </p:spPr>
+        <p:txBody>
+          <a:bodyPr wrap="square" anchor="t" lIns="0" rIns="0" tIns="0" bIns="0">
+            <a:spAutoFit/>
+          </a:bodyPr>
+          <a:lstStyle/>
+          <a:p>
+            <a:pPr algn="l">
+              <a:lnSpc>
+                <a:spcPct val="112000"/>
+              </a:lnSpc>
+            </a:pPr>
+            <a:r>
+              <a:rPr sz="875" b="0">
+                <a:solidFill>
+                  <a:srgbClr val="555555"/>
+                </a:solidFill>
+                <a:latin typeface="Arial"/>
+                <a:ea typeface="Arial"/>
+              </a:rPr>
+              <a:t>TrendForce 2026-08-18 · CMX가 TLC 현물가 반등을 견인했다고 적었습니다</a:t>
+            </a:r>
+          </a:p>
+        </p:txBody>
+      </p:sp>
+      <p:sp>
+        <p:nvSpPr>
+          <p:cNvPr id="124" name="TextBox 123"/>
+          <p:cNvSpPr txBox="1"/>
+          <p:nvPr/>
+        </p:nvSpPr>
+        <p:spPr>
+          <a:xfrm>
+            <a:off x="7415783" y="7150608"/>
+            <a:ext cx="2377440" cy="155448"/>
+          </a:xfrm>
+          <a:prstGeom prst="rect">
+            <a:avLst/>
+          </a:prstGeom>
+          <a:noFill/>
+        </p:spPr>
+        <p:txBody>
+          <a:bodyPr wrap="square" anchor="t" lIns="0" rIns="0" tIns="0" bIns="0">
+            <a:spAutoFit/>
+          </a:bodyPr>
+          <a:lstStyle/>
+          <a:p>
+            <a:pPr algn="l">
+              <a:lnSpc>
+                <a:spcPct val="112000"/>
+              </a:lnSpc>
+            </a:pPr>
+            <a:r>
+              <a:rPr sz="850" b="0">
+                <a:solidFill>
+                  <a:srgbClr val="8A8A8A"/>
+                </a:solidFill>
+                <a:latin typeface="Arial"/>
+                <a:ea typeface="Arial"/>
+              </a:rPr>
+              <a:t>CMX NAND 소요</a:t>
+            </a:r>
+          </a:p>
+        </p:txBody>
+      </p:sp>
+      <p:sp>
+        <p:nvSpPr>
+          <p:cNvPr id="125" name="TextBox 124"/>
+          <p:cNvSpPr txBox="1"/>
+          <p:nvPr/>
+        </p:nvSpPr>
+        <p:spPr>
+          <a:xfrm>
+            <a:off x="7415783" y="7287768"/>
+            <a:ext cx="2377440" cy="182880"/>
+          </a:xfrm>
+          <a:prstGeom prst="rect">
+            <a:avLst/>
+          </a:prstGeom>
+          <a:noFill/>
+        </p:spPr>
+        <p:txBody>
+          <a:bodyPr wrap="square" anchor="t" lIns="0" rIns="0" tIns="0" bIns="0">
+            <a:spAutoFit/>
+          </a:bodyPr>
+          <a:lstStyle/>
+          <a:p>
+            <a:pPr algn="l">
+              <a:lnSpc>
+                <a:spcPct val="112000"/>
+              </a:lnSpc>
+            </a:pPr>
+            <a:r>
+              <a:rPr sz="950" b="1">
+                <a:solidFill>
+                  <a:srgbClr val="1428A0"/>
+                </a:solidFill>
+                <a:latin typeface="Arial"/>
+                <a:ea typeface="Arial"/>
+              </a:rPr>
+              <a:t>2026 35EB → 2027 100EB+</a:t>
+            </a:r>
+          </a:p>
+        </p:txBody>
+      </p:sp>
+      <p:sp>
+        <p:nvSpPr>
+          <p:cNvPr id="126" name="TextBox 125"/>
+          <p:cNvSpPr txBox="1"/>
+          <p:nvPr/>
+        </p:nvSpPr>
+        <p:spPr>
+          <a:xfrm>
+            <a:off x="9921240" y="7150608"/>
+            <a:ext cx="2377440" cy="155448"/>
+          </a:xfrm>
+          <a:prstGeom prst="rect">
+            <a:avLst/>
+          </a:prstGeom>
+          <a:noFill/>
+        </p:spPr>
+        <p:txBody>
+          <a:bodyPr wrap="square" anchor="t" lIns="0" rIns="0" tIns="0" bIns="0">
+            <a:spAutoFit/>
+          </a:bodyPr>
+          <a:lstStyle/>
+          <a:p>
+            <a:pPr algn="l">
+              <a:lnSpc>
+                <a:spcPct val="112000"/>
+              </a:lnSpc>
+            </a:pPr>
+            <a:r>
+              <a:rPr sz="850" b="0">
+                <a:solidFill>
+                  <a:srgbClr val="8A8A8A"/>
+                </a:solidFill>
+                <a:latin typeface="Arial"/>
+                <a:ea typeface="Arial"/>
+              </a:rPr>
+              <a:t>삼성 V-NAND 캐파</a:t>
+            </a:r>
+          </a:p>
+        </p:txBody>
+      </p:sp>
+      <p:sp>
+        <p:nvSpPr>
+          <p:cNvPr id="127" name="TextBox 126"/>
+          <p:cNvSpPr txBox="1"/>
+          <p:nvPr/>
+        </p:nvSpPr>
+        <p:spPr>
+          <a:xfrm>
+            <a:off x="9921240" y="7287768"/>
+            <a:ext cx="2377440" cy="182880"/>
+          </a:xfrm>
+          <a:prstGeom prst="rect">
+            <a:avLst/>
+          </a:prstGeom>
+          <a:noFill/>
+        </p:spPr>
+        <p:txBody>
+          <a:bodyPr wrap="square" anchor="t" lIns="0" rIns="0" tIns="0" bIns="0">
+            <a:spAutoFit/>
+          </a:bodyPr>
+          <a:lstStyle/>
+          <a:p>
+            <a:pPr algn="l">
+              <a:lnSpc>
+                <a:spcPct val="112000"/>
+              </a:lnSpc>
+            </a:pPr>
+            <a:r>
+              <a:rPr sz="950" b="1">
+                <a:solidFill>
+                  <a:srgbClr val="1428A0"/>
+                </a:solidFill>
+                <a:latin typeface="Arial"/>
+                <a:ea typeface="Arial"/>
+              </a:rPr>
+              <a:t>약 60%를 CMX 대응에 배정</a:t>
+            </a:r>
+          </a:p>
+        </p:txBody>
+      </p:sp>
+      <p:sp>
+        <p:nvSpPr>
+          <p:cNvPr id="128" name="Rectangle 127"/>
+          <p:cNvSpPr/>
+          <p:nvPr/>
+        </p:nvSpPr>
+        <p:spPr>
+          <a:xfrm>
+            <a:off x="7251192" y="7607808"/>
+            <a:ext cx="5212080" cy="804672"/>
           </a:xfrm>
           <a:prstGeom prst="rect">
             <a:avLst/>
@@ -8339,14 +9549,14 @@
       </p:sp>
       <p:sp>
         <p:nvSpPr>
-          <p:cNvPr id="100" name="TextBox 99"/>
-          <p:cNvSpPr txBox="1"/>
-          <p:nvPr/>
-        </p:nvSpPr>
-        <p:spPr>
-          <a:xfrm>
-            <a:off x="8074152" y="6510528"/>
-            <a:ext cx="4114800" cy="219456"/>
+          <p:cNvPr id="129" name="TextBox 128"/>
+          <p:cNvSpPr txBox="1"/>
+          <p:nvPr/>
+        </p:nvSpPr>
+        <p:spPr>
+          <a:xfrm>
+            <a:off x="7434071" y="7680960"/>
+            <a:ext cx="3218688" cy="256032"/>
           </a:xfrm>
           <a:prstGeom prst="rect">
             <a:avLst/>
@@ -8365,28 +9575,28 @@
               </a:lnSpc>
             </a:pPr>
             <a:r>
-              <a:rPr sz="1050" b="0">
-                <a:solidFill>
-                  <a:srgbClr val="8A8A8A"/>
-                </a:solidFill>
-                <a:latin typeface="Arial"/>
-                <a:ea typeface="Arial"/>
-              </a:rPr>
-              <a:t>그 위에 새 축이 하나 올라왔습니다</a:t>
-            </a:r>
-          </a:p>
-        </p:txBody>
-      </p:sp>
-      <p:sp>
-        <p:nvSpPr>
-          <p:cNvPr id="101" name="TextBox 100"/>
-          <p:cNvSpPr txBox="1"/>
-          <p:nvPr/>
-        </p:nvSpPr>
-        <p:spPr>
-          <a:xfrm>
-            <a:off x="8074152" y="6729984"/>
-            <a:ext cx="4114800" cy="310896"/>
+              <a:rPr sz="1275" b="1">
+                <a:solidFill>
+                  <a:srgbClr val="1428A0"/>
+                </a:solidFill>
+                <a:latin typeface="Arial"/>
+                <a:ea typeface="Arial"/>
+              </a:rPr>
+              <a:t>그래서 SSD에 오는 요구는 내구성입니다</a:t>
+            </a:r>
+          </a:p>
+        </p:txBody>
+      </p:sp>
+      <p:sp>
+        <p:nvSpPr>
+          <p:cNvPr id="130" name="TextBox 129"/>
+          <p:cNvSpPr txBox="1"/>
+          <p:nvPr/>
+        </p:nvSpPr>
+        <p:spPr>
+          <a:xfrm>
+            <a:off x="7434071" y="7955280"/>
+            <a:ext cx="3218688" cy="347472"/>
           </a:xfrm>
           <a:prstGeom prst="rect">
             <a:avLst/>
@@ -8401,89 +9611,32 @@
           <a:p>
             <a:pPr algn="l">
               <a:lnSpc>
-                <a:spcPct val="112000"/>
-              </a:lnSpc>
-            </a:pPr>
-            <a:r>
-              <a:rPr sz="1500" b="1">
-                <a:solidFill>
-                  <a:srgbClr val="1428A0"/>
-                </a:solidFill>
-                <a:latin typeface="Arial"/>
-                <a:ea typeface="Arial"/>
-              </a:rPr>
-              <a:t>KV 캐시 오프로드 → 내구성</a:t>
-            </a:r>
-          </a:p>
-        </p:txBody>
-      </p:sp>
-      <p:sp>
-        <p:nvSpPr>
-          <p:cNvPr id="102" name="TextBox 101"/>
-          <p:cNvSpPr txBox="1"/>
-          <p:nvPr/>
-        </p:nvSpPr>
-        <p:spPr>
-          <a:xfrm>
-            <a:off x="8074152" y="7059168"/>
-            <a:ext cx="4114800" cy="457200"/>
-          </a:xfrm>
-          <a:prstGeom prst="rect">
-            <a:avLst/>
-          </a:prstGeom>
-          <a:noFill/>
-        </p:spPr>
-        <p:txBody>
-          <a:bodyPr wrap="square" anchor="t" lIns="0" rIns="0" tIns="0" bIns="0">
-            <a:spAutoFit/>
-          </a:bodyPr>
-          <a:lstStyle/>
-          <a:p>
-            <a:pPr algn="l">
-              <a:lnSpc>
-                <a:spcPct val="106000"/>
-              </a:lnSpc>
-            </a:pPr>
-            <a:r>
-              <a:rPr sz="1000" b="0">
+                <a:spcPct val="104000"/>
+              </a:lnSpc>
+            </a:pPr>
+            <a:r>
+              <a:rPr sz="900" b="0">
                 <a:solidFill>
                   <a:srgbClr val="555555"/>
                 </a:solidFill>
                 <a:latin typeface="Arial"/>
                 <a:ea typeface="Arial"/>
               </a:rPr>
-              <a:t>추론 캐시 계층은 쓰기가 몰리는 첫 대용량 계층입니다</a:t>
-            </a:r>
-          </a:p>
-          <a:p>
-            <a:pPr algn="l">
-              <a:lnSpc>
-                <a:spcPct val="106000"/>
-              </a:lnSpc>
-            </a:pPr>
-            <a:r>
-              <a:rPr sz="1000" b="0">
-                <a:solidFill>
-                  <a:srgbClr val="555555"/>
-                </a:solidFill>
-                <a:latin typeface="Arial"/>
-                <a:ea typeface="Arial"/>
-              </a:rPr>
-              <a:t>Kioxia는 이 계층 제품으로 CM9 TLC 3 DWPD를 지목했습니다</a:t>
-            </a:r>
-          </a:p>
-        </p:txBody>
-      </p:sp>
-      <p:sp>
-        <p:nvSpPr>
-          <p:cNvPr id="103" name="Rectangle 102"/>
-          <p:cNvSpPr/>
-          <p:nvPr/>
-        </p:nvSpPr>
-        <p:spPr>
-          <a:xfrm>
-            <a:off x="8074152" y="7534656"/>
-            <a:ext cx="4114800" cy="256032"/>
+              <a:t>추론 수요 CAGR 86% · 학습 16% · 이 계층 제품으로 Kioxia는 CM9 TLC 3 DWPD를 지목했습니다</a:t>
+            </a:r>
+          </a:p>
+        </p:txBody>
+      </p:sp>
+      <p:sp>
+        <p:nvSpPr>
+          <p:cNvPr id="131" name="Rectangle 130"/>
+          <p:cNvSpPr/>
+          <p:nvPr/>
+        </p:nvSpPr>
+        <p:spPr>
+          <a:xfrm>
+            <a:off x="10725911" y="7735824"/>
+            <a:ext cx="1591056" cy="548640"/>
           </a:xfrm>
           <a:prstGeom prst="rect">
             <a:avLst/>
@@ -8520,14 +9673,14 @@
       </p:sp>
       <p:sp>
         <p:nvSpPr>
-          <p:cNvPr id="104" name="TextBox 103"/>
-          <p:cNvSpPr txBox="1"/>
-          <p:nvPr/>
-        </p:nvSpPr>
-        <p:spPr>
-          <a:xfrm>
-            <a:off x="8074152" y="7534656"/>
-            <a:ext cx="4114800" cy="256032"/>
+          <p:cNvPr id="132" name="TextBox 131"/>
+          <p:cNvSpPr txBox="1"/>
+          <p:nvPr/>
+        </p:nvSpPr>
+        <p:spPr>
+          <a:xfrm>
+            <a:off x="10725911" y="7735824"/>
+            <a:ext cx="1591056" cy="548640"/>
           </a:xfrm>
           <a:prstGeom prst="rect">
             <a:avLst/>
@@ -8542,72 +9695,49 @@
           <a:p>
             <a:pPr algn="ctr">
               <a:lnSpc>
-                <a:spcPct val="112000"/>
-              </a:lnSpc>
-            </a:pPr>
-            <a:r>
-              <a:rPr sz="1275" b="1">
+                <a:spcPct val="100000"/>
+              </a:lnSpc>
+            </a:pPr>
+            <a:r>
+              <a:rPr sz="950" b="0">
+                <a:solidFill>
+                  <a:srgbClr val="8A8A8A"/>
+                </a:solidFill>
+                <a:latin typeface="Arial"/>
+                <a:ea typeface="Arial"/>
+              </a:rPr>
+              <a:t>요구 DWPD</a:t>
+            </a:r>
+          </a:p>
+          <a:p>
+            <a:pPr algn="ctr">
+              <a:lnSpc>
+                <a:spcPct val="100000"/>
+              </a:lnSpc>
+            </a:pPr>
+            <a:r>
+              <a:rPr sz="2100" b="1">
                 <a:solidFill>
                   <a:srgbClr val="1428A0"/>
                 </a:solidFill>
                 <a:latin typeface="Arial"/>
                 <a:ea typeface="Arial"/>
               </a:rPr>
-              <a:t>요구 DWPD 1 ~ 3</a:t>
-            </a:r>
-          </a:p>
-        </p:txBody>
-      </p:sp>
-      <p:sp>
-        <p:nvSpPr>
-          <p:cNvPr id="105" name="TextBox 104"/>
-          <p:cNvSpPr txBox="1"/>
-          <p:nvPr/>
-        </p:nvSpPr>
-        <p:spPr>
-          <a:xfrm>
-            <a:off x="7891272" y="7991856"/>
-            <a:ext cx="4480560" cy="219456"/>
-          </a:xfrm>
-          <a:prstGeom prst="rect">
-            <a:avLst/>
-          </a:prstGeom>
-          <a:noFill/>
-        </p:spPr>
-        <p:txBody>
-          <a:bodyPr wrap="square" anchor="t" lIns="0" rIns="0" tIns="0" bIns="0">
-            <a:spAutoFit/>
-          </a:bodyPr>
-          <a:lstStyle/>
-          <a:p>
-            <a:pPr algn="l">
-              <a:lnSpc>
-                <a:spcPct val="112000"/>
-              </a:lnSpc>
-            </a:pPr>
-            <a:r>
-              <a:rPr sz="950" b="0">
-                <a:solidFill>
-                  <a:srgbClr val="8A8A8A"/>
-                </a:solidFill>
-                <a:latin typeface="Arial"/>
-                <a:ea typeface="Arial"/>
-              </a:rPr>
-              <a:t>추론 수요 CAGR 86% · 학습 16% (Kioxia)</a:t>
-            </a:r>
-          </a:p>
-        </p:txBody>
-      </p:sp>
-      <p:sp>
-        <p:nvSpPr>
-          <p:cNvPr id="106" name="Rectangle 105"/>
-          <p:cNvSpPr/>
-          <p:nvPr/>
-        </p:nvSpPr>
-        <p:spPr>
-          <a:xfrm>
-            <a:off x="12865608" y="2560320"/>
-            <a:ext cx="4700016" cy="5870448"/>
+              <a:t>1 ~ 3</a:t>
+            </a:r>
+          </a:p>
+        </p:txBody>
+      </p:sp>
+      <p:sp>
+        <p:nvSpPr>
+          <p:cNvPr id="133" name="Rectangle 132"/>
+          <p:cNvSpPr/>
+          <p:nvPr/>
+        </p:nvSpPr>
+        <p:spPr>
+          <a:xfrm>
+            <a:off x="12957048" y="2560320"/>
+            <a:ext cx="4608576" cy="5870448"/>
           </a:xfrm>
           <a:prstGeom prst="rect">
             <a:avLst/>
@@ -8646,14 +9776,14 @@
       </p:sp>
       <p:sp>
         <p:nvSpPr>
-          <p:cNvPr id="107" name="Rectangle 106"/>
-          <p:cNvSpPr/>
-          <p:nvPr/>
-        </p:nvSpPr>
-        <p:spPr>
-          <a:xfrm>
-            <a:off x="12865608" y="2560320"/>
-            <a:ext cx="4700016" cy="45720"/>
+          <p:cNvPr id="134" name="Rectangle 133"/>
+          <p:cNvSpPr/>
+          <p:nvPr/>
+        </p:nvSpPr>
+        <p:spPr>
+          <a:xfrm>
+            <a:off x="12957048" y="2560320"/>
+            <a:ext cx="4608576" cy="45720"/>
           </a:xfrm>
           <a:prstGeom prst="rect">
             <a:avLst/>
@@ -8690,14 +9820,14 @@
       </p:sp>
       <p:sp>
         <p:nvSpPr>
-          <p:cNvPr id="108" name="TextBox 107"/>
-          <p:cNvSpPr txBox="1"/>
-          <p:nvPr/>
-        </p:nvSpPr>
-        <p:spPr>
-          <a:xfrm>
-            <a:off x="13085064" y="2706624"/>
-            <a:ext cx="4261104" cy="274320"/>
+          <p:cNvPr id="135" name="TextBox 134"/>
+          <p:cNvSpPr txBox="1"/>
+          <p:nvPr/>
+        </p:nvSpPr>
+        <p:spPr>
+          <a:xfrm>
+            <a:off x="13176504" y="2706624"/>
+            <a:ext cx="4169664" cy="274320"/>
           </a:xfrm>
           <a:prstGeom prst="rect">
             <a:avLst/>
@@ -8740,14 +9870,14 @@
       </p:sp>
       <p:sp>
         <p:nvSpPr>
-          <p:cNvPr id="109" name="TextBox 108"/>
-          <p:cNvSpPr txBox="1"/>
-          <p:nvPr/>
-        </p:nvSpPr>
-        <p:spPr>
-          <a:xfrm>
-            <a:off x="13085064" y="2980944"/>
-            <a:ext cx="4261104" cy="219456"/>
+          <p:cNvPr id="136" name="TextBox 135"/>
+          <p:cNvSpPr txBox="1"/>
+          <p:nvPr/>
+        </p:nvSpPr>
+        <p:spPr>
+          <a:xfrm>
+            <a:off x="13176504" y="2980944"/>
+            <a:ext cx="4169664" cy="219456"/>
           </a:xfrm>
           <a:prstGeom prst="rect">
             <a:avLst/>
@@ -8780,14 +9910,14 @@
       </p:sp>
       <p:sp>
         <p:nvSpPr>
-          <p:cNvPr id="110" name="TextBox 109"/>
-          <p:cNvSpPr txBox="1"/>
-          <p:nvPr/>
-        </p:nvSpPr>
-        <p:spPr>
-          <a:xfrm>
-            <a:off x="13139928" y="3346703"/>
-            <a:ext cx="4151376" cy="219456"/>
+          <p:cNvPr id="137" name="TextBox 136"/>
+          <p:cNvSpPr txBox="1"/>
+          <p:nvPr/>
+        </p:nvSpPr>
+        <p:spPr>
+          <a:xfrm>
+            <a:off x="13231368" y="3346703"/>
+            <a:ext cx="4059936" cy="219456"/>
           </a:xfrm>
           <a:prstGeom prst="rect">
             <a:avLst/>
@@ -8820,14 +9950,14 @@
       </p:sp>
       <p:sp>
         <p:nvSpPr>
-          <p:cNvPr id="111" name="Rectangle 110"/>
-          <p:cNvSpPr/>
-          <p:nvPr/>
-        </p:nvSpPr>
-        <p:spPr>
-          <a:xfrm>
-            <a:off x="13139928" y="3602735"/>
-            <a:ext cx="2002536" cy="1792224"/>
+          <p:cNvPr id="138" name="Rectangle 137"/>
+          <p:cNvSpPr/>
+          <p:nvPr/>
+        </p:nvSpPr>
+        <p:spPr>
+          <a:xfrm>
+            <a:off x="13231368" y="3602735"/>
+            <a:ext cx="1956816" cy="1792224"/>
           </a:xfrm>
           <a:prstGeom prst="rect">
             <a:avLst/>
@@ -8866,14 +9996,14 @@
       </p:sp>
       <p:sp>
         <p:nvSpPr>
-          <p:cNvPr id="112" name="Rectangle 111"/>
-          <p:cNvSpPr/>
-          <p:nvPr/>
-        </p:nvSpPr>
-        <p:spPr>
-          <a:xfrm>
-            <a:off x="13139928" y="3602735"/>
-            <a:ext cx="2002536" cy="45720"/>
+          <p:cNvPr id="139" name="Rectangle 138"/>
+          <p:cNvSpPr/>
+          <p:nvPr/>
+        </p:nvSpPr>
+        <p:spPr>
+          <a:xfrm>
+            <a:off x="13231368" y="3602735"/>
+            <a:ext cx="1956816" cy="45720"/>
           </a:xfrm>
           <a:prstGeom prst="rect">
             <a:avLst/>
@@ -8910,14 +10040,14 @@
       </p:sp>
       <p:sp>
         <p:nvSpPr>
-          <p:cNvPr id="113" name="TextBox 112"/>
-          <p:cNvSpPr txBox="1"/>
-          <p:nvPr/>
-        </p:nvSpPr>
-        <p:spPr>
-          <a:xfrm>
-            <a:off x="13286232" y="3694175"/>
-            <a:ext cx="1709928" cy="274320"/>
+          <p:cNvPr id="140" name="TextBox 139"/>
+          <p:cNvSpPr txBox="1"/>
+          <p:nvPr/>
+        </p:nvSpPr>
+        <p:spPr>
+          <a:xfrm>
+            <a:off x="13377672" y="3694175"/>
+            <a:ext cx="1664208" cy="274320"/>
           </a:xfrm>
           <a:prstGeom prst="rect">
             <a:avLst/>
@@ -8950,14 +10080,14 @@
       </p:sp>
       <p:sp>
         <p:nvSpPr>
-          <p:cNvPr id="114" name="TextBox 113"/>
-          <p:cNvSpPr txBox="1"/>
-          <p:nvPr/>
-        </p:nvSpPr>
-        <p:spPr>
-          <a:xfrm>
-            <a:off x="13286232" y="3968496"/>
-            <a:ext cx="1709928" cy="201168"/>
+          <p:cNvPr id="141" name="TextBox 140"/>
+          <p:cNvSpPr txBox="1"/>
+          <p:nvPr/>
+        </p:nvSpPr>
+        <p:spPr>
+          <a:xfrm>
+            <a:off x="13377672" y="3968496"/>
+            <a:ext cx="1664208" cy="201168"/>
           </a:xfrm>
           <a:prstGeom prst="rect">
             <a:avLst/>
@@ -8990,14 +10120,14 @@
       </p:sp>
       <p:sp>
         <p:nvSpPr>
-          <p:cNvPr id="115" name="TextBox 114"/>
-          <p:cNvSpPr txBox="1"/>
-          <p:nvPr/>
-        </p:nvSpPr>
-        <p:spPr>
-          <a:xfrm>
-            <a:off x="13286232" y="4206240"/>
-            <a:ext cx="1709928" cy="164592"/>
+          <p:cNvPr id="142" name="TextBox 141"/>
+          <p:cNvSpPr txBox="1"/>
+          <p:nvPr/>
+        </p:nvSpPr>
+        <p:spPr>
+          <a:xfrm>
+            <a:off x="13377672" y="4206240"/>
+            <a:ext cx="1664208" cy="164592"/>
           </a:xfrm>
           <a:prstGeom prst="rect">
             <a:avLst/>
@@ -9030,14 +10160,14 @@
       </p:sp>
       <p:sp>
         <p:nvSpPr>
-          <p:cNvPr id="116" name="TextBox 115"/>
-          <p:cNvSpPr txBox="1"/>
-          <p:nvPr/>
-        </p:nvSpPr>
-        <p:spPr>
-          <a:xfrm>
-            <a:off x="13286232" y="4352544"/>
-            <a:ext cx="1709928" cy="219456"/>
+          <p:cNvPr id="143" name="TextBox 142"/>
+          <p:cNvSpPr txBox="1"/>
+          <p:nvPr/>
+        </p:nvSpPr>
+        <p:spPr>
+          <a:xfrm>
+            <a:off x="13377672" y="4352544"/>
+            <a:ext cx="1664208" cy="219456"/>
           </a:xfrm>
           <a:prstGeom prst="rect">
             <a:avLst/>
@@ -9070,14 +10200,14 @@
       </p:sp>
       <p:sp>
         <p:nvSpPr>
-          <p:cNvPr id="117" name="TextBox 116"/>
-          <p:cNvSpPr txBox="1"/>
-          <p:nvPr/>
-        </p:nvSpPr>
-        <p:spPr>
-          <a:xfrm>
-            <a:off x="13286232" y="4590288"/>
-            <a:ext cx="1709928" cy="164592"/>
+          <p:cNvPr id="144" name="TextBox 143"/>
+          <p:cNvSpPr txBox="1"/>
+          <p:nvPr/>
+        </p:nvSpPr>
+        <p:spPr>
+          <a:xfrm>
+            <a:off x="13377672" y="4590288"/>
+            <a:ext cx="1664208" cy="164592"/>
           </a:xfrm>
           <a:prstGeom prst="rect">
             <a:avLst/>
@@ -9110,14 +10240,14 @@
       </p:sp>
       <p:sp>
         <p:nvSpPr>
-          <p:cNvPr id="118" name="TextBox 117"/>
-          <p:cNvSpPr txBox="1"/>
-          <p:nvPr/>
-        </p:nvSpPr>
-        <p:spPr>
-          <a:xfrm>
-            <a:off x="13286232" y="4736592"/>
-            <a:ext cx="1709928" cy="219456"/>
+          <p:cNvPr id="145" name="TextBox 144"/>
+          <p:cNvSpPr txBox="1"/>
+          <p:nvPr/>
+        </p:nvSpPr>
+        <p:spPr>
+          <a:xfrm>
+            <a:off x="13377672" y="4736592"/>
+            <a:ext cx="1664208" cy="219456"/>
           </a:xfrm>
           <a:prstGeom prst="rect">
             <a:avLst/>
@@ -9150,14 +10280,14 @@
       </p:sp>
       <p:sp>
         <p:nvSpPr>
-          <p:cNvPr id="119" name="TextBox 118"/>
-          <p:cNvSpPr txBox="1"/>
-          <p:nvPr/>
-        </p:nvSpPr>
-        <p:spPr>
-          <a:xfrm>
-            <a:off x="13286232" y="4974336"/>
-            <a:ext cx="1709928" cy="164592"/>
+          <p:cNvPr id="146" name="TextBox 145"/>
+          <p:cNvSpPr txBox="1"/>
+          <p:nvPr/>
+        </p:nvSpPr>
+        <p:spPr>
+          <a:xfrm>
+            <a:off x="13377672" y="4974336"/>
+            <a:ext cx="1664208" cy="164592"/>
           </a:xfrm>
           <a:prstGeom prst="rect">
             <a:avLst/>
@@ -9190,14 +10320,14 @@
       </p:sp>
       <p:sp>
         <p:nvSpPr>
-          <p:cNvPr id="120" name="TextBox 119"/>
-          <p:cNvSpPr txBox="1"/>
-          <p:nvPr/>
-        </p:nvSpPr>
-        <p:spPr>
-          <a:xfrm>
-            <a:off x="13286232" y="5120640"/>
-            <a:ext cx="1709928" cy="219456"/>
+          <p:cNvPr id="147" name="TextBox 146"/>
+          <p:cNvSpPr txBox="1"/>
+          <p:nvPr/>
+        </p:nvSpPr>
+        <p:spPr>
+          <a:xfrm>
+            <a:off x="13377672" y="5120640"/>
+            <a:ext cx="1664208" cy="219456"/>
           </a:xfrm>
           <a:prstGeom prst="rect">
             <a:avLst/>
@@ -9230,14 +10360,14 @@
       </p:sp>
       <p:sp>
         <p:nvSpPr>
-          <p:cNvPr id="121" name="Rectangle 120"/>
-          <p:cNvSpPr/>
-          <p:nvPr/>
-        </p:nvSpPr>
-        <p:spPr>
-          <a:xfrm>
-            <a:off x="15288768" y="3602735"/>
-            <a:ext cx="2002536" cy="1792224"/>
+          <p:cNvPr id="148" name="Rectangle 147"/>
+          <p:cNvSpPr/>
+          <p:nvPr/>
+        </p:nvSpPr>
+        <p:spPr>
+          <a:xfrm>
+            <a:off x="15334488" y="3602735"/>
+            <a:ext cx="1956816" cy="1792224"/>
           </a:xfrm>
           <a:prstGeom prst="rect">
             <a:avLst/>
@@ -9276,14 +10406,14 @@
       </p:sp>
       <p:sp>
         <p:nvSpPr>
-          <p:cNvPr id="122" name="Rectangle 121"/>
-          <p:cNvSpPr/>
-          <p:nvPr/>
-        </p:nvSpPr>
-        <p:spPr>
-          <a:xfrm>
-            <a:off x="15288768" y="3602735"/>
-            <a:ext cx="2002536" cy="45720"/>
+          <p:cNvPr id="149" name="Rectangle 148"/>
+          <p:cNvSpPr/>
+          <p:nvPr/>
+        </p:nvSpPr>
+        <p:spPr>
+          <a:xfrm>
+            <a:off x="15334488" y="3602735"/>
+            <a:ext cx="1956816" cy="45720"/>
           </a:xfrm>
           <a:prstGeom prst="rect">
             <a:avLst/>
@@ -9320,14 +10450,14 @@
       </p:sp>
       <p:sp>
         <p:nvSpPr>
-          <p:cNvPr id="123" name="TextBox 122"/>
-          <p:cNvSpPr txBox="1"/>
-          <p:nvPr/>
-        </p:nvSpPr>
-        <p:spPr>
-          <a:xfrm>
-            <a:off x="15435072" y="3694175"/>
-            <a:ext cx="1709928" cy="274320"/>
+          <p:cNvPr id="150" name="TextBox 149"/>
+          <p:cNvSpPr txBox="1"/>
+          <p:nvPr/>
+        </p:nvSpPr>
+        <p:spPr>
+          <a:xfrm>
+            <a:off x="15480792" y="3694175"/>
+            <a:ext cx="1664208" cy="274320"/>
           </a:xfrm>
           <a:prstGeom prst="rect">
             <a:avLst/>
@@ -9360,14 +10490,14 @@
       </p:sp>
       <p:sp>
         <p:nvSpPr>
-          <p:cNvPr id="124" name="TextBox 123"/>
-          <p:cNvSpPr txBox="1"/>
-          <p:nvPr/>
-        </p:nvSpPr>
-        <p:spPr>
-          <a:xfrm>
-            <a:off x="15435072" y="3968496"/>
-            <a:ext cx="1709928" cy="201168"/>
+          <p:cNvPr id="151" name="TextBox 150"/>
+          <p:cNvSpPr txBox="1"/>
+          <p:nvPr/>
+        </p:nvSpPr>
+        <p:spPr>
+          <a:xfrm>
+            <a:off x="15480792" y="3968496"/>
+            <a:ext cx="1664208" cy="201168"/>
           </a:xfrm>
           <a:prstGeom prst="rect">
             <a:avLst/>
@@ -9400,14 +10530,14 @@
       </p:sp>
       <p:sp>
         <p:nvSpPr>
-          <p:cNvPr id="125" name="TextBox 124"/>
-          <p:cNvSpPr txBox="1"/>
-          <p:nvPr/>
-        </p:nvSpPr>
-        <p:spPr>
-          <a:xfrm>
-            <a:off x="15435072" y="4206240"/>
-            <a:ext cx="1709928" cy="164592"/>
+          <p:cNvPr id="152" name="TextBox 151"/>
+          <p:cNvSpPr txBox="1"/>
+          <p:nvPr/>
+        </p:nvSpPr>
+        <p:spPr>
+          <a:xfrm>
+            <a:off x="15480792" y="4206240"/>
+            <a:ext cx="1664208" cy="164592"/>
           </a:xfrm>
           <a:prstGeom prst="rect">
             <a:avLst/>
@@ -9440,14 +10570,14 @@
       </p:sp>
       <p:sp>
         <p:nvSpPr>
-          <p:cNvPr id="126" name="TextBox 125"/>
-          <p:cNvSpPr txBox="1"/>
-          <p:nvPr/>
-        </p:nvSpPr>
-        <p:spPr>
-          <a:xfrm>
-            <a:off x="15435072" y="4352544"/>
-            <a:ext cx="1709928" cy="219456"/>
+          <p:cNvPr id="153" name="TextBox 152"/>
+          <p:cNvSpPr txBox="1"/>
+          <p:nvPr/>
+        </p:nvSpPr>
+        <p:spPr>
+          <a:xfrm>
+            <a:off x="15480792" y="4352544"/>
+            <a:ext cx="1664208" cy="219456"/>
           </a:xfrm>
           <a:prstGeom prst="rect">
             <a:avLst/>
@@ -9480,14 +10610,14 @@
       </p:sp>
       <p:sp>
         <p:nvSpPr>
-          <p:cNvPr id="127" name="TextBox 126"/>
-          <p:cNvSpPr txBox="1"/>
-          <p:nvPr/>
-        </p:nvSpPr>
-        <p:spPr>
-          <a:xfrm>
-            <a:off x="15435072" y="4590288"/>
-            <a:ext cx="1709928" cy="164592"/>
+          <p:cNvPr id="154" name="TextBox 153"/>
+          <p:cNvSpPr txBox="1"/>
+          <p:nvPr/>
+        </p:nvSpPr>
+        <p:spPr>
+          <a:xfrm>
+            <a:off x="15480792" y="4590288"/>
+            <a:ext cx="1664208" cy="164592"/>
           </a:xfrm>
           <a:prstGeom prst="rect">
             <a:avLst/>
@@ -9520,14 +10650,14 @@
       </p:sp>
       <p:sp>
         <p:nvSpPr>
-          <p:cNvPr id="128" name="TextBox 127"/>
-          <p:cNvSpPr txBox="1"/>
-          <p:nvPr/>
-        </p:nvSpPr>
-        <p:spPr>
-          <a:xfrm>
-            <a:off x="15435072" y="4736592"/>
-            <a:ext cx="1709928" cy="219456"/>
+          <p:cNvPr id="155" name="TextBox 154"/>
+          <p:cNvSpPr txBox="1"/>
+          <p:nvPr/>
+        </p:nvSpPr>
+        <p:spPr>
+          <a:xfrm>
+            <a:off x="15480792" y="4736592"/>
+            <a:ext cx="1664208" cy="219456"/>
           </a:xfrm>
           <a:prstGeom prst="rect">
             <a:avLst/>
@@ -9560,14 +10690,14 @@
       </p:sp>
       <p:sp>
         <p:nvSpPr>
-          <p:cNvPr id="129" name="TextBox 128"/>
-          <p:cNvSpPr txBox="1"/>
-          <p:nvPr/>
-        </p:nvSpPr>
-        <p:spPr>
-          <a:xfrm>
-            <a:off x="15435072" y="4974336"/>
-            <a:ext cx="1709928" cy="164592"/>
+          <p:cNvPr id="156" name="TextBox 155"/>
+          <p:cNvSpPr txBox="1"/>
+          <p:nvPr/>
+        </p:nvSpPr>
+        <p:spPr>
+          <a:xfrm>
+            <a:off x="15480792" y="4974336"/>
+            <a:ext cx="1664208" cy="164592"/>
           </a:xfrm>
           <a:prstGeom prst="rect">
             <a:avLst/>
@@ -9600,14 +10730,14 @@
       </p:sp>
       <p:sp>
         <p:nvSpPr>
-          <p:cNvPr id="130" name="TextBox 129"/>
-          <p:cNvSpPr txBox="1"/>
-          <p:nvPr/>
-        </p:nvSpPr>
-        <p:spPr>
-          <a:xfrm>
-            <a:off x="15435072" y="5120640"/>
-            <a:ext cx="1709928" cy="219456"/>
+          <p:cNvPr id="157" name="TextBox 156"/>
+          <p:cNvSpPr txBox="1"/>
+          <p:nvPr/>
+        </p:nvSpPr>
+        <p:spPr>
+          <a:xfrm>
+            <a:off x="15480792" y="5120640"/>
+            <a:ext cx="1664208" cy="219456"/>
           </a:xfrm>
           <a:prstGeom prst="rect">
             <a:avLst/>
@@ -9640,14 +10770,14 @@
       </p:sp>
       <p:sp>
         <p:nvSpPr>
-          <p:cNvPr id="131" name="TextBox 130"/>
-          <p:cNvSpPr txBox="1"/>
-          <p:nvPr/>
-        </p:nvSpPr>
-        <p:spPr>
-          <a:xfrm>
-            <a:off x="13139928" y="5541264"/>
-            <a:ext cx="4151376" cy="201168"/>
+          <p:cNvPr id="158" name="TextBox 157"/>
+          <p:cNvSpPr txBox="1"/>
+          <p:nvPr/>
+        </p:nvSpPr>
+        <p:spPr>
+          <a:xfrm>
+            <a:off x="13231368" y="5541264"/>
+            <a:ext cx="4059936" cy="201168"/>
           </a:xfrm>
           <a:prstGeom prst="rect">
             <a:avLst/>
@@ -9680,14 +10810,14 @@
       </p:sp>
       <p:sp>
         <p:nvSpPr>
-          <p:cNvPr id="132" name="TextBox 131"/>
-          <p:cNvSpPr txBox="1"/>
-          <p:nvPr/>
-        </p:nvSpPr>
-        <p:spPr>
-          <a:xfrm>
-            <a:off x="13139928" y="5742431"/>
-            <a:ext cx="4151376" cy="603504"/>
+          <p:cNvPr id="159" name="TextBox 158"/>
+          <p:cNvSpPr txBox="1"/>
+          <p:nvPr/>
+        </p:nvSpPr>
+        <p:spPr>
+          <a:xfrm>
+            <a:off x="13231368" y="5742431"/>
+            <a:ext cx="4059936" cy="603504"/>
           </a:xfrm>
           <a:prstGeom prst="rect">
             <a:avLst/>
@@ -9720,14 +10850,14 @@
       </p:sp>
       <p:sp>
         <p:nvSpPr>
-          <p:cNvPr id="133" name="TextBox 132"/>
-          <p:cNvSpPr txBox="1"/>
-          <p:nvPr/>
-        </p:nvSpPr>
-        <p:spPr>
-          <a:xfrm>
-            <a:off x="13139928" y="6345936"/>
-            <a:ext cx="4151376" cy="219456"/>
+          <p:cNvPr id="160" name="TextBox 159"/>
+          <p:cNvSpPr txBox="1"/>
+          <p:nvPr/>
+        </p:nvSpPr>
+        <p:spPr>
+          <a:xfrm>
+            <a:off x="13231368" y="6345936"/>
+            <a:ext cx="4059936" cy="219456"/>
           </a:xfrm>
           <a:prstGeom prst="rect">
             <a:avLst/>
@@ -9760,14 +10890,14 @@
       </p:sp>
       <p:sp>
         <p:nvSpPr>
-          <p:cNvPr id="134" name="Rectangle 133"/>
-          <p:cNvSpPr/>
-          <p:nvPr/>
-        </p:nvSpPr>
-        <p:spPr>
-          <a:xfrm>
-            <a:off x="13139928" y="6656831"/>
-            <a:ext cx="4151376" cy="1554480"/>
+          <p:cNvPr id="161" name="Rectangle 160"/>
+          <p:cNvSpPr/>
+          <p:nvPr/>
+        </p:nvSpPr>
+        <p:spPr>
+          <a:xfrm>
+            <a:off x="13231368" y="6656831"/>
+            <a:ext cx="4059936" cy="1554480"/>
           </a:xfrm>
           <a:prstGeom prst="rect">
             <a:avLst/>
@@ -9804,14 +10934,14 @@
       </p:sp>
       <p:sp>
         <p:nvSpPr>
-          <p:cNvPr id="135" name="TextBox 134"/>
-          <p:cNvSpPr txBox="1"/>
-          <p:nvPr/>
-        </p:nvSpPr>
-        <p:spPr>
-          <a:xfrm>
-            <a:off x="13341096" y="6784847"/>
-            <a:ext cx="3749040" cy="1298448"/>
+          <p:cNvPr id="162" name="TextBox 161"/>
+          <p:cNvSpPr txBox="1"/>
+          <p:nvPr/>
+        </p:nvSpPr>
+        <p:spPr>
+          <a:xfrm>
+            <a:off x="13432536" y="6784847"/>
+            <a:ext cx="3657600" cy="1298448"/>
           </a:xfrm>
           <a:prstGeom prst="rect">
             <a:avLst/>
@@ -9861,7 +10991,7 @@
       </p:sp>
       <p:sp>
         <p:nvSpPr>
-          <p:cNvPr id="136" name="Rectangle 135"/>
+          <p:cNvPr id="163" name="Rectangle 162"/>
           <p:cNvSpPr/>
           <p:nvPr/>
         </p:nvSpPr>
@@ -9905,7 +11035,7 @@
       </p:sp>
       <p:sp>
         <p:nvSpPr>
-          <p:cNvPr id="137" name="TextBox 136"/>
+          <p:cNvPr id="164" name="TextBox 163"/>
           <p:cNvSpPr txBox="1"/>
           <p:nvPr/>
         </p:nvSpPr>
@@ -9945,7 +11075,7 @@
       </p:sp>
       <p:sp>
         <p:nvSpPr>
-          <p:cNvPr id="138" name="TextBox 137"/>
+          <p:cNvPr id="165" name="TextBox 164"/>
           <p:cNvSpPr txBox="1"/>
           <p:nvPr/>
         </p:nvSpPr>
@@ -9978,7 +11108,7 @@
                 <a:latin typeface="Arial"/>
                 <a:ea typeface="Arial"/>
               </a:rPr>
-              <a:t>고객과 함께 수요를 설계하고 판단을 끊지 않는 것이 HBM의 교훈이었고, 지금 그 수요는 KV 캐시의 내구성입니다.</a:t>
+              <a:t>HBM의 교훈은 수요를 고객과 함께 설계하는 것이었고, 그 수요가 지금 HBM에서 넘쳐 NAND로 내려옵니다.</a:t>
             </a:r>
           </a:p>
           <a:p>
@@ -10002,7 +11132,7 @@
       </p:sp>
       <p:sp>
         <p:nvSpPr>
-          <p:cNvPr id="139" name="Rectangle 138"/>
+          <p:cNvPr id="166" name="Rectangle 165"/>
           <p:cNvSpPr/>
           <p:nvPr/>
         </p:nvSpPr>
@@ -10046,7 +11176,7 @@
       </p:sp>
       <p:sp>
         <p:nvSpPr>
-          <p:cNvPr id="140" name="Rectangle 139"/>
+          <p:cNvPr id="167" name="Rectangle 166"/>
           <p:cNvSpPr/>
           <p:nvPr/>
         </p:nvSpPr>
@@ -10090,7 +11220,7 @@
       </p:sp>
       <p:sp>
         <p:nvSpPr>
-          <p:cNvPr id="141" name="TextBox 140"/>
+          <p:cNvPr id="168" name="TextBox 167"/>
           <p:cNvSpPr txBox="1"/>
           <p:nvPr/>
         </p:nvSpPr>
@@ -10147,7 +11277,7 @@
       </p:sp>
       <p:sp>
         <p:nvSpPr>
-          <p:cNvPr id="142" name="TextBox 141"/>
+          <p:cNvPr id="169" name="TextBox 168"/>
           <p:cNvSpPr txBox="1"/>
           <p:nvPr/>
         </p:nvSpPr>
@@ -10180,14 +11310,14 @@
                 <a:latin typeface="Arial"/>
                 <a:ea typeface="Arial"/>
               </a:rPr>
-              <a:t>출처: AMD·SK하이닉스 HBM 공동 개발(2013-12), JEDEC JESD238·270-4, NVIDIA·SK하이닉스 다년 기술 파트너십(2026-06-07), CNBC 2024-11-08(2019년 조직 판단 ⚠️ 단일 출처 계열), Counterpoint·TrendForce(점유율), Kioxia GTC 2026, Solidigm·Kioxia 사양</a:t>
-            </a:r>
-          </a:p>
-        </p:txBody>
-      </p:sp>
-      <p:sp>
-        <p:nvSpPr>
-          <p:cNvPr id="143" name="TextBox 142"/>
+              <a:t>출처: HBM 연표 각사 발표 · JEDEC JESD270-4, CNBC 2024-11-08(2019년 판단 ⚠️ 단일 출처), TrendForce(점유율 · 2026-08-18 HBM→NAND 스필오버), NVIDIA Dynamo KVBM·CMX, 서울경제 2026-07-20(CMX 🟡), Kioxia GTC 2026</a:t>
+            </a:r>
+          </a:p>
+        </p:txBody>
+      </p:sp>
+      <p:sp>
+        <p:nvSpPr>
+          <p:cNvPr id="170" name="TextBox 169"/>
           <p:cNvSpPr txBox="1"/>
           <p:nvPr/>
         </p:nvSpPr>

--- a/outputs/presentation/qlc-ssd-strategy.pptx
+++ b/outputs/presentation/qlc-ssd-strategy.pptx
@@ -508,7 +508,7 @@
           <a:lstStyle/>
           <a:p>
             <a:r>
-              <a:t>1장은 문제 제기입니다. 결론은 내리지 않고, 고용량 QLC에서 DWPD를 높일 해법이 필요한 상황임을 세웁니다. 왼쪽이 교훈, 가운데가 지금 수요의 이동, 오른쪽이 문제입니다. 왼쪽 교훈입니다. 두 레인은 같은 기술을 가진 두 회사의 다른 판단입니다. SK하이닉스는 2013년 AMD와 HBM을 공동 개발했고, 2021년 10월 JEDEC 표준보다 먼저 HBM3 개발을 마쳐 2022년 6월 NVIDIA에 업계 최초로 공급했으며, 2023년 한 해 동안 유일한 양산사였습니다. 그 결과가 2025년 6월 DRAM 매출 1위로, 1992년 이후 처음 있는 역전이었습니다. 2026년 6월에는 NVIDIA와 다년 기술 파트너십을 맺고 Vera Rubin용 메모리를 공동 개발합니다. 아래 레인이 삼성입니다. 중요한 것은 기술이 없지 않았다는 점입니다. 업계 최초 HBM2E는 2019년 3월 삼성이 발표했습니다. 같은 해에 HBM 시장 성장률이 과대평가됐다는 판단으로 전담 조직이 후순위가 됐고, 2024년 4월에야 전담 팀이 재구성되어 5년의 공백이 생겼으며, 12단 HBM3E는 2025년 9월에야 NVIDIA 퀄을 통과해 Blackwell 사이클을 놓쳤습니다. 2019년 조직 판단은 CNBC 보도 계열의 단일 출처이므로 그 점을 밝혀 둡니다. 그리고 그 해 삼성은 감산도 CapEx 삭감도 하지 않았습니다. 돈이 아니라 우선순위의 문제였습니다. 교훈을 한 줄로 쓰면 기술이 없어서가 아니라 시장을 작게 봤기 때문입니다. 그리고 구속력 있는 규격은 표준이 아니라 고객의 사양이었습니다. JEDEC HBM4 표준은 최대 8Gbps인데 NVIDIA는 10에서 13Gbps를 요구했고, 승부는 그 위에서 갈렸습니다. 삼성도 표준 제정 9개사 중 하나였으므로 테이블에 앉았는지가 아니라 고객 사양에 맞췄는지가 변수였습니다. 다만 이 교훈을 영구적 판정으로 쓰면 안 됩니다. 삼성은 2025년 4분기 DRAM 1위를 탈환했고, 2026년 2월 업계 최초로 상용 HBM4를 출하했으며, 2026년 2분기 HBM 점유율은 33%로 직전 분기 대비 12%포인트 올랐습니다. 되돌릴 수 있다는 것도 같은 기록이 보여 줍니다. 변수는 판단을 끊지 않는 것이고, 다음 수요에서 같은 판단을 다시 해야 합니다. 가운데가 지금의 수요입니다. 먼저 구매 기준입니다. 2008년에서 2012년은 성능과 용량당 가격, 2012년에서 2021년은 QoS와 지연 꼬리였습니다. OCP 사양 v2.0이 2021년 7월 지연 모니터를 의무화하면서 제도화됐습니다. 2022년 이후는 용량 밀도와 전력 효율, 물량 확보가 상위 기준입니다. 그 위에 새 수요가 올라왔습니다. 여기가 이번에 추가한 부분입니다. AI 메모리 수요가 HBM 밖으로 넘치고 있습니다. 추론에서 컨텍스트가 길어지고 동시 사용자가 늘면 KV 캐시가 GPU의 HBM을 먼저 채웁니다. HBM은 가속기당 용량이 고정된 계층이라 더 담을 수 없고, 넘친 것은 CPU DRAM으로 내려옵니다. DRAM도 용량당 단가가 벽이어서 다시 넘치고, 그 아래에서 받는 것이 NVMe SSD입니다. 이것은 제 해석이 아니라 NVIDIA Dynamo의 KV 블록 매니저가 실제로 쓰는 4단 위계입니다. G1이 GPU HBM, G2가 CPU DRAM, G3가 로컬 또는 풀 NVMe SSD, G4가 원격 스토리지입니다. NVIDIA는 여기서 더 나아가 CMX로 이 계층을 컨텍스트 메모리 스토리지라는 플랫폼으로 규정했습니다. 시장에서도 같은 말이 나옵니다. TrendForce는 2026년 8월 18일에 Vera Rubin의 HBM에서 NAND로의 스필오버라고 적었고, CMX가 6월 저점 대비 TLC 현물가 반등을 견인했다고 했습니다. 규모로는 CMX의 NAND 소요가 2026년 35엑사바이트에서 2027년 100엑사바이트 이상으로 추정되고, 이것은 SanDisk가 따로 발표한 KV 캐시 수요 2027년 75에서 100엑사바이트와 독립적인 경로인데 같은 자리에서 만납니다. 삼성은 이미 V낸드 캐파의 약 60%를 CMX 대응에 배정한 것으로 보도됐습니다. 이 두 숫자는 보도와 분석가 추정 계열이므로 등급을 낮춰 읽어야 합니다. 한 가지는 분명히 해 두겠습니다. HBM 수요가 줄어서 스토리지로 옮겨 간 것이 아닙니다. HBM은 계속 늘고 있고, 그 위에서 넘친 몫이 새로 스토리지 계층을 열었다는 뜻입니다. 대체가 아니라 스필오버입니다. 그래서 SSD에 오는 요구가 내구성입니다. 추론 수요는 연평균 86%로 학습의 16%보다 훨씬 빠르게 크고, 추론 캐시 계층은 쓰기가 몰리는 첫 대용량 계층입니다. Kioxia는 이 계층 제품으로 CM9 TLC 3 DWPD를 지목했습니다. 요구는 1에서 3 DWPD입니다. 오른쪽이 문제입니다. 요구 1에서 3 DWPD는 TLC로는 이미 충족됩니다. 그런데 고객은 QLC를 원합니다. 용량 밀도가 245TB급으로 네 배이고 TB당 가격이 20에서 30% 싸기 때문입니다. 반면 QLC의 정격은 0.6으로 요구와 2배에서 5배 거리가 있습니다. 고객은 QLC의 밀도와 원가로 TLC의 내구성을 요구하는 셈이고, 이 간극을 메우는 것이 우리가 풀 문제입니다. 고용량화는 두 축의 문제를 낳습니다. 다이 수가 만드는 신뢰성 축이 2장, DWPD 격차가 만드는 내구성 축이 3장입니다.</a:t>
+              <a:t>1장은 문제 제기입니다. 결론은 내리지 않고, 고용량 QLC에서 DWPD를 높일 해법이 필요한 상황임을 세웁니다. 왼쪽이 교훈, 가운데가 지금 수요의 이동, 오른쪽이 문제입니다. 왼쪽 교훈입니다. 두 레인은 같은 기술을 가진 두 회사의 다른 판단입니다. SK하이닉스는 2013년 AMD와 HBM을 공동 개발했고, 2021년 10월 JEDEC 표준보다 먼저 HBM3 개발을 마쳐 2022년 6월 NVIDIA에 업계 최초로 공급했으며, 2023년 한 해 동안 유일한 양산사였습니다. 그 결과가 2025년 6월 DRAM 매출 1위로, 1992년 이후 처음 있는 역전이었습니다. 2026년 6월에는 NVIDIA와 다년 기술 파트너십을 맺고 Vera Rubin용 메모리를 공동 개발합니다. 아래 레인이 삼성입니다. 중요한 것은 기술이 없지 않았다는 점입니다. 업계 최초 HBM2E는 2019년 3월 삼성이 발표했습니다. 같은 해에 HBM 시장 성장률이 과대평가됐다는 판단으로 전담 조직이 후순위가 됐고, 2024년 4월에야 전담 팀이 재구성되어 5년의 공백이 생겼으며, 12단 HBM3E는 2025년 9월에야 NVIDIA 퀄을 통과해 Blackwell 사이클을 놓쳤습니다. 2019년 조직 판단은 CNBC 보도 계열의 단일 출처이므로 그 점을 밝혀 둡니다. 그리고 그 해 삼성은 감산도 CapEx 삭감도 하지 않았습니다. 돈이 아니라 우선순위의 문제였습니다. 교훈을 한 줄로 쓰면 기술이 없어서가 아니라 시장을 작게 봤기 때문입니다. 그리고 구속력 있는 규격은 표준이 아니라 고객의 사양이었습니다. JEDEC HBM4 표준은 최대 8Gbps인데 NVIDIA는 10에서 13Gbps를 요구했고, 승부는 그 위에서 갈렸습니다. 삼성도 표준 제정 9개사 중 하나였으므로 테이블에 앉았는지가 아니라 고객 사양에 맞췄는지가 변수였습니다. 다만 이 교훈을 영구적 판정으로 쓰면 안 됩니다. 삼성은 2025년 4분기 DRAM 1위를 탈환했고, 2026년 2월 업계 최초로 상용 HBM4를 출하했으며, 2026년 2분기 HBM 점유율은 33%로 직전 분기 대비 12%포인트 올랐습니다. 되돌릴 수 있다는 것도 같은 기록이 보여 줍니다. 변수는 판단을 끊지 않는 것이고, 다음 수요에서 같은 판단을 다시 해야 합니다. 가운데가 지금의 수요입니다. 먼저 구매 기준입니다. 2008년에서 2012년은 성능과 용량당 가격, 2012년에서 2021년은 QoS와 지연 꼬리였습니다. OCP 사양 v2.0이 2021년 7월 지연 모니터를 의무화하면서 제도화됐습니다. 2022년 이후는 용량 밀도와 전력 효율, 물량 확보가 상위 기준입니다. 그 위에 새 수요가 올라왔습니다. 여기가 이번에 추가한 부분입니다. KV 캐시가 HBM 용량을 넘어섭니다. 숫자로 보면 이렇습니다. NVIDIA 개발자 블로그 기준으로 Llama 3 70B에서 단일 사용자의 128K 컨텍스트 KV 캐시가 약 40기가바이트이고, 이것이 사용자 수에 선형으로 비례합니다. H100의 HBM이 80기가바이트니까 사용자 한 명이 절반을 씁니다. 그래서 넘친 것이 CPU DRAM으로 내려오는데, Kioxia는 DRAM만으로는 더 못 따라간다고 밝혔습니다. 다시 넘친 것을 받는 것이 NVMe SSD이고, 이 계층은 쓰기가 몰리는 첫 대용량 계층입니다. 근거는 세 갈래입니다. 첫째, 진단을 한 주체가 우리가 아닙니다. HBM 1위 업체인 SK하이닉스가 2026년 7월 29일 2분기 실적 발표에서 KV 캐시를 담을 HBM 용량이 한계에 도달하고 있다고 밝혔고, 같은 자리에서 GPU 인근 NAND 개발을 공표했습니다. 둘째, 오프로드는 슬라이드 위의 개념이 아니라 메인라인 코드입니다. LMCache 디스크 캐시가 2024년 8월, GPUDirect Storage 백엔드가 2025년 6월, vLLM 다계층 오프로딩이 2026년 5월에 머지됐고 전부 PR로 확인됩니다. 셋째, 비트의 무게중심이 이미 움직였습니다. 전 세계 NAND 비트 출하에서 엔터프라이즈 SSD 비중이 1년 만에 26%에서 48%로 올라갔습니다. 여기서 반드시 정정하고 갈 것이 있습니다. 이것은 HBM에서 스토리지로의 이동이 아니라 HBM 위에 얹는 증설입니다. 근거가 셋입니다. 하나, SK하이닉스 본인의 단어가 대체가 아니라 추가 KV 캐시 저장소입니다. 둘, 같은 기간 GPU당 HBM 용량은 오히려 커집니다. 192기가바이트에서 288기가바이트를 거쳐 2027년 384기가바이트입니다. 셋, Micron의 계층 정의는 HBM을 핫 KV 캐시로 유지한 채 SSD를 영속 KV로 추가하는 구조이고, Kioxia가 못 따라간다고 지목한 것도 HBM이 아니라 DRAM이었습니다. 질문이 나오면 이렇게 답하시면 됩니다. HBM 수요가 줄어서 우리에게 오는 것이 아니라, HBM으로 감당이 안 되는 몫이 새 계층을 열었다는 뜻입니다. 반대 신호도 알고 있어야 합니다. 컨텍스트 전용 가속기인 Rubin CPX는 값싼 GDDR7로 발표됐다가 168기가바이트 HBM4로 재설계됐다는 보도가 있습니다. 애널리스트 보도이고 NVIDIA 공식 확인은 없습니다. 그리고 모델 측 효율 개선은 수요 총량을 깎는데 그 타격이 HBM보다 스토리지에 더 큽니다. DeepSeek V4.1-Flash는 KV 캐시의 HBM 요구를 75%, 영속 SSD 요구를 87.5% 줄였습니다. 이 계층이 커진다는 전망은 이 두 가지에 노출되어 있습니다. 그래서 SSD에 오는 요구가 내구성입니다. 추론 수요는 연평균 86%로 학습의 16%보다 훨씬 빠르게 큽니다. 삼성도 이미 V낸드 캐파의 약 60%를 CMX 대응에 배정한 것으로 보도됐습니다. 요구는 1에서 3 DWPD입니다. 오른쪽이 문제입니다. 요구 1에서 3 DWPD는 TLC로는 이미 충족됩니다. 그런데 고객은 QLC를 원합니다. 용량 밀도가 245TB급으로 네 배이고 TB당 가격이 20에서 30% 싸기 때문입니다. 반면 QLC의 정격은 0.6으로 요구와 2배에서 5배 거리가 있습니다. 고객은 QLC의 밀도와 원가로 TLC의 내구성을 요구하는 셈이고, 이 간극을 메우는 것이 우리가 풀 문제입니다. 고용량화는 두 축의 문제를 낳습니다. 다이 수가 만드는 신뢰성 축이 2장, DWPD 격차가 만드는 내구성 축이 3장입니다.</a:t>
             </a:r>
           </a:p>
         </p:txBody>
@@ -5387,7 +5387,7 @@
                 <a:latin typeface="Arial"/>
                 <a:ea typeface="Arial"/>
               </a:rPr>
-              <a:t>HBM이 보여 준 것은 기술의 차이가 아니라 시장을 보는 눈의 차이였습니다. 그리고 그 수요는 지금 HBM에서 넘쳐 스토리지 계층으로 내려오고 있습니다.</a:t>
+              <a:t>HBM이 보여 준 것은 기술의 차이가 아니라 시장을 보는 눈의 차이였습니다. 그리고 그 수요는 지금 HBM 용량을 넘어 스토리지 계층을 새로 얹고 있습니다.</a:t>
             </a:r>
           </a:p>
         </p:txBody>
@@ -7662,7 +7662,7 @@
                 <a:latin typeface="Arial"/>
                 <a:ea typeface="Arial"/>
               </a:rPr>
-              <a:t>지금 · 같은 수요가 스토리지로</a:t>
+              <a:t>지금 · HBM 위에 새 계층이 얹힌다</a:t>
             </a:r>
           </a:p>
         </p:txBody>
@@ -7702,7 +7702,7 @@
                 <a:latin typeface="Arial"/>
                 <a:ea typeface="Arial"/>
               </a:rPr>
-              <a:t>HBM에서 넘친 것이 NAND로 내려온다</a:t>
+              <a:t>KV 캐시가 HBM 용량을 넘어선다</a:t>
             </a:r>
           </a:p>
         </p:txBody>
@@ -7715,7 +7715,7 @@
         </p:nvSpPr>
         <p:spPr>
           <a:xfrm>
-            <a:off x="7251192" y="3310127"/>
+            <a:off x="7251192" y="3291839"/>
             <a:ext cx="5212080" cy="182880"/>
           </a:xfrm>
           <a:prstGeom prst="rect">
@@ -7755,8 +7755,8 @@
         </p:nvSpPr>
         <p:spPr>
           <a:xfrm>
-            <a:off x="7251192" y="3511296"/>
-            <a:ext cx="1591056" cy="640080"/>
+            <a:off x="7251192" y="3474720"/>
+            <a:ext cx="1591056" cy="585216"/>
           </a:xfrm>
           <a:prstGeom prst="rect">
             <a:avLst/>
@@ -7801,8 +7801,8 @@
         </p:nvSpPr>
         <p:spPr>
           <a:xfrm>
-            <a:off x="7324344" y="3566160"/>
-            <a:ext cx="1444752" cy="164592"/>
+            <a:off x="7324344" y="3511296"/>
+            <a:ext cx="1444752" cy="155448"/>
           </a:xfrm>
           <a:prstGeom prst="rect">
             <a:avLst/>
@@ -7821,7 +7821,7 @@
               </a:lnSpc>
             </a:pPr>
             <a:r>
-              <a:rPr sz="875" b="0">
+              <a:rPr sz="850" b="0">
                 <a:solidFill>
                   <a:srgbClr val="8A8A8A"/>
                 </a:solidFill>
@@ -7841,7 +7841,7 @@
         </p:nvSpPr>
         <p:spPr>
           <a:xfrm>
-            <a:off x="7306055" y="3739896"/>
+            <a:off x="7306055" y="3666744"/>
             <a:ext cx="1481328" cy="347472"/>
           </a:xfrm>
           <a:prstGeom prst="rect">
@@ -7881,8 +7881,8 @@
         </p:nvSpPr>
         <p:spPr>
           <a:xfrm>
-            <a:off x="8878824" y="3749039"/>
-            <a:ext cx="146303" cy="164592"/>
+            <a:off x="8878824" y="3694176"/>
+            <a:ext cx="146303" cy="155448"/>
           </a:xfrm>
           <a:prstGeom prst="rightArrow">
             <a:avLst/>
@@ -7925,8 +7925,8 @@
         </p:nvSpPr>
         <p:spPr>
           <a:xfrm>
-            <a:off x="9061704" y="3511296"/>
-            <a:ext cx="1591056" cy="640080"/>
+            <a:off x="9061704" y="3474720"/>
+            <a:ext cx="1591056" cy="585216"/>
           </a:xfrm>
           <a:prstGeom prst="rect">
             <a:avLst/>
@@ -7971,8 +7971,8 @@
         </p:nvSpPr>
         <p:spPr>
           <a:xfrm>
-            <a:off x="9134856" y="3566160"/>
-            <a:ext cx="1444752" cy="164592"/>
+            <a:off x="9134856" y="3511296"/>
+            <a:ext cx="1444752" cy="155448"/>
           </a:xfrm>
           <a:prstGeom prst="rect">
             <a:avLst/>
@@ -7991,7 +7991,7 @@
               </a:lnSpc>
             </a:pPr>
             <a:r>
-              <a:rPr sz="875" b="0">
+              <a:rPr sz="850" b="0">
                 <a:solidFill>
                   <a:srgbClr val="8A8A8A"/>
                 </a:solidFill>
@@ -8011,7 +8011,7 @@
         </p:nvSpPr>
         <p:spPr>
           <a:xfrm>
-            <a:off x="9116568" y="3739896"/>
+            <a:off x="9116568" y="3666744"/>
             <a:ext cx="1481328" cy="347472"/>
           </a:xfrm>
           <a:prstGeom prst="rect">
@@ -8051,8 +8051,8 @@
         </p:nvSpPr>
         <p:spPr>
           <a:xfrm>
-            <a:off x="10689336" y="3749039"/>
-            <a:ext cx="146303" cy="164592"/>
+            <a:off x="10689336" y="3694176"/>
+            <a:ext cx="146303" cy="155448"/>
           </a:xfrm>
           <a:prstGeom prst="rightArrow">
             <a:avLst/>
@@ -8095,8 +8095,8 @@
         </p:nvSpPr>
         <p:spPr>
           <a:xfrm>
-            <a:off x="10872216" y="3511296"/>
-            <a:ext cx="1591056" cy="640080"/>
+            <a:off x="10872216" y="3474720"/>
+            <a:ext cx="1591056" cy="585216"/>
           </a:xfrm>
           <a:prstGeom prst="rect">
             <a:avLst/>
@@ -8139,8 +8139,8 @@
         </p:nvSpPr>
         <p:spPr>
           <a:xfrm>
-            <a:off x="10945368" y="3566160"/>
-            <a:ext cx="1444752" cy="164592"/>
+            <a:off x="10945368" y="3511296"/>
+            <a:ext cx="1444752" cy="155448"/>
           </a:xfrm>
           <a:prstGeom prst="rect">
             <a:avLst/>
@@ -8159,7 +8159,7 @@
               </a:lnSpc>
             </a:pPr>
             <a:r>
-              <a:rPr sz="875" b="0">
+              <a:rPr sz="850" b="0">
                 <a:solidFill>
                   <a:srgbClr val="AAB8E8"/>
                 </a:solidFill>
@@ -8179,7 +8179,7 @@
         </p:nvSpPr>
         <p:spPr>
           <a:xfrm>
-            <a:off x="10927080" y="3739896"/>
+            <a:off x="10927080" y="3666744"/>
             <a:ext cx="1481328" cy="347472"/>
           </a:xfrm>
           <a:prstGeom prst="rect">
@@ -8219,7 +8219,7 @@
         </p:nvSpPr>
         <p:spPr>
           <a:xfrm>
-            <a:off x="7251192" y="4297680"/>
+            <a:off x="7251192" y="4187951"/>
             <a:ext cx="5212080" cy="201168"/>
           </a:xfrm>
           <a:prstGeom prst="rect">
@@ -8256,7 +8256,7 @@
                 <a:latin typeface="Arial"/>
                 <a:ea typeface="Arial"/>
               </a:rPr>
-              <a:t>AI 메모리 수요가 HBM 밖으로 넘칩니다</a:t>
+              <a:t>KV 캐시가 HBM 용량을 넘어섭니다</a:t>
             </a:r>
           </a:p>
         </p:txBody>
@@ -8269,8 +8269,8 @@
         </p:nvSpPr>
         <p:spPr>
           <a:xfrm>
-            <a:off x="7251192" y="4535424"/>
-            <a:ext cx="5212080" cy="512064"/>
+            <a:off x="7251192" y="4416551"/>
+            <a:ext cx="5212080" cy="475488"/>
           </a:xfrm>
           <a:prstGeom prst="rect">
             <a:avLst/>
@@ -8313,8 +8313,8 @@
         </p:nvSpPr>
         <p:spPr>
           <a:xfrm>
-            <a:off x="7251192" y="4535424"/>
-            <a:ext cx="530352" cy="512064"/>
+            <a:off x="7251192" y="4416551"/>
+            <a:ext cx="512064" cy="475488"/>
           </a:xfrm>
           <a:prstGeom prst="rect">
             <a:avLst/>
@@ -8357,8 +8357,8 @@
         </p:nvSpPr>
         <p:spPr>
           <a:xfrm>
-            <a:off x="7251192" y="4535424"/>
-            <a:ext cx="530352" cy="512064"/>
+            <a:off x="7251192" y="4416551"/>
+            <a:ext cx="512064" cy="475488"/>
           </a:xfrm>
           <a:prstGeom prst="rect">
             <a:avLst/>
@@ -8397,8 +8397,8 @@
         </p:nvSpPr>
         <p:spPr>
           <a:xfrm>
-            <a:off x="7909560" y="4599432"/>
-            <a:ext cx="1664208" cy="228600"/>
+            <a:off x="7891271" y="4462271"/>
+            <a:ext cx="1700784" cy="219456"/>
           </a:xfrm>
           <a:prstGeom prst="rect">
             <a:avLst/>
@@ -8417,7 +8417,7 @@
               </a:lnSpc>
             </a:pPr>
             <a:r>
-              <a:rPr sz="1275" b="1">
+              <a:rPr sz="1200" b="1">
                 <a:solidFill>
                   <a:srgbClr val="FFFFFF"/>
                 </a:solidFill>
@@ -8437,8 +8437,8 @@
         </p:nvSpPr>
         <p:spPr>
           <a:xfrm>
-            <a:off x="7909560" y="4828032"/>
-            <a:ext cx="1664208" cy="173736"/>
+            <a:off x="7891271" y="4681727"/>
+            <a:ext cx="1700784" cy="173736"/>
           </a:xfrm>
           <a:prstGeom prst="rect">
             <a:avLst/>
@@ -8457,14 +8457,14 @@
               </a:lnSpc>
             </a:pPr>
             <a:r>
-              <a:rPr sz="875" b="0">
+              <a:rPr sz="850" b="0">
                 <a:solidFill>
                   <a:srgbClr val="AAB8E8"/>
                 </a:solidFill>
                 <a:latin typeface="Arial"/>
                 <a:ea typeface="Arial"/>
               </a:rPr>
-              <a:t>용량이 고정된 계층</a:t>
+              <a:t>80 → 288GB로 커졌지만</a:t>
             </a:r>
           </a:p>
         </p:txBody>
@@ -8477,7 +8477,7 @@
         </p:nvSpPr>
         <p:spPr>
           <a:xfrm>
-            <a:off x="9646920" y="4572000"/>
+            <a:off x="9646920" y="4434839"/>
             <a:ext cx="2688336" cy="438912"/>
           </a:xfrm>
           <a:prstGeom prst="rect">
@@ -8497,14 +8497,14 @@
               </a:lnSpc>
             </a:pPr>
             <a:r>
-              <a:rPr sz="950" b="0">
+              <a:rPr sz="900" b="0">
                 <a:solidFill>
                   <a:srgbClr val="AAB8E8"/>
                 </a:solidFill>
                 <a:latin typeface="Arial"/>
                 <a:ea typeface="Arial"/>
               </a:rPr>
-              <a:t>길어진 컨텍스트가 먼저 채웁니다</a:t>
+              <a:t>단일 사용자 128K 컨텍스트가 약 40GB · 사용자 수에 비례</a:t>
             </a:r>
           </a:p>
         </p:txBody>
@@ -8517,8 +8517,8 @@
         </p:nvSpPr>
         <p:spPr>
           <a:xfrm>
-            <a:off x="7443216" y="5056631"/>
-            <a:ext cx="146304" cy="146304"/>
+            <a:off x="7434071" y="4901183"/>
+            <a:ext cx="146304" cy="128016"/>
           </a:xfrm>
           <a:prstGeom prst="downArrow">
             <a:avLst/>
@@ -8561,8 +8561,8 @@
         </p:nvSpPr>
         <p:spPr>
           <a:xfrm>
-            <a:off x="7671816" y="5047488"/>
-            <a:ext cx="4700016" cy="164592"/>
+            <a:off x="7653527" y="4892040"/>
+            <a:ext cx="4718304" cy="146304"/>
           </a:xfrm>
           <a:prstGeom prst="rect">
             <a:avLst/>
@@ -8601,8 +8601,8 @@
         </p:nvSpPr>
         <p:spPr>
           <a:xfrm>
-            <a:off x="7251192" y="5212080"/>
-            <a:ext cx="5212080" cy="512064"/>
+            <a:off x="7251192" y="5038343"/>
+            <a:ext cx="5212080" cy="475488"/>
           </a:xfrm>
           <a:prstGeom prst="rect">
             <a:avLst/>
@@ -8647,8 +8647,8 @@
         </p:nvSpPr>
         <p:spPr>
           <a:xfrm>
-            <a:off x="7251192" y="5212080"/>
-            <a:ext cx="530352" cy="512064"/>
+            <a:off x="7251192" y="5038343"/>
+            <a:ext cx="512064" cy="475488"/>
           </a:xfrm>
           <a:prstGeom prst="rect">
             <a:avLst/>
@@ -8691,8 +8691,8 @@
         </p:nvSpPr>
         <p:spPr>
           <a:xfrm>
-            <a:off x="7251192" y="5212080"/>
-            <a:ext cx="530352" cy="512064"/>
+            <a:off x="7251192" y="5038343"/>
+            <a:ext cx="512064" cy="475488"/>
           </a:xfrm>
           <a:prstGeom prst="rect">
             <a:avLst/>
@@ -8731,8 +8731,8 @@
         </p:nvSpPr>
         <p:spPr>
           <a:xfrm>
-            <a:off x="7909560" y="5276088"/>
-            <a:ext cx="1664208" cy="228600"/>
+            <a:off x="7891271" y="5084063"/>
+            <a:ext cx="1700784" cy="219456"/>
           </a:xfrm>
           <a:prstGeom prst="rect">
             <a:avLst/>
@@ -8751,7 +8751,7 @@
               </a:lnSpc>
             </a:pPr>
             <a:r>
-              <a:rPr sz="1275" b="1">
+              <a:rPr sz="1200" b="1">
                 <a:solidFill>
                   <a:srgbClr val="1A1A1A"/>
                 </a:solidFill>
@@ -8771,8 +8771,8 @@
         </p:nvSpPr>
         <p:spPr>
           <a:xfrm>
-            <a:off x="7909560" y="5504688"/>
-            <a:ext cx="1664208" cy="173736"/>
+            <a:off x="7891271" y="5303519"/>
+            <a:ext cx="1700784" cy="173736"/>
           </a:xfrm>
           <a:prstGeom prst="rect">
             <a:avLst/>
@@ -8791,14 +8791,14 @@
               </a:lnSpc>
             </a:pPr>
             <a:r>
-              <a:rPr sz="875" b="0">
+              <a:rPr sz="850" b="0">
                 <a:solidFill>
                   <a:srgbClr val="8A8A8A"/>
                 </a:solidFill>
                 <a:latin typeface="Arial"/>
                 <a:ea typeface="Arial"/>
               </a:rPr>
-              <a:t>노드 안팎의 확장</a:t>
+              <a:t>첫 확장</a:t>
             </a:r>
           </a:p>
         </p:txBody>
@@ -8811,7 +8811,7 @@
         </p:nvSpPr>
         <p:spPr>
           <a:xfrm>
-            <a:off x="9646920" y="5248656"/>
+            <a:off x="9646920" y="5056631"/>
             <a:ext cx="2688336" cy="438912"/>
           </a:xfrm>
           <a:prstGeom prst="rect">
@@ -8831,14 +8831,14 @@
               </a:lnSpc>
             </a:pPr>
             <a:r>
-              <a:rPr sz="950" b="0">
+              <a:rPr sz="900" b="0">
                 <a:solidFill>
                   <a:srgbClr val="555555"/>
                 </a:solidFill>
                 <a:latin typeface="Arial"/>
                 <a:ea typeface="Arial"/>
               </a:rPr>
-              <a:t>용량당 단가가 벽입니다</a:t>
+              <a:t>Kioxia — DRAM만으로는 더 못 따라간다</a:t>
             </a:r>
           </a:p>
         </p:txBody>
@@ -8851,8 +8851,8 @@
         </p:nvSpPr>
         <p:spPr>
           <a:xfrm>
-            <a:off x="7443216" y="5733288"/>
-            <a:ext cx="146304" cy="146304"/>
+            <a:off x="7434071" y="5522975"/>
+            <a:ext cx="146304" cy="128016"/>
           </a:xfrm>
           <a:prstGeom prst="downArrow">
             <a:avLst/>
@@ -8895,8 +8895,8 @@
         </p:nvSpPr>
         <p:spPr>
           <a:xfrm>
-            <a:off x="7671816" y="5724144"/>
-            <a:ext cx="4700016" cy="164592"/>
+            <a:off x="7653527" y="5513831"/>
+            <a:ext cx="4718304" cy="146304"/>
           </a:xfrm>
           <a:prstGeom prst="rect">
             <a:avLst/>
@@ -8935,8 +8935,8 @@
         </p:nvSpPr>
         <p:spPr>
           <a:xfrm>
-            <a:off x="7251192" y="5888736"/>
-            <a:ext cx="5212080" cy="512064"/>
+            <a:off x="7251192" y="5660136"/>
+            <a:ext cx="5212080" cy="475488"/>
           </a:xfrm>
           <a:prstGeom prst="rect">
             <a:avLst/>
@@ -8981,8 +8981,8 @@
         </p:nvSpPr>
         <p:spPr>
           <a:xfrm>
-            <a:off x="7251192" y="5888736"/>
-            <a:ext cx="530352" cy="512064"/>
+            <a:off x="7251192" y="5660136"/>
+            <a:ext cx="512064" cy="475488"/>
           </a:xfrm>
           <a:prstGeom prst="rect">
             <a:avLst/>
@@ -9025,8 +9025,8 @@
         </p:nvSpPr>
         <p:spPr>
           <a:xfrm>
-            <a:off x="7251192" y="5888736"/>
-            <a:ext cx="530352" cy="512064"/>
+            <a:off x="7251192" y="5660136"/>
+            <a:ext cx="512064" cy="475488"/>
           </a:xfrm>
           <a:prstGeom prst="rect">
             <a:avLst/>
@@ -9065,8 +9065,8 @@
         </p:nvSpPr>
         <p:spPr>
           <a:xfrm>
-            <a:off x="7909560" y="5952744"/>
-            <a:ext cx="1664208" cy="228600"/>
+            <a:off x="7891271" y="5705855"/>
+            <a:ext cx="1700784" cy="219456"/>
           </a:xfrm>
           <a:prstGeom prst="rect">
             <a:avLst/>
@@ -9085,7 +9085,7 @@
               </a:lnSpc>
             </a:pPr>
             <a:r>
-              <a:rPr sz="1275" b="1">
+              <a:rPr sz="1200" b="1">
                 <a:solidFill>
                   <a:srgbClr val="1428A0"/>
                 </a:solidFill>
@@ -9105,8 +9105,8 @@
         </p:nvSpPr>
         <p:spPr>
           <a:xfrm>
-            <a:off x="7909560" y="6181344"/>
-            <a:ext cx="1664208" cy="173736"/>
+            <a:off x="7891271" y="5925312"/>
+            <a:ext cx="1700784" cy="173736"/>
           </a:xfrm>
           <a:prstGeom prst="rect">
             <a:avLst/>
@@ -9125,14 +9125,14 @@
               </a:lnSpc>
             </a:pPr>
             <a:r>
-              <a:rPr sz="875" b="0">
+              <a:rPr sz="850" b="0">
                 <a:solidFill>
                   <a:srgbClr val="8A8A8A"/>
                 </a:solidFill>
                 <a:latin typeface="Arial"/>
                 <a:ea typeface="Arial"/>
               </a:rPr>
-              <a:t>새로 열린 계층</a:t>
+              <a:t>새로 얹힌 계층</a:t>
             </a:r>
           </a:p>
         </p:txBody>
@@ -9145,7 +9145,7 @@
         </p:nvSpPr>
         <p:spPr>
           <a:xfrm>
-            <a:off x="9646920" y="5925312"/>
+            <a:off x="9646920" y="5678423"/>
             <a:ext cx="2688336" cy="438912"/>
           </a:xfrm>
           <a:prstGeom prst="rect">
@@ -9165,7 +9165,7 @@
               </a:lnSpc>
             </a:pPr>
             <a:r>
-              <a:rPr sz="950" b="0">
+              <a:rPr sz="900" b="0">
                 <a:solidFill>
                   <a:srgbClr val="555555"/>
                 </a:solidFill>
@@ -9179,54 +9179,14 @@
       </p:sp>
       <p:sp>
         <p:nvSpPr>
-          <p:cNvPr id="120" name="TextBox 119"/>
-          <p:cNvSpPr txBox="1"/>
-          <p:nvPr/>
-        </p:nvSpPr>
-        <p:spPr>
-          <a:xfrm>
-            <a:off x="7251192" y="6446520"/>
-            <a:ext cx="5212080" cy="182880"/>
-          </a:xfrm>
-          <a:prstGeom prst="rect">
-            <a:avLst/>
-          </a:prstGeom>
-          <a:noFill/>
-        </p:spPr>
-        <p:txBody>
-          <a:bodyPr wrap="square" anchor="t" lIns="0" rIns="0" tIns="0" bIns="0">
-            <a:spAutoFit/>
-          </a:bodyPr>
-          <a:lstStyle/>
-          <a:p>
-            <a:pPr algn="l">
-              <a:lnSpc>
-                <a:spcPct val="112000"/>
-              </a:lnSpc>
-            </a:pPr>
-            <a:r>
-              <a:rPr sz="875" b="0">
-                <a:solidFill>
-                  <a:srgbClr val="8A8A8A"/>
-                </a:solidFill>
-                <a:latin typeface="Arial"/>
-                <a:ea typeface="Arial"/>
-              </a:rPr>
-              <a:t>NVIDIA Dynamo KVBM의 4단 위계 · HBM 수요가 준 것이 아니라 넘친 것이 내려왔습니다</a:t>
-            </a:r>
-          </a:p>
-        </p:txBody>
-      </p:sp>
-      <p:sp>
-        <p:nvSpPr>
-          <p:cNvPr id="121" name="Rectangle 120"/>
-          <p:cNvSpPr/>
-          <p:nvPr/>
-        </p:nvSpPr>
-        <p:spPr>
-          <a:xfrm>
-            <a:off x="7251192" y="6693408"/>
-            <a:ext cx="5212080" cy="804672"/>
+          <p:cNvPr id="120" name="Rectangle 119"/>
+          <p:cNvSpPr/>
+          <p:nvPr/>
+        </p:nvSpPr>
+        <p:spPr>
+          <a:xfrm>
+            <a:off x="7251192" y="6181343"/>
+            <a:ext cx="5212080" cy="219456"/>
           </a:xfrm>
           <a:prstGeom prst="rect">
             <a:avLst/>
@@ -9263,14 +9223,110 @@
       </p:sp>
       <p:sp>
         <p:nvSpPr>
-          <p:cNvPr id="122" name="TextBox 121"/>
-          <p:cNvSpPr txBox="1"/>
-          <p:nvPr/>
-        </p:nvSpPr>
-        <p:spPr>
-          <a:xfrm>
-            <a:off x="7415783" y="6748272"/>
-            <a:ext cx="4882896" cy="219456"/>
+          <p:cNvPr id="121" name="TextBox 120"/>
+          <p:cNvSpPr txBox="1"/>
+          <p:nvPr/>
+        </p:nvSpPr>
+        <p:spPr>
+          <a:xfrm>
+            <a:off x="7342631" y="6181343"/>
+            <a:ext cx="5029200" cy="219456"/>
+          </a:xfrm>
+          <a:prstGeom prst="rect">
+            <a:avLst/>
+          </a:prstGeom>
+          <a:noFill/>
+        </p:spPr>
+        <p:txBody>
+          <a:bodyPr wrap="square" anchor="ctr" lIns="0" rIns="0" tIns="0" bIns="0">
+            <a:spAutoFit/>
+          </a:bodyPr>
+          <a:lstStyle/>
+          <a:p>
+            <a:pPr algn="l">
+              <a:lnSpc>
+                <a:spcPct val="112000"/>
+              </a:lnSpc>
+            </a:pPr>
+            <a:r>
+              <a:rPr sz="900" b="1">
+                <a:solidFill>
+                  <a:srgbClr val="1428A0"/>
+                </a:solidFill>
+                <a:latin typeface="Arial"/>
+                <a:ea typeface="Arial"/>
+              </a:rPr>
+              <a:t>대체가 아니라 증설입니다  </a:t>
+            </a:r>
+            <a:r>
+              <a:rPr sz="900" b="0">
+                <a:solidFill>
+                  <a:srgbClr val="555555"/>
+                </a:solidFill>
+                <a:latin typeface="Arial"/>
+                <a:ea typeface="Arial"/>
+              </a:rPr>
+              <a:t>같은 기간 GPU당 HBM은 192 → 288GB, 2027년 384GB로 커집니다</a:t>
+            </a:r>
+          </a:p>
+        </p:txBody>
+      </p:sp>
+      <p:sp>
+        <p:nvSpPr>
+          <p:cNvPr id="122" name="Rectangle 121"/>
+          <p:cNvSpPr/>
+          <p:nvPr/>
+        </p:nvSpPr>
+        <p:spPr>
+          <a:xfrm>
+            <a:off x="7251192" y="6492239"/>
+            <a:ext cx="5212080" cy="950976"/>
+          </a:xfrm>
+          <a:prstGeom prst="rect">
+            <a:avLst/>
+          </a:prstGeom>
+          <a:solidFill>
+            <a:srgbClr val="FFFFFF"/>
+          </a:solidFill>
+          <a:ln w="12700">
+            <a:solidFill>
+              <a:srgbClr val="AAB8E8"/>
+            </a:solidFill>
+          </a:ln>
+          <a:effectLst/>
+        </p:spPr>
+        <p:style>
+          <a:lnRef idx="1">
+            <a:schemeClr val="accent1"/>
+          </a:lnRef>
+          <a:fillRef idx="3">
+            <a:schemeClr val="accent1"/>
+          </a:fillRef>
+          <a:effectRef idx="2">
+            <a:schemeClr val="accent1"/>
+          </a:effectRef>
+          <a:fontRef idx="minor">
+            <a:schemeClr val="lt1"/>
+          </a:fontRef>
+        </p:style>
+        <p:txBody>
+          <a:bodyPr rtlCol="0" anchor="ctr"/>
+          <a:lstStyle/>
+          <a:p>
+            <a:pPr algn="ctr"/>
+          </a:p>
+        </p:txBody>
+      </p:sp>
+      <p:sp>
+        <p:nvSpPr>
+          <p:cNvPr id="123" name="TextBox 122"/>
+          <p:cNvSpPr txBox="1"/>
+          <p:nvPr/>
+        </p:nvSpPr>
+        <p:spPr>
+          <a:xfrm>
+            <a:off x="7397496" y="6547103"/>
+            <a:ext cx="4919472" cy="219456"/>
           </a:xfrm>
           <a:prstGeom prst="rect">
             <a:avLst/>
@@ -9296,21 +9352,21 @@
                 <a:latin typeface="Arial"/>
                 <a:ea typeface="Arial"/>
               </a:rPr>
-              <a:t>「Vera Rubin의 HBM → NAND 스필오버」</a:t>
-            </a:r>
-          </a:p>
-        </p:txBody>
-      </p:sp>
-      <p:sp>
-        <p:nvSpPr>
-          <p:cNvPr id="123" name="TextBox 122"/>
-          <p:cNvSpPr txBox="1"/>
-          <p:nvPr/>
-        </p:nvSpPr>
-        <p:spPr>
-          <a:xfrm>
-            <a:off x="7415783" y="6958584"/>
-            <a:ext cx="4882896" cy="182880"/>
+              <a:t>「KV 캐시를 담을 HBM 용량이 한계에 도달했다」</a:t>
+            </a:r>
+          </a:p>
+        </p:txBody>
+      </p:sp>
+      <p:sp>
+        <p:nvSpPr>
+          <p:cNvPr id="124" name="TextBox 123"/>
+          <p:cNvSpPr txBox="1"/>
+          <p:nvPr/>
+        </p:nvSpPr>
+        <p:spPr>
+          <a:xfrm>
+            <a:off x="7397496" y="6757415"/>
+            <a:ext cx="4919472" cy="182880"/>
           </a:xfrm>
           <a:prstGeom prst="rect">
             <a:avLst/>
@@ -9336,21 +9392,65 @@
                 <a:latin typeface="Arial"/>
                 <a:ea typeface="Arial"/>
               </a:rPr>
-              <a:t>TrendForce 2026-08-18 · CMX가 TLC 현물가 반등을 견인했다고 적었습니다</a:t>
-            </a:r>
-          </a:p>
-        </p:txBody>
-      </p:sp>
-      <p:sp>
-        <p:nvSpPr>
-          <p:cNvPr id="124" name="TextBox 123"/>
-          <p:cNvSpPr txBox="1"/>
-          <p:nvPr/>
-        </p:nvSpPr>
-        <p:spPr>
-          <a:xfrm>
-            <a:off x="7415783" y="7150608"/>
-            <a:ext cx="2377440" cy="155448"/>
+              <a:t>SK하이닉스 2026-07-29 실적 발표 · 같은 자리에서 GPU 인근 NAND 개발 공표</a:t>
+            </a:r>
+          </a:p>
+        </p:txBody>
+      </p:sp>
+      <p:sp>
+        <p:nvSpPr>
+          <p:cNvPr id="125" name="Rectangle 124"/>
+          <p:cNvSpPr/>
+          <p:nvPr/>
+        </p:nvSpPr>
+        <p:spPr>
+          <a:xfrm>
+            <a:off x="7397496" y="6967727"/>
+            <a:ext cx="4919472" cy="10972"/>
+          </a:xfrm>
+          <a:prstGeom prst="rect">
+            <a:avLst/>
+          </a:prstGeom>
+          <a:solidFill>
+            <a:srgbClr val="D9D9D9"/>
+          </a:solidFill>
+          <a:ln>
+            <a:noFill/>
+          </a:ln>
+          <a:effectLst/>
+        </p:spPr>
+        <p:style>
+          <a:lnRef idx="1">
+            <a:schemeClr val="accent1"/>
+          </a:lnRef>
+          <a:fillRef idx="3">
+            <a:schemeClr val="accent1"/>
+          </a:fillRef>
+          <a:effectRef idx="2">
+            <a:schemeClr val="accent1"/>
+          </a:effectRef>
+          <a:fontRef idx="minor">
+            <a:schemeClr val="lt1"/>
+          </a:fontRef>
+        </p:style>
+        <p:txBody>
+          <a:bodyPr rtlCol="0" anchor="ctr"/>
+          <a:lstStyle/>
+          <a:p>
+            <a:pPr algn="ctr"/>
+          </a:p>
+        </p:txBody>
+      </p:sp>
+      <p:sp>
+        <p:nvSpPr>
+          <p:cNvPr id="126" name="TextBox 125"/>
+          <p:cNvSpPr txBox="1"/>
+          <p:nvPr/>
+        </p:nvSpPr>
+        <p:spPr>
+          <a:xfrm>
+            <a:off x="7397496" y="7022591"/>
+            <a:ext cx="2395728" cy="155448"/>
           </a:xfrm>
           <a:prstGeom prst="rect">
             <a:avLst/>
@@ -9376,21 +9476,21 @@
                 <a:latin typeface="Arial"/>
                 <a:ea typeface="Arial"/>
               </a:rPr>
-              <a:t>CMX NAND 소요</a:t>
-            </a:r>
-          </a:p>
-        </p:txBody>
-      </p:sp>
-      <p:sp>
-        <p:nvSpPr>
-          <p:cNvPr id="125" name="TextBox 124"/>
-          <p:cNvSpPr txBox="1"/>
-          <p:nvPr/>
-        </p:nvSpPr>
-        <p:spPr>
-          <a:xfrm>
-            <a:off x="7415783" y="7287768"/>
-            <a:ext cx="2377440" cy="182880"/>
+              <a:t>오프로드는 메인라인 코드</a:t>
+            </a:r>
+          </a:p>
+        </p:txBody>
+      </p:sp>
+      <p:sp>
+        <p:nvSpPr>
+          <p:cNvPr id="127" name="TextBox 126"/>
+          <p:cNvSpPr txBox="1"/>
+          <p:nvPr/>
+        </p:nvSpPr>
+        <p:spPr>
+          <a:xfrm>
+            <a:off x="7397496" y="7168895"/>
+            <a:ext cx="2395728" cy="219456"/>
           </a:xfrm>
           <a:prstGeom prst="rect">
             <a:avLst/>
@@ -9405,10 +9505,90 @@
           <a:p>
             <a:pPr algn="l">
               <a:lnSpc>
+                <a:spcPct val="100000"/>
+              </a:lnSpc>
+            </a:pPr>
+            <a:r>
+              <a:rPr sz="950" b="1">
+                <a:solidFill>
+                  <a:srgbClr val="1428A0"/>
+                </a:solidFill>
+                <a:latin typeface="Arial"/>
+                <a:ea typeface="Arial"/>
+              </a:rPr>
+              <a:t>LMCache 2024-08 → vLLM 2026-05</a:t>
+            </a:r>
+          </a:p>
+        </p:txBody>
+      </p:sp>
+      <p:sp>
+        <p:nvSpPr>
+          <p:cNvPr id="128" name="TextBox 127"/>
+          <p:cNvSpPr txBox="1"/>
+          <p:nvPr/>
+        </p:nvSpPr>
+        <p:spPr>
+          <a:xfrm>
+            <a:off x="9921240" y="7022591"/>
+            <a:ext cx="2395728" cy="155448"/>
+          </a:xfrm>
+          <a:prstGeom prst="rect">
+            <a:avLst/>
+          </a:prstGeom>
+          <a:noFill/>
+        </p:spPr>
+        <p:txBody>
+          <a:bodyPr wrap="square" anchor="t" lIns="0" rIns="0" tIns="0" bIns="0">
+            <a:spAutoFit/>
+          </a:bodyPr>
+          <a:lstStyle/>
+          <a:p>
+            <a:pPr algn="l">
+              <a:lnSpc>
                 <a:spcPct val="112000"/>
               </a:lnSpc>
             </a:pPr>
             <a:r>
+              <a:rPr sz="850" b="0">
+                <a:solidFill>
+                  <a:srgbClr val="8A8A8A"/>
+                </a:solidFill>
+                <a:latin typeface="Arial"/>
+                <a:ea typeface="Arial"/>
+              </a:rPr>
+              <a:t>NAND 비트 중 eSSD 비중</a:t>
+            </a:r>
+          </a:p>
+        </p:txBody>
+      </p:sp>
+      <p:sp>
+        <p:nvSpPr>
+          <p:cNvPr id="129" name="TextBox 128"/>
+          <p:cNvSpPr txBox="1"/>
+          <p:nvPr/>
+        </p:nvSpPr>
+        <p:spPr>
+          <a:xfrm>
+            <a:off x="9921240" y="7168895"/>
+            <a:ext cx="2395728" cy="219456"/>
+          </a:xfrm>
+          <a:prstGeom prst="rect">
+            <a:avLst/>
+          </a:prstGeom>
+          <a:noFill/>
+        </p:spPr>
+        <p:txBody>
+          <a:bodyPr wrap="square" anchor="t" lIns="0" rIns="0" tIns="0" bIns="0">
+            <a:spAutoFit/>
+          </a:bodyPr>
+          <a:lstStyle/>
+          <a:p>
+            <a:pPr algn="l">
+              <a:lnSpc>
+                <a:spcPct val="100000"/>
+              </a:lnSpc>
+            </a:pPr>
+            <a:r>
               <a:rPr sz="950" b="1">
                 <a:solidFill>
                   <a:srgbClr val="1428A0"/>
@@ -9416,101 +9596,21 @@
                 <a:latin typeface="Arial"/>
                 <a:ea typeface="Arial"/>
               </a:rPr>
-              <a:t>2026 35EB → 2027 100EB+</a:t>
-            </a:r>
-          </a:p>
-        </p:txBody>
-      </p:sp>
-      <p:sp>
-        <p:nvSpPr>
-          <p:cNvPr id="126" name="TextBox 125"/>
-          <p:cNvSpPr txBox="1"/>
-          <p:nvPr/>
-        </p:nvSpPr>
-        <p:spPr>
-          <a:xfrm>
-            <a:off x="9921240" y="7150608"/>
-            <a:ext cx="2377440" cy="155448"/>
-          </a:xfrm>
-          <a:prstGeom prst="rect">
-            <a:avLst/>
-          </a:prstGeom>
-          <a:noFill/>
-        </p:spPr>
-        <p:txBody>
-          <a:bodyPr wrap="square" anchor="t" lIns="0" rIns="0" tIns="0" bIns="0">
-            <a:spAutoFit/>
-          </a:bodyPr>
-          <a:lstStyle/>
-          <a:p>
-            <a:pPr algn="l">
-              <a:lnSpc>
-                <a:spcPct val="112000"/>
-              </a:lnSpc>
-            </a:pPr>
-            <a:r>
-              <a:rPr sz="850" b="0">
-                <a:solidFill>
-                  <a:srgbClr val="8A8A8A"/>
-                </a:solidFill>
-                <a:latin typeface="Arial"/>
-                <a:ea typeface="Arial"/>
-              </a:rPr>
-              <a:t>삼성 V-NAND 캐파</a:t>
-            </a:r>
-          </a:p>
-        </p:txBody>
-      </p:sp>
-      <p:sp>
-        <p:nvSpPr>
-          <p:cNvPr id="127" name="TextBox 126"/>
-          <p:cNvSpPr txBox="1"/>
-          <p:nvPr/>
-        </p:nvSpPr>
-        <p:spPr>
-          <a:xfrm>
-            <a:off x="9921240" y="7287768"/>
-            <a:ext cx="2377440" cy="182880"/>
-          </a:xfrm>
-          <a:prstGeom prst="rect">
-            <a:avLst/>
-          </a:prstGeom>
-          <a:noFill/>
-        </p:spPr>
-        <p:txBody>
-          <a:bodyPr wrap="square" anchor="t" lIns="0" rIns="0" tIns="0" bIns="0">
-            <a:spAutoFit/>
-          </a:bodyPr>
-          <a:lstStyle/>
-          <a:p>
-            <a:pPr algn="l">
-              <a:lnSpc>
-                <a:spcPct val="112000"/>
-              </a:lnSpc>
-            </a:pPr>
-            <a:r>
-              <a:rPr sz="950" b="1">
-                <a:solidFill>
-                  <a:srgbClr val="1428A0"/>
-                </a:solidFill>
-                <a:latin typeface="Arial"/>
-                <a:ea typeface="Arial"/>
-              </a:rPr>
-              <a:t>약 60%를 CMX 대응에 배정</a:t>
-            </a:r>
-          </a:p>
-        </p:txBody>
-      </p:sp>
-      <p:sp>
-        <p:nvSpPr>
-          <p:cNvPr id="128" name="Rectangle 127"/>
-          <p:cNvSpPr/>
-          <p:nvPr/>
-        </p:nvSpPr>
-        <p:spPr>
-          <a:xfrm>
-            <a:off x="7251192" y="7607808"/>
-            <a:ext cx="5212080" cy="804672"/>
+              <a:t>1년 만에 26% → 48%</a:t>
+            </a:r>
+          </a:p>
+        </p:txBody>
+      </p:sp>
+      <p:sp>
+        <p:nvSpPr>
+          <p:cNvPr id="130" name="Rectangle 129"/>
+          <p:cNvSpPr/>
+          <p:nvPr/>
+        </p:nvSpPr>
+        <p:spPr>
+          <a:xfrm>
+            <a:off x="7251192" y="7552943"/>
+            <a:ext cx="5212080" cy="859536"/>
           </a:xfrm>
           <a:prstGeom prst="rect">
             <a:avLst/>
@@ -9549,14 +9649,14 @@
       </p:sp>
       <p:sp>
         <p:nvSpPr>
-          <p:cNvPr id="129" name="TextBox 128"/>
-          <p:cNvSpPr txBox="1"/>
-          <p:nvPr/>
-        </p:nvSpPr>
-        <p:spPr>
-          <a:xfrm>
-            <a:off x="7434071" y="7680960"/>
-            <a:ext cx="3218688" cy="256032"/>
+          <p:cNvPr id="131" name="TextBox 130"/>
+          <p:cNvSpPr txBox="1"/>
+          <p:nvPr/>
+        </p:nvSpPr>
+        <p:spPr>
+          <a:xfrm>
+            <a:off x="7415783" y="7616951"/>
+            <a:ext cx="3328416" cy="246888"/>
           </a:xfrm>
           <a:prstGeom prst="rect">
             <a:avLst/>
@@ -9589,14 +9689,14 @@
       </p:sp>
       <p:sp>
         <p:nvSpPr>
-          <p:cNvPr id="130" name="TextBox 129"/>
-          <p:cNvSpPr txBox="1"/>
-          <p:nvPr/>
-        </p:nvSpPr>
-        <p:spPr>
-          <a:xfrm>
-            <a:off x="7434071" y="7955280"/>
-            <a:ext cx="3218688" cy="347472"/>
+          <p:cNvPr id="132" name="TextBox 131"/>
+          <p:cNvSpPr txBox="1"/>
+          <p:nvPr/>
+        </p:nvSpPr>
+        <p:spPr>
+          <a:xfrm>
+            <a:off x="7415783" y="7882127"/>
+            <a:ext cx="3328416" cy="347472"/>
           </a:xfrm>
           <a:prstGeom prst="rect">
             <a:avLst/>
@@ -9622,21 +9722,21 @@
                 <a:latin typeface="Arial"/>
                 <a:ea typeface="Arial"/>
               </a:rPr>
-              <a:t>추론 수요 CAGR 86% · 학습 16% · 이 계층 제품으로 Kioxia는 CM9 TLC 3 DWPD를 지목했습니다</a:t>
-            </a:r>
-          </a:p>
-        </p:txBody>
-      </p:sp>
-      <p:sp>
-        <p:nvSpPr>
-          <p:cNvPr id="131" name="Rectangle 130"/>
-          <p:cNvSpPr/>
-          <p:nvPr/>
-        </p:nvSpPr>
-        <p:spPr>
-          <a:xfrm>
-            <a:off x="10725911" y="7735824"/>
-            <a:ext cx="1591056" cy="548640"/>
+              <a:t>추론 수요 CAGR 86% · 삼성은 V-NAND 캐파의 약 60%를 CMX 대응에 배정했습니다</a:t>
+            </a:r>
+          </a:p>
+        </p:txBody>
+      </p:sp>
+      <p:sp>
+        <p:nvSpPr>
+          <p:cNvPr id="133" name="Rectangle 132"/>
+          <p:cNvSpPr/>
+          <p:nvPr/>
+        </p:nvSpPr>
+        <p:spPr>
+          <a:xfrm>
+            <a:off x="10817351" y="7662671"/>
+            <a:ext cx="1517904" cy="640080"/>
           </a:xfrm>
           <a:prstGeom prst="rect">
             <a:avLst/>
@@ -9673,14 +9773,14 @@
       </p:sp>
       <p:sp>
         <p:nvSpPr>
-          <p:cNvPr id="132" name="TextBox 131"/>
-          <p:cNvSpPr txBox="1"/>
-          <p:nvPr/>
-        </p:nvSpPr>
-        <p:spPr>
-          <a:xfrm>
-            <a:off x="10725911" y="7735824"/>
-            <a:ext cx="1591056" cy="548640"/>
+          <p:cNvPr id="134" name="TextBox 133"/>
+          <p:cNvSpPr txBox="1"/>
+          <p:nvPr/>
+        </p:nvSpPr>
+        <p:spPr>
+          <a:xfrm>
+            <a:off x="10817351" y="7662671"/>
+            <a:ext cx="1517904" cy="640080"/>
           </a:xfrm>
           <a:prstGeom prst="rect">
             <a:avLst/>
@@ -9730,7 +9830,7 @@
       </p:sp>
       <p:sp>
         <p:nvSpPr>
-          <p:cNvPr id="133" name="Rectangle 132"/>
+          <p:cNvPr id="135" name="Rectangle 134"/>
           <p:cNvSpPr/>
           <p:nvPr/>
         </p:nvSpPr>
@@ -9776,7 +9876,7 @@
       </p:sp>
       <p:sp>
         <p:nvSpPr>
-          <p:cNvPr id="134" name="Rectangle 133"/>
+          <p:cNvPr id="136" name="Rectangle 135"/>
           <p:cNvSpPr/>
           <p:nvPr/>
         </p:nvSpPr>
@@ -9820,7 +9920,7 @@
       </p:sp>
       <p:sp>
         <p:nvSpPr>
-          <p:cNvPr id="135" name="TextBox 134"/>
+          <p:cNvPr id="137" name="TextBox 136"/>
           <p:cNvSpPr txBox="1"/>
           <p:nvPr/>
         </p:nvSpPr>
@@ -9870,7 +9970,7 @@
       </p:sp>
       <p:sp>
         <p:nvSpPr>
-          <p:cNvPr id="136" name="TextBox 135"/>
+          <p:cNvPr id="138" name="TextBox 137"/>
           <p:cNvSpPr txBox="1"/>
           <p:nvPr/>
         </p:nvSpPr>
@@ -9910,7 +10010,7 @@
       </p:sp>
       <p:sp>
         <p:nvSpPr>
-          <p:cNvPr id="137" name="TextBox 136"/>
+          <p:cNvPr id="139" name="TextBox 138"/>
           <p:cNvSpPr txBox="1"/>
           <p:nvPr/>
         </p:nvSpPr>
@@ -9950,7 +10050,7 @@
       </p:sp>
       <p:sp>
         <p:nvSpPr>
-          <p:cNvPr id="138" name="Rectangle 137"/>
+          <p:cNvPr id="140" name="Rectangle 139"/>
           <p:cNvSpPr/>
           <p:nvPr/>
         </p:nvSpPr>
@@ -9996,7 +10096,7 @@
       </p:sp>
       <p:sp>
         <p:nvSpPr>
-          <p:cNvPr id="139" name="Rectangle 138"/>
+          <p:cNvPr id="141" name="Rectangle 140"/>
           <p:cNvSpPr/>
           <p:nvPr/>
         </p:nvSpPr>
@@ -10040,7 +10140,7 @@
       </p:sp>
       <p:sp>
         <p:nvSpPr>
-          <p:cNvPr id="140" name="TextBox 139"/>
+          <p:cNvPr id="142" name="TextBox 141"/>
           <p:cNvSpPr txBox="1"/>
           <p:nvPr/>
         </p:nvSpPr>
@@ -10080,7 +10180,7 @@
       </p:sp>
       <p:sp>
         <p:nvSpPr>
-          <p:cNvPr id="141" name="TextBox 140"/>
+          <p:cNvPr id="143" name="TextBox 142"/>
           <p:cNvSpPr txBox="1"/>
           <p:nvPr/>
         </p:nvSpPr>
@@ -10120,7 +10220,7 @@
       </p:sp>
       <p:sp>
         <p:nvSpPr>
-          <p:cNvPr id="142" name="TextBox 141"/>
+          <p:cNvPr id="144" name="TextBox 143"/>
           <p:cNvSpPr txBox="1"/>
           <p:nvPr/>
         </p:nvSpPr>
@@ -10160,7 +10260,7 @@
       </p:sp>
       <p:sp>
         <p:nvSpPr>
-          <p:cNvPr id="143" name="TextBox 142"/>
+          <p:cNvPr id="145" name="TextBox 144"/>
           <p:cNvSpPr txBox="1"/>
           <p:nvPr/>
         </p:nvSpPr>
@@ -10200,7 +10300,7 @@
       </p:sp>
       <p:sp>
         <p:nvSpPr>
-          <p:cNvPr id="144" name="TextBox 143"/>
+          <p:cNvPr id="146" name="TextBox 145"/>
           <p:cNvSpPr txBox="1"/>
           <p:nvPr/>
         </p:nvSpPr>
@@ -10240,7 +10340,7 @@
       </p:sp>
       <p:sp>
         <p:nvSpPr>
-          <p:cNvPr id="145" name="TextBox 144"/>
+          <p:cNvPr id="147" name="TextBox 146"/>
           <p:cNvSpPr txBox="1"/>
           <p:nvPr/>
         </p:nvSpPr>
@@ -10280,7 +10380,7 @@
       </p:sp>
       <p:sp>
         <p:nvSpPr>
-          <p:cNvPr id="146" name="TextBox 145"/>
+          <p:cNvPr id="148" name="TextBox 147"/>
           <p:cNvSpPr txBox="1"/>
           <p:nvPr/>
         </p:nvSpPr>
@@ -10320,7 +10420,7 @@
       </p:sp>
       <p:sp>
         <p:nvSpPr>
-          <p:cNvPr id="147" name="TextBox 146"/>
+          <p:cNvPr id="149" name="TextBox 148"/>
           <p:cNvSpPr txBox="1"/>
           <p:nvPr/>
         </p:nvSpPr>
@@ -10360,7 +10460,7 @@
       </p:sp>
       <p:sp>
         <p:nvSpPr>
-          <p:cNvPr id="148" name="Rectangle 147"/>
+          <p:cNvPr id="150" name="Rectangle 149"/>
           <p:cNvSpPr/>
           <p:nvPr/>
         </p:nvSpPr>
@@ -10406,7 +10506,7 @@
       </p:sp>
       <p:sp>
         <p:nvSpPr>
-          <p:cNvPr id="149" name="Rectangle 148"/>
+          <p:cNvPr id="151" name="Rectangle 150"/>
           <p:cNvSpPr/>
           <p:nvPr/>
         </p:nvSpPr>
@@ -10450,7 +10550,7 @@
       </p:sp>
       <p:sp>
         <p:nvSpPr>
-          <p:cNvPr id="150" name="TextBox 149"/>
+          <p:cNvPr id="152" name="TextBox 151"/>
           <p:cNvSpPr txBox="1"/>
           <p:nvPr/>
         </p:nvSpPr>
@@ -10490,7 +10590,7 @@
       </p:sp>
       <p:sp>
         <p:nvSpPr>
-          <p:cNvPr id="151" name="TextBox 150"/>
+          <p:cNvPr id="153" name="TextBox 152"/>
           <p:cNvSpPr txBox="1"/>
           <p:nvPr/>
         </p:nvSpPr>
@@ -10530,7 +10630,7 @@
       </p:sp>
       <p:sp>
         <p:nvSpPr>
-          <p:cNvPr id="152" name="TextBox 151"/>
+          <p:cNvPr id="154" name="TextBox 153"/>
           <p:cNvSpPr txBox="1"/>
           <p:nvPr/>
         </p:nvSpPr>
@@ -10570,7 +10670,7 @@
       </p:sp>
       <p:sp>
         <p:nvSpPr>
-          <p:cNvPr id="153" name="TextBox 152"/>
+          <p:cNvPr id="155" name="TextBox 154"/>
           <p:cNvSpPr txBox="1"/>
           <p:nvPr/>
         </p:nvSpPr>
@@ -10610,7 +10710,7 @@
       </p:sp>
       <p:sp>
         <p:nvSpPr>
-          <p:cNvPr id="154" name="TextBox 153"/>
+          <p:cNvPr id="156" name="TextBox 155"/>
           <p:cNvSpPr txBox="1"/>
           <p:nvPr/>
         </p:nvSpPr>
@@ -10650,7 +10750,7 @@
       </p:sp>
       <p:sp>
         <p:nvSpPr>
-          <p:cNvPr id="155" name="TextBox 154"/>
+          <p:cNvPr id="157" name="TextBox 156"/>
           <p:cNvSpPr txBox="1"/>
           <p:nvPr/>
         </p:nvSpPr>
@@ -10690,7 +10790,7 @@
       </p:sp>
       <p:sp>
         <p:nvSpPr>
-          <p:cNvPr id="156" name="TextBox 155"/>
+          <p:cNvPr id="158" name="TextBox 157"/>
           <p:cNvSpPr txBox="1"/>
           <p:nvPr/>
         </p:nvSpPr>
@@ -10730,7 +10830,7 @@
       </p:sp>
       <p:sp>
         <p:nvSpPr>
-          <p:cNvPr id="157" name="TextBox 156"/>
+          <p:cNvPr id="159" name="TextBox 158"/>
           <p:cNvSpPr txBox="1"/>
           <p:nvPr/>
         </p:nvSpPr>
@@ -10770,7 +10870,7 @@
       </p:sp>
       <p:sp>
         <p:nvSpPr>
-          <p:cNvPr id="158" name="TextBox 157"/>
+          <p:cNvPr id="160" name="TextBox 159"/>
           <p:cNvSpPr txBox="1"/>
           <p:nvPr/>
         </p:nvSpPr>
@@ -10810,7 +10910,7 @@
       </p:sp>
       <p:sp>
         <p:nvSpPr>
-          <p:cNvPr id="159" name="TextBox 158"/>
+          <p:cNvPr id="161" name="TextBox 160"/>
           <p:cNvSpPr txBox="1"/>
           <p:nvPr/>
         </p:nvSpPr>
@@ -10850,7 +10950,7 @@
       </p:sp>
       <p:sp>
         <p:nvSpPr>
-          <p:cNvPr id="160" name="TextBox 159"/>
+          <p:cNvPr id="162" name="TextBox 161"/>
           <p:cNvSpPr txBox="1"/>
           <p:nvPr/>
         </p:nvSpPr>
@@ -10890,7 +10990,7 @@
       </p:sp>
       <p:sp>
         <p:nvSpPr>
-          <p:cNvPr id="161" name="Rectangle 160"/>
+          <p:cNvPr id="163" name="Rectangle 162"/>
           <p:cNvSpPr/>
           <p:nvPr/>
         </p:nvSpPr>
@@ -10934,7 +11034,7 @@
       </p:sp>
       <p:sp>
         <p:nvSpPr>
-          <p:cNvPr id="162" name="TextBox 161"/>
+          <p:cNvPr id="164" name="TextBox 163"/>
           <p:cNvSpPr txBox="1"/>
           <p:nvPr/>
         </p:nvSpPr>
@@ -10991,7 +11091,7 @@
       </p:sp>
       <p:sp>
         <p:nvSpPr>
-          <p:cNvPr id="163" name="Rectangle 162"/>
+          <p:cNvPr id="165" name="Rectangle 164"/>
           <p:cNvSpPr/>
           <p:nvPr/>
         </p:nvSpPr>
@@ -11035,7 +11135,7 @@
       </p:sp>
       <p:sp>
         <p:nvSpPr>
-          <p:cNvPr id="164" name="TextBox 163"/>
+          <p:cNvPr id="166" name="TextBox 165"/>
           <p:cNvSpPr txBox="1"/>
           <p:nvPr/>
         </p:nvSpPr>
@@ -11075,7 +11175,7 @@
       </p:sp>
       <p:sp>
         <p:nvSpPr>
-          <p:cNvPr id="165" name="TextBox 164"/>
+          <p:cNvPr id="167" name="TextBox 166"/>
           <p:cNvSpPr txBox="1"/>
           <p:nvPr/>
         </p:nvSpPr>
@@ -11108,7 +11208,7 @@
                 <a:latin typeface="Arial"/>
                 <a:ea typeface="Arial"/>
               </a:rPr>
-              <a:t>HBM의 교훈은 수요를 고객과 함께 설계하는 것이었고, 그 수요가 지금 HBM에서 넘쳐 NAND로 내려옵니다.</a:t>
+              <a:t>HBM의 교훈은 수요를 고객과 함께 설계하는 것이었고, 그 수요가 지금 HBM 위에 새 스토리지 계층을 얹고 있습니다.</a:t>
             </a:r>
           </a:p>
           <a:p>
@@ -11132,7 +11232,7 @@
       </p:sp>
       <p:sp>
         <p:nvSpPr>
-          <p:cNvPr id="166" name="Rectangle 165"/>
+          <p:cNvPr id="168" name="Rectangle 167"/>
           <p:cNvSpPr/>
           <p:nvPr/>
         </p:nvSpPr>
@@ -11176,7 +11276,7 @@
       </p:sp>
       <p:sp>
         <p:nvSpPr>
-          <p:cNvPr id="167" name="Rectangle 166"/>
+          <p:cNvPr id="169" name="Rectangle 168"/>
           <p:cNvSpPr/>
           <p:nvPr/>
         </p:nvSpPr>
@@ -11220,7 +11320,7 @@
       </p:sp>
       <p:sp>
         <p:nvSpPr>
-          <p:cNvPr id="168" name="TextBox 167"/>
+          <p:cNvPr id="170" name="TextBox 169"/>
           <p:cNvSpPr txBox="1"/>
           <p:nvPr/>
         </p:nvSpPr>
@@ -11277,7 +11377,7 @@
       </p:sp>
       <p:sp>
         <p:nvSpPr>
-          <p:cNvPr id="169" name="TextBox 168"/>
+          <p:cNvPr id="171" name="TextBox 170"/>
           <p:cNvSpPr txBox="1"/>
           <p:nvPr/>
         </p:nvSpPr>
@@ -11310,14 +11410,14 @@
                 <a:latin typeface="Arial"/>
                 <a:ea typeface="Arial"/>
               </a:rPr>
-              <a:t>출처: HBM 연표 각사 발표 · JEDEC JESD270-4, CNBC 2024-11-08(2019년 판단 ⚠️ 단일 출처), TrendForce(점유율 · 2026-08-18 HBM→NAND 스필오버), NVIDIA Dynamo KVBM·CMX, 서울경제 2026-07-20(CMX 🟡), Kioxia GTC 2026</a:t>
-            </a:r>
-          </a:p>
-        </p:txBody>
-      </p:sp>
-      <p:sp>
-        <p:nvSpPr>
-          <p:cNvPr id="170" name="TextBox 169"/>
+              <a:t>출처: HBM 연표 각사 발표 · JEDEC JESD270-4, CNBC 2024-11-08(⚠️ 단일 출처), 서울경제 2026-07-29(SK하이닉스 실적 콜 🟡)·2026-07-20(CMX 🟡), NVIDIA 개발자 블로그(KV 40GB 🟡), GitHub PR(LMCache·vLLM ✅), Counterpoint Q2 2026, TrendForce(HBM 용량)</a:t>
+            </a:r>
+          </a:p>
+        </p:txBody>
+      </p:sp>
+      <p:sp>
+        <p:nvSpPr>
+          <p:cNvPr id="172" name="TextBox 171"/>
           <p:cNvSpPr txBox="1"/>
           <p:nvPr/>
         </p:nvSpPr>

--- a/outputs/presentation/qlc-ssd-strategy.pptx
+++ b/outputs/presentation/qlc-ssd-strategy.pptx
@@ -508,7 +508,7 @@
           <a:lstStyle/>
           <a:p>
             <a:r>
-              <a:t>1장은 문제 제기입니다. 결론은 내리지 않고, 고용량 QLC에서 DWPD를 높일 해법이 필요한 상황임을 세웁니다. 왼쪽이 교훈, 가운데가 지금 수요의 이동, 오른쪽이 문제입니다. 왼쪽 교훈입니다. 두 레인은 같은 기술을 가진 두 회사의 다른 판단입니다. SK하이닉스는 2013년 AMD와 HBM을 공동 개발했고, 2021년 10월 JEDEC 표준보다 먼저 HBM3 개발을 마쳐 2022년 6월 NVIDIA에 업계 최초로 공급했으며, 2023년 한 해 동안 유일한 양산사였습니다. 그 결과가 2025년 6월 DRAM 매출 1위로, 1992년 이후 처음 있는 역전이었습니다. 2026년 6월에는 NVIDIA와 다년 기술 파트너십을 맺고 Vera Rubin용 메모리를 공동 개발합니다. 아래 레인이 삼성입니다. 중요한 것은 기술이 없지 않았다는 점입니다. 업계 최초 HBM2E는 2019년 3월 삼성이 발표했습니다. 같은 해에 HBM 시장 성장률이 과대평가됐다는 판단으로 전담 조직이 후순위가 됐고, 2024년 4월에야 전담 팀이 재구성되어 5년의 공백이 생겼으며, 12단 HBM3E는 2025년 9월에야 NVIDIA 퀄을 통과해 Blackwell 사이클을 놓쳤습니다. 2019년 조직 판단은 CNBC 보도 계열의 단일 출처이므로 그 점을 밝혀 둡니다. 그리고 그 해 삼성은 감산도 CapEx 삭감도 하지 않았습니다. 돈이 아니라 우선순위의 문제였습니다. 교훈을 한 줄로 쓰면 기술이 없어서가 아니라 시장을 작게 봤기 때문입니다. 그리고 구속력 있는 규격은 표준이 아니라 고객의 사양이었습니다. JEDEC HBM4 표준은 최대 8Gbps인데 NVIDIA는 10에서 13Gbps를 요구했고, 승부는 그 위에서 갈렸습니다. 삼성도 표준 제정 9개사 중 하나였으므로 테이블에 앉았는지가 아니라 고객 사양에 맞췄는지가 변수였습니다. 다만 이 교훈을 영구적 판정으로 쓰면 안 됩니다. 삼성은 2025년 4분기 DRAM 1위를 탈환했고, 2026년 2월 업계 최초로 상용 HBM4를 출하했으며, 2026년 2분기 HBM 점유율은 33%로 직전 분기 대비 12%포인트 올랐습니다. 되돌릴 수 있다는 것도 같은 기록이 보여 줍니다. 변수는 판단을 끊지 않는 것이고, 다음 수요에서 같은 판단을 다시 해야 합니다. 가운데가 지금의 수요입니다. 먼저 구매 기준입니다. 2008년에서 2012년은 성능과 용량당 가격, 2012년에서 2021년은 QoS와 지연 꼬리였습니다. OCP 사양 v2.0이 2021년 7월 지연 모니터를 의무화하면서 제도화됐습니다. 2022년 이후는 용량 밀도와 전력 효율, 물량 확보가 상위 기준입니다. 그 위에 새 수요가 올라왔습니다. 여기가 이번에 추가한 부분입니다. KV 캐시가 HBM 용량을 넘어섭니다. 숫자로 보면 이렇습니다. NVIDIA 개발자 블로그 기준으로 Llama 3 70B에서 단일 사용자의 128K 컨텍스트 KV 캐시가 약 40기가바이트이고, 이것이 사용자 수에 선형으로 비례합니다. H100의 HBM이 80기가바이트니까 사용자 한 명이 절반을 씁니다. 그래서 넘친 것이 CPU DRAM으로 내려오는데, Kioxia는 DRAM만으로는 더 못 따라간다고 밝혔습니다. 다시 넘친 것을 받는 것이 NVMe SSD이고, 이 계층은 쓰기가 몰리는 첫 대용량 계층입니다. 근거는 세 갈래입니다. 첫째, 진단을 한 주체가 우리가 아닙니다. HBM 1위 업체인 SK하이닉스가 2026년 7월 29일 2분기 실적 발표에서 KV 캐시를 담을 HBM 용량이 한계에 도달하고 있다고 밝혔고, 같은 자리에서 GPU 인근 NAND 개발을 공표했습니다. 둘째, 오프로드는 슬라이드 위의 개념이 아니라 메인라인 코드입니다. LMCache 디스크 캐시가 2024년 8월, GPUDirect Storage 백엔드가 2025년 6월, vLLM 다계층 오프로딩이 2026년 5월에 머지됐고 전부 PR로 확인됩니다. 셋째, 비트의 무게중심이 이미 움직였습니다. 전 세계 NAND 비트 출하에서 엔터프라이즈 SSD 비중이 1년 만에 26%에서 48%로 올라갔습니다. 여기서 반드시 정정하고 갈 것이 있습니다. 이것은 HBM에서 스토리지로의 이동이 아니라 HBM 위에 얹는 증설입니다. 근거가 셋입니다. 하나, SK하이닉스 본인의 단어가 대체가 아니라 추가 KV 캐시 저장소입니다. 둘, 같은 기간 GPU당 HBM 용량은 오히려 커집니다. 192기가바이트에서 288기가바이트를 거쳐 2027년 384기가바이트입니다. 셋, Micron의 계층 정의는 HBM을 핫 KV 캐시로 유지한 채 SSD를 영속 KV로 추가하는 구조이고, Kioxia가 못 따라간다고 지목한 것도 HBM이 아니라 DRAM이었습니다. 질문이 나오면 이렇게 답하시면 됩니다. HBM 수요가 줄어서 우리에게 오는 것이 아니라, HBM으로 감당이 안 되는 몫이 새 계층을 열었다는 뜻입니다. 반대 신호도 알고 있어야 합니다. 컨텍스트 전용 가속기인 Rubin CPX는 값싼 GDDR7로 발표됐다가 168기가바이트 HBM4로 재설계됐다는 보도가 있습니다. 애널리스트 보도이고 NVIDIA 공식 확인은 없습니다. 그리고 모델 측 효율 개선은 수요 총량을 깎는데 그 타격이 HBM보다 스토리지에 더 큽니다. DeepSeek V4.1-Flash는 KV 캐시의 HBM 요구를 75%, 영속 SSD 요구를 87.5% 줄였습니다. 이 계층이 커진다는 전망은 이 두 가지에 노출되어 있습니다. 그래서 SSD에 오는 요구가 내구성입니다. 추론 수요는 연평균 86%로 학습의 16%보다 훨씬 빠르게 큽니다. 삼성도 이미 V낸드 캐파의 약 60%를 CMX 대응에 배정한 것으로 보도됐습니다. 요구는 1에서 3 DWPD입니다. 오른쪽이 문제입니다. 요구 1에서 3 DWPD는 TLC로는 이미 충족됩니다. 그런데 고객은 QLC를 원합니다. 용량 밀도가 245TB급으로 네 배이고 TB당 가격이 20에서 30% 싸기 때문입니다. 반면 QLC의 정격은 0.6으로 요구와 2배에서 5배 거리가 있습니다. 고객은 QLC의 밀도와 원가로 TLC의 내구성을 요구하는 셈이고, 이 간극을 메우는 것이 우리가 풀 문제입니다. 고용량화는 두 축의 문제를 낳습니다. 다이 수가 만드는 신뢰성 축이 2장, DWPD 격차가 만드는 내구성 축이 3장입니다.</a:t>
+              <a:t>1장은 문제 제기입니다. 결론은 내리지 않고, 고용량 QLC에서 내구성을 확보할 수 있는가라는 질문까지만 세웁니다. 왼쪽이 교훈, 가운데가 지금 일어나는 전환, 오른쪽이 문제입니다. 왼쪽 교훈입니다. 이 장의 요지는 삼성의 과거 의사결정을 평가하는 것이 아니라, design-in이 무엇으로 결정됐는가를 보는 것입니다. HBM4 세대에서 선이 두 개 있었습니다. 하나는 JEDEC 표준선으로 최대 8Gbps입니다. 다른 하나는 고객이 요구한 사양으로 NVIDIA가 10에서 13Gbps를 요구했습니다. 표준을 완전히 만족해도 고객 요구선에는 닿지 않는 구간이 남습니다. design-in은 바로 이 구간에서 갈렸습니다. 공개 기록 세 가지를 보시면 됩니다. 2019년 3월 삼성이 업계 최초로 HBM2E를 발표했습니다. 기술은 확보돼 있었다는 뜻입니다. 2021년 10월 SK하이닉스가 JEDEC 표준 제정 전에 HBM3 개발을 마쳤고 2022년 6월 NVIDIA에 최초 공급했습니다. 그리고 2026년 2월 삼성이 업계 최초로 상용 HBM4를 출하했습니다. 제품 개발은 계속 이어졌습니다. 그래서 교훈은 이렇습니다. 표준을 만족하는 기술을 가진 것만으로는 부족했습니다. 시장 전환 시점에 고객이 요구하는 사양을 먼저 맞춘 쪽이 design-in을 가져갔습니다. 전략적 우선순위가 약화된 구간에서 격차가 생겼다는 것이지, 기술 보유 여부의 문제가 아니었습니다. 이 점은 질문이 나와도 같은 선에서 답하시면 됩니다. 조직이나 개별 의사결정을 평가하는 자리가 아닙니다. 가운데가 지금 일어나는 전환입니다. 같은 구조가 SSD에서 반복되고 있습니다. 먼저 짚을 것은 구매 기준이 세대별로 교체되는 것이 아니라는 점입니다. 용량당 비용과 밀도, 전력은 그대로 요구로 남아 있고, 그 위에 내구성이 더해지고 있습니다. 시대 구분이 아니라 요구사항이 추가되는 구조로 보시면 됩니다. 무엇이 그 요구를 만들었는가. KV 캐시가 SSD를 추론 메모리 계층으로 옮기고 있습니다. 추론에서 컨텍스트가 길어지면 KV 캐시가 GPU의 HBM을 먼저 채웁니다. NVIDIA 개발자 블로그 기준으로 Llama 3 70B에서 단일 사용자의 128K 컨텍스트가 약 40기가바이트이고 사용자 수에 선형으로 비례합니다. HBM 용량도 80에서 288기가바이트로 커졌지만 이 증가 속도를 따라가지 못합니다. 넘친 것은 CPU DRAM으로 내려오는데 Kioxia는 DRAM만으로는 더 못 따라간다고 밝혔습니다. 다시 넘친 것을 NVMe SSD가 받습니다. 이 계층은 쓰기가 몰리는 첫 대용량 계층이고, 그래서 내구성이 요구로 올라옵니다. 한 가지는 분명히 하겠습니다. 대체가 아니라 증설입니다. 같은 기간 GPU당 HBM 용량은 192에서 288기가바이트, 2027년에는 384기가바이트로 커집니다. HBM 수요가 줄어 스토리지로 옮겨 간 것이 아니라, HBM으로 감당되지 않는 몫이 새 계층을 연 것입니다. 근거는 세 갈래입니다. 첫째, 진단의 주체가 우리가 아닙니다. HBM 1위 업체인 SK하이닉스가 2026년 7월 29일 실적 발표에서 KV 캐시를 담을 HBM 용량이 한계에 도달했다고 밝히고 같은 자리에서 GPU 인근 NAND 개발을 공표했습니다. 둘째, 오프로드는 개념이 아니라 메인라인 코드입니다. LMCache 디스크 캐시가 2024년 8월, vLLM 다계층 오프로딩이 2026년 5월에 머지됐고 전부 PR로 확인됩니다. 셋째, 비트의 무게중심이 움직였습니다. 전 세계 NAND 비트 출하에서 엔터프라이즈 SSD 비중이 1년 만에 26%에서 48%로 올라갔습니다. AI 수요의 중심이 추론으로 빠르게 확대되고 있고, Kioxia는 데이터센터 NAND 수요를 2025년 295엑사바이트에서 2028년 1,807엑사바이트로 전망합니다. 오른쪽이 문제입니다. 오늘 선택지는 둘 다를 주지 않습니다. TLC 3 DWPD 급은 내구성 요구를 충족하지만 용량이 61테라바이트 급이고 비용이 높습니다. 고용량 QLC는 245테라바이트 급 용량과 낮은 비용을 주지만 정격 내구성이 0.3에서 1.0 수준입니다. 이 값은 제품과 기준 블록 크기에 따라 달라지므로 단일 숫자로 말하지 않습니다. 특히 245테라바이트 급은 0.3 수준입니다. 그래서 질문은 하나로 모입니다. 고용량 QLC의 밀도와 비용 이점을 유지하면서 AI 추론이 요구하는 내구성을 확보할 수 있는가. 1장은 여기서 멈춥니다. 고용량화는 두 축의 문제를 낳습니다. 다이 수가 만드는 신뢰성 축이 2장, 내구성 축이 3장입니다.</a:t>
             </a:r>
           </a:p>
         </p:txBody>
@@ -5347,7 +5347,7 @@
                 <a:latin typeface="Arial"/>
                 <a:ea typeface="Arial"/>
               </a:rPr>
-              <a:t>고객과 함께 수요를 설계한 기업이 이겼고, 지금 그 수요는 QLC에 1~3 DWPD를 요구합니다</a:t>
+              <a:t>표준 충족이 아니라 고객 사양이 design-in을 갈랐고, 그 사양에 지금 내구성이 더해지고 있습니다</a:t>
             </a:r>
           </a:p>
         </p:txBody>
@@ -5387,7 +5387,7 @@
                 <a:latin typeface="Arial"/>
                 <a:ea typeface="Arial"/>
               </a:rPr>
-              <a:t>HBM이 보여 준 것은 기술의 차이가 아니라 시장을 보는 눈의 차이였습니다. 그리고 그 수요는 지금 HBM 용량을 넘어 스토리지 계층을 새로 얹고 있습니다.</a:t>
+              <a:t>표준을 만족하는 기술 보유만으로는 design-in이 결정되지 않았습니다. 같은 전환이 지금 SSD에서 일어나 고객 요구에 내구성이 더해지고 있습니다.</a:t>
             </a:r>
           </a:p>
         </p:txBody>
@@ -5571,7 +5571,7 @@
                 <a:latin typeface="Arial"/>
                 <a:ea typeface="Arial"/>
               </a:rPr>
-              <a:t>교훈 · HBM이 가르친 것</a:t>
+              <a:t>교훈 · HBM이 남긴 것</a:t>
             </a:r>
           </a:p>
         </p:txBody>
@@ -5611,27 +5611,67 @@
                 <a:latin typeface="Arial"/>
                 <a:ea typeface="Arial"/>
               </a:rPr>
-              <a:t>2013 ~ 2026 · 같은 기술, 다른 판단</a:t>
-            </a:r>
-          </a:p>
-        </p:txBody>
-      </p:sp>
-      <p:sp>
-        <p:nvSpPr>
-          <p:cNvPr id="40" name="Rectangle 39"/>
-          <p:cNvSpPr/>
-          <p:nvPr/>
-        </p:nvSpPr>
-        <p:spPr>
-          <a:xfrm>
-            <a:off x="1929384" y="4315968"/>
-            <a:ext cx="4480559" cy="27432"/>
-          </a:xfrm>
-          <a:prstGeom prst="rect">
-            <a:avLst/>
-          </a:prstGeom>
-          <a:solidFill>
-            <a:srgbClr val="1428A0"/>
+              <a:t>표준 충족과 design-in은 다른 선이었다</a:t>
+            </a:r>
+          </a:p>
+        </p:txBody>
+      </p:sp>
+      <p:sp>
+        <p:nvSpPr>
+          <p:cNvPr id="40" name="TextBox 39"/>
+          <p:cNvSpPr txBox="1"/>
+          <p:nvPr/>
+        </p:nvSpPr>
+        <p:spPr>
+          <a:xfrm>
+            <a:off x="996696" y="3310127"/>
+            <a:ext cx="5486400" cy="201168"/>
+          </a:xfrm>
+          <a:prstGeom prst="rect">
+            <a:avLst/>
+          </a:prstGeom>
+          <a:noFill/>
+        </p:spPr>
+        <p:txBody>
+          <a:bodyPr wrap="square" anchor="t" lIns="0" rIns="0" tIns="0" bIns="0">
+            <a:spAutoFit/>
+          </a:bodyPr>
+          <a:lstStyle/>
+          <a:p>
+            <a:pPr algn="l">
+              <a:lnSpc>
+                <a:spcPct val="112000"/>
+              </a:lnSpc>
+            </a:pPr>
+            <a:r>
+              <a:rPr sz="1000" b="0">
+                <a:solidFill>
+                  <a:srgbClr val="8A8A8A"/>
+                </a:solidFill>
+                <a:latin typeface="Arial"/>
+                <a:ea typeface="Arial"/>
+              </a:rPr>
+              <a:t>같은 세대에서 두 개의 선이 있었습니다</a:t>
+            </a:r>
+          </a:p>
+        </p:txBody>
+      </p:sp>
+      <p:sp>
+        <p:nvSpPr>
+          <p:cNvPr id="41" name="Rectangle 40"/>
+          <p:cNvSpPr/>
+          <p:nvPr/>
+        </p:nvSpPr>
+        <p:spPr>
+          <a:xfrm>
+            <a:off x="996696" y="3584448"/>
+            <a:ext cx="1792224" cy="420624"/>
+          </a:xfrm>
+          <a:prstGeom prst="rect">
+            <a:avLst/>
+          </a:prstGeom>
+          <a:solidFill>
+            <a:srgbClr val="FFFFFF"/>
           </a:solidFill>
           <a:ln>
             <a:noFill/>
@@ -5662,14 +5702,14 @@
       </p:sp>
       <p:sp>
         <p:nvSpPr>
-          <p:cNvPr id="41" name="TextBox 40"/>
-          <p:cNvSpPr txBox="1"/>
-          <p:nvPr/>
-        </p:nvSpPr>
-        <p:spPr>
-          <a:xfrm>
-            <a:off x="996696" y="4187952"/>
-            <a:ext cx="859536" cy="256032"/>
+          <p:cNvPr id="42" name="TextBox 41"/>
+          <p:cNvSpPr txBox="1"/>
+          <p:nvPr/>
+        </p:nvSpPr>
+        <p:spPr>
+          <a:xfrm>
+            <a:off x="996696" y="3584448"/>
+            <a:ext cx="1792224" cy="420624"/>
           </a:xfrm>
           <a:prstGeom prst="rect">
             <a:avLst/>
@@ -5695,27 +5735,27 @@
                 <a:latin typeface="Arial"/>
                 <a:ea typeface="Arial"/>
               </a:rPr>
-              <a:t>SK하이닉스</a:t>
-            </a:r>
-          </a:p>
-        </p:txBody>
-      </p:sp>
-      <p:sp>
-        <p:nvSpPr>
-          <p:cNvPr id="42" name="Rectangle 41"/>
-          <p:cNvSpPr/>
-          <p:nvPr/>
-        </p:nvSpPr>
-        <p:spPr>
-          <a:xfrm>
-            <a:off x="1929384" y="4937760"/>
-            <a:ext cx="4480559" cy="27432"/>
-          </a:xfrm>
-          <a:prstGeom prst="rect">
-            <a:avLst/>
-          </a:prstGeom>
-          <a:solidFill>
-            <a:srgbClr val="8A8A8A"/>
+              <a:t>고객이 요구한 사양</a:t>
+            </a:r>
+          </a:p>
+        </p:txBody>
+      </p:sp>
+      <p:sp>
+        <p:nvSpPr>
+          <p:cNvPr id="43" name="Rectangle 42"/>
+          <p:cNvSpPr/>
+          <p:nvPr/>
+        </p:nvSpPr>
+        <p:spPr>
+          <a:xfrm>
+            <a:off x="2880360" y="3675887"/>
+            <a:ext cx="2349304" cy="237744"/>
+          </a:xfrm>
+          <a:prstGeom prst="rect">
+            <a:avLst/>
+          </a:prstGeom>
+          <a:solidFill>
+            <a:srgbClr val="F4F6FC"/>
           </a:solidFill>
           <a:ln>
             <a:noFill/>
@@ -5746,216 +5786,16 @@
       </p:sp>
       <p:sp>
         <p:nvSpPr>
-          <p:cNvPr id="43" name="TextBox 42"/>
-          <p:cNvSpPr txBox="1"/>
-          <p:nvPr/>
-        </p:nvSpPr>
-        <p:spPr>
-          <a:xfrm>
-            <a:off x="996696" y="4809744"/>
-            <a:ext cx="859536" cy="256032"/>
-          </a:xfrm>
-          <a:prstGeom prst="rect">
-            <a:avLst/>
-          </a:prstGeom>
-          <a:noFill/>
-        </p:spPr>
-        <p:txBody>
-          <a:bodyPr wrap="square" anchor="ctr" lIns="0" rIns="0" tIns="0" bIns="0">
-            <a:spAutoFit/>
-          </a:bodyPr>
-          <a:lstStyle/>
-          <a:p>
-            <a:pPr algn="l">
-              <a:lnSpc>
-                <a:spcPct val="112000"/>
-              </a:lnSpc>
-            </a:pPr>
-            <a:r>
-              <a:rPr sz="1050" b="1">
-                <a:solidFill>
-                  <a:srgbClr val="8A8A8A"/>
-                </a:solidFill>
-                <a:latin typeface="Arial"/>
-                <a:ea typeface="Arial"/>
-              </a:rPr>
-              <a:t>삼성</a:t>
-            </a:r>
-          </a:p>
-        </p:txBody>
-      </p:sp>
-      <p:sp>
-        <p:nvSpPr>
-          <p:cNvPr id="44" name="TextBox 43"/>
-          <p:cNvSpPr txBox="1"/>
-          <p:nvPr/>
-        </p:nvSpPr>
-        <p:spPr>
-          <a:xfrm>
-            <a:off x="1563624" y="6089904"/>
-            <a:ext cx="731520" cy="182880"/>
-          </a:xfrm>
-          <a:prstGeom prst="rect">
-            <a:avLst/>
-          </a:prstGeom>
-          <a:noFill/>
-        </p:spPr>
-        <p:txBody>
-          <a:bodyPr wrap="square" anchor="t" lIns="0" rIns="0" tIns="0" bIns="0">
-            <a:spAutoFit/>
-          </a:bodyPr>
-          <a:lstStyle/>
-          <a:p>
-            <a:pPr algn="ctr">
-              <a:lnSpc>
-                <a:spcPct val="112000"/>
-              </a:lnSpc>
-            </a:pPr>
-            <a:r>
-              <a:rPr sz="950" b="0">
-                <a:solidFill>
-                  <a:srgbClr val="8A8A8A"/>
-                </a:solidFill>
-                <a:latin typeface="Arial"/>
-                <a:ea typeface="Arial"/>
-              </a:rPr>
-              <a:t>2013</a:t>
-            </a:r>
-          </a:p>
-        </p:txBody>
-      </p:sp>
-      <p:sp>
-        <p:nvSpPr>
-          <p:cNvPr id="45" name="TextBox 44"/>
-          <p:cNvSpPr txBox="1"/>
-          <p:nvPr/>
-        </p:nvSpPr>
-        <p:spPr>
-          <a:xfrm>
-            <a:off x="2881435" y="6089904"/>
-            <a:ext cx="731520" cy="182880"/>
-          </a:xfrm>
-          <a:prstGeom prst="rect">
-            <a:avLst/>
-          </a:prstGeom>
-          <a:noFill/>
-        </p:spPr>
-        <p:txBody>
-          <a:bodyPr wrap="square" anchor="t" lIns="0" rIns="0" tIns="0" bIns="0">
-            <a:spAutoFit/>
-          </a:bodyPr>
-          <a:lstStyle/>
-          <a:p>
-            <a:pPr algn="ctr">
-              <a:lnSpc>
-                <a:spcPct val="112000"/>
-              </a:lnSpc>
-            </a:pPr>
-            <a:r>
-              <a:rPr sz="950" b="0">
-                <a:solidFill>
-                  <a:srgbClr val="8A8A8A"/>
-                </a:solidFill>
-                <a:latin typeface="Arial"/>
-                <a:ea typeface="Arial"/>
-              </a:rPr>
-              <a:t>2017</a:t>
-            </a:r>
-          </a:p>
-        </p:txBody>
-      </p:sp>
-      <p:sp>
-        <p:nvSpPr>
-          <p:cNvPr id="46" name="TextBox 45"/>
-          <p:cNvSpPr txBox="1"/>
-          <p:nvPr/>
-        </p:nvSpPr>
-        <p:spPr>
-          <a:xfrm>
-            <a:off x="4199247" y="6089904"/>
-            <a:ext cx="731520" cy="182880"/>
-          </a:xfrm>
-          <a:prstGeom prst="rect">
-            <a:avLst/>
-          </a:prstGeom>
-          <a:noFill/>
-        </p:spPr>
-        <p:txBody>
-          <a:bodyPr wrap="square" anchor="t" lIns="0" rIns="0" tIns="0" bIns="0">
-            <a:spAutoFit/>
-          </a:bodyPr>
-          <a:lstStyle/>
-          <a:p>
-            <a:pPr algn="ctr">
-              <a:lnSpc>
-                <a:spcPct val="112000"/>
-              </a:lnSpc>
-            </a:pPr>
-            <a:r>
-              <a:rPr sz="950" b="0">
-                <a:solidFill>
-                  <a:srgbClr val="8A8A8A"/>
-                </a:solidFill>
-                <a:latin typeface="Arial"/>
-                <a:ea typeface="Arial"/>
-              </a:rPr>
-              <a:t>2021</a:t>
-            </a:r>
-          </a:p>
-        </p:txBody>
-      </p:sp>
-      <p:sp>
-        <p:nvSpPr>
-          <p:cNvPr id="47" name="TextBox 46"/>
-          <p:cNvSpPr txBox="1"/>
-          <p:nvPr/>
-        </p:nvSpPr>
-        <p:spPr>
-          <a:xfrm>
-            <a:off x="5517059" y="6089904"/>
-            <a:ext cx="731520" cy="182880"/>
-          </a:xfrm>
-          <a:prstGeom prst="rect">
-            <a:avLst/>
-          </a:prstGeom>
-          <a:noFill/>
-        </p:spPr>
-        <p:txBody>
-          <a:bodyPr wrap="square" anchor="t" lIns="0" rIns="0" tIns="0" bIns="0">
-            <a:spAutoFit/>
-          </a:bodyPr>
-          <a:lstStyle/>
-          <a:p>
-            <a:pPr algn="ctr">
-              <a:lnSpc>
-                <a:spcPct val="112000"/>
-              </a:lnSpc>
-            </a:pPr>
-            <a:r>
-              <a:rPr sz="950" b="0">
-                <a:solidFill>
-                  <a:srgbClr val="8A8A8A"/>
-                </a:solidFill>
-                <a:latin typeface="Arial"/>
-                <a:ea typeface="Arial"/>
-              </a:rPr>
-              <a:t>2025</a:t>
-            </a:r>
-          </a:p>
-        </p:txBody>
-      </p:sp>
-      <p:sp>
-        <p:nvSpPr>
-          <p:cNvPr id="48" name="Oval 47"/>
-          <p:cNvSpPr/>
-          <p:nvPr/>
-        </p:nvSpPr>
-        <p:spPr>
-          <a:xfrm>
-            <a:off x="2143595" y="4247388"/>
-            <a:ext cx="164592" cy="164592"/>
-          </a:xfrm>
-          <a:prstGeom prst="ellipse">
+          <p:cNvPr id="44" name="Rectangle 43"/>
+          <p:cNvSpPr/>
+          <p:nvPr/>
+        </p:nvSpPr>
+        <p:spPr>
+          <a:xfrm>
+            <a:off x="5229664" y="3584448"/>
+            <a:ext cx="704791" cy="420624"/>
+          </a:xfrm>
+          <a:prstGeom prst="rect">
             <a:avLst/>
           </a:prstGeom>
           <a:solidFill>
@@ -5990,20 +5830,100 @@
       </p:sp>
       <p:sp>
         <p:nvSpPr>
-          <p:cNvPr id="49" name="Rectangle 48"/>
-          <p:cNvSpPr/>
-          <p:nvPr/>
-        </p:nvSpPr>
-        <p:spPr>
-          <a:xfrm>
-            <a:off x="2218576" y="4041648"/>
-            <a:ext cx="14630" cy="219456"/>
-          </a:xfrm>
-          <a:prstGeom prst="rect">
-            <a:avLst/>
-          </a:prstGeom>
-          <a:solidFill>
-            <a:srgbClr val="AAB8E8"/>
+          <p:cNvPr id="45" name="TextBox 44"/>
+          <p:cNvSpPr txBox="1"/>
+          <p:nvPr/>
+        </p:nvSpPr>
+        <p:spPr>
+          <a:xfrm>
+            <a:off x="5229664" y="3584448"/>
+            <a:ext cx="704791" cy="420624"/>
+          </a:xfrm>
+          <a:prstGeom prst="rect">
+            <a:avLst/>
+          </a:prstGeom>
+          <a:noFill/>
+        </p:spPr>
+        <p:txBody>
+          <a:bodyPr wrap="square" anchor="ctr" lIns="0" rIns="0" tIns="0" bIns="0">
+            <a:spAutoFit/>
+          </a:bodyPr>
+          <a:lstStyle/>
+          <a:p>
+            <a:pPr algn="ctr">
+              <a:lnSpc>
+                <a:spcPct val="112000"/>
+              </a:lnSpc>
+            </a:pPr>
+            <a:r>
+              <a:rPr sz="1125" b="1">
+                <a:solidFill>
+                  <a:srgbClr val="FFFFFF"/>
+                </a:solidFill>
+                <a:latin typeface="Arial"/>
+                <a:ea typeface="Arial"/>
+              </a:rPr>
+              <a:t>10 ~ 13</a:t>
+            </a:r>
+          </a:p>
+        </p:txBody>
+      </p:sp>
+      <p:sp>
+        <p:nvSpPr>
+          <p:cNvPr id="46" name="TextBox 45"/>
+          <p:cNvSpPr txBox="1"/>
+          <p:nvPr/>
+        </p:nvSpPr>
+        <p:spPr>
+          <a:xfrm>
+            <a:off x="5989320" y="3584448"/>
+            <a:ext cx="548640" cy="420624"/>
+          </a:xfrm>
+          <a:prstGeom prst="rect">
+            <a:avLst/>
+          </a:prstGeom>
+          <a:noFill/>
+        </p:spPr>
+        <p:txBody>
+          <a:bodyPr wrap="square" anchor="ctr" lIns="0" rIns="0" tIns="0" bIns="0">
+            <a:spAutoFit/>
+          </a:bodyPr>
+          <a:lstStyle/>
+          <a:p>
+            <a:pPr algn="l">
+              <a:lnSpc>
+                <a:spcPct val="112000"/>
+              </a:lnSpc>
+            </a:pPr>
+            <a:r>
+              <a:rPr sz="900" b="0">
+                <a:solidFill>
+                  <a:srgbClr val="8A8A8A"/>
+                </a:solidFill>
+                <a:latin typeface="Arial"/>
+                <a:ea typeface="Arial"/>
+              </a:rPr>
+              <a:t>Gbps</a:t>
+            </a:r>
+          </a:p>
+        </p:txBody>
+      </p:sp>
+      <p:sp>
+        <p:nvSpPr>
+          <p:cNvPr id="47" name="Rectangle 46"/>
+          <p:cNvSpPr/>
+          <p:nvPr/>
+        </p:nvSpPr>
+        <p:spPr>
+          <a:xfrm>
+            <a:off x="996696" y="4315968"/>
+            <a:ext cx="1792224" cy="420624"/>
+          </a:xfrm>
+          <a:prstGeom prst="rect">
+            <a:avLst/>
+          </a:prstGeom>
+          <a:solidFill>
+            <a:srgbClr val="FFFFFF"/>
           </a:solidFill>
           <a:ln>
             <a:noFill/>
@@ -6034,77 +5954,60 @@
       </p:sp>
       <p:sp>
         <p:nvSpPr>
-          <p:cNvPr id="50" name="TextBox 49"/>
-          <p:cNvSpPr txBox="1"/>
-          <p:nvPr/>
-        </p:nvSpPr>
-        <p:spPr>
-          <a:xfrm>
-            <a:off x="1348067" y="3511296"/>
-            <a:ext cx="1755648" cy="512064"/>
-          </a:xfrm>
-          <a:prstGeom prst="rect">
-            <a:avLst/>
-          </a:prstGeom>
-          <a:noFill/>
-        </p:spPr>
-        <p:txBody>
-          <a:bodyPr wrap="square" anchor="t" lIns="0" rIns="0" tIns="0" bIns="0">
-            <a:spAutoFit/>
-          </a:bodyPr>
-          <a:lstStyle/>
-          <a:p>
-            <a:pPr algn="ctr">
-              <a:lnSpc>
-                <a:spcPct val="100000"/>
-              </a:lnSpc>
-            </a:pPr>
-            <a:r>
-              <a:rPr sz="950" b="1">
-                <a:solidFill>
-                  <a:srgbClr val="1A1A1A"/>
-                </a:solidFill>
-                <a:latin typeface="Arial"/>
-                <a:ea typeface="Arial"/>
-              </a:rPr>
-              <a:t>2013</a:t>
-            </a:r>
-          </a:p>
-          <a:p>
-            <a:pPr algn="ctr">
-              <a:lnSpc>
-                <a:spcPct val="100000"/>
-              </a:lnSpc>
-            </a:pPr>
-            <a:r>
-              <a:rPr sz="900" b="0">
+          <p:cNvPr id="48" name="TextBox 47"/>
+          <p:cNvSpPr txBox="1"/>
+          <p:nvPr/>
+        </p:nvSpPr>
+        <p:spPr>
+          <a:xfrm>
+            <a:off x="996696" y="4315968"/>
+            <a:ext cx="1792224" cy="420624"/>
+          </a:xfrm>
+          <a:prstGeom prst="rect">
+            <a:avLst/>
+          </a:prstGeom>
+          <a:noFill/>
+        </p:spPr>
+        <p:txBody>
+          <a:bodyPr wrap="square" anchor="ctr" lIns="0" rIns="0" tIns="0" bIns="0">
+            <a:spAutoFit/>
+          </a:bodyPr>
+          <a:lstStyle/>
+          <a:p>
+            <a:pPr algn="l">
+              <a:lnSpc>
+                <a:spcPct val="112000"/>
+              </a:lnSpc>
+            </a:pPr>
+            <a:r>
+              <a:rPr sz="1050" b="1">
                 <a:solidFill>
                   <a:srgbClr val="555555"/>
                 </a:solidFill>
                 <a:latin typeface="Arial"/>
                 <a:ea typeface="Arial"/>
               </a:rPr>
-              <a:t>AMD와 HBM 공동 개발</a:t>
-            </a:r>
-          </a:p>
-        </p:txBody>
-      </p:sp>
-      <p:sp>
-        <p:nvSpPr>
-          <p:cNvPr id="51" name="Oval 50"/>
-          <p:cNvSpPr/>
-          <p:nvPr/>
-        </p:nvSpPr>
-        <p:spPr>
-          <a:xfrm>
-            <a:off x="4812164" y="4247388"/>
-            <a:ext cx="164592" cy="164592"/>
-          </a:xfrm>
-          <a:prstGeom prst="ellipse">
-            <a:avLst/>
-          </a:prstGeom>
-          <a:solidFill>
-            <a:srgbClr val="1428A0"/>
+              <a:t>JEDEC HBM4 표준</a:t>
+            </a:r>
+          </a:p>
+        </p:txBody>
+      </p:sp>
+      <p:sp>
+        <p:nvSpPr>
+          <p:cNvPr id="49" name="Rectangle 48"/>
+          <p:cNvSpPr/>
+          <p:nvPr/>
+        </p:nvSpPr>
+        <p:spPr>
+          <a:xfrm>
+            <a:off x="2880360" y="4315968"/>
+            <a:ext cx="1879443" cy="420624"/>
+          </a:xfrm>
+          <a:prstGeom prst="rect">
+            <a:avLst/>
+          </a:prstGeom>
+          <a:solidFill>
+            <a:srgbClr val="8A8A8A"/>
           </a:solidFill>
           <a:ln>
             <a:noFill/>
@@ -6135,20 +6038,100 @@
       </p:sp>
       <p:sp>
         <p:nvSpPr>
+          <p:cNvPr id="50" name="TextBox 49"/>
+          <p:cNvSpPr txBox="1"/>
+          <p:nvPr/>
+        </p:nvSpPr>
+        <p:spPr>
+          <a:xfrm>
+            <a:off x="2880360" y="4315968"/>
+            <a:ext cx="1879443" cy="420624"/>
+          </a:xfrm>
+          <a:prstGeom prst="rect">
+            <a:avLst/>
+          </a:prstGeom>
+          <a:noFill/>
+        </p:spPr>
+        <p:txBody>
+          <a:bodyPr wrap="square" anchor="ctr" lIns="0" rIns="0" tIns="0" bIns="0">
+            <a:spAutoFit/>
+          </a:bodyPr>
+          <a:lstStyle/>
+          <a:p>
+            <a:pPr algn="ctr">
+              <a:lnSpc>
+                <a:spcPct val="112000"/>
+              </a:lnSpc>
+            </a:pPr>
+            <a:r>
+              <a:rPr sz="1125" b="1">
+                <a:solidFill>
+                  <a:srgbClr val="FFFFFF"/>
+                </a:solidFill>
+                <a:latin typeface="Arial"/>
+                <a:ea typeface="Arial"/>
+              </a:rPr>
+              <a:t>최대 8</a:t>
+            </a:r>
+          </a:p>
+        </p:txBody>
+      </p:sp>
+      <p:sp>
+        <p:nvSpPr>
+          <p:cNvPr id="51" name="TextBox 50"/>
+          <p:cNvSpPr txBox="1"/>
+          <p:nvPr/>
+        </p:nvSpPr>
+        <p:spPr>
+          <a:xfrm>
+            <a:off x="4814667" y="4315968"/>
+            <a:ext cx="548640" cy="420624"/>
+          </a:xfrm>
+          <a:prstGeom prst="rect">
+            <a:avLst/>
+          </a:prstGeom>
+          <a:noFill/>
+        </p:spPr>
+        <p:txBody>
+          <a:bodyPr wrap="square" anchor="ctr" lIns="0" rIns="0" tIns="0" bIns="0">
+            <a:spAutoFit/>
+          </a:bodyPr>
+          <a:lstStyle/>
+          <a:p>
+            <a:pPr algn="l">
+              <a:lnSpc>
+                <a:spcPct val="112000"/>
+              </a:lnSpc>
+            </a:pPr>
+            <a:r>
+              <a:rPr sz="900" b="0">
+                <a:solidFill>
+                  <a:srgbClr val="8A8A8A"/>
+                </a:solidFill>
+                <a:latin typeface="Arial"/>
+                <a:ea typeface="Arial"/>
+              </a:rPr>
+              <a:t>Gbps</a:t>
+            </a:r>
+          </a:p>
+        </p:txBody>
+      </p:sp>
+      <p:sp>
+        <p:nvSpPr>
           <p:cNvPr id="52" name="Rectangle 51"/>
           <p:cNvSpPr/>
           <p:nvPr/>
         </p:nvSpPr>
         <p:spPr>
           <a:xfrm>
-            <a:off x="4887145" y="4041648"/>
-            <a:ext cx="14630" cy="219456"/>
-          </a:xfrm>
-          <a:prstGeom prst="rect">
-            <a:avLst/>
-          </a:prstGeom>
-          <a:solidFill>
-            <a:srgbClr val="AAB8E8"/>
+            <a:off x="4753402" y="3584448"/>
+            <a:ext cx="12801" cy="1152143"/>
+          </a:xfrm>
+          <a:prstGeom prst="rect">
+            <a:avLst/>
+          </a:prstGeom>
+          <a:solidFill>
+            <a:srgbClr val="3C5AC8"/>
           </a:solidFill>
           <a:ln>
             <a:noFill/>
@@ -6179,94 +6162,20 @@
       </p:sp>
       <p:sp>
         <p:nvSpPr>
-          <p:cNvPr id="53" name="TextBox 52"/>
-          <p:cNvSpPr txBox="1"/>
-          <p:nvPr/>
-        </p:nvSpPr>
-        <p:spPr>
-          <a:xfrm>
-            <a:off x="4016636" y="2980944"/>
-            <a:ext cx="1755648" cy="512064"/>
-          </a:xfrm>
-          <a:prstGeom prst="rect">
-            <a:avLst/>
-          </a:prstGeom>
-          <a:noFill/>
-        </p:spPr>
-        <p:txBody>
-          <a:bodyPr wrap="square" anchor="t" lIns="0" rIns="0" tIns="0" bIns="0">
-            <a:spAutoFit/>
-          </a:bodyPr>
-          <a:lstStyle/>
-          <a:p>
-            <a:pPr algn="ctr">
-              <a:lnSpc>
-                <a:spcPct val="100000"/>
-              </a:lnSpc>
-            </a:pPr>
-            <a:r>
-              <a:rPr sz="950" b="1">
-                <a:solidFill>
-                  <a:srgbClr val="1A1A1A"/>
-                </a:solidFill>
-                <a:latin typeface="Arial"/>
-                <a:ea typeface="Arial"/>
-              </a:rPr>
-              <a:t>2021-10 → 2022-06</a:t>
-            </a:r>
-          </a:p>
-          <a:p>
-            <a:pPr algn="ctr">
-              <a:lnSpc>
-                <a:spcPct val="100000"/>
-              </a:lnSpc>
-            </a:pPr>
-            <a:r>
-              <a:rPr sz="900" b="0">
-                <a:solidFill>
-                  <a:srgbClr val="555555"/>
-                </a:solidFill>
-                <a:latin typeface="Arial"/>
-                <a:ea typeface="Arial"/>
-              </a:rPr>
-              <a:t>표준보다 먼저 개발 →</a:t>
-            </a:r>
-          </a:p>
-          <a:p>
-            <a:pPr algn="ctr">
-              <a:lnSpc>
-                <a:spcPct val="100000"/>
-              </a:lnSpc>
-            </a:pPr>
-            <a:r>
-              <a:rPr sz="900" b="0">
-                <a:solidFill>
-                  <a:srgbClr val="555555"/>
-                </a:solidFill>
-                <a:latin typeface="Arial"/>
-                <a:ea typeface="Arial"/>
-              </a:rPr>
-              <a:t>NVIDIA 최초 공급</a:t>
-            </a:r>
-          </a:p>
-        </p:txBody>
-      </p:sp>
-      <p:sp>
-        <p:nvSpPr>
-          <p:cNvPr id="54" name="Oval 53"/>
-          <p:cNvSpPr/>
-          <p:nvPr/>
-        </p:nvSpPr>
-        <p:spPr>
-          <a:xfrm>
-            <a:off x="5965249" y="4247388"/>
-            <a:ext cx="164592" cy="164592"/>
-          </a:xfrm>
-          <a:prstGeom prst="ellipse">
-            <a:avLst/>
-          </a:prstGeom>
-          <a:solidFill>
-            <a:srgbClr val="1428A0"/>
+          <p:cNvPr id="53" name="Rectangle 52"/>
+          <p:cNvSpPr/>
+          <p:nvPr/>
+        </p:nvSpPr>
+        <p:spPr>
+          <a:xfrm>
+            <a:off x="5223263" y="3584448"/>
+            <a:ext cx="12801" cy="1152143"/>
+          </a:xfrm>
+          <a:prstGeom prst="rect">
+            <a:avLst/>
+          </a:prstGeom>
+          <a:solidFill>
+            <a:srgbClr val="3C5AC8"/>
           </a:solidFill>
           <a:ln>
             <a:noFill/>
@@ -6297,20 +6206,20 @@
       </p:sp>
       <p:sp>
         <p:nvSpPr>
-          <p:cNvPr id="55" name="Rectangle 54"/>
-          <p:cNvSpPr/>
-          <p:nvPr/>
-        </p:nvSpPr>
-        <p:spPr>
-          <a:xfrm>
-            <a:off x="6040230" y="4041648"/>
-            <a:ext cx="14630" cy="219456"/>
-          </a:xfrm>
-          <a:prstGeom prst="rect">
-            <a:avLst/>
-          </a:prstGeom>
-          <a:solidFill>
-            <a:srgbClr val="AAB8E8"/>
+          <p:cNvPr id="54" name="Rectangle 53"/>
+          <p:cNvSpPr/>
+          <p:nvPr/>
+        </p:nvSpPr>
+        <p:spPr>
+          <a:xfrm>
+            <a:off x="4759803" y="4809744"/>
+            <a:ext cx="469860" cy="45720"/>
+          </a:xfrm>
+          <a:prstGeom prst="rect">
+            <a:avLst/>
+          </a:prstGeom>
+          <a:solidFill>
+            <a:srgbClr val="3C5AC8"/>
           </a:solidFill>
           <a:ln>
             <a:noFill/>
@@ -6341,14 +6250,64 @@
       </p:sp>
       <p:sp>
         <p:nvSpPr>
+          <p:cNvPr id="55" name="TextBox 54"/>
+          <p:cNvSpPr txBox="1"/>
+          <p:nvPr/>
+        </p:nvSpPr>
+        <p:spPr>
+          <a:xfrm>
+            <a:off x="996696" y="4901183"/>
+            <a:ext cx="5486400" cy="219456"/>
+          </a:xfrm>
+          <a:prstGeom prst="rect">
+            <a:avLst/>
+          </a:prstGeom>
+          <a:noFill/>
+        </p:spPr>
+        <p:txBody>
+          <a:bodyPr wrap="square" anchor="t" lIns="0" rIns="0" tIns="0" bIns="0">
+            <a:spAutoFit/>
+          </a:bodyPr>
+          <a:lstStyle/>
+          <a:p>
+            <a:pPr algn="l">
+              <a:lnSpc>
+                <a:spcPct val="112000"/>
+              </a:lnSpc>
+            </a:pPr>
+            <a:r>
+              <a:rPr sz="1000" b="1">
+                <a:solidFill>
+                  <a:srgbClr val="3C5AC8"/>
+                </a:solidFill>
+                <a:latin typeface="Arial"/>
+                <a:ea typeface="Arial"/>
+              </a:rPr>
+              <a:t>표준을 만족해도 닿지 않는 구간</a:t>
+            </a:r>
+            <a:r>
+              <a:rPr sz="1000" b="0">
+                <a:solidFill>
+                  <a:srgbClr val="555555"/>
+                </a:solidFill>
+                <a:latin typeface="Arial"/>
+                <a:ea typeface="Arial"/>
+              </a:rPr>
+              <a:t>   design-in은 표준선이 아니라 고객 요구선에서 갈렸습니다</a:t>
+            </a:r>
+          </a:p>
+        </p:txBody>
+      </p:sp>
+      <p:sp>
+        <p:nvSpPr>
           <p:cNvPr id="56" name="TextBox 55"/>
           <p:cNvSpPr txBox="1"/>
           <p:nvPr/>
         </p:nvSpPr>
         <p:spPr>
           <a:xfrm>
-            <a:off x="4727448" y="3511296"/>
-            <a:ext cx="1755648" cy="512064"/>
+            <a:off x="996696" y="5285231"/>
+            <a:ext cx="5486400" cy="201168"/>
           </a:xfrm>
           <a:prstGeom prst="rect">
             <a:avLst/>
@@ -6361,78 +6320,44 @@
           </a:bodyPr>
           <a:lstStyle/>
           <a:p>
-            <a:pPr algn="ctr">
-              <a:lnSpc>
-                <a:spcPct val="100000"/>
-              </a:lnSpc>
-            </a:pPr>
-            <a:r>
-              <a:rPr sz="950" b="1">
-                <a:solidFill>
-                  <a:srgbClr val="1A1A1A"/>
-                </a:solidFill>
-                <a:latin typeface="Arial"/>
-                <a:ea typeface="Arial"/>
-              </a:rPr>
-              <a:t>2025-06</a:t>
-            </a:r>
-          </a:p>
-          <a:p>
-            <a:pPr algn="ctr">
-              <a:lnSpc>
-                <a:spcPct val="100000"/>
-              </a:lnSpc>
-            </a:pPr>
-            <a:r>
-              <a:rPr sz="900" b="0">
-                <a:solidFill>
-                  <a:srgbClr val="555555"/>
-                </a:solidFill>
-                <a:latin typeface="Arial"/>
-                <a:ea typeface="Arial"/>
-              </a:rPr>
-              <a:t>DRAM 매출 1위</a:t>
-            </a:r>
-          </a:p>
-          <a:p>
-            <a:pPr algn="ctr">
-              <a:lnSpc>
-                <a:spcPct val="100000"/>
-              </a:lnSpc>
-            </a:pPr>
-            <a:r>
-              <a:rPr sz="900" b="0">
-                <a:solidFill>
-                  <a:srgbClr val="555555"/>
-                </a:solidFill>
-                <a:latin typeface="Arial"/>
-                <a:ea typeface="Arial"/>
-              </a:rPr>
-              <a:t>1992년 이후 처음</a:t>
-            </a:r>
-          </a:p>
-        </p:txBody>
-      </p:sp>
-      <p:sp>
-        <p:nvSpPr>
-          <p:cNvPr id="57" name="Oval 56"/>
-          <p:cNvSpPr/>
-          <p:nvPr/>
-        </p:nvSpPr>
-        <p:spPr>
-          <a:xfrm>
-            <a:off x="3889696" y="4869180"/>
-            <a:ext cx="164592" cy="164592"/>
-          </a:xfrm>
-          <a:prstGeom prst="ellipse">
+            <a:pPr algn="l">
+              <a:lnSpc>
+                <a:spcPct val="112000"/>
+              </a:lnSpc>
+            </a:pPr>
+            <a:r>
+              <a:rPr sz="1000" b="1">
+                <a:solidFill>
+                  <a:srgbClr val="1428A0"/>
+                </a:solidFill>
+                <a:latin typeface="Arial"/>
+                <a:ea typeface="Arial"/>
+              </a:rPr>
+              <a:t>공개 기록</a:t>
+            </a:r>
+          </a:p>
+        </p:txBody>
+      </p:sp>
+      <p:sp>
+        <p:nvSpPr>
+          <p:cNvPr id="57" name="Rectangle 56"/>
+          <p:cNvSpPr/>
+          <p:nvPr/>
+        </p:nvSpPr>
+        <p:spPr>
+          <a:xfrm>
+            <a:off x="996696" y="5522975"/>
+            <a:ext cx="1743455" cy="1280160"/>
+          </a:xfrm>
+          <a:prstGeom prst="rect">
             <a:avLst/>
           </a:prstGeom>
           <a:solidFill>
             <a:srgbClr val="FFFFFF"/>
           </a:solidFill>
-          <a:ln w="15875">
+          <a:ln w="9525">
             <a:solidFill>
-              <a:srgbClr val="8A8A8A"/>
+              <a:srgbClr val="D9D9D9"/>
             </a:solidFill>
           </a:ln>
           <a:effectLst/>
@@ -6467,14 +6392,14 @@
         </p:nvSpPr>
         <p:spPr>
           <a:xfrm>
-            <a:off x="3964677" y="5029200"/>
-            <a:ext cx="14630" cy="182880"/>
-          </a:xfrm>
-          <a:prstGeom prst="rect">
-            <a:avLst/>
-          </a:prstGeom>
-          <a:solidFill>
-            <a:srgbClr val="D9D9D9"/>
+            <a:off x="996696" y="5522975"/>
+            <a:ext cx="1743455" cy="36576"/>
+          </a:xfrm>
+          <a:prstGeom prst="rect">
+            <a:avLst/>
+          </a:prstGeom>
+          <a:solidFill>
+            <a:srgbClr val="AAB8E8"/>
           </a:solidFill>
           <a:ln>
             <a:noFill/>
@@ -6511,8 +6436,8 @@
         </p:nvSpPr>
         <p:spPr>
           <a:xfrm>
-            <a:off x="3094168" y="5230368"/>
-            <a:ext cx="1755648" cy="512064"/>
+            <a:off x="1106424" y="5596127"/>
+            <a:ext cx="1523999" cy="182880"/>
           </a:xfrm>
           <a:prstGeom prst="rect">
             <a:avLst/>
@@ -6525,26 +6450,99 @@
           </a:bodyPr>
           <a:lstStyle/>
           <a:p>
-            <a:pPr algn="ctr">
-              <a:lnSpc>
-                <a:spcPct val="100000"/>
+            <a:pPr algn="l">
+              <a:lnSpc>
+                <a:spcPct val="112000"/>
               </a:lnSpc>
             </a:pPr>
             <a:r>
               <a:rPr sz="950" b="1">
                 <a:solidFill>
+                  <a:srgbClr val="1428A0"/>
+                </a:solidFill>
+                <a:latin typeface="Arial"/>
+                <a:ea typeface="Arial"/>
+              </a:rPr>
+              <a:t>2019-03  </a:t>
+            </a:r>
+            <a:r>
+              <a:rPr sz="950" b="0">
+                <a:solidFill>
+                  <a:srgbClr val="8A8A8A"/>
+                </a:solidFill>
+                <a:latin typeface="Arial"/>
+                <a:ea typeface="Arial"/>
+              </a:rPr>
+              <a:t>삼성</a:t>
+            </a:r>
+          </a:p>
+        </p:txBody>
+      </p:sp>
+      <p:sp>
+        <p:nvSpPr>
+          <p:cNvPr id="60" name="TextBox 59"/>
+          <p:cNvSpPr txBox="1"/>
+          <p:nvPr/>
+        </p:nvSpPr>
+        <p:spPr>
+          <a:xfrm>
+            <a:off x="1106424" y="5797296"/>
+            <a:ext cx="1523999" cy="438912"/>
+          </a:xfrm>
+          <a:prstGeom prst="rect">
+            <a:avLst/>
+          </a:prstGeom>
+          <a:noFill/>
+        </p:spPr>
+        <p:txBody>
+          <a:bodyPr wrap="square" anchor="t" lIns="0" rIns="0" tIns="0" bIns="0">
+            <a:spAutoFit/>
+          </a:bodyPr>
+          <a:lstStyle/>
+          <a:p>
+            <a:pPr algn="l">
+              <a:lnSpc>
+                <a:spcPct val="104000"/>
+              </a:lnSpc>
+            </a:pPr>
+            <a:r>
+              <a:rPr sz="1050" b="1">
+                <a:solidFill>
                   <a:srgbClr val="1A1A1A"/>
                 </a:solidFill>
                 <a:latin typeface="Arial"/>
                 <a:ea typeface="Arial"/>
               </a:rPr>
-              <a:t>2019</a:t>
-            </a:r>
-          </a:p>
-          <a:p>
-            <a:pPr algn="ctr">
-              <a:lnSpc>
-                <a:spcPct val="100000"/>
+              <a:t>업계 최초 HBM2E 발표</a:t>
+            </a:r>
+          </a:p>
+        </p:txBody>
+      </p:sp>
+      <p:sp>
+        <p:nvSpPr>
+          <p:cNvPr id="61" name="TextBox 60"/>
+          <p:cNvSpPr txBox="1"/>
+          <p:nvPr/>
+        </p:nvSpPr>
+        <p:spPr>
+          <a:xfrm>
+            <a:off x="1106424" y="6254496"/>
+            <a:ext cx="1523999" cy="365760"/>
+          </a:xfrm>
+          <a:prstGeom prst="rect">
+            <a:avLst/>
+          </a:prstGeom>
+          <a:noFill/>
+        </p:spPr>
+        <p:txBody>
+          <a:bodyPr wrap="square" anchor="t" lIns="0" rIns="0" tIns="0" bIns="0">
+            <a:spAutoFit/>
+          </a:bodyPr>
+          <a:lstStyle/>
+          <a:p>
+            <a:pPr algn="l">
+              <a:lnSpc>
+                <a:spcPct val="102000"/>
               </a:lnSpc>
             </a:pPr>
             <a:r>
@@ -6555,48 +6553,31 @@
                 <a:latin typeface="Arial"/>
                 <a:ea typeface="Arial"/>
               </a:rPr>
-              <a:t>시장 성장률을 과대평가로 보고</a:t>
-            </a:r>
-          </a:p>
-          <a:p>
-            <a:pPr algn="ctr">
-              <a:lnSpc>
-                <a:spcPct val="100000"/>
-              </a:lnSpc>
-            </a:pPr>
-            <a:r>
-              <a:rPr sz="900" b="0">
-                <a:solidFill>
-                  <a:srgbClr val="555555"/>
-                </a:solidFill>
-                <a:latin typeface="Arial"/>
-                <a:ea typeface="Arial"/>
-              </a:rPr>
-              <a:t>전담 조직 후순위</a:t>
-            </a:r>
-          </a:p>
-        </p:txBody>
-      </p:sp>
-      <p:sp>
-        <p:nvSpPr>
-          <p:cNvPr id="60" name="Oval 59"/>
-          <p:cNvSpPr/>
-          <p:nvPr/>
-        </p:nvSpPr>
-        <p:spPr>
-          <a:xfrm>
-            <a:off x="5569906" y="4869180"/>
-            <a:ext cx="164592" cy="164592"/>
-          </a:xfrm>
-          <a:prstGeom prst="ellipse">
+              <a:t>기술은 확보돼 있었습니다</a:t>
+            </a:r>
+          </a:p>
+        </p:txBody>
+      </p:sp>
+      <p:sp>
+        <p:nvSpPr>
+          <p:cNvPr id="62" name="Rectangle 61"/>
+          <p:cNvSpPr/>
+          <p:nvPr/>
+        </p:nvSpPr>
+        <p:spPr>
+          <a:xfrm>
+            <a:off x="2868168" y="5522975"/>
+            <a:ext cx="1743455" cy="1280160"/>
+          </a:xfrm>
+          <a:prstGeom prst="rect">
             <a:avLst/>
           </a:prstGeom>
           <a:solidFill>
             <a:srgbClr val="FFFFFF"/>
           </a:solidFill>
-          <a:ln w="15875">
+          <a:ln w="9525">
             <a:solidFill>
-              <a:srgbClr val="8A8A8A"/>
+              <a:srgbClr val="D9D9D9"/>
             </a:solidFill>
           </a:ln>
           <a:effectLst/>
@@ -6625,20 +6606,20 @@
       </p:sp>
       <p:sp>
         <p:nvSpPr>
-          <p:cNvPr id="61" name="Rectangle 60"/>
-          <p:cNvSpPr/>
-          <p:nvPr/>
-        </p:nvSpPr>
-        <p:spPr>
-          <a:xfrm>
-            <a:off x="5644887" y="5029200"/>
-            <a:ext cx="14630" cy="182880"/>
-          </a:xfrm>
-          <a:prstGeom prst="rect">
-            <a:avLst/>
-          </a:prstGeom>
-          <a:solidFill>
-            <a:srgbClr val="D9D9D9"/>
+          <p:cNvPr id="63" name="Rectangle 62"/>
+          <p:cNvSpPr/>
+          <p:nvPr/>
+        </p:nvSpPr>
+        <p:spPr>
+          <a:xfrm>
+            <a:off x="2868168" y="5522975"/>
+            <a:ext cx="1743455" cy="36576"/>
+          </a:xfrm>
+          <a:prstGeom prst="rect">
+            <a:avLst/>
+          </a:prstGeom>
+          <a:solidFill>
+            <a:srgbClr val="AAB8E8"/>
           </a:solidFill>
           <a:ln>
             <a:noFill/>
@@ -6669,14 +6650,14 @@
       </p:sp>
       <p:sp>
         <p:nvSpPr>
-          <p:cNvPr id="62" name="TextBox 61"/>
-          <p:cNvSpPr txBox="1"/>
-          <p:nvPr/>
-        </p:nvSpPr>
-        <p:spPr>
-          <a:xfrm>
-            <a:off x="4727448" y="5760720"/>
-            <a:ext cx="1755648" cy="512064"/>
+          <p:cNvPr id="64" name="TextBox 63"/>
+          <p:cNvSpPr txBox="1"/>
+          <p:nvPr/>
+        </p:nvSpPr>
+        <p:spPr>
+          <a:xfrm>
+            <a:off x="2977896" y="5596127"/>
+            <a:ext cx="1523999" cy="182880"/>
           </a:xfrm>
           <a:prstGeom prst="rect">
             <a:avLst/>
@@ -6689,26 +6670,99 @@
           </a:bodyPr>
           <a:lstStyle/>
           <a:p>
-            <a:pPr algn="ctr">
-              <a:lnSpc>
-                <a:spcPct val="100000"/>
+            <a:pPr algn="l">
+              <a:lnSpc>
+                <a:spcPct val="112000"/>
               </a:lnSpc>
             </a:pPr>
             <a:r>
               <a:rPr sz="950" b="1">
                 <a:solidFill>
+                  <a:srgbClr val="1428A0"/>
+                </a:solidFill>
+                <a:latin typeface="Arial"/>
+                <a:ea typeface="Arial"/>
+              </a:rPr>
+              <a:t>2021-10  </a:t>
+            </a:r>
+            <a:r>
+              <a:rPr sz="950" b="0">
+                <a:solidFill>
+                  <a:srgbClr val="8A8A8A"/>
+                </a:solidFill>
+                <a:latin typeface="Arial"/>
+                <a:ea typeface="Arial"/>
+              </a:rPr>
+              <a:t>SK하이닉스</a:t>
+            </a:r>
+          </a:p>
+        </p:txBody>
+      </p:sp>
+      <p:sp>
+        <p:nvSpPr>
+          <p:cNvPr id="65" name="TextBox 64"/>
+          <p:cNvSpPr txBox="1"/>
+          <p:nvPr/>
+        </p:nvSpPr>
+        <p:spPr>
+          <a:xfrm>
+            <a:off x="2977896" y="5797296"/>
+            <a:ext cx="1523999" cy="438912"/>
+          </a:xfrm>
+          <a:prstGeom prst="rect">
+            <a:avLst/>
+          </a:prstGeom>
+          <a:noFill/>
+        </p:spPr>
+        <p:txBody>
+          <a:bodyPr wrap="square" anchor="t" lIns="0" rIns="0" tIns="0" bIns="0">
+            <a:spAutoFit/>
+          </a:bodyPr>
+          <a:lstStyle/>
+          <a:p>
+            <a:pPr algn="l">
+              <a:lnSpc>
+                <a:spcPct val="104000"/>
+              </a:lnSpc>
+            </a:pPr>
+            <a:r>
+              <a:rPr sz="1050" b="1">
+                <a:solidFill>
                   <a:srgbClr val="1A1A1A"/>
                 </a:solidFill>
                 <a:latin typeface="Arial"/>
                 <a:ea typeface="Arial"/>
               </a:rPr>
-              <a:t>2024-04</a:t>
-            </a:r>
-          </a:p>
-          <a:p>
-            <a:pPr algn="ctr">
-              <a:lnSpc>
-                <a:spcPct val="100000"/>
+              <a:t>표준 제정 전 HBM3 완료</a:t>
+            </a:r>
+          </a:p>
+        </p:txBody>
+      </p:sp>
+      <p:sp>
+        <p:nvSpPr>
+          <p:cNvPr id="66" name="TextBox 65"/>
+          <p:cNvSpPr txBox="1"/>
+          <p:nvPr/>
+        </p:nvSpPr>
+        <p:spPr>
+          <a:xfrm>
+            <a:off x="2977896" y="6254496"/>
+            <a:ext cx="1523999" cy="365760"/>
+          </a:xfrm>
+          <a:prstGeom prst="rect">
+            <a:avLst/>
+          </a:prstGeom>
+          <a:noFill/>
+        </p:spPr>
+        <p:txBody>
+          <a:bodyPr wrap="square" anchor="t" lIns="0" rIns="0" tIns="0" bIns="0">
+            <a:spAutoFit/>
+          </a:bodyPr>
+          <a:lstStyle/>
+          <a:p>
+            <a:pPr algn="l">
+              <a:lnSpc>
+                <a:spcPct val="102000"/>
               </a:lnSpc>
             </a:pPr>
             <a:r>
@@ -6719,31 +6773,31 @@
                 <a:latin typeface="Arial"/>
                 <a:ea typeface="Arial"/>
               </a:rPr>
-              <a:t>전담 팀 재구성 · 5년 공백</a:t>
-            </a:r>
-          </a:p>
-        </p:txBody>
-      </p:sp>
-      <p:sp>
-        <p:nvSpPr>
-          <p:cNvPr id="63" name="Oval 62"/>
-          <p:cNvSpPr/>
-          <p:nvPr/>
-        </p:nvSpPr>
-        <p:spPr>
-          <a:xfrm>
-            <a:off x="6031140" y="4869180"/>
-            <a:ext cx="164592" cy="164592"/>
-          </a:xfrm>
-          <a:prstGeom prst="ellipse">
+              <a:t>2022-06 NVIDIA 최초 공급</a:t>
+            </a:r>
+          </a:p>
+        </p:txBody>
+      </p:sp>
+      <p:sp>
+        <p:nvSpPr>
+          <p:cNvPr id="67" name="Rectangle 66"/>
+          <p:cNvSpPr/>
+          <p:nvPr/>
+        </p:nvSpPr>
+        <p:spPr>
+          <a:xfrm>
+            <a:off x="4739639" y="5522975"/>
+            <a:ext cx="1743455" cy="1280160"/>
+          </a:xfrm>
+          <a:prstGeom prst="rect">
             <a:avLst/>
           </a:prstGeom>
           <a:solidFill>
             <a:srgbClr val="FFFFFF"/>
           </a:solidFill>
-          <a:ln w="15875">
+          <a:ln w="9525">
             <a:solidFill>
-              <a:srgbClr val="8A8A8A"/>
+              <a:srgbClr val="D9D9D9"/>
             </a:solidFill>
           </a:ln>
           <a:effectLst/>
@@ -6772,20 +6826,20 @@
       </p:sp>
       <p:sp>
         <p:nvSpPr>
-          <p:cNvPr id="64" name="Rectangle 63"/>
-          <p:cNvSpPr/>
-          <p:nvPr/>
-        </p:nvSpPr>
-        <p:spPr>
-          <a:xfrm>
-            <a:off x="6106121" y="5029200"/>
-            <a:ext cx="14630" cy="182880"/>
-          </a:xfrm>
-          <a:prstGeom prst="rect">
-            <a:avLst/>
-          </a:prstGeom>
-          <a:solidFill>
-            <a:srgbClr val="D9D9D9"/>
+          <p:cNvPr id="68" name="Rectangle 67"/>
+          <p:cNvSpPr/>
+          <p:nvPr/>
+        </p:nvSpPr>
+        <p:spPr>
+          <a:xfrm>
+            <a:off x="4739639" y="5522975"/>
+            <a:ext cx="1743455" cy="36576"/>
+          </a:xfrm>
+          <a:prstGeom prst="rect">
+            <a:avLst/>
+          </a:prstGeom>
+          <a:solidFill>
+            <a:srgbClr val="AAB8E8"/>
           </a:solidFill>
           <a:ln>
             <a:noFill/>
@@ -6816,14 +6870,14 @@
       </p:sp>
       <p:sp>
         <p:nvSpPr>
-          <p:cNvPr id="65" name="TextBox 64"/>
-          <p:cNvSpPr txBox="1"/>
-          <p:nvPr/>
-        </p:nvSpPr>
-        <p:spPr>
-          <a:xfrm>
-            <a:off x="4727448" y="5230368"/>
-            <a:ext cx="1755648" cy="512064"/>
+          <p:cNvPr id="69" name="TextBox 68"/>
+          <p:cNvSpPr txBox="1"/>
+          <p:nvPr/>
+        </p:nvSpPr>
+        <p:spPr>
+          <a:xfrm>
+            <a:off x="4849367" y="5596127"/>
+            <a:ext cx="1523999" cy="182880"/>
           </a:xfrm>
           <a:prstGeom prst="rect">
             <a:avLst/>
@@ -6836,26 +6890,99 @@
           </a:bodyPr>
           <a:lstStyle/>
           <a:p>
-            <a:pPr algn="ctr">
-              <a:lnSpc>
-                <a:spcPct val="100000"/>
+            <a:pPr algn="l">
+              <a:lnSpc>
+                <a:spcPct val="112000"/>
               </a:lnSpc>
             </a:pPr>
             <a:r>
               <a:rPr sz="950" b="1">
                 <a:solidFill>
+                  <a:srgbClr val="1428A0"/>
+                </a:solidFill>
+                <a:latin typeface="Arial"/>
+                <a:ea typeface="Arial"/>
+              </a:rPr>
+              <a:t>2026-02  </a:t>
+            </a:r>
+            <a:r>
+              <a:rPr sz="950" b="0">
+                <a:solidFill>
+                  <a:srgbClr val="8A8A8A"/>
+                </a:solidFill>
+                <a:latin typeface="Arial"/>
+                <a:ea typeface="Arial"/>
+              </a:rPr>
+              <a:t>삼성</a:t>
+            </a:r>
+          </a:p>
+        </p:txBody>
+      </p:sp>
+      <p:sp>
+        <p:nvSpPr>
+          <p:cNvPr id="70" name="TextBox 69"/>
+          <p:cNvSpPr txBox="1"/>
+          <p:nvPr/>
+        </p:nvSpPr>
+        <p:spPr>
+          <a:xfrm>
+            <a:off x="4849367" y="5797296"/>
+            <a:ext cx="1523999" cy="438912"/>
+          </a:xfrm>
+          <a:prstGeom prst="rect">
+            <a:avLst/>
+          </a:prstGeom>
+          <a:noFill/>
+        </p:spPr>
+        <p:txBody>
+          <a:bodyPr wrap="square" anchor="t" lIns="0" rIns="0" tIns="0" bIns="0">
+            <a:spAutoFit/>
+          </a:bodyPr>
+          <a:lstStyle/>
+          <a:p>
+            <a:pPr algn="l">
+              <a:lnSpc>
+                <a:spcPct val="104000"/>
+              </a:lnSpc>
+            </a:pPr>
+            <a:r>
+              <a:rPr sz="1050" b="1">
+                <a:solidFill>
                   <a:srgbClr val="1A1A1A"/>
                 </a:solidFill>
                 <a:latin typeface="Arial"/>
                 <a:ea typeface="Arial"/>
               </a:rPr>
-              <a:t>2025-09</a:t>
-            </a:r>
-          </a:p>
-          <a:p>
-            <a:pPr algn="ctr">
-              <a:lnSpc>
-                <a:spcPct val="100000"/>
+              <a:t>업계 최초 상용 HBM4 출하</a:t>
+            </a:r>
+          </a:p>
+        </p:txBody>
+      </p:sp>
+      <p:sp>
+        <p:nvSpPr>
+          <p:cNvPr id="71" name="TextBox 70"/>
+          <p:cNvSpPr txBox="1"/>
+          <p:nvPr/>
+        </p:nvSpPr>
+        <p:spPr>
+          <a:xfrm>
+            <a:off x="4849367" y="6254496"/>
+            <a:ext cx="1523999" cy="365760"/>
+          </a:xfrm>
+          <a:prstGeom prst="rect">
+            <a:avLst/>
+          </a:prstGeom>
+          <a:noFill/>
+        </p:spPr>
+        <p:txBody>
+          <a:bodyPr wrap="square" anchor="t" lIns="0" rIns="0" tIns="0" bIns="0">
+            <a:spAutoFit/>
+          </a:bodyPr>
+          <a:lstStyle/>
+          <a:p>
+            <a:pPr algn="l">
+              <a:lnSpc>
+                <a:spcPct val="102000"/>
               </a:lnSpc>
             </a:pPr>
             <a:r>
@@ -6866,95 +6993,21 @@
                 <a:latin typeface="Arial"/>
                 <a:ea typeface="Arial"/>
               </a:rPr>
-              <a:t>12단 HBM3E 퀄 통과</a:t>
-            </a:r>
-          </a:p>
-          <a:p>
-            <a:pPr algn="ctr">
-              <a:lnSpc>
-                <a:spcPct val="100000"/>
-              </a:lnSpc>
-            </a:pPr>
-            <a:r>
-              <a:rPr sz="900" b="0">
-                <a:solidFill>
-                  <a:srgbClr val="555555"/>
-                </a:solidFill>
-                <a:latin typeface="Arial"/>
-                <a:ea typeface="Arial"/>
-              </a:rPr>
-              <a:t>18개월 지연</a:t>
-            </a:r>
-          </a:p>
-        </p:txBody>
-      </p:sp>
-      <p:sp>
-        <p:nvSpPr>
-          <p:cNvPr id="66" name="TextBox 65"/>
-          <p:cNvSpPr txBox="1"/>
-          <p:nvPr/>
-        </p:nvSpPr>
-        <p:spPr>
-          <a:xfrm>
-            <a:off x="1995274" y="4480559"/>
-            <a:ext cx="3108960" cy="365760"/>
-          </a:xfrm>
-          <a:prstGeom prst="rect">
-            <a:avLst/>
-          </a:prstGeom>
-          <a:noFill/>
-        </p:spPr>
-        <p:txBody>
-          <a:bodyPr wrap="square" anchor="t" lIns="0" rIns="0" tIns="0" bIns="0">
-            <a:spAutoFit/>
-          </a:bodyPr>
-          <a:lstStyle/>
-          <a:p>
-            <a:pPr algn="l">
-              <a:lnSpc>
-                <a:spcPct val="100000"/>
-              </a:lnSpc>
-            </a:pPr>
-            <a:r>
-              <a:rPr sz="900" b="1">
-                <a:solidFill>
-                  <a:srgbClr val="1A1A1A"/>
-                </a:solidFill>
-                <a:latin typeface="Arial"/>
-                <a:ea typeface="Arial"/>
-              </a:rPr>
-              <a:t>업계 최초 HBM2E는 삼성이 2019-03에 발표했습니다</a:t>
-            </a:r>
-          </a:p>
-          <a:p>
-            <a:pPr algn="l">
-              <a:lnSpc>
-                <a:spcPct val="100000"/>
-              </a:lnSpc>
-            </a:pPr>
-            <a:r>
-              <a:rPr sz="900" b="0">
-                <a:solidFill>
-                  <a:srgbClr val="555555"/>
-                </a:solidFill>
-                <a:latin typeface="Arial"/>
-                <a:ea typeface="Arial"/>
-              </a:rPr>
-              <a:t>기술의 차이가 아니었습니다</a:t>
-            </a:r>
-          </a:p>
-        </p:txBody>
-      </p:sp>
-      <p:sp>
-        <p:nvSpPr>
-          <p:cNvPr id="67" name="Rectangle 66"/>
-          <p:cNvSpPr/>
-          <p:nvPr/>
-        </p:nvSpPr>
-        <p:spPr>
-          <a:xfrm>
-            <a:off x="996696" y="6327648"/>
-            <a:ext cx="5486400" cy="786384"/>
+              <a:t>제품 개발은 이어졌습니다</a:t>
+            </a:r>
+          </a:p>
+        </p:txBody>
+      </p:sp>
+      <p:sp>
+        <p:nvSpPr>
+          <p:cNvPr id="72" name="Rectangle 71"/>
+          <p:cNvSpPr/>
+          <p:nvPr/>
+        </p:nvSpPr>
+        <p:spPr>
+          <a:xfrm>
+            <a:off x="996696" y="6931151"/>
+            <a:ext cx="5486400" cy="932688"/>
           </a:xfrm>
           <a:prstGeom prst="rect">
             <a:avLst/>
@@ -6991,14 +7044,14 @@
       </p:sp>
       <p:sp>
         <p:nvSpPr>
-          <p:cNvPr id="68" name="TextBox 67"/>
-          <p:cNvSpPr txBox="1"/>
-          <p:nvPr/>
-        </p:nvSpPr>
-        <p:spPr>
-          <a:xfrm>
-            <a:off x="1234440" y="6419088"/>
-            <a:ext cx="5010912" cy="274320"/>
+          <p:cNvPr id="73" name="TextBox 72"/>
+          <p:cNvSpPr txBox="1"/>
+          <p:nvPr/>
+        </p:nvSpPr>
+        <p:spPr>
+          <a:xfrm>
+            <a:off x="1216152" y="7022591"/>
+            <a:ext cx="5047488" cy="475488"/>
           </a:xfrm>
           <a:prstGeom prst="rect">
             <a:avLst/>
@@ -7013,32 +7066,626 @@
           <a:p>
             <a:pPr algn="l">
               <a:lnSpc>
+                <a:spcPct val="104000"/>
+              </a:lnSpc>
+            </a:pPr>
+            <a:r>
+              <a:rPr sz="1425" b="1">
+                <a:solidFill>
+                  <a:srgbClr val="FFFFFF"/>
+                </a:solidFill>
+                <a:latin typeface="Arial"/>
+                <a:ea typeface="Arial"/>
+              </a:rPr>
+              <a:t>표준을 만족하는 기술을 가진 것만으로는 부족했습니다</a:t>
+            </a:r>
+          </a:p>
+        </p:txBody>
+      </p:sp>
+      <p:sp>
+        <p:nvSpPr>
+          <p:cNvPr id="74" name="TextBox 73"/>
+          <p:cNvSpPr txBox="1"/>
+          <p:nvPr/>
+        </p:nvSpPr>
+        <p:spPr>
+          <a:xfrm>
+            <a:off x="1216152" y="7479792"/>
+            <a:ext cx="5047488" cy="310896"/>
+          </a:xfrm>
+          <a:prstGeom prst="rect">
+            <a:avLst/>
+          </a:prstGeom>
+          <a:noFill/>
+        </p:spPr>
+        <p:txBody>
+          <a:bodyPr wrap="square" anchor="t" lIns="0" rIns="0" tIns="0" bIns="0">
+            <a:spAutoFit/>
+          </a:bodyPr>
+          <a:lstStyle/>
+          <a:p>
+            <a:pPr algn="l">
+              <a:lnSpc>
+                <a:spcPct val="104000"/>
+              </a:lnSpc>
+            </a:pPr>
+            <a:r>
+              <a:rPr sz="1125" b="0">
+                <a:solidFill>
+                  <a:srgbClr val="AAB8E8"/>
+                </a:solidFill>
+                <a:latin typeface="Arial"/>
+                <a:ea typeface="Arial"/>
+              </a:rPr>
+              <a:t>시장 전환 시점에 고객이 요구하는 사양을 먼저 맞춘 쪽이 design-in을 가져갔습니다</a:t>
+            </a:r>
+          </a:p>
+        </p:txBody>
+      </p:sp>
+      <p:sp>
+        <p:nvSpPr>
+          <p:cNvPr id="75" name="TextBox 74"/>
+          <p:cNvSpPr txBox="1"/>
+          <p:nvPr/>
+        </p:nvSpPr>
+        <p:spPr>
+          <a:xfrm>
+            <a:off x="996696" y="7936992"/>
+            <a:ext cx="5486400" cy="365760"/>
+          </a:xfrm>
+          <a:prstGeom prst="rect">
+            <a:avLst/>
+          </a:prstGeom>
+          <a:noFill/>
+        </p:spPr>
+        <p:txBody>
+          <a:bodyPr wrap="square" anchor="t" lIns="0" rIns="0" tIns="0" bIns="0">
+            <a:spAutoFit/>
+          </a:bodyPr>
+          <a:lstStyle/>
+          <a:p>
+            <a:pPr algn="l">
+              <a:lnSpc>
+                <a:spcPct val="102000"/>
+              </a:lnSpc>
+            </a:pPr>
+            <a:r>
+              <a:rPr sz="950" b="0">
+                <a:solidFill>
+                  <a:srgbClr val="8A8A8A"/>
+                </a:solidFill>
+                <a:latin typeface="Arial"/>
+                <a:ea typeface="Arial"/>
+              </a:rPr>
+              <a:t>전략적 우선순위가 약화된 구간에서 격차가 생겼습니다 · 기술 보유 여부의 문제가 아니었습니다</a:t>
+            </a:r>
+          </a:p>
+        </p:txBody>
+      </p:sp>
+      <p:sp>
+        <p:nvSpPr>
+          <p:cNvPr id="76" name="Rectangle 75"/>
+          <p:cNvSpPr/>
+          <p:nvPr/>
+        </p:nvSpPr>
+        <p:spPr>
+          <a:xfrm>
+            <a:off x="6976872" y="2560320"/>
+            <a:ext cx="5760720" cy="5870448"/>
+          </a:xfrm>
+          <a:prstGeom prst="rect">
+            <a:avLst/>
+          </a:prstGeom>
+          <a:solidFill>
+            <a:srgbClr val="FFFFFF"/>
+          </a:solidFill>
+          <a:ln w="9525">
+            <a:solidFill>
+              <a:srgbClr val="D9D9D9"/>
+            </a:solidFill>
+          </a:ln>
+          <a:effectLst/>
+        </p:spPr>
+        <p:style>
+          <a:lnRef idx="1">
+            <a:schemeClr val="accent1"/>
+          </a:lnRef>
+          <a:fillRef idx="3">
+            <a:schemeClr val="accent1"/>
+          </a:fillRef>
+          <a:effectRef idx="2">
+            <a:schemeClr val="accent1"/>
+          </a:effectRef>
+          <a:fontRef idx="minor">
+            <a:schemeClr val="lt1"/>
+          </a:fontRef>
+        </p:style>
+        <p:txBody>
+          <a:bodyPr rtlCol="0" anchor="ctr"/>
+          <a:lstStyle/>
+          <a:p>
+            <a:pPr algn="ctr"/>
+          </a:p>
+        </p:txBody>
+      </p:sp>
+      <p:sp>
+        <p:nvSpPr>
+          <p:cNvPr id="77" name="Rectangle 76"/>
+          <p:cNvSpPr/>
+          <p:nvPr/>
+        </p:nvSpPr>
+        <p:spPr>
+          <a:xfrm>
+            <a:off x="6976872" y="2560320"/>
+            <a:ext cx="5760720" cy="45720"/>
+          </a:xfrm>
+          <a:prstGeom prst="rect">
+            <a:avLst/>
+          </a:prstGeom>
+          <a:solidFill>
+            <a:srgbClr val="AAB8E8"/>
+          </a:solidFill>
+          <a:ln>
+            <a:noFill/>
+          </a:ln>
+          <a:effectLst/>
+        </p:spPr>
+        <p:style>
+          <a:lnRef idx="1">
+            <a:schemeClr val="accent1"/>
+          </a:lnRef>
+          <a:fillRef idx="3">
+            <a:schemeClr val="accent1"/>
+          </a:fillRef>
+          <a:effectRef idx="2">
+            <a:schemeClr val="accent1"/>
+          </a:effectRef>
+          <a:fontRef idx="minor">
+            <a:schemeClr val="lt1"/>
+          </a:fontRef>
+        </p:style>
+        <p:txBody>
+          <a:bodyPr rtlCol="0" anchor="ctr"/>
+          <a:lstStyle/>
+          <a:p>
+            <a:pPr algn="ctr"/>
+          </a:p>
+        </p:txBody>
+      </p:sp>
+      <p:sp>
+        <p:nvSpPr>
+          <p:cNvPr id="78" name="TextBox 77"/>
+          <p:cNvSpPr txBox="1"/>
+          <p:nvPr/>
+        </p:nvSpPr>
+        <p:spPr>
+          <a:xfrm>
+            <a:off x="7196328" y="2706624"/>
+            <a:ext cx="5321808" cy="274320"/>
+          </a:xfrm>
+          <a:prstGeom prst="rect">
+            <a:avLst/>
+          </a:prstGeom>
+          <a:noFill/>
+        </p:spPr>
+        <p:txBody>
+          <a:bodyPr wrap="square" anchor="t" lIns="0" rIns="0" tIns="0" bIns="0">
+            <a:spAutoFit/>
+          </a:bodyPr>
+          <a:lstStyle/>
+          <a:p>
+            <a:pPr algn="l">
+              <a:lnSpc>
                 <a:spcPct val="112000"/>
               </a:lnSpc>
             </a:pPr>
             <a:r>
-              <a:rPr sz="1500" b="1">
+              <a:rPr sz="1350" b="1">
+                <a:solidFill>
+                  <a:srgbClr val="1428A0"/>
+                </a:solidFill>
+                <a:latin typeface="Arial"/>
+                <a:ea typeface="Arial"/>
+              </a:rPr>
+              <a:t>②  </a:t>
+            </a:r>
+            <a:r>
+              <a:rPr sz="1350" b="1">
+                <a:solidFill>
+                  <a:srgbClr val="1428A0"/>
+                </a:solidFill>
+                <a:latin typeface="Arial"/>
+                <a:ea typeface="Arial"/>
+              </a:rPr>
+              <a:t>지금 · 같은 전환이 SSD에서</a:t>
+            </a:r>
+          </a:p>
+        </p:txBody>
+      </p:sp>
+      <p:sp>
+        <p:nvSpPr>
+          <p:cNvPr id="79" name="TextBox 78"/>
+          <p:cNvSpPr txBox="1"/>
+          <p:nvPr/>
+        </p:nvSpPr>
+        <p:spPr>
+          <a:xfrm>
+            <a:off x="7196328" y="2980944"/>
+            <a:ext cx="5321808" cy="219456"/>
+          </a:xfrm>
+          <a:prstGeom prst="rect">
+            <a:avLst/>
+          </a:prstGeom>
+          <a:noFill/>
+        </p:spPr>
+        <p:txBody>
+          <a:bodyPr wrap="square" anchor="t" lIns="0" rIns="0" tIns="0" bIns="0">
+            <a:spAutoFit/>
+          </a:bodyPr>
+          <a:lstStyle/>
+          <a:p>
+            <a:pPr algn="l">
+              <a:lnSpc>
+                <a:spcPct val="112000"/>
+              </a:lnSpc>
+            </a:pPr>
+            <a:r>
+              <a:rPr sz="1000" b="0">
+                <a:solidFill>
+                  <a:srgbClr val="8A8A8A"/>
+                </a:solidFill>
+                <a:latin typeface="Arial"/>
+                <a:ea typeface="Arial"/>
+              </a:rPr>
+              <a:t>고객 요구가 확장되고 있다</a:t>
+            </a:r>
+          </a:p>
+        </p:txBody>
+      </p:sp>
+      <p:sp>
+        <p:nvSpPr>
+          <p:cNvPr id="80" name="TextBox 79"/>
+          <p:cNvSpPr txBox="1"/>
+          <p:nvPr/>
+        </p:nvSpPr>
+        <p:spPr>
+          <a:xfrm>
+            <a:off x="7251192" y="3310127"/>
+            <a:ext cx="5212080" cy="201168"/>
+          </a:xfrm>
+          <a:prstGeom prst="rect">
+            <a:avLst/>
+          </a:prstGeom>
+          <a:noFill/>
+        </p:spPr>
+        <p:txBody>
+          <a:bodyPr wrap="square" anchor="t" lIns="0" rIns="0" tIns="0" bIns="0">
+            <a:spAutoFit/>
+          </a:bodyPr>
+          <a:lstStyle/>
+          <a:p>
+            <a:pPr algn="l">
+              <a:lnSpc>
+                <a:spcPct val="112000"/>
+              </a:lnSpc>
+            </a:pPr>
+            <a:r>
+              <a:rPr sz="1000" b="0">
+                <a:solidFill>
+                  <a:srgbClr val="8A8A8A"/>
+                </a:solidFill>
+                <a:latin typeface="Arial"/>
+                <a:ea typeface="Arial"/>
+              </a:rPr>
+              <a:t>기존 요구는 그대로이고, 그 위에 요구가 더해지고 있습니다</a:t>
+            </a:r>
+          </a:p>
+        </p:txBody>
+      </p:sp>
+      <p:sp>
+        <p:nvSpPr>
+          <p:cNvPr id="81" name="Rectangle 80"/>
+          <p:cNvSpPr/>
+          <p:nvPr/>
+        </p:nvSpPr>
+        <p:spPr>
+          <a:xfrm>
+            <a:off x="7251192" y="3529584"/>
+            <a:ext cx="2918764" cy="566928"/>
+          </a:xfrm>
+          <a:prstGeom prst="rect">
+            <a:avLst/>
+          </a:prstGeom>
+          <a:solidFill>
+            <a:srgbClr val="FFFFFF"/>
+          </a:solidFill>
+          <a:ln w="9525">
+            <a:solidFill>
+              <a:srgbClr val="D9D9D9"/>
+            </a:solidFill>
+          </a:ln>
+          <a:effectLst/>
+        </p:spPr>
+        <p:style>
+          <a:lnRef idx="1">
+            <a:schemeClr val="accent1"/>
+          </a:lnRef>
+          <a:fillRef idx="3">
+            <a:schemeClr val="accent1"/>
+          </a:fillRef>
+          <a:effectRef idx="2">
+            <a:schemeClr val="accent1"/>
+          </a:effectRef>
+          <a:fontRef idx="minor">
+            <a:schemeClr val="lt1"/>
+          </a:fontRef>
+        </p:style>
+        <p:txBody>
+          <a:bodyPr rtlCol="0" anchor="ctr"/>
+          <a:lstStyle/>
+          <a:p>
+            <a:pPr algn="ctr"/>
+          </a:p>
+        </p:txBody>
+      </p:sp>
+      <p:sp>
+        <p:nvSpPr>
+          <p:cNvPr id="82" name="TextBox 81"/>
+          <p:cNvSpPr txBox="1"/>
+          <p:nvPr/>
+        </p:nvSpPr>
+        <p:spPr>
+          <a:xfrm>
+            <a:off x="7379208" y="3584448"/>
+            <a:ext cx="2662732" cy="201168"/>
+          </a:xfrm>
+          <a:prstGeom prst="rect">
+            <a:avLst/>
+          </a:prstGeom>
+          <a:noFill/>
+        </p:spPr>
+        <p:txBody>
+          <a:bodyPr wrap="square" anchor="t" lIns="0" rIns="0" tIns="0" bIns="0">
+            <a:spAutoFit/>
+          </a:bodyPr>
+          <a:lstStyle/>
+          <a:p>
+            <a:pPr algn="l">
+              <a:lnSpc>
+                <a:spcPct val="112000"/>
+              </a:lnSpc>
+            </a:pPr>
+            <a:r>
+              <a:rPr sz="875" b="0">
+                <a:solidFill>
+                  <a:srgbClr val="8A8A8A"/>
+                </a:solidFill>
+                <a:latin typeface="Arial"/>
+                <a:ea typeface="Arial"/>
+              </a:rPr>
+              <a:t>기존</a:t>
+            </a:r>
+          </a:p>
+        </p:txBody>
+      </p:sp>
+      <p:sp>
+        <p:nvSpPr>
+          <p:cNvPr id="83" name="TextBox 82"/>
+          <p:cNvSpPr txBox="1"/>
+          <p:nvPr/>
+        </p:nvSpPr>
+        <p:spPr>
+          <a:xfrm>
+            <a:off x="7379208" y="3767328"/>
+            <a:ext cx="2662732" cy="274320"/>
+          </a:xfrm>
+          <a:prstGeom prst="rect">
+            <a:avLst/>
+          </a:prstGeom>
+          <a:noFill/>
+        </p:spPr>
+        <p:txBody>
+          <a:bodyPr wrap="square" anchor="t" lIns="0" rIns="0" tIns="0" bIns="0">
+            <a:spAutoFit/>
+          </a:bodyPr>
+          <a:lstStyle/>
+          <a:p>
+            <a:pPr algn="l">
+              <a:lnSpc>
+                <a:spcPct val="112000"/>
+              </a:lnSpc>
+            </a:pPr>
+            <a:r>
+              <a:rPr sz="1125" b="1">
+                <a:solidFill>
+                  <a:srgbClr val="1A1A1A"/>
+                </a:solidFill>
+                <a:latin typeface="Arial"/>
+                <a:ea typeface="Arial"/>
+              </a:rPr>
+              <a:t>용량당 비용 · 밀도 · 전력</a:t>
+            </a:r>
+          </a:p>
+        </p:txBody>
+      </p:sp>
+      <p:sp>
+        <p:nvSpPr>
+          <p:cNvPr id="84" name="Right Arrow 83"/>
+          <p:cNvSpPr/>
+          <p:nvPr/>
+        </p:nvSpPr>
+        <p:spPr>
+          <a:xfrm>
+            <a:off x="10224820" y="3712463"/>
+            <a:ext cx="201168" cy="201168"/>
+          </a:xfrm>
+          <a:prstGeom prst="rightArrow">
+            <a:avLst/>
+          </a:prstGeom>
+          <a:solidFill>
+            <a:srgbClr val="AAB8E8"/>
+          </a:solidFill>
+          <a:ln>
+            <a:noFill/>
+          </a:ln>
+          <a:effectLst/>
+        </p:spPr>
+        <p:style>
+          <a:lnRef idx="1">
+            <a:schemeClr val="accent1"/>
+          </a:lnRef>
+          <a:fillRef idx="3">
+            <a:schemeClr val="accent1"/>
+          </a:fillRef>
+          <a:effectRef idx="2">
+            <a:schemeClr val="accent1"/>
+          </a:effectRef>
+          <a:fontRef idx="minor">
+            <a:schemeClr val="lt1"/>
+          </a:fontRef>
+        </p:style>
+        <p:txBody>
+          <a:bodyPr rtlCol="0" anchor="ctr"/>
+          <a:lstStyle/>
+          <a:p>
+            <a:pPr algn="ctr"/>
+          </a:p>
+        </p:txBody>
+      </p:sp>
+      <p:sp>
+        <p:nvSpPr>
+          <p:cNvPr id="85" name="Rectangle 84"/>
+          <p:cNvSpPr/>
+          <p:nvPr/>
+        </p:nvSpPr>
+        <p:spPr>
+          <a:xfrm>
+            <a:off x="10480852" y="3529584"/>
+            <a:ext cx="1982419" cy="566928"/>
+          </a:xfrm>
+          <a:prstGeom prst="rect">
+            <a:avLst/>
+          </a:prstGeom>
+          <a:solidFill>
+            <a:srgbClr val="1428A0"/>
+          </a:solidFill>
+          <a:ln>
+            <a:noFill/>
+          </a:ln>
+          <a:effectLst/>
+        </p:spPr>
+        <p:style>
+          <a:lnRef idx="1">
+            <a:schemeClr val="accent1"/>
+          </a:lnRef>
+          <a:fillRef idx="3">
+            <a:schemeClr val="accent1"/>
+          </a:fillRef>
+          <a:effectRef idx="2">
+            <a:schemeClr val="accent1"/>
+          </a:effectRef>
+          <a:fontRef idx="minor">
+            <a:schemeClr val="lt1"/>
+          </a:fontRef>
+        </p:style>
+        <p:txBody>
+          <a:bodyPr rtlCol="0" anchor="ctr"/>
+          <a:lstStyle/>
+          <a:p>
+            <a:pPr algn="ctr"/>
+          </a:p>
+        </p:txBody>
+      </p:sp>
+      <p:sp>
+        <p:nvSpPr>
+          <p:cNvPr id="86" name="TextBox 85"/>
+          <p:cNvSpPr txBox="1"/>
+          <p:nvPr/>
+        </p:nvSpPr>
+        <p:spPr>
+          <a:xfrm>
+            <a:off x="10608868" y="3584448"/>
+            <a:ext cx="1726387" cy="201168"/>
+          </a:xfrm>
+          <a:prstGeom prst="rect">
+            <a:avLst/>
+          </a:prstGeom>
+          <a:noFill/>
+        </p:spPr>
+        <p:txBody>
+          <a:bodyPr wrap="square" anchor="t" lIns="0" rIns="0" tIns="0" bIns="0">
+            <a:spAutoFit/>
+          </a:bodyPr>
+          <a:lstStyle/>
+          <a:p>
+            <a:pPr algn="l">
+              <a:lnSpc>
+                <a:spcPct val="112000"/>
+              </a:lnSpc>
+            </a:pPr>
+            <a:r>
+              <a:rPr sz="875" b="0">
+                <a:solidFill>
+                  <a:srgbClr val="AAB8E8"/>
+                </a:solidFill>
+                <a:latin typeface="Arial"/>
+                <a:ea typeface="Arial"/>
+              </a:rPr>
+              <a:t>추가</a:t>
+            </a:r>
+          </a:p>
+        </p:txBody>
+      </p:sp>
+      <p:sp>
+        <p:nvSpPr>
+          <p:cNvPr id="87" name="TextBox 86"/>
+          <p:cNvSpPr txBox="1"/>
+          <p:nvPr/>
+        </p:nvSpPr>
+        <p:spPr>
+          <a:xfrm>
+            <a:off x="10608868" y="3767328"/>
+            <a:ext cx="1726387" cy="274320"/>
+          </a:xfrm>
+          <a:prstGeom prst="rect">
+            <a:avLst/>
+          </a:prstGeom>
+          <a:noFill/>
+        </p:spPr>
+        <p:txBody>
+          <a:bodyPr wrap="square" anchor="t" lIns="0" rIns="0" tIns="0" bIns="0">
+            <a:spAutoFit/>
+          </a:bodyPr>
+          <a:lstStyle/>
+          <a:p>
+            <a:pPr algn="l">
+              <a:lnSpc>
+                <a:spcPct val="112000"/>
+              </a:lnSpc>
+            </a:pPr>
+            <a:r>
+              <a:rPr sz="1275" b="1">
                 <a:solidFill>
                   <a:srgbClr val="FFFFFF"/>
                 </a:solidFill>
                 <a:latin typeface="Arial"/>
                 <a:ea typeface="Arial"/>
               </a:rPr>
-              <a:t>기술이 없어서가 아니라 시장을 작게 봤기 때문입니다</a:t>
-            </a:r>
-          </a:p>
-        </p:txBody>
-      </p:sp>
-      <p:sp>
-        <p:nvSpPr>
-          <p:cNvPr id="69" name="TextBox 68"/>
-          <p:cNvSpPr txBox="1"/>
-          <p:nvPr/>
-        </p:nvSpPr>
-        <p:spPr>
-          <a:xfrm>
-            <a:off x="1234440" y="6729984"/>
-            <a:ext cx="5010912" cy="292608"/>
+              <a:t>내구성</a:t>
+            </a:r>
+          </a:p>
+        </p:txBody>
+      </p:sp>
+      <p:sp>
+        <p:nvSpPr>
+          <p:cNvPr id="88" name="TextBox 87"/>
+          <p:cNvSpPr txBox="1"/>
+          <p:nvPr/>
+        </p:nvSpPr>
+        <p:spPr>
+          <a:xfrm>
+            <a:off x="7251192" y="4261104"/>
+            <a:ext cx="5212080" cy="201168"/>
           </a:xfrm>
           <a:prstGeom prst="rect">
             <a:avLst/>
@@ -7057,28 +7704,500 @@
               </a:lnSpc>
             </a:pPr>
             <a:r>
-              <a:rPr sz="1050" b="0">
+              <a:rPr sz="1000" b="0">
+                <a:solidFill>
+                  <a:srgbClr val="8A8A8A"/>
+                </a:solidFill>
+                <a:latin typeface="Arial"/>
+                <a:ea typeface="Arial"/>
+              </a:rPr>
+              <a:t>무엇이 그 요구를 만들었나   </a:t>
+            </a:r>
+            <a:r>
+              <a:rPr sz="1050" b="1">
+                <a:solidFill>
+                  <a:srgbClr val="1428A0"/>
+                </a:solidFill>
+                <a:latin typeface="Arial"/>
+                <a:ea typeface="Arial"/>
+              </a:rPr>
+              <a:t>KV 캐시가 SSD를 추론 메모리 계층으로 옮깁니다</a:t>
+            </a:r>
+          </a:p>
+        </p:txBody>
+      </p:sp>
+      <p:sp>
+        <p:nvSpPr>
+          <p:cNvPr id="89" name="Rectangle 88"/>
+          <p:cNvSpPr/>
+          <p:nvPr/>
+        </p:nvSpPr>
+        <p:spPr>
+          <a:xfrm>
+            <a:off x="7251192" y="4498848"/>
+            <a:ext cx="5212080" cy="566928"/>
+          </a:xfrm>
+          <a:prstGeom prst="rect">
+            <a:avLst/>
+          </a:prstGeom>
+          <a:solidFill>
+            <a:srgbClr val="1428A0"/>
+          </a:solidFill>
+          <a:ln>
+            <a:noFill/>
+          </a:ln>
+          <a:effectLst/>
+        </p:spPr>
+        <p:style>
+          <a:lnRef idx="1">
+            <a:schemeClr val="accent1"/>
+          </a:lnRef>
+          <a:fillRef idx="3">
+            <a:schemeClr val="accent1"/>
+          </a:fillRef>
+          <a:effectRef idx="2">
+            <a:schemeClr val="accent1"/>
+          </a:effectRef>
+          <a:fontRef idx="minor">
+            <a:schemeClr val="lt1"/>
+          </a:fontRef>
+        </p:style>
+        <p:txBody>
+          <a:bodyPr rtlCol="0" anchor="ctr"/>
+          <a:lstStyle/>
+          <a:p>
+            <a:pPr algn="ctr"/>
+          </a:p>
+        </p:txBody>
+      </p:sp>
+      <p:sp>
+        <p:nvSpPr>
+          <p:cNvPr id="90" name="Rectangle 89"/>
+          <p:cNvSpPr/>
+          <p:nvPr/>
+        </p:nvSpPr>
+        <p:spPr>
+          <a:xfrm>
+            <a:off x="7251192" y="4498848"/>
+            <a:ext cx="530352" cy="566928"/>
+          </a:xfrm>
+          <a:prstGeom prst="rect">
+            <a:avLst/>
+          </a:prstGeom>
+          <a:solidFill>
+            <a:srgbClr val="3C5AC8"/>
+          </a:solidFill>
+          <a:ln>
+            <a:noFill/>
+          </a:ln>
+          <a:effectLst/>
+        </p:spPr>
+        <p:style>
+          <a:lnRef idx="1">
+            <a:schemeClr val="accent1"/>
+          </a:lnRef>
+          <a:fillRef idx="3">
+            <a:schemeClr val="accent1"/>
+          </a:fillRef>
+          <a:effectRef idx="2">
+            <a:schemeClr val="accent1"/>
+          </a:effectRef>
+          <a:fontRef idx="minor">
+            <a:schemeClr val="lt1"/>
+          </a:fontRef>
+        </p:style>
+        <p:txBody>
+          <a:bodyPr rtlCol="0" anchor="ctr"/>
+          <a:lstStyle/>
+          <a:p>
+            <a:pPr algn="ctr"/>
+          </a:p>
+        </p:txBody>
+      </p:sp>
+      <p:sp>
+        <p:nvSpPr>
+          <p:cNvPr id="91" name="TextBox 90"/>
+          <p:cNvSpPr txBox="1"/>
+          <p:nvPr/>
+        </p:nvSpPr>
+        <p:spPr>
+          <a:xfrm>
+            <a:off x="7251192" y="4498848"/>
+            <a:ext cx="530352" cy="566928"/>
+          </a:xfrm>
+          <a:prstGeom prst="rect">
+            <a:avLst/>
+          </a:prstGeom>
+          <a:noFill/>
+        </p:spPr>
+        <p:txBody>
+          <a:bodyPr wrap="square" anchor="ctr" lIns="0" rIns="0" tIns="0" bIns="0">
+            <a:spAutoFit/>
+          </a:bodyPr>
+          <a:lstStyle/>
+          <a:p>
+            <a:pPr algn="ctr">
+              <a:lnSpc>
+                <a:spcPct val="112000"/>
+              </a:lnSpc>
+            </a:pPr>
+            <a:r>
+              <a:rPr sz="1200" b="1">
+                <a:solidFill>
+                  <a:srgbClr val="FFFFFF"/>
+                </a:solidFill>
+                <a:latin typeface="Arial"/>
+                <a:ea typeface="Arial"/>
+              </a:rPr>
+              <a:t>G1</a:t>
+            </a:r>
+          </a:p>
+        </p:txBody>
+      </p:sp>
+      <p:sp>
+        <p:nvSpPr>
+          <p:cNvPr id="92" name="TextBox 91"/>
+          <p:cNvSpPr txBox="1"/>
+          <p:nvPr/>
+        </p:nvSpPr>
+        <p:spPr>
+          <a:xfrm>
+            <a:off x="7909560" y="4572000"/>
+            <a:ext cx="1682496" cy="237744"/>
+          </a:xfrm>
+          <a:prstGeom prst="rect">
+            <a:avLst/>
+          </a:prstGeom>
+          <a:noFill/>
+        </p:spPr>
+        <p:txBody>
+          <a:bodyPr wrap="square" anchor="t" lIns="0" rIns="0" tIns="0" bIns="0">
+            <a:spAutoFit/>
+          </a:bodyPr>
+          <a:lstStyle/>
+          <a:p>
+            <a:pPr algn="l">
+              <a:lnSpc>
+                <a:spcPct val="112000"/>
+              </a:lnSpc>
+            </a:pPr>
+            <a:r>
+              <a:rPr sz="1275" b="1">
+                <a:solidFill>
+                  <a:srgbClr val="FFFFFF"/>
+                </a:solidFill>
+                <a:latin typeface="Arial"/>
+                <a:ea typeface="Arial"/>
+              </a:rPr>
+              <a:t>GPU HBM</a:t>
+            </a:r>
+          </a:p>
+        </p:txBody>
+      </p:sp>
+      <p:sp>
+        <p:nvSpPr>
+          <p:cNvPr id="93" name="TextBox 92"/>
+          <p:cNvSpPr txBox="1"/>
+          <p:nvPr/>
+        </p:nvSpPr>
+        <p:spPr>
+          <a:xfrm>
+            <a:off x="7909560" y="4809744"/>
+            <a:ext cx="1682496" cy="182880"/>
+          </a:xfrm>
+          <a:prstGeom prst="rect">
+            <a:avLst/>
+          </a:prstGeom>
+          <a:noFill/>
+        </p:spPr>
+        <p:txBody>
+          <a:bodyPr wrap="square" anchor="t" lIns="0" rIns="0" tIns="0" bIns="0">
+            <a:spAutoFit/>
+          </a:bodyPr>
+          <a:lstStyle/>
+          <a:p>
+            <a:pPr algn="l">
+              <a:lnSpc>
+                <a:spcPct val="112000"/>
+              </a:lnSpc>
+            </a:pPr>
+            <a:r>
+              <a:rPr sz="875" b="0">
                 <a:solidFill>
                   <a:srgbClr val="AAB8E8"/>
                 </a:solidFill>
                 <a:latin typeface="Arial"/>
                 <a:ea typeface="Arial"/>
               </a:rPr>
-              <a:t>구속력 있는 규격은 표준이 아니라 고객의 사양이었습니다 · JEDEC HBM4 8 Gbps 대 NVIDIA 요구 10~13 Gbps</a:t>
-            </a:r>
-          </a:p>
-        </p:txBody>
-      </p:sp>
-      <p:sp>
-        <p:nvSpPr>
-          <p:cNvPr id="70" name="TextBox 69"/>
-          <p:cNvSpPr txBox="1"/>
-          <p:nvPr/>
-        </p:nvSpPr>
-        <p:spPr>
-          <a:xfrm>
-            <a:off x="996696" y="7260336"/>
-            <a:ext cx="5486400" cy="219456"/>
+              <a:t>80 → 288GB로 커졌지만</a:t>
+            </a:r>
+          </a:p>
+        </p:txBody>
+      </p:sp>
+      <p:sp>
+        <p:nvSpPr>
+          <p:cNvPr id="94" name="TextBox 93"/>
+          <p:cNvSpPr txBox="1"/>
+          <p:nvPr/>
+        </p:nvSpPr>
+        <p:spPr>
+          <a:xfrm>
+            <a:off x="9665208" y="4535424"/>
+            <a:ext cx="2670048" cy="493776"/>
+          </a:xfrm>
+          <a:prstGeom prst="rect">
+            <a:avLst/>
+          </a:prstGeom>
+          <a:noFill/>
+        </p:spPr>
+        <p:txBody>
+          <a:bodyPr wrap="square" anchor="ctr" lIns="0" rIns="0" tIns="0" bIns="0">
+            <a:spAutoFit/>
+          </a:bodyPr>
+          <a:lstStyle/>
+          <a:p>
+            <a:pPr algn="l">
+              <a:lnSpc>
+                <a:spcPct val="104000"/>
+              </a:lnSpc>
+            </a:pPr>
+            <a:r>
+              <a:rPr sz="900" b="0">
+                <a:solidFill>
+                  <a:srgbClr val="AAB8E8"/>
+                </a:solidFill>
+                <a:latin typeface="Arial"/>
+                <a:ea typeface="Arial"/>
+              </a:rPr>
+              <a:t>단일 사용자 128K 컨텍스트가 약 40GB · 사용자 수에 비례</a:t>
+            </a:r>
+          </a:p>
+        </p:txBody>
+      </p:sp>
+      <p:sp>
+        <p:nvSpPr>
+          <p:cNvPr id="95" name="Down Arrow 94"/>
+          <p:cNvSpPr/>
+          <p:nvPr/>
+        </p:nvSpPr>
+        <p:spPr>
+          <a:xfrm>
+            <a:off x="7424927" y="5074920"/>
+            <a:ext cx="146304" cy="137160"/>
+          </a:xfrm>
+          <a:prstGeom prst="downArrow">
+            <a:avLst/>
+          </a:prstGeom>
+          <a:solidFill>
+            <a:srgbClr val="3C5AC8"/>
+          </a:solidFill>
+          <a:ln>
+            <a:noFill/>
+          </a:ln>
+          <a:effectLst/>
+        </p:spPr>
+        <p:style>
+          <a:lnRef idx="1">
+            <a:schemeClr val="accent1"/>
+          </a:lnRef>
+          <a:fillRef idx="3">
+            <a:schemeClr val="accent1"/>
+          </a:fillRef>
+          <a:effectRef idx="2">
+            <a:schemeClr val="accent1"/>
+          </a:effectRef>
+          <a:fontRef idx="minor">
+            <a:schemeClr val="lt1"/>
+          </a:fontRef>
+        </p:style>
+        <p:txBody>
+          <a:bodyPr rtlCol="0" anchor="ctr"/>
+          <a:lstStyle/>
+          <a:p>
+            <a:pPr algn="ctr"/>
+          </a:p>
+        </p:txBody>
+      </p:sp>
+      <p:sp>
+        <p:nvSpPr>
+          <p:cNvPr id="96" name="TextBox 95"/>
+          <p:cNvSpPr txBox="1"/>
+          <p:nvPr/>
+        </p:nvSpPr>
+        <p:spPr>
+          <a:xfrm>
+            <a:off x="7635240" y="5065776"/>
+            <a:ext cx="4736592" cy="155448"/>
+          </a:xfrm>
+          <a:prstGeom prst="rect">
+            <a:avLst/>
+          </a:prstGeom>
+          <a:noFill/>
+        </p:spPr>
+        <p:txBody>
+          <a:bodyPr wrap="square" anchor="ctr" lIns="0" rIns="0" tIns="0" bIns="0">
+            <a:spAutoFit/>
+          </a:bodyPr>
+          <a:lstStyle/>
+          <a:p>
+            <a:pPr algn="l">
+              <a:lnSpc>
+                <a:spcPct val="112000"/>
+              </a:lnSpc>
+            </a:pPr>
+            <a:r>
+              <a:rPr sz="900" b="1">
+                <a:solidFill>
+                  <a:srgbClr val="3C5AC8"/>
+                </a:solidFill>
+                <a:latin typeface="Arial"/>
+                <a:ea typeface="Arial"/>
+              </a:rPr>
+              <a:t>넘친다</a:t>
+            </a:r>
+          </a:p>
+        </p:txBody>
+      </p:sp>
+      <p:sp>
+        <p:nvSpPr>
+          <p:cNvPr id="97" name="Rectangle 96"/>
+          <p:cNvSpPr/>
+          <p:nvPr/>
+        </p:nvSpPr>
+        <p:spPr>
+          <a:xfrm>
+            <a:off x="7251192" y="5221224"/>
+            <a:ext cx="5212080" cy="566928"/>
+          </a:xfrm>
+          <a:prstGeom prst="rect">
+            <a:avLst/>
+          </a:prstGeom>
+          <a:solidFill>
+            <a:srgbClr val="F4F6FC"/>
+          </a:solidFill>
+          <a:ln w="9525">
+            <a:solidFill>
+              <a:srgbClr val="D9D9D9"/>
+            </a:solidFill>
+          </a:ln>
+          <a:effectLst/>
+        </p:spPr>
+        <p:style>
+          <a:lnRef idx="1">
+            <a:schemeClr val="accent1"/>
+          </a:lnRef>
+          <a:fillRef idx="3">
+            <a:schemeClr val="accent1"/>
+          </a:fillRef>
+          <a:effectRef idx="2">
+            <a:schemeClr val="accent1"/>
+          </a:effectRef>
+          <a:fontRef idx="minor">
+            <a:schemeClr val="lt1"/>
+          </a:fontRef>
+        </p:style>
+        <p:txBody>
+          <a:bodyPr rtlCol="0" anchor="ctr"/>
+          <a:lstStyle/>
+          <a:p>
+            <a:pPr algn="ctr"/>
+          </a:p>
+        </p:txBody>
+      </p:sp>
+      <p:sp>
+        <p:nvSpPr>
+          <p:cNvPr id="98" name="Rectangle 97"/>
+          <p:cNvSpPr/>
+          <p:nvPr/>
+        </p:nvSpPr>
+        <p:spPr>
+          <a:xfrm>
+            <a:off x="7251192" y="5221224"/>
+            <a:ext cx="530352" cy="566928"/>
+          </a:xfrm>
+          <a:prstGeom prst="rect">
+            <a:avLst/>
+          </a:prstGeom>
+          <a:solidFill>
+            <a:srgbClr val="AAB8E8"/>
+          </a:solidFill>
+          <a:ln>
+            <a:noFill/>
+          </a:ln>
+          <a:effectLst/>
+        </p:spPr>
+        <p:style>
+          <a:lnRef idx="1">
+            <a:schemeClr val="accent1"/>
+          </a:lnRef>
+          <a:fillRef idx="3">
+            <a:schemeClr val="accent1"/>
+          </a:fillRef>
+          <a:effectRef idx="2">
+            <a:schemeClr val="accent1"/>
+          </a:effectRef>
+          <a:fontRef idx="minor">
+            <a:schemeClr val="lt1"/>
+          </a:fontRef>
+        </p:style>
+        <p:txBody>
+          <a:bodyPr rtlCol="0" anchor="ctr"/>
+          <a:lstStyle/>
+          <a:p>
+            <a:pPr algn="ctr"/>
+          </a:p>
+        </p:txBody>
+      </p:sp>
+      <p:sp>
+        <p:nvSpPr>
+          <p:cNvPr id="99" name="TextBox 98"/>
+          <p:cNvSpPr txBox="1"/>
+          <p:nvPr/>
+        </p:nvSpPr>
+        <p:spPr>
+          <a:xfrm>
+            <a:off x="7251192" y="5221224"/>
+            <a:ext cx="530352" cy="566928"/>
+          </a:xfrm>
+          <a:prstGeom prst="rect">
+            <a:avLst/>
+          </a:prstGeom>
+          <a:noFill/>
+        </p:spPr>
+        <p:txBody>
+          <a:bodyPr wrap="square" anchor="ctr" lIns="0" rIns="0" tIns="0" bIns="0">
+            <a:spAutoFit/>
+          </a:bodyPr>
+          <a:lstStyle/>
+          <a:p>
+            <a:pPr algn="ctr">
+              <a:lnSpc>
+                <a:spcPct val="112000"/>
+              </a:lnSpc>
+            </a:pPr>
+            <a:r>
+              <a:rPr sz="1200" b="1">
+                <a:solidFill>
+                  <a:srgbClr val="FFFFFF"/>
+                </a:solidFill>
+                <a:latin typeface="Arial"/>
+                <a:ea typeface="Arial"/>
+              </a:rPr>
+              <a:t>G2</a:t>
+            </a:r>
+          </a:p>
+        </p:txBody>
+      </p:sp>
+      <p:sp>
+        <p:nvSpPr>
+          <p:cNvPr id="100" name="TextBox 99"/>
+          <p:cNvSpPr txBox="1"/>
+          <p:nvPr/>
+        </p:nvSpPr>
+        <p:spPr>
+          <a:xfrm>
+            <a:off x="7909560" y="5294376"/>
+            <a:ext cx="1682496" cy="237744"/>
           </a:xfrm>
           <a:prstGeom prst="rect">
             <a:avLst/>
@@ -7097,28 +8216,536 @@
               </a:lnSpc>
             </a:pPr>
             <a:r>
-              <a:rPr sz="1050" b="1">
+              <a:rPr sz="1275" b="1">
+                <a:solidFill>
+                  <a:srgbClr val="1A1A1A"/>
+                </a:solidFill>
+                <a:latin typeface="Arial"/>
+                <a:ea typeface="Arial"/>
+              </a:rPr>
+              <a:t>CPU DRAM</a:t>
+            </a:r>
+          </a:p>
+        </p:txBody>
+      </p:sp>
+      <p:sp>
+        <p:nvSpPr>
+          <p:cNvPr id="101" name="TextBox 100"/>
+          <p:cNvSpPr txBox="1"/>
+          <p:nvPr/>
+        </p:nvSpPr>
+        <p:spPr>
+          <a:xfrm>
+            <a:off x="7909560" y="5532120"/>
+            <a:ext cx="1682496" cy="182880"/>
+          </a:xfrm>
+          <a:prstGeom prst="rect">
+            <a:avLst/>
+          </a:prstGeom>
+          <a:noFill/>
+        </p:spPr>
+        <p:txBody>
+          <a:bodyPr wrap="square" anchor="t" lIns="0" rIns="0" tIns="0" bIns="0">
+            <a:spAutoFit/>
+          </a:bodyPr>
+          <a:lstStyle/>
+          <a:p>
+            <a:pPr algn="l">
+              <a:lnSpc>
+                <a:spcPct val="112000"/>
+              </a:lnSpc>
+            </a:pPr>
+            <a:r>
+              <a:rPr sz="875" b="0">
+                <a:solidFill>
+                  <a:srgbClr val="8A8A8A"/>
+                </a:solidFill>
+                <a:latin typeface="Arial"/>
+                <a:ea typeface="Arial"/>
+              </a:rPr>
+              <a:t>첫 확장</a:t>
+            </a:r>
+          </a:p>
+        </p:txBody>
+      </p:sp>
+      <p:sp>
+        <p:nvSpPr>
+          <p:cNvPr id="102" name="TextBox 101"/>
+          <p:cNvSpPr txBox="1"/>
+          <p:nvPr/>
+        </p:nvSpPr>
+        <p:spPr>
+          <a:xfrm>
+            <a:off x="9665208" y="5257800"/>
+            <a:ext cx="2670048" cy="493776"/>
+          </a:xfrm>
+          <a:prstGeom prst="rect">
+            <a:avLst/>
+          </a:prstGeom>
+          <a:noFill/>
+        </p:spPr>
+        <p:txBody>
+          <a:bodyPr wrap="square" anchor="ctr" lIns="0" rIns="0" tIns="0" bIns="0">
+            <a:spAutoFit/>
+          </a:bodyPr>
+          <a:lstStyle/>
+          <a:p>
+            <a:pPr algn="l">
+              <a:lnSpc>
+                <a:spcPct val="104000"/>
+              </a:lnSpc>
+            </a:pPr>
+            <a:r>
+              <a:rPr sz="900" b="0">
+                <a:solidFill>
+                  <a:srgbClr val="555555"/>
+                </a:solidFill>
+                <a:latin typeface="Arial"/>
+                <a:ea typeface="Arial"/>
+              </a:rPr>
+              <a:t>Kioxia — DRAM만으로는 더 못 따라간다</a:t>
+            </a:r>
+          </a:p>
+        </p:txBody>
+      </p:sp>
+      <p:sp>
+        <p:nvSpPr>
+          <p:cNvPr id="103" name="Down Arrow 102"/>
+          <p:cNvSpPr/>
+          <p:nvPr/>
+        </p:nvSpPr>
+        <p:spPr>
+          <a:xfrm>
+            <a:off x="7424927" y="5797296"/>
+            <a:ext cx="146304" cy="137160"/>
+          </a:xfrm>
+          <a:prstGeom prst="downArrow">
+            <a:avLst/>
+          </a:prstGeom>
+          <a:solidFill>
+            <a:srgbClr val="3C5AC8"/>
+          </a:solidFill>
+          <a:ln>
+            <a:noFill/>
+          </a:ln>
+          <a:effectLst/>
+        </p:spPr>
+        <p:style>
+          <a:lnRef idx="1">
+            <a:schemeClr val="accent1"/>
+          </a:lnRef>
+          <a:fillRef idx="3">
+            <a:schemeClr val="accent1"/>
+          </a:fillRef>
+          <a:effectRef idx="2">
+            <a:schemeClr val="accent1"/>
+          </a:effectRef>
+          <a:fontRef idx="minor">
+            <a:schemeClr val="lt1"/>
+          </a:fontRef>
+        </p:style>
+        <p:txBody>
+          <a:bodyPr rtlCol="0" anchor="ctr"/>
+          <a:lstStyle/>
+          <a:p>
+            <a:pPr algn="ctr"/>
+          </a:p>
+        </p:txBody>
+      </p:sp>
+      <p:sp>
+        <p:nvSpPr>
+          <p:cNvPr id="104" name="TextBox 103"/>
+          <p:cNvSpPr txBox="1"/>
+          <p:nvPr/>
+        </p:nvSpPr>
+        <p:spPr>
+          <a:xfrm>
+            <a:off x="7635240" y="5788152"/>
+            <a:ext cx="4736592" cy="155448"/>
+          </a:xfrm>
+          <a:prstGeom prst="rect">
+            <a:avLst/>
+          </a:prstGeom>
+          <a:noFill/>
+        </p:spPr>
+        <p:txBody>
+          <a:bodyPr wrap="square" anchor="ctr" lIns="0" rIns="0" tIns="0" bIns="0">
+            <a:spAutoFit/>
+          </a:bodyPr>
+          <a:lstStyle/>
+          <a:p>
+            <a:pPr algn="l">
+              <a:lnSpc>
+                <a:spcPct val="112000"/>
+              </a:lnSpc>
+            </a:pPr>
+            <a:r>
+              <a:rPr sz="900" b="1">
+                <a:solidFill>
+                  <a:srgbClr val="3C5AC8"/>
+                </a:solidFill>
+                <a:latin typeface="Arial"/>
+                <a:ea typeface="Arial"/>
+              </a:rPr>
+              <a:t>다시 넘친다</a:t>
+            </a:r>
+          </a:p>
+        </p:txBody>
+      </p:sp>
+      <p:sp>
+        <p:nvSpPr>
+          <p:cNvPr id="105" name="Rectangle 104"/>
+          <p:cNvSpPr/>
+          <p:nvPr/>
+        </p:nvSpPr>
+        <p:spPr>
+          <a:xfrm>
+            <a:off x="7251192" y="5943600"/>
+            <a:ext cx="5212080" cy="566928"/>
+          </a:xfrm>
+          <a:prstGeom prst="rect">
+            <a:avLst/>
+          </a:prstGeom>
+          <a:solidFill>
+            <a:srgbClr val="FFFFFF"/>
+          </a:solidFill>
+          <a:ln w="19050">
+            <a:solidFill>
+              <a:srgbClr val="1428A0"/>
+            </a:solidFill>
+          </a:ln>
+          <a:effectLst/>
+        </p:spPr>
+        <p:style>
+          <a:lnRef idx="1">
+            <a:schemeClr val="accent1"/>
+          </a:lnRef>
+          <a:fillRef idx="3">
+            <a:schemeClr val="accent1"/>
+          </a:fillRef>
+          <a:effectRef idx="2">
+            <a:schemeClr val="accent1"/>
+          </a:effectRef>
+          <a:fontRef idx="minor">
+            <a:schemeClr val="lt1"/>
+          </a:fontRef>
+        </p:style>
+        <p:txBody>
+          <a:bodyPr rtlCol="0" anchor="ctr"/>
+          <a:lstStyle/>
+          <a:p>
+            <a:pPr algn="ctr"/>
+          </a:p>
+        </p:txBody>
+      </p:sp>
+      <p:sp>
+        <p:nvSpPr>
+          <p:cNvPr id="106" name="Rectangle 105"/>
+          <p:cNvSpPr/>
+          <p:nvPr/>
+        </p:nvSpPr>
+        <p:spPr>
+          <a:xfrm>
+            <a:off x="7251192" y="5943600"/>
+            <a:ext cx="530352" cy="566928"/>
+          </a:xfrm>
+          <a:prstGeom prst="rect">
+            <a:avLst/>
+          </a:prstGeom>
+          <a:solidFill>
+            <a:srgbClr val="1428A0"/>
+          </a:solidFill>
+          <a:ln>
+            <a:noFill/>
+          </a:ln>
+          <a:effectLst/>
+        </p:spPr>
+        <p:style>
+          <a:lnRef idx="1">
+            <a:schemeClr val="accent1"/>
+          </a:lnRef>
+          <a:fillRef idx="3">
+            <a:schemeClr val="accent1"/>
+          </a:fillRef>
+          <a:effectRef idx="2">
+            <a:schemeClr val="accent1"/>
+          </a:effectRef>
+          <a:fontRef idx="minor">
+            <a:schemeClr val="lt1"/>
+          </a:fontRef>
+        </p:style>
+        <p:txBody>
+          <a:bodyPr rtlCol="0" anchor="ctr"/>
+          <a:lstStyle/>
+          <a:p>
+            <a:pPr algn="ctr"/>
+          </a:p>
+        </p:txBody>
+      </p:sp>
+      <p:sp>
+        <p:nvSpPr>
+          <p:cNvPr id="107" name="TextBox 106"/>
+          <p:cNvSpPr txBox="1"/>
+          <p:nvPr/>
+        </p:nvSpPr>
+        <p:spPr>
+          <a:xfrm>
+            <a:off x="7251192" y="5943600"/>
+            <a:ext cx="530352" cy="566928"/>
+          </a:xfrm>
+          <a:prstGeom prst="rect">
+            <a:avLst/>
+          </a:prstGeom>
+          <a:noFill/>
+        </p:spPr>
+        <p:txBody>
+          <a:bodyPr wrap="square" anchor="ctr" lIns="0" rIns="0" tIns="0" bIns="0">
+            <a:spAutoFit/>
+          </a:bodyPr>
+          <a:lstStyle/>
+          <a:p>
+            <a:pPr algn="ctr">
+              <a:lnSpc>
+                <a:spcPct val="112000"/>
+              </a:lnSpc>
+            </a:pPr>
+            <a:r>
+              <a:rPr sz="1200" b="1">
+                <a:solidFill>
+                  <a:srgbClr val="FFFFFF"/>
+                </a:solidFill>
+                <a:latin typeface="Arial"/>
+                <a:ea typeface="Arial"/>
+              </a:rPr>
+              <a:t>G3</a:t>
+            </a:r>
+          </a:p>
+        </p:txBody>
+      </p:sp>
+      <p:sp>
+        <p:nvSpPr>
+          <p:cNvPr id="108" name="TextBox 107"/>
+          <p:cNvSpPr txBox="1"/>
+          <p:nvPr/>
+        </p:nvSpPr>
+        <p:spPr>
+          <a:xfrm>
+            <a:off x="7909560" y="6016752"/>
+            <a:ext cx="1682496" cy="237744"/>
+          </a:xfrm>
+          <a:prstGeom prst="rect">
+            <a:avLst/>
+          </a:prstGeom>
+          <a:noFill/>
+        </p:spPr>
+        <p:txBody>
+          <a:bodyPr wrap="square" anchor="t" lIns="0" rIns="0" tIns="0" bIns="0">
+            <a:spAutoFit/>
+          </a:bodyPr>
+          <a:lstStyle/>
+          <a:p>
+            <a:pPr algn="l">
+              <a:lnSpc>
+                <a:spcPct val="112000"/>
+              </a:lnSpc>
+            </a:pPr>
+            <a:r>
+              <a:rPr sz="1275" b="1">
                 <a:solidFill>
                   <a:srgbClr val="1428A0"/>
                 </a:solidFill>
                 <a:latin typeface="Arial"/>
                 <a:ea typeface="Arial"/>
               </a:rPr>
-              <a:t>되돌릴 수 있다는 것도 같은 기록이 보여 줍니다</a:t>
-            </a:r>
-          </a:p>
-        </p:txBody>
-      </p:sp>
-      <p:sp>
-        <p:nvSpPr>
-          <p:cNvPr id="71" name="Rectangle 70"/>
-          <p:cNvSpPr/>
-          <p:nvPr/>
-        </p:nvSpPr>
-        <p:spPr>
-          <a:xfrm>
-            <a:off x="996696" y="7516367"/>
-            <a:ext cx="1743455" cy="566928"/>
+              <a:t>NVMe SSD</a:t>
+            </a:r>
+          </a:p>
+        </p:txBody>
+      </p:sp>
+      <p:sp>
+        <p:nvSpPr>
+          <p:cNvPr id="109" name="TextBox 108"/>
+          <p:cNvSpPr txBox="1"/>
+          <p:nvPr/>
+        </p:nvSpPr>
+        <p:spPr>
+          <a:xfrm>
+            <a:off x="7909560" y="6254496"/>
+            <a:ext cx="1682496" cy="182880"/>
+          </a:xfrm>
+          <a:prstGeom prst="rect">
+            <a:avLst/>
+          </a:prstGeom>
+          <a:noFill/>
+        </p:spPr>
+        <p:txBody>
+          <a:bodyPr wrap="square" anchor="t" lIns="0" rIns="0" tIns="0" bIns="0">
+            <a:spAutoFit/>
+          </a:bodyPr>
+          <a:lstStyle/>
+          <a:p>
+            <a:pPr algn="l">
+              <a:lnSpc>
+                <a:spcPct val="112000"/>
+              </a:lnSpc>
+            </a:pPr>
+            <a:r>
+              <a:rPr sz="875" b="0">
+                <a:solidFill>
+                  <a:srgbClr val="8A8A8A"/>
+                </a:solidFill>
+                <a:latin typeface="Arial"/>
+                <a:ea typeface="Arial"/>
+              </a:rPr>
+              <a:t>새로 얹힌 계층</a:t>
+            </a:r>
+          </a:p>
+        </p:txBody>
+      </p:sp>
+      <p:sp>
+        <p:nvSpPr>
+          <p:cNvPr id="110" name="TextBox 109"/>
+          <p:cNvSpPr txBox="1"/>
+          <p:nvPr/>
+        </p:nvSpPr>
+        <p:spPr>
+          <a:xfrm>
+            <a:off x="9665208" y="5980176"/>
+            <a:ext cx="2670048" cy="493776"/>
+          </a:xfrm>
+          <a:prstGeom prst="rect">
+            <a:avLst/>
+          </a:prstGeom>
+          <a:noFill/>
+        </p:spPr>
+        <p:txBody>
+          <a:bodyPr wrap="square" anchor="ctr" lIns="0" rIns="0" tIns="0" bIns="0">
+            <a:spAutoFit/>
+          </a:bodyPr>
+          <a:lstStyle/>
+          <a:p>
+            <a:pPr algn="l">
+              <a:lnSpc>
+                <a:spcPct val="104000"/>
+              </a:lnSpc>
+            </a:pPr>
+            <a:r>
+              <a:rPr sz="900" b="0">
+                <a:solidFill>
+                  <a:srgbClr val="555555"/>
+                </a:solidFill>
+                <a:latin typeface="Arial"/>
+                <a:ea typeface="Arial"/>
+              </a:rPr>
+              <a:t>쓰기가 몰리는 첫 대용량 계층 → 내구성이 요구로</a:t>
+            </a:r>
+          </a:p>
+        </p:txBody>
+      </p:sp>
+      <p:sp>
+        <p:nvSpPr>
+          <p:cNvPr id="111" name="Rectangle 110"/>
+          <p:cNvSpPr/>
+          <p:nvPr/>
+        </p:nvSpPr>
+        <p:spPr>
+          <a:xfrm>
+            <a:off x="7251192" y="6547103"/>
+            <a:ext cx="5212080" cy="201168"/>
+          </a:xfrm>
+          <a:prstGeom prst="rect">
+            <a:avLst/>
+          </a:prstGeom>
+          <a:solidFill>
+            <a:srgbClr val="F4F6FC"/>
+          </a:solidFill>
+          <a:ln>
+            <a:noFill/>
+          </a:ln>
+          <a:effectLst/>
+        </p:spPr>
+        <p:style>
+          <a:lnRef idx="1">
+            <a:schemeClr val="accent1"/>
+          </a:lnRef>
+          <a:fillRef idx="3">
+            <a:schemeClr val="accent1"/>
+          </a:fillRef>
+          <a:effectRef idx="2">
+            <a:schemeClr val="accent1"/>
+          </a:effectRef>
+          <a:fontRef idx="minor">
+            <a:schemeClr val="lt1"/>
+          </a:fontRef>
+        </p:style>
+        <p:txBody>
+          <a:bodyPr rtlCol="0" anchor="ctr"/>
+          <a:lstStyle/>
+          <a:p>
+            <a:pPr algn="ctr"/>
+          </a:p>
+        </p:txBody>
+      </p:sp>
+      <p:sp>
+        <p:nvSpPr>
+          <p:cNvPr id="112" name="TextBox 111"/>
+          <p:cNvSpPr txBox="1"/>
+          <p:nvPr/>
+        </p:nvSpPr>
+        <p:spPr>
+          <a:xfrm>
+            <a:off x="7342631" y="6547103"/>
+            <a:ext cx="5029200" cy="201168"/>
+          </a:xfrm>
+          <a:prstGeom prst="rect">
+            <a:avLst/>
+          </a:prstGeom>
+          <a:noFill/>
+        </p:spPr>
+        <p:txBody>
+          <a:bodyPr wrap="square" anchor="ctr" lIns="0" rIns="0" tIns="0" bIns="0">
+            <a:spAutoFit/>
+          </a:bodyPr>
+          <a:lstStyle/>
+          <a:p>
+            <a:pPr algn="l">
+              <a:lnSpc>
+                <a:spcPct val="112000"/>
+              </a:lnSpc>
+            </a:pPr>
+            <a:r>
+              <a:rPr sz="900" b="1">
+                <a:solidFill>
+                  <a:srgbClr val="1428A0"/>
+                </a:solidFill>
+                <a:latin typeface="Arial"/>
+                <a:ea typeface="Arial"/>
+              </a:rPr>
+              <a:t>대체가 아니라 증설입니다  </a:t>
+            </a:r>
+            <a:r>
+              <a:rPr sz="900" b="0">
+                <a:solidFill>
+                  <a:srgbClr val="555555"/>
+                </a:solidFill>
+                <a:latin typeface="Arial"/>
+                <a:ea typeface="Arial"/>
+              </a:rPr>
+              <a:t>같은 기간 GPU당 HBM은 192 → 288GB, 2027년 384GB로 커집니다</a:t>
+            </a:r>
+          </a:p>
+        </p:txBody>
+      </p:sp>
+      <p:sp>
+        <p:nvSpPr>
+          <p:cNvPr id="113" name="Rectangle 112"/>
+          <p:cNvSpPr/>
+          <p:nvPr/>
+        </p:nvSpPr>
+        <p:spPr>
+          <a:xfrm>
+            <a:off x="7251192" y="6839712"/>
+            <a:ext cx="5212080" cy="1572768"/>
           </a:xfrm>
           <a:prstGeom prst="rect">
             <a:avLst/>
@@ -7157,14 +8784,14 @@
       </p:sp>
       <p:sp>
         <p:nvSpPr>
-          <p:cNvPr id="72" name="TextBox 71"/>
-          <p:cNvSpPr txBox="1"/>
-          <p:nvPr/>
-        </p:nvSpPr>
-        <p:spPr>
-          <a:xfrm>
-            <a:off x="1124712" y="7552944"/>
-            <a:ext cx="1487423" cy="201168"/>
+          <p:cNvPr id="114" name="TextBox 113"/>
+          <p:cNvSpPr txBox="1"/>
+          <p:nvPr/>
+        </p:nvSpPr>
+        <p:spPr>
+          <a:xfrm>
+            <a:off x="7397496" y="6894575"/>
+            <a:ext cx="4919472" cy="219456"/>
           </a:xfrm>
           <a:prstGeom prst="rect">
             <a:avLst/>
@@ -7183,6 +8810,170 @@
               </a:lnSpc>
             </a:pPr>
             <a:r>
+              <a:rPr sz="1125" b="1">
+                <a:solidFill>
+                  <a:srgbClr val="1428A0"/>
+                </a:solidFill>
+                <a:latin typeface="Arial"/>
+                <a:ea typeface="Arial"/>
+              </a:rPr>
+              <a:t>「KV 캐시를 담을 HBM 용량이 한계에 도달했다」</a:t>
+            </a:r>
+          </a:p>
+        </p:txBody>
+      </p:sp>
+      <p:sp>
+        <p:nvSpPr>
+          <p:cNvPr id="115" name="TextBox 114"/>
+          <p:cNvSpPr txBox="1"/>
+          <p:nvPr/>
+        </p:nvSpPr>
+        <p:spPr>
+          <a:xfrm>
+            <a:off x="7397496" y="7104888"/>
+            <a:ext cx="4919472" cy="182880"/>
+          </a:xfrm>
+          <a:prstGeom prst="rect">
+            <a:avLst/>
+          </a:prstGeom>
+          <a:noFill/>
+        </p:spPr>
+        <p:txBody>
+          <a:bodyPr wrap="square" anchor="t" lIns="0" rIns="0" tIns="0" bIns="0">
+            <a:spAutoFit/>
+          </a:bodyPr>
+          <a:lstStyle/>
+          <a:p>
+            <a:pPr algn="l">
+              <a:lnSpc>
+                <a:spcPct val="112000"/>
+              </a:lnSpc>
+            </a:pPr>
+            <a:r>
+              <a:rPr sz="875" b="0">
+                <a:solidFill>
+                  <a:srgbClr val="555555"/>
+                </a:solidFill>
+                <a:latin typeface="Arial"/>
+                <a:ea typeface="Arial"/>
+              </a:rPr>
+              <a:t>SK하이닉스 2026-07-29 실적 발표 · 같은 자리에서 GPU 인근 NAND 개발 공표</a:t>
+            </a:r>
+          </a:p>
+        </p:txBody>
+      </p:sp>
+      <p:sp>
+        <p:nvSpPr>
+          <p:cNvPr id="116" name="Rectangle 115"/>
+          <p:cNvSpPr/>
+          <p:nvPr/>
+        </p:nvSpPr>
+        <p:spPr>
+          <a:xfrm>
+            <a:off x="7397496" y="7315200"/>
+            <a:ext cx="4919472" cy="10972"/>
+          </a:xfrm>
+          <a:prstGeom prst="rect">
+            <a:avLst/>
+          </a:prstGeom>
+          <a:solidFill>
+            <a:srgbClr val="D9D9D9"/>
+          </a:solidFill>
+          <a:ln>
+            <a:noFill/>
+          </a:ln>
+          <a:effectLst/>
+        </p:spPr>
+        <p:style>
+          <a:lnRef idx="1">
+            <a:schemeClr val="accent1"/>
+          </a:lnRef>
+          <a:fillRef idx="3">
+            <a:schemeClr val="accent1"/>
+          </a:fillRef>
+          <a:effectRef idx="2">
+            <a:schemeClr val="accent1"/>
+          </a:effectRef>
+          <a:fontRef idx="minor">
+            <a:schemeClr val="lt1"/>
+          </a:fontRef>
+        </p:style>
+        <p:txBody>
+          <a:bodyPr rtlCol="0" anchor="ctr"/>
+          <a:lstStyle/>
+          <a:p>
+            <a:pPr algn="ctr"/>
+          </a:p>
+        </p:txBody>
+      </p:sp>
+      <p:sp>
+        <p:nvSpPr>
+          <p:cNvPr id="117" name="TextBox 116"/>
+          <p:cNvSpPr txBox="1"/>
+          <p:nvPr/>
+        </p:nvSpPr>
+        <p:spPr>
+          <a:xfrm>
+            <a:off x="7397496" y="7370063"/>
+            <a:ext cx="2395728" cy="155448"/>
+          </a:xfrm>
+          <a:prstGeom prst="rect">
+            <a:avLst/>
+          </a:prstGeom>
+          <a:noFill/>
+        </p:spPr>
+        <p:txBody>
+          <a:bodyPr wrap="square" anchor="t" lIns="0" rIns="0" tIns="0" bIns="0">
+            <a:spAutoFit/>
+          </a:bodyPr>
+          <a:lstStyle/>
+          <a:p>
+            <a:pPr algn="l">
+              <a:lnSpc>
+                <a:spcPct val="112000"/>
+              </a:lnSpc>
+            </a:pPr>
+            <a:r>
+              <a:rPr sz="850" b="0">
+                <a:solidFill>
+                  <a:srgbClr val="8A8A8A"/>
+                </a:solidFill>
+                <a:latin typeface="Arial"/>
+                <a:ea typeface="Arial"/>
+              </a:rPr>
+              <a:t>오프로드는 메인라인 코드</a:t>
+            </a:r>
+          </a:p>
+        </p:txBody>
+      </p:sp>
+      <p:sp>
+        <p:nvSpPr>
+          <p:cNvPr id="118" name="TextBox 117"/>
+          <p:cNvSpPr txBox="1"/>
+          <p:nvPr/>
+        </p:nvSpPr>
+        <p:spPr>
+          <a:xfrm>
+            <a:off x="7397496" y="7516367"/>
+            <a:ext cx="2395728" cy="219456"/>
+          </a:xfrm>
+          <a:prstGeom prst="rect">
+            <a:avLst/>
+          </a:prstGeom>
+          <a:noFill/>
+        </p:spPr>
+        <p:txBody>
+          <a:bodyPr wrap="square" anchor="t" lIns="0" rIns="0" tIns="0" bIns="0">
+            <a:spAutoFit/>
+          </a:bodyPr>
+          <a:lstStyle/>
+          <a:p>
+            <a:pPr algn="l">
+              <a:lnSpc>
+                <a:spcPct val="100000"/>
+              </a:lnSpc>
+            </a:pPr>
+            <a:r>
               <a:rPr sz="950" b="1">
                 <a:solidFill>
                   <a:srgbClr val="1428A0"/>
@@ -7190,21 +8981,21 @@
                 <a:latin typeface="Arial"/>
                 <a:ea typeface="Arial"/>
               </a:rPr>
-              <a:t>2025-Q4</a:t>
-            </a:r>
-          </a:p>
-        </p:txBody>
-      </p:sp>
-      <p:sp>
-        <p:nvSpPr>
-          <p:cNvPr id="73" name="TextBox 72"/>
-          <p:cNvSpPr txBox="1"/>
-          <p:nvPr/>
-        </p:nvSpPr>
-        <p:spPr>
-          <a:xfrm>
-            <a:off x="1124712" y="7754112"/>
-            <a:ext cx="1487423" cy="310896"/>
+              <a:t>LMCache 2024-08 → vLLM 2026-05</a:t>
+            </a:r>
+          </a:p>
+        </p:txBody>
+      </p:sp>
+      <p:sp>
+        <p:nvSpPr>
+          <p:cNvPr id="119" name="TextBox 118"/>
+          <p:cNvSpPr txBox="1"/>
+          <p:nvPr/>
+        </p:nvSpPr>
+        <p:spPr>
+          <a:xfrm>
+            <a:off x="9921240" y="7370063"/>
+            <a:ext cx="2395728" cy="155448"/>
           </a:xfrm>
           <a:prstGeom prst="rect">
             <a:avLst/>
@@ -7219,324 +9010,332 @@
           <a:p>
             <a:pPr algn="l">
               <a:lnSpc>
+                <a:spcPct val="112000"/>
+              </a:lnSpc>
+            </a:pPr>
+            <a:r>
+              <a:rPr sz="850" b="0">
+                <a:solidFill>
+                  <a:srgbClr val="8A8A8A"/>
+                </a:solidFill>
+                <a:latin typeface="Arial"/>
+                <a:ea typeface="Arial"/>
+              </a:rPr>
+              <a:t>NAND 비트 중 eSSD 비중</a:t>
+            </a:r>
+          </a:p>
+        </p:txBody>
+      </p:sp>
+      <p:sp>
+        <p:nvSpPr>
+          <p:cNvPr id="120" name="TextBox 119"/>
+          <p:cNvSpPr txBox="1"/>
+          <p:nvPr/>
+        </p:nvSpPr>
+        <p:spPr>
+          <a:xfrm>
+            <a:off x="9921240" y="7516367"/>
+            <a:ext cx="2395728" cy="219456"/>
+          </a:xfrm>
+          <a:prstGeom prst="rect">
+            <a:avLst/>
+          </a:prstGeom>
+          <a:noFill/>
+        </p:spPr>
+        <p:txBody>
+          <a:bodyPr wrap="square" anchor="t" lIns="0" rIns="0" tIns="0" bIns="0">
+            <a:spAutoFit/>
+          </a:bodyPr>
+          <a:lstStyle/>
+          <a:p>
+            <a:pPr algn="l">
+              <a:lnSpc>
                 <a:spcPct val="100000"/>
               </a:lnSpc>
             </a:pPr>
             <a:r>
-              <a:rPr sz="950" b="0">
+              <a:rPr sz="950" b="1">
+                <a:solidFill>
+                  <a:srgbClr val="1428A0"/>
+                </a:solidFill>
+                <a:latin typeface="Arial"/>
+                <a:ea typeface="Arial"/>
+              </a:rPr>
+              <a:t>1년 만에 26% → 48%</a:t>
+            </a:r>
+          </a:p>
+        </p:txBody>
+      </p:sp>
+      <p:sp>
+        <p:nvSpPr>
+          <p:cNvPr id="121" name="TextBox 120"/>
+          <p:cNvSpPr txBox="1"/>
+          <p:nvPr/>
+        </p:nvSpPr>
+        <p:spPr>
+          <a:xfrm>
+            <a:off x="7397496" y="7754112"/>
+            <a:ext cx="4919472" cy="182880"/>
+          </a:xfrm>
+          <a:prstGeom prst="rect">
+            <a:avLst/>
+          </a:prstGeom>
+          <a:noFill/>
+        </p:spPr>
+        <p:txBody>
+          <a:bodyPr wrap="square" anchor="t" lIns="0" rIns="0" tIns="0" bIns="0">
+            <a:spAutoFit/>
+          </a:bodyPr>
+          <a:lstStyle/>
+          <a:p>
+            <a:pPr algn="l">
+              <a:lnSpc>
+                <a:spcPct val="112000"/>
+              </a:lnSpc>
+            </a:pPr>
+            <a:r>
+              <a:rPr sz="850" b="0">
+                <a:solidFill>
+                  <a:srgbClr val="8A8A8A"/>
+                </a:solidFill>
+                <a:latin typeface="Arial"/>
+                <a:ea typeface="Arial"/>
+              </a:rPr>
+              <a:t>AI 수요의 중심이 추론으로 빠르게 확대되고 있습니다 · 데이터센터 NAND 295EB(2025) → 1,807EB(2028), Kioxia 전망</a:t>
+            </a:r>
+          </a:p>
+        </p:txBody>
+      </p:sp>
+      <p:sp>
+        <p:nvSpPr>
+          <p:cNvPr id="122" name="Rectangle 121"/>
+          <p:cNvSpPr/>
+          <p:nvPr/>
+        </p:nvSpPr>
+        <p:spPr>
+          <a:xfrm>
+            <a:off x="12957048" y="2560320"/>
+            <a:ext cx="4608576" cy="5870448"/>
+          </a:xfrm>
+          <a:prstGeom prst="rect">
+            <a:avLst/>
+          </a:prstGeom>
+          <a:solidFill>
+            <a:srgbClr val="F4F6FC"/>
+          </a:solidFill>
+          <a:ln w="15875">
+            <a:solidFill>
+              <a:srgbClr val="1428A0"/>
+            </a:solidFill>
+          </a:ln>
+          <a:effectLst/>
+        </p:spPr>
+        <p:style>
+          <a:lnRef idx="1">
+            <a:schemeClr val="accent1"/>
+          </a:lnRef>
+          <a:fillRef idx="3">
+            <a:schemeClr val="accent1"/>
+          </a:fillRef>
+          <a:effectRef idx="2">
+            <a:schemeClr val="accent1"/>
+          </a:effectRef>
+          <a:fontRef idx="minor">
+            <a:schemeClr val="lt1"/>
+          </a:fontRef>
+        </p:style>
+        <p:txBody>
+          <a:bodyPr rtlCol="0" anchor="ctr"/>
+          <a:lstStyle/>
+          <a:p>
+            <a:pPr algn="ctr"/>
+          </a:p>
+        </p:txBody>
+      </p:sp>
+      <p:sp>
+        <p:nvSpPr>
+          <p:cNvPr id="123" name="Rectangle 122"/>
+          <p:cNvSpPr/>
+          <p:nvPr/>
+        </p:nvSpPr>
+        <p:spPr>
+          <a:xfrm>
+            <a:off x="12957048" y="2560320"/>
+            <a:ext cx="4608576" cy="45720"/>
+          </a:xfrm>
+          <a:prstGeom prst="rect">
+            <a:avLst/>
+          </a:prstGeom>
+          <a:solidFill>
+            <a:srgbClr val="1428A0"/>
+          </a:solidFill>
+          <a:ln>
+            <a:noFill/>
+          </a:ln>
+          <a:effectLst/>
+        </p:spPr>
+        <p:style>
+          <a:lnRef idx="1">
+            <a:schemeClr val="accent1"/>
+          </a:lnRef>
+          <a:fillRef idx="3">
+            <a:schemeClr val="accent1"/>
+          </a:fillRef>
+          <a:effectRef idx="2">
+            <a:schemeClr val="accent1"/>
+          </a:effectRef>
+          <a:fontRef idx="minor">
+            <a:schemeClr val="lt1"/>
+          </a:fontRef>
+        </p:style>
+        <p:txBody>
+          <a:bodyPr rtlCol="0" anchor="ctr"/>
+          <a:lstStyle/>
+          <a:p>
+            <a:pPr algn="ctr"/>
+          </a:p>
+        </p:txBody>
+      </p:sp>
+      <p:sp>
+        <p:nvSpPr>
+          <p:cNvPr id="124" name="TextBox 123"/>
+          <p:cNvSpPr txBox="1"/>
+          <p:nvPr/>
+        </p:nvSpPr>
+        <p:spPr>
+          <a:xfrm>
+            <a:off x="13176504" y="2706624"/>
+            <a:ext cx="4169664" cy="274320"/>
+          </a:xfrm>
+          <a:prstGeom prst="rect">
+            <a:avLst/>
+          </a:prstGeom>
+          <a:noFill/>
+        </p:spPr>
+        <p:txBody>
+          <a:bodyPr wrap="square" anchor="t" lIns="0" rIns="0" tIns="0" bIns="0">
+            <a:spAutoFit/>
+          </a:bodyPr>
+          <a:lstStyle/>
+          <a:p>
+            <a:pPr algn="l">
+              <a:lnSpc>
+                <a:spcPct val="112000"/>
+              </a:lnSpc>
+            </a:pPr>
+            <a:r>
+              <a:rPr sz="1350" b="1">
+                <a:solidFill>
+                  <a:srgbClr val="1428A0"/>
+                </a:solidFill>
+                <a:latin typeface="Arial"/>
+                <a:ea typeface="Arial"/>
+              </a:rPr>
+              <a:t>③  </a:t>
+            </a:r>
+            <a:r>
+              <a:rPr sz="1350" b="1">
+                <a:solidFill>
+                  <a:srgbClr val="1428A0"/>
+                </a:solidFill>
+                <a:latin typeface="Arial"/>
+                <a:ea typeface="Arial"/>
+              </a:rPr>
+              <a:t>문제 · 둘 다 가질 수 있는가</a:t>
+            </a:r>
+          </a:p>
+        </p:txBody>
+      </p:sp>
+      <p:sp>
+        <p:nvSpPr>
+          <p:cNvPr id="125" name="TextBox 124"/>
+          <p:cNvSpPr txBox="1"/>
+          <p:nvPr/>
+        </p:nvSpPr>
+        <p:spPr>
+          <a:xfrm>
+            <a:off x="13176504" y="2980944"/>
+            <a:ext cx="4169664" cy="219456"/>
+          </a:xfrm>
+          <a:prstGeom prst="rect">
+            <a:avLst/>
+          </a:prstGeom>
+          <a:noFill/>
+        </p:spPr>
+        <p:txBody>
+          <a:bodyPr wrap="square" anchor="t" lIns="0" rIns="0" tIns="0" bIns="0">
+            <a:spAutoFit/>
+          </a:bodyPr>
+          <a:lstStyle/>
+          <a:p>
+            <a:pPr algn="l">
+              <a:lnSpc>
+                <a:spcPct val="112000"/>
+              </a:lnSpc>
+            </a:pPr>
+            <a:r>
+              <a:rPr sz="1000" b="0">
+                <a:solidFill>
+                  <a:srgbClr val="8A8A8A"/>
+                </a:solidFill>
+                <a:latin typeface="Arial"/>
+                <a:ea typeface="Arial"/>
+              </a:rPr>
+              <a:t>용량·비용과 내구성의 상충</a:t>
+            </a:r>
+          </a:p>
+        </p:txBody>
+      </p:sp>
+      <p:sp>
+        <p:nvSpPr>
+          <p:cNvPr id="126" name="TextBox 125"/>
+          <p:cNvSpPr txBox="1"/>
+          <p:nvPr/>
+        </p:nvSpPr>
+        <p:spPr>
+          <a:xfrm>
+            <a:off x="13231368" y="3310127"/>
+            <a:ext cx="4059936" cy="201168"/>
+          </a:xfrm>
+          <a:prstGeom prst="rect">
+            <a:avLst/>
+          </a:prstGeom>
+          <a:noFill/>
+        </p:spPr>
+        <p:txBody>
+          <a:bodyPr wrap="square" anchor="t" lIns="0" rIns="0" tIns="0" bIns="0">
+            <a:spAutoFit/>
+          </a:bodyPr>
+          <a:lstStyle/>
+          <a:p>
+            <a:pPr algn="l">
+              <a:lnSpc>
+                <a:spcPct val="112000"/>
+              </a:lnSpc>
+            </a:pPr>
+            <a:r>
+              <a:rPr sz="1000" b="0">
                 <a:solidFill>
                   <a:srgbClr val="555555"/>
                 </a:solidFill>
                 <a:latin typeface="Arial"/>
                 <a:ea typeface="Arial"/>
               </a:rPr>
-              <a:t>DRAM 1위 탈환</a:t>
-            </a:r>
-          </a:p>
-        </p:txBody>
-      </p:sp>
-      <p:sp>
-        <p:nvSpPr>
-          <p:cNvPr id="74" name="Rectangle 73"/>
-          <p:cNvSpPr/>
-          <p:nvPr/>
-        </p:nvSpPr>
-        <p:spPr>
-          <a:xfrm>
-            <a:off x="2868168" y="7516367"/>
-            <a:ext cx="1743455" cy="566928"/>
-          </a:xfrm>
-          <a:prstGeom prst="rect">
-            <a:avLst/>
-          </a:prstGeom>
-          <a:solidFill>
-            <a:srgbClr val="FFFFFF"/>
-          </a:solidFill>
-          <a:ln w="12700">
-            <a:solidFill>
-              <a:srgbClr val="AAB8E8"/>
-            </a:solidFill>
-          </a:ln>
-          <a:effectLst/>
-        </p:spPr>
-        <p:style>
-          <a:lnRef idx="1">
-            <a:schemeClr val="accent1"/>
-          </a:lnRef>
-          <a:fillRef idx="3">
-            <a:schemeClr val="accent1"/>
-          </a:fillRef>
-          <a:effectRef idx="2">
-            <a:schemeClr val="accent1"/>
-          </a:effectRef>
-          <a:fontRef idx="minor">
-            <a:schemeClr val="lt1"/>
-          </a:fontRef>
-        </p:style>
-        <p:txBody>
-          <a:bodyPr rtlCol="0" anchor="ctr"/>
-          <a:lstStyle/>
-          <a:p>
-            <a:pPr algn="ctr"/>
-          </a:p>
-        </p:txBody>
-      </p:sp>
-      <p:sp>
-        <p:nvSpPr>
-          <p:cNvPr id="75" name="TextBox 74"/>
-          <p:cNvSpPr txBox="1"/>
-          <p:nvPr/>
-        </p:nvSpPr>
-        <p:spPr>
-          <a:xfrm>
-            <a:off x="2996184" y="7552944"/>
-            <a:ext cx="1487423" cy="201168"/>
-          </a:xfrm>
-          <a:prstGeom prst="rect">
-            <a:avLst/>
-          </a:prstGeom>
-          <a:noFill/>
-        </p:spPr>
-        <p:txBody>
-          <a:bodyPr wrap="square" anchor="t" lIns="0" rIns="0" tIns="0" bIns="0">
-            <a:spAutoFit/>
-          </a:bodyPr>
-          <a:lstStyle/>
-          <a:p>
-            <a:pPr algn="l">
-              <a:lnSpc>
-                <a:spcPct val="112000"/>
-              </a:lnSpc>
-            </a:pPr>
-            <a:r>
-              <a:rPr sz="950" b="1">
-                <a:solidFill>
-                  <a:srgbClr val="1428A0"/>
-                </a:solidFill>
-                <a:latin typeface="Arial"/>
-                <a:ea typeface="Arial"/>
-              </a:rPr>
-              <a:t>2026-02</a:t>
-            </a:r>
-          </a:p>
-        </p:txBody>
-      </p:sp>
-      <p:sp>
-        <p:nvSpPr>
-          <p:cNvPr id="76" name="TextBox 75"/>
-          <p:cNvSpPr txBox="1"/>
-          <p:nvPr/>
-        </p:nvSpPr>
-        <p:spPr>
-          <a:xfrm>
-            <a:off x="2996184" y="7754112"/>
-            <a:ext cx="1487423" cy="310896"/>
-          </a:xfrm>
-          <a:prstGeom prst="rect">
-            <a:avLst/>
-          </a:prstGeom>
-          <a:noFill/>
-        </p:spPr>
-        <p:txBody>
-          <a:bodyPr wrap="square" anchor="t" lIns="0" rIns="0" tIns="0" bIns="0">
-            <a:spAutoFit/>
-          </a:bodyPr>
-          <a:lstStyle/>
-          <a:p>
-            <a:pPr algn="l">
-              <a:lnSpc>
-                <a:spcPct val="100000"/>
-              </a:lnSpc>
-            </a:pPr>
-            <a:r>
-              <a:rPr sz="950" b="0">
-                <a:solidFill>
-                  <a:srgbClr val="555555"/>
-                </a:solidFill>
-                <a:latin typeface="Arial"/>
-                <a:ea typeface="Arial"/>
-              </a:rPr>
-              <a:t>업계 최초 상용 HBM4 출하</a:t>
-            </a:r>
-          </a:p>
-        </p:txBody>
-      </p:sp>
-      <p:sp>
-        <p:nvSpPr>
-          <p:cNvPr id="77" name="Rectangle 76"/>
-          <p:cNvSpPr/>
-          <p:nvPr/>
-        </p:nvSpPr>
-        <p:spPr>
-          <a:xfrm>
-            <a:off x="4739639" y="7516367"/>
-            <a:ext cx="1743455" cy="566928"/>
-          </a:xfrm>
-          <a:prstGeom prst="rect">
-            <a:avLst/>
-          </a:prstGeom>
-          <a:solidFill>
-            <a:srgbClr val="FFFFFF"/>
-          </a:solidFill>
-          <a:ln w="12700">
-            <a:solidFill>
-              <a:srgbClr val="AAB8E8"/>
-            </a:solidFill>
-          </a:ln>
-          <a:effectLst/>
-        </p:spPr>
-        <p:style>
-          <a:lnRef idx="1">
-            <a:schemeClr val="accent1"/>
-          </a:lnRef>
-          <a:fillRef idx="3">
-            <a:schemeClr val="accent1"/>
-          </a:fillRef>
-          <a:effectRef idx="2">
-            <a:schemeClr val="accent1"/>
-          </a:effectRef>
-          <a:fontRef idx="minor">
-            <a:schemeClr val="lt1"/>
-          </a:fontRef>
-        </p:style>
-        <p:txBody>
-          <a:bodyPr rtlCol="0" anchor="ctr"/>
-          <a:lstStyle/>
-          <a:p>
-            <a:pPr algn="ctr"/>
-          </a:p>
-        </p:txBody>
-      </p:sp>
-      <p:sp>
-        <p:nvSpPr>
-          <p:cNvPr id="78" name="TextBox 77"/>
-          <p:cNvSpPr txBox="1"/>
-          <p:nvPr/>
-        </p:nvSpPr>
-        <p:spPr>
-          <a:xfrm>
-            <a:off x="4867655" y="7552944"/>
-            <a:ext cx="1487423" cy="201168"/>
-          </a:xfrm>
-          <a:prstGeom prst="rect">
-            <a:avLst/>
-          </a:prstGeom>
-          <a:noFill/>
-        </p:spPr>
-        <p:txBody>
-          <a:bodyPr wrap="square" anchor="t" lIns="0" rIns="0" tIns="0" bIns="0">
-            <a:spAutoFit/>
-          </a:bodyPr>
-          <a:lstStyle/>
-          <a:p>
-            <a:pPr algn="l">
-              <a:lnSpc>
-                <a:spcPct val="112000"/>
-              </a:lnSpc>
-            </a:pPr>
-            <a:r>
-              <a:rPr sz="950" b="1">
-                <a:solidFill>
-                  <a:srgbClr val="1428A0"/>
-                </a:solidFill>
-                <a:latin typeface="Arial"/>
-                <a:ea typeface="Arial"/>
-              </a:rPr>
-              <a:t>2026-Q2</a:t>
-            </a:r>
-          </a:p>
-        </p:txBody>
-      </p:sp>
-      <p:sp>
-        <p:nvSpPr>
-          <p:cNvPr id="79" name="TextBox 78"/>
-          <p:cNvSpPr txBox="1"/>
-          <p:nvPr/>
-        </p:nvSpPr>
-        <p:spPr>
-          <a:xfrm>
-            <a:off x="4867655" y="7754112"/>
-            <a:ext cx="1487423" cy="310896"/>
-          </a:xfrm>
-          <a:prstGeom prst="rect">
-            <a:avLst/>
-          </a:prstGeom>
-          <a:noFill/>
-        </p:spPr>
-        <p:txBody>
-          <a:bodyPr wrap="square" anchor="t" lIns="0" rIns="0" tIns="0" bIns="0">
-            <a:spAutoFit/>
-          </a:bodyPr>
-          <a:lstStyle/>
-          <a:p>
-            <a:pPr algn="l">
-              <a:lnSpc>
-                <a:spcPct val="100000"/>
-              </a:lnSpc>
-            </a:pPr>
-            <a:r>
-              <a:rPr sz="950" b="0">
-                <a:solidFill>
-                  <a:srgbClr val="555555"/>
-                </a:solidFill>
-                <a:latin typeface="Arial"/>
-                <a:ea typeface="Arial"/>
-              </a:rPr>
-              <a:t>HBM 점유 33% · 직전 분기 +12%p</a:t>
-            </a:r>
-          </a:p>
-        </p:txBody>
-      </p:sp>
-      <p:sp>
-        <p:nvSpPr>
-          <p:cNvPr id="80" name="TextBox 79"/>
-          <p:cNvSpPr txBox="1"/>
-          <p:nvPr/>
-        </p:nvSpPr>
-        <p:spPr>
-          <a:xfrm>
-            <a:off x="996696" y="8156448"/>
-            <a:ext cx="5486400" cy="219456"/>
-          </a:xfrm>
-          <a:prstGeom prst="rect">
-            <a:avLst/>
-          </a:prstGeom>
-          <a:noFill/>
-        </p:spPr>
-        <p:txBody>
-          <a:bodyPr wrap="square" anchor="t" lIns="0" rIns="0" tIns="0" bIns="0">
-            <a:spAutoFit/>
-          </a:bodyPr>
-          <a:lstStyle/>
-          <a:p>
-            <a:pPr algn="l">
-              <a:lnSpc>
-                <a:spcPct val="112000"/>
-              </a:lnSpc>
-            </a:pPr>
-            <a:r>
-              <a:rPr sz="1000" b="0">
-                <a:solidFill>
-                  <a:srgbClr val="555555"/>
-                </a:solidFill>
-                <a:latin typeface="Arial"/>
-                <a:ea typeface="Arial"/>
-              </a:rPr>
-              <a:t>변수는 판단을 끊지 않는 것입니다 · 다음 수요에서 같은 판단을 다시 해야 합니다</a:t>
-            </a:r>
-          </a:p>
-        </p:txBody>
-      </p:sp>
-      <p:sp>
-        <p:nvSpPr>
-          <p:cNvPr id="81" name="Rectangle 80"/>
-          <p:cNvSpPr/>
-          <p:nvPr/>
-        </p:nvSpPr>
-        <p:spPr>
-          <a:xfrm>
-            <a:off x="6976872" y="2560320"/>
-            <a:ext cx="5760720" cy="5870448"/>
+              <a:t>오늘 선택지는 둘 다를 주지 않습니다</a:t>
+            </a:r>
+          </a:p>
+        </p:txBody>
+      </p:sp>
+      <p:sp>
+        <p:nvSpPr>
+          <p:cNvPr id="127" name="Rectangle 126"/>
+          <p:cNvSpPr/>
+          <p:nvPr/>
+        </p:nvSpPr>
+        <p:spPr>
+          <a:xfrm>
+            <a:off x="13231368" y="3547872"/>
+            <a:ext cx="1965960" cy="1847088"/>
           </a:xfrm>
           <a:prstGeom prst="rect">
             <a:avLst/>
@@ -7575,20 +9374,20 @@
       </p:sp>
       <p:sp>
         <p:nvSpPr>
-          <p:cNvPr id="82" name="Rectangle 81"/>
-          <p:cNvSpPr/>
-          <p:nvPr/>
-        </p:nvSpPr>
-        <p:spPr>
-          <a:xfrm>
-            <a:off x="6976872" y="2560320"/>
-            <a:ext cx="5760720" cy="45720"/>
-          </a:xfrm>
-          <a:prstGeom prst="rect">
-            <a:avLst/>
-          </a:prstGeom>
-          <a:solidFill>
-            <a:srgbClr val="AAB8E8"/>
+          <p:cNvPr id="128" name="Rectangle 127"/>
+          <p:cNvSpPr/>
+          <p:nvPr/>
+        </p:nvSpPr>
+        <p:spPr>
+          <a:xfrm>
+            <a:off x="13231368" y="3547872"/>
+            <a:ext cx="1965960" cy="45720"/>
+          </a:xfrm>
+          <a:prstGeom prst="rect">
+            <a:avLst/>
+          </a:prstGeom>
+          <a:solidFill>
+            <a:srgbClr val="8A8A8A"/>
           </a:solidFill>
           <a:ln>
             <a:noFill/>
@@ -7619,14 +9418,14 @@
       </p:sp>
       <p:sp>
         <p:nvSpPr>
-          <p:cNvPr id="83" name="TextBox 82"/>
-          <p:cNvSpPr txBox="1"/>
-          <p:nvPr/>
-        </p:nvSpPr>
-        <p:spPr>
-          <a:xfrm>
-            <a:off x="7196328" y="2706624"/>
-            <a:ext cx="5321808" cy="274320"/>
+          <p:cNvPr id="129" name="TextBox 128"/>
+          <p:cNvSpPr txBox="1"/>
+          <p:nvPr/>
+        </p:nvSpPr>
+        <p:spPr>
+          <a:xfrm>
+            <a:off x="13359384" y="3639312"/>
+            <a:ext cx="1709928" cy="256032"/>
           </a:xfrm>
           <a:prstGeom prst="rect">
             <a:avLst/>
@@ -7645,38 +9444,148 @@
               </a:lnSpc>
             </a:pPr>
             <a:r>
-              <a:rPr sz="1350" b="1">
+              <a:rPr sz="1500" b="1">
+                <a:solidFill>
+                  <a:srgbClr val="555555"/>
+                </a:solidFill>
+                <a:latin typeface="Arial"/>
+                <a:ea typeface="Arial"/>
+              </a:rPr>
+              <a:t>TLC</a:t>
+            </a:r>
+          </a:p>
+        </p:txBody>
+      </p:sp>
+      <p:sp>
+        <p:nvSpPr>
+          <p:cNvPr id="130" name="TextBox 129"/>
+          <p:cNvSpPr txBox="1"/>
+          <p:nvPr/>
+        </p:nvSpPr>
+        <p:spPr>
+          <a:xfrm>
+            <a:off x="13359384" y="3895344"/>
+            <a:ext cx="1709928" cy="201168"/>
+          </a:xfrm>
+          <a:prstGeom prst="rect">
+            <a:avLst/>
+          </a:prstGeom>
+          <a:noFill/>
+        </p:spPr>
+        <p:txBody>
+          <a:bodyPr wrap="square" anchor="t" lIns="0" rIns="0" tIns="0" bIns="0">
+            <a:spAutoFit/>
+          </a:bodyPr>
+          <a:lstStyle/>
+          <a:p>
+            <a:pPr algn="l">
+              <a:lnSpc>
+                <a:spcPct val="112000"/>
+              </a:lnSpc>
+            </a:pPr>
+            <a:r>
+              <a:rPr sz="950" b="0">
+                <a:solidFill>
+                  <a:srgbClr val="8A8A8A"/>
+                </a:solidFill>
+                <a:latin typeface="Arial"/>
+                <a:ea typeface="Arial"/>
+              </a:rPr>
+              <a:t>3 DWPD 급</a:t>
+            </a:r>
+          </a:p>
+        </p:txBody>
+      </p:sp>
+      <p:sp>
+        <p:nvSpPr>
+          <p:cNvPr id="131" name="TextBox 130"/>
+          <p:cNvSpPr txBox="1"/>
+          <p:nvPr/>
+        </p:nvSpPr>
+        <p:spPr>
+          <a:xfrm>
+            <a:off x="13359384" y="4151376"/>
+            <a:ext cx="1709928" cy="164592"/>
+          </a:xfrm>
+          <a:prstGeom prst="rect">
+            <a:avLst/>
+          </a:prstGeom>
+          <a:noFill/>
+        </p:spPr>
+        <p:txBody>
+          <a:bodyPr wrap="square" anchor="t" lIns="0" rIns="0" tIns="0" bIns="0">
+            <a:spAutoFit/>
+          </a:bodyPr>
+          <a:lstStyle/>
+          <a:p>
+            <a:pPr algn="l">
+              <a:lnSpc>
+                <a:spcPct val="112000"/>
+              </a:lnSpc>
+            </a:pPr>
+            <a:r>
+              <a:rPr sz="875" b="0">
+                <a:solidFill>
+                  <a:srgbClr val="8A8A8A"/>
+                </a:solidFill>
+                <a:latin typeface="Arial"/>
+                <a:ea typeface="Arial"/>
+              </a:rPr>
+              <a:t>내구성</a:t>
+            </a:r>
+          </a:p>
+        </p:txBody>
+      </p:sp>
+      <p:sp>
+        <p:nvSpPr>
+          <p:cNvPr id="132" name="TextBox 131"/>
+          <p:cNvSpPr txBox="1"/>
+          <p:nvPr/>
+        </p:nvSpPr>
+        <p:spPr>
+          <a:xfrm>
+            <a:off x="13359384" y="4297680"/>
+            <a:ext cx="1709928" cy="237744"/>
+          </a:xfrm>
+          <a:prstGeom prst="rect">
+            <a:avLst/>
+          </a:prstGeom>
+          <a:noFill/>
+        </p:spPr>
+        <p:txBody>
+          <a:bodyPr wrap="square" anchor="t" lIns="0" rIns="0" tIns="0" bIns="0">
+            <a:spAutoFit/>
+          </a:bodyPr>
+          <a:lstStyle/>
+          <a:p>
+            <a:pPr algn="l">
+              <a:lnSpc>
+                <a:spcPct val="112000"/>
+              </a:lnSpc>
+            </a:pPr>
+            <a:r>
+              <a:rPr sz="1125" b="1">
                 <a:solidFill>
                   <a:srgbClr val="1428A0"/>
                 </a:solidFill>
                 <a:latin typeface="Arial"/>
                 <a:ea typeface="Arial"/>
               </a:rPr>
-              <a:t>②  </a:t>
-            </a:r>
-            <a:r>
-              <a:rPr sz="1350" b="1">
-                <a:solidFill>
-                  <a:srgbClr val="1428A0"/>
-                </a:solidFill>
-                <a:latin typeface="Arial"/>
-                <a:ea typeface="Arial"/>
-              </a:rPr>
-              <a:t>지금 · HBM 위에 새 계층이 얹힌다</a:t>
-            </a:r>
-          </a:p>
-        </p:txBody>
-      </p:sp>
-      <p:sp>
-        <p:nvSpPr>
-          <p:cNvPr id="84" name="TextBox 83"/>
-          <p:cNvSpPr txBox="1"/>
-          <p:nvPr/>
-        </p:nvSpPr>
-        <p:spPr>
-          <a:xfrm>
-            <a:off x="7196328" y="2980944"/>
-            <a:ext cx="5321808" cy="219456"/>
+              <a:t>요구 충족</a:t>
+            </a:r>
+          </a:p>
+        </p:txBody>
+      </p:sp>
+      <p:sp>
+        <p:nvSpPr>
+          <p:cNvPr id="133" name="TextBox 132"/>
+          <p:cNvSpPr txBox="1"/>
+          <p:nvPr/>
+        </p:nvSpPr>
+        <p:spPr>
+          <a:xfrm>
+            <a:off x="13359384" y="4553712"/>
+            <a:ext cx="1709928" cy="164592"/>
           </a:xfrm>
           <a:prstGeom prst="rect">
             <a:avLst/>
@@ -7695,28 +9604,28 @@
               </a:lnSpc>
             </a:pPr>
             <a:r>
-              <a:rPr sz="1000" b="0">
+              <a:rPr sz="875" b="0">
                 <a:solidFill>
                   <a:srgbClr val="8A8A8A"/>
                 </a:solidFill>
                 <a:latin typeface="Arial"/>
                 <a:ea typeface="Arial"/>
               </a:rPr>
-              <a:t>KV 캐시가 HBM 용량을 넘어선다</a:t>
-            </a:r>
-          </a:p>
-        </p:txBody>
-      </p:sp>
-      <p:sp>
-        <p:nvSpPr>
-          <p:cNvPr id="85" name="TextBox 84"/>
-          <p:cNvSpPr txBox="1"/>
-          <p:nvPr/>
-        </p:nvSpPr>
-        <p:spPr>
-          <a:xfrm>
-            <a:off x="7251192" y="3291839"/>
-            <a:ext cx="5212080" cy="182880"/>
+              <a:t>용량</a:t>
+            </a:r>
+          </a:p>
+        </p:txBody>
+      </p:sp>
+      <p:sp>
+        <p:nvSpPr>
+          <p:cNvPr id="134" name="TextBox 133"/>
+          <p:cNvSpPr txBox="1"/>
+          <p:nvPr/>
+        </p:nvSpPr>
+        <p:spPr>
+          <a:xfrm>
+            <a:off x="13359384" y="4700016"/>
+            <a:ext cx="1709928" cy="237744"/>
           </a:xfrm>
           <a:prstGeom prst="rect">
             <a:avLst/>
@@ -7735,74 +9644,68 @@
               </a:lnSpc>
             </a:pPr>
             <a:r>
-              <a:rPr sz="950" b="0">
+              <a:rPr sz="1125" b="1">
+                <a:solidFill>
+                  <a:srgbClr val="555555"/>
+                </a:solidFill>
+                <a:latin typeface="Arial"/>
+                <a:ea typeface="Arial"/>
+              </a:rPr>
+              <a:t>61TB 급</a:t>
+            </a:r>
+          </a:p>
+        </p:txBody>
+      </p:sp>
+      <p:sp>
+        <p:nvSpPr>
+          <p:cNvPr id="135" name="TextBox 134"/>
+          <p:cNvSpPr txBox="1"/>
+          <p:nvPr/>
+        </p:nvSpPr>
+        <p:spPr>
+          <a:xfrm>
+            <a:off x="13359384" y="4956048"/>
+            <a:ext cx="1709928" cy="164592"/>
+          </a:xfrm>
+          <a:prstGeom prst="rect">
+            <a:avLst/>
+          </a:prstGeom>
+          <a:noFill/>
+        </p:spPr>
+        <p:txBody>
+          <a:bodyPr wrap="square" anchor="t" lIns="0" rIns="0" tIns="0" bIns="0">
+            <a:spAutoFit/>
+          </a:bodyPr>
+          <a:lstStyle/>
+          <a:p>
+            <a:pPr algn="l">
+              <a:lnSpc>
+                <a:spcPct val="112000"/>
+              </a:lnSpc>
+            </a:pPr>
+            <a:r>
+              <a:rPr sz="875" b="0">
                 <a:solidFill>
                   <a:srgbClr val="8A8A8A"/>
                 </a:solidFill>
                 <a:latin typeface="Arial"/>
                 <a:ea typeface="Arial"/>
               </a:rPr>
-              <a:t>구매 기준은 이렇게 움직여 왔습니다</a:t>
-            </a:r>
-          </a:p>
-        </p:txBody>
-      </p:sp>
-      <p:sp>
-        <p:nvSpPr>
-          <p:cNvPr id="86" name="Rectangle 85"/>
-          <p:cNvSpPr/>
-          <p:nvPr/>
-        </p:nvSpPr>
-        <p:spPr>
-          <a:xfrm>
-            <a:off x="7251192" y="3474720"/>
-            <a:ext cx="1591056" cy="585216"/>
-          </a:xfrm>
-          <a:prstGeom prst="rect">
-            <a:avLst/>
-          </a:prstGeom>
-          <a:solidFill>
-            <a:srgbClr val="FFFFFF"/>
-          </a:solidFill>
-          <a:ln w="9525">
-            <a:solidFill>
-              <a:srgbClr val="D9D9D9"/>
-            </a:solidFill>
-          </a:ln>
-          <a:effectLst/>
-        </p:spPr>
-        <p:style>
-          <a:lnRef idx="1">
-            <a:schemeClr val="accent1"/>
-          </a:lnRef>
-          <a:fillRef idx="3">
-            <a:schemeClr val="accent1"/>
-          </a:fillRef>
-          <a:effectRef idx="2">
-            <a:schemeClr val="accent1"/>
-          </a:effectRef>
-          <a:fontRef idx="minor">
-            <a:schemeClr val="lt1"/>
-          </a:fontRef>
-        </p:style>
-        <p:txBody>
-          <a:bodyPr rtlCol="0" anchor="ctr"/>
-          <a:lstStyle/>
-          <a:p>
-            <a:pPr algn="ctr"/>
-          </a:p>
-        </p:txBody>
-      </p:sp>
-      <p:sp>
-        <p:nvSpPr>
-          <p:cNvPr id="87" name="TextBox 86"/>
-          <p:cNvSpPr txBox="1"/>
-          <p:nvPr/>
-        </p:nvSpPr>
-        <p:spPr>
-          <a:xfrm>
-            <a:off x="7324344" y="3511296"/>
-            <a:ext cx="1444752" cy="155448"/>
+              <a:t>비용</a:t>
+            </a:r>
+          </a:p>
+        </p:txBody>
+      </p:sp>
+      <p:sp>
+        <p:nvSpPr>
+          <p:cNvPr id="136" name="TextBox 135"/>
+          <p:cNvSpPr txBox="1"/>
+          <p:nvPr/>
+        </p:nvSpPr>
+        <p:spPr>
+          <a:xfrm>
+            <a:off x="13359384" y="5102352"/>
+            <a:ext cx="1709928" cy="237744"/>
           </a:xfrm>
           <a:prstGeom prst="rect">
             <a:avLst/>
@@ -7815,1802 +9718,34 @@
           </a:bodyPr>
           <a:lstStyle/>
           <a:p>
-            <a:pPr algn="ctr">
+            <a:pPr algn="l">
               <a:lnSpc>
                 <a:spcPct val="112000"/>
               </a:lnSpc>
             </a:pPr>
             <a:r>
-              <a:rPr sz="850" b="0">
-                <a:solidFill>
-                  <a:srgbClr val="8A8A8A"/>
-                </a:solidFill>
-                <a:latin typeface="Arial"/>
-                <a:ea typeface="Arial"/>
-              </a:rPr>
-              <a:t>2008~12</a:t>
-            </a:r>
-          </a:p>
-        </p:txBody>
-      </p:sp>
-      <p:sp>
-        <p:nvSpPr>
-          <p:cNvPr id="88" name="TextBox 87"/>
-          <p:cNvSpPr txBox="1"/>
-          <p:nvPr/>
-        </p:nvSpPr>
-        <p:spPr>
-          <a:xfrm>
-            <a:off x="7306055" y="3666744"/>
-            <a:ext cx="1481328" cy="347472"/>
-          </a:xfrm>
-          <a:prstGeom prst="rect">
-            <a:avLst/>
-          </a:prstGeom>
-          <a:noFill/>
-        </p:spPr>
-        <p:txBody>
-          <a:bodyPr wrap="square" anchor="t" lIns="0" rIns="0" tIns="0" bIns="0">
-            <a:spAutoFit/>
-          </a:bodyPr>
-          <a:lstStyle/>
-          <a:p>
-            <a:pPr algn="ctr">
-              <a:lnSpc>
-                <a:spcPct val="100000"/>
-              </a:lnSpc>
-            </a:pPr>
-            <a:r>
-              <a:rPr sz="1050" b="1">
-                <a:solidFill>
-                  <a:srgbClr val="1A1A1A"/>
-                </a:solidFill>
-                <a:latin typeface="Arial"/>
-                <a:ea typeface="Arial"/>
-              </a:rPr>
-              <a:t>성능 · 용량당 가격</a:t>
-            </a:r>
-          </a:p>
-        </p:txBody>
-      </p:sp>
-      <p:sp>
-        <p:nvSpPr>
-          <p:cNvPr id="89" name="Right Arrow 88"/>
-          <p:cNvSpPr/>
-          <p:nvPr/>
-        </p:nvSpPr>
-        <p:spPr>
-          <a:xfrm>
-            <a:off x="8878824" y="3694176"/>
-            <a:ext cx="146303" cy="155448"/>
-          </a:xfrm>
-          <a:prstGeom prst="rightArrow">
-            <a:avLst/>
-          </a:prstGeom>
-          <a:solidFill>
-            <a:srgbClr val="AAB8E8"/>
-          </a:solidFill>
-          <a:ln>
-            <a:noFill/>
-          </a:ln>
-          <a:effectLst/>
-        </p:spPr>
-        <p:style>
-          <a:lnRef idx="1">
-            <a:schemeClr val="accent1"/>
-          </a:lnRef>
-          <a:fillRef idx="3">
-            <a:schemeClr val="accent1"/>
-          </a:fillRef>
-          <a:effectRef idx="2">
-            <a:schemeClr val="accent1"/>
-          </a:effectRef>
-          <a:fontRef idx="minor">
-            <a:schemeClr val="lt1"/>
-          </a:fontRef>
-        </p:style>
-        <p:txBody>
-          <a:bodyPr rtlCol="0" anchor="ctr"/>
-          <a:lstStyle/>
-          <a:p>
-            <a:pPr algn="ctr"/>
-          </a:p>
-        </p:txBody>
-      </p:sp>
-      <p:sp>
-        <p:nvSpPr>
-          <p:cNvPr id="90" name="Rectangle 89"/>
-          <p:cNvSpPr/>
-          <p:nvPr/>
-        </p:nvSpPr>
-        <p:spPr>
-          <a:xfrm>
-            <a:off x="9061704" y="3474720"/>
-            <a:ext cx="1591056" cy="585216"/>
-          </a:xfrm>
-          <a:prstGeom prst="rect">
-            <a:avLst/>
-          </a:prstGeom>
-          <a:solidFill>
-            <a:srgbClr val="FFFFFF"/>
-          </a:solidFill>
-          <a:ln w="9525">
-            <a:solidFill>
-              <a:srgbClr val="D9D9D9"/>
-            </a:solidFill>
-          </a:ln>
-          <a:effectLst/>
-        </p:spPr>
-        <p:style>
-          <a:lnRef idx="1">
-            <a:schemeClr val="accent1"/>
-          </a:lnRef>
-          <a:fillRef idx="3">
-            <a:schemeClr val="accent1"/>
-          </a:fillRef>
-          <a:effectRef idx="2">
-            <a:schemeClr val="accent1"/>
-          </a:effectRef>
-          <a:fontRef idx="minor">
-            <a:schemeClr val="lt1"/>
-          </a:fontRef>
-        </p:style>
-        <p:txBody>
-          <a:bodyPr rtlCol="0" anchor="ctr"/>
-          <a:lstStyle/>
-          <a:p>
-            <a:pPr algn="ctr"/>
-          </a:p>
-        </p:txBody>
-      </p:sp>
-      <p:sp>
-        <p:nvSpPr>
-          <p:cNvPr id="91" name="TextBox 90"/>
-          <p:cNvSpPr txBox="1"/>
-          <p:nvPr/>
-        </p:nvSpPr>
-        <p:spPr>
-          <a:xfrm>
-            <a:off x="9134856" y="3511296"/>
-            <a:ext cx="1444752" cy="155448"/>
-          </a:xfrm>
-          <a:prstGeom prst="rect">
-            <a:avLst/>
-          </a:prstGeom>
-          <a:noFill/>
-        </p:spPr>
-        <p:txBody>
-          <a:bodyPr wrap="square" anchor="t" lIns="0" rIns="0" tIns="0" bIns="0">
-            <a:spAutoFit/>
-          </a:bodyPr>
-          <a:lstStyle/>
-          <a:p>
-            <a:pPr algn="ctr">
-              <a:lnSpc>
-                <a:spcPct val="112000"/>
-              </a:lnSpc>
-            </a:pPr>
-            <a:r>
-              <a:rPr sz="850" b="0">
-                <a:solidFill>
-                  <a:srgbClr val="8A8A8A"/>
-                </a:solidFill>
-                <a:latin typeface="Arial"/>
-                <a:ea typeface="Arial"/>
-              </a:rPr>
-              <a:t>2012~21</a:t>
-            </a:r>
-          </a:p>
-        </p:txBody>
-      </p:sp>
-      <p:sp>
-        <p:nvSpPr>
-          <p:cNvPr id="92" name="TextBox 91"/>
-          <p:cNvSpPr txBox="1"/>
-          <p:nvPr/>
-        </p:nvSpPr>
-        <p:spPr>
-          <a:xfrm>
-            <a:off x="9116568" y="3666744"/>
-            <a:ext cx="1481328" cy="347472"/>
-          </a:xfrm>
-          <a:prstGeom prst="rect">
-            <a:avLst/>
-          </a:prstGeom>
-          <a:noFill/>
-        </p:spPr>
-        <p:txBody>
-          <a:bodyPr wrap="square" anchor="t" lIns="0" rIns="0" tIns="0" bIns="0">
-            <a:spAutoFit/>
-          </a:bodyPr>
-          <a:lstStyle/>
-          <a:p>
-            <a:pPr algn="ctr">
-              <a:lnSpc>
-                <a:spcPct val="100000"/>
-              </a:lnSpc>
-            </a:pPr>
-            <a:r>
-              <a:rPr sz="1050" b="1">
-                <a:solidFill>
-                  <a:srgbClr val="1A1A1A"/>
-                </a:solidFill>
-                <a:latin typeface="Arial"/>
-                <a:ea typeface="Arial"/>
-              </a:rPr>
-              <a:t>QoS · 지연 꼬리</a:t>
-            </a:r>
-          </a:p>
-        </p:txBody>
-      </p:sp>
-      <p:sp>
-        <p:nvSpPr>
-          <p:cNvPr id="93" name="Right Arrow 92"/>
-          <p:cNvSpPr/>
-          <p:nvPr/>
-        </p:nvSpPr>
-        <p:spPr>
-          <a:xfrm>
-            <a:off x="10689336" y="3694176"/>
-            <a:ext cx="146303" cy="155448"/>
-          </a:xfrm>
-          <a:prstGeom prst="rightArrow">
-            <a:avLst/>
-          </a:prstGeom>
-          <a:solidFill>
-            <a:srgbClr val="AAB8E8"/>
-          </a:solidFill>
-          <a:ln>
-            <a:noFill/>
-          </a:ln>
-          <a:effectLst/>
-        </p:spPr>
-        <p:style>
-          <a:lnRef idx="1">
-            <a:schemeClr val="accent1"/>
-          </a:lnRef>
-          <a:fillRef idx="3">
-            <a:schemeClr val="accent1"/>
-          </a:fillRef>
-          <a:effectRef idx="2">
-            <a:schemeClr val="accent1"/>
-          </a:effectRef>
-          <a:fontRef idx="minor">
-            <a:schemeClr val="lt1"/>
-          </a:fontRef>
-        </p:style>
-        <p:txBody>
-          <a:bodyPr rtlCol="0" anchor="ctr"/>
-          <a:lstStyle/>
-          <a:p>
-            <a:pPr algn="ctr"/>
-          </a:p>
-        </p:txBody>
-      </p:sp>
-      <p:sp>
-        <p:nvSpPr>
-          <p:cNvPr id="94" name="Rectangle 93"/>
-          <p:cNvSpPr/>
-          <p:nvPr/>
-        </p:nvSpPr>
-        <p:spPr>
-          <a:xfrm>
-            <a:off x="10872216" y="3474720"/>
-            <a:ext cx="1591056" cy="585216"/>
-          </a:xfrm>
-          <a:prstGeom prst="rect">
-            <a:avLst/>
-          </a:prstGeom>
-          <a:solidFill>
-            <a:srgbClr val="1428A0"/>
-          </a:solidFill>
-          <a:ln>
-            <a:noFill/>
-          </a:ln>
-          <a:effectLst/>
-        </p:spPr>
-        <p:style>
-          <a:lnRef idx="1">
-            <a:schemeClr val="accent1"/>
-          </a:lnRef>
-          <a:fillRef idx="3">
-            <a:schemeClr val="accent1"/>
-          </a:fillRef>
-          <a:effectRef idx="2">
-            <a:schemeClr val="accent1"/>
-          </a:effectRef>
-          <a:fontRef idx="minor">
-            <a:schemeClr val="lt1"/>
-          </a:fontRef>
-        </p:style>
-        <p:txBody>
-          <a:bodyPr rtlCol="0" anchor="ctr"/>
-          <a:lstStyle/>
-          <a:p>
-            <a:pPr algn="ctr"/>
-          </a:p>
-        </p:txBody>
-      </p:sp>
-      <p:sp>
-        <p:nvSpPr>
-          <p:cNvPr id="95" name="TextBox 94"/>
-          <p:cNvSpPr txBox="1"/>
-          <p:nvPr/>
-        </p:nvSpPr>
-        <p:spPr>
-          <a:xfrm>
-            <a:off x="10945368" y="3511296"/>
-            <a:ext cx="1444752" cy="155448"/>
-          </a:xfrm>
-          <a:prstGeom prst="rect">
-            <a:avLst/>
-          </a:prstGeom>
-          <a:noFill/>
-        </p:spPr>
-        <p:txBody>
-          <a:bodyPr wrap="square" anchor="t" lIns="0" rIns="0" tIns="0" bIns="0">
-            <a:spAutoFit/>
-          </a:bodyPr>
-          <a:lstStyle/>
-          <a:p>
-            <a:pPr algn="ctr">
-              <a:lnSpc>
-                <a:spcPct val="112000"/>
-              </a:lnSpc>
-            </a:pPr>
-            <a:r>
-              <a:rPr sz="850" b="0">
-                <a:solidFill>
-                  <a:srgbClr val="AAB8E8"/>
-                </a:solidFill>
-                <a:latin typeface="Arial"/>
-                <a:ea typeface="Arial"/>
-              </a:rPr>
-              <a:t>2022~26</a:t>
-            </a:r>
-          </a:p>
-        </p:txBody>
-      </p:sp>
-      <p:sp>
-        <p:nvSpPr>
-          <p:cNvPr id="96" name="TextBox 95"/>
-          <p:cNvSpPr txBox="1"/>
-          <p:nvPr/>
-        </p:nvSpPr>
-        <p:spPr>
-          <a:xfrm>
-            <a:off x="10927080" y="3666744"/>
-            <a:ext cx="1481328" cy="347472"/>
-          </a:xfrm>
-          <a:prstGeom prst="rect">
-            <a:avLst/>
-          </a:prstGeom>
-          <a:noFill/>
-        </p:spPr>
-        <p:txBody>
-          <a:bodyPr wrap="square" anchor="t" lIns="0" rIns="0" tIns="0" bIns="0">
-            <a:spAutoFit/>
-          </a:bodyPr>
-          <a:lstStyle/>
-          <a:p>
-            <a:pPr algn="ctr">
-              <a:lnSpc>
-                <a:spcPct val="100000"/>
-              </a:lnSpc>
-            </a:pPr>
-            <a:r>
-              <a:rPr sz="1050" b="1">
-                <a:solidFill>
-                  <a:srgbClr val="FFFFFF"/>
-                </a:solidFill>
-                <a:latin typeface="Arial"/>
-                <a:ea typeface="Arial"/>
-              </a:rPr>
-              <a:t>밀도 · 전력 · 물량</a:t>
-            </a:r>
-          </a:p>
-        </p:txBody>
-      </p:sp>
-      <p:sp>
-        <p:nvSpPr>
-          <p:cNvPr id="97" name="TextBox 96"/>
-          <p:cNvSpPr txBox="1"/>
-          <p:nvPr/>
-        </p:nvSpPr>
-        <p:spPr>
-          <a:xfrm>
-            <a:off x="7251192" y="4187951"/>
-            <a:ext cx="5212080" cy="201168"/>
-          </a:xfrm>
-          <a:prstGeom prst="rect">
-            <a:avLst/>
-          </a:prstGeom>
-          <a:noFill/>
-        </p:spPr>
-        <p:txBody>
-          <a:bodyPr wrap="square" anchor="t" lIns="0" rIns="0" tIns="0" bIns="0">
-            <a:spAutoFit/>
-          </a:bodyPr>
-          <a:lstStyle/>
-          <a:p>
-            <a:pPr algn="l">
-              <a:lnSpc>
-                <a:spcPct val="112000"/>
-              </a:lnSpc>
-            </a:pPr>
-            <a:r>
-              <a:rPr sz="950" b="0">
-                <a:solidFill>
-                  <a:srgbClr val="8A8A8A"/>
-                </a:solidFill>
-                <a:latin typeface="Arial"/>
-                <a:ea typeface="Arial"/>
-              </a:rPr>
-              <a:t>그 위에 새 수요가 올라왔습니다   </a:t>
-            </a:r>
-            <a:r>
-              <a:rPr sz="1050" b="1">
-                <a:solidFill>
-                  <a:srgbClr val="1428A0"/>
-                </a:solidFill>
-                <a:latin typeface="Arial"/>
-                <a:ea typeface="Arial"/>
-              </a:rPr>
-              <a:t>KV 캐시가 HBM 용량을 넘어섭니다</a:t>
-            </a:r>
-          </a:p>
-        </p:txBody>
-      </p:sp>
-      <p:sp>
-        <p:nvSpPr>
-          <p:cNvPr id="98" name="Rectangle 97"/>
-          <p:cNvSpPr/>
-          <p:nvPr/>
-        </p:nvSpPr>
-        <p:spPr>
-          <a:xfrm>
-            <a:off x="7251192" y="4416551"/>
-            <a:ext cx="5212080" cy="475488"/>
-          </a:xfrm>
-          <a:prstGeom prst="rect">
-            <a:avLst/>
-          </a:prstGeom>
-          <a:solidFill>
-            <a:srgbClr val="1428A0"/>
-          </a:solidFill>
-          <a:ln>
-            <a:noFill/>
-          </a:ln>
-          <a:effectLst/>
-        </p:spPr>
-        <p:style>
-          <a:lnRef idx="1">
-            <a:schemeClr val="accent1"/>
-          </a:lnRef>
-          <a:fillRef idx="3">
-            <a:schemeClr val="accent1"/>
-          </a:fillRef>
-          <a:effectRef idx="2">
-            <a:schemeClr val="accent1"/>
-          </a:effectRef>
-          <a:fontRef idx="minor">
-            <a:schemeClr val="lt1"/>
-          </a:fontRef>
-        </p:style>
-        <p:txBody>
-          <a:bodyPr rtlCol="0" anchor="ctr"/>
-          <a:lstStyle/>
-          <a:p>
-            <a:pPr algn="ctr"/>
-          </a:p>
-        </p:txBody>
-      </p:sp>
-      <p:sp>
-        <p:nvSpPr>
-          <p:cNvPr id="99" name="Rectangle 98"/>
-          <p:cNvSpPr/>
-          <p:nvPr/>
-        </p:nvSpPr>
-        <p:spPr>
-          <a:xfrm>
-            <a:off x="7251192" y="4416551"/>
-            <a:ext cx="512064" cy="475488"/>
-          </a:xfrm>
-          <a:prstGeom prst="rect">
-            <a:avLst/>
-          </a:prstGeom>
-          <a:solidFill>
-            <a:srgbClr val="3C5AC8"/>
-          </a:solidFill>
-          <a:ln>
-            <a:noFill/>
-          </a:ln>
-          <a:effectLst/>
-        </p:spPr>
-        <p:style>
-          <a:lnRef idx="1">
-            <a:schemeClr val="accent1"/>
-          </a:lnRef>
-          <a:fillRef idx="3">
-            <a:schemeClr val="accent1"/>
-          </a:fillRef>
-          <a:effectRef idx="2">
-            <a:schemeClr val="accent1"/>
-          </a:effectRef>
-          <a:fontRef idx="minor">
-            <a:schemeClr val="lt1"/>
-          </a:fontRef>
-        </p:style>
-        <p:txBody>
-          <a:bodyPr rtlCol="0" anchor="ctr"/>
-          <a:lstStyle/>
-          <a:p>
-            <a:pPr algn="ctr"/>
-          </a:p>
-        </p:txBody>
-      </p:sp>
-      <p:sp>
-        <p:nvSpPr>
-          <p:cNvPr id="100" name="TextBox 99"/>
-          <p:cNvSpPr txBox="1"/>
-          <p:nvPr/>
-        </p:nvSpPr>
-        <p:spPr>
-          <a:xfrm>
-            <a:off x="7251192" y="4416551"/>
-            <a:ext cx="512064" cy="475488"/>
-          </a:xfrm>
-          <a:prstGeom prst="rect">
-            <a:avLst/>
-          </a:prstGeom>
-          <a:noFill/>
-        </p:spPr>
-        <p:txBody>
-          <a:bodyPr wrap="square" anchor="ctr" lIns="0" rIns="0" tIns="0" bIns="0">
-            <a:spAutoFit/>
-          </a:bodyPr>
-          <a:lstStyle/>
-          <a:p>
-            <a:pPr algn="ctr">
-              <a:lnSpc>
-                <a:spcPct val="112000"/>
-              </a:lnSpc>
-            </a:pPr>
-            <a:r>
               <a:rPr sz="1125" b="1">
                 <a:solidFill>
-                  <a:srgbClr val="FFFFFF"/>
-                </a:solidFill>
-                <a:latin typeface="Arial"/>
-                <a:ea typeface="Arial"/>
-              </a:rPr>
-              <a:t>G1</a:t>
-            </a:r>
-          </a:p>
-        </p:txBody>
-      </p:sp>
-      <p:sp>
-        <p:nvSpPr>
-          <p:cNvPr id="101" name="TextBox 100"/>
-          <p:cNvSpPr txBox="1"/>
-          <p:nvPr/>
-        </p:nvSpPr>
-        <p:spPr>
-          <a:xfrm>
-            <a:off x="7891271" y="4462271"/>
-            <a:ext cx="1700784" cy="219456"/>
-          </a:xfrm>
-          <a:prstGeom prst="rect">
-            <a:avLst/>
-          </a:prstGeom>
-          <a:noFill/>
-        </p:spPr>
-        <p:txBody>
-          <a:bodyPr wrap="square" anchor="t" lIns="0" rIns="0" tIns="0" bIns="0">
-            <a:spAutoFit/>
-          </a:bodyPr>
-          <a:lstStyle/>
-          <a:p>
-            <a:pPr algn="l">
-              <a:lnSpc>
-                <a:spcPct val="112000"/>
-              </a:lnSpc>
-            </a:pPr>
-            <a:r>
-              <a:rPr sz="1200" b="1">
-                <a:solidFill>
-                  <a:srgbClr val="FFFFFF"/>
-                </a:solidFill>
-                <a:latin typeface="Arial"/>
-                <a:ea typeface="Arial"/>
-              </a:rPr>
-              <a:t>GPU HBM</a:t>
-            </a:r>
-          </a:p>
-        </p:txBody>
-      </p:sp>
-      <p:sp>
-        <p:nvSpPr>
-          <p:cNvPr id="102" name="TextBox 101"/>
-          <p:cNvSpPr txBox="1"/>
-          <p:nvPr/>
-        </p:nvSpPr>
-        <p:spPr>
-          <a:xfrm>
-            <a:off x="7891271" y="4681727"/>
-            <a:ext cx="1700784" cy="173736"/>
-          </a:xfrm>
-          <a:prstGeom prst="rect">
-            <a:avLst/>
-          </a:prstGeom>
-          <a:noFill/>
-        </p:spPr>
-        <p:txBody>
-          <a:bodyPr wrap="square" anchor="t" lIns="0" rIns="0" tIns="0" bIns="0">
-            <a:spAutoFit/>
-          </a:bodyPr>
-          <a:lstStyle/>
-          <a:p>
-            <a:pPr algn="l">
-              <a:lnSpc>
-                <a:spcPct val="112000"/>
-              </a:lnSpc>
-            </a:pPr>
-            <a:r>
-              <a:rPr sz="850" b="0">
-                <a:solidFill>
-                  <a:srgbClr val="AAB8E8"/>
-                </a:solidFill>
-                <a:latin typeface="Arial"/>
-                <a:ea typeface="Arial"/>
-              </a:rPr>
-              <a:t>80 → 288GB로 커졌지만</a:t>
-            </a:r>
-          </a:p>
-        </p:txBody>
-      </p:sp>
-      <p:sp>
-        <p:nvSpPr>
-          <p:cNvPr id="103" name="TextBox 102"/>
-          <p:cNvSpPr txBox="1"/>
-          <p:nvPr/>
-        </p:nvSpPr>
-        <p:spPr>
-          <a:xfrm>
-            <a:off x="9646920" y="4434839"/>
-            <a:ext cx="2688336" cy="438912"/>
-          </a:xfrm>
-          <a:prstGeom prst="rect">
-            <a:avLst/>
-          </a:prstGeom>
-          <a:noFill/>
-        </p:spPr>
-        <p:txBody>
-          <a:bodyPr wrap="square" anchor="ctr" lIns="0" rIns="0" tIns="0" bIns="0">
-            <a:spAutoFit/>
-          </a:bodyPr>
-          <a:lstStyle/>
-          <a:p>
-            <a:pPr algn="l">
-              <a:lnSpc>
-                <a:spcPct val="104000"/>
-              </a:lnSpc>
-            </a:pPr>
-            <a:r>
-              <a:rPr sz="900" b="0">
-                <a:solidFill>
-                  <a:srgbClr val="AAB8E8"/>
-                </a:solidFill>
-                <a:latin typeface="Arial"/>
-                <a:ea typeface="Arial"/>
-              </a:rPr>
-              <a:t>단일 사용자 128K 컨텍스트가 약 40GB · 사용자 수에 비례</a:t>
-            </a:r>
-          </a:p>
-        </p:txBody>
-      </p:sp>
-      <p:sp>
-        <p:nvSpPr>
-          <p:cNvPr id="104" name="Down Arrow 103"/>
-          <p:cNvSpPr/>
-          <p:nvPr/>
-        </p:nvSpPr>
-        <p:spPr>
-          <a:xfrm>
-            <a:off x="7434071" y="4901183"/>
-            <a:ext cx="146304" cy="128016"/>
-          </a:xfrm>
-          <a:prstGeom prst="downArrow">
-            <a:avLst/>
-          </a:prstGeom>
-          <a:solidFill>
-            <a:srgbClr val="3C5AC8"/>
-          </a:solidFill>
-          <a:ln>
-            <a:noFill/>
-          </a:ln>
-          <a:effectLst/>
-        </p:spPr>
-        <p:style>
-          <a:lnRef idx="1">
-            <a:schemeClr val="accent1"/>
-          </a:lnRef>
-          <a:fillRef idx="3">
-            <a:schemeClr val="accent1"/>
-          </a:fillRef>
-          <a:effectRef idx="2">
-            <a:schemeClr val="accent1"/>
-          </a:effectRef>
-          <a:fontRef idx="minor">
-            <a:schemeClr val="lt1"/>
-          </a:fontRef>
-        </p:style>
-        <p:txBody>
-          <a:bodyPr rtlCol="0" anchor="ctr"/>
-          <a:lstStyle/>
-          <a:p>
-            <a:pPr algn="ctr"/>
-          </a:p>
-        </p:txBody>
-      </p:sp>
-      <p:sp>
-        <p:nvSpPr>
-          <p:cNvPr id="105" name="TextBox 104"/>
-          <p:cNvSpPr txBox="1"/>
-          <p:nvPr/>
-        </p:nvSpPr>
-        <p:spPr>
-          <a:xfrm>
-            <a:off x="7653527" y="4892040"/>
-            <a:ext cx="4718304" cy="146304"/>
-          </a:xfrm>
-          <a:prstGeom prst="rect">
-            <a:avLst/>
-          </a:prstGeom>
-          <a:noFill/>
-        </p:spPr>
-        <p:txBody>
-          <a:bodyPr wrap="square" anchor="ctr" lIns="0" rIns="0" tIns="0" bIns="0">
-            <a:spAutoFit/>
-          </a:bodyPr>
-          <a:lstStyle/>
-          <a:p>
-            <a:pPr algn="l">
-              <a:lnSpc>
-                <a:spcPct val="112000"/>
-              </a:lnSpc>
-            </a:pPr>
-            <a:r>
-              <a:rPr sz="900" b="1">
-                <a:solidFill>
-                  <a:srgbClr val="3C5AC8"/>
-                </a:solidFill>
-                <a:latin typeface="Arial"/>
-                <a:ea typeface="Arial"/>
-              </a:rPr>
-              <a:t>넘친다</a:t>
-            </a:r>
-          </a:p>
-        </p:txBody>
-      </p:sp>
-      <p:sp>
-        <p:nvSpPr>
-          <p:cNvPr id="106" name="Rectangle 105"/>
-          <p:cNvSpPr/>
-          <p:nvPr/>
-        </p:nvSpPr>
-        <p:spPr>
-          <a:xfrm>
-            <a:off x="7251192" y="5038343"/>
-            <a:ext cx="5212080" cy="475488"/>
-          </a:xfrm>
-          <a:prstGeom prst="rect">
-            <a:avLst/>
-          </a:prstGeom>
-          <a:solidFill>
-            <a:srgbClr val="F4F6FC"/>
-          </a:solidFill>
-          <a:ln w="9525">
-            <a:solidFill>
-              <a:srgbClr val="D9D9D9"/>
-            </a:solidFill>
-          </a:ln>
-          <a:effectLst/>
-        </p:spPr>
-        <p:style>
-          <a:lnRef idx="1">
-            <a:schemeClr val="accent1"/>
-          </a:lnRef>
-          <a:fillRef idx="3">
-            <a:schemeClr val="accent1"/>
-          </a:fillRef>
-          <a:effectRef idx="2">
-            <a:schemeClr val="accent1"/>
-          </a:effectRef>
-          <a:fontRef idx="minor">
-            <a:schemeClr val="lt1"/>
-          </a:fontRef>
-        </p:style>
-        <p:txBody>
-          <a:bodyPr rtlCol="0" anchor="ctr"/>
-          <a:lstStyle/>
-          <a:p>
-            <a:pPr algn="ctr"/>
-          </a:p>
-        </p:txBody>
-      </p:sp>
-      <p:sp>
-        <p:nvSpPr>
-          <p:cNvPr id="107" name="Rectangle 106"/>
-          <p:cNvSpPr/>
-          <p:nvPr/>
-        </p:nvSpPr>
-        <p:spPr>
-          <a:xfrm>
-            <a:off x="7251192" y="5038343"/>
-            <a:ext cx="512064" cy="475488"/>
-          </a:xfrm>
-          <a:prstGeom prst="rect">
-            <a:avLst/>
-          </a:prstGeom>
-          <a:solidFill>
-            <a:srgbClr val="AAB8E8"/>
-          </a:solidFill>
-          <a:ln>
-            <a:noFill/>
-          </a:ln>
-          <a:effectLst/>
-        </p:spPr>
-        <p:style>
-          <a:lnRef idx="1">
-            <a:schemeClr val="accent1"/>
-          </a:lnRef>
-          <a:fillRef idx="3">
-            <a:schemeClr val="accent1"/>
-          </a:fillRef>
-          <a:effectRef idx="2">
-            <a:schemeClr val="accent1"/>
-          </a:effectRef>
-          <a:fontRef idx="minor">
-            <a:schemeClr val="lt1"/>
-          </a:fontRef>
-        </p:style>
-        <p:txBody>
-          <a:bodyPr rtlCol="0" anchor="ctr"/>
-          <a:lstStyle/>
-          <a:p>
-            <a:pPr algn="ctr"/>
-          </a:p>
-        </p:txBody>
-      </p:sp>
-      <p:sp>
-        <p:nvSpPr>
-          <p:cNvPr id="108" name="TextBox 107"/>
-          <p:cNvSpPr txBox="1"/>
-          <p:nvPr/>
-        </p:nvSpPr>
-        <p:spPr>
-          <a:xfrm>
-            <a:off x="7251192" y="5038343"/>
-            <a:ext cx="512064" cy="475488"/>
-          </a:xfrm>
-          <a:prstGeom prst="rect">
-            <a:avLst/>
-          </a:prstGeom>
-          <a:noFill/>
-        </p:spPr>
-        <p:txBody>
-          <a:bodyPr wrap="square" anchor="ctr" lIns="0" rIns="0" tIns="0" bIns="0">
-            <a:spAutoFit/>
-          </a:bodyPr>
-          <a:lstStyle/>
-          <a:p>
-            <a:pPr algn="ctr">
-              <a:lnSpc>
-                <a:spcPct val="112000"/>
-              </a:lnSpc>
-            </a:pPr>
-            <a:r>
-              <a:rPr sz="1125" b="1">
-                <a:solidFill>
-                  <a:srgbClr val="FFFFFF"/>
-                </a:solidFill>
-                <a:latin typeface="Arial"/>
-                <a:ea typeface="Arial"/>
-              </a:rPr>
-              <a:t>G2</a:t>
-            </a:r>
-          </a:p>
-        </p:txBody>
-      </p:sp>
-      <p:sp>
-        <p:nvSpPr>
-          <p:cNvPr id="109" name="TextBox 108"/>
-          <p:cNvSpPr txBox="1"/>
-          <p:nvPr/>
-        </p:nvSpPr>
-        <p:spPr>
-          <a:xfrm>
-            <a:off x="7891271" y="5084063"/>
-            <a:ext cx="1700784" cy="219456"/>
-          </a:xfrm>
-          <a:prstGeom prst="rect">
-            <a:avLst/>
-          </a:prstGeom>
-          <a:noFill/>
-        </p:spPr>
-        <p:txBody>
-          <a:bodyPr wrap="square" anchor="t" lIns="0" rIns="0" tIns="0" bIns="0">
-            <a:spAutoFit/>
-          </a:bodyPr>
-          <a:lstStyle/>
-          <a:p>
-            <a:pPr algn="l">
-              <a:lnSpc>
-                <a:spcPct val="112000"/>
-              </a:lnSpc>
-            </a:pPr>
-            <a:r>
-              <a:rPr sz="1200" b="1">
-                <a:solidFill>
-                  <a:srgbClr val="1A1A1A"/>
-                </a:solidFill>
-                <a:latin typeface="Arial"/>
-                <a:ea typeface="Arial"/>
-              </a:rPr>
-              <a:t>CPU DRAM</a:t>
-            </a:r>
-          </a:p>
-        </p:txBody>
-      </p:sp>
-      <p:sp>
-        <p:nvSpPr>
-          <p:cNvPr id="110" name="TextBox 109"/>
-          <p:cNvSpPr txBox="1"/>
-          <p:nvPr/>
-        </p:nvSpPr>
-        <p:spPr>
-          <a:xfrm>
-            <a:off x="7891271" y="5303519"/>
-            <a:ext cx="1700784" cy="173736"/>
-          </a:xfrm>
-          <a:prstGeom prst="rect">
-            <a:avLst/>
-          </a:prstGeom>
-          <a:noFill/>
-        </p:spPr>
-        <p:txBody>
-          <a:bodyPr wrap="square" anchor="t" lIns="0" rIns="0" tIns="0" bIns="0">
-            <a:spAutoFit/>
-          </a:bodyPr>
-          <a:lstStyle/>
-          <a:p>
-            <a:pPr algn="l">
-              <a:lnSpc>
-                <a:spcPct val="112000"/>
-              </a:lnSpc>
-            </a:pPr>
-            <a:r>
-              <a:rPr sz="850" b="0">
-                <a:solidFill>
-                  <a:srgbClr val="8A8A8A"/>
-                </a:solidFill>
-                <a:latin typeface="Arial"/>
-                <a:ea typeface="Arial"/>
-              </a:rPr>
-              <a:t>첫 확장</a:t>
-            </a:r>
-          </a:p>
-        </p:txBody>
-      </p:sp>
-      <p:sp>
-        <p:nvSpPr>
-          <p:cNvPr id="111" name="TextBox 110"/>
-          <p:cNvSpPr txBox="1"/>
-          <p:nvPr/>
-        </p:nvSpPr>
-        <p:spPr>
-          <a:xfrm>
-            <a:off x="9646920" y="5056631"/>
-            <a:ext cx="2688336" cy="438912"/>
-          </a:xfrm>
-          <a:prstGeom prst="rect">
-            <a:avLst/>
-          </a:prstGeom>
-          <a:noFill/>
-        </p:spPr>
-        <p:txBody>
-          <a:bodyPr wrap="square" anchor="ctr" lIns="0" rIns="0" tIns="0" bIns="0">
-            <a:spAutoFit/>
-          </a:bodyPr>
-          <a:lstStyle/>
-          <a:p>
-            <a:pPr algn="l">
-              <a:lnSpc>
-                <a:spcPct val="104000"/>
-              </a:lnSpc>
-            </a:pPr>
-            <a:r>
-              <a:rPr sz="900" b="0">
-                <a:solidFill>
                   <a:srgbClr val="555555"/>
                 </a:solidFill>
                 <a:latin typeface="Arial"/>
                 <a:ea typeface="Arial"/>
               </a:rPr>
-              <a:t>Kioxia — DRAM만으로는 더 못 따라간다</a:t>
-            </a:r>
-          </a:p>
-        </p:txBody>
-      </p:sp>
-      <p:sp>
-        <p:nvSpPr>
-          <p:cNvPr id="112" name="Down Arrow 111"/>
-          <p:cNvSpPr/>
-          <p:nvPr/>
-        </p:nvSpPr>
-        <p:spPr>
-          <a:xfrm>
-            <a:off x="7434071" y="5522975"/>
-            <a:ext cx="146304" cy="128016"/>
-          </a:xfrm>
-          <a:prstGeom prst="downArrow">
-            <a:avLst/>
-          </a:prstGeom>
-          <a:solidFill>
-            <a:srgbClr val="3C5AC8"/>
-          </a:solidFill>
-          <a:ln>
-            <a:noFill/>
-          </a:ln>
-          <a:effectLst/>
-        </p:spPr>
-        <p:style>
-          <a:lnRef idx="1">
-            <a:schemeClr val="accent1"/>
-          </a:lnRef>
-          <a:fillRef idx="3">
-            <a:schemeClr val="accent1"/>
-          </a:fillRef>
-          <a:effectRef idx="2">
-            <a:schemeClr val="accent1"/>
-          </a:effectRef>
-          <a:fontRef idx="minor">
-            <a:schemeClr val="lt1"/>
-          </a:fontRef>
-        </p:style>
-        <p:txBody>
-          <a:bodyPr rtlCol="0" anchor="ctr"/>
-          <a:lstStyle/>
-          <a:p>
-            <a:pPr algn="ctr"/>
-          </a:p>
-        </p:txBody>
-      </p:sp>
-      <p:sp>
-        <p:nvSpPr>
-          <p:cNvPr id="113" name="TextBox 112"/>
-          <p:cNvSpPr txBox="1"/>
-          <p:nvPr/>
-        </p:nvSpPr>
-        <p:spPr>
-          <a:xfrm>
-            <a:off x="7653527" y="5513831"/>
-            <a:ext cx="4718304" cy="146304"/>
-          </a:xfrm>
-          <a:prstGeom prst="rect">
-            <a:avLst/>
-          </a:prstGeom>
-          <a:noFill/>
-        </p:spPr>
-        <p:txBody>
-          <a:bodyPr wrap="square" anchor="ctr" lIns="0" rIns="0" tIns="0" bIns="0">
-            <a:spAutoFit/>
-          </a:bodyPr>
-          <a:lstStyle/>
-          <a:p>
-            <a:pPr algn="l">
-              <a:lnSpc>
-                <a:spcPct val="112000"/>
-              </a:lnSpc>
-            </a:pPr>
-            <a:r>
-              <a:rPr sz="900" b="1">
-                <a:solidFill>
-                  <a:srgbClr val="3C5AC8"/>
-                </a:solidFill>
-                <a:latin typeface="Arial"/>
-                <a:ea typeface="Arial"/>
-              </a:rPr>
-              <a:t>다시 넘친다</a:t>
-            </a:r>
-          </a:p>
-        </p:txBody>
-      </p:sp>
-      <p:sp>
-        <p:nvSpPr>
-          <p:cNvPr id="114" name="Rectangle 113"/>
-          <p:cNvSpPr/>
-          <p:nvPr/>
-        </p:nvSpPr>
-        <p:spPr>
-          <a:xfrm>
-            <a:off x="7251192" y="5660136"/>
-            <a:ext cx="5212080" cy="475488"/>
-          </a:xfrm>
-          <a:prstGeom prst="rect">
-            <a:avLst/>
-          </a:prstGeom>
-          <a:solidFill>
-            <a:srgbClr val="FFFFFF"/>
-          </a:solidFill>
-          <a:ln w="19050">
-            <a:solidFill>
-              <a:srgbClr val="1428A0"/>
-            </a:solidFill>
-          </a:ln>
-          <a:effectLst/>
-        </p:spPr>
-        <p:style>
-          <a:lnRef idx="1">
-            <a:schemeClr val="accent1"/>
-          </a:lnRef>
-          <a:fillRef idx="3">
-            <a:schemeClr val="accent1"/>
-          </a:fillRef>
-          <a:effectRef idx="2">
-            <a:schemeClr val="accent1"/>
-          </a:effectRef>
-          <a:fontRef idx="minor">
-            <a:schemeClr val="lt1"/>
-          </a:fontRef>
-        </p:style>
-        <p:txBody>
-          <a:bodyPr rtlCol="0" anchor="ctr"/>
-          <a:lstStyle/>
-          <a:p>
-            <a:pPr algn="ctr"/>
-          </a:p>
-        </p:txBody>
-      </p:sp>
-      <p:sp>
-        <p:nvSpPr>
-          <p:cNvPr id="115" name="Rectangle 114"/>
-          <p:cNvSpPr/>
-          <p:nvPr/>
-        </p:nvSpPr>
-        <p:spPr>
-          <a:xfrm>
-            <a:off x="7251192" y="5660136"/>
-            <a:ext cx="512064" cy="475488"/>
-          </a:xfrm>
-          <a:prstGeom prst="rect">
-            <a:avLst/>
-          </a:prstGeom>
-          <a:solidFill>
-            <a:srgbClr val="1428A0"/>
-          </a:solidFill>
-          <a:ln>
-            <a:noFill/>
-          </a:ln>
-          <a:effectLst/>
-        </p:spPr>
-        <p:style>
-          <a:lnRef idx="1">
-            <a:schemeClr val="accent1"/>
-          </a:lnRef>
-          <a:fillRef idx="3">
-            <a:schemeClr val="accent1"/>
-          </a:fillRef>
-          <a:effectRef idx="2">
-            <a:schemeClr val="accent1"/>
-          </a:effectRef>
-          <a:fontRef idx="minor">
-            <a:schemeClr val="lt1"/>
-          </a:fontRef>
-        </p:style>
-        <p:txBody>
-          <a:bodyPr rtlCol="0" anchor="ctr"/>
-          <a:lstStyle/>
-          <a:p>
-            <a:pPr algn="ctr"/>
-          </a:p>
-        </p:txBody>
-      </p:sp>
-      <p:sp>
-        <p:nvSpPr>
-          <p:cNvPr id="116" name="TextBox 115"/>
-          <p:cNvSpPr txBox="1"/>
-          <p:nvPr/>
-        </p:nvSpPr>
-        <p:spPr>
-          <a:xfrm>
-            <a:off x="7251192" y="5660136"/>
-            <a:ext cx="512064" cy="475488"/>
-          </a:xfrm>
-          <a:prstGeom prst="rect">
-            <a:avLst/>
-          </a:prstGeom>
-          <a:noFill/>
-        </p:spPr>
-        <p:txBody>
-          <a:bodyPr wrap="square" anchor="ctr" lIns="0" rIns="0" tIns="0" bIns="0">
-            <a:spAutoFit/>
-          </a:bodyPr>
-          <a:lstStyle/>
-          <a:p>
-            <a:pPr algn="ctr">
-              <a:lnSpc>
-                <a:spcPct val="112000"/>
-              </a:lnSpc>
-            </a:pPr>
-            <a:r>
-              <a:rPr sz="1125" b="1">
-                <a:solidFill>
-                  <a:srgbClr val="FFFFFF"/>
-                </a:solidFill>
-                <a:latin typeface="Arial"/>
-                <a:ea typeface="Arial"/>
-              </a:rPr>
-              <a:t>G3</a:t>
-            </a:r>
-          </a:p>
-        </p:txBody>
-      </p:sp>
-      <p:sp>
-        <p:nvSpPr>
-          <p:cNvPr id="117" name="TextBox 116"/>
-          <p:cNvSpPr txBox="1"/>
-          <p:nvPr/>
-        </p:nvSpPr>
-        <p:spPr>
-          <a:xfrm>
-            <a:off x="7891271" y="5705855"/>
-            <a:ext cx="1700784" cy="219456"/>
-          </a:xfrm>
-          <a:prstGeom prst="rect">
-            <a:avLst/>
-          </a:prstGeom>
-          <a:noFill/>
-        </p:spPr>
-        <p:txBody>
-          <a:bodyPr wrap="square" anchor="t" lIns="0" rIns="0" tIns="0" bIns="0">
-            <a:spAutoFit/>
-          </a:bodyPr>
-          <a:lstStyle/>
-          <a:p>
-            <a:pPr algn="l">
-              <a:lnSpc>
-                <a:spcPct val="112000"/>
-              </a:lnSpc>
-            </a:pPr>
-            <a:r>
-              <a:rPr sz="1200" b="1">
-                <a:solidFill>
-                  <a:srgbClr val="1428A0"/>
-                </a:solidFill>
-                <a:latin typeface="Arial"/>
-                <a:ea typeface="Arial"/>
-              </a:rPr>
-              <a:t>NVMe SSD</a:t>
-            </a:r>
-          </a:p>
-        </p:txBody>
-      </p:sp>
-      <p:sp>
-        <p:nvSpPr>
-          <p:cNvPr id="118" name="TextBox 117"/>
-          <p:cNvSpPr txBox="1"/>
-          <p:nvPr/>
-        </p:nvSpPr>
-        <p:spPr>
-          <a:xfrm>
-            <a:off x="7891271" y="5925312"/>
-            <a:ext cx="1700784" cy="173736"/>
-          </a:xfrm>
-          <a:prstGeom prst="rect">
-            <a:avLst/>
-          </a:prstGeom>
-          <a:noFill/>
-        </p:spPr>
-        <p:txBody>
-          <a:bodyPr wrap="square" anchor="t" lIns="0" rIns="0" tIns="0" bIns="0">
-            <a:spAutoFit/>
-          </a:bodyPr>
-          <a:lstStyle/>
-          <a:p>
-            <a:pPr algn="l">
-              <a:lnSpc>
-                <a:spcPct val="112000"/>
-              </a:lnSpc>
-            </a:pPr>
-            <a:r>
-              <a:rPr sz="850" b="0">
-                <a:solidFill>
-                  <a:srgbClr val="8A8A8A"/>
-                </a:solidFill>
-                <a:latin typeface="Arial"/>
-                <a:ea typeface="Arial"/>
-              </a:rPr>
-              <a:t>새로 얹힌 계층</a:t>
-            </a:r>
-          </a:p>
-        </p:txBody>
-      </p:sp>
-      <p:sp>
-        <p:nvSpPr>
-          <p:cNvPr id="119" name="TextBox 118"/>
-          <p:cNvSpPr txBox="1"/>
-          <p:nvPr/>
-        </p:nvSpPr>
-        <p:spPr>
-          <a:xfrm>
-            <a:off x="9646920" y="5678423"/>
-            <a:ext cx="2688336" cy="438912"/>
-          </a:xfrm>
-          <a:prstGeom prst="rect">
-            <a:avLst/>
-          </a:prstGeom>
-          <a:noFill/>
-        </p:spPr>
-        <p:txBody>
-          <a:bodyPr wrap="square" anchor="ctr" lIns="0" rIns="0" tIns="0" bIns="0">
-            <a:spAutoFit/>
-          </a:bodyPr>
-          <a:lstStyle/>
-          <a:p>
-            <a:pPr algn="l">
-              <a:lnSpc>
-                <a:spcPct val="104000"/>
-              </a:lnSpc>
-            </a:pPr>
-            <a:r>
-              <a:rPr sz="900" b="0">
-                <a:solidFill>
-                  <a:srgbClr val="555555"/>
-                </a:solidFill>
-                <a:latin typeface="Arial"/>
-                <a:ea typeface="Arial"/>
-              </a:rPr>
-              <a:t>쓰기가 몰리는 첫 대용량 계층</a:t>
-            </a:r>
-          </a:p>
-        </p:txBody>
-      </p:sp>
-      <p:sp>
-        <p:nvSpPr>
-          <p:cNvPr id="120" name="Rectangle 119"/>
-          <p:cNvSpPr/>
-          <p:nvPr/>
-        </p:nvSpPr>
-        <p:spPr>
-          <a:xfrm>
-            <a:off x="7251192" y="6181343"/>
-            <a:ext cx="5212080" cy="219456"/>
-          </a:xfrm>
-          <a:prstGeom prst="rect">
-            <a:avLst/>
-          </a:prstGeom>
-          <a:solidFill>
-            <a:srgbClr val="F4F6FC"/>
-          </a:solidFill>
-          <a:ln>
-            <a:noFill/>
-          </a:ln>
-          <a:effectLst/>
-        </p:spPr>
-        <p:style>
-          <a:lnRef idx="1">
-            <a:schemeClr val="accent1"/>
-          </a:lnRef>
-          <a:fillRef idx="3">
-            <a:schemeClr val="accent1"/>
-          </a:fillRef>
-          <a:effectRef idx="2">
-            <a:schemeClr val="accent1"/>
-          </a:effectRef>
-          <a:fontRef idx="minor">
-            <a:schemeClr val="lt1"/>
-          </a:fontRef>
-        </p:style>
-        <p:txBody>
-          <a:bodyPr rtlCol="0" anchor="ctr"/>
-          <a:lstStyle/>
-          <a:p>
-            <a:pPr algn="ctr"/>
-          </a:p>
-        </p:txBody>
-      </p:sp>
-      <p:sp>
-        <p:nvSpPr>
-          <p:cNvPr id="121" name="TextBox 120"/>
-          <p:cNvSpPr txBox="1"/>
-          <p:nvPr/>
-        </p:nvSpPr>
-        <p:spPr>
-          <a:xfrm>
-            <a:off x="7342631" y="6181343"/>
-            <a:ext cx="5029200" cy="219456"/>
-          </a:xfrm>
-          <a:prstGeom prst="rect">
-            <a:avLst/>
-          </a:prstGeom>
-          <a:noFill/>
-        </p:spPr>
-        <p:txBody>
-          <a:bodyPr wrap="square" anchor="ctr" lIns="0" rIns="0" tIns="0" bIns="0">
-            <a:spAutoFit/>
-          </a:bodyPr>
-          <a:lstStyle/>
-          <a:p>
-            <a:pPr algn="l">
-              <a:lnSpc>
-                <a:spcPct val="112000"/>
-              </a:lnSpc>
-            </a:pPr>
-            <a:r>
-              <a:rPr sz="900" b="1">
-                <a:solidFill>
-                  <a:srgbClr val="1428A0"/>
-                </a:solidFill>
-                <a:latin typeface="Arial"/>
-                <a:ea typeface="Arial"/>
-              </a:rPr>
-              <a:t>대체가 아니라 증설입니다  </a:t>
-            </a:r>
-            <a:r>
-              <a:rPr sz="900" b="0">
-                <a:solidFill>
-                  <a:srgbClr val="555555"/>
-                </a:solidFill>
-                <a:latin typeface="Arial"/>
-                <a:ea typeface="Arial"/>
-              </a:rPr>
-              <a:t>같은 기간 GPU당 HBM은 192 → 288GB, 2027년 384GB로 커집니다</a:t>
-            </a:r>
-          </a:p>
-        </p:txBody>
-      </p:sp>
-      <p:sp>
-        <p:nvSpPr>
-          <p:cNvPr id="122" name="Rectangle 121"/>
-          <p:cNvSpPr/>
-          <p:nvPr/>
-        </p:nvSpPr>
-        <p:spPr>
-          <a:xfrm>
-            <a:off x="7251192" y="6492239"/>
-            <a:ext cx="5212080" cy="950976"/>
-          </a:xfrm>
-          <a:prstGeom prst="rect">
-            <a:avLst/>
-          </a:prstGeom>
-          <a:solidFill>
-            <a:srgbClr val="FFFFFF"/>
-          </a:solidFill>
-          <a:ln w="12700">
-            <a:solidFill>
-              <a:srgbClr val="AAB8E8"/>
-            </a:solidFill>
-          </a:ln>
-          <a:effectLst/>
-        </p:spPr>
-        <p:style>
-          <a:lnRef idx="1">
-            <a:schemeClr val="accent1"/>
-          </a:lnRef>
-          <a:fillRef idx="3">
-            <a:schemeClr val="accent1"/>
-          </a:fillRef>
-          <a:effectRef idx="2">
-            <a:schemeClr val="accent1"/>
-          </a:effectRef>
-          <a:fontRef idx="minor">
-            <a:schemeClr val="lt1"/>
-          </a:fontRef>
-        </p:style>
-        <p:txBody>
-          <a:bodyPr rtlCol="0" anchor="ctr"/>
-          <a:lstStyle/>
-          <a:p>
-            <a:pPr algn="ctr"/>
-          </a:p>
-        </p:txBody>
-      </p:sp>
-      <p:sp>
-        <p:nvSpPr>
-          <p:cNvPr id="123" name="TextBox 122"/>
-          <p:cNvSpPr txBox="1"/>
-          <p:nvPr/>
-        </p:nvSpPr>
-        <p:spPr>
-          <a:xfrm>
-            <a:off x="7397496" y="6547103"/>
-            <a:ext cx="4919472" cy="219456"/>
-          </a:xfrm>
-          <a:prstGeom prst="rect">
-            <a:avLst/>
-          </a:prstGeom>
-          <a:noFill/>
-        </p:spPr>
-        <p:txBody>
-          <a:bodyPr wrap="square" anchor="t" lIns="0" rIns="0" tIns="0" bIns="0">
-            <a:spAutoFit/>
-          </a:bodyPr>
-          <a:lstStyle/>
-          <a:p>
-            <a:pPr algn="l">
-              <a:lnSpc>
-                <a:spcPct val="112000"/>
-              </a:lnSpc>
-            </a:pPr>
-            <a:r>
-              <a:rPr sz="1125" b="1">
-                <a:solidFill>
-                  <a:srgbClr val="1428A0"/>
-                </a:solidFill>
-                <a:latin typeface="Arial"/>
-                <a:ea typeface="Arial"/>
-              </a:rPr>
-              <a:t>「KV 캐시를 담을 HBM 용량이 한계에 도달했다」</a:t>
-            </a:r>
-          </a:p>
-        </p:txBody>
-      </p:sp>
-      <p:sp>
-        <p:nvSpPr>
-          <p:cNvPr id="124" name="TextBox 123"/>
-          <p:cNvSpPr txBox="1"/>
-          <p:nvPr/>
-        </p:nvSpPr>
-        <p:spPr>
-          <a:xfrm>
-            <a:off x="7397496" y="6757415"/>
-            <a:ext cx="4919472" cy="182880"/>
-          </a:xfrm>
-          <a:prstGeom prst="rect">
-            <a:avLst/>
-          </a:prstGeom>
-          <a:noFill/>
-        </p:spPr>
-        <p:txBody>
-          <a:bodyPr wrap="square" anchor="t" lIns="0" rIns="0" tIns="0" bIns="0">
-            <a:spAutoFit/>
-          </a:bodyPr>
-          <a:lstStyle/>
-          <a:p>
-            <a:pPr algn="l">
-              <a:lnSpc>
-                <a:spcPct val="112000"/>
-              </a:lnSpc>
-            </a:pPr>
-            <a:r>
-              <a:rPr sz="875" b="0">
-                <a:solidFill>
-                  <a:srgbClr val="555555"/>
-                </a:solidFill>
-                <a:latin typeface="Arial"/>
-                <a:ea typeface="Arial"/>
-              </a:rPr>
-              <a:t>SK하이닉스 2026-07-29 실적 발표 · 같은 자리에서 GPU 인근 NAND 개발 공표</a:t>
-            </a:r>
-          </a:p>
-        </p:txBody>
-      </p:sp>
-      <p:sp>
-        <p:nvSpPr>
-          <p:cNvPr id="125" name="Rectangle 124"/>
-          <p:cNvSpPr/>
-          <p:nvPr/>
-        </p:nvSpPr>
-        <p:spPr>
-          <a:xfrm>
-            <a:off x="7397496" y="6967727"/>
-            <a:ext cx="4919472" cy="10972"/>
-          </a:xfrm>
-          <a:prstGeom prst="rect">
-            <a:avLst/>
-          </a:prstGeom>
-          <a:solidFill>
-            <a:srgbClr val="D9D9D9"/>
-          </a:solidFill>
-          <a:ln>
-            <a:noFill/>
-          </a:ln>
-          <a:effectLst/>
-        </p:spPr>
-        <p:style>
-          <a:lnRef idx="1">
-            <a:schemeClr val="accent1"/>
-          </a:lnRef>
-          <a:fillRef idx="3">
-            <a:schemeClr val="accent1"/>
-          </a:fillRef>
-          <a:effectRef idx="2">
-            <a:schemeClr val="accent1"/>
-          </a:effectRef>
-          <a:fontRef idx="minor">
-            <a:schemeClr val="lt1"/>
-          </a:fontRef>
-        </p:style>
-        <p:txBody>
-          <a:bodyPr rtlCol="0" anchor="ctr"/>
-          <a:lstStyle/>
-          <a:p>
-            <a:pPr algn="ctr"/>
-          </a:p>
-        </p:txBody>
-      </p:sp>
-      <p:sp>
-        <p:nvSpPr>
-          <p:cNvPr id="126" name="TextBox 125"/>
-          <p:cNvSpPr txBox="1"/>
-          <p:nvPr/>
-        </p:nvSpPr>
-        <p:spPr>
-          <a:xfrm>
-            <a:off x="7397496" y="7022591"/>
-            <a:ext cx="2395728" cy="155448"/>
-          </a:xfrm>
-          <a:prstGeom prst="rect">
-            <a:avLst/>
-          </a:prstGeom>
-          <a:noFill/>
-        </p:spPr>
-        <p:txBody>
-          <a:bodyPr wrap="square" anchor="t" lIns="0" rIns="0" tIns="0" bIns="0">
-            <a:spAutoFit/>
-          </a:bodyPr>
-          <a:lstStyle/>
-          <a:p>
-            <a:pPr algn="l">
-              <a:lnSpc>
-                <a:spcPct val="112000"/>
-              </a:lnSpc>
-            </a:pPr>
-            <a:r>
-              <a:rPr sz="850" b="0">
-                <a:solidFill>
-                  <a:srgbClr val="8A8A8A"/>
-                </a:solidFill>
-                <a:latin typeface="Arial"/>
-                <a:ea typeface="Arial"/>
-              </a:rPr>
-              <a:t>오프로드는 메인라인 코드</a:t>
-            </a:r>
-          </a:p>
-        </p:txBody>
-      </p:sp>
-      <p:sp>
-        <p:nvSpPr>
-          <p:cNvPr id="127" name="TextBox 126"/>
-          <p:cNvSpPr txBox="1"/>
-          <p:nvPr/>
-        </p:nvSpPr>
-        <p:spPr>
-          <a:xfrm>
-            <a:off x="7397496" y="7168895"/>
-            <a:ext cx="2395728" cy="219456"/>
-          </a:xfrm>
-          <a:prstGeom prst="rect">
-            <a:avLst/>
-          </a:prstGeom>
-          <a:noFill/>
-        </p:spPr>
-        <p:txBody>
-          <a:bodyPr wrap="square" anchor="t" lIns="0" rIns="0" tIns="0" bIns="0">
-            <a:spAutoFit/>
-          </a:bodyPr>
-          <a:lstStyle/>
-          <a:p>
-            <a:pPr algn="l">
-              <a:lnSpc>
-                <a:spcPct val="100000"/>
-              </a:lnSpc>
-            </a:pPr>
-            <a:r>
-              <a:rPr sz="950" b="1">
-                <a:solidFill>
-                  <a:srgbClr val="1428A0"/>
-                </a:solidFill>
-                <a:latin typeface="Arial"/>
-                <a:ea typeface="Arial"/>
-              </a:rPr>
-              <a:t>LMCache 2024-08 → vLLM 2026-05</a:t>
-            </a:r>
-          </a:p>
-        </p:txBody>
-      </p:sp>
-      <p:sp>
-        <p:nvSpPr>
-          <p:cNvPr id="128" name="TextBox 127"/>
-          <p:cNvSpPr txBox="1"/>
-          <p:nvPr/>
-        </p:nvSpPr>
-        <p:spPr>
-          <a:xfrm>
-            <a:off x="9921240" y="7022591"/>
-            <a:ext cx="2395728" cy="155448"/>
-          </a:xfrm>
-          <a:prstGeom prst="rect">
-            <a:avLst/>
-          </a:prstGeom>
-          <a:noFill/>
-        </p:spPr>
-        <p:txBody>
-          <a:bodyPr wrap="square" anchor="t" lIns="0" rIns="0" tIns="0" bIns="0">
-            <a:spAutoFit/>
-          </a:bodyPr>
-          <a:lstStyle/>
-          <a:p>
-            <a:pPr algn="l">
-              <a:lnSpc>
-                <a:spcPct val="112000"/>
-              </a:lnSpc>
-            </a:pPr>
-            <a:r>
-              <a:rPr sz="850" b="0">
-                <a:solidFill>
-                  <a:srgbClr val="8A8A8A"/>
-                </a:solidFill>
-                <a:latin typeface="Arial"/>
-                <a:ea typeface="Arial"/>
-              </a:rPr>
-              <a:t>NAND 비트 중 eSSD 비중</a:t>
-            </a:r>
-          </a:p>
-        </p:txBody>
-      </p:sp>
-      <p:sp>
-        <p:nvSpPr>
-          <p:cNvPr id="129" name="TextBox 128"/>
-          <p:cNvSpPr txBox="1"/>
-          <p:nvPr/>
-        </p:nvSpPr>
-        <p:spPr>
-          <a:xfrm>
-            <a:off x="9921240" y="7168895"/>
-            <a:ext cx="2395728" cy="219456"/>
-          </a:xfrm>
-          <a:prstGeom prst="rect">
-            <a:avLst/>
-          </a:prstGeom>
-          <a:noFill/>
-        </p:spPr>
-        <p:txBody>
-          <a:bodyPr wrap="square" anchor="t" lIns="0" rIns="0" tIns="0" bIns="0">
-            <a:spAutoFit/>
-          </a:bodyPr>
-          <a:lstStyle/>
-          <a:p>
-            <a:pPr algn="l">
-              <a:lnSpc>
-                <a:spcPct val="100000"/>
-              </a:lnSpc>
-            </a:pPr>
-            <a:r>
-              <a:rPr sz="950" b="1">
-                <a:solidFill>
-                  <a:srgbClr val="1428A0"/>
-                </a:solidFill>
-                <a:latin typeface="Arial"/>
-                <a:ea typeface="Arial"/>
-              </a:rPr>
-              <a:t>1년 만에 26% → 48%</a:t>
-            </a:r>
-          </a:p>
-        </p:txBody>
-      </p:sp>
-      <p:sp>
-        <p:nvSpPr>
-          <p:cNvPr id="130" name="Rectangle 129"/>
-          <p:cNvSpPr/>
-          <p:nvPr/>
-        </p:nvSpPr>
-        <p:spPr>
-          <a:xfrm>
-            <a:off x="7251192" y="7552943"/>
-            <a:ext cx="5212080" cy="859536"/>
+              <a:t>높다</a:t>
+            </a:r>
+          </a:p>
+        </p:txBody>
+      </p:sp>
+      <p:sp>
+        <p:nvSpPr>
+          <p:cNvPr id="137" name="Rectangle 136"/>
+          <p:cNvSpPr/>
+          <p:nvPr/>
+        </p:nvSpPr>
+        <p:spPr>
+          <a:xfrm>
+            <a:off x="15325344" y="3547872"/>
+            <a:ext cx="1965960" cy="1847088"/>
           </a:xfrm>
           <a:prstGeom prst="rect">
             <a:avLst/>
@@ -9649,100 +9784,20 @@
       </p:sp>
       <p:sp>
         <p:nvSpPr>
-          <p:cNvPr id="131" name="TextBox 130"/>
-          <p:cNvSpPr txBox="1"/>
-          <p:nvPr/>
-        </p:nvSpPr>
-        <p:spPr>
-          <a:xfrm>
-            <a:off x="7415783" y="7616951"/>
-            <a:ext cx="3328416" cy="246888"/>
-          </a:xfrm>
-          <a:prstGeom prst="rect">
-            <a:avLst/>
-          </a:prstGeom>
-          <a:noFill/>
-        </p:spPr>
-        <p:txBody>
-          <a:bodyPr wrap="square" anchor="t" lIns="0" rIns="0" tIns="0" bIns="0">
-            <a:spAutoFit/>
-          </a:bodyPr>
-          <a:lstStyle/>
-          <a:p>
-            <a:pPr algn="l">
-              <a:lnSpc>
-                <a:spcPct val="112000"/>
-              </a:lnSpc>
-            </a:pPr>
-            <a:r>
-              <a:rPr sz="1275" b="1">
-                <a:solidFill>
-                  <a:srgbClr val="1428A0"/>
-                </a:solidFill>
-                <a:latin typeface="Arial"/>
-                <a:ea typeface="Arial"/>
-              </a:rPr>
-              <a:t>그래서 SSD에 오는 요구는 내구성입니다</a:t>
-            </a:r>
-          </a:p>
-        </p:txBody>
-      </p:sp>
-      <p:sp>
-        <p:nvSpPr>
-          <p:cNvPr id="132" name="TextBox 131"/>
-          <p:cNvSpPr txBox="1"/>
-          <p:nvPr/>
-        </p:nvSpPr>
-        <p:spPr>
-          <a:xfrm>
-            <a:off x="7415783" y="7882127"/>
-            <a:ext cx="3328416" cy="347472"/>
-          </a:xfrm>
-          <a:prstGeom prst="rect">
-            <a:avLst/>
-          </a:prstGeom>
-          <a:noFill/>
-        </p:spPr>
-        <p:txBody>
-          <a:bodyPr wrap="square" anchor="t" lIns="0" rIns="0" tIns="0" bIns="0">
-            <a:spAutoFit/>
-          </a:bodyPr>
-          <a:lstStyle/>
-          <a:p>
-            <a:pPr algn="l">
-              <a:lnSpc>
-                <a:spcPct val="104000"/>
-              </a:lnSpc>
-            </a:pPr>
-            <a:r>
-              <a:rPr sz="900" b="0">
-                <a:solidFill>
-                  <a:srgbClr val="555555"/>
-                </a:solidFill>
-                <a:latin typeface="Arial"/>
-                <a:ea typeface="Arial"/>
-              </a:rPr>
-              <a:t>추론 수요 CAGR 86% · 삼성은 V-NAND 캐파의 약 60%를 CMX 대응에 배정했습니다</a:t>
-            </a:r>
-          </a:p>
-        </p:txBody>
-      </p:sp>
-      <p:sp>
-        <p:nvSpPr>
-          <p:cNvPr id="133" name="Rectangle 132"/>
-          <p:cNvSpPr/>
-          <p:nvPr/>
-        </p:nvSpPr>
-        <p:spPr>
-          <a:xfrm>
-            <a:off x="10817351" y="7662671"/>
-            <a:ext cx="1517904" cy="640080"/>
-          </a:xfrm>
-          <a:prstGeom prst="rect">
-            <a:avLst/>
-          </a:prstGeom>
-          <a:solidFill>
-            <a:srgbClr val="F4F6FC"/>
+          <p:cNvPr id="138" name="Rectangle 137"/>
+          <p:cNvSpPr/>
+          <p:nvPr/>
+        </p:nvSpPr>
+        <p:spPr>
+          <a:xfrm>
+            <a:off x="15325344" y="3547872"/>
+            <a:ext cx="1965960" cy="45720"/>
+          </a:xfrm>
+          <a:prstGeom prst="rect">
+            <a:avLst/>
+          </a:prstGeom>
+          <a:solidFill>
+            <a:srgbClr val="1428A0"/>
           </a:solidFill>
           <a:ln>
             <a:noFill/>
@@ -9773,29 +9828,69 @@
       </p:sp>
       <p:sp>
         <p:nvSpPr>
-          <p:cNvPr id="134" name="TextBox 133"/>
-          <p:cNvSpPr txBox="1"/>
-          <p:nvPr/>
-        </p:nvSpPr>
-        <p:spPr>
-          <a:xfrm>
-            <a:off x="10817351" y="7662671"/>
-            <a:ext cx="1517904" cy="640080"/>
-          </a:xfrm>
-          <a:prstGeom prst="rect">
-            <a:avLst/>
-          </a:prstGeom>
-          <a:noFill/>
-        </p:spPr>
-        <p:txBody>
-          <a:bodyPr wrap="square" anchor="ctr" lIns="0" rIns="0" tIns="0" bIns="0">
-            <a:spAutoFit/>
-          </a:bodyPr>
-          <a:lstStyle/>
-          <a:p>
-            <a:pPr algn="ctr">
-              <a:lnSpc>
-                <a:spcPct val="100000"/>
+          <p:cNvPr id="139" name="TextBox 138"/>
+          <p:cNvSpPr txBox="1"/>
+          <p:nvPr/>
+        </p:nvSpPr>
+        <p:spPr>
+          <a:xfrm>
+            <a:off x="15453360" y="3639312"/>
+            <a:ext cx="1709928" cy="256032"/>
+          </a:xfrm>
+          <a:prstGeom prst="rect">
+            <a:avLst/>
+          </a:prstGeom>
+          <a:noFill/>
+        </p:spPr>
+        <p:txBody>
+          <a:bodyPr wrap="square" anchor="t" lIns="0" rIns="0" tIns="0" bIns="0">
+            <a:spAutoFit/>
+          </a:bodyPr>
+          <a:lstStyle/>
+          <a:p>
+            <a:pPr algn="l">
+              <a:lnSpc>
+                <a:spcPct val="112000"/>
+              </a:lnSpc>
+            </a:pPr>
+            <a:r>
+              <a:rPr sz="1500" b="1">
+                <a:solidFill>
+                  <a:srgbClr val="1428A0"/>
+                </a:solidFill>
+                <a:latin typeface="Arial"/>
+                <a:ea typeface="Arial"/>
+              </a:rPr>
+              <a:t>QLC</a:t>
+            </a:r>
+          </a:p>
+        </p:txBody>
+      </p:sp>
+      <p:sp>
+        <p:nvSpPr>
+          <p:cNvPr id="140" name="TextBox 139"/>
+          <p:cNvSpPr txBox="1"/>
+          <p:nvPr/>
+        </p:nvSpPr>
+        <p:spPr>
+          <a:xfrm>
+            <a:off x="15453360" y="3895344"/>
+            <a:ext cx="1709928" cy="201168"/>
+          </a:xfrm>
+          <a:prstGeom prst="rect">
+            <a:avLst/>
+          </a:prstGeom>
+          <a:noFill/>
+        </p:spPr>
+        <p:txBody>
+          <a:bodyPr wrap="square" anchor="t" lIns="0" rIns="0" tIns="0" bIns="0">
+            <a:spAutoFit/>
+          </a:bodyPr>
+          <a:lstStyle/>
+          <a:p>
+            <a:pPr algn="l">
+              <a:lnSpc>
+                <a:spcPct val="112000"/>
               </a:lnSpc>
             </a:pPr>
             <a:r>
@@ -9806,84 +9901,301 @@
                 <a:latin typeface="Arial"/>
                 <a:ea typeface="Arial"/>
               </a:rPr>
-              <a:t>요구 DWPD</a:t>
-            </a:r>
-          </a:p>
-          <a:p>
-            <a:pPr algn="ctr">
-              <a:lnSpc>
-                <a:spcPct val="100000"/>
-              </a:lnSpc>
-            </a:pPr>
-            <a:r>
-              <a:rPr sz="2100" b="1">
+              <a:t>고용량</a:t>
+            </a:r>
+          </a:p>
+        </p:txBody>
+      </p:sp>
+      <p:sp>
+        <p:nvSpPr>
+          <p:cNvPr id="141" name="TextBox 140"/>
+          <p:cNvSpPr txBox="1"/>
+          <p:nvPr/>
+        </p:nvSpPr>
+        <p:spPr>
+          <a:xfrm>
+            <a:off x="15453360" y="4151376"/>
+            <a:ext cx="1709928" cy="164592"/>
+          </a:xfrm>
+          <a:prstGeom prst="rect">
+            <a:avLst/>
+          </a:prstGeom>
+          <a:noFill/>
+        </p:spPr>
+        <p:txBody>
+          <a:bodyPr wrap="square" anchor="t" lIns="0" rIns="0" tIns="0" bIns="0">
+            <a:spAutoFit/>
+          </a:bodyPr>
+          <a:lstStyle/>
+          <a:p>
+            <a:pPr algn="l">
+              <a:lnSpc>
+                <a:spcPct val="112000"/>
+              </a:lnSpc>
+            </a:pPr>
+            <a:r>
+              <a:rPr sz="875" b="0">
+                <a:solidFill>
+                  <a:srgbClr val="8A8A8A"/>
+                </a:solidFill>
+                <a:latin typeface="Arial"/>
+                <a:ea typeface="Arial"/>
+              </a:rPr>
+              <a:t>내구성</a:t>
+            </a:r>
+          </a:p>
+        </p:txBody>
+      </p:sp>
+      <p:sp>
+        <p:nvSpPr>
+          <p:cNvPr id="142" name="TextBox 141"/>
+          <p:cNvSpPr txBox="1"/>
+          <p:nvPr/>
+        </p:nvSpPr>
+        <p:spPr>
+          <a:xfrm>
+            <a:off x="15453360" y="4297680"/>
+            <a:ext cx="1709928" cy="237744"/>
+          </a:xfrm>
+          <a:prstGeom prst="rect">
+            <a:avLst/>
+          </a:prstGeom>
+          <a:noFill/>
+        </p:spPr>
+        <p:txBody>
+          <a:bodyPr wrap="square" anchor="t" lIns="0" rIns="0" tIns="0" bIns="0">
+            <a:spAutoFit/>
+          </a:bodyPr>
+          <a:lstStyle/>
+          <a:p>
+            <a:pPr algn="l">
+              <a:lnSpc>
+                <a:spcPct val="112000"/>
+              </a:lnSpc>
+            </a:pPr>
+            <a:r>
+              <a:rPr sz="1125" b="1">
+                <a:solidFill>
+                  <a:srgbClr val="555555"/>
+                </a:solidFill>
+                <a:latin typeface="Arial"/>
+                <a:ea typeface="Arial"/>
+              </a:rPr>
+              <a:t>0.3 ~ 1.0</a:t>
+            </a:r>
+          </a:p>
+        </p:txBody>
+      </p:sp>
+      <p:sp>
+        <p:nvSpPr>
+          <p:cNvPr id="143" name="TextBox 142"/>
+          <p:cNvSpPr txBox="1"/>
+          <p:nvPr/>
+        </p:nvSpPr>
+        <p:spPr>
+          <a:xfrm>
+            <a:off x="15453360" y="4553712"/>
+            <a:ext cx="1709928" cy="164592"/>
+          </a:xfrm>
+          <a:prstGeom prst="rect">
+            <a:avLst/>
+          </a:prstGeom>
+          <a:noFill/>
+        </p:spPr>
+        <p:txBody>
+          <a:bodyPr wrap="square" anchor="t" lIns="0" rIns="0" tIns="0" bIns="0">
+            <a:spAutoFit/>
+          </a:bodyPr>
+          <a:lstStyle/>
+          <a:p>
+            <a:pPr algn="l">
+              <a:lnSpc>
+                <a:spcPct val="112000"/>
+              </a:lnSpc>
+            </a:pPr>
+            <a:r>
+              <a:rPr sz="875" b="0">
+                <a:solidFill>
+                  <a:srgbClr val="8A8A8A"/>
+                </a:solidFill>
+                <a:latin typeface="Arial"/>
+                <a:ea typeface="Arial"/>
+              </a:rPr>
+              <a:t>용량</a:t>
+            </a:r>
+          </a:p>
+        </p:txBody>
+      </p:sp>
+      <p:sp>
+        <p:nvSpPr>
+          <p:cNvPr id="144" name="TextBox 143"/>
+          <p:cNvSpPr txBox="1"/>
+          <p:nvPr/>
+        </p:nvSpPr>
+        <p:spPr>
+          <a:xfrm>
+            <a:off x="15453360" y="4700016"/>
+            <a:ext cx="1709928" cy="237744"/>
+          </a:xfrm>
+          <a:prstGeom prst="rect">
+            <a:avLst/>
+          </a:prstGeom>
+          <a:noFill/>
+        </p:spPr>
+        <p:txBody>
+          <a:bodyPr wrap="square" anchor="t" lIns="0" rIns="0" tIns="0" bIns="0">
+            <a:spAutoFit/>
+          </a:bodyPr>
+          <a:lstStyle/>
+          <a:p>
+            <a:pPr algn="l">
+              <a:lnSpc>
+                <a:spcPct val="112000"/>
+              </a:lnSpc>
+            </a:pPr>
+            <a:r>
+              <a:rPr sz="1125" b="1">
                 <a:solidFill>
                   <a:srgbClr val="1428A0"/>
                 </a:solidFill>
                 <a:latin typeface="Arial"/>
                 <a:ea typeface="Arial"/>
               </a:rPr>
-              <a:t>1 ~ 3</a:t>
-            </a:r>
-          </a:p>
-        </p:txBody>
-      </p:sp>
-      <p:sp>
-        <p:nvSpPr>
-          <p:cNvPr id="135" name="Rectangle 134"/>
-          <p:cNvSpPr/>
-          <p:nvPr/>
-        </p:nvSpPr>
-        <p:spPr>
-          <a:xfrm>
-            <a:off x="12957048" y="2560320"/>
-            <a:ext cx="4608576" cy="5870448"/>
-          </a:xfrm>
-          <a:prstGeom prst="rect">
-            <a:avLst/>
-          </a:prstGeom>
-          <a:solidFill>
-            <a:srgbClr val="F4F6FC"/>
-          </a:solidFill>
-          <a:ln w="15875">
-            <a:solidFill>
-              <a:srgbClr val="1428A0"/>
-            </a:solidFill>
-          </a:ln>
-          <a:effectLst/>
-        </p:spPr>
-        <p:style>
-          <a:lnRef idx="1">
-            <a:schemeClr val="accent1"/>
-          </a:lnRef>
-          <a:fillRef idx="3">
-            <a:schemeClr val="accent1"/>
-          </a:fillRef>
-          <a:effectRef idx="2">
-            <a:schemeClr val="accent1"/>
-          </a:effectRef>
-          <a:fontRef idx="minor">
-            <a:schemeClr val="lt1"/>
-          </a:fontRef>
-        </p:style>
-        <p:txBody>
-          <a:bodyPr rtlCol="0" anchor="ctr"/>
-          <a:lstStyle/>
-          <a:p>
-            <a:pPr algn="ctr"/>
-          </a:p>
-        </p:txBody>
-      </p:sp>
-      <p:sp>
-        <p:nvSpPr>
-          <p:cNvPr id="136" name="Rectangle 135"/>
-          <p:cNvSpPr/>
-          <p:nvPr/>
-        </p:nvSpPr>
-        <p:spPr>
-          <a:xfrm>
-            <a:off x="12957048" y="2560320"/>
-            <a:ext cx="4608576" cy="45720"/>
+              <a:t>245TB 급</a:t>
+            </a:r>
+          </a:p>
+        </p:txBody>
+      </p:sp>
+      <p:sp>
+        <p:nvSpPr>
+          <p:cNvPr id="145" name="TextBox 144"/>
+          <p:cNvSpPr txBox="1"/>
+          <p:nvPr/>
+        </p:nvSpPr>
+        <p:spPr>
+          <a:xfrm>
+            <a:off x="15453360" y="4956048"/>
+            <a:ext cx="1709928" cy="164592"/>
+          </a:xfrm>
+          <a:prstGeom prst="rect">
+            <a:avLst/>
+          </a:prstGeom>
+          <a:noFill/>
+        </p:spPr>
+        <p:txBody>
+          <a:bodyPr wrap="square" anchor="t" lIns="0" rIns="0" tIns="0" bIns="0">
+            <a:spAutoFit/>
+          </a:bodyPr>
+          <a:lstStyle/>
+          <a:p>
+            <a:pPr algn="l">
+              <a:lnSpc>
+                <a:spcPct val="112000"/>
+              </a:lnSpc>
+            </a:pPr>
+            <a:r>
+              <a:rPr sz="875" b="0">
+                <a:solidFill>
+                  <a:srgbClr val="8A8A8A"/>
+                </a:solidFill>
+                <a:latin typeface="Arial"/>
+                <a:ea typeface="Arial"/>
+              </a:rPr>
+              <a:t>비용</a:t>
+            </a:r>
+          </a:p>
+        </p:txBody>
+      </p:sp>
+      <p:sp>
+        <p:nvSpPr>
+          <p:cNvPr id="146" name="TextBox 145"/>
+          <p:cNvSpPr txBox="1"/>
+          <p:nvPr/>
+        </p:nvSpPr>
+        <p:spPr>
+          <a:xfrm>
+            <a:off x="15453360" y="5102352"/>
+            <a:ext cx="1709928" cy="237744"/>
+          </a:xfrm>
+          <a:prstGeom prst="rect">
+            <a:avLst/>
+          </a:prstGeom>
+          <a:noFill/>
+        </p:spPr>
+        <p:txBody>
+          <a:bodyPr wrap="square" anchor="t" lIns="0" rIns="0" tIns="0" bIns="0">
+            <a:spAutoFit/>
+          </a:bodyPr>
+          <a:lstStyle/>
+          <a:p>
+            <a:pPr algn="l">
+              <a:lnSpc>
+                <a:spcPct val="112000"/>
+              </a:lnSpc>
+            </a:pPr>
+            <a:r>
+              <a:rPr sz="1125" b="1">
+                <a:solidFill>
+                  <a:srgbClr val="1428A0"/>
+                </a:solidFill>
+                <a:latin typeface="Arial"/>
+                <a:ea typeface="Arial"/>
+              </a:rPr>
+              <a:t>낮다</a:t>
+            </a:r>
+          </a:p>
+        </p:txBody>
+      </p:sp>
+      <p:sp>
+        <p:nvSpPr>
+          <p:cNvPr id="147" name="TextBox 146"/>
+          <p:cNvSpPr txBox="1"/>
+          <p:nvPr/>
+        </p:nvSpPr>
+        <p:spPr>
+          <a:xfrm>
+            <a:off x="13231368" y="5468112"/>
+            <a:ext cx="4059936" cy="329184"/>
+          </a:xfrm>
+          <a:prstGeom prst="rect">
+            <a:avLst/>
+          </a:prstGeom>
+          <a:noFill/>
+        </p:spPr>
+        <p:txBody>
+          <a:bodyPr wrap="square" anchor="t" lIns="0" rIns="0" tIns="0" bIns="0">
+            <a:spAutoFit/>
+          </a:bodyPr>
+          <a:lstStyle/>
+          <a:p>
+            <a:pPr algn="l">
+              <a:lnSpc>
+                <a:spcPct val="102000"/>
+              </a:lnSpc>
+            </a:pPr>
+            <a:r>
+              <a:rPr sz="900" b="0">
+                <a:solidFill>
+                  <a:srgbClr val="8A8A8A"/>
+                </a:solidFill>
+                <a:latin typeface="Arial"/>
+                <a:ea typeface="Arial"/>
+              </a:rPr>
+              <a:t>QLC 정격은 제품·기준 블록에 따라 다릅니다 · 245TB급은 0.3 DWPD 수준</a:t>
+            </a:r>
+          </a:p>
+        </p:txBody>
+      </p:sp>
+      <p:sp>
+        <p:nvSpPr>
+          <p:cNvPr id="148" name="Rectangle 147"/>
+          <p:cNvSpPr/>
+          <p:nvPr/>
+        </p:nvSpPr>
+        <p:spPr>
+          <a:xfrm>
+            <a:off x="13231368" y="5852160"/>
+            <a:ext cx="4059936" cy="2487168"/>
           </a:xfrm>
           <a:prstGeom prst="rect">
             <a:avLst/>
@@ -9920,14 +10232,14 @@
       </p:sp>
       <p:sp>
         <p:nvSpPr>
-          <p:cNvPr id="137" name="TextBox 136"/>
-          <p:cNvSpPr txBox="1"/>
-          <p:nvPr/>
-        </p:nvSpPr>
-        <p:spPr>
-          <a:xfrm>
-            <a:off x="13176504" y="2706624"/>
-            <a:ext cx="4169664" cy="274320"/>
+          <p:cNvPr id="149" name="TextBox 148"/>
+          <p:cNvSpPr txBox="1"/>
+          <p:nvPr/>
+        </p:nvSpPr>
+        <p:spPr>
+          <a:xfrm>
+            <a:off x="13432536" y="5998464"/>
+            <a:ext cx="3657600" cy="274320"/>
           </a:xfrm>
           <a:prstGeom prst="rect">
             <a:avLst/>
@@ -9946,170 +10258,108 @@
               </a:lnSpc>
             </a:pPr>
             <a:r>
-              <a:rPr sz="1350" b="1">
-                <a:solidFill>
-                  <a:srgbClr val="1428A0"/>
-                </a:solidFill>
-                <a:latin typeface="Arial"/>
-                <a:ea typeface="Arial"/>
-              </a:rPr>
-              <a:t>③  </a:t>
-            </a:r>
-            <a:r>
-              <a:rPr sz="1350" b="1">
-                <a:solidFill>
-                  <a:srgbClr val="1428A0"/>
-                </a:solidFill>
-                <a:latin typeface="Arial"/>
-                <a:ea typeface="Arial"/>
-              </a:rPr>
-              <a:t>문제 · 고객은 QLC를 원한다</a:t>
-            </a:r>
-          </a:p>
-        </p:txBody>
-      </p:sp>
-      <p:sp>
-        <p:nvSpPr>
-          <p:cNvPr id="138" name="TextBox 137"/>
-          <p:cNvSpPr txBox="1"/>
-          <p:nvPr/>
-        </p:nvSpPr>
-        <p:spPr>
-          <a:xfrm>
-            <a:off x="13176504" y="2980944"/>
-            <a:ext cx="4169664" cy="219456"/>
-          </a:xfrm>
-          <a:prstGeom prst="rect">
-            <a:avLst/>
-          </a:prstGeom>
-          <a:noFill/>
-        </p:spPr>
-        <p:txBody>
-          <a:bodyPr wrap="square" anchor="t" lIns="0" rIns="0" tIns="0" bIns="0">
+              <a:rPr sz="1050" b="0">
+                <a:solidFill>
+                  <a:srgbClr val="AAB8E8"/>
+                </a:solidFill>
+                <a:latin typeface="Arial"/>
+                <a:ea typeface="Arial"/>
+              </a:rPr>
+              <a:t>그래서 질문은 하나입니다</a:t>
+            </a:r>
+          </a:p>
+        </p:txBody>
+      </p:sp>
+      <p:sp>
+        <p:nvSpPr>
+          <p:cNvPr id="150" name="TextBox 149"/>
+          <p:cNvSpPr txBox="1"/>
+          <p:nvPr/>
+        </p:nvSpPr>
+        <p:spPr>
+          <a:xfrm>
+            <a:off x="13432536" y="6291072"/>
+            <a:ext cx="3657600" cy="1938528"/>
+          </a:xfrm>
+          <a:prstGeom prst="rect">
+            <a:avLst/>
+          </a:prstGeom>
+          <a:noFill/>
+        </p:spPr>
+        <p:txBody>
+          <a:bodyPr wrap="square" anchor="ctr" lIns="0" rIns="0" tIns="0" bIns="0">
             <a:spAutoFit/>
           </a:bodyPr>
           <a:lstStyle/>
           <a:p>
             <a:pPr algn="l">
               <a:lnSpc>
-                <a:spcPct val="112000"/>
-              </a:lnSpc>
-            </a:pPr>
-            <a:r>
-              <a:rPr sz="1000" b="0">
-                <a:solidFill>
-                  <a:srgbClr val="8A8A8A"/>
-                </a:solidFill>
-                <a:latin typeface="Arial"/>
-                <a:ea typeface="Arial"/>
-              </a:rPr>
-              <a:t>TLC면 되는데 왜 QLC인가</a:t>
-            </a:r>
-          </a:p>
-        </p:txBody>
-      </p:sp>
-      <p:sp>
-        <p:nvSpPr>
-          <p:cNvPr id="139" name="TextBox 138"/>
-          <p:cNvSpPr txBox="1"/>
-          <p:nvPr/>
-        </p:nvSpPr>
-        <p:spPr>
-          <a:xfrm>
-            <a:off x="13231368" y="3346703"/>
-            <a:ext cx="4059936" cy="219456"/>
-          </a:xfrm>
-          <a:prstGeom prst="rect">
-            <a:avLst/>
-          </a:prstGeom>
-          <a:noFill/>
-        </p:spPr>
-        <p:txBody>
-          <a:bodyPr wrap="square" anchor="t" lIns="0" rIns="0" tIns="0" bIns="0">
-            <a:spAutoFit/>
-          </a:bodyPr>
-          <a:lstStyle/>
+                <a:spcPct val="118000"/>
+              </a:lnSpc>
+            </a:pPr>
+            <a:r>
+              <a:rPr sz="1425" b="1">
+                <a:solidFill>
+                  <a:srgbClr val="FFFFFF"/>
+                </a:solidFill>
+                <a:latin typeface="Arial"/>
+                <a:ea typeface="Arial"/>
+              </a:rPr>
+              <a:t>고용량 QLC의 밀도·비용 이점을 유지하면서</a:t>
+            </a:r>
+          </a:p>
           <a:p>
             <a:pPr algn="l">
               <a:lnSpc>
-                <a:spcPct val="112000"/>
-              </a:lnSpc>
-            </a:pPr>
-            <a:r>
-              <a:rPr sz="1000" b="0">
-                <a:solidFill>
-                  <a:srgbClr val="555555"/>
-                </a:solidFill>
-                <a:latin typeface="Arial"/>
-                <a:ea typeface="Arial"/>
-              </a:rPr>
-              <a:t>같은 요구 1~3 DWPD를 두 방법으로 볼 수 있습니다</a:t>
-            </a:r>
-          </a:p>
-        </p:txBody>
-      </p:sp>
-      <p:sp>
-        <p:nvSpPr>
-          <p:cNvPr id="140" name="Rectangle 139"/>
-          <p:cNvSpPr/>
-          <p:nvPr/>
-        </p:nvSpPr>
-        <p:spPr>
-          <a:xfrm>
-            <a:off x="13231368" y="3602735"/>
-            <a:ext cx="1956816" cy="1792224"/>
-          </a:xfrm>
-          <a:prstGeom prst="rect">
-            <a:avLst/>
-          </a:prstGeom>
-          <a:solidFill>
-            <a:srgbClr val="FFFFFF"/>
-          </a:solidFill>
-          <a:ln w="9525">
-            <a:solidFill>
-              <a:srgbClr val="D9D9D9"/>
-            </a:solidFill>
-          </a:ln>
-          <a:effectLst/>
-        </p:spPr>
-        <p:style>
-          <a:lnRef idx="1">
-            <a:schemeClr val="accent1"/>
-          </a:lnRef>
-          <a:fillRef idx="3">
-            <a:schemeClr val="accent1"/>
-          </a:fillRef>
-          <a:effectRef idx="2">
-            <a:schemeClr val="accent1"/>
-          </a:effectRef>
-          <a:fontRef idx="minor">
-            <a:schemeClr val="lt1"/>
-          </a:fontRef>
-        </p:style>
-        <p:txBody>
-          <a:bodyPr rtlCol="0" anchor="ctr"/>
-          <a:lstStyle/>
-          <a:p>
-            <a:pPr algn="ctr"/>
-          </a:p>
-        </p:txBody>
-      </p:sp>
-      <p:sp>
-        <p:nvSpPr>
-          <p:cNvPr id="141" name="Rectangle 140"/>
-          <p:cNvSpPr/>
-          <p:nvPr/>
-        </p:nvSpPr>
-        <p:spPr>
-          <a:xfrm>
-            <a:off x="13231368" y="3602735"/>
-            <a:ext cx="1956816" cy="45720"/>
-          </a:xfrm>
-          <a:prstGeom prst="rect">
-            <a:avLst/>
-          </a:prstGeom>
-          <a:solidFill>
-            <a:srgbClr val="8A8A8A"/>
+                <a:spcPct val="118000"/>
+              </a:lnSpc>
+            </a:pPr>
+            <a:r>
+              <a:rPr sz="1425" b="1">
+                <a:solidFill>
+                  <a:srgbClr val="FFFFFF"/>
+                </a:solidFill>
+                <a:latin typeface="Arial"/>
+                <a:ea typeface="Arial"/>
+              </a:rPr>
+              <a:t>AI 추론이 요구하는 내구성을</a:t>
+            </a:r>
+          </a:p>
+          <a:p>
+            <a:pPr algn="l">
+              <a:lnSpc>
+                <a:spcPct val="118000"/>
+              </a:lnSpc>
+            </a:pPr>
+            <a:r>
+              <a:rPr sz="1425" b="1">
+                <a:solidFill>
+                  <a:srgbClr val="FFFFFF"/>
+                </a:solidFill>
+                <a:latin typeface="Arial"/>
+                <a:ea typeface="Arial"/>
+              </a:rPr>
+              <a:t>확보할 수 있는가?</a:t>
+            </a:r>
+          </a:p>
+        </p:txBody>
+      </p:sp>
+      <p:sp>
+        <p:nvSpPr>
+          <p:cNvPr id="151" name="Rectangle 150"/>
+          <p:cNvSpPr/>
+          <p:nvPr/>
+        </p:nvSpPr>
+        <p:spPr>
+          <a:xfrm>
+            <a:off x="722376" y="8613648"/>
+            <a:ext cx="16843248" cy="731520"/>
+          </a:xfrm>
+          <a:prstGeom prst="rect">
+            <a:avLst/>
+          </a:prstGeom>
+          <a:solidFill>
+            <a:srgbClr val="1428A0"/>
           </a:solidFill>
           <a:ln>
             <a:noFill/>
@@ -10140,1002 +10390,7 @@
       </p:sp>
       <p:sp>
         <p:nvSpPr>
-          <p:cNvPr id="142" name="TextBox 141"/>
-          <p:cNvSpPr txBox="1"/>
-          <p:nvPr/>
-        </p:nvSpPr>
-        <p:spPr>
-          <a:xfrm>
-            <a:off x="13377672" y="3694175"/>
-            <a:ext cx="1664208" cy="274320"/>
-          </a:xfrm>
-          <a:prstGeom prst="rect">
-            <a:avLst/>
-          </a:prstGeom>
-          <a:noFill/>
-        </p:spPr>
-        <p:txBody>
-          <a:bodyPr wrap="square" anchor="t" lIns="0" rIns="0" tIns="0" bIns="0">
-            <a:spAutoFit/>
-          </a:bodyPr>
-          <a:lstStyle/>
-          <a:p>
-            <a:pPr algn="l">
-              <a:lnSpc>
-                <a:spcPct val="112000"/>
-              </a:lnSpc>
-            </a:pPr>
-            <a:r>
-              <a:rPr sz="1500" b="1">
-                <a:solidFill>
-                  <a:srgbClr val="555555"/>
-                </a:solidFill>
-                <a:latin typeface="Arial"/>
-                <a:ea typeface="Arial"/>
-              </a:rPr>
-              <a:t>TLC</a:t>
-            </a:r>
-          </a:p>
-        </p:txBody>
-      </p:sp>
-      <p:sp>
-        <p:nvSpPr>
-          <p:cNvPr id="143" name="TextBox 142"/>
-          <p:cNvSpPr txBox="1"/>
-          <p:nvPr/>
-        </p:nvSpPr>
-        <p:spPr>
-          <a:xfrm>
-            <a:off x="13377672" y="3968496"/>
-            <a:ext cx="1664208" cy="201168"/>
-          </a:xfrm>
-          <a:prstGeom prst="rect">
-            <a:avLst/>
-          </a:prstGeom>
-          <a:noFill/>
-        </p:spPr>
-        <p:txBody>
-          <a:bodyPr wrap="square" anchor="t" lIns="0" rIns="0" tIns="0" bIns="0">
-            <a:spAutoFit/>
-          </a:bodyPr>
-          <a:lstStyle/>
-          <a:p>
-            <a:pPr algn="l">
-              <a:lnSpc>
-                <a:spcPct val="112000"/>
-              </a:lnSpc>
-            </a:pPr>
-            <a:r>
-              <a:rPr sz="950" b="0">
-                <a:solidFill>
-                  <a:srgbClr val="8A8A8A"/>
-                </a:solidFill>
-                <a:latin typeface="Arial"/>
-                <a:ea typeface="Arial"/>
-              </a:rPr>
-              <a:t>요구는 만족</a:t>
-            </a:r>
-          </a:p>
-        </p:txBody>
-      </p:sp>
-      <p:sp>
-        <p:nvSpPr>
-          <p:cNvPr id="144" name="TextBox 143"/>
-          <p:cNvSpPr txBox="1"/>
-          <p:nvPr/>
-        </p:nvSpPr>
-        <p:spPr>
-          <a:xfrm>
-            <a:off x="13377672" y="4206240"/>
-            <a:ext cx="1664208" cy="164592"/>
-          </a:xfrm>
-          <a:prstGeom prst="rect">
-            <a:avLst/>
-          </a:prstGeom>
-          <a:noFill/>
-        </p:spPr>
-        <p:txBody>
-          <a:bodyPr wrap="square" anchor="t" lIns="0" rIns="0" tIns="0" bIns="0">
-            <a:spAutoFit/>
-          </a:bodyPr>
-          <a:lstStyle/>
-          <a:p>
-            <a:pPr algn="l">
-              <a:lnSpc>
-                <a:spcPct val="112000"/>
-              </a:lnSpc>
-            </a:pPr>
-            <a:r>
-              <a:rPr sz="875" b="0">
-                <a:solidFill>
-                  <a:srgbClr val="8A8A8A"/>
-                </a:solidFill>
-                <a:latin typeface="Arial"/>
-                <a:ea typeface="Arial"/>
-              </a:rPr>
-              <a:t>내구성</a:t>
-            </a:r>
-          </a:p>
-        </p:txBody>
-      </p:sp>
-      <p:sp>
-        <p:nvSpPr>
-          <p:cNvPr id="145" name="TextBox 144"/>
-          <p:cNvSpPr txBox="1"/>
-          <p:nvPr/>
-        </p:nvSpPr>
-        <p:spPr>
-          <a:xfrm>
-            <a:off x="13377672" y="4352544"/>
-            <a:ext cx="1664208" cy="219456"/>
-          </a:xfrm>
-          <a:prstGeom prst="rect">
-            <a:avLst/>
-          </a:prstGeom>
-          <a:noFill/>
-        </p:spPr>
-        <p:txBody>
-          <a:bodyPr wrap="square" anchor="t" lIns="0" rIns="0" tIns="0" bIns="0">
-            <a:spAutoFit/>
-          </a:bodyPr>
-          <a:lstStyle/>
-          <a:p>
-            <a:pPr algn="l">
-              <a:lnSpc>
-                <a:spcPct val="112000"/>
-              </a:lnSpc>
-            </a:pPr>
-            <a:r>
-              <a:rPr sz="1125" b="1">
-                <a:solidFill>
-                  <a:srgbClr val="1428A0"/>
-                </a:solidFill>
-                <a:latin typeface="Arial"/>
-                <a:ea typeface="Arial"/>
-              </a:rPr>
-              <a:t>1 ~ 3 DWPD</a:t>
-            </a:r>
-          </a:p>
-        </p:txBody>
-      </p:sp>
-      <p:sp>
-        <p:nvSpPr>
-          <p:cNvPr id="146" name="TextBox 145"/>
-          <p:cNvSpPr txBox="1"/>
-          <p:nvPr/>
-        </p:nvSpPr>
-        <p:spPr>
-          <a:xfrm>
-            <a:off x="13377672" y="4590288"/>
-            <a:ext cx="1664208" cy="164592"/>
-          </a:xfrm>
-          <a:prstGeom prst="rect">
-            <a:avLst/>
-          </a:prstGeom>
-          <a:noFill/>
-        </p:spPr>
-        <p:txBody>
-          <a:bodyPr wrap="square" anchor="t" lIns="0" rIns="0" tIns="0" bIns="0">
-            <a:spAutoFit/>
-          </a:bodyPr>
-          <a:lstStyle/>
-          <a:p>
-            <a:pPr algn="l">
-              <a:lnSpc>
-                <a:spcPct val="112000"/>
-              </a:lnSpc>
-            </a:pPr>
-            <a:r>
-              <a:rPr sz="875" b="0">
-                <a:solidFill>
-                  <a:srgbClr val="8A8A8A"/>
-                </a:solidFill>
-                <a:latin typeface="Arial"/>
-                <a:ea typeface="Arial"/>
-              </a:rPr>
-              <a:t>용량 밀도</a:t>
-            </a:r>
-          </a:p>
-        </p:txBody>
-      </p:sp>
-      <p:sp>
-        <p:nvSpPr>
-          <p:cNvPr id="147" name="TextBox 146"/>
-          <p:cNvSpPr txBox="1"/>
-          <p:nvPr/>
-        </p:nvSpPr>
-        <p:spPr>
-          <a:xfrm>
-            <a:off x="13377672" y="4736592"/>
-            <a:ext cx="1664208" cy="219456"/>
-          </a:xfrm>
-          <a:prstGeom prst="rect">
-            <a:avLst/>
-          </a:prstGeom>
-          <a:noFill/>
-        </p:spPr>
-        <p:txBody>
-          <a:bodyPr wrap="square" anchor="t" lIns="0" rIns="0" tIns="0" bIns="0">
-            <a:spAutoFit/>
-          </a:bodyPr>
-          <a:lstStyle/>
-          <a:p>
-            <a:pPr algn="l">
-              <a:lnSpc>
-                <a:spcPct val="112000"/>
-              </a:lnSpc>
-            </a:pPr>
-            <a:r>
-              <a:rPr sz="1125" b="1">
-                <a:solidFill>
-                  <a:srgbClr val="555555"/>
-                </a:solidFill>
-                <a:latin typeface="Arial"/>
-                <a:ea typeface="Arial"/>
-              </a:rPr>
-              <a:t>61TB급</a:t>
-            </a:r>
-          </a:p>
-        </p:txBody>
-      </p:sp>
-      <p:sp>
-        <p:nvSpPr>
-          <p:cNvPr id="148" name="TextBox 147"/>
-          <p:cNvSpPr txBox="1"/>
-          <p:nvPr/>
-        </p:nvSpPr>
-        <p:spPr>
-          <a:xfrm>
-            <a:off x="13377672" y="4974336"/>
-            <a:ext cx="1664208" cy="164592"/>
-          </a:xfrm>
-          <a:prstGeom prst="rect">
-            <a:avLst/>
-          </a:prstGeom>
-          <a:noFill/>
-        </p:spPr>
-        <p:txBody>
-          <a:bodyPr wrap="square" anchor="t" lIns="0" rIns="0" tIns="0" bIns="0">
-            <a:spAutoFit/>
-          </a:bodyPr>
-          <a:lstStyle/>
-          <a:p>
-            <a:pPr algn="l">
-              <a:lnSpc>
-                <a:spcPct val="112000"/>
-              </a:lnSpc>
-            </a:pPr>
-            <a:r>
-              <a:rPr sz="875" b="0">
-                <a:solidFill>
-                  <a:srgbClr val="8A8A8A"/>
-                </a:solidFill>
-                <a:latin typeface="Arial"/>
-                <a:ea typeface="Arial"/>
-              </a:rPr>
-              <a:t>TB당 가격</a:t>
-            </a:r>
-          </a:p>
-        </p:txBody>
-      </p:sp>
-      <p:sp>
-        <p:nvSpPr>
-          <p:cNvPr id="149" name="TextBox 148"/>
-          <p:cNvSpPr txBox="1"/>
-          <p:nvPr/>
-        </p:nvSpPr>
-        <p:spPr>
-          <a:xfrm>
-            <a:off x="13377672" y="5120640"/>
-            <a:ext cx="1664208" cy="219456"/>
-          </a:xfrm>
-          <a:prstGeom prst="rect">
-            <a:avLst/>
-          </a:prstGeom>
-          <a:noFill/>
-        </p:spPr>
-        <p:txBody>
-          <a:bodyPr wrap="square" anchor="t" lIns="0" rIns="0" tIns="0" bIns="0">
-            <a:spAutoFit/>
-          </a:bodyPr>
-          <a:lstStyle/>
-          <a:p>
-            <a:pPr algn="l">
-              <a:lnSpc>
-                <a:spcPct val="112000"/>
-              </a:lnSpc>
-            </a:pPr>
-            <a:r>
-              <a:rPr sz="1125" b="1">
-                <a:solidFill>
-                  <a:srgbClr val="555555"/>
-                </a:solidFill>
-                <a:latin typeface="Arial"/>
-                <a:ea typeface="Arial"/>
-              </a:rPr>
-              <a:t>기준</a:t>
-            </a:r>
-          </a:p>
-        </p:txBody>
-      </p:sp>
-      <p:sp>
-        <p:nvSpPr>
-          <p:cNvPr id="150" name="Rectangle 149"/>
-          <p:cNvSpPr/>
-          <p:nvPr/>
-        </p:nvSpPr>
-        <p:spPr>
-          <a:xfrm>
-            <a:off x="15334488" y="3602735"/>
-            <a:ext cx="1956816" cy="1792224"/>
-          </a:xfrm>
-          <a:prstGeom prst="rect">
-            <a:avLst/>
-          </a:prstGeom>
-          <a:solidFill>
-            <a:srgbClr val="FFFFFF"/>
-          </a:solidFill>
-          <a:ln w="15875">
-            <a:solidFill>
-              <a:srgbClr val="1428A0"/>
-            </a:solidFill>
-          </a:ln>
-          <a:effectLst/>
-        </p:spPr>
-        <p:style>
-          <a:lnRef idx="1">
-            <a:schemeClr val="accent1"/>
-          </a:lnRef>
-          <a:fillRef idx="3">
-            <a:schemeClr val="accent1"/>
-          </a:fillRef>
-          <a:effectRef idx="2">
-            <a:schemeClr val="accent1"/>
-          </a:effectRef>
-          <a:fontRef idx="minor">
-            <a:schemeClr val="lt1"/>
-          </a:fontRef>
-        </p:style>
-        <p:txBody>
-          <a:bodyPr rtlCol="0" anchor="ctr"/>
-          <a:lstStyle/>
-          <a:p>
-            <a:pPr algn="ctr"/>
-          </a:p>
-        </p:txBody>
-      </p:sp>
-      <p:sp>
-        <p:nvSpPr>
-          <p:cNvPr id="151" name="Rectangle 150"/>
-          <p:cNvSpPr/>
-          <p:nvPr/>
-        </p:nvSpPr>
-        <p:spPr>
-          <a:xfrm>
-            <a:off x="15334488" y="3602735"/>
-            <a:ext cx="1956816" cy="45720"/>
-          </a:xfrm>
-          <a:prstGeom prst="rect">
-            <a:avLst/>
-          </a:prstGeom>
-          <a:solidFill>
-            <a:srgbClr val="1428A0"/>
-          </a:solidFill>
-          <a:ln>
-            <a:noFill/>
-          </a:ln>
-          <a:effectLst/>
-        </p:spPr>
-        <p:style>
-          <a:lnRef idx="1">
-            <a:schemeClr val="accent1"/>
-          </a:lnRef>
-          <a:fillRef idx="3">
-            <a:schemeClr val="accent1"/>
-          </a:fillRef>
-          <a:effectRef idx="2">
-            <a:schemeClr val="accent1"/>
-          </a:effectRef>
-          <a:fontRef idx="minor">
-            <a:schemeClr val="lt1"/>
-          </a:fontRef>
-        </p:style>
-        <p:txBody>
-          <a:bodyPr rtlCol="0" anchor="ctr"/>
-          <a:lstStyle/>
-          <a:p>
-            <a:pPr algn="ctr"/>
-          </a:p>
-        </p:txBody>
-      </p:sp>
-      <p:sp>
-        <p:nvSpPr>
           <p:cNvPr id="152" name="TextBox 151"/>
-          <p:cNvSpPr txBox="1"/>
-          <p:nvPr/>
-        </p:nvSpPr>
-        <p:spPr>
-          <a:xfrm>
-            <a:off x="15480792" y="3694175"/>
-            <a:ext cx="1664208" cy="274320"/>
-          </a:xfrm>
-          <a:prstGeom prst="rect">
-            <a:avLst/>
-          </a:prstGeom>
-          <a:noFill/>
-        </p:spPr>
-        <p:txBody>
-          <a:bodyPr wrap="square" anchor="t" lIns="0" rIns="0" tIns="0" bIns="0">
-            <a:spAutoFit/>
-          </a:bodyPr>
-          <a:lstStyle/>
-          <a:p>
-            <a:pPr algn="l">
-              <a:lnSpc>
-                <a:spcPct val="112000"/>
-              </a:lnSpc>
-            </a:pPr>
-            <a:r>
-              <a:rPr sz="1500" b="1">
-                <a:solidFill>
-                  <a:srgbClr val="1428A0"/>
-                </a:solidFill>
-                <a:latin typeface="Arial"/>
-                <a:ea typeface="Arial"/>
-              </a:rPr>
-              <a:t>QLC</a:t>
-            </a:r>
-          </a:p>
-        </p:txBody>
-      </p:sp>
-      <p:sp>
-        <p:nvSpPr>
-          <p:cNvPr id="153" name="TextBox 152"/>
-          <p:cNvSpPr txBox="1"/>
-          <p:nvPr/>
-        </p:nvSpPr>
-        <p:spPr>
-          <a:xfrm>
-            <a:off x="15480792" y="3968496"/>
-            <a:ext cx="1664208" cy="201168"/>
-          </a:xfrm>
-          <a:prstGeom prst="rect">
-            <a:avLst/>
-          </a:prstGeom>
-          <a:noFill/>
-        </p:spPr>
-        <p:txBody>
-          <a:bodyPr wrap="square" anchor="t" lIns="0" rIns="0" tIns="0" bIns="0">
-            <a:spAutoFit/>
-          </a:bodyPr>
-          <a:lstStyle/>
-          <a:p>
-            <a:pPr algn="l">
-              <a:lnSpc>
-                <a:spcPct val="112000"/>
-              </a:lnSpc>
-            </a:pPr>
-            <a:r>
-              <a:rPr sz="950" b="0">
-                <a:solidFill>
-                  <a:srgbClr val="8A8A8A"/>
-                </a:solidFill>
-                <a:latin typeface="Arial"/>
-                <a:ea typeface="Arial"/>
-              </a:rPr>
-              <a:t>요구가 부족</a:t>
-            </a:r>
-          </a:p>
-        </p:txBody>
-      </p:sp>
-      <p:sp>
-        <p:nvSpPr>
-          <p:cNvPr id="154" name="TextBox 153"/>
-          <p:cNvSpPr txBox="1"/>
-          <p:nvPr/>
-        </p:nvSpPr>
-        <p:spPr>
-          <a:xfrm>
-            <a:off x="15480792" y="4206240"/>
-            <a:ext cx="1664208" cy="164592"/>
-          </a:xfrm>
-          <a:prstGeom prst="rect">
-            <a:avLst/>
-          </a:prstGeom>
-          <a:noFill/>
-        </p:spPr>
-        <p:txBody>
-          <a:bodyPr wrap="square" anchor="t" lIns="0" rIns="0" tIns="0" bIns="0">
-            <a:spAutoFit/>
-          </a:bodyPr>
-          <a:lstStyle/>
-          <a:p>
-            <a:pPr algn="l">
-              <a:lnSpc>
-                <a:spcPct val="112000"/>
-              </a:lnSpc>
-            </a:pPr>
-            <a:r>
-              <a:rPr sz="875" b="0">
-                <a:solidFill>
-                  <a:srgbClr val="8A8A8A"/>
-                </a:solidFill>
-                <a:latin typeface="Arial"/>
-                <a:ea typeface="Arial"/>
-              </a:rPr>
-              <a:t>내구성</a:t>
-            </a:r>
-          </a:p>
-        </p:txBody>
-      </p:sp>
-      <p:sp>
-        <p:nvSpPr>
-          <p:cNvPr id="155" name="TextBox 154"/>
-          <p:cNvSpPr txBox="1"/>
-          <p:nvPr/>
-        </p:nvSpPr>
-        <p:spPr>
-          <a:xfrm>
-            <a:off x="15480792" y="4352544"/>
-            <a:ext cx="1664208" cy="219456"/>
-          </a:xfrm>
-          <a:prstGeom prst="rect">
-            <a:avLst/>
-          </a:prstGeom>
-          <a:noFill/>
-        </p:spPr>
-        <p:txBody>
-          <a:bodyPr wrap="square" anchor="t" lIns="0" rIns="0" tIns="0" bIns="0">
-            <a:spAutoFit/>
-          </a:bodyPr>
-          <a:lstStyle/>
-          <a:p>
-            <a:pPr algn="l">
-              <a:lnSpc>
-                <a:spcPct val="112000"/>
-              </a:lnSpc>
-            </a:pPr>
-            <a:r>
-              <a:rPr sz="1125" b="1">
-                <a:solidFill>
-                  <a:srgbClr val="555555"/>
-                </a:solidFill>
-                <a:latin typeface="Arial"/>
-                <a:ea typeface="Arial"/>
-              </a:rPr>
-              <a:t>0.6 DWPD</a:t>
-            </a:r>
-          </a:p>
-        </p:txBody>
-      </p:sp>
-      <p:sp>
-        <p:nvSpPr>
-          <p:cNvPr id="156" name="TextBox 155"/>
-          <p:cNvSpPr txBox="1"/>
-          <p:nvPr/>
-        </p:nvSpPr>
-        <p:spPr>
-          <a:xfrm>
-            <a:off x="15480792" y="4590288"/>
-            <a:ext cx="1664208" cy="164592"/>
-          </a:xfrm>
-          <a:prstGeom prst="rect">
-            <a:avLst/>
-          </a:prstGeom>
-          <a:noFill/>
-        </p:spPr>
-        <p:txBody>
-          <a:bodyPr wrap="square" anchor="t" lIns="0" rIns="0" tIns="0" bIns="0">
-            <a:spAutoFit/>
-          </a:bodyPr>
-          <a:lstStyle/>
-          <a:p>
-            <a:pPr algn="l">
-              <a:lnSpc>
-                <a:spcPct val="112000"/>
-              </a:lnSpc>
-            </a:pPr>
-            <a:r>
-              <a:rPr sz="875" b="0">
-                <a:solidFill>
-                  <a:srgbClr val="8A8A8A"/>
-                </a:solidFill>
-                <a:latin typeface="Arial"/>
-                <a:ea typeface="Arial"/>
-              </a:rPr>
-              <a:t>용량 밀도</a:t>
-            </a:r>
-          </a:p>
-        </p:txBody>
-      </p:sp>
-      <p:sp>
-        <p:nvSpPr>
-          <p:cNvPr id="157" name="TextBox 156"/>
-          <p:cNvSpPr txBox="1"/>
-          <p:nvPr/>
-        </p:nvSpPr>
-        <p:spPr>
-          <a:xfrm>
-            <a:off x="15480792" y="4736592"/>
-            <a:ext cx="1664208" cy="219456"/>
-          </a:xfrm>
-          <a:prstGeom prst="rect">
-            <a:avLst/>
-          </a:prstGeom>
-          <a:noFill/>
-        </p:spPr>
-        <p:txBody>
-          <a:bodyPr wrap="square" anchor="t" lIns="0" rIns="0" tIns="0" bIns="0">
-            <a:spAutoFit/>
-          </a:bodyPr>
-          <a:lstStyle/>
-          <a:p>
-            <a:pPr algn="l">
-              <a:lnSpc>
-                <a:spcPct val="112000"/>
-              </a:lnSpc>
-            </a:pPr>
-            <a:r>
-              <a:rPr sz="1125" b="1">
-                <a:solidFill>
-                  <a:srgbClr val="1428A0"/>
-                </a:solidFill>
-                <a:latin typeface="Arial"/>
-                <a:ea typeface="Arial"/>
-              </a:rPr>
-              <a:t>245TB급 · 4배</a:t>
-            </a:r>
-          </a:p>
-        </p:txBody>
-      </p:sp>
-      <p:sp>
-        <p:nvSpPr>
-          <p:cNvPr id="158" name="TextBox 157"/>
-          <p:cNvSpPr txBox="1"/>
-          <p:nvPr/>
-        </p:nvSpPr>
-        <p:spPr>
-          <a:xfrm>
-            <a:off x="15480792" y="4974336"/>
-            <a:ext cx="1664208" cy="164592"/>
-          </a:xfrm>
-          <a:prstGeom prst="rect">
-            <a:avLst/>
-          </a:prstGeom>
-          <a:noFill/>
-        </p:spPr>
-        <p:txBody>
-          <a:bodyPr wrap="square" anchor="t" lIns="0" rIns="0" tIns="0" bIns="0">
-            <a:spAutoFit/>
-          </a:bodyPr>
-          <a:lstStyle/>
-          <a:p>
-            <a:pPr algn="l">
-              <a:lnSpc>
-                <a:spcPct val="112000"/>
-              </a:lnSpc>
-            </a:pPr>
-            <a:r>
-              <a:rPr sz="875" b="0">
-                <a:solidFill>
-                  <a:srgbClr val="8A8A8A"/>
-                </a:solidFill>
-                <a:latin typeface="Arial"/>
-                <a:ea typeface="Arial"/>
-              </a:rPr>
-              <a:t>TB당 가격</a:t>
-            </a:r>
-          </a:p>
-        </p:txBody>
-      </p:sp>
-      <p:sp>
-        <p:nvSpPr>
-          <p:cNvPr id="159" name="TextBox 158"/>
-          <p:cNvSpPr txBox="1"/>
-          <p:nvPr/>
-        </p:nvSpPr>
-        <p:spPr>
-          <a:xfrm>
-            <a:off x="15480792" y="5120640"/>
-            <a:ext cx="1664208" cy="219456"/>
-          </a:xfrm>
-          <a:prstGeom prst="rect">
-            <a:avLst/>
-          </a:prstGeom>
-          <a:noFill/>
-        </p:spPr>
-        <p:txBody>
-          <a:bodyPr wrap="square" anchor="t" lIns="0" rIns="0" tIns="0" bIns="0">
-            <a:spAutoFit/>
-          </a:bodyPr>
-          <a:lstStyle/>
-          <a:p>
-            <a:pPr algn="l">
-              <a:lnSpc>
-                <a:spcPct val="112000"/>
-              </a:lnSpc>
-            </a:pPr>
-            <a:r>
-              <a:rPr sz="1125" b="1">
-                <a:solidFill>
-                  <a:srgbClr val="1428A0"/>
-                </a:solidFill>
-                <a:latin typeface="Arial"/>
-                <a:ea typeface="Arial"/>
-              </a:rPr>
-              <a:t>20~30% 저렴</a:t>
-            </a:r>
-          </a:p>
-        </p:txBody>
-      </p:sp>
-      <p:sp>
-        <p:nvSpPr>
-          <p:cNvPr id="160" name="TextBox 159"/>
-          <p:cNvSpPr txBox="1"/>
-          <p:nvPr/>
-        </p:nvSpPr>
-        <p:spPr>
-          <a:xfrm>
-            <a:off x="13231368" y="5541264"/>
-            <a:ext cx="4059936" cy="201168"/>
-          </a:xfrm>
-          <a:prstGeom prst="rect">
-            <a:avLst/>
-          </a:prstGeom>
-          <a:noFill/>
-        </p:spPr>
-        <p:txBody>
-          <a:bodyPr wrap="square" anchor="t" lIns="0" rIns="0" tIns="0" bIns="0">
-            <a:spAutoFit/>
-          </a:bodyPr>
-          <a:lstStyle/>
-          <a:p>
-            <a:pPr algn="l">
-              <a:lnSpc>
-                <a:spcPct val="112000"/>
-              </a:lnSpc>
-            </a:pPr>
-            <a:r>
-              <a:rPr sz="1000" b="0">
-                <a:solidFill>
-                  <a:srgbClr val="8A8A8A"/>
-                </a:solidFill>
-                <a:latin typeface="Arial"/>
-                <a:ea typeface="Arial"/>
-              </a:rPr>
-              <a:t>QLC가 채워야 할 거리</a:t>
-            </a:r>
-          </a:p>
-        </p:txBody>
-      </p:sp>
-      <p:sp>
-        <p:nvSpPr>
-          <p:cNvPr id="161" name="TextBox 160"/>
-          <p:cNvSpPr txBox="1"/>
-          <p:nvPr/>
-        </p:nvSpPr>
-        <p:spPr>
-          <a:xfrm>
-            <a:off x="13231368" y="5742431"/>
-            <a:ext cx="4059936" cy="603504"/>
-          </a:xfrm>
-          <a:prstGeom prst="rect">
-            <a:avLst/>
-          </a:prstGeom>
-          <a:noFill/>
-        </p:spPr>
-        <p:txBody>
-          <a:bodyPr wrap="square" anchor="ctr" lIns="0" rIns="0" tIns="0" bIns="0">
-            <a:spAutoFit/>
-          </a:bodyPr>
-          <a:lstStyle/>
-          <a:p>
-            <a:pPr algn="l">
-              <a:lnSpc>
-                <a:spcPct val="112000"/>
-              </a:lnSpc>
-            </a:pPr>
-            <a:r>
-              <a:rPr sz="3400" b="1">
-                <a:solidFill>
-                  <a:srgbClr val="1428A0"/>
-                </a:solidFill>
-                <a:latin typeface="Arial"/>
-                <a:ea typeface="Arial"/>
-              </a:rPr>
-              <a:t>2 ~ 5배</a:t>
-            </a:r>
-          </a:p>
-        </p:txBody>
-      </p:sp>
-      <p:sp>
-        <p:nvSpPr>
-          <p:cNvPr id="162" name="TextBox 161"/>
-          <p:cNvSpPr txBox="1"/>
-          <p:nvPr/>
-        </p:nvSpPr>
-        <p:spPr>
-          <a:xfrm>
-            <a:off x="13231368" y="6345936"/>
-            <a:ext cx="4059936" cy="219456"/>
-          </a:xfrm>
-          <a:prstGeom prst="rect">
-            <a:avLst/>
-          </a:prstGeom>
-          <a:noFill/>
-        </p:spPr>
-        <p:txBody>
-          <a:bodyPr wrap="square" anchor="t" lIns="0" rIns="0" tIns="0" bIns="0">
-            <a:spAutoFit/>
-          </a:bodyPr>
-          <a:lstStyle/>
-          <a:p>
-            <a:pPr algn="l">
-              <a:lnSpc>
-                <a:spcPct val="112000"/>
-              </a:lnSpc>
-            </a:pPr>
-            <a:r>
-              <a:rPr sz="950" b="0">
-                <a:solidFill>
-                  <a:srgbClr val="555555"/>
-                </a:solidFill>
-                <a:latin typeface="Arial"/>
-                <a:ea typeface="Arial"/>
-              </a:rPr>
-              <a:t>요구 1~3 DWPD ÷ 현 QLC 정격 0.6</a:t>
-            </a:r>
-          </a:p>
-        </p:txBody>
-      </p:sp>
-      <p:sp>
-        <p:nvSpPr>
-          <p:cNvPr id="163" name="Rectangle 162"/>
-          <p:cNvSpPr/>
-          <p:nvPr/>
-        </p:nvSpPr>
-        <p:spPr>
-          <a:xfrm>
-            <a:off x="13231368" y="6656831"/>
-            <a:ext cx="4059936" cy="1554480"/>
-          </a:xfrm>
-          <a:prstGeom prst="rect">
-            <a:avLst/>
-          </a:prstGeom>
-          <a:solidFill>
-            <a:srgbClr val="1428A0"/>
-          </a:solidFill>
-          <a:ln>
-            <a:noFill/>
-          </a:ln>
-          <a:effectLst/>
-        </p:spPr>
-        <p:style>
-          <a:lnRef idx="1">
-            <a:schemeClr val="accent1"/>
-          </a:lnRef>
-          <a:fillRef idx="3">
-            <a:schemeClr val="accent1"/>
-          </a:fillRef>
-          <a:effectRef idx="2">
-            <a:schemeClr val="accent1"/>
-          </a:effectRef>
-          <a:fontRef idx="minor">
-            <a:schemeClr val="lt1"/>
-          </a:fontRef>
-        </p:style>
-        <p:txBody>
-          <a:bodyPr rtlCol="0" anchor="ctr"/>
-          <a:lstStyle/>
-          <a:p>
-            <a:pPr algn="ctr"/>
-          </a:p>
-        </p:txBody>
-      </p:sp>
-      <p:sp>
-        <p:nvSpPr>
-          <p:cNvPr id="164" name="TextBox 163"/>
-          <p:cNvSpPr txBox="1"/>
-          <p:nvPr/>
-        </p:nvSpPr>
-        <p:spPr>
-          <a:xfrm>
-            <a:off x="13432536" y="6784847"/>
-            <a:ext cx="3657600" cy="1298448"/>
-          </a:xfrm>
-          <a:prstGeom prst="rect">
-            <a:avLst/>
-          </a:prstGeom>
-          <a:noFill/>
-        </p:spPr>
-        <p:txBody>
-          <a:bodyPr wrap="square" anchor="ctr" lIns="0" rIns="0" tIns="0" bIns="0">
-            <a:spAutoFit/>
-          </a:bodyPr>
-          <a:lstStyle/>
-          <a:p>
-            <a:pPr algn="l">
-              <a:lnSpc>
-                <a:spcPct val="112000"/>
-              </a:lnSpc>
-            </a:pPr>
-            <a:r>
-              <a:rPr sz="1350" b="1">
-                <a:solidFill>
-                  <a:srgbClr val="FFFFFF"/>
-                </a:solidFill>
-                <a:latin typeface="Arial"/>
-                <a:ea typeface="Arial"/>
-              </a:rPr>
-              <a:t>고객은 QLC의 밀도와 원가를 원하면서 TLC의 내구성을 요구합니다</a:t>
-            </a:r>
-          </a:p>
-          <a:p>
-            <a:pPr algn="l">
-              <a:lnSpc>
-                <a:spcPct val="112000"/>
-              </a:lnSpc>
-            </a:pPr>
-            <a:r>
-              <a:rPr sz="1125" b="0">
-                <a:solidFill>
-                  <a:srgbClr val="AAB8E8"/>
-                </a:solidFill>
-                <a:latin typeface="Arial"/>
-                <a:ea typeface="Arial"/>
-              </a:rPr>
-              <a:t>이 간극을 메우는 것이 우리가 풀 문제입니다</a:t>
-            </a:r>
-          </a:p>
-        </p:txBody>
-      </p:sp>
-      <p:sp>
-        <p:nvSpPr>
-          <p:cNvPr id="165" name="Rectangle 164"/>
-          <p:cNvSpPr/>
-          <p:nvPr/>
-        </p:nvSpPr>
-        <p:spPr>
-          <a:xfrm>
-            <a:off x="722376" y="8613648"/>
-            <a:ext cx="16843248" cy="731520"/>
-          </a:xfrm>
-          <a:prstGeom prst="rect">
-            <a:avLst/>
-          </a:prstGeom>
-          <a:solidFill>
-            <a:srgbClr val="1428A0"/>
-          </a:solidFill>
-          <a:ln>
-            <a:noFill/>
-          </a:ln>
-          <a:effectLst/>
-        </p:spPr>
-        <p:style>
-          <a:lnRef idx="1">
-            <a:schemeClr val="accent1"/>
-          </a:lnRef>
-          <a:fillRef idx="3">
-            <a:schemeClr val="accent1"/>
-          </a:fillRef>
-          <a:effectRef idx="2">
-            <a:schemeClr val="accent1"/>
-          </a:effectRef>
-          <a:fontRef idx="minor">
-            <a:schemeClr val="lt1"/>
-          </a:fontRef>
-        </p:style>
-        <p:txBody>
-          <a:bodyPr rtlCol="0" anchor="ctr"/>
-          <a:lstStyle/>
-          <a:p>
-            <a:pPr algn="ctr"/>
-          </a:p>
-        </p:txBody>
-      </p:sp>
-      <p:sp>
-        <p:nvSpPr>
-          <p:cNvPr id="166" name="TextBox 165"/>
           <p:cNvSpPr txBox="1"/>
           <p:nvPr/>
         </p:nvSpPr>
@@ -11175,7 +10430,7 @@
       </p:sp>
       <p:sp>
         <p:nvSpPr>
-          <p:cNvPr id="167" name="TextBox 166"/>
+          <p:cNvPr id="153" name="TextBox 152"/>
           <p:cNvSpPr txBox="1"/>
           <p:nvPr/>
         </p:nvSpPr>
@@ -11208,7 +10463,7 @@
                 <a:latin typeface="Arial"/>
                 <a:ea typeface="Arial"/>
               </a:rPr>
-              <a:t>HBM의 교훈은 수요를 고객과 함께 설계하는 것이었고, 그 수요가 지금 HBM 위에 새 스토리지 계층을 얹고 있습니다.</a:t>
+              <a:t>HBM의 교훈은 표준 충족이 아니라 고객 요구 사양을 먼저 맞추는 것이 design-in을 가른다는 것이었습니다.</a:t>
             </a:r>
           </a:p>
           <a:p>
@@ -11225,14 +10480,14 @@
                 <a:latin typeface="Arial"/>
                 <a:ea typeface="Arial"/>
               </a:rPr>
-              <a:t>고객은 QLC의 밀도와 원가로 TLC의 1~3 DWPD를 요구하며, 현 정격 0.6과는 2~5배 거리가 있습니다</a:t>
-            </a:r>
-          </a:p>
-        </p:txBody>
-      </p:sp>
-      <p:sp>
-        <p:nvSpPr>
-          <p:cNvPr id="168" name="Rectangle 167"/>
+              <a:t>같은 전환이 SSD에서 일어나 내구성이 요구로 더해졌고, 고용량 QLC로 그 요구를 만족할 수 있는가가 문제입니다</a:t>
+            </a:r>
+          </a:p>
+        </p:txBody>
+      </p:sp>
+      <p:sp>
+        <p:nvSpPr>
+          <p:cNvPr id="154" name="Rectangle 153"/>
           <p:cNvSpPr/>
           <p:nvPr/>
         </p:nvSpPr>
@@ -11276,7 +10531,7 @@
       </p:sp>
       <p:sp>
         <p:nvSpPr>
-          <p:cNvPr id="169" name="Rectangle 168"/>
+          <p:cNvPr id="155" name="Rectangle 154"/>
           <p:cNvSpPr/>
           <p:nvPr/>
         </p:nvSpPr>
@@ -11320,7 +10575,7 @@
       </p:sp>
       <p:sp>
         <p:nvSpPr>
-          <p:cNvPr id="170" name="TextBox 169"/>
+          <p:cNvPr id="156" name="TextBox 155"/>
           <p:cNvSpPr txBox="1"/>
           <p:nvPr/>
         </p:nvSpPr>
@@ -11377,7 +10632,7 @@
       </p:sp>
       <p:sp>
         <p:nvSpPr>
-          <p:cNvPr id="171" name="TextBox 170"/>
+          <p:cNvPr id="157" name="TextBox 156"/>
           <p:cNvSpPr txBox="1"/>
           <p:nvPr/>
         </p:nvSpPr>
@@ -11410,14 +10665,14 @@
                 <a:latin typeface="Arial"/>
                 <a:ea typeface="Arial"/>
               </a:rPr>
-              <a:t>출처: HBM 연표 각사 발표 · JEDEC JESD270-4, CNBC 2024-11-08(⚠️ 단일 출처), 서울경제 2026-07-29(SK하이닉스 실적 콜 🟡)·2026-07-20(CMX 🟡), NVIDIA 개발자 블로그(KV 40GB 🟡), GitHub PR(LMCache·vLLM ✅), Counterpoint Q2 2026, TrendForce(HBM 용량)</a:t>
-            </a:r>
-          </a:p>
-        </p:txBody>
-      </p:sp>
-      <p:sp>
-        <p:nvSpPr>
-          <p:cNvPr id="172" name="TextBox 171"/>
+              <a:t>출처: JEDEC JESD270-4 · NVIDIA 요구 10~13Gbps(업계 보도 🟡), 서울경제 2026-07-29(SK하이닉스 실적 콜 🟡), NVIDIA 개발자 블로그(KV 40GB 🟡), GitHub PR(LMCache·vLLM ✅), Counterpoint Q2 2026, Kioxia IR 2026-06-02, 각사 제품 사양(DWPD)</a:t>
+            </a:r>
+          </a:p>
+        </p:txBody>
+      </p:sp>
+      <p:sp>
+        <p:nvSpPr>
+          <p:cNvPr id="158" name="TextBox 157"/>
           <p:cNvSpPr txBox="1"/>
           <p:nvPr/>
         </p:nvSpPr>

--- a/outputs/presentation/qlc-ssd-strategy.pptx
+++ b/outputs/presentation/qlc-ssd-strategy.pptx
@@ -9068,13 +9068,57 @@
       </p:sp>
       <p:sp>
         <p:nvSpPr>
-          <p:cNvPr id="121" name="TextBox 120"/>
-          <p:cNvSpPr txBox="1"/>
-          <p:nvPr/>
-        </p:nvSpPr>
-        <p:spPr>
-          <a:xfrm>
-            <a:off x="7397496" y="7754112"/>
+          <p:cNvPr id="121" name="Rectangle 120"/>
+          <p:cNvSpPr/>
+          <p:nvPr/>
+        </p:nvSpPr>
+        <p:spPr>
+          <a:xfrm>
+            <a:off x="7397496" y="7772400"/>
+            <a:ext cx="4919472" cy="10972"/>
+          </a:xfrm>
+          <a:prstGeom prst="rect">
+            <a:avLst/>
+          </a:prstGeom>
+          <a:solidFill>
+            <a:srgbClr val="D9D9D9"/>
+          </a:solidFill>
+          <a:ln>
+            <a:noFill/>
+          </a:ln>
+          <a:effectLst/>
+        </p:spPr>
+        <p:style>
+          <a:lnRef idx="1">
+            <a:schemeClr val="accent1"/>
+          </a:lnRef>
+          <a:fillRef idx="3">
+            <a:schemeClr val="accent1"/>
+          </a:fillRef>
+          <a:effectRef idx="2">
+            <a:schemeClr val="accent1"/>
+          </a:effectRef>
+          <a:fontRef idx="minor">
+            <a:schemeClr val="lt1"/>
+          </a:fontRef>
+        </p:style>
+        <p:txBody>
+          <a:bodyPr rtlCol="0" anchor="ctr"/>
+          <a:lstStyle/>
+          <a:p>
+            <a:pPr algn="ctr"/>
+          </a:p>
+        </p:txBody>
+      </p:sp>
+      <p:sp>
+        <p:nvSpPr>
+          <p:cNvPr id="122" name="TextBox 121"/>
+          <p:cNvSpPr txBox="1"/>
+          <p:nvPr/>
+        </p:nvSpPr>
+        <p:spPr>
+          <a:xfrm>
+            <a:off x="7397496" y="7827263"/>
             <a:ext cx="4919472" cy="182880"/>
           </a:xfrm>
           <a:prstGeom prst="rect">
@@ -9094,6 +9138,56 @@
               </a:lnSpc>
             </a:pPr>
             <a:r>
+              <a:rPr sz="950" b="1">
+                <a:solidFill>
+                  <a:srgbClr val="1428A0"/>
+                </a:solidFill>
+                <a:latin typeface="Arial"/>
+                <a:ea typeface="Arial"/>
+              </a:rPr>
+              <a:t>2026년 추론 지출이 학습을 처음 추월합니다  </a:t>
+            </a:r>
+            <a:r>
+              <a:rPr sz="950" b="0">
+                <a:solidFill>
+                  <a:srgbClr val="555555"/>
+                </a:solidFill>
+                <a:latin typeface="Arial"/>
+                <a:ea typeface="Arial"/>
+              </a:rPr>
+              <a:t>AI 최적화 IaaS의 55%</a:t>
+            </a:r>
+          </a:p>
+        </p:txBody>
+      </p:sp>
+      <p:sp>
+        <p:nvSpPr>
+          <p:cNvPr id="123" name="TextBox 122"/>
+          <p:cNvSpPr txBox="1"/>
+          <p:nvPr/>
+        </p:nvSpPr>
+        <p:spPr>
+          <a:xfrm>
+            <a:off x="7397496" y="8010144"/>
+            <a:ext cx="4919472" cy="182880"/>
+          </a:xfrm>
+          <a:prstGeom prst="rect">
+            <a:avLst/>
+          </a:prstGeom>
+          <a:noFill/>
+        </p:spPr>
+        <p:txBody>
+          <a:bodyPr wrap="square" anchor="t" lIns="0" rIns="0" tIns="0" bIns="0">
+            <a:spAutoFit/>
+          </a:bodyPr>
+          <a:lstStyle/>
+          <a:p>
+            <a:pPr algn="l">
+              <a:lnSpc>
+                <a:spcPct val="112000"/>
+              </a:lnSpc>
+            </a:pPr>
+            <a:r>
               <a:rPr sz="850" b="0">
                 <a:solidFill>
                   <a:srgbClr val="8A8A8A"/>
@@ -9101,14 +9195,14 @@
                 <a:latin typeface="Arial"/>
                 <a:ea typeface="Arial"/>
               </a:rPr>
-              <a:t>AI 수요의 중심이 추론으로 빠르게 확대되고 있습니다 · 데이터센터 NAND 295EB(2025) → 1,807EB(2028), Kioxia 전망</a:t>
-            </a:r>
-          </a:p>
-        </p:txBody>
-      </p:sp>
-      <p:sp>
-        <p:nvSpPr>
-          <p:cNvPr id="122" name="Rectangle 121"/>
+              <a:t>추론 $23.3B 대 학습 $19.0B(Gartner 2026-08-10) · DC NAND 295EB → 909EB(CY28, Kioxia)</a:t>
+            </a:r>
+          </a:p>
+        </p:txBody>
+      </p:sp>
+      <p:sp>
+        <p:nvSpPr>
+          <p:cNvPr id="124" name="Rectangle 123"/>
           <p:cNvSpPr/>
           <p:nvPr/>
         </p:nvSpPr>
@@ -9154,7 +9248,7 @@
       </p:sp>
       <p:sp>
         <p:nvSpPr>
-          <p:cNvPr id="123" name="Rectangle 122"/>
+          <p:cNvPr id="125" name="Rectangle 124"/>
           <p:cNvSpPr/>
           <p:nvPr/>
         </p:nvSpPr>
@@ -9198,7 +9292,7 @@
       </p:sp>
       <p:sp>
         <p:nvSpPr>
-          <p:cNvPr id="124" name="TextBox 123"/>
+          <p:cNvPr id="126" name="TextBox 125"/>
           <p:cNvSpPr txBox="1"/>
           <p:nvPr/>
         </p:nvSpPr>
@@ -9248,7 +9342,7 @@
       </p:sp>
       <p:sp>
         <p:nvSpPr>
-          <p:cNvPr id="125" name="TextBox 124"/>
+          <p:cNvPr id="127" name="TextBox 126"/>
           <p:cNvSpPr txBox="1"/>
           <p:nvPr/>
         </p:nvSpPr>
@@ -9288,7 +9382,7 @@
       </p:sp>
       <p:sp>
         <p:nvSpPr>
-          <p:cNvPr id="126" name="TextBox 125"/>
+          <p:cNvPr id="128" name="TextBox 127"/>
           <p:cNvSpPr txBox="1"/>
           <p:nvPr/>
         </p:nvSpPr>
@@ -9328,7 +9422,7 @@
       </p:sp>
       <p:sp>
         <p:nvSpPr>
-          <p:cNvPr id="127" name="Rectangle 126"/>
+          <p:cNvPr id="129" name="Rectangle 128"/>
           <p:cNvSpPr/>
           <p:nvPr/>
         </p:nvSpPr>
@@ -9374,7 +9468,7 @@
       </p:sp>
       <p:sp>
         <p:nvSpPr>
-          <p:cNvPr id="128" name="Rectangle 127"/>
+          <p:cNvPr id="130" name="Rectangle 129"/>
           <p:cNvSpPr/>
           <p:nvPr/>
         </p:nvSpPr>
@@ -9418,7 +9512,7 @@
       </p:sp>
       <p:sp>
         <p:nvSpPr>
-          <p:cNvPr id="129" name="TextBox 128"/>
+          <p:cNvPr id="131" name="TextBox 130"/>
           <p:cNvSpPr txBox="1"/>
           <p:nvPr/>
         </p:nvSpPr>
@@ -9458,7 +9552,7 @@
       </p:sp>
       <p:sp>
         <p:nvSpPr>
-          <p:cNvPr id="130" name="TextBox 129"/>
+          <p:cNvPr id="132" name="TextBox 131"/>
           <p:cNvSpPr txBox="1"/>
           <p:nvPr/>
         </p:nvSpPr>
@@ -9498,7 +9592,7 @@
       </p:sp>
       <p:sp>
         <p:nvSpPr>
-          <p:cNvPr id="131" name="TextBox 130"/>
+          <p:cNvPr id="133" name="TextBox 132"/>
           <p:cNvSpPr txBox="1"/>
           <p:nvPr/>
         </p:nvSpPr>
@@ -9538,7 +9632,7 @@
       </p:sp>
       <p:sp>
         <p:nvSpPr>
-          <p:cNvPr id="132" name="TextBox 131"/>
+          <p:cNvPr id="134" name="TextBox 133"/>
           <p:cNvSpPr txBox="1"/>
           <p:nvPr/>
         </p:nvSpPr>
@@ -9578,7 +9672,7 @@
       </p:sp>
       <p:sp>
         <p:nvSpPr>
-          <p:cNvPr id="133" name="TextBox 132"/>
+          <p:cNvPr id="135" name="TextBox 134"/>
           <p:cNvSpPr txBox="1"/>
           <p:nvPr/>
         </p:nvSpPr>
@@ -9618,7 +9712,7 @@
       </p:sp>
       <p:sp>
         <p:nvSpPr>
-          <p:cNvPr id="134" name="TextBox 133"/>
+          <p:cNvPr id="136" name="TextBox 135"/>
           <p:cNvSpPr txBox="1"/>
           <p:nvPr/>
         </p:nvSpPr>
@@ -9658,7 +9752,7 @@
       </p:sp>
       <p:sp>
         <p:nvSpPr>
-          <p:cNvPr id="135" name="TextBox 134"/>
+          <p:cNvPr id="137" name="TextBox 136"/>
           <p:cNvSpPr txBox="1"/>
           <p:nvPr/>
         </p:nvSpPr>
@@ -9698,7 +9792,7 @@
       </p:sp>
       <p:sp>
         <p:nvSpPr>
-          <p:cNvPr id="136" name="TextBox 135"/>
+          <p:cNvPr id="138" name="TextBox 137"/>
           <p:cNvSpPr txBox="1"/>
           <p:nvPr/>
         </p:nvSpPr>
@@ -9738,7 +9832,7 @@
       </p:sp>
       <p:sp>
         <p:nvSpPr>
-          <p:cNvPr id="137" name="Rectangle 136"/>
+          <p:cNvPr id="139" name="Rectangle 138"/>
           <p:cNvSpPr/>
           <p:nvPr/>
         </p:nvSpPr>
@@ -9784,7 +9878,7 @@
       </p:sp>
       <p:sp>
         <p:nvSpPr>
-          <p:cNvPr id="138" name="Rectangle 137"/>
+          <p:cNvPr id="140" name="Rectangle 139"/>
           <p:cNvSpPr/>
           <p:nvPr/>
         </p:nvSpPr>
@@ -9828,7 +9922,7 @@
       </p:sp>
       <p:sp>
         <p:nvSpPr>
-          <p:cNvPr id="139" name="TextBox 138"/>
+          <p:cNvPr id="141" name="TextBox 140"/>
           <p:cNvSpPr txBox="1"/>
           <p:nvPr/>
         </p:nvSpPr>
@@ -9868,7 +9962,7 @@
       </p:sp>
       <p:sp>
         <p:nvSpPr>
-          <p:cNvPr id="140" name="TextBox 139"/>
+          <p:cNvPr id="142" name="TextBox 141"/>
           <p:cNvSpPr txBox="1"/>
           <p:nvPr/>
         </p:nvSpPr>
@@ -9908,7 +10002,7 @@
       </p:sp>
       <p:sp>
         <p:nvSpPr>
-          <p:cNvPr id="141" name="TextBox 140"/>
+          <p:cNvPr id="143" name="TextBox 142"/>
           <p:cNvSpPr txBox="1"/>
           <p:nvPr/>
         </p:nvSpPr>
@@ -9948,7 +10042,7 @@
       </p:sp>
       <p:sp>
         <p:nvSpPr>
-          <p:cNvPr id="142" name="TextBox 141"/>
+          <p:cNvPr id="144" name="TextBox 143"/>
           <p:cNvSpPr txBox="1"/>
           <p:nvPr/>
         </p:nvSpPr>
@@ -9981,14 +10075,14 @@
                 <a:latin typeface="Arial"/>
                 <a:ea typeface="Arial"/>
               </a:rPr>
-              <a:t>0.3 ~ 1.0</a:t>
-            </a:r>
-          </a:p>
-        </p:txBody>
-      </p:sp>
-      <p:sp>
-        <p:nvSpPr>
-          <p:cNvPr id="143" name="TextBox 142"/>
+              <a:t>0.3 ~ 0.6</a:t>
+            </a:r>
+          </a:p>
+        </p:txBody>
+      </p:sp>
+      <p:sp>
+        <p:nvSpPr>
+          <p:cNvPr id="145" name="TextBox 144"/>
           <p:cNvSpPr txBox="1"/>
           <p:nvPr/>
         </p:nvSpPr>
@@ -10028,7 +10122,7 @@
       </p:sp>
       <p:sp>
         <p:nvSpPr>
-          <p:cNvPr id="144" name="TextBox 143"/>
+          <p:cNvPr id="146" name="TextBox 145"/>
           <p:cNvSpPr txBox="1"/>
           <p:nvPr/>
         </p:nvSpPr>
@@ -10068,7 +10162,7 @@
       </p:sp>
       <p:sp>
         <p:nvSpPr>
-          <p:cNvPr id="145" name="TextBox 144"/>
+          <p:cNvPr id="147" name="TextBox 146"/>
           <p:cNvSpPr txBox="1"/>
           <p:nvPr/>
         </p:nvSpPr>
@@ -10108,7 +10202,7 @@
       </p:sp>
       <p:sp>
         <p:nvSpPr>
-          <p:cNvPr id="146" name="TextBox 145"/>
+          <p:cNvPr id="148" name="TextBox 147"/>
           <p:cNvSpPr txBox="1"/>
           <p:nvPr/>
         </p:nvSpPr>
@@ -10148,14 +10242,14 @@
       </p:sp>
       <p:sp>
         <p:nvSpPr>
-          <p:cNvPr id="147" name="TextBox 146"/>
+          <p:cNvPr id="149" name="TextBox 148"/>
           <p:cNvSpPr txBox="1"/>
           <p:nvPr/>
         </p:nvSpPr>
         <p:spPr>
           <a:xfrm>
             <a:off x="13231368" y="5468112"/>
-            <a:ext cx="4059936" cy="329184"/>
+            <a:ext cx="4059936" cy="512064"/>
           </a:xfrm>
           <a:prstGeom prst="rect">
             <a:avLst/>
@@ -10170,7 +10264,7 @@
           <a:p>
             <a:pPr algn="l">
               <a:lnSpc>
-                <a:spcPct val="102000"/>
+                <a:spcPct val="104000"/>
               </a:lnSpc>
             </a:pPr>
             <a:r>
@@ -10181,21 +10275,38 @@
                 <a:latin typeface="Arial"/>
                 <a:ea typeface="Arial"/>
               </a:rPr>
-              <a:t>QLC 정격은 제품·기준 블록에 따라 다릅니다 · 245TB급은 0.3 DWPD 수준</a:t>
-            </a:r>
-          </a:p>
-        </p:txBody>
-      </p:sp>
-      <p:sp>
-        <p:nvSpPr>
-          <p:cNvPr id="148" name="Rectangle 147"/>
-          <p:cNvSpPr/>
-          <p:nvPr/>
-        </p:nvSpPr>
-        <p:spPr>
-          <a:xfrm>
-            <a:off x="13231368" y="5852160"/>
-            <a:ext cx="4059936" cy="2487168"/>
+              <a:t>245TB급 헤드라인 정격입니다 — Kioxia LC9 0.3 · 삼성 BM1773 0.6</a:t>
+            </a:r>
+          </a:p>
+          <a:p>
+            <a:pPr algn="l">
+              <a:lnSpc>
+                <a:spcPct val="104000"/>
+              </a:lnSpc>
+            </a:pPr>
+            <a:r>
+              <a:rPr sz="900" b="0">
+                <a:solidFill>
+                  <a:srgbClr val="8A8A8A"/>
+                </a:solidFill>
+                <a:latin typeface="Arial"/>
+                <a:ea typeface="Arial"/>
+              </a:rPr>
+              <a:t>두 제품 모두 측정 워크로드를 공개하지 않아 나란히 비교할 수 없습니다</a:t>
+            </a:r>
+          </a:p>
+        </p:txBody>
+      </p:sp>
+      <p:sp>
+        <p:nvSpPr>
+          <p:cNvPr id="150" name="Rectangle 149"/>
+          <p:cNvSpPr/>
+          <p:nvPr/>
+        </p:nvSpPr>
+        <p:spPr>
+          <a:xfrm>
+            <a:off x="13231368" y="6035040"/>
+            <a:ext cx="4059936" cy="2304288"/>
           </a:xfrm>
           <a:prstGeom prst="rect">
             <a:avLst/>
@@ -10232,13 +10343,13 @@
       </p:sp>
       <p:sp>
         <p:nvSpPr>
-          <p:cNvPr id="149" name="TextBox 148"/>
-          <p:cNvSpPr txBox="1"/>
-          <p:nvPr/>
-        </p:nvSpPr>
-        <p:spPr>
-          <a:xfrm>
-            <a:off x="13432536" y="5998464"/>
+          <p:cNvPr id="151" name="TextBox 150"/>
+          <p:cNvSpPr txBox="1"/>
+          <p:nvPr/>
+        </p:nvSpPr>
+        <p:spPr>
+          <a:xfrm>
+            <a:off x="13432536" y="6181344"/>
             <a:ext cx="3657600" cy="274320"/>
           </a:xfrm>
           <a:prstGeom prst="rect">
@@ -10272,14 +10383,14 @@
       </p:sp>
       <p:sp>
         <p:nvSpPr>
-          <p:cNvPr id="150" name="TextBox 149"/>
-          <p:cNvSpPr txBox="1"/>
-          <p:nvPr/>
-        </p:nvSpPr>
-        <p:spPr>
-          <a:xfrm>
-            <a:off x="13432536" y="6291072"/>
-            <a:ext cx="3657600" cy="1938528"/>
+          <p:cNvPr id="152" name="TextBox 151"/>
+          <p:cNvSpPr txBox="1"/>
+          <p:nvPr/>
+        </p:nvSpPr>
+        <p:spPr>
+          <a:xfrm>
+            <a:off x="13432536" y="6473952"/>
+            <a:ext cx="3657600" cy="1755648"/>
           </a:xfrm>
           <a:prstGeom prst="rect">
             <a:avLst/>
@@ -10346,7 +10457,7 @@
       </p:sp>
       <p:sp>
         <p:nvSpPr>
-          <p:cNvPr id="151" name="Rectangle 150"/>
+          <p:cNvPr id="153" name="Rectangle 152"/>
           <p:cNvSpPr/>
           <p:nvPr/>
         </p:nvSpPr>
@@ -10390,7 +10501,7 @@
       </p:sp>
       <p:sp>
         <p:nvSpPr>
-          <p:cNvPr id="152" name="TextBox 151"/>
+          <p:cNvPr id="154" name="TextBox 153"/>
           <p:cNvSpPr txBox="1"/>
           <p:nvPr/>
         </p:nvSpPr>
@@ -10430,7 +10541,7 @@
       </p:sp>
       <p:sp>
         <p:nvSpPr>
-          <p:cNvPr id="153" name="TextBox 152"/>
+          <p:cNvPr id="155" name="TextBox 154"/>
           <p:cNvSpPr txBox="1"/>
           <p:nvPr/>
         </p:nvSpPr>
@@ -10487,7 +10598,7 @@
       </p:sp>
       <p:sp>
         <p:nvSpPr>
-          <p:cNvPr id="154" name="Rectangle 153"/>
+          <p:cNvPr id="156" name="Rectangle 155"/>
           <p:cNvSpPr/>
           <p:nvPr/>
         </p:nvSpPr>
@@ -10531,7 +10642,7 @@
       </p:sp>
       <p:sp>
         <p:nvSpPr>
-          <p:cNvPr id="155" name="Rectangle 154"/>
+          <p:cNvPr id="157" name="Rectangle 156"/>
           <p:cNvSpPr/>
           <p:nvPr/>
         </p:nvSpPr>
@@ -10575,7 +10686,7 @@
       </p:sp>
       <p:sp>
         <p:nvSpPr>
-          <p:cNvPr id="156" name="TextBox 155"/>
+          <p:cNvPr id="158" name="TextBox 157"/>
           <p:cNvSpPr txBox="1"/>
           <p:nvPr/>
         </p:nvSpPr>
@@ -10632,7 +10743,7 @@
       </p:sp>
       <p:sp>
         <p:nvSpPr>
-          <p:cNvPr id="157" name="TextBox 156"/>
+          <p:cNvPr id="159" name="TextBox 158"/>
           <p:cNvSpPr txBox="1"/>
           <p:nvPr/>
         </p:nvSpPr>
@@ -10665,14 +10776,14 @@
                 <a:latin typeface="Arial"/>
                 <a:ea typeface="Arial"/>
               </a:rPr>
-              <a:t>출처: JEDEC JESD270-4 · NVIDIA 요구 10~13Gbps(업계 보도 🟡), 서울경제 2026-07-29(SK하이닉스 실적 콜 🟡), NVIDIA 개발자 블로그(KV 40GB 🟡), GitHub PR(LMCache·vLLM ✅), Counterpoint Q2 2026, Kioxia IR 2026-06-02, 각사 제품 사양(DWPD)</a:t>
-            </a:r>
-          </a:p>
-        </p:txBody>
-      </p:sp>
-      <p:sp>
-        <p:nvSpPr>
-          <p:cNvPr id="158" name="TextBox 157"/>
+              <a:t>출처: JEDEC JESD270-4 · NVIDIA 요구 10~13Gbps(업계 보도 🟡), 서울경제 2026-07-29(SK하이닉스 실적 콜 🟡), NVIDIA 개발자 블로그(KV 40GB 🟡), GitHub PR(LMCache·vLLM ✅), Counterpoint Q2 2026, Gartner 2026-08-10 ✅, Kioxia IR 2026-06-02 ✅, 각사 제품 사양(DWPD)</a:t>
+            </a:r>
+          </a:p>
+        </p:txBody>
+      </p:sp>
+      <p:sp>
+        <p:nvSpPr>
+          <p:cNvPr id="160" name="TextBox 159"/>
           <p:cNvSpPr txBox="1"/>
           <p:nvPr/>
         </p:nvSpPr>

--- a/outputs/presentation/qlc-ssd-strategy.pptx
+++ b/outputs/presentation/qlc-ssd-strategy.pptx
@@ -5347,7 +5347,7 @@
                 <a:latin typeface="Arial"/>
                 <a:ea typeface="Arial"/>
               </a:rPr>
-              <a:t>표준 충족이 아니라 고객 사양이 design-in을 갈랐고, 그 사양에 지금 내구성이 더해지고 있습니다</a:t>
+              <a:t>규격이 아니라 양산 시점이 소켓을 갈랐고, 지금 그 고객 일정에 내구성이 요구로 더해집니다</a:t>
             </a:r>
           </a:p>
         </p:txBody>
@@ -5387,7 +5387,7 @@
                 <a:latin typeface="Arial"/>
                 <a:ea typeface="Arial"/>
               </a:rPr>
-              <a:t>표준을 만족하는 기술 보유만으로는 design-in이 결정되지 않았습니다. 같은 전환이 지금 SSD에서 일어나 고객 요구에 내구성이 더해지고 있습니다.</a:t>
+              <a:t>2022년 HBM3에서 두 회사의 공표 스펙은 같았습니다. 갈린 것은 양산 시점이었고, 같은 구조가 지금 SSD에서 반복됩니다.</a:t>
             </a:r>
           </a:p>
         </p:txBody>
@@ -5571,7 +5571,7 @@
                 <a:latin typeface="Arial"/>
                 <a:ea typeface="Arial"/>
               </a:rPr>
-              <a:t>교훈 · HBM이 남긴 것</a:t>
+              <a:t>교훈 · HBM3가 남긴 것</a:t>
             </a:r>
           </a:p>
         </p:txBody>
@@ -5611,67 +5611,27 @@
                 <a:latin typeface="Arial"/>
                 <a:ea typeface="Arial"/>
               </a:rPr>
-              <a:t>표준 충족과 design-in은 다른 선이었다</a:t>
-            </a:r>
-          </a:p>
-        </p:txBody>
-      </p:sp>
-      <p:sp>
-        <p:nvSpPr>
-          <p:cNvPr id="40" name="TextBox 39"/>
-          <p:cNvSpPr txBox="1"/>
-          <p:nvPr/>
-        </p:nvSpPr>
-        <p:spPr>
-          <a:xfrm>
-            <a:off x="996696" y="3310127"/>
-            <a:ext cx="5486400" cy="201168"/>
-          </a:xfrm>
-          <a:prstGeom prst="rect">
-            <a:avLst/>
-          </a:prstGeom>
-          <a:noFill/>
-        </p:spPr>
-        <p:txBody>
-          <a:bodyPr wrap="square" anchor="t" lIns="0" rIns="0" tIns="0" bIns="0">
-            <a:spAutoFit/>
-          </a:bodyPr>
-          <a:lstStyle/>
-          <a:p>
-            <a:pPr algn="l">
-              <a:lnSpc>
-                <a:spcPct val="112000"/>
-              </a:lnSpc>
-            </a:pPr>
-            <a:r>
-              <a:rPr sz="1000" b="0">
-                <a:solidFill>
-                  <a:srgbClr val="8A8A8A"/>
-                </a:solidFill>
-                <a:latin typeface="Arial"/>
-                <a:ea typeface="Arial"/>
-              </a:rPr>
-              <a:t>같은 세대에서 두 개의 선이 있었습니다</a:t>
-            </a:r>
-          </a:p>
-        </p:txBody>
-      </p:sp>
-      <p:sp>
-        <p:nvSpPr>
-          <p:cNvPr id="41" name="Rectangle 40"/>
-          <p:cNvSpPr/>
-          <p:nvPr/>
-        </p:nvSpPr>
-        <p:spPr>
-          <a:xfrm>
-            <a:off x="996696" y="3584448"/>
-            <a:ext cx="1792224" cy="420624"/>
-          </a:xfrm>
-          <a:prstGeom prst="rect">
-            <a:avLst/>
-          </a:prstGeom>
-          <a:solidFill>
-            <a:srgbClr val="FFFFFF"/>
+              <a:t>갈린 것은 규격이 아니라 양산 시점이었다</a:t>
+            </a:r>
+          </a:p>
+        </p:txBody>
+      </p:sp>
+      <p:sp>
+        <p:nvSpPr>
+          <p:cNvPr id="40" name="Rectangle 39"/>
+          <p:cNvSpPr/>
+          <p:nvPr/>
+        </p:nvSpPr>
+        <p:spPr>
+          <a:xfrm>
+            <a:off x="996696" y="3291839"/>
+            <a:ext cx="5486400" cy="475488"/>
+          </a:xfrm>
+          <a:prstGeom prst="rect">
+            <a:avLst/>
+          </a:prstGeom>
+          <a:solidFill>
+            <a:srgbClr val="F4F6FC"/>
           </a:solidFill>
           <a:ln>
             <a:noFill/>
@@ -5702,22 +5662,62 @@
       </p:sp>
       <p:sp>
         <p:nvSpPr>
+          <p:cNvPr id="41" name="TextBox 40"/>
+          <p:cNvSpPr txBox="1"/>
+          <p:nvPr/>
+        </p:nvSpPr>
+        <p:spPr>
+          <a:xfrm>
+            <a:off x="1161288" y="3337559"/>
+            <a:ext cx="5157216" cy="201168"/>
+          </a:xfrm>
+          <a:prstGeom prst="rect">
+            <a:avLst/>
+          </a:prstGeom>
+          <a:noFill/>
+        </p:spPr>
+        <p:txBody>
+          <a:bodyPr wrap="square" anchor="t" lIns="0" rIns="0" tIns="0" bIns="0">
+            <a:spAutoFit/>
+          </a:bodyPr>
+          <a:lstStyle/>
+          <a:p>
+            <a:pPr algn="l">
+              <a:lnSpc>
+                <a:spcPct val="112000"/>
+              </a:lnSpc>
+            </a:pPr>
+            <a:r>
+              <a:rPr sz="1050" b="1">
+                <a:solidFill>
+                  <a:srgbClr val="1428A0"/>
+                </a:solidFill>
+                <a:latin typeface="Arial"/>
+                <a:ea typeface="Arial"/>
+              </a:rPr>
+              <a:t>두 회사의 HBM3 공표 스펙은 같았습니다</a:t>
+            </a:r>
+          </a:p>
+        </p:txBody>
+      </p:sp>
+      <p:sp>
+        <p:nvSpPr>
           <p:cNvPr id="42" name="TextBox 41"/>
           <p:cNvSpPr txBox="1"/>
           <p:nvPr/>
         </p:nvSpPr>
         <p:spPr>
           <a:xfrm>
-            <a:off x="996696" y="3584448"/>
-            <a:ext cx="1792224" cy="420624"/>
-          </a:xfrm>
-          <a:prstGeom prst="rect">
-            <a:avLst/>
-          </a:prstGeom>
-          <a:noFill/>
-        </p:spPr>
-        <p:txBody>
-          <a:bodyPr wrap="square" anchor="ctr" lIns="0" rIns="0" tIns="0" bIns="0">
+            <a:off x="1161288" y="3529583"/>
+            <a:ext cx="5157216" cy="201168"/>
+          </a:xfrm>
+          <a:prstGeom prst="rect">
+            <a:avLst/>
+          </a:prstGeom>
+          <a:noFill/>
+        </p:spPr>
+        <p:txBody>
+          <a:bodyPr wrap="square" anchor="t" lIns="0" rIns="0" tIns="0" bIns="0">
             <a:spAutoFit/>
           </a:bodyPr>
           <a:lstStyle/>
@@ -5728,14 +5728,14 @@
               </a:lnSpc>
             </a:pPr>
             <a:r>
-              <a:rPr sz="1050" b="1">
-                <a:solidFill>
-                  <a:srgbClr val="1428A0"/>
-                </a:solidFill>
-                <a:latin typeface="Arial"/>
-                <a:ea typeface="Arial"/>
-              </a:rPr>
-              <a:t>고객이 요구한 사양</a:t>
+              <a:rPr sz="950" b="0">
+                <a:solidFill>
+                  <a:srgbClr val="555555"/>
+                </a:solidFill>
+                <a:latin typeface="Arial"/>
+                <a:ea typeface="Arial"/>
+              </a:rPr>
+              <a:t>6.4 Gbps/pin · 819 GB/s · 8단 16GB — 2022년에 규격 격차는 없었습니다</a:t>
             </a:r>
           </a:p>
         </p:txBody>
@@ -5748,14 +5748,14 @@
         </p:nvSpPr>
         <p:spPr>
           <a:xfrm>
-            <a:off x="2880360" y="3675887"/>
-            <a:ext cx="2349304" cy="237744"/>
-          </a:xfrm>
-          <a:prstGeom prst="rect">
-            <a:avLst/>
-          </a:prstGeom>
-          <a:solidFill>
-            <a:srgbClr val="F4F6FC"/>
+            <a:off x="3703985" y="4261103"/>
+            <a:ext cx="91440" cy="1078991"/>
+          </a:xfrm>
+          <a:prstGeom prst="rect">
+            <a:avLst/>
+          </a:prstGeom>
+          <a:solidFill>
+            <a:srgbClr val="AAB8E8"/>
           </a:solidFill>
           <a:ln>
             <a:noFill/>
@@ -5792,14 +5792,14 @@
         </p:nvSpPr>
         <p:spPr>
           <a:xfrm>
-            <a:off x="5229664" y="3584448"/>
-            <a:ext cx="704791" cy="420624"/>
-          </a:xfrm>
-          <a:prstGeom prst="rect">
-            <a:avLst/>
-          </a:prstGeom>
-          <a:solidFill>
-            <a:srgbClr val="1428A0"/>
+            <a:off x="2692907" y="4261103"/>
+            <a:ext cx="12801" cy="1078991"/>
+          </a:xfrm>
+          <a:prstGeom prst="rect">
+            <a:avLst/>
+          </a:prstGeom>
+          <a:solidFill>
+            <a:srgbClr val="8A8A8A"/>
           </a:solidFill>
           <a:ln>
             <a:noFill/>
@@ -5836,34 +5836,51 @@
         </p:nvSpPr>
         <p:spPr>
           <a:xfrm>
-            <a:off x="5229664" y="3584448"/>
-            <a:ext cx="704791" cy="420624"/>
-          </a:xfrm>
-          <a:prstGeom prst="rect">
-            <a:avLst/>
-          </a:prstGeom>
-          <a:noFill/>
-        </p:spPr>
-        <p:txBody>
-          <a:bodyPr wrap="square" anchor="ctr" lIns="0" rIns="0" tIns="0" bIns="0">
+            <a:off x="1784908" y="3950207"/>
+            <a:ext cx="1828800" cy="292608"/>
+          </a:xfrm>
+          <a:prstGeom prst="rect">
+            <a:avLst/>
+          </a:prstGeom>
+          <a:noFill/>
+        </p:spPr>
+        <p:txBody>
+          <a:bodyPr wrap="square" anchor="t" lIns="0" rIns="0" tIns="0" bIns="0">
             <a:spAutoFit/>
           </a:bodyPr>
           <a:lstStyle/>
           <a:p>
             <a:pPr algn="ctr">
               <a:lnSpc>
-                <a:spcPct val="112000"/>
-              </a:lnSpc>
-            </a:pPr>
-            <a:r>
-              <a:rPr sz="1125" b="1">
-                <a:solidFill>
-                  <a:srgbClr val="FFFFFF"/>
-                </a:solidFill>
-                <a:latin typeface="Arial"/>
-                <a:ea typeface="Arial"/>
-              </a:rPr>
-              <a:t>10 ~ 13</a:t>
+                <a:spcPct val="100000"/>
+              </a:lnSpc>
+            </a:pPr>
+            <a:r>
+              <a:rPr sz="900" b="1">
+                <a:solidFill>
+                  <a:srgbClr val="555555"/>
+                </a:solidFill>
+                <a:latin typeface="Arial"/>
+                <a:ea typeface="Arial"/>
+              </a:rPr>
+              <a:t>JEDEC 표준</a:t>
+            </a:r>
+          </a:p>
+          <a:p>
+            <a:pPr algn="ctr">
+              <a:lnSpc>
+                <a:spcPct val="100000"/>
+              </a:lnSpc>
+            </a:pPr>
+            <a:r>
+              <a:rPr sz="850" b="0">
+                <a:solidFill>
+                  <a:srgbClr val="8A8A8A"/>
+                </a:solidFill>
+                <a:latin typeface="Arial"/>
+                <a:ea typeface="Arial"/>
+              </a:rPr>
+              <a:t>2022-01</a:t>
             </a:r>
           </a:p>
         </p:txBody>
@@ -5876,34 +5893,51 @@
         </p:nvSpPr>
         <p:spPr>
           <a:xfrm>
-            <a:off x="5989320" y="3584448"/>
-            <a:ext cx="548640" cy="420624"/>
-          </a:xfrm>
-          <a:prstGeom prst="rect">
-            <a:avLst/>
-          </a:prstGeom>
-          <a:noFill/>
-        </p:spPr>
-        <p:txBody>
-          <a:bodyPr wrap="square" anchor="ctr" lIns="0" rIns="0" tIns="0" bIns="0">
-            <a:spAutoFit/>
-          </a:bodyPr>
-          <a:lstStyle/>
-          <a:p>
-            <a:pPr algn="l">
-              <a:lnSpc>
-                <a:spcPct val="112000"/>
-              </a:lnSpc>
-            </a:pPr>
-            <a:r>
-              <a:rPr sz="900" b="0">
-                <a:solidFill>
-                  <a:srgbClr val="8A8A8A"/>
-                </a:solidFill>
-                <a:latin typeface="Arial"/>
-                <a:ea typeface="Arial"/>
-              </a:rPr>
-              <a:t>Gbps</a:t>
+            <a:off x="2963321" y="3950207"/>
+            <a:ext cx="2011680" cy="292608"/>
+          </a:xfrm>
+          <a:prstGeom prst="rect">
+            <a:avLst/>
+          </a:prstGeom>
+          <a:noFill/>
+        </p:spPr>
+        <p:txBody>
+          <a:bodyPr wrap="square" anchor="t" lIns="0" rIns="0" tIns="0" bIns="0">
+            <a:spAutoFit/>
+          </a:bodyPr>
+          <a:lstStyle/>
+          <a:p>
+            <a:pPr algn="ctr">
+              <a:lnSpc>
+                <a:spcPct val="100000"/>
+              </a:lnSpc>
+            </a:pPr>
+            <a:r>
+              <a:rPr sz="950" b="1">
+                <a:solidFill>
+                  <a:srgbClr val="1428A0"/>
+                </a:solidFill>
+                <a:latin typeface="Arial"/>
+                <a:ea typeface="Arial"/>
+              </a:rPr>
+              <a:t>고객 일정 · H100 출하</a:t>
+            </a:r>
+          </a:p>
+          <a:p>
+            <a:pPr algn="ctr">
+              <a:lnSpc>
+                <a:spcPct val="100000"/>
+              </a:lnSpc>
+            </a:pPr>
+            <a:r>
+              <a:rPr sz="850" b="0">
+                <a:solidFill>
+                  <a:srgbClr val="3C5AC8"/>
+                </a:solidFill>
+                <a:latin typeface="Arial"/>
+                <a:ea typeface="Arial"/>
+              </a:rPr>
+              <a:t>2022 Q3</a:t>
             </a:r>
           </a:p>
         </p:txBody>
@@ -5916,14 +5950,14 @@
         </p:nvSpPr>
         <p:spPr>
           <a:xfrm>
-            <a:off x="996696" y="4315968"/>
-            <a:ext cx="1792224" cy="420624"/>
-          </a:xfrm>
-          <a:prstGeom prst="rect">
-            <a:avLst/>
-          </a:prstGeom>
-          <a:solidFill>
-            <a:srgbClr val="FFFFFF"/>
+            <a:off x="2057400" y="4517136"/>
+            <a:ext cx="4279392" cy="27432"/>
+          </a:xfrm>
+          <a:prstGeom prst="rect">
+            <a:avLst/>
+          </a:prstGeom>
+          <a:solidFill>
+            <a:srgbClr val="1428A0"/>
           </a:solidFill>
           <a:ln>
             <a:noFill/>
@@ -5960,8 +5994,8 @@
         </p:nvSpPr>
         <p:spPr>
           <a:xfrm>
-            <a:off x="996696" y="4315968"/>
-            <a:ext cx="1792224" cy="420624"/>
+            <a:off x="996696" y="4389120"/>
+            <a:ext cx="969264" cy="256032"/>
           </a:xfrm>
           <a:prstGeom prst="rect">
             <a:avLst/>
@@ -5982,12 +6016,12 @@
             <a:r>
               <a:rPr sz="1050" b="1">
                 <a:solidFill>
-                  <a:srgbClr val="555555"/>
-                </a:solidFill>
-                <a:latin typeface="Arial"/>
-                <a:ea typeface="Arial"/>
-              </a:rPr>
-              <a:t>JEDEC HBM4 표준</a:t>
+                  <a:srgbClr val="1428A0"/>
+                </a:solidFill>
+                <a:latin typeface="Arial"/>
+                <a:ea typeface="Arial"/>
+              </a:rPr>
+              <a:t>SK하이닉스</a:t>
             </a:r>
           </a:p>
         </p:txBody>
@@ -6000,8 +6034,8 @@
         </p:nvSpPr>
         <p:spPr>
           <a:xfrm>
-            <a:off x="2880360" y="4315968"/>
-            <a:ext cx="1879443" cy="420624"/>
+            <a:off x="2057400" y="5285231"/>
+            <a:ext cx="4279392" cy="22860"/>
           </a:xfrm>
           <a:prstGeom prst="rect">
             <a:avLst/>
@@ -6044,8 +6078,8 @@
         </p:nvSpPr>
         <p:spPr>
           <a:xfrm>
-            <a:off x="2880360" y="4315968"/>
-            <a:ext cx="1879443" cy="420624"/>
+            <a:off x="996696" y="5157216"/>
+            <a:ext cx="969264" cy="256032"/>
           </a:xfrm>
           <a:prstGeom prst="rect">
             <a:avLst/>
@@ -6058,80 +6092,40 @@
           </a:bodyPr>
           <a:lstStyle/>
           <a:p>
-            <a:pPr algn="ctr">
+            <a:pPr algn="l">
               <a:lnSpc>
                 <a:spcPct val="112000"/>
               </a:lnSpc>
             </a:pPr>
             <a:r>
-              <a:rPr sz="1125" b="1">
-                <a:solidFill>
-                  <a:srgbClr val="FFFFFF"/>
-                </a:solidFill>
-                <a:latin typeface="Arial"/>
-                <a:ea typeface="Arial"/>
-              </a:rPr>
-              <a:t>최대 8</a:t>
-            </a:r>
-          </a:p>
-        </p:txBody>
-      </p:sp>
-      <p:sp>
-        <p:nvSpPr>
-          <p:cNvPr id="51" name="TextBox 50"/>
-          <p:cNvSpPr txBox="1"/>
-          <p:nvPr/>
-        </p:nvSpPr>
-        <p:spPr>
-          <a:xfrm>
-            <a:off x="4814667" y="4315968"/>
-            <a:ext cx="548640" cy="420624"/>
-          </a:xfrm>
-          <a:prstGeom prst="rect">
-            <a:avLst/>
-          </a:prstGeom>
-          <a:noFill/>
-        </p:spPr>
-        <p:txBody>
-          <a:bodyPr wrap="square" anchor="ctr" lIns="0" rIns="0" tIns="0" bIns="0">
-            <a:spAutoFit/>
-          </a:bodyPr>
-          <a:lstStyle/>
-          <a:p>
-            <a:pPr algn="l">
-              <a:lnSpc>
-                <a:spcPct val="112000"/>
-              </a:lnSpc>
-            </a:pPr>
-            <a:r>
-              <a:rPr sz="900" b="0">
+              <a:rPr sz="1050" b="1">
                 <a:solidFill>
                   <a:srgbClr val="8A8A8A"/>
                 </a:solidFill>
                 <a:latin typeface="Arial"/>
                 <a:ea typeface="Arial"/>
               </a:rPr>
-              <a:t>Gbps</a:t>
-            </a:r>
-          </a:p>
-        </p:txBody>
-      </p:sp>
-      <p:sp>
-        <p:nvSpPr>
-          <p:cNvPr id="52" name="Rectangle 51"/>
-          <p:cNvSpPr/>
-          <p:nvPr/>
-        </p:nvSpPr>
-        <p:spPr>
-          <a:xfrm>
-            <a:off x="4753402" y="3584448"/>
-            <a:ext cx="12801" cy="1152143"/>
-          </a:xfrm>
-          <a:prstGeom prst="rect">
-            <a:avLst/>
-          </a:prstGeom>
-          <a:solidFill>
-            <a:srgbClr val="3C5AC8"/>
+              <a:t>삼성</a:t>
+            </a:r>
+          </a:p>
+        </p:txBody>
+      </p:sp>
+      <p:sp>
+        <p:nvSpPr>
+          <p:cNvPr id="51" name="Rectangle 50"/>
+          <p:cNvSpPr/>
+          <p:nvPr/>
+        </p:nvSpPr>
+        <p:spPr>
+          <a:xfrm>
+            <a:off x="3399572" y="5202936"/>
+            <a:ext cx="2781604" cy="192024"/>
+          </a:xfrm>
+          <a:prstGeom prst="rect">
+            <a:avLst/>
+          </a:prstGeom>
+          <a:solidFill>
+            <a:srgbClr val="F4F6FC"/>
           </a:solidFill>
           <a:ln>
             <a:noFill/>
@@ -6162,20 +6156,60 @@
       </p:sp>
       <p:sp>
         <p:nvSpPr>
-          <p:cNvPr id="53" name="Rectangle 52"/>
-          <p:cNvSpPr/>
-          <p:nvPr/>
-        </p:nvSpPr>
-        <p:spPr>
-          <a:xfrm>
-            <a:off x="5223263" y="3584448"/>
-            <a:ext cx="12801" cy="1152143"/>
-          </a:xfrm>
-          <a:prstGeom prst="rect">
-            <a:avLst/>
-          </a:prstGeom>
-          <a:solidFill>
-            <a:srgbClr val="3C5AC8"/>
+          <p:cNvPr id="52" name="TextBox 51"/>
+          <p:cNvSpPr txBox="1"/>
+          <p:nvPr/>
+        </p:nvSpPr>
+        <p:spPr>
+          <a:xfrm>
+            <a:off x="3399572" y="5202936"/>
+            <a:ext cx="2781604" cy="192024"/>
+          </a:xfrm>
+          <a:prstGeom prst="rect">
+            <a:avLst/>
+          </a:prstGeom>
+          <a:noFill/>
+        </p:spPr>
+        <p:txBody>
+          <a:bodyPr wrap="square" anchor="ctr" lIns="0" rIns="0" tIns="0" bIns="0">
+            <a:spAutoFit/>
+          </a:bodyPr>
+          <a:lstStyle/>
+          <a:p>
+            <a:pPr algn="ctr">
+              <a:lnSpc>
+                <a:spcPct val="112000"/>
+              </a:lnSpc>
+            </a:pPr>
+            <a:r>
+              <a:rPr sz="875" b="1">
+                <a:solidFill>
+                  <a:srgbClr val="555555"/>
+                </a:solidFill>
+                <a:latin typeface="Arial"/>
+                <a:ea typeface="Arial"/>
+              </a:rPr>
+              <a:t>약 5개 분기</a:t>
+            </a:r>
+          </a:p>
+        </p:txBody>
+      </p:sp>
+      <p:sp>
+        <p:nvSpPr>
+          <p:cNvPr id="53" name="Oval 52"/>
+          <p:cNvSpPr/>
+          <p:nvPr/>
+        </p:nvSpPr>
+        <p:spPr>
+          <a:xfrm>
+            <a:off x="1979676" y="4453127"/>
+            <a:ext cx="155448" cy="155448"/>
+          </a:xfrm>
+          <a:prstGeom prst="ellipse">
+            <a:avLst/>
+          </a:prstGeom>
+          <a:solidFill>
+            <a:srgbClr val="1428A0"/>
           </a:solidFill>
           <a:ln>
             <a:noFill/>
@@ -6206,20 +6240,20 @@
       </p:sp>
       <p:sp>
         <p:nvSpPr>
-          <p:cNvPr id="54" name="Rectangle 53"/>
-          <p:cNvSpPr/>
-          <p:nvPr/>
-        </p:nvSpPr>
-        <p:spPr>
-          <a:xfrm>
-            <a:off x="4759803" y="4809744"/>
-            <a:ext cx="469860" cy="45720"/>
-          </a:xfrm>
-          <a:prstGeom prst="rect">
-            <a:avLst/>
-          </a:prstGeom>
-          <a:solidFill>
-            <a:srgbClr val="3C5AC8"/>
+          <p:cNvPr id="54" name="Oval 53"/>
+          <p:cNvSpPr/>
+          <p:nvPr/>
+        </p:nvSpPr>
+        <p:spPr>
+          <a:xfrm>
+            <a:off x="3321848" y="4453127"/>
+            <a:ext cx="155448" cy="155448"/>
+          </a:xfrm>
+          <a:prstGeom prst="ellipse">
+            <a:avLst/>
+          </a:prstGeom>
+          <a:solidFill>
+            <a:srgbClr val="1428A0"/>
           </a:solidFill>
           <a:ln>
             <a:noFill/>
@@ -6250,14 +6284,106 @@
       </p:sp>
       <p:sp>
         <p:nvSpPr>
-          <p:cNvPr id="55" name="TextBox 54"/>
-          <p:cNvSpPr txBox="1"/>
-          <p:nvPr/>
-        </p:nvSpPr>
-        <p:spPr>
-          <a:xfrm>
-            <a:off x="996696" y="4901183"/>
-            <a:ext cx="5486400" cy="219456"/>
+          <p:cNvPr id="55" name="Oval 54"/>
+          <p:cNvSpPr/>
+          <p:nvPr/>
+        </p:nvSpPr>
+        <p:spPr>
+          <a:xfrm>
+            <a:off x="1979676" y="5221223"/>
+            <a:ext cx="155448" cy="155448"/>
+          </a:xfrm>
+          <a:prstGeom prst="ellipse">
+            <a:avLst/>
+          </a:prstGeom>
+          <a:solidFill>
+            <a:srgbClr val="FFFFFF"/>
+          </a:solidFill>
+          <a:ln w="15875">
+            <a:solidFill>
+              <a:srgbClr val="8A8A8A"/>
+            </a:solidFill>
+          </a:ln>
+          <a:effectLst/>
+        </p:spPr>
+        <p:style>
+          <a:lnRef idx="1">
+            <a:schemeClr val="accent1"/>
+          </a:lnRef>
+          <a:fillRef idx="3">
+            <a:schemeClr val="accent1"/>
+          </a:fillRef>
+          <a:effectRef idx="2">
+            <a:schemeClr val="accent1"/>
+          </a:effectRef>
+          <a:fontRef idx="minor">
+            <a:schemeClr val="lt1"/>
+          </a:fontRef>
+        </p:style>
+        <p:txBody>
+          <a:bodyPr rtlCol="0" anchor="ctr"/>
+          <a:lstStyle/>
+          <a:p>
+            <a:pPr algn="ctr"/>
+          </a:p>
+        </p:txBody>
+      </p:sp>
+      <p:sp>
+        <p:nvSpPr>
+          <p:cNvPr id="56" name="Oval 55"/>
+          <p:cNvSpPr/>
+          <p:nvPr/>
+        </p:nvSpPr>
+        <p:spPr>
+          <a:xfrm>
+            <a:off x="6103453" y="5221223"/>
+            <a:ext cx="155448" cy="155448"/>
+          </a:xfrm>
+          <a:prstGeom prst="ellipse">
+            <a:avLst/>
+          </a:prstGeom>
+          <a:solidFill>
+            <a:srgbClr val="FFFFFF"/>
+          </a:solidFill>
+          <a:ln w="15875">
+            <a:solidFill>
+              <a:srgbClr val="8A8A8A"/>
+            </a:solidFill>
+          </a:ln>
+          <a:effectLst/>
+        </p:spPr>
+        <p:style>
+          <a:lnRef idx="1">
+            <a:schemeClr val="accent1"/>
+          </a:lnRef>
+          <a:fillRef idx="3">
+            <a:schemeClr val="accent1"/>
+          </a:fillRef>
+          <a:effectRef idx="2">
+            <a:schemeClr val="accent1"/>
+          </a:effectRef>
+          <a:fontRef idx="minor">
+            <a:schemeClr val="lt1"/>
+          </a:fontRef>
+        </p:style>
+        <p:txBody>
+          <a:bodyPr rtlCol="0" anchor="ctr"/>
+          <a:lstStyle/>
+          <a:p>
+            <a:pPr algn="ctr"/>
+          </a:p>
+        </p:txBody>
+      </p:sp>
+      <p:sp>
+        <p:nvSpPr>
+          <p:cNvPr id="57" name="TextBox 56"/>
+          <p:cNvSpPr txBox="1"/>
+          <p:nvPr/>
+        </p:nvSpPr>
+        <p:spPr>
+          <a:xfrm>
+            <a:off x="1783080" y="4645151"/>
+            <a:ext cx="1554480" cy="384048"/>
           </a:xfrm>
           <a:prstGeom prst="rect">
             <a:avLst/>
@@ -6272,42 +6398,260 @@
           <a:p>
             <a:pPr algn="l">
               <a:lnSpc>
+                <a:spcPct val="102000"/>
+              </a:lnSpc>
+            </a:pPr>
+            <a:r>
+              <a:rPr sz="900" b="1">
+                <a:solidFill>
+                  <a:srgbClr val="1A1A1A"/>
+                </a:solidFill>
+                <a:latin typeface="Arial"/>
+                <a:ea typeface="Arial"/>
+              </a:rPr>
+              <a:t>2021-10  개발 완료</a:t>
+            </a:r>
+          </a:p>
+          <a:p>
+            <a:pPr algn="l">
+              <a:lnSpc>
+                <a:spcPct val="102000"/>
+              </a:lnSpc>
+            </a:pPr>
+            <a:r>
+              <a:rPr sz="875" b="0">
+                <a:solidFill>
+                  <a:srgbClr val="555555"/>
+                </a:solidFill>
+                <a:latin typeface="Arial"/>
+                <a:ea typeface="Arial"/>
+              </a:rPr>
+              <a:t>표준보다 3개월 앞섬</a:t>
+            </a:r>
+          </a:p>
+        </p:txBody>
+      </p:sp>
+      <p:sp>
+        <p:nvSpPr>
+          <p:cNvPr id="58" name="TextBox 57"/>
+          <p:cNvSpPr txBox="1"/>
+          <p:nvPr/>
+        </p:nvSpPr>
+        <p:spPr>
+          <a:xfrm>
+            <a:off x="3308132" y="4645151"/>
+            <a:ext cx="2103120" cy="384048"/>
+          </a:xfrm>
+          <a:prstGeom prst="rect">
+            <a:avLst/>
+          </a:prstGeom>
+          <a:noFill/>
+        </p:spPr>
+        <p:txBody>
+          <a:bodyPr wrap="square" anchor="t" lIns="0" rIns="0" tIns="0" bIns="0">
+            <a:spAutoFit/>
+          </a:bodyPr>
+          <a:lstStyle/>
+          <a:p>
+            <a:pPr algn="l">
+              <a:lnSpc>
+                <a:spcPct val="102000"/>
+              </a:lnSpc>
+            </a:pPr>
+            <a:r>
+              <a:rPr sz="900" b="1">
+                <a:solidFill>
+                  <a:srgbClr val="1428A0"/>
+                </a:solidFill>
+                <a:latin typeface="Arial"/>
+                <a:ea typeface="Arial"/>
+              </a:rPr>
+              <a:t>2022-06  양산 · NVIDIA 공급</a:t>
+            </a:r>
+          </a:p>
+          <a:p>
+            <a:pPr algn="l">
+              <a:lnSpc>
+                <a:spcPct val="102000"/>
+              </a:lnSpc>
+            </a:pPr>
+            <a:r>
+              <a:rPr sz="875" b="0">
+                <a:solidFill>
+                  <a:srgbClr val="555555"/>
+                </a:solidFill>
+                <a:latin typeface="Arial"/>
+                <a:ea typeface="Arial"/>
+              </a:rPr>
+              <a:t>퀄 통과 후 양산</a:t>
+            </a:r>
+          </a:p>
+        </p:txBody>
+      </p:sp>
+      <p:sp>
+        <p:nvSpPr>
+          <p:cNvPr id="59" name="TextBox 58"/>
+          <p:cNvSpPr txBox="1"/>
+          <p:nvPr/>
+        </p:nvSpPr>
+        <p:spPr>
+          <a:xfrm>
+            <a:off x="1783080" y="5431536"/>
+            <a:ext cx="1737360" cy="384048"/>
+          </a:xfrm>
+          <a:prstGeom prst="rect">
+            <a:avLst/>
+          </a:prstGeom>
+          <a:noFill/>
+        </p:spPr>
+        <p:txBody>
+          <a:bodyPr wrap="square" anchor="t" lIns="0" rIns="0" tIns="0" bIns="0">
+            <a:spAutoFit/>
+          </a:bodyPr>
+          <a:lstStyle/>
+          <a:p>
+            <a:pPr algn="l">
+              <a:lnSpc>
+                <a:spcPct val="102000"/>
+              </a:lnSpc>
+            </a:pPr>
+            <a:r>
+              <a:rPr sz="900" b="1">
+                <a:solidFill>
+                  <a:srgbClr val="1A1A1A"/>
+                </a:solidFill>
+                <a:latin typeface="Arial"/>
+                <a:ea typeface="Arial"/>
+              </a:rPr>
+              <a:t>2021-10  로드맵 「2022 Q2」</a:t>
+            </a:r>
+          </a:p>
+          <a:p>
+            <a:pPr algn="l">
+              <a:lnSpc>
+                <a:spcPct val="102000"/>
+              </a:lnSpc>
+            </a:pPr>
+            <a:r>
+              <a:rPr sz="875" b="0">
+                <a:solidFill>
+                  <a:srgbClr val="555555"/>
+                </a:solidFill>
+                <a:latin typeface="Arial"/>
+                <a:ea typeface="Arial"/>
+              </a:rPr>
+              <a:t>양산 공표는 확보되지 않음</a:t>
+            </a:r>
+          </a:p>
+        </p:txBody>
+      </p:sp>
+      <p:sp>
+        <p:nvSpPr>
+          <p:cNvPr id="60" name="TextBox 59"/>
+          <p:cNvSpPr txBox="1"/>
+          <p:nvPr/>
+        </p:nvSpPr>
+        <p:spPr>
+          <a:xfrm>
+            <a:off x="4955881" y="5431536"/>
+            <a:ext cx="1463040" cy="384048"/>
+          </a:xfrm>
+          <a:prstGeom prst="rect">
+            <a:avLst/>
+          </a:prstGeom>
+          <a:noFill/>
+        </p:spPr>
+        <p:txBody>
+          <a:bodyPr wrap="square" anchor="t" lIns="0" rIns="0" tIns="0" bIns="0">
+            <a:spAutoFit/>
+          </a:bodyPr>
+          <a:lstStyle/>
+          <a:p>
+            <a:pPr algn="r">
+              <a:lnSpc>
+                <a:spcPct val="102000"/>
+              </a:lnSpc>
+            </a:pPr>
+            <a:r>
+              <a:rPr sz="900" b="1">
+                <a:solidFill>
+                  <a:srgbClr val="1A1A1A"/>
+                </a:solidFill>
+                <a:latin typeface="Arial"/>
+                <a:ea typeface="Arial"/>
+              </a:rPr>
+              <a:t>2023 Q4  공급망 진입</a:t>
+            </a:r>
+          </a:p>
+          <a:p>
+            <a:pPr algn="r">
+              <a:lnSpc>
+                <a:spcPct val="102000"/>
+              </a:lnSpc>
+            </a:pPr>
+            <a:r>
+              <a:rPr sz="875" b="0">
+                <a:solidFill>
+                  <a:srgbClr val="555555"/>
+                </a:solidFill>
+                <a:latin typeface="Arial"/>
+                <a:ea typeface="Arial"/>
+              </a:rPr>
+              <a:t>1Znm HBM3 · 소량</a:t>
+            </a:r>
+          </a:p>
+        </p:txBody>
+      </p:sp>
+      <p:sp>
+        <p:nvSpPr>
+          <p:cNvPr id="61" name="TextBox 60"/>
+          <p:cNvSpPr txBox="1"/>
+          <p:nvPr/>
+        </p:nvSpPr>
+        <p:spPr>
+          <a:xfrm>
+            <a:off x="1691640" y="5888736"/>
+            <a:ext cx="731520" cy="182880"/>
+          </a:xfrm>
+          <a:prstGeom prst="rect">
+            <a:avLst/>
+          </a:prstGeom>
+          <a:noFill/>
+        </p:spPr>
+        <p:txBody>
+          <a:bodyPr wrap="square" anchor="t" lIns="0" rIns="0" tIns="0" bIns="0">
+            <a:spAutoFit/>
+          </a:bodyPr>
+          <a:lstStyle/>
+          <a:p>
+            <a:pPr algn="ctr">
+              <a:lnSpc>
                 <a:spcPct val="112000"/>
               </a:lnSpc>
             </a:pPr>
             <a:r>
-              <a:rPr sz="1000" b="1">
-                <a:solidFill>
-                  <a:srgbClr val="3C5AC8"/>
-                </a:solidFill>
-                <a:latin typeface="Arial"/>
-                <a:ea typeface="Arial"/>
-              </a:rPr>
-              <a:t>표준을 만족해도 닿지 않는 구간</a:t>
-            </a:r>
-            <a:r>
-              <a:rPr sz="1000" b="0">
-                <a:solidFill>
-                  <a:srgbClr val="555555"/>
-                </a:solidFill>
-                <a:latin typeface="Arial"/>
-                <a:ea typeface="Arial"/>
-              </a:rPr>
-              <a:t>   design-in은 표준선이 아니라 고객 요구선에서 갈렸습니다</a:t>
-            </a:r>
-          </a:p>
-        </p:txBody>
-      </p:sp>
-      <p:sp>
-        <p:nvSpPr>
-          <p:cNvPr id="56" name="TextBox 55"/>
-          <p:cNvSpPr txBox="1"/>
-          <p:nvPr/>
-        </p:nvSpPr>
-        <p:spPr>
-          <a:xfrm>
-            <a:off x="996696" y="5285231"/>
-            <a:ext cx="5486400" cy="201168"/>
+              <a:rPr sz="900" b="0">
+                <a:solidFill>
+                  <a:srgbClr val="8A8A8A"/>
+                </a:solidFill>
+                <a:latin typeface="Arial"/>
+                <a:ea typeface="Arial"/>
+              </a:rPr>
+              <a:t>2021</a:t>
+            </a:r>
+          </a:p>
+        </p:txBody>
+      </p:sp>
+      <p:sp>
+        <p:nvSpPr>
+          <p:cNvPr id="62" name="TextBox 61"/>
+          <p:cNvSpPr txBox="1"/>
+          <p:nvPr/>
+        </p:nvSpPr>
+        <p:spPr>
+          <a:xfrm>
+            <a:off x="3150523" y="5888736"/>
+            <a:ext cx="731520" cy="182880"/>
           </a:xfrm>
           <a:prstGeom prst="rect">
             <a:avLst/>
@@ -6320,34 +6664,238 @@
           </a:bodyPr>
           <a:lstStyle/>
           <a:p>
+            <a:pPr algn="ctr">
+              <a:lnSpc>
+                <a:spcPct val="112000"/>
+              </a:lnSpc>
+            </a:pPr>
+            <a:r>
+              <a:rPr sz="900" b="0">
+                <a:solidFill>
+                  <a:srgbClr val="8A8A8A"/>
+                </a:solidFill>
+                <a:latin typeface="Arial"/>
+                <a:ea typeface="Arial"/>
+              </a:rPr>
+              <a:t>2022</a:t>
+            </a:r>
+          </a:p>
+        </p:txBody>
+      </p:sp>
+      <p:sp>
+        <p:nvSpPr>
+          <p:cNvPr id="63" name="TextBox 62"/>
+          <p:cNvSpPr txBox="1"/>
+          <p:nvPr/>
+        </p:nvSpPr>
+        <p:spPr>
+          <a:xfrm>
+            <a:off x="5095701" y="5888736"/>
+            <a:ext cx="731520" cy="182880"/>
+          </a:xfrm>
+          <a:prstGeom prst="rect">
+            <a:avLst/>
+          </a:prstGeom>
+          <a:noFill/>
+        </p:spPr>
+        <p:txBody>
+          <a:bodyPr wrap="square" anchor="t" lIns="0" rIns="0" tIns="0" bIns="0">
+            <a:spAutoFit/>
+          </a:bodyPr>
+          <a:lstStyle/>
+          <a:p>
+            <a:pPr algn="ctr">
+              <a:lnSpc>
+                <a:spcPct val="112000"/>
+              </a:lnSpc>
+            </a:pPr>
+            <a:r>
+              <a:rPr sz="900" b="0">
+                <a:solidFill>
+                  <a:srgbClr val="8A8A8A"/>
+                </a:solidFill>
+                <a:latin typeface="Arial"/>
+                <a:ea typeface="Arial"/>
+              </a:rPr>
+              <a:t>2023</a:t>
+            </a:r>
+          </a:p>
+        </p:txBody>
+      </p:sp>
+      <p:sp>
+        <p:nvSpPr>
+          <p:cNvPr id="64" name="Rectangle 63"/>
+          <p:cNvSpPr/>
+          <p:nvPr/>
+        </p:nvSpPr>
+        <p:spPr>
+          <a:xfrm>
+            <a:off x="996696" y="6199631"/>
+            <a:ext cx="5486400" cy="1042415"/>
+          </a:xfrm>
+          <a:prstGeom prst="rect">
+            <a:avLst/>
+          </a:prstGeom>
+          <a:solidFill>
+            <a:srgbClr val="1428A0"/>
+          </a:solidFill>
+          <a:ln>
+            <a:noFill/>
+          </a:ln>
+          <a:effectLst/>
+        </p:spPr>
+        <p:style>
+          <a:lnRef idx="1">
+            <a:schemeClr val="accent1"/>
+          </a:lnRef>
+          <a:fillRef idx="3">
+            <a:schemeClr val="accent1"/>
+          </a:fillRef>
+          <a:effectRef idx="2">
+            <a:schemeClr val="accent1"/>
+          </a:effectRef>
+          <a:fontRef idx="minor">
+            <a:schemeClr val="lt1"/>
+          </a:fontRef>
+        </p:style>
+        <p:txBody>
+          <a:bodyPr rtlCol="0" anchor="ctr"/>
+          <a:lstStyle/>
+          <a:p>
+            <a:pPr algn="ctr"/>
+          </a:p>
+        </p:txBody>
+      </p:sp>
+      <p:sp>
+        <p:nvSpPr>
+          <p:cNvPr id="65" name="TextBox 64"/>
+          <p:cNvSpPr txBox="1"/>
+          <p:nvPr/>
+        </p:nvSpPr>
+        <p:spPr>
+          <a:xfrm>
+            <a:off x="1216152" y="6309359"/>
+            <a:ext cx="5047488" cy="512064"/>
+          </a:xfrm>
+          <a:prstGeom prst="rect">
+            <a:avLst/>
+          </a:prstGeom>
+          <a:noFill/>
+        </p:spPr>
+        <p:txBody>
+          <a:bodyPr wrap="square" anchor="t" lIns="0" rIns="0" tIns="0" bIns="0">
+            <a:spAutoFit/>
+          </a:bodyPr>
+          <a:lstStyle/>
+          <a:p>
             <a:pPr algn="l">
               <a:lnSpc>
-                <a:spcPct val="112000"/>
-              </a:lnSpc>
-            </a:pPr>
-            <a:r>
-              <a:rPr sz="1000" b="1">
-                <a:solidFill>
-                  <a:srgbClr val="1428A0"/>
-                </a:solidFill>
-                <a:latin typeface="Arial"/>
-                <a:ea typeface="Arial"/>
-              </a:rPr>
-              <a:t>공개 기록</a:t>
-            </a:r>
-          </a:p>
-        </p:txBody>
-      </p:sp>
-      <p:sp>
-        <p:nvSpPr>
-          <p:cNvPr id="57" name="Rectangle 56"/>
-          <p:cNvSpPr/>
-          <p:nvPr/>
-        </p:nvSpPr>
-        <p:spPr>
-          <a:xfrm>
-            <a:off x="996696" y="5522975"/>
-            <a:ext cx="1743455" cy="1280160"/>
+                <a:spcPct val="104000"/>
+              </a:lnSpc>
+            </a:pPr>
+            <a:r>
+              <a:rPr sz="1425" b="1">
+                <a:solidFill>
+                  <a:srgbClr val="FFFFFF"/>
+                </a:solidFill>
+                <a:latin typeface="Arial"/>
+                <a:ea typeface="Arial"/>
+              </a:rPr>
+              <a:t>규격이 아니라 그 규격을 언제 물량으로 만들었는가가 소켓을 갈랐습니다</a:t>
+            </a:r>
+          </a:p>
+        </p:txBody>
+      </p:sp>
+      <p:sp>
+        <p:nvSpPr>
+          <p:cNvPr id="66" name="TextBox 65"/>
+          <p:cNvSpPr txBox="1"/>
+          <p:nvPr/>
+        </p:nvSpPr>
+        <p:spPr>
+          <a:xfrm>
+            <a:off x="1216152" y="6839712"/>
+            <a:ext cx="5047488" cy="310896"/>
+          </a:xfrm>
+          <a:prstGeom prst="rect">
+            <a:avLst/>
+          </a:prstGeom>
+          <a:noFill/>
+        </p:spPr>
+        <p:txBody>
+          <a:bodyPr wrap="square" anchor="t" lIns="0" rIns="0" tIns="0" bIns="0">
+            <a:spAutoFit/>
+          </a:bodyPr>
+          <a:lstStyle/>
+          <a:p>
+            <a:pPr algn="l">
+              <a:lnSpc>
+                <a:spcPct val="104000"/>
+              </a:lnSpc>
+            </a:pPr>
+            <a:r>
+              <a:rPr sz="1125" b="0">
+                <a:solidFill>
+                  <a:srgbClr val="AAB8E8"/>
+                </a:solidFill>
+                <a:latin typeface="Arial"/>
+                <a:ea typeface="Arial"/>
+              </a:rPr>
+              <a:t>구속력 있는 일정은 표준이 아니라 고객의 제품 출시 일정이었습니다</a:t>
+            </a:r>
+          </a:p>
+        </p:txBody>
+      </p:sp>
+      <p:sp>
+        <p:nvSpPr>
+          <p:cNvPr id="67" name="TextBox 66"/>
+          <p:cNvSpPr txBox="1"/>
+          <p:nvPr/>
+        </p:nvSpPr>
+        <p:spPr>
+          <a:xfrm>
+            <a:off x="996696" y="7315199"/>
+            <a:ext cx="5486400" cy="384048"/>
+          </a:xfrm>
+          <a:prstGeom prst="rect">
+            <a:avLst/>
+          </a:prstGeom>
+          <a:noFill/>
+        </p:spPr>
+        <p:txBody>
+          <a:bodyPr wrap="square" anchor="t" lIns="0" rIns="0" tIns="0" bIns="0">
+            <a:spAutoFit/>
+          </a:bodyPr>
+          <a:lstStyle/>
+          <a:p>
+            <a:pPr algn="l">
+              <a:lnSpc>
+                <a:spcPct val="102000"/>
+              </a:lnSpc>
+            </a:pPr>
+            <a:r>
+              <a:rPr sz="900" b="0">
+                <a:solidFill>
+                  <a:srgbClr val="8A8A8A"/>
+                </a:solidFill>
+                <a:latin typeface="Arial"/>
+                <a:ea typeface="Arial"/>
+              </a:rPr>
+              <a:t>2022년 삼성의 HBM 점유율은 40%였습니다 · 비어 있던 것은 사업이 아니라 HBM3 한 세대의 신규 소켓입니다</a:t>
+            </a:r>
+          </a:p>
+        </p:txBody>
+      </p:sp>
+      <p:sp>
+        <p:nvSpPr>
+          <p:cNvPr id="68" name="Rectangle 67"/>
+          <p:cNvSpPr/>
+          <p:nvPr/>
+        </p:nvSpPr>
+        <p:spPr>
+          <a:xfrm>
+            <a:off x="996696" y="7754111"/>
+            <a:ext cx="5486400" cy="621792"/>
           </a:xfrm>
           <a:prstGeom prst="rect">
             <a:avLst/>
@@ -6386,58 +6934,14 @@
       </p:sp>
       <p:sp>
         <p:nvSpPr>
-          <p:cNvPr id="58" name="Rectangle 57"/>
-          <p:cNvSpPr/>
-          <p:nvPr/>
-        </p:nvSpPr>
-        <p:spPr>
-          <a:xfrm>
-            <a:off x="996696" y="5522975"/>
-            <a:ext cx="1743455" cy="36576"/>
-          </a:xfrm>
-          <a:prstGeom prst="rect">
-            <a:avLst/>
-          </a:prstGeom>
-          <a:solidFill>
-            <a:srgbClr val="AAB8E8"/>
-          </a:solidFill>
-          <a:ln>
-            <a:noFill/>
-          </a:ln>
-          <a:effectLst/>
-        </p:spPr>
-        <p:style>
-          <a:lnRef idx="1">
-            <a:schemeClr val="accent1"/>
-          </a:lnRef>
-          <a:fillRef idx="3">
-            <a:schemeClr val="accent1"/>
-          </a:fillRef>
-          <a:effectRef idx="2">
-            <a:schemeClr val="accent1"/>
-          </a:effectRef>
-          <a:fontRef idx="minor">
-            <a:schemeClr val="lt1"/>
-          </a:fontRef>
-        </p:style>
-        <p:txBody>
-          <a:bodyPr rtlCol="0" anchor="ctr"/>
-          <a:lstStyle/>
-          <a:p>
-            <a:pPr algn="ctr"/>
-          </a:p>
-        </p:txBody>
-      </p:sp>
-      <p:sp>
-        <p:nvSpPr>
-          <p:cNvPr id="59" name="TextBox 58"/>
-          <p:cNvSpPr txBox="1"/>
-          <p:nvPr/>
-        </p:nvSpPr>
-        <p:spPr>
-          <a:xfrm>
-            <a:off x="1106424" y="5596127"/>
-            <a:ext cx="1523999" cy="182880"/>
+          <p:cNvPr id="69" name="TextBox 68"/>
+          <p:cNvSpPr txBox="1"/>
+          <p:nvPr/>
+        </p:nvSpPr>
+        <p:spPr>
+          <a:xfrm>
+            <a:off x="1143000" y="7818119"/>
+            <a:ext cx="5193792" cy="201168"/>
           </a:xfrm>
           <a:prstGeom prst="rect">
             <a:avLst/>
@@ -6458,116 +6962,76 @@
             <a:r>
               <a:rPr sz="950" b="1">
                 <a:solidFill>
+                  <a:srgbClr val="555555"/>
+                </a:solidFill>
+                <a:latin typeface="Arial"/>
+                <a:ea typeface="Arial"/>
+              </a:rPr>
+              <a:t>그 시간차의 원인으로 업계가 지목하는 것</a:t>
+            </a:r>
+            <a:r>
+              <a:rPr sz="950" b="1">
+                <a:solidFill>
                   <a:srgbClr val="1428A0"/>
                 </a:solidFill>
                 <a:latin typeface="Arial"/>
                 <a:ea typeface="Arial"/>
               </a:rPr>
-              <a:t>2019-03  </a:t>
-            </a:r>
-            <a:r>
-              <a:rPr sz="950" b="0">
+              <a:t>   SK하이닉스의 MR-MUF 패키징</a:t>
+            </a:r>
+          </a:p>
+        </p:txBody>
+      </p:sp>
+      <p:sp>
+        <p:nvSpPr>
+          <p:cNvPr id="70" name="TextBox 69"/>
+          <p:cNvSpPr txBox="1"/>
+          <p:nvPr/>
+        </p:nvSpPr>
+        <p:spPr>
+          <a:xfrm>
+            <a:off x="1143000" y="8019287"/>
+            <a:ext cx="5193792" cy="365760"/>
+          </a:xfrm>
+          <a:prstGeom prst="rect">
+            <a:avLst/>
+          </a:prstGeom>
+          <a:noFill/>
+        </p:spPr>
+        <p:txBody>
+          <a:bodyPr wrap="square" anchor="t" lIns="0" rIns="0" tIns="0" bIns="0">
+            <a:spAutoFit/>
+          </a:bodyPr>
+          <a:lstStyle/>
+          <a:p>
+            <a:pPr algn="l">
+              <a:lnSpc>
+                <a:spcPct val="102000"/>
+              </a:lnSpc>
+            </a:pPr>
+            <a:r>
+              <a:rPr sz="875" b="0">
                 <a:solidFill>
                   <a:srgbClr val="8A8A8A"/>
                 </a:solidFill>
                 <a:latin typeface="Arial"/>
                 <a:ea typeface="Arial"/>
               </a:rPr>
-              <a:t>삼성</a:t>
-            </a:r>
-          </a:p>
-        </p:txBody>
-      </p:sp>
-      <p:sp>
-        <p:nvSpPr>
-          <p:cNvPr id="60" name="TextBox 59"/>
-          <p:cNvSpPr txBox="1"/>
-          <p:nvPr/>
-        </p:nvSpPr>
-        <p:spPr>
-          <a:xfrm>
-            <a:off x="1106424" y="5797296"/>
-            <a:ext cx="1523999" cy="438912"/>
-          </a:xfrm>
-          <a:prstGeom prst="rect">
-            <a:avLst/>
-          </a:prstGeom>
-          <a:noFill/>
-        </p:spPr>
-        <p:txBody>
-          <a:bodyPr wrap="square" anchor="t" lIns="0" rIns="0" tIns="0" bIns="0">
-            <a:spAutoFit/>
-          </a:bodyPr>
-          <a:lstStyle/>
-          <a:p>
-            <a:pPr algn="l">
-              <a:lnSpc>
-                <a:spcPct val="104000"/>
-              </a:lnSpc>
-            </a:pPr>
-            <a:r>
-              <a:rPr sz="1050" b="1">
-                <a:solidFill>
-                  <a:srgbClr val="1A1A1A"/>
-                </a:solidFill>
-                <a:latin typeface="Arial"/>
-                <a:ea typeface="Arial"/>
-              </a:rPr>
-              <a:t>업계 최초 HBM2E 발표</a:t>
-            </a:r>
-          </a:p>
-        </p:txBody>
-      </p:sp>
-      <p:sp>
-        <p:nvSpPr>
-          <p:cNvPr id="61" name="TextBox 60"/>
-          <p:cNvSpPr txBox="1"/>
-          <p:nvPr/>
-        </p:nvSpPr>
-        <p:spPr>
-          <a:xfrm>
-            <a:off x="1106424" y="6254496"/>
-            <a:ext cx="1523999" cy="365760"/>
-          </a:xfrm>
-          <a:prstGeom prst="rect">
-            <a:avLst/>
-          </a:prstGeom>
-          <a:noFill/>
-        </p:spPr>
-        <p:txBody>
-          <a:bodyPr wrap="square" anchor="t" lIns="0" rIns="0" tIns="0" bIns="0">
-            <a:spAutoFit/>
-          </a:bodyPr>
-          <a:lstStyle/>
-          <a:p>
-            <a:pPr algn="l">
-              <a:lnSpc>
-                <a:spcPct val="102000"/>
-              </a:lnSpc>
-            </a:pPr>
-            <a:r>
-              <a:rPr sz="900" b="0">
-                <a:solidFill>
-                  <a:srgbClr val="555555"/>
-                </a:solidFill>
-                <a:latin typeface="Arial"/>
-                <a:ea typeface="Arial"/>
-              </a:rPr>
-              <a:t>기술은 확보돼 있었습니다</a:t>
-            </a:r>
-          </a:p>
-        </p:txBody>
-      </p:sp>
-      <p:sp>
-        <p:nvSpPr>
-          <p:cNvPr id="62" name="Rectangle 61"/>
-          <p:cNvSpPr/>
-          <p:nvPr/>
-        </p:nvSpPr>
-        <p:spPr>
-          <a:xfrm>
-            <a:off x="2868168" y="5522975"/>
-            <a:ext cx="1743455" cy="1280160"/>
+              <a:t>다만 이는 2023년 이후의 사후 해석이고, 2022년 당시의 1차 근거와 벤더가 확인한 수율은 공개된 바 없습니다</a:t>
+            </a:r>
+          </a:p>
+        </p:txBody>
+      </p:sp>
+      <p:sp>
+        <p:nvSpPr>
+          <p:cNvPr id="71" name="Rectangle 70"/>
+          <p:cNvSpPr/>
+          <p:nvPr/>
+        </p:nvSpPr>
+        <p:spPr>
+          <a:xfrm>
+            <a:off x="6976872" y="2560320"/>
+            <a:ext cx="5760720" cy="5870448"/>
           </a:xfrm>
           <a:prstGeom prst="rect">
             <a:avLst/>
@@ -6606,14 +7070,14 @@
       </p:sp>
       <p:sp>
         <p:nvSpPr>
-          <p:cNvPr id="63" name="Rectangle 62"/>
-          <p:cNvSpPr/>
-          <p:nvPr/>
-        </p:nvSpPr>
-        <p:spPr>
-          <a:xfrm>
-            <a:off x="2868168" y="5522975"/>
-            <a:ext cx="1743455" cy="36576"/>
+          <p:cNvPr id="72" name="Rectangle 71"/>
+          <p:cNvSpPr/>
+          <p:nvPr/>
+        </p:nvSpPr>
+        <p:spPr>
+          <a:xfrm>
+            <a:off x="6976872" y="2560320"/>
+            <a:ext cx="5760720" cy="45720"/>
           </a:xfrm>
           <a:prstGeom prst="rect">
             <a:avLst/>
@@ -6650,14 +7114,14 @@
       </p:sp>
       <p:sp>
         <p:nvSpPr>
-          <p:cNvPr id="64" name="TextBox 63"/>
-          <p:cNvSpPr txBox="1"/>
-          <p:nvPr/>
-        </p:nvSpPr>
-        <p:spPr>
-          <a:xfrm>
-            <a:off x="2977896" y="5596127"/>
-            <a:ext cx="1523999" cy="182880"/>
+          <p:cNvPr id="73" name="TextBox 72"/>
+          <p:cNvSpPr txBox="1"/>
+          <p:nvPr/>
+        </p:nvSpPr>
+        <p:spPr>
+          <a:xfrm>
+            <a:off x="7196328" y="2706624"/>
+            <a:ext cx="5321808" cy="274320"/>
           </a:xfrm>
           <a:prstGeom prst="rect">
             <a:avLst/>
@@ -6676,38 +7140,78 @@
               </a:lnSpc>
             </a:pPr>
             <a:r>
-              <a:rPr sz="950" b="1">
+              <a:rPr sz="1350" b="1">
                 <a:solidFill>
                   <a:srgbClr val="1428A0"/>
                 </a:solidFill>
                 <a:latin typeface="Arial"/>
                 <a:ea typeface="Arial"/>
               </a:rPr>
-              <a:t>2021-10  </a:t>
-            </a:r>
-            <a:r>
-              <a:rPr sz="950" b="0">
+              <a:t>②  </a:t>
+            </a:r>
+            <a:r>
+              <a:rPr sz="1350" b="1">
+                <a:solidFill>
+                  <a:srgbClr val="1428A0"/>
+                </a:solidFill>
+                <a:latin typeface="Arial"/>
+                <a:ea typeface="Arial"/>
+              </a:rPr>
+              <a:t>지금 · 같은 전환이 SSD에서</a:t>
+            </a:r>
+          </a:p>
+        </p:txBody>
+      </p:sp>
+      <p:sp>
+        <p:nvSpPr>
+          <p:cNvPr id="74" name="TextBox 73"/>
+          <p:cNvSpPr txBox="1"/>
+          <p:nvPr/>
+        </p:nvSpPr>
+        <p:spPr>
+          <a:xfrm>
+            <a:off x="7196328" y="2980944"/>
+            <a:ext cx="5321808" cy="219456"/>
+          </a:xfrm>
+          <a:prstGeom prst="rect">
+            <a:avLst/>
+          </a:prstGeom>
+          <a:noFill/>
+        </p:spPr>
+        <p:txBody>
+          <a:bodyPr wrap="square" anchor="t" lIns="0" rIns="0" tIns="0" bIns="0">
+            <a:spAutoFit/>
+          </a:bodyPr>
+          <a:lstStyle/>
+          <a:p>
+            <a:pPr algn="l">
+              <a:lnSpc>
+                <a:spcPct val="112000"/>
+              </a:lnSpc>
+            </a:pPr>
+            <a:r>
+              <a:rPr sz="1000" b="0">
                 <a:solidFill>
                   <a:srgbClr val="8A8A8A"/>
                 </a:solidFill>
                 <a:latin typeface="Arial"/>
                 <a:ea typeface="Arial"/>
               </a:rPr>
-              <a:t>SK하이닉스</a:t>
-            </a:r>
-          </a:p>
-        </p:txBody>
-      </p:sp>
-      <p:sp>
-        <p:nvSpPr>
-          <p:cNvPr id="65" name="TextBox 64"/>
-          <p:cNvSpPr txBox="1"/>
-          <p:nvPr/>
-        </p:nvSpPr>
-        <p:spPr>
-          <a:xfrm>
-            <a:off x="2977896" y="5797296"/>
-            <a:ext cx="1523999" cy="438912"/>
+              <a:t>고객 요구가 확장되고 있다</a:t>
+            </a:r>
+          </a:p>
+        </p:txBody>
+      </p:sp>
+      <p:sp>
+        <p:nvSpPr>
+          <p:cNvPr id="75" name="TextBox 74"/>
+          <p:cNvSpPr txBox="1"/>
+          <p:nvPr/>
+        </p:nvSpPr>
+        <p:spPr>
+          <a:xfrm>
+            <a:off x="7251192" y="3310127"/>
+            <a:ext cx="5212080" cy="201168"/>
           </a:xfrm>
           <a:prstGeom prst="rect">
             <a:avLst/>
@@ -6722,72 +7226,32 @@
           <a:p>
             <a:pPr algn="l">
               <a:lnSpc>
-                <a:spcPct val="104000"/>
-              </a:lnSpc>
-            </a:pPr>
-            <a:r>
-              <a:rPr sz="1050" b="1">
-                <a:solidFill>
-                  <a:srgbClr val="1A1A1A"/>
-                </a:solidFill>
-                <a:latin typeface="Arial"/>
-                <a:ea typeface="Arial"/>
-              </a:rPr>
-              <a:t>표준 제정 전 HBM3 완료</a:t>
-            </a:r>
-          </a:p>
-        </p:txBody>
-      </p:sp>
-      <p:sp>
-        <p:nvSpPr>
-          <p:cNvPr id="66" name="TextBox 65"/>
-          <p:cNvSpPr txBox="1"/>
-          <p:nvPr/>
-        </p:nvSpPr>
-        <p:spPr>
-          <a:xfrm>
-            <a:off x="2977896" y="6254496"/>
-            <a:ext cx="1523999" cy="365760"/>
-          </a:xfrm>
-          <a:prstGeom prst="rect">
-            <a:avLst/>
-          </a:prstGeom>
-          <a:noFill/>
-        </p:spPr>
-        <p:txBody>
-          <a:bodyPr wrap="square" anchor="t" lIns="0" rIns="0" tIns="0" bIns="0">
-            <a:spAutoFit/>
-          </a:bodyPr>
-          <a:lstStyle/>
-          <a:p>
-            <a:pPr algn="l">
-              <a:lnSpc>
-                <a:spcPct val="102000"/>
-              </a:lnSpc>
-            </a:pPr>
-            <a:r>
-              <a:rPr sz="900" b="0">
-                <a:solidFill>
-                  <a:srgbClr val="555555"/>
-                </a:solidFill>
-                <a:latin typeface="Arial"/>
-                <a:ea typeface="Arial"/>
-              </a:rPr>
-              <a:t>2022-06 NVIDIA 최초 공급</a:t>
-            </a:r>
-          </a:p>
-        </p:txBody>
-      </p:sp>
-      <p:sp>
-        <p:nvSpPr>
-          <p:cNvPr id="67" name="Rectangle 66"/>
-          <p:cNvSpPr/>
-          <p:nvPr/>
-        </p:nvSpPr>
-        <p:spPr>
-          <a:xfrm>
-            <a:off x="4739639" y="5522975"/>
-            <a:ext cx="1743455" cy="1280160"/>
+                <a:spcPct val="112000"/>
+              </a:lnSpc>
+            </a:pPr>
+            <a:r>
+              <a:rPr sz="1000" b="0">
+                <a:solidFill>
+                  <a:srgbClr val="8A8A8A"/>
+                </a:solidFill>
+                <a:latin typeface="Arial"/>
+                <a:ea typeface="Arial"/>
+              </a:rPr>
+              <a:t>기존 요구는 그대로이고, 그 위에 요구가 더해지고 있습니다</a:t>
+            </a:r>
+          </a:p>
+        </p:txBody>
+      </p:sp>
+      <p:sp>
+        <p:nvSpPr>
+          <p:cNvPr id="76" name="Rectangle 75"/>
+          <p:cNvSpPr/>
+          <p:nvPr/>
+        </p:nvSpPr>
+        <p:spPr>
+          <a:xfrm>
+            <a:off x="7251192" y="3529584"/>
+            <a:ext cx="2918764" cy="566928"/>
           </a:xfrm>
           <a:prstGeom prst="rect">
             <a:avLst/>
@@ -6826,16 +7290,96 @@
       </p:sp>
       <p:sp>
         <p:nvSpPr>
-          <p:cNvPr id="68" name="Rectangle 67"/>
-          <p:cNvSpPr/>
-          <p:nvPr/>
-        </p:nvSpPr>
-        <p:spPr>
-          <a:xfrm>
-            <a:off x="4739639" y="5522975"/>
-            <a:ext cx="1743455" cy="36576"/>
-          </a:xfrm>
-          <a:prstGeom prst="rect">
+          <p:cNvPr id="77" name="TextBox 76"/>
+          <p:cNvSpPr txBox="1"/>
+          <p:nvPr/>
+        </p:nvSpPr>
+        <p:spPr>
+          <a:xfrm>
+            <a:off x="7379208" y="3584448"/>
+            <a:ext cx="2662732" cy="201168"/>
+          </a:xfrm>
+          <a:prstGeom prst="rect">
+            <a:avLst/>
+          </a:prstGeom>
+          <a:noFill/>
+        </p:spPr>
+        <p:txBody>
+          <a:bodyPr wrap="square" anchor="t" lIns="0" rIns="0" tIns="0" bIns="0">
+            <a:spAutoFit/>
+          </a:bodyPr>
+          <a:lstStyle/>
+          <a:p>
+            <a:pPr algn="l">
+              <a:lnSpc>
+                <a:spcPct val="112000"/>
+              </a:lnSpc>
+            </a:pPr>
+            <a:r>
+              <a:rPr sz="875" b="0">
+                <a:solidFill>
+                  <a:srgbClr val="8A8A8A"/>
+                </a:solidFill>
+                <a:latin typeface="Arial"/>
+                <a:ea typeface="Arial"/>
+              </a:rPr>
+              <a:t>기존</a:t>
+            </a:r>
+          </a:p>
+        </p:txBody>
+      </p:sp>
+      <p:sp>
+        <p:nvSpPr>
+          <p:cNvPr id="78" name="TextBox 77"/>
+          <p:cNvSpPr txBox="1"/>
+          <p:nvPr/>
+        </p:nvSpPr>
+        <p:spPr>
+          <a:xfrm>
+            <a:off x="7379208" y="3767328"/>
+            <a:ext cx="2662732" cy="274320"/>
+          </a:xfrm>
+          <a:prstGeom prst="rect">
+            <a:avLst/>
+          </a:prstGeom>
+          <a:noFill/>
+        </p:spPr>
+        <p:txBody>
+          <a:bodyPr wrap="square" anchor="t" lIns="0" rIns="0" tIns="0" bIns="0">
+            <a:spAutoFit/>
+          </a:bodyPr>
+          <a:lstStyle/>
+          <a:p>
+            <a:pPr algn="l">
+              <a:lnSpc>
+                <a:spcPct val="112000"/>
+              </a:lnSpc>
+            </a:pPr>
+            <a:r>
+              <a:rPr sz="1125" b="1">
+                <a:solidFill>
+                  <a:srgbClr val="1A1A1A"/>
+                </a:solidFill>
+                <a:latin typeface="Arial"/>
+                <a:ea typeface="Arial"/>
+              </a:rPr>
+              <a:t>용량당 비용 · 밀도 · 전력</a:t>
+            </a:r>
+          </a:p>
+        </p:txBody>
+      </p:sp>
+      <p:sp>
+        <p:nvSpPr>
+          <p:cNvPr id="79" name="Right Arrow 78"/>
+          <p:cNvSpPr/>
+          <p:nvPr/>
+        </p:nvSpPr>
+        <p:spPr>
+          <a:xfrm>
+            <a:off x="10224820" y="3712463"/>
+            <a:ext cx="201168" cy="201168"/>
+          </a:xfrm>
+          <a:prstGeom prst="rightArrow">
             <a:avLst/>
           </a:prstGeom>
           <a:solidFill>
@@ -6870,144 +7414,14 @@
       </p:sp>
       <p:sp>
         <p:nvSpPr>
-          <p:cNvPr id="69" name="TextBox 68"/>
-          <p:cNvSpPr txBox="1"/>
-          <p:nvPr/>
-        </p:nvSpPr>
-        <p:spPr>
-          <a:xfrm>
-            <a:off x="4849367" y="5596127"/>
-            <a:ext cx="1523999" cy="182880"/>
-          </a:xfrm>
-          <a:prstGeom prst="rect">
-            <a:avLst/>
-          </a:prstGeom>
-          <a:noFill/>
-        </p:spPr>
-        <p:txBody>
-          <a:bodyPr wrap="square" anchor="t" lIns="0" rIns="0" tIns="0" bIns="0">
-            <a:spAutoFit/>
-          </a:bodyPr>
-          <a:lstStyle/>
-          <a:p>
-            <a:pPr algn="l">
-              <a:lnSpc>
-                <a:spcPct val="112000"/>
-              </a:lnSpc>
-            </a:pPr>
-            <a:r>
-              <a:rPr sz="950" b="1">
-                <a:solidFill>
-                  <a:srgbClr val="1428A0"/>
-                </a:solidFill>
-                <a:latin typeface="Arial"/>
-                <a:ea typeface="Arial"/>
-              </a:rPr>
-              <a:t>2026-02  </a:t>
-            </a:r>
-            <a:r>
-              <a:rPr sz="950" b="0">
-                <a:solidFill>
-                  <a:srgbClr val="8A8A8A"/>
-                </a:solidFill>
-                <a:latin typeface="Arial"/>
-                <a:ea typeface="Arial"/>
-              </a:rPr>
-              <a:t>삼성</a:t>
-            </a:r>
-          </a:p>
-        </p:txBody>
-      </p:sp>
-      <p:sp>
-        <p:nvSpPr>
-          <p:cNvPr id="70" name="TextBox 69"/>
-          <p:cNvSpPr txBox="1"/>
-          <p:nvPr/>
-        </p:nvSpPr>
-        <p:spPr>
-          <a:xfrm>
-            <a:off x="4849367" y="5797296"/>
-            <a:ext cx="1523999" cy="438912"/>
-          </a:xfrm>
-          <a:prstGeom prst="rect">
-            <a:avLst/>
-          </a:prstGeom>
-          <a:noFill/>
-        </p:spPr>
-        <p:txBody>
-          <a:bodyPr wrap="square" anchor="t" lIns="0" rIns="0" tIns="0" bIns="0">
-            <a:spAutoFit/>
-          </a:bodyPr>
-          <a:lstStyle/>
-          <a:p>
-            <a:pPr algn="l">
-              <a:lnSpc>
-                <a:spcPct val="104000"/>
-              </a:lnSpc>
-            </a:pPr>
-            <a:r>
-              <a:rPr sz="1050" b="1">
-                <a:solidFill>
-                  <a:srgbClr val="1A1A1A"/>
-                </a:solidFill>
-                <a:latin typeface="Arial"/>
-                <a:ea typeface="Arial"/>
-              </a:rPr>
-              <a:t>업계 최초 상용 HBM4 출하</a:t>
-            </a:r>
-          </a:p>
-        </p:txBody>
-      </p:sp>
-      <p:sp>
-        <p:nvSpPr>
-          <p:cNvPr id="71" name="TextBox 70"/>
-          <p:cNvSpPr txBox="1"/>
-          <p:nvPr/>
-        </p:nvSpPr>
-        <p:spPr>
-          <a:xfrm>
-            <a:off x="4849367" y="6254496"/>
-            <a:ext cx="1523999" cy="365760"/>
-          </a:xfrm>
-          <a:prstGeom prst="rect">
-            <a:avLst/>
-          </a:prstGeom>
-          <a:noFill/>
-        </p:spPr>
-        <p:txBody>
-          <a:bodyPr wrap="square" anchor="t" lIns="0" rIns="0" tIns="0" bIns="0">
-            <a:spAutoFit/>
-          </a:bodyPr>
-          <a:lstStyle/>
-          <a:p>
-            <a:pPr algn="l">
-              <a:lnSpc>
-                <a:spcPct val="102000"/>
-              </a:lnSpc>
-            </a:pPr>
-            <a:r>
-              <a:rPr sz="900" b="0">
-                <a:solidFill>
-                  <a:srgbClr val="555555"/>
-                </a:solidFill>
-                <a:latin typeface="Arial"/>
-                <a:ea typeface="Arial"/>
-              </a:rPr>
-              <a:t>제품 개발은 이어졌습니다</a:t>
-            </a:r>
-          </a:p>
-        </p:txBody>
-      </p:sp>
-      <p:sp>
-        <p:nvSpPr>
-          <p:cNvPr id="72" name="Rectangle 71"/>
-          <p:cNvSpPr/>
-          <p:nvPr/>
-        </p:nvSpPr>
-        <p:spPr>
-          <a:xfrm>
-            <a:off x="996696" y="6931151"/>
-            <a:ext cx="5486400" cy="932688"/>
+          <p:cNvPr id="80" name="Rectangle 79"/>
+          <p:cNvSpPr/>
+          <p:nvPr/>
+        </p:nvSpPr>
+        <p:spPr>
+          <a:xfrm>
+            <a:off x="10480852" y="3529584"/>
+            <a:ext cx="1982419" cy="566928"/>
           </a:xfrm>
           <a:prstGeom prst="rect">
             <a:avLst/>
@@ -7044,14 +7458,14 @@
       </p:sp>
       <p:sp>
         <p:nvSpPr>
-          <p:cNvPr id="73" name="TextBox 72"/>
-          <p:cNvSpPr txBox="1"/>
-          <p:nvPr/>
-        </p:nvSpPr>
-        <p:spPr>
-          <a:xfrm>
-            <a:off x="1216152" y="7022591"/>
-            <a:ext cx="5047488" cy="475488"/>
+          <p:cNvPr id="81" name="TextBox 80"/>
+          <p:cNvSpPr txBox="1"/>
+          <p:nvPr/>
+        </p:nvSpPr>
+        <p:spPr>
+          <a:xfrm>
+            <a:off x="10608868" y="3584448"/>
+            <a:ext cx="1726387" cy="201168"/>
           </a:xfrm>
           <a:prstGeom prst="rect">
             <a:avLst/>
@@ -7066,118 +7480,460 @@
           <a:p>
             <a:pPr algn="l">
               <a:lnSpc>
+                <a:spcPct val="112000"/>
+              </a:lnSpc>
+            </a:pPr>
+            <a:r>
+              <a:rPr sz="875" b="0">
+                <a:solidFill>
+                  <a:srgbClr val="AAB8E8"/>
+                </a:solidFill>
+                <a:latin typeface="Arial"/>
+                <a:ea typeface="Arial"/>
+              </a:rPr>
+              <a:t>추가</a:t>
+            </a:r>
+          </a:p>
+        </p:txBody>
+      </p:sp>
+      <p:sp>
+        <p:nvSpPr>
+          <p:cNvPr id="82" name="TextBox 81"/>
+          <p:cNvSpPr txBox="1"/>
+          <p:nvPr/>
+        </p:nvSpPr>
+        <p:spPr>
+          <a:xfrm>
+            <a:off x="10608868" y="3767328"/>
+            <a:ext cx="1726387" cy="274320"/>
+          </a:xfrm>
+          <a:prstGeom prst="rect">
+            <a:avLst/>
+          </a:prstGeom>
+          <a:noFill/>
+        </p:spPr>
+        <p:txBody>
+          <a:bodyPr wrap="square" anchor="t" lIns="0" rIns="0" tIns="0" bIns="0">
+            <a:spAutoFit/>
+          </a:bodyPr>
+          <a:lstStyle/>
+          <a:p>
+            <a:pPr algn="l">
+              <a:lnSpc>
+                <a:spcPct val="112000"/>
+              </a:lnSpc>
+            </a:pPr>
+            <a:r>
+              <a:rPr sz="1275" b="1">
+                <a:solidFill>
+                  <a:srgbClr val="FFFFFF"/>
+                </a:solidFill>
+                <a:latin typeface="Arial"/>
+                <a:ea typeface="Arial"/>
+              </a:rPr>
+              <a:t>내구성</a:t>
+            </a:r>
+          </a:p>
+        </p:txBody>
+      </p:sp>
+      <p:sp>
+        <p:nvSpPr>
+          <p:cNvPr id="83" name="TextBox 82"/>
+          <p:cNvSpPr txBox="1"/>
+          <p:nvPr/>
+        </p:nvSpPr>
+        <p:spPr>
+          <a:xfrm>
+            <a:off x="7251192" y="4261104"/>
+            <a:ext cx="5212080" cy="201168"/>
+          </a:xfrm>
+          <a:prstGeom prst="rect">
+            <a:avLst/>
+          </a:prstGeom>
+          <a:noFill/>
+        </p:spPr>
+        <p:txBody>
+          <a:bodyPr wrap="square" anchor="t" lIns="0" rIns="0" tIns="0" bIns="0">
+            <a:spAutoFit/>
+          </a:bodyPr>
+          <a:lstStyle/>
+          <a:p>
+            <a:pPr algn="l">
+              <a:lnSpc>
+                <a:spcPct val="112000"/>
+              </a:lnSpc>
+            </a:pPr>
+            <a:r>
+              <a:rPr sz="1000" b="0">
+                <a:solidFill>
+                  <a:srgbClr val="8A8A8A"/>
+                </a:solidFill>
+                <a:latin typeface="Arial"/>
+                <a:ea typeface="Arial"/>
+              </a:rPr>
+              <a:t>무엇이 그 요구를 만들었나   </a:t>
+            </a:r>
+            <a:r>
+              <a:rPr sz="1050" b="1">
+                <a:solidFill>
+                  <a:srgbClr val="1428A0"/>
+                </a:solidFill>
+                <a:latin typeface="Arial"/>
+                <a:ea typeface="Arial"/>
+              </a:rPr>
+              <a:t>KV 캐시가 SSD를 추론 메모리 계층으로 옮깁니다</a:t>
+            </a:r>
+          </a:p>
+        </p:txBody>
+      </p:sp>
+      <p:sp>
+        <p:nvSpPr>
+          <p:cNvPr id="84" name="Rectangle 83"/>
+          <p:cNvSpPr/>
+          <p:nvPr/>
+        </p:nvSpPr>
+        <p:spPr>
+          <a:xfrm>
+            <a:off x="7251192" y="4498848"/>
+            <a:ext cx="5212080" cy="566928"/>
+          </a:xfrm>
+          <a:prstGeom prst="rect">
+            <a:avLst/>
+          </a:prstGeom>
+          <a:solidFill>
+            <a:srgbClr val="1428A0"/>
+          </a:solidFill>
+          <a:ln>
+            <a:noFill/>
+          </a:ln>
+          <a:effectLst/>
+        </p:spPr>
+        <p:style>
+          <a:lnRef idx="1">
+            <a:schemeClr val="accent1"/>
+          </a:lnRef>
+          <a:fillRef idx="3">
+            <a:schemeClr val="accent1"/>
+          </a:fillRef>
+          <a:effectRef idx="2">
+            <a:schemeClr val="accent1"/>
+          </a:effectRef>
+          <a:fontRef idx="minor">
+            <a:schemeClr val="lt1"/>
+          </a:fontRef>
+        </p:style>
+        <p:txBody>
+          <a:bodyPr rtlCol="0" anchor="ctr"/>
+          <a:lstStyle/>
+          <a:p>
+            <a:pPr algn="ctr"/>
+          </a:p>
+        </p:txBody>
+      </p:sp>
+      <p:sp>
+        <p:nvSpPr>
+          <p:cNvPr id="85" name="Rectangle 84"/>
+          <p:cNvSpPr/>
+          <p:nvPr/>
+        </p:nvSpPr>
+        <p:spPr>
+          <a:xfrm>
+            <a:off x="7251192" y="4498848"/>
+            <a:ext cx="530352" cy="566928"/>
+          </a:xfrm>
+          <a:prstGeom prst="rect">
+            <a:avLst/>
+          </a:prstGeom>
+          <a:solidFill>
+            <a:srgbClr val="3C5AC8"/>
+          </a:solidFill>
+          <a:ln>
+            <a:noFill/>
+          </a:ln>
+          <a:effectLst/>
+        </p:spPr>
+        <p:style>
+          <a:lnRef idx="1">
+            <a:schemeClr val="accent1"/>
+          </a:lnRef>
+          <a:fillRef idx="3">
+            <a:schemeClr val="accent1"/>
+          </a:fillRef>
+          <a:effectRef idx="2">
+            <a:schemeClr val="accent1"/>
+          </a:effectRef>
+          <a:fontRef idx="minor">
+            <a:schemeClr val="lt1"/>
+          </a:fontRef>
+        </p:style>
+        <p:txBody>
+          <a:bodyPr rtlCol="0" anchor="ctr"/>
+          <a:lstStyle/>
+          <a:p>
+            <a:pPr algn="ctr"/>
+          </a:p>
+        </p:txBody>
+      </p:sp>
+      <p:sp>
+        <p:nvSpPr>
+          <p:cNvPr id="86" name="TextBox 85"/>
+          <p:cNvSpPr txBox="1"/>
+          <p:nvPr/>
+        </p:nvSpPr>
+        <p:spPr>
+          <a:xfrm>
+            <a:off x="7251192" y="4498848"/>
+            <a:ext cx="530352" cy="566928"/>
+          </a:xfrm>
+          <a:prstGeom prst="rect">
+            <a:avLst/>
+          </a:prstGeom>
+          <a:noFill/>
+        </p:spPr>
+        <p:txBody>
+          <a:bodyPr wrap="square" anchor="ctr" lIns="0" rIns="0" tIns="0" bIns="0">
+            <a:spAutoFit/>
+          </a:bodyPr>
+          <a:lstStyle/>
+          <a:p>
+            <a:pPr algn="ctr">
+              <a:lnSpc>
+                <a:spcPct val="112000"/>
+              </a:lnSpc>
+            </a:pPr>
+            <a:r>
+              <a:rPr sz="1200" b="1">
+                <a:solidFill>
+                  <a:srgbClr val="FFFFFF"/>
+                </a:solidFill>
+                <a:latin typeface="Arial"/>
+                <a:ea typeface="Arial"/>
+              </a:rPr>
+              <a:t>G1</a:t>
+            </a:r>
+          </a:p>
+        </p:txBody>
+      </p:sp>
+      <p:sp>
+        <p:nvSpPr>
+          <p:cNvPr id="87" name="TextBox 86"/>
+          <p:cNvSpPr txBox="1"/>
+          <p:nvPr/>
+        </p:nvSpPr>
+        <p:spPr>
+          <a:xfrm>
+            <a:off x="7909560" y="4572000"/>
+            <a:ext cx="1682496" cy="237744"/>
+          </a:xfrm>
+          <a:prstGeom prst="rect">
+            <a:avLst/>
+          </a:prstGeom>
+          <a:noFill/>
+        </p:spPr>
+        <p:txBody>
+          <a:bodyPr wrap="square" anchor="t" lIns="0" rIns="0" tIns="0" bIns="0">
+            <a:spAutoFit/>
+          </a:bodyPr>
+          <a:lstStyle/>
+          <a:p>
+            <a:pPr algn="l">
+              <a:lnSpc>
+                <a:spcPct val="112000"/>
+              </a:lnSpc>
+            </a:pPr>
+            <a:r>
+              <a:rPr sz="1275" b="1">
+                <a:solidFill>
+                  <a:srgbClr val="FFFFFF"/>
+                </a:solidFill>
+                <a:latin typeface="Arial"/>
+                <a:ea typeface="Arial"/>
+              </a:rPr>
+              <a:t>GPU HBM</a:t>
+            </a:r>
+          </a:p>
+        </p:txBody>
+      </p:sp>
+      <p:sp>
+        <p:nvSpPr>
+          <p:cNvPr id="88" name="TextBox 87"/>
+          <p:cNvSpPr txBox="1"/>
+          <p:nvPr/>
+        </p:nvSpPr>
+        <p:spPr>
+          <a:xfrm>
+            <a:off x="7909560" y="4809744"/>
+            <a:ext cx="1682496" cy="182880"/>
+          </a:xfrm>
+          <a:prstGeom prst="rect">
+            <a:avLst/>
+          </a:prstGeom>
+          <a:noFill/>
+        </p:spPr>
+        <p:txBody>
+          <a:bodyPr wrap="square" anchor="t" lIns="0" rIns="0" tIns="0" bIns="0">
+            <a:spAutoFit/>
+          </a:bodyPr>
+          <a:lstStyle/>
+          <a:p>
+            <a:pPr algn="l">
+              <a:lnSpc>
+                <a:spcPct val="112000"/>
+              </a:lnSpc>
+            </a:pPr>
+            <a:r>
+              <a:rPr sz="875" b="0">
+                <a:solidFill>
+                  <a:srgbClr val="AAB8E8"/>
+                </a:solidFill>
+                <a:latin typeface="Arial"/>
+                <a:ea typeface="Arial"/>
+              </a:rPr>
+              <a:t>80 → 288GB로 커졌지만</a:t>
+            </a:r>
+          </a:p>
+        </p:txBody>
+      </p:sp>
+      <p:sp>
+        <p:nvSpPr>
+          <p:cNvPr id="89" name="TextBox 88"/>
+          <p:cNvSpPr txBox="1"/>
+          <p:nvPr/>
+        </p:nvSpPr>
+        <p:spPr>
+          <a:xfrm>
+            <a:off x="9665208" y="4535424"/>
+            <a:ext cx="2670048" cy="493776"/>
+          </a:xfrm>
+          <a:prstGeom prst="rect">
+            <a:avLst/>
+          </a:prstGeom>
+          <a:noFill/>
+        </p:spPr>
+        <p:txBody>
+          <a:bodyPr wrap="square" anchor="ctr" lIns="0" rIns="0" tIns="0" bIns="0">
+            <a:spAutoFit/>
+          </a:bodyPr>
+          <a:lstStyle/>
+          <a:p>
+            <a:pPr algn="l">
+              <a:lnSpc>
                 <a:spcPct val="104000"/>
               </a:lnSpc>
             </a:pPr>
             <a:r>
-              <a:rPr sz="1425" b="1">
-                <a:solidFill>
-                  <a:srgbClr val="FFFFFF"/>
-                </a:solidFill>
-                <a:latin typeface="Arial"/>
-                <a:ea typeface="Arial"/>
-              </a:rPr>
-              <a:t>표준을 만족하는 기술을 가진 것만으로는 부족했습니다</a:t>
-            </a:r>
-          </a:p>
-        </p:txBody>
-      </p:sp>
-      <p:sp>
-        <p:nvSpPr>
-          <p:cNvPr id="74" name="TextBox 73"/>
-          <p:cNvSpPr txBox="1"/>
-          <p:nvPr/>
-        </p:nvSpPr>
-        <p:spPr>
-          <a:xfrm>
-            <a:off x="1216152" y="7479792"/>
-            <a:ext cx="5047488" cy="310896"/>
-          </a:xfrm>
-          <a:prstGeom prst="rect">
-            <a:avLst/>
-          </a:prstGeom>
-          <a:noFill/>
-        </p:spPr>
-        <p:txBody>
-          <a:bodyPr wrap="square" anchor="t" lIns="0" rIns="0" tIns="0" bIns="0">
+              <a:rPr sz="900" b="0">
+                <a:solidFill>
+                  <a:srgbClr val="AAB8E8"/>
+                </a:solidFill>
+                <a:latin typeface="Arial"/>
+                <a:ea typeface="Arial"/>
+              </a:rPr>
+              <a:t>단일 사용자 128K 컨텍스트가 약 40GB · 사용자 수에 비례</a:t>
+            </a:r>
+          </a:p>
+        </p:txBody>
+      </p:sp>
+      <p:sp>
+        <p:nvSpPr>
+          <p:cNvPr id="90" name="Down Arrow 89"/>
+          <p:cNvSpPr/>
+          <p:nvPr/>
+        </p:nvSpPr>
+        <p:spPr>
+          <a:xfrm>
+            <a:off x="7424927" y="5074920"/>
+            <a:ext cx="146304" cy="137160"/>
+          </a:xfrm>
+          <a:prstGeom prst="downArrow">
+            <a:avLst/>
+          </a:prstGeom>
+          <a:solidFill>
+            <a:srgbClr val="3C5AC8"/>
+          </a:solidFill>
+          <a:ln>
+            <a:noFill/>
+          </a:ln>
+          <a:effectLst/>
+        </p:spPr>
+        <p:style>
+          <a:lnRef idx="1">
+            <a:schemeClr val="accent1"/>
+          </a:lnRef>
+          <a:fillRef idx="3">
+            <a:schemeClr val="accent1"/>
+          </a:fillRef>
+          <a:effectRef idx="2">
+            <a:schemeClr val="accent1"/>
+          </a:effectRef>
+          <a:fontRef idx="minor">
+            <a:schemeClr val="lt1"/>
+          </a:fontRef>
+        </p:style>
+        <p:txBody>
+          <a:bodyPr rtlCol="0" anchor="ctr"/>
+          <a:lstStyle/>
+          <a:p>
+            <a:pPr algn="ctr"/>
+          </a:p>
+        </p:txBody>
+      </p:sp>
+      <p:sp>
+        <p:nvSpPr>
+          <p:cNvPr id="91" name="TextBox 90"/>
+          <p:cNvSpPr txBox="1"/>
+          <p:nvPr/>
+        </p:nvSpPr>
+        <p:spPr>
+          <a:xfrm>
+            <a:off x="7635240" y="5065776"/>
+            <a:ext cx="4736592" cy="155448"/>
+          </a:xfrm>
+          <a:prstGeom prst="rect">
+            <a:avLst/>
+          </a:prstGeom>
+          <a:noFill/>
+        </p:spPr>
+        <p:txBody>
+          <a:bodyPr wrap="square" anchor="ctr" lIns="0" rIns="0" tIns="0" bIns="0">
             <a:spAutoFit/>
           </a:bodyPr>
           <a:lstStyle/>
           <a:p>
             <a:pPr algn="l">
               <a:lnSpc>
-                <a:spcPct val="104000"/>
-              </a:lnSpc>
-            </a:pPr>
-            <a:r>
-              <a:rPr sz="1125" b="0">
-                <a:solidFill>
-                  <a:srgbClr val="AAB8E8"/>
-                </a:solidFill>
-                <a:latin typeface="Arial"/>
-                <a:ea typeface="Arial"/>
-              </a:rPr>
-              <a:t>시장 전환 시점에 고객이 요구하는 사양을 먼저 맞춘 쪽이 design-in을 가져갔습니다</a:t>
-            </a:r>
-          </a:p>
-        </p:txBody>
-      </p:sp>
-      <p:sp>
-        <p:nvSpPr>
-          <p:cNvPr id="75" name="TextBox 74"/>
-          <p:cNvSpPr txBox="1"/>
-          <p:nvPr/>
-        </p:nvSpPr>
-        <p:spPr>
-          <a:xfrm>
-            <a:off x="996696" y="7936992"/>
-            <a:ext cx="5486400" cy="365760"/>
-          </a:xfrm>
-          <a:prstGeom prst="rect">
-            <a:avLst/>
-          </a:prstGeom>
-          <a:noFill/>
-        </p:spPr>
-        <p:txBody>
-          <a:bodyPr wrap="square" anchor="t" lIns="0" rIns="0" tIns="0" bIns="0">
-            <a:spAutoFit/>
-          </a:bodyPr>
-          <a:lstStyle/>
-          <a:p>
-            <a:pPr algn="l">
-              <a:lnSpc>
-                <a:spcPct val="102000"/>
-              </a:lnSpc>
-            </a:pPr>
-            <a:r>
-              <a:rPr sz="950" b="0">
-                <a:solidFill>
-                  <a:srgbClr val="8A8A8A"/>
-                </a:solidFill>
-                <a:latin typeface="Arial"/>
-                <a:ea typeface="Arial"/>
-              </a:rPr>
-              <a:t>전략적 우선순위가 약화된 구간에서 격차가 생겼습니다 · 기술 보유 여부의 문제가 아니었습니다</a:t>
-            </a:r>
-          </a:p>
-        </p:txBody>
-      </p:sp>
-      <p:sp>
-        <p:nvSpPr>
-          <p:cNvPr id="76" name="Rectangle 75"/>
-          <p:cNvSpPr/>
-          <p:nvPr/>
-        </p:nvSpPr>
-        <p:spPr>
-          <a:xfrm>
-            <a:off x="6976872" y="2560320"/>
-            <a:ext cx="5760720" cy="5870448"/>
-          </a:xfrm>
-          <a:prstGeom prst="rect">
-            <a:avLst/>
-          </a:prstGeom>
-          <a:solidFill>
-            <a:srgbClr val="FFFFFF"/>
+                <a:spcPct val="112000"/>
+              </a:lnSpc>
+            </a:pPr>
+            <a:r>
+              <a:rPr sz="900" b="1">
+                <a:solidFill>
+                  <a:srgbClr val="3C5AC8"/>
+                </a:solidFill>
+                <a:latin typeface="Arial"/>
+                <a:ea typeface="Arial"/>
+              </a:rPr>
+              <a:t>넘친다</a:t>
+            </a:r>
+          </a:p>
+        </p:txBody>
+      </p:sp>
+      <p:sp>
+        <p:nvSpPr>
+          <p:cNvPr id="92" name="Rectangle 91"/>
+          <p:cNvSpPr/>
+          <p:nvPr/>
+        </p:nvSpPr>
+        <p:spPr>
+          <a:xfrm>
+            <a:off x="7251192" y="5221224"/>
+            <a:ext cx="5212080" cy="566928"/>
+          </a:xfrm>
+          <a:prstGeom prst="rect">
+            <a:avLst/>
+          </a:prstGeom>
+          <a:solidFill>
+            <a:srgbClr val="F4F6FC"/>
           </a:solidFill>
           <a:ln w="9525">
             <a:solidFill>
@@ -7210,14 +7966,14 @@
       </p:sp>
       <p:sp>
         <p:nvSpPr>
-          <p:cNvPr id="77" name="Rectangle 76"/>
-          <p:cNvSpPr/>
-          <p:nvPr/>
-        </p:nvSpPr>
-        <p:spPr>
-          <a:xfrm>
-            <a:off x="6976872" y="2560320"/>
-            <a:ext cx="5760720" cy="45720"/>
+          <p:cNvPr id="93" name="Rectangle 92"/>
+          <p:cNvSpPr/>
+          <p:nvPr/>
+        </p:nvSpPr>
+        <p:spPr>
+          <a:xfrm>
+            <a:off x="7251192" y="5221224"/>
+            <a:ext cx="530352" cy="566928"/>
           </a:xfrm>
           <a:prstGeom prst="rect">
             <a:avLst/>
@@ -7254,14 +8010,54 @@
       </p:sp>
       <p:sp>
         <p:nvSpPr>
-          <p:cNvPr id="78" name="TextBox 77"/>
-          <p:cNvSpPr txBox="1"/>
-          <p:nvPr/>
-        </p:nvSpPr>
-        <p:spPr>
-          <a:xfrm>
-            <a:off x="7196328" y="2706624"/>
-            <a:ext cx="5321808" cy="274320"/>
+          <p:cNvPr id="94" name="TextBox 93"/>
+          <p:cNvSpPr txBox="1"/>
+          <p:nvPr/>
+        </p:nvSpPr>
+        <p:spPr>
+          <a:xfrm>
+            <a:off x="7251192" y="5221224"/>
+            <a:ext cx="530352" cy="566928"/>
+          </a:xfrm>
+          <a:prstGeom prst="rect">
+            <a:avLst/>
+          </a:prstGeom>
+          <a:noFill/>
+        </p:spPr>
+        <p:txBody>
+          <a:bodyPr wrap="square" anchor="ctr" lIns="0" rIns="0" tIns="0" bIns="0">
+            <a:spAutoFit/>
+          </a:bodyPr>
+          <a:lstStyle/>
+          <a:p>
+            <a:pPr algn="ctr">
+              <a:lnSpc>
+                <a:spcPct val="112000"/>
+              </a:lnSpc>
+            </a:pPr>
+            <a:r>
+              <a:rPr sz="1200" b="1">
+                <a:solidFill>
+                  <a:srgbClr val="FFFFFF"/>
+                </a:solidFill>
+                <a:latin typeface="Arial"/>
+                <a:ea typeface="Arial"/>
+              </a:rPr>
+              <a:t>G2</a:t>
+            </a:r>
+          </a:p>
+        </p:txBody>
+      </p:sp>
+      <p:sp>
+        <p:nvSpPr>
+          <p:cNvPr id="95" name="TextBox 94"/>
+          <p:cNvSpPr txBox="1"/>
+          <p:nvPr/>
+        </p:nvSpPr>
+        <p:spPr>
+          <a:xfrm>
+            <a:off x="7909560" y="5294376"/>
+            <a:ext cx="1682496" cy="237744"/>
           </a:xfrm>
           <a:prstGeom prst="rect">
             <a:avLst/>
@@ -7280,6 +8076,1108 @@
               </a:lnSpc>
             </a:pPr>
             <a:r>
+              <a:rPr sz="1275" b="1">
+                <a:solidFill>
+                  <a:srgbClr val="1A1A1A"/>
+                </a:solidFill>
+                <a:latin typeface="Arial"/>
+                <a:ea typeface="Arial"/>
+              </a:rPr>
+              <a:t>CPU DRAM</a:t>
+            </a:r>
+          </a:p>
+        </p:txBody>
+      </p:sp>
+      <p:sp>
+        <p:nvSpPr>
+          <p:cNvPr id="96" name="TextBox 95"/>
+          <p:cNvSpPr txBox="1"/>
+          <p:nvPr/>
+        </p:nvSpPr>
+        <p:spPr>
+          <a:xfrm>
+            <a:off x="7909560" y="5532120"/>
+            <a:ext cx="1682496" cy="182880"/>
+          </a:xfrm>
+          <a:prstGeom prst="rect">
+            <a:avLst/>
+          </a:prstGeom>
+          <a:noFill/>
+        </p:spPr>
+        <p:txBody>
+          <a:bodyPr wrap="square" anchor="t" lIns="0" rIns="0" tIns="0" bIns="0">
+            <a:spAutoFit/>
+          </a:bodyPr>
+          <a:lstStyle/>
+          <a:p>
+            <a:pPr algn="l">
+              <a:lnSpc>
+                <a:spcPct val="112000"/>
+              </a:lnSpc>
+            </a:pPr>
+            <a:r>
+              <a:rPr sz="875" b="0">
+                <a:solidFill>
+                  <a:srgbClr val="8A8A8A"/>
+                </a:solidFill>
+                <a:latin typeface="Arial"/>
+                <a:ea typeface="Arial"/>
+              </a:rPr>
+              <a:t>첫 확장</a:t>
+            </a:r>
+          </a:p>
+        </p:txBody>
+      </p:sp>
+      <p:sp>
+        <p:nvSpPr>
+          <p:cNvPr id="97" name="TextBox 96"/>
+          <p:cNvSpPr txBox="1"/>
+          <p:nvPr/>
+        </p:nvSpPr>
+        <p:spPr>
+          <a:xfrm>
+            <a:off x="9665208" y="5257800"/>
+            <a:ext cx="2670048" cy="493776"/>
+          </a:xfrm>
+          <a:prstGeom prst="rect">
+            <a:avLst/>
+          </a:prstGeom>
+          <a:noFill/>
+        </p:spPr>
+        <p:txBody>
+          <a:bodyPr wrap="square" anchor="ctr" lIns="0" rIns="0" tIns="0" bIns="0">
+            <a:spAutoFit/>
+          </a:bodyPr>
+          <a:lstStyle/>
+          <a:p>
+            <a:pPr algn="l">
+              <a:lnSpc>
+                <a:spcPct val="104000"/>
+              </a:lnSpc>
+            </a:pPr>
+            <a:r>
+              <a:rPr sz="900" b="0">
+                <a:solidFill>
+                  <a:srgbClr val="555555"/>
+                </a:solidFill>
+                <a:latin typeface="Arial"/>
+                <a:ea typeface="Arial"/>
+              </a:rPr>
+              <a:t>Kioxia — DRAM만으로는 더 못 따라간다</a:t>
+            </a:r>
+          </a:p>
+        </p:txBody>
+      </p:sp>
+      <p:sp>
+        <p:nvSpPr>
+          <p:cNvPr id="98" name="Down Arrow 97"/>
+          <p:cNvSpPr/>
+          <p:nvPr/>
+        </p:nvSpPr>
+        <p:spPr>
+          <a:xfrm>
+            <a:off x="7424927" y="5797296"/>
+            <a:ext cx="146304" cy="137160"/>
+          </a:xfrm>
+          <a:prstGeom prst="downArrow">
+            <a:avLst/>
+          </a:prstGeom>
+          <a:solidFill>
+            <a:srgbClr val="3C5AC8"/>
+          </a:solidFill>
+          <a:ln>
+            <a:noFill/>
+          </a:ln>
+          <a:effectLst/>
+        </p:spPr>
+        <p:style>
+          <a:lnRef idx="1">
+            <a:schemeClr val="accent1"/>
+          </a:lnRef>
+          <a:fillRef idx="3">
+            <a:schemeClr val="accent1"/>
+          </a:fillRef>
+          <a:effectRef idx="2">
+            <a:schemeClr val="accent1"/>
+          </a:effectRef>
+          <a:fontRef idx="minor">
+            <a:schemeClr val="lt1"/>
+          </a:fontRef>
+        </p:style>
+        <p:txBody>
+          <a:bodyPr rtlCol="0" anchor="ctr"/>
+          <a:lstStyle/>
+          <a:p>
+            <a:pPr algn="ctr"/>
+          </a:p>
+        </p:txBody>
+      </p:sp>
+      <p:sp>
+        <p:nvSpPr>
+          <p:cNvPr id="99" name="TextBox 98"/>
+          <p:cNvSpPr txBox="1"/>
+          <p:nvPr/>
+        </p:nvSpPr>
+        <p:spPr>
+          <a:xfrm>
+            <a:off x="7635240" y="5788152"/>
+            <a:ext cx="4736592" cy="155448"/>
+          </a:xfrm>
+          <a:prstGeom prst="rect">
+            <a:avLst/>
+          </a:prstGeom>
+          <a:noFill/>
+        </p:spPr>
+        <p:txBody>
+          <a:bodyPr wrap="square" anchor="ctr" lIns="0" rIns="0" tIns="0" bIns="0">
+            <a:spAutoFit/>
+          </a:bodyPr>
+          <a:lstStyle/>
+          <a:p>
+            <a:pPr algn="l">
+              <a:lnSpc>
+                <a:spcPct val="112000"/>
+              </a:lnSpc>
+            </a:pPr>
+            <a:r>
+              <a:rPr sz="900" b="1">
+                <a:solidFill>
+                  <a:srgbClr val="3C5AC8"/>
+                </a:solidFill>
+                <a:latin typeface="Arial"/>
+                <a:ea typeface="Arial"/>
+              </a:rPr>
+              <a:t>다시 넘친다</a:t>
+            </a:r>
+          </a:p>
+        </p:txBody>
+      </p:sp>
+      <p:sp>
+        <p:nvSpPr>
+          <p:cNvPr id="100" name="Rectangle 99"/>
+          <p:cNvSpPr/>
+          <p:nvPr/>
+        </p:nvSpPr>
+        <p:spPr>
+          <a:xfrm>
+            <a:off x="7251192" y="5943600"/>
+            <a:ext cx="5212080" cy="566928"/>
+          </a:xfrm>
+          <a:prstGeom prst="rect">
+            <a:avLst/>
+          </a:prstGeom>
+          <a:solidFill>
+            <a:srgbClr val="FFFFFF"/>
+          </a:solidFill>
+          <a:ln w="19050">
+            <a:solidFill>
+              <a:srgbClr val="1428A0"/>
+            </a:solidFill>
+          </a:ln>
+          <a:effectLst/>
+        </p:spPr>
+        <p:style>
+          <a:lnRef idx="1">
+            <a:schemeClr val="accent1"/>
+          </a:lnRef>
+          <a:fillRef idx="3">
+            <a:schemeClr val="accent1"/>
+          </a:fillRef>
+          <a:effectRef idx="2">
+            <a:schemeClr val="accent1"/>
+          </a:effectRef>
+          <a:fontRef idx="minor">
+            <a:schemeClr val="lt1"/>
+          </a:fontRef>
+        </p:style>
+        <p:txBody>
+          <a:bodyPr rtlCol="0" anchor="ctr"/>
+          <a:lstStyle/>
+          <a:p>
+            <a:pPr algn="ctr"/>
+          </a:p>
+        </p:txBody>
+      </p:sp>
+      <p:sp>
+        <p:nvSpPr>
+          <p:cNvPr id="101" name="Rectangle 100"/>
+          <p:cNvSpPr/>
+          <p:nvPr/>
+        </p:nvSpPr>
+        <p:spPr>
+          <a:xfrm>
+            <a:off x="7251192" y="5943600"/>
+            <a:ext cx="530352" cy="566928"/>
+          </a:xfrm>
+          <a:prstGeom prst="rect">
+            <a:avLst/>
+          </a:prstGeom>
+          <a:solidFill>
+            <a:srgbClr val="1428A0"/>
+          </a:solidFill>
+          <a:ln>
+            <a:noFill/>
+          </a:ln>
+          <a:effectLst/>
+        </p:spPr>
+        <p:style>
+          <a:lnRef idx="1">
+            <a:schemeClr val="accent1"/>
+          </a:lnRef>
+          <a:fillRef idx="3">
+            <a:schemeClr val="accent1"/>
+          </a:fillRef>
+          <a:effectRef idx="2">
+            <a:schemeClr val="accent1"/>
+          </a:effectRef>
+          <a:fontRef idx="minor">
+            <a:schemeClr val="lt1"/>
+          </a:fontRef>
+        </p:style>
+        <p:txBody>
+          <a:bodyPr rtlCol="0" anchor="ctr"/>
+          <a:lstStyle/>
+          <a:p>
+            <a:pPr algn="ctr"/>
+          </a:p>
+        </p:txBody>
+      </p:sp>
+      <p:sp>
+        <p:nvSpPr>
+          <p:cNvPr id="102" name="TextBox 101"/>
+          <p:cNvSpPr txBox="1"/>
+          <p:nvPr/>
+        </p:nvSpPr>
+        <p:spPr>
+          <a:xfrm>
+            <a:off x="7251192" y="5943600"/>
+            <a:ext cx="530352" cy="566928"/>
+          </a:xfrm>
+          <a:prstGeom prst="rect">
+            <a:avLst/>
+          </a:prstGeom>
+          <a:noFill/>
+        </p:spPr>
+        <p:txBody>
+          <a:bodyPr wrap="square" anchor="ctr" lIns="0" rIns="0" tIns="0" bIns="0">
+            <a:spAutoFit/>
+          </a:bodyPr>
+          <a:lstStyle/>
+          <a:p>
+            <a:pPr algn="ctr">
+              <a:lnSpc>
+                <a:spcPct val="112000"/>
+              </a:lnSpc>
+            </a:pPr>
+            <a:r>
+              <a:rPr sz="1200" b="1">
+                <a:solidFill>
+                  <a:srgbClr val="FFFFFF"/>
+                </a:solidFill>
+                <a:latin typeface="Arial"/>
+                <a:ea typeface="Arial"/>
+              </a:rPr>
+              <a:t>G3</a:t>
+            </a:r>
+          </a:p>
+        </p:txBody>
+      </p:sp>
+      <p:sp>
+        <p:nvSpPr>
+          <p:cNvPr id="103" name="TextBox 102"/>
+          <p:cNvSpPr txBox="1"/>
+          <p:nvPr/>
+        </p:nvSpPr>
+        <p:spPr>
+          <a:xfrm>
+            <a:off x="7909560" y="6016752"/>
+            <a:ext cx="1682496" cy="237744"/>
+          </a:xfrm>
+          <a:prstGeom prst="rect">
+            <a:avLst/>
+          </a:prstGeom>
+          <a:noFill/>
+        </p:spPr>
+        <p:txBody>
+          <a:bodyPr wrap="square" anchor="t" lIns="0" rIns="0" tIns="0" bIns="0">
+            <a:spAutoFit/>
+          </a:bodyPr>
+          <a:lstStyle/>
+          <a:p>
+            <a:pPr algn="l">
+              <a:lnSpc>
+                <a:spcPct val="112000"/>
+              </a:lnSpc>
+            </a:pPr>
+            <a:r>
+              <a:rPr sz="1275" b="1">
+                <a:solidFill>
+                  <a:srgbClr val="1428A0"/>
+                </a:solidFill>
+                <a:latin typeface="Arial"/>
+                <a:ea typeface="Arial"/>
+              </a:rPr>
+              <a:t>NVMe SSD</a:t>
+            </a:r>
+          </a:p>
+        </p:txBody>
+      </p:sp>
+      <p:sp>
+        <p:nvSpPr>
+          <p:cNvPr id="104" name="TextBox 103"/>
+          <p:cNvSpPr txBox="1"/>
+          <p:nvPr/>
+        </p:nvSpPr>
+        <p:spPr>
+          <a:xfrm>
+            <a:off x="7909560" y="6254496"/>
+            <a:ext cx="1682496" cy="182880"/>
+          </a:xfrm>
+          <a:prstGeom prst="rect">
+            <a:avLst/>
+          </a:prstGeom>
+          <a:noFill/>
+        </p:spPr>
+        <p:txBody>
+          <a:bodyPr wrap="square" anchor="t" lIns="0" rIns="0" tIns="0" bIns="0">
+            <a:spAutoFit/>
+          </a:bodyPr>
+          <a:lstStyle/>
+          <a:p>
+            <a:pPr algn="l">
+              <a:lnSpc>
+                <a:spcPct val="112000"/>
+              </a:lnSpc>
+            </a:pPr>
+            <a:r>
+              <a:rPr sz="875" b="0">
+                <a:solidFill>
+                  <a:srgbClr val="8A8A8A"/>
+                </a:solidFill>
+                <a:latin typeface="Arial"/>
+                <a:ea typeface="Arial"/>
+              </a:rPr>
+              <a:t>새로 얹힌 계층</a:t>
+            </a:r>
+          </a:p>
+        </p:txBody>
+      </p:sp>
+      <p:sp>
+        <p:nvSpPr>
+          <p:cNvPr id="105" name="TextBox 104"/>
+          <p:cNvSpPr txBox="1"/>
+          <p:nvPr/>
+        </p:nvSpPr>
+        <p:spPr>
+          <a:xfrm>
+            <a:off x="9665208" y="5980176"/>
+            <a:ext cx="2670048" cy="493776"/>
+          </a:xfrm>
+          <a:prstGeom prst="rect">
+            <a:avLst/>
+          </a:prstGeom>
+          <a:noFill/>
+        </p:spPr>
+        <p:txBody>
+          <a:bodyPr wrap="square" anchor="ctr" lIns="0" rIns="0" tIns="0" bIns="0">
+            <a:spAutoFit/>
+          </a:bodyPr>
+          <a:lstStyle/>
+          <a:p>
+            <a:pPr algn="l">
+              <a:lnSpc>
+                <a:spcPct val="104000"/>
+              </a:lnSpc>
+            </a:pPr>
+            <a:r>
+              <a:rPr sz="900" b="0">
+                <a:solidFill>
+                  <a:srgbClr val="555555"/>
+                </a:solidFill>
+                <a:latin typeface="Arial"/>
+                <a:ea typeface="Arial"/>
+              </a:rPr>
+              <a:t>쓰기가 몰리는 첫 대용량 계층 → 내구성이 요구로</a:t>
+            </a:r>
+          </a:p>
+        </p:txBody>
+      </p:sp>
+      <p:sp>
+        <p:nvSpPr>
+          <p:cNvPr id="106" name="Rectangle 105"/>
+          <p:cNvSpPr/>
+          <p:nvPr/>
+        </p:nvSpPr>
+        <p:spPr>
+          <a:xfrm>
+            <a:off x="7251192" y="6547103"/>
+            <a:ext cx="5212080" cy="201168"/>
+          </a:xfrm>
+          <a:prstGeom prst="rect">
+            <a:avLst/>
+          </a:prstGeom>
+          <a:solidFill>
+            <a:srgbClr val="F4F6FC"/>
+          </a:solidFill>
+          <a:ln>
+            <a:noFill/>
+          </a:ln>
+          <a:effectLst/>
+        </p:spPr>
+        <p:style>
+          <a:lnRef idx="1">
+            <a:schemeClr val="accent1"/>
+          </a:lnRef>
+          <a:fillRef idx="3">
+            <a:schemeClr val="accent1"/>
+          </a:fillRef>
+          <a:effectRef idx="2">
+            <a:schemeClr val="accent1"/>
+          </a:effectRef>
+          <a:fontRef idx="minor">
+            <a:schemeClr val="lt1"/>
+          </a:fontRef>
+        </p:style>
+        <p:txBody>
+          <a:bodyPr rtlCol="0" anchor="ctr"/>
+          <a:lstStyle/>
+          <a:p>
+            <a:pPr algn="ctr"/>
+          </a:p>
+        </p:txBody>
+      </p:sp>
+      <p:sp>
+        <p:nvSpPr>
+          <p:cNvPr id="107" name="TextBox 106"/>
+          <p:cNvSpPr txBox="1"/>
+          <p:nvPr/>
+        </p:nvSpPr>
+        <p:spPr>
+          <a:xfrm>
+            <a:off x="7342631" y="6547103"/>
+            <a:ext cx="5029200" cy="201168"/>
+          </a:xfrm>
+          <a:prstGeom prst="rect">
+            <a:avLst/>
+          </a:prstGeom>
+          <a:noFill/>
+        </p:spPr>
+        <p:txBody>
+          <a:bodyPr wrap="square" anchor="ctr" lIns="0" rIns="0" tIns="0" bIns="0">
+            <a:spAutoFit/>
+          </a:bodyPr>
+          <a:lstStyle/>
+          <a:p>
+            <a:pPr algn="l">
+              <a:lnSpc>
+                <a:spcPct val="112000"/>
+              </a:lnSpc>
+            </a:pPr>
+            <a:r>
+              <a:rPr sz="900" b="1">
+                <a:solidFill>
+                  <a:srgbClr val="1428A0"/>
+                </a:solidFill>
+                <a:latin typeface="Arial"/>
+                <a:ea typeface="Arial"/>
+              </a:rPr>
+              <a:t>대체가 아니라 증설입니다  </a:t>
+            </a:r>
+            <a:r>
+              <a:rPr sz="900" b="0">
+                <a:solidFill>
+                  <a:srgbClr val="555555"/>
+                </a:solidFill>
+                <a:latin typeface="Arial"/>
+                <a:ea typeface="Arial"/>
+              </a:rPr>
+              <a:t>같은 기간 GPU당 HBM은 192 → 288GB, 2027년 384GB로 커집니다</a:t>
+            </a:r>
+          </a:p>
+        </p:txBody>
+      </p:sp>
+      <p:sp>
+        <p:nvSpPr>
+          <p:cNvPr id="108" name="Rectangle 107"/>
+          <p:cNvSpPr/>
+          <p:nvPr/>
+        </p:nvSpPr>
+        <p:spPr>
+          <a:xfrm>
+            <a:off x="7251192" y="6839712"/>
+            <a:ext cx="5212080" cy="1572768"/>
+          </a:xfrm>
+          <a:prstGeom prst="rect">
+            <a:avLst/>
+          </a:prstGeom>
+          <a:solidFill>
+            <a:srgbClr val="FFFFFF"/>
+          </a:solidFill>
+          <a:ln w="12700">
+            <a:solidFill>
+              <a:srgbClr val="AAB8E8"/>
+            </a:solidFill>
+          </a:ln>
+          <a:effectLst/>
+        </p:spPr>
+        <p:style>
+          <a:lnRef idx="1">
+            <a:schemeClr val="accent1"/>
+          </a:lnRef>
+          <a:fillRef idx="3">
+            <a:schemeClr val="accent1"/>
+          </a:fillRef>
+          <a:effectRef idx="2">
+            <a:schemeClr val="accent1"/>
+          </a:effectRef>
+          <a:fontRef idx="minor">
+            <a:schemeClr val="lt1"/>
+          </a:fontRef>
+        </p:style>
+        <p:txBody>
+          <a:bodyPr rtlCol="0" anchor="ctr"/>
+          <a:lstStyle/>
+          <a:p>
+            <a:pPr algn="ctr"/>
+          </a:p>
+        </p:txBody>
+      </p:sp>
+      <p:sp>
+        <p:nvSpPr>
+          <p:cNvPr id="109" name="TextBox 108"/>
+          <p:cNvSpPr txBox="1"/>
+          <p:nvPr/>
+        </p:nvSpPr>
+        <p:spPr>
+          <a:xfrm>
+            <a:off x="7397496" y="6894575"/>
+            <a:ext cx="4919472" cy="219456"/>
+          </a:xfrm>
+          <a:prstGeom prst="rect">
+            <a:avLst/>
+          </a:prstGeom>
+          <a:noFill/>
+        </p:spPr>
+        <p:txBody>
+          <a:bodyPr wrap="square" anchor="t" lIns="0" rIns="0" tIns="0" bIns="0">
+            <a:spAutoFit/>
+          </a:bodyPr>
+          <a:lstStyle/>
+          <a:p>
+            <a:pPr algn="l">
+              <a:lnSpc>
+                <a:spcPct val="112000"/>
+              </a:lnSpc>
+            </a:pPr>
+            <a:r>
+              <a:rPr sz="1125" b="1">
+                <a:solidFill>
+                  <a:srgbClr val="1428A0"/>
+                </a:solidFill>
+                <a:latin typeface="Arial"/>
+                <a:ea typeface="Arial"/>
+              </a:rPr>
+              <a:t>「KV 캐시를 담을 HBM 용량이 한계에 도달했다」</a:t>
+            </a:r>
+          </a:p>
+        </p:txBody>
+      </p:sp>
+      <p:sp>
+        <p:nvSpPr>
+          <p:cNvPr id="110" name="TextBox 109"/>
+          <p:cNvSpPr txBox="1"/>
+          <p:nvPr/>
+        </p:nvSpPr>
+        <p:spPr>
+          <a:xfrm>
+            <a:off x="7397496" y="7104888"/>
+            <a:ext cx="4919472" cy="182880"/>
+          </a:xfrm>
+          <a:prstGeom prst="rect">
+            <a:avLst/>
+          </a:prstGeom>
+          <a:noFill/>
+        </p:spPr>
+        <p:txBody>
+          <a:bodyPr wrap="square" anchor="t" lIns="0" rIns="0" tIns="0" bIns="0">
+            <a:spAutoFit/>
+          </a:bodyPr>
+          <a:lstStyle/>
+          <a:p>
+            <a:pPr algn="l">
+              <a:lnSpc>
+                <a:spcPct val="112000"/>
+              </a:lnSpc>
+            </a:pPr>
+            <a:r>
+              <a:rPr sz="875" b="0">
+                <a:solidFill>
+                  <a:srgbClr val="555555"/>
+                </a:solidFill>
+                <a:latin typeface="Arial"/>
+                <a:ea typeface="Arial"/>
+              </a:rPr>
+              <a:t>SK하이닉스 2026-07-29 실적 발표 · 같은 자리에서 GPU 인근 NAND 개발 공표</a:t>
+            </a:r>
+          </a:p>
+        </p:txBody>
+      </p:sp>
+      <p:sp>
+        <p:nvSpPr>
+          <p:cNvPr id="111" name="Rectangle 110"/>
+          <p:cNvSpPr/>
+          <p:nvPr/>
+        </p:nvSpPr>
+        <p:spPr>
+          <a:xfrm>
+            <a:off x="7397496" y="7315200"/>
+            <a:ext cx="4919472" cy="10972"/>
+          </a:xfrm>
+          <a:prstGeom prst="rect">
+            <a:avLst/>
+          </a:prstGeom>
+          <a:solidFill>
+            <a:srgbClr val="D9D9D9"/>
+          </a:solidFill>
+          <a:ln>
+            <a:noFill/>
+          </a:ln>
+          <a:effectLst/>
+        </p:spPr>
+        <p:style>
+          <a:lnRef idx="1">
+            <a:schemeClr val="accent1"/>
+          </a:lnRef>
+          <a:fillRef idx="3">
+            <a:schemeClr val="accent1"/>
+          </a:fillRef>
+          <a:effectRef idx="2">
+            <a:schemeClr val="accent1"/>
+          </a:effectRef>
+          <a:fontRef idx="minor">
+            <a:schemeClr val="lt1"/>
+          </a:fontRef>
+        </p:style>
+        <p:txBody>
+          <a:bodyPr rtlCol="0" anchor="ctr"/>
+          <a:lstStyle/>
+          <a:p>
+            <a:pPr algn="ctr"/>
+          </a:p>
+        </p:txBody>
+      </p:sp>
+      <p:sp>
+        <p:nvSpPr>
+          <p:cNvPr id="112" name="TextBox 111"/>
+          <p:cNvSpPr txBox="1"/>
+          <p:nvPr/>
+        </p:nvSpPr>
+        <p:spPr>
+          <a:xfrm>
+            <a:off x="7397496" y="7370063"/>
+            <a:ext cx="2395728" cy="155448"/>
+          </a:xfrm>
+          <a:prstGeom prst="rect">
+            <a:avLst/>
+          </a:prstGeom>
+          <a:noFill/>
+        </p:spPr>
+        <p:txBody>
+          <a:bodyPr wrap="square" anchor="t" lIns="0" rIns="0" tIns="0" bIns="0">
+            <a:spAutoFit/>
+          </a:bodyPr>
+          <a:lstStyle/>
+          <a:p>
+            <a:pPr algn="l">
+              <a:lnSpc>
+                <a:spcPct val="112000"/>
+              </a:lnSpc>
+            </a:pPr>
+            <a:r>
+              <a:rPr sz="850" b="0">
+                <a:solidFill>
+                  <a:srgbClr val="8A8A8A"/>
+                </a:solidFill>
+                <a:latin typeface="Arial"/>
+                <a:ea typeface="Arial"/>
+              </a:rPr>
+              <a:t>오프로드는 메인라인 코드</a:t>
+            </a:r>
+          </a:p>
+        </p:txBody>
+      </p:sp>
+      <p:sp>
+        <p:nvSpPr>
+          <p:cNvPr id="113" name="TextBox 112"/>
+          <p:cNvSpPr txBox="1"/>
+          <p:nvPr/>
+        </p:nvSpPr>
+        <p:spPr>
+          <a:xfrm>
+            <a:off x="7397496" y="7516367"/>
+            <a:ext cx="2395728" cy="219456"/>
+          </a:xfrm>
+          <a:prstGeom prst="rect">
+            <a:avLst/>
+          </a:prstGeom>
+          <a:noFill/>
+        </p:spPr>
+        <p:txBody>
+          <a:bodyPr wrap="square" anchor="t" lIns="0" rIns="0" tIns="0" bIns="0">
+            <a:spAutoFit/>
+          </a:bodyPr>
+          <a:lstStyle/>
+          <a:p>
+            <a:pPr algn="l">
+              <a:lnSpc>
+                <a:spcPct val="100000"/>
+              </a:lnSpc>
+            </a:pPr>
+            <a:r>
+              <a:rPr sz="950" b="1">
+                <a:solidFill>
+                  <a:srgbClr val="1428A0"/>
+                </a:solidFill>
+                <a:latin typeface="Arial"/>
+                <a:ea typeface="Arial"/>
+              </a:rPr>
+              <a:t>LMCache 2024-08 → vLLM 2026-05</a:t>
+            </a:r>
+          </a:p>
+        </p:txBody>
+      </p:sp>
+      <p:sp>
+        <p:nvSpPr>
+          <p:cNvPr id="114" name="TextBox 113"/>
+          <p:cNvSpPr txBox="1"/>
+          <p:nvPr/>
+        </p:nvSpPr>
+        <p:spPr>
+          <a:xfrm>
+            <a:off x="9921240" y="7370063"/>
+            <a:ext cx="2395728" cy="155448"/>
+          </a:xfrm>
+          <a:prstGeom prst="rect">
+            <a:avLst/>
+          </a:prstGeom>
+          <a:noFill/>
+        </p:spPr>
+        <p:txBody>
+          <a:bodyPr wrap="square" anchor="t" lIns="0" rIns="0" tIns="0" bIns="0">
+            <a:spAutoFit/>
+          </a:bodyPr>
+          <a:lstStyle/>
+          <a:p>
+            <a:pPr algn="l">
+              <a:lnSpc>
+                <a:spcPct val="112000"/>
+              </a:lnSpc>
+            </a:pPr>
+            <a:r>
+              <a:rPr sz="850" b="0">
+                <a:solidFill>
+                  <a:srgbClr val="8A8A8A"/>
+                </a:solidFill>
+                <a:latin typeface="Arial"/>
+                <a:ea typeface="Arial"/>
+              </a:rPr>
+              <a:t>NAND 비트 중 eSSD 비중</a:t>
+            </a:r>
+          </a:p>
+        </p:txBody>
+      </p:sp>
+      <p:sp>
+        <p:nvSpPr>
+          <p:cNvPr id="115" name="TextBox 114"/>
+          <p:cNvSpPr txBox="1"/>
+          <p:nvPr/>
+        </p:nvSpPr>
+        <p:spPr>
+          <a:xfrm>
+            <a:off x="9921240" y="7516367"/>
+            <a:ext cx="2395728" cy="219456"/>
+          </a:xfrm>
+          <a:prstGeom prst="rect">
+            <a:avLst/>
+          </a:prstGeom>
+          <a:noFill/>
+        </p:spPr>
+        <p:txBody>
+          <a:bodyPr wrap="square" anchor="t" lIns="0" rIns="0" tIns="0" bIns="0">
+            <a:spAutoFit/>
+          </a:bodyPr>
+          <a:lstStyle/>
+          <a:p>
+            <a:pPr algn="l">
+              <a:lnSpc>
+                <a:spcPct val="100000"/>
+              </a:lnSpc>
+            </a:pPr>
+            <a:r>
+              <a:rPr sz="950" b="1">
+                <a:solidFill>
+                  <a:srgbClr val="1428A0"/>
+                </a:solidFill>
+                <a:latin typeface="Arial"/>
+                <a:ea typeface="Arial"/>
+              </a:rPr>
+              <a:t>1년 만에 26% → 48%</a:t>
+            </a:r>
+          </a:p>
+        </p:txBody>
+      </p:sp>
+      <p:sp>
+        <p:nvSpPr>
+          <p:cNvPr id="116" name="Rectangle 115"/>
+          <p:cNvSpPr/>
+          <p:nvPr/>
+        </p:nvSpPr>
+        <p:spPr>
+          <a:xfrm>
+            <a:off x="7397496" y="7772400"/>
+            <a:ext cx="4919472" cy="10972"/>
+          </a:xfrm>
+          <a:prstGeom prst="rect">
+            <a:avLst/>
+          </a:prstGeom>
+          <a:solidFill>
+            <a:srgbClr val="D9D9D9"/>
+          </a:solidFill>
+          <a:ln>
+            <a:noFill/>
+          </a:ln>
+          <a:effectLst/>
+        </p:spPr>
+        <p:style>
+          <a:lnRef idx="1">
+            <a:schemeClr val="accent1"/>
+          </a:lnRef>
+          <a:fillRef idx="3">
+            <a:schemeClr val="accent1"/>
+          </a:fillRef>
+          <a:effectRef idx="2">
+            <a:schemeClr val="accent1"/>
+          </a:effectRef>
+          <a:fontRef idx="minor">
+            <a:schemeClr val="lt1"/>
+          </a:fontRef>
+        </p:style>
+        <p:txBody>
+          <a:bodyPr rtlCol="0" anchor="ctr"/>
+          <a:lstStyle/>
+          <a:p>
+            <a:pPr algn="ctr"/>
+          </a:p>
+        </p:txBody>
+      </p:sp>
+      <p:sp>
+        <p:nvSpPr>
+          <p:cNvPr id="117" name="TextBox 116"/>
+          <p:cNvSpPr txBox="1"/>
+          <p:nvPr/>
+        </p:nvSpPr>
+        <p:spPr>
+          <a:xfrm>
+            <a:off x="7397496" y="7827263"/>
+            <a:ext cx="4919472" cy="182880"/>
+          </a:xfrm>
+          <a:prstGeom prst="rect">
+            <a:avLst/>
+          </a:prstGeom>
+          <a:noFill/>
+        </p:spPr>
+        <p:txBody>
+          <a:bodyPr wrap="square" anchor="t" lIns="0" rIns="0" tIns="0" bIns="0">
+            <a:spAutoFit/>
+          </a:bodyPr>
+          <a:lstStyle/>
+          <a:p>
+            <a:pPr algn="l">
+              <a:lnSpc>
+                <a:spcPct val="112000"/>
+              </a:lnSpc>
+            </a:pPr>
+            <a:r>
+              <a:rPr sz="950" b="1">
+                <a:solidFill>
+                  <a:srgbClr val="1428A0"/>
+                </a:solidFill>
+                <a:latin typeface="Arial"/>
+                <a:ea typeface="Arial"/>
+              </a:rPr>
+              <a:t>2026년 추론 지출이 학습을 처음 추월합니다  </a:t>
+            </a:r>
+            <a:r>
+              <a:rPr sz="950" b="0">
+                <a:solidFill>
+                  <a:srgbClr val="555555"/>
+                </a:solidFill>
+                <a:latin typeface="Arial"/>
+                <a:ea typeface="Arial"/>
+              </a:rPr>
+              <a:t>AI 최적화 IaaS의 55%</a:t>
+            </a:r>
+          </a:p>
+        </p:txBody>
+      </p:sp>
+      <p:sp>
+        <p:nvSpPr>
+          <p:cNvPr id="118" name="TextBox 117"/>
+          <p:cNvSpPr txBox="1"/>
+          <p:nvPr/>
+        </p:nvSpPr>
+        <p:spPr>
+          <a:xfrm>
+            <a:off x="7397496" y="8010144"/>
+            <a:ext cx="4919472" cy="182880"/>
+          </a:xfrm>
+          <a:prstGeom prst="rect">
+            <a:avLst/>
+          </a:prstGeom>
+          <a:noFill/>
+        </p:spPr>
+        <p:txBody>
+          <a:bodyPr wrap="square" anchor="t" lIns="0" rIns="0" tIns="0" bIns="0">
+            <a:spAutoFit/>
+          </a:bodyPr>
+          <a:lstStyle/>
+          <a:p>
+            <a:pPr algn="l">
+              <a:lnSpc>
+                <a:spcPct val="112000"/>
+              </a:lnSpc>
+            </a:pPr>
+            <a:r>
+              <a:rPr sz="850" b="0">
+                <a:solidFill>
+                  <a:srgbClr val="8A8A8A"/>
+                </a:solidFill>
+                <a:latin typeface="Arial"/>
+                <a:ea typeface="Arial"/>
+              </a:rPr>
+              <a:t>추론 $23.3B 대 학습 $19.0B(Gartner 2026-08-10) · DC NAND 295EB → 909EB(CY28, Kioxia)</a:t>
+            </a:r>
+          </a:p>
+        </p:txBody>
+      </p:sp>
+      <p:sp>
+        <p:nvSpPr>
+          <p:cNvPr id="119" name="Rectangle 118"/>
+          <p:cNvSpPr/>
+          <p:nvPr/>
+        </p:nvSpPr>
+        <p:spPr>
+          <a:xfrm>
+            <a:off x="12957048" y="2560320"/>
+            <a:ext cx="4608576" cy="5870448"/>
+          </a:xfrm>
+          <a:prstGeom prst="rect">
+            <a:avLst/>
+          </a:prstGeom>
+          <a:solidFill>
+            <a:srgbClr val="F4F6FC"/>
+          </a:solidFill>
+          <a:ln w="15875">
+            <a:solidFill>
+              <a:srgbClr val="1428A0"/>
+            </a:solidFill>
+          </a:ln>
+          <a:effectLst/>
+        </p:spPr>
+        <p:style>
+          <a:lnRef idx="1">
+            <a:schemeClr val="accent1"/>
+          </a:lnRef>
+          <a:fillRef idx="3">
+            <a:schemeClr val="accent1"/>
+          </a:fillRef>
+          <a:effectRef idx="2">
+            <a:schemeClr val="accent1"/>
+          </a:effectRef>
+          <a:fontRef idx="minor">
+            <a:schemeClr val="lt1"/>
+          </a:fontRef>
+        </p:style>
+        <p:txBody>
+          <a:bodyPr rtlCol="0" anchor="ctr"/>
+          <a:lstStyle/>
+          <a:p>
+            <a:pPr algn="ctr"/>
+          </a:p>
+        </p:txBody>
+      </p:sp>
+      <p:sp>
+        <p:nvSpPr>
+          <p:cNvPr id="120" name="Rectangle 119"/>
+          <p:cNvSpPr/>
+          <p:nvPr/>
+        </p:nvSpPr>
+        <p:spPr>
+          <a:xfrm>
+            <a:off x="12957048" y="2560320"/>
+            <a:ext cx="4608576" cy="45720"/>
+          </a:xfrm>
+          <a:prstGeom prst="rect">
+            <a:avLst/>
+          </a:prstGeom>
+          <a:solidFill>
+            <a:srgbClr val="1428A0"/>
+          </a:solidFill>
+          <a:ln>
+            <a:noFill/>
+          </a:ln>
+          <a:effectLst/>
+        </p:spPr>
+        <p:style>
+          <a:lnRef idx="1">
+            <a:schemeClr val="accent1"/>
+          </a:lnRef>
+          <a:fillRef idx="3">
+            <a:schemeClr val="accent1"/>
+          </a:fillRef>
+          <a:effectRef idx="2">
+            <a:schemeClr val="accent1"/>
+          </a:effectRef>
+          <a:fontRef idx="minor">
+            <a:schemeClr val="lt1"/>
+          </a:fontRef>
+        </p:style>
+        <p:txBody>
+          <a:bodyPr rtlCol="0" anchor="ctr"/>
+          <a:lstStyle/>
+          <a:p>
+            <a:pPr algn="ctr"/>
+          </a:p>
+        </p:txBody>
+      </p:sp>
+      <p:sp>
+        <p:nvSpPr>
+          <p:cNvPr id="121" name="TextBox 120"/>
+          <p:cNvSpPr txBox="1"/>
+          <p:nvPr/>
+        </p:nvSpPr>
+        <p:spPr>
+          <a:xfrm>
+            <a:off x="13176504" y="2706624"/>
+            <a:ext cx="4169664" cy="274320"/>
+          </a:xfrm>
+          <a:prstGeom prst="rect">
+            <a:avLst/>
+          </a:prstGeom>
+          <a:noFill/>
+        </p:spPr>
+        <p:txBody>
+          <a:bodyPr wrap="square" anchor="t" lIns="0" rIns="0" tIns="0" bIns="0">
+            <a:spAutoFit/>
+          </a:bodyPr>
+          <a:lstStyle/>
+          <a:p>
+            <a:pPr algn="l">
+              <a:lnSpc>
+                <a:spcPct val="112000"/>
+              </a:lnSpc>
+            </a:pPr>
+            <a:r>
               <a:rPr sz="1350" b="1">
                 <a:solidFill>
                   <a:srgbClr val="1428A0"/>
@@ -7287,7 +9185,7 @@
                 <a:latin typeface="Arial"/>
                 <a:ea typeface="Arial"/>
               </a:rPr>
-              <a:t>②  </a:t>
+              <a:t>③  </a:t>
             </a:r>
             <a:r>
               <a:rPr sz="1350" b="1">
@@ -7297,21 +9195,21 @@
                 <a:latin typeface="Arial"/>
                 <a:ea typeface="Arial"/>
               </a:rPr>
-              <a:t>지금 · 같은 전환이 SSD에서</a:t>
-            </a:r>
-          </a:p>
-        </p:txBody>
-      </p:sp>
-      <p:sp>
-        <p:nvSpPr>
-          <p:cNvPr id="79" name="TextBox 78"/>
-          <p:cNvSpPr txBox="1"/>
-          <p:nvPr/>
-        </p:nvSpPr>
-        <p:spPr>
-          <a:xfrm>
-            <a:off x="7196328" y="2980944"/>
-            <a:ext cx="5321808" cy="219456"/>
+              <a:t>문제 · 둘 다 가질 수 있는가</a:t>
+            </a:r>
+          </a:p>
+        </p:txBody>
+      </p:sp>
+      <p:sp>
+        <p:nvSpPr>
+          <p:cNvPr id="122" name="TextBox 121"/>
+          <p:cNvSpPr txBox="1"/>
+          <p:nvPr/>
+        </p:nvSpPr>
+        <p:spPr>
+          <a:xfrm>
+            <a:off x="13176504" y="2980944"/>
+            <a:ext cx="4169664" cy="219456"/>
           </a:xfrm>
           <a:prstGeom prst="rect">
             <a:avLst/>
@@ -7337,21 +9235,21 @@
                 <a:latin typeface="Arial"/>
                 <a:ea typeface="Arial"/>
               </a:rPr>
-              <a:t>고객 요구가 확장되고 있다</a:t>
-            </a:r>
-          </a:p>
-        </p:txBody>
-      </p:sp>
-      <p:sp>
-        <p:nvSpPr>
-          <p:cNvPr id="80" name="TextBox 79"/>
-          <p:cNvSpPr txBox="1"/>
-          <p:nvPr/>
-        </p:nvSpPr>
-        <p:spPr>
-          <a:xfrm>
-            <a:off x="7251192" y="3310127"/>
-            <a:ext cx="5212080" cy="201168"/>
+              <a:t>용량·비용과 내구성의 상충</a:t>
+            </a:r>
+          </a:p>
+        </p:txBody>
+      </p:sp>
+      <p:sp>
+        <p:nvSpPr>
+          <p:cNvPr id="123" name="TextBox 122"/>
+          <p:cNvSpPr txBox="1"/>
+          <p:nvPr/>
+        </p:nvSpPr>
+        <p:spPr>
+          <a:xfrm>
+            <a:off x="13231368" y="3310127"/>
+            <a:ext cx="4059936" cy="201168"/>
           </a:xfrm>
           <a:prstGeom prst="rect">
             <a:avLst/>
@@ -7372,26 +9270,26 @@
             <a:r>
               <a:rPr sz="1000" b="0">
                 <a:solidFill>
-                  <a:srgbClr val="8A8A8A"/>
-                </a:solidFill>
-                <a:latin typeface="Arial"/>
-                <a:ea typeface="Arial"/>
-              </a:rPr>
-              <a:t>기존 요구는 그대로이고, 그 위에 요구가 더해지고 있습니다</a:t>
-            </a:r>
-          </a:p>
-        </p:txBody>
-      </p:sp>
-      <p:sp>
-        <p:nvSpPr>
-          <p:cNvPr id="81" name="Rectangle 80"/>
-          <p:cNvSpPr/>
-          <p:nvPr/>
-        </p:nvSpPr>
-        <p:spPr>
-          <a:xfrm>
-            <a:off x="7251192" y="3529584"/>
-            <a:ext cx="2918764" cy="566928"/>
+                  <a:srgbClr val="555555"/>
+                </a:solidFill>
+                <a:latin typeface="Arial"/>
+                <a:ea typeface="Arial"/>
+              </a:rPr>
+              <a:t>오늘 선택지는 둘 다를 주지 않습니다</a:t>
+            </a:r>
+          </a:p>
+        </p:txBody>
+      </p:sp>
+      <p:sp>
+        <p:nvSpPr>
+          <p:cNvPr id="124" name="Rectangle 123"/>
+          <p:cNvSpPr/>
+          <p:nvPr/>
+        </p:nvSpPr>
+        <p:spPr>
+          <a:xfrm>
+            <a:off x="13231368" y="3547872"/>
+            <a:ext cx="1965960" cy="1847088"/>
           </a:xfrm>
           <a:prstGeom prst="rect">
             <a:avLst/>
@@ -7430,100 +9328,20 @@
       </p:sp>
       <p:sp>
         <p:nvSpPr>
-          <p:cNvPr id="82" name="TextBox 81"/>
-          <p:cNvSpPr txBox="1"/>
-          <p:nvPr/>
-        </p:nvSpPr>
-        <p:spPr>
-          <a:xfrm>
-            <a:off x="7379208" y="3584448"/>
-            <a:ext cx="2662732" cy="201168"/>
-          </a:xfrm>
-          <a:prstGeom prst="rect">
-            <a:avLst/>
-          </a:prstGeom>
-          <a:noFill/>
-        </p:spPr>
-        <p:txBody>
-          <a:bodyPr wrap="square" anchor="t" lIns="0" rIns="0" tIns="0" bIns="0">
-            <a:spAutoFit/>
-          </a:bodyPr>
-          <a:lstStyle/>
-          <a:p>
-            <a:pPr algn="l">
-              <a:lnSpc>
-                <a:spcPct val="112000"/>
-              </a:lnSpc>
-            </a:pPr>
-            <a:r>
-              <a:rPr sz="875" b="0">
-                <a:solidFill>
-                  <a:srgbClr val="8A8A8A"/>
-                </a:solidFill>
-                <a:latin typeface="Arial"/>
-                <a:ea typeface="Arial"/>
-              </a:rPr>
-              <a:t>기존</a:t>
-            </a:r>
-          </a:p>
-        </p:txBody>
-      </p:sp>
-      <p:sp>
-        <p:nvSpPr>
-          <p:cNvPr id="83" name="TextBox 82"/>
-          <p:cNvSpPr txBox="1"/>
-          <p:nvPr/>
-        </p:nvSpPr>
-        <p:spPr>
-          <a:xfrm>
-            <a:off x="7379208" y="3767328"/>
-            <a:ext cx="2662732" cy="274320"/>
-          </a:xfrm>
-          <a:prstGeom prst="rect">
-            <a:avLst/>
-          </a:prstGeom>
-          <a:noFill/>
-        </p:spPr>
-        <p:txBody>
-          <a:bodyPr wrap="square" anchor="t" lIns="0" rIns="0" tIns="0" bIns="0">
-            <a:spAutoFit/>
-          </a:bodyPr>
-          <a:lstStyle/>
-          <a:p>
-            <a:pPr algn="l">
-              <a:lnSpc>
-                <a:spcPct val="112000"/>
-              </a:lnSpc>
-            </a:pPr>
-            <a:r>
-              <a:rPr sz="1125" b="1">
-                <a:solidFill>
-                  <a:srgbClr val="1A1A1A"/>
-                </a:solidFill>
-                <a:latin typeface="Arial"/>
-                <a:ea typeface="Arial"/>
-              </a:rPr>
-              <a:t>용량당 비용 · 밀도 · 전력</a:t>
-            </a:r>
-          </a:p>
-        </p:txBody>
-      </p:sp>
-      <p:sp>
-        <p:nvSpPr>
-          <p:cNvPr id="84" name="Right Arrow 83"/>
-          <p:cNvSpPr/>
-          <p:nvPr/>
-        </p:nvSpPr>
-        <p:spPr>
-          <a:xfrm>
-            <a:off x="10224820" y="3712463"/>
-            <a:ext cx="201168" cy="201168"/>
-          </a:xfrm>
-          <a:prstGeom prst="rightArrow">
-            <a:avLst/>
-          </a:prstGeom>
-          <a:solidFill>
-            <a:srgbClr val="AAB8E8"/>
+          <p:cNvPr id="125" name="Rectangle 124"/>
+          <p:cNvSpPr/>
+          <p:nvPr/>
+        </p:nvSpPr>
+        <p:spPr>
+          <a:xfrm>
+            <a:off x="13231368" y="3547872"/>
+            <a:ext cx="1965960" cy="45720"/>
+          </a:xfrm>
+          <a:prstGeom prst="rect">
+            <a:avLst/>
+          </a:prstGeom>
+          <a:solidFill>
+            <a:srgbClr val="8A8A8A"/>
           </a:solidFill>
           <a:ln>
             <a:noFill/>
@@ -7554,58 +9372,14 @@
       </p:sp>
       <p:sp>
         <p:nvSpPr>
-          <p:cNvPr id="85" name="Rectangle 84"/>
-          <p:cNvSpPr/>
-          <p:nvPr/>
-        </p:nvSpPr>
-        <p:spPr>
-          <a:xfrm>
-            <a:off x="10480852" y="3529584"/>
-            <a:ext cx="1982419" cy="566928"/>
-          </a:xfrm>
-          <a:prstGeom prst="rect">
-            <a:avLst/>
-          </a:prstGeom>
-          <a:solidFill>
-            <a:srgbClr val="1428A0"/>
-          </a:solidFill>
-          <a:ln>
-            <a:noFill/>
-          </a:ln>
-          <a:effectLst/>
-        </p:spPr>
-        <p:style>
-          <a:lnRef idx="1">
-            <a:schemeClr val="accent1"/>
-          </a:lnRef>
-          <a:fillRef idx="3">
-            <a:schemeClr val="accent1"/>
-          </a:fillRef>
-          <a:effectRef idx="2">
-            <a:schemeClr val="accent1"/>
-          </a:effectRef>
-          <a:fontRef idx="minor">
-            <a:schemeClr val="lt1"/>
-          </a:fontRef>
-        </p:style>
-        <p:txBody>
-          <a:bodyPr rtlCol="0" anchor="ctr"/>
-          <a:lstStyle/>
-          <a:p>
-            <a:pPr algn="ctr"/>
-          </a:p>
-        </p:txBody>
-      </p:sp>
-      <p:sp>
-        <p:nvSpPr>
-          <p:cNvPr id="86" name="TextBox 85"/>
-          <p:cNvSpPr txBox="1"/>
-          <p:nvPr/>
-        </p:nvSpPr>
-        <p:spPr>
-          <a:xfrm>
-            <a:off x="10608868" y="3584448"/>
-            <a:ext cx="1726387" cy="201168"/>
+          <p:cNvPr id="126" name="TextBox 125"/>
+          <p:cNvSpPr txBox="1"/>
+          <p:nvPr/>
+        </p:nvSpPr>
+        <p:spPr>
+          <a:xfrm>
+            <a:off x="13359384" y="3639312"/>
+            <a:ext cx="1709928" cy="256032"/>
           </a:xfrm>
           <a:prstGeom prst="rect">
             <a:avLst/>
@@ -7624,28 +9398,108 @@
               </a:lnSpc>
             </a:pPr>
             <a:r>
+              <a:rPr sz="1500" b="1">
+                <a:solidFill>
+                  <a:srgbClr val="555555"/>
+                </a:solidFill>
+                <a:latin typeface="Arial"/>
+                <a:ea typeface="Arial"/>
+              </a:rPr>
+              <a:t>TLC</a:t>
+            </a:r>
+          </a:p>
+        </p:txBody>
+      </p:sp>
+      <p:sp>
+        <p:nvSpPr>
+          <p:cNvPr id="127" name="TextBox 126"/>
+          <p:cNvSpPr txBox="1"/>
+          <p:nvPr/>
+        </p:nvSpPr>
+        <p:spPr>
+          <a:xfrm>
+            <a:off x="13359384" y="3895344"/>
+            <a:ext cx="1709928" cy="201168"/>
+          </a:xfrm>
+          <a:prstGeom prst="rect">
+            <a:avLst/>
+          </a:prstGeom>
+          <a:noFill/>
+        </p:spPr>
+        <p:txBody>
+          <a:bodyPr wrap="square" anchor="t" lIns="0" rIns="0" tIns="0" bIns="0">
+            <a:spAutoFit/>
+          </a:bodyPr>
+          <a:lstStyle/>
+          <a:p>
+            <a:pPr algn="l">
+              <a:lnSpc>
+                <a:spcPct val="112000"/>
+              </a:lnSpc>
+            </a:pPr>
+            <a:r>
+              <a:rPr sz="950" b="0">
+                <a:solidFill>
+                  <a:srgbClr val="8A8A8A"/>
+                </a:solidFill>
+                <a:latin typeface="Arial"/>
+                <a:ea typeface="Arial"/>
+              </a:rPr>
+              <a:t>3 DWPD 급</a:t>
+            </a:r>
+          </a:p>
+        </p:txBody>
+      </p:sp>
+      <p:sp>
+        <p:nvSpPr>
+          <p:cNvPr id="128" name="TextBox 127"/>
+          <p:cNvSpPr txBox="1"/>
+          <p:nvPr/>
+        </p:nvSpPr>
+        <p:spPr>
+          <a:xfrm>
+            <a:off x="13359384" y="4151376"/>
+            <a:ext cx="1709928" cy="164592"/>
+          </a:xfrm>
+          <a:prstGeom prst="rect">
+            <a:avLst/>
+          </a:prstGeom>
+          <a:noFill/>
+        </p:spPr>
+        <p:txBody>
+          <a:bodyPr wrap="square" anchor="t" lIns="0" rIns="0" tIns="0" bIns="0">
+            <a:spAutoFit/>
+          </a:bodyPr>
+          <a:lstStyle/>
+          <a:p>
+            <a:pPr algn="l">
+              <a:lnSpc>
+                <a:spcPct val="112000"/>
+              </a:lnSpc>
+            </a:pPr>
+            <a:r>
               <a:rPr sz="875" b="0">
                 <a:solidFill>
-                  <a:srgbClr val="AAB8E8"/>
-                </a:solidFill>
-                <a:latin typeface="Arial"/>
-                <a:ea typeface="Arial"/>
-              </a:rPr>
-              <a:t>추가</a:t>
-            </a:r>
-          </a:p>
-        </p:txBody>
-      </p:sp>
-      <p:sp>
-        <p:nvSpPr>
-          <p:cNvPr id="87" name="TextBox 86"/>
-          <p:cNvSpPr txBox="1"/>
-          <p:nvPr/>
-        </p:nvSpPr>
-        <p:spPr>
-          <a:xfrm>
-            <a:off x="10608868" y="3767328"/>
-            <a:ext cx="17